--- a/public/presentations/CS211_Recitation_3.pptx
+++ b/public/presentations/CS211_Recitation_3.pptx
@@ -2,31 +2,38 @@
 <file path=ppt/presentation.xml><?xml version="1.0" encoding="utf-8"?>
 <p:presentation xmlns:p="http://schemas.openxmlformats.org/presentationml/2006/main">
   <p:sldMasterIdLst>
-    <p:sldMasterId xmlns:r="http://schemas.openxmlformats.org/officeDocument/2006/relationships" id="2147483648" r:id="Rfa5d0d16fdaa475b"/>
+    <p:sldMasterId xmlns:r="http://schemas.openxmlformats.org/officeDocument/2006/relationships" id="2147483648" r:id="R532f33b44a174a2d"/>
   </p:sldMasterIdLst>
   <p:notesMasterIdLst>
-    <p:notesMasterId xmlns:r="http://schemas.openxmlformats.org/officeDocument/2006/relationships" r:id="R2abc4c829754438e"/>
+    <p:notesMasterId xmlns:r="http://schemas.openxmlformats.org/officeDocument/2006/relationships" r:id="R23ee4fb6f9d7420c"/>
   </p:notesMasterIdLst>
   <p:sldIdLst>
-    <p:sldId xmlns:r="http://schemas.openxmlformats.org/officeDocument/2006/relationships" id="256" r:id="R41c92d0a04d84a4f"/>
-    <p:sldId xmlns:r="http://schemas.openxmlformats.org/officeDocument/2006/relationships" id="257" r:id="R7f6c4896679b4c8a"/>
-    <p:sldId xmlns:r="http://schemas.openxmlformats.org/officeDocument/2006/relationships" id="258" r:id="R0c0dbc3302e948cd"/>
-    <p:sldId xmlns:r="http://schemas.openxmlformats.org/officeDocument/2006/relationships" id="259" r:id="Ra111a1530064470e"/>
-    <p:sldId xmlns:r="http://schemas.openxmlformats.org/officeDocument/2006/relationships" id="260" r:id="R6697be5c5f2345ff"/>
-    <p:sldId xmlns:r="http://schemas.openxmlformats.org/officeDocument/2006/relationships" id="261" r:id="R0c9c6051fd9d4919"/>
-    <p:sldId xmlns:r="http://schemas.openxmlformats.org/officeDocument/2006/relationships" id="262" r:id="Rbd589d6e5e5c4748"/>
-    <p:sldId xmlns:r="http://schemas.openxmlformats.org/officeDocument/2006/relationships" id="263" r:id="Re6a78861ffd34e22"/>
-    <p:sldId xmlns:r="http://schemas.openxmlformats.org/officeDocument/2006/relationships" id="264" r:id="Rfe5ace0c12ea44ad"/>
-    <p:sldId xmlns:r="http://schemas.openxmlformats.org/officeDocument/2006/relationships" id="265" r:id="R134c56d230bf4bf7"/>
-    <p:sldId xmlns:r="http://schemas.openxmlformats.org/officeDocument/2006/relationships" id="266" r:id="R42c0bb16b97143e5"/>
-    <p:sldId xmlns:r="http://schemas.openxmlformats.org/officeDocument/2006/relationships" id="267" r:id="R78022fac00da4a47"/>
-    <p:sldId xmlns:r="http://schemas.openxmlformats.org/officeDocument/2006/relationships" id="268" r:id="Rddd0d78a7091423a"/>
-    <p:sldId xmlns:r="http://schemas.openxmlformats.org/officeDocument/2006/relationships" id="269" r:id="Rfd478591fd7b4fc0"/>
-    <p:sldId xmlns:r="http://schemas.openxmlformats.org/officeDocument/2006/relationships" id="270" r:id="R997b494a8d364e0e"/>
-    <p:sldId xmlns:r="http://schemas.openxmlformats.org/officeDocument/2006/relationships" id="271" r:id="R477c49f2a279480f"/>
-    <p:sldId xmlns:r="http://schemas.openxmlformats.org/officeDocument/2006/relationships" id="272" r:id="R8642616388894b86"/>
-    <p:sldId xmlns:r="http://schemas.openxmlformats.org/officeDocument/2006/relationships" id="273" r:id="R4ffd4da5a257426f"/>
-    <p:sldId xmlns:r="http://schemas.openxmlformats.org/officeDocument/2006/relationships" id="274" r:id="R40b761a8a6b04bff"/>
+    <p:sldId xmlns:r="http://schemas.openxmlformats.org/officeDocument/2006/relationships" id="256" r:id="Rc925909d4bd24d77"/>
+    <p:sldId xmlns:r="http://schemas.openxmlformats.org/officeDocument/2006/relationships" id="257" r:id="R83716b7304694782"/>
+    <p:sldId xmlns:r="http://schemas.openxmlformats.org/officeDocument/2006/relationships" id="258" r:id="Rdc59bfaf27ce47ad"/>
+    <p:sldId xmlns:r="http://schemas.openxmlformats.org/officeDocument/2006/relationships" id="259" r:id="R327f49a60d3e4b70"/>
+    <p:sldId xmlns:r="http://schemas.openxmlformats.org/officeDocument/2006/relationships" id="260" r:id="R8c9e3c5ae5cd43b6"/>
+    <p:sldId xmlns:r="http://schemas.openxmlformats.org/officeDocument/2006/relationships" id="261" r:id="Rfc10cd339b2b4117"/>
+    <p:sldId xmlns:r="http://schemas.openxmlformats.org/officeDocument/2006/relationships" id="262" r:id="R37fb21a5f7e94003"/>
+    <p:sldId xmlns:r="http://schemas.openxmlformats.org/officeDocument/2006/relationships" id="263" r:id="Rb9f6b4a2f87342e6"/>
+    <p:sldId xmlns:r="http://schemas.openxmlformats.org/officeDocument/2006/relationships" id="264" r:id="R32637df9156748be"/>
+    <p:sldId xmlns:r="http://schemas.openxmlformats.org/officeDocument/2006/relationships" id="265" r:id="R110c171ae6d049fc"/>
+    <p:sldId xmlns:r="http://schemas.openxmlformats.org/officeDocument/2006/relationships" id="266" r:id="R2c54b7c70f224c2c"/>
+    <p:sldId xmlns:r="http://schemas.openxmlformats.org/officeDocument/2006/relationships" id="267" r:id="R99d219c71d0840c6"/>
+    <p:sldId xmlns:r="http://schemas.openxmlformats.org/officeDocument/2006/relationships" id="268" r:id="R0e47123f9c624f5d"/>
+    <p:sldId xmlns:r="http://schemas.openxmlformats.org/officeDocument/2006/relationships" id="269" r:id="Rb3a79bb873f74e14"/>
+    <p:sldId xmlns:r="http://schemas.openxmlformats.org/officeDocument/2006/relationships" id="270" r:id="Raccac7e14e344669"/>
+    <p:sldId xmlns:r="http://schemas.openxmlformats.org/officeDocument/2006/relationships" id="271" r:id="R9c8a6a4e380a4203"/>
+    <p:sldId xmlns:r="http://schemas.openxmlformats.org/officeDocument/2006/relationships" id="272" r:id="R9fb6fd7fcf004876"/>
+    <p:sldId xmlns:r="http://schemas.openxmlformats.org/officeDocument/2006/relationships" id="273" r:id="R6cd5eb2d972043cc"/>
+    <p:sldId xmlns:r="http://schemas.openxmlformats.org/officeDocument/2006/relationships" id="274" r:id="Rae315eb2f5f941c3"/>
+    <p:sldId xmlns:r="http://schemas.openxmlformats.org/officeDocument/2006/relationships" id="275" r:id="R6a643f80532d493c"/>
+    <p:sldId xmlns:r="http://schemas.openxmlformats.org/officeDocument/2006/relationships" id="276" r:id="R87c3276036b245eb"/>
+    <p:sldId xmlns:r="http://schemas.openxmlformats.org/officeDocument/2006/relationships" id="277" r:id="R6d1998c2d8d94468"/>
+    <p:sldId xmlns:r="http://schemas.openxmlformats.org/officeDocument/2006/relationships" id="278" r:id="R9a0ddd405a9b4f0f"/>
+    <p:sldId xmlns:r="http://schemas.openxmlformats.org/officeDocument/2006/relationships" id="279" r:id="Rd4abcb9920384dae"/>
+    <p:sldId xmlns:r="http://schemas.openxmlformats.org/officeDocument/2006/relationships" id="280" r:id="Rb73fea381df64910"/>
+    <p:sldId xmlns:r="http://schemas.openxmlformats.org/officeDocument/2006/relationships" id="281" r:id="R74bf3faafc694e82"/>
   </p:sldIdLst>
   <p:sldSz cx="12192000" cy="6858000"/>
   <p:notesSz cx="6858000" cy="9144000"/>
@@ -460,7 +467,7 @@
           <a:lstStyle xmlns:a="http://schemas.openxmlformats.org/drawingml/2006/main"/>
           <a:p xmlns:a="http://schemas.openxmlformats.org/drawingml/2006/main">
             <a:r>
-              <a:t>Suggested 50-minute pacing: representation and floating point 6 min; assembly syntax and tracing 21 min; calls and stack 12 min; arrays and practice 11 min. Source: lectures 6–8.</a:t>
+              <a:t>Suggested 50-minute pacing: floating point walkthrough and practice 20 min; assembly operands and tracing 16 min; branches, stack, and arrays 14 min. This teaches the concepts behind the professor's planned assignment without displaying its unreleased prompt or solution. Sources: lectures 6–8 and the professor's description supplied by the TA.</a:t>
             </a:r>
           </a:p>
           <a:p xmlns:a="http://schemas.openxmlformats.org/drawingml/2006/main">
@@ -540,7 +547,7 @@
           <a:lstStyle xmlns:a="http://schemas.openxmlformats.org/drawingml/2006/main"/>
           <a:p xmlns:a="http://schemas.openxmlformats.org/drawingml/2006/main">
             <a:r>
-              <a:t>Ask: which instruction could compute &amp;a[2], and which could load a[2]? Clarify that movq reads eight bytes here; the made-up memory value 42 is an eight-byte value for this trace. Source: lecture 8 sieve assembly and lecture 7 RIP-relative example.</a:t>
+              <a:t>The future homework description does not specify rounding, so do not teach truncation or nearest as a required rule. Here E=1 for both nearby normals. 5/16=0.3125, 11/32=0.34375, and 1/3≈0.3333. This replaces the earlier abstract associativity slide with a representation example directly tied to the professor's stated learning goal.</a:t>
             </a:r>
           </a:p>
           <a:p xmlns:a="http://schemas.openxmlformats.org/drawingml/2006/main">
@@ -550,7 +557,7 @@
           </a:p>
           <a:p xmlns:a="http://schemas.openxmlformats.org/drawingml/2006/main">
             <a:r>
-              <a:t>Source: https://firner.com/presentations/cs211/2026-Fall/cs211_08/#/</a:t>
+              <a:t>Source: https://firner.com/presentations/cs211/2026-Fall/cs211_06/#/</a:t>
             </a:r>
           </a:p>
         </p:txBody>
@@ -620,7 +627,7 @@
           <a:lstStyle xmlns:a="http://schemas.openxmlformats.org/drawingml/2006/main"/>
           <a:p xmlns:a="http://schemas.openxmlformats.org/drawingml/2006/main">
             <a:r>
-              <a:t>For AT&amp;T cmpq $1, %rdi, flags describe rdi minus 1. ja is true for unsigned rdi &gt; 1. This matches lecture 7's unsigned sequence example. Distinguish signed jg from unsigned ja when asked. In a real compiled function there may be setup/cleanup instructions.</a:t>
+              <a:t>Ask students to point to the value that changes. Contrast Intel syntax only if a student asks: its operand order is reversed. Source: lectures 6 and 7.</a:t>
             </a:r>
           </a:p>
           <a:p xmlns:a="http://schemas.openxmlformats.org/drawingml/2006/main">
@@ -700,7 +707,7 @@
           <a:lstStyle xmlns:a="http://schemas.openxmlformats.org/drawingml/2006/main"/>
           <a:p xmlns:a="http://schemas.openxmlformats.org/drawingml/2006/main">
             <a:r>
-              <a:t>Give partners time to trace. Ask one student why n=1 does not jump. The next slide moves to calls and stack frames.</a:t>
+              <a:t>Use an analogy: a register holds a street address; parentheses mean visit that street address. The example assumes x is an eight-byte value so movq is appropriate. Distinguish $8 (the number eight) from 8(%rax) (memory eight bytes past the address in rax).</a:t>
             </a:r>
           </a:p>
           <a:p xmlns:a="http://schemas.openxmlformats.org/drawingml/2006/main">
@@ -710,7 +717,7 @@
           </a:p>
           <a:p xmlns:a="http://schemas.openxmlformats.org/drawingml/2006/main">
             <a:r>
-              <a:t>Source: https://firner.com/presentations/cs211/2026-Fall/cs211_07/#/</a:t>
+              <a:t>Source: https://firner.com/presentations/cs211/2026-Fall/cs211_06/#/</a:t>
             </a:r>
           </a:p>
         </p:txBody>
@@ -780,7 +787,7 @@
           <a:lstStyle xmlns:a="http://schemas.openxmlformats.org/drawingml/2006/main"/>
           <a:p xmlns:a="http://schemas.openxmlformats.org/drawingml/2006/main">
             <a:r>
-              <a:t>Make clear this is an ABI convention, not an inherent meaning of the registers. The call instruction also saves a return address. Source: lectures 6 and 7.</a:t>
+              <a:t>Pause before showing the answer. Have students narrate the two changes aloud. Source operands are read; the destination receives the result.</a:t>
             </a:r>
           </a:p>
           <a:p xmlns:a="http://schemas.openxmlformats.org/drawingml/2006/main">
@@ -860,7 +867,7 @@
           <a:lstStyle xmlns:a="http://schemas.openxmlformats.org/drawingml/2006/main"/>
           <a:p xmlns:a="http://schemas.openxmlformats.org/drawingml/2006/main">
             <a:r>
-              <a:t>Lecture 8 gives this prologue and epilogue. Correct mental model: pushq decrements rsp by 8 then writes; popq reads then increments rsp by 8. call pushes the return address, ret pops it. Optimized code may omit rbp or use different frame layouts.</a:t>
+              <a:t>Common confusion: students may think 'move' transfers and clears rbx. Emphasize that it copies. Then ask what subq $2, %rax would do: rax becomes 8.</a:t>
             </a:r>
           </a:p>
           <a:p xmlns:a="http://schemas.openxmlformats.org/drawingml/2006/main">
@@ -870,7 +877,7 @@
           </a:p>
           <a:p xmlns:a="http://schemas.openxmlformats.org/drawingml/2006/main">
             <a:r>
-              <a:t>Source: https://firner.com/presentations/cs211/2026-Fall/cs211_08/#/</a:t>
+              <a:t>Source: https://firner.com/presentations/cs211/2026-Fall/cs211_07/#/</a:t>
             </a:r>
           </a:p>
         </p:txBody>
@@ -940,7 +947,7 @@
           <a:lstStyle xmlns:a="http://schemas.openxmlformats.org/drawingml/2006/main"/>
           <a:p xmlns:a="http://schemas.openxmlformats.org/drawingml/2006/main">
             <a:r>
-              <a:t>Walk down by eight bytes for pushq, then by sixteen for local space. The address notation here is conceptual, not a literal disassembly. The return address was pushed by call before the stated starting point.</a:t>
+              <a:t>Lecture 7 discusses register aliases and movl. Be precise: writing a 32-bit register zeroes the upper 32 bits; a movl from %eax into memory does not clear the upper half of %rax. Do not generalize this rule to 8- or 16-bit writes.</a:t>
             </a:r>
           </a:p>
           <a:p xmlns:a="http://schemas.openxmlformats.org/drawingml/2006/main">
@@ -950,7 +957,7 @@
           </a:p>
           <a:p xmlns:a="http://schemas.openxmlformats.org/drawingml/2006/main">
             <a:r>
-              <a:t>Source: https://firner.com/presentations/cs211/2026-Fall/cs211_08/#/</a:t>
+              <a:t>Source: https://firner.com/presentations/cs211/2026-Fall/cs211_07/#/</a:t>
             </a:r>
           </a:p>
         </p:txBody>
@@ -1020,7 +1027,7 @@
           <a:lstStyle xmlns:a="http://schemas.openxmlformats.org/drawingml/2006/main"/>
           <a:p xmlns:a="http://schemas.openxmlformats.org/drawingml/2006/main">
             <a:r>
-              <a:t>Lecture 8 covers known-size arrays, VLAs, and array parameters. Avoid claiming sizeof(pointer) always equals 8: that is platform dependent. A parameter written int a[10] is also adjusted to a pointer; the 10 does not enforce array length for a function argument.</a:t>
+              <a:t>Assume sizeof(int)==4 for this example; the C standard does not require int to be 4 bytes on every platform. Draw boxes at addresses base, base+4, base+8, base+12. Source: lectures 6–8.</a:t>
             </a:r>
           </a:p>
           <a:p xmlns:a="http://schemas.openxmlformats.org/drawingml/2006/main">
@@ -1030,7 +1037,7 @@
           </a:p>
           <a:p xmlns:a="http://schemas.openxmlformats.org/drawingml/2006/main">
             <a:r>
-              <a:t>Source: https://firner.com/presentations/cs211/2026-Fall/cs211_08/#/</a:t>
+              <a:t>Source: https://firner.com/presentations/cs211/2026-Fall/cs211_06/#/</a:t>
             </a:r>
           </a:p>
         </p:txBody>
@@ -1100,7 +1107,7 @@
           <a:lstStyle xmlns:a="http://schemas.openxmlformats.org/drawingml/2006/main"/>
           <a:p xmlns:a="http://schemas.openxmlformats.org/drawingml/2006/main">
             <a:r>
-              <a:t>Source: lecture 8. The exact maximum safe VLA size depends on available stack space. C language support for VLAs depends on the chosen C version and compiler; use course tooling for live examples. A local array's storage duration, rather than whether its bytes are immediately overwritten, determines pointer validity.</a:t>
+              <a:t>Ask: which instruction could compute &amp;a[2], and which could load a[2]? Clarify that movq reads eight bytes here; the made-up memory value 42 is an eight-byte value for this trace. Source: lecture 8 sieve assembly and lecture 7 RIP-relative example.</a:t>
             </a:r>
           </a:p>
           <a:p xmlns:a="http://schemas.openxmlformats.org/drawingml/2006/main">
@@ -1180,7 +1187,7 @@
           <a:lstStyle xmlns:a="http://schemas.openxmlformats.org/drawingml/2006/main"/>
           <a:p xmlns:a="http://schemas.openxmlformats.org/drawingml/2006/main">
             <a:r>
-              <a:t>Expected: rdx = 0x2008 and eax = 30. The address is base + 2*4. Have students explain why leaq does not put 30 in rdx.</a:t>
+              <a:t>For AT&amp;T cmpq $1, %rdi, flags describe rdi minus 1. ja is true for unsigned rdi &gt; 1. This matches lecture 7's unsigned sequence example. Distinguish signed jg from unsigned ja when asked. In a real compiled function there may be setup/cleanup instructions.</a:t>
             </a:r>
           </a:p>
           <a:p xmlns:a="http://schemas.openxmlformats.org/drawingml/2006/main">
@@ -1190,7 +1197,7 @@
           </a:p>
           <a:p xmlns:a="http://schemas.openxmlformats.org/drawingml/2006/main">
             <a:r>
-              <a:t>Source: https://firner.com/presentations/cs211/2026-Fall/cs211_08/#/</a:t>
+              <a:t>Source: https://firner.com/presentations/cs211/2026-Fall/cs211_07/#/</a:t>
             </a:r>
           </a:p>
         </p:txBody>
@@ -1260,7 +1267,7 @@
           <a:lstStyle xmlns:a="http://schemas.openxmlformats.org/drawingml/2006/main"/>
           <a:p xmlns:a="http://schemas.openxmlformats.org/drawingml/2006/main">
             <a:r>
-              <a:t>Close by pointing students to lectures 6–8 for the larger examples. Suggest compiling a very small C function with gcc -O0 -S and finding its arguments, arithmetic, and return value; compiler output may vary.</a:t>
+              <a:t>Give partners time to trace. Ask one student why n=1 does not jump. The next slide moves to calls and stack frames.</a:t>
             </a:r>
           </a:p>
           <a:p xmlns:a="http://schemas.openxmlformats.org/drawingml/2006/main">
@@ -1270,7 +1277,7 @@
           </a:p>
           <a:p xmlns:a="http://schemas.openxmlformats.org/drawingml/2006/main">
             <a:r>
-              <a:t>Source: https://firner.com/presentations/cs211/2026-Fall/cs211_08/#/</a:t>
+              <a:t>Source: https://firner.com/presentations/cs211/2026-Fall/cs211_07/#/</a:t>
             </a:r>
           </a:p>
         </p:txBody>
@@ -1340,7 +1347,7 @@
           <a:lstStyle xmlns:a="http://schemas.openxmlformats.org/drawingml/2006/main"/>
           <a:p xmlns:a="http://schemas.openxmlformats.org/drawingml/2006/main">
             <a:r>
-              <a:t>Lecture 6 shows float rounding with 3.14, 1e10, and -1e10. Exact output depends on type and evaluation environment. This slide teaches the principle without promising a platform-independent numeric result.</a:t>
+              <a:t>The planned assignment accepts exponent-bit count, bias, significand-bit count, numerator, and denominator. Do not present this as the released homework. Explain that these are stored fields, not decimal digits. Here F means the integer represented by the three fraction bits. Lecture 6 reviews normal and subnormal equations.</a:t>
             </a:r>
           </a:p>
           <a:p xmlns:a="http://schemas.openxmlformats.org/drawingml/2006/main">
@@ -1351,6 +1358,566 @@
           <a:p xmlns:a="http://schemas.openxmlformats.org/drawingml/2006/main">
             <a:r>
               <a:t>Source: https://firner.com/presentations/cs211/2026-Fall/cs211_06/#/</a:t>
+            </a:r>
+          </a:p>
+        </p:txBody>
+      </p:sp>
+      <p:sp>
+        <p:nvSpPr>
+          <p:cNvPr id="4" name="Slide Number Placeholder 3"/>
+          <p:cNvSpPr>
+            <a:spLocks xmlns:a="http://schemas.openxmlformats.org/drawingml/2006/main" noGrp="1"/>
+          </p:cNvSpPr>
+          <p:nvPr>
+            <p:ph type="sldNum" idx="5"/>
+          </p:nvPr>
+        </p:nvSpPr>
+        <p:spPr/>
+        <p:txBody>
+          <a:bodyPr xmlns:a="http://schemas.openxmlformats.org/drawingml/2006/main"/>
+          <a:lstStyle xmlns:a="http://schemas.openxmlformats.org/drawingml/2006/main"/>
+          <a:p xmlns:a="http://schemas.openxmlformats.org/drawingml/2006/main"/>
+        </p:txBody>
+      </p:sp>
+    </p:spTree>
+  </p:cSld>
+  <p:clrMapOvr>
+    <a:masterClrMapping xmlns:a="http://schemas.openxmlformats.org/drawingml/2006/main"/>
+  </p:clrMapOvr>
+</p:notes>
+</file>
+
+<file path=ppt/notesSlides/notesSlide20.xml><?xml version="1.0" encoding="utf-8"?>
+<p:notes xmlns:p="http://schemas.openxmlformats.org/presentationml/2006/main">
+  <p:cSld>
+    <p:spTree>
+      <p:nvGrpSpPr>
+        <p:cNvPr id="1" name=""/>
+        <p:cNvGrpSpPr/>
+        <p:nvPr/>
+      </p:nvGrpSpPr>
+      <p:grpSpPr>
+        <a:xfrm xmlns:a="http://schemas.openxmlformats.org/drawingml/2006/main"/>
+      </p:grpSpPr>
+      <p:sp>
+        <p:nvSpPr>
+          <p:cNvPr id="2" name="Slide Image Placeholder 1"/>
+          <p:cNvSpPr>
+            <a:spLocks xmlns:a="http://schemas.openxmlformats.org/drawingml/2006/main" noGrp="1"/>
+          </p:cNvSpPr>
+          <p:nvPr>
+            <p:ph type="sldImg" idx="0"/>
+          </p:nvPr>
+        </p:nvSpPr>
+        <p:spPr/>
+      </p:sp>
+      <p:sp>
+        <p:nvSpPr>
+          <p:cNvPr id="3" name="Notes Placeholder 2"/>
+          <p:cNvSpPr>
+            <a:spLocks xmlns:a="http://schemas.openxmlformats.org/drawingml/2006/main" noGrp="1"/>
+          </p:cNvSpPr>
+          <p:nvPr>
+            <p:ph type="body" idx="1"/>
+          </p:nvPr>
+        </p:nvSpPr>
+        <p:spPr/>
+        <p:txBody>
+          <a:bodyPr xmlns:a="http://schemas.openxmlformats.org/drawingml/2006/main"/>
+          <a:lstStyle xmlns:a="http://schemas.openxmlformats.org/drawingml/2006/main"/>
+          <a:p xmlns:a="http://schemas.openxmlformats.org/drawingml/2006/main">
+            <a:r>
+              <a:t>Make clear this is an ABI convention, not an inherent meaning of the registers. The call instruction also saves a return address. Source: lectures 6 and 7.</a:t>
+            </a:r>
+          </a:p>
+          <a:p xmlns:a="http://schemas.openxmlformats.org/drawingml/2006/main">
+            <a:r>
+              <a:t/>
+            </a:r>
+          </a:p>
+          <a:p xmlns:a="http://schemas.openxmlformats.org/drawingml/2006/main">
+            <a:r>
+              <a:t>Source: https://firner.com/presentations/cs211/2026-Fall/cs211_07/#/</a:t>
+            </a:r>
+          </a:p>
+        </p:txBody>
+      </p:sp>
+      <p:sp>
+        <p:nvSpPr>
+          <p:cNvPr id="4" name="Slide Number Placeholder 3"/>
+          <p:cNvSpPr>
+            <a:spLocks xmlns:a="http://schemas.openxmlformats.org/drawingml/2006/main" noGrp="1"/>
+          </p:cNvSpPr>
+          <p:nvPr>
+            <p:ph type="sldNum" idx="5"/>
+          </p:nvPr>
+        </p:nvSpPr>
+        <p:spPr/>
+        <p:txBody>
+          <a:bodyPr xmlns:a="http://schemas.openxmlformats.org/drawingml/2006/main"/>
+          <a:lstStyle xmlns:a="http://schemas.openxmlformats.org/drawingml/2006/main"/>
+          <a:p xmlns:a="http://schemas.openxmlformats.org/drawingml/2006/main"/>
+        </p:txBody>
+      </p:sp>
+    </p:spTree>
+  </p:cSld>
+  <p:clrMapOvr>
+    <a:masterClrMapping xmlns:a="http://schemas.openxmlformats.org/drawingml/2006/main"/>
+  </p:clrMapOvr>
+</p:notes>
+</file>
+
+<file path=ppt/notesSlides/notesSlide21.xml><?xml version="1.0" encoding="utf-8"?>
+<p:notes xmlns:p="http://schemas.openxmlformats.org/presentationml/2006/main">
+  <p:cSld>
+    <p:spTree>
+      <p:nvGrpSpPr>
+        <p:cNvPr id="1" name=""/>
+        <p:cNvGrpSpPr/>
+        <p:nvPr/>
+      </p:nvGrpSpPr>
+      <p:grpSpPr>
+        <a:xfrm xmlns:a="http://schemas.openxmlformats.org/drawingml/2006/main"/>
+      </p:grpSpPr>
+      <p:sp>
+        <p:nvSpPr>
+          <p:cNvPr id="2" name="Slide Image Placeholder 1"/>
+          <p:cNvSpPr>
+            <a:spLocks xmlns:a="http://schemas.openxmlformats.org/drawingml/2006/main" noGrp="1"/>
+          </p:cNvSpPr>
+          <p:nvPr>
+            <p:ph type="sldImg" idx="0"/>
+          </p:nvPr>
+        </p:nvSpPr>
+        <p:spPr/>
+      </p:sp>
+      <p:sp>
+        <p:nvSpPr>
+          <p:cNvPr id="3" name="Notes Placeholder 2"/>
+          <p:cNvSpPr>
+            <a:spLocks xmlns:a="http://schemas.openxmlformats.org/drawingml/2006/main" noGrp="1"/>
+          </p:cNvSpPr>
+          <p:nvPr>
+            <p:ph type="body" idx="1"/>
+          </p:nvPr>
+        </p:nvSpPr>
+        <p:spPr/>
+        <p:txBody>
+          <a:bodyPr xmlns:a="http://schemas.openxmlformats.org/drawingml/2006/main"/>
+          <a:lstStyle xmlns:a="http://schemas.openxmlformats.org/drawingml/2006/main"/>
+          <a:p xmlns:a="http://schemas.openxmlformats.org/drawingml/2006/main">
+            <a:r>
+              <a:t>Lecture 8 gives this prologue and epilogue. Correct mental model: pushq decrements rsp by 8 then writes; popq reads then increments rsp by 8. call pushes the return address, ret pops it. Optimized code may omit rbp or use different frame layouts.</a:t>
+            </a:r>
+          </a:p>
+          <a:p xmlns:a="http://schemas.openxmlformats.org/drawingml/2006/main">
+            <a:r>
+              <a:t/>
+            </a:r>
+          </a:p>
+          <a:p xmlns:a="http://schemas.openxmlformats.org/drawingml/2006/main">
+            <a:r>
+              <a:t>Source: https://firner.com/presentations/cs211/2026-Fall/cs211_08/#/</a:t>
+            </a:r>
+          </a:p>
+        </p:txBody>
+      </p:sp>
+      <p:sp>
+        <p:nvSpPr>
+          <p:cNvPr id="4" name="Slide Number Placeholder 3"/>
+          <p:cNvSpPr>
+            <a:spLocks xmlns:a="http://schemas.openxmlformats.org/drawingml/2006/main" noGrp="1"/>
+          </p:cNvSpPr>
+          <p:nvPr>
+            <p:ph type="sldNum" idx="5"/>
+          </p:nvPr>
+        </p:nvSpPr>
+        <p:spPr/>
+        <p:txBody>
+          <a:bodyPr xmlns:a="http://schemas.openxmlformats.org/drawingml/2006/main"/>
+          <a:lstStyle xmlns:a="http://schemas.openxmlformats.org/drawingml/2006/main"/>
+          <a:p xmlns:a="http://schemas.openxmlformats.org/drawingml/2006/main"/>
+        </p:txBody>
+      </p:sp>
+    </p:spTree>
+  </p:cSld>
+  <p:clrMapOvr>
+    <a:masterClrMapping xmlns:a="http://schemas.openxmlformats.org/drawingml/2006/main"/>
+  </p:clrMapOvr>
+</p:notes>
+</file>
+
+<file path=ppt/notesSlides/notesSlide22.xml><?xml version="1.0" encoding="utf-8"?>
+<p:notes xmlns:p="http://schemas.openxmlformats.org/presentationml/2006/main">
+  <p:cSld>
+    <p:spTree>
+      <p:nvGrpSpPr>
+        <p:cNvPr id="1" name=""/>
+        <p:cNvGrpSpPr/>
+        <p:nvPr/>
+      </p:nvGrpSpPr>
+      <p:grpSpPr>
+        <a:xfrm xmlns:a="http://schemas.openxmlformats.org/drawingml/2006/main"/>
+      </p:grpSpPr>
+      <p:sp>
+        <p:nvSpPr>
+          <p:cNvPr id="2" name="Slide Image Placeholder 1"/>
+          <p:cNvSpPr>
+            <a:spLocks xmlns:a="http://schemas.openxmlformats.org/drawingml/2006/main" noGrp="1"/>
+          </p:cNvSpPr>
+          <p:nvPr>
+            <p:ph type="sldImg" idx="0"/>
+          </p:nvPr>
+        </p:nvSpPr>
+        <p:spPr/>
+      </p:sp>
+      <p:sp>
+        <p:nvSpPr>
+          <p:cNvPr id="3" name="Notes Placeholder 2"/>
+          <p:cNvSpPr>
+            <a:spLocks xmlns:a="http://schemas.openxmlformats.org/drawingml/2006/main" noGrp="1"/>
+          </p:cNvSpPr>
+          <p:nvPr>
+            <p:ph type="body" idx="1"/>
+          </p:nvPr>
+        </p:nvSpPr>
+        <p:spPr/>
+        <p:txBody>
+          <a:bodyPr xmlns:a="http://schemas.openxmlformats.org/drawingml/2006/main"/>
+          <a:lstStyle xmlns:a="http://schemas.openxmlformats.org/drawingml/2006/main"/>
+          <a:p xmlns:a="http://schemas.openxmlformats.org/drawingml/2006/main">
+            <a:r>
+              <a:t>Walk down by eight bytes for pushq, then by sixteen for local space. The address notation here is conceptual, not a literal disassembly. The return address was pushed by call before the stated starting point.</a:t>
+            </a:r>
+          </a:p>
+          <a:p xmlns:a="http://schemas.openxmlformats.org/drawingml/2006/main">
+            <a:r>
+              <a:t/>
+            </a:r>
+          </a:p>
+          <a:p xmlns:a="http://schemas.openxmlformats.org/drawingml/2006/main">
+            <a:r>
+              <a:t>Source: https://firner.com/presentations/cs211/2026-Fall/cs211_08/#/</a:t>
+            </a:r>
+          </a:p>
+        </p:txBody>
+      </p:sp>
+      <p:sp>
+        <p:nvSpPr>
+          <p:cNvPr id="4" name="Slide Number Placeholder 3"/>
+          <p:cNvSpPr>
+            <a:spLocks xmlns:a="http://schemas.openxmlformats.org/drawingml/2006/main" noGrp="1"/>
+          </p:cNvSpPr>
+          <p:nvPr>
+            <p:ph type="sldNum" idx="5"/>
+          </p:nvPr>
+        </p:nvSpPr>
+        <p:spPr/>
+        <p:txBody>
+          <a:bodyPr xmlns:a="http://schemas.openxmlformats.org/drawingml/2006/main"/>
+          <a:lstStyle xmlns:a="http://schemas.openxmlformats.org/drawingml/2006/main"/>
+          <a:p xmlns:a="http://schemas.openxmlformats.org/drawingml/2006/main"/>
+        </p:txBody>
+      </p:sp>
+    </p:spTree>
+  </p:cSld>
+  <p:clrMapOvr>
+    <a:masterClrMapping xmlns:a="http://schemas.openxmlformats.org/drawingml/2006/main"/>
+  </p:clrMapOvr>
+</p:notes>
+</file>
+
+<file path=ppt/notesSlides/notesSlide23.xml><?xml version="1.0" encoding="utf-8"?>
+<p:notes xmlns:p="http://schemas.openxmlformats.org/presentationml/2006/main">
+  <p:cSld>
+    <p:spTree>
+      <p:nvGrpSpPr>
+        <p:cNvPr id="1" name=""/>
+        <p:cNvGrpSpPr/>
+        <p:nvPr/>
+      </p:nvGrpSpPr>
+      <p:grpSpPr>
+        <a:xfrm xmlns:a="http://schemas.openxmlformats.org/drawingml/2006/main"/>
+      </p:grpSpPr>
+      <p:sp>
+        <p:nvSpPr>
+          <p:cNvPr id="2" name="Slide Image Placeholder 1"/>
+          <p:cNvSpPr>
+            <a:spLocks xmlns:a="http://schemas.openxmlformats.org/drawingml/2006/main" noGrp="1"/>
+          </p:cNvSpPr>
+          <p:nvPr>
+            <p:ph type="sldImg" idx="0"/>
+          </p:nvPr>
+        </p:nvSpPr>
+        <p:spPr/>
+      </p:sp>
+      <p:sp>
+        <p:nvSpPr>
+          <p:cNvPr id="3" name="Notes Placeholder 2"/>
+          <p:cNvSpPr>
+            <a:spLocks xmlns:a="http://schemas.openxmlformats.org/drawingml/2006/main" noGrp="1"/>
+          </p:cNvSpPr>
+          <p:nvPr>
+            <p:ph type="body" idx="1"/>
+          </p:nvPr>
+        </p:nvSpPr>
+        <p:spPr/>
+        <p:txBody>
+          <a:bodyPr xmlns:a="http://schemas.openxmlformats.org/drawingml/2006/main"/>
+          <a:lstStyle xmlns:a="http://schemas.openxmlformats.org/drawingml/2006/main"/>
+          <a:p xmlns:a="http://schemas.openxmlformats.org/drawingml/2006/main">
+            <a:r>
+              <a:t>Lecture 8 covers known-size arrays, VLAs, and array parameters. Avoid claiming sizeof(pointer) always equals 8: that is platform dependent. A parameter written int a[10] is also adjusted to a pointer; the 10 does not enforce array length for a function argument.</a:t>
+            </a:r>
+          </a:p>
+          <a:p xmlns:a="http://schemas.openxmlformats.org/drawingml/2006/main">
+            <a:r>
+              <a:t/>
+            </a:r>
+          </a:p>
+          <a:p xmlns:a="http://schemas.openxmlformats.org/drawingml/2006/main">
+            <a:r>
+              <a:t>Source: https://firner.com/presentations/cs211/2026-Fall/cs211_08/#/</a:t>
+            </a:r>
+          </a:p>
+        </p:txBody>
+      </p:sp>
+      <p:sp>
+        <p:nvSpPr>
+          <p:cNvPr id="4" name="Slide Number Placeholder 3"/>
+          <p:cNvSpPr>
+            <a:spLocks xmlns:a="http://schemas.openxmlformats.org/drawingml/2006/main" noGrp="1"/>
+          </p:cNvSpPr>
+          <p:nvPr>
+            <p:ph type="sldNum" idx="5"/>
+          </p:nvPr>
+        </p:nvSpPr>
+        <p:spPr/>
+        <p:txBody>
+          <a:bodyPr xmlns:a="http://schemas.openxmlformats.org/drawingml/2006/main"/>
+          <a:lstStyle xmlns:a="http://schemas.openxmlformats.org/drawingml/2006/main"/>
+          <a:p xmlns:a="http://schemas.openxmlformats.org/drawingml/2006/main"/>
+        </p:txBody>
+      </p:sp>
+    </p:spTree>
+  </p:cSld>
+  <p:clrMapOvr>
+    <a:masterClrMapping xmlns:a="http://schemas.openxmlformats.org/drawingml/2006/main"/>
+  </p:clrMapOvr>
+</p:notes>
+</file>
+
+<file path=ppt/notesSlides/notesSlide24.xml><?xml version="1.0" encoding="utf-8"?>
+<p:notes xmlns:p="http://schemas.openxmlformats.org/presentationml/2006/main">
+  <p:cSld>
+    <p:spTree>
+      <p:nvGrpSpPr>
+        <p:cNvPr id="1" name=""/>
+        <p:cNvGrpSpPr/>
+        <p:nvPr/>
+      </p:nvGrpSpPr>
+      <p:grpSpPr>
+        <a:xfrm xmlns:a="http://schemas.openxmlformats.org/drawingml/2006/main"/>
+      </p:grpSpPr>
+      <p:sp>
+        <p:nvSpPr>
+          <p:cNvPr id="2" name="Slide Image Placeholder 1"/>
+          <p:cNvSpPr>
+            <a:spLocks xmlns:a="http://schemas.openxmlformats.org/drawingml/2006/main" noGrp="1"/>
+          </p:cNvSpPr>
+          <p:nvPr>
+            <p:ph type="sldImg" idx="0"/>
+          </p:nvPr>
+        </p:nvSpPr>
+        <p:spPr/>
+      </p:sp>
+      <p:sp>
+        <p:nvSpPr>
+          <p:cNvPr id="3" name="Notes Placeholder 2"/>
+          <p:cNvSpPr>
+            <a:spLocks xmlns:a="http://schemas.openxmlformats.org/drawingml/2006/main" noGrp="1"/>
+          </p:cNvSpPr>
+          <p:nvPr>
+            <p:ph type="body" idx="1"/>
+          </p:nvPr>
+        </p:nvSpPr>
+        <p:spPr/>
+        <p:txBody>
+          <a:bodyPr xmlns:a="http://schemas.openxmlformats.org/drawingml/2006/main"/>
+          <a:lstStyle xmlns:a="http://schemas.openxmlformats.org/drawingml/2006/main"/>
+          <a:p xmlns:a="http://schemas.openxmlformats.org/drawingml/2006/main">
+            <a:r>
+              <a:t>Source: lecture 8. The exact maximum safe VLA size depends on available stack space. C language support for VLAs depends on the chosen C version and compiler; use course tooling for live examples. A local array's storage duration, rather than whether its bytes are immediately overwritten, determines pointer validity.</a:t>
+            </a:r>
+          </a:p>
+          <a:p xmlns:a="http://schemas.openxmlformats.org/drawingml/2006/main">
+            <a:r>
+              <a:t/>
+            </a:r>
+          </a:p>
+          <a:p xmlns:a="http://schemas.openxmlformats.org/drawingml/2006/main">
+            <a:r>
+              <a:t>Source: https://firner.com/presentations/cs211/2026-Fall/cs211_08/#/</a:t>
+            </a:r>
+          </a:p>
+        </p:txBody>
+      </p:sp>
+      <p:sp>
+        <p:nvSpPr>
+          <p:cNvPr id="4" name="Slide Number Placeholder 3"/>
+          <p:cNvSpPr>
+            <a:spLocks xmlns:a="http://schemas.openxmlformats.org/drawingml/2006/main" noGrp="1"/>
+          </p:cNvSpPr>
+          <p:nvPr>
+            <p:ph type="sldNum" idx="5"/>
+          </p:nvPr>
+        </p:nvSpPr>
+        <p:spPr/>
+        <p:txBody>
+          <a:bodyPr xmlns:a="http://schemas.openxmlformats.org/drawingml/2006/main"/>
+          <a:lstStyle xmlns:a="http://schemas.openxmlformats.org/drawingml/2006/main"/>
+          <a:p xmlns:a="http://schemas.openxmlformats.org/drawingml/2006/main"/>
+        </p:txBody>
+      </p:sp>
+    </p:spTree>
+  </p:cSld>
+  <p:clrMapOvr>
+    <a:masterClrMapping xmlns:a="http://schemas.openxmlformats.org/drawingml/2006/main"/>
+  </p:clrMapOvr>
+</p:notes>
+</file>
+
+<file path=ppt/notesSlides/notesSlide25.xml><?xml version="1.0" encoding="utf-8"?>
+<p:notes xmlns:p="http://schemas.openxmlformats.org/presentationml/2006/main">
+  <p:cSld>
+    <p:spTree>
+      <p:nvGrpSpPr>
+        <p:cNvPr id="1" name=""/>
+        <p:cNvGrpSpPr/>
+        <p:nvPr/>
+      </p:nvGrpSpPr>
+      <p:grpSpPr>
+        <a:xfrm xmlns:a="http://schemas.openxmlformats.org/drawingml/2006/main"/>
+      </p:grpSpPr>
+      <p:sp>
+        <p:nvSpPr>
+          <p:cNvPr id="2" name="Slide Image Placeholder 1"/>
+          <p:cNvSpPr>
+            <a:spLocks xmlns:a="http://schemas.openxmlformats.org/drawingml/2006/main" noGrp="1"/>
+          </p:cNvSpPr>
+          <p:nvPr>
+            <p:ph type="sldImg" idx="0"/>
+          </p:nvPr>
+        </p:nvSpPr>
+        <p:spPr/>
+      </p:sp>
+      <p:sp>
+        <p:nvSpPr>
+          <p:cNvPr id="3" name="Notes Placeholder 2"/>
+          <p:cNvSpPr>
+            <a:spLocks xmlns:a="http://schemas.openxmlformats.org/drawingml/2006/main" noGrp="1"/>
+          </p:cNvSpPr>
+          <p:nvPr>
+            <p:ph type="body" idx="1"/>
+          </p:nvPr>
+        </p:nvSpPr>
+        <p:spPr/>
+        <p:txBody>
+          <a:bodyPr xmlns:a="http://schemas.openxmlformats.org/drawingml/2006/main"/>
+          <a:lstStyle xmlns:a="http://schemas.openxmlformats.org/drawingml/2006/main"/>
+          <a:p xmlns:a="http://schemas.openxmlformats.org/drawingml/2006/main">
+            <a:r>
+              <a:t>Expected: rdx = 0x2008 and eax = 30. The address is base + 2*4. Have students explain why leaq does not put 30 in rdx.</a:t>
+            </a:r>
+          </a:p>
+          <a:p xmlns:a="http://schemas.openxmlformats.org/drawingml/2006/main">
+            <a:r>
+              <a:t/>
+            </a:r>
+          </a:p>
+          <a:p xmlns:a="http://schemas.openxmlformats.org/drawingml/2006/main">
+            <a:r>
+              <a:t>Source: https://firner.com/presentations/cs211/2026-Fall/cs211_08/#/</a:t>
+            </a:r>
+          </a:p>
+        </p:txBody>
+      </p:sp>
+      <p:sp>
+        <p:nvSpPr>
+          <p:cNvPr id="4" name="Slide Number Placeholder 3"/>
+          <p:cNvSpPr>
+            <a:spLocks xmlns:a="http://schemas.openxmlformats.org/drawingml/2006/main" noGrp="1"/>
+          </p:cNvSpPr>
+          <p:nvPr>
+            <p:ph type="sldNum" idx="5"/>
+          </p:nvPr>
+        </p:nvSpPr>
+        <p:spPr/>
+        <p:txBody>
+          <a:bodyPr xmlns:a="http://schemas.openxmlformats.org/drawingml/2006/main"/>
+          <a:lstStyle xmlns:a="http://schemas.openxmlformats.org/drawingml/2006/main"/>
+          <a:p xmlns:a="http://schemas.openxmlformats.org/drawingml/2006/main"/>
+        </p:txBody>
+      </p:sp>
+    </p:spTree>
+  </p:cSld>
+  <p:clrMapOvr>
+    <a:masterClrMapping xmlns:a="http://schemas.openxmlformats.org/drawingml/2006/main"/>
+  </p:clrMapOvr>
+</p:notes>
+</file>
+
+<file path=ppt/notesSlides/notesSlide26.xml><?xml version="1.0" encoding="utf-8"?>
+<p:notes xmlns:p="http://schemas.openxmlformats.org/presentationml/2006/main">
+  <p:cSld>
+    <p:spTree>
+      <p:nvGrpSpPr>
+        <p:cNvPr id="1" name=""/>
+        <p:cNvGrpSpPr/>
+        <p:nvPr/>
+      </p:nvGrpSpPr>
+      <p:grpSpPr>
+        <a:xfrm xmlns:a="http://schemas.openxmlformats.org/drawingml/2006/main"/>
+      </p:grpSpPr>
+      <p:sp>
+        <p:nvSpPr>
+          <p:cNvPr id="2" name="Slide Image Placeholder 1"/>
+          <p:cNvSpPr>
+            <a:spLocks xmlns:a="http://schemas.openxmlformats.org/drawingml/2006/main" noGrp="1"/>
+          </p:cNvSpPr>
+          <p:nvPr>
+            <p:ph type="sldImg" idx="0"/>
+          </p:nvPr>
+        </p:nvSpPr>
+        <p:spPr/>
+      </p:sp>
+      <p:sp>
+        <p:nvSpPr>
+          <p:cNvPr id="3" name="Notes Placeholder 2"/>
+          <p:cNvSpPr>
+            <a:spLocks xmlns:a="http://schemas.openxmlformats.org/drawingml/2006/main" noGrp="1"/>
+          </p:cNvSpPr>
+          <p:nvPr>
+            <p:ph type="body" idx="1"/>
+          </p:nvPr>
+        </p:nvSpPr>
+        <p:spPr/>
+        <p:txBody>
+          <a:bodyPr xmlns:a="http://schemas.openxmlformats.org/drawingml/2006/main"/>
+          <a:lstStyle xmlns:a="http://schemas.openxmlformats.org/drawingml/2006/main"/>
+          <a:p xmlns:a="http://schemas.openxmlformats.org/drawingml/2006/main">
+            <a:r>
+              <a:t>Close by pointing students to lectures 6–8 for the larger examples. Suggest compiling a very small C function with gcc -O0 -S and finding its arguments, arithmetic, and return value; compiler output may vary.</a:t>
+            </a:r>
+          </a:p>
+          <a:p xmlns:a="http://schemas.openxmlformats.org/drawingml/2006/main">
+            <a:r>
+              <a:t/>
+            </a:r>
+          </a:p>
+          <a:p xmlns:a="http://schemas.openxmlformats.org/drawingml/2006/main">
+            <a:r>
+              <a:t>Source: https://firner.com/presentations/cs211/2026-Fall/cs211_08/#/</a:t>
             </a:r>
           </a:p>
         </p:txBody>
@@ -1420,7 +1987,7 @@
           <a:lstStyle xmlns:a="http://schemas.openxmlformats.org/drawingml/2006/main"/>
           <a:p xmlns:a="http://schemas.openxmlformats.org/drawingml/2006/main">
             <a:r>
-              <a:t>Use lecture 6's C/addl/objdump progression. Compilers may choose registers or optimize the entire expression away, so avoid teaching a single assembly listing as universal.</a:t>
+              <a:t>Draw place-value columns 1, 1/2, 1/4, 1/8. 1.010 binary is exactly 1.25. The trailing zero pads the practice format; it does not change the value. The examples are constructed for teaching, not copied from the unreleased solution.</a:t>
             </a:r>
           </a:p>
           <a:p xmlns:a="http://schemas.openxmlformats.org/drawingml/2006/main">
@@ -1500,7 +2067,7 @@
           <a:lstStyle xmlns:a="http://schemas.openxmlformats.org/drawingml/2006/main"/>
           <a:p xmlns:a="http://schemas.openxmlformats.org/drawingml/2006/main">
             <a:r>
-              <a:t>Ask students to point to the value that changes. Contrast Intel syntax only if a student asks: its operand order is reversed. Source: lectures 6 and 7.</a:t>
+              <a:t>Normal fields have E from 1 through 6 in this toy format. The all-ones exponent is reserved for infinities/NaNs in IEEE-style formats. We are using the lecture's normal/subnormal equations and a toy format with bias 3. Avoid saying the bias always equals 2^(k−1)−1; the planned exercise supplies it explicitly.</a:t>
             </a:r>
           </a:p>
           <a:p xmlns:a="http://schemas.openxmlformats.org/drawingml/2006/main">
@@ -1510,7 +2077,7 @@
           </a:p>
           <a:p xmlns:a="http://schemas.openxmlformats.org/drawingml/2006/main">
             <a:r>
-              <a:t>Source: https://firner.com/presentations/cs211/2026-Fall/cs211_07/#/</a:t>
+              <a:t>Source: https://firner.com/presentations/cs211/2026-Fall/cs211_06/#/</a:t>
             </a:r>
           </a:p>
         </p:txBody>
@@ -1580,7 +2147,7 @@
           <a:lstStyle xmlns:a="http://schemas.openxmlformats.org/drawingml/2006/main"/>
           <a:p xmlns:a="http://schemas.openxmlformats.org/drawingml/2006/main">
             <a:r>
-              <a:t>Use an analogy: a register holds a street address; parentheses mean visit that street address. Distinguish $8 from 8(%rax) carefully. In real user programs address 8 is normally invalid; replace with a valid pointer for a live demo.</a:t>
+              <a:t>Work through this slowly on the board. Ask which part of 1.010 is stored: 010. The lecture equation is (−1)^S × 2^(E−bias) × (1+F/2^sig_bits). For E=3, bias=3, F=2, sig_bits=3 the result is exactly 1.25.</a:t>
             </a:r>
           </a:p>
           <a:p xmlns:a="http://schemas.openxmlformats.org/drawingml/2006/main">
@@ -1660,7 +2227,7 @@
           <a:lstStyle xmlns:a="http://schemas.openxmlformats.org/drawingml/2006/main"/>
           <a:p xmlns:a="http://schemas.openxmlformats.org/drawingml/2006/main">
             <a:r>
-              <a:t>Pause before showing the answer. Have students narrate the two changes aloud. Source operands are read; the destination receives the result.</a:t>
+              <a:t>This is the likely stumbling block: subnormals use exponent 1−bias, not 0−bias, and no hidden leading 1. For this format, F=0 gives zero, F=1 is 1/32, F=7 is 7/32, and the smallest normal is 1/4. Source: lecture 6 equations.</a:t>
             </a:r>
           </a:p>
           <a:p xmlns:a="http://schemas.openxmlformats.org/drawingml/2006/main">
@@ -1670,7 +2237,7 @@
           </a:p>
           <a:p xmlns:a="http://schemas.openxmlformats.org/drawingml/2006/main">
             <a:r>
-              <a:t>Source: https://firner.com/presentations/cs211/2026-Fall/cs211_07/#/</a:t>
+              <a:t>Source: https://firner.com/presentations/cs211/2026-Fall/cs211_06/#/</a:t>
             </a:r>
           </a:p>
         </p:txBody>
@@ -1740,7 +2307,7 @@
           <a:lstStyle xmlns:a="http://schemas.openxmlformats.org/drawingml/2006/main"/>
           <a:p xmlns:a="http://schemas.openxmlformats.org/drawingml/2006/main">
             <a:r>
-              <a:t>Common confusion: students may think 'move' transfers and clears rbx. Emphasize that it copies. Then ask what subq $2, %rax would do: rax becomes 8.</a:t>
+              <a:t>Contrast this with the normal 5/4 example. Students may try to store a negative exponent in E or include the hidden 1. Return to the formula to resolve both confusions.</a:t>
             </a:r>
           </a:p>
           <a:p xmlns:a="http://schemas.openxmlformats.org/drawingml/2006/main">
@@ -1750,7 +2317,7 @@
           </a:p>
           <a:p xmlns:a="http://schemas.openxmlformats.org/drawingml/2006/main">
             <a:r>
-              <a:t>Source: https://firner.com/presentations/cs211/2026-Fall/cs211_07/#/</a:t>
+              <a:t>Source: https://firner.com/presentations/cs211/2026-Fall/cs211_06/#/</a:t>
             </a:r>
           </a:p>
         </p:txBody>
@@ -1820,7 +2387,7 @@
           <a:lstStyle xmlns:a="http://schemas.openxmlformats.org/drawingml/2006/main"/>
           <a:p xmlns:a="http://schemas.openxmlformats.org/drawingml/2006/main">
             <a:r>
-              <a:t>Lecture 7 discusses register aliases and movl. Be precise: writing a 32-bit register zeroes the upper 32 bits; a movl from %eax into memory does not clear the upper half of %rax. Do not generalize this rule to 8- or 16-bit writes.</a:t>
+              <a:t>Give two minutes. Both examples are exactly representable, so no rounding rule is needed. Ask students to check results by substituting E and F into the appropriate formula.</a:t>
             </a:r>
           </a:p>
           <a:p xmlns:a="http://schemas.openxmlformats.org/drawingml/2006/main">
@@ -1830,7 +2397,7 @@
           </a:p>
           <a:p xmlns:a="http://schemas.openxmlformats.org/drawingml/2006/main">
             <a:r>
-              <a:t>Source: https://firner.com/presentations/cs211/2026-Fall/cs211_07/#/</a:t>
+              <a:t>Source: https://firner.com/presentations/cs211/2026-Fall/cs211_06/#/</a:t>
             </a:r>
           </a:p>
         </p:txBody>
@@ -1900,7 +2467,7 @@
           <a:lstStyle xmlns:a="http://schemas.openxmlformats.org/drawingml/2006/main"/>
           <a:p xmlns:a="http://schemas.openxmlformats.org/drawingml/2006/main">
             <a:r>
-              <a:t>Assume sizeof(int)==4 for this example; the C standard does not require int to be 4 bytes on every platform. Draw boxes at addresses base, base+4, base+8, base+12. Source: lectures 6–8.</a:t>
+              <a:t>Do not reveal until students have tried both. Emphasize that E=0 is a category marker here, not the unbiased exponent. E=3 represents true exponent zero because bias is three.</a:t>
             </a:r>
           </a:p>
           <a:p xmlns:a="http://schemas.openxmlformats.org/drawingml/2006/main">
@@ -1978,7 +2545,7 @@
   </p:cSld>
   <p:clrMap bg1="lt1" tx1="dk1" bg2="lt2" tx2="dk2" accent1="accent1" accent2="accent2" accent3="accent3" accent4="accent4" accent5="accent5" accent6="accent6" hlink="hlink" folHlink="folHlink"/>
   <p:sldLayoutIdLst>
-    <p:sldLayoutId xmlns:r="http://schemas.openxmlformats.org/officeDocument/2006/relationships" id="2147483649" r:id="Rb2dafda1cdf34b33"/>
+    <p:sldLayoutId xmlns:r="http://schemas.openxmlformats.org/officeDocument/2006/relationships" id="2147483649" r:id="R943b2fc9b43f4eec"/>
   </p:sldLayoutIdLst>
   <p:txStyles>
     <p:titleStyle>
@@ -2529,7 +3096,7 @@
           <p:cNvPr id="7" name="">
             <a:extLst xmlns:a="http://schemas.openxmlformats.org/drawingml/2006/main">
               <a:ext uri="{FF2B5EF4-FFF2-40B4-BE49-F238E27FC236}">
-                <a16:creationId xmlns:a16="http://schemas.microsoft.com/office/drawing/2014/main" id="{F458C08C-436C-4F24-8C32-9803C799BFA5}"/>
+                <a16:creationId xmlns:a16="http://schemas.microsoft.com/office/drawing/2014/main" id="{03E28F38-3FA8-4CA7-8931-27EA642E7346}"/>
               </a:ext>
             </a:extLst>
           </p:cNvPr>
@@ -2586,7 +3153,7 @@
           <p:cNvPr id="2" name="">
             <a:extLst xmlns:a="http://schemas.openxmlformats.org/drawingml/2006/main">
               <a:ext uri="{FF2B5EF4-FFF2-40B4-BE49-F238E27FC236}">
-                <a16:creationId xmlns:a16="http://schemas.microsoft.com/office/drawing/2014/main" id="{201A8558-F3B2-4225-9809-DFCC32E0B68E}"/>
+                <a16:creationId xmlns:a16="http://schemas.microsoft.com/office/drawing/2014/main" id="{4B92EC2A-D08A-41AE-9047-4617C0C49428}"/>
               </a:ext>
             </a:extLst>
           </p:cNvPr>
@@ -2633,7 +3200,7 @@
                 <a:ea typeface="Arial"/>
                 <a:cs typeface="Arial"/>
               </a:rPr>
-              <a:t>Reading assembly without panic</a:t>
+              <a:t>Floating point and assembly</a:t>
             </a:r>
           </a:p>
         </p:txBody>
@@ -2643,7 +3210,7 @@
           <p:cNvPr id="3" name="">
             <a:extLst xmlns:a="http://schemas.openxmlformats.org/drawingml/2006/main">
               <a:ext uri="{FF2B5EF4-FFF2-40B4-BE49-F238E27FC236}">
-                <a16:creationId xmlns:a16="http://schemas.microsoft.com/office/drawing/2014/main" id="{01FB0252-B386-4FD6-9333-E5ED40A45028}"/>
+                <a16:creationId xmlns:a16="http://schemas.microsoft.com/office/drawing/2014/main" id="{858ABDE9-D79B-4317-864D-AC9B15447BAA}"/>
               </a:ext>
             </a:extLst>
           </p:cNvPr>
@@ -2690,7 +3257,7 @@
                 <a:ea typeface="Arial"/>
                 <a:cs typeface="Arial"/>
               </a:rPr>
-              <a:t>Lectures 6–8: program representations, x86-64 instructions, stack frames, and arrays.</a:t>
+              <a:t>Build a number in a small floating point format, then read the assembly and memory ideas from lectures 6–8.</a:t>
             </a:r>
           </a:p>
         </p:txBody>
@@ -2700,7 +3267,7 @@
           <p:cNvPr id="4" name="">
             <a:extLst xmlns:a="http://schemas.openxmlformats.org/drawingml/2006/main">
               <a:ext uri="{FF2B5EF4-FFF2-40B4-BE49-F238E27FC236}">
-                <a16:creationId xmlns:a16="http://schemas.microsoft.com/office/drawing/2014/main" id="{216088FE-A8D2-4476-AC34-982C577C1330}"/>
+                <a16:creationId xmlns:a16="http://schemas.microsoft.com/office/drawing/2014/main" id="{18BB6088-4220-40F2-AF9A-64AD0E8CC9C8}"/>
               </a:ext>
             </a:extLst>
           </p:cNvPr>
@@ -2775,7 +3342,7 @@
                 <a:ea typeface="Courier New"/>
                 <a:cs typeface="Courier New"/>
               </a:rPr>
-              <a:t>C → assembly → machine code</a:t>
+              <a:t>Fraction → binary → fields</a:t>
             </a:r>
           </a:p>
           <a:p xmlns:a="http://schemas.openxmlformats.org/drawingml/2006/main">
@@ -2798,7 +3365,7 @@
                 <a:ea typeface="Courier New"/>
                 <a:cs typeface="Courier New"/>
               </a:rPr>
-              <a:t>Read operands and trace values</a:t>
+              <a:t>Normal and subnormal values</a:t>
             </a:r>
           </a:p>
           <a:p xmlns:a="http://schemas.openxmlformats.org/drawingml/2006/main">
@@ -2821,7 +3388,7 @@
                 <a:ea typeface="Courier New"/>
                 <a:cs typeface="Courier New"/>
               </a:rPr>
-              <a:t>Follow a call and its stack frame</a:t>
+              <a:t>Read short x86-64 instructions</a:t>
             </a:r>
           </a:p>
           <a:p xmlns:a="http://schemas.openxmlformats.org/drawingml/2006/main">
@@ -2844,7 +3411,7 @@
                 <a:ea typeface="Courier New"/>
                 <a:cs typeface="Courier New"/>
               </a:rPr>
-              <a:t>Connect arrays to byte addresses</a:t>
+              <a:t>Follow the stack and arrays</a:t>
             </a:r>
           </a:p>
         </p:txBody>
@@ -2854,7 +3421,7 @@
           <p:cNvPr id="5" name="">
             <a:extLst xmlns:a="http://schemas.openxmlformats.org/drawingml/2006/main">
               <a:ext uri="{FF2B5EF4-FFF2-40B4-BE49-F238E27FC236}">
-                <a16:creationId xmlns:a16="http://schemas.microsoft.com/office/drawing/2014/main" id="{D29DCD2A-FF21-420E-92FF-E3D7E400EF5F}"/>
+                <a16:creationId xmlns:a16="http://schemas.microsoft.com/office/drawing/2014/main" id="{5E9FBCF7-2FEE-4EAE-819E-D83B0A9743D2}"/>
               </a:ext>
             </a:extLst>
           </p:cNvPr>
@@ -2901,7 +3468,7 @@
                 <a:ea typeface="Arial"/>
                 <a:cs typeface="Arial"/>
               </a:rPr>
-              <a:t>Goal: explain what a short snippet does, one instruction at a time.</a:t>
+              <a:t>We will use a tiny practice format so every bit has a visible job.</a:t>
             </a:r>
           </a:p>
         </p:txBody>
@@ -2911,7 +3478,7 @@
           <p:cNvPr id="6" name="">
             <a:extLst xmlns:a="http://schemas.openxmlformats.org/drawingml/2006/main">
               <a:ext uri="{FF2B5EF4-FFF2-40B4-BE49-F238E27FC236}">
-                <a16:creationId xmlns:a16="http://schemas.microsoft.com/office/drawing/2014/main" id="{D0D2DD3D-DE9C-4652-82F2-D1DC89B92FAB}"/>
+                <a16:creationId xmlns:a16="http://schemas.microsoft.com/office/drawing/2014/main" id="{BD25B7B5-9B4F-48E6-BC95-8960AFF41D20}"/>
               </a:ext>
             </a:extLst>
           </p:cNvPr>
@@ -2958,7 +3525,7 @@
                 <a:ea typeface="Courier New"/>
                 <a:cs typeface="Courier New"/>
               </a:rPr>
-              <a:t>01 / 19</a:t>
+              <a:t>01 / 26</a:t>
             </a:r>
           </a:p>
         </p:txBody>
@@ -2966,7 +3533,7 @@
     </p:spTree>
     <p:extLst>
       <p:ext uri="{BB962C8B-B14F-4D97-AF65-F5344CB8AC3E}">
-        <p14:creationId xmlns:p14="http://schemas.microsoft.com/office/powerpoint/2010/main" val="526443351"/>
+        <p14:creationId xmlns:p14="http://schemas.microsoft.com/office/powerpoint/2010/main" val="458665212"/>
       </p:ext>
     </p:extLst>
   </p:cSld>
@@ -2997,7 +3564,7 @@
           <p:cNvPr id="7" name="">
             <a:extLst xmlns:a="http://schemas.openxmlformats.org/drawingml/2006/main">
               <a:ext uri="{FF2B5EF4-FFF2-40B4-BE49-F238E27FC236}">
-                <a16:creationId xmlns:a16="http://schemas.microsoft.com/office/drawing/2014/main" id="{18AF8674-4A76-4165-865B-3E0F47413F10}"/>
+                <a16:creationId xmlns:a16="http://schemas.microsoft.com/office/drawing/2014/main" id="{B702D2C2-CA4E-4E1C-9800-99F321D4EB1E}"/>
               </a:ext>
             </a:extLst>
           </p:cNvPr>
@@ -3044,7 +3611,7 @@
                 <a:ea typeface="Courier New"/>
                 <a:cs typeface="Courier New"/>
               </a:rPr>
-              <a:t>COMMON ASSEMBLY CONFUSION</a:t>
+              <a:t>FLOATING POINT · PRECISION</a:t>
             </a:r>
           </a:p>
         </p:txBody>
@@ -3054,7 +3621,7 @@
           <p:cNvPr id="2" name="">
             <a:extLst xmlns:a="http://schemas.openxmlformats.org/drawingml/2006/main">
               <a:ext uri="{FF2B5EF4-FFF2-40B4-BE49-F238E27FC236}">
-                <a16:creationId xmlns:a16="http://schemas.microsoft.com/office/drawing/2014/main" id="{3E640387-E3B6-4280-B068-99C3C379EB6B}"/>
+                <a16:creationId xmlns:a16="http://schemas.microsoft.com/office/drawing/2014/main" id="{A1D753E9-0C61-457C-A33E-1FFFD739872B}"/>
               </a:ext>
             </a:extLst>
           </p:cNvPr>
@@ -3101,7 +3668,7 @@
                 <a:ea typeface="Arial"/>
                 <a:cs typeface="Arial"/>
               </a:rPr>
-              <a:t>Address versus value</a:t>
+              <a:t>Some ratios need rounding</a:t>
             </a:r>
           </a:p>
         </p:txBody>
@@ -3111,7 +3678,7 @@
           <p:cNvPr id="3" name="">
             <a:extLst xmlns:a="http://schemas.openxmlformats.org/drawingml/2006/main">
               <a:ext uri="{FF2B5EF4-FFF2-40B4-BE49-F238E27FC236}">
-                <a16:creationId xmlns:a16="http://schemas.microsoft.com/office/drawing/2014/main" id="{7A3081A9-786A-48C7-8B21-C4CEAA5FB2D5}"/>
+                <a16:creationId xmlns:a16="http://schemas.microsoft.com/office/drawing/2014/main" id="{3B111229-CC68-4CAB-8EB9-3092D09E9191}"/>
               </a:ext>
             </a:extLst>
           </p:cNvPr>
@@ -3158,7 +3725,7 @@
                 <a:ea typeface="Arial"/>
                 <a:cs typeface="Arial"/>
               </a:rPr>
-              <a:t>leaq computes an address and places that number in a register.</a:t>
+              <a:t>Only eight fraction patterns fit in three bits. A ratio such as 1/3 has a repeating binary expansion and cannot be stored exactly.</a:t>
             </a:r>
           </a:p>
           <a:p xmlns:a="http://schemas.openxmlformats.org/drawingml/2006/main">
@@ -3186,7 +3753,7 @@
                 <a:ea typeface="Arial"/>
                 <a:cs typeface="Arial"/>
               </a:rPr>
-              <a:t>movq with a memory source reads the value stored at an address.</a:t>
+              <a:t>The required rounding rule decides which nearby value to store.</a:t>
             </a:r>
           </a:p>
         </p:txBody>
@@ -3196,7 +3763,7 @@
           <p:cNvPr id="4" name="">
             <a:extLst xmlns:a="http://schemas.openxmlformats.org/drawingml/2006/main">
               <a:ext uri="{FF2B5EF4-FFF2-40B4-BE49-F238E27FC236}">
-                <a16:creationId xmlns:a16="http://schemas.microsoft.com/office/drawing/2014/main" id="{919D7140-EEE6-41B9-AE4B-80E94916AEE5}"/>
+                <a16:creationId xmlns:a16="http://schemas.microsoft.com/office/drawing/2014/main" id="{41C96812-9C9A-4DB5-BEC4-B56277AF335C}"/>
               </a:ext>
             </a:extLst>
           </p:cNvPr>
@@ -3243,7 +3810,7 @@
                 <a:ea typeface="Courier New"/>
                 <a:cs typeface="Courier New"/>
               </a:rPr>
-              <a:t>Assume rax = 1000, memory[1008] = 42</a:t>
+              <a:t>1/3 = 1.010101…₂ × 2⁻²</a:t>
             </a:r>
           </a:p>
           <a:p xmlns:a="http://schemas.openxmlformats.org/drawingml/2006/main">
@@ -3271,7 +3838,7 @@
                 <a:ea typeface="Courier New"/>
                 <a:cs typeface="Courier New"/>
               </a:rPr>
-              <a:t>leaq 8(%rax), %rbx  → rbx = 1008</a:t>
+              <a:t>Nearby values in this format:</a:t>
             </a:r>
           </a:p>
           <a:p xmlns:a="http://schemas.openxmlformats.org/drawingml/2006/main">
@@ -3294,7 +3861,58 @@
                 <a:ea typeface="Courier New"/>
                 <a:cs typeface="Courier New"/>
               </a:rPr>
-              <a:t>movq 8(%rax), %rcx  → rcx = 42</a:t>
+              <a:t>F = 010₂  →  5/16</a:t>
+            </a:r>
+          </a:p>
+          <a:p xmlns:a="http://schemas.openxmlformats.org/drawingml/2006/main">
+            <a:pPr>
+              <a:defRPr sz="1650" b="0">
+                <a:solidFill>
+                  <a:srgbClr val="A7F3D0"/>
+                </a:solidFill>
+                <a:latin typeface="Courier New"/>
+                <a:ea typeface="Courier New"/>
+                <a:cs typeface="Courier New"/>
+              </a:defRPr>
+            </a:pPr>
+            <a:r>
+              <a:rPr sz="1650" b="0">
+                <a:solidFill>
+                  <a:srgbClr val="A7F3D0"/>
+                </a:solidFill>
+                <a:latin typeface="Courier New"/>
+                <a:ea typeface="Courier New"/>
+                <a:cs typeface="Courier New"/>
+              </a:rPr>
+              <a:t>F = 011₂  →  11/32</a:t>
+            </a:r>
+          </a:p>
+          <a:p xmlns:a="http://schemas.openxmlformats.org/drawingml/2006/main">
+            <a:r>
+              <a:t/>
+            </a:r>
+          </a:p>
+          <a:p xmlns:a="http://schemas.openxmlformats.org/drawingml/2006/main">
+            <a:pPr>
+              <a:defRPr sz="1650" b="0">
+                <a:solidFill>
+                  <a:srgbClr val="A7F3D0"/>
+                </a:solidFill>
+                <a:latin typeface="Courier New"/>
+                <a:ea typeface="Courier New"/>
+                <a:cs typeface="Courier New"/>
+              </a:defRPr>
+            </a:pPr>
+            <a:r>
+              <a:rPr sz="1650" b="0">
+                <a:solidFill>
+                  <a:srgbClr val="A7F3D0"/>
+                </a:solidFill>
+                <a:latin typeface="Courier New"/>
+                <a:ea typeface="Courier New"/>
+                <a:cs typeface="Courier New"/>
+              </a:rPr>
+              <a:t>Neither is exactly 1/3.</a:t>
             </a:r>
           </a:p>
         </p:txBody>
@@ -3304,7 +3922,7 @@
           <p:cNvPr id="5" name="">
             <a:extLst xmlns:a="http://schemas.openxmlformats.org/drawingml/2006/main">
               <a:ext uri="{FF2B5EF4-FFF2-40B4-BE49-F238E27FC236}">
-                <a16:creationId xmlns:a16="http://schemas.microsoft.com/office/drawing/2014/main" id="{F18882BD-E6ED-4311-94C0-2A8FC2278AD2}"/>
+                <a16:creationId xmlns:a16="http://schemas.microsoft.com/office/drawing/2014/main" id="{85F8BB5E-84AF-400F-A9D8-087C6F00474F}"/>
               </a:ext>
             </a:extLst>
           </p:cNvPr>
@@ -3351,7 +3969,7 @@
                 <a:ea typeface="Arial"/>
                 <a:cs typeface="Arial"/>
               </a:rPr>
-              <a:t>lea does not dereference memory, even though its source looks like a memory operand.</a:t>
+              <a:t>Wait for the assignment’s rounding instructions before choosing a stored result.</a:t>
             </a:r>
           </a:p>
         </p:txBody>
@@ -3361,7 +3979,7 @@
           <p:cNvPr id="6" name="">
             <a:extLst xmlns:a="http://schemas.openxmlformats.org/drawingml/2006/main">
               <a:ext uri="{FF2B5EF4-FFF2-40B4-BE49-F238E27FC236}">
-                <a16:creationId xmlns:a16="http://schemas.microsoft.com/office/drawing/2014/main" id="{25295CBC-4F31-4FA8-AA48-E09D78822D36}"/>
+                <a16:creationId xmlns:a16="http://schemas.microsoft.com/office/drawing/2014/main" id="{84FFA50B-9286-4888-9AE4-F29565C771B1}"/>
               </a:ext>
             </a:extLst>
           </p:cNvPr>
@@ -3408,7 +4026,7 @@
                 <a:ea typeface="Courier New"/>
                 <a:cs typeface="Courier New"/>
               </a:rPr>
-              <a:t>10 / 19</a:t>
+              <a:t>10 / 26</a:t>
             </a:r>
           </a:p>
         </p:txBody>
@@ -3416,7 +4034,7 @@
     </p:spTree>
     <p:extLst>
       <p:ext uri="{BB962C8B-B14F-4D97-AF65-F5344CB8AC3E}">
-        <p14:creationId xmlns:p14="http://schemas.microsoft.com/office/powerpoint/2010/main" val="1877006524"/>
+        <p14:creationId xmlns:p14="http://schemas.microsoft.com/office/powerpoint/2010/main" val="254154254"/>
       </p:ext>
     </p:extLst>
   </p:cSld>
@@ -3447,7 +4065,7 @@
           <p:cNvPr id="7" name="">
             <a:extLst xmlns:a="http://schemas.openxmlformats.org/drawingml/2006/main">
               <a:ext uri="{FF2B5EF4-FFF2-40B4-BE49-F238E27FC236}">
-                <a16:creationId xmlns:a16="http://schemas.microsoft.com/office/drawing/2014/main" id="{B0D7C06C-3ECB-4C48-B6F2-8A21288E2844}"/>
+                <a16:creationId xmlns:a16="http://schemas.microsoft.com/office/drawing/2014/main" id="{90359610-38B1-45FE-A1B0-0CD74E98A8EF}"/>
               </a:ext>
             </a:extLst>
           </p:cNvPr>
@@ -3494,7 +4112,7 @@
                 <a:ea typeface="Courier New"/>
                 <a:cs typeface="Courier New"/>
               </a:rPr>
-              <a:t>LECTURE 7 · CONTROL FLOW</a:t>
+              <a:t>LECTURE 6–7 · READING ORDER</a:t>
             </a:r>
           </a:p>
         </p:txBody>
@@ -3504,7 +4122,7 @@
           <p:cNvPr id="2" name="">
             <a:extLst xmlns:a="http://schemas.openxmlformats.org/drawingml/2006/main">
               <a:ext uri="{FF2B5EF4-FFF2-40B4-BE49-F238E27FC236}">
-                <a16:creationId xmlns:a16="http://schemas.microsoft.com/office/drawing/2014/main" id="{17C313DE-56DE-422B-AED6-5A2A6A009111}"/>
+                <a16:creationId xmlns:a16="http://schemas.microsoft.com/office/drawing/2014/main" id="{9E970715-3AF0-4D0E-8443-DF6C8C290CE3}"/>
               </a:ext>
             </a:extLst>
           </p:cNvPr>
@@ -3551,7 +4169,7 @@
                 <a:ea typeface="Arial"/>
                 <a:cs typeface="Arial"/>
               </a:rPr>
-              <a:t>A branch is an if statement</a:t>
+              <a:t>One line of AT&amp;T assembly</a:t>
             </a:r>
           </a:p>
         </p:txBody>
@@ -3561,7 +4179,7 @@
           <p:cNvPr id="3" name="">
             <a:extLst xmlns:a="http://schemas.openxmlformats.org/drawingml/2006/main">
               <a:ext uri="{FF2B5EF4-FFF2-40B4-BE49-F238E27FC236}">
-                <a16:creationId xmlns:a16="http://schemas.microsoft.com/office/drawing/2014/main" id="{73B4DE23-87D7-4E9D-8147-FD56CC429266}"/>
+                <a16:creationId xmlns:a16="http://schemas.microsoft.com/office/drawing/2014/main" id="{F0355440-9B90-4DE9-847B-E30977955892}"/>
               </a:ext>
             </a:extLst>
           </p:cNvPr>
@@ -3608,7 +4226,7 @@
                 <a:ea typeface="Arial"/>
                 <a:cs typeface="Arial"/>
               </a:rPr>
-              <a:t>cmpq compares two operands and sets condition flags. A conditional jump reads those flags.</a:t>
+              <a:t>Read the source first, then the destination. The destination changes.</a:t>
             </a:r>
           </a:p>
           <a:p xmlns:a="http://schemas.openxmlformats.org/drawingml/2006/main">
@@ -3636,7 +4254,7 @@
                 <a:ea typeface="Arial"/>
                 <a:cs typeface="Arial"/>
               </a:rPr>
-              <a:t>ja means unsigned “jump if above.” The target is a label elsewhere in the code.</a:t>
+              <a:t>The suffix says how much data is used: b = 1 byte, w = 2, l = 4, q = 8.</a:t>
             </a:r>
           </a:p>
         </p:txBody>
@@ -3646,7 +4264,7 @@
           <p:cNvPr id="4" name="">
             <a:extLst xmlns:a="http://schemas.openxmlformats.org/drawingml/2006/main">
               <a:ext uri="{FF2B5EF4-FFF2-40B4-BE49-F238E27FC236}">
-                <a16:creationId xmlns:a16="http://schemas.microsoft.com/office/drawing/2014/main" id="{91194161-D916-4553-9F2F-BDD84DD8A85B}"/>
+                <a16:creationId xmlns:a16="http://schemas.microsoft.com/office/drawing/2014/main" id="{809B7050-3500-4B02-B1C2-2A60C7F977BC}"/>
               </a:ext>
             </a:extLst>
           </p:cNvPr>
@@ -3693,7 +4311,7 @@
                 <a:ea typeface="Courier New"/>
                 <a:cs typeface="Courier New"/>
               </a:rPr>
-              <a:t>C: if (n &gt; 1) return n;</a:t>
+              <a:t>movq $5, %rax</a:t>
             </a:r>
           </a:p>
           <a:p xmlns:a="http://schemas.openxmlformats.org/drawingml/2006/main">
@@ -3721,7 +4339,7 @@
                 <a:ea typeface="Courier New"/>
                 <a:cs typeface="Courier New"/>
               </a:rPr>
-              <a:t>cmpq $1, %rdi</a:t>
+              <a:t>movq   move 8 bytes</a:t>
             </a:r>
           </a:p>
           <a:p xmlns:a="http://schemas.openxmlformats.org/drawingml/2006/main">
@@ -3744,7 +4362,7 @@
                 <a:ea typeface="Courier New"/>
                 <a:cs typeface="Courier New"/>
               </a:rPr>
-              <a:t>ja   .Lbig</a:t>
+              <a:t>$5     literal value 5</a:t>
             </a:r>
           </a:p>
           <a:p xmlns:a="http://schemas.openxmlformats.org/drawingml/2006/main">
@@ -3767,7 +4385,12 @@
                 <a:ea typeface="Courier New"/>
                 <a:cs typeface="Courier New"/>
               </a:rPr>
-              <a:t>movl $1, %eax</a:t>
+              <a:t>%rax   destination register</a:t>
+            </a:r>
+          </a:p>
+          <a:p xmlns:a="http://schemas.openxmlformats.org/drawingml/2006/main">
+            <a:r>
+              <a:t/>
             </a:r>
           </a:p>
           <a:p xmlns:a="http://schemas.openxmlformats.org/drawingml/2006/main">
@@ -3790,76 +4413,7 @@
                 <a:ea typeface="Courier New"/>
                 <a:cs typeface="Courier New"/>
               </a:rPr>
-              <a:t>ret</a:t>
-            </a:r>
-          </a:p>
-          <a:p xmlns:a="http://schemas.openxmlformats.org/drawingml/2006/main">
-            <a:pPr>
-              <a:defRPr sz="1650" b="0">
-                <a:solidFill>
-                  <a:srgbClr val="A7F3D0"/>
-                </a:solidFill>
-                <a:latin typeface="Courier New"/>
-                <a:ea typeface="Courier New"/>
-                <a:cs typeface="Courier New"/>
-              </a:defRPr>
-            </a:pPr>
-            <a:r>
-              <a:rPr sz="1650" b="0">
-                <a:solidFill>
-                  <a:srgbClr val="A7F3D0"/>
-                </a:solidFill>
-                <a:latin typeface="Courier New"/>
-                <a:ea typeface="Courier New"/>
-                <a:cs typeface="Courier New"/>
-              </a:rPr>
-              <a:t>.Lbig:</a:t>
-            </a:r>
-          </a:p>
-          <a:p xmlns:a="http://schemas.openxmlformats.org/drawingml/2006/main">
-            <a:pPr>
-              <a:defRPr sz="1650" b="0">
-                <a:solidFill>
-                  <a:srgbClr val="A7F3D0"/>
-                </a:solidFill>
-                <a:latin typeface="Courier New"/>
-                <a:ea typeface="Courier New"/>
-                <a:cs typeface="Courier New"/>
-              </a:defRPr>
-            </a:pPr>
-            <a:r>
-              <a:rPr sz="1650" b="0">
-                <a:solidFill>
-                  <a:srgbClr val="A7F3D0"/>
-                </a:solidFill>
-                <a:latin typeface="Courier New"/>
-                <a:ea typeface="Courier New"/>
-                <a:cs typeface="Courier New"/>
-              </a:rPr>
-              <a:t>movq %rdi, %rax</a:t>
-            </a:r>
-          </a:p>
-          <a:p xmlns:a="http://schemas.openxmlformats.org/drawingml/2006/main">
-            <a:pPr>
-              <a:defRPr sz="1650" b="0">
-                <a:solidFill>
-                  <a:srgbClr val="A7F3D0"/>
-                </a:solidFill>
-                <a:latin typeface="Courier New"/>
-                <a:ea typeface="Courier New"/>
-                <a:cs typeface="Courier New"/>
-              </a:defRPr>
-            </a:pPr>
-            <a:r>
-              <a:rPr sz="1650" b="0">
-                <a:solidFill>
-                  <a:srgbClr val="A7F3D0"/>
-                </a:solidFill>
-                <a:latin typeface="Courier New"/>
-                <a:ea typeface="Courier New"/>
-                <a:cs typeface="Courier New"/>
-              </a:rPr>
-              <a:t>ret</a:t>
+              <a:t>Afterward: %rax = 5</a:t>
             </a:r>
           </a:p>
         </p:txBody>
@@ -3869,7 +4423,7 @@
           <p:cNvPr id="5" name="">
             <a:extLst xmlns:a="http://schemas.openxmlformats.org/drawingml/2006/main">
               <a:ext uri="{FF2B5EF4-FFF2-40B4-BE49-F238E27FC236}">
-                <a16:creationId xmlns:a16="http://schemas.microsoft.com/office/drawing/2014/main" id="{32D2144D-3488-4050-8528-64000666EBF5}"/>
+                <a16:creationId xmlns:a16="http://schemas.microsoft.com/office/drawing/2014/main" id="{50D530AA-BC18-4CB7-845E-D912EB36578F}"/>
               </a:ext>
             </a:extLst>
           </p:cNvPr>
@@ -3916,7 +4470,7 @@
                 <a:ea typeface="Arial"/>
                 <a:cs typeface="Arial"/>
               </a:rPr>
-              <a:t>Here %rdi is an unsigned 64-bit n; %rax carries the return value.</a:t>
+              <a:t>AT&amp;T syntax is the format used in these lectures and by GCC’s default assembly output.</a:t>
             </a:r>
           </a:p>
         </p:txBody>
@@ -3926,7 +4480,7 @@
           <p:cNvPr id="6" name="">
             <a:extLst xmlns:a="http://schemas.openxmlformats.org/drawingml/2006/main">
               <a:ext uri="{FF2B5EF4-FFF2-40B4-BE49-F238E27FC236}">
-                <a16:creationId xmlns:a16="http://schemas.microsoft.com/office/drawing/2014/main" id="{B7E1E3A4-70A3-4C6C-99F7-71E336D0D35C}"/>
+                <a16:creationId xmlns:a16="http://schemas.microsoft.com/office/drawing/2014/main" id="{B6DDB160-C907-4D94-AE4E-BDECCFCC0B8B}"/>
               </a:ext>
             </a:extLst>
           </p:cNvPr>
@@ -3973,7 +4527,7 @@
                 <a:ea typeface="Courier New"/>
                 <a:cs typeface="Courier New"/>
               </a:rPr>
-              <a:t>11 / 19</a:t>
+              <a:t>11 / 26</a:t>
             </a:r>
           </a:p>
         </p:txBody>
@@ -3981,7 +4535,7 @@
     </p:spTree>
     <p:extLst>
       <p:ext uri="{BB962C8B-B14F-4D97-AF65-F5344CB8AC3E}">
-        <p14:creationId xmlns:p14="http://schemas.microsoft.com/office/powerpoint/2010/main" val="913969322"/>
+        <p14:creationId xmlns:p14="http://schemas.microsoft.com/office/powerpoint/2010/main" val="1190573947"/>
       </p:ext>
     </p:extLst>
   </p:cSld>
@@ -4012,7 +4566,7 @@
           <p:cNvPr id="7" name="">
             <a:extLst xmlns:a="http://schemas.openxmlformats.org/drawingml/2006/main">
               <a:ext uri="{FF2B5EF4-FFF2-40B4-BE49-F238E27FC236}">
-                <a16:creationId xmlns:a16="http://schemas.microsoft.com/office/drawing/2014/main" id="{D8ADF1AD-B7B3-45D0-A67F-77D5E71A5AAF}"/>
+                <a16:creationId xmlns:a16="http://schemas.microsoft.com/office/drawing/2014/main" id="{CBB68D0A-FECB-4D23-9D56-064441DCB118}"/>
               </a:ext>
             </a:extLst>
           </p:cNvPr>
@@ -4059,7 +4613,7 @@
                 <a:ea typeface="Courier New"/>
                 <a:cs typeface="Courier New"/>
               </a:rPr>
-              <a:t>TRY IT · 2 MINUTES</a:t>
+              <a:t>ASSEMBLY VOCABULARY</a:t>
             </a:r>
           </a:p>
         </p:txBody>
@@ -4069,7 +4623,7 @@
           <p:cNvPr id="2" name="">
             <a:extLst xmlns:a="http://schemas.openxmlformats.org/drawingml/2006/main">
               <a:ext uri="{FF2B5EF4-FFF2-40B4-BE49-F238E27FC236}">
-                <a16:creationId xmlns:a16="http://schemas.microsoft.com/office/drawing/2014/main" id="{2C6FE935-5CEE-4A63-A5AC-CABC8F25BA93}"/>
+                <a16:creationId xmlns:a16="http://schemas.microsoft.com/office/drawing/2014/main" id="{19107AD8-9D33-448A-89EB-8A952AE1AF1B}"/>
               </a:ext>
             </a:extLst>
           </p:cNvPr>
@@ -4116,7 +4670,7 @@
                 <a:ea typeface="Arial"/>
                 <a:cs typeface="Arial"/>
               </a:rPr>
-              <a:t>Trace the branch</a:t>
+              <a:t>Three kinds of operands</a:t>
             </a:r>
           </a:p>
         </p:txBody>
@@ -4126,7 +4680,7 @@
           <p:cNvPr id="3" name="">
             <a:extLst xmlns:a="http://schemas.openxmlformats.org/drawingml/2006/main">
               <a:ext uri="{FF2B5EF4-FFF2-40B4-BE49-F238E27FC236}">
-                <a16:creationId xmlns:a16="http://schemas.microsoft.com/office/drawing/2014/main" id="{4E3031C8-2349-4185-B503-3D2A9AB397B8}"/>
+                <a16:creationId xmlns:a16="http://schemas.microsoft.com/office/drawing/2014/main" id="{DF43C050-F034-428C-9D92-7B818989FFF9}"/>
               </a:ext>
             </a:extLst>
           </p:cNvPr>
@@ -4173,7 +4727,7 @@
                 <a:ea typeface="Arial"/>
                 <a:cs typeface="Arial"/>
               </a:rPr>
-              <a:t>Use the previous snippet. Predict the return value for n = 0, 1, and 4.</a:t>
+              <a:t>A dollar sign means the value itself. A percent sign names a register. Parentheses mean memory at an address.</a:t>
             </a:r>
           </a:p>
           <a:p xmlns:a="http://schemas.openxmlformats.org/drawingml/2006/main">
@@ -4201,7 +4755,7 @@
                 <a:ea typeface="Arial"/>
                 <a:cs typeface="Arial"/>
               </a:rPr>
-              <a:t>For each input, decide whether ja jumps before following any other line.</a:t>
+              <a:t>These are different even when the same digits appear.</a:t>
             </a:r>
           </a:p>
         </p:txBody>
@@ -4211,7 +4765,7 @@
           <p:cNvPr id="4" name="">
             <a:extLst xmlns:a="http://schemas.openxmlformats.org/drawingml/2006/main">
               <a:ext uri="{FF2B5EF4-FFF2-40B4-BE49-F238E27FC236}">
-                <a16:creationId xmlns:a16="http://schemas.microsoft.com/office/drawing/2014/main" id="{0A2F0FA9-70A7-41A5-A444-B4DF44E0B68A}"/>
+                <a16:creationId xmlns:a16="http://schemas.microsoft.com/office/drawing/2014/main" id="{6D6F29CD-5640-4BB8-A702-5F426F50E4F2}"/>
               </a:ext>
             </a:extLst>
           </p:cNvPr>
@@ -4258,7 +4812,7 @@
                 <a:ea typeface="Courier New"/>
                 <a:cs typeface="Courier New"/>
               </a:rPr>
-              <a:t>n = 0  → ja? ___  return ___</a:t>
+              <a:t>$8        literal 8</a:t>
             </a:r>
           </a:p>
           <a:p xmlns:a="http://schemas.openxmlformats.org/drawingml/2006/main">
@@ -4281,7 +4835,7 @@
                 <a:ea typeface="Courier New"/>
                 <a:cs typeface="Courier New"/>
               </a:rPr>
-              <a:t>n = 1  → ja? ___  return ___</a:t>
+              <a:t>%rax      value in rax</a:t>
             </a:r>
           </a:p>
           <a:p xmlns:a="http://schemas.openxmlformats.org/drawingml/2006/main">
@@ -4304,7 +4858,30 @@
                 <a:ea typeface="Courier New"/>
                 <a:cs typeface="Courier New"/>
               </a:rPr>
-              <a:t>n = 4  → ja? ___  return ___</a:t>
+              <a:t>(%rax)    value at address in rax</a:t>
+            </a:r>
+          </a:p>
+          <a:p xmlns:a="http://schemas.openxmlformats.org/drawingml/2006/main">
+            <a:pPr>
+              <a:defRPr sz="1650" b="0">
+                <a:solidFill>
+                  <a:srgbClr val="A7F3D0"/>
+                </a:solidFill>
+                <a:latin typeface="Courier New"/>
+                <a:ea typeface="Courier New"/>
+                <a:cs typeface="Courier New"/>
+              </a:defRPr>
+            </a:pPr>
+            <a:r>
+              <a:rPr sz="1650" b="0">
+                <a:solidFill>
+                  <a:srgbClr val="A7F3D0"/>
+                </a:solidFill>
+                <a:latin typeface="Courier New"/>
+                <a:ea typeface="Courier New"/>
+                <a:cs typeface="Courier New"/>
+              </a:rPr>
+              <a:t>8(%rax)   value 8 bytes later</a:t>
             </a:r>
           </a:p>
           <a:p xmlns:a="http://schemas.openxmlformats.org/drawingml/2006/main">
@@ -4332,7 +4909,30 @@
                 <a:ea typeface="Courier New"/>
                 <a:cs typeface="Courier New"/>
               </a:rPr>
-              <a:t>Hint: “above 1” is strict, not ≥ 1.</a:t>
+              <a:t>If %rax = &amp;x and x = 42:</a:t>
+            </a:r>
+          </a:p>
+          <a:p xmlns:a="http://schemas.openxmlformats.org/drawingml/2006/main">
+            <a:pPr>
+              <a:defRPr sz="1650" b="0">
+                <a:solidFill>
+                  <a:srgbClr val="A7F3D0"/>
+                </a:solidFill>
+                <a:latin typeface="Courier New"/>
+                <a:ea typeface="Courier New"/>
+                <a:cs typeface="Courier New"/>
+              </a:defRPr>
+            </a:pPr>
+            <a:r>
+              <a:rPr sz="1650" b="0">
+                <a:solidFill>
+                  <a:srgbClr val="A7F3D0"/>
+                </a:solidFill>
+                <a:latin typeface="Courier New"/>
+                <a:ea typeface="Courier New"/>
+                <a:cs typeface="Courier New"/>
+              </a:rPr>
+              <a:t>movq (%rax), %rbx → rbx = 42</a:t>
             </a:r>
           </a:p>
         </p:txBody>
@@ -4342,7 +4942,7 @@
           <p:cNvPr id="5" name="">
             <a:extLst xmlns:a="http://schemas.openxmlformats.org/drawingml/2006/main">
               <a:ext uri="{FF2B5EF4-FFF2-40B4-BE49-F238E27FC236}">
-                <a16:creationId xmlns:a16="http://schemas.microsoft.com/office/drawing/2014/main" id="{6E6E87DD-D6CF-4F27-A0F0-ED691007B1E0}"/>
+                <a16:creationId xmlns:a16="http://schemas.microsoft.com/office/drawing/2014/main" id="{3D6D84AF-4ADF-483C-8832-27D026823113}"/>
               </a:ext>
             </a:extLst>
           </p:cNvPr>
@@ -4389,7 +4989,7 @@
                 <a:ea typeface="Arial"/>
                 <a:cs typeface="Arial"/>
               </a:rPr>
-              <a:t>Check your answer by following only the instructions on the chosen path.</a:t>
+              <a:t>Parentheses read memory; without them, the register value itself is used.</a:t>
             </a:r>
           </a:p>
         </p:txBody>
@@ -4399,7 +4999,7 @@
           <p:cNvPr id="6" name="">
             <a:extLst xmlns:a="http://schemas.openxmlformats.org/drawingml/2006/main">
               <a:ext uri="{FF2B5EF4-FFF2-40B4-BE49-F238E27FC236}">
-                <a16:creationId xmlns:a16="http://schemas.microsoft.com/office/drawing/2014/main" id="{2350FEF4-6F1E-4048-B9E4-E7122FB40AC8}"/>
+                <a16:creationId xmlns:a16="http://schemas.microsoft.com/office/drawing/2014/main" id="{6830BA37-F4FF-4AE7-9BB9-7AACBAAC03A7}"/>
               </a:ext>
             </a:extLst>
           </p:cNvPr>
@@ -4446,7 +5046,7 @@
                 <a:ea typeface="Courier New"/>
                 <a:cs typeface="Courier New"/>
               </a:rPr>
-              <a:t>12 / 19</a:t>
+              <a:t>12 / 26</a:t>
             </a:r>
           </a:p>
         </p:txBody>
@@ -4454,7 +5054,7 @@
     </p:spTree>
     <p:extLst>
       <p:ext uri="{BB962C8B-B14F-4D97-AF65-F5344CB8AC3E}">
-        <p14:creationId xmlns:p14="http://schemas.microsoft.com/office/powerpoint/2010/main" val="2127795789"/>
+        <p14:creationId xmlns:p14="http://schemas.microsoft.com/office/powerpoint/2010/main" val="521665453"/>
       </p:ext>
     </p:extLst>
   </p:cSld>
@@ -4485,7 +5085,7 @@
           <p:cNvPr id="7" name="">
             <a:extLst xmlns:a="http://schemas.openxmlformats.org/drawingml/2006/main">
               <a:ext uri="{FF2B5EF4-FFF2-40B4-BE49-F238E27FC236}">
-                <a16:creationId xmlns:a16="http://schemas.microsoft.com/office/drawing/2014/main" id="{02539392-4A41-4C61-8986-D1E351A94CD6}"/>
+                <a16:creationId xmlns:a16="http://schemas.microsoft.com/office/drawing/2014/main" id="{3229F7C7-FF20-4A6B-93AA-93BC40A26C3D}"/>
               </a:ext>
             </a:extLst>
           </p:cNvPr>
@@ -4532,7 +5132,7 @@
                 <a:ea typeface="Courier New"/>
                 <a:cs typeface="Courier New"/>
               </a:rPr>
-              <a:t>LECTURE 6–7 · REGISTERS</a:t>
+              <a:t>TRY IT · 1 MINUTE</a:t>
             </a:r>
           </a:p>
         </p:txBody>
@@ -4542,7 +5142,7 @@
           <p:cNvPr id="2" name="">
             <a:extLst xmlns:a="http://schemas.openxmlformats.org/drawingml/2006/main">
               <a:ext uri="{FF2B5EF4-FFF2-40B4-BE49-F238E27FC236}">
-                <a16:creationId xmlns:a16="http://schemas.microsoft.com/office/drawing/2014/main" id="{A0C30156-0E7C-4F3A-9303-C7D41DDD5725}"/>
+                <a16:creationId xmlns:a16="http://schemas.microsoft.com/office/drawing/2014/main" id="{8DCE8B5F-0DEC-42AF-90D7-EB9A8DD1D455}"/>
               </a:ext>
             </a:extLst>
           </p:cNvPr>
@@ -4589,7 +5189,7 @@
                 <a:ea typeface="Arial"/>
                 <a:cs typeface="Arial"/>
               </a:rPr>
-              <a:t>Function calls use conventions</a:t>
+              <a:t>Trace two instructions</a:t>
             </a:r>
           </a:p>
         </p:txBody>
@@ -4599,7 +5199,7 @@
           <p:cNvPr id="3" name="">
             <a:extLst xmlns:a="http://schemas.openxmlformats.org/drawingml/2006/main">
               <a:ext uri="{FF2B5EF4-FFF2-40B4-BE49-F238E27FC236}">
-                <a16:creationId xmlns:a16="http://schemas.microsoft.com/office/drawing/2014/main" id="{EBB66976-E14F-4AB3-8EFF-16160C38559D}"/>
+                <a16:creationId xmlns:a16="http://schemas.microsoft.com/office/drawing/2014/main" id="{85D3B046-77ED-4D0E-9DE2-20A38DC889A7}"/>
               </a:ext>
             </a:extLst>
           </p:cNvPr>
@@ -4646,7 +5246,7 @@
                 <a:ea typeface="Arial"/>
                 <a:cs typeface="Arial"/>
               </a:rPr>
-              <a:t>For ordinary integer or pointer arguments on the x86-64 System V ABI, the first arguments use %rdi, %rsi, %rdx, %rcx, %r8, %r9.</a:t>
+              <a:t>Start with %rax = 100 and %rbx = 7.</a:t>
             </a:r>
           </a:p>
           <a:p xmlns:a="http://schemas.openxmlformats.org/drawingml/2006/main">
@@ -4674,7 +5274,35 @@
                 <a:ea typeface="Arial"/>
                 <a:cs typeface="Arial"/>
               </a:rPr>
-              <a:t>The return value usually arrives in %rax.</a:t>
+              <a:t>What is in each register after these lines?</a:t>
+            </a:r>
+          </a:p>
+          <a:p xmlns:a="http://schemas.openxmlformats.org/drawingml/2006/main">
+            <a:r>
+              <a:t/>
+            </a:r>
+          </a:p>
+          <a:p xmlns:a="http://schemas.openxmlformats.org/drawingml/2006/main">
+            <a:pPr>
+              <a:defRPr sz="1950" b="0">
+                <a:solidFill>
+                  <a:srgbClr val="D4D4D8"/>
+                </a:solidFill>
+                <a:latin typeface="Arial"/>
+                <a:ea typeface="Arial"/>
+                <a:cs typeface="Arial"/>
+              </a:defRPr>
+            </a:pPr>
+            <a:r>
+              <a:rPr sz="1950" b="0">
+                <a:solidFill>
+                  <a:srgbClr val="D4D4D8"/>
+                </a:solidFill>
+                <a:latin typeface="Arial"/>
+                <a:ea typeface="Arial"/>
+                <a:cs typeface="Arial"/>
+              </a:rPr>
+              <a:t>Which register changed on each line?</a:t>
             </a:r>
           </a:p>
         </p:txBody>
@@ -4684,7 +5312,7 @@
           <p:cNvPr id="4" name="">
             <a:extLst xmlns:a="http://schemas.openxmlformats.org/drawingml/2006/main">
               <a:ext uri="{FF2B5EF4-FFF2-40B4-BE49-F238E27FC236}">
-                <a16:creationId xmlns:a16="http://schemas.microsoft.com/office/drawing/2014/main" id="{6EE81C10-9623-42C5-9639-21CFBF8B02A5}"/>
+                <a16:creationId xmlns:a16="http://schemas.microsoft.com/office/drawing/2014/main" id="{6E496FDC-713C-4C83-9912-F131C0A89FC7}"/>
               </a:ext>
             </a:extLst>
           </p:cNvPr>
@@ -4731,7 +5359,7 @@
                 <a:ea typeface="Courier New"/>
                 <a:cs typeface="Courier New"/>
               </a:rPr>
-              <a:t>long double_it(long x) {</a:t>
+              <a:t>movq %rbx, %rax</a:t>
             </a:r>
           </a:p>
           <a:p xmlns:a="http://schemas.openxmlformats.org/drawingml/2006/main">
@@ -4754,7 +5382,12 @@
                 <a:ea typeface="Courier New"/>
                 <a:cs typeface="Courier New"/>
               </a:rPr>
-              <a:t>    return 2 * x;</a:t>
+              <a:t>addq $3, %rax</a:t>
+            </a:r>
+          </a:p>
+          <a:p xmlns:a="http://schemas.openxmlformats.org/drawingml/2006/main">
+            <a:r>
+              <a:t/>
             </a:r>
           </a:p>
           <a:p xmlns:a="http://schemas.openxmlformats.org/drawingml/2006/main">
@@ -4777,12 +5410,7 @@
                 <a:ea typeface="Courier New"/>
                 <a:cs typeface="Courier New"/>
               </a:rPr>
-              <a:t>}</a:t>
-            </a:r>
-          </a:p>
-          <a:p xmlns:a="http://schemas.openxmlformats.org/drawingml/2006/main">
-            <a:r>
-              <a:t/>
+              <a:t>%rax = ?</a:t>
             </a:r>
           </a:p>
           <a:p xmlns:a="http://schemas.openxmlformats.org/drawingml/2006/main">
@@ -4805,53 +5433,7 @@
                 <a:ea typeface="Courier New"/>
                 <a:cs typeface="Courier New"/>
               </a:rPr>
-              <a:t>At call:   %rdi = x</a:t>
-            </a:r>
-          </a:p>
-          <a:p xmlns:a="http://schemas.openxmlformats.org/drawingml/2006/main">
-            <a:pPr>
-              <a:defRPr sz="1650" b="0">
-                <a:solidFill>
-                  <a:srgbClr val="A7F3D0"/>
-                </a:solidFill>
-                <a:latin typeface="Courier New"/>
-                <a:ea typeface="Courier New"/>
-                <a:cs typeface="Courier New"/>
-              </a:defRPr>
-            </a:pPr>
-            <a:r>
-              <a:rPr sz="1650" b="0">
-                <a:solidFill>
-                  <a:srgbClr val="A7F3D0"/>
-                </a:solidFill>
-                <a:latin typeface="Courier New"/>
-                <a:ea typeface="Courier New"/>
-                <a:cs typeface="Courier New"/>
-              </a:rPr>
-              <a:t>           call double_it</a:t>
-            </a:r>
-          </a:p>
-          <a:p xmlns:a="http://schemas.openxmlformats.org/drawingml/2006/main">
-            <a:pPr>
-              <a:defRPr sz="1650" b="0">
-                <a:solidFill>
-                  <a:srgbClr val="A7F3D0"/>
-                </a:solidFill>
-                <a:latin typeface="Courier New"/>
-                <a:ea typeface="Courier New"/>
-                <a:cs typeface="Courier New"/>
-              </a:defRPr>
-            </a:pPr>
-            <a:r>
-              <a:rPr sz="1650" b="0">
-                <a:solidFill>
-                  <a:srgbClr val="A7F3D0"/>
-                </a:solidFill>
-                <a:latin typeface="Courier New"/>
-                <a:ea typeface="Courier New"/>
-                <a:cs typeface="Courier New"/>
-              </a:rPr>
-              <a:t>On return: %rax = 2 * x</a:t>
+              <a:t>%rbx = ?</a:t>
             </a:r>
           </a:p>
         </p:txBody>
@@ -4861,7 +5443,7 @@
           <p:cNvPr id="5" name="">
             <a:extLst xmlns:a="http://schemas.openxmlformats.org/drawingml/2006/main">
               <a:ext uri="{FF2B5EF4-FFF2-40B4-BE49-F238E27FC236}">
-                <a16:creationId xmlns:a16="http://schemas.microsoft.com/office/drawing/2014/main" id="{1C37B8DC-F482-434D-AC56-4D5481ABE361}"/>
+                <a16:creationId xmlns:a16="http://schemas.microsoft.com/office/drawing/2014/main" id="{EAEE263D-A398-4386-82EE-A730F003D09D}"/>
               </a:ext>
             </a:extLst>
           </p:cNvPr>
@@ -4908,7 +5490,7 @@
                 <a:ea typeface="Arial"/>
                 <a:cs typeface="Arial"/>
               </a:rPr>
-              <a:t>This convention applies to the Linux x86-64 examples in the lectures; floating point arguments use different registers.</a:t>
+              <a:t>Read each line left to right: source, then destination.</a:t>
             </a:r>
           </a:p>
         </p:txBody>
@@ -4918,7 +5500,7 @@
           <p:cNvPr id="6" name="">
             <a:extLst xmlns:a="http://schemas.openxmlformats.org/drawingml/2006/main">
               <a:ext uri="{FF2B5EF4-FFF2-40B4-BE49-F238E27FC236}">
-                <a16:creationId xmlns:a16="http://schemas.microsoft.com/office/drawing/2014/main" id="{8DB7C5CC-57D0-4568-9257-16EE90F87DDA}"/>
+                <a16:creationId xmlns:a16="http://schemas.microsoft.com/office/drawing/2014/main" id="{0FE58891-C67E-4CED-A622-D4AC431BD876}"/>
               </a:ext>
             </a:extLst>
           </p:cNvPr>
@@ -4965,7 +5547,7 @@
                 <a:ea typeface="Courier New"/>
                 <a:cs typeface="Courier New"/>
               </a:rPr>
-              <a:t>13 / 19</a:t>
+              <a:t>13 / 26</a:t>
             </a:r>
           </a:p>
         </p:txBody>
@@ -4973,7 +5555,7 @@
     </p:spTree>
     <p:extLst>
       <p:ext uri="{BB962C8B-B14F-4D97-AF65-F5344CB8AC3E}">
-        <p14:creationId xmlns:p14="http://schemas.microsoft.com/office/powerpoint/2010/main" val="1016316391"/>
+        <p14:creationId xmlns:p14="http://schemas.microsoft.com/office/powerpoint/2010/main" val="786613741"/>
       </p:ext>
     </p:extLst>
   </p:cSld>
@@ -5004,7 +5586,7 @@
           <p:cNvPr id="7" name="">
             <a:extLst xmlns:a="http://schemas.openxmlformats.org/drawingml/2006/main">
               <a:ext uri="{FF2B5EF4-FFF2-40B4-BE49-F238E27FC236}">
-                <a16:creationId xmlns:a16="http://schemas.microsoft.com/office/drawing/2014/main" id="{EEAF5619-B1AF-4840-92A6-E828C77DA9BC}"/>
+                <a16:creationId xmlns:a16="http://schemas.microsoft.com/office/drawing/2014/main" id="{A42604C2-D25B-462A-8C27-E80B58D26658}"/>
               </a:ext>
             </a:extLst>
           </p:cNvPr>
@@ -5051,7 +5633,7 @@
                 <a:ea typeface="Courier New"/>
                 <a:cs typeface="Courier New"/>
               </a:rPr>
-              <a:t>LECTURE 7–8 · STACK FRAMES</a:t>
+              <a:t>WORKED EXAMPLE</a:t>
             </a:r>
           </a:p>
         </p:txBody>
@@ -5061,7 +5643,7 @@
           <p:cNvPr id="2" name="">
             <a:extLst xmlns:a="http://schemas.openxmlformats.org/drawingml/2006/main">
               <a:ext uri="{FF2B5EF4-FFF2-40B4-BE49-F238E27FC236}">
-                <a16:creationId xmlns:a16="http://schemas.microsoft.com/office/drawing/2014/main" id="{D1175FC7-BAA1-4586-A7AA-32C681B397C0}"/>
+                <a16:creationId xmlns:a16="http://schemas.microsoft.com/office/drawing/2014/main" id="{81DFCEDF-D0AE-4988-8761-FC900BC9B821}"/>
               </a:ext>
             </a:extLst>
           </p:cNvPr>
@@ -5108,7 +5690,7 @@
                 <a:ea typeface="Arial"/>
                 <a:cs typeface="Arial"/>
               </a:rPr>
-              <a:t>The stack keeps each call’s state</a:t>
+              <a:t>Trace answer</a:t>
             </a:r>
           </a:p>
         </p:txBody>
@@ -5118,7 +5700,7 @@
           <p:cNvPr id="3" name="">
             <a:extLst xmlns:a="http://schemas.openxmlformats.org/drawingml/2006/main">
               <a:ext uri="{FF2B5EF4-FFF2-40B4-BE49-F238E27FC236}">
-                <a16:creationId xmlns:a16="http://schemas.microsoft.com/office/drawing/2014/main" id="{AA3EFBE9-100B-4467-BEF3-43A1C8CC193E}"/>
+                <a16:creationId xmlns:a16="http://schemas.microsoft.com/office/drawing/2014/main" id="{91E7D4EA-B5C9-43C7-A040-CAA9E35C8272}"/>
               </a:ext>
             </a:extLst>
           </p:cNvPr>
@@ -5165,7 +5747,7 @@
                 <a:ea typeface="Arial"/>
                 <a:cs typeface="Arial"/>
               </a:rPr>
-              <a:t>The stack grows toward lower addresses. %rsp points at its current top.</a:t>
+              <a:t>The first line copies 7 into %rax. The second adds 3 to that copy.</a:t>
             </a:r>
           </a:p>
           <a:p xmlns:a="http://schemas.openxmlformats.org/drawingml/2006/main">
@@ -5193,7 +5775,7 @@
                 <a:ea typeface="Arial"/>
                 <a:cs typeface="Arial"/>
               </a:rPr>
-              <a:t>A function may save the old %rbp, set a new frame base, and subtract from %rsp to reserve space for local data.</a:t>
+              <a:t>%rbx never changes.</a:t>
             </a:r>
           </a:p>
         </p:txBody>
@@ -5203,7 +5785,7 @@
           <p:cNvPr id="4" name="">
             <a:extLst xmlns:a="http://schemas.openxmlformats.org/drawingml/2006/main">
               <a:ext uri="{FF2B5EF4-FFF2-40B4-BE49-F238E27FC236}">
-                <a16:creationId xmlns:a16="http://schemas.microsoft.com/office/drawing/2014/main" id="{01E66211-5305-4925-AACF-698FA191F895}"/>
+                <a16:creationId xmlns:a16="http://schemas.microsoft.com/office/drawing/2014/main" id="{D3CFEF06-0807-4B72-B454-E110344C17F3}"/>
               </a:ext>
             </a:extLst>
           </p:cNvPr>
@@ -5250,7 +5832,7 @@
                 <a:ea typeface="Courier New"/>
                 <a:cs typeface="Courier New"/>
               </a:rPr>
-              <a:t>pushq %rbp        save old frame</a:t>
+              <a:t>Initially       rax = 100   rbx = 7</a:t>
             </a:r>
           </a:p>
           <a:p xmlns:a="http://schemas.openxmlformats.org/drawingml/2006/main">
@@ -5273,7 +5855,7 @@
                 <a:ea typeface="Courier New"/>
                 <a:cs typeface="Courier New"/>
               </a:rPr>
-              <a:t>movq %rsp, %rbp   set frame base</a:t>
+              <a:t>movq %rbx,%rax  rax =   7   rbx = 7</a:t>
             </a:r>
           </a:p>
           <a:p xmlns:a="http://schemas.openxmlformats.org/drawingml/2006/main">
@@ -5296,76 +5878,7 @@
                 <a:ea typeface="Courier New"/>
                 <a:cs typeface="Courier New"/>
               </a:rPr>
-              <a:t>subq $16, %rsp   reserve 16 bytes</a:t>
-            </a:r>
-          </a:p>
-          <a:p xmlns:a="http://schemas.openxmlformats.org/drawingml/2006/main">
-            <a:pPr>
-              <a:defRPr sz="1650" b="0">
-                <a:solidFill>
-                  <a:srgbClr val="A7F3D0"/>
-                </a:solidFill>
-                <a:latin typeface="Courier New"/>
-                <a:ea typeface="Courier New"/>
-                <a:cs typeface="Courier New"/>
-              </a:defRPr>
-            </a:pPr>
-            <a:r>
-              <a:rPr sz="1650" b="0">
-                <a:solidFill>
-                  <a:srgbClr val="A7F3D0"/>
-                </a:solidFill>
-                <a:latin typeface="Courier New"/>
-                <a:ea typeface="Courier New"/>
-                <a:cs typeface="Courier New"/>
-              </a:rPr>
-              <a:t>...</a:t>
-            </a:r>
-          </a:p>
-          <a:p xmlns:a="http://schemas.openxmlformats.org/drawingml/2006/main">
-            <a:pPr>
-              <a:defRPr sz="1650" b="0">
-                <a:solidFill>
-                  <a:srgbClr val="A7F3D0"/>
-                </a:solidFill>
-                <a:latin typeface="Courier New"/>
-                <a:ea typeface="Courier New"/>
-                <a:cs typeface="Courier New"/>
-              </a:defRPr>
-            </a:pPr>
-            <a:r>
-              <a:rPr sz="1650" b="0">
-                <a:solidFill>
-                  <a:srgbClr val="A7F3D0"/>
-                </a:solidFill>
-                <a:latin typeface="Courier New"/>
-                <a:ea typeface="Courier New"/>
-                <a:cs typeface="Courier New"/>
-              </a:rPr>
-              <a:t>leave             restore old frame</a:t>
-            </a:r>
-          </a:p>
-          <a:p xmlns:a="http://schemas.openxmlformats.org/drawingml/2006/main">
-            <a:pPr>
-              <a:defRPr sz="1650" b="0">
-                <a:solidFill>
-                  <a:srgbClr val="A7F3D0"/>
-                </a:solidFill>
-                <a:latin typeface="Courier New"/>
-                <a:ea typeface="Courier New"/>
-                <a:cs typeface="Courier New"/>
-              </a:defRPr>
-            </a:pPr>
-            <a:r>
-              <a:rPr sz="1650" b="0">
-                <a:solidFill>
-                  <a:srgbClr val="A7F3D0"/>
-                </a:solidFill>
-                <a:latin typeface="Courier New"/>
-                <a:ea typeface="Courier New"/>
-                <a:cs typeface="Courier New"/>
-              </a:rPr>
-              <a:t>ret               return to caller</a:t>
+              <a:t>addq $3,%rax   rax =  10   rbx = 7</a:t>
             </a:r>
           </a:p>
         </p:txBody>
@@ -5375,7 +5888,7 @@
           <p:cNvPr id="5" name="">
             <a:extLst xmlns:a="http://schemas.openxmlformats.org/drawingml/2006/main">
               <a:ext uri="{FF2B5EF4-FFF2-40B4-BE49-F238E27FC236}">
-                <a16:creationId xmlns:a16="http://schemas.microsoft.com/office/drawing/2014/main" id="{A957CCD4-7877-4BAB-B6AF-A4936859C0E9}"/>
+                <a16:creationId xmlns:a16="http://schemas.microsoft.com/office/drawing/2014/main" id="{251128FE-BBF9-4DF3-91A2-91B5057A3E39}"/>
               </a:ext>
             </a:extLst>
           </p:cNvPr>
@@ -5422,7 +5935,7 @@
                 <a:ea typeface="Arial"/>
                 <a:cs typeface="Arial"/>
               </a:rPr>
-              <a:t>These are common unoptimized patterns, not instructions every function must contain.</a:t>
+              <a:t>A move copies a value; it does not erase the source.</a:t>
             </a:r>
           </a:p>
         </p:txBody>
@@ -5432,7 +5945,7 @@
           <p:cNvPr id="6" name="">
             <a:extLst xmlns:a="http://schemas.openxmlformats.org/drawingml/2006/main">
               <a:ext uri="{FF2B5EF4-FFF2-40B4-BE49-F238E27FC236}">
-                <a16:creationId xmlns:a16="http://schemas.microsoft.com/office/drawing/2014/main" id="{AE0874F7-41FF-40B4-BB7A-B4E15113D739}"/>
+                <a16:creationId xmlns:a16="http://schemas.microsoft.com/office/drawing/2014/main" id="{B743A760-0939-436E-9313-D31B89A511B7}"/>
               </a:ext>
             </a:extLst>
           </p:cNvPr>
@@ -5479,7 +5992,7 @@
                 <a:ea typeface="Courier New"/>
                 <a:cs typeface="Courier New"/>
               </a:rPr>
-              <a:t>14 / 19</a:t>
+              <a:t>14 / 26</a:t>
             </a:r>
           </a:p>
         </p:txBody>
@@ -5487,7 +6000,7 @@
     </p:spTree>
     <p:extLst>
       <p:ext uri="{BB962C8B-B14F-4D97-AF65-F5344CB8AC3E}">
-        <p14:creationId xmlns:p14="http://schemas.microsoft.com/office/powerpoint/2010/main" val="1215642899"/>
+        <p14:creationId xmlns:p14="http://schemas.microsoft.com/office/powerpoint/2010/main" val="365054280"/>
       </p:ext>
     </p:extLst>
   </p:cSld>
@@ -5518,7 +6031,7 @@
           <p:cNvPr id="7" name="">
             <a:extLst xmlns:a="http://schemas.openxmlformats.org/drawingml/2006/main">
               <a:ext uri="{FF2B5EF4-FFF2-40B4-BE49-F238E27FC236}">
-                <a16:creationId xmlns:a16="http://schemas.microsoft.com/office/drawing/2014/main" id="{B6A12284-A980-424A-8533-88955AEAE8FC}"/>
+                <a16:creationId xmlns:a16="http://schemas.microsoft.com/office/drawing/2014/main" id="{BA01EE65-6C32-4424-AFFE-63C84390671D}"/>
               </a:ext>
             </a:extLst>
           </p:cNvPr>
@@ -5565,7 +6078,7 @@
                 <a:ea typeface="Courier New"/>
                 <a:cs typeface="Courier New"/>
               </a:rPr>
-              <a:t>WORKED EXAMPLE</a:t>
+              <a:t>LECTURE 6–7 · REGISTER NAMES</a:t>
             </a:r>
           </a:p>
         </p:txBody>
@@ -5575,7 +6088,7 @@
           <p:cNvPr id="2" name="">
             <a:extLst xmlns:a="http://schemas.openxmlformats.org/drawingml/2006/main">
               <a:ext uri="{FF2B5EF4-FFF2-40B4-BE49-F238E27FC236}">
-                <a16:creationId xmlns:a16="http://schemas.microsoft.com/office/drawing/2014/main" id="{E227DF81-B184-472A-9B1C-4D966F413A64}"/>
+                <a16:creationId xmlns:a16="http://schemas.microsoft.com/office/drawing/2014/main" id="{9C560F74-8E4F-4186-AAD5-55BDBA0FE94E}"/>
               </a:ext>
             </a:extLst>
           </p:cNvPr>
@@ -5622,7 +6135,7 @@
                 <a:ea typeface="Arial"/>
                 <a:cs typeface="Arial"/>
               </a:rPr>
-              <a:t>A stack frame in addresses</a:t>
+              <a:t>Registers have different widths</a:t>
             </a:r>
           </a:p>
         </p:txBody>
@@ -5632,7 +6145,7 @@
           <p:cNvPr id="3" name="">
             <a:extLst xmlns:a="http://schemas.openxmlformats.org/drawingml/2006/main">
               <a:ext uri="{FF2B5EF4-FFF2-40B4-BE49-F238E27FC236}">
-                <a16:creationId xmlns:a16="http://schemas.microsoft.com/office/drawing/2014/main" id="{1F698C16-F485-4981-83A9-A2440ACC3BC0}"/>
+                <a16:creationId xmlns:a16="http://schemas.microsoft.com/office/drawing/2014/main" id="{6D27A478-D570-44CD-8ECF-174738BD0A4C}"/>
               </a:ext>
             </a:extLst>
           </p:cNvPr>
@@ -5679,7 +6192,7 @@
                 <a:ea typeface="Arial"/>
                 <a:cs typeface="Arial"/>
               </a:rPr>
-              <a:t>Suppose %rsp is 0x1000 just after call has placed the return address on the stack.</a:t>
+              <a:t>%rax is 64 bits. %eax names its low 32 bits; %ax names the low 16; %al names the low 8.</a:t>
             </a:r>
           </a:p>
           <a:p xmlns:a="http://schemas.openxmlformats.org/drawingml/2006/main">
@@ -5707,7 +6220,7 @@
                 <a:ea typeface="Arial"/>
                 <a:cs typeface="Arial"/>
               </a:rPr>
-              <a:t>Follow the three setup instructions. Which address holds the saved %rbp? Where does the new frame begin?</a:t>
+              <a:t>Writing %eax zeroes the upper 32 bits of %rax. Reading %eax does not change %rax.</a:t>
             </a:r>
           </a:p>
         </p:txBody>
@@ -5717,7 +6230,7 @@
           <p:cNvPr id="4" name="">
             <a:extLst xmlns:a="http://schemas.openxmlformats.org/drawingml/2006/main">
               <a:ext uri="{FF2B5EF4-FFF2-40B4-BE49-F238E27FC236}">
-                <a16:creationId xmlns:a16="http://schemas.microsoft.com/office/drawing/2014/main" id="{07B76856-90F4-4205-A753-206E9AB51751}"/>
+                <a16:creationId xmlns:a16="http://schemas.microsoft.com/office/drawing/2014/main" id="{75B3F5E8-CEA9-419D-9D64-965FF9412C26}"/>
               </a:ext>
             </a:extLst>
           </p:cNvPr>
@@ -5764,7 +6277,7 @@
                 <a:ea typeface="Courier New"/>
                 <a:cs typeface="Courier New"/>
               </a:rPr>
-              <a:t>Start             rsp = 0x1000</a:t>
+              <a:t>movq $-1, %rax</a:t>
             </a:r>
           </a:p>
           <a:p xmlns:a="http://schemas.openxmlformats.org/drawingml/2006/main">
@@ -5787,7 +6300,12 @@
                 <a:ea typeface="Courier New"/>
                 <a:cs typeface="Courier New"/>
               </a:rPr>
-              <a:t>pushq %rbp        rsp = 0x0ff8</a:t>
+              <a:t>movl $1, %eax</a:t>
+            </a:r>
+          </a:p>
+          <a:p xmlns:a="http://schemas.openxmlformats.org/drawingml/2006/main">
+            <a:r>
+              <a:t/>
             </a:r>
           </a:p>
           <a:p xmlns:a="http://schemas.openxmlformats.org/drawingml/2006/main">
@@ -5810,7 +6328,12 @@
                 <a:ea typeface="Courier New"/>
                 <a:cs typeface="Courier New"/>
               </a:rPr>
-              <a:t>movq %rsp,%rbp    rbp = 0x0ff8</a:t>
+              <a:t>Now %rax = 0x0000000000000001</a:t>
+            </a:r>
+          </a:p>
+          <a:p xmlns:a="http://schemas.openxmlformats.org/drawingml/2006/main">
+            <a:r>
+              <a:t/>
             </a:r>
           </a:p>
           <a:p xmlns:a="http://schemas.openxmlformats.org/drawingml/2006/main">
@@ -5833,12 +6356,7 @@
                 <a:ea typeface="Courier New"/>
                 <a:cs typeface="Courier New"/>
               </a:rPr>
-              <a:t>subq $16,%rsp     rsp = 0x0fe8</a:t>
-            </a:r>
-          </a:p>
-          <a:p xmlns:a="http://schemas.openxmlformats.org/drawingml/2006/main">
-            <a:r>
-              <a:t/>
+              <a:t>movq  ↔  %rax  ↔  8 bytes</a:t>
             </a:r>
           </a:p>
           <a:p xmlns:a="http://schemas.openxmlformats.org/drawingml/2006/main">
@@ -5861,30 +6379,7 @@
                 <a:ea typeface="Courier New"/>
                 <a:cs typeface="Courier New"/>
               </a:rPr>
-              <a:t>Saved rbp: [0x0ff8]</a:t>
-            </a:r>
-          </a:p>
-          <a:p xmlns:a="http://schemas.openxmlformats.org/drawingml/2006/main">
-            <a:pPr>
-              <a:defRPr sz="1650" b="0">
-                <a:solidFill>
-                  <a:srgbClr val="A7F3D0"/>
-                </a:solidFill>
-                <a:latin typeface="Courier New"/>
-                <a:ea typeface="Courier New"/>
-                <a:cs typeface="Courier New"/>
-              </a:defRPr>
-            </a:pPr>
-            <a:r>
-              <a:rPr sz="1650" b="0">
-                <a:solidFill>
-                  <a:srgbClr val="A7F3D0"/>
-                </a:solidFill>
-                <a:latin typeface="Courier New"/>
-                <a:ea typeface="Courier New"/>
-                <a:cs typeface="Courier New"/>
-              </a:rPr>
-              <a:t>Return address: [0x1000]</a:t>
+              <a:t>movl  ↔  %eax  ↔  4 bytes</a:t>
             </a:r>
           </a:p>
         </p:txBody>
@@ -5894,7 +6389,7 @@
           <p:cNvPr id="5" name="">
             <a:extLst xmlns:a="http://schemas.openxmlformats.org/drawingml/2006/main">
               <a:ext uri="{FF2B5EF4-FFF2-40B4-BE49-F238E27FC236}">
-                <a16:creationId xmlns:a16="http://schemas.microsoft.com/office/drawing/2014/main" id="{70511233-1C1B-417F-9226-79572B35CB2B}"/>
+                <a16:creationId xmlns:a16="http://schemas.microsoft.com/office/drawing/2014/main" id="{3BDB0F94-9BB2-4FA6-BBAB-19202E7EE0B0}"/>
               </a:ext>
             </a:extLst>
           </p:cNvPr>
@@ -5941,7 +6436,7 @@
                 <a:ea typeface="Arial"/>
                 <a:cs typeface="Arial"/>
               </a:rPr>
-              <a:t>Local stack space is at addresses below the new %rbp.</a:t>
+              <a:t>This zero-extension rule applies to 32-bit register destinations in x86-64.</a:t>
             </a:r>
           </a:p>
         </p:txBody>
@@ -5951,7 +6446,7 @@
           <p:cNvPr id="6" name="">
             <a:extLst xmlns:a="http://schemas.openxmlformats.org/drawingml/2006/main">
               <a:ext uri="{FF2B5EF4-FFF2-40B4-BE49-F238E27FC236}">
-                <a16:creationId xmlns:a16="http://schemas.microsoft.com/office/drawing/2014/main" id="{652A8281-EB19-4743-856F-86C7BB16AC5E}"/>
+                <a16:creationId xmlns:a16="http://schemas.microsoft.com/office/drawing/2014/main" id="{F2AA670B-4D08-4BB0-9FF0-9D7CCA4D9A42}"/>
               </a:ext>
             </a:extLst>
           </p:cNvPr>
@@ -5998,7 +6493,7 @@
                 <a:ea typeface="Courier New"/>
                 <a:cs typeface="Courier New"/>
               </a:rPr>
-              <a:t>15 / 19</a:t>
+              <a:t>15 / 26</a:t>
             </a:r>
           </a:p>
         </p:txBody>
@@ -6006,7 +6501,7 @@
     </p:spTree>
     <p:extLst>
       <p:ext uri="{BB962C8B-B14F-4D97-AF65-F5344CB8AC3E}">
-        <p14:creationId xmlns:p14="http://schemas.microsoft.com/office/powerpoint/2010/main" val="710979260"/>
+        <p14:creationId xmlns:p14="http://schemas.microsoft.com/office/powerpoint/2010/main" val="1190518523"/>
       </p:ext>
     </p:extLst>
   </p:cSld>
@@ -6037,7 +6532,7 @@
           <p:cNvPr id="7" name="">
             <a:extLst xmlns:a="http://schemas.openxmlformats.org/drawingml/2006/main">
               <a:ext uri="{FF2B5EF4-FFF2-40B4-BE49-F238E27FC236}">
-                <a16:creationId xmlns:a16="http://schemas.microsoft.com/office/drawing/2014/main" id="{736E22CF-2EB5-447F-98A2-4536985678E7}"/>
+                <a16:creationId xmlns:a16="http://schemas.microsoft.com/office/drawing/2014/main" id="{FC881573-EAFD-41CC-AA46-826EBCA6CD7B}"/>
               </a:ext>
             </a:extLst>
           </p:cNvPr>
@@ -6084,7 +6579,7 @@
                 <a:ea typeface="Courier New"/>
                 <a:cs typeface="Courier New"/>
               </a:rPr>
-              <a:t>LECTURE 8 · C MEETS MEMORY</a:t>
+              <a:t>LECTURE 6–8 · ADDRESSES</a:t>
             </a:r>
           </a:p>
         </p:txBody>
@@ -6094,7 +6589,7 @@
           <p:cNvPr id="2" name="">
             <a:extLst xmlns:a="http://schemas.openxmlformats.org/drawingml/2006/main">
               <a:ext uri="{FF2B5EF4-FFF2-40B4-BE49-F238E27FC236}">
-                <a16:creationId xmlns:a16="http://schemas.microsoft.com/office/drawing/2014/main" id="{DDC1011D-9354-4BA3-8CC1-BF8F2F51BB79}"/>
+                <a16:creationId xmlns:a16="http://schemas.microsoft.com/office/drawing/2014/main" id="{691F0FD0-C4D6-4AA6-90FB-C4C253C17396}"/>
               </a:ext>
             </a:extLst>
           </p:cNvPr>
@@ -6141,7 +6636,7 @@
                 <a:ea typeface="Arial"/>
                 <a:cs typeface="Arial"/>
               </a:rPr>
-              <a:t>Arrays and sizeof</a:t>
+              <a:t>Array indexing is byte arithmetic</a:t>
             </a:r>
           </a:p>
         </p:txBody>
@@ -6151,7 +6646,7 @@
           <p:cNvPr id="3" name="">
             <a:extLst xmlns:a="http://schemas.openxmlformats.org/drawingml/2006/main">
               <a:ext uri="{FF2B5EF4-FFF2-40B4-BE49-F238E27FC236}">
-                <a16:creationId xmlns:a16="http://schemas.microsoft.com/office/drawing/2014/main" id="{07033280-0C8C-481A-A272-246A8B241A61}"/>
+                <a16:creationId xmlns:a16="http://schemas.microsoft.com/office/drawing/2014/main" id="{79140A4F-A2DF-4CF6-81F3-03B77410E8E9}"/>
               </a:ext>
             </a:extLst>
           </p:cNvPr>
@@ -6198,7 +6693,7 @@
                 <a:ea typeface="Arial"/>
                 <a:cs typeface="Arial"/>
               </a:rPr>
-              <a:t>An array stores elements in consecutive memory. In its own scope, sizeof array measures its total bytes.</a:t>
+              <a:t>Memory addresses count bytes. For an int array, element i begins 4i bytes after the start when int is 4 bytes.</a:t>
             </a:r>
           </a:p>
           <a:p xmlns:a="http://schemas.openxmlformats.org/drawingml/2006/main">
@@ -6226,7 +6721,7 @@
                 <a:ea typeface="Arial"/>
                 <a:cs typeface="Arial"/>
               </a:rPr>
-              <a:t>A function parameter written as int a[] is treated as a pointer, so sizeof a there measures the pointer.</a:t>
+              <a:t>The addressing form combines base + index × scale + displacement.</a:t>
             </a:r>
           </a:p>
         </p:txBody>
@@ -6236,7 +6731,7 @@
           <p:cNvPr id="4" name="">
             <a:extLst xmlns:a="http://schemas.openxmlformats.org/drawingml/2006/main">
               <a:ext uri="{FF2B5EF4-FFF2-40B4-BE49-F238E27FC236}">
-                <a16:creationId xmlns:a16="http://schemas.microsoft.com/office/drawing/2014/main" id="{2AE05FE1-9610-49AC-BAFE-6BA8D492B6B5}"/>
+                <a16:creationId xmlns:a16="http://schemas.microsoft.com/office/drawing/2014/main" id="{E91F495F-0EEE-402D-B6A7-EF6AA449C328}"/>
               </a:ext>
             </a:extLst>
           </p:cNvPr>
@@ -6283,7 +6778,12 @@
                 <a:ea typeface="Courier New"/>
                 <a:cs typeface="Courier New"/>
               </a:rPr>
-              <a:t>int a[5];</a:t>
+              <a:t>Assume %rax = &amp;a[0], %rcx = 3</a:t>
+            </a:r>
+          </a:p>
+          <a:p xmlns:a="http://schemas.openxmlformats.org/drawingml/2006/main">
+            <a:r>
+              <a:t/>
             </a:r>
           </a:p>
           <a:p xmlns:a="http://schemas.openxmlformats.org/drawingml/2006/main">
@@ -6306,7 +6806,53 @@
                 <a:ea typeface="Courier New"/>
                 <a:cs typeface="Courier New"/>
               </a:rPr>
-              <a:t>sizeof a / sizeof a[0]  → 5</a:t>
+              <a:t>(%rax,%rcx,4)</a:t>
+            </a:r>
+          </a:p>
+          <a:p xmlns:a="http://schemas.openxmlformats.org/drawingml/2006/main">
+            <a:pPr>
+              <a:defRPr sz="1650" b="0">
+                <a:solidFill>
+                  <a:srgbClr val="A7F3D0"/>
+                </a:solidFill>
+                <a:latin typeface="Courier New"/>
+                <a:ea typeface="Courier New"/>
+                <a:cs typeface="Courier New"/>
+              </a:defRPr>
+            </a:pPr>
+            <a:r>
+              <a:rPr sz="1650" b="0">
+                <a:solidFill>
+                  <a:srgbClr val="A7F3D0"/>
+                </a:solidFill>
+                <a:latin typeface="Courier New"/>
+                <a:ea typeface="Courier New"/>
+                <a:cs typeface="Courier New"/>
+              </a:rPr>
+              <a:t>= memory[rax + 3×4]</a:t>
+            </a:r>
+          </a:p>
+          <a:p xmlns:a="http://schemas.openxmlformats.org/drawingml/2006/main">
+            <a:pPr>
+              <a:defRPr sz="1650" b="0">
+                <a:solidFill>
+                  <a:srgbClr val="A7F3D0"/>
+                </a:solidFill>
+                <a:latin typeface="Courier New"/>
+                <a:ea typeface="Courier New"/>
+                <a:cs typeface="Courier New"/>
+              </a:defRPr>
+            </a:pPr>
+            <a:r>
+              <a:rPr sz="1650" b="0">
+                <a:solidFill>
+                  <a:srgbClr val="A7F3D0"/>
+                </a:solidFill>
+                <a:latin typeface="Courier New"/>
+                <a:ea typeface="Courier New"/>
+                <a:cs typeface="Courier New"/>
+              </a:rPr>
+              <a:t>= a[3]</a:t>
             </a:r>
           </a:p>
           <a:p xmlns:a="http://schemas.openxmlformats.org/drawingml/2006/main">
@@ -6334,53 +6880,7 @@
                 <a:ea typeface="Courier New"/>
                 <a:cs typeface="Courier New"/>
               </a:rPr>
-              <a:t>void f(int a[], int length) {</a:t>
-            </a:r>
-          </a:p>
-          <a:p xmlns:a="http://schemas.openxmlformats.org/drawingml/2006/main">
-            <a:pPr>
-              <a:defRPr sz="1650" b="0">
-                <a:solidFill>
-                  <a:srgbClr val="A7F3D0"/>
-                </a:solidFill>
-                <a:latin typeface="Courier New"/>
-                <a:ea typeface="Courier New"/>
-                <a:cs typeface="Courier New"/>
-              </a:defRPr>
-            </a:pPr>
-            <a:r>
-              <a:rPr sz="1650" b="0">
-                <a:solidFill>
-                  <a:srgbClr val="A7F3D0"/>
-                </a:solidFill>
-                <a:latin typeface="Courier New"/>
-                <a:ea typeface="Courier New"/>
-                <a:cs typeface="Courier New"/>
-              </a:rPr>
-              <a:t>    // use length for bounds</a:t>
-            </a:r>
-          </a:p>
-          <a:p xmlns:a="http://schemas.openxmlformats.org/drawingml/2006/main">
-            <a:pPr>
-              <a:defRPr sz="1650" b="0">
-                <a:solidFill>
-                  <a:srgbClr val="A7F3D0"/>
-                </a:solidFill>
-                <a:latin typeface="Courier New"/>
-                <a:ea typeface="Courier New"/>
-                <a:cs typeface="Courier New"/>
-              </a:defRPr>
-            </a:pPr>
-            <a:r>
-              <a:rPr sz="1650" b="0">
-                <a:solidFill>
-                  <a:srgbClr val="A7F3D0"/>
-                </a:solidFill>
-                <a:latin typeface="Courier New"/>
-                <a:ea typeface="Courier New"/>
-                <a:cs typeface="Courier New"/>
-              </a:rPr>
-              <a:t>}</a:t>
+              <a:t>8(%rax,%rcx,4) = a[5]</a:t>
             </a:r>
           </a:p>
         </p:txBody>
@@ -6390,7 +6890,7 @@
           <p:cNvPr id="5" name="">
             <a:extLst xmlns:a="http://schemas.openxmlformats.org/drawingml/2006/main">
               <a:ext uri="{FF2B5EF4-FFF2-40B4-BE49-F238E27FC236}">
-                <a16:creationId xmlns:a16="http://schemas.microsoft.com/office/drawing/2014/main" id="{0EA4A3FF-B340-40DC-99B7-418B3F44A289}"/>
+                <a16:creationId xmlns:a16="http://schemas.microsoft.com/office/drawing/2014/main" id="{D735B3E1-C03C-4722-BE5C-78B32A18354A}"/>
               </a:ext>
             </a:extLst>
           </p:cNvPr>
@@ -6437,7 +6937,7 @@
                 <a:ea typeface="Arial"/>
                 <a:cs typeface="Arial"/>
               </a:rPr>
-              <a:t>For a VLA, sizeof can be evaluated at run time. In a parameter, it still describes a pointer.</a:t>
+              <a:t>The scale is the size of an element in bytes; 8 adds two more int positions here.</a:t>
             </a:r>
           </a:p>
         </p:txBody>
@@ -6447,7 +6947,7 @@
           <p:cNvPr id="6" name="">
             <a:extLst xmlns:a="http://schemas.openxmlformats.org/drawingml/2006/main">
               <a:ext uri="{FF2B5EF4-FFF2-40B4-BE49-F238E27FC236}">
-                <a16:creationId xmlns:a16="http://schemas.microsoft.com/office/drawing/2014/main" id="{934A896D-C279-4E71-8D6A-927B4C146036}"/>
+                <a16:creationId xmlns:a16="http://schemas.microsoft.com/office/drawing/2014/main" id="{D3F8B9E2-D6F3-43AE-97F9-789B949E7489}"/>
               </a:ext>
             </a:extLst>
           </p:cNvPr>
@@ -6494,7 +6994,7 @@
                 <a:ea typeface="Courier New"/>
                 <a:cs typeface="Courier New"/>
               </a:rPr>
-              <a:t>16 / 19</a:t>
+              <a:t>16 / 26</a:t>
             </a:r>
           </a:p>
         </p:txBody>
@@ -6502,7 +7002,7 @@
     </p:spTree>
     <p:extLst>
       <p:ext uri="{BB962C8B-B14F-4D97-AF65-F5344CB8AC3E}">
-        <p14:creationId xmlns:p14="http://schemas.microsoft.com/office/powerpoint/2010/main" val="1279838385"/>
+        <p14:creationId xmlns:p14="http://schemas.microsoft.com/office/powerpoint/2010/main" val="1687346227"/>
       </p:ext>
     </p:extLst>
   </p:cSld>
@@ -6533,7 +7033,7 @@
           <p:cNvPr id="7" name="">
             <a:extLst xmlns:a="http://schemas.openxmlformats.org/drawingml/2006/main">
               <a:ext uri="{FF2B5EF4-FFF2-40B4-BE49-F238E27FC236}">
-                <a16:creationId xmlns:a16="http://schemas.microsoft.com/office/drawing/2014/main" id="{594F8E14-AFD4-478E-97B3-8BAD58B23B2C}"/>
+                <a16:creationId xmlns:a16="http://schemas.microsoft.com/office/drawing/2014/main" id="{8C6C726C-E47D-4CDD-8C6C-B6050C8B3E57}"/>
               </a:ext>
             </a:extLst>
           </p:cNvPr>
@@ -6580,7 +7080,7 @@
                 <a:ea typeface="Courier New"/>
                 <a:cs typeface="Courier New"/>
               </a:rPr>
-              <a:t>LECTURE 8 · MEMORY OWNERSHIP</a:t>
+              <a:t>COMMON ASSEMBLY CONFUSION</a:t>
             </a:r>
           </a:p>
         </p:txBody>
@@ -6590,7 +7090,7 @@
           <p:cNvPr id="2" name="">
             <a:extLst xmlns:a="http://schemas.openxmlformats.org/drawingml/2006/main">
               <a:ext uri="{FF2B5EF4-FFF2-40B4-BE49-F238E27FC236}">
-                <a16:creationId xmlns:a16="http://schemas.microsoft.com/office/drawing/2014/main" id="{854FE8C1-4BBB-4DDA-AB73-A57E8798CAC6}"/>
+                <a16:creationId xmlns:a16="http://schemas.microsoft.com/office/drawing/2014/main" id="{7325508F-4A33-4FD6-A626-F73AEB3CA455}"/>
               </a:ext>
             </a:extLst>
           </p:cNvPr>
@@ -6637,7 +7137,7 @@
                 <a:ea typeface="Arial"/>
                 <a:cs typeface="Arial"/>
               </a:rPr>
-              <a:t>Variable length arrays and lifetime</a:t>
+              <a:t>Address versus value</a:t>
             </a:r>
           </a:p>
         </p:txBody>
@@ -6647,7 +7147,7 @@
           <p:cNvPr id="3" name="">
             <a:extLst xmlns:a="http://schemas.openxmlformats.org/drawingml/2006/main">
               <a:ext uri="{FF2B5EF4-FFF2-40B4-BE49-F238E27FC236}">
-                <a16:creationId xmlns:a16="http://schemas.microsoft.com/office/drawing/2014/main" id="{215404FB-8337-4DC6-A8A6-1DCD994F1E70}"/>
+                <a16:creationId xmlns:a16="http://schemas.microsoft.com/office/drawing/2014/main" id="{392E3B5E-5FB7-410D-9596-3266A7676105}"/>
               </a:ext>
             </a:extLst>
           </p:cNvPr>
@@ -6694,7 +7194,7 @@
                 <a:ea typeface="Arial"/>
                 <a:cs typeface="Arial"/>
               </a:rPr>
-              <a:t>A VLA gets its length at run time. Its elements need explicit initialization.</a:t>
+              <a:t>leaq computes an address and puts it in a register.</a:t>
             </a:r>
           </a:p>
           <a:p xmlns:a="http://schemas.openxmlformats.org/drawingml/2006/main">
@@ -6722,7 +7222,7 @@
                 <a:ea typeface="Arial"/>
                 <a:cs typeface="Arial"/>
               </a:rPr>
-              <a:t>Local array storage ends when its scope ends, so returning a pointer to that array leaves a dangling pointer.</a:t>
+              <a:t>movq with a memory source reads the value at that address.</a:t>
             </a:r>
           </a:p>
         </p:txBody>
@@ -6732,7 +7232,7 @@
           <p:cNvPr id="4" name="">
             <a:extLst xmlns:a="http://schemas.openxmlformats.org/drawingml/2006/main">
               <a:ext uri="{FF2B5EF4-FFF2-40B4-BE49-F238E27FC236}">
-                <a16:creationId xmlns:a16="http://schemas.microsoft.com/office/drawing/2014/main" id="{7314FA59-2D59-440E-AF6A-FA4CC56D3A57}"/>
+                <a16:creationId xmlns:a16="http://schemas.microsoft.com/office/drawing/2014/main" id="{A5D52EB3-65F4-4BB3-B1B2-41D1A8B64AB1}"/>
               </a:ext>
             </a:extLst>
           </p:cNvPr>
@@ -6779,7 +7279,12 @@
                 <a:ea typeface="Courier New"/>
                 <a:cs typeface="Courier New"/>
               </a:rPr>
-              <a:t>int n = get_count();</a:t>
+              <a:t>Assume rax = 1000, memory[1008] = 42</a:t>
+            </a:r>
+          </a:p>
+          <a:p xmlns:a="http://schemas.openxmlformats.org/drawingml/2006/main">
+            <a:r>
+              <a:t/>
             </a:r>
           </a:p>
           <a:p xmlns:a="http://schemas.openxmlformats.org/drawingml/2006/main">
@@ -6802,7 +7307,7 @@
                 <a:ea typeface="Courier New"/>
                 <a:cs typeface="Courier New"/>
               </a:rPr>
-              <a:t>if (n &lt;= 0) return;</a:t>
+              <a:t>leaq 8(%rax), %rbx  → rbx = 1008</a:t>
             </a:r>
           </a:p>
           <a:p xmlns:a="http://schemas.openxmlformats.org/drawingml/2006/main">
@@ -6825,58 +7330,7 @@
                 <a:ea typeface="Courier New"/>
                 <a:cs typeface="Courier New"/>
               </a:rPr>
-              <a:t>int a[n];</a:t>
-            </a:r>
-          </a:p>
-          <a:p xmlns:a="http://schemas.openxmlformats.org/drawingml/2006/main">
-            <a:pPr>
-              <a:defRPr sz="1650" b="0">
-                <a:solidFill>
-                  <a:srgbClr val="A7F3D0"/>
-                </a:solidFill>
-                <a:latin typeface="Courier New"/>
-                <a:ea typeface="Courier New"/>
-                <a:cs typeface="Courier New"/>
-              </a:defRPr>
-            </a:pPr>
-            <a:r>
-              <a:rPr sz="1650" b="0">
-                <a:solidFill>
-                  <a:srgbClr val="A7F3D0"/>
-                </a:solidFill>
-                <a:latin typeface="Courier New"/>
-                <a:ea typeface="Courier New"/>
-                <a:cs typeface="Courier New"/>
-              </a:rPr>
-              <a:t>for (int i = 0; i &lt; n; ++i) a[i] = 0;</a:t>
-            </a:r>
-          </a:p>
-          <a:p xmlns:a="http://schemas.openxmlformats.org/drawingml/2006/main">
-            <a:r>
-              <a:t/>
-            </a:r>
-          </a:p>
-          <a:p xmlns:a="http://schemas.openxmlformats.org/drawingml/2006/main">
-            <a:pPr>
-              <a:defRPr sz="1650" b="0">
-                <a:solidFill>
-                  <a:srgbClr val="A7F3D0"/>
-                </a:solidFill>
-                <a:latin typeface="Courier New"/>
-                <a:ea typeface="Courier New"/>
-                <a:cs typeface="Courier New"/>
-              </a:defRPr>
-            </a:pPr>
-            <a:r>
-              <a:rPr sz="1650" b="0">
-                <a:solidFill>
-                  <a:srgbClr val="A7F3D0"/>
-                </a:solidFill>
-                <a:latin typeface="Courier New"/>
-                <a:ea typeface="Courier New"/>
-                <a:cs typeface="Courier New"/>
-              </a:rPr>
-              <a:t>// a is valid only in this scope</a:t>
+              <a:t>movq 8(%rax), %rcx  → rcx = 42</a:t>
             </a:r>
           </a:p>
         </p:txBody>
@@ -6886,7 +7340,7 @@
           <p:cNvPr id="5" name="">
             <a:extLst xmlns:a="http://schemas.openxmlformats.org/drawingml/2006/main">
               <a:ext uri="{FF2B5EF4-FFF2-40B4-BE49-F238E27FC236}">
-                <a16:creationId xmlns:a16="http://schemas.microsoft.com/office/drawing/2014/main" id="{0EF64C51-654B-485F-BD4B-7E9D64DE9CA6}"/>
+                <a16:creationId xmlns:a16="http://schemas.microsoft.com/office/drawing/2014/main" id="{0BCC5F4E-BC78-47E2-9993-97E0F974DB82}"/>
               </a:ext>
             </a:extLst>
           </p:cNvPr>
@@ -6933,7 +7387,7 @@
                 <a:ea typeface="Arial"/>
                 <a:cs typeface="Arial"/>
               </a:rPr>
-              <a:t>For data that must survive a function return, use an appropriate allocation and ownership plan.</a:t>
+              <a:t>lea does not dereference memory, even though its source looks like a memory operand.</a:t>
             </a:r>
           </a:p>
         </p:txBody>
@@ -6943,7 +7397,7 @@
           <p:cNvPr id="6" name="">
             <a:extLst xmlns:a="http://schemas.openxmlformats.org/drawingml/2006/main">
               <a:ext uri="{FF2B5EF4-FFF2-40B4-BE49-F238E27FC236}">
-                <a16:creationId xmlns:a16="http://schemas.microsoft.com/office/drawing/2014/main" id="{696AE578-F060-4529-96D0-4836FA49460F}"/>
+                <a16:creationId xmlns:a16="http://schemas.microsoft.com/office/drawing/2014/main" id="{C92F1DD5-7CB9-4E53-AC06-0D6115400B20}"/>
               </a:ext>
             </a:extLst>
           </p:cNvPr>
@@ -6990,7 +7444,7 @@
                 <a:ea typeface="Courier New"/>
                 <a:cs typeface="Courier New"/>
               </a:rPr>
-              <a:t>17 / 19</a:t>
+              <a:t>17 / 26</a:t>
             </a:r>
           </a:p>
         </p:txBody>
@@ -6998,7 +7452,7 @@
     </p:spTree>
     <p:extLst>
       <p:ext uri="{BB962C8B-B14F-4D97-AF65-F5344CB8AC3E}">
-        <p14:creationId xmlns:p14="http://schemas.microsoft.com/office/powerpoint/2010/main" val="2109848732"/>
+        <p14:creationId xmlns:p14="http://schemas.microsoft.com/office/powerpoint/2010/main" val="772612768"/>
       </p:ext>
     </p:extLst>
   </p:cSld>
@@ -7029,7 +7483,7 @@
           <p:cNvPr id="7" name="">
             <a:extLst xmlns:a="http://schemas.openxmlformats.org/drawingml/2006/main">
               <a:ext uri="{FF2B5EF4-FFF2-40B4-BE49-F238E27FC236}">
-                <a16:creationId xmlns:a16="http://schemas.microsoft.com/office/drawing/2014/main" id="{7BF8D382-8294-4DEF-998D-68AAB7B3199C}"/>
+                <a16:creationId xmlns:a16="http://schemas.microsoft.com/office/drawing/2014/main" id="{1BDAF34F-2B2B-4364-913A-8CED7C950385}"/>
               </a:ext>
             </a:extLst>
           </p:cNvPr>
@@ -7076,7 +7530,7 @@
                 <a:ea typeface="Courier New"/>
                 <a:cs typeface="Courier New"/>
               </a:rPr>
-              <a:t>BOARD PRACTICE · 3 MINUTES</a:t>
+              <a:t>LECTURE 7 · CONTROL FLOW</a:t>
             </a:r>
           </a:p>
         </p:txBody>
@@ -7086,7 +7540,7 @@
           <p:cNvPr id="2" name="">
             <a:extLst xmlns:a="http://schemas.openxmlformats.org/drawingml/2006/main">
               <a:ext uri="{FF2B5EF4-FFF2-40B4-BE49-F238E27FC236}">
-                <a16:creationId xmlns:a16="http://schemas.microsoft.com/office/drawing/2014/main" id="{F3E9DAEB-821C-4F01-A675-0E7F23EC647E}"/>
+                <a16:creationId xmlns:a16="http://schemas.microsoft.com/office/drawing/2014/main" id="{D2225FE4-69AB-43E2-B364-E8CAD17174C1}"/>
               </a:ext>
             </a:extLst>
           </p:cNvPr>
@@ -7133,7 +7587,7 @@
                 <a:ea typeface="Arial"/>
                 <a:cs typeface="Arial"/>
               </a:rPr>
-              <a:t>One final trace</a:t>
+              <a:t>A branch is an if statement</a:t>
             </a:r>
           </a:p>
         </p:txBody>
@@ -7143,7 +7597,7 @@
           <p:cNvPr id="3" name="">
             <a:extLst xmlns:a="http://schemas.openxmlformats.org/drawingml/2006/main">
               <a:ext uri="{FF2B5EF4-FFF2-40B4-BE49-F238E27FC236}">
-                <a16:creationId xmlns:a16="http://schemas.microsoft.com/office/drawing/2014/main" id="{E07249AD-D2B3-442A-B698-CC600D798DB6}"/>
+                <a16:creationId xmlns:a16="http://schemas.microsoft.com/office/drawing/2014/main" id="{98706C0F-596E-47AB-87AE-5802A87910A6}"/>
               </a:ext>
             </a:extLst>
           </p:cNvPr>
@@ -7190,7 +7644,7 @@
                 <a:ea typeface="Arial"/>
                 <a:cs typeface="Arial"/>
               </a:rPr>
-              <a:t>Assume int is 4 bytes, %rax holds &amp;a[0], and %rcx = 2.</a:t>
+              <a:t>cmpq compares two operands and sets condition flags. A conditional jump reads those flags.</a:t>
             </a:r>
           </a:p>
           <a:p xmlns:a="http://schemas.openxmlformats.org/drawingml/2006/main">
@@ -7218,7 +7672,7 @@
                 <a:ea typeface="Arial"/>
                 <a:cs typeface="Arial"/>
               </a:rPr>
-              <a:t>What address does leaq compute? What value does movl read?</a:t>
+              <a:t>ja means unsigned “jump if above.” The target is a label elsewhere in the code.</a:t>
             </a:r>
           </a:p>
         </p:txBody>
@@ -7228,7 +7682,7 @@
           <p:cNvPr id="4" name="">
             <a:extLst xmlns:a="http://schemas.openxmlformats.org/drawingml/2006/main">
               <a:ext uri="{FF2B5EF4-FFF2-40B4-BE49-F238E27FC236}">
-                <a16:creationId xmlns:a16="http://schemas.microsoft.com/office/drawing/2014/main" id="{F6C5B83A-CD97-44F6-A54B-23E177F9AB77}"/>
+                <a16:creationId xmlns:a16="http://schemas.microsoft.com/office/drawing/2014/main" id="{2759E58A-3342-4254-8F59-55AF706ABE76}"/>
               </a:ext>
             </a:extLst>
           </p:cNvPr>
@@ -7275,7 +7729,12 @@
                 <a:ea typeface="Courier New"/>
                 <a:cs typeface="Courier New"/>
               </a:rPr>
-              <a:t>a = {10, 20, 30, 40}</a:t>
+              <a:t>C: if (n &gt; 1) return n;</a:t>
+            </a:r>
+          </a:p>
+          <a:p xmlns:a="http://schemas.openxmlformats.org/drawingml/2006/main">
+            <a:r>
+              <a:t/>
             </a:r>
           </a:p>
           <a:p xmlns:a="http://schemas.openxmlformats.org/drawingml/2006/main">
@@ -7298,12 +7757,7 @@
                 <a:ea typeface="Courier New"/>
                 <a:cs typeface="Courier New"/>
               </a:rPr>
-              <a:t>%rax = 0x2000</a:t>
-            </a:r>
-          </a:p>
-          <a:p xmlns:a="http://schemas.openxmlformats.org/drawingml/2006/main">
-            <a:r>
-              <a:t/>
+              <a:t>cmpq $1, %rdi</a:t>
             </a:r>
           </a:p>
           <a:p xmlns:a="http://schemas.openxmlformats.org/drawingml/2006/main">
@@ -7326,7 +7780,7 @@
                 <a:ea typeface="Courier New"/>
                 <a:cs typeface="Courier New"/>
               </a:rPr>
-              <a:t>leaq (%rax,%rcx,4), %rdx</a:t>
+              <a:t>ja   .Lbig</a:t>
             </a:r>
           </a:p>
           <a:p xmlns:a="http://schemas.openxmlformats.org/drawingml/2006/main">
@@ -7349,12 +7803,7 @@
                 <a:ea typeface="Courier New"/>
                 <a:cs typeface="Courier New"/>
               </a:rPr>
-              <a:t>movl (%rdx), %eax</a:t>
-            </a:r>
-          </a:p>
-          <a:p xmlns:a="http://schemas.openxmlformats.org/drawingml/2006/main">
-            <a:r>
-              <a:t/>
+              <a:t>movl $1, %eax</a:t>
             </a:r>
           </a:p>
           <a:p xmlns:a="http://schemas.openxmlformats.org/drawingml/2006/main">
@@ -7377,7 +7826,7 @@
                 <a:ea typeface="Courier New"/>
                 <a:cs typeface="Courier New"/>
               </a:rPr>
-              <a:t>%rdx = ?</a:t>
+              <a:t>ret</a:t>
             </a:r>
           </a:p>
           <a:p xmlns:a="http://schemas.openxmlformats.org/drawingml/2006/main">
@@ -7400,7 +7849,53 @@
                 <a:ea typeface="Courier New"/>
                 <a:cs typeface="Courier New"/>
               </a:rPr>
-              <a:t>%eax = ?</a:t>
+              <a:t>.Lbig:</a:t>
+            </a:r>
+          </a:p>
+          <a:p xmlns:a="http://schemas.openxmlformats.org/drawingml/2006/main">
+            <a:pPr>
+              <a:defRPr sz="1650" b="0">
+                <a:solidFill>
+                  <a:srgbClr val="A7F3D0"/>
+                </a:solidFill>
+                <a:latin typeface="Courier New"/>
+                <a:ea typeface="Courier New"/>
+                <a:cs typeface="Courier New"/>
+              </a:defRPr>
+            </a:pPr>
+            <a:r>
+              <a:rPr sz="1650" b="0">
+                <a:solidFill>
+                  <a:srgbClr val="A7F3D0"/>
+                </a:solidFill>
+                <a:latin typeface="Courier New"/>
+                <a:ea typeface="Courier New"/>
+                <a:cs typeface="Courier New"/>
+              </a:rPr>
+              <a:t>movq %rdi, %rax</a:t>
+            </a:r>
+          </a:p>
+          <a:p xmlns:a="http://schemas.openxmlformats.org/drawingml/2006/main">
+            <a:pPr>
+              <a:defRPr sz="1650" b="0">
+                <a:solidFill>
+                  <a:srgbClr val="A7F3D0"/>
+                </a:solidFill>
+                <a:latin typeface="Courier New"/>
+                <a:ea typeface="Courier New"/>
+                <a:cs typeface="Courier New"/>
+              </a:defRPr>
+            </a:pPr>
+            <a:r>
+              <a:rPr sz="1650" b="0">
+                <a:solidFill>
+                  <a:srgbClr val="A7F3D0"/>
+                </a:solidFill>
+                <a:latin typeface="Courier New"/>
+                <a:ea typeface="Courier New"/>
+                <a:cs typeface="Courier New"/>
+              </a:rPr>
+              <a:t>ret</a:t>
             </a:r>
           </a:p>
         </p:txBody>
@@ -7410,7 +7905,7 @@
           <p:cNvPr id="5" name="">
             <a:extLst xmlns:a="http://schemas.openxmlformats.org/drawingml/2006/main">
               <a:ext uri="{FF2B5EF4-FFF2-40B4-BE49-F238E27FC236}">
-                <a16:creationId xmlns:a16="http://schemas.microsoft.com/office/drawing/2014/main" id="{C2F33EB1-5576-4097-80DE-D90813602B9E}"/>
+                <a16:creationId xmlns:a16="http://schemas.microsoft.com/office/drawing/2014/main" id="{3CE2A77C-5861-49F1-A87B-678DEDB9C3E6}"/>
               </a:ext>
             </a:extLst>
           </p:cNvPr>
@@ -7457,7 +7952,7 @@
                 <a:ea typeface="Arial"/>
                 <a:cs typeface="Arial"/>
               </a:rPr>
-              <a:t>Sketch four boxes, each four bytes wide, before calculating.</a:t>
+              <a:t>Here %rdi is an unsigned 64-bit n; %rax carries the return value.</a:t>
             </a:r>
           </a:p>
         </p:txBody>
@@ -7467,7 +7962,7 @@
           <p:cNvPr id="6" name="">
             <a:extLst xmlns:a="http://schemas.openxmlformats.org/drawingml/2006/main">
               <a:ext uri="{FF2B5EF4-FFF2-40B4-BE49-F238E27FC236}">
-                <a16:creationId xmlns:a16="http://schemas.microsoft.com/office/drawing/2014/main" id="{8D39F4A2-27B5-47AF-AD7E-FB89A7CFF3DE}"/>
+                <a16:creationId xmlns:a16="http://schemas.microsoft.com/office/drawing/2014/main" id="{D2F172BA-C05B-4403-9C57-E56F9AB4D1BF}"/>
               </a:ext>
             </a:extLst>
           </p:cNvPr>
@@ -7514,7 +8009,7 @@
                 <a:ea typeface="Courier New"/>
                 <a:cs typeface="Courier New"/>
               </a:rPr>
-              <a:t>18 / 19</a:t>
+              <a:t>18 / 26</a:t>
             </a:r>
           </a:p>
         </p:txBody>
@@ -7522,7 +8017,7 @@
     </p:spTree>
     <p:extLst>
       <p:ext uri="{BB962C8B-B14F-4D97-AF65-F5344CB8AC3E}">
-        <p14:creationId xmlns:p14="http://schemas.microsoft.com/office/powerpoint/2010/main" val="671007532"/>
+        <p14:creationId xmlns:p14="http://schemas.microsoft.com/office/powerpoint/2010/main" val="1200762649"/>
       </p:ext>
     </p:extLst>
   </p:cSld>
@@ -7553,7 +8048,7 @@
           <p:cNvPr id="7" name="">
             <a:extLst xmlns:a="http://schemas.openxmlformats.org/drawingml/2006/main">
               <a:ext uri="{FF2B5EF4-FFF2-40B4-BE49-F238E27FC236}">
-                <a16:creationId xmlns:a16="http://schemas.microsoft.com/office/drawing/2014/main" id="{B784071B-3FE2-4035-84E2-79DC355D35EC}"/>
+                <a16:creationId xmlns:a16="http://schemas.microsoft.com/office/drawing/2014/main" id="{919B757C-BCC3-4598-AC6C-CE8A997A49FC}"/>
               </a:ext>
             </a:extLst>
           </p:cNvPr>
@@ -7600,7 +8095,7 @@
                 <a:ea typeface="Courier New"/>
                 <a:cs typeface="Courier New"/>
               </a:rPr>
-              <a:t>WRAP-UP</a:t>
+              <a:t>TRY IT · 2 MINUTES</a:t>
             </a:r>
           </a:p>
         </p:txBody>
@@ -7610,7 +8105,7 @@
           <p:cNvPr id="2" name="">
             <a:extLst xmlns:a="http://schemas.openxmlformats.org/drawingml/2006/main">
               <a:ext uri="{FF2B5EF4-FFF2-40B4-BE49-F238E27FC236}">
-                <a16:creationId xmlns:a16="http://schemas.microsoft.com/office/drawing/2014/main" id="{7EA5C113-1700-4EC3-B000-8AFC7F9D932A}"/>
+                <a16:creationId xmlns:a16="http://schemas.microsoft.com/office/drawing/2014/main" id="{D0CF9A24-D113-4CF5-ABAD-70F23BFD2C64}"/>
               </a:ext>
             </a:extLst>
           </p:cNvPr>
@@ -7657,7 +8152,7 @@
                 <a:ea typeface="Arial"/>
                 <a:cs typeface="Arial"/>
               </a:rPr>
-              <a:t>Trace answer and checklist</a:t>
+              <a:t>Trace the branch</a:t>
             </a:r>
           </a:p>
         </p:txBody>
@@ -7667,7 +8162,7 @@
           <p:cNvPr id="3" name="">
             <a:extLst xmlns:a="http://schemas.openxmlformats.org/drawingml/2006/main">
               <a:ext uri="{FF2B5EF4-FFF2-40B4-BE49-F238E27FC236}">
-                <a16:creationId xmlns:a16="http://schemas.microsoft.com/office/drawing/2014/main" id="{C73F9950-49C0-4063-BE73-62F30D235C53}"/>
+                <a16:creationId xmlns:a16="http://schemas.microsoft.com/office/drawing/2014/main" id="{544DDE5D-FF1C-4A36-AC95-312655830A6D}"/>
               </a:ext>
             </a:extLst>
           </p:cNvPr>
@@ -7714,7 +8209,7 @@
                 <a:ea typeface="Arial"/>
                 <a:cs typeface="Arial"/>
               </a:rPr>
-              <a:t>leaq computes 0x2000 + 2×4 = 0x2008. movl reads the 4-byte int at that address: 30.</a:t>
+              <a:t>Use the previous snippet. Predict the return value for n = 0, 1, and 4.</a:t>
             </a:r>
           </a:p>
           <a:p xmlns:a="http://schemas.openxmlformats.org/drawingml/2006/main">
@@ -7742,7 +8237,7 @@
                 <a:ea typeface="Arial"/>
                 <a:cs typeface="Arial"/>
               </a:rPr>
-              <a:t>When assembly feels dense, mark the operand type, track the changed register, then follow the next instruction.</a:t>
+              <a:t>For each input, decide whether ja jumps before following any other line.</a:t>
             </a:r>
           </a:p>
         </p:txBody>
@@ -7752,7 +8247,7 @@
           <p:cNvPr id="4" name="">
             <a:extLst xmlns:a="http://schemas.openxmlformats.org/drawingml/2006/main">
               <a:ext uri="{FF2B5EF4-FFF2-40B4-BE49-F238E27FC236}">
-                <a16:creationId xmlns:a16="http://schemas.microsoft.com/office/drawing/2014/main" id="{E9AA3BD9-9A8C-4BEB-9D3F-055A77D850EE}"/>
+                <a16:creationId xmlns:a16="http://schemas.microsoft.com/office/drawing/2014/main" id="{C318D6CE-3357-4CD1-8C54-5276AA111965}"/>
               </a:ext>
             </a:extLst>
           </p:cNvPr>
@@ -7799,7 +8294,7 @@
                 <a:ea typeface="Courier New"/>
                 <a:cs typeface="Courier New"/>
               </a:rPr>
-              <a:t>%rdx = 0x2008   address of a[2]</a:t>
+              <a:t>n = 0  → ja? ___  return ___</a:t>
             </a:r>
           </a:p>
           <a:p xmlns:a="http://schemas.openxmlformats.org/drawingml/2006/main">
@@ -7822,7 +8317,30 @@
                 <a:ea typeface="Courier New"/>
                 <a:cs typeface="Courier New"/>
               </a:rPr>
-              <a:t>%eax = 30       value of a[2]</a:t>
+              <a:t>n = 1  → ja? ___  return ___</a:t>
+            </a:r>
+          </a:p>
+          <a:p xmlns:a="http://schemas.openxmlformats.org/drawingml/2006/main">
+            <a:pPr>
+              <a:defRPr sz="1650" b="0">
+                <a:solidFill>
+                  <a:srgbClr val="A7F3D0"/>
+                </a:solidFill>
+                <a:latin typeface="Courier New"/>
+                <a:ea typeface="Courier New"/>
+                <a:cs typeface="Courier New"/>
+              </a:defRPr>
+            </a:pPr>
+            <a:r>
+              <a:rPr sz="1650" b="0">
+                <a:solidFill>
+                  <a:srgbClr val="A7F3D0"/>
+                </a:solidFill>
+                <a:latin typeface="Courier New"/>
+                <a:ea typeface="Courier New"/>
+                <a:cs typeface="Courier New"/>
+              </a:rPr>
+              <a:t>n = 4  → ja? ___  return ___</a:t>
             </a:r>
           </a:p>
           <a:p xmlns:a="http://schemas.openxmlformats.org/drawingml/2006/main">
@@ -7850,76 +8368,7 @@
                 <a:ea typeface="Courier New"/>
                 <a:cs typeface="Courier New"/>
               </a:rPr>
-              <a:t>$        literal</a:t>
-            </a:r>
-          </a:p>
-          <a:p xmlns:a="http://schemas.openxmlformats.org/drawingml/2006/main">
-            <a:pPr>
-              <a:defRPr sz="1650" b="0">
-                <a:solidFill>
-                  <a:srgbClr val="A7F3D0"/>
-                </a:solidFill>
-                <a:latin typeface="Courier New"/>
-                <a:ea typeface="Courier New"/>
-                <a:cs typeface="Courier New"/>
-              </a:defRPr>
-            </a:pPr>
-            <a:r>
-              <a:rPr sz="1650" b="0">
-                <a:solidFill>
-                  <a:srgbClr val="A7F3D0"/>
-                </a:solidFill>
-                <a:latin typeface="Courier New"/>
-                <a:ea typeface="Courier New"/>
-                <a:cs typeface="Courier New"/>
-              </a:rPr>
-              <a:t>%        register</a:t>
-            </a:r>
-          </a:p>
-          <a:p xmlns:a="http://schemas.openxmlformats.org/drawingml/2006/main">
-            <a:pPr>
-              <a:defRPr sz="1650" b="0">
-                <a:solidFill>
-                  <a:srgbClr val="A7F3D0"/>
-                </a:solidFill>
-                <a:latin typeface="Courier New"/>
-                <a:ea typeface="Courier New"/>
-                <a:cs typeface="Courier New"/>
-              </a:defRPr>
-            </a:pPr>
-            <a:r>
-              <a:rPr sz="1650" b="0">
-                <a:solidFill>
-                  <a:srgbClr val="A7F3D0"/>
-                </a:solidFill>
-                <a:latin typeface="Courier New"/>
-                <a:ea typeface="Courier New"/>
-                <a:cs typeface="Courier New"/>
-              </a:rPr>
-              <a:t>(...)    memory</a:t>
-            </a:r>
-          </a:p>
-          <a:p xmlns:a="http://schemas.openxmlformats.org/drawingml/2006/main">
-            <a:pPr>
-              <a:defRPr sz="1650" b="0">
-                <a:solidFill>
-                  <a:srgbClr val="A7F3D0"/>
-                </a:solidFill>
-                <a:latin typeface="Courier New"/>
-                <a:ea typeface="Courier New"/>
-                <a:cs typeface="Courier New"/>
-              </a:defRPr>
-            </a:pPr>
-            <a:r>
-              <a:rPr sz="1650" b="0">
-                <a:solidFill>
-                  <a:srgbClr val="A7F3D0"/>
-                </a:solidFill>
-                <a:latin typeface="Courier New"/>
-                <a:ea typeface="Courier New"/>
-                <a:cs typeface="Courier New"/>
-              </a:rPr>
-              <a:t>q/l      8/4 bytes</a:t>
+              <a:t>Hint: “above 1” is strict, not ≥ 1.</a:t>
             </a:r>
           </a:p>
         </p:txBody>
@@ -7929,7 +8378,7 @@
           <p:cNvPr id="5" name="">
             <a:extLst xmlns:a="http://schemas.openxmlformats.org/drawingml/2006/main">
               <a:ext uri="{FF2B5EF4-FFF2-40B4-BE49-F238E27FC236}">
-                <a16:creationId xmlns:a16="http://schemas.microsoft.com/office/drawing/2014/main" id="{B6E0DABB-390B-4F1B-8F5A-FA9ABE851711}"/>
+                <a16:creationId xmlns:a16="http://schemas.microsoft.com/office/drawing/2014/main" id="{0603EAE2-BF14-4089-A8D2-E9210F3092ED}"/>
               </a:ext>
             </a:extLst>
           </p:cNvPr>
@@ -7976,7 +8425,7 @@
                 <a:ea typeface="Arial"/>
                 <a:cs typeface="Arial"/>
               </a:rPr>
-              <a:t>Read the relevant C beside the assembly, then verify one step at a time.</a:t>
+              <a:t>Check your answer by following only the instructions on the chosen path.</a:t>
             </a:r>
           </a:p>
         </p:txBody>
@@ -7986,7 +8435,7 @@
           <p:cNvPr id="6" name="">
             <a:extLst xmlns:a="http://schemas.openxmlformats.org/drawingml/2006/main">
               <a:ext uri="{FF2B5EF4-FFF2-40B4-BE49-F238E27FC236}">
-                <a16:creationId xmlns:a16="http://schemas.microsoft.com/office/drawing/2014/main" id="{36CDBF3C-3A45-4A85-B8ED-949FA3CB0F04}"/>
+                <a16:creationId xmlns:a16="http://schemas.microsoft.com/office/drawing/2014/main" id="{30255386-80A6-4C69-86A0-86FC511C8C9F}"/>
               </a:ext>
             </a:extLst>
           </p:cNvPr>
@@ -8033,7 +8482,7 @@
                 <a:ea typeface="Courier New"/>
                 <a:cs typeface="Courier New"/>
               </a:rPr>
-              <a:t>19 / 19</a:t>
+              <a:t>19 / 26</a:t>
             </a:r>
           </a:p>
         </p:txBody>
@@ -8041,7 +8490,7 @@
     </p:spTree>
     <p:extLst>
       <p:ext uri="{BB962C8B-B14F-4D97-AF65-F5344CB8AC3E}">
-        <p14:creationId xmlns:p14="http://schemas.microsoft.com/office/powerpoint/2010/main" val="565307126"/>
+        <p14:creationId xmlns:p14="http://schemas.microsoft.com/office/powerpoint/2010/main" val="466769636"/>
       </p:ext>
     </p:extLst>
   </p:cSld>
@@ -8072,7 +8521,7 @@
           <p:cNvPr id="7" name="">
             <a:extLst xmlns:a="http://schemas.openxmlformats.org/drawingml/2006/main">
               <a:ext uri="{FF2B5EF4-FFF2-40B4-BE49-F238E27FC236}">
-                <a16:creationId xmlns:a16="http://schemas.microsoft.com/office/drawing/2014/main" id="{0A75E4FF-8C23-4A5E-9A4C-714C57EF8A1F}"/>
+                <a16:creationId xmlns:a16="http://schemas.microsoft.com/office/drawing/2014/main" id="{8D851566-04AF-43AB-8237-EB8BEC673AA8}"/>
               </a:ext>
             </a:extLst>
           </p:cNvPr>
@@ -8119,7 +8568,7 @@
                 <a:ea typeface="Courier New"/>
                 <a:cs typeface="Courier New"/>
               </a:rPr>
-              <a:t>LECTURE 6 · QUICK REVIEW</a:t>
+              <a:t>FLOATING POINT · FORMAT</a:t>
             </a:r>
           </a:p>
         </p:txBody>
@@ -8129,7 +8578,7 @@
           <p:cNvPr id="2" name="">
             <a:extLst xmlns:a="http://schemas.openxmlformats.org/drawingml/2006/main">
               <a:ext uri="{FF2B5EF4-FFF2-40B4-BE49-F238E27FC236}">
-                <a16:creationId xmlns:a16="http://schemas.microsoft.com/office/drawing/2014/main" id="{556D74C7-C1EE-40A0-B155-567E42818D0E}"/>
+                <a16:creationId xmlns:a16="http://schemas.microsoft.com/office/drawing/2014/main" id="{EAFF5C18-EE4C-449F-9564-C13B2A194CBB}"/>
               </a:ext>
             </a:extLst>
           </p:cNvPr>
@@ -8176,7 +8625,7 @@
                 <a:ea typeface="Arial"/>
                 <a:cs typeface="Arial"/>
               </a:rPr>
-              <a:t>Floating point is approximate</a:t>
+              <a:t>A float has three fields</a:t>
             </a:r>
           </a:p>
         </p:txBody>
@@ -8186,7 +8635,7 @@
           <p:cNvPr id="3" name="">
             <a:extLst xmlns:a="http://schemas.openxmlformats.org/drawingml/2006/main">
               <a:ext uri="{FF2B5EF4-FFF2-40B4-BE49-F238E27FC236}">
-                <a16:creationId xmlns:a16="http://schemas.microsoft.com/office/drawing/2014/main" id="{F3A31579-C626-42EB-98F2-E746464E8637}"/>
+                <a16:creationId xmlns:a16="http://schemas.microsoft.com/office/drawing/2014/main" id="{B2335538-8F23-4797-A232-AC43B2F24175}"/>
               </a:ext>
             </a:extLst>
           </p:cNvPr>
@@ -8233,7 +8682,7 @@
                 <a:ea typeface="Arial"/>
                 <a:cs typeface="Arial"/>
               </a:rPr>
-              <a:t>A float stores a finite set of values. The gaps grow as the magnitude grows.</a:t>
+              <a:t>The sign says positive or negative. The exponent sets the scale. The significand carries the detail.</a:t>
             </a:r>
           </a:p>
           <a:p xmlns:a="http://schemas.openxmlformats.org/drawingml/2006/main">
@@ -8261,7 +8710,7 @@
                 <a:ea typeface="Arial"/>
                 <a:cs typeface="Arial"/>
               </a:rPr>
-              <a:t>An intermediate result can round before the next operation, so rearranging arithmetic may change the answer.</a:t>
+              <a:t>For our nonnegative examples, the sign bit is always 0.</a:t>
             </a:r>
           </a:p>
         </p:txBody>
@@ -8271,7 +8720,7 @@
           <p:cNvPr id="4" name="">
             <a:extLst xmlns:a="http://schemas.openxmlformats.org/drawingml/2006/main">
               <a:ext uri="{FF2B5EF4-FFF2-40B4-BE49-F238E27FC236}">
-                <a16:creationId xmlns:a16="http://schemas.microsoft.com/office/drawing/2014/main" id="{8CD9F476-50A6-45F9-AF39-7CDEBF4A3F54}"/>
+                <a16:creationId xmlns:a16="http://schemas.microsoft.com/office/drawing/2014/main" id="{2BB046C1-725F-49E1-A4C3-B64E4F9D0A00}"/>
               </a:ext>
             </a:extLst>
           </p:cNvPr>
@@ -8318,7 +8767,7 @@
                 <a:ea typeface="Courier New"/>
                 <a:cs typeface="Courier New"/>
               </a:rPr>
-              <a:t>With finite precision:</a:t>
+              <a:t>Practice format</a:t>
             </a:r>
           </a:p>
           <a:p xmlns:a="http://schemas.openxmlformats.org/drawingml/2006/main">
@@ -8346,7 +8795,7 @@
                 <a:ea typeface="Courier New"/>
                 <a:cs typeface="Courier New"/>
               </a:rPr>
-              <a:t>(a + b) + c  may differ from</a:t>
+              <a:t> S  |  EEE  |  FFF</a:t>
             </a:r>
           </a:p>
           <a:p xmlns:a="http://schemas.openxmlformats.org/drawingml/2006/main">
@@ -8369,7 +8818,7 @@
                 <a:ea typeface="Courier New"/>
                 <a:cs typeface="Courier New"/>
               </a:rPr>
-              <a:t>a + (b + c)</a:t>
+              <a:t> 0  |  011  |  010</a:t>
             </a:r>
           </a:p>
           <a:p xmlns:a="http://schemas.openxmlformats.org/drawingml/2006/main">
@@ -8397,12 +8846,7 @@
                 <a:ea typeface="Courier New"/>
                 <a:cs typeface="Courier New"/>
               </a:rPr>
-              <a:t>Try: a = 3.14, b = 1e10, c = -1e10</a:t>
-            </a:r>
-          </a:p>
-          <a:p xmlns:a="http://schemas.openxmlformats.org/drawingml/2006/main">
-            <a:r>
-              <a:t/>
+              <a:t>1 sign bit, 3 exponent bits,</a:t>
             </a:r>
           </a:p>
           <a:p xmlns:a="http://schemas.openxmlformats.org/drawingml/2006/main">
@@ -8425,7 +8869,7 @@
                 <a:ea typeface="Courier New"/>
                 <a:cs typeface="Courier New"/>
               </a:rPr>
-              <a:t>The large addition can lose 3.14.</a:t>
+              <a:t>3 stored fraction bits</a:t>
             </a:r>
           </a:p>
         </p:txBody>
@@ -8435,7 +8879,7 @@
           <p:cNvPr id="5" name="">
             <a:extLst xmlns:a="http://schemas.openxmlformats.org/drawingml/2006/main">
               <a:ext uri="{FF2B5EF4-FFF2-40B4-BE49-F238E27FC236}">
-                <a16:creationId xmlns:a16="http://schemas.microsoft.com/office/drawing/2014/main" id="{CD8A5185-6640-45C0-BCAA-4607D66A937D}"/>
+                <a16:creationId xmlns:a16="http://schemas.microsoft.com/office/drawing/2014/main" id="{4956C47C-1D75-40F4-9C65-E008B359FA8E}"/>
               </a:ext>
             </a:extLst>
           </p:cNvPr>
@@ -8482,7 +8926,7 @@
                 <a:ea typeface="Arial"/>
                 <a:cs typeface="Arial"/>
               </a:rPr>
-              <a:t>Do not use algebraic rearrangement as a guaranteed floating point equivalence.</a:t>
+              <a:t>Normal values also have a leading 1 that is implied rather than stored.</a:t>
             </a:r>
           </a:p>
         </p:txBody>
@@ -8492,7 +8936,7 @@
           <p:cNvPr id="6" name="">
             <a:extLst xmlns:a="http://schemas.openxmlformats.org/drawingml/2006/main">
               <a:ext uri="{FF2B5EF4-FFF2-40B4-BE49-F238E27FC236}">
-                <a16:creationId xmlns:a16="http://schemas.microsoft.com/office/drawing/2014/main" id="{E825D13A-D9A4-4840-A5C3-8E4D48DF2EDB}"/>
+                <a16:creationId xmlns:a16="http://schemas.microsoft.com/office/drawing/2014/main" id="{C5873E98-D8EE-4990-A4E1-247DD58DED0F}"/>
               </a:ext>
             </a:extLst>
           </p:cNvPr>
@@ -8539,7 +8983,7 @@
                 <a:ea typeface="Courier New"/>
                 <a:cs typeface="Courier New"/>
               </a:rPr>
-              <a:t>02 / 19</a:t>
+              <a:t>02 / 26</a:t>
             </a:r>
           </a:p>
         </p:txBody>
@@ -8547,7 +8991,3594 @@
     </p:spTree>
     <p:extLst>
       <p:ext uri="{BB962C8B-B14F-4D97-AF65-F5344CB8AC3E}">
-        <p14:creationId xmlns:p14="http://schemas.microsoft.com/office/powerpoint/2010/main" val="1751270414"/>
+        <p14:creationId xmlns:p14="http://schemas.microsoft.com/office/powerpoint/2010/main" val="1232075384"/>
+      </p:ext>
+    </p:extLst>
+  </p:cSld>
+</p:sld>
+</file>
+
+<file path=ppt/slides/slide20.xml><?xml version="1.0" encoding="utf-8"?>
+<p:sld xmlns:p="http://schemas.openxmlformats.org/presentationml/2006/main">
+  <p:cSld>
+    <p:bg>
+      <p:bgPr>
+        <a:solidFill xmlns:a="http://schemas.openxmlformats.org/drawingml/2006/main">
+          <a:srgbClr val="09090B"/>
+        </a:solidFill>
+      </p:bgPr>
+    </p:bg>
+    <p:spTree>
+      <p:nvGrpSpPr>
+        <p:cNvPr id="1" name=""/>
+        <p:cNvGrpSpPr/>
+        <p:nvPr/>
+      </p:nvGrpSpPr>
+      <p:grpSpPr>
+        <a:xfrm xmlns:a="http://schemas.openxmlformats.org/drawingml/2006/main"/>
+      </p:grpSpPr>
+      <p:sp>
+        <p:nvSpPr>
+          <p:cNvPr id="7" name="">
+            <a:extLst xmlns:a="http://schemas.openxmlformats.org/drawingml/2006/main">
+              <a:ext uri="{FF2B5EF4-FFF2-40B4-BE49-F238E27FC236}">
+                <a16:creationId xmlns:a16="http://schemas.microsoft.com/office/drawing/2014/main" id="{4E44F5C6-B0F3-4D5D-9C5C-50ED79E86C90}"/>
+              </a:ext>
+            </a:extLst>
+          </p:cNvPr>
+          <p:cNvSpPr>
+            <a:spLocks xmlns:a="http://schemas.openxmlformats.org/drawingml/2006/main" noGrp="1"/>
+          </p:cNvSpPr>
+          <p:nvPr/>
+        </p:nvSpPr>
+        <p:spPr>
+          <a:xfrm xmlns:a="http://schemas.openxmlformats.org/drawingml/2006/main">
+            <a:off x="685800" y="361950"/>
+            <a:ext cx="10477500" cy="285750"/>
+          </a:xfrm>
+          <a:prstGeom xmlns:a="http://schemas.openxmlformats.org/drawingml/2006/main" prst="rect">
+            <a:avLst/>
+          </a:prstGeom>
+          <a:noFill xmlns:a="http://schemas.openxmlformats.org/drawingml/2006/main"/>
+          <a:ln xmlns:a="http://schemas.openxmlformats.org/drawingml/2006/main" w="0">
+            <a:noFill/>
+          </a:ln>
+        </p:spPr>
+        <p:txBody>
+          <a:bodyPr xmlns:a="http://schemas.openxmlformats.org/drawingml/2006/main" anchor="t">
+            <a:normAutofit fontScale="100000"/>
+          </a:bodyPr>
+          <a:lstStyle xmlns:a="http://schemas.openxmlformats.org/drawingml/2006/main"/>
+          <a:p xmlns:a="http://schemas.openxmlformats.org/drawingml/2006/main">
+            <a:pPr>
+              <a:defRPr sz="1275" b="0">
+                <a:solidFill>
+                  <a:srgbClr val="6EE7B7"/>
+                </a:solidFill>
+                <a:latin typeface="Courier New"/>
+                <a:ea typeface="Courier New"/>
+                <a:cs typeface="Courier New"/>
+              </a:defRPr>
+            </a:pPr>
+            <a:r>
+              <a:rPr sz="1275" b="0">
+                <a:solidFill>
+                  <a:srgbClr val="6EE7B7"/>
+                </a:solidFill>
+                <a:latin typeface="Courier New"/>
+                <a:ea typeface="Courier New"/>
+                <a:cs typeface="Courier New"/>
+              </a:rPr>
+              <a:t>LECTURE 6–7 · REGISTERS</a:t>
+            </a:r>
+          </a:p>
+        </p:txBody>
+      </p:sp>
+      <p:sp>
+        <p:nvSpPr>
+          <p:cNvPr id="2" name="">
+            <a:extLst xmlns:a="http://schemas.openxmlformats.org/drawingml/2006/main">
+              <a:ext uri="{FF2B5EF4-FFF2-40B4-BE49-F238E27FC236}">
+                <a16:creationId xmlns:a16="http://schemas.microsoft.com/office/drawing/2014/main" id="{22A794E9-2B43-4E5C-AE94-398C3A604795}"/>
+              </a:ext>
+            </a:extLst>
+          </p:cNvPr>
+          <p:cNvSpPr>
+            <a:spLocks xmlns:a="http://schemas.openxmlformats.org/drawingml/2006/main" noGrp="1"/>
+          </p:cNvSpPr>
+          <p:nvPr/>
+        </p:nvSpPr>
+        <p:spPr>
+          <a:xfrm xmlns:a="http://schemas.openxmlformats.org/drawingml/2006/main">
+            <a:off x="685800" y="885825"/>
+            <a:ext cx="10820400" cy="1066800"/>
+          </a:xfrm>
+          <a:prstGeom xmlns:a="http://schemas.openxmlformats.org/drawingml/2006/main" prst="rect">
+            <a:avLst/>
+          </a:prstGeom>
+          <a:noFill xmlns:a="http://schemas.openxmlformats.org/drawingml/2006/main"/>
+          <a:ln xmlns:a="http://schemas.openxmlformats.org/drawingml/2006/main" w="0">
+            <a:noFill/>
+          </a:ln>
+        </p:spPr>
+        <p:txBody>
+          <a:bodyPr xmlns:a="http://schemas.openxmlformats.org/drawingml/2006/main" anchor="t">
+            <a:normAutofit fontScale="100000"/>
+          </a:bodyPr>
+          <a:lstStyle xmlns:a="http://schemas.openxmlformats.org/drawingml/2006/main"/>
+          <a:p xmlns:a="http://schemas.openxmlformats.org/drawingml/2006/main">
+            <a:pPr>
+              <a:defRPr sz="3600" b="0">
+                <a:solidFill>
+                  <a:srgbClr val="FAFAFA"/>
+                </a:solidFill>
+                <a:latin typeface="Arial"/>
+                <a:ea typeface="Arial"/>
+                <a:cs typeface="Arial"/>
+              </a:defRPr>
+            </a:pPr>
+            <a:r>
+              <a:rPr sz="3600" b="0">
+                <a:solidFill>
+                  <a:srgbClr val="FAFAFA"/>
+                </a:solidFill>
+                <a:latin typeface="Arial"/>
+                <a:ea typeface="Arial"/>
+                <a:cs typeface="Arial"/>
+              </a:rPr>
+              <a:t>Function calls use conventions</a:t>
+            </a:r>
+          </a:p>
+        </p:txBody>
+      </p:sp>
+      <p:sp>
+        <p:nvSpPr>
+          <p:cNvPr id="3" name="">
+            <a:extLst xmlns:a="http://schemas.openxmlformats.org/drawingml/2006/main">
+              <a:ext uri="{FF2B5EF4-FFF2-40B4-BE49-F238E27FC236}">
+                <a16:creationId xmlns:a16="http://schemas.microsoft.com/office/drawing/2014/main" id="{B1DC4CCA-5AA0-4119-A13A-F07438A7ECBC}"/>
+              </a:ext>
+            </a:extLst>
+          </p:cNvPr>
+          <p:cNvSpPr>
+            <a:spLocks xmlns:a="http://schemas.openxmlformats.org/drawingml/2006/main" noGrp="1"/>
+          </p:cNvSpPr>
+          <p:nvPr/>
+        </p:nvSpPr>
+        <p:spPr>
+          <a:xfrm xmlns:a="http://schemas.openxmlformats.org/drawingml/2006/main">
+            <a:off x="685800" y="2200275"/>
+            <a:ext cx="4857750" cy="3124200"/>
+          </a:xfrm>
+          <a:prstGeom xmlns:a="http://schemas.openxmlformats.org/drawingml/2006/main" prst="rect">
+            <a:avLst/>
+          </a:prstGeom>
+          <a:noFill xmlns:a="http://schemas.openxmlformats.org/drawingml/2006/main"/>
+          <a:ln xmlns:a="http://schemas.openxmlformats.org/drawingml/2006/main" w="0">
+            <a:noFill/>
+          </a:ln>
+        </p:spPr>
+        <p:txBody>
+          <a:bodyPr xmlns:a="http://schemas.openxmlformats.org/drawingml/2006/main" anchor="t">
+            <a:normAutofit fontScale="100000"/>
+          </a:bodyPr>
+          <a:lstStyle xmlns:a="http://schemas.openxmlformats.org/drawingml/2006/main"/>
+          <a:p xmlns:a="http://schemas.openxmlformats.org/drawingml/2006/main">
+            <a:pPr>
+              <a:defRPr sz="1950" b="0">
+                <a:solidFill>
+                  <a:srgbClr val="D4D4D8"/>
+                </a:solidFill>
+                <a:latin typeface="Arial"/>
+                <a:ea typeface="Arial"/>
+                <a:cs typeface="Arial"/>
+              </a:defRPr>
+            </a:pPr>
+            <a:r>
+              <a:rPr sz="1950" b="0">
+                <a:solidFill>
+                  <a:srgbClr val="D4D4D8"/>
+                </a:solidFill>
+                <a:latin typeface="Arial"/>
+                <a:ea typeface="Arial"/>
+                <a:cs typeface="Arial"/>
+              </a:rPr>
+              <a:t>For ordinary integer or pointer arguments on the x86-64 System V ABI, the first arguments use %rdi, %rsi, %rdx, %rcx, %r8, %r9.</a:t>
+            </a:r>
+          </a:p>
+          <a:p xmlns:a="http://schemas.openxmlformats.org/drawingml/2006/main">
+            <a:r>
+              <a:t/>
+            </a:r>
+          </a:p>
+          <a:p xmlns:a="http://schemas.openxmlformats.org/drawingml/2006/main">
+            <a:pPr>
+              <a:defRPr sz="1950" b="0">
+                <a:solidFill>
+                  <a:srgbClr val="D4D4D8"/>
+                </a:solidFill>
+                <a:latin typeface="Arial"/>
+                <a:ea typeface="Arial"/>
+                <a:cs typeface="Arial"/>
+              </a:defRPr>
+            </a:pPr>
+            <a:r>
+              <a:rPr sz="1950" b="0">
+                <a:solidFill>
+                  <a:srgbClr val="D4D4D8"/>
+                </a:solidFill>
+                <a:latin typeface="Arial"/>
+                <a:ea typeface="Arial"/>
+                <a:cs typeface="Arial"/>
+              </a:rPr>
+              <a:t>The return value usually arrives in %rax.</a:t>
+            </a:r>
+          </a:p>
+        </p:txBody>
+      </p:sp>
+      <p:sp>
+        <p:nvSpPr>
+          <p:cNvPr id="4" name="">
+            <a:extLst xmlns:a="http://schemas.openxmlformats.org/drawingml/2006/main">
+              <a:ext uri="{FF2B5EF4-FFF2-40B4-BE49-F238E27FC236}">
+                <a16:creationId xmlns:a16="http://schemas.microsoft.com/office/drawing/2014/main" id="{7B26B2D2-22E4-47D5-8CD1-74FC194B6F12}"/>
+              </a:ext>
+            </a:extLst>
+          </p:cNvPr>
+          <p:cNvSpPr>
+            <a:spLocks xmlns:a="http://schemas.openxmlformats.org/drawingml/2006/main" noGrp="1"/>
+          </p:cNvSpPr>
+          <p:nvPr/>
+        </p:nvSpPr>
+        <p:spPr>
+          <a:xfrm xmlns:a="http://schemas.openxmlformats.org/drawingml/2006/main">
+            <a:off x="6181725" y="2200275"/>
+            <a:ext cx="5238750" cy="3286125"/>
+          </a:xfrm>
+          <a:prstGeom xmlns:a="http://schemas.openxmlformats.org/drawingml/2006/main" prst="rect">
+            <a:avLst/>
+          </a:prstGeom>
+          <a:noFill xmlns:a="http://schemas.openxmlformats.org/drawingml/2006/main"/>
+          <a:ln xmlns:a="http://schemas.openxmlformats.org/drawingml/2006/main" w="0">
+            <a:noFill/>
+          </a:ln>
+        </p:spPr>
+        <p:txBody>
+          <a:bodyPr xmlns:a="http://schemas.openxmlformats.org/drawingml/2006/main" anchor="t">
+            <a:normAutofit fontScale="100000"/>
+          </a:bodyPr>
+          <a:lstStyle xmlns:a="http://schemas.openxmlformats.org/drawingml/2006/main"/>
+          <a:p xmlns:a="http://schemas.openxmlformats.org/drawingml/2006/main">
+            <a:pPr>
+              <a:defRPr sz="1650" b="0">
+                <a:solidFill>
+                  <a:srgbClr val="A7F3D0"/>
+                </a:solidFill>
+                <a:latin typeface="Courier New"/>
+                <a:ea typeface="Courier New"/>
+                <a:cs typeface="Courier New"/>
+              </a:defRPr>
+            </a:pPr>
+            <a:r>
+              <a:rPr sz="1650" b="0">
+                <a:solidFill>
+                  <a:srgbClr val="A7F3D0"/>
+                </a:solidFill>
+                <a:latin typeface="Courier New"/>
+                <a:ea typeface="Courier New"/>
+                <a:cs typeface="Courier New"/>
+              </a:rPr>
+              <a:t>long double_it(long x) {</a:t>
+            </a:r>
+          </a:p>
+          <a:p xmlns:a="http://schemas.openxmlformats.org/drawingml/2006/main">
+            <a:pPr>
+              <a:defRPr sz="1650" b="0">
+                <a:solidFill>
+                  <a:srgbClr val="A7F3D0"/>
+                </a:solidFill>
+                <a:latin typeface="Courier New"/>
+                <a:ea typeface="Courier New"/>
+                <a:cs typeface="Courier New"/>
+              </a:defRPr>
+            </a:pPr>
+            <a:r>
+              <a:rPr sz="1650" b="0">
+                <a:solidFill>
+                  <a:srgbClr val="A7F3D0"/>
+                </a:solidFill>
+                <a:latin typeface="Courier New"/>
+                <a:ea typeface="Courier New"/>
+                <a:cs typeface="Courier New"/>
+              </a:rPr>
+              <a:t>    return 2 * x;</a:t>
+            </a:r>
+          </a:p>
+          <a:p xmlns:a="http://schemas.openxmlformats.org/drawingml/2006/main">
+            <a:pPr>
+              <a:defRPr sz="1650" b="0">
+                <a:solidFill>
+                  <a:srgbClr val="A7F3D0"/>
+                </a:solidFill>
+                <a:latin typeface="Courier New"/>
+                <a:ea typeface="Courier New"/>
+                <a:cs typeface="Courier New"/>
+              </a:defRPr>
+            </a:pPr>
+            <a:r>
+              <a:rPr sz="1650" b="0">
+                <a:solidFill>
+                  <a:srgbClr val="A7F3D0"/>
+                </a:solidFill>
+                <a:latin typeface="Courier New"/>
+                <a:ea typeface="Courier New"/>
+                <a:cs typeface="Courier New"/>
+              </a:rPr>
+              <a:t>}</a:t>
+            </a:r>
+          </a:p>
+          <a:p xmlns:a="http://schemas.openxmlformats.org/drawingml/2006/main">
+            <a:r>
+              <a:t/>
+            </a:r>
+          </a:p>
+          <a:p xmlns:a="http://schemas.openxmlformats.org/drawingml/2006/main">
+            <a:pPr>
+              <a:defRPr sz="1650" b="0">
+                <a:solidFill>
+                  <a:srgbClr val="A7F3D0"/>
+                </a:solidFill>
+                <a:latin typeface="Courier New"/>
+                <a:ea typeface="Courier New"/>
+                <a:cs typeface="Courier New"/>
+              </a:defRPr>
+            </a:pPr>
+            <a:r>
+              <a:rPr sz="1650" b="0">
+                <a:solidFill>
+                  <a:srgbClr val="A7F3D0"/>
+                </a:solidFill>
+                <a:latin typeface="Courier New"/>
+                <a:ea typeface="Courier New"/>
+                <a:cs typeface="Courier New"/>
+              </a:rPr>
+              <a:t>At call:   %rdi = x</a:t>
+            </a:r>
+          </a:p>
+          <a:p xmlns:a="http://schemas.openxmlformats.org/drawingml/2006/main">
+            <a:pPr>
+              <a:defRPr sz="1650" b="0">
+                <a:solidFill>
+                  <a:srgbClr val="A7F3D0"/>
+                </a:solidFill>
+                <a:latin typeface="Courier New"/>
+                <a:ea typeface="Courier New"/>
+                <a:cs typeface="Courier New"/>
+              </a:defRPr>
+            </a:pPr>
+            <a:r>
+              <a:rPr sz="1650" b="0">
+                <a:solidFill>
+                  <a:srgbClr val="A7F3D0"/>
+                </a:solidFill>
+                <a:latin typeface="Courier New"/>
+                <a:ea typeface="Courier New"/>
+                <a:cs typeface="Courier New"/>
+              </a:rPr>
+              <a:t>           call double_it</a:t>
+            </a:r>
+          </a:p>
+          <a:p xmlns:a="http://schemas.openxmlformats.org/drawingml/2006/main">
+            <a:pPr>
+              <a:defRPr sz="1650" b="0">
+                <a:solidFill>
+                  <a:srgbClr val="A7F3D0"/>
+                </a:solidFill>
+                <a:latin typeface="Courier New"/>
+                <a:ea typeface="Courier New"/>
+                <a:cs typeface="Courier New"/>
+              </a:defRPr>
+            </a:pPr>
+            <a:r>
+              <a:rPr sz="1650" b="0">
+                <a:solidFill>
+                  <a:srgbClr val="A7F3D0"/>
+                </a:solidFill>
+                <a:latin typeface="Courier New"/>
+                <a:ea typeface="Courier New"/>
+                <a:cs typeface="Courier New"/>
+              </a:rPr>
+              <a:t>On return: %rax = 2 * x</a:t>
+            </a:r>
+          </a:p>
+        </p:txBody>
+      </p:sp>
+      <p:sp>
+        <p:nvSpPr>
+          <p:cNvPr id="5" name="">
+            <a:extLst xmlns:a="http://schemas.openxmlformats.org/drawingml/2006/main">
+              <a:ext uri="{FF2B5EF4-FFF2-40B4-BE49-F238E27FC236}">
+                <a16:creationId xmlns:a16="http://schemas.microsoft.com/office/drawing/2014/main" id="{2CEF0632-AF45-45C7-B97A-BF03625BEAEC}"/>
+              </a:ext>
+            </a:extLst>
+          </p:cNvPr>
+          <p:cNvSpPr>
+            <a:spLocks xmlns:a="http://schemas.openxmlformats.org/drawingml/2006/main" noGrp="1"/>
+          </p:cNvSpPr>
+          <p:nvPr/>
+        </p:nvSpPr>
+        <p:spPr>
+          <a:xfrm xmlns:a="http://schemas.openxmlformats.org/drawingml/2006/main">
+            <a:off x="685800" y="5743575"/>
+            <a:ext cx="10191750" cy="428625"/>
+          </a:xfrm>
+          <a:prstGeom xmlns:a="http://schemas.openxmlformats.org/drawingml/2006/main" prst="rect">
+            <a:avLst/>
+          </a:prstGeom>
+          <a:noFill xmlns:a="http://schemas.openxmlformats.org/drawingml/2006/main"/>
+          <a:ln xmlns:a="http://schemas.openxmlformats.org/drawingml/2006/main" w="0">
+            <a:noFill/>
+          </a:ln>
+        </p:spPr>
+        <p:txBody>
+          <a:bodyPr xmlns:a="http://schemas.openxmlformats.org/drawingml/2006/main" anchor="t">
+            <a:normAutofit fontScale="100000"/>
+          </a:bodyPr>
+          <a:lstStyle xmlns:a="http://schemas.openxmlformats.org/drawingml/2006/main"/>
+          <a:p xmlns:a="http://schemas.openxmlformats.org/drawingml/2006/main">
+            <a:pPr>
+              <a:defRPr sz="1350" b="0">
+                <a:solidFill>
+                  <a:srgbClr val="A1A1AA"/>
+                </a:solidFill>
+                <a:latin typeface="Arial"/>
+                <a:ea typeface="Arial"/>
+                <a:cs typeface="Arial"/>
+              </a:defRPr>
+            </a:pPr>
+            <a:r>
+              <a:rPr sz="1350" b="0">
+                <a:solidFill>
+                  <a:srgbClr val="A1A1AA"/>
+                </a:solidFill>
+                <a:latin typeface="Arial"/>
+                <a:ea typeface="Arial"/>
+                <a:cs typeface="Arial"/>
+              </a:rPr>
+              <a:t>This convention applies to the Linux x86-64 examples in the lectures; floating point arguments use different registers.</a:t>
+            </a:r>
+          </a:p>
+        </p:txBody>
+      </p:sp>
+      <p:sp>
+        <p:nvSpPr>
+          <p:cNvPr id="6" name="">
+            <a:extLst xmlns:a="http://schemas.openxmlformats.org/drawingml/2006/main">
+              <a:ext uri="{FF2B5EF4-FFF2-40B4-BE49-F238E27FC236}">
+                <a16:creationId xmlns:a16="http://schemas.microsoft.com/office/drawing/2014/main" id="{AAA10E70-E1A5-40EF-947B-26F446CEF7FB}"/>
+              </a:ext>
+            </a:extLst>
+          </p:cNvPr>
+          <p:cNvSpPr>
+            <a:spLocks xmlns:a="http://schemas.openxmlformats.org/drawingml/2006/main" noGrp="1"/>
+          </p:cNvSpPr>
+          <p:nvPr/>
+        </p:nvSpPr>
+        <p:spPr>
+          <a:xfrm xmlns:a="http://schemas.openxmlformats.org/drawingml/2006/main">
+            <a:off x="10477500" y="6210300"/>
+            <a:ext cx="1000125" cy="219075"/>
+          </a:xfrm>
+          <a:prstGeom xmlns:a="http://schemas.openxmlformats.org/drawingml/2006/main" prst="rect">
+            <a:avLst/>
+          </a:prstGeom>
+          <a:noFill xmlns:a="http://schemas.openxmlformats.org/drawingml/2006/main"/>
+          <a:ln xmlns:a="http://schemas.openxmlformats.org/drawingml/2006/main" w="0">
+            <a:noFill/>
+          </a:ln>
+        </p:spPr>
+        <p:txBody>
+          <a:bodyPr xmlns:a="http://schemas.openxmlformats.org/drawingml/2006/main" anchor="t">
+            <a:normAutofit fontScale="79762"/>
+          </a:bodyPr>
+          <a:lstStyle xmlns:a="http://schemas.openxmlformats.org/drawingml/2006/main"/>
+          <a:p xmlns:a="http://schemas.openxmlformats.org/drawingml/2006/main">
+            <a:pPr>
+              <a:defRPr sz="1050" b="0">
+                <a:solidFill>
+                  <a:srgbClr val="71717A"/>
+                </a:solidFill>
+                <a:latin typeface="Courier New"/>
+                <a:ea typeface="Courier New"/>
+                <a:cs typeface="Courier New"/>
+              </a:defRPr>
+            </a:pPr>
+            <a:r>
+              <a:rPr sz="1050" b="0">
+                <a:solidFill>
+                  <a:srgbClr val="71717A"/>
+                </a:solidFill>
+                <a:latin typeface="Courier New"/>
+                <a:ea typeface="Courier New"/>
+                <a:cs typeface="Courier New"/>
+              </a:rPr>
+              <a:t>20 / 26</a:t>
+            </a:r>
+          </a:p>
+        </p:txBody>
+      </p:sp>
+    </p:spTree>
+    <p:extLst>
+      <p:ext uri="{BB962C8B-B14F-4D97-AF65-F5344CB8AC3E}">
+        <p14:creationId xmlns:p14="http://schemas.microsoft.com/office/powerpoint/2010/main" val="1894518872"/>
+      </p:ext>
+    </p:extLst>
+  </p:cSld>
+</p:sld>
+</file>
+
+<file path=ppt/slides/slide21.xml><?xml version="1.0" encoding="utf-8"?>
+<p:sld xmlns:p="http://schemas.openxmlformats.org/presentationml/2006/main">
+  <p:cSld>
+    <p:bg>
+      <p:bgPr>
+        <a:solidFill xmlns:a="http://schemas.openxmlformats.org/drawingml/2006/main">
+          <a:srgbClr val="09090B"/>
+        </a:solidFill>
+      </p:bgPr>
+    </p:bg>
+    <p:spTree>
+      <p:nvGrpSpPr>
+        <p:cNvPr id="1" name=""/>
+        <p:cNvGrpSpPr/>
+        <p:nvPr/>
+      </p:nvGrpSpPr>
+      <p:grpSpPr>
+        <a:xfrm xmlns:a="http://schemas.openxmlformats.org/drawingml/2006/main"/>
+      </p:grpSpPr>
+      <p:sp>
+        <p:nvSpPr>
+          <p:cNvPr id="7" name="">
+            <a:extLst xmlns:a="http://schemas.openxmlformats.org/drawingml/2006/main">
+              <a:ext uri="{FF2B5EF4-FFF2-40B4-BE49-F238E27FC236}">
+                <a16:creationId xmlns:a16="http://schemas.microsoft.com/office/drawing/2014/main" id="{D6CB6258-BBA6-4CC0-9C3D-6FE1B3C02A4A}"/>
+              </a:ext>
+            </a:extLst>
+          </p:cNvPr>
+          <p:cNvSpPr>
+            <a:spLocks xmlns:a="http://schemas.openxmlformats.org/drawingml/2006/main" noGrp="1"/>
+          </p:cNvSpPr>
+          <p:nvPr/>
+        </p:nvSpPr>
+        <p:spPr>
+          <a:xfrm xmlns:a="http://schemas.openxmlformats.org/drawingml/2006/main">
+            <a:off x="685800" y="361950"/>
+            <a:ext cx="10477500" cy="285750"/>
+          </a:xfrm>
+          <a:prstGeom xmlns:a="http://schemas.openxmlformats.org/drawingml/2006/main" prst="rect">
+            <a:avLst/>
+          </a:prstGeom>
+          <a:noFill xmlns:a="http://schemas.openxmlformats.org/drawingml/2006/main"/>
+          <a:ln xmlns:a="http://schemas.openxmlformats.org/drawingml/2006/main" w="0">
+            <a:noFill/>
+          </a:ln>
+        </p:spPr>
+        <p:txBody>
+          <a:bodyPr xmlns:a="http://schemas.openxmlformats.org/drawingml/2006/main" anchor="t">
+            <a:normAutofit fontScale="100000"/>
+          </a:bodyPr>
+          <a:lstStyle xmlns:a="http://schemas.openxmlformats.org/drawingml/2006/main"/>
+          <a:p xmlns:a="http://schemas.openxmlformats.org/drawingml/2006/main">
+            <a:pPr>
+              <a:defRPr sz="1275" b="0">
+                <a:solidFill>
+                  <a:srgbClr val="6EE7B7"/>
+                </a:solidFill>
+                <a:latin typeface="Courier New"/>
+                <a:ea typeface="Courier New"/>
+                <a:cs typeface="Courier New"/>
+              </a:defRPr>
+            </a:pPr>
+            <a:r>
+              <a:rPr sz="1275" b="0">
+                <a:solidFill>
+                  <a:srgbClr val="6EE7B7"/>
+                </a:solidFill>
+                <a:latin typeface="Courier New"/>
+                <a:ea typeface="Courier New"/>
+                <a:cs typeface="Courier New"/>
+              </a:rPr>
+              <a:t>LECTURE 7–8 · STACK FRAMES</a:t>
+            </a:r>
+          </a:p>
+        </p:txBody>
+      </p:sp>
+      <p:sp>
+        <p:nvSpPr>
+          <p:cNvPr id="2" name="">
+            <a:extLst xmlns:a="http://schemas.openxmlformats.org/drawingml/2006/main">
+              <a:ext uri="{FF2B5EF4-FFF2-40B4-BE49-F238E27FC236}">
+                <a16:creationId xmlns:a16="http://schemas.microsoft.com/office/drawing/2014/main" id="{7479E666-998F-4AA1-AD9F-48D47D232678}"/>
+              </a:ext>
+            </a:extLst>
+          </p:cNvPr>
+          <p:cNvSpPr>
+            <a:spLocks xmlns:a="http://schemas.openxmlformats.org/drawingml/2006/main" noGrp="1"/>
+          </p:cNvSpPr>
+          <p:nvPr/>
+        </p:nvSpPr>
+        <p:spPr>
+          <a:xfrm xmlns:a="http://schemas.openxmlformats.org/drawingml/2006/main">
+            <a:off x="685800" y="885825"/>
+            <a:ext cx="10820400" cy="1066800"/>
+          </a:xfrm>
+          <a:prstGeom xmlns:a="http://schemas.openxmlformats.org/drawingml/2006/main" prst="rect">
+            <a:avLst/>
+          </a:prstGeom>
+          <a:noFill xmlns:a="http://schemas.openxmlformats.org/drawingml/2006/main"/>
+          <a:ln xmlns:a="http://schemas.openxmlformats.org/drawingml/2006/main" w="0">
+            <a:noFill/>
+          </a:ln>
+        </p:spPr>
+        <p:txBody>
+          <a:bodyPr xmlns:a="http://schemas.openxmlformats.org/drawingml/2006/main" anchor="t">
+            <a:normAutofit fontScale="100000"/>
+          </a:bodyPr>
+          <a:lstStyle xmlns:a="http://schemas.openxmlformats.org/drawingml/2006/main"/>
+          <a:p xmlns:a="http://schemas.openxmlformats.org/drawingml/2006/main">
+            <a:pPr>
+              <a:defRPr sz="3600" b="0">
+                <a:solidFill>
+                  <a:srgbClr val="FAFAFA"/>
+                </a:solidFill>
+                <a:latin typeface="Arial"/>
+                <a:ea typeface="Arial"/>
+                <a:cs typeface="Arial"/>
+              </a:defRPr>
+            </a:pPr>
+            <a:r>
+              <a:rPr sz="3600" b="0">
+                <a:solidFill>
+                  <a:srgbClr val="FAFAFA"/>
+                </a:solidFill>
+                <a:latin typeface="Arial"/>
+                <a:ea typeface="Arial"/>
+                <a:cs typeface="Arial"/>
+              </a:rPr>
+              <a:t>The stack keeps each call’s state</a:t>
+            </a:r>
+          </a:p>
+        </p:txBody>
+      </p:sp>
+      <p:sp>
+        <p:nvSpPr>
+          <p:cNvPr id="3" name="">
+            <a:extLst xmlns:a="http://schemas.openxmlformats.org/drawingml/2006/main">
+              <a:ext uri="{FF2B5EF4-FFF2-40B4-BE49-F238E27FC236}">
+                <a16:creationId xmlns:a16="http://schemas.microsoft.com/office/drawing/2014/main" id="{DBA8E267-AE1D-4447-A6DA-708A8A8CD3C0}"/>
+              </a:ext>
+            </a:extLst>
+          </p:cNvPr>
+          <p:cNvSpPr>
+            <a:spLocks xmlns:a="http://schemas.openxmlformats.org/drawingml/2006/main" noGrp="1"/>
+          </p:cNvSpPr>
+          <p:nvPr/>
+        </p:nvSpPr>
+        <p:spPr>
+          <a:xfrm xmlns:a="http://schemas.openxmlformats.org/drawingml/2006/main">
+            <a:off x="685800" y="2200275"/>
+            <a:ext cx="4857750" cy="3124200"/>
+          </a:xfrm>
+          <a:prstGeom xmlns:a="http://schemas.openxmlformats.org/drawingml/2006/main" prst="rect">
+            <a:avLst/>
+          </a:prstGeom>
+          <a:noFill xmlns:a="http://schemas.openxmlformats.org/drawingml/2006/main"/>
+          <a:ln xmlns:a="http://schemas.openxmlformats.org/drawingml/2006/main" w="0">
+            <a:noFill/>
+          </a:ln>
+        </p:spPr>
+        <p:txBody>
+          <a:bodyPr xmlns:a="http://schemas.openxmlformats.org/drawingml/2006/main" anchor="t">
+            <a:normAutofit fontScale="100000"/>
+          </a:bodyPr>
+          <a:lstStyle xmlns:a="http://schemas.openxmlformats.org/drawingml/2006/main"/>
+          <a:p xmlns:a="http://schemas.openxmlformats.org/drawingml/2006/main">
+            <a:pPr>
+              <a:defRPr sz="1950" b="0">
+                <a:solidFill>
+                  <a:srgbClr val="D4D4D8"/>
+                </a:solidFill>
+                <a:latin typeface="Arial"/>
+                <a:ea typeface="Arial"/>
+                <a:cs typeface="Arial"/>
+              </a:defRPr>
+            </a:pPr>
+            <a:r>
+              <a:rPr sz="1950" b="0">
+                <a:solidFill>
+                  <a:srgbClr val="D4D4D8"/>
+                </a:solidFill>
+                <a:latin typeface="Arial"/>
+                <a:ea typeface="Arial"/>
+                <a:cs typeface="Arial"/>
+              </a:rPr>
+              <a:t>The stack grows toward lower addresses. %rsp points at its current top.</a:t>
+            </a:r>
+          </a:p>
+          <a:p xmlns:a="http://schemas.openxmlformats.org/drawingml/2006/main">
+            <a:r>
+              <a:t/>
+            </a:r>
+          </a:p>
+          <a:p xmlns:a="http://schemas.openxmlformats.org/drawingml/2006/main">
+            <a:pPr>
+              <a:defRPr sz="1950" b="0">
+                <a:solidFill>
+                  <a:srgbClr val="D4D4D8"/>
+                </a:solidFill>
+                <a:latin typeface="Arial"/>
+                <a:ea typeface="Arial"/>
+                <a:cs typeface="Arial"/>
+              </a:defRPr>
+            </a:pPr>
+            <a:r>
+              <a:rPr sz="1950" b="0">
+                <a:solidFill>
+                  <a:srgbClr val="D4D4D8"/>
+                </a:solidFill>
+                <a:latin typeface="Arial"/>
+                <a:ea typeface="Arial"/>
+                <a:cs typeface="Arial"/>
+              </a:rPr>
+              <a:t>A function may save the old %rbp, set a new frame base, and subtract from %rsp to reserve space for local data.</a:t>
+            </a:r>
+          </a:p>
+        </p:txBody>
+      </p:sp>
+      <p:sp>
+        <p:nvSpPr>
+          <p:cNvPr id="4" name="">
+            <a:extLst xmlns:a="http://schemas.openxmlformats.org/drawingml/2006/main">
+              <a:ext uri="{FF2B5EF4-FFF2-40B4-BE49-F238E27FC236}">
+                <a16:creationId xmlns:a16="http://schemas.microsoft.com/office/drawing/2014/main" id="{7501CCA6-DF34-4AFB-90C1-2BDD4D11359E}"/>
+              </a:ext>
+            </a:extLst>
+          </p:cNvPr>
+          <p:cNvSpPr>
+            <a:spLocks xmlns:a="http://schemas.openxmlformats.org/drawingml/2006/main" noGrp="1"/>
+          </p:cNvSpPr>
+          <p:nvPr/>
+        </p:nvSpPr>
+        <p:spPr>
+          <a:xfrm xmlns:a="http://schemas.openxmlformats.org/drawingml/2006/main">
+            <a:off x="6181725" y="2200275"/>
+            <a:ext cx="5238750" cy="3286125"/>
+          </a:xfrm>
+          <a:prstGeom xmlns:a="http://schemas.openxmlformats.org/drawingml/2006/main" prst="rect">
+            <a:avLst/>
+          </a:prstGeom>
+          <a:noFill xmlns:a="http://schemas.openxmlformats.org/drawingml/2006/main"/>
+          <a:ln xmlns:a="http://schemas.openxmlformats.org/drawingml/2006/main" w="0">
+            <a:noFill/>
+          </a:ln>
+        </p:spPr>
+        <p:txBody>
+          <a:bodyPr xmlns:a="http://schemas.openxmlformats.org/drawingml/2006/main" anchor="t">
+            <a:normAutofit fontScale="100000"/>
+          </a:bodyPr>
+          <a:lstStyle xmlns:a="http://schemas.openxmlformats.org/drawingml/2006/main"/>
+          <a:p xmlns:a="http://schemas.openxmlformats.org/drawingml/2006/main">
+            <a:pPr>
+              <a:defRPr sz="1650" b="0">
+                <a:solidFill>
+                  <a:srgbClr val="A7F3D0"/>
+                </a:solidFill>
+                <a:latin typeface="Courier New"/>
+                <a:ea typeface="Courier New"/>
+                <a:cs typeface="Courier New"/>
+              </a:defRPr>
+            </a:pPr>
+            <a:r>
+              <a:rPr sz="1650" b="0">
+                <a:solidFill>
+                  <a:srgbClr val="A7F3D0"/>
+                </a:solidFill>
+                <a:latin typeface="Courier New"/>
+                <a:ea typeface="Courier New"/>
+                <a:cs typeface="Courier New"/>
+              </a:rPr>
+              <a:t>pushq %rbp        save old frame</a:t>
+            </a:r>
+          </a:p>
+          <a:p xmlns:a="http://schemas.openxmlformats.org/drawingml/2006/main">
+            <a:pPr>
+              <a:defRPr sz="1650" b="0">
+                <a:solidFill>
+                  <a:srgbClr val="A7F3D0"/>
+                </a:solidFill>
+                <a:latin typeface="Courier New"/>
+                <a:ea typeface="Courier New"/>
+                <a:cs typeface="Courier New"/>
+              </a:defRPr>
+            </a:pPr>
+            <a:r>
+              <a:rPr sz="1650" b="0">
+                <a:solidFill>
+                  <a:srgbClr val="A7F3D0"/>
+                </a:solidFill>
+                <a:latin typeface="Courier New"/>
+                <a:ea typeface="Courier New"/>
+                <a:cs typeface="Courier New"/>
+              </a:rPr>
+              <a:t>movq %rsp, %rbp   set frame base</a:t>
+            </a:r>
+          </a:p>
+          <a:p xmlns:a="http://schemas.openxmlformats.org/drawingml/2006/main">
+            <a:pPr>
+              <a:defRPr sz="1650" b="0">
+                <a:solidFill>
+                  <a:srgbClr val="A7F3D0"/>
+                </a:solidFill>
+                <a:latin typeface="Courier New"/>
+                <a:ea typeface="Courier New"/>
+                <a:cs typeface="Courier New"/>
+              </a:defRPr>
+            </a:pPr>
+            <a:r>
+              <a:rPr sz="1650" b="0">
+                <a:solidFill>
+                  <a:srgbClr val="A7F3D0"/>
+                </a:solidFill>
+                <a:latin typeface="Courier New"/>
+                <a:ea typeface="Courier New"/>
+                <a:cs typeface="Courier New"/>
+              </a:rPr>
+              <a:t>subq $16, %rsp   reserve 16 bytes</a:t>
+            </a:r>
+          </a:p>
+          <a:p xmlns:a="http://schemas.openxmlformats.org/drawingml/2006/main">
+            <a:pPr>
+              <a:defRPr sz="1650" b="0">
+                <a:solidFill>
+                  <a:srgbClr val="A7F3D0"/>
+                </a:solidFill>
+                <a:latin typeface="Courier New"/>
+                <a:ea typeface="Courier New"/>
+                <a:cs typeface="Courier New"/>
+              </a:defRPr>
+            </a:pPr>
+            <a:r>
+              <a:rPr sz="1650" b="0">
+                <a:solidFill>
+                  <a:srgbClr val="A7F3D0"/>
+                </a:solidFill>
+                <a:latin typeface="Courier New"/>
+                <a:ea typeface="Courier New"/>
+                <a:cs typeface="Courier New"/>
+              </a:rPr>
+              <a:t>...</a:t>
+            </a:r>
+          </a:p>
+          <a:p xmlns:a="http://schemas.openxmlformats.org/drawingml/2006/main">
+            <a:pPr>
+              <a:defRPr sz="1650" b="0">
+                <a:solidFill>
+                  <a:srgbClr val="A7F3D0"/>
+                </a:solidFill>
+                <a:latin typeface="Courier New"/>
+                <a:ea typeface="Courier New"/>
+                <a:cs typeface="Courier New"/>
+              </a:defRPr>
+            </a:pPr>
+            <a:r>
+              <a:rPr sz="1650" b="0">
+                <a:solidFill>
+                  <a:srgbClr val="A7F3D0"/>
+                </a:solidFill>
+                <a:latin typeface="Courier New"/>
+                <a:ea typeface="Courier New"/>
+                <a:cs typeface="Courier New"/>
+              </a:rPr>
+              <a:t>leave             restore old frame</a:t>
+            </a:r>
+          </a:p>
+          <a:p xmlns:a="http://schemas.openxmlformats.org/drawingml/2006/main">
+            <a:pPr>
+              <a:defRPr sz="1650" b="0">
+                <a:solidFill>
+                  <a:srgbClr val="A7F3D0"/>
+                </a:solidFill>
+                <a:latin typeface="Courier New"/>
+                <a:ea typeface="Courier New"/>
+                <a:cs typeface="Courier New"/>
+              </a:defRPr>
+            </a:pPr>
+            <a:r>
+              <a:rPr sz="1650" b="0">
+                <a:solidFill>
+                  <a:srgbClr val="A7F3D0"/>
+                </a:solidFill>
+                <a:latin typeface="Courier New"/>
+                <a:ea typeface="Courier New"/>
+                <a:cs typeface="Courier New"/>
+              </a:rPr>
+              <a:t>ret               return to caller</a:t>
+            </a:r>
+          </a:p>
+        </p:txBody>
+      </p:sp>
+      <p:sp>
+        <p:nvSpPr>
+          <p:cNvPr id="5" name="">
+            <a:extLst xmlns:a="http://schemas.openxmlformats.org/drawingml/2006/main">
+              <a:ext uri="{FF2B5EF4-FFF2-40B4-BE49-F238E27FC236}">
+                <a16:creationId xmlns:a16="http://schemas.microsoft.com/office/drawing/2014/main" id="{7D24F0F0-C481-47F0-AFF2-9B88B6E24745}"/>
+              </a:ext>
+            </a:extLst>
+          </p:cNvPr>
+          <p:cNvSpPr>
+            <a:spLocks xmlns:a="http://schemas.openxmlformats.org/drawingml/2006/main" noGrp="1"/>
+          </p:cNvSpPr>
+          <p:nvPr/>
+        </p:nvSpPr>
+        <p:spPr>
+          <a:xfrm xmlns:a="http://schemas.openxmlformats.org/drawingml/2006/main">
+            <a:off x="685800" y="5743575"/>
+            <a:ext cx="10191750" cy="428625"/>
+          </a:xfrm>
+          <a:prstGeom xmlns:a="http://schemas.openxmlformats.org/drawingml/2006/main" prst="rect">
+            <a:avLst/>
+          </a:prstGeom>
+          <a:noFill xmlns:a="http://schemas.openxmlformats.org/drawingml/2006/main"/>
+          <a:ln xmlns:a="http://schemas.openxmlformats.org/drawingml/2006/main" w="0">
+            <a:noFill/>
+          </a:ln>
+        </p:spPr>
+        <p:txBody>
+          <a:bodyPr xmlns:a="http://schemas.openxmlformats.org/drawingml/2006/main" anchor="t">
+            <a:normAutofit fontScale="100000"/>
+          </a:bodyPr>
+          <a:lstStyle xmlns:a="http://schemas.openxmlformats.org/drawingml/2006/main"/>
+          <a:p xmlns:a="http://schemas.openxmlformats.org/drawingml/2006/main">
+            <a:pPr>
+              <a:defRPr sz="1350" b="0">
+                <a:solidFill>
+                  <a:srgbClr val="A1A1AA"/>
+                </a:solidFill>
+                <a:latin typeface="Arial"/>
+                <a:ea typeface="Arial"/>
+                <a:cs typeface="Arial"/>
+              </a:defRPr>
+            </a:pPr>
+            <a:r>
+              <a:rPr sz="1350" b="0">
+                <a:solidFill>
+                  <a:srgbClr val="A1A1AA"/>
+                </a:solidFill>
+                <a:latin typeface="Arial"/>
+                <a:ea typeface="Arial"/>
+                <a:cs typeface="Arial"/>
+              </a:rPr>
+              <a:t>These are common unoptimized patterns, not instructions every function must contain.</a:t>
+            </a:r>
+          </a:p>
+        </p:txBody>
+      </p:sp>
+      <p:sp>
+        <p:nvSpPr>
+          <p:cNvPr id="6" name="">
+            <a:extLst xmlns:a="http://schemas.openxmlformats.org/drawingml/2006/main">
+              <a:ext uri="{FF2B5EF4-FFF2-40B4-BE49-F238E27FC236}">
+                <a16:creationId xmlns:a16="http://schemas.microsoft.com/office/drawing/2014/main" id="{68488E68-0622-4C3B-99D7-9AD1AF278A45}"/>
+              </a:ext>
+            </a:extLst>
+          </p:cNvPr>
+          <p:cNvSpPr>
+            <a:spLocks xmlns:a="http://schemas.openxmlformats.org/drawingml/2006/main" noGrp="1"/>
+          </p:cNvSpPr>
+          <p:nvPr/>
+        </p:nvSpPr>
+        <p:spPr>
+          <a:xfrm xmlns:a="http://schemas.openxmlformats.org/drawingml/2006/main">
+            <a:off x="10477500" y="6210300"/>
+            <a:ext cx="1000125" cy="219075"/>
+          </a:xfrm>
+          <a:prstGeom xmlns:a="http://schemas.openxmlformats.org/drawingml/2006/main" prst="rect">
+            <a:avLst/>
+          </a:prstGeom>
+          <a:noFill xmlns:a="http://schemas.openxmlformats.org/drawingml/2006/main"/>
+          <a:ln xmlns:a="http://schemas.openxmlformats.org/drawingml/2006/main" w="0">
+            <a:noFill/>
+          </a:ln>
+        </p:spPr>
+        <p:txBody>
+          <a:bodyPr xmlns:a="http://schemas.openxmlformats.org/drawingml/2006/main" anchor="t">
+            <a:normAutofit fontScale="79762"/>
+          </a:bodyPr>
+          <a:lstStyle xmlns:a="http://schemas.openxmlformats.org/drawingml/2006/main"/>
+          <a:p xmlns:a="http://schemas.openxmlformats.org/drawingml/2006/main">
+            <a:pPr>
+              <a:defRPr sz="1050" b="0">
+                <a:solidFill>
+                  <a:srgbClr val="71717A"/>
+                </a:solidFill>
+                <a:latin typeface="Courier New"/>
+                <a:ea typeface="Courier New"/>
+                <a:cs typeface="Courier New"/>
+              </a:defRPr>
+            </a:pPr>
+            <a:r>
+              <a:rPr sz="1050" b="0">
+                <a:solidFill>
+                  <a:srgbClr val="71717A"/>
+                </a:solidFill>
+                <a:latin typeface="Courier New"/>
+                <a:ea typeface="Courier New"/>
+                <a:cs typeface="Courier New"/>
+              </a:rPr>
+              <a:t>21 / 26</a:t>
+            </a:r>
+          </a:p>
+        </p:txBody>
+      </p:sp>
+    </p:spTree>
+    <p:extLst>
+      <p:ext uri="{BB962C8B-B14F-4D97-AF65-F5344CB8AC3E}">
+        <p14:creationId xmlns:p14="http://schemas.microsoft.com/office/powerpoint/2010/main" val="692106884"/>
+      </p:ext>
+    </p:extLst>
+  </p:cSld>
+</p:sld>
+</file>
+
+<file path=ppt/slides/slide22.xml><?xml version="1.0" encoding="utf-8"?>
+<p:sld xmlns:p="http://schemas.openxmlformats.org/presentationml/2006/main">
+  <p:cSld>
+    <p:bg>
+      <p:bgPr>
+        <a:solidFill xmlns:a="http://schemas.openxmlformats.org/drawingml/2006/main">
+          <a:srgbClr val="09090B"/>
+        </a:solidFill>
+      </p:bgPr>
+    </p:bg>
+    <p:spTree>
+      <p:nvGrpSpPr>
+        <p:cNvPr id="1" name=""/>
+        <p:cNvGrpSpPr/>
+        <p:nvPr/>
+      </p:nvGrpSpPr>
+      <p:grpSpPr>
+        <a:xfrm xmlns:a="http://schemas.openxmlformats.org/drawingml/2006/main"/>
+      </p:grpSpPr>
+      <p:sp>
+        <p:nvSpPr>
+          <p:cNvPr id="7" name="">
+            <a:extLst xmlns:a="http://schemas.openxmlformats.org/drawingml/2006/main">
+              <a:ext uri="{FF2B5EF4-FFF2-40B4-BE49-F238E27FC236}">
+                <a16:creationId xmlns:a16="http://schemas.microsoft.com/office/drawing/2014/main" id="{DF9ECE8B-B23C-4E20-88C8-3896A9C8C574}"/>
+              </a:ext>
+            </a:extLst>
+          </p:cNvPr>
+          <p:cNvSpPr>
+            <a:spLocks xmlns:a="http://schemas.openxmlformats.org/drawingml/2006/main" noGrp="1"/>
+          </p:cNvSpPr>
+          <p:nvPr/>
+        </p:nvSpPr>
+        <p:spPr>
+          <a:xfrm xmlns:a="http://schemas.openxmlformats.org/drawingml/2006/main">
+            <a:off x="685800" y="361950"/>
+            <a:ext cx="10477500" cy="285750"/>
+          </a:xfrm>
+          <a:prstGeom xmlns:a="http://schemas.openxmlformats.org/drawingml/2006/main" prst="rect">
+            <a:avLst/>
+          </a:prstGeom>
+          <a:noFill xmlns:a="http://schemas.openxmlformats.org/drawingml/2006/main"/>
+          <a:ln xmlns:a="http://schemas.openxmlformats.org/drawingml/2006/main" w="0">
+            <a:noFill/>
+          </a:ln>
+        </p:spPr>
+        <p:txBody>
+          <a:bodyPr xmlns:a="http://schemas.openxmlformats.org/drawingml/2006/main" anchor="t">
+            <a:normAutofit fontScale="100000"/>
+          </a:bodyPr>
+          <a:lstStyle xmlns:a="http://schemas.openxmlformats.org/drawingml/2006/main"/>
+          <a:p xmlns:a="http://schemas.openxmlformats.org/drawingml/2006/main">
+            <a:pPr>
+              <a:defRPr sz="1275" b="0">
+                <a:solidFill>
+                  <a:srgbClr val="6EE7B7"/>
+                </a:solidFill>
+                <a:latin typeface="Courier New"/>
+                <a:ea typeface="Courier New"/>
+                <a:cs typeface="Courier New"/>
+              </a:defRPr>
+            </a:pPr>
+            <a:r>
+              <a:rPr sz="1275" b="0">
+                <a:solidFill>
+                  <a:srgbClr val="6EE7B7"/>
+                </a:solidFill>
+                <a:latin typeface="Courier New"/>
+                <a:ea typeface="Courier New"/>
+                <a:cs typeface="Courier New"/>
+              </a:rPr>
+              <a:t>WORKED EXAMPLE</a:t>
+            </a:r>
+          </a:p>
+        </p:txBody>
+      </p:sp>
+      <p:sp>
+        <p:nvSpPr>
+          <p:cNvPr id="2" name="">
+            <a:extLst xmlns:a="http://schemas.openxmlformats.org/drawingml/2006/main">
+              <a:ext uri="{FF2B5EF4-FFF2-40B4-BE49-F238E27FC236}">
+                <a16:creationId xmlns:a16="http://schemas.microsoft.com/office/drawing/2014/main" id="{490ACD20-CB71-48D1-9C4F-1B4D40C0AF55}"/>
+              </a:ext>
+            </a:extLst>
+          </p:cNvPr>
+          <p:cNvSpPr>
+            <a:spLocks xmlns:a="http://schemas.openxmlformats.org/drawingml/2006/main" noGrp="1"/>
+          </p:cNvSpPr>
+          <p:nvPr/>
+        </p:nvSpPr>
+        <p:spPr>
+          <a:xfrm xmlns:a="http://schemas.openxmlformats.org/drawingml/2006/main">
+            <a:off x="685800" y="885825"/>
+            <a:ext cx="10820400" cy="1066800"/>
+          </a:xfrm>
+          <a:prstGeom xmlns:a="http://schemas.openxmlformats.org/drawingml/2006/main" prst="rect">
+            <a:avLst/>
+          </a:prstGeom>
+          <a:noFill xmlns:a="http://schemas.openxmlformats.org/drawingml/2006/main"/>
+          <a:ln xmlns:a="http://schemas.openxmlformats.org/drawingml/2006/main" w="0">
+            <a:noFill/>
+          </a:ln>
+        </p:spPr>
+        <p:txBody>
+          <a:bodyPr xmlns:a="http://schemas.openxmlformats.org/drawingml/2006/main" anchor="t">
+            <a:normAutofit fontScale="100000"/>
+          </a:bodyPr>
+          <a:lstStyle xmlns:a="http://schemas.openxmlformats.org/drawingml/2006/main"/>
+          <a:p xmlns:a="http://schemas.openxmlformats.org/drawingml/2006/main">
+            <a:pPr>
+              <a:defRPr sz="3600" b="0">
+                <a:solidFill>
+                  <a:srgbClr val="FAFAFA"/>
+                </a:solidFill>
+                <a:latin typeface="Arial"/>
+                <a:ea typeface="Arial"/>
+                <a:cs typeface="Arial"/>
+              </a:defRPr>
+            </a:pPr>
+            <a:r>
+              <a:rPr sz="3600" b="0">
+                <a:solidFill>
+                  <a:srgbClr val="FAFAFA"/>
+                </a:solidFill>
+                <a:latin typeface="Arial"/>
+                <a:ea typeface="Arial"/>
+                <a:cs typeface="Arial"/>
+              </a:rPr>
+              <a:t>A stack frame in addresses</a:t>
+            </a:r>
+          </a:p>
+        </p:txBody>
+      </p:sp>
+      <p:sp>
+        <p:nvSpPr>
+          <p:cNvPr id="3" name="">
+            <a:extLst xmlns:a="http://schemas.openxmlformats.org/drawingml/2006/main">
+              <a:ext uri="{FF2B5EF4-FFF2-40B4-BE49-F238E27FC236}">
+                <a16:creationId xmlns:a16="http://schemas.microsoft.com/office/drawing/2014/main" id="{42CAF0E4-B4BD-4908-A8DF-C8D90E30371D}"/>
+              </a:ext>
+            </a:extLst>
+          </p:cNvPr>
+          <p:cNvSpPr>
+            <a:spLocks xmlns:a="http://schemas.openxmlformats.org/drawingml/2006/main" noGrp="1"/>
+          </p:cNvSpPr>
+          <p:nvPr/>
+        </p:nvSpPr>
+        <p:spPr>
+          <a:xfrm xmlns:a="http://schemas.openxmlformats.org/drawingml/2006/main">
+            <a:off x="685800" y="2200275"/>
+            <a:ext cx="4857750" cy="3124200"/>
+          </a:xfrm>
+          <a:prstGeom xmlns:a="http://schemas.openxmlformats.org/drawingml/2006/main" prst="rect">
+            <a:avLst/>
+          </a:prstGeom>
+          <a:noFill xmlns:a="http://schemas.openxmlformats.org/drawingml/2006/main"/>
+          <a:ln xmlns:a="http://schemas.openxmlformats.org/drawingml/2006/main" w="0">
+            <a:noFill/>
+          </a:ln>
+        </p:spPr>
+        <p:txBody>
+          <a:bodyPr xmlns:a="http://schemas.openxmlformats.org/drawingml/2006/main" anchor="t">
+            <a:normAutofit fontScale="100000"/>
+          </a:bodyPr>
+          <a:lstStyle xmlns:a="http://schemas.openxmlformats.org/drawingml/2006/main"/>
+          <a:p xmlns:a="http://schemas.openxmlformats.org/drawingml/2006/main">
+            <a:pPr>
+              <a:defRPr sz="1950" b="0">
+                <a:solidFill>
+                  <a:srgbClr val="D4D4D8"/>
+                </a:solidFill>
+                <a:latin typeface="Arial"/>
+                <a:ea typeface="Arial"/>
+                <a:cs typeface="Arial"/>
+              </a:defRPr>
+            </a:pPr>
+            <a:r>
+              <a:rPr sz="1950" b="0">
+                <a:solidFill>
+                  <a:srgbClr val="D4D4D8"/>
+                </a:solidFill>
+                <a:latin typeface="Arial"/>
+                <a:ea typeface="Arial"/>
+                <a:cs typeface="Arial"/>
+              </a:rPr>
+              <a:t>Suppose %rsp is 0x1000 just after call has placed the return address on the stack.</a:t>
+            </a:r>
+          </a:p>
+          <a:p xmlns:a="http://schemas.openxmlformats.org/drawingml/2006/main">
+            <a:r>
+              <a:t/>
+            </a:r>
+          </a:p>
+          <a:p xmlns:a="http://schemas.openxmlformats.org/drawingml/2006/main">
+            <a:pPr>
+              <a:defRPr sz="1950" b="0">
+                <a:solidFill>
+                  <a:srgbClr val="D4D4D8"/>
+                </a:solidFill>
+                <a:latin typeface="Arial"/>
+                <a:ea typeface="Arial"/>
+                <a:cs typeface="Arial"/>
+              </a:defRPr>
+            </a:pPr>
+            <a:r>
+              <a:rPr sz="1950" b="0">
+                <a:solidFill>
+                  <a:srgbClr val="D4D4D8"/>
+                </a:solidFill>
+                <a:latin typeface="Arial"/>
+                <a:ea typeface="Arial"/>
+                <a:cs typeface="Arial"/>
+              </a:rPr>
+              <a:t>Follow the three setup instructions. Which address holds the saved %rbp? Where does the new frame begin?</a:t>
+            </a:r>
+          </a:p>
+        </p:txBody>
+      </p:sp>
+      <p:sp>
+        <p:nvSpPr>
+          <p:cNvPr id="4" name="">
+            <a:extLst xmlns:a="http://schemas.openxmlformats.org/drawingml/2006/main">
+              <a:ext uri="{FF2B5EF4-FFF2-40B4-BE49-F238E27FC236}">
+                <a16:creationId xmlns:a16="http://schemas.microsoft.com/office/drawing/2014/main" id="{076D16AC-6246-4BCF-AC54-52506BB24489}"/>
+              </a:ext>
+            </a:extLst>
+          </p:cNvPr>
+          <p:cNvSpPr>
+            <a:spLocks xmlns:a="http://schemas.openxmlformats.org/drawingml/2006/main" noGrp="1"/>
+          </p:cNvSpPr>
+          <p:nvPr/>
+        </p:nvSpPr>
+        <p:spPr>
+          <a:xfrm xmlns:a="http://schemas.openxmlformats.org/drawingml/2006/main">
+            <a:off x="6181725" y="2200275"/>
+            <a:ext cx="5238750" cy="3286125"/>
+          </a:xfrm>
+          <a:prstGeom xmlns:a="http://schemas.openxmlformats.org/drawingml/2006/main" prst="rect">
+            <a:avLst/>
+          </a:prstGeom>
+          <a:noFill xmlns:a="http://schemas.openxmlformats.org/drawingml/2006/main"/>
+          <a:ln xmlns:a="http://schemas.openxmlformats.org/drawingml/2006/main" w="0">
+            <a:noFill/>
+          </a:ln>
+        </p:spPr>
+        <p:txBody>
+          <a:bodyPr xmlns:a="http://schemas.openxmlformats.org/drawingml/2006/main" anchor="t">
+            <a:normAutofit fontScale="100000"/>
+          </a:bodyPr>
+          <a:lstStyle xmlns:a="http://schemas.openxmlformats.org/drawingml/2006/main"/>
+          <a:p xmlns:a="http://schemas.openxmlformats.org/drawingml/2006/main">
+            <a:pPr>
+              <a:defRPr sz="1650" b="0">
+                <a:solidFill>
+                  <a:srgbClr val="A7F3D0"/>
+                </a:solidFill>
+                <a:latin typeface="Courier New"/>
+                <a:ea typeface="Courier New"/>
+                <a:cs typeface="Courier New"/>
+              </a:defRPr>
+            </a:pPr>
+            <a:r>
+              <a:rPr sz="1650" b="0">
+                <a:solidFill>
+                  <a:srgbClr val="A7F3D0"/>
+                </a:solidFill>
+                <a:latin typeface="Courier New"/>
+                <a:ea typeface="Courier New"/>
+                <a:cs typeface="Courier New"/>
+              </a:rPr>
+              <a:t>Start             rsp = 0x1000</a:t>
+            </a:r>
+          </a:p>
+          <a:p xmlns:a="http://schemas.openxmlformats.org/drawingml/2006/main">
+            <a:pPr>
+              <a:defRPr sz="1650" b="0">
+                <a:solidFill>
+                  <a:srgbClr val="A7F3D0"/>
+                </a:solidFill>
+                <a:latin typeface="Courier New"/>
+                <a:ea typeface="Courier New"/>
+                <a:cs typeface="Courier New"/>
+              </a:defRPr>
+            </a:pPr>
+            <a:r>
+              <a:rPr sz="1650" b="0">
+                <a:solidFill>
+                  <a:srgbClr val="A7F3D0"/>
+                </a:solidFill>
+                <a:latin typeface="Courier New"/>
+                <a:ea typeface="Courier New"/>
+                <a:cs typeface="Courier New"/>
+              </a:rPr>
+              <a:t>pushq %rbp        rsp = 0x0ff8</a:t>
+            </a:r>
+          </a:p>
+          <a:p xmlns:a="http://schemas.openxmlformats.org/drawingml/2006/main">
+            <a:pPr>
+              <a:defRPr sz="1650" b="0">
+                <a:solidFill>
+                  <a:srgbClr val="A7F3D0"/>
+                </a:solidFill>
+                <a:latin typeface="Courier New"/>
+                <a:ea typeface="Courier New"/>
+                <a:cs typeface="Courier New"/>
+              </a:defRPr>
+            </a:pPr>
+            <a:r>
+              <a:rPr sz="1650" b="0">
+                <a:solidFill>
+                  <a:srgbClr val="A7F3D0"/>
+                </a:solidFill>
+                <a:latin typeface="Courier New"/>
+                <a:ea typeface="Courier New"/>
+                <a:cs typeface="Courier New"/>
+              </a:rPr>
+              <a:t>movq %rsp,%rbp    rbp = 0x0ff8</a:t>
+            </a:r>
+          </a:p>
+          <a:p xmlns:a="http://schemas.openxmlformats.org/drawingml/2006/main">
+            <a:pPr>
+              <a:defRPr sz="1650" b="0">
+                <a:solidFill>
+                  <a:srgbClr val="A7F3D0"/>
+                </a:solidFill>
+                <a:latin typeface="Courier New"/>
+                <a:ea typeface="Courier New"/>
+                <a:cs typeface="Courier New"/>
+              </a:defRPr>
+            </a:pPr>
+            <a:r>
+              <a:rPr sz="1650" b="0">
+                <a:solidFill>
+                  <a:srgbClr val="A7F3D0"/>
+                </a:solidFill>
+                <a:latin typeface="Courier New"/>
+                <a:ea typeface="Courier New"/>
+                <a:cs typeface="Courier New"/>
+              </a:rPr>
+              <a:t>subq $16,%rsp     rsp = 0x0fe8</a:t>
+            </a:r>
+          </a:p>
+          <a:p xmlns:a="http://schemas.openxmlformats.org/drawingml/2006/main">
+            <a:r>
+              <a:t/>
+            </a:r>
+          </a:p>
+          <a:p xmlns:a="http://schemas.openxmlformats.org/drawingml/2006/main">
+            <a:pPr>
+              <a:defRPr sz="1650" b="0">
+                <a:solidFill>
+                  <a:srgbClr val="A7F3D0"/>
+                </a:solidFill>
+                <a:latin typeface="Courier New"/>
+                <a:ea typeface="Courier New"/>
+                <a:cs typeface="Courier New"/>
+              </a:defRPr>
+            </a:pPr>
+            <a:r>
+              <a:rPr sz="1650" b="0">
+                <a:solidFill>
+                  <a:srgbClr val="A7F3D0"/>
+                </a:solidFill>
+                <a:latin typeface="Courier New"/>
+                <a:ea typeface="Courier New"/>
+                <a:cs typeface="Courier New"/>
+              </a:rPr>
+              <a:t>Saved rbp: [0x0ff8]</a:t>
+            </a:r>
+          </a:p>
+          <a:p xmlns:a="http://schemas.openxmlformats.org/drawingml/2006/main">
+            <a:pPr>
+              <a:defRPr sz="1650" b="0">
+                <a:solidFill>
+                  <a:srgbClr val="A7F3D0"/>
+                </a:solidFill>
+                <a:latin typeface="Courier New"/>
+                <a:ea typeface="Courier New"/>
+                <a:cs typeface="Courier New"/>
+              </a:defRPr>
+            </a:pPr>
+            <a:r>
+              <a:rPr sz="1650" b="0">
+                <a:solidFill>
+                  <a:srgbClr val="A7F3D0"/>
+                </a:solidFill>
+                <a:latin typeface="Courier New"/>
+                <a:ea typeface="Courier New"/>
+                <a:cs typeface="Courier New"/>
+              </a:rPr>
+              <a:t>Return address: [0x1000]</a:t>
+            </a:r>
+          </a:p>
+        </p:txBody>
+      </p:sp>
+      <p:sp>
+        <p:nvSpPr>
+          <p:cNvPr id="5" name="">
+            <a:extLst xmlns:a="http://schemas.openxmlformats.org/drawingml/2006/main">
+              <a:ext uri="{FF2B5EF4-FFF2-40B4-BE49-F238E27FC236}">
+                <a16:creationId xmlns:a16="http://schemas.microsoft.com/office/drawing/2014/main" id="{C76DE0B4-0C15-4123-8440-0FF11A619B0B}"/>
+              </a:ext>
+            </a:extLst>
+          </p:cNvPr>
+          <p:cNvSpPr>
+            <a:spLocks xmlns:a="http://schemas.openxmlformats.org/drawingml/2006/main" noGrp="1"/>
+          </p:cNvSpPr>
+          <p:nvPr/>
+        </p:nvSpPr>
+        <p:spPr>
+          <a:xfrm xmlns:a="http://schemas.openxmlformats.org/drawingml/2006/main">
+            <a:off x="685800" y="5743575"/>
+            <a:ext cx="10191750" cy="428625"/>
+          </a:xfrm>
+          <a:prstGeom xmlns:a="http://schemas.openxmlformats.org/drawingml/2006/main" prst="rect">
+            <a:avLst/>
+          </a:prstGeom>
+          <a:noFill xmlns:a="http://schemas.openxmlformats.org/drawingml/2006/main"/>
+          <a:ln xmlns:a="http://schemas.openxmlformats.org/drawingml/2006/main" w="0">
+            <a:noFill/>
+          </a:ln>
+        </p:spPr>
+        <p:txBody>
+          <a:bodyPr xmlns:a="http://schemas.openxmlformats.org/drawingml/2006/main" anchor="t">
+            <a:normAutofit fontScale="100000"/>
+          </a:bodyPr>
+          <a:lstStyle xmlns:a="http://schemas.openxmlformats.org/drawingml/2006/main"/>
+          <a:p xmlns:a="http://schemas.openxmlformats.org/drawingml/2006/main">
+            <a:pPr>
+              <a:defRPr sz="1350" b="0">
+                <a:solidFill>
+                  <a:srgbClr val="A1A1AA"/>
+                </a:solidFill>
+                <a:latin typeface="Arial"/>
+                <a:ea typeface="Arial"/>
+                <a:cs typeface="Arial"/>
+              </a:defRPr>
+            </a:pPr>
+            <a:r>
+              <a:rPr sz="1350" b="0">
+                <a:solidFill>
+                  <a:srgbClr val="A1A1AA"/>
+                </a:solidFill>
+                <a:latin typeface="Arial"/>
+                <a:ea typeface="Arial"/>
+                <a:cs typeface="Arial"/>
+              </a:rPr>
+              <a:t>Local stack space is at addresses below the new %rbp.</a:t>
+            </a:r>
+          </a:p>
+        </p:txBody>
+      </p:sp>
+      <p:sp>
+        <p:nvSpPr>
+          <p:cNvPr id="6" name="">
+            <a:extLst xmlns:a="http://schemas.openxmlformats.org/drawingml/2006/main">
+              <a:ext uri="{FF2B5EF4-FFF2-40B4-BE49-F238E27FC236}">
+                <a16:creationId xmlns:a16="http://schemas.microsoft.com/office/drawing/2014/main" id="{387BB551-D0A1-42CB-A4D8-FB6926F1B6D6}"/>
+              </a:ext>
+            </a:extLst>
+          </p:cNvPr>
+          <p:cNvSpPr>
+            <a:spLocks xmlns:a="http://schemas.openxmlformats.org/drawingml/2006/main" noGrp="1"/>
+          </p:cNvSpPr>
+          <p:nvPr/>
+        </p:nvSpPr>
+        <p:spPr>
+          <a:xfrm xmlns:a="http://schemas.openxmlformats.org/drawingml/2006/main">
+            <a:off x="10477500" y="6210300"/>
+            <a:ext cx="1000125" cy="219075"/>
+          </a:xfrm>
+          <a:prstGeom xmlns:a="http://schemas.openxmlformats.org/drawingml/2006/main" prst="rect">
+            <a:avLst/>
+          </a:prstGeom>
+          <a:noFill xmlns:a="http://schemas.openxmlformats.org/drawingml/2006/main"/>
+          <a:ln xmlns:a="http://schemas.openxmlformats.org/drawingml/2006/main" w="0">
+            <a:noFill/>
+          </a:ln>
+        </p:spPr>
+        <p:txBody>
+          <a:bodyPr xmlns:a="http://schemas.openxmlformats.org/drawingml/2006/main" anchor="t">
+            <a:normAutofit fontScale="79762"/>
+          </a:bodyPr>
+          <a:lstStyle xmlns:a="http://schemas.openxmlformats.org/drawingml/2006/main"/>
+          <a:p xmlns:a="http://schemas.openxmlformats.org/drawingml/2006/main">
+            <a:pPr>
+              <a:defRPr sz="1050" b="0">
+                <a:solidFill>
+                  <a:srgbClr val="71717A"/>
+                </a:solidFill>
+                <a:latin typeface="Courier New"/>
+                <a:ea typeface="Courier New"/>
+                <a:cs typeface="Courier New"/>
+              </a:defRPr>
+            </a:pPr>
+            <a:r>
+              <a:rPr sz="1050" b="0">
+                <a:solidFill>
+                  <a:srgbClr val="71717A"/>
+                </a:solidFill>
+                <a:latin typeface="Courier New"/>
+                <a:ea typeface="Courier New"/>
+                <a:cs typeface="Courier New"/>
+              </a:rPr>
+              <a:t>22 / 26</a:t>
+            </a:r>
+          </a:p>
+        </p:txBody>
+      </p:sp>
+    </p:spTree>
+    <p:extLst>
+      <p:ext uri="{BB962C8B-B14F-4D97-AF65-F5344CB8AC3E}">
+        <p14:creationId xmlns:p14="http://schemas.microsoft.com/office/powerpoint/2010/main" val="446938757"/>
+      </p:ext>
+    </p:extLst>
+  </p:cSld>
+</p:sld>
+</file>
+
+<file path=ppt/slides/slide23.xml><?xml version="1.0" encoding="utf-8"?>
+<p:sld xmlns:p="http://schemas.openxmlformats.org/presentationml/2006/main">
+  <p:cSld>
+    <p:bg>
+      <p:bgPr>
+        <a:solidFill xmlns:a="http://schemas.openxmlformats.org/drawingml/2006/main">
+          <a:srgbClr val="09090B"/>
+        </a:solidFill>
+      </p:bgPr>
+    </p:bg>
+    <p:spTree>
+      <p:nvGrpSpPr>
+        <p:cNvPr id="1" name=""/>
+        <p:cNvGrpSpPr/>
+        <p:nvPr/>
+      </p:nvGrpSpPr>
+      <p:grpSpPr>
+        <a:xfrm xmlns:a="http://schemas.openxmlformats.org/drawingml/2006/main"/>
+      </p:grpSpPr>
+      <p:sp>
+        <p:nvSpPr>
+          <p:cNvPr id="7" name="">
+            <a:extLst xmlns:a="http://schemas.openxmlformats.org/drawingml/2006/main">
+              <a:ext uri="{FF2B5EF4-FFF2-40B4-BE49-F238E27FC236}">
+                <a16:creationId xmlns:a16="http://schemas.microsoft.com/office/drawing/2014/main" id="{8590715E-5556-4506-99CB-3CFCFF466267}"/>
+              </a:ext>
+            </a:extLst>
+          </p:cNvPr>
+          <p:cNvSpPr>
+            <a:spLocks xmlns:a="http://schemas.openxmlformats.org/drawingml/2006/main" noGrp="1"/>
+          </p:cNvSpPr>
+          <p:nvPr/>
+        </p:nvSpPr>
+        <p:spPr>
+          <a:xfrm xmlns:a="http://schemas.openxmlformats.org/drawingml/2006/main">
+            <a:off x="685800" y="361950"/>
+            <a:ext cx="10477500" cy="285750"/>
+          </a:xfrm>
+          <a:prstGeom xmlns:a="http://schemas.openxmlformats.org/drawingml/2006/main" prst="rect">
+            <a:avLst/>
+          </a:prstGeom>
+          <a:noFill xmlns:a="http://schemas.openxmlformats.org/drawingml/2006/main"/>
+          <a:ln xmlns:a="http://schemas.openxmlformats.org/drawingml/2006/main" w="0">
+            <a:noFill/>
+          </a:ln>
+        </p:spPr>
+        <p:txBody>
+          <a:bodyPr xmlns:a="http://schemas.openxmlformats.org/drawingml/2006/main" anchor="t">
+            <a:normAutofit fontScale="100000"/>
+          </a:bodyPr>
+          <a:lstStyle xmlns:a="http://schemas.openxmlformats.org/drawingml/2006/main"/>
+          <a:p xmlns:a="http://schemas.openxmlformats.org/drawingml/2006/main">
+            <a:pPr>
+              <a:defRPr sz="1275" b="0">
+                <a:solidFill>
+                  <a:srgbClr val="6EE7B7"/>
+                </a:solidFill>
+                <a:latin typeface="Courier New"/>
+                <a:ea typeface="Courier New"/>
+                <a:cs typeface="Courier New"/>
+              </a:defRPr>
+            </a:pPr>
+            <a:r>
+              <a:rPr sz="1275" b="0">
+                <a:solidFill>
+                  <a:srgbClr val="6EE7B7"/>
+                </a:solidFill>
+                <a:latin typeface="Courier New"/>
+                <a:ea typeface="Courier New"/>
+                <a:cs typeface="Courier New"/>
+              </a:rPr>
+              <a:t>LECTURE 8 · C MEETS MEMORY</a:t>
+            </a:r>
+          </a:p>
+        </p:txBody>
+      </p:sp>
+      <p:sp>
+        <p:nvSpPr>
+          <p:cNvPr id="2" name="">
+            <a:extLst xmlns:a="http://schemas.openxmlformats.org/drawingml/2006/main">
+              <a:ext uri="{FF2B5EF4-FFF2-40B4-BE49-F238E27FC236}">
+                <a16:creationId xmlns:a16="http://schemas.microsoft.com/office/drawing/2014/main" id="{82D60D5C-5097-4AFC-A226-6F86C0B22CD8}"/>
+              </a:ext>
+            </a:extLst>
+          </p:cNvPr>
+          <p:cNvSpPr>
+            <a:spLocks xmlns:a="http://schemas.openxmlformats.org/drawingml/2006/main" noGrp="1"/>
+          </p:cNvSpPr>
+          <p:nvPr/>
+        </p:nvSpPr>
+        <p:spPr>
+          <a:xfrm xmlns:a="http://schemas.openxmlformats.org/drawingml/2006/main">
+            <a:off x="685800" y="885825"/>
+            <a:ext cx="10820400" cy="1066800"/>
+          </a:xfrm>
+          <a:prstGeom xmlns:a="http://schemas.openxmlformats.org/drawingml/2006/main" prst="rect">
+            <a:avLst/>
+          </a:prstGeom>
+          <a:noFill xmlns:a="http://schemas.openxmlformats.org/drawingml/2006/main"/>
+          <a:ln xmlns:a="http://schemas.openxmlformats.org/drawingml/2006/main" w="0">
+            <a:noFill/>
+          </a:ln>
+        </p:spPr>
+        <p:txBody>
+          <a:bodyPr xmlns:a="http://schemas.openxmlformats.org/drawingml/2006/main" anchor="t">
+            <a:normAutofit fontScale="100000"/>
+          </a:bodyPr>
+          <a:lstStyle xmlns:a="http://schemas.openxmlformats.org/drawingml/2006/main"/>
+          <a:p xmlns:a="http://schemas.openxmlformats.org/drawingml/2006/main">
+            <a:pPr>
+              <a:defRPr sz="3600" b="0">
+                <a:solidFill>
+                  <a:srgbClr val="FAFAFA"/>
+                </a:solidFill>
+                <a:latin typeface="Arial"/>
+                <a:ea typeface="Arial"/>
+                <a:cs typeface="Arial"/>
+              </a:defRPr>
+            </a:pPr>
+            <a:r>
+              <a:rPr sz="3600" b="0">
+                <a:solidFill>
+                  <a:srgbClr val="FAFAFA"/>
+                </a:solidFill>
+                <a:latin typeface="Arial"/>
+                <a:ea typeface="Arial"/>
+                <a:cs typeface="Arial"/>
+              </a:rPr>
+              <a:t>Arrays and sizeof</a:t>
+            </a:r>
+          </a:p>
+        </p:txBody>
+      </p:sp>
+      <p:sp>
+        <p:nvSpPr>
+          <p:cNvPr id="3" name="">
+            <a:extLst xmlns:a="http://schemas.openxmlformats.org/drawingml/2006/main">
+              <a:ext uri="{FF2B5EF4-FFF2-40B4-BE49-F238E27FC236}">
+                <a16:creationId xmlns:a16="http://schemas.microsoft.com/office/drawing/2014/main" id="{8824CBCE-7260-4C05-873A-8106C8431E65}"/>
+              </a:ext>
+            </a:extLst>
+          </p:cNvPr>
+          <p:cNvSpPr>
+            <a:spLocks xmlns:a="http://schemas.openxmlformats.org/drawingml/2006/main" noGrp="1"/>
+          </p:cNvSpPr>
+          <p:nvPr/>
+        </p:nvSpPr>
+        <p:spPr>
+          <a:xfrm xmlns:a="http://schemas.openxmlformats.org/drawingml/2006/main">
+            <a:off x="685800" y="2200275"/>
+            <a:ext cx="4857750" cy="3124200"/>
+          </a:xfrm>
+          <a:prstGeom xmlns:a="http://schemas.openxmlformats.org/drawingml/2006/main" prst="rect">
+            <a:avLst/>
+          </a:prstGeom>
+          <a:noFill xmlns:a="http://schemas.openxmlformats.org/drawingml/2006/main"/>
+          <a:ln xmlns:a="http://schemas.openxmlformats.org/drawingml/2006/main" w="0">
+            <a:noFill/>
+          </a:ln>
+        </p:spPr>
+        <p:txBody>
+          <a:bodyPr xmlns:a="http://schemas.openxmlformats.org/drawingml/2006/main" anchor="t">
+            <a:normAutofit fontScale="100000"/>
+          </a:bodyPr>
+          <a:lstStyle xmlns:a="http://schemas.openxmlformats.org/drawingml/2006/main"/>
+          <a:p xmlns:a="http://schemas.openxmlformats.org/drawingml/2006/main">
+            <a:pPr>
+              <a:defRPr sz="1950" b="0">
+                <a:solidFill>
+                  <a:srgbClr val="D4D4D8"/>
+                </a:solidFill>
+                <a:latin typeface="Arial"/>
+                <a:ea typeface="Arial"/>
+                <a:cs typeface="Arial"/>
+              </a:defRPr>
+            </a:pPr>
+            <a:r>
+              <a:rPr sz="1950" b="0">
+                <a:solidFill>
+                  <a:srgbClr val="D4D4D8"/>
+                </a:solidFill>
+                <a:latin typeface="Arial"/>
+                <a:ea typeface="Arial"/>
+                <a:cs typeface="Arial"/>
+              </a:rPr>
+              <a:t>An array stores elements in consecutive memory. In its own scope, sizeof array measures its total bytes.</a:t>
+            </a:r>
+          </a:p>
+          <a:p xmlns:a="http://schemas.openxmlformats.org/drawingml/2006/main">
+            <a:r>
+              <a:t/>
+            </a:r>
+          </a:p>
+          <a:p xmlns:a="http://schemas.openxmlformats.org/drawingml/2006/main">
+            <a:pPr>
+              <a:defRPr sz="1950" b="0">
+                <a:solidFill>
+                  <a:srgbClr val="D4D4D8"/>
+                </a:solidFill>
+                <a:latin typeface="Arial"/>
+                <a:ea typeface="Arial"/>
+                <a:cs typeface="Arial"/>
+              </a:defRPr>
+            </a:pPr>
+            <a:r>
+              <a:rPr sz="1950" b="0">
+                <a:solidFill>
+                  <a:srgbClr val="D4D4D8"/>
+                </a:solidFill>
+                <a:latin typeface="Arial"/>
+                <a:ea typeface="Arial"/>
+                <a:cs typeface="Arial"/>
+              </a:rPr>
+              <a:t>A function parameter written as int a[] is treated as a pointer, so sizeof a there measures the pointer.</a:t>
+            </a:r>
+          </a:p>
+        </p:txBody>
+      </p:sp>
+      <p:sp>
+        <p:nvSpPr>
+          <p:cNvPr id="4" name="">
+            <a:extLst xmlns:a="http://schemas.openxmlformats.org/drawingml/2006/main">
+              <a:ext uri="{FF2B5EF4-FFF2-40B4-BE49-F238E27FC236}">
+                <a16:creationId xmlns:a16="http://schemas.microsoft.com/office/drawing/2014/main" id="{53F3EF8A-5CA0-46A6-9CBD-8AE88915A418}"/>
+              </a:ext>
+            </a:extLst>
+          </p:cNvPr>
+          <p:cNvSpPr>
+            <a:spLocks xmlns:a="http://schemas.openxmlformats.org/drawingml/2006/main" noGrp="1"/>
+          </p:cNvSpPr>
+          <p:nvPr/>
+        </p:nvSpPr>
+        <p:spPr>
+          <a:xfrm xmlns:a="http://schemas.openxmlformats.org/drawingml/2006/main">
+            <a:off x="6181725" y="2200275"/>
+            <a:ext cx="5238750" cy="3286125"/>
+          </a:xfrm>
+          <a:prstGeom xmlns:a="http://schemas.openxmlformats.org/drawingml/2006/main" prst="rect">
+            <a:avLst/>
+          </a:prstGeom>
+          <a:noFill xmlns:a="http://schemas.openxmlformats.org/drawingml/2006/main"/>
+          <a:ln xmlns:a="http://schemas.openxmlformats.org/drawingml/2006/main" w="0">
+            <a:noFill/>
+          </a:ln>
+        </p:spPr>
+        <p:txBody>
+          <a:bodyPr xmlns:a="http://schemas.openxmlformats.org/drawingml/2006/main" anchor="t">
+            <a:normAutofit fontScale="100000"/>
+          </a:bodyPr>
+          <a:lstStyle xmlns:a="http://schemas.openxmlformats.org/drawingml/2006/main"/>
+          <a:p xmlns:a="http://schemas.openxmlformats.org/drawingml/2006/main">
+            <a:pPr>
+              <a:defRPr sz="1650" b="0">
+                <a:solidFill>
+                  <a:srgbClr val="A7F3D0"/>
+                </a:solidFill>
+                <a:latin typeface="Courier New"/>
+                <a:ea typeface="Courier New"/>
+                <a:cs typeface="Courier New"/>
+              </a:defRPr>
+            </a:pPr>
+            <a:r>
+              <a:rPr sz="1650" b="0">
+                <a:solidFill>
+                  <a:srgbClr val="A7F3D0"/>
+                </a:solidFill>
+                <a:latin typeface="Courier New"/>
+                <a:ea typeface="Courier New"/>
+                <a:cs typeface="Courier New"/>
+              </a:rPr>
+              <a:t>int a[5];</a:t>
+            </a:r>
+          </a:p>
+          <a:p xmlns:a="http://schemas.openxmlformats.org/drawingml/2006/main">
+            <a:pPr>
+              <a:defRPr sz="1650" b="0">
+                <a:solidFill>
+                  <a:srgbClr val="A7F3D0"/>
+                </a:solidFill>
+                <a:latin typeface="Courier New"/>
+                <a:ea typeface="Courier New"/>
+                <a:cs typeface="Courier New"/>
+              </a:defRPr>
+            </a:pPr>
+            <a:r>
+              <a:rPr sz="1650" b="0">
+                <a:solidFill>
+                  <a:srgbClr val="A7F3D0"/>
+                </a:solidFill>
+                <a:latin typeface="Courier New"/>
+                <a:ea typeface="Courier New"/>
+                <a:cs typeface="Courier New"/>
+              </a:rPr>
+              <a:t>sizeof a / sizeof a[0]  → 5</a:t>
+            </a:r>
+          </a:p>
+          <a:p xmlns:a="http://schemas.openxmlformats.org/drawingml/2006/main">
+            <a:r>
+              <a:t/>
+            </a:r>
+          </a:p>
+          <a:p xmlns:a="http://schemas.openxmlformats.org/drawingml/2006/main">
+            <a:pPr>
+              <a:defRPr sz="1650" b="0">
+                <a:solidFill>
+                  <a:srgbClr val="A7F3D0"/>
+                </a:solidFill>
+                <a:latin typeface="Courier New"/>
+                <a:ea typeface="Courier New"/>
+                <a:cs typeface="Courier New"/>
+              </a:defRPr>
+            </a:pPr>
+            <a:r>
+              <a:rPr sz="1650" b="0">
+                <a:solidFill>
+                  <a:srgbClr val="A7F3D0"/>
+                </a:solidFill>
+                <a:latin typeface="Courier New"/>
+                <a:ea typeface="Courier New"/>
+                <a:cs typeface="Courier New"/>
+              </a:rPr>
+              <a:t>void f(int a[], int length) {</a:t>
+            </a:r>
+          </a:p>
+          <a:p xmlns:a="http://schemas.openxmlformats.org/drawingml/2006/main">
+            <a:pPr>
+              <a:defRPr sz="1650" b="0">
+                <a:solidFill>
+                  <a:srgbClr val="A7F3D0"/>
+                </a:solidFill>
+                <a:latin typeface="Courier New"/>
+                <a:ea typeface="Courier New"/>
+                <a:cs typeface="Courier New"/>
+              </a:defRPr>
+            </a:pPr>
+            <a:r>
+              <a:rPr sz="1650" b="0">
+                <a:solidFill>
+                  <a:srgbClr val="A7F3D0"/>
+                </a:solidFill>
+                <a:latin typeface="Courier New"/>
+                <a:ea typeface="Courier New"/>
+                <a:cs typeface="Courier New"/>
+              </a:rPr>
+              <a:t>    // use length for bounds</a:t>
+            </a:r>
+          </a:p>
+          <a:p xmlns:a="http://schemas.openxmlformats.org/drawingml/2006/main">
+            <a:pPr>
+              <a:defRPr sz="1650" b="0">
+                <a:solidFill>
+                  <a:srgbClr val="A7F3D0"/>
+                </a:solidFill>
+                <a:latin typeface="Courier New"/>
+                <a:ea typeface="Courier New"/>
+                <a:cs typeface="Courier New"/>
+              </a:defRPr>
+            </a:pPr>
+            <a:r>
+              <a:rPr sz="1650" b="0">
+                <a:solidFill>
+                  <a:srgbClr val="A7F3D0"/>
+                </a:solidFill>
+                <a:latin typeface="Courier New"/>
+                <a:ea typeface="Courier New"/>
+                <a:cs typeface="Courier New"/>
+              </a:rPr>
+              <a:t>}</a:t>
+            </a:r>
+          </a:p>
+        </p:txBody>
+      </p:sp>
+      <p:sp>
+        <p:nvSpPr>
+          <p:cNvPr id="5" name="">
+            <a:extLst xmlns:a="http://schemas.openxmlformats.org/drawingml/2006/main">
+              <a:ext uri="{FF2B5EF4-FFF2-40B4-BE49-F238E27FC236}">
+                <a16:creationId xmlns:a16="http://schemas.microsoft.com/office/drawing/2014/main" id="{55CDC612-C221-42AB-9D87-FE77B53CF706}"/>
+              </a:ext>
+            </a:extLst>
+          </p:cNvPr>
+          <p:cNvSpPr>
+            <a:spLocks xmlns:a="http://schemas.openxmlformats.org/drawingml/2006/main" noGrp="1"/>
+          </p:cNvSpPr>
+          <p:nvPr/>
+        </p:nvSpPr>
+        <p:spPr>
+          <a:xfrm xmlns:a="http://schemas.openxmlformats.org/drawingml/2006/main">
+            <a:off x="685800" y="5743575"/>
+            <a:ext cx="10191750" cy="428625"/>
+          </a:xfrm>
+          <a:prstGeom xmlns:a="http://schemas.openxmlformats.org/drawingml/2006/main" prst="rect">
+            <a:avLst/>
+          </a:prstGeom>
+          <a:noFill xmlns:a="http://schemas.openxmlformats.org/drawingml/2006/main"/>
+          <a:ln xmlns:a="http://schemas.openxmlformats.org/drawingml/2006/main" w="0">
+            <a:noFill/>
+          </a:ln>
+        </p:spPr>
+        <p:txBody>
+          <a:bodyPr xmlns:a="http://schemas.openxmlformats.org/drawingml/2006/main" anchor="t">
+            <a:normAutofit fontScale="100000"/>
+          </a:bodyPr>
+          <a:lstStyle xmlns:a="http://schemas.openxmlformats.org/drawingml/2006/main"/>
+          <a:p xmlns:a="http://schemas.openxmlformats.org/drawingml/2006/main">
+            <a:pPr>
+              <a:defRPr sz="1350" b="0">
+                <a:solidFill>
+                  <a:srgbClr val="A1A1AA"/>
+                </a:solidFill>
+                <a:latin typeface="Arial"/>
+                <a:ea typeface="Arial"/>
+                <a:cs typeface="Arial"/>
+              </a:defRPr>
+            </a:pPr>
+            <a:r>
+              <a:rPr sz="1350" b="0">
+                <a:solidFill>
+                  <a:srgbClr val="A1A1AA"/>
+                </a:solidFill>
+                <a:latin typeface="Arial"/>
+                <a:ea typeface="Arial"/>
+                <a:cs typeface="Arial"/>
+              </a:rPr>
+              <a:t>For a VLA, sizeof can be evaluated at run time. In a parameter, it still describes a pointer.</a:t>
+            </a:r>
+          </a:p>
+        </p:txBody>
+      </p:sp>
+      <p:sp>
+        <p:nvSpPr>
+          <p:cNvPr id="6" name="">
+            <a:extLst xmlns:a="http://schemas.openxmlformats.org/drawingml/2006/main">
+              <a:ext uri="{FF2B5EF4-FFF2-40B4-BE49-F238E27FC236}">
+                <a16:creationId xmlns:a16="http://schemas.microsoft.com/office/drawing/2014/main" id="{ADD73477-4FA3-4C43-95EC-0D60D66F183D}"/>
+              </a:ext>
+            </a:extLst>
+          </p:cNvPr>
+          <p:cNvSpPr>
+            <a:spLocks xmlns:a="http://schemas.openxmlformats.org/drawingml/2006/main" noGrp="1"/>
+          </p:cNvSpPr>
+          <p:nvPr/>
+        </p:nvSpPr>
+        <p:spPr>
+          <a:xfrm xmlns:a="http://schemas.openxmlformats.org/drawingml/2006/main">
+            <a:off x="10477500" y="6210300"/>
+            <a:ext cx="1000125" cy="219075"/>
+          </a:xfrm>
+          <a:prstGeom xmlns:a="http://schemas.openxmlformats.org/drawingml/2006/main" prst="rect">
+            <a:avLst/>
+          </a:prstGeom>
+          <a:noFill xmlns:a="http://schemas.openxmlformats.org/drawingml/2006/main"/>
+          <a:ln xmlns:a="http://schemas.openxmlformats.org/drawingml/2006/main" w="0">
+            <a:noFill/>
+          </a:ln>
+        </p:spPr>
+        <p:txBody>
+          <a:bodyPr xmlns:a="http://schemas.openxmlformats.org/drawingml/2006/main" anchor="t">
+            <a:normAutofit fontScale="79762"/>
+          </a:bodyPr>
+          <a:lstStyle xmlns:a="http://schemas.openxmlformats.org/drawingml/2006/main"/>
+          <a:p xmlns:a="http://schemas.openxmlformats.org/drawingml/2006/main">
+            <a:pPr>
+              <a:defRPr sz="1050" b="0">
+                <a:solidFill>
+                  <a:srgbClr val="71717A"/>
+                </a:solidFill>
+                <a:latin typeface="Courier New"/>
+                <a:ea typeface="Courier New"/>
+                <a:cs typeface="Courier New"/>
+              </a:defRPr>
+            </a:pPr>
+            <a:r>
+              <a:rPr sz="1050" b="0">
+                <a:solidFill>
+                  <a:srgbClr val="71717A"/>
+                </a:solidFill>
+                <a:latin typeface="Courier New"/>
+                <a:ea typeface="Courier New"/>
+                <a:cs typeface="Courier New"/>
+              </a:rPr>
+              <a:t>23 / 26</a:t>
+            </a:r>
+          </a:p>
+        </p:txBody>
+      </p:sp>
+    </p:spTree>
+    <p:extLst>
+      <p:ext uri="{BB962C8B-B14F-4D97-AF65-F5344CB8AC3E}">
+        <p14:creationId xmlns:p14="http://schemas.microsoft.com/office/powerpoint/2010/main" val="131361384"/>
+      </p:ext>
+    </p:extLst>
+  </p:cSld>
+</p:sld>
+</file>
+
+<file path=ppt/slides/slide24.xml><?xml version="1.0" encoding="utf-8"?>
+<p:sld xmlns:p="http://schemas.openxmlformats.org/presentationml/2006/main">
+  <p:cSld>
+    <p:bg>
+      <p:bgPr>
+        <a:solidFill xmlns:a="http://schemas.openxmlformats.org/drawingml/2006/main">
+          <a:srgbClr val="09090B"/>
+        </a:solidFill>
+      </p:bgPr>
+    </p:bg>
+    <p:spTree>
+      <p:nvGrpSpPr>
+        <p:cNvPr id="1" name=""/>
+        <p:cNvGrpSpPr/>
+        <p:nvPr/>
+      </p:nvGrpSpPr>
+      <p:grpSpPr>
+        <a:xfrm xmlns:a="http://schemas.openxmlformats.org/drawingml/2006/main"/>
+      </p:grpSpPr>
+      <p:sp>
+        <p:nvSpPr>
+          <p:cNvPr id="7" name="">
+            <a:extLst xmlns:a="http://schemas.openxmlformats.org/drawingml/2006/main">
+              <a:ext uri="{FF2B5EF4-FFF2-40B4-BE49-F238E27FC236}">
+                <a16:creationId xmlns:a16="http://schemas.microsoft.com/office/drawing/2014/main" id="{1A4E527B-75C9-41BB-8BD2-46E59ACF945C}"/>
+              </a:ext>
+            </a:extLst>
+          </p:cNvPr>
+          <p:cNvSpPr>
+            <a:spLocks xmlns:a="http://schemas.openxmlformats.org/drawingml/2006/main" noGrp="1"/>
+          </p:cNvSpPr>
+          <p:nvPr/>
+        </p:nvSpPr>
+        <p:spPr>
+          <a:xfrm xmlns:a="http://schemas.openxmlformats.org/drawingml/2006/main">
+            <a:off x="685800" y="361950"/>
+            <a:ext cx="10477500" cy="285750"/>
+          </a:xfrm>
+          <a:prstGeom xmlns:a="http://schemas.openxmlformats.org/drawingml/2006/main" prst="rect">
+            <a:avLst/>
+          </a:prstGeom>
+          <a:noFill xmlns:a="http://schemas.openxmlformats.org/drawingml/2006/main"/>
+          <a:ln xmlns:a="http://schemas.openxmlformats.org/drawingml/2006/main" w="0">
+            <a:noFill/>
+          </a:ln>
+        </p:spPr>
+        <p:txBody>
+          <a:bodyPr xmlns:a="http://schemas.openxmlformats.org/drawingml/2006/main" anchor="t">
+            <a:normAutofit fontScale="100000"/>
+          </a:bodyPr>
+          <a:lstStyle xmlns:a="http://schemas.openxmlformats.org/drawingml/2006/main"/>
+          <a:p xmlns:a="http://schemas.openxmlformats.org/drawingml/2006/main">
+            <a:pPr>
+              <a:defRPr sz="1275" b="0">
+                <a:solidFill>
+                  <a:srgbClr val="6EE7B7"/>
+                </a:solidFill>
+                <a:latin typeface="Courier New"/>
+                <a:ea typeface="Courier New"/>
+                <a:cs typeface="Courier New"/>
+              </a:defRPr>
+            </a:pPr>
+            <a:r>
+              <a:rPr sz="1275" b="0">
+                <a:solidFill>
+                  <a:srgbClr val="6EE7B7"/>
+                </a:solidFill>
+                <a:latin typeface="Courier New"/>
+                <a:ea typeface="Courier New"/>
+                <a:cs typeface="Courier New"/>
+              </a:rPr>
+              <a:t>LECTURE 8 · MEMORY OWNERSHIP</a:t>
+            </a:r>
+          </a:p>
+        </p:txBody>
+      </p:sp>
+      <p:sp>
+        <p:nvSpPr>
+          <p:cNvPr id="2" name="">
+            <a:extLst xmlns:a="http://schemas.openxmlformats.org/drawingml/2006/main">
+              <a:ext uri="{FF2B5EF4-FFF2-40B4-BE49-F238E27FC236}">
+                <a16:creationId xmlns:a16="http://schemas.microsoft.com/office/drawing/2014/main" id="{88781F12-D1F6-4F0F-8C4F-6D14E0665F1D}"/>
+              </a:ext>
+            </a:extLst>
+          </p:cNvPr>
+          <p:cNvSpPr>
+            <a:spLocks xmlns:a="http://schemas.openxmlformats.org/drawingml/2006/main" noGrp="1"/>
+          </p:cNvSpPr>
+          <p:nvPr/>
+        </p:nvSpPr>
+        <p:spPr>
+          <a:xfrm xmlns:a="http://schemas.openxmlformats.org/drawingml/2006/main">
+            <a:off x="685800" y="885825"/>
+            <a:ext cx="10820400" cy="1066800"/>
+          </a:xfrm>
+          <a:prstGeom xmlns:a="http://schemas.openxmlformats.org/drawingml/2006/main" prst="rect">
+            <a:avLst/>
+          </a:prstGeom>
+          <a:noFill xmlns:a="http://schemas.openxmlformats.org/drawingml/2006/main"/>
+          <a:ln xmlns:a="http://schemas.openxmlformats.org/drawingml/2006/main" w="0">
+            <a:noFill/>
+          </a:ln>
+        </p:spPr>
+        <p:txBody>
+          <a:bodyPr xmlns:a="http://schemas.openxmlformats.org/drawingml/2006/main" anchor="t">
+            <a:normAutofit fontScale="100000"/>
+          </a:bodyPr>
+          <a:lstStyle xmlns:a="http://schemas.openxmlformats.org/drawingml/2006/main"/>
+          <a:p xmlns:a="http://schemas.openxmlformats.org/drawingml/2006/main">
+            <a:pPr>
+              <a:defRPr sz="3600" b="0">
+                <a:solidFill>
+                  <a:srgbClr val="FAFAFA"/>
+                </a:solidFill>
+                <a:latin typeface="Arial"/>
+                <a:ea typeface="Arial"/>
+                <a:cs typeface="Arial"/>
+              </a:defRPr>
+            </a:pPr>
+            <a:r>
+              <a:rPr sz="3600" b="0">
+                <a:solidFill>
+                  <a:srgbClr val="FAFAFA"/>
+                </a:solidFill>
+                <a:latin typeface="Arial"/>
+                <a:ea typeface="Arial"/>
+                <a:cs typeface="Arial"/>
+              </a:rPr>
+              <a:t>Variable length arrays and lifetime</a:t>
+            </a:r>
+          </a:p>
+        </p:txBody>
+      </p:sp>
+      <p:sp>
+        <p:nvSpPr>
+          <p:cNvPr id="3" name="">
+            <a:extLst xmlns:a="http://schemas.openxmlformats.org/drawingml/2006/main">
+              <a:ext uri="{FF2B5EF4-FFF2-40B4-BE49-F238E27FC236}">
+                <a16:creationId xmlns:a16="http://schemas.microsoft.com/office/drawing/2014/main" id="{1965108D-54FA-4EA6-B69B-816C27061671}"/>
+              </a:ext>
+            </a:extLst>
+          </p:cNvPr>
+          <p:cNvSpPr>
+            <a:spLocks xmlns:a="http://schemas.openxmlformats.org/drawingml/2006/main" noGrp="1"/>
+          </p:cNvSpPr>
+          <p:nvPr/>
+        </p:nvSpPr>
+        <p:spPr>
+          <a:xfrm xmlns:a="http://schemas.openxmlformats.org/drawingml/2006/main">
+            <a:off x="685800" y="2200275"/>
+            <a:ext cx="4857750" cy="3124200"/>
+          </a:xfrm>
+          <a:prstGeom xmlns:a="http://schemas.openxmlformats.org/drawingml/2006/main" prst="rect">
+            <a:avLst/>
+          </a:prstGeom>
+          <a:noFill xmlns:a="http://schemas.openxmlformats.org/drawingml/2006/main"/>
+          <a:ln xmlns:a="http://schemas.openxmlformats.org/drawingml/2006/main" w="0">
+            <a:noFill/>
+          </a:ln>
+        </p:spPr>
+        <p:txBody>
+          <a:bodyPr xmlns:a="http://schemas.openxmlformats.org/drawingml/2006/main" anchor="t">
+            <a:normAutofit fontScale="100000"/>
+          </a:bodyPr>
+          <a:lstStyle xmlns:a="http://schemas.openxmlformats.org/drawingml/2006/main"/>
+          <a:p xmlns:a="http://schemas.openxmlformats.org/drawingml/2006/main">
+            <a:pPr>
+              <a:defRPr sz="1950" b="0">
+                <a:solidFill>
+                  <a:srgbClr val="D4D4D8"/>
+                </a:solidFill>
+                <a:latin typeface="Arial"/>
+                <a:ea typeface="Arial"/>
+                <a:cs typeface="Arial"/>
+              </a:defRPr>
+            </a:pPr>
+            <a:r>
+              <a:rPr sz="1950" b="0">
+                <a:solidFill>
+                  <a:srgbClr val="D4D4D8"/>
+                </a:solidFill>
+                <a:latin typeface="Arial"/>
+                <a:ea typeface="Arial"/>
+                <a:cs typeface="Arial"/>
+              </a:rPr>
+              <a:t>A VLA gets its length at run time. Its elements need explicit initialization.</a:t>
+            </a:r>
+          </a:p>
+          <a:p xmlns:a="http://schemas.openxmlformats.org/drawingml/2006/main">
+            <a:r>
+              <a:t/>
+            </a:r>
+          </a:p>
+          <a:p xmlns:a="http://schemas.openxmlformats.org/drawingml/2006/main">
+            <a:pPr>
+              <a:defRPr sz="1950" b="0">
+                <a:solidFill>
+                  <a:srgbClr val="D4D4D8"/>
+                </a:solidFill>
+                <a:latin typeface="Arial"/>
+                <a:ea typeface="Arial"/>
+                <a:cs typeface="Arial"/>
+              </a:defRPr>
+            </a:pPr>
+            <a:r>
+              <a:rPr sz="1950" b="0">
+                <a:solidFill>
+                  <a:srgbClr val="D4D4D8"/>
+                </a:solidFill>
+                <a:latin typeface="Arial"/>
+                <a:ea typeface="Arial"/>
+                <a:cs typeface="Arial"/>
+              </a:rPr>
+              <a:t>Local array storage ends when its scope ends, so returning a pointer to that array leaves a dangling pointer.</a:t>
+            </a:r>
+          </a:p>
+        </p:txBody>
+      </p:sp>
+      <p:sp>
+        <p:nvSpPr>
+          <p:cNvPr id="4" name="">
+            <a:extLst xmlns:a="http://schemas.openxmlformats.org/drawingml/2006/main">
+              <a:ext uri="{FF2B5EF4-FFF2-40B4-BE49-F238E27FC236}">
+                <a16:creationId xmlns:a16="http://schemas.microsoft.com/office/drawing/2014/main" id="{469604DC-2292-4E13-ABDC-DCF5ADE833D3}"/>
+              </a:ext>
+            </a:extLst>
+          </p:cNvPr>
+          <p:cNvSpPr>
+            <a:spLocks xmlns:a="http://schemas.openxmlformats.org/drawingml/2006/main" noGrp="1"/>
+          </p:cNvSpPr>
+          <p:nvPr/>
+        </p:nvSpPr>
+        <p:spPr>
+          <a:xfrm xmlns:a="http://schemas.openxmlformats.org/drawingml/2006/main">
+            <a:off x="6181725" y="2200275"/>
+            <a:ext cx="5238750" cy="3286125"/>
+          </a:xfrm>
+          <a:prstGeom xmlns:a="http://schemas.openxmlformats.org/drawingml/2006/main" prst="rect">
+            <a:avLst/>
+          </a:prstGeom>
+          <a:noFill xmlns:a="http://schemas.openxmlformats.org/drawingml/2006/main"/>
+          <a:ln xmlns:a="http://schemas.openxmlformats.org/drawingml/2006/main" w="0">
+            <a:noFill/>
+          </a:ln>
+        </p:spPr>
+        <p:txBody>
+          <a:bodyPr xmlns:a="http://schemas.openxmlformats.org/drawingml/2006/main" anchor="t">
+            <a:normAutofit fontScale="100000"/>
+          </a:bodyPr>
+          <a:lstStyle xmlns:a="http://schemas.openxmlformats.org/drawingml/2006/main"/>
+          <a:p xmlns:a="http://schemas.openxmlformats.org/drawingml/2006/main">
+            <a:pPr>
+              <a:defRPr sz="1650" b="0">
+                <a:solidFill>
+                  <a:srgbClr val="A7F3D0"/>
+                </a:solidFill>
+                <a:latin typeface="Courier New"/>
+                <a:ea typeface="Courier New"/>
+                <a:cs typeface="Courier New"/>
+              </a:defRPr>
+            </a:pPr>
+            <a:r>
+              <a:rPr sz="1650" b="0">
+                <a:solidFill>
+                  <a:srgbClr val="A7F3D0"/>
+                </a:solidFill>
+                <a:latin typeface="Courier New"/>
+                <a:ea typeface="Courier New"/>
+                <a:cs typeface="Courier New"/>
+              </a:rPr>
+              <a:t>int n = get_count();</a:t>
+            </a:r>
+          </a:p>
+          <a:p xmlns:a="http://schemas.openxmlformats.org/drawingml/2006/main">
+            <a:pPr>
+              <a:defRPr sz="1650" b="0">
+                <a:solidFill>
+                  <a:srgbClr val="A7F3D0"/>
+                </a:solidFill>
+                <a:latin typeface="Courier New"/>
+                <a:ea typeface="Courier New"/>
+                <a:cs typeface="Courier New"/>
+              </a:defRPr>
+            </a:pPr>
+            <a:r>
+              <a:rPr sz="1650" b="0">
+                <a:solidFill>
+                  <a:srgbClr val="A7F3D0"/>
+                </a:solidFill>
+                <a:latin typeface="Courier New"/>
+                <a:ea typeface="Courier New"/>
+                <a:cs typeface="Courier New"/>
+              </a:rPr>
+              <a:t>if (n &lt;= 0) return;</a:t>
+            </a:r>
+          </a:p>
+          <a:p xmlns:a="http://schemas.openxmlformats.org/drawingml/2006/main">
+            <a:pPr>
+              <a:defRPr sz="1650" b="0">
+                <a:solidFill>
+                  <a:srgbClr val="A7F3D0"/>
+                </a:solidFill>
+                <a:latin typeface="Courier New"/>
+                <a:ea typeface="Courier New"/>
+                <a:cs typeface="Courier New"/>
+              </a:defRPr>
+            </a:pPr>
+            <a:r>
+              <a:rPr sz="1650" b="0">
+                <a:solidFill>
+                  <a:srgbClr val="A7F3D0"/>
+                </a:solidFill>
+                <a:latin typeface="Courier New"/>
+                <a:ea typeface="Courier New"/>
+                <a:cs typeface="Courier New"/>
+              </a:rPr>
+              <a:t>int a[n];</a:t>
+            </a:r>
+          </a:p>
+          <a:p xmlns:a="http://schemas.openxmlformats.org/drawingml/2006/main">
+            <a:pPr>
+              <a:defRPr sz="1650" b="0">
+                <a:solidFill>
+                  <a:srgbClr val="A7F3D0"/>
+                </a:solidFill>
+                <a:latin typeface="Courier New"/>
+                <a:ea typeface="Courier New"/>
+                <a:cs typeface="Courier New"/>
+              </a:defRPr>
+            </a:pPr>
+            <a:r>
+              <a:rPr sz="1650" b="0">
+                <a:solidFill>
+                  <a:srgbClr val="A7F3D0"/>
+                </a:solidFill>
+                <a:latin typeface="Courier New"/>
+                <a:ea typeface="Courier New"/>
+                <a:cs typeface="Courier New"/>
+              </a:rPr>
+              <a:t>for (int i = 0; i &lt; n; ++i) a[i] = 0;</a:t>
+            </a:r>
+          </a:p>
+          <a:p xmlns:a="http://schemas.openxmlformats.org/drawingml/2006/main">
+            <a:r>
+              <a:t/>
+            </a:r>
+          </a:p>
+          <a:p xmlns:a="http://schemas.openxmlformats.org/drawingml/2006/main">
+            <a:pPr>
+              <a:defRPr sz="1650" b="0">
+                <a:solidFill>
+                  <a:srgbClr val="A7F3D0"/>
+                </a:solidFill>
+                <a:latin typeface="Courier New"/>
+                <a:ea typeface="Courier New"/>
+                <a:cs typeface="Courier New"/>
+              </a:defRPr>
+            </a:pPr>
+            <a:r>
+              <a:rPr sz="1650" b="0">
+                <a:solidFill>
+                  <a:srgbClr val="A7F3D0"/>
+                </a:solidFill>
+                <a:latin typeface="Courier New"/>
+                <a:ea typeface="Courier New"/>
+                <a:cs typeface="Courier New"/>
+              </a:rPr>
+              <a:t>// a is valid only in this scope</a:t>
+            </a:r>
+          </a:p>
+        </p:txBody>
+      </p:sp>
+      <p:sp>
+        <p:nvSpPr>
+          <p:cNvPr id="5" name="">
+            <a:extLst xmlns:a="http://schemas.openxmlformats.org/drawingml/2006/main">
+              <a:ext uri="{FF2B5EF4-FFF2-40B4-BE49-F238E27FC236}">
+                <a16:creationId xmlns:a16="http://schemas.microsoft.com/office/drawing/2014/main" id="{7D3BF107-5180-4233-B694-C22D938AF442}"/>
+              </a:ext>
+            </a:extLst>
+          </p:cNvPr>
+          <p:cNvSpPr>
+            <a:spLocks xmlns:a="http://schemas.openxmlformats.org/drawingml/2006/main" noGrp="1"/>
+          </p:cNvSpPr>
+          <p:nvPr/>
+        </p:nvSpPr>
+        <p:spPr>
+          <a:xfrm xmlns:a="http://schemas.openxmlformats.org/drawingml/2006/main">
+            <a:off x="685800" y="5743575"/>
+            <a:ext cx="10191750" cy="428625"/>
+          </a:xfrm>
+          <a:prstGeom xmlns:a="http://schemas.openxmlformats.org/drawingml/2006/main" prst="rect">
+            <a:avLst/>
+          </a:prstGeom>
+          <a:noFill xmlns:a="http://schemas.openxmlformats.org/drawingml/2006/main"/>
+          <a:ln xmlns:a="http://schemas.openxmlformats.org/drawingml/2006/main" w="0">
+            <a:noFill/>
+          </a:ln>
+        </p:spPr>
+        <p:txBody>
+          <a:bodyPr xmlns:a="http://schemas.openxmlformats.org/drawingml/2006/main" anchor="t">
+            <a:normAutofit fontScale="100000"/>
+          </a:bodyPr>
+          <a:lstStyle xmlns:a="http://schemas.openxmlformats.org/drawingml/2006/main"/>
+          <a:p xmlns:a="http://schemas.openxmlformats.org/drawingml/2006/main">
+            <a:pPr>
+              <a:defRPr sz="1350" b="0">
+                <a:solidFill>
+                  <a:srgbClr val="A1A1AA"/>
+                </a:solidFill>
+                <a:latin typeface="Arial"/>
+                <a:ea typeface="Arial"/>
+                <a:cs typeface="Arial"/>
+              </a:defRPr>
+            </a:pPr>
+            <a:r>
+              <a:rPr sz="1350" b="0">
+                <a:solidFill>
+                  <a:srgbClr val="A1A1AA"/>
+                </a:solidFill>
+                <a:latin typeface="Arial"/>
+                <a:ea typeface="Arial"/>
+                <a:cs typeface="Arial"/>
+              </a:rPr>
+              <a:t>For data that must survive a function return, use an appropriate allocation and ownership plan.</a:t>
+            </a:r>
+          </a:p>
+        </p:txBody>
+      </p:sp>
+      <p:sp>
+        <p:nvSpPr>
+          <p:cNvPr id="6" name="">
+            <a:extLst xmlns:a="http://schemas.openxmlformats.org/drawingml/2006/main">
+              <a:ext uri="{FF2B5EF4-FFF2-40B4-BE49-F238E27FC236}">
+                <a16:creationId xmlns:a16="http://schemas.microsoft.com/office/drawing/2014/main" id="{F07F17B8-3DBB-4D10-AFE1-F119955BA144}"/>
+              </a:ext>
+            </a:extLst>
+          </p:cNvPr>
+          <p:cNvSpPr>
+            <a:spLocks xmlns:a="http://schemas.openxmlformats.org/drawingml/2006/main" noGrp="1"/>
+          </p:cNvSpPr>
+          <p:nvPr/>
+        </p:nvSpPr>
+        <p:spPr>
+          <a:xfrm xmlns:a="http://schemas.openxmlformats.org/drawingml/2006/main">
+            <a:off x="10477500" y="6210300"/>
+            <a:ext cx="1000125" cy="219075"/>
+          </a:xfrm>
+          <a:prstGeom xmlns:a="http://schemas.openxmlformats.org/drawingml/2006/main" prst="rect">
+            <a:avLst/>
+          </a:prstGeom>
+          <a:noFill xmlns:a="http://schemas.openxmlformats.org/drawingml/2006/main"/>
+          <a:ln xmlns:a="http://schemas.openxmlformats.org/drawingml/2006/main" w="0">
+            <a:noFill/>
+          </a:ln>
+        </p:spPr>
+        <p:txBody>
+          <a:bodyPr xmlns:a="http://schemas.openxmlformats.org/drawingml/2006/main" anchor="t">
+            <a:normAutofit fontScale="79762"/>
+          </a:bodyPr>
+          <a:lstStyle xmlns:a="http://schemas.openxmlformats.org/drawingml/2006/main"/>
+          <a:p xmlns:a="http://schemas.openxmlformats.org/drawingml/2006/main">
+            <a:pPr>
+              <a:defRPr sz="1050" b="0">
+                <a:solidFill>
+                  <a:srgbClr val="71717A"/>
+                </a:solidFill>
+                <a:latin typeface="Courier New"/>
+                <a:ea typeface="Courier New"/>
+                <a:cs typeface="Courier New"/>
+              </a:defRPr>
+            </a:pPr>
+            <a:r>
+              <a:rPr sz="1050" b="0">
+                <a:solidFill>
+                  <a:srgbClr val="71717A"/>
+                </a:solidFill>
+                <a:latin typeface="Courier New"/>
+                <a:ea typeface="Courier New"/>
+                <a:cs typeface="Courier New"/>
+              </a:rPr>
+              <a:t>24 / 26</a:t>
+            </a:r>
+          </a:p>
+        </p:txBody>
+      </p:sp>
+    </p:spTree>
+    <p:extLst>
+      <p:ext uri="{BB962C8B-B14F-4D97-AF65-F5344CB8AC3E}">
+        <p14:creationId xmlns:p14="http://schemas.microsoft.com/office/powerpoint/2010/main" val="298913049"/>
+      </p:ext>
+    </p:extLst>
+  </p:cSld>
+</p:sld>
+</file>
+
+<file path=ppt/slides/slide25.xml><?xml version="1.0" encoding="utf-8"?>
+<p:sld xmlns:p="http://schemas.openxmlformats.org/presentationml/2006/main">
+  <p:cSld>
+    <p:bg>
+      <p:bgPr>
+        <a:solidFill xmlns:a="http://schemas.openxmlformats.org/drawingml/2006/main">
+          <a:srgbClr val="09090B"/>
+        </a:solidFill>
+      </p:bgPr>
+    </p:bg>
+    <p:spTree>
+      <p:nvGrpSpPr>
+        <p:cNvPr id="1" name=""/>
+        <p:cNvGrpSpPr/>
+        <p:nvPr/>
+      </p:nvGrpSpPr>
+      <p:grpSpPr>
+        <a:xfrm xmlns:a="http://schemas.openxmlformats.org/drawingml/2006/main"/>
+      </p:grpSpPr>
+      <p:sp>
+        <p:nvSpPr>
+          <p:cNvPr id="7" name="">
+            <a:extLst xmlns:a="http://schemas.openxmlformats.org/drawingml/2006/main">
+              <a:ext uri="{FF2B5EF4-FFF2-40B4-BE49-F238E27FC236}">
+                <a16:creationId xmlns:a16="http://schemas.microsoft.com/office/drawing/2014/main" id="{C6A0EA87-3B46-415F-985F-EECA1D3A9081}"/>
+              </a:ext>
+            </a:extLst>
+          </p:cNvPr>
+          <p:cNvSpPr>
+            <a:spLocks xmlns:a="http://schemas.openxmlformats.org/drawingml/2006/main" noGrp="1"/>
+          </p:cNvSpPr>
+          <p:nvPr/>
+        </p:nvSpPr>
+        <p:spPr>
+          <a:xfrm xmlns:a="http://schemas.openxmlformats.org/drawingml/2006/main">
+            <a:off x="685800" y="361950"/>
+            <a:ext cx="10477500" cy="285750"/>
+          </a:xfrm>
+          <a:prstGeom xmlns:a="http://schemas.openxmlformats.org/drawingml/2006/main" prst="rect">
+            <a:avLst/>
+          </a:prstGeom>
+          <a:noFill xmlns:a="http://schemas.openxmlformats.org/drawingml/2006/main"/>
+          <a:ln xmlns:a="http://schemas.openxmlformats.org/drawingml/2006/main" w="0">
+            <a:noFill/>
+          </a:ln>
+        </p:spPr>
+        <p:txBody>
+          <a:bodyPr xmlns:a="http://schemas.openxmlformats.org/drawingml/2006/main" anchor="t">
+            <a:normAutofit fontScale="100000"/>
+          </a:bodyPr>
+          <a:lstStyle xmlns:a="http://schemas.openxmlformats.org/drawingml/2006/main"/>
+          <a:p xmlns:a="http://schemas.openxmlformats.org/drawingml/2006/main">
+            <a:pPr>
+              <a:defRPr sz="1275" b="0">
+                <a:solidFill>
+                  <a:srgbClr val="6EE7B7"/>
+                </a:solidFill>
+                <a:latin typeface="Courier New"/>
+                <a:ea typeface="Courier New"/>
+                <a:cs typeface="Courier New"/>
+              </a:defRPr>
+            </a:pPr>
+            <a:r>
+              <a:rPr sz="1275" b="0">
+                <a:solidFill>
+                  <a:srgbClr val="6EE7B7"/>
+                </a:solidFill>
+                <a:latin typeface="Courier New"/>
+                <a:ea typeface="Courier New"/>
+                <a:cs typeface="Courier New"/>
+              </a:rPr>
+              <a:t>BOARD PRACTICE · 3 MINUTES</a:t>
+            </a:r>
+          </a:p>
+        </p:txBody>
+      </p:sp>
+      <p:sp>
+        <p:nvSpPr>
+          <p:cNvPr id="2" name="">
+            <a:extLst xmlns:a="http://schemas.openxmlformats.org/drawingml/2006/main">
+              <a:ext uri="{FF2B5EF4-FFF2-40B4-BE49-F238E27FC236}">
+                <a16:creationId xmlns:a16="http://schemas.microsoft.com/office/drawing/2014/main" id="{E3AF9897-55A2-4D9A-A50A-671E7D8C1471}"/>
+              </a:ext>
+            </a:extLst>
+          </p:cNvPr>
+          <p:cNvSpPr>
+            <a:spLocks xmlns:a="http://schemas.openxmlformats.org/drawingml/2006/main" noGrp="1"/>
+          </p:cNvSpPr>
+          <p:nvPr/>
+        </p:nvSpPr>
+        <p:spPr>
+          <a:xfrm xmlns:a="http://schemas.openxmlformats.org/drawingml/2006/main">
+            <a:off x="685800" y="885825"/>
+            <a:ext cx="10820400" cy="1066800"/>
+          </a:xfrm>
+          <a:prstGeom xmlns:a="http://schemas.openxmlformats.org/drawingml/2006/main" prst="rect">
+            <a:avLst/>
+          </a:prstGeom>
+          <a:noFill xmlns:a="http://schemas.openxmlformats.org/drawingml/2006/main"/>
+          <a:ln xmlns:a="http://schemas.openxmlformats.org/drawingml/2006/main" w="0">
+            <a:noFill/>
+          </a:ln>
+        </p:spPr>
+        <p:txBody>
+          <a:bodyPr xmlns:a="http://schemas.openxmlformats.org/drawingml/2006/main" anchor="t">
+            <a:normAutofit fontScale="100000"/>
+          </a:bodyPr>
+          <a:lstStyle xmlns:a="http://schemas.openxmlformats.org/drawingml/2006/main"/>
+          <a:p xmlns:a="http://schemas.openxmlformats.org/drawingml/2006/main">
+            <a:pPr>
+              <a:defRPr sz="3600" b="0">
+                <a:solidFill>
+                  <a:srgbClr val="FAFAFA"/>
+                </a:solidFill>
+                <a:latin typeface="Arial"/>
+                <a:ea typeface="Arial"/>
+                <a:cs typeface="Arial"/>
+              </a:defRPr>
+            </a:pPr>
+            <a:r>
+              <a:rPr sz="3600" b="0">
+                <a:solidFill>
+                  <a:srgbClr val="FAFAFA"/>
+                </a:solidFill>
+                <a:latin typeface="Arial"/>
+                <a:ea typeface="Arial"/>
+                <a:cs typeface="Arial"/>
+              </a:rPr>
+              <a:t>One final trace</a:t>
+            </a:r>
+          </a:p>
+        </p:txBody>
+      </p:sp>
+      <p:sp>
+        <p:nvSpPr>
+          <p:cNvPr id="3" name="">
+            <a:extLst xmlns:a="http://schemas.openxmlformats.org/drawingml/2006/main">
+              <a:ext uri="{FF2B5EF4-FFF2-40B4-BE49-F238E27FC236}">
+                <a16:creationId xmlns:a16="http://schemas.microsoft.com/office/drawing/2014/main" id="{A76ADACC-4000-472D-9EA8-BCA87CECFC52}"/>
+              </a:ext>
+            </a:extLst>
+          </p:cNvPr>
+          <p:cNvSpPr>
+            <a:spLocks xmlns:a="http://schemas.openxmlformats.org/drawingml/2006/main" noGrp="1"/>
+          </p:cNvSpPr>
+          <p:nvPr/>
+        </p:nvSpPr>
+        <p:spPr>
+          <a:xfrm xmlns:a="http://schemas.openxmlformats.org/drawingml/2006/main">
+            <a:off x="685800" y="2200275"/>
+            <a:ext cx="4857750" cy="3124200"/>
+          </a:xfrm>
+          <a:prstGeom xmlns:a="http://schemas.openxmlformats.org/drawingml/2006/main" prst="rect">
+            <a:avLst/>
+          </a:prstGeom>
+          <a:noFill xmlns:a="http://schemas.openxmlformats.org/drawingml/2006/main"/>
+          <a:ln xmlns:a="http://schemas.openxmlformats.org/drawingml/2006/main" w="0">
+            <a:noFill/>
+          </a:ln>
+        </p:spPr>
+        <p:txBody>
+          <a:bodyPr xmlns:a="http://schemas.openxmlformats.org/drawingml/2006/main" anchor="t">
+            <a:normAutofit fontScale="100000"/>
+          </a:bodyPr>
+          <a:lstStyle xmlns:a="http://schemas.openxmlformats.org/drawingml/2006/main"/>
+          <a:p xmlns:a="http://schemas.openxmlformats.org/drawingml/2006/main">
+            <a:pPr>
+              <a:defRPr sz="1950" b="0">
+                <a:solidFill>
+                  <a:srgbClr val="D4D4D8"/>
+                </a:solidFill>
+                <a:latin typeface="Arial"/>
+                <a:ea typeface="Arial"/>
+                <a:cs typeface="Arial"/>
+              </a:defRPr>
+            </a:pPr>
+            <a:r>
+              <a:rPr sz="1950" b="0">
+                <a:solidFill>
+                  <a:srgbClr val="D4D4D8"/>
+                </a:solidFill>
+                <a:latin typeface="Arial"/>
+                <a:ea typeface="Arial"/>
+                <a:cs typeface="Arial"/>
+              </a:rPr>
+              <a:t>Assume int is 4 bytes, %rax holds &amp;a[0], and %rcx = 2.</a:t>
+            </a:r>
+          </a:p>
+          <a:p xmlns:a="http://schemas.openxmlformats.org/drawingml/2006/main">
+            <a:r>
+              <a:t/>
+            </a:r>
+          </a:p>
+          <a:p xmlns:a="http://schemas.openxmlformats.org/drawingml/2006/main">
+            <a:pPr>
+              <a:defRPr sz="1950" b="0">
+                <a:solidFill>
+                  <a:srgbClr val="D4D4D8"/>
+                </a:solidFill>
+                <a:latin typeface="Arial"/>
+                <a:ea typeface="Arial"/>
+                <a:cs typeface="Arial"/>
+              </a:defRPr>
+            </a:pPr>
+            <a:r>
+              <a:rPr sz="1950" b="0">
+                <a:solidFill>
+                  <a:srgbClr val="D4D4D8"/>
+                </a:solidFill>
+                <a:latin typeface="Arial"/>
+                <a:ea typeface="Arial"/>
+                <a:cs typeface="Arial"/>
+              </a:rPr>
+              <a:t>What address does leaq compute? What value does movl read?</a:t>
+            </a:r>
+          </a:p>
+        </p:txBody>
+      </p:sp>
+      <p:sp>
+        <p:nvSpPr>
+          <p:cNvPr id="4" name="">
+            <a:extLst xmlns:a="http://schemas.openxmlformats.org/drawingml/2006/main">
+              <a:ext uri="{FF2B5EF4-FFF2-40B4-BE49-F238E27FC236}">
+                <a16:creationId xmlns:a16="http://schemas.microsoft.com/office/drawing/2014/main" id="{D7B5CA29-8179-4E81-89A9-826193A48354}"/>
+              </a:ext>
+            </a:extLst>
+          </p:cNvPr>
+          <p:cNvSpPr>
+            <a:spLocks xmlns:a="http://schemas.openxmlformats.org/drawingml/2006/main" noGrp="1"/>
+          </p:cNvSpPr>
+          <p:nvPr/>
+        </p:nvSpPr>
+        <p:spPr>
+          <a:xfrm xmlns:a="http://schemas.openxmlformats.org/drawingml/2006/main">
+            <a:off x="6181725" y="2200275"/>
+            <a:ext cx="5238750" cy="3286125"/>
+          </a:xfrm>
+          <a:prstGeom xmlns:a="http://schemas.openxmlformats.org/drawingml/2006/main" prst="rect">
+            <a:avLst/>
+          </a:prstGeom>
+          <a:noFill xmlns:a="http://schemas.openxmlformats.org/drawingml/2006/main"/>
+          <a:ln xmlns:a="http://schemas.openxmlformats.org/drawingml/2006/main" w="0">
+            <a:noFill/>
+          </a:ln>
+        </p:spPr>
+        <p:txBody>
+          <a:bodyPr xmlns:a="http://schemas.openxmlformats.org/drawingml/2006/main" anchor="t">
+            <a:normAutofit fontScale="100000"/>
+          </a:bodyPr>
+          <a:lstStyle xmlns:a="http://schemas.openxmlformats.org/drawingml/2006/main"/>
+          <a:p xmlns:a="http://schemas.openxmlformats.org/drawingml/2006/main">
+            <a:pPr>
+              <a:defRPr sz="1650" b="0">
+                <a:solidFill>
+                  <a:srgbClr val="A7F3D0"/>
+                </a:solidFill>
+                <a:latin typeface="Courier New"/>
+                <a:ea typeface="Courier New"/>
+                <a:cs typeface="Courier New"/>
+              </a:defRPr>
+            </a:pPr>
+            <a:r>
+              <a:rPr sz="1650" b="0">
+                <a:solidFill>
+                  <a:srgbClr val="A7F3D0"/>
+                </a:solidFill>
+                <a:latin typeface="Courier New"/>
+                <a:ea typeface="Courier New"/>
+                <a:cs typeface="Courier New"/>
+              </a:rPr>
+              <a:t>a = {10, 20, 30, 40}</a:t>
+            </a:r>
+          </a:p>
+          <a:p xmlns:a="http://schemas.openxmlformats.org/drawingml/2006/main">
+            <a:pPr>
+              <a:defRPr sz="1650" b="0">
+                <a:solidFill>
+                  <a:srgbClr val="A7F3D0"/>
+                </a:solidFill>
+                <a:latin typeface="Courier New"/>
+                <a:ea typeface="Courier New"/>
+                <a:cs typeface="Courier New"/>
+              </a:defRPr>
+            </a:pPr>
+            <a:r>
+              <a:rPr sz="1650" b="0">
+                <a:solidFill>
+                  <a:srgbClr val="A7F3D0"/>
+                </a:solidFill>
+                <a:latin typeface="Courier New"/>
+                <a:ea typeface="Courier New"/>
+                <a:cs typeface="Courier New"/>
+              </a:rPr>
+              <a:t>%rax = 0x2000</a:t>
+            </a:r>
+          </a:p>
+          <a:p xmlns:a="http://schemas.openxmlformats.org/drawingml/2006/main">
+            <a:r>
+              <a:t/>
+            </a:r>
+          </a:p>
+          <a:p xmlns:a="http://schemas.openxmlformats.org/drawingml/2006/main">
+            <a:pPr>
+              <a:defRPr sz="1650" b="0">
+                <a:solidFill>
+                  <a:srgbClr val="A7F3D0"/>
+                </a:solidFill>
+                <a:latin typeface="Courier New"/>
+                <a:ea typeface="Courier New"/>
+                <a:cs typeface="Courier New"/>
+              </a:defRPr>
+            </a:pPr>
+            <a:r>
+              <a:rPr sz="1650" b="0">
+                <a:solidFill>
+                  <a:srgbClr val="A7F3D0"/>
+                </a:solidFill>
+                <a:latin typeface="Courier New"/>
+                <a:ea typeface="Courier New"/>
+                <a:cs typeface="Courier New"/>
+              </a:rPr>
+              <a:t>leaq (%rax,%rcx,4), %rdx</a:t>
+            </a:r>
+          </a:p>
+          <a:p xmlns:a="http://schemas.openxmlformats.org/drawingml/2006/main">
+            <a:pPr>
+              <a:defRPr sz="1650" b="0">
+                <a:solidFill>
+                  <a:srgbClr val="A7F3D0"/>
+                </a:solidFill>
+                <a:latin typeface="Courier New"/>
+                <a:ea typeface="Courier New"/>
+                <a:cs typeface="Courier New"/>
+              </a:defRPr>
+            </a:pPr>
+            <a:r>
+              <a:rPr sz="1650" b="0">
+                <a:solidFill>
+                  <a:srgbClr val="A7F3D0"/>
+                </a:solidFill>
+                <a:latin typeface="Courier New"/>
+                <a:ea typeface="Courier New"/>
+                <a:cs typeface="Courier New"/>
+              </a:rPr>
+              <a:t>movl (%rdx), %eax</a:t>
+            </a:r>
+          </a:p>
+          <a:p xmlns:a="http://schemas.openxmlformats.org/drawingml/2006/main">
+            <a:r>
+              <a:t/>
+            </a:r>
+          </a:p>
+          <a:p xmlns:a="http://schemas.openxmlformats.org/drawingml/2006/main">
+            <a:pPr>
+              <a:defRPr sz="1650" b="0">
+                <a:solidFill>
+                  <a:srgbClr val="A7F3D0"/>
+                </a:solidFill>
+                <a:latin typeface="Courier New"/>
+                <a:ea typeface="Courier New"/>
+                <a:cs typeface="Courier New"/>
+              </a:defRPr>
+            </a:pPr>
+            <a:r>
+              <a:rPr sz="1650" b="0">
+                <a:solidFill>
+                  <a:srgbClr val="A7F3D0"/>
+                </a:solidFill>
+                <a:latin typeface="Courier New"/>
+                <a:ea typeface="Courier New"/>
+                <a:cs typeface="Courier New"/>
+              </a:rPr>
+              <a:t>%rdx = ?</a:t>
+            </a:r>
+          </a:p>
+          <a:p xmlns:a="http://schemas.openxmlformats.org/drawingml/2006/main">
+            <a:pPr>
+              <a:defRPr sz="1650" b="0">
+                <a:solidFill>
+                  <a:srgbClr val="A7F3D0"/>
+                </a:solidFill>
+                <a:latin typeface="Courier New"/>
+                <a:ea typeface="Courier New"/>
+                <a:cs typeface="Courier New"/>
+              </a:defRPr>
+            </a:pPr>
+            <a:r>
+              <a:rPr sz="1650" b="0">
+                <a:solidFill>
+                  <a:srgbClr val="A7F3D0"/>
+                </a:solidFill>
+                <a:latin typeface="Courier New"/>
+                <a:ea typeface="Courier New"/>
+                <a:cs typeface="Courier New"/>
+              </a:rPr>
+              <a:t>%eax = ?</a:t>
+            </a:r>
+          </a:p>
+        </p:txBody>
+      </p:sp>
+      <p:sp>
+        <p:nvSpPr>
+          <p:cNvPr id="5" name="">
+            <a:extLst xmlns:a="http://schemas.openxmlformats.org/drawingml/2006/main">
+              <a:ext uri="{FF2B5EF4-FFF2-40B4-BE49-F238E27FC236}">
+                <a16:creationId xmlns:a16="http://schemas.microsoft.com/office/drawing/2014/main" id="{59CD6D66-0E53-4FBC-9A5B-B3B2042F199D}"/>
+              </a:ext>
+            </a:extLst>
+          </p:cNvPr>
+          <p:cNvSpPr>
+            <a:spLocks xmlns:a="http://schemas.openxmlformats.org/drawingml/2006/main" noGrp="1"/>
+          </p:cNvSpPr>
+          <p:nvPr/>
+        </p:nvSpPr>
+        <p:spPr>
+          <a:xfrm xmlns:a="http://schemas.openxmlformats.org/drawingml/2006/main">
+            <a:off x="685800" y="5743575"/>
+            <a:ext cx="10191750" cy="428625"/>
+          </a:xfrm>
+          <a:prstGeom xmlns:a="http://schemas.openxmlformats.org/drawingml/2006/main" prst="rect">
+            <a:avLst/>
+          </a:prstGeom>
+          <a:noFill xmlns:a="http://schemas.openxmlformats.org/drawingml/2006/main"/>
+          <a:ln xmlns:a="http://schemas.openxmlformats.org/drawingml/2006/main" w="0">
+            <a:noFill/>
+          </a:ln>
+        </p:spPr>
+        <p:txBody>
+          <a:bodyPr xmlns:a="http://schemas.openxmlformats.org/drawingml/2006/main" anchor="t">
+            <a:normAutofit fontScale="100000"/>
+          </a:bodyPr>
+          <a:lstStyle xmlns:a="http://schemas.openxmlformats.org/drawingml/2006/main"/>
+          <a:p xmlns:a="http://schemas.openxmlformats.org/drawingml/2006/main">
+            <a:pPr>
+              <a:defRPr sz="1350" b="0">
+                <a:solidFill>
+                  <a:srgbClr val="A1A1AA"/>
+                </a:solidFill>
+                <a:latin typeface="Arial"/>
+                <a:ea typeface="Arial"/>
+                <a:cs typeface="Arial"/>
+              </a:defRPr>
+            </a:pPr>
+            <a:r>
+              <a:rPr sz="1350" b="0">
+                <a:solidFill>
+                  <a:srgbClr val="A1A1AA"/>
+                </a:solidFill>
+                <a:latin typeface="Arial"/>
+                <a:ea typeface="Arial"/>
+                <a:cs typeface="Arial"/>
+              </a:rPr>
+              <a:t>Sketch four boxes, each four bytes wide, before calculating.</a:t>
+            </a:r>
+          </a:p>
+        </p:txBody>
+      </p:sp>
+      <p:sp>
+        <p:nvSpPr>
+          <p:cNvPr id="6" name="">
+            <a:extLst xmlns:a="http://schemas.openxmlformats.org/drawingml/2006/main">
+              <a:ext uri="{FF2B5EF4-FFF2-40B4-BE49-F238E27FC236}">
+                <a16:creationId xmlns:a16="http://schemas.microsoft.com/office/drawing/2014/main" id="{43485F3E-6B40-4752-9B33-026E6403DBE8}"/>
+              </a:ext>
+            </a:extLst>
+          </p:cNvPr>
+          <p:cNvSpPr>
+            <a:spLocks xmlns:a="http://schemas.openxmlformats.org/drawingml/2006/main" noGrp="1"/>
+          </p:cNvSpPr>
+          <p:nvPr/>
+        </p:nvSpPr>
+        <p:spPr>
+          <a:xfrm xmlns:a="http://schemas.openxmlformats.org/drawingml/2006/main">
+            <a:off x="10477500" y="6210300"/>
+            <a:ext cx="1000125" cy="219075"/>
+          </a:xfrm>
+          <a:prstGeom xmlns:a="http://schemas.openxmlformats.org/drawingml/2006/main" prst="rect">
+            <a:avLst/>
+          </a:prstGeom>
+          <a:noFill xmlns:a="http://schemas.openxmlformats.org/drawingml/2006/main"/>
+          <a:ln xmlns:a="http://schemas.openxmlformats.org/drawingml/2006/main" w="0">
+            <a:noFill/>
+          </a:ln>
+        </p:spPr>
+        <p:txBody>
+          <a:bodyPr xmlns:a="http://schemas.openxmlformats.org/drawingml/2006/main" anchor="t">
+            <a:normAutofit fontScale="79762"/>
+          </a:bodyPr>
+          <a:lstStyle xmlns:a="http://schemas.openxmlformats.org/drawingml/2006/main"/>
+          <a:p xmlns:a="http://schemas.openxmlformats.org/drawingml/2006/main">
+            <a:pPr>
+              <a:defRPr sz="1050" b="0">
+                <a:solidFill>
+                  <a:srgbClr val="71717A"/>
+                </a:solidFill>
+                <a:latin typeface="Courier New"/>
+                <a:ea typeface="Courier New"/>
+                <a:cs typeface="Courier New"/>
+              </a:defRPr>
+            </a:pPr>
+            <a:r>
+              <a:rPr sz="1050" b="0">
+                <a:solidFill>
+                  <a:srgbClr val="71717A"/>
+                </a:solidFill>
+                <a:latin typeface="Courier New"/>
+                <a:ea typeface="Courier New"/>
+                <a:cs typeface="Courier New"/>
+              </a:rPr>
+              <a:t>25 / 26</a:t>
+            </a:r>
+          </a:p>
+        </p:txBody>
+      </p:sp>
+    </p:spTree>
+    <p:extLst>
+      <p:ext uri="{BB962C8B-B14F-4D97-AF65-F5344CB8AC3E}">
+        <p14:creationId xmlns:p14="http://schemas.microsoft.com/office/powerpoint/2010/main" val="1744903419"/>
+      </p:ext>
+    </p:extLst>
+  </p:cSld>
+</p:sld>
+</file>
+
+<file path=ppt/slides/slide26.xml><?xml version="1.0" encoding="utf-8"?>
+<p:sld xmlns:p="http://schemas.openxmlformats.org/presentationml/2006/main">
+  <p:cSld>
+    <p:bg>
+      <p:bgPr>
+        <a:solidFill xmlns:a="http://schemas.openxmlformats.org/drawingml/2006/main">
+          <a:srgbClr val="09090B"/>
+        </a:solidFill>
+      </p:bgPr>
+    </p:bg>
+    <p:spTree>
+      <p:nvGrpSpPr>
+        <p:cNvPr id="1" name=""/>
+        <p:cNvGrpSpPr/>
+        <p:nvPr/>
+      </p:nvGrpSpPr>
+      <p:grpSpPr>
+        <a:xfrm xmlns:a="http://schemas.openxmlformats.org/drawingml/2006/main"/>
+      </p:grpSpPr>
+      <p:sp>
+        <p:nvSpPr>
+          <p:cNvPr id="7" name="">
+            <a:extLst xmlns:a="http://schemas.openxmlformats.org/drawingml/2006/main">
+              <a:ext uri="{FF2B5EF4-FFF2-40B4-BE49-F238E27FC236}">
+                <a16:creationId xmlns:a16="http://schemas.microsoft.com/office/drawing/2014/main" id="{25A1F966-C6D8-41EE-9831-A7547BBA9B5D}"/>
+              </a:ext>
+            </a:extLst>
+          </p:cNvPr>
+          <p:cNvSpPr>
+            <a:spLocks xmlns:a="http://schemas.openxmlformats.org/drawingml/2006/main" noGrp="1"/>
+          </p:cNvSpPr>
+          <p:nvPr/>
+        </p:nvSpPr>
+        <p:spPr>
+          <a:xfrm xmlns:a="http://schemas.openxmlformats.org/drawingml/2006/main">
+            <a:off x="685800" y="361950"/>
+            <a:ext cx="10477500" cy="285750"/>
+          </a:xfrm>
+          <a:prstGeom xmlns:a="http://schemas.openxmlformats.org/drawingml/2006/main" prst="rect">
+            <a:avLst/>
+          </a:prstGeom>
+          <a:noFill xmlns:a="http://schemas.openxmlformats.org/drawingml/2006/main"/>
+          <a:ln xmlns:a="http://schemas.openxmlformats.org/drawingml/2006/main" w="0">
+            <a:noFill/>
+          </a:ln>
+        </p:spPr>
+        <p:txBody>
+          <a:bodyPr xmlns:a="http://schemas.openxmlformats.org/drawingml/2006/main" anchor="t">
+            <a:normAutofit fontScale="100000"/>
+          </a:bodyPr>
+          <a:lstStyle xmlns:a="http://schemas.openxmlformats.org/drawingml/2006/main"/>
+          <a:p xmlns:a="http://schemas.openxmlformats.org/drawingml/2006/main">
+            <a:pPr>
+              <a:defRPr sz="1275" b="0">
+                <a:solidFill>
+                  <a:srgbClr val="6EE7B7"/>
+                </a:solidFill>
+                <a:latin typeface="Courier New"/>
+                <a:ea typeface="Courier New"/>
+                <a:cs typeface="Courier New"/>
+              </a:defRPr>
+            </a:pPr>
+            <a:r>
+              <a:rPr sz="1275" b="0">
+                <a:solidFill>
+                  <a:srgbClr val="6EE7B7"/>
+                </a:solidFill>
+                <a:latin typeface="Courier New"/>
+                <a:ea typeface="Courier New"/>
+                <a:cs typeface="Courier New"/>
+              </a:rPr>
+              <a:t>WRAP-UP</a:t>
+            </a:r>
+          </a:p>
+        </p:txBody>
+      </p:sp>
+      <p:sp>
+        <p:nvSpPr>
+          <p:cNvPr id="2" name="">
+            <a:extLst xmlns:a="http://schemas.openxmlformats.org/drawingml/2006/main">
+              <a:ext uri="{FF2B5EF4-FFF2-40B4-BE49-F238E27FC236}">
+                <a16:creationId xmlns:a16="http://schemas.microsoft.com/office/drawing/2014/main" id="{DFA97D09-7BEF-4822-B56A-3FC3068371B2}"/>
+              </a:ext>
+            </a:extLst>
+          </p:cNvPr>
+          <p:cNvSpPr>
+            <a:spLocks xmlns:a="http://schemas.openxmlformats.org/drawingml/2006/main" noGrp="1"/>
+          </p:cNvSpPr>
+          <p:nvPr/>
+        </p:nvSpPr>
+        <p:spPr>
+          <a:xfrm xmlns:a="http://schemas.openxmlformats.org/drawingml/2006/main">
+            <a:off x="685800" y="885825"/>
+            <a:ext cx="10820400" cy="1066800"/>
+          </a:xfrm>
+          <a:prstGeom xmlns:a="http://schemas.openxmlformats.org/drawingml/2006/main" prst="rect">
+            <a:avLst/>
+          </a:prstGeom>
+          <a:noFill xmlns:a="http://schemas.openxmlformats.org/drawingml/2006/main"/>
+          <a:ln xmlns:a="http://schemas.openxmlformats.org/drawingml/2006/main" w="0">
+            <a:noFill/>
+          </a:ln>
+        </p:spPr>
+        <p:txBody>
+          <a:bodyPr xmlns:a="http://schemas.openxmlformats.org/drawingml/2006/main" anchor="t">
+            <a:normAutofit fontScale="100000"/>
+          </a:bodyPr>
+          <a:lstStyle xmlns:a="http://schemas.openxmlformats.org/drawingml/2006/main"/>
+          <a:p xmlns:a="http://schemas.openxmlformats.org/drawingml/2006/main">
+            <a:pPr>
+              <a:defRPr sz="3600" b="0">
+                <a:solidFill>
+                  <a:srgbClr val="FAFAFA"/>
+                </a:solidFill>
+                <a:latin typeface="Arial"/>
+                <a:ea typeface="Arial"/>
+                <a:cs typeface="Arial"/>
+              </a:defRPr>
+            </a:pPr>
+            <a:r>
+              <a:rPr sz="3600" b="0">
+                <a:solidFill>
+                  <a:srgbClr val="FAFAFA"/>
+                </a:solidFill>
+                <a:latin typeface="Arial"/>
+                <a:ea typeface="Arial"/>
+                <a:cs typeface="Arial"/>
+              </a:rPr>
+              <a:t>Trace answer and checklist</a:t>
+            </a:r>
+          </a:p>
+        </p:txBody>
+      </p:sp>
+      <p:sp>
+        <p:nvSpPr>
+          <p:cNvPr id="3" name="">
+            <a:extLst xmlns:a="http://schemas.openxmlformats.org/drawingml/2006/main">
+              <a:ext uri="{FF2B5EF4-FFF2-40B4-BE49-F238E27FC236}">
+                <a16:creationId xmlns:a16="http://schemas.microsoft.com/office/drawing/2014/main" id="{12F6E8D5-3AF7-4BE3-AFBF-72535F3AFE93}"/>
+              </a:ext>
+            </a:extLst>
+          </p:cNvPr>
+          <p:cNvSpPr>
+            <a:spLocks xmlns:a="http://schemas.openxmlformats.org/drawingml/2006/main" noGrp="1"/>
+          </p:cNvSpPr>
+          <p:nvPr/>
+        </p:nvSpPr>
+        <p:spPr>
+          <a:xfrm xmlns:a="http://schemas.openxmlformats.org/drawingml/2006/main">
+            <a:off x="685800" y="2200275"/>
+            <a:ext cx="4857750" cy="3124200"/>
+          </a:xfrm>
+          <a:prstGeom xmlns:a="http://schemas.openxmlformats.org/drawingml/2006/main" prst="rect">
+            <a:avLst/>
+          </a:prstGeom>
+          <a:noFill xmlns:a="http://schemas.openxmlformats.org/drawingml/2006/main"/>
+          <a:ln xmlns:a="http://schemas.openxmlformats.org/drawingml/2006/main" w="0">
+            <a:noFill/>
+          </a:ln>
+        </p:spPr>
+        <p:txBody>
+          <a:bodyPr xmlns:a="http://schemas.openxmlformats.org/drawingml/2006/main" anchor="t">
+            <a:normAutofit fontScale="100000"/>
+          </a:bodyPr>
+          <a:lstStyle xmlns:a="http://schemas.openxmlformats.org/drawingml/2006/main"/>
+          <a:p xmlns:a="http://schemas.openxmlformats.org/drawingml/2006/main">
+            <a:pPr>
+              <a:defRPr sz="1950" b="0">
+                <a:solidFill>
+                  <a:srgbClr val="D4D4D8"/>
+                </a:solidFill>
+                <a:latin typeface="Arial"/>
+                <a:ea typeface="Arial"/>
+                <a:cs typeface="Arial"/>
+              </a:defRPr>
+            </a:pPr>
+            <a:r>
+              <a:rPr sz="1950" b="0">
+                <a:solidFill>
+                  <a:srgbClr val="D4D4D8"/>
+                </a:solidFill>
+                <a:latin typeface="Arial"/>
+                <a:ea typeface="Arial"/>
+                <a:cs typeface="Arial"/>
+              </a:rPr>
+              <a:t>leaq computes 0x2000 + 2×4 = 0x2008. movl reads the 4-byte int at that address: 30.</a:t>
+            </a:r>
+          </a:p>
+          <a:p xmlns:a="http://schemas.openxmlformats.org/drawingml/2006/main">
+            <a:r>
+              <a:t/>
+            </a:r>
+          </a:p>
+          <a:p xmlns:a="http://schemas.openxmlformats.org/drawingml/2006/main">
+            <a:pPr>
+              <a:defRPr sz="1950" b="0">
+                <a:solidFill>
+                  <a:srgbClr val="D4D4D8"/>
+                </a:solidFill>
+                <a:latin typeface="Arial"/>
+                <a:ea typeface="Arial"/>
+                <a:cs typeface="Arial"/>
+              </a:defRPr>
+            </a:pPr>
+            <a:r>
+              <a:rPr sz="1950" b="0">
+                <a:solidFill>
+                  <a:srgbClr val="D4D4D8"/>
+                </a:solidFill>
+                <a:latin typeface="Arial"/>
+                <a:ea typeface="Arial"/>
+                <a:cs typeface="Arial"/>
+              </a:rPr>
+              <a:t>When assembly feels dense, mark the operand type, track the changed register, then follow the next instruction.</a:t>
+            </a:r>
+          </a:p>
+        </p:txBody>
+      </p:sp>
+      <p:sp>
+        <p:nvSpPr>
+          <p:cNvPr id="4" name="">
+            <a:extLst xmlns:a="http://schemas.openxmlformats.org/drawingml/2006/main">
+              <a:ext uri="{FF2B5EF4-FFF2-40B4-BE49-F238E27FC236}">
+                <a16:creationId xmlns:a16="http://schemas.microsoft.com/office/drawing/2014/main" id="{4EF18EBB-7C7E-4A7B-84AC-5DE137C6CDD2}"/>
+              </a:ext>
+            </a:extLst>
+          </p:cNvPr>
+          <p:cNvSpPr>
+            <a:spLocks xmlns:a="http://schemas.openxmlformats.org/drawingml/2006/main" noGrp="1"/>
+          </p:cNvSpPr>
+          <p:nvPr/>
+        </p:nvSpPr>
+        <p:spPr>
+          <a:xfrm xmlns:a="http://schemas.openxmlformats.org/drawingml/2006/main">
+            <a:off x="6181725" y="2200275"/>
+            <a:ext cx="5238750" cy="3286125"/>
+          </a:xfrm>
+          <a:prstGeom xmlns:a="http://schemas.openxmlformats.org/drawingml/2006/main" prst="rect">
+            <a:avLst/>
+          </a:prstGeom>
+          <a:noFill xmlns:a="http://schemas.openxmlformats.org/drawingml/2006/main"/>
+          <a:ln xmlns:a="http://schemas.openxmlformats.org/drawingml/2006/main" w="0">
+            <a:noFill/>
+          </a:ln>
+        </p:spPr>
+        <p:txBody>
+          <a:bodyPr xmlns:a="http://schemas.openxmlformats.org/drawingml/2006/main" anchor="t">
+            <a:normAutofit fontScale="100000"/>
+          </a:bodyPr>
+          <a:lstStyle xmlns:a="http://schemas.openxmlformats.org/drawingml/2006/main"/>
+          <a:p xmlns:a="http://schemas.openxmlformats.org/drawingml/2006/main">
+            <a:pPr>
+              <a:defRPr sz="1650" b="0">
+                <a:solidFill>
+                  <a:srgbClr val="A7F3D0"/>
+                </a:solidFill>
+                <a:latin typeface="Courier New"/>
+                <a:ea typeface="Courier New"/>
+                <a:cs typeface="Courier New"/>
+              </a:defRPr>
+            </a:pPr>
+            <a:r>
+              <a:rPr sz="1650" b="0">
+                <a:solidFill>
+                  <a:srgbClr val="A7F3D0"/>
+                </a:solidFill>
+                <a:latin typeface="Courier New"/>
+                <a:ea typeface="Courier New"/>
+                <a:cs typeface="Courier New"/>
+              </a:rPr>
+              <a:t>%rdx = 0x2008   address of a[2]</a:t>
+            </a:r>
+          </a:p>
+          <a:p xmlns:a="http://schemas.openxmlformats.org/drawingml/2006/main">
+            <a:pPr>
+              <a:defRPr sz="1650" b="0">
+                <a:solidFill>
+                  <a:srgbClr val="A7F3D0"/>
+                </a:solidFill>
+                <a:latin typeface="Courier New"/>
+                <a:ea typeface="Courier New"/>
+                <a:cs typeface="Courier New"/>
+              </a:defRPr>
+            </a:pPr>
+            <a:r>
+              <a:rPr sz="1650" b="0">
+                <a:solidFill>
+                  <a:srgbClr val="A7F3D0"/>
+                </a:solidFill>
+                <a:latin typeface="Courier New"/>
+                <a:ea typeface="Courier New"/>
+                <a:cs typeface="Courier New"/>
+              </a:rPr>
+              <a:t>%eax = 30       value of a[2]</a:t>
+            </a:r>
+          </a:p>
+          <a:p xmlns:a="http://schemas.openxmlformats.org/drawingml/2006/main">
+            <a:r>
+              <a:t/>
+            </a:r>
+          </a:p>
+          <a:p xmlns:a="http://schemas.openxmlformats.org/drawingml/2006/main">
+            <a:pPr>
+              <a:defRPr sz="1650" b="0">
+                <a:solidFill>
+                  <a:srgbClr val="A7F3D0"/>
+                </a:solidFill>
+                <a:latin typeface="Courier New"/>
+                <a:ea typeface="Courier New"/>
+                <a:cs typeface="Courier New"/>
+              </a:defRPr>
+            </a:pPr>
+            <a:r>
+              <a:rPr sz="1650" b="0">
+                <a:solidFill>
+                  <a:srgbClr val="A7F3D0"/>
+                </a:solidFill>
+                <a:latin typeface="Courier New"/>
+                <a:ea typeface="Courier New"/>
+                <a:cs typeface="Courier New"/>
+              </a:rPr>
+              <a:t>$        literal</a:t>
+            </a:r>
+          </a:p>
+          <a:p xmlns:a="http://schemas.openxmlformats.org/drawingml/2006/main">
+            <a:pPr>
+              <a:defRPr sz="1650" b="0">
+                <a:solidFill>
+                  <a:srgbClr val="A7F3D0"/>
+                </a:solidFill>
+                <a:latin typeface="Courier New"/>
+                <a:ea typeface="Courier New"/>
+                <a:cs typeface="Courier New"/>
+              </a:defRPr>
+            </a:pPr>
+            <a:r>
+              <a:rPr sz="1650" b="0">
+                <a:solidFill>
+                  <a:srgbClr val="A7F3D0"/>
+                </a:solidFill>
+                <a:latin typeface="Courier New"/>
+                <a:ea typeface="Courier New"/>
+                <a:cs typeface="Courier New"/>
+              </a:rPr>
+              <a:t>%        register</a:t>
+            </a:r>
+          </a:p>
+          <a:p xmlns:a="http://schemas.openxmlformats.org/drawingml/2006/main">
+            <a:pPr>
+              <a:defRPr sz="1650" b="0">
+                <a:solidFill>
+                  <a:srgbClr val="A7F3D0"/>
+                </a:solidFill>
+                <a:latin typeface="Courier New"/>
+                <a:ea typeface="Courier New"/>
+                <a:cs typeface="Courier New"/>
+              </a:defRPr>
+            </a:pPr>
+            <a:r>
+              <a:rPr sz="1650" b="0">
+                <a:solidFill>
+                  <a:srgbClr val="A7F3D0"/>
+                </a:solidFill>
+                <a:latin typeface="Courier New"/>
+                <a:ea typeface="Courier New"/>
+                <a:cs typeface="Courier New"/>
+              </a:rPr>
+              <a:t>(...)    memory</a:t>
+            </a:r>
+          </a:p>
+          <a:p xmlns:a="http://schemas.openxmlformats.org/drawingml/2006/main">
+            <a:pPr>
+              <a:defRPr sz="1650" b="0">
+                <a:solidFill>
+                  <a:srgbClr val="A7F3D0"/>
+                </a:solidFill>
+                <a:latin typeface="Courier New"/>
+                <a:ea typeface="Courier New"/>
+                <a:cs typeface="Courier New"/>
+              </a:defRPr>
+            </a:pPr>
+            <a:r>
+              <a:rPr sz="1650" b="0">
+                <a:solidFill>
+                  <a:srgbClr val="A7F3D0"/>
+                </a:solidFill>
+                <a:latin typeface="Courier New"/>
+                <a:ea typeface="Courier New"/>
+                <a:cs typeface="Courier New"/>
+              </a:rPr>
+              <a:t>q/l      8/4 bytes</a:t>
+            </a:r>
+          </a:p>
+        </p:txBody>
+      </p:sp>
+      <p:sp>
+        <p:nvSpPr>
+          <p:cNvPr id="5" name="">
+            <a:extLst xmlns:a="http://schemas.openxmlformats.org/drawingml/2006/main">
+              <a:ext uri="{FF2B5EF4-FFF2-40B4-BE49-F238E27FC236}">
+                <a16:creationId xmlns:a16="http://schemas.microsoft.com/office/drawing/2014/main" id="{ECA36F9F-59E4-44F4-9FC8-C812B4C6F1CE}"/>
+              </a:ext>
+            </a:extLst>
+          </p:cNvPr>
+          <p:cNvSpPr>
+            <a:spLocks xmlns:a="http://schemas.openxmlformats.org/drawingml/2006/main" noGrp="1"/>
+          </p:cNvSpPr>
+          <p:nvPr/>
+        </p:nvSpPr>
+        <p:spPr>
+          <a:xfrm xmlns:a="http://schemas.openxmlformats.org/drawingml/2006/main">
+            <a:off x="685800" y="5743575"/>
+            <a:ext cx="10191750" cy="428625"/>
+          </a:xfrm>
+          <a:prstGeom xmlns:a="http://schemas.openxmlformats.org/drawingml/2006/main" prst="rect">
+            <a:avLst/>
+          </a:prstGeom>
+          <a:noFill xmlns:a="http://schemas.openxmlformats.org/drawingml/2006/main"/>
+          <a:ln xmlns:a="http://schemas.openxmlformats.org/drawingml/2006/main" w="0">
+            <a:noFill/>
+          </a:ln>
+        </p:spPr>
+        <p:txBody>
+          <a:bodyPr xmlns:a="http://schemas.openxmlformats.org/drawingml/2006/main" anchor="t">
+            <a:normAutofit fontScale="100000"/>
+          </a:bodyPr>
+          <a:lstStyle xmlns:a="http://schemas.openxmlformats.org/drawingml/2006/main"/>
+          <a:p xmlns:a="http://schemas.openxmlformats.org/drawingml/2006/main">
+            <a:pPr>
+              <a:defRPr sz="1350" b="0">
+                <a:solidFill>
+                  <a:srgbClr val="A1A1AA"/>
+                </a:solidFill>
+                <a:latin typeface="Arial"/>
+                <a:ea typeface="Arial"/>
+                <a:cs typeface="Arial"/>
+              </a:defRPr>
+            </a:pPr>
+            <a:r>
+              <a:rPr sz="1350" b="0">
+                <a:solidFill>
+                  <a:srgbClr val="A1A1AA"/>
+                </a:solidFill>
+                <a:latin typeface="Arial"/>
+                <a:ea typeface="Arial"/>
+                <a:cs typeface="Arial"/>
+              </a:rPr>
+              <a:t>Read the relevant C beside the assembly, then verify one step at a time.</a:t>
+            </a:r>
+          </a:p>
+        </p:txBody>
+      </p:sp>
+      <p:sp>
+        <p:nvSpPr>
+          <p:cNvPr id="6" name="">
+            <a:extLst xmlns:a="http://schemas.openxmlformats.org/drawingml/2006/main">
+              <a:ext uri="{FF2B5EF4-FFF2-40B4-BE49-F238E27FC236}">
+                <a16:creationId xmlns:a16="http://schemas.microsoft.com/office/drawing/2014/main" id="{2B8D8537-72A7-4B47-A806-12B2F54A7471}"/>
+              </a:ext>
+            </a:extLst>
+          </p:cNvPr>
+          <p:cNvSpPr>
+            <a:spLocks xmlns:a="http://schemas.openxmlformats.org/drawingml/2006/main" noGrp="1"/>
+          </p:cNvSpPr>
+          <p:nvPr/>
+        </p:nvSpPr>
+        <p:spPr>
+          <a:xfrm xmlns:a="http://schemas.openxmlformats.org/drawingml/2006/main">
+            <a:off x="10477500" y="6210300"/>
+            <a:ext cx="1000125" cy="219075"/>
+          </a:xfrm>
+          <a:prstGeom xmlns:a="http://schemas.openxmlformats.org/drawingml/2006/main" prst="rect">
+            <a:avLst/>
+          </a:prstGeom>
+          <a:noFill xmlns:a="http://schemas.openxmlformats.org/drawingml/2006/main"/>
+          <a:ln xmlns:a="http://schemas.openxmlformats.org/drawingml/2006/main" w="0">
+            <a:noFill/>
+          </a:ln>
+        </p:spPr>
+        <p:txBody>
+          <a:bodyPr xmlns:a="http://schemas.openxmlformats.org/drawingml/2006/main" anchor="t">
+            <a:normAutofit fontScale="79762"/>
+          </a:bodyPr>
+          <a:lstStyle xmlns:a="http://schemas.openxmlformats.org/drawingml/2006/main"/>
+          <a:p xmlns:a="http://schemas.openxmlformats.org/drawingml/2006/main">
+            <a:pPr>
+              <a:defRPr sz="1050" b="0">
+                <a:solidFill>
+                  <a:srgbClr val="71717A"/>
+                </a:solidFill>
+                <a:latin typeface="Courier New"/>
+                <a:ea typeface="Courier New"/>
+                <a:cs typeface="Courier New"/>
+              </a:defRPr>
+            </a:pPr>
+            <a:r>
+              <a:rPr sz="1050" b="0">
+                <a:solidFill>
+                  <a:srgbClr val="71717A"/>
+                </a:solidFill>
+                <a:latin typeface="Courier New"/>
+                <a:ea typeface="Courier New"/>
+                <a:cs typeface="Courier New"/>
+              </a:rPr>
+              <a:t>26 / 26</a:t>
+            </a:r>
+          </a:p>
+        </p:txBody>
+      </p:sp>
+    </p:spTree>
+    <p:extLst>
+      <p:ext uri="{BB962C8B-B14F-4D97-AF65-F5344CB8AC3E}">
+        <p14:creationId xmlns:p14="http://schemas.microsoft.com/office/powerpoint/2010/main" val="883911834"/>
       </p:ext>
     </p:extLst>
   </p:cSld>
@@ -8578,7 +12609,7 @@
           <p:cNvPr id="7" name="">
             <a:extLst xmlns:a="http://schemas.openxmlformats.org/drawingml/2006/main">
               <a:ext uri="{FF2B5EF4-FFF2-40B4-BE49-F238E27FC236}">
-                <a16:creationId xmlns:a16="http://schemas.microsoft.com/office/drawing/2014/main" id="{CEC90D3C-4C7F-4582-8B2B-7EDDBB8E8082}"/>
+                <a16:creationId xmlns:a16="http://schemas.microsoft.com/office/drawing/2014/main" id="{23217C83-2C97-4761-B068-713D269F9408}"/>
               </a:ext>
             </a:extLst>
           </p:cNvPr>
@@ -8625,7 +12656,7 @@
                 <a:ea typeface="Courier New"/>
                 <a:cs typeface="Courier New"/>
               </a:rPr>
-              <a:t>LECTURE 6 · HARDWARE BRIDGE</a:t>
+              <a:t>FLOATING POINT · FIRST STEP</a:t>
             </a:r>
           </a:p>
         </p:txBody>
@@ -8635,7 +12666,7 @@
           <p:cNvPr id="2" name="">
             <a:extLst xmlns:a="http://schemas.openxmlformats.org/drawingml/2006/main">
               <a:ext uri="{FF2B5EF4-FFF2-40B4-BE49-F238E27FC236}">
-                <a16:creationId xmlns:a16="http://schemas.microsoft.com/office/drawing/2014/main" id="{830DDFA0-B47C-4A76-A1FF-930066C280E5}"/>
+                <a16:creationId xmlns:a16="http://schemas.microsoft.com/office/drawing/2014/main" id="{F83129EE-90C7-453C-AC74-A49AEC155EE6}"/>
               </a:ext>
             </a:extLst>
           </p:cNvPr>
@@ -8682,7 +12713,7 @@
                 <a:ea typeface="Arial"/>
                 <a:cs typeface="Arial"/>
               </a:rPr>
-              <a:t>ALU, FPU, and instructions</a:t>
+              <a:t>Write a ratio in binary</a:t>
             </a:r>
           </a:p>
         </p:txBody>
@@ -8692,7 +12723,7 @@
           <p:cNvPr id="3" name="">
             <a:extLst xmlns:a="http://schemas.openxmlformats.org/drawingml/2006/main">
               <a:ext uri="{FF2B5EF4-FFF2-40B4-BE49-F238E27FC236}">
-                <a16:creationId xmlns:a16="http://schemas.microsoft.com/office/drawing/2014/main" id="{A5B9DE3B-A5CA-4279-8DE4-F345BA2DBD0A}"/>
+                <a16:creationId xmlns:a16="http://schemas.microsoft.com/office/drawing/2014/main" id="{B5D0BD62-5570-4BC1-B18E-4ADB5B78029D}"/>
               </a:ext>
             </a:extLst>
           </p:cNvPr>
@@ -8739,7 +12770,7 @@
                 <a:ea typeface="Arial"/>
                 <a:cs typeface="Arial"/>
               </a:rPr>
-              <a:t>The ALU handles integer arithmetic and logic. The FPU handles floating point work.</a:t>
+              <a:t>Start with the value, before thinking about fields.</a:t>
             </a:r>
           </a:p>
           <a:p xmlns:a="http://schemas.openxmlformats.org/drawingml/2006/main">
@@ -8767,7 +12798,7 @@
                 <a:ea typeface="Arial"/>
                 <a:cs typeface="Arial"/>
               </a:rPr>
-              <a:t>Machine instructions choose operations and operands. Assembly gives those instructions readable names.</a:t>
+              <a:t>5/4 is 1.25 in decimal. The quarter is 2⁻², so 5/4 is 1.01 in binary.</a:t>
             </a:r>
           </a:p>
         </p:txBody>
@@ -8777,7 +12808,7 @@
           <p:cNvPr id="4" name="">
             <a:extLst xmlns:a="http://schemas.openxmlformats.org/drawingml/2006/main">
               <a:ext uri="{FF2B5EF4-FFF2-40B4-BE49-F238E27FC236}">
-                <a16:creationId xmlns:a16="http://schemas.microsoft.com/office/drawing/2014/main" id="{4B4F9E59-1954-455E-8152-D44F7B87A2E9}"/>
+                <a16:creationId xmlns:a16="http://schemas.microsoft.com/office/drawing/2014/main" id="{71514B00-5A2D-421F-ABE5-1E1175E765C4}"/>
               </a:ext>
             </a:extLst>
           </p:cNvPr>
@@ -8824,7 +12855,7 @@
                 <a:ea typeface="Courier New"/>
                 <a:cs typeface="Courier New"/>
               </a:rPr>
-              <a:t>C:            a = a + 8;</a:t>
+              <a:t>5/4 = 1 + 1/4</a:t>
             </a:r>
           </a:p>
           <a:p xmlns:a="http://schemas.openxmlformats.org/drawingml/2006/main">
@@ -8847,7 +12878,7 @@
                 <a:ea typeface="Courier New"/>
                 <a:cs typeface="Courier New"/>
               </a:rPr>
-              <a:t>Assembly:     addl $8, -4(%rbp)</a:t>
+              <a:t>    = 1 + 2⁻²</a:t>
             </a:r>
           </a:p>
           <a:p xmlns:a="http://schemas.openxmlformats.org/drawingml/2006/main">
@@ -8870,7 +12901,12 @@
                 <a:ea typeface="Courier New"/>
                 <a:cs typeface="Courier New"/>
               </a:rPr>
-              <a:t>Machine code: instruction bytes</a:t>
+              <a:t>    = 1.01₂</a:t>
+            </a:r>
+          </a:p>
+          <a:p xmlns:a="http://schemas.openxmlformats.org/drawingml/2006/main">
+            <a:r>
+              <a:t/>
             </a:r>
           </a:p>
           <a:p xmlns:a="http://schemas.openxmlformats.org/drawingml/2006/main">
@@ -8893,7 +12929,7 @@
                 <a:ea typeface="Courier New"/>
                 <a:cs typeface="Courier New"/>
               </a:rPr>
-              <a:t>Hardware:     decode, then execute</a:t>
+              <a:t>With 3 fraction bits: 1.010₂</a:t>
             </a:r>
           </a:p>
         </p:txBody>
@@ -8903,7 +12939,7 @@
           <p:cNvPr id="5" name="">
             <a:extLst xmlns:a="http://schemas.openxmlformats.org/drawingml/2006/main">
               <a:ext uri="{FF2B5EF4-FFF2-40B4-BE49-F238E27FC236}">
-                <a16:creationId xmlns:a16="http://schemas.microsoft.com/office/drawing/2014/main" id="{1574882A-F115-4DA3-A31D-E06BC3B4EDD7}"/>
+                <a16:creationId xmlns:a16="http://schemas.microsoft.com/office/drawing/2014/main" id="{90951000-B20E-4C49-A64C-8A7F940E2D1B}"/>
               </a:ext>
             </a:extLst>
           </p:cNvPr>
@@ -8950,7 +12986,7 @@
                 <a:ea typeface="Arial"/>
                 <a:cs typeface="Arial"/>
               </a:rPr>
-              <a:t>The example assembly is one possible unoptimized x86-64 translation, not a required compiler output.</a:t>
+              <a:t>Binary places after the point are 1/2, 1/4, 1/8, and so on.</a:t>
             </a:r>
           </a:p>
         </p:txBody>
@@ -8960,7 +12996,7 @@
           <p:cNvPr id="6" name="">
             <a:extLst xmlns:a="http://schemas.openxmlformats.org/drawingml/2006/main">
               <a:ext uri="{FF2B5EF4-FFF2-40B4-BE49-F238E27FC236}">
-                <a16:creationId xmlns:a16="http://schemas.microsoft.com/office/drawing/2014/main" id="{4920927F-7A67-4230-A551-E5979780D3B3}"/>
+                <a16:creationId xmlns:a16="http://schemas.microsoft.com/office/drawing/2014/main" id="{D8B60308-1A78-4D4A-A5E8-B77EA72C37A8}"/>
               </a:ext>
             </a:extLst>
           </p:cNvPr>
@@ -9007,7 +13043,7 @@
                 <a:ea typeface="Courier New"/>
                 <a:cs typeface="Courier New"/>
               </a:rPr>
-              <a:t>03 / 19</a:t>
+              <a:t>03 / 26</a:t>
             </a:r>
           </a:p>
         </p:txBody>
@@ -9015,7 +13051,7 @@
     </p:spTree>
     <p:extLst>
       <p:ext uri="{BB962C8B-B14F-4D97-AF65-F5344CB8AC3E}">
-        <p14:creationId xmlns:p14="http://schemas.microsoft.com/office/powerpoint/2010/main" val="1530330455"/>
+        <p14:creationId xmlns:p14="http://schemas.microsoft.com/office/powerpoint/2010/main" val="1031819998"/>
       </p:ext>
     </p:extLst>
   </p:cSld>
@@ -9046,7 +13082,7 @@
           <p:cNvPr id="7" name="">
             <a:extLst xmlns:a="http://schemas.openxmlformats.org/drawingml/2006/main">
               <a:ext uri="{FF2B5EF4-FFF2-40B4-BE49-F238E27FC236}">
-                <a16:creationId xmlns:a16="http://schemas.microsoft.com/office/drawing/2014/main" id="{A1381817-172F-441C-BC9E-88F5E0F8F09D}"/>
+                <a16:creationId xmlns:a16="http://schemas.microsoft.com/office/drawing/2014/main" id="{BCFBF6B7-AA73-4E6D-9493-BE91284C8170}"/>
               </a:ext>
             </a:extLst>
           </p:cNvPr>
@@ -9093,7 +13129,7 @@
                 <a:ea typeface="Courier New"/>
                 <a:cs typeface="Courier New"/>
               </a:rPr>
-              <a:t>LECTURE 6–7 · READING ORDER</a:t>
+              <a:t>FLOATING POINT · NORMAL VALUES</a:t>
             </a:r>
           </a:p>
         </p:txBody>
@@ -9103,7 +13139,7 @@
           <p:cNvPr id="2" name="">
             <a:extLst xmlns:a="http://schemas.openxmlformats.org/drawingml/2006/main">
               <a:ext uri="{FF2B5EF4-FFF2-40B4-BE49-F238E27FC236}">
-                <a16:creationId xmlns:a16="http://schemas.microsoft.com/office/drawing/2014/main" id="{3CA442A3-54AB-4AFC-9894-D5DD62E00953}"/>
+                <a16:creationId xmlns:a16="http://schemas.microsoft.com/office/drawing/2014/main" id="{ADEAA4E1-64CC-4F17-A696-AC75ACC0FD10}"/>
               </a:ext>
             </a:extLst>
           </p:cNvPr>
@@ -9150,7 +13186,7 @@
                 <a:ea typeface="Arial"/>
                 <a:cs typeface="Arial"/>
               </a:rPr>
-              <a:t>One line of AT&amp;T assembly</a:t>
+              <a:t>The exponent has a bias</a:t>
             </a:r>
           </a:p>
         </p:txBody>
@@ -9160,7 +13196,7 @@
           <p:cNvPr id="3" name="">
             <a:extLst xmlns:a="http://schemas.openxmlformats.org/drawingml/2006/main">
               <a:ext uri="{FF2B5EF4-FFF2-40B4-BE49-F238E27FC236}">
-                <a16:creationId xmlns:a16="http://schemas.microsoft.com/office/drawing/2014/main" id="{25936786-F1BF-42A0-B2FE-666B9BFF5492}"/>
+                <a16:creationId xmlns:a16="http://schemas.microsoft.com/office/drawing/2014/main" id="{CDAD1316-1DD6-453D-AF4E-1FE12220AE09}"/>
               </a:ext>
             </a:extLst>
           </p:cNvPr>
@@ -9207,7 +13243,7 @@
                 <a:ea typeface="Arial"/>
                 <a:cs typeface="Arial"/>
               </a:rPr>
-              <a:t>Read the source first, then the destination. The destination changes.</a:t>
+              <a:t>A normal value is written as 1.fraction × 2ᵉ. The leading 1 is implied and is not stored.</a:t>
             </a:r>
           </a:p>
           <a:p xmlns:a="http://schemas.openxmlformats.org/drawingml/2006/main">
@@ -9235,7 +13271,7 @@
                 <a:ea typeface="Arial"/>
                 <a:cs typeface="Arial"/>
               </a:rPr>
-              <a:t>The suffix says how much data is used: b = 1 byte, w = 2, l = 4, q = 8.</a:t>
+              <a:t>The stored exponent E equals e + bias.</a:t>
             </a:r>
           </a:p>
         </p:txBody>
@@ -9245,7 +13281,7 @@
           <p:cNvPr id="4" name="">
             <a:extLst xmlns:a="http://schemas.openxmlformats.org/drawingml/2006/main">
               <a:ext uri="{FF2B5EF4-FFF2-40B4-BE49-F238E27FC236}">
-                <a16:creationId xmlns:a16="http://schemas.microsoft.com/office/drawing/2014/main" id="{F7BFB8D7-85DA-4F4B-B130-3EB28E9D9371}"/>
+                <a16:creationId xmlns:a16="http://schemas.microsoft.com/office/drawing/2014/main" id="{70C9427F-68F0-4671-8106-A7F32DC45507}"/>
               </a:ext>
             </a:extLst>
           </p:cNvPr>
@@ -9292,7 +13328,7 @@
                 <a:ea typeface="Courier New"/>
                 <a:cs typeface="Courier New"/>
               </a:rPr>
-              <a:t>movq $5, %rax</a:t>
+              <a:t>Practice bias = 3</a:t>
             </a:r>
           </a:p>
           <a:p xmlns:a="http://schemas.openxmlformats.org/drawingml/2006/main">
@@ -9320,7 +13356,7 @@
                 <a:ea typeface="Courier New"/>
                 <a:cs typeface="Courier New"/>
               </a:rPr>
-              <a:t>movq   move 8 bytes</a:t>
+              <a:t>e = −2  →  E = 1  →  bits 001</a:t>
             </a:r>
           </a:p>
           <a:p xmlns:a="http://schemas.openxmlformats.org/drawingml/2006/main">
@@ -9343,7 +13379,7 @@
                 <a:ea typeface="Courier New"/>
                 <a:cs typeface="Courier New"/>
               </a:rPr>
-              <a:t>$5     literal value 5</a:t>
+              <a:t>e =  0  →  E = 3  →  bits 011</a:t>
             </a:r>
           </a:p>
           <a:p xmlns:a="http://schemas.openxmlformats.org/drawingml/2006/main">
@@ -9366,35 +13402,7 @@
                 <a:ea typeface="Courier New"/>
                 <a:cs typeface="Courier New"/>
               </a:rPr>
-              <a:t>%rax   destination register</a:t>
-            </a:r>
-          </a:p>
-          <a:p xmlns:a="http://schemas.openxmlformats.org/drawingml/2006/main">
-            <a:r>
-              <a:t/>
-            </a:r>
-          </a:p>
-          <a:p xmlns:a="http://schemas.openxmlformats.org/drawingml/2006/main">
-            <a:pPr>
-              <a:defRPr sz="1650" b="0">
-                <a:solidFill>
-                  <a:srgbClr val="A7F3D0"/>
-                </a:solidFill>
-                <a:latin typeface="Courier New"/>
-                <a:ea typeface="Courier New"/>
-                <a:cs typeface="Courier New"/>
-              </a:defRPr>
-            </a:pPr>
-            <a:r>
-              <a:rPr sz="1650" b="0">
-                <a:solidFill>
-                  <a:srgbClr val="A7F3D0"/>
-                </a:solidFill>
-                <a:latin typeface="Courier New"/>
-                <a:ea typeface="Courier New"/>
-                <a:cs typeface="Courier New"/>
-              </a:rPr>
-              <a:t>Afterward: %rax = 5</a:t>
+              <a:t>e =  2  →  E = 5  →  bits 101</a:t>
             </a:r>
           </a:p>
         </p:txBody>
@@ -9404,7 +13412,7 @@
           <p:cNvPr id="5" name="">
             <a:extLst xmlns:a="http://schemas.openxmlformats.org/drawingml/2006/main">
               <a:ext uri="{FF2B5EF4-FFF2-40B4-BE49-F238E27FC236}">
-                <a16:creationId xmlns:a16="http://schemas.microsoft.com/office/drawing/2014/main" id="{2E2E9E17-0D68-41B4-B0D4-41F73AC911CF}"/>
+                <a16:creationId xmlns:a16="http://schemas.microsoft.com/office/drawing/2014/main" id="{22AB6784-0A31-4631-8E90-1916BFF61E77}"/>
               </a:ext>
             </a:extLst>
           </p:cNvPr>
@@ -9451,7 +13459,7 @@
                 <a:ea typeface="Arial"/>
                 <a:cs typeface="Arial"/>
               </a:rPr>
-              <a:t>AT&amp;T syntax is the format used in these lectures and by GCC’s default assembly output.</a:t>
+              <a:t>In this 3-bit format, E = 0 is for zero or subnormals; E = 7 is reserved.</a:t>
             </a:r>
           </a:p>
         </p:txBody>
@@ -9461,7 +13469,7 @@
           <p:cNvPr id="6" name="">
             <a:extLst xmlns:a="http://schemas.openxmlformats.org/drawingml/2006/main">
               <a:ext uri="{FF2B5EF4-FFF2-40B4-BE49-F238E27FC236}">
-                <a16:creationId xmlns:a16="http://schemas.microsoft.com/office/drawing/2014/main" id="{DDF531E4-B997-4933-92F4-52963CB9DE3E}"/>
+                <a16:creationId xmlns:a16="http://schemas.microsoft.com/office/drawing/2014/main" id="{2339BDBC-16B5-48E3-83D2-2EE8FDE771E9}"/>
               </a:ext>
             </a:extLst>
           </p:cNvPr>
@@ -9508,7 +13516,7 @@
                 <a:ea typeface="Courier New"/>
                 <a:cs typeface="Courier New"/>
               </a:rPr>
-              <a:t>04 / 19</a:t>
+              <a:t>04 / 26</a:t>
             </a:r>
           </a:p>
         </p:txBody>
@@ -9516,7 +13524,7 @@
     </p:spTree>
     <p:extLst>
       <p:ext uri="{BB962C8B-B14F-4D97-AF65-F5344CB8AC3E}">
-        <p14:creationId xmlns:p14="http://schemas.microsoft.com/office/powerpoint/2010/main" val="2119479961"/>
+        <p14:creationId xmlns:p14="http://schemas.microsoft.com/office/powerpoint/2010/main" val="600653741"/>
       </p:ext>
     </p:extLst>
   </p:cSld>
@@ -9547,7 +13555,7 @@
           <p:cNvPr id="7" name="">
             <a:extLst xmlns:a="http://schemas.openxmlformats.org/drawingml/2006/main">
               <a:ext uri="{FF2B5EF4-FFF2-40B4-BE49-F238E27FC236}">
-                <a16:creationId xmlns:a16="http://schemas.microsoft.com/office/drawing/2014/main" id="{37810AB8-001C-445F-8906-2047ED01791F}"/>
+                <a16:creationId xmlns:a16="http://schemas.microsoft.com/office/drawing/2014/main" id="{742D3E43-7C4C-4CAF-8365-70B7B211B76C}"/>
               </a:ext>
             </a:extLst>
           </p:cNvPr>
@@ -9594,7 +13602,7 @@
                 <a:ea typeface="Courier New"/>
                 <a:cs typeface="Courier New"/>
               </a:rPr>
-              <a:t>ASSEMBLY VOCABULARY</a:t>
+              <a:t>FLOATING POINT · WORKED EXAMPLE</a:t>
             </a:r>
           </a:p>
         </p:txBody>
@@ -9604,7 +13612,7 @@
           <p:cNvPr id="2" name="">
             <a:extLst xmlns:a="http://schemas.openxmlformats.org/drawingml/2006/main">
               <a:ext uri="{FF2B5EF4-FFF2-40B4-BE49-F238E27FC236}">
-                <a16:creationId xmlns:a16="http://schemas.microsoft.com/office/drawing/2014/main" id="{8B508FD5-C735-44EF-81C0-DA4F075C3617}"/>
+                <a16:creationId xmlns:a16="http://schemas.microsoft.com/office/drawing/2014/main" id="{1BC47B7C-FBD1-45EA-BDB0-89D2E74D3A36}"/>
               </a:ext>
             </a:extLst>
           </p:cNvPr>
@@ -9651,7 +13659,7 @@
                 <a:ea typeface="Arial"/>
                 <a:cs typeface="Arial"/>
               </a:rPr>
-              <a:t>Three kinds of operands</a:t>
+              <a:t>Encode a normal value: 5/4</a:t>
             </a:r>
           </a:p>
         </p:txBody>
@@ -9661,7 +13669,7 @@
           <p:cNvPr id="3" name="">
             <a:extLst xmlns:a="http://schemas.openxmlformats.org/drawingml/2006/main">
               <a:ext uri="{FF2B5EF4-FFF2-40B4-BE49-F238E27FC236}">
-                <a16:creationId xmlns:a16="http://schemas.microsoft.com/office/drawing/2014/main" id="{52DA6CFB-DCAF-48B6-9244-7BD720BB3954}"/>
+                <a16:creationId xmlns:a16="http://schemas.microsoft.com/office/drawing/2014/main" id="{705A294B-32F3-4E6A-B582-DE7B0874C530}"/>
               </a:ext>
             </a:extLst>
           </p:cNvPr>
@@ -9708,7 +13716,7 @@
                 <a:ea typeface="Arial"/>
                 <a:cs typeface="Arial"/>
               </a:rPr>
-              <a:t>A dollar sign means the value itself. A percent sign names a register. Parentheses mean memory at an address.</a:t>
+              <a:t>5/4 = 1.010₂ × 2⁰.</a:t>
             </a:r>
           </a:p>
           <a:p xmlns:a="http://schemas.openxmlformats.org/drawingml/2006/main">
@@ -9736,7 +13744,7 @@
                 <a:ea typeface="Arial"/>
                 <a:cs typeface="Arial"/>
               </a:rPr>
-              <a:t>These are different even when the same digits appear.</a:t>
+              <a:t>The true exponent is e = 0, so stored E = 0 + 3 = 3. The fraction after the leading 1 is 010₂, or F = 2.</a:t>
             </a:r>
           </a:p>
         </p:txBody>
@@ -9746,7 +13754,7 @@
           <p:cNvPr id="4" name="">
             <a:extLst xmlns:a="http://schemas.openxmlformats.org/drawingml/2006/main">
               <a:ext uri="{FF2B5EF4-FFF2-40B4-BE49-F238E27FC236}">
-                <a16:creationId xmlns:a16="http://schemas.microsoft.com/office/drawing/2014/main" id="{6E1A69D4-A8DE-4DC7-A299-610900BE4AA0}"/>
+                <a16:creationId xmlns:a16="http://schemas.microsoft.com/office/drawing/2014/main" id="{3674ED78-0E5F-47D4-8B31-627FCBD79096}"/>
               </a:ext>
             </a:extLst>
           </p:cNvPr>
@@ -9793,7 +13801,7 @@
                 <a:ea typeface="Courier New"/>
                 <a:cs typeface="Courier New"/>
               </a:rPr>
-              <a:t>$8          value 8</a:t>
+              <a:t>S = 0</a:t>
             </a:r>
           </a:p>
           <a:p xmlns:a="http://schemas.openxmlformats.org/drawingml/2006/main">
@@ -9816,7 +13824,7 @@
                 <a:ea typeface="Courier New"/>
                 <a:cs typeface="Courier New"/>
               </a:rPr>
-              <a:t>%rax        value inside rax</a:t>
+              <a:t>E = 3 = 011₂</a:t>
             </a:r>
           </a:p>
           <a:p xmlns:a="http://schemas.openxmlformats.org/drawingml/2006/main">
@@ -9839,7 +13847,12 @@
                 <a:ea typeface="Courier New"/>
                 <a:cs typeface="Courier New"/>
               </a:rPr>
-              <a:t>(%rax)      memory at address in rax</a:t>
+              <a:t>F = 2 = 010₂</a:t>
+            </a:r>
+          </a:p>
+          <a:p xmlns:a="http://schemas.openxmlformats.org/drawingml/2006/main">
+            <a:r>
+              <a:t/>
             </a:r>
           </a:p>
           <a:p xmlns:a="http://schemas.openxmlformats.org/drawingml/2006/main">
@@ -9862,7 +13875,7 @@
                 <a:ea typeface="Courier New"/>
                 <a:cs typeface="Courier New"/>
               </a:rPr>
-              <a:t>8(%rax)     memory at address rax + 8</a:t>
+              <a:t>Fields: 0 | 011 | 010</a:t>
             </a:r>
           </a:p>
           <a:p xmlns:a="http://schemas.openxmlformats.org/drawingml/2006/main">
@@ -9890,30 +13903,7 @@
                 <a:ea typeface="Courier New"/>
                 <a:cs typeface="Courier New"/>
               </a:rPr>
-              <a:t>movq $8, %rax   → rax becomes 8</a:t>
-            </a:r>
-          </a:p>
-          <a:p xmlns:a="http://schemas.openxmlformats.org/drawingml/2006/main">
-            <a:pPr>
-              <a:defRPr sz="1650" b="0">
-                <a:solidFill>
-                  <a:srgbClr val="A7F3D0"/>
-                </a:solidFill>
-                <a:latin typeface="Courier New"/>
-                <a:ea typeface="Courier New"/>
-                <a:cs typeface="Courier New"/>
-              </a:defRPr>
-            </a:pPr>
-            <a:r>
-              <a:rPr sz="1650" b="0">
-                <a:solidFill>
-                  <a:srgbClr val="A7F3D0"/>
-                </a:solidFill>
-                <a:latin typeface="Courier New"/>
-                <a:ea typeface="Courier New"/>
-                <a:cs typeface="Courier New"/>
-              </a:rPr>
-              <a:t>movq (%rax), %rbx → load from address 8</a:t>
+              <a:t>Check: (1 + 2/8) × 2⁰ = 5/4</a:t>
             </a:r>
           </a:p>
         </p:txBody>
@@ -9923,7 +13913,7 @@
           <p:cNvPr id="5" name="">
             <a:extLst xmlns:a="http://schemas.openxmlformats.org/drawingml/2006/main">
               <a:ext uri="{FF2B5EF4-FFF2-40B4-BE49-F238E27FC236}">
-                <a16:creationId xmlns:a16="http://schemas.microsoft.com/office/drawing/2014/main" id="{ACED9CC3-08C7-4141-A321-39F8588C9753}"/>
+                <a16:creationId xmlns:a16="http://schemas.microsoft.com/office/drawing/2014/main" id="{87ECD816-C700-4272-BD81-C1A4CAD3494F}"/>
               </a:ext>
             </a:extLst>
           </p:cNvPr>
@@ -9970,7 +13960,7 @@
                 <a:ea typeface="Arial"/>
                 <a:cs typeface="Arial"/>
               </a:rPr>
-              <a:t>The last line only makes sense if address 8 is readable; it illustrates syntax, not a safe program.</a:t>
+              <a:t>The stored fraction has three bits; the implied leading 1 is not one of them.</a:t>
             </a:r>
           </a:p>
         </p:txBody>
@@ -9980,7 +13970,7 @@
           <p:cNvPr id="6" name="">
             <a:extLst xmlns:a="http://schemas.openxmlformats.org/drawingml/2006/main">
               <a:ext uri="{FF2B5EF4-FFF2-40B4-BE49-F238E27FC236}">
-                <a16:creationId xmlns:a16="http://schemas.microsoft.com/office/drawing/2014/main" id="{83A07E18-6B77-4D4A-B164-76BA29E2B848}"/>
+                <a16:creationId xmlns:a16="http://schemas.microsoft.com/office/drawing/2014/main" id="{F3CD6794-AFE3-4574-AC1E-68A9423BC913}"/>
               </a:ext>
             </a:extLst>
           </p:cNvPr>
@@ -10027,7 +14017,7 @@
                 <a:ea typeface="Courier New"/>
                 <a:cs typeface="Courier New"/>
               </a:rPr>
-              <a:t>05 / 19</a:t>
+              <a:t>05 / 26</a:t>
             </a:r>
           </a:p>
         </p:txBody>
@@ -10035,7 +14025,7 @@
     </p:spTree>
     <p:extLst>
       <p:ext uri="{BB962C8B-B14F-4D97-AF65-F5344CB8AC3E}">
-        <p14:creationId xmlns:p14="http://schemas.microsoft.com/office/powerpoint/2010/main" val="1440678880"/>
+        <p14:creationId xmlns:p14="http://schemas.microsoft.com/office/powerpoint/2010/main" val="926200402"/>
       </p:ext>
     </p:extLst>
   </p:cSld>
@@ -10066,7 +14056,7 @@
           <p:cNvPr id="7" name="">
             <a:extLst xmlns:a="http://schemas.openxmlformats.org/drawingml/2006/main">
               <a:ext uri="{FF2B5EF4-FFF2-40B4-BE49-F238E27FC236}">
-                <a16:creationId xmlns:a16="http://schemas.microsoft.com/office/drawing/2014/main" id="{03B9B8CD-A9D4-4A71-94A2-3E7C3221DE96}"/>
+                <a16:creationId xmlns:a16="http://schemas.microsoft.com/office/drawing/2014/main" id="{DBD6A3ED-265C-4789-BF0A-6021958AF056}"/>
               </a:ext>
             </a:extLst>
           </p:cNvPr>
@@ -10113,7 +14103,7 @@
                 <a:ea typeface="Courier New"/>
                 <a:cs typeface="Courier New"/>
               </a:rPr>
-              <a:t>TRY IT · 1 MINUTE</a:t>
+              <a:t>FLOATING POINT · SUBNORMALS</a:t>
             </a:r>
           </a:p>
         </p:txBody>
@@ -10123,7 +14113,7 @@
           <p:cNvPr id="2" name="">
             <a:extLst xmlns:a="http://schemas.openxmlformats.org/drawingml/2006/main">
               <a:ext uri="{FF2B5EF4-FFF2-40B4-BE49-F238E27FC236}">
-                <a16:creationId xmlns:a16="http://schemas.microsoft.com/office/drawing/2014/main" id="{AAFAE137-E5CE-4B14-9FE9-15E5355CFB4C}"/>
+                <a16:creationId xmlns:a16="http://schemas.microsoft.com/office/drawing/2014/main" id="{7EE61E4C-7F57-406B-BD21-5422E88EBCDA}"/>
               </a:ext>
             </a:extLst>
           </p:cNvPr>
@@ -10170,7 +14160,7 @@
                 <a:ea typeface="Arial"/>
                 <a:cs typeface="Arial"/>
               </a:rPr>
-              <a:t>Trace two instructions</a:t>
+              <a:t>What happens below the normal range?</a:t>
             </a:r>
           </a:p>
         </p:txBody>
@@ -10180,7 +14170,7 @@
           <p:cNvPr id="3" name="">
             <a:extLst xmlns:a="http://schemas.openxmlformats.org/drawingml/2006/main">
               <a:ext uri="{FF2B5EF4-FFF2-40B4-BE49-F238E27FC236}">
-                <a16:creationId xmlns:a16="http://schemas.microsoft.com/office/drawing/2014/main" id="{7E742803-2FCF-4740-9085-A74FA6D64365}"/>
+                <a16:creationId xmlns:a16="http://schemas.microsoft.com/office/drawing/2014/main" id="{318B8CFA-E6B6-4BAD-88B5-C9355CEAE07C}"/>
               </a:ext>
             </a:extLst>
           </p:cNvPr>
@@ -10227,7 +14217,7 @@
                 <a:ea typeface="Arial"/>
                 <a:cs typeface="Arial"/>
               </a:rPr>
-              <a:t>Start with %rax = 100 and %rbx = 7.</a:t>
+              <a:t>The smallest positive normal value here is 1.000₂ × 2⁻² = 1/4.</a:t>
             </a:r>
           </a:p>
           <a:p xmlns:a="http://schemas.openxmlformats.org/drawingml/2006/main">
@@ -10255,35 +14245,7 @@
                 <a:ea typeface="Arial"/>
                 <a:cs typeface="Arial"/>
               </a:rPr>
-              <a:t>What is in each register after these lines?</a:t>
-            </a:r>
-          </a:p>
-          <a:p xmlns:a="http://schemas.openxmlformats.org/drawingml/2006/main">
-            <a:r>
-              <a:t/>
-            </a:r>
-          </a:p>
-          <a:p xmlns:a="http://schemas.openxmlformats.org/drawingml/2006/main">
-            <a:pPr>
-              <a:defRPr sz="1950" b="0">
-                <a:solidFill>
-                  <a:srgbClr val="D4D4D8"/>
-                </a:solidFill>
-                <a:latin typeface="Arial"/>
-                <a:ea typeface="Arial"/>
-                <a:cs typeface="Arial"/>
-              </a:defRPr>
-            </a:pPr>
-            <a:r>
-              <a:rPr sz="1950" b="0">
-                <a:solidFill>
-                  <a:srgbClr val="D4D4D8"/>
-                </a:solidFill>
-                <a:latin typeface="Arial"/>
-                <a:ea typeface="Arial"/>
-                <a:cs typeface="Arial"/>
-              </a:rPr>
-              <a:t>Which register changed on each line?</a:t>
+              <a:t>Smaller positive values use E = 0. They have no implied leading 1. Their exponent is fixed at 1 − bias.</a:t>
             </a:r>
           </a:p>
         </p:txBody>
@@ -10293,7 +14255,7 @@
           <p:cNvPr id="4" name="">
             <a:extLst xmlns:a="http://schemas.openxmlformats.org/drawingml/2006/main">
               <a:ext uri="{FF2B5EF4-FFF2-40B4-BE49-F238E27FC236}">
-                <a16:creationId xmlns:a16="http://schemas.microsoft.com/office/drawing/2014/main" id="{09373B3B-6E49-4EA5-9B22-A2D4AED0C9B6}"/>
+                <a16:creationId xmlns:a16="http://schemas.microsoft.com/office/drawing/2014/main" id="{109ABFFC-5872-4624-AE1D-84C39905D2F8}"/>
               </a:ext>
             </a:extLst>
           </p:cNvPr>
@@ -10340,7 +14302,7 @@
                 <a:ea typeface="Courier New"/>
                 <a:cs typeface="Courier New"/>
               </a:rPr>
-              <a:t>movq %rbx, %rax</a:t>
+              <a:t>Normal:    (1 + F/8) × 2^(E−3)</a:t>
             </a:r>
           </a:p>
           <a:p xmlns:a="http://schemas.openxmlformats.org/drawingml/2006/main">
@@ -10363,7 +14325,7 @@
                 <a:ea typeface="Courier New"/>
                 <a:cs typeface="Courier New"/>
               </a:rPr>
-              <a:t>addq $3, %rax</a:t>
+              <a:t>Subnormal: (    F/8) × 2^(1−3)</a:t>
             </a:r>
           </a:p>
           <a:p xmlns:a="http://schemas.openxmlformats.org/drawingml/2006/main">
@@ -10391,7 +14353,7 @@
                 <a:ea typeface="Courier New"/>
                 <a:cs typeface="Courier New"/>
               </a:rPr>
-              <a:t>%rax = ?</a:t>
+              <a:t>With E = 0:</a:t>
             </a:r>
           </a:p>
           <a:p xmlns:a="http://schemas.openxmlformats.org/drawingml/2006/main">
@@ -10414,7 +14376,7 @@
                 <a:ea typeface="Courier New"/>
                 <a:cs typeface="Courier New"/>
               </a:rPr>
-              <a:t>%rbx = ?</a:t>
+              <a:t>value = (F/8) × 1/4 = F/32</a:t>
             </a:r>
           </a:p>
         </p:txBody>
@@ -10424,7 +14386,7 @@
           <p:cNvPr id="5" name="">
             <a:extLst xmlns:a="http://schemas.openxmlformats.org/drawingml/2006/main">
               <a:ext uri="{FF2B5EF4-FFF2-40B4-BE49-F238E27FC236}">
-                <a16:creationId xmlns:a16="http://schemas.microsoft.com/office/drawing/2014/main" id="{89B2C794-3957-49CE-866B-64DAA105576F}"/>
+                <a16:creationId xmlns:a16="http://schemas.microsoft.com/office/drawing/2014/main" id="{9F4CF9CF-84BA-4EC0-8FAB-A22D151C3C0A}"/>
               </a:ext>
             </a:extLst>
           </p:cNvPr>
@@ -10471,7 +14433,7 @@
                 <a:ea typeface="Arial"/>
                 <a:cs typeface="Arial"/>
               </a:rPr>
-              <a:t>Read each line left to right: source, then destination.</a:t>
+              <a:t>E = 0 changes the formula; it does not mean the true exponent is −3.</a:t>
             </a:r>
           </a:p>
         </p:txBody>
@@ -10481,7 +14443,7 @@
           <p:cNvPr id="6" name="">
             <a:extLst xmlns:a="http://schemas.openxmlformats.org/drawingml/2006/main">
               <a:ext uri="{FF2B5EF4-FFF2-40B4-BE49-F238E27FC236}">
-                <a16:creationId xmlns:a16="http://schemas.microsoft.com/office/drawing/2014/main" id="{DAEC1731-5FDA-4FC6-B4ED-CEED5A61906D}"/>
+                <a16:creationId xmlns:a16="http://schemas.microsoft.com/office/drawing/2014/main" id="{8102533E-061C-486D-8935-0048992AA266}"/>
               </a:ext>
             </a:extLst>
           </p:cNvPr>
@@ -10528,7 +14490,7 @@
                 <a:ea typeface="Courier New"/>
                 <a:cs typeface="Courier New"/>
               </a:rPr>
-              <a:t>06 / 19</a:t>
+              <a:t>06 / 26</a:t>
             </a:r>
           </a:p>
         </p:txBody>
@@ -10536,7 +14498,7 @@
     </p:spTree>
     <p:extLst>
       <p:ext uri="{BB962C8B-B14F-4D97-AF65-F5344CB8AC3E}">
-        <p14:creationId xmlns:p14="http://schemas.microsoft.com/office/powerpoint/2010/main" val="1161994973"/>
+        <p14:creationId xmlns:p14="http://schemas.microsoft.com/office/powerpoint/2010/main" val="2127417299"/>
       </p:ext>
     </p:extLst>
   </p:cSld>
@@ -10567,7 +14529,7 @@
           <p:cNvPr id="7" name="">
             <a:extLst xmlns:a="http://schemas.openxmlformats.org/drawingml/2006/main">
               <a:ext uri="{FF2B5EF4-FFF2-40B4-BE49-F238E27FC236}">
-                <a16:creationId xmlns:a16="http://schemas.microsoft.com/office/drawing/2014/main" id="{D1AAFCF9-5EBD-4593-BBDC-BDBA342C5B48}"/>
+                <a16:creationId xmlns:a16="http://schemas.microsoft.com/office/drawing/2014/main" id="{CECA9B27-DB7A-4F32-815F-B74B7157F97F}"/>
               </a:ext>
             </a:extLst>
           </p:cNvPr>
@@ -10614,7 +14576,7 @@
                 <a:ea typeface="Courier New"/>
                 <a:cs typeface="Courier New"/>
               </a:rPr>
-              <a:t>WORKED EXAMPLE</a:t>
+              <a:t>FLOATING POINT · WORKED EXAMPLE</a:t>
             </a:r>
           </a:p>
         </p:txBody>
@@ -10624,7 +14586,7 @@
           <p:cNvPr id="2" name="">
             <a:extLst xmlns:a="http://schemas.openxmlformats.org/drawingml/2006/main">
               <a:ext uri="{FF2B5EF4-FFF2-40B4-BE49-F238E27FC236}">
-                <a16:creationId xmlns:a16="http://schemas.microsoft.com/office/drawing/2014/main" id="{C91AE967-5D70-43B1-80BD-11C8068E0468}"/>
+                <a16:creationId xmlns:a16="http://schemas.microsoft.com/office/drawing/2014/main" id="{B2C12482-9A52-4181-8EA9-E8A66935C31D}"/>
               </a:ext>
             </a:extLst>
           </p:cNvPr>
@@ -10671,7 +14633,7 @@
                 <a:ea typeface="Arial"/>
                 <a:cs typeface="Arial"/>
               </a:rPr>
-              <a:t>Trace answer</a:t>
+              <a:t>Encode a subnormal value: 1/8</a:t>
             </a:r>
           </a:p>
         </p:txBody>
@@ -10681,7 +14643,7 @@
           <p:cNvPr id="3" name="">
             <a:extLst xmlns:a="http://schemas.openxmlformats.org/drawingml/2006/main">
               <a:ext uri="{FF2B5EF4-FFF2-40B4-BE49-F238E27FC236}">
-                <a16:creationId xmlns:a16="http://schemas.microsoft.com/office/drawing/2014/main" id="{21FF75AB-D080-42C0-B421-4A44FB46732C}"/>
+                <a16:creationId xmlns:a16="http://schemas.microsoft.com/office/drawing/2014/main" id="{0E01CC07-B285-4F43-B3EB-D367BBB056A6}"/>
               </a:ext>
             </a:extLst>
           </p:cNvPr>
@@ -10728,7 +14690,7 @@
                 <a:ea typeface="Arial"/>
                 <a:cs typeface="Arial"/>
               </a:rPr>
-              <a:t>The first line copies 7 into %rax. The second adds 3 to that copy.</a:t>
+              <a:t>1/8 is below the smallest normal value, 1/4. Set E = 0.</a:t>
             </a:r>
           </a:p>
           <a:p xmlns:a="http://schemas.openxmlformats.org/drawingml/2006/main">
@@ -10756,7 +14718,7 @@
                 <a:ea typeface="Arial"/>
                 <a:cs typeface="Arial"/>
               </a:rPr>
-              <a:t>%rbx never changes.</a:t>
+              <a:t>For this format, a subnormal has value F/32. Solve F/32 = 1/8, giving F = 4.</a:t>
             </a:r>
           </a:p>
         </p:txBody>
@@ -10766,7 +14728,7 @@
           <p:cNvPr id="4" name="">
             <a:extLst xmlns:a="http://schemas.openxmlformats.org/drawingml/2006/main">
               <a:ext uri="{FF2B5EF4-FFF2-40B4-BE49-F238E27FC236}">
-                <a16:creationId xmlns:a16="http://schemas.microsoft.com/office/drawing/2014/main" id="{E7826070-AED1-4AA6-80F5-058568425EB2}"/>
+                <a16:creationId xmlns:a16="http://schemas.microsoft.com/office/drawing/2014/main" id="{99F60560-AF7C-4B8A-BBEF-A206FB04E784}"/>
               </a:ext>
             </a:extLst>
           </p:cNvPr>
@@ -10813,7 +14775,7 @@
                 <a:ea typeface="Courier New"/>
                 <a:cs typeface="Courier New"/>
               </a:rPr>
-              <a:t>Initially       rax = 100   rbx = 7</a:t>
+              <a:t>S = 0</a:t>
             </a:r>
           </a:p>
           <a:p xmlns:a="http://schemas.openxmlformats.org/drawingml/2006/main">
@@ -10836,7 +14798,7 @@
                 <a:ea typeface="Courier New"/>
                 <a:cs typeface="Courier New"/>
               </a:rPr>
-              <a:t>movq %rbx,%rax  rax =   7   rbx = 7</a:t>
+              <a:t>E = 0 = 000₂</a:t>
             </a:r>
           </a:p>
           <a:p xmlns:a="http://schemas.openxmlformats.org/drawingml/2006/main">
@@ -10859,7 +14821,63 @@
                 <a:ea typeface="Courier New"/>
                 <a:cs typeface="Courier New"/>
               </a:rPr>
-              <a:t>addq $3,%rax   rax =  10   rbx = 7</a:t>
+              <a:t>F = 4 = 100₂</a:t>
+            </a:r>
+          </a:p>
+          <a:p xmlns:a="http://schemas.openxmlformats.org/drawingml/2006/main">
+            <a:r>
+              <a:t/>
+            </a:r>
+          </a:p>
+          <a:p xmlns:a="http://schemas.openxmlformats.org/drawingml/2006/main">
+            <a:pPr>
+              <a:defRPr sz="1650" b="0">
+                <a:solidFill>
+                  <a:srgbClr val="A7F3D0"/>
+                </a:solidFill>
+                <a:latin typeface="Courier New"/>
+                <a:ea typeface="Courier New"/>
+                <a:cs typeface="Courier New"/>
+              </a:defRPr>
+            </a:pPr>
+            <a:r>
+              <a:rPr sz="1650" b="0">
+                <a:solidFill>
+                  <a:srgbClr val="A7F3D0"/>
+                </a:solidFill>
+                <a:latin typeface="Courier New"/>
+                <a:ea typeface="Courier New"/>
+                <a:cs typeface="Courier New"/>
+              </a:rPr>
+              <a:t>Fields: 0 | 000 | 100</a:t>
+            </a:r>
+          </a:p>
+          <a:p xmlns:a="http://schemas.openxmlformats.org/drawingml/2006/main">
+            <a:r>
+              <a:t/>
+            </a:r>
+          </a:p>
+          <a:p xmlns:a="http://schemas.openxmlformats.org/drawingml/2006/main">
+            <a:pPr>
+              <a:defRPr sz="1650" b="0">
+                <a:solidFill>
+                  <a:srgbClr val="A7F3D0"/>
+                </a:solidFill>
+                <a:latin typeface="Courier New"/>
+                <a:ea typeface="Courier New"/>
+                <a:cs typeface="Courier New"/>
+              </a:defRPr>
+            </a:pPr>
+            <a:r>
+              <a:rPr sz="1650" b="0">
+                <a:solidFill>
+                  <a:srgbClr val="A7F3D0"/>
+                </a:solidFill>
+                <a:latin typeface="Courier New"/>
+                <a:ea typeface="Courier New"/>
+                <a:cs typeface="Courier New"/>
+              </a:rPr>
+              <a:t>Check: (4/8) × 2⁻² = 1/8</a:t>
             </a:r>
           </a:p>
         </p:txBody>
@@ -10869,7 +14887,7 @@
           <p:cNvPr id="5" name="">
             <a:extLst xmlns:a="http://schemas.openxmlformats.org/drawingml/2006/main">
               <a:ext uri="{FF2B5EF4-FFF2-40B4-BE49-F238E27FC236}">
-                <a16:creationId xmlns:a16="http://schemas.microsoft.com/office/drawing/2014/main" id="{493E413F-7904-4528-A08D-D14CD6B7BC5A}"/>
+                <a16:creationId xmlns:a16="http://schemas.microsoft.com/office/drawing/2014/main" id="{8DB80937-F574-4F1A-B149-19222B27F739}"/>
               </a:ext>
             </a:extLst>
           </p:cNvPr>
@@ -10916,7 +14934,7 @@
                 <a:ea typeface="Arial"/>
                 <a:cs typeface="Arial"/>
               </a:rPr>
-              <a:t>A move copies a value; it does not erase the source.</a:t>
+              <a:t>The stored fraction is 100₂. There is no leading 1 in the subnormal formula.</a:t>
             </a:r>
           </a:p>
         </p:txBody>
@@ -10926,7 +14944,7 @@
           <p:cNvPr id="6" name="">
             <a:extLst xmlns:a="http://schemas.openxmlformats.org/drawingml/2006/main">
               <a:ext uri="{FF2B5EF4-FFF2-40B4-BE49-F238E27FC236}">
-                <a16:creationId xmlns:a16="http://schemas.microsoft.com/office/drawing/2014/main" id="{80F108AD-40E1-4E2D-A0AB-52183491248F}"/>
+                <a16:creationId xmlns:a16="http://schemas.microsoft.com/office/drawing/2014/main" id="{E1E48C19-A67A-47A9-8DED-3CD488DF82E5}"/>
               </a:ext>
             </a:extLst>
           </p:cNvPr>
@@ -10973,7 +14991,7 @@
                 <a:ea typeface="Courier New"/>
                 <a:cs typeface="Courier New"/>
               </a:rPr>
-              <a:t>07 / 19</a:t>
+              <a:t>07 / 26</a:t>
             </a:r>
           </a:p>
         </p:txBody>
@@ -10981,7 +14999,7 @@
     </p:spTree>
     <p:extLst>
       <p:ext uri="{BB962C8B-B14F-4D97-AF65-F5344CB8AC3E}">
-        <p14:creationId xmlns:p14="http://schemas.microsoft.com/office/powerpoint/2010/main" val="479575319"/>
+        <p14:creationId xmlns:p14="http://schemas.microsoft.com/office/powerpoint/2010/main" val="482910634"/>
       </p:ext>
     </p:extLst>
   </p:cSld>
@@ -11012,7 +15030,7 @@
           <p:cNvPr id="7" name="">
             <a:extLst xmlns:a="http://schemas.openxmlformats.org/drawingml/2006/main">
               <a:ext uri="{FF2B5EF4-FFF2-40B4-BE49-F238E27FC236}">
-                <a16:creationId xmlns:a16="http://schemas.microsoft.com/office/drawing/2014/main" id="{221EED7E-B98A-40F3-A5F6-F847FC56ACA1}"/>
+                <a16:creationId xmlns:a16="http://schemas.microsoft.com/office/drawing/2014/main" id="{2F1D4FA8-7CA1-42C0-8651-205DAB456109}"/>
               </a:ext>
             </a:extLst>
           </p:cNvPr>
@@ -11059,7 +15077,7 @@
                 <a:ea typeface="Courier New"/>
                 <a:cs typeface="Courier New"/>
               </a:rPr>
-              <a:t>LECTURE 6–7 · REGISTER NAMES</a:t>
+              <a:t>FLOATING POINT · PRACTICE</a:t>
             </a:r>
           </a:p>
         </p:txBody>
@@ -11069,7 +15087,7 @@
           <p:cNvPr id="2" name="">
             <a:extLst xmlns:a="http://schemas.openxmlformats.org/drawingml/2006/main">
               <a:ext uri="{FF2B5EF4-FFF2-40B4-BE49-F238E27FC236}">
-                <a16:creationId xmlns:a16="http://schemas.microsoft.com/office/drawing/2014/main" id="{4632EDD3-AD69-4717-8F36-B94A4B6866B9}"/>
+                <a16:creationId xmlns:a16="http://schemas.microsoft.com/office/drawing/2014/main" id="{40F8098D-7D0F-42BB-811B-E0EB6101091B}"/>
               </a:ext>
             </a:extLst>
           </p:cNvPr>
@@ -11116,7 +15134,7 @@
                 <a:ea typeface="Arial"/>
                 <a:cs typeface="Arial"/>
               </a:rPr>
-              <a:t>Registers have different widths</a:t>
+              <a:t>Your turn: classify two ratios</a:t>
             </a:r>
           </a:p>
         </p:txBody>
@@ -11126,7 +15144,7 @@
           <p:cNvPr id="3" name="">
             <a:extLst xmlns:a="http://schemas.openxmlformats.org/drawingml/2006/main">
               <a:ext uri="{FF2B5EF4-FFF2-40B4-BE49-F238E27FC236}">
-                <a16:creationId xmlns:a16="http://schemas.microsoft.com/office/drawing/2014/main" id="{C15C141F-7149-4DB5-AC30-E339D5C93414}"/>
+                <a16:creationId xmlns:a16="http://schemas.microsoft.com/office/drawing/2014/main" id="{3D92BDD9-1EE8-40B7-8D10-7CD44AC2FF64}"/>
               </a:ext>
             </a:extLst>
           </p:cNvPr>
@@ -11173,7 +15191,7 @@
                 <a:ea typeface="Arial"/>
                 <a:cs typeface="Arial"/>
               </a:rPr>
-              <a:t>%rax is 64 bits. %eax names its low 32 bits; %ax names the low 16; %al names the low 8.</a:t>
+              <a:t>Use the same practice format: 3 exponent bits, bias 3, and 3 fraction bits.</a:t>
             </a:r>
           </a:p>
           <a:p xmlns:a="http://schemas.openxmlformats.org/drawingml/2006/main">
@@ -11201,7 +15219,7 @@
                 <a:ea typeface="Arial"/>
                 <a:cs typeface="Arial"/>
               </a:rPr>
-              <a:t>Writing %eax zeroes the upper 32 bits of %rax. Reading %eax does not change %rax.</a:t>
+              <a:t>For each ratio, decide normal or subnormal, then find E and F.</a:t>
             </a:r>
           </a:p>
         </p:txBody>
@@ -11211,7 +15229,7 @@
           <p:cNvPr id="4" name="">
             <a:extLst xmlns:a="http://schemas.openxmlformats.org/drawingml/2006/main">
               <a:ext uri="{FF2B5EF4-FFF2-40B4-BE49-F238E27FC236}">
-                <a16:creationId xmlns:a16="http://schemas.microsoft.com/office/drawing/2014/main" id="{FD99C023-2BE9-4A75-960A-5B4CA7B00574}"/>
+                <a16:creationId xmlns:a16="http://schemas.microsoft.com/office/drawing/2014/main" id="{4C44C26C-EAB8-4C35-ADA6-099DD154A3DC}"/>
               </a:ext>
             </a:extLst>
           </p:cNvPr>
@@ -11258,7 +15276,7 @@
                 <a:ea typeface="Courier New"/>
                 <a:cs typeface="Courier New"/>
               </a:rPr>
-              <a:t>movq $-1, %rax</a:t>
+              <a:t>A. 3/2</a:t>
             </a:r>
           </a:p>
           <a:p xmlns:a="http://schemas.openxmlformats.org/drawingml/2006/main">
@@ -11281,7 +15299,30 @@
                 <a:ea typeface="Courier New"/>
                 <a:cs typeface="Courier New"/>
               </a:rPr>
-              <a:t>movl $1, %eax</a:t>
+              <a:t>   normal or subnormal?</a:t>
+            </a:r>
+          </a:p>
+          <a:p xmlns:a="http://schemas.openxmlformats.org/drawingml/2006/main">
+            <a:pPr>
+              <a:defRPr sz="1650" b="0">
+                <a:solidFill>
+                  <a:srgbClr val="A7F3D0"/>
+                </a:solidFill>
+                <a:latin typeface="Courier New"/>
+                <a:ea typeface="Courier New"/>
+                <a:cs typeface="Courier New"/>
+              </a:defRPr>
+            </a:pPr>
+            <a:r>
+              <a:rPr sz="1650" b="0">
+                <a:solidFill>
+                  <a:srgbClr val="A7F3D0"/>
+                </a:solidFill>
+                <a:latin typeface="Courier New"/>
+                <a:ea typeface="Courier New"/>
+                <a:cs typeface="Courier New"/>
+              </a:rPr>
+              <a:t>   E = ?   F = ?</a:t>
             </a:r>
           </a:p>
           <a:p xmlns:a="http://schemas.openxmlformats.org/drawingml/2006/main">
@@ -11309,12 +15350,7 @@
                 <a:ea typeface="Courier New"/>
                 <a:cs typeface="Courier New"/>
               </a:rPr>
-              <a:t>Now %rax = 0x0000000000000001</a:t>
-            </a:r>
-          </a:p>
-          <a:p xmlns:a="http://schemas.openxmlformats.org/drawingml/2006/main">
-            <a:r>
-              <a:t/>
+              <a:t>B. 3/16</a:t>
             </a:r>
           </a:p>
           <a:p xmlns:a="http://schemas.openxmlformats.org/drawingml/2006/main">
@@ -11337,7 +15373,7 @@
                 <a:ea typeface="Courier New"/>
                 <a:cs typeface="Courier New"/>
               </a:rPr>
-              <a:t>movq  ↔  %rax  ↔  8 bytes</a:t>
+              <a:t>   normal or subnormal?</a:t>
             </a:r>
           </a:p>
           <a:p xmlns:a="http://schemas.openxmlformats.org/drawingml/2006/main">
@@ -11360,7 +15396,7 @@
                 <a:ea typeface="Courier New"/>
                 <a:cs typeface="Courier New"/>
               </a:rPr>
-              <a:t>movl  ↔  %eax  ↔  4 bytes</a:t>
+              <a:t>   E = ?   F = ?</a:t>
             </a:r>
           </a:p>
         </p:txBody>
@@ -11370,7 +15406,7 @@
           <p:cNvPr id="5" name="">
             <a:extLst xmlns:a="http://schemas.openxmlformats.org/drawingml/2006/main">
               <a:ext uri="{FF2B5EF4-FFF2-40B4-BE49-F238E27FC236}">
-                <a16:creationId xmlns:a16="http://schemas.microsoft.com/office/drawing/2014/main" id="{6404CD27-1DA0-4EE3-B5F5-4DF338E088DD}"/>
+                <a16:creationId xmlns:a16="http://schemas.microsoft.com/office/drawing/2014/main" id="{010BF70E-B1F3-4655-8D2A-9F8999B30F9F}"/>
               </a:ext>
             </a:extLst>
           </p:cNvPr>
@@ -11417,7 +15453,7 @@
                 <a:ea typeface="Arial"/>
                 <a:cs typeface="Arial"/>
               </a:rPr>
-              <a:t>This zero-extension rule applies to 32-bit register destinations in x86-64.</a:t>
+              <a:t>Compare each value with the smallest normal, 1/4, before finding bits.</a:t>
             </a:r>
           </a:p>
         </p:txBody>
@@ -11427,7 +15463,7 @@
           <p:cNvPr id="6" name="">
             <a:extLst xmlns:a="http://schemas.openxmlformats.org/drawingml/2006/main">
               <a:ext uri="{FF2B5EF4-FFF2-40B4-BE49-F238E27FC236}">
-                <a16:creationId xmlns:a16="http://schemas.microsoft.com/office/drawing/2014/main" id="{C1062B0A-8015-4A91-AFBB-9E04190BDE0D}"/>
+                <a16:creationId xmlns:a16="http://schemas.microsoft.com/office/drawing/2014/main" id="{C7BFB043-FF1A-4122-A4D8-61D62EBF9E95}"/>
               </a:ext>
             </a:extLst>
           </p:cNvPr>
@@ -11474,7 +15510,7 @@
                 <a:ea typeface="Courier New"/>
                 <a:cs typeface="Courier New"/>
               </a:rPr>
-              <a:t>08 / 19</a:t>
+              <a:t>08 / 26</a:t>
             </a:r>
           </a:p>
         </p:txBody>
@@ -11482,7 +15518,7 @@
     </p:spTree>
     <p:extLst>
       <p:ext uri="{BB962C8B-B14F-4D97-AF65-F5344CB8AC3E}">
-        <p14:creationId xmlns:p14="http://schemas.microsoft.com/office/powerpoint/2010/main" val="1032486088"/>
+        <p14:creationId xmlns:p14="http://schemas.microsoft.com/office/powerpoint/2010/main" val="2091730236"/>
       </p:ext>
     </p:extLst>
   </p:cSld>
@@ -11513,7 +15549,7 @@
           <p:cNvPr id="7" name="">
             <a:extLst xmlns:a="http://schemas.openxmlformats.org/drawingml/2006/main">
               <a:ext uri="{FF2B5EF4-FFF2-40B4-BE49-F238E27FC236}">
-                <a16:creationId xmlns:a16="http://schemas.microsoft.com/office/drawing/2014/main" id="{D5A63E4D-D9DC-4F24-9325-98D2B594F106}"/>
+                <a16:creationId xmlns:a16="http://schemas.microsoft.com/office/drawing/2014/main" id="{09288539-5276-4697-90F4-50641D976E34}"/>
               </a:ext>
             </a:extLst>
           </p:cNvPr>
@@ -11560,7 +15596,7 @@
                 <a:ea typeface="Courier New"/>
                 <a:cs typeface="Courier New"/>
               </a:rPr>
-              <a:t>LECTURE 6–8 · ADDRESSES</a:t>
+              <a:t>FLOATING POINT · CHECK</a:t>
             </a:r>
           </a:p>
         </p:txBody>
@@ -11570,7 +15606,7 @@
           <p:cNvPr id="2" name="">
             <a:extLst xmlns:a="http://schemas.openxmlformats.org/drawingml/2006/main">
               <a:ext uri="{FF2B5EF4-FFF2-40B4-BE49-F238E27FC236}">
-                <a16:creationId xmlns:a16="http://schemas.microsoft.com/office/drawing/2014/main" id="{C4C8700A-908F-4130-B240-B1997CF65D01}"/>
+                <a16:creationId xmlns:a16="http://schemas.microsoft.com/office/drawing/2014/main" id="{E565C4E1-2E6B-40DB-BB5D-138AB40CBC18}"/>
               </a:ext>
             </a:extLst>
           </p:cNvPr>
@@ -11617,7 +15653,7 @@
                 <a:ea typeface="Arial"/>
                 <a:cs typeface="Arial"/>
               </a:rPr>
-              <a:t>Array indexing is byte arithmetic</a:t>
+              <a:t>Practice answers</a:t>
             </a:r>
           </a:p>
         </p:txBody>
@@ -11627,7 +15663,7 @@
           <p:cNvPr id="3" name="">
             <a:extLst xmlns:a="http://schemas.openxmlformats.org/drawingml/2006/main">
               <a:ext uri="{FF2B5EF4-FFF2-40B4-BE49-F238E27FC236}">
-                <a16:creationId xmlns:a16="http://schemas.microsoft.com/office/drawing/2014/main" id="{4C062AE3-ACBD-4712-A361-20E2D87F53D3}"/>
+                <a16:creationId xmlns:a16="http://schemas.microsoft.com/office/drawing/2014/main" id="{5C240C3A-57CA-42F3-B71A-D2332E5D333D}"/>
               </a:ext>
             </a:extLst>
           </p:cNvPr>
@@ -11674,7 +15710,7 @@
                 <a:ea typeface="Arial"/>
                 <a:cs typeface="Arial"/>
               </a:rPr>
-              <a:t>Memory addresses count bytes. For an int array, element i begins 4i bytes after the start when int is 4 bytes.</a:t>
+              <a:t>3/2 = 1.100₂ × 2⁰, so it is normal.</a:t>
             </a:r>
           </a:p>
           <a:p xmlns:a="http://schemas.openxmlformats.org/drawingml/2006/main">
@@ -11702,7 +15738,7 @@
                 <a:ea typeface="Arial"/>
                 <a:cs typeface="Arial"/>
               </a:rPr>
-              <a:t>The addressing form combines base + index × scale + displacement.</a:t>
+              <a:t>3/16 is below 1/4, so it is subnormal. Since value = F/32, F = 6.</a:t>
             </a:r>
           </a:p>
         </p:txBody>
@@ -11712,7 +15748,7 @@
           <p:cNvPr id="4" name="">
             <a:extLst xmlns:a="http://schemas.openxmlformats.org/drawingml/2006/main">
               <a:ext uri="{FF2B5EF4-FFF2-40B4-BE49-F238E27FC236}">
-                <a16:creationId xmlns:a16="http://schemas.microsoft.com/office/drawing/2014/main" id="{38E4C6D3-ECDC-4DF0-BDEC-6B336B57FD84}"/>
+                <a16:creationId xmlns:a16="http://schemas.microsoft.com/office/drawing/2014/main" id="{CF3E6C5D-FB1A-4074-BB14-6DA60B946AE0}"/>
               </a:ext>
             </a:extLst>
           </p:cNvPr>
@@ -11759,7 +15795,76 @@
                 <a:ea typeface="Courier New"/>
                 <a:cs typeface="Courier New"/>
               </a:rPr>
-              <a:t>Assume %rax = &amp;a[0], %rcx = 3</a:t>
+              <a:t>A. 3/2</a:t>
+            </a:r>
+          </a:p>
+          <a:p xmlns:a="http://schemas.openxmlformats.org/drawingml/2006/main">
+            <a:pPr>
+              <a:defRPr sz="1650" b="0">
+                <a:solidFill>
+                  <a:srgbClr val="A7F3D0"/>
+                </a:solidFill>
+                <a:latin typeface="Courier New"/>
+                <a:ea typeface="Courier New"/>
+                <a:cs typeface="Courier New"/>
+              </a:defRPr>
+            </a:pPr>
+            <a:r>
+              <a:rPr sz="1650" b="0">
+                <a:solidFill>
+                  <a:srgbClr val="A7F3D0"/>
+                </a:solidFill>
+                <a:latin typeface="Courier New"/>
+                <a:ea typeface="Courier New"/>
+                <a:cs typeface="Courier New"/>
+              </a:rPr>
+              <a:t>   E = 3 = 011₂</a:t>
+            </a:r>
+          </a:p>
+          <a:p xmlns:a="http://schemas.openxmlformats.org/drawingml/2006/main">
+            <a:pPr>
+              <a:defRPr sz="1650" b="0">
+                <a:solidFill>
+                  <a:srgbClr val="A7F3D0"/>
+                </a:solidFill>
+                <a:latin typeface="Courier New"/>
+                <a:ea typeface="Courier New"/>
+                <a:cs typeface="Courier New"/>
+              </a:defRPr>
+            </a:pPr>
+            <a:r>
+              <a:rPr sz="1650" b="0">
+                <a:solidFill>
+                  <a:srgbClr val="A7F3D0"/>
+                </a:solidFill>
+                <a:latin typeface="Courier New"/>
+                <a:ea typeface="Courier New"/>
+                <a:cs typeface="Courier New"/>
+              </a:rPr>
+              <a:t>   F = 4 = 100₂</a:t>
+            </a:r>
+          </a:p>
+          <a:p xmlns:a="http://schemas.openxmlformats.org/drawingml/2006/main">
+            <a:pPr>
+              <a:defRPr sz="1650" b="0">
+                <a:solidFill>
+                  <a:srgbClr val="A7F3D0"/>
+                </a:solidFill>
+                <a:latin typeface="Courier New"/>
+                <a:ea typeface="Courier New"/>
+                <a:cs typeface="Courier New"/>
+              </a:defRPr>
+            </a:pPr>
+            <a:r>
+              <a:rPr sz="1650" b="0">
+                <a:solidFill>
+                  <a:srgbClr val="A7F3D0"/>
+                </a:solidFill>
+                <a:latin typeface="Courier New"/>
+                <a:ea typeface="Courier New"/>
+                <a:cs typeface="Courier New"/>
+              </a:rPr>
+              <a:t>   Check: (1 + 4/8) × 1 = 3/2</a:t>
             </a:r>
           </a:p>
           <a:p xmlns:a="http://schemas.openxmlformats.org/drawingml/2006/main">
@@ -11787,7 +15892,7 @@
                 <a:ea typeface="Courier New"/>
                 <a:cs typeface="Courier New"/>
               </a:rPr>
-              <a:t>(%rax,%rcx,4)</a:t>
+              <a:t>B. 3/16</a:t>
             </a:r>
           </a:p>
           <a:p xmlns:a="http://schemas.openxmlformats.org/drawingml/2006/main">
@@ -11810,7 +15915,7 @@
                 <a:ea typeface="Courier New"/>
                 <a:cs typeface="Courier New"/>
               </a:rPr>
-              <a:t>= memory[rax + 3×4]</a:t>
+              <a:t>   E = 0 = 000₂</a:t>
             </a:r>
           </a:p>
           <a:p xmlns:a="http://schemas.openxmlformats.org/drawingml/2006/main">
@@ -11833,12 +15938,7 @@
                 <a:ea typeface="Courier New"/>
                 <a:cs typeface="Courier New"/>
               </a:rPr>
-              <a:t>= a[3]</a:t>
-            </a:r>
-          </a:p>
-          <a:p xmlns:a="http://schemas.openxmlformats.org/drawingml/2006/main">
-            <a:r>
-              <a:t/>
+              <a:t>   F = 6 = 110₂</a:t>
             </a:r>
           </a:p>
           <a:p xmlns:a="http://schemas.openxmlformats.org/drawingml/2006/main">
@@ -11861,7 +15961,7 @@
                 <a:ea typeface="Courier New"/>
                 <a:cs typeface="Courier New"/>
               </a:rPr>
-              <a:t>8(%rax,%rcx,4) = a[5]</a:t>
+              <a:t>   Check: 6/32 = 3/16</a:t>
             </a:r>
           </a:p>
         </p:txBody>
@@ -11871,7 +15971,7 @@
           <p:cNvPr id="5" name="">
             <a:extLst xmlns:a="http://schemas.openxmlformats.org/drawingml/2006/main">
               <a:ext uri="{FF2B5EF4-FFF2-40B4-BE49-F238E27FC236}">
-                <a16:creationId xmlns:a16="http://schemas.microsoft.com/office/drawing/2014/main" id="{1913A293-676F-45D1-8F6F-A73831165B76}"/>
+                <a16:creationId xmlns:a16="http://schemas.microsoft.com/office/drawing/2014/main" id="{7A691C48-55B9-462E-A2A2-10EE22CE8B3F}"/>
               </a:ext>
             </a:extLst>
           </p:cNvPr>
@@ -11918,7 +16018,7 @@
                 <a:ea typeface="Arial"/>
                 <a:cs typeface="Arial"/>
               </a:rPr>
-              <a:t>The scale is the size of an element in bytes; 8 adds two more int positions here.</a:t>
+              <a:t>A fraction can be exactly representable in one format and not another.</a:t>
             </a:r>
           </a:p>
         </p:txBody>
@@ -11928,7 +16028,7 @@
           <p:cNvPr id="6" name="">
             <a:extLst xmlns:a="http://schemas.openxmlformats.org/drawingml/2006/main">
               <a:ext uri="{FF2B5EF4-FFF2-40B4-BE49-F238E27FC236}">
-                <a16:creationId xmlns:a16="http://schemas.microsoft.com/office/drawing/2014/main" id="{C413D022-7584-4A00-8D28-110371BFC522}"/>
+                <a16:creationId xmlns:a16="http://schemas.microsoft.com/office/drawing/2014/main" id="{56A1B2B5-6F4D-4BDD-A953-77BA254CF43A}"/>
               </a:ext>
             </a:extLst>
           </p:cNvPr>
@@ -11975,7 +16075,7 @@
                 <a:ea typeface="Courier New"/>
                 <a:cs typeface="Courier New"/>
               </a:rPr>
-              <a:t>09 / 19</a:t>
+              <a:t>09 / 26</a:t>
             </a:r>
           </a:p>
         </p:txBody>
@@ -11983,7 +16083,7 @@
     </p:spTree>
     <p:extLst>
       <p:ext uri="{BB962C8B-B14F-4D97-AF65-F5344CB8AC3E}">
-        <p14:creationId xmlns:p14="http://schemas.microsoft.com/office/powerpoint/2010/main" val="216551771"/>
+        <p14:creationId xmlns:p14="http://schemas.microsoft.com/office/powerpoint/2010/main" val="1946185767"/>
       </p:ext>
     </p:extLst>
   </p:cSld>

--- a/public/presentations/CS211_Recitation_3.pptx
+++ b/public/presentations/CS211_Recitation_3.pptx
@@ -2,38 +2,29 @@
 <file path=ppt/presentation.xml><?xml version="1.0" encoding="utf-8"?>
 <p:presentation xmlns:p="http://schemas.openxmlformats.org/presentationml/2006/main">
   <p:sldMasterIdLst>
-    <p:sldMasterId xmlns:r="http://schemas.openxmlformats.org/officeDocument/2006/relationships" id="2147483648" r:id="R532f33b44a174a2d"/>
+    <p:sldMasterId xmlns:r="http://schemas.openxmlformats.org/officeDocument/2006/relationships" id="2147483648" r:id="R8ef0510d25a24440"/>
   </p:sldMasterIdLst>
   <p:notesMasterIdLst>
-    <p:notesMasterId xmlns:r="http://schemas.openxmlformats.org/officeDocument/2006/relationships" r:id="R23ee4fb6f9d7420c"/>
+    <p:notesMasterId xmlns:r="http://schemas.openxmlformats.org/officeDocument/2006/relationships" r:id="R8aa4f0f4d1994147"/>
   </p:notesMasterIdLst>
   <p:sldIdLst>
-    <p:sldId xmlns:r="http://schemas.openxmlformats.org/officeDocument/2006/relationships" id="256" r:id="Rc925909d4bd24d77"/>
-    <p:sldId xmlns:r="http://schemas.openxmlformats.org/officeDocument/2006/relationships" id="257" r:id="R83716b7304694782"/>
-    <p:sldId xmlns:r="http://schemas.openxmlformats.org/officeDocument/2006/relationships" id="258" r:id="Rdc59bfaf27ce47ad"/>
-    <p:sldId xmlns:r="http://schemas.openxmlformats.org/officeDocument/2006/relationships" id="259" r:id="R327f49a60d3e4b70"/>
-    <p:sldId xmlns:r="http://schemas.openxmlformats.org/officeDocument/2006/relationships" id="260" r:id="R8c9e3c5ae5cd43b6"/>
-    <p:sldId xmlns:r="http://schemas.openxmlformats.org/officeDocument/2006/relationships" id="261" r:id="Rfc10cd339b2b4117"/>
-    <p:sldId xmlns:r="http://schemas.openxmlformats.org/officeDocument/2006/relationships" id="262" r:id="R37fb21a5f7e94003"/>
-    <p:sldId xmlns:r="http://schemas.openxmlformats.org/officeDocument/2006/relationships" id="263" r:id="Rb9f6b4a2f87342e6"/>
-    <p:sldId xmlns:r="http://schemas.openxmlformats.org/officeDocument/2006/relationships" id="264" r:id="R32637df9156748be"/>
-    <p:sldId xmlns:r="http://schemas.openxmlformats.org/officeDocument/2006/relationships" id="265" r:id="R110c171ae6d049fc"/>
-    <p:sldId xmlns:r="http://schemas.openxmlformats.org/officeDocument/2006/relationships" id="266" r:id="R2c54b7c70f224c2c"/>
-    <p:sldId xmlns:r="http://schemas.openxmlformats.org/officeDocument/2006/relationships" id="267" r:id="R99d219c71d0840c6"/>
-    <p:sldId xmlns:r="http://schemas.openxmlformats.org/officeDocument/2006/relationships" id="268" r:id="R0e47123f9c624f5d"/>
-    <p:sldId xmlns:r="http://schemas.openxmlformats.org/officeDocument/2006/relationships" id="269" r:id="Rb3a79bb873f74e14"/>
-    <p:sldId xmlns:r="http://schemas.openxmlformats.org/officeDocument/2006/relationships" id="270" r:id="Raccac7e14e344669"/>
-    <p:sldId xmlns:r="http://schemas.openxmlformats.org/officeDocument/2006/relationships" id="271" r:id="R9c8a6a4e380a4203"/>
-    <p:sldId xmlns:r="http://schemas.openxmlformats.org/officeDocument/2006/relationships" id="272" r:id="R9fb6fd7fcf004876"/>
-    <p:sldId xmlns:r="http://schemas.openxmlformats.org/officeDocument/2006/relationships" id="273" r:id="R6cd5eb2d972043cc"/>
-    <p:sldId xmlns:r="http://schemas.openxmlformats.org/officeDocument/2006/relationships" id="274" r:id="Rae315eb2f5f941c3"/>
-    <p:sldId xmlns:r="http://schemas.openxmlformats.org/officeDocument/2006/relationships" id="275" r:id="R6a643f80532d493c"/>
-    <p:sldId xmlns:r="http://schemas.openxmlformats.org/officeDocument/2006/relationships" id="276" r:id="R87c3276036b245eb"/>
-    <p:sldId xmlns:r="http://schemas.openxmlformats.org/officeDocument/2006/relationships" id="277" r:id="R6d1998c2d8d94468"/>
-    <p:sldId xmlns:r="http://schemas.openxmlformats.org/officeDocument/2006/relationships" id="278" r:id="R9a0ddd405a9b4f0f"/>
-    <p:sldId xmlns:r="http://schemas.openxmlformats.org/officeDocument/2006/relationships" id="279" r:id="Rd4abcb9920384dae"/>
-    <p:sldId xmlns:r="http://schemas.openxmlformats.org/officeDocument/2006/relationships" id="280" r:id="Rb73fea381df64910"/>
-    <p:sldId xmlns:r="http://schemas.openxmlformats.org/officeDocument/2006/relationships" id="281" r:id="R74bf3faafc694e82"/>
+    <p:sldId xmlns:r="http://schemas.openxmlformats.org/officeDocument/2006/relationships" id="256" r:id="R2e5fd7b401034495"/>
+    <p:sldId xmlns:r="http://schemas.openxmlformats.org/officeDocument/2006/relationships" id="257" r:id="R1225c6ea891b4ed2"/>
+    <p:sldId xmlns:r="http://schemas.openxmlformats.org/officeDocument/2006/relationships" id="258" r:id="R461f0b8506044744"/>
+    <p:sldId xmlns:r="http://schemas.openxmlformats.org/officeDocument/2006/relationships" id="259" r:id="Rdb93ef0b09d84dfb"/>
+    <p:sldId xmlns:r="http://schemas.openxmlformats.org/officeDocument/2006/relationships" id="260" r:id="Rd313bce263f546a8"/>
+    <p:sldId xmlns:r="http://schemas.openxmlformats.org/officeDocument/2006/relationships" id="261" r:id="R358fc6bfdd2c40b7"/>
+    <p:sldId xmlns:r="http://schemas.openxmlformats.org/officeDocument/2006/relationships" id="262" r:id="R09bb18d6ecab4f9f"/>
+    <p:sldId xmlns:r="http://schemas.openxmlformats.org/officeDocument/2006/relationships" id="263" r:id="R1ab76bbb87ad4eeb"/>
+    <p:sldId xmlns:r="http://schemas.openxmlformats.org/officeDocument/2006/relationships" id="264" r:id="R20e0c0edd2f54e00"/>
+    <p:sldId xmlns:r="http://schemas.openxmlformats.org/officeDocument/2006/relationships" id="265" r:id="R453557a4695c48d0"/>
+    <p:sldId xmlns:r="http://schemas.openxmlformats.org/officeDocument/2006/relationships" id="266" r:id="R1f9e5f482c784e45"/>
+    <p:sldId xmlns:r="http://schemas.openxmlformats.org/officeDocument/2006/relationships" id="267" r:id="Re5ccc9e889de484c"/>
+    <p:sldId xmlns:r="http://schemas.openxmlformats.org/officeDocument/2006/relationships" id="268" r:id="Rb3843a33f808476c"/>
+    <p:sldId xmlns:r="http://schemas.openxmlformats.org/officeDocument/2006/relationships" id="269" r:id="R88c937303f4342cc"/>
+    <p:sldId xmlns:r="http://schemas.openxmlformats.org/officeDocument/2006/relationships" id="270" r:id="Re10018e583c2457c"/>
+    <p:sldId xmlns:r="http://schemas.openxmlformats.org/officeDocument/2006/relationships" id="271" r:id="R400764ad50c341f5"/>
+    <p:sldId xmlns:r="http://schemas.openxmlformats.org/officeDocument/2006/relationships" id="272" r:id="R267876eb78f74481"/>
   </p:sldIdLst>
   <p:sldSz cx="12192000" cy="6858000"/>
   <p:notesSz cx="6858000" cy="9144000"/>
@@ -467,7 +458,7 @@
           <a:lstStyle xmlns:a="http://schemas.openxmlformats.org/drawingml/2006/main"/>
           <a:p xmlns:a="http://schemas.openxmlformats.org/drawingml/2006/main">
             <a:r>
-              <a:t>Suggested 50-minute pacing: floating point walkthrough and practice 20 min; assembly operands and tracing 16 min; branches, stack, and arrays 14 min. This teaches the concepts behind the professor's planned assignment without displaying its unreleased prompt or solution. Sources: lectures 6–8 and the professor's description supplied by the TA.</a:t>
+              <a:t>Suggested 50-minute pacing: binary place values and fields 8 min; normal values 12 min; subnormals and the boundary 12 min; decoding and encoding practice 12 min; rounding and recap 6 min. This teaches the concepts behind the professor’s planned assignment without displaying its unreleased prompt or solution. Source: lecture 6 and the professor’s description supplied by the TA.</a:t>
             </a:r>
           </a:p>
           <a:p xmlns:a="http://schemas.openxmlformats.org/drawingml/2006/main">
@@ -547,7 +538,7 @@
           <a:lstStyle xmlns:a="http://schemas.openxmlformats.org/drawingml/2006/main"/>
           <a:p xmlns:a="http://schemas.openxmlformats.org/drawingml/2006/main">
             <a:r>
-              <a:t>The future homework description does not specify rounding, so do not teach truncation or nearest as a required rule. Here E=1 for both nearby normals. 5/16=0.3125, 11/32=0.34375, and 1/3≈0.3333. This replaces the earlier abstract associativity slide with a representation example directly tied to the professor's stated learning goal.</a:t>
+              <a:t>Use the 3-exponent-bit, bias-3, 3-fraction-bit practice format. Largest subnormal is F=7, giving 7/32. Smallest normal is E=1,F=0, giving 2^(1−3)=1/4. This illustrates gradual underflow.</a:t>
             </a:r>
           </a:p>
           <a:p xmlns:a="http://schemas.openxmlformats.org/drawingml/2006/main">
@@ -627,7 +618,7 @@
           <a:lstStyle xmlns:a="http://schemas.openxmlformats.org/drawingml/2006/main"/>
           <a:p xmlns:a="http://schemas.openxmlformats.org/drawingml/2006/main">
             <a:r>
-              <a:t>Ask students to point to the value that changes. Contrast Intel syntax only if a student asks: its operand order is reversed. Source: lectures 6 and 7.</a:t>
+              <a:t>Allow two to three minutes. A is normal: E=2,F=4, value (1+4/8)×2^-1=3/4. B is subnormal: E=0,F=3, value 3/32. Ask students to name the equation before calculating.</a:t>
             </a:r>
           </a:p>
           <a:p xmlns:a="http://schemas.openxmlformats.org/drawingml/2006/main">
@@ -637,7 +628,7 @@
           </a:p>
           <a:p xmlns:a="http://schemas.openxmlformats.org/drawingml/2006/main">
             <a:r>
-              <a:t>Source: https://firner.com/presentations/cs211/2026-Fall/cs211_07/#/</a:t>
+              <a:t>Source: https://firner.com/presentations/cs211/2026-Fall/cs211_06/#/</a:t>
             </a:r>
           </a:p>
         </p:txBody>
@@ -707,7 +698,7 @@
           <a:lstStyle xmlns:a="http://schemas.openxmlformats.org/drawingml/2006/main"/>
           <a:p xmlns:a="http://schemas.openxmlformats.org/drawingml/2006/main">
             <a:r>
-              <a:t>Use an analogy: a register holds a street address; parentheses mean visit that street address. The example assumes x is an eight-byte value so movq is appropriate. Distinguish $8 (the number eight) from 8(%rax) (memory eight bytes past the address in rax).</a:t>
+              <a:t>Have students explain why B is not (1+3/8)×2^-3. The exponent for subnormals is fixed at 1−bias=-2, and the leading 1 is absent.</a:t>
             </a:r>
           </a:p>
           <a:p xmlns:a="http://schemas.openxmlformats.org/drawingml/2006/main">
@@ -787,7 +778,7 @@
           <a:lstStyle xmlns:a="http://schemas.openxmlformats.org/drawingml/2006/main"/>
           <a:p xmlns:a="http://schemas.openxmlformats.org/drawingml/2006/main">
             <a:r>
-              <a:t>Pause before showing the answer. Have students narrate the two changes aloud. Source operands are read; the destination receives the result.</a:t>
+              <a:t>Give two minutes. Both examples are exactly representable, so no rounding rule is needed. Ask students to check results by substituting E and F into the appropriate formula.</a:t>
             </a:r>
           </a:p>
           <a:p xmlns:a="http://schemas.openxmlformats.org/drawingml/2006/main">
@@ -797,7 +788,7 @@
           </a:p>
           <a:p xmlns:a="http://schemas.openxmlformats.org/drawingml/2006/main">
             <a:r>
-              <a:t>Source: https://firner.com/presentations/cs211/2026-Fall/cs211_07/#/</a:t>
+              <a:t>Source: https://firner.com/presentations/cs211/2026-Fall/cs211_06/#/</a:t>
             </a:r>
           </a:p>
         </p:txBody>
@@ -867,7 +858,7 @@
           <a:lstStyle xmlns:a="http://schemas.openxmlformats.org/drawingml/2006/main"/>
           <a:p xmlns:a="http://schemas.openxmlformats.org/drawingml/2006/main">
             <a:r>
-              <a:t>Common confusion: students may think 'move' transfers and clears rbx. Emphasize that it copies. Then ask what subq $2, %rax would do: rax becomes 8.</a:t>
+              <a:t>Do not reveal until students have tried both. Emphasize that E=0 is a category marker here, not the unbiased exponent. E=3 represents true exponent zero because bias is three.</a:t>
             </a:r>
           </a:p>
           <a:p xmlns:a="http://schemas.openxmlformats.org/drawingml/2006/main">
@@ -877,7 +868,7 @@
           </a:p>
           <a:p xmlns:a="http://schemas.openxmlformats.org/drawingml/2006/main">
             <a:r>
-              <a:t>Source: https://firner.com/presentations/cs211/2026-Fall/cs211_07/#/</a:t>
+              <a:t>Source: https://firner.com/presentations/cs211/2026-Fall/cs211_06/#/</a:t>
             </a:r>
           </a:p>
         </p:txBody>
@@ -947,7 +938,7 @@
           <a:lstStyle xmlns:a="http://schemas.openxmlformats.org/drawingml/2006/main"/>
           <a:p xmlns:a="http://schemas.openxmlformats.org/drawingml/2006/main">
             <a:r>
-              <a:t>Lecture 7 discusses register aliases and movl. Be precise: writing a 32-bit register zeroes the upper 32 bits; a movl from %eax into memory does not clear the upper half of %rax. Do not generalize this rule to 8- or 16-bit writes.</a:t>
+              <a:t>The future homework description does not specify rounding, so do not teach truncation or nearest as a required rule. Here E=1 for both nearby normals. 5/16=0.3125, 11/32=0.34375, and 1/3≈0.3333. This replaces the earlier abstract associativity slide with a representation example directly tied to the professor's stated learning goal.</a:t>
             </a:r>
           </a:p>
           <a:p xmlns:a="http://schemas.openxmlformats.org/drawingml/2006/main">
@@ -957,7 +948,7 @@
           </a:p>
           <a:p xmlns:a="http://schemas.openxmlformats.org/drawingml/2006/main">
             <a:r>
-              <a:t>Source: https://firner.com/presentations/cs211/2026-Fall/cs211_07/#/</a:t>
+              <a:t>Source: https://firner.com/presentations/cs211/2026-Fall/cs211_06/#/</a:t>
             </a:r>
           </a:p>
         </p:txBody>
@@ -1027,7 +1018,7 @@
           <a:lstStyle xmlns:a="http://schemas.openxmlformats.org/drawingml/2006/main"/>
           <a:p xmlns:a="http://schemas.openxmlformats.org/drawingml/2006/main">
             <a:r>
-              <a:t>Assume sizeof(int)==4 for this example; the C standard does not require int to be 4 bytes on every platform. Draw boxes at addresses base, base+4, base+8, base+12. Source: lectures 6–8.</a:t>
+              <a:t>For normals with fixed E, incrementing F by one changes the value by 2^(E−bias)/8. Show how this connects to the rounding slide and lecture 6’s discussion of gaps between floats.</a:t>
             </a:r>
           </a:p>
           <a:p xmlns:a="http://schemas.openxmlformats.org/drawingml/2006/main">
@@ -1107,7 +1098,7 @@
           <a:lstStyle xmlns:a="http://schemas.openxmlformats.org/drawingml/2006/main"/>
           <a:p xmlns:a="http://schemas.openxmlformats.org/drawingml/2006/main">
             <a:r>
-              <a:t>Ask: which instruction could compute &amp;a[2], and which could load a[2]? Clarify that movq reads eight bytes here; the made-up memory value 42 is an eight-byte value for this trace. Source: lecture 8 sieve assembly and lecture 7 RIP-relative example.</a:t>
+              <a:t>Review the two mistakes most likely to occur: forgetting to add the bias for a normal exponent, and using the normal hidden 1 for a subnormal. Do not reveal the unreleased homework solution. Remind students to follow the eventual assignment’s rounding and valid-input rules.</a:t>
             </a:r>
           </a:p>
           <a:p xmlns:a="http://schemas.openxmlformats.org/drawingml/2006/main">
@@ -1117,167 +1108,7 @@
           </a:p>
           <a:p xmlns:a="http://schemas.openxmlformats.org/drawingml/2006/main">
             <a:r>
-              <a:t>Source: https://firner.com/presentations/cs211/2026-Fall/cs211_08/#/</a:t>
-            </a:r>
-          </a:p>
-        </p:txBody>
-      </p:sp>
-      <p:sp>
-        <p:nvSpPr>
-          <p:cNvPr id="4" name="Slide Number Placeholder 3"/>
-          <p:cNvSpPr>
-            <a:spLocks xmlns:a="http://schemas.openxmlformats.org/drawingml/2006/main" noGrp="1"/>
-          </p:cNvSpPr>
-          <p:nvPr>
-            <p:ph type="sldNum" idx="5"/>
-          </p:nvPr>
-        </p:nvSpPr>
-        <p:spPr/>
-        <p:txBody>
-          <a:bodyPr xmlns:a="http://schemas.openxmlformats.org/drawingml/2006/main"/>
-          <a:lstStyle xmlns:a="http://schemas.openxmlformats.org/drawingml/2006/main"/>
-          <a:p xmlns:a="http://schemas.openxmlformats.org/drawingml/2006/main"/>
-        </p:txBody>
-      </p:sp>
-    </p:spTree>
-  </p:cSld>
-  <p:clrMapOvr>
-    <a:masterClrMapping xmlns:a="http://schemas.openxmlformats.org/drawingml/2006/main"/>
-  </p:clrMapOvr>
-</p:notes>
-</file>
-
-<file path=ppt/notesSlides/notesSlide18.xml><?xml version="1.0" encoding="utf-8"?>
-<p:notes xmlns:p="http://schemas.openxmlformats.org/presentationml/2006/main">
-  <p:cSld>
-    <p:spTree>
-      <p:nvGrpSpPr>
-        <p:cNvPr id="1" name=""/>
-        <p:cNvGrpSpPr/>
-        <p:nvPr/>
-      </p:nvGrpSpPr>
-      <p:grpSpPr>
-        <a:xfrm xmlns:a="http://schemas.openxmlformats.org/drawingml/2006/main"/>
-      </p:grpSpPr>
-      <p:sp>
-        <p:nvSpPr>
-          <p:cNvPr id="2" name="Slide Image Placeholder 1"/>
-          <p:cNvSpPr>
-            <a:spLocks xmlns:a="http://schemas.openxmlformats.org/drawingml/2006/main" noGrp="1"/>
-          </p:cNvSpPr>
-          <p:nvPr>
-            <p:ph type="sldImg" idx="0"/>
-          </p:nvPr>
-        </p:nvSpPr>
-        <p:spPr/>
-      </p:sp>
-      <p:sp>
-        <p:nvSpPr>
-          <p:cNvPr id="3" name="Notes Placeholder 2"/>
-          <p:cNvSpPr>
-            <a:spLocks xmlns:a="http://schemas.openxmlformats.org/drawingml/2006/main" noGrp="1"/>
-          </p:cNvSpPr>
-          <p:nvPr>
-            <p:ph type="body" idx="1"/>
-          </p:nvPr>
-        </p:nvSpPr>
-        <p:spPr/>
-        <p:txBody>
-          <a:bodyPr xmlns:a="http://schemas.openxmlformats.org/drawingml/2006/main"/>
-          <a:lstStyle xmlns:a="http://schemas.openxmlformats.org/drawingml/2006/main"/>
-          <a:p xmlns:a="http://schemas.openxmlformats.org/drawingml/2006/main">
-            <a:r>
-              <a:t>For AT&amp;T cmpq $1, %rdi, flags describe rdi minus 1. ja is true for unsigned rdi &gt; 1. This matches lecture 7's unsigned sequence example. Distinguish signed jg from unsigned ja when asked. In a real compiled function there may be setup/cleanup instructions.</a:t>
-            </a:r>
-          </a:p>
-          <a:p xmlns:a="http://schemas.openxmlformats.org/drawingml/2006/main">
-            <a:r>
-              <a:t/>
-            </a:r>
-          </a:p>
-          <a:p xmlns:a="http://schemas.openxmlformats.org/drawingml/2006/main">
-            <a:r>
-              <a:t>Source: https://firner.com/presentations/cs211/2026-Fall/cs211_07/#/</a:t>
-            </a:r>
-          </a:p>
-        </p:txBody>
-      </p:sp>
-      <p:sp>
-        <p:nvSpPr>
-          <p:cNvPr id="4" name="Slide Number Placeholder 3"/>
-          <p:cNvSpPr>
-            <a:spLocks xmlns:a="http://schemas.openxmlformats.org/drawingml/2006/main" noGrp="1"/>
-          </p:cNvSpPr>
-          <p:nvPr>
-            <p:ph type="sldNum" idx="5"/>
-          </p:nvPr>
-        </p:nvSpPr>
-        <p:spPr/>
-        <p:txBody>
-          <a:bodyPr xmlns:a="http://schemas.openxmlformats.org/drawingml/2006/main"/>
-          <a:lstStyle xmlns:a="http://schemas.openxmlformats.org/drawingml/2006/main"/>
-          <a:p xmlns:a="http://schemas.openxmlformats.org/drawingml/2006/main"/>
-        </p:txBody>
-      </p:sp>
-    </p:spTree>
-  </p:cSld>
-  <p:clrMapOvr>
-    <a:masterClrMapping xmlns:a="http://schemas.openxmlformats.org/drawingml/2006/main"/>
-  </p:clrMapOvr>
-</p:notes>
-</file>
-
-<file path=ppt/notesSlides/notesSlide19.xml><?xml version="1.0" encoding="utf-8"?>
-<p:notes xmlns:p="http://schemas.openxmlformats.org/presentationml/2006/main">
-  <p:cSld>
-    <p:spTree>
-      <p:nvGrpSpPr>
-        <p:cNvPr id="1" name=""/>
-        <p:cNvGrpSpPr/>
-        <p:nvPr/>
-      </p:nvGrpSpPr>
-      <p:grpSpPr>
-        <a:xfrm xmlns:a="http://schemas.openxmlformats.org/drawingml/2006/main"/>
-      </p:grpSpPr>
-      <p:sp>
-        <p:nvSpPr>
-          <p:cNvPr id="2" name="Slide Image Placeholder 1"/>
-          <p:cNvSpPr>
-            <a:spLocks xmlns:a="http://schemas.openxmlformats.org/drawingml/2006/main" noGrp="1"/>
-          </p:cNvSpPr>
-          <p:nvPr>
-            <p:ph type="sldImg" idx="0"/>
-          </p:nvPr>
-        </p:nvSpPr>
-        <p:spPr/>
-      </p:sp>
-      <p:sp>
-        <p:nvSpPr>
-          <p:cNvPr id="3" name="Notes Placeholder 2"/>
-          <p:cNvSpPr>
-            <a:spLocks xmlns:a="http://schemas.openxmlformats.org/drawingml/2006/main" noGrp="1"/>
-          </p:cNvSpPr>
-          <p:nvPr>
-            <p:ph type="body" idx="1"/>
-          </p:nvPr>
-        </p:nvSpPr>
-        <p:spPr/>
-        <p:txBody>
-          <a:bodyPr xmlns:a="http://schemas.openxmlformats.org/drawingml/2006/main"/>
-          <a:lstStyle xmlns:a="http://schemas.openxmlformats.org/drawingml/2006/main"/>
-          <a:p xmlns:a="http://schemas.openxmlformats.org/drawingml/2006/main">
-            <a:r>
-              <a:t>Give partners time to trace. Ask one student why n=1 does not jump. The next slide moves to calls and stack frames.</a:t>
-            </a:r>
-          </a:p>
-          <a:p xmlns:a="http://schemas.openxmlformats.org/drawingml/2006/main">
-            <a:r>
-              <a:t/>
-            </a:r>
-          </a:p>
-          <a:p xmlns:a="http://schemas.openxmlformats.org/drawingml/2006/main">
-            <a:r>
-              <a:t>Source: https://firner.com/presentations/cs211/2026-Fall/cs211_07/#/</a:t>
+              <a:t>Source: https://firner.com/presentations/cs211/2026-Fall/cs211_06/#/</a:t>
             </a:r>
           </a:p>
         </p:txBody>
@@ -1387,566 +1218,6 @@
 </p:notes>
 </file>
 
-<file path=ppt/notesSlides/notesSlide20.xml><?xml version="1.0" encoding="utf-8"?>
-<p:notes xmlns:p="http://schemas.openxmlformats.org/presentationml/2006/main">
-  <p:cSld>
-    <p:spTree>
-      <p:nvGrpSpPr>
-        <p:cNvPr id="1" name=""/>
-        <p:cNvGrpSpPr/>
-        <p:nvPr/>
-      </p:nvGrpSpPr>
-      <p:grpSpPr>
-        <a:xfrm xmlns:a="http://schemas.openxmlformats.org/drawingml/2006/main"/>
-      </p:grpSpPr>
-      <p:sp>
-        <p:nvSpPr>
-          <p:cNvPr id="2" name="Slide Image Placeholder 1"/>
-          <p:cNvSpPr>
-            <a:spLocks xmlns:a="http://schemas.openxmlformats.org/drawingml/2006/main" noGrp="1"/>
-          </p:cNvSpPr>
-          <p:nvPr>
-            <p:ph type="sldImg" idx="0"/>
-          </p:nvPr>
-        </p:nvSpPr>
-        <p:spPr/>
-      </p:sp>
-      <p:sp>
-        <p:nvSpPr>
-          <p:cNvPr id="3" name="Notes Placeholder 2"/>
-          <p:cNvSpPr>
-            <a:spLocks xmlns:a="http://schemas.openxmlformats.org/drawingml/2006/main" noGrp="1"/>
-          </p:cNvSpPr>
-          <p:nvPr>
-            <p:ph type="body" idx="1"/>
-          </p:nvPr>
-        </p:nvSpPr>
-        <p:spPr/>
-        <p:txBody>
-          <a:bodyPr xmlns:a="http://schemas.openxmlformats.org/drawingml/2006/main"/>
-          <a:lstStyle xmlns:a="http://schemas.openxmlformats.org/drawingml/2006/main"/>
-          <a:p xmlns:a="http://schemas.openxmlformats.org/drawingml/2006/main">
-            <a:r>
-              <a:t>Make clear this is an ABI convention, not an inherent meaning of the registers. The call instruction also saves a return address. Source: lectures 6 and 7.</a:t>
-            </a:r>
-          </a:p>
-          <a:p xmlns:a="http://schemas.openxmlformats.org/drawingml/2006/main">
-            <a:r>
-              <a:t/>
-            </a:r>
-          </a:p>
-          <a:p xmlns:a="http://schemas.openxmlformats.org/drawingml/2006/main">
-            <a:r>
-              <a:t>Source: https://firner.com/presentations/cs211/2026-Fall/cs211_07/#/</a:t>
-            </a:r>
-          </a:p>
-        </p:txBody>
-      </p:sp>
-      <p:sp>
-        <p:nvSpPr>
-          <p:cNvPr id="4" name="Slide Number Placeholder 3"/>
-          <p:cNvSpPr>
-            <a:spLocks xmlns:a="http://schemas.openxmlformats.org/drawingml/2006/main" noGrp="1"/>
-          </p:cNvSpPr>
-          <p:nvPr>
-            <p:ph type="sldNum" idx="5"/>
-          </p:nvPr>
-        </p:nvSpPr>
-        <p:spPr/>
-        <p:txBody>
-          <a:bodyPr xmlns:a="http://schemas.openxmlformats.org/drawingml/2006/main"/>
-          <a:lstStyle xmlns:a="http://schemas.openxmlformats.org/drawingml/2006/main"/>
-          <a:p xmlns:a="http://schemas.openxmlformats.org/drawingml/2006/main"/>
-        </p:txBody>
-      </p:sp>
-    </p:spTree>
-  </p:cSld>
-  <p:clrMapOvr>
-    <a:masterClrMapping xmlns:a="http://schemas.openxmlformats.org/drawingml/2006/main"/>
-  </p:clrMapOvr>
-</p:notes>
-</file>
-
-<file path=ppt/notesSlides/notesSlide21.xml><?xml version="1.0" encoding="utf-8"?>
-<p:notes xmlns:p="http://schemas.openxmlformats.org/presentationml/2006/main">
-  <p:cSld>
-    <p:spTree>
-      <p:nvGrpSpPr>
-        <p:cNvPr id="1" name=""/>
-        <p:cNvGrpSpPr/>
-        <p:nvPr/>
-      </p:nvGrpSpPr>
-      <p:grpSpPr>
-        <a:xfrm xmlns:a="http://schemas.openxmlformats.org/drawingml/2006/main"/>
-      </p:grpSpPr>
-      <p:sp>
-        <p:nvSpPr>
-          <p:cNvPr id="2" name="Slide Image Placeholder 1"/>
-          <p:cNvSpPr>
-            <a:spLocks xmlns:a="http://schemas.openxmlformats.org/drawingml/2006/main" noGrp="1"/>
-          </p:cNvSpPr>
-          <p:nvPr>
-            <p:ph type="sldImg" idx="0"/>
-          </p:nvPr>
-        </p:nvSpPr>
-        <p:spPr/>
-      </p:sp>
-      <p:sp>
-        <p:nvSpPr>
-          <p:cNvPr id="3" name="Notes Placeholder 2"/>
-          <p:cNvSpPr>
-            <a:spLocks xmlns:a="http://schemas.openxmlformats.org/drawingml/2006/main" noGrp="1"/>
-          </p:cNvSpPr>
-          <p:nvPr>
-            <p:ph type="body" idx="1"/>
-          </p:nvPr>
-        </p:nvSpPr>
-        <p:spPr/>
-        <p:txBody>
-          <a:bodyPr xmlns:a="http://schemas.openxmlformats.org/drawingml/2006/main"/>
-          <a:lstStyle xmlns:a="http://schemas.openxmlformats.org/drawingml/2006/main"/>
-          <a:p xmlns:a="http://schemas.openxmlformats.org/drawingml/2006/main">
-            <a:r>
-              <a:t>Lecture 8 gives this prologue and epilogue. Correct mental model: pushq decrements rsp by 8 then writes; popq reads then increments rsp by 8. call pushes the return address, ret pops it. Optimized code may omit rbp or use different frame layouts.</a:t>
-            </a:r>
-          </a:p>
-          <a:p xmlns:a="http://schemas.openxmlformats.org/drawingml/2006/main">
-            <a:r>
-              <a:t/>
-            </a:r>
-          </a:p>
-          <a:p xmlns:a="http://schemas.openxmlformats.org/drawingml/2006/main">
-            <a:r>
-              <a:t>Source: https://firner.com/presentations/cs211/2026-Fall/cs211_08/#/</a:t>
-            </a:r>
-          </a:p>
-        </p:txBody>
-      </p:sp>
-      <p:sp>
-        <p:nvSpPr>
-          <p:cNvPr id="4" name="Slide Number Placeholder 3"/>
-          <p:cNvSpPr>
-            <a:spLocks xmlns:a="http://schemas.openxmlformats.org/drawingml/2006/main" noGrp="1"/>
-          </p:cNvSpPr>
-          <p:nvPr>
-            <p:ph type="sldNum" idx="5"/>
-          </p:nvPr>
-        </p:nvSpPr>
-        <p:spPr/>
-        <p:txBody>
-          <a:bodyPr xmlns:a="http://schemas.openxmlformats.org/drawingml/2006/main"/>
-          <a:lstStyle xmlns:a="http://schemas.openxmlformats.org/drawingml/2006/main"/>
-          <a:p xmlns:a="http://schemas.openxmlformats.org/drawingml/2006/main"/>
-        </p:txBody>
-      </p:sp>
-    </p:spTree>
-  </p:cSld>
-  <p:clrMapOvr>
-    <a:masterClrMapping xmlns:a="http://schemas.openxmlformats.org/drawingml/2006/main"/>
-  </p:clrMapOvr>
-</p:notes>
-</file>
-
-<file path=ppt/notesSlides/notesSlide22.xml><?xml version="1.0" encoding="utf-8"?>
-<p:notes xmlns:p="http://schemas.openxmlformats.org/presentationml/2006/main">
-  <p:cSld>
-    <p:spTree>
-      <p:nvGrpSpPr>
-        <p:cNvPr id="1" name=""/>
-        <p:cNvGrpSpPr/>
-        <p:nvPr/>
-      </p:nvGrpSpPr>
-      <p:grpSpPr>
-        <a:xfrm xmlns:a="http://schemas.openxmlformats.org/drawingml/2006/main"/>
-      </p:grpSpPr>
-      <p:sp>
-        <p:nvSpPr>
-          <p:cNvPr id="2" name="Slide Image Placeholder 1"/>
-          <p:cNvSpPr>
-            <a:spLocks xmlns:a="http://schemas.openxmlformats.org/drawingml/2006/main" noGrp="1"/>
-          </p:cNvSpPr>
-          <p:nvPr>
-            <p:ph type="sldImg" idx="0"/>
-          </p:nvPr>
-        </p:nvSpPr>
-        <p:spPr/>
-      </p:sp>
-      <p:sp>
-        <p:nvSpPr>
-          <p:cNvPr id="3" name="Notes Placeholder 2"/>
-          <p:cNvSpPr>
-            <a:spLocks xmlns:a="http://schemas.openxmlformats.org/drawingml/2006/main" noGrp="1"/>
-          </p:cNvSpPr>
-          <p:nvPr>
-            <p:ph type="body" idx="1"/>
-          </p:nvPr>
-        </p:nvSpPr>
-        <p:spPr/>
-        <p:txBody>
-          <a:bodyPr xmlns:a="http://schemas.openxmlformats.org/drawingml/2006/main"/>
-          <a:lstStyle xmlns:a="http://schemas.openxmlformats.org/drawingml/2006/main"/>
-          <a:p xmlns:a="http://schemas.openxmlformats.org/drawingml/2006/main">
-            <a:r>
-              <a:t>Walk down by eight bytes for pushq, then by sixteen for local space. The address notation here is conceptual, not a literal disassembly. The return address was pushed by call before the stated starting point.</a:t>
-            </a:r>
-          </a:p>
-          <a:p xmlns:a="http://schemas.openxmlformats.org/drawingml/2006/main">
-            <a:r>
-              <a:t/>
-            </a:r>
-          </a:p>
-          <a:p xmlns:a="http://schemas.openxmlformats.org/drawingml/2006/main">
-            <a:r>
-              <a:t>Source: https://firner.com/presentations/cs211/2026-Fall/cs211_08/#/</a:t>
-            </a:r>
-          </a:p>
-        </p:txBody>
-      </p:sp>
-      <p:sp>
-        <p:nvSpPr>
-          <p:cNvPr id="4" name="Slide Number Placeholder 3"/>
-          <p:cNvSpPr>
-            <a:spLocks xmlns:a="http://schemas.openxmlformats.org/drawingml/2006/main" noGrp="1"/>
-          </p:cNvSpPr>
-          <p:nvPr>
-            <p:ph type="sldNum" idx="5"/>
-          </p:nvPr>
-        </p:nvSpPr>
-        <p:spPr/>
-        <p:txBody>
-          <a:bodyPr xmlns:a="http://schemas.openxmlformats.org/drawingml/2006/main"/>
-          <a:lstStyle xmlns:a="http://schemas.openxmlformats.org/drawingml/2006/main"/>
-          <a:p xmlns:a="http://schemas.openxmlformats.org/drawingml/2006/main"/>
-        </p:txBody>
-      </p:sp>
-    </p:spTree>
-  </p:cSld>
-  <p:clrMapOvr>
-    <a:masterClrMapping xmlns:a="http://schemas.openxmlformats.org/drawingml/2006/main"/>
-  </p:clrMapOvr>
-</p:notes>
-</file>
-
-<file path=ppt/notesSlides/notesSlide23.xml><?xml version="1.0" encoding="utf-8"?>
-<p:notes xmlns:p="http://schemas.openxmlformats.org/presentationml/2006/main">
-  <p:cSld>
-    <p:spTree>
-      <p:nvGrpSpPr>
-        <p:cNvPr id="1" name=""/>
-        <p:cNvGrpSpPr/>
-        <p:nvPr/>
-      </p:nvGrpSpPr>
-      <p:grpSpPr>
-        <a:xfrm xmlns:a="http://schemas.openxmlformats.org/drawingml/2006/main"/>
-      </p:grpSpPr>
-      <p:sp>
-        <p:nvSpPr>
-          <p:cNvPr id="2" name="Slide Image Placeholder 1"/>
-          <p:cNvSpPr>
-            <a:spLocks xmlns:a="http://schemas.openxmlformats.org/drawingml/2006/main" noGrp="1"/>
-          </p:cNvSpPr>
-          <p:nvPr>
-            <p:ph type="sldImg" idx="0"/>
-          </p:nvPr>
-        </p:nvSpPr>
-        <p:spPr/>
-      </p:sp>
-      <p:sp>
-        <p:nvSpPr>
-          <p:cNvPr id="3" name="Notes Placeholder 2"/>
-          <p:cNvSpPr>
-            <a:spLocks xmlns:a="http://schemas.openxmlformats.org/drawingml/2006/main" noGrp="1"/>
-          </p:cNvSpPr>
-          <p:nvPr>
-            <p:ph type="body" idx="1"/>
-          </p:nvPr>
-        </p:nvSpPr>
-        <p:spPr/>
-        <p:txBody>
-          <a:bodyPr xmlns:a="http://schemas.openxmlformats.org/drawingml/2006/main"/>
-          <a:lstStyle xmlns:a="http://schemas.openxmlformats.org/drawingml/2006/main"/>
-          <a:p xmlns:a="http://schemas.openxmlformats.org/drawingml/2006/main">
-            <a:r>
-              <a:t>Lecture 8 covers known-size arrays, VLAs, and array parameters. Avoid claiming sizeof(pointer) always equals 8: that is platform dependent. A parameter written int a[10] is also adjusted to a pointer; the 10 does not enforce array length for a function argument.</a:t>
-            </a:r>
-          </a:p>
-          <a:p xmlns:a="http://schemas.openxmlformats.org/drawingml/2006/main">
-            <a:r>
-              <a:t/>
-            </a:r>
-          </a:p>
-          <a:p xmlns:a="http://schemas.openxmlformats.org/drawingml/2006/main">
-            <a:r>
-              <a:t>Source: https://firner.com/presentations/cs211/2026-Fall/cs211_08/#/</a:t>
-            </a:r>
-          </a:p>
-        </p:txBody>
-      </p:sp>
-      <p:sp>
-        <p:nvSpPr>
-          <p:cNvPr id="4" name="Slide Number Placeholder 3"/>
-          <p:cNvSpPr>
-            <a:spLocks xmlns:a="http://schemas.openxmlformats.org/drawingml/2006/main" noGrp="1"/>
-          </p:cNvSpPr>
-          <p:nvPr>
-            <p:ph type="sldNum" idx="5"/>
-          </p:nvPr>
-        </p:nvSpPr>
-        <p:spPr/>
-        <p:txBody>
-          <a:bodyPr xmlns:a="http://schemas.openxmlformats.org/drawingml/2006/main"/>
-          <a:lstStyle xmlns:a="http://schemas.openxmlformats.org/drawingml/2006/main"/>
-          <a:p xmlns:a="http://schemas.openxmlformats.org/drawingml/2006/main"/>
-        </p:txBody>
-      </p:sp>
-    </p:spTree>
-  </p:cSld>
-  <p:clrMapOvr>
-    <a:masterClrMapping xmlns:a="http://schemas.openxmlformats.org/drawingml/2006/main"/>
-  </p:clrMapOvr>
-</p:notes>
-</file>
-
-<file path=ppt/notesSlides/notesSlide24.xml><?xml version="1.0" encoding="utf-8"?>
-<p:notes xmlns:p="http://schemas.openxmlformats.org/presentationml/2006/main">
-  <p:cSld>
-    <p:spTree>
-      <p:nvGrpSpPr>
-        <p:cNvPr id="1" name=""/>
-        <p:cNvGrpSpPr/>
-        <p:nvPr/>
-      </p:nvGrpSpPr>
-      <p:grpSpPr>
-        <a:xfrm xmlns:a="http://schemas.openxmlformats.org/drawingml/2006/main"/>
-      </p:grpSpPr>
-      <p:sp>
-        <p:nvSpPr>
-          <p:cNvPr id="2" name="Slide Image Placeholder 1"/>
-          <p:cNvSpPr>
-            <a:spLocks xmlns:a="http://schemas.openxmlformats.org/drawingml/2006/main" noGrp="1"/>
-          </p:cNvSpPr>
-          <p:nvPr>
-            <p:ph type="sldImg" idx="0"/>
-          </p:nvPr>
-        </p:nvSpPr>
-        <p:spPr/>
-      </p:sp>
-      <p:sp>
-        <p:nvSpPr>
-          <p:cNvPr id="3" name="Notes Placeholder 2"/>
-          <p:cNvSpPr>
-            <a:spLocks xmlns:a="http://schemas.openxmlformats.org/drawingml/2006/main" noGrp="1"/>
-          </p:cNvSpPr>
-          <p:nvPr>
-            <p:ph type="body" idx="1"/>
-          </p:nvPr>
-        </p:nvSpPr>
-        <p:spPr/>
-        <p:txBody>
-          <a:bodyPr xmlns:a="http://schemas.openxmlformats.org/drawingml/2006/main"/>
-          <a:lstStyle xmlns:a="http://schemas.openxmlformats.org/drawingml/2006/main"/>
-          <a:p xmlns:a="http://schemas.openxmlformats.org/drawingml/2006/main">
-            <a:r>
-              <a:t>Source: lecture 8. The exact maximum safe VLA size depends on available stack space. C language support for VLAs depends on the chosen C version and compiler; use course tooling for live examples. A local array's storage duration, rather than whether its bytes are immediately overwritten, determines pointer validity.</a:t>
-            </a:r>
-          </a:p>
-          <a:p xmlns:a="http://schemas.openxmlformats.org/drawingml/2006/main">
-            <a:r>
-              <a:t/>
-            </a:r>
-          </a:p>
-          <a:p xmlns:a="http://schemas.openxmlformats.org/drawingml/2006/main">
-            <a:r>
-              <a:t>Source: https://firner.com/presentations/cs211/2026-Fall/cs211_08/#/</a:t>
-            </a:r>
-          </a:p>
-        </p:txBody>
-      </p:sp>
-      <p:sp>
-        <p:nvSpPr>
-          <p:cNvPr id="4" name="Slide Number Placeholder 3"/>
-          <p:cNvSpPr>
-            <a:spLocks xmlns:a="http://schemas.openxmlformats.org/drawingml/2006/main" noGrp="1"/>
-          </p:cNvSpPr>
-          <p:nvPr>
-            <p:ph type="sldNum" idx="5"/>
-          </p:nvPr>
-        </p:nvSpPr>
-        <p:spPr/>
-        <p:txBody>
-          <a:bodyPr xmlns:a="http://schemas.openxmlformats.org/drawingml/2006/main"/>
-          <a:lstStyle xmlns:a="http://schemas.openxmlformats.org/drawingml/2006/main"/>
-          <a:p xmlns:a="http://schemas.openxmlformats.org/drawingml/2006/main"/>
-        </p:txBody>
-      </p:sp>
-    </p:spTree>
-  </p:cSld>
-  <p:clrMapOvr>
-    <a:masterClrMapping xmlns:a="http://schemas.openxmlformats.org/drawingml/2006/main"/>
-  </p:clrMapOvr>
-</p:notes>
-</file>
-
-<file path=ppt/notesSlides/notesSlide25.xml><?xml version="1.0" encoding="utf-8"?>
-<p:notes xmlns:p="http://schemas.openxmlformats.org/presentationml/2006/main">
-  <p:cSld>
-    <p:spTree>
-      <p:nvGrpSpPr>
-        <p:cNvPr id="1" name=""/>
-        <p:cNvGrpSpPr/>
-        <p:nvPr/>
-      </p:nvGrpSpPr>
-      <p:grpSpPr>
-        <a:xfrm xmlns:a="http://schemas.openxmlformats.org/drawingml/2006/main"/>
-      </p:grpSpPr>
-      <p:sp>
-        <p:nvSpPr>
-          <p:cNvPr id="2" name="Slide Image Placeholder 1"/>
-          <p:cNvSpPr>
-            <a:spLocks xmlns:a="http://schemas.openxmlformats.org/drawingml/2006/main" noGrp="1"/>
-          </p:cNvSpPr>
-          <p:nvPr>
-            <p:ph type="sldImg" idx="0"/>
-          </p:nvPr>
-        </p:nvSpPr>
-        <p:spPr/>
-      </p:sp>
-      <p:sp>
-        <p:nvSpPr>
-          <p:cNvPr id="3" name="Notes Placeholder 2"/>
-          <p:cNvSpPr>
-            <a:spLocks xmlns:a="http://schemas.openxmlformats.org/drawingml/2006/main" noGrp="1"/>
-          </p:cNvSpPr>
-          <p:nvPr>
-            <p:ph type="body" idx="1"/>
-          </p:nvPr>
-        </p:nvSpPr>
-        <p:spPr/>
-        <p:txBody>
-          <a:bodyPr xmlns:a="http://schemas.openxmlformats.org/drawingml/2006/main"/>
-          <a:lstStyle xmlns:a="http://schemas.openxmlformats.org/drawingml/2006/main"/>
-          <a:p xmlns:a="http://schemas.openxmlformats.org/drawingml/2006/main">
-            <a:r>
-              <a:t>Expected: rdx = 0x2008 and eax = 30. The address is base + 2*4. Have students explain why leaq does not put 30 in rdx.</a:t>
-            </a:r>
-          </a:p>
-          <a:p xmlns:a="http://schemas.openxmlformats.org/drawingml/2006/main">
-            <a:r>
-              <a:t/>
-            </a:r>
-          </a:p>
-          <a:p xmlns:a="http://schemas.openxmlformats.org/drawingml/2006/main">
-            <a:r>
-              <a:t>Source: https://firner.com/presentations/cs211/2026-Fall/cs211_08/#/</a:t>
-            </a:r>
-          </a:p>
-        </p:txBody>
-      </p:sp>
-      <p:sp>
-        <p:nvSpPr>
-          <p:cNvPr id="4" name="Slide Number Placeholder 3"/>
-          <p:cNvSpPr>
-            <a:spLocks xmlns:a="http://schemas.openxmlformats.org/drawingml/2006/main" noGrp="1"/>
-          </p:cNvSpPr>
-          <p:nvPr>
-            <p:ph type="sldNum" idx="5"/>
-          </p:nvPr>
-        </p:nvSpPr>
-        <p:spPr/>
-        <p:txBody>
-          <a:bodyPr xmlns:a="http://schemas.openxmlformats.org/drawingml/2006/main"/>
-          <a:lstStyle xmlns:a="http://schemas.openxmlformats.org/drawingml/2006/main"/>
-          <a:p xmlns:a="http://schemas.openxmlformats.org/drawingml/2006/main"/>
-        </p:txBody>
-      </p:sp>
-    </p:spTree>
-  </p:cSld>
-  <p:clrMapOvr>
-    <a:masterClrMapping xmlns:a="http://schemas.openxmlformats.org/drawingml/2006/main"/>
-  </p:clrMapOvr>
-</p:notes>
-</file>
-
-<file path=ppt/notesSlides/notesSlide26.xml><?xml version="1.0" encoding="utf-8"?>
-<p:notes xmlns:p="http://schemas.openxmlformats.org/presentationml/2006/main">
-  <p:cSld>
-    <p:spTree>
-      <p:nvGrpSpPr>
-        <p:cNvPr id="1" name=""/>
-        <p:cNvGrpSpPr/>
-        <p:nvPr/>
-      </p:nvGrpSpPr>
-      <p:grpSpPr>
-        <a:xfrm xmlns:a="http://schemas.openxmlformats.org/drawingml/2006/main"/>
-      </p:grpSpPr>
-      <p:sp>
-        <p:nvSpPr>
-          <p:cNvPr id="2" name="Slide Image Placeholder 1"/>
-          <p:cNvSpPr>
-            <a:spLocks xmlns:a="http://schemas.openxmlformats.org/drawingml/2006/main" noGrp="1"/>
-          </p:cNvSpPr>
-          <p:nvPr>
-            <p:ph type="sldImg" idx="0"/>
-          </p:nvPr>
-        </p:nvSpPr>
-        <p:spPr/>
-      </p:sp>
-      <p:sp>
-        <p:nvSpPr>
-          <p:cNvPr id="3" name="Notes Placeholder 2"/>
-          <p:cNvSpPr>
-            <a:spLocks xmlns:a="http://schemas.openxmlformats.org/drawingml/2006/main" noGrp="1"/>
-          </p:cNvSpPr>
-          <p:nvPr>
-            <p:ph type="body" idx="1"/>
-          </p:nvPr>
-        </p:nvSpPr>
-        <p:spPr/>
-        <p:txBody>
-          <a:bodyPr xmlns:a="http://schemas.openxmlformats.org/drawingml/2006/main"/>
-          <a:lstStyle xmlns:a="http://schemas.openxmlformats.org/drawingml/2006/main"/>
-          <a:p xmlns:a="http://schemas.openxmlformats.org/drawingml/2006/main">
-            <a:r>
-              <a:t>Close by pointing students to lectures 6–8 for the larger examples. Suggest compiling a very small C function with gcc -O0 -S and finding its arguments, arithmetic, and return value; compiler output may vary.</a:t>
-            </a:r>
-          </a:p>
-          <a:p xmlns:a="http://schemas.openxmlformats.org/drawingml/2006/main">
-            <a:r>
-              <a:t/>
-            </a:r>
-          </a:p>
-          <a:p xmlns:a="http://schemas.openxmlformats.org/drawingml/2006/main">
-            <a:r>
-              <a:t>Source: https://firner.com/presentations/cs211/2026-Fall/cs211_08/#/</a:t>
-            </a:r>
-          </a:p>
-        </p:txBody>
-      </p:sp>
-      <p:sp>
-        <p:nvSpPr>
-          <p:cNvPr id="4" name="Slide Number Placeholder 3"/>
-          <p:cNvSpPr>
-            <a:spLocks xmlns:a="http://schemas.openxmlformats.org/drawingml/2006/main" noGrp="1"/>
-          </p:cNvSpPr>
-          <p:nvPr>
-            <p:ph type="sldNum" idx="5"/>
-          </p:nvPr>
-        </p:nvSpPr>
-        <p:spPr/>
-        <p:txBody>
-          <a:bodyPr xmlns:a="http://schemas.openxmlformats.org/drawingml/2006/main"/>
-          <a:lstStyle xmlns:a="http://schemas.openxmlformats.org/drawingml/2006/main"/>
-          <a:p xmlns:a="http://schemas.openxmlformats.org/drawingml/2006/main"/>
-        </p:txBody>
-      </p:sp>
-    </p:spTree>
-  </p:cSld>
-  <p:clrMapOvr>
-    <a:masterClrMapping xmlns:a="http://schemas.openxmlformats.org/drawingml/2006/main"/>
-  </p:clrMapOvr>
-</p:notes>
-</file>
-
 <file path=ppt/notesSlides/notesSlide3.xml><?xml version="1.0" encoding="utf-8"?>
 <p:notes xmlns:p="http://schemas.openxmlformats.org/presentationml/2006/main">
   <p:cSld>
@@ -1987,7 +1258,7 @@
           <a:lstStyle xmlns:a="http://schemas.openxmlformats.org/drawingml/2006/main"/>
           <a:p xmlns:a="http://schemas.openxmlformats.org/drawingml/2006/main">
             <a:r>
-              <a:t>Draw place-value columns 1, 1/2, 1/4, 1/8. 1.010 binary is exactly 1.25. The trailing zero pads the practice format; it does not change the value. The examples are constructed for teaching, not copied from the unreleased solution.</a:t>
+              <a:t>Draw place-value columns before introducing exponent fields. This bridges base-2 arithmetic to the 5/4 and 3/16 examples. The 0.101₂ example equals 0.625.</a:t>
             </a:r>
           </a:p>
           <a:p xmlns:a="http://schemas.openxmlformats.org/drawingml/2006/main">
@@ -2067,7 +1338,7 @@
           <a:lstStyle xmlns:a="http://schemas.openxmlformats.org/drawingml/2006/main"/>
           <a:p xmlns:a="http://schemas.openxmlformats.org/drawingml/2006/main">
             <a:r>
-              <a:t>Normal fields have E from 1 through 6 in this toy format. The all-ones exponent is reserved for infinities/NaNs in IEEE-style formats. We are using the lecture's normal/subnormal equations and a toy format with bias 3. Avoid saying the bias always equals 2^(k−1)−1; the planned exercise supplies it explicitly.</a:t>
+              <a:t>Draw place-value columns 1, 1/2, 1/4, 1/8. 1.010 binary is exactly 1.25. The trailing zero pads the practice format; it does not change the value. The examples are constructed for teaching, not copied from the unreleased solution.</a:t>
             </a:r>
           </a:p>
           <a:p xmlns:a="http://schemas.openxmlformats.org/drawingml/2006/main">
@@ -2147,7 +1418,7 @@
           <a:lstStyle xmlns:a="http://schemas.openxmlformats.org/drawingml/2006/main"/>
           <a:p xmlns:a="http://schemas.openxmlformats.org/drawingml/2006/main">
             <a:r>
-              <a:t>Work through this slowly on the board. Ask which part of 1.010 is stored: 010. The lecture equation is (−1)^S × 2^(E−bias) × (1+F/2^sig_bits). For E=3, bias=3, F=2, sig_bits=3 the result is exactly 1.25.</a:t>
+              <a:t>Normal fields have E from 1 through 6 in this toy format. The all-ones exponent is reserved for infinities/NaNs in IEEE-style formats. We are using the lecture's normal/subnormal equations and a toy format with bias 3. Avoid saying the bias always equals 2^(k−1)−1; the planned exercise supplies it explicitly.</a:t>
             </a:r>
           </a:p>
           <a:p xmlns:a="http://schemas.openxmlformats.org/drawingml/2006/main">
@@ -2227,7 +1498,7 @@
           <a:lstStyle xmlns:a="http://schemas.openxmlformats.org/drawingml/2006/main"/>
           <a:p xmlns:a="http://schemas.openxmlformats.org/drawingml/2006/main">
             <a:r>
-              <a:t>This is the likely stumbling block: subnormals use exponent 1−bias, not 0−bias, and no hidden leading 1. For this format, F=0 gives zero, F=1 is 1/32, F=7 is 7/32, and the smallest normal is 1/4. Source: lecture 6 equations.</a:t>
+              <a:t>Work through this slowly on the board. Ask which part of 1.010 is stored: 010. The lecture equation is (−1)^S × 2^(E−bias) × (1+F/2^sig_bits). For E=3, bias=3, F=2, sig_bits=3 the result is exactly 1.25.</a:t>
             </a:r>
           </a:p>
           <a:p xmlns:a="http://schemas.openxmlformats.org/drawingml/2006/main">
@@ -2307,7 +1578,7 @@
           <a:lstStyle xmlns:a="http://schemas.openxmlformats.org/drawingml/2006/main"/>
           <a:p xmlns:a="http://schemas.openxmlformats.org/drawingml/2006/main">
             <a:r>
-              <a:t>Contrast this with the normal 5/4 example. Students may try to store a negative exponent in E or include the hidden 1. Return to the formula to resolve both confusions.</a:t>
+              <a:t>Pause at each field and ask students what it means. The sign is zero. E=2 lies in the normal range, e=-1, and F=5. The value is 0.8125.</a:t>
             </a:r>
           </a:p>
           <a:p xmlns:a="http://schemas.openxmlformats.org/drawingml/2006/main">
@@ -2387,7 +1658,7 @@
           <a:lstStyle xmlns:a="http://schemas.openxmlformats.org/drawingml/2006/main"/>
           <a:p xmlns:a="http://schemas.openxmlformats.org/drawingml/2006/main">
             <a:r>
-              <a:t>Give two minutes. Both examples are exactly representable, so no rounding rule is needed. Ask students to check results by substituting E and F into the appropriate formula.</a:t>
+              <a:t>This is the likely stumbling block: subnormals use exponent 1−bias, not 0−bias, and no hidden leading 1. For this format, F=0 gives zero, F=1 is 1/32, F=7 is 7/32, and the smallest normal is 1/4. Source: lecture 6 equations.</a:t>
             </a:r>
           </a:p>
           <a:p xmlns:a="http://schemas.openxmlformats.org/drawingml/2006/main">
@@ -2467,7 +1738,7 @@
           <a:lstStyle xmlns:a="http://schemas.openxmlformats.org/drawingml/2006/main"/>
           <a:p xmlns:a="http://schemas.openxmlformats.org/drawingml/2006/main">
             <a:r>
-              <a:t>Do not reveal until students have tried both. Emphasize that E=0 is a category marker here, not the unbiased exponent. E=3 represents true exponent zero because bias is three.</a:t>
+              <a:t>Contrast this with the normal 5/4 example. Students may try to store a negative exponent in E or include the hidden 1. Return to the formula to resolve both confusions.</a:t>
             </a:r>
           </a:p>
           <a:p xmlns:a="http://schemas.openxmlformats.org/drawingml/2006/main">
@@ -2545,7 +1816,7 @@
   </p:cSld>
   <p:clrMap bg1="lt1" tx1="dk1" bg2="lt2" tx2="dk2" accent1="accent1" accent2="accent2" accent3="accent3" accent4="accent4" accent5="accent5" accent6="accent6" hlink="hlink" folHlink="folHlink"/>
   <p:sldLayoutIdLst>
-    <p:sldLayoutId xmlns:r="http://schemas.openxmlformats.org/officeDocument/2006/relationships" id="2147483649" r:id="R943b2fc9b43f4eec"/>
+    <p:sldLayoutId xmlns:r="http://schemas.openxmlformats.org/officeDocument/2006/relationships" id="2147483649" r:id="R1ec887bd53c348e7"/>
   </p:sldLayoutIdLst>
   <p:txStyles>
     <p:titleStyle>
@@ -3096,7 +2367,7 @@
           <p:cNvPr id="7" name="">
             <a:extLst xmlns:a="http://schemas.openxmlformats.org/drawingml/2006/main">
               <a:ext uri="{FF2B5EF4-FFF2-40B4-BE49-F238E27FC236}">
-                <a16:creationId xmlns:a16="http://schemas.microsoft.com/office/drawing/2014/main" id="{03E28F38-3FA8-4CA7-8931-27EA642E7346}"/>
+                <a16:creationId xmlns:a16="http://schemas.microsoft.com/office/drawing/2014/main" id="{C4B5A9CF-720A-44C7-8892-52DB130A17A2}"/>
               </a:ext>
             </a:extLst>
           </p:cNvPr>
@@ -3153,7 +2424,7 @@
           <p:cNvPr id="2" name="">
             <a:extLst xmlns:a="http://schemas.openxmlformats.org/drawingml/2006/main">
               <a:ext uri="{FF2B5EF4-FFF2-40B4-BE49-F238E27FC236}">
-                <a16:creationId xmlns:a16="http://schemas.microsoft.com/office/drawing/2014/main" id="{4B92EC2A-D08A-41AE-9047-4617C0C49428}"/>
+                <a16:creationId xmlns:a16="http://schemas.microsoft.com/office/drawing/2014/main" id="{A14C0B84-CEFB-4C94-9A52-E2F799B7FBED}"/>
               </a:ext>
             </a:extLst>
           </p:cNvPr>
@@ -3200,7 +2471,7 @@
                 <a:ea typeface="Arial"/>
                 <a:cs typeface="Arial"/>
               </a:rPr>
-              <a:t>Floating point and assembly</a:t>
+              <a:t>Floating point numbers</a:t>
             </a:r>
           </a:p>
         </p:txBody>
@@ -3210,7 +2481,7 @@
           <p:cNvPr id="3" name="">
             <a:extLst xmlns:a="http://schemas.openxmlformats.org/drawingml/2006/main">
               <a:ext uri="{FF2B5EF4-FFF2-40B4-BE49-F238E27FC236}">
-                <a16:creationId xmlns:a16="http://schemas.microsoft.com/office/drawing/2014/main" id="{858ABDE9-D79B-4317-864D-AC9B15447BAA}"/>
+                <a16:creationId xmlns:a16="http://schemas.microsoft.com/office/drawing/2014/main" id="{12DCB16E-01E0-44DC-B52E-55F3E014E7A7}"/>
               </a:ext>
             </a:extLst>
           </p:cNvPr>
@@ -3257,7 +2528,7 @@
                 <a:ea typeface="Arial"/>
                 <a:cs typeface="Arial"/>
               </a:rPr>
-              <a:t>Build a number in a small floating point format, then read the assembly and memory ideas from lectures 6–8.</a:t>
+              <a:t>Build and decode numbers in a small floating point format. We will work through the bits before worrying about implementation.</a:t>
             </a:r>
           </a:p>
         </p:txBody>
@@ -3267,7 +2538,7 @@
           <p:cNvPr id="4" name="">
             <a:extLst xmlns:a="http://schemas.openxmlformats.org/drawingml/2006/main">
               <a:ext uri="{FF2B5EF4-FFF2-40B4-BE49-F238E27FC236}">
-                <a16:creationId xmlns:a16="http://schemas.microsoft.com/office/drawing/2014/main" id="{18BB6088-4220-40F2-AF9A-64AD0E8CC9C8}"/>
+                <a16:creationId xmlns:a16="http://schemas.microsoft.com/office/drawing/2014/main" id="{8A4BFE31-4E89-4E9C-A6C1-6B1DC19BC25A}"/>
               </a:ext>
             </a:extLst>
           </p:cNvPr>
@@ -3342,7 +2613,7 @@
                 <a:ea typeface="Courier New"/>
                 <a:cs typeface="Courier New"/>
               </a:rPr>
-              <a:t>Fraction → binary → fields</a:t>
+              <a:t>Binary fractions</a:t>
             </a:r>
           </a:p>
           <a:p xmlns:a="http://schemas.openxmlformats.org/drawingml/2006/main">
@@ -3365,6 +2636,29 @@
                 <a:ea typeface="Courier New"/>
                 <a:cs typeface="Courier New"/>
               </a:rPr>
+              <a:t>Exponent and significand fields</a:t>
+            </a:r>
+          </a:p>
+          <a:p xmlns:a="http://schemas.openxmlformats.org/drawingml/2006/main">
+            <a:pPr>
+              <a:defRPr sz="1650" b="0">
+                <a:solidFill>
+                  <a:srgbClr val="A7F3D0"/>
+                </a:solidFill>
+                <a:latin typeface="Courier New"/>
+                <a:ea typeface="Courier New"/>
+                <a:cs typeface="Courier New"/>
+              </a:defRPr>
+            </a:pPr>
+            <a:r>
+              <a:rPr sz="1650" b="0">
+                <a:solidFill>
+                  <a:srgbClr val="A7F3D0"/>
+                </a:solidFill>
+                <a:latin typeface="Courier New"/>
+                <a:ea typeface="Courier New"/>
+                <a:cs typeface="Courier New"/>
+              </a:rPr>
               <a:t>Normal and subnormal values</a:t>
             </a:r>
           </a:p>
@@ -3388,30 +2682,7 @@
                 <a:ea typeface="Courier New"/>
                 <a:cs typeface="Courier New"/>
               </a:rPr>
-              <a:t>Read short x86-64 instructions</a:t>
-            </a:r>
-          </a:p>
-          <a:p xmlns:a="http://schemas.openxmlformats.org/drawingml/2006/main">
-            <a:pPr>
-              <a:defRPr sz="1650" b="0">
-                <a:solidFill>
-                  <a:srgbClr val="A7F3D0"/>
-                </a:solidFill>
-                <a:latin typeface="Courier New"/>
-                <a:ea typeface="Courier New"/>
-                <a:cs typeface="Courier New"/>
-              </a:defRPr>
-            </a:pPr>
-            <a:r>
-              <a:rPr sz="1650" b="0">
-                <a:solidFill>
-                  <a:srgbClr val="A7F3D0"/>
-                </a:solidFill>
-                <a:latin typeface="Courier New"/>
-                <a:ea typeface="Courier New"/>
-                <a:cs typeface="Courier New"/>
-              </a:rPr>
-              <a:t>Follow the stack and arrays</a:t>
+              <a:t>Practice with ratios and bit patterns</a:t>
             </a:r>
           </a:p>
         </p:txBody>
@@ -3421,7 +2692,7 @@
           <p:cNvPr id="5" name="">
             <a:extLst xmlns:a="http://schemas.openxmlformats.org/drawingml/2006/main">
               <a:ext uri="{FF2B5EF4-FFF2-40B4-BE49-F238E27FC236}">
-                <a16:creationId xmlns:a16="http://schemas.microsoft.com/office/drawing/2014/main" id="{5E9FBCF7-2FEE-4EAE-819E-D83B0A9743D2}"/>
+                <a16:creationId xmlns:a16="http://schemas.microsoft.com/office/drawing/2014/main" id="{969A9A68-0243-45E1-8E3A-073C6455A09E}"/>
               </a:ext>
             </a:extLst>
           </p:cNvPr>
@@ -3468,7 +2739,7 @@
                 <a:ea typeface="Arial"/>
                 <a:cs typeface="Arial"/>
               </a:rPr>
-              <a:t>We will use a tiny practice format so every bit has a visible job.</a:t>
+              <a:t>Every example uses a tiny format so every bit has a visible job.</a:t>
             </a:r>
           </a:p>
         </p:txBody>
@@ -3478,7 +2749,7 @@
           <p:cNvPr id="6" name="">
             <a:extLst xmlns:a="http://schemas.openxmlformats.org/drawingml/2006/main">
               <a:ext uri="{FF2B5EF4-FFF2-40B4-BE49-F238E27FC236}">
-                <a16:creationId xmlns:a16="http://schemas.microsoft.com/office/drawing/2014/main" id="{BD25B7B5-9B4F-48E6-BC95-8960AFF41D20}"/>
+                <a16:creationId xmlns:a16="http://schemas.microsoft.com/office/drawing/2014/main" id="{83875137-4A77-4850-9E53-34918B663FF4}"/>
               </a:ext>
             </a:extLst>
           </p:cNvPr>
@@ -3525,7 +2796,7 @@
                 <a:ea typeface="Courier New"/>
                 <a:cs typeface="Courier New"/>
               </a:rPr>
-              <a:t>01 / 26</a:t>
+              <a:t>01 / 17</a:t>
             </a:r>
           </a:p>
         </p:txBody>
@@ -3533,7 +2804,7 @@
     </p:spTree>
     <p:extLst>
       <p:ext uri="{BB962C8B-B14F-4D97-AF65-F5344CB8AC3E}">
-        <p14:creationId xmlns:p14="http://schemas.microsoft.com/office/powerpoint/2010/main" val="458665212"/>
+        <p14:creationId xmlns:p14="http://schemas.microsoft.com/office/powerpoint/2010/main" val="2003878777"/>
       </p:ext>
     </p:extLst>
   </p:cSld>
@@ -3564,7 +2835,7 @@
           <p:cNvPr id="7" name="">
             <a:extLst xmlns:a="http://schemas.openxmlformats.org/drawingml/2006/main">
               <a:ext uri="{FF2B5EF4-FFF2-40B4-BE49-F238E27FC236}">
-                <a16:creationId xmlns:a16="http://schemas.microsoft.com/office/drawing/2014/main" id="{B702D2C2-CA4E-4E1C-9800-99F321D4EB1E}"/>
+                <a16:creationId xmlns:a16="http://schemas.microsoft.com/office/drawing/2014/main" id="{DF65E5C3-C59B-4F4C-8123-D26BB20B62FC}"/>
               </a:ext>
             </a:extLst>
           </p:cNvPr>
@@ -3611,7 +2882,7 @@
                 <a:ea typeface="Courier New"/>
                 <a:cs typeface="Courier New"/>
               </a:rPr>
-              <a:t>FLOATING POINT · PRECISION</a:t>
+              <a:t>FLOATING POINT · SMALLEST VALUES</a:t>
             </a:r>
           </a:p>
         </p:txBody>
@@ -3621,7 +2892,7 @@
           <p:cNvPr id="2" name="">
             <a:extLst xmlns:a="http://schemas.openxmlformats.org/drawingml/2006/main">
               <a:ext uri="{FF2B5EF4-FFF2-40B4-BE49-F238E27FC236}">
-                <a16:creationId xmlns:a16="http://schemas.microsoft.com/office/drawing/2014/main" id="{A1D753E9-0C61-457C-A33E-1FFFD739872B}"/>
+                <a16:creationId xmlns:a16="http://schemas.microsoft.com/office/drawing/2014/main" id="{AAF148DA-667A-4F17-8947-3A10B5D66209}"/>
               </a:ext>
             </a:extLst>
           </p:cNvPr>
@@ -3668,7 +2939,7 @@
                 <a:ea typeface="Arial"/>
                 <a:cs typeface="Arial"/>
               </a:rPr>
-              <a:t>Some ratios need rounding</a:t>
+              <a:t>The normal–subnormal boundary</a:t>
             </a:r>
           </a:p>
         </p:txBody>
@@ -3678,7 +2949,7 @@
           <p:cNvPr id="3" name="">
             <a:extLst xmlns:a="http://schemas.openxmlformats.org/drawingml/2006/main">
               <a:ext uri="{FF2B5EF4-FFF2-40B4-BE49-F238E27FC236}">
-                <a16:creationId xmlns:a16="http://schemas.microsoft.com/office/drawing/2014/main" id="{3B111229-CC68-4CAB-8EB9-3092D09E9191}"/>
+                <a16:creationId xmlns:a16="http://schemas.microsoft.com/office/drawing/2014/main" id="{9CBE9A2B-E617-4407-BF21-6D1C10DB5F7C}"/>
               </a:ext>
             </a:extLst>
           </p:cNvPr>
@@ -3725,35 +2996,7 @@
                 <a:ea typeface="Arial"/>
                 <a:cs typeface="Arial"/>
               </a:rPr>
-              <a:t>Only eight fraction patterns fit in three bits. A ratio such as 1/3 has a repeating binary expansion and cannot be stored exactly.</a:t>
-            </a:r>
-          </a:p>
-          <a:p xmlns:a="http://schemas.openxmlformats.org/drawingml/2006/main">
-            <a:r>
-              <a:t/>
-            </a:r>
-          </a:p>
-          <a:p xmlns:a="http://schemas.openxmlformats.org/drawingml/2006/main">
-            <a:pPr>
-              <a:defRPr sz="1950" b="0">
-                <a:solidFill>
-                  <a:srgbClr val="D4D4D8"/>
-                </a:solidFill>
-                <a:latin typeface="Arial"/>
-                <a:ea typeface="Arial"/>
-                <a:cs typeface="Arial"/>
-              </a:defRPr>
-            </a:pPr>
-            <a:r>
-              <a:rPr sz="1950" b="0">
-                <a:solidFill>
-                  <a:srgbClr val="D4D4D8"/>
-                </a:solidFill>
-                <a:latin typeface="Arial"/>
-                <a:ea typeface="Arial"/>
-                <a:cs typeface="Arial"/>
-              </a:rPr>
-              <a:t>The required rounding rule decides which nearby value to store.</a:t>
+              <a:t>The largest subnormal sits directly below the smallest normal. The exponent stays at −2 across this boundary, but the implied leading 1 appears only for the normal value.</a:t>
             </a:r>
           </a:p>
         </p:txBody>
@@ -3763,7 +3006,7 @@
           <p:cNvPr id="4" name="">
             <a:extLst xmlns:a="http://schemas.openxmlformats.org/drawingml/2006/main">
               <a:ext uri="{FF2B5EF4-FFF2-40B4-BE49-F238E27FC236}">
-                <a16:creationId xmlns:a16="http://schemas.microsoft.com/office/drawing/2014/main" id="{41C96812-9C9A-4DB5-BEC4-B56277AF335C}"/>
+                <a16:creationId xmlns:a16="http://schemas.microsoft.com/office/drawing/2014/main" id="{F24EA955-1341-477F-B9E0-1F67FB906026}"/>
               </a:ext>
             </a:extLst>
           </p:cNvPr>
@@ -3810,7 +3053,30 @@
                 <a:ea typeface="Courier New"/>
                 <a:cs typeface="Courier New"/>
               </a:rPr>
-              <a:t>1/3 = 1.010101…₂ × 2⁻²</a:t>
+              <a:t>Largest subnormal: E=0, F=7</a:t>
+            </a:r>
+          </a:p>
+          <a:p xmlns:a="http://schemas.openxmlformats.org/drawingml/2006/main">
+            <a:pPr>
+              <a:defRPr sz="1650" b="0">
+                <a:solidFill>
+                  <a:srgbClr val="A7F3D0"/>
+                </a:solidFill>
+                <a:latin typeface="Courier New"/>
+                <a:ea typeface="Courier New"/>
+                <a:cs typeface="Courier New"/>
+              </a:defRPr>
+            </a:pPr>
+            <a:r>
+              <a:rPr sz="1650" b="0">
+                <a:solidFill>
+                  <a:srgbClr val="A7F3D0"/>
+                </a:solidFill>
+                <a:latin typeface="Courier New"/>
+                <a:ea typeface="Courier New"/>
+                <a:cs typeface="Courier New"/>
+              </a:rPr>
+              <a:t>value = 7/32</a:t>
             </a:r>
           </a:p>
           <a:p xmlns:a="http://schemas.openxmlformats.org/drawingml/2006/main">
@@ -3838,7 +3104,7 @@
                 <a:ea typeface="Courier New"/>
                 <a:cs typeface="Courier New"/>
               </a:rPr>
-              <a:t>Nearby values in this format:</a:t>
+              <a:t>Smallest normal: E=1, F=0</a:t>
             </a:r>
           </a:p>
           <a:p xmlns:a="http://schemas.openxmlformats.org/drawingml/2006/main">
@@ -3861,7 +3127,12 @@
                 <a:ea typeface="Courier New"/>
                 <a:cs typeface="Courier New"/>
               </a:rPr>
-              <a:t>F = 010₂  →  5/16</a:t>
+              <a:t>value = 1/4 = 8/32</a:t>
+            </a:r>
+          </a:p>
+          <a:p xmlns:a="http://schemas.openxmlformats.org/drawingml/2006/main">
+            <a:r>
+              <a:t/>
             </a:r>
           </a:p>
           <a:p xmlns:a="http://schemas.openxmlformats.org/drawingml/2006/main">
@@ -3884,35 +3155,7 @@
                 <a:ea typeface="Courier New"/>
                 <a:cs typeface="Courier New"/>
               </a:rPr>
-              <a:t>F = 011₂  →  11/32</a:t>
-            </a:r>
-          </a:p>
-          <a:p xmlns:a="http://schemas.openxmlformats.org/drawingml/2006/main">
-            <a:r>
-              <a:t/>
-            </a:r>
-          </a:p>
-          <a:p xmlns:a="http://schemas.openxmlformats.org/drawingml/2006/main">
-            <a:pPr>
-              <a:defRPr sz="1650" b="0">
-                <a:solidFill>
-                  <a:srgbClr val="A7F3D0"/>
-                </a:solidFill>
-                <a:latin typeface="Courier New"/>
-                <a:ea typeface="Courier New"/>
-                <a:cs typeface="Courier New"/>
-              </a:defRPr>
-            </a:pPr>
-            <a:r>
-              <a:rPr sz="1650" b="0">
-                <a:solidFill>
-                  <a:srgbClr val="A7F3D0"/>
-                </a:solidFill>
-                <a:latin typeface="Courier New"/>
-                <a:ea typeface="Courier New"/>
-                <a:cs typeface="Courier New"/>
-              </a:rPr>
-              <a:t>Neither is exactly 1/3.</a:t>
+              <a:t>Gap = 1/32</a:t>
             </a:r>
           </a:p>
         </p:txBody>
@@ -3922,7 +3165,7 @@
           <p:cNvPr id="5" name="">
             <a:extLst xmlns:a="http://schemas.openxmlformats.org/drawingml/2006/main">
               <a:ext uri="{FF2B5EF4-FFF2-40B4-BE49-F238E27FC236}">
-                <a16:creationId xmlns:a16="http://schemas.microsoft.com/office/drawing/2014/main" id="{85F8BB5E-84AF-400F-A9D8-087C6F00474F}"/>
+                <a16:creationId xmlns:a16="http://schemas.microsoft.com/office/drawing/2014/main" id="{E8B59BBF-C1FE-4848-A1BE-0E49C6150211}"/>
               </a:ext>
             </a:extLst>
           </p:cNvPr>
@@ -3969,7 +3212,7 @@
                 <a:ea typeface="Arial"/>
                 <a:cs typeface="Arial"/>
               </a:rPr>
-              <a:t>Wait for the assignment’s rounding instructions before choosing a stored result.</a:t>
+              <a:t>Subnormals fill the gap between zero and the smallest normal.</a:t>
             </a:r>
           </a:p>
         </p:txBody>
@@ -3979,7 +3222,7 @@
           <p:cNvPr id="6" name="">
             <a:extLst xmlns:a="http://schemas.openxmlformats.org/drawingml/2006/main">
               <a:ext uri="{FF2B5EF4-FFF2-40B4-BE49-F238E27FC236}">
-                <a16:creationId xmlns:a16="http://schemas.microsoft.com/office/drawing/2014/main" id="{84FFA50B-9286-4888-9AE4-F29565C771B1}"/>
+                <a16:creationId xmlns:a16="http://schemas.microsoft.com/office/drawing/2014/main" id="{C1D8CDEF-F520-47D3-A60F-E6AFCB834AE6}"/>
               </a:ext>
             </a:extLst>
           </p:cNvPr>
@@ -4026,7 +3269,7 @@
                 <a:ea typeface="Courier New"/>
                 <a:cs typeface="Courier New"/>
               </a:rPr>
-              <a:t>10 / 26</a:t>
+              <a:t>10 / 17</a:t>
             </a:r>
           </a:p>
         </p:txBody>
@@ -4034,7 +3277,7 @@
     </p:spTree>
     <p:extLst>
       <p:ext uri="{BB962C8B-B14F-4D97-AF65-F5344CB8AC3E}">
-        <p14:creationId xmlns:p14="http://schemas.microsoft.com/office/powerpoint/2010/main" val="254154254"/>
+        <p14:creationId xmlns:p14="http://schemas.microsoft.com/office/powerpoint/2010/main" val="1006218793"/>
       </p:ext>
     </p:extLst>
   </p:cSld>
@@ -4065,7 +3308,7 @@
           <p:cNvPr id="7" name="">
             <a:extLst xmlns:a="http://schemas.openxmlformats.org/drawingml/2006/main">
               <a:ext uri="{FF2B5EF4-FFF2-40B4-BE49-F238E27FC236}">
-                <a16:creationId xmlns:a16="http://schemas.microsoft.com/office/drawing/2014/main" id="{90359610-38B1-45FE-A1B0-0CD74E98A8EF}"/>
+                <a16:creationId xmlns:a16="http://schemas.microsoft.com/office/drawing/2014/main" id="{ED6F0A3D-C361-4FA6-9CFE-2E669E0D919F}"/>
               </a:ext>
             </a:extLst>
           </p:cNvPr>
@@ -4112,7 +3355,7 @@
                 <a:ea typeface="Courier New"/>
                 <a:cs typeface="Courier New"/>
               </a:rPr>
-              <a:t>LECTURE 6–7 · READING ORDER</a:t>
+              <a:t>FLOATING POINT · PRACTICE</a:t>
             </a:r>
           </a:p>
         </p:txBody>
@@ -4122,7 +3365,7 @@
           <p:cNvPr id="2" name="">
             <a:extLst xmlns:a="http://schemas.openxmlformats.org/drawingml/2006/main">
               <a:ext uri="{FF2B5EF4-FFF2-40B4-BE49-F238E27FC236}">
-                <a16:creationId xmlns:a16="http://schemas.microsoft.com/office/drawing/2014/main" id="{9E970715-3AF0-4D0E-8443-DF6C8C290CE3}"/>
+                <a16:creationId xmlns:a16="http://schemas.microsoft.com/office/drawing/2014/main" id="{8531682B-A598-4D48-84FE-CD10468FEB1D}"/>
               </a:ext>
             </a:extLst>
           </p:cNvPr>
@@ -4169,7 +3412,7 @@
                 <a:ea typeface="Arial"/>
                 <a:cs typeface="Arial"/>
               </a:rPr>
-              <a:t>One line of AT&amp;T assembly</a:t>
+              <a:t>Your turn: decode two patterns</a:t>
             </a:r>
           </a:p>
         </p:txBody>
@@ -4179,7 +3422,7 @@
           <p:cNvPr id="3" name="">
             <a:extLst xmlns:a="http://schemas.openxmlformats.org/drawingml/2006/main">
               <a:ext uri="{FF2B5EF4-FFF2-40B4-BE49-F238E27FC236}">
-                <a16:creationId xmlns:a16="http://schemas.microsoft.com/office/drawing/2014/main" id="{F0355440-9B90-4DE9-847B-E30977955892}"/>
+                <a16:creationId xmlns:a16="http://schemas.microsoft.com/office/drawing/2014/main" id="{7C4976BE-C2D5-4F13-B1DA-E2F9D2612B6A}"/>
               </a:ext>
             </a:extLst>
           </p:cNvPr>
@@ -4226,7 +3469,7 @@
                 <a:ea typeface="Arial"/>
                 <a:cs typeface="Arial"/>
               </a:rPr>
-              <a:t>Read the source first, then the destination. The destination changes.</a:t>
+              <a:t>Use the same format: 3 exponent bits, bias 3, and 3 fraction bits.</a:t>
             </a:r>
           </a:p>
           <a:p xmlns:a="http://schemas.openxmlformats.org/drawingml/2006/main">
@@ -4254,7 +3497,7 @@
                 <a:ea typeface="Arial"/>
                 <a:cs typeface="Arial"/>
               </a:rPr>
-              <a:t>The suffix says how much data is used: b = 1 byte, w = 2, l = 4, q = 8.</a:t>
+              <a:t>For each pattern, classify it, find E and F, then calculate the value.</a:t>
             </a:r>
           </a:p>
         </p:txBody>
@@ -4264,7 +3507,7 @@
           <p:cNvPr id="4" name="">
             <a:extLst xmlns:a="http://schemas.openxmlformats.org/drawingml/2006/main">
               <a:ext uri="{FF2B5EF4-FFF2-40B4-BE49-F238E27FC236}">
-                <a16:creationId xmlns:a16="http://schemas.microsoft.com/office/drawing/2014/main" id="{809B7050-3500-4B02-B1C2-2A60C7F977BC}"/>
+                <a16:creationId xmlns:a16="http://schemas.microsoft.com/office/drawing/2014/main" id="{97877AB9-DA81-4CB4-8D40-AAADEA86261B}"/>
               </a:ext>
             </a:extLst>
           </p:cNvPr>
@@ -4311,7 +3554,53 @@
                 <a:ea typeface="Courier New"/>
                 <a:cs typeface="Courier New"/>
               </a:rPr>
-              <a:t>movq $5, %rax</a:t>
+              <a:t>A. 0 | 010 | 100</a:t>
+            </a:r>
+          </a:p>
+          <a:p xmlns:a="http://schemas.openxmlformats.org/drawingml/2006/main">
+            <a:pPr>
+              <a:defRPr sz="1650" b="0">
+                <a:solidFill>
+                  <a:srgbClr val="A7F3D0"/>
+                </a:solidFill>
+                <a:latin typeface="Courier New"/>
+                <a:ea typeface="Courier New"/>
+                <a:cs typeface="Courier New"/>
+              </a:defRPr>
+            </a:pPr>
+            <a:r>
+              <a:rPr sz="1650" b="0">
+                <a:solidFill>
+                  <a:srgbClr val="A7F3D0"/>
+                </a:solidFill>
+                <a:latin typeface="Courier New"/>
+                <a:ea typeface="Courier New"/>
+                <a:cs typeface="Courier New"/>
+              </a:rPr>
+              <a:t>   normal or subnormal?</a:t>
+            </a:r>
+          </a:p>
+          <a:p xmlns:a="http://schemas.openxmlformats.org/drawingml/2006/main">
+            <a:pPr>
+              <a:defRPr sz="1650" b="0">
+                <a:solidFill>
+                  <a:srgbClr val="A7F3D0"/>
+                </a:solidFill>
+                <a:latin typeface="Courier New"/>
+                <a:ea typeface="Courier New"/>
+                <a:cs typeface="Courier New"/>
+              </a:defRPr>
+            </a:pPr>
+            <a:r>
+              <a:rPr sz="1650" b="0">
+                <a:solidFill>
+                  <a:srgbClr val="A7F3D0"/>
+                </a:solidFill>
+                <a:latin typeface="Courier New"/>
+                <a:ea typeface="Courier New"/>
+                <a:cs typeface="Courier New"/>
+              </a:rPr>
+              <a:t>   value = ?</a:t>
             </a:r>
           </a:p>
           <a:p xmlns:a="http://schemas.openxmlformats.org/drawingml/2006/main">
@@ -4339,7 +3628,7 @@
                 <a:ea typeface="Courier New"/>
                 <a:cs typeface="Courier New"/>
               </a:rPr>
-              <a:t>movq   move 8 bytes</a:t>
+              <a:t>B. 0 | 000 | 011</a:t>
             </a:r>
           </a:p>
           <a:p xmlns:a="http://schemas.openxmlformats.org/drawingml/2006/main">
@@ -4362,7 +3651,7 @@
                 <a:ea typeface="Courier New"/>
                 <a:cs typeface="Courier New"/>
               </a:rPr>
-              <a:t>$5     literal value 5</a:t>
+              <a:t>   normal or subnormal?</a:t>
             </a:r>
           </a:p>
           <a:p xmlns:a="http://schemas.openxmlformats.org/drawingml/2006/main">
@@ -4385,35 +3674,7 @@
                 <a:ea typeface="Courier New"/>
                 <a:cs typeface="Courier New"/>
               </a:rPr>
-              <a:t>%rax   destination register</a:t>
-            </a:r>
-          </a:p>
-          <a:p xmlns:a="http://schemas.openxmlformats.org/drawingml/2006/main">
-            <a:r>
-              <a:t/>
-            </a:r>
-          </a:p>
-          <a:p xmlns:a="http://schemas.openxmlformats.org/drawingml/2006/main">
-            <a:pPr>
-              <a:defRPr sz="1650" b="0">
-                <a:solidFill>
-                  <a:srgbClr val="A7F3D0"/>
-                </a:solidFill>
-                <a:latin typeface="Courier New"/>
-                <a:ea typeface="Courier New"/>
-                <a:cs typeface="Courier New"/>
-              </a:defRPr>
-            </a:pPr>
-            <a:r>
-              <a:rPr sz="1650" b="0">
-                <a:solidFill>
-                  <a:srgbClr val="A7F3D0"/>
-                </a:solidFill>
-                <a:latin typeface="Courier New"/>
-                <a:ea typeface="Courier New"/>
-                <a:cs typeface="Courier New"/>
-              </a:rPr>
-              <a:t>Afterward: %rax = 5</a:t>
+              <a:t>   value = ?</a:t>
             </a:r>
           </a:p>
         </p:txBody>
@@ -4423,7 +3684,7 @@
           <p:cNvPr id="5" name="">
             <a:extLst xmlns:a="http://schemas.openxmlformats.org/drawingml/2006/main">
               <a:ext uri="{FF2B5EF4-FFF2-40B4-BE49-F238E27FC236}">
-                <a16:creationId xmlns:a16="http://schemas.microsoft.com/office/drawing/2014/main" id="{50D530AA-BC18-4CB7-845E-D912EB36578F}"/>
+                <a16:creationId xmlns:a16="http://schemas.microsoft.com/office/drawing/2014/main" id="{0C768E93-B810-439B-9ECE-DACDD6255183}"/>
               </a:ext>
             </a:extLst>
           </p:cNvPr>
@@ -4470,7 +3731,7 @@
                 <a:ea typeface="Arial"/>
                 <a:cs typeface="Arial"/>
               </a:rPr>
-              <a:t>AT&amp;T syntax is the format used in these lectures and by GCC’s default assembly output.</a:t>
+              <a:t>Check E first: it selects the equation.</a:t>
             </a:r>
           </a:p>
         </p:txBody>
@@ -4480,7 +3741,7 @@
           <p:cNvPr id="6" name="">
             <a:extLst xmlns:a="http://schemas.openxmlformats.org/drawingml/2006/main">
               <a:ext uri="{FF2B5EF4-FFF2-40B4-BE49-F238E27FC236}">
-                <a16:creationId xmlns:a16="http://schemas.microsoft.com/office/drawing/2014/main" id="{B6DDB160-C907-4D94-AE4E-BDECCFCC0B8B}"/>
+                <a16:creationId xmlns:a16="http://schemas.microsoft.com/office/drawing/2014/main" id="{4E485357-E888-4A45-92E1-47CDEA8A71B2}"/>
               </a:ext>
             </a:extLst>
           </p:cNvPr>
@@ -4527,7 +3788,7 @@
                 <a:ea typeface="Courier New"/>
                 <a:cs typeface="Courier New"/>
               </a:rPr>
-              <a:t>11 / 26</a:t>
+              <a:t>11 / 17</a:t>
             </a:r>
           </a:p>
         </p:txBody>
@@ -4535,7 +3796,7 @@
     </p:spTree>
     <p:extLst>
       <p:ext uri="{BB962C8B-B14F-4D97-AF65-F5344CB8AC3E}">
-        <p14:creationId xmlns:p14="http://schemas.microsoft.com/office/powerpoint/2010/main" val="1190573947"/>
+        <p14:creationId xmlns:p14="http://schemas.microsoft.com/office/powerpoint/2010/main" val="1507595076"/>
       </p:ext>
     </p:extLst>
   </p:cSld>
@@ -4566,7 +3827,7 @@
           <p:cNvPr id="7" name="">
             <a:extLst xmlns:a="http://schemas.openxmlformats.org/drawingml/2006/main">
               <a:ext uri="{FF2B5EF4-FFF2-40B4-BE49-F238E27FC236}">
-                <a16:creationId xmlns:a16="http://schemas.microsoft.com/office/drawing/2014/main" id="{CBB68D0A-FECB-4D23-9D56-064441DCB118}"/>
+                <a16:creationId xmlns:a16="http://schemas.microsoft.com/office/drawing/2014/main" id="{7AC5D697-73A9-4130-AF88-3B9A153D538D}"/>
               </a:ext>
             </a:extLst>
           </p:cNvPr>
@@ -4613,7 +3874,7 @@
                 <a:ea typeface="Courier New"/>
                 <a:cs typeface="Courier New"/>
               </a:rPr>
-              <a:t>ASSEMBLY VOCABULARY</a:t>
+              <a:t>FLOATING POINT · CHECK</a:t>
             </a:r>
           </a:p>
         </p:txBody>
@@ -4623,7 +3884,7 @@
           <p:cNvPr id="2" name="">
             <a:extLst xmlns:a="http://schemas.openxmlformats.org/drawingml/2006/main">
               <a:ext uri="{FF2B5EF4-FFF2-40B4-BE49-F238E27FC236}">
-                <a16:creationId xmlns:a16="http://schemas.microsoft.com/office/drawing/2014/main" id="{19107AD8-9D33-448A-89EB-8A952AE1AF1B}"/>
+                <a16:creationId xmlns:a16="http://schemas.microsoft.com/office/drawing/2014/main" id="{1059792B-54CD-4C1F-8A87-49C3F494D2AD}"/>
               </a:ext>
             </a:extLst>
           </p:cNvPr>
@@ -4670,7 +3931,7 @@
                 <a:ea typeface="Arial"/>
                 <a:cs typeface="Arial"/>
               </a:rPr>
-              <a:t>Three kinds of operands</a:t>
+              <a:t>Decode answers</a:t>
             </a:r>
           </a:p>
         </p:txBody>
@@ -4680,7 +3941,7 @@
           <p:cNvPr id="3" name="">
             <a:extLst xmlns:a="http://schemas.openxmlformats.org/drawingml/2006/main">
               <a:ext uri="{FF2B5EF4-FFF2-40B4-BE49-F238E27FC236}">
-                <a16:creationId xmlns:a16="http://schemas.microsoft.com/office/drawing/2014/main" id="{DF43C050-F034-428C-9D92-7B818989FFF9}"/>
+                <a16:creationId xmlns:a16="http://schemas.microsoft.com/office/drawing/2014/main" id="{26F3E9C7-6AC5-4E40-B664-B323C1BA5CEA}"/>
               </a:ext>
             </a:extLst>
           </p:cNvPr>
@@ -4727,7 +3988,7 @@
                 <a:ea typeface="Arial"/>
                 <a:cs typeface="Arial"/>
               </a:rPr>
-              <a:t>A dollar sign means the value itself. A percent sign names a register. Parentheses mean memory at an address.</a:t>
+              <a:t>A uses the normal equation because E = 2.</a:t>
             </a:r>
           </a:p>
           <a:p xmlns:a="http://schemas.openxmlformats.org/drawingml/2006/main">
@@ -4755,7 +4016,7 @@
                 <a:ea typeface="Arial"/>
                 <a:cs typeface="Arial"/>
               </a:rPr>
-              <a:t>These are different even when the same digits appear.</a:t>
+              <a:t>B uses the subnormal equation because E = 0; there is no implied leading 1.</a:t>
             </a:r>
           </a:p>
         </p:txBody>
@@ -4765,7 +4026,7 @@
           <p:cNvPr id="4" name="">
             <a:extLst xmlns:a="http://schemas.openxmlformats.org/drawingml/2006/main">
               <a:ext uri="{FF2B5EF4-FFF2-40B4-BE49-F238E27FC236}">
-                <a16:creationId xmlns:a16="http://schemas.microsoft.com/office/drawing/2014/main" id="{6D6F29CD-5640-4BB8-A702-5F426F50E4F2}"/>
+                <a16:creationId xmlns:a16="http://schemas.microsoft.com/office/drawing/2014/main" id="{737C1F1B-87F6-43C2-BCA8-B1C729031D72}"/>
               </a:ext>
             </a:extLst>
           </p:cNvPr>
@@ -4812,7 +4073,7 @@
                 <a:ea typeface="Courier New"/>
                 <a:cs typeface="Courier New"/>
               </a:rPr>
-              <a:t>$8        literal 8</a:t>
+              <a:t>A. 0 | 010 | 100</a:t>
             </a:r>
           </a:p>
           <a:p xmlns:a="http://schemas.openxmlformats.org/drawingml/2006/main">
@@ -4835,7 +4096,12 @@
                 <a:ea typeface="Courier New"/>
                 <a:cs typeface="Courier New"/>
               </a:rPr>
-              <a:t>%rax      value in rax</a:t>
+              <a:t>   (1 + 4/8) × 2⁻¹ = 3/4</a:t>
+            </a:r>
+          </a:p>
+          <a:p xmlns:a="http://schemas.openxmlformats.org/drawingml/2006/main">
+            <a:r>
+              <a:t/>
             </a:r>
           </a:p>
           <a:p xmlns:a="http://schemas.openxmlformats.org/drawingml/2006/main">
@@ -4858,7 +4124,7 @@
                 <a:ea typeface="Courier New"/>
                 <a:cs typeface="Courier New"/>
               </a:rPr>
-              <a:t>(%rax)    value at address in rax</a:t>
+              <a:t>B. 0 | 000 | 011</a:t>
             </a:r>
           </a:p>
           <a:p xmlns:a="http://schemas.openxmlformats.org/drawingml/2006/main">
@@ -4881,58 +4147,7 @@
                 <a:ea typeface="Courier New"/>
                 <a:cs typeface="Courier New"/>
               </a:rPr>
-              <a:t>8(%rax)   value 8 bytes later</a:t>
-            </a:r>
-          </a:p>
-          <a:p xmlns:a="http://schemas.openxmlformats.org/drawingml/2006/main">
-            <a:r>
-              <a:t/>
-            </a:r>
-          </a:p>
-          <a:p xmlns:a="http://schemas.openxmlformats.org/drawingml/2006/main">
-            <a:pPr>
-              <a:defRPr sz="1650" b="0">
-                <a:solidFill>
-                  <a:srgbClr val="A7F3D0"/>
-                </a:solidFill>
-                <a:latin typeface="Courier New"/>
-                <a:ea typeface="Courier New"/>
-                <a:cs typeface="Courier New"/>
-              </a:defRPr>
-            </a:pPr>
-            <a:r>
-              <a:rPr sz="1650" b="0">
-                <a:solidFill>
-                  <a:srgbClr val="A7F3D0"/>
-                </a:solidFill>
-                <a:latin typeface="Courier New"/>
-                <a:ea typeface="Courier New"/>
-                <a:cs typeface="Courier New"/>
-              </a:rPr>
-              <a:t>If %rax = &amp;x and x = 42:</a:t>
-            </a:r>
-          </a:p>
-          <a:p xmlns:a="http://schemas.openxmlformats.org/drawingml/2006/main">
-            <a:pPr>
-              <a:defRPr sz="1650" b="0">
-                <a:solidFill>
-                  <a:srgbClr val="A7F3D0"/>
-                </a:solidFill>
-                <a:latin typeface="Courier New"/>
-                <a:ea typeface="Courier New"/>
-                <a:cs typeface="Courier New"/>
-              </a:defRPr>
-            </a:pPr>
-            <a:r>
-              <a:rPr sz="1650" b="0">
-                <a:solidFill>
-                  <a:srgbClr val="A7F3D0"/>
-                </a:solidFill>
-                <a:latin typeface="Courier New"/>
-                <a:ea typeface="Courier New"/>
-                <a:cs typeface="Courier New"/>
-              </a:rPr>
-              <a:t>movq (%rax), %rbx → rbx = 42</a:t>
+              <a:t>   (3/8) × 2⁻² = 3/32</a:t>
             </a:r>
           </a:p>
         </p:txBody>
@@ -4942,7 +4157,7 @@
           <p:cNvPr id="5" name="">
             <a:extLst xmlns:a="http://schemas.openxmlformats.org/drawingml/2006/main">
               <a:ext uri="{FF2B5EF4-FFF2-40B4-BE49-F238E27FC236}">
-                <a16:creationId xmlns:a16="http://schemas.microsoft.com/office/drawing/2014/main" id="{3D6D84AF-4ADF-483C-8832-27D026823113}"/>
+                <a16:creationId xmlns:a16="http://schemas.microsoft.com/office/drawing/2014/main" id="{9DAD2664-9B32-4402-A088-C1DEBD68E3CD}"/>
               </a:ext>
             </a:extLst>
           </p:cNvPr>
@@ -4989,7 +4204,7 @@
                 <a:ea typeface="Arial"/>
                 <a:cs typeface="Arial"/>
               </a:rPr>
-              <a:t>Parentheses read memory; without them, the register value itself is used.</a:t>
+              <a:t>If the answer seems surprising, decode the same fields back into the formula.</a:t>
             </a:r>
           </a:p>
         </p:txBody>
@@ -4999,7 +4214,7 @@
           <p:cNvPr id="6" name="">
             <a:extLst xmlns:a="http://schemas.openxmlformats.org/drawingml/2006/main">
               <a:ext uri="{FF2B5EF4-FFF2-40B4-BE49-F238E27FC236}">
-                <a16:creationId xmlns:a16="http://schemas.microsoft.com/office/drawing/2014/main" id="{6830BA37-F4FF-4AE7-9BB9-7AACBAAC03A7}"/>
+                <a16:creationId xmlns:a16="http://schemas.microsoft.com/office/drawing/2014/main" id="{DBE61FAB-FD81-4893-85F8-90700B31187C}"/>
               </a:ext>
             </a:extLst>
           </p:cNvPr>
@@ -5046,7 +4261,7 @@
                 <a:ea typeface="Courier New"/>
                 <a:cs typeface="Courier New"/>
               </a:rPr>
-              <a:t>12 / 26</a:t>
+              <a:t>12 / 17</a:t>
             </a:r>
           </a:p>
         </p:txBody>
@@ -5054,7 +4269,7 @@
     </p:spTree>
     <p:extLst>
       <p:ext uri="{BB962C8B-B14F-4D97-AF65-F5344CB8AC3E}">
-        <p14:creationId xmlns:p14="http://schemas.microsoft.com/office/powerpoint/2010/main" val="521665453"/>
+        <p14:creationId xmlns:p14="http://schemas.microsoft.com/office/powerpoint/2010/main" val="1502731382"/>
       </p:ext>
     </p:extLst>
   </p:cSld>
@@ -5085,7 +4300,7 @@
           <p:cNvPr id="7" name="">
             <a:extLst xmlns:a="http://schemas.openxmlformats.org/drawingml/2006/main">
               <a:ext uri="{FF2B5EF4-FFF2-40B4-BE49-F238E27FC236}">
-                <a16:creationId xmlns:a16="http://schemas.microsoft.com/office/drawing/2014/main" id="{3229F7C7-FF20-4A6B-93AA-93BC40A26C3D}"/>
+                <a16:creationId xmlns:a16="http://schemas.microsoft.com/office/drawing/2014/main" id="{35A724E8-02D1-4C78-A9D3-AE6AD6E2D594}"/>
               </a:ext>
             </a:extLst>
           </p:cNvPr>
@@ -5132,7 +4347,7 @@
                 <a:ea typeface="Courier New"/>
                 <a:cs typeface="Courier New"/>
               </a:rPr>
-              <a:t>TRY IT · 1 MINUTE</a:t>
+              <a:t>FLOATING POINT · PRACTICE</a:t>
             </a:r>
           </a:p>
         </p:txBody>
@@ -5142,7 +4357,7 @@
           <p:cNvPr id="2" name="">
             <a:extLst xmlns:a="http://schemas.openxmlformats.org/drawingml/2006/main">
               <a:ext uri="{FF2B5EF4-FFF2-40B4-BE49-F238E27FC236}">
-                <a16:creationId xmlns:a16="http://schemas.microsoft.com/office/drawing/2014/main" id="{8DCE8B5F-0DEC-42AF-90D7-EB9A8DD1D455}"/>
+                <a16:creationId xmlns:a16="http://schemas.microsoft.com/office/drawing/2014/main" id="{D68140D5-AD40-4B2D-9276-45B94835A98B}"/>
               </a:ext>
             </a:extLst>
           </p:cNvPr>
@@ -5189,7 +4404,7 @@
                 <a:ea typeface="Arial"/>
                 <a:cs typeface="Arial"/>
               </a:rPr>
-              <a:t>Trace two instructions</a:t>
+              <a:t>Your turn: classify two ratios</a:t>
             </a:r>
           </a:p>
         </p:txBody>
@@ -5199,7 +4414,7 @@
           <p:cNvPr id="3" name="">
             <a:extLst xmlns:a="http://schemas.openxmlformats.org/drawingml/2006/main">
               <a:ext uri="{FF2B5EF4-FFF2-40B4-BE49-F238E27FC236}">
-                <a16:creationId xmlns:a16="http://schemas.microsoft.com/office/drawing/2014/main" id="{85D3B046-77ED-4D0E-9DE2-20A38DC889A7}"/>
+                <a16:creationId xmlns:a16="http://schemas.microsoft.com/office/drawing/2014/main" id="{AA9609DC-0513-451F-B1A4-CD75618D8A9F}"/>
               </a:ext>
             </a:extLst>
           </p:cNvPr>
@@ -5246,7 +4461,7 @@
                 <a:ea typeface="Arial"/>
                 <a:cs typeface="Arial"/>
               </a:rPr>
-              <a:t>Start with %rax = 100 and %rbx = 7.</a:t>
+              <a:t>Use the same practice format: 3 exponent bits, bias 3, and 3 fraction bits.</a:t>
             </a:r>
           </a:p>
           <a:p xmlns:a="http://schemas.openxmlformats.org/drawingml/2006/main">
@@ -5274,35 +4489,7 @@
                 <a:ea typeface="Arial"/>
                 <a:cs typeface="Arial"/>
               </a:rPr>
-              <a:t>What is in each register after these lines?</a:t>
-            </a:r>
-          </a:p>
-          <a:p xmlns:a="http://schemas.openxmlformats.org/drawingml/2006/main">
-            <a:r>
-              <a:t/>
-            </a:r>
-          </a:p>
-          <a:p xmlns:a="http://schemas.openxmlformats.org/drawingml/2006/main">
-            <a:pPr>
-              <a:defRPr sz="1950" b="0">
-                <a:solidFill>
-                  <a:srgbClr val="D4D4D8"/>
-                </a:solidFill>
-                <a:latin typeface="Arial"/>
-                <a:ea typeface="Arial"/>
-                <a:cs typeface="Arial"/>
-              </a:defRPr>
-            </a:pPr>
-            <a:r>
-              <a:rPr sz="1950" b="0">
-                <a:solidFill>
-                  <a:srgbClr val="D4D4D8"/>
-                </a:solidFill>
-                <a:latin typeface="Arial"/>
-                <a:ea typeface="Arial"/>
-                <a:cs typeface="Arial"/>
-              </a:rPr>
-              <a:t>Which register changed on each line?</a:t>
+              <a:t>For each ratio, decide normal or subnormal, then find E and F.</a:t>
             </a:r>
           </a:p>
         </p:txBody>
@@ -5312,7 +4499,7 @@
           <p:cNvPr id="4" name="">
             <a:extLst xmlns:a="http://schemas.openxmlformats.org/drawingml/2006/main">
               <a:ext uri="{FF2B5EF4-FFF2-40B4-BE49-F238E27FC236}">
-                <a16:creationId xmlns:a16="http://schemas.microsoft.com/office/drawing/2014/main" id="{6E496FDC-713C-4C83-9912-F131C0A89FC7}"/>
+                <a16:creationId xmlns:a16="http://schemas.microsoft.com/office/drawing/2014/main" id="{37A2E272-B675-4F8B-8D9A-1DD0C7D3E885}"/>
               </a:ext>
             </a:extLst>
           </p:cNvPr>
@@ -5359,7 +4546,7 @@
                 <a:ea typeface="Courier New"/>
                 <a:cs typeface="Courier New"/>
               </a:rPr>
-              <a:t>movq %rbx, %rax</a:t>
+              <a:t>A. 3/2</a:t>
             </a:r>
           </a:p>
           <a:p xmlns:a="http://schemas.openxmlformats.org/drawingml/2006/main">
@@ -5382,7 +4569,30 @@
                 <a:ea typeface="Courier New"/>
                 <a:cs typeface="Courier New"/>
               </a:rPr>
-              <a:t>addq $3, %rax</a:t>
+              <a:t>   normal or subnormal?</a:t>
+            </a:r>
+          </a:p>
+          <a:p xmlns:a="http://schemas.openxmlformats.org/drawingml/2006/main">
+            <a:pPr>
+              <a:defRPr sz="1650" b="0">
+                <a:solidFill>
+                  <a:srgbClr val="A7F3D0"/>
+                </a:solidFill>
+                <a:latin typeface="Courier New"/>
+                <a:ea typeface="Courier New"/>
+                <a:cs typeface="Courier New"/>
+              </a:defRPr>
+            </a:pPr>
+            <a:r>
+              <a:rPr sz="1650" b="0">
+                <a:solidFill>
+                  <a:srgbClr val="A7F3D0"/>
+                </a:solidFill>
+                <a:latin typeface="Courier New"/>
+                <a:ea typeface="Courier New"/>
+                <a:cs typeface="Courier New"/>
+              </a:rPr>
+              <a:t>   E = ?   F = ?</a:t>
             </a:r>
           </a:p>
           <a:p xmlns:a="http://schemas.openxmlformats.org/drawingml/2006/main">
@@ -5410,7 +4620,7 @@
                 <a:ea typeface="Courier New"/>
                 <a:cs typeface="Courier New"/>
               </a:rPr>
-              <a:t>%rax = ?</a:t>
+              <a:t>B. 3/16</a:t>
             </a:r>
           </a:p>
           <a:p xmlns:a="http://schemas.openxmlformats.org/drawingml/2006/main">
@@ -5433,7 +4643,30 @@
                 <a:ea typeface="Courier New"/>
                 <a:cs typeface="Courier New"/>
               </a:rPr>
-              <a:t>%rbx = ?</a:t>
+              <a:t>   normal or subnormal?</a:t>
+            </a:r>
+          </a:p>
+          <a:p xmlns:a="http://schemas.openxmlformats.org/drawingml/2006/main">
+            <a:pPr>
+              <a:defRPr sz="1650" b="0">
+                <a:solidFill>
+                  <a:srgbClr val="A7F3D0"/>
+                </a:solidFill>
+                <a:latin typeface="Courier New"/>
+                <a:ea typeface="Courier New"/>
+                <a:cs typeface="Courier New"/>
+              </a:defRPr>
+            </a:pPr>
+            <a:r>
+              <a:rPr sz="1650" b="0">
+                <a:solidFill>
+                  <a:srgbClr val="A7F3D0"/>
+                </a:solidFill>
+                <a:latin typeface="Courier New"/>
+                <a:ea typeface="Courier New"/>
+                <a:cs typeface="Courier New"/>
+              </a:rPr>
+              <a:t>   E = ?   F = ?</a:t>
             </a:r>
           </a:p>
         </p:txBody>
@@ -5443,7 +4676,7 @@
           <p:cNvPr id="5" name="">
             <a:extLst xmlns:a="http://schemas.openxmlformats.org/drawingml/2006/main">
               <a:ext uri="{FF2B5EF4-FFF2-40B4-BE49-F238E27FC236}">
-                <a16:creationId xmlns:a16="http://schemas.microsoft.com/office/drawing/2014/main" id="{EAEE263D-A398-4386-82EE-A730F003D09D}"/>
+                <a16:creationId xmlns:a16="http://schemas.microsoft.com/office/drawing/2014/main" id="{8F900304-F8E7-4C1C-B3A0-F1A0DD604211}"/>
               </a:ext>
             </a:extLst>
           </p:cNvPr>
@@ -5490,7 +4723,7 @@
                 <a:ea typeface="Arial"/>
                 <a:cs typeface="Arial"/>
               </a:rPr>
-              <a:t>Read each line left to right: source, then destination.</a:t>
+              <a:t>Compare each value with the smallest normal, 1/4, before finding bits.</a:t>
             </a:r>
           </a:p>
         </p:txBody>
@@ -5500,7 +4733,7 @@
           <p:cNvPr id="6" name="">
             <a:extLst xmlns:a="http://schemas.openxmlformats.org/drawingml/2006/main">
               <a:ext uri="{FF2B5EF4-FFF2-40B4-BE49-F238E27FC236}">
-                <a16:creationId xmlns:a16="http://schemas.microsoft.com/office/drawing/2014/main" id="{0FE58891-C67E-4CED-A622-D4AC431BD876}"/>
+                <a16:creationId xmlns:a16="http://schemas.microsoft.com/office/drawing/2014/main" id="{16200DCD-0F16-4BE6-9538-9FDAF86C958E}"/>
               </a:ext>
             </a:extLst>
           </p:cNvPr>
@@ -5547,7 +4780,7 @@
                 <a:ea typeface="Courier New"/>
                 <a:cs typeface="Courier New"/>
               </a:rPr>
-              <a:t>13 / 26</a:t>
+              <a:t>13 / 17</a:t>
             </a:r>
           </a:p>
         </p:txBody>
@@ -5555,7 +4788,7 @@
     </p:spTree>
     <p:extLst>
       <p:ext uri="{BB962C8B-B14F-4D97-AF65-F5344CB8AC3E}">
-        <p14:creationId xmlns:p14="http://schemas.microsoft.com/office/powerpoint/2010/main" val="786613741"/>
+        <p14:creationId xmlns:p14="http://schemas.microsoft.com/office/powerpoint/2010/main" val="2079659254"/>
       </p:ext>
     </p:extLst>
   </p:cSld>
@@ -5586,7 +4819,7 @@
           <p:cNvPr id="7" name="">
             <a:extLst xmlns:a="http://schemas.openxmlformats.org/drawingml/2006/main">
               <a:ext uri="{FF2B5EF4-FFF2-40B4-BE49-F238E27FC236}">
-                <a16:creationId xmlns:a16="http://schemas.microsoft.com/office/drawing/2014/main" id="{A42604C2-D25B-462A-8C27-E80B58D26658}"/>
+                <a16:creationId xmlns:a16="http://schemas.microsoft.com/office/drawing/2014/main" id="{D25A2A70-779E-4A39-9AD5-537DDE3C5B7A}"/>
               </a:ext>
             </a:extLst>
           </p:cNvPr>
@@ -5633,7 +4866,7 @@
                 <a:ea typeface="Courier New"/>
                 <a:cs typeface="Courier New"/>
               </a:rPr>
-              <a:t>WORKED EXAMPLE</a:t>
+              <a:t>FLOATING POINT · CHECK</a:t>
             </a:r>
           </a:p>
         </p:txBody>
@@ -5643,7 +4876,7 @@
           <p:cNvPr id="2" name="">
             <a:extLst xmlns:a="http://schemas.openxmlformats.org/drawingml/2006/main">
               <a:ext uri="{FF2B5EF4-FFF2-40B4-BE49-F238E27FC236}">
-                <a16:creationId xmlns:a16="http://schemas.microsoft.com/office/drawing/2014/main" id="{81DFCEDF-D0AE-4988-8761-FC900BC9B821}"/>
+                <a16:creationId xmlns:a16="http://schemas.microsoft.com/office/drawing/2014/main" id="{2F2733A3-E106-4C90-B097-BE7CB4577892}"/>
               </a:ext>
             </a:extLst>
           </p:cNvPr>
@@ -5690,7 +4923,7 @@
                 <a:ea typeface="Arial"/>
                 <a:cs typeface="Arial"/>
               </a:rPr>
-              <a:t>Trace answer</a:t>
+              <a:t>Practice answers</a:t>
             </a:r>
           </a:p>
         </p:txBody>
@@ -5700,7 +4933,7 @@
           <p:cNvPr id="3" name="">
             <a:extLst xmlns:a="http://schemas.openxmlformats.org/drawingml/2006/main">
               <a:ext uri="{FF2B5EF4-FFF2-40B4-BE49-F238E27FC236}">
-                <a16:creationId xmlns:a16="http://schemas.microsoft.com/office/drawing/2014/main" id="{91E7D4EA-B5C9-43C7-A040-CAA9E35C8272}"/>
+                <a16:creationId xmlns:a16="http://schemas.microsoft.com/office/drawing/2014/main" id="{53BB6D32-B5C1-4BFB-8D41-7B7055B1A606}"/>
               </a:ext>
             </a:extLst>
           </p:cNvPr>
@@ -5747,7 +4980,7 @@
                 <a:ea typeface="Arial"/>
                 <a:cs typeface="Arial"/>
               </a:rPr>
-              <a:t>The first line copies 7 into %rax. The second adds 3 to that copy.</a:t>
+              <a:t>3/2 = 1.100₂ × 2⁰, so it is normal.</a:t>
             </a:r>
           </a:p>
           <a:p xmlns:a="http://schemas.openxmlformats.org/drawingml/2006/main">
@@ -5775,7 +5008,7 @@
                 <a:ea typeface="Arial"/>
                 <a:cs typeface="Arial"/>
               </a:rPr>
-              <a:t>%rbx never changes.</a:t>
+              <a:t>3/16 is below 1/4, so it is subnormal. Since value = F/32, F = 6.</a:t>
             </a:r>
           </a:p>
         </p:txBody>
@@ -5785,7 +5018,7 @@
           <p:cNvPr id="4" name="">
             <a:extLst xmlns:a="http://schemas.openxmlformats.org/drawingml/2006/main">
               <a:ext uri="{FF2B5EF4-FFF2-40B4-BE49-F238E27FC236}">
-                <a16:creationId xmlns:a16="http://schemas.microsoft.com/office/drawing/2014/main" id="{D3CFEF06-0807-4B72-B454-E110344C17F3}"/>
+                <a16:creationId xmlns:a16="http://schemas.microsoft.com/office/drawing/2014/main" id="{CD85FA7D-EF72-4F2A-85B4-517634BC5BE7}"/>
               </a:ext>
             </a:extLst>
           </p:cNvPr>
@@ -5832,7 +5065,7 @@
                 <a:ea typeface="Courier New"/>
                 <a:cs typeface="Courier New"/>
               </a:rPr>
-              <a:t>Initially       rax = 100   rbx = 7</a:t>
+              <a:t>A. 3/2</a:t>
             </a:r>
           </a:p>
           <a:p xmlns:a="http://schemas.openxmlformats.org/drawingml/2006/main">
@@ -5855,7 +5088,7 @@
                 <a:ea typeface="Courier New"/>
                 <a:cs typeface="Courier New"/>
               </a:rPr>
-              <a:t>movq %rbx,%rax  rax =   7   rbx = 7</a:t>
+              <a:t>   E = 3 = 011₂</a:t>
             </a:r>
           </a:p>
           <a:p xmlns:a="http://schemas.openxmlformats.org/drawingml/2006/main">
@@ -5878,7 +5111,127 @@
                 <a:ea typeface="Courier New"/>
                 <a:cs typeface="Courier New"/>
               </a:rPr>
-              <a:t>addq $3,%rax   rax =  10   rbx = 7</a:t>
+              <a:t>   F = 4 = 100₂</a:t>
+            </a:r>
+          </a:p>
+          <a:p xmlns:a="http://schemas.openxmlformats.org/drawingml/2006/main">
+            <a:pPr>
+              <a:defRPr sz="1650" b="0">
+                <a:solidFill>
+                  <a:srgbClr val="A7F3D0"/>
+                </a:solidFill>
+                <a:latin typeface="Courier New"/>
+                <a:ea typeface="Courier New"/>
+                <a:cs typeface="Courier New"/>
+              </a:defRPr>
+            </a:pPr>
+            <a:r>
+              <a:rPr sz="1650" b="0">
+                <a:solidFill>
+                  <a:srgbClr val="A7F3D0"/>
+                </a:solidFill>
+                <a:latin typeface="Courier New"/>
+                <a:ea typeface="Courier New"/>
+                <a:cs typeface="Courier New"/>
+              </a:rPr>
+              <a:t>   Check: (1 + 4/8) × 1 = 3/2</a:t>
+            </a:r>
+          </a:p>
+          <a:p xmlns:a="http://schemas.openxmlformats.org/drawingml/2006/main">
+            <a:r>
+              <a:t/>
+            </a:r>
+          </a:p>
+          <a:p xmlns:a="http://schemas.openxmlformats.org/drawingml/2006/main">
+            <a:pPr>
+              <a:defRPr sz="1650" b="0">
+                <a:solidFill>
+                  <a:srgbClr val="A7F3D0"/>
+                </a:solidFill>
+                <a:latin typeface="Courier New"/>
+                <a:ea typeface="Courier New"/>
+                <a:cs typeface="Courier New"/>
+              </a:defRPr>
+            </a:pPr>
+            <a:r>
+              <a:rPr sz="1650" b="0">
+                <a:solidFill>
+                  <a:srgbClr val="A7F3D0"/>
+                </a:solidFill>
+                <a:latin typeface="Courier New"/>
+                <a:ea typeface="Courier New"/>
+                <a:cs typeface="Courier New"/>
+              </a:rPr>
+              <a:t>B. 3/16</a:t>
+            </a:r>
+          </a:p>
+          <a:p xmlns:a="http://schemas.openxmlformats.org/drawingml/2006/main">
+            <a:pPr>
+              <a:defRPr sz="1650" b="0">
+                <a:solidFill>
+                  <a:srgbClr val="A7F3D0"/>
+                </a:solidFill>
+                <a:latin typeface="Courier New"/>
+                <a:ea typeface="Courier New"/>
+                <a:cs typeface="Courier New"/>
+              </a:defRPr>
+            </a:pPr>
+            <a:r>
+              <a:rPr sz="1650" b="0">
+                <a:solidFill>
+                  <a:srgbClr val="A7F3D0"/>
+                </a:solidFill>
+                <a:latin typeface="Courier New"/>
+                <a:ea typeface="Courier New"/>
+                <a:cs typeface="Courier New"/>
+              </a:rPr>
+              <a:t>   E = 0 = 000₂</a:t>
+            </a:r>
+          </a:p>
+          <a:p xmlns:a="http://schemas.openxmlformats.org/drawingml/2006/main">
+            <a:pPr>
+              <a:defRPr sz="1650" b="0">
+                <a:solidFill>
+                  <a:srgbClr val="A7F3D0"/>
+                </a:solidFill>
+                <a:latin typeface="Courier New"/>
+                <a:ea typeface="Courier New"/>
+                <a:cs typeface="Courier New"/>
+              </a:defRPr>
+            </a:pPr>
+            <a:r>
+              <a:rPr sz="1650" b="0">
+                <a:solidFill>
+                  <a:srgbClr val="A7F3D0"/>
+                </a:solidFill>
+                <a:latin typeface="Courier New"/>
+                <a:ea typeface="Courier New"/>
+                <a:cs typeface="Courier New"/>
+              </a:rPr>
+              <a:t>   F = 6 = 110₂</a:t>
+            </a:r>
+          </a:p>
+          <a:p xmlns:a="http://schemas.openxmlformats.org/drawingml/2006/main">
+            <a:pPr>
+              <a:defRPr sz="1650" b="0">
+                <a:solidFill>
+                  <a:srgbClr val="A7F3D0"/>
+                </a:solidFill>
+                <a:latin typeface="Courier New"/>
+                <a:ea typeface="Courier New"/>
+                <a:cs typeface="Courier New"/>
+              </a:defRPr>
+            </a:pPr>
+            <a:r>
+              <a:rPr sz="1650" b="0">
+                <a:solidFill>
+                  <a:srgbClr val="A7F3D0"/>
+                </a:solidFill>
+                <a:latin typeface="Courier New"/>
+                <a:ea typeface="Courier New"/>
+                <a:cs typeface="Courier New"/>
+              </a:rPr>
+              <a:t>   Check: 6/32 = 3/16</a:t>
             </a:r>
           </a:p>
         </p:txBody>
@@ -5888,7 +5241,7 @@
           <p:cNvPr id="5" name="">
             <a:extLst xmlns:a="http://schemas.openxmlformats.org/drawingml/2006/main">
               <a:ext uri="{FF2B5EF4-FFF2-40B4-BE49-F238E27FC236}">
-                <a16:creationId xmlns:a16="http://schemas.microsoft.com/office/drawing/2014/main" id="{251128FE-BBF9-4DF3-91A2-91B5057A3E39}"/>
+                <a16:creationId xmlns:a16="http://schemas.microsoft.com/office/drawing/2014/main" id="{09DD94A5-8CF6-4CC6-9FAF-1AAE9F86C651}"/>
               </a:ext>
             </a:extLst>
           </p:cNvPr>
@@ -5935,7 +5288,7 @@
                 <a:ea typeface="Arial"/>
                 <a:cs typeface="Arial"/>
               </a:rPr>
-              <a:t>A move copies a value; it does not erase the source.</a:t>
+              <a:t>A fraction can be exactly representable in one format and not another.</a:t>
             </a:r>
           </a:p>
         </p:txBody>
@@ -5945,7 +5298,7 @@
           <p:cNvPr id="6" name="">
             <a:extLst xmlns:a="http://schemas.openxmlformats.org/drawingml/2006/main">
               <a:ext uri="{FF2B5EF4-FFF2-40B4-BE49-F238E27FC236}">
-                <a16:creationId xmlns:a16="http://schemas.microsoft.com/office/drawing/2014/main" id="{B743A760-0939-436E-9313-D31B89A511B7}"/>
+                <a16:creationId xmlns:a16="http://schemas.microsoft.com/office/drawing/2014/main" id="{BEB8226B-AC16-4616-9E79-3B5C231B3962}"/>
               </a:ext>
             </a:extLst>
           </p:cNvPr>
@@ -5992,7 +5345,7 @@
                 <a:ea typeface="Courier New"/>
                 <a:cs typeface="Courier New"/>
               </a:rPr>
-              <a:t>14 / 26</a:t>
+              <a:t>14 / 17</a:t>
             </a:r>
           </a:p>
         </p:txBody>
@@ -6000,7 +5353,7 @@
     </p:spTree>
     <p:extLst>
       <p:ext uri="{BB962C8B-B14F-4D97-AF65-F5344CB8AC3E}">
-        <p14:creationId xmlns:p14="http://schemas.microsoft.com/office/powerpoint/2010/main" val="365054280"/>
+        <p14:creationId xmlns:p14="http://schemas.microsoft.com/office/powerpoint/2010/main" val="1590754296"/>
       </p:ext>
     </p:extLst>
   </p:cSld>
@@ -6031,7 +5384,7 @@
           <p:cNvPr id="7" name="">
             <a:extLst xmlns:a="http://schemas.openxmlformats.org/drawingml/2006/main">
               <a:ext uri="{FF2B5EF4-FFF2-40B4-BE49-F238E27FC236}">
-                <a16:creationId xmlns:a16="http://schemas.microsoft.com/office/drawing/2014/main" id="{BA01EE65-6C32-4424-AFFE-63C84390671D}"/>
+                <a16:creationId xmlns:a16="http://schemas.microsoft.com/office/drawing/2014/main" id="{93E43C1D-677A-4484-B42E-435337BCED51}"/>
               </a:ext>
             </a:extLst>
           </p:cNvPr>
@@ -6078,7 +5431,7 @@
                 <a:ea typeface="Courier New"/>
                 <a:cs typeface="Courier New"/>
               </a:rPr>
-              <a:t>LECTURE 6–7 · REGISTER NAMES</a:t>
+              <a:t>FLOATING POINT · PRECISION</a:t>
             </a:r>
           </a:p>
         </p:txBody>
@@ -6088,7 +5441,7 @@
           <p:cNvPr id="2" name="">
             <a:extLst xmlns:a="http://schemas.openxmlformats.org/drawingml/2006/main">
               <a:ext uri="{FF2B5EF4-FFF2-40B4-BE49-F238E27FC236}">
-                <a16:creationId xmlns:a16="http://schemas.microsoft.com/office/drawing/2014/main" id="{9C560F74-8E4F-4186-AAD5-55BDBA0FE94E}"/>
+                <a16:creationId xmlns:a16="http://schemas.microsoft.com/office/drawing/2014/main" id="{074B736B-6CBC-48AB-BB9C-B94B56E89F35}"/>
               </a:ext>
             </a:extLst>
           </p:cNvPr>
@@ -6135,7 +5488,7 @@
                 <a:ea typeface="Arial"/>
                 <a:cs typeface="Arial"/>
               </a:rPr>
-              <a:t>Registers have different widths</a:t>
+              <a:t>Some ratios need rounding</a:t>
             </a:r>
           </a:p>
         </p:txBody>
@@ -6145,7 +5498,7 @@
           <p:cNvPr id="3" name="">
             <a:extLst xmlns:a="http://schemas.openxmlformats.org/drawingml/2006/main">
               <a:ext uri="{FF2B5EF4-FFF2-40B4-BE49-F238E27FC236}">
-                <a16:creationId xmlns:a16="http://schemas.microsoft.com/office/drawing/2014/main" id="{6D27A478-D570-44CD-8ECF-174738BD0A4C}"/>
+                <a16:creationId xmlns:a16="http://schemas.microsoft.com/office/drawing/2014/main" id="{31BF5015-85C0-4422-9A8D-3AB1598AB1B5}"/>
               </a:ext>
             </a:extLst>
           </p:cNvPr>
@@ -6192,7 +5545,7 @@
                 <a:ea typeface="Arial"/>
                 <a:cs typeface="Arial"/>
               </a:rPr>
-              <a:t>%rax is 64 bits. %eax names its low 32 bits; %ax names the low 16; %al names the low 8.</a:t>
+              <a:t>Only eight fraction patterns fit in three bits. A ratio such as 1/3 has a repeating binary expansion and cannot be stored exactly.</a:t>
             </a:r>
           </a:p>
           <a:p xmlns:a="http://schemas.openxmlformats.org/drawingml/2006/main">
@@ -6220,7 +5573,7 @@
                 <a:ea typeface="Arial"/>
                 <a:cs typeface="Arial"/>
               </a:rPr>
-              <a:t>Writing %eax zeroes the upper 32 bits of %rax. Reading %eax does not change %rax.</a:t>
+              <a:t>The required rounding rule decides which nearby value to store.</a:t>
             </a:r>
           </a:p>
         </p:txBody>
@@ -6230,7 +5583,7 @@
           <p:cNvPr id="4" name="">
             <a:extLst xmlns:a="http://schemas.openxmlformats.org/drawingml/2006/main">
               <a:ext uri="{FF2B5EF4-FFF2-40B4-BE49-F238E27FC236}">
-                <a16:creationId xmlns:a16="http://schemas.microsoft.com/office/drawing/2014/main" id="{75B3F5E8-CEA9-419D-9D64-965FF9412C26}"/>
+                <a16:creationId xmlns:a16="http://schemas.microsoft.com/office/drawing/2014/main" id="{442E6650-2F07-46E8-968E-92CAC81BA173}"/>
               </a:ext>
             </a:extLst>
           </p:cNvPr>
@@ -6277,7 +5630,12 @@
                 <a:ea typeface="Courier New"/>
                 <a:cs typeface="Courier New"/>
               </a:rPr>
-              <a:t>movq $-1, %rax</a:t>
+              <a:t>1/3 = 1.010101…₂ × 2⁻²</a:t>
+            </a:r>
+          </a:p>
+          <a:p xmlns:a="http://schemas.openxmlformats.org/drawingml/2006/main">
+            <a:r>
+              <a:t/>
             </a:r>
           </a:p>
           <a:p xmlns:a="http://schemas.openxmlformats.org/drawingml/2006/main">
@@ -6300,7 +5658,53 @@
                 <a:ea typeface="Courier New"/>
                 <a:cs typeface="Courier New"/>
               </a:rPr>
-              <a:t>movl $1, %eax</a:t>
+              <a:t>Nearby values in this format:</a:t>
+            </a:r>
+          </a:p>
+          <a:p xmlns:a="http://schemas.openxmlformats.org/drawingml/2006/main">
+            <a:pPr>
+              <a:defRPr sz="1650" b="0">
+                <a:solidFill>
+                  <a:srgbClr val="A7F3D0"/>
+                </a:solidFill>
+                <a:latin typeface="Courier New"/>
+                <a:ea typeface="Courier New"/>
+                <a:cs typeface="Courier New"/>
+              </a:defRPr>
+            </a:pPr>
+            <a:r>
+              <a:rPr sz="1650" b="0">
+                <a:solidFill>
+                  <a:srgbClr val="A7F3D0"/>
+                </a:solidFill>
+                <a:latin typeface="Courier New"/>
+                <a:ea typeface="Courier New"/>
+                <a:cs typeface="Courier New"/>
+              </a:rPr>
+              <a:t>F = 010₂  →  5/16</a:t>
+            </a:r>
+          </a:p>
+          <a:p xmlns:a="http://schemas.openxmlformats.org/drawingml/2006/main">
+            <a:pPr>
+              <a:defRPr sz="1650" b="0">
+                <a:solidFill>
+                  <a:srgbClr val="A7F3D0"/>
+                </a:solidFill>
+                <a:latin typeface="Courier New"/>
+                <a:ea typeface="Courier New"/>
+                <a:cs typeface="Courier New"/>
+              </a:defRPr>
+            </a:pPr>
+            <a:r>
+              <a:rPr sz="1650" b="0">
+                <a:solidFill>
+                  <a:srgbClr val="A7F3D0"/>
+                </a:solidFill>
+                <a:latin typeface="Courier New"/>
+                <a:ea typeface="Courier New"/>
+                <a:cs typeface="Courier New"/>
+              </a:rPr>
+              <a:t>F = 011₂  →  11/32</a:t>
             </a:r>
           </a:p>
           <a:p xmlns:a="http://schemas.openxmlformats.org/drawingml/2006/main">
@@ -6328,58 +5732,7 @@
                 <a:ea typeface="Courier New"/>
                 <a:cs typeface="Courier New"/>
               </a:rPr>
-              <a:t>Now %rax = 0x0000000000000001</a:t>
-            </a:r>
-          </a:p>
-          <a:p xmlns:a="http://schemas.openxmlformats.org/drawingml/2006/main">
-            <a:r>
-              <a:t/>
-            </a:r>
-          </a:p>
-          <a:p xmlns:a="http://schemas.openxmlformats.org/drawingml/2006/main">
-            <a:pPr>
-              <a:defRPr sz="1650" b="0">
-                <a:solidFill>
-                  <a:srgbClr val="A7F3D0"/>
-                </a:solidFill>
-                <a:latin typeface="Courier New"/>
-                <a:ea typeface="Courier New"/>
-                <a:cs typeface="Courier New"/>
-              </a:defRPr>
-            </a:pPr>
-            <a:r>
-              <a:rPr sz="1650" b="0">
-                <a:solidFill>
-                  <a:srgbClr val="A7F3D0"/>
-                </a:solidFill>
-                <a:latin typeface="Courier New"/>
-                <a:ea typeface="Courier New"/>
-                <a:cs typeface="Courier New"/>
-              </a:rPr>
-              <a:t>movq  ↔  %rax  ↔  8 bytes</a:t>
-            </a:r>
-          </a:p>
-          <a:p xmlns:a="http://schemas.openxmlformats.org/drawingml/2006/main">
-            <a:pPr>
-              <a:defRPr sz="1650" b="0">
-                <a:solidFill>
-                  <a:srgbClr val="A7F3D0"/>
-                </a:solidFill>
-                <a:latin typeface="Courier New"/>
-                <a:ea typeface="Courier New"/>
-                <a:cs typeface="Courier New"/>
-              </a:defRPr>
-            </a:pPr>
-            <a:r>
-              <a:rPr sz="1650" b="0">
-                <a:solidFill>
-                  <a:srgbClr val="A7F3D0"/>
-                </a:solidFill>
-                <a:latin typeface="Courier New"/>
-                <a:ea typeface="Courier New"/>
-                <a:cs typeface="Courier New"/>
-              </a:rPr>
-              <a:t>movl  ↔  %eax  ↔  4 bytes</a:t>
+              <a:t>Neither is exactly 1/3.</a:t>
             </a:r>
           </a:p>
         </p:txBody>
@@ -6389,7 +5742,7 @@
           <p:cNvPr id="5" name="">
             <a:extLst xmlns:a="http://schemas.openxmlformats.org/drawingml/2006/main">
               <a:ext uri="{FF2B5EF4-FFF2-40B4-BE49-F238E27FC236}">
-                <a16:creationId xmlns:a16="http://schemas.microsoft.com/office/drawing/2014/main" id="{3BDB0F94-9BB2-4FA6-BBAB-19202E7EE0B0}"/>
+                <a16:creationId xmlns:a16="http://schemas.microsoft.com/office/drawing/2014/main" id="{7550F9BB-98E4-470C-A339-F30A270C656C}"/>
               </a:ext>
             </a:extLst>
           </p:cNvPr>
@@ -6436,7 +5789,7 @@
                 <a:ea typeface="Arial"/>
                 <a:cs typeface="Arial"/>
               </a:rPr>
-              <a:t>This zero-extension rule applies to 32-bit register destinations in x86-64.</a:t>
+              <a:t>Wait for the assignment’s rounding instructions before choosing a stored result.</a:t>
             </a:r>
           </a:p>
         </p:txBody>
@@ -6446,7 +5799,7 @@
           <p:cNvPr id="6" name="">
             <a:extLst xmlns:a="http://schemas.openxmlformats.org/drawingml/2006/main">
               <a:ext uri="{FF2B5EF4-FFF2-40B4-BE49-F238E27FC236}">
-                <a16:creationId xmlns:a16="http://schemas.microsoft.com/office/drawing/2014/main" id="{F2AA670B-4D08-4BB0-9FF0-9D7CCA4D9A42}"/>
+                <a16:creationId xmlns:a16="http://schemas.microsoft.com/office/drawing/2014/main" id="{73B702C8-3DF9-406E-8087-CF675ECCC2D1}"/>
               </a:ext>
             </a:extLst>
           </p:cNvPr>
@@ -6493,7 +5846,7 @@
                 <a:ea typeface="Courier New"/>
                 <a:cs typeface="Courier New"/>
               </a:rPr>
-              <a:t>15 / 26</a:t>
+              <a:t>15 / 17</a:t>
             </a:r>
           </a:p>
         </p:txBody>
@@ -6501,7 +5854,7 @@
     </p:spTree>
     <p:extLst>
       <p:ext uri="{BB962C8B-B14F-4D97-AF65-F5344CB8AC3E}">
-        <p14:creationId xmlns:p14="http://schemas.microsoft.com/office/powerpoint/2010/main" val="1190518523"/>
+        <p14:creationId xmlns:p14="http://schemas.microsoft.com/office/powerpoint/2010/main" val="1704851840"/>
       </p:ext>
     </p:extLst>
   </p:cSld>
@@ -6532,7 +5885,7 @@
           <p:cNvPr id="7" name="">
             <a:extLst xmlns:a="http://schemas.openxmlformats.org/drawingml/2006/main">
               <a:ext uri="{FF2B5EF4-FFF2-40B4-BE49-F238E27FC236}">
-                <a16:creationId xmlns:a16="http://schemas.microsoft.com/office/drawing/2014/main" id="{FC881573-EAFD-41CC-AA46-826EBCA6CD7B}"/>
+                <a16:creationId xmlns:a16="http://schemas.microsoft.com/office/drawing/2014/main" id="{0BCE7827-648B-4B62-AE80-F3CE9BFFD594}"/>
               </a:ext>
             </a:extLst>
           </p:cNvPr>
@@ -6579,7 +5932,7 @@
                 <a:ea typeface="Courier New"/>
                 <a:cs typeface="Courier New"/>
               </a:rPr>
-              <a:t>LECTURE 6–8 · ADDRESSES</a:t>
+              <a:t>FLOATING POINT · SPACING</a:t>
             </a:r>
           </a:p>
         </p:txBody>
@@ -6589,7 +5942,7 @@
           <p:cNvPr id="2" name="">
             <a:extLst xmlns:a="http://schemas.openxmlformats.org/drawingml/2006/main">
               <a:ext uri="{FF2B5EF4-FFF2-40B4-BE49-F238E27FC236}">
-                <a16:creationId xmlns:a16="http://schemas.microsoft.com/office/drawing/2014/main" id="{691F0FD0-C4D6-4AA6-90FB-C4C253C17396}"/>
+                <a16:creationId xmlns:a16="http://schemas.microsoft.com/office/drawing/2014/main" id="{E6B69FE5-5D95-4306-AAF0-9A70AD531613}"/>
               </a:ext>
             </a:extLst>
           </p:cNvPr>
@@ -6636,7 +5989,7 @@
                 <a:ea typeface="Arial"/>
                 <a:cs typeface="Arial"/>
               </a:rPr>
-              <a:t>Array indexing is byte arithmetic</a:t>
+              <a:t>Precision changes with scale</a:t>
             </a:r>
           </a:p>
         </p:txBody>
@@ -6646,7 +5999,7 @@
           <p:cNvPr id="3" name="">
             <a:extLst xmlns:a="http://schemas.openxmlformats.org/drawingml/2006/main">
               <a:ext uri="{FF2B5EF4-FFF2-40B4-BE49-F238E27FC236}">
-                <a16:creationId xmlns:a16="http://schemas.microsoft.com/office/drawing/2014/main" id="{79140A4F-A2DF-4CF6-81F3-03B77410E8E9}"/>
+                <a16:creationId xmlns:a16="http://schemas.microsoft.com/office/drawing/2014/main" id="{887FE9A9-E5DE-4BC1-94AD-59371BF9B78C}"/>
               </a:ext>
             </a:extLst>
           </p:cNvPr>
@@ -6693,7 +6046,7 @@
                 <a:ea typeface="Arial"/>
                 <a:cs typeface="Arial"/>
               </a:rPr>
-              <a:t>Memory addresses count bytes. For an int array, element i begins 4i bytes after the start when int is 4 bytes.</a:t>
+              <a:t>The same three fraction bits give eight values within each normal exponent range.</a:t>
             </a:r>
           </a:p>
           <a:p xmlns:a="http://schemas.openxmlformats.org/drawingml/2006/main">
@@ -6721,7 +6074,7 @@
                 <a:ea typeface="Arial"/>
                 <a:cs typeface="Arial"/>
               </a:rPr>
-              <a:t>The addressing form combines base + index × scale + displacement.</a:t>
+              <a:t>When the exponent increases by one, the distance between neighboring values doubles.</a:t>
             </a:r>
           </a:p>
         </p:txBody>
@@ -6731,7 +6084,7 @@
           <p:cNvPr id="4" name="">
             <a:extLst xmlns:a="http://schemas.openxmlformats.org/drawingml/2006/main">
               <a:ext uri="{FF2B5EF4-FFF2-40B4-BE49-F238E27FC236}">
-                <a16:creationId xmlns:a16="http://schemas.microsoft.com/office/drawing/2014/main" id="{E91F495F-0EEE-402D-B6A7-EF6AA449C328}"/>
+                <a16:creationId xmlns:a16="http://schemas.microsoft.com/office/drawing/2014/main" id="{CED75AEC-85E3-4520-B63E-09FCF9AACAE6}"/>
               </a:ext>
             </a:extLst>
           </p:cNvPr>
@@ -6778,7 +6131,53 @@
                 <a:ea typeface="Courier New"/>
                 <a:cs typeface="Courier New"/>
               </a:rPr>
-              <a:t>Assume %rax = &amp;a[0], %rcx = 3</a:t>
+              <a:t>E = 3 (e = 0)</a:t>
+            </a:r>
+          </a:p>
+          <a:p xmlns:a="http://schemas.openxmlformats.org/drawingml/2006/main">
+            <a:pPr>
+              <a:defRPr sz="1650" b="0">
+                <a:solidFill>
+                  <a:srgbClr val="A7F3D0"/>
+                </a:solidFill>
+                <a:latin typeface="Courier New"/>
+                <a:ea typeface="Courier New"/>
+                <a:cs typeface="Courier New"/>
+              </a:defRPr>
+            </a:pPr>
+            <a:r>
+              <a:rPr sz="1650" b="0">
+                <a:solidFill>
+                  <a:srgbClr val="A7F3D0"/>
+                </a:solidFill>
+                <a:latin typeface="Courier New"/>
+                <a:ea typeface="Courier New"/>
+                <a:cs typeface="Courier New"/>
+              </a:rPr>
+              <a:t>F = 0 → 1       F = 1 → 9/8</a:t>
+            </a:r>
+          </a:p>
+          <a:p xmlns:a="http://schemas.openxmlformats.org/drawingml/2006/main">
+            <a:pPr>
+              <a:defRPr sz="1650" b="0">
+                <a:solidFill>
+                  <a:srgbClr val="A7F3D0"/>
+                </a:solidFill>
+                <a:latin typeface="Courier New"/>
+                <a:ea typeface="Courier New"/>
+                <a:cs typeface="Courier New"/>
+              </a:defRPr>
+            </a:pPr>
+            <a:r>
+              <a:rPr sz="1650" b="0">
+                <a:solidFill>
+                  <a:srgbClr val="A7F3D0"/>
+                </a:solidFill>
+                <a:latin typeface="Courier New"/>
+                <a:ea typeface="Courier New"/>
+                <a:cs typeface="Courier New"/>
+              </a:rPr>
+              <a:t>step = 1/8</a:t>
             </a:r>
           </a:p>
           <a:p xmlns:a="http://schemas.openxmlformats.org/drawingml/2006/main">
@@ -6806,7 +6205,7 @@
                 <a:ea typeface="Courier New"/>
                 <a:cs typeface="Courier New"/>
               </a:rPr>
-              <a:t>(%rax,%rcx,4)</a:t>
+              <a:t>E = 4 (e = 1)</a:t>
             </a:r>
           </a:p>
           <a:p xmlns:a="http://schemas.openxmlformats.org/drawingml/2006/main">
@@ -6829,7 +6228,7 @@
                 <a:ea typeface="Courier New"/>
                 <a:cs typeface="Courier New"/>
               </a:rPr>
-              <a:t>= memory[rax + 3×4]</a:t>
+              <a:t>F = 0 → 2       F = 1 → 9/4</a:t>
             </a:r>
           </a:p>
           <a:p xmlns:a="http://schemas.openxmlformats.org/drawingml/2006/main">
@@ -6852,35 +6251,7 @@
                 <a:ea typeface="Courier New"/>
                 <a:cs typeface="Courier New"/>
               </a:rPr>
-              <a:t>= a[3]</a:t>
-            </a:r>
-          </a:p>
-          <a:p xmlns:a="http://schemas.openxmlformats.org/drawingml/2006/main">
-            <a:r>
-              <a:t/>
-            </a:r>
-          </a:p>
-          <a:p xmlns:a="http://schemas.openxmlformats.org/drawingml/2006/main">
-            <a:pPr>
-              <a:defRPr sz="1650" b="0">
-                <a:solidFill>
-                  <a:srgbClr val="A7F3D0"/>
-                </a:solidFill>
-                <a:latin typeface="Courier New"/>
-                <a:ea typeface="Courier New"/>
-                <a:cs typeface="Courier New"/>
-              </a:defRPr>
-            </a:pPr>
-            <a:r>
-              <a:rPr sz="1650" b="0">
-                <a:solidFill>
-                  <a:srgbClr val="A7F3D0"/>
-                </a:solidFill>
-                <a:latin typeface="Courier New"/>
-                <a:ea typeface="Courier New"/>
-                <a:cs typeface="Courier New"/>
-              </a:rPr>
-              <a:t>8(%rax,%rcx,4) = a[5]</a:t>
+              <a:t>step = 1/4</a:t>
             </a:r>
           </a:p>
         </p:txBody>
@@ -6890,7 +6261,7 @@
           <p:cNvPr id="5" name="">
             <a:extLst xmlns:a="http://schemas.openxmlformats.org/drawingml/2006/main">
               <a:ext uri="{FF2B5EF4-FFF2-40B4-BE49-F238E27FC236}">
-                <a16:creationId xmlns:a16="http://schemas.microsoft.com/office/drawing/2014/main" id="{D735B3E1-C03C-4722-BE5C-78B32A18354A}"/>
+                <a16:creationId xmlns:a16="http://schemas.microsoft.com/office/drawing/2014/main" id="{7A18BC8F-2DC5-4B6B-A4F9-10CDE1183DE6}"/>
               </a:ext>
             </a:extLst>
           </p:cNvPr>
@@ -6937,7 +6308,7 @@
                 <a:ea typeface="Arial"/>
                 <a:cs typeface="Arial"/>
               </a:rPr>
-              <a:t>The scale is the size of an element in bytes; 8 adds two more int positions here.</a:t>
+              <a:t>This is why large floating point values have larger gaps.</a:t>
             </a:r>
           </a:p>
         </p:txBody>
@@ -6947,7 +6318,7 @@
           <p:cNvPr id="6" name="">
             <a:extLst xmlns:a="http://schemas.openxmlformats.org/drawingml/2006/main">
               <a:ext uri="{FF2B5EF4-FFF2-40B4-BE49-F238E27FC236}">
-                <a16:creationId xmlns:a16="http://schemas.microsoft.com/office/drawing/2014/main" id="{D3F8B9E2-D6F3-43AE-97F9-789B949E7489}"/>
+                <a16:creationId xmlns:a16="http://schemas.microsoft.com/office/drawing/2014/main" id="{94269C50-3A0A-4FBB-A1D2-A33411F72ECA}"/>
               </a:ext>
             </a:extLst>
           </p:cNvPr>
@@ -6994,7 +6365,7 @@
                 <a:ea typeface="Courier New"/>
                 <a:cs typeface="Courier New"/>
               </a:rPr>
-              <a:t>16 / 26</a:t>
+              <a:t>16 / 17</a:t>
             </a:r>
           </a:p>
         </p:txBody>
@@ -7002,7 +6373,7 @@
     </p:spTree>
     <p:extLst>
       <p:ext uri="{BB962C8B-B14F-4D97-AF65-F5344CB8AC3E}">
-        <p14:creationId xmlns:p14="http://schemas.microsoft.com/office/powerpoint/2010/main" val="1687346227"/>
+        <p14:creationId xmlns:p14="http://schemas.microsoft.com/office/powerpoint/2010/main" val="1018474765"/>
       </p:ext>
     </p:extLst>
   </p:cSld>
@@ -7033,7 +6404,7 @@
           <p:cNvPr id="7" name="">
             <a:extLst xmlns:a="http://schemas.openxmlformats.org/drawingml/2006/main">
               <a:ext uri="{FF2B5EF4-FFF2-40B4-BE49-F238E27FC236}">
-                <a16:creationId xmlns:a16="http://schemas.microsoft.com/office/drawing/2014/main" id="{8C6C726C-E47D-4CDD-8C6C-B6050C8B3E57}"/>
+                <a16:creationId xmlns:a16="http://schemas.microsoft.com/office/drawing/2014/main" id="{4989B079-C3E8-43BB-8638-96121018769A}"/>
               </a:ext>
             </a:extLst>
           </p:cNvPr>
@@ -7080,7 +6451,7 @@
                 <a:ea typeface="Courier New"/>
                 <a:cs typeface="Courier New"/>
               </a:rPr>
-              <a:t>COMMON ASSEMBLY CONFUSION</a:t>
+              <a:t>FLOATING POINT · RECAP</a:t>
             </a:r>
           </a:p>
         </p:txBody>
@@ -7090,7 +6461,7 @@
           <p:cNvPr id="2" name="">
             <a:extLst xmlns:a="http://schemas.openxmlformats.org/drawingml/2006/main">
               <a:ext uri="{FF2B5EF4-FFF2-40B4-BE49-F238E27FC236}">
-                <a16:creationId xmlns:a16="http://schemas.microsoft.com/office/drawing/2014/main" id="{7325508F-4A33-4FD6-A626-F73AEB3CA455}"/>
+                <a16:creationId xmlns:a16="http://schemas.microsoft.com/office/drawing/2014/main" id="{95D3113E-85F1-4E22-A62E-265E94FE3617}"/>
               </a:ext>
             </a:extLst>
           </p:cNvPr>
@@ -7137,7 +6508,7 @@
                 <a:ea typeface="Arial"/>
                 <a:cs typeface="Arial"/>
               </a:rPr>
-              <a:t>Address versus value</a:t>
+              <a:t>How to check an encoding</a:t>
             </a:r>
           </a:p>
         </p:txBody>
@@ -7147,7 +6518,7 @@
           <p:cNvPr id="3" name="">
             <a:extLst xmlns:a="http://schemas.openxmlformats.org/drawingml/2006/main">
               <a:ext uri="{FF2B5EF4-FFF2-40B4-BE49-F238E27FC236}">
-                <a16:creationId xmlns:a16="http://schemas.microsoft.com/office/drawing/2014/main" id="{392E3B5E-5FB7-410D-9596-3266A7676105}"/>
+                <a16:creationId xmlns:a16="http://schemas.microsoft.com/office/drawing/2014/main" id="{8EC5E33C-BA7C-4ADE-9FC3-9ABD9F3C6FD4}"/>
               </a:ext>
             </a:extLst>
           </p:cNvPr>
@@ -7194,7 +6565,7 @@
                 <a:ea typeface="Arial"/>
                 <a:cs typeface="Arial"/>
               </a:rPr>
-              <a:t>leaq computes an address and puts it in a register.</a:t>
+              <a:t>Compare the value with the smallest normal. Choose the normal or subnormal equation, work out the fields, then decode them to check.</a:t>
             </a:r>
           </a:p>
           <a:p xmlns:a="http://schemas.openxmlformats.org/drawingml/2006/main">
@@ -7222,7 +6593,7 @@
                 <a:ea typeface="Arial"/>
                 <a:cs typeface="Arial"/>
               </a:rPr>
-              <a:t>movq with a memory source reads the value at that address.</a:t>
+              <a:t>If the value is not exact, use the rounding rule given with the problem.</a:t>
             </a:r>
           </a:p>
         </p:txBody>
@@ -7232,7 +6603,7 @@
           <p:cNvPr id="4" name="">
             <a:extLst xmlns:a="http://schemas.openxmlformats.org/drawingml/2006/main">
               <a:ext uri="{FF2B5EF4-FFF2-40B4-BE49-F238E27FC236}">
-                <a16:creationId xmlns:a16="http://schemas.microsoft.com/office/drawing/2014/main" id="{A5D52EB3-65F4-4BB3-B1B2-41D1A8B64AB1}"/>
+                <a16:creationId xmlns:a16="http://schemas.microsoft.com/office/drawing/2014/main" id="{EA939046-DA6B-448C-A179-5B13743C72F3}"/>
               </a:ext>
             </a:extLst>
           </p:cNvPr>
@@ -7279,7 +6650,7 @@
                 <a:ea typeface="Courier New"/>
                 <a:cs typeface="Courier New"/>
               </a:rPr>
-              <a:t>Assume rax = 1000, memory[1008] = 42</a:t>
+              <a:t>Our practice format</a:t>
             </a:r>
           </a:p>
           <a:p xmlns:a="http://schemas.openxmlformats.org/drawingml/2006/main">
@@ -7307,7 +6678,7 @@
                 <a:ea typeface="Courier New"/>
                 <a:cs typeface="Courier New"/>
               </a:rPr>
-              <a:t>leaq 8(%rax), %rbx  → rbx = 1008</a:t>
+              <a:t>Normal:    (1 + F/8) × 2^(E−3)</a:t>
             </a:r>
           </a:p>
           <a:p xmlns:a="http://schemas.openxmlformats.org/drawingml/2006/main">
@@ -7330,7 +6701,63 @@
                 <a:ea typeface="Courier New"/>
                 <a:cs typeface="Courier New"/>
               </a:rPr>
-              <a:t>movq 8(%rax), %rcx  → rcx = 42</a:t>
+              <a:t>Subnormal: (    F/8) × 2⁻²</a:t>
+            </a:r>
+          </a:p>
+          <a:p xmlns:a="http://schemas.openxmlformats.org/drawingml/2006/main">
+            <a:r>
+              <a:t/>
+            </a:r>
+          </a:p>
+          <a:p xmlns:a="http://schemas.openxmlformats.org/drawingml/2006/main">
+            <a:pPr>
+              <a:defRPr sz="1650" b="0">
+                <a:solidFill>
+                  <a:srgbClr val="A7F3D0"/>
+                </a:solidFill>
+                <a:latin typeface="Courier New"/>
+                <a:ea typeface="Courier New"/>
+                <a:cs typeface="Courier New"/>
+              </a:defRPr>
+            </a:pPr>
+            <a:r>
+              <a:rPr sz="1650" b="0">
+                <a:solidFill>
+                  <a:srgbClr val="A7F3D0"/>
+                </a:solidFill>
+                <a:latin typeface="Courier New"/>
+                <a:ea typeface="Courier New"/>
+                <a:cs typeface="Courier New"/>
+              </a:rPr>
+              <a:t>E = 0, F = 0  →  zero</a:t>
+            </a:r>
+          </a:p>
+          <a:p xmlns:a="http://schemas.openxmlformats.org/drawingml/2006/main">
+            <a:r>
+              <a:t/>
+            </a:r>
+          </a:p>
+          <a:p xmlns:a="http://schemas.openxmlformats.org/drawingml/2006/main">
+            <a:pPr>
+              <a:defRPr sz="1650" b="0">
+                <a:solidFill>
+                  <a:srgbClr val="A7F3D0"/>
+                </a:solidFill>
+                <a:latin typeface="Courier New"/>
+                <a:ea typeface="Courier New"/>
+                <a:cs typeface="Courier New"/>
+              </a:defRPr>
+            </a:pPr>
+            <a:r>
+              <a:rPr sz="1650" b="0">
+                <a:solidFill>
+                  <a:srgbClr val="A7F3D0"/>
+                </a:solidFill>
+                <a:latin typeface="Courier New"/>
+                <a:ea typeface="Courier New"/>
+                <a:cs typeface="Courier New"/>
+              </a:rPr>
+              <a:t>Decode your bits as a final check.</a:t>
             </a:r>
           </a:p>
         </p:txBody>
@@ -7340,7 +6767,7 @@
           <p:cNvPr id="5" name="">
             <a:extLst xmlns:a="http://schemas.openxmlformats.org/drawingml/2006/main">
               <a:ext uri="{FF2B5EF4-FFF2-40B4-BE49-F238E27FC236}">
-                <a16:creationId xmlns:a16="http://schemas.microsoft.com/office/drawing/2014/main" id="{0BCC5F4E-BC78-47E2-9993-97E0F974DB82}"/>
+                <a16:creationId xmlns:a16="http://schemas.microsoft.com/office/drawing/2014/main" id="{585A0E73-828D-45A1-9AD7-8EED8C5E7EB1}"/>
               </a:ext>
             </a:extLst>
           </p:cNvPr>
@@ -7387,7 +6814,7 @@
                 <a:ea typeface="Arial"/>
                 <a:cs typeface="Arial"/>
               </a:rPr>
-              <a:t>lea does not dereference memory, even though its source looks like a memory operand.</a:t>
+              <a:t>A correct encoding must reproduce the intended value or its required rounded value.</a:t>
             </a:r>
           </a:p>
         </p:txBody>
@@ -7397,7 +6824,7 @@
           <p:cNvPr id="6" name="">
             <a:extLst xmlns:a="http://schemas.openxmlformats.org/drawingml/2006/main">
               <a:ext uri="{FF2B5EF4-FFF2-40B4-BE49-F238E27FC236}">
-                <a16:creationId xmlns:a16="http://schemas.microsoft.com/office/drawing/2014/main" id="{C92F1DD5-7CB9-4E53-AC06-0D6115400B20}"/>
+                <a16:creationId xmlns:a16="http://schemas.microsoft.com/office/drawing/2014/main" id="{E1FBC5BD-1F5D-42FA-AC83-E0BF862F4EDF}"/>
               </a:ext>
             </a:extLst>
           </p:cNvPr>
@@ -7444,7 +6871,7 @@
                 <a:ea typeface="Courier New"/>
                 <a:cs typeface="Courier New"/>
               </a:rPr>
-              <a:t>17 / 26</a:t>
+              <a:t>17 / 17</a:t>
             </a:r>
           </a:p>
         </p:txBody>
@@ -7452,1045 +6879,7 @@
     </p:spTree>
     <p:extLst>
       <p:ext uri="{BB962C8B-B14F-4D97-AF65-F5344CB8AC3E}">
-        <p14:creationId xmlns:p14="http://schemas.microsoft.com/office/powerpoint/2010/main" val="772612768"/>
-      </p:ext>
-    </p:extLst>
-  </p:cSld>
-</p:sld>
-</file>
-
-<file path=ppt/slides/slide18.xml><?xml version="1.0" encoding="utf-8"?>
-<p:sld xmlns:p="http://schemas.openxmlformats.org/presentationml/2006/main">
-  <p:cSld>
-    <p:bg>
-      <p:bgPr>
-        <a:solidFill xmlns:a="http://schemas.openxmlformats.org/drawingml/2006/main">
-          <a:srgbClr val="09090B"/>
-        </a:solidFill>
-      </p:bgPr>
-    </p:bg>
-    <p:spTree>
-      <p:nvGrpSpPr>
-        <p:cNvPr id="1" name=""/>
-        <p:cNvGrpSpPr/>
-        <p:nvPr/>
-      </p:nvGrpSpPr>
-      <p:grpSpPr>
-        <a:xfrm xmlns:a="http://schemas.openxmlformats.org/drawingml/2006/main"/>
-      </p:grpSpPr>
-      <p:sp>
-        <p:nvSpPr>
-          <p:cNvPr id="7" name="">
-            <a:extLst xmlns:a="http://schemas.openxmlformats.org/drawingml/2006/main">
-              <a:ext uri="{FF2B5EF4-FFF2-40B4-BE49-F238E27FC236}">
-                <a16:creationId xmlns:a16="http://schemas.microsoft.com/office/drawing/2014/main" id="{1BDAF34F-2B2B-4364-913A-8CED7C950385}"/>
-              </a:ext>
-            </a:extLst>
-          </p:cNvPr>
-          <p:cNvSpPr>
-            <a:spLocks xmlns:a="http://schemas.openxmlformats.org/drawingml/2006/main" noGrp="1"/>
-          </p:cNvSpPr>
-          <p:nvPr/>
-        </p:nvSpPr>
-        <p:spPr>
-          <a:xfrm xmlns:a="http://schemas.openxmlformats.org/drawingml/2006/main">
-            <a:off x="685800" y="361950"/>
-            <a:ext cx="10477500" cy="285750"/>
-          </a:xfrm>
-          <a:prstGeom xmlns:a="http://schemas.openxmlformats.org/drawingml/2006/main" prst="rect">
-            <a:avLst/>
-          </a:prstGeom>
-          <a:noFill xmlns:a="http://schemas.openxmlformats.org/drawingml/2006/main"/>
-          <a:ln xmlns:a="http://schemas.openxmlformats.org/drawingml/2006/main" w="0">
-            <a:noFill/>
-          </a:ln>
-        </p:spPr>
-        <p:txBody>
-          <a:bodyPr xmlns:a="http://schemas.openxmlformats.org/drawingml/2006/main" anchor="t">
-            <a:normAutofit fontScale="100000"/>
-          </a:bodyPr>
-          <a:lstStyle xmlns:a="http://schemas.openxmlformats.org/drawingml/2006/main"/>
-          <a:p xmlns:a="http://schemas.openxmlformats.org/drawingml/2006/main">
-            <a:pPr>
-              <a:defRPr sz="1275" b="0">
-                <a:solidFill>
-                  <a:srgbClr val="6EE7B7"/>
-                </a:solidFill>
-                <a:latin typeface="Courier New"/>
-                <a:ea typeface="Courier New"/>
-                <a:cs typeface="Courier New"/>
-              </a:defRPr>
-            </a:pPr>
-            <a:r>
-              <a:rPr sz="1275" b="0">
-                <a:solidFill>
-                  <a:srgbClr val="6EE7B7"/>
-                </a:solidFill>
-                <a:latin typeface="Courier New"/>
-                <a:ea typeface="Courier New"/>
-                <a:cs typeface="Courier New"/>
-              </a:rPr>
-              <a:t>LECTURE 7 · CONTROL FLOW</a:t>
-            </a:r>
-          </a:p>
-        </p:txBody>
-      </p:sp>
-      <p:sp>
-        <p:nvSpPr>
-          <p:cNvPr id="2" name="">
-            <a:extLst xmlns:a="http://schemas.openxmlformats.org/drawingml/2006/main">
-              <a:ext uri="{FF2B5EF4-FFF2-40B4-BE49-F238E27FC236}">
-                <a16:creationId xmlns:a16="http://schemas.microsoft.com/office/drawing/2014/main" id="{D2225FE4-69AB-43E2-B364-E8CAD17174C1}"/>
-              </a:ext>
-            </a:extLst>
-          </p:cNvPr>
-          <p:cNvSpPr>
-            <a:spLocks xmlns:a="http://schemas.openxmlformats.org/drawingml/2006/main" noGrp="1"/>
-          </p:cNvSpPr>
-          <p:nvPr/>
-        </p:nvSpPr>
-        <p:spPr>
-          <a:xfrm xmlns:a="http://schemas.openxmlformats.org/drawingml/2006/main">
-            <a:off x="685800" y="885825"/>
-            <a:ext cx="10820400" cy="1066800"/>
-          </a:xfrm>
-          <a:prstGeom xmlns:a="http://schemas.openxmlformats.org/drawingml/2006/main" prst="rect">
-            <a:avLst/>
-          </a:prstGeom>
-          <a:noFill xmlns:a="http://schemas.openxmlformats.org/drawingml/2006/main"/>
-          <a:ln xmlns:a="http://schemas.openxmlformats.org/drawingml/2006/main" w="0">
-            <a:noFill/>
-          </a:ln>
-        </p:spPr>
-        <p:txBody>
-          <a:bodyPr xmlns:a="http://schemas.openxmlformats.org/drawingml/2006/main" anchor="t">
-            <a:normAutofit fontScale="100000"/>
-          </a:bodyPr>
-          <a:lstStyle xmlns:a="http://schemas.openxmlformats.org/drawingml/2006/main"/>
-          <a:p xmlns:a="http://schemas.openxmlformats.org/drawingml/2006/main">
-            <a:pPr>
-              <a:defRPr sz="3600" b="0">
-                <a:solidFill>
-                  <a:srgbClr val="FAFAFA"/>
-                </a:solidFill>
-                <a:latin typeface="Arial"/>
-                <a:ea typeface="Arial"/>
-                <a:cs typeface="Arial"/>
-              </a:defRPr>
-            </a:pPr>
-            <a:r>
-              <a:rPr sz="3600" b="0">
-                <a:solidFill>
-                  <a:srgbClr val="FAFAFA"/>
-                </a:solidFill>
-                <a:latin typeface="Arial"/>
-                <a:ea typeface="Arial"/>
-                <a:cs typeface="Arial"/>
-              </a:rPr>
-              <a:t>A branch is an if statement</a:t>
-            </a:r>
-          </a:p>
-        </p:txBody>
-      </p:sp>
-      <p:sp>
-        <p:nvSpPr>
-          <p:cNvPr id="3" name="">
-            <a:extLst xmlns:a="http://schemas.openxmlformats.org/drawingml/2006/main">
-              <a:ext uri="{FF2B5EF4-FFF2-40B4-BE49-F238E27FC236}">
-                <a16:creationId xmlns:a16="http://schemas.microsoft.com/office/drawing/2014/main" id="{98706C0F-596E-47AB-87AE-5802A87910A6}"/>
-              </a:ext>
-            </a:extLst>
-          </p:cNvPr>
-          <p:cNvSpPr>
-            <a:spLocks xmlns:a="http://schemas.openxmlformats.org/drawingml/2006/main" noGrp="1"/>
-          </p:cNvSpPr>
-          <p:nvPr/>
-        </p:nvSpPr>
-        <p:spPr>
-          <a:xfrm xmlns:a="http://schemas.openxmlformats.org/drawingml/2006/main">
-            <a:off x="685800" y="2200275"/>
-            <a:ext cx="4857750" cy="3124200"/>
-          </a:xfrm>
-          <a:prstGeom xmlns:a="http://schemas.openxmlformats.org/drawingml/2006/main" prst="rect">
-            <a:avLst/>
-          </a:prstGeom>
-          <a:noFill xmlns:a="http://schemas.openxmlformats.org/drawingml/2006/main"/>
-          <a:ln xmlns:a="http://schemas.openxmlformats.org/drawingml/2006/main" w="0">
-            <a:noFill/>
-          </a:ln>
-        </p:spPr>
-        <p:txBody>
-          <a:bodyPr xmlns:a="http://schemas.openxmlformats.org/drawingml/2006/main" anchor="t">
-            <a:normAutofit fontScale="100000"/>
-          </a:bodyPr>
-          <a:lstStyle xmlns:a="http://schemas.openxmlformats.org/drawingml/2006/main"/>
-          <a:p xmlns:a="http://schemas.openxmlformats.org/drawingml/2006/main">
-            <a:pPr>
-              <a:defRPr sz="1950" b="0">
-                <a:solidFill>
-                  <a:srgbClr val="D4D4D8"/>
-                </a:solidFill>
-                <a:latin typeface="Arial"/>
-                <a:ea typeface="Arial"/>
-                <a:cs typeface="Arial"/>
-              </a:defRPr>
-            </a:pPr>
-            <a:r>
-              <a:rPr sz="1950" b="0">
-                <a:solidFill>
-                  <a:srgbClr val="D4D4D8"/>
-                </a:solidFill>
-                <a:latin typeface="Arial"/>
-                <a:ea typeface="Arial"/>
-                <a:cs typeface="Arial"/>
-              </a:rPr>
-              <a:t>cmpq compares two operands and sets condition flags. A conditional jump reads those flags.</a:t>
-            </a:r>
-          </a:p>
-          <a:p xmlns:a="http://schemas.openxmlformats.org/drawingml/2006/main">
-            <a:r>
-              <a:t/>
-            </a:r>
-          </a:p>
-          <a:p xmlns:a="http://schemas.openxmlformats.org/drawingml/2006/main">
-            <a:pPr>
-              <a:defRPr sz="1950" b="0">
-                <a:solidFill>
-                  <a:srgbClr val="D4D4D8"/>
-                </a:solidFill>
-                <a:latin typeface="Arial"/>
-                <a:ea typeface="Arial"/>
-                <a:cs typeface="Arial"/>
-              </a:defRPr>
-            </a:pPr>
-            <a:r>
-              <a:rPr sz="1950" b="0">
-                <a:solidFill>
-                  <a:srgbClr val="D4D4D8"/>
-                </a:solidFill>
-                <a:latin typeface="Arial"/>
-                <a:ea typeface="Arial"/>
-                <a:cs typeface="Arial"/>
-              </a:rPr>
-              <a:t>ja means unsigned “jump if above.” The target is a label elsewhere in the code.</a:t>
-            </a:r>
-          </a:p>
-        </p:txBody>
-      </p:sp>
-      <p:sp>
-        <p:nvSpPr>
-          <p:cNvPr id="4" name="">
-            <a:extLst xmlns:a="http://schemas.openxmlformats.org/drawingml/2006/main">
-              <a:ext uri="{FF2B5EF4-FFF2-40B4-BE49-F238E27FC236}">
-                <a16:creationId xmlns:a16="http://schemas.microsoft.com/office/drawing/2014/main" id="{2759E58A-3342-4254-8F59-55AF706ABE76}"/>
-              </a:ext>
-            </a:extLst>
-          </p:cNvPr>
-          <p:cNvSpPr>
-            <a:spLocks xmlns:a="http://schemas.openxmlformats.org/drawingml/2006/main" noGrp="1"/>
-          </p:cNvSpPr>
-          <p:nvPr/>
-        </p:nvSpPr>
-        <p:spPr>
-          <a:xfrm xmlns:a="http://schemas.openxmlformats.org/drawingml/2006/main">
-            <a:off x="6181725" y="2200275"/>
-            <a:ext cx="5238750" cy="3286125"/>
-          </a:xfrm>
-          <a:prstGeom xmlns:a="http://schemas.openxmlformats.org/drawingml/2006/main" prst="rect">
-            <a:avLst/>
-          </a:prstGeom>
-          <a:noFill xmlns:a="http://schemas.openxmlformats.org/drawingml/2006/main"/>
-          <a:ln xmlns:a="http://schemas.openxmlformats.org/drawingml/2006/main" w="0">
-            <a:noFill/>
-          </a:ln>
-        </p:spPr>
-        <p:txBody>
-          <a:bodyPr xmlns:a="http://schemas.openxmlformats.org/drawingml/2006/main" anchor="t">
-            <a:normAutofit fontScale="100000"/>
-          </a:bodyPr>
-          <a:lstStyle xmlns:a="http://schemas.openxmlformats.org/drawingml/2006/main"/>
-          <a:p xmlns:a="http://schemas.openxmlformats.org/drawingml/2006/main">
-            <a:pPr>
-              <a:defRPr sz="1650" b="0">
-                <a:solidFill>
-                  <a:srgbClr val="A7F3D0"/>
-                </a:solidFill>
-                <a:latin typeface="Courier New"/>
-                <a:ea typeface="Courier New"/>
-                <a:cs typeface="Courier New"/>
-              </a:defRPr>
-            </a:pPr>
-            <a:r>
-              <a:rPr sz="1650" b="0">
-                <a:solidFill>
-                  <a:srgbClr val="A7F3D0"/>
-                </a:solidFill>
-                <a:latin typeface="Courier New"/>
-                <a:ea typeface="Courier New"/>
-                <a:cs typeface="Courier New"/>
-              </a:rPr>
-              <a:t>C: if (n &gt; 1) return n;</a:t>
-            </a:r>
-          </a:p>
-          <a:p xmlns:a="http://schemas.openxmlformats.org/drawingml/2006/main">
-            <a:r>
-              <a:t/>
-            </a:r>
-          </a:p>
-          <a:p xmlns:a="http://schemas.openxmlformats.org/drawingml/2006/main">
-            <a:pPr>
-              <a:defRPr sz="1650" b="0">
-                <a:solidFill>
-                  <a:srgbClr val="A7F3D0"/>
-                </a:solidFill>
-                <a:latin typeface="Courier New"/>
-                <a:ea typeface="Courier New"/>
-                <a:cs typeface="Courier New"/>
-              </a:defRPr>
-            </a:pPr>
-            <a:r>
-              <a:rPr sz="1650" b="0">
-                <a:solidFill>
-                  <a:srgbClr val="A7F3D0"/>
-                </a:solidFill>
-                <a:latin typeface="Courier New"/>
-                <a:ea typeface="Courier New"/>
-                <a:cs typeface="Courier New"/>
-              </a:rPr>
-              <a:t>cmpq $1, %rdi</a:t>
-            </a:r>
-          </a:p>
-          <a:p xmlns:a="http://schemas.openxmlformats.org/drawingml/2006/main">
-            <a:pPr>
-              <a:defRPr sz="1650" b="0">
-                <a:solidFill>
-                  <a:srgbClr val="A7F3D0"/>
-                </a:solidFill>
-                <a:latin typeface="Courier New"/>
-                <a:ea typeface="Courier New"/>
-                <a:cs typeface="Courier New"/>
-              </a:defRPr>
-            </a:pPr>
-            <a:r>
-              <a:rPr sz="1650" b="0">
-                <a:solidFill>
-                  <a:srgbClr val="A7F3D0"/>
-                </a:solidFill>
-                <a:latin typeface="Courier New"/>
-                <a:ea typeface="Courier New"/>
-                <a:cs typeface="Courier New"/>
-              </a:rPr>
-              <a:t>ja   .Lbig</a:t>
-            </a:r>
-          </a:p>
-          <a:p xmlns:a="http://schemas.openxmlformats.org/drawingml/2006/main">
-            <a:pPr>
-              <a:defRPr sz="1650" b="0">
-                <a:solidFill>
-                  <a:srgbClr val="A7F3D0"/>
-                </a:solidFill>
-                <a:latin typeface="Courier New"/>
-                <a:ea typeface="Courier New"/>
-                <a:cs typeface="Courier New"/>
-              </a:defRPr>
-            </a:pPr>
-            <a:r>
-              <a:rPr sz="1650" b="0">
-                <a:solidFill>
-                  <a:srgbClr val="A7F3D0"/>
-                </a:solidFill>
-                <a:latin typeface="Courier New"/>
-                <a:ea typeface="Courier New"/>
-                <a:cs typeface="Courier New"/>
-              </a:rPr>
-              <a:t>movl $1, %eax</a:t>
-            </a:r>
-          </a:p>
-          <a:p xmlns:a="http://schemas.openxmlformats.org/drawingml/2006/main">
-            <a:pPr>
-              <a:defRPr sz="1650" b="0">
-                <a:solidFill>
-                  <a:srgbClr val="A7F3D0"/>
-                </a:solidFill>
-                <a:latin typeface="Courier New"/>
-                <a:ea typeface="Courier New"/>
-                <a:cs typeface="Courier New"/>
-              </a:defRPr>
-            </a:pPr>
-            <a:r>
-              <a:rPr sz="1650" b="0">
-                <a:solidFill>
-                  <a:srgbClr val="A7F3D0"/>
-                </a:solidFill>
-                <a:latin typeface="Courier New"/>
-                <a:ea typeface="Courier New"/>
-                <a:cs typeface="Courier New"/>
-              </a:rPr>
-              <a:t>ret</a:t>
-            </a:r>
-          </a:p>
-          <a:p xmlns:a="http://schemas.openxmlformats.org/drawingml/2006/main">
-            <a:pPr>
-              <a:defRPr sz="1650" b="0">
-                <a:solidFill>
-                  <a:srgbClr val="A7F3D0"/>
-                </a:solidFill>
-                <a:latin typeface="Courier New"/>
-                <a:ea typeface="Courier New"/>
-                <a:cs typeface="Courier New"/>
-              </a:defRPr>
-            </a:pPr>
-            <a:r>
-              <a:rPr sz="1650" b="0">
-                <a:solidFill>
-                  <a:srgbClr val="A7F3D0"/>
-                </a:solidFill>
-                <a:latin typeface="Courier New"/>
-                <a:ea typeface="Courier New"/>
-                <a:cs typeface="Courier New"/>
-              </a:rPr>
-              <a:t>.Lbig:</a:t>
-            </a:r>
-          </a:p>
-          <a:p xmlns:a="http://schemas.openxmlformats.org/drawingml/2006/main">
-            <a:pPr>
-              <a:defRPr sz="1650" b="0">
-                <a:solidFill>
-                  <a:srgbClr val="A7F3D0"/>
-                </a:solidFill>
-                <a:latin typeface="Courier New"/>
-                <a:ea typeface="Courier New"/>
-                <a:cs typeface="Courier New"/>
-              </a:defRPr>
-            </a:pPr>
-            <a:r>
-              <a:rPr sz="1650" b="0">
-                <a:solidFill>
-                  <a:srgbClr val="A7F3D0"/>
-                </a:solidFill>
-                <a:latin typeface="Courier New"/>
-                <a:ea typeface="Courier New"/>
-                <a:cs typeface="Courier New"/>
-              </a:rPr>
-              <a:t>movq %rdi, %rax</a:t>
-            </a:r>
-          </a:p>
-          <a:p xmlns:a="http://schemas.openxmlformats.org/drawingml/2006/main">
-            <a:pPr>
-              <a:defRPr sz="1650" b="0">
-                <a:solidFill>
-                  <a:srgbClr val="A7F3D0"/>
-                </a:solidFill>
-                <a:latin typeface="Courier New"/>
-                <a:ea typeface="Courier New"/>
-                <a:cs typeface="Courier New"/>
-              </a:defRPr>
-            </a:pPr>
-            <a:r>
-              <a:rPr sz="1650" b="0">
-                <a:solidFill>
-                  <a:srgbClr val="A7F3D0"/>
-                </a:solidFill>
-                <a:latin typeface="Courier New"/>
-                <a:ea typeface="Courier New"/>
-                <a:cs typeface="Courier New"/>
-              </a:rPr>
-              <a:t>ret</a:t>
-            </a:r>
-          </a:p>
-        </p:txBody>
-      </p:sp>
-      <p:sp>
-        <p:nvSpPr>
-          <p:cNvPr id="5" name="">
-            <a:extLst xmlns:a="http://schemas.openxmlformats.org/drawingml/2006/main">
-              <a:ext uri="{FF2B5EF4-FFF2-40B4-BE49-F238E27FC236}">
-                <a16:creationId xmlns:a16="http://schemas.microsoft.com/office/drawing/2014/main" id="{3CE2A77C-5861-49F1-A87B-678DEDB9C3E6}"/>
-              </a:ext>
-            </a:extLst>
-          </p:cNvPr>
-          <p:cNvSpPr>
-            <a:spLocks xmlns:a="http://schemas.openxmlformats.org/drawingml/2006/main" noGrp="1"/>
-          </p:cNvSpPr>
-          <p:nvPr/>
-        </p:nvSpPr>
-        <p:spPr>
-          <a:xfrm xmlns:a="http://schemas.openxmlformats.org/drawingml/2006/main">
-            <a:off x="685800" y="5743575"/>
-            <a:ext cx="10191750" cy="428625"/>
-          </a:xfrm>
-          <a:prstGeom xmlns:a="http://schemas.openxmlformats.org/drawingml/2006/main" prst="rect">
-            <a:avLst/>
-          </a:prstGeom>
-          <a:noFill xmlns:a="http://schemas.openxmlformats.org/drawingml/2006/main"/>
-          <a:ln xmlns:a="http://schemas.openxmlformats.org/drawingml/2006/main" w="0">
-            <a:noFill/>
-          </a:ln>
-        </p:spPr>
-        <p:txBody>
-          <a:bodyPr xmlns:a="http://schemas.openxmlformats.org/drawingml/2006/main" anchor="t">
-            <a:normAutofit fontScale="100000"/>
-          </a:bodyPr>
-          <a:lstStyle xmlns:a="http://schemas.openxmlformats.org/drawingml/2006/main"/>
-          <a:p xmlns:a="http://schemas.openxmlformats.org/drawingml/2006/main">
-            <a:pPr>
-              <a:defRPr sz="1350" b="0">
-                <a:solidFill>
-                  <a:srgbClr val="A1A1AA"/>
-                </a:solidFill>
-                <a:latin typeface="Arial"/>
-                <a:ea typeface="Arial"/>
-                <a:cs typeface="Arial"/>
-              </a:defRPr>
-            </a:pPr>
-            <a:r>
-              <a:rPr sz="1350" b="0">
-                <a:solidFill>
-                  <a:srgbClr val="A1A1AA"/>
-                </a:solidFill>
-                <a:latin typeface="Arial"/>
-                <a:ea typeface="Arial"/>
-                <a:cs typeface="Arial"/>
-              </a:rPr>
-              <a:t>Here %rdi is an unsigned 64-bit n; %rax carries the return value.</a:t>
-            </a:r>
-          </a:p>
-        </p:txBody>
-      </p:sp>
-      <p:sp>
-        <p:nvSpPr>
-          <p:cNvPr id="6" name="">
-            <a:extLst xmlns:a="http://schemas.openxmlformats.org/drawingml/2006/main">
-              <a:ext uri="{FF2B5EF4-FFF2-40B4-BE49-F238E27FC236}">
-                <a16:creationId xmlns:a16="http://schemas.microsoft.com/office/drawing/2014/main" id="{D2F172BA-C05B-4403-9C57-E56F9AB4D1BF}"/>
-              </a:ext>
-            </a:extLst>
-          </p:cNvPr>
-          <p:cNvSpPr>
-            <a:spLocks xmlns:a="http://schemas.openxmlformats.org/drawingml/2006/main" noGrp="1"/>
-          </p:cNvSpPr>
-          <p:nvPr/>
-        </p:nvSpPr>
-        <p:spPr>
-          <a:xfrm xmlns:a="http://schemas.openxmlformats.org/drawingml/2006/main">
-            <a:off x="10477500" y="6210300"/>
-            <a:ext cx="1000125" cy="219075"/>
-          </a:xfrm>
-          <a:prstGeom xmlns:a="http://schemas.openxmlformats.org/drawingml/2006/main" prst="rect">
-            <a:avLst/>
-          </a:prstGeom>
-          <a:noFill xmlns:a="http://schemas.openxmlformats.org/drawingml/2006/main"/>
-          <a:ln xmlns:a="http://schemas.openxmlformats.org/drawingml/2006/main" w="0">
-            <a:noFill/>
-          </a:ln>
-        </p:spPr>
-        <p:txBody>
-          <a:bodyPr xmlns:a="http://schemas.openxmlformats.org/drawingml/2006/main" anchor="t">
-            <a:normAutofit fontScale="79762"/>
-          </a:bodyPr>
-          <a:lstStyle xmlns:a="http://schemas.openxmlformats.org/drawingml/2006/main"/>
-          <a:p xmlns:a="http://schemas.openxmlformats.org/drawingml/2006/main">
-            <a:pPr>
-              <a:defRPr sz="1050" b="0">
-                <a:solidFill>
-                  <a:srgbClr val="71717A"/>
-                </a:solidFill>
-                <a:latin typeface="Courier New"/>
-                <a:ea typeface="Courier New"/>
-                <a:cs typeface="Courier New"/>
-              </a:defRPr>
-            </a:pPr>
-            <a:r>
-              <a:rPr sz="1050" b="0">
-                <a:solidFill>
-                  <a:srgbClr val="71717A"/>
-                </a:solidFill>
-                <a:latin typeface="Courier New"/>
-                <a:ea typeface="Courier New"/>
-                <a:cs typeface="Courier New"/>
-              </a:rPr>
-              <a:t>18 / 26</a:t>
-            </a:r>
-          </a:p>
-        </p:txBody>
-      </p:sp>
-    </p:spTree>
-    <p:extLst>
-      <p:ext uri="{BB962C8B-B14F-4D97-AF65-F5344CB8AC3E}">
-        <p14:creationId xmlns:p14="http://schemas.microsoft.com/office/powerpoint/2010/main" val="1200762649"/>
-      </p:ext>
-    </p:extLst>
-  </p:cSld>
-</p:sld>
-</file>
-
-<file path=ppt/slides/slide19.xml><?xml version="1.0" encoding="utf-8"?>
-<p:sld xmlns:p="http://schemas.openxmlformats.org/presentationml/2006/main">
-  <p:cSld>
-    <p:bg>
-      <p:bgPr>
-        <a:solidFill xmlns:a="http://schemas.openxmlformats.org/drawingml/2006/main">
-          <a:srgbClr val="09090B"/>
-        </a:solidFill>
-      </p:bgPr>
-    </p:bg>
-    <p:spTree>
-      <p:nvGrpSpPr>
-        <p:cNvPr id="1" name=""/>
-        <p:cNvGrpSpPr/>
-        <p:nvPr/>
-      </p:nvGrpSpPr>
-      <p:grpSpPr>
-        <a:xfrm xmlns:a="http://schemas.openxmlformats.org/drawingml/2006/main"/>
-      </p:grpSpPr>
-      <p:sp>
-        <p:nvSpPr>
-          <p:cNvPr id="7" name="">
-            <a:extLst xmlns:a="http://schemas.openxmlformats.org/drawingml/2006/main">
-              <a:ext uri="{FF2B5EF4-FFF2-40B4-BE49-F238E27FC236}">
-                <a16:creationId xmlns:a16="http://schemas.microsoft.com/office/drawing/2014/main" id="{919B757C-BCC3-4598-AC6C-CE8A997A49FC}"/>
-              </a:ext>
-            </a:extLst>
-          </p:cNvPr>
-          <p:cNvSpPr>
-            <a:spLocks xmlns:a="http://schemas.openxmlformats.org/drawingml/2006/main" noGrp="1"/>
-          </p:cNvSpPr>
-          <p:nvPr/>
-        </p:nvSpPr>
-        <p:spPr>
-          <a:xfrm xmlns:a="http://schemas.openxmlformats.org/drawingml/2006/main">
-            <a:off x="685800" y="361950"/>
-            <a:ext cx="10477500" cy="285750"/>
-          </a:xfrm>
-          <a:prstGeom xmlns:a="http://schemas.openxmlformats.org/drawingml/2006/main" prst="rect">
-            <a:avLst/>
-          </a:prstGeom>
-          <a:noFill xmlns:a="http://schemas.openxmlformats.org/drawingml/2006/main"/>
-          <a:ln xmlns:a="http://schemas.openxmlformats.org/drawingml/2006/main" w="0">
-            <a:noFill/>
-          </a:ln>
-        </p:spPr>
-        <p:txBody>
-          <a:bodyPr xmlns:a="http://schemas.openxmlformats.org/drawingml/2006/main" anchor="t">
-            <a:normAutofit fontScale="100000"/>
-          </a:bodyPr>
-          <a:lstStyle xmlns:a="http://schemas.openxmlformats.org/drawingml/2006/main"/>
-          <a:p xmlns:a="http://schemas.openxmlformats.org/drawingml/2006/main">
-            <a:pPr>
-              <a:defRPr sz="1275" b="0">
-                <a:solidFill>
-                  <a:srgbClr val="6EE7B7"/>
-                </a:solidFill>
-                <a:latin typeface="Courier New"/>
-                <a:ea typeface="Courier New"/>
-                <a:cs typeface="Courier New"/>
-              </a:defRPr>
-            </a:pPr>
-            <a:r>
-              <a:rPr sz="1275" b="0">
-                <a:solidFill>
-                  <a:srgbClr val="6EE7B7"/>
-                </a:solidFill>
-                <a:latin typeface="Courier New"/>
-                <a:ea typeface="Courier New"/>
-                <a:cs typeface="Courier New"/>
-              </a:rPr>
-              <a:t>TRY IT · 2 MINUTES</a:t>
-            </a:r>
-          </a:p>
-        </p:txBody>
-      </p:sp>
-      <p:sp>
-        <p:nvSpPr>
-          <p:cNvPr id="2" name="">
-            <a:extLst xmlns:a="http://schemas.openxmlformats.org/drawingml/2006/main">
-              <a:ext uri="{FF2B5EF4-FFF2-40B4-BE49-F238E27FC236}">
-                <a16:creationId xmlns:a16="http://schemas.microsoft.com/office/drawing/2014/main" id="{D0CF9A24-D113-4CF5-ABAD-70F23BFD2C64}"/>
-              </a:ext>
-            </a:extLst>
-          </p:cNvPr>
-          <p:cNvSpPr>
-            <a:spLocks xmlns:a="http://schemas.openxmlformats.org/drawingml/2006/main" noGrp="1"/>
-          </p:cNvSpPr>
-          <p:nvPr/>
-        </p:nvSpPr>
-        <p:spPr>
-          <a:xfrm xmlns:a="http://schemas.openxmlformats.org/drawingml/2006/main">
-            <a:off x="685800" y="885825"/>
-            <a:ext cx="10820400" cy="1066800"/>
-          </a:xfrm>
-          <a:prstGeom xmlns:a="http://schemas.openxmlformats.org/drawingml/2006/main" prst="rect">
-            <a:avLst/>
-          </a:prstGeom>
-          <a:noFill xmlns:a="http://schemas.openxmlformats.org/drawingml/2006/main"/>
-          <a:ln xmlns:a="http://schemas.openxmlformats.org/drawingml/2006/main" w="0">
-            <a:noFill/>
-          </a:ln>
-        </p:spPr>
-        <p:txBody>
-          <a:bodyPr xmlns:a="http://schemas.openxmlformats.org/drawingml/2006/main" anchor="t">
-            <a:normAutofit fontScale="100000"/>
-          </a:bodyPr>
-          <a:lstStyle xmlns:a="http://schemas.openxmlformats.org/drawingml/2006/main"/>
-          <a:p xmlns:a="http://schemas.openxmlformats.org/drawingml/2006/main">
-            <a:pPr>
-              <a:defRPr sz="3600" b="0">
-                <a:solidFill>
-                  <a:srgbClr val="FAFAFA"/>
-                </a:solidFill>
-                <a:latin typeface="Arial"/>
-                <a:ea typeface="Arial"/>
-                <a:cs typeface="Arial"/>
-              </a:defRPr>
-            </a:pPr>
-            <a:r>
-              <a:rPr sz="3600" b="0">
-                <a:solidFill>
-                  <a:srgbClr val="FAFAFA"/>
-                </a:solidFill>
-                <a:latin typeface="Arial"/>
-                <a:ea typeface="Arial"/>
-                <a:cs typeface="Arial"/>
-              </a:rPr>
-              <a:t>Trace the branch</a:t>
-            </a:r>
-          </a:p>
-        </p:txBody>
-      </p:sp>
-      <p:sp>
-        <p:nvSpPr>
-          <p:cNvPr id="3" name="">
-            <a:extLst xmlns:a="http://schemas.openxmlformats.org/drawingml/2006/main">
-              <a:ext uri="{FF2B5EF4-FFF2-40B4-BE49-F238E27FC236}">
-                <a16:creationId xmlns:a16="http://schemas.microsoft.com/office/drawing/2014/main" id="{544DDE5D-FF1C-4A36-AC95-312655830A6D}"/>
-              </a:ext>
-            </a:extLst>
-          </p:cNvPr>
-          <p:cNvSpPr>
-            <a:spLocks xmlns:a="http://schemas.openxmlformats.org/drawingml/2006/main" noGrp="1"/>
-          </p:cNvSpPr>
-          <p:nvPr/>
-        </p:nvSpPr>
-        <p:spPr>
-          <a:xfrm xmlns:a="http://schemas.openxmlformats.org/drawingml/2006/main">
-            <a:off x="685800" y="2200275"/>
-            <a:ext cx="4857750" cy="3124200"/>
-          </a:xfrm>
-          <a:prstGeom xmlns:a="http://schemas.openxmlformats.org/drawingml/2006/main" prst="rect">
-            <a:avLst/>
-          </a:prstGeom>
-          <a:noFill xmlns:a="http://schemas.openxmlformats.org/drawingml/2006/main"/>
-          <a:ln xmlns:a="http://schemas.openxmlformats.org/drawingml/2006/main" w="0">
-            <a:noFill/>
-          </a:ln>
-        </p:spPr>
-        <p:txBody>
-          <a:bodyPr xmlns:a="http://schemas.openxmlformats.org/drawingml/2006/main" anchor="t">
-            <a:normAutofit fontScale="100000"/>
-          </a:bodyPr>
-          <a:lstStyle xmlns:a="http://schemas.openxmlformats.org/drawingml/2006/main"/>
-          <a:p xmlns:a="http://schemas.openxmlformats.org/drawingml/2006/main">
-            <a:pPr>
-              <a:defRPr sz="1950" b="0">
-                <a:solidFill>
-                  <a:srgbClr val="D4D4D8"/>
-                </a:solidFill>
-                <a:latin typeface="Arial"/>
-                <a:ea typeface="Arial"/>
-                <a:cs typeface="Arial"/>
-              </a:defRPr>
-            </a:pPr>
-            <a:r>
-              <a:rPr sz="1950" b="0">
-                <a:solidFill>
-                  <a:srgbClr val="D4D4D8"/>
-                </a:solidFill>
-                <a:latin typeface="Arial"/>
-                <a:ea typeface="Arial"/>
-                <a:cs typeface="Arial"/>
-              </a:rPr>
-              <a:t>Use the previous snippet. Predict the return value for n = 0, 1, and 4.</a:t>
-            </a:r>
-          </a:p>
-          <a:p xmlns:a="http://schemas.openxmlformats.org/drawingml/2006/main">
-            <a:r>
-              <a:t/>
-            </a:r>
-          </a:p>
-          <a:p xmlns:a="http://schemas.openxmlformats.org/drawingml/2006/main">
-            <a:pPr>
-              <a:defRPr sz="1950" b="0">
-                <a:solidFill>
-                  <a:srgbClr val="D4D4D8"/>
-                </a:solidFill>
-                <a:latin typeface="Arial"/>
-                <a:ea typeface="Arial"/>
-                <a:cs typeface="Arial"/>
-              </a:defRPr>
-            </a:pPr>
-            <a:r>
-              <a:rPr sz="1950" b="0">
-                <a:solidFill>
-                  <a:srgbClr val="D4D4D8"/>
-                </a:solidFill>
-                <a:latin typeface="Arial"/>
-                <a:ea typeface="Arial"/>
-                <a:cs typeface="Arial"/>
-              </a:rPr>
-              <a:t>For each input, decide whether ja jumps before following any other line.</a:t>
-            </a:r>
-          </a:p>
-        </p:txBody>
-      </p:sp>
-      <p:sp>
-        <p:nvSpPr>
-          <p:cNvPr id="4" name="">
-            <a:extLst xmlns:a="http://schemas.openxmlformats.org/drawingml/2006/main">
-              <a:ext uri="{FF2B5EF4-FFF2-40B4-BE49-F238E27FC236}">
-                <a16:creationId xmlns:a16="http://schemas.microsoft.com/office/drawing/2014/main" id="{C318D6CE-3357-4CD1-8C54-5276AA111965}"/>
-              </a:ext>
-            </a:extLst>
-          </p:cNvPr>
-          <p:cNvSpPr>
-            <a:spLocks xmlns:a="http://schemas.openxmlformats.org/drawingml/2006/main" noGrp="1"/>
-          </p:cNvSpPr>
-          <p:nvPr/>
-        </p:nvSpPr>
-        <p:spPr>
-          <a:xfrm xmlns:a="http://schemas.openxmlformats.org/drawingml/2006/main">
-            <a:off x="6181725" y="2200275"/>
-            <a:ext cx="5238750" cy="3286125"/>
-          </a:xfrm>
-          <a:prstGeom xmlns:a="http://schemas.openxmlformats.org/drawingml/2006/main" prst="rect">
-            <a:avLst/>
-          </a:prstGeom>
-          <a:noFill xmlns:a="http://schemas.openxmlformats.org/drawingml/2006/main"/>
-          <a:ln xmlns:a="http://schemas.openxmlformats.org/drawingml/2006/main" w="0">
-            <a:noFill/>
-          </a:ln>
-        </p:spPr>
-        <p:txBody>
-          <a:bodyPr xmlns:a="http://schemas.openxmlformats.org/drawingml/2006/main" anchor="t">
-            <a:normAutofit fontScale="100000"/>
-          </a:bodyPr>
-          <a:lstStyle xmlns:a="http://schemas.openxmlformats.org/drawingml/2006/main"/>
-          <a:p xmlns:a="http://schemas.openxmlformats.org/drawingml/2006/main">
-            <a:pPr>
-              <a:defRPr sz="1650" b="0">
-                <a:solidFill>
-                  <a:srgbClr val="A7F3D0"/>
-                </a:solidFill>
-                <a:latin typeface="Courier New"/>
-                <a:ea typeface="Courier New"/>
-                <a:cs typeface="Courier New"/>
-              </a:defRPr>
-            </a:pPr>
-            <a:r>
-              <a:rPr sz="1650" b="0">
-                <a:solidFill>
-                  <a:srgbClr val="A7F3D0"/>
-                </a:solidFill>
-                <a:latin typeface="Courier New"/>
-                <a:ea typeface="Courier New"/>
-                <a:cs typeface="Courier New"/>
-              </a:rPr>
-              <a:t>n = 0  → ja? ___  return ___</a:t>
-            </a:r>
-          </a:p>
-          <a:p xmlns:a="http://schemas.openxmlformats.org/drawingml/2006/main">
-            <a:pPr>
-              <a:defRPr sz="1650" b="0">
-                <a:solidFill>
-                  <a:srgbClr val="A7F3D0"/>
-                </a:solidFill>
-                <a:latin typeface="Courier New"/>
-                <a:ea typeface="Courier New"/>
-                <a:cs typeface="Courier New"/>
-              </a:defRPr>
-            </a:pPr>
-            <a:r>
-              <a:rPr sz="1650" b="0">
-                <a:solidFill>
-                  <a:srgbClr val="A7F3D0"/>
-                </a:solidFill>
-                <a:latin typeface="Courier New"/>
-                <a:ea typeface="Courier New"/>
-                <a:cs typeface="Courier New"/>
-              </a:rPr>
-              <a:t>n = 1  → ja? ___  return ___</a:t>
-            </a:r>
-          </a:p>
-          <a:p xmlns:a="http://schemas.openxmlformats.org/drawingml/2006/main">
-            <a:pPr>
-              <a:defRPr sz="1650" b="0">
-                <a:solidFill>
-                  <a:srgbClr val="A7F3D0"/>
-                </a:solidFill>
-                <a:latin typeface="Courier New"/>
-                <a:ea typeface="Courier New"/>
-                <a:cs typeface="Courier New"/>
-              </a:defRPr>
-            </a:pPr>
-            <a:r>
-              <a:rPr sz="1650" b="0">
-                <a:solidFill>
-                  <a:srgbClr val="A7F3D0"/>
-                </a:solidFill>
-                <a:latin typeface="Courier New"/>
-                <a:ea typeface="Courier New"/>
-                <a:cs typeface="Courier New"/>
-              </a:rPr>
-              <a:t>n = 4  → ja? ___  return ___</a:t>
-            </a:r>
-          </a:p>
-          <a:p xmlns:a="http://schemas.openxmlformats.org/drawingml/2006/main">
-            <a:r>
-              <a:t/>
-            </a:r>
-          </a:p>
-          <a:p xmlns:a="http://schemas.openxmlformats.org/drawingml/2006/main">
-            <a:pPr>
-              <a:defRPr sz="1650" b="0">
-                <a:solidFill>
-                  <a:srgbClr val="A7F3D0"/>
-                </a:solidFill>
-                <a:latin typeface="Courier New"/>
-                <a:ea typeface="Courier New"/>
-                <a:cs typeface="Courier New"/>
-              </a:defRPr>
-            </a:pPr>
-            <a:r>
-              <a:rPr sz="1650" b="0">
-                <a:solidFill>
-                  <a:srgbClr val="A7F3D0"/>
-                </a:solidFill>
-                <a:latin typeface="Courier New"/>
-                <a:ea typeface="Courier New"/>
-                <a:cs typeface="Courier New"/>
-              </a:rPr>
-              <a:t>Hint: “above 1” is strict, not ≥ 1.</a:t>
-            </a:r>
-          </a:p>
-        </p:txBody>
-      </p:sp>
-      <p:sp>
-        <p:nvSpPr>
-          <p:cNvPr id="5" name="">
-            <a:extLst xmlns:a="http://schemas.openxmlformats.org/drawingml/2006/main">
-              <a:ext uri="{FF2B5EF4-FFF2-40B4-BE49-F238E27FC236}">
-                <a16:creationId xmlns:a16="http://schemas.microsoft.com/office/drawing/2014/main" id="{0603EAE2-BF14-4089-A8D2-E9210F3092ED}"/>
-              </a:ext>
-            </a:extLst>
-          </p:cNvPr>
-          <p:cNvSpPr>
-            <a:spLocks xmlns:a="http://schemas.openxmlformats.org/drawingml/2006/main" noGrp="1"/>
-          </p:cNvSpPr>
-          <p:nvPr/>
-        </p:nvSpPr>
-        <p:spPr>
-          <a:xfrm xmlns:a="http://schemas.openxmlformats.org/drawingml/2006/main">
-            <a:off x="685800" y="5743575"/>
-            <a:ext cx="10191750" cy="428625"/>
-          </a:xfrm>
-          <a:prstGeom xmlns:a="http://schemas.openxmlformats.org/drawingml/2006/main" prst="rect">
-            <a:avLst/>
-          </a:prstGeom>
-          <a:noFill xmlns:a="http://schemas.openxmlformats.org/drawingml/2006/main"/>
-          <a:ln xmlns:a="http://schemas.openxmlformats.org/drawingml/2006/main" w="0">
-            <a:noFill/>
-          </a:ln>
-        </p:spPr>
-        <p:txBody>
-          <a:bodyPr xmlns:a="http://schemas.openxmlformats.org/drawingml/2006/main" anchor="t">
-            <a:normAutofit fontScale="100000"/>
-          </a:bodyPr>
-          <a:lstStyle xmlns:a="http://schemas.openxmlformats.org/drawingml/2006/main"/>
-          <a:p xmlns:a="http://schemas.openxmlformats.org/drawingml/2006/main">
-            <a:pPr>
-              <a:defRPr sz="1350" b="0">
-                <a:solidFill>
-                  <a:srgbClr val="A1A1AA"/>
-                </a:solidFill>
-                <a:latin typeface="Arial"/>
-                <a:ea typeface="Arial"/>
-                <a:cs typeface="Arial"/>
-              </a:defRPr>
-            </a:pPr>
-            <a:r>
-              <a:rPr sz="1350" b="0">
-                <a:solidFill>
-                  <a:srgbClr val="A1A1AA"/>
-                </a:solidFill>
-                <a:latin typeface="Arial"/>
-                <a:ea typeface="Arial"/>
-                <a:cs typeface="Arial"/>
-              </a:rPr>
-              <a:t>Check your answer by following only the instructions on the chosen path.</a:t>
-            </a:r>
-          </a:p>
-        </p:txBody>
-      </p:sp>
-      <p:sp>
-        <p:nvSpPr>
-          <p:cNvPr id="6" name="">
-            <a:extLst xmlns:a="http://schemas.openxmlformats.org/drawingml/2006/main">
-              <a:ext uri="{FF2B5EF4-FFF2-40B4-BE49-F238E27FC236}">
-                <a16:creationId xmlns:a16="http://schemas.microsoft.com/office/drawing/2014/main" id="{30255386-80A6-4C69-86A0-86FC511C8C9F}"/>
-              </a:ext>
-            </a:extLst>
-          </p:cNvPr>
-          <p:cNvSpPr>
-            <a:spLocks xmlns:a="http://schemas.openxmlformats.org/drawingml/2006/main" noGrp="1"/>
-          </p:cNvSpPr>
-          <p:nvPr/>
-        </p:nvSpPr>
-        <p:spPr>
-          <a:xfrm xmlns:a="http://schemas.openxmlformats.org/drawingml/2006/main">
-            <a:off x="10477500" y="6210300"/>
-            <a:ext cx="1000125" cy="219075"/>
-          </a:xfrm>
-          <a:prstGeom xmlns:a="http://schemas.openxmlformats.org/drawingml/2006/main" prst="rect">
-            <a:avLst/>
-          </a:prstGeom>
-          <a:noFill xmlns:a="http://schemas.openxmlformats.org/drawingml/2006/main"/>
-          <a:ln xmlns:a="http://schemas.openxmlformats.org/drawingml/2006/main" w="0">
-            <a:noFill/>
-          </a:ln>
-        </p:spPr>
-        <p:txBody>
-          <a:bodyPr xmlns:a="http://schemas.openxmlformats.org/drawingml/2006/main" anchor="t">
-            <a:normAutofit fontScale="79762"/>
-          </a:bodyPr>
-          <a:lstStyle xmlns:a="http://schemas.openxmlformats.org/drawingml/2006/main"/>
-          <a:p xmlns:a="http://schemas.openxmlformats.org/drawingml/2006/main">
-            <a:pPr>
-              <a:defRPr sz="1050" b="0">
-                <a:solidFill>
-                  <a:srgbClr val="71717A"/>
-                </a:solidFill>
-                <a:latin typeface="Courier New"/>
-                <a:ea typeface="Courier New"/>
-                <a:cs typeface="Courier New"/>
-              </a:defRPr>
-            </a:pPr>
-            <a:r>
-              <a:rPr sz="1050" b="0">
-                <a:solidFill>
-                  <a:srgbClr val="71717A"/>
-                </a:solidFill>
-                <a:latin typeface="Courier New"/>
-                <a:ea typeface="Courier New"/>
-                <a:cs typeface="Courier New"/>
-              </a:rPr>
-              <a:t>19 / 26</a:t>
-            </a:r>
-          </a:p>
-        </p:txBody>
-      </p:sp>
-    </p:spTree>
-    <p:extLst>
-      <p:ext uri="{BB962C8B-B14F-4D97-AF65-F5344CB8AC3E}">
-        <p14:creationId xmlns:p14="http://schemas.microsoft.com/office/powerpoint/2010/main" val="466769636"/>
+        <p14:creationId xmlns:p14="http://schemas.microsoft.com/office/powerpoint/2010/main" val="10196595"/>
       </p:ext>
     </p:extLst>
   </p:cSld>
@@ -8521,7 +6910,7 @@
           <p:cNvPr id="7" name="">
             <a:extLst xmlns:a="http://schemas.openxmlformats.org/drawingml/2006/main">
               <a:ext uri="{FF2B5EF4-FFF2-40B4-BE49-F238E27FC236}">
-                <a16:creationId xmlns:a16="http://schemas.microsoft.com/office/drawing/2014/main" id="{8D851566-04AF-43AB-8237-EB8BEC673AA8}"/>
+                <a16:creationId xmlns:a16="http://schemas.microsoft.com/office/drawing/2014/main" id="{5BDFA7D7-A9A4-4E20-B4BB-8F5429B7E714}"/>
               </a:ext>
             </a:extLst>
           </p:cNvPr>
@@ -8578,7 +6967,7 @@
           <p:cNvPr id="2" name="">
             <a:extLst xmlns:a="http://schemas.openxmlformats.org/drawingml/2006/main">
               <a:ext uri="{FF2B5EF4-FFF2-40B4-BE49-F238E27FC236}">
-                <a16:creationId xmlns:a16="http://schemas.microsoft.com/office/drawing/2014/main" id="{EAFF5C18-EE4C-449F-9564-C13B2A194CBB}"/>
+                <a16:creationId xmlns:a16="http://schemas.microsoft.com/office/drawing/2014/main" id="{807B417B-A1A4-4103-A251-41297467A68C}"/>
               </a:ext>
             </a:extLst>
           </p:cNvPr>
@@ -8635,7 +7024,7 @@
           <p:cNvPr id="3" name="">
             <a:extLst xmlns:a="http://schemas.openxmlformats.org/drawingml/2006/main">
               <a:ext uri="{FF2B5EF4-FFF2-40B4-BE49-F238E27FC236}">
-                <a16:creationId xmlns:a16="http://schemas.microsoft.com/office/drawing/2014/main" id="{B2335538-8F23-4797-A232-AC43B2F24175}"/>
+                <a16:creationId xmlns:a16="http://schemas.microsoft.com/office/drawing/2014/main" id="{A6F05AB9-C2BF-4BB7-9199-FEA1FA113B01}"/>
               </a:ext>
             </a:extLst>
           </p:cNvPr>
@@ -8720,7 +7109,7 @@
           <p:cNvPr id="4" name="">
             <a:extLst xmlns:a="http://schemas.openxmlformats.org/drawingml/2006/main">
               <a:ext uri="{FF2B5EF4-FFF2-40B4-BE49-F238E27FC236}">
-                <a16:creationId xmlns:a16="http://schemas.microsoft.com/office/drawing/2014/main" id="{2BB046C1-725F-49E1-A4C3-B64E4F9D0A00}"/>
+                <a16:creationId xmlns:a16="http://schemas.microsoft.com/office/drawing/2014/main" id="{76F2FAC3-6750-4FCE-BD25-11D79F5C3EEC}"/>
               </a:ext>
             </a:extLst>
           </p:cNvPr>
@@ -8879,7 +7268,7 @@
           <p:cNvPr id="5" name="">
             <a:extLst xmlns:a="http://schemas.openxmlformats.org/drawingml/2006/main">
               <a:ext uri="{FF2B5EF4-FFF2-40B4-BE49-F238E27FC236}">
-                <a16:creationId xmlns:a16="http://schemas.microsoft.com/office/drawing/2014/main" id="{4956C47C-1D75-40F4-9C65-E008B359FA8E}"/>
+                <a16:creationId xmlns:a16="http://schemas.microsoft.com/office/drawing/2014/main" id="{4BDF5D24-84A8-44EF-90E7-5DEFDD23FFAC}"/>
               </a:ext>
             </a:extLst>
           </p:cNvPr>
@@ -8936,7 +7325,7 @@
           <p:cNvPr id="6" name="">
             <a:extLst xmlns:a="http://schemas.openxmlformats.org/drawingml/2006/main">
               <a:ext uri="{FF2B5EF4-FFF2-40B4-BE49-F238E27FC236}">
-                <a16:creationId xmlns:a16="http://schemas.microsoft.com/office/drawing/2014/main" id="{C5873E98-D8EE-4990-A4E1-247DD58DED0F}"/>
+                <a16:creationId xmlns:a16="http://schemas.microsoft.com/office/drawing/2014/main" id="{BB18D6FA-A861-47F3-A379-560FF106EC0D}"/>
               </a:ext>
             </a:extLst>
           </p:cNvPr>
@@ -8983,7 +7372,7 @@
                 <a:ea typeface="Courier New"/>
                 <a:cs typeface="Courier New"/>
               </a:rPr>
-              <a:t>02 / 26</a:t>
+              <a:t>02 / 17</a:t>
             </a:r>
           </a:p>
         </p:txBody>
@@ -8991,3594 +7380,7 @@
     </p:spTree>
     <p:extLst>
       <p:ext uri="{BB962C8B-B14F-4D97-AF65-F5344CB8AC3E}">
-        <p14:creationId xmlns:p14="http://schemas.microsoft.com/office/powerpoint/2010/main" val="1232075384"/>
-      </p:ext>
-    </p:extLst>
-  </p:cSld>
-</p:sld>
-</file>
-
-<file path=ppt/slides/slide20.xml><?xml version="1.0" encoding="utf-8"?>
-<p:sld xmlns:p="http://schemas.openxmlformats.org/presentationml/2006/main">
-  <p:cSld>
-    <p:bg>
-      <p:bgPr>
-        <a:solidFill xmlns:a="http://schemas.openxmlformats.org/drawingml/2006/main">
-          <a:srgbClr val="09090B"/>
-        </a:solidFill>
-      </p:bgPr>
-    </p:bg>
-    <p:spTree>
-      <p:nvGrpSpPr>
-        <p:cNvPr id="1" name=""/>
-        <p:cNvGrpSpPr/>
-        <p:nvPr/>
-      </p:nvGrpSpPr>
-      <p:grpSpPr>
-        <a:xfrm xmlns:a="http://schemas.openxmlformats.org/drawingml/2006/main"/>
-      </p:grpSpPr>
-      <p:sp>
-        <p:nvSpPr>
-          <p:cNvPr id="7" name="">
-            <a:extLst xmlns:a="http://schemas.openxmlformats.org/drawingml/2006/main">
-              <a:ext uri="{FF2B5EF4-FFF2-40B4-BE49-F238E27FC236}">
-                <a16:creationId xmlns:a16="http://schemas.microsoft.com/office/drawing/2014/main" id="{4E44F5C6-B0F3-4D5D-9C5C-50ED79E86C90}"/>
-              </a:ext>
-            </a:extLst>
-          </p:cNvPr>
-          <p:cNvSpPr>
-            <a:spLocks xmlns:a="http://schemas.openxmlformats.org/drawingml/2006/main" noGrp="1"/>
-          </p:cNvSpPr>
-          <p:nvPr/>
-        </p:nvSpPr>
-        <p:spPr>
-          <a:xfrm xmlns:a="http://schemas.openxmlformats.org/drawingml/2006/main">
-            <a:off x="685800" y="361950"/>
-            <a:ext cx="10477500" cy="285750"/>
-          </a:xfrm>
-          <a:prstGeom xmlns:a="http://schemas.openxmlformats.org/drawingml/2006/main" prst="rect">
-            <a:avLst/>
-          </a:prstGeom>
-          <a:noFill xmlns:a="http://schemas.openxmlformats.org/drawingml/2006/main"/>
-          <a:ln xmlns:a="http://schemas.openxmlformats.org/drawingml/2006/main" w="0">
-            <a:noFill/>
-          </a:ln>
-        </p:spPr>
-        <p:txBody>
-          <a:bodyPr xmlns:a="http://schemas.openxmlformats.org/drawingml/2006/main" anchor="t">
-            <a:normAutofit fontScale="100000"/>
-          </a:bodyPr>
-          <a:lstStyle xmlns:a="http://schemas.openxmlformats.org/drawingml/2006/main"/>
-          <a:p xmlns:a="http://schemas.openxmlformats.org/drawingml/2006/main">
-            <a:pPr>
-              <a:defRPr sz="1275" b="0">
-                <a:solidFill>
-                  <a:srgbClr val="6EE7B7"/>
-                </a:solidFill>
-                <a:latin typeface="Courier New"/>
-                <a:ea typeface="Courier New"/>
-                <a:cs typeface="Courier New"/>
-              </a:defRPr>
-            </a:pPr>
-            <a:r>
-              <a:rPr sz="1275" b="0">
-                <a:solidFill>
-                  <a:srgbClr val="6EE7B7"/>
-                </a:solidFill>
-                <a:latin typeface="Courier New"/>
-                <a:ea typeface="Courier New"/>
-                <a:cs typeface="Courier New"/>
-              </a:rPr>
-              <a:t>LECTURE 6–7 · REGISTERS</a:t>
-            </a:r>
-          </a:p>
-        </p:txBody>
-      </p:sp>
-      <p:sp>
-        <p:nvSpPr>
-          <p:cNvPr id="2" name="">
-            <a:extLst xmlns:a="http://schemas.openxmlformats.org/drawingml/2006/main">
-              <a:ext uri="{FF2B5EF4-FFF2-40B4-BE49-F238E27FC236}">
-                <a16:creationId xmlns:a16="http://schemas.microsoft.com/office/drawing/2014/main" id="{22A794E9-2B43-4E5C-AE94-398C3A604795}"/>
-              </a:ext>
-            </a:extLst>
-          </p:cNvPr>
-          <p:cNvSpPr>
-            <a:spLocks xmlns:a="http://schemas.openxmlformats.org/drawingml/2006/main" noGrp="1"/>
-          </p:cNvSpPr>
-          <p:nvPr/>
-        </p:nvSpPr>
-        <p:spPr>
-          <a:xfrm xmlns:a="http://schemas.openxmlformats.org/drawingml/2006/main">
-            <a:off x="685800" y="885825"/>
-            <a:ext cx="10820400" cy="1066800"/>
-          </a:xfrm>
-          <a:prstGeom xmlns:a="http://schemas.openxmlformats.org/drawingml/2006/main" prst="rect">
-            <a:avLst/>
-          </a:prstGeom>
-          <a:noFill xmlns:a="http://schemas.openxmlformats.org/drawingml/2006/main"/>
-          <a:ln xmlns:a="http://schemas.openxmlformats.org/drawingml/2006/main" w="0">
-            <a:noFill/>
-          </a:ln>
-        </p:spPr>
-        <p:txBody>
-          <a:bodyPr xmlns:a="http://schemas.openxmlformats.org/drawingml/2006/main" anchor="t">
-            <a:normAutofit fontScale="100000"/>
-          </a:bodyPr>
-          <a:lstStyle xmlns:a="http://schemas.openxmlformats.org/drawingml/2006/main"/>
-          <a:p xmlns:a="http://schemas.openxmlformats.org/drawingml/2006/main">
-            <a:pPr>
-              <a:defRPr sz="3600" b="0">
-                <a:solidFill>
-                  <a:srgbClr val="FAFAFA"/>
-                </a:solidFill>
-                <a:latin typeface="Arial"/>
-                <a:ea typeface="Arial"/>
-                <a:cs typeface="Arial"/>
-              </a:defRPr>
-            </a:pPr>
-            <a:r>
-              <a:rPr sz="3600" b="0">
-                <a:solidFill>
-                  <a:srgbClr val="FAFAFA"/>
-                </a:solidFill>
-                <a:latin typeface="Arial"/>
-                <a:ea typeface="Arial"/>
-                <a:cs typeface="Arial"/>
-              </a:rPr>
-              <a:t>Function calls use conventions</a:t>
-            </a:r>
-          </a:p>
-        </p:txBody>
-      </p:sp>
-      <p:sp>
-        <p:nvSpPr>
-          <p:cNvPr id="3" name="">
-            <a:extLst xmlns:a="http://schemas.openxmlformats.org/drawingml/2006/main">
-              <a:ext uri="{FF2B5EF4-FFF2-40B4-BE49-F238E27FC236}">
-                <a16:creationId xmlns:a16="http://schemas.microsoft.com/office/drawing/2014/main" id="{B1DC4CCA-5AA0-4119-A13A-F07438A7ECBC}"/>
-              </a:ext>
-            </a:extLst>
-          </p:cNvPr>
-          <p:cNvSpPr>
-            <a:spLocks xmlns:a="http://schemas.openxmlformats.org/drawingml/2006/main" noGrp="1"/>
-          </p:cNvSpPr>
-          <p:nvPr/>
-        </p:nvSpPr>
-        <p:spPr>
-          <a:xfrm xmlns:a="http://schemas.openxmlformats.org/drawingml/2006/main">
-            <a:off x="685800" y="2200275"/>
-            <a:ext cx="4857750" cy="3124200"/>
-          </a:xfrm>
-          <a:prstGeom xmlns:a="http://schemas.openxmlformats.org/drawingml/2006/main" prst="rect">
-            <a:avLst/>
-          </a:prstGeom>
-          <a:noFill xmlns:a="http://schemas.openxmlformats.org/drawingml/2006/main"/>
-          <a:ln xmlns:a="http://schemas.openxmlformats.org/drawingml/2006/main" w="0">
-            <a:noFill/>
-          </a:ln>
-        </p:spPr>
-        <p:txBody>
-          <a:bodyPr xmlns:a="http://schemas.openxmlformats.org/drawingml/2006/main" anchor="t">
-            <a:normAutofit fontScale="100000"/>
-          </a:bodyPr>
-          <a:lstStyle xmlns:a="http://schemas.openxmlformats.org/drawingml/2006/main"/>
-          <a:p xmlns:a="http://schemas.openxmlformats.org/drawingml/2006/main">
-            <a:pPr>
-              <a:defRPr sz="1950" b="0">
-                <a:solidFill>
-                  <a:srgbClr val="D4D4D8"/>
-                </a:solidFill>
-                <a:latin typeface="Arial"/>
-                <a:ea typeface="Arial"/>
-                <a:cs typeface="Arial"/>
-              </a:defRPr>
-            </a:pPr>
-            <a:r>
-              <a:rPr sz="1950" b="0">
-                <a:solidFill>
-                  <a:srgbClr val="D4D4D8"/>
-                </a:solidFill>
-                <a:latin typeface="Arial"/>
-                <a:ea typeface="Arial"/>
-                <a:cs typeface="Arial"/>
-              </a:rPr>
-              <a:t>For ordinary integer or pointer arguments on the x86-64 System V ABI, the first arguments use %rdi, %rsi, %rdx, %rcx, %r8, %r9.</a:t>
-            </a:r>
-          </a:p>
-          <a:p xmlns:a="http://schemas.openxmlformats.org/drawingml/2006/main">
-            <a:r>
-              <a:t/>
-            </a:r>
-          </a:p>
-          <a:p xmlns:a="http://schemas.openxmlformats.org/drawingml/2006/main">
-            <a:pPr>
-              <a:defRPr sz="1950" b="0">
-                <a:solidFill>
-                  <a:srgbClr val="D4D4D8"/>
-                </a:solidFill>
-                <a:latin typeface="Arial"/>
-                <a:ea typeface="Arial"/>
-                <a:cs typeface="Arial"/>
-              </a:defRPr>
-            </a:pPr>
-            <a:r>
-              <a:rPr sz="1950" b="0">
-                <a:solidFill>
-                  <a:srgbClr val="D4D4D8"/>
-                </a:solidFill>
-                <a:latin typeface="Arial"/>
-                <a:ea typeface="Arial"/>
-                <a:cs typeface="Arial"/>
-              </a:rPr>
-              <a:t>The return value usually arrives in %rax.</a:t>
-            </a:r>
-          </a:p>
-        </p:txBody>
-      </p:sp>
-      <p:sp>
-        <p:nvSpPr>
-          <p:cNvPr id="4" name="">
-            <a:extLst xmlns:a="http://schemas.openxmlformats.org/drawingml/2006/main">
-              <a:ext uri="{FF2B5EF4-FFF2-40B4-BE49-F238E27FC236}">
-                <a16:creationId xmlns:a16="http://schemas.microsoft.com/office/drawing/2014/main" id="{7B26B2D2-22E4-47D5-8CD1-74FC194B6F12}"/>
-              </a:ext>
-            </a:extLst>
-          </p:cNvPr>
-          <p:cNvSpPr>
-            <a:spLocks xmlns:a="http://schemas.openxmlformats.org/drawingml/2006/main" noGrp="1"/>
-          </p:cNvSpPr>
-          <p:nvPr/>
-        </p:nvSpPr>
-        <p:spPr>
-          <a:xfrm xmlns:a="http://schemas.openxmlformats.org/drawingml/2006/main">
-            <a:off x="6181725" y="2200275"/>
-            <a:ext cx="5238750" cy="3286125"/>
-          </a:xfrm>
-          <a:prstGeom xmlns:a="http://schemas.openxmlformats.org/drawingml/2006/main" prst="rect">
-            <a:avLst/>
-          </a:prstGeom>
-          <a:noFill xmlns:a="http://schemas.openxmlformats.org/drawingml/2006/main"/>
-          <a:ln xmlns:a="http://schemas.openxmlformats.org/drawingml/2006/main" w="0">
-            <a:noFill/>
-          </a:ln>
-        </p:spPr>
-        <p:txBody>
-          <a:bodyPr xmlns:a="http://schemas.openxmlformats.org/drawingml/2006/main" anchor="t">
-            <a:normAutofit fontScale="100000"/>
-          </a:bodyPr>
-          <a:lstStyle xmlns:a="http://schemas.openxmlformats.org/drawingml/2006/main"/>
-          <a:p xmlns:a="http://schemas.openxmlformats.org/drawingml/2006/main">
-            <a:pPr>
-              <a:defRPr sz="1650" b="0">
-                <a:solidFill>
-                  <a:srgbClr val="A7F3D0"/>
-                </a:solidFill>
-                <a:latin typeface="Courier New"/>
-                <a:ea typeface="Courier New"/>
-                <a:cs typeface="Courier New"/>
-              </a:defRPr>
-            </a:pPr>
-            <a:r>
-              <a:rPr sz="1650" b="0">
-                <a:solidFill>
-                  <a:srgbClr val="A7F3D0"/>
-                </a:solidFill>
-                <a:latin typeface="Courier New"/>
-                <a:ea typeface="Courier New"/>
-                <a:cs typeface="Courier New"/>
-              </a:rPr>
-              <a:t>long double_it(long x) {</a:t>
-            </a:r>
-          </a:p>
-          <a:p xmlns:a="http://schemas.openxmlformats.org/drawingml/2006/main">
-            <a:pPr>
-              <a:defRPr sz="1650" b="0">
-                <a:solidFill>
-                  <a:srgbClr val="A7F3D0"/>
-                </a:solidFill>
-                <a:latin typeface="Courier New"/>
-                <a:ea typeface="Courier New"/>
-                <a:cs typeface="Courier New"/>
-              </a:defRPr>
-            </a:pPr>
-            <a:r>
-              <a:rPr sz="1650" b="0">
-                <a:solidFill>
-                  <a:srgbClr val="A7F3D0"/>
-                </a:solidFill>
-                <a:latin typeface="Courier New"/>
-                <a:ea typeface="Courier New"/>
-                <a:cs typeface="Courier New"/>
-              </a:rPr>
-              <a:t>    return 2 * x;</a:t>
-            </a:r>
-          </a:p>
-          <a:p xmlns:a="http://schemas.openxmlformats.org/drawingml/2006/main">
-            <a:pPr>
-              <a:defRPr sz="1650" b="0">
-                <a:solidFill>
-                  <a:srgbClr val="A7F3D0"/>
-                </a:solidFill>
-                <a:latin typeface="Courier New"/>
-                <a:ea typeface="Courier New"/>
-                <a:cs typeface="Courier New"/>
-              </a:defRPr>
-            </a:pPr>
-            <a:r>
-              <a:rPr sz="1650" b="0">
-                <a:solidFill>
-                  <a:srgbClr val="A7F3D0"/>
-                </a:solidFill>
-                <a:latin typeface="Courier New"/>
-                <a:ea typeface="Courier New"/>
-                <a:cs typeface="Courier New"/>
-              </a:rPr>
-              <a:t>}</a:t>
-            </a:r>
-          </a:p>
-          <a:p xmlns:a="http://schemas.openxmlformats.org/drawingml/2006/main">
-            <a:r>
-              <a:t/>
-            </a:r>
-          </a:p>
-          <a:p xmlns:a="http://schemas.openxmlformats.org/drawingml/2006/main">
-            <a:pPr>
-              <a:defRPr sz="1650" b="0">
-                <a:solidFill>
-                  <a:srgbClr val="A7F3D0"/>
-                </a:solidFill>
-                <a:latin typeface="Courier New"/>
-                <a:ea typeface="Courier New"/>
-                <a:cs typeface="Courier New"/>
-              </a:defRPr>
-            </a:pPr>
-            <a:r>
-              <a:rPr sz="1650" b="0">
-                <a:solidFill>
-                  <a:srgbClr val="A7F3D0"/>
-                </a:solidFill>
-                <a:latin typeface="Courier New"/>
-                <a:ea typeface="Courier New"/>
-                <a:cs typeface="Courier New"/>
-              </a:rPr>
-              <a:t>At call:   %rdi = x</a:t>
-            </a:r>
-          </a:p>
-          <a:p xmlns:a="http://schemas.openxmlformats.org/drawingml/2006/main">
-            <a:pPr>
-              <a:defRPr sz="1650" b="0">
-                <a:solidFill>
-                  <a:srgbClr val="A7F3D0"/>
-                </a:solidFill>
-                <a:latin typeface="Courier New"/>
-                <a:ea typeface="Courier New"/>
-                <a:cs typeface="Courier New"/>
-              </a:defRPr>
-            </a:pPr>
-            <a:r>
-              <a:rPr sz="1650" b="0">
-                <a:solidFill>
-                  <a:srgbClr val="A7F3D0"/>
-                </a:solidFill>
-                <a:latin typeface="Courier New"/>
-                <a:ea typeface="Courier New"/>
-                <a:cs typeface="Courier New"/>
-              </a:rPr>
-              <a:t>           call double_it</a:t>
-            </a:r>
-          </a:p>
-          <a:p xmlns:a="http://schemas.openxmlformats.org/drawingml/2006/main">
-            <a:pPr>
-              <a:defRPr sz="1650" b="0">
-                <a:solidFill>
-                  <a:srgbClr val="A7F3D0"/>
-                </a:solidFill>
-                <a:latin typeface="Courier New"/>
-                <a:ea typeface="Courier New"/>
-                <a:cs typeface="Courier New"/>
-              </a:defRPr>
-            </a:pPr>
-            <a:r>
-              <a:rPr sz="1650" b="0">
-                <a:solidFill>
-                  <a:srgbClr val="A7F3D0"/>
-                </a:solidFill>
-                <a:latin typeface="Courier New"/>
-                <a:ea typeface="Courier New"/>
-                <a:cs typeface="Courier New"/>
-              </a:rPr>
-              <a:t>On return: %rax = 2 * x</a:t>
-            </a:r>
-          </a:p>
-        </p:txBody>
-      </p:sp>
-      <p:sp>
-        <p:nvSpPr>
-          <p:cNvPr id="5" name="">
-            <a:extLst xmlns:a="http://schemas.openxmlformats.org/drawingml/2006/main">
-              <a:ext uri="{FF2B5EF4-FFF2-40B4-BE49-F238E27FC236}">
-                <a16:creationId xmlns:a16="http://schemas.microsoft.com/office/drawing/2014/main" id="{2CEF0632-AF45-45C7-B97A-BF03625BEAEC}"/>
-              </a:ext>
-            </a:extLst>
-          </p:cNvPr>
-          <p:cNvSpPr>
-            <a:spLocks xmlns:a="http://schemas.openxmlformats.org/drawingml/2006/main" noGrp="1"/>
-          </p:cNvSpPr>
-          <p:nvPr/>
-        </p:nvSpPr>
-        <p:spPr>
-          <a:xfrm xmlns:a="http://schemas.openxmlformats.org/drawingml/2006/main">
-            <a:off x="685800" y="5743575"/>
-            <a:ext cx="10191750" cy="428625"/>
-          </a:xfrm>
-          <a:prstGeom xmlns:a="http://schemas.openxmlformats.org/drawingml/2006/main" prst="rect">
-            <a:avLst/>
-          </a:prstGeom>
-          <a:noFill xmlns:a="http://schemas.openxmlformats.org/drawingml/2006/main"/>
-          <a:ln xmlns:a="http://schemas.openxmlformats.org/drawingml/2006/main" w="0">
-            <a:noFill/>
-          </a:ln>
-        </p:spPr>
-        <p:txBody>
-          <a:bodyPr xmlns:a="http://schemas.openxmlformats.org/drawingml/2006/main" anchor="t">
-            <a:normAutofit fontScale="100000"/>
-          </a:bodyPr>
-          <a:lstStyle xmlns:a="http://schemas.openxmlformats.org/drawingml/2006/main"/>
-          <a:p xmlns:a="http://schemas.openxmlformats.org/drawingml/2006/main">
-            <a:pPr>
-              <a:defRPr sz="1350" b="0">
-                <a:solidFill>
-                  <a:srgbClr val="A1A1AA"/>
-                </a:solidFill>
-                <a:latin typeface="Arial"/>
-                <a:ea typeface="Arial"/>
-                <a:cs typeface="Arial"/>
-              </a:defRPr>
-            </a:pPr>
-            <a:r>
-              <a:rPr sz="1350" b="0">
-                <a:solidFill>
-                  <a:srgbClr val="A1A1AA"/>
-                </a:solidFill>
-                <a:latin typeface="Arial"/>
-                <a:ea typeface="Arial"/>
-                <a:cs typeface="Arial"/>
-              </a:rPr>
-              <a:t>This convention applies to the Linux x86-64 examples in the lectures; floating point arguments use different registers.</a:t>
-            </a:r>
-          </a:p>
-        </p:txBody>
-      </p:sp>
-      <p:sp>
-        <p:nvSpPr>
-          <p:cNvPr id="6" name="">
-            <a:extLst xmlns:a="http://schemas.openxmlformats.org/drawingml/2006/main">
-              <a:ext uri="{FF2B5EF4-FFF2-40B4-BE49-F238E27FC236}">
-                <a16:creationId xmlns:a16="http://schemas.microsoft.com/office/drawing/2014/main" id="{AAA10E70-E1A5-40EF-947B-26F446CEF7FB}"/>
-              </a:ext>
-            </a:extLst>
-          </p:cNvPr>
-          <p:cNvSpPr>
-            <a:spLocks xmlns:a="http://schemas.openxmlformats.org/drawingml/2006/main" noGrp="1"/>
-          </p:cNvSpPr>
-          <p:nvPr/>
-        </p:nvSpPr>
-        <p:spPr>
-          <a:xfrm xmlns:a="http://schemas.openxmlformats.org/drawingml/2006/main">
-            <a:off x="10477500" y="6210300"/>
-            <a:ext cx="1000125" cy="219075"/>
-          </a:xfrm>
-          <a:prstGeom xmlns:a="http://schemas.openxmlformats.org/drawingml/2006/main" prst="rect">
-            <a:avLst/>
-          </a:prstGeom>
-          <a:noFill xmlns:a="http://schemas.openxmlformats.org/drawingml/2006/main"/>
-          <a:ln xmlns:a="http://schemas.openxmlformats.org/drawingml/2006/main" w="0">
-            <a:noFill/>
-          </a:ln>
-        </p:spPr>
-        <p:txBody>
-          <a:bodyPr xmlns:a="http://schemas.openxmlformats.org/drawingml/2006/main" anchor="t">
-            <a:normAutofit fontScale="79762"/>
-          </a:bodyPr>
-          <a:lstStyle xmlns:a="http://schemas.openxmlformats.org/drawingml/2006/main"/>
-          <a:p xmlns:a="http://schemas.openxmlformats.org/drawingml/2006/main">
-            <a:pPr>
-              <a:defRPr sz="1050" b="0">
-                <a:solidFill>
-                  <a:srgbClr val="71717A"/>
-                </a:solidFill>
-                <a:latin typeface="Courier New"/>
-                <a:ea typeface="Courier New"/>
-                <a:cs typeface="Courier New"/>
-              </a:defRPr>
-            </a:pPr>
-            <a:r>
-              <a:rPr sz="1050" b="0">
-                <a:solidFill>
-                  <a:srgbClr val="71717A"/>
-                </a:solidFill>
-                <a:latin typeface="Courier New"/>
-                <a:ea typeface="Courier New"/>
-                <a:cs typeface="Courier New"/>
-              </a:rPr>
-              <a:t>20 / 26</a:t>
-            </a:r>
-          </a:p>
-        </p:txBody>
-      </p:sp>
-    </p:spTree>
-    <p:extLst>
-      <p:ext uri="{BB962C8B-B14F-4D97-AF65-F5344CB8AC3E}">
-        <p14:creationId xmlns:p14="http://schemas.microsoft.com/office/powerpoint/2010/main" val="1894518872"/>
-      </p:ext>
-    </p:extLst>
-  </p:cSld>
-</p:sld>
-</file>
-
-<file path=ppt/slides/slide21.xml><?xml version="1.0" encoding="utf-8"?>
-<p:sld xmlns:p="http://schemas.openxmlformats.org/presentationml/2006/main">
-  <p:cSld>
-    <p:bg>
-      <p:bgPr>
-        <a:solidFill xmlns:a="http://schemas.openxmlformats.org/drawingml/2006/main">
-          <a:srgbClr val="09090B"/>
-        </a:solidFill>
-      </p:bgPr>
-    </p:bg>
-    <p:spTree>
-      <p:nvGrpSpPr>
-        <p:cNvPr id="1" name=""/>
-        <p:cNvGrpSpPr/>
-        <p:nvPr/>
-      </p:nvGrpSpPr>
-      <p:grpSpPr>
-        <a:xfrm xmlns:a="http://schemas.openxmlformats.org/drawingml/2006/main"/>
-      </p:grpSpPr>
-      <p:sp>
-        <p:nvSpPr>
-          <p:cNvPr id="7" name="">
-            <a:extLst xmlns:a="http://schemas.openxmlformats.org/drawingml/2006/main">
-              <a:ext uri="{FF2B5EF4-FFF2-40B4-BE49-F238E27FC236}">
-                <a16:creationId xmlns:a16="http://schemas.microsoft.com/office/drawing/2014/main" id="{D6CB6258-BBA6-4CC0-9C3D-6FE1B3C02A4A}"/>
-              </a:ext>
-            </a:extLst>
-          </p:cNvPr>
-          <p:cNvSpPr>
-            <a:spLocks xmlns:a="http://schemas.openxmlformats.org/drawingml/2006/main" noGrp="1"/>
-          </p:cNvSpPr>
-          <p:nvPr/>
-        </p:nvSpPr>
-        <p:spPr>
-          <a:xfrm xmlns:a="http://schemas.openxmlformats.org/drawingml/2006/main">
-            <a:off x="685800" y="361950"/>
-            <a:ext cx="10477500" cy="285750"/>
-          </a:xfrm>
-          <a:prstGeom xmlns:a="http://schemas.openxmlformats.org/drawingml/2006/main" prst="rect">
-            <a:avLst/>
-          </a:prstGeom>
-          <a:noFill xmlns:a="http://schemas.openxmlformats.org/drawingml/2006/main"/>
-          <a:ln xmlns:a="http://schemas.openxmlformats.org/drawingml/2006/main" w="0">
-            <a:noFill/>
-          </a:ln>
-        </p:spPr>
-        <p:txBody>
-          <a:bodyPr xmlns:a="http://schemas.openxmlformats.org/drawingml/2006/main" anchor="t">
-            <a:normAutofit fontScale="100000"/>
-          </a:bodyPr>
-          <a:lstStyle xmlns:a="http://schemas.openxmlformats.org/drawingml/2006/main"/>
-          <a:p xmlns:a="http://schemas.openxmlformats.org/drawingml/2006/main">
-            <a:pPr>
-              <a:defRPr sz="1275" b="0">
-                <a:solidFill>
-                  <a:srgbClr val="6EE7B7"/>
-                </a:solidFill>
-                <a:latin typeface="Courier New"/>
-                <a:ea typeface="Courier New"/>
-                <a:cs typeface="Courier New"/>
-              </a:defRPr>
-            </a:pPr>
-            <a:r>
-              <a:rPr sz="1275" b="0">
-                <a:solidFill>
-                  <a:srgbClr val="6EE7B7"/>
-                </a:solidFill>
-                <a:latin typeface="Courier New"/>
-                <a:ea typeface="Courier New"/>
-                <a:cs typeface="Courier New"/>
-              </a:rPr>
-              <a:t>LECTURE 7–8 · STACK FRAMES</a:t>
-            </a:r>
-          </a:p>
-        </p:txBody>
-      </p:sp>
-      <p:sp>
-        <p:nvSpPr>
-          <p:cNvPr id="2" name="">
-            <a:extLst xmlns:a="http://schemas.openxmlformats.org/drawingml/2006/main">
-              <a:ext uri="{FF2B5EF4-FFF2-40B4-BE49-F238E27FC236}">
-                <a16:creationId xmlns:a16="http://schemas.microsoft.com/office/drawing/2014/main" id="{7479E666-998F-4AA1-AD9F-48D47D232678}"/>
-              </a:ext>
-            </a:extLst>
-          </p:cNvPr>
-          <p:cNvSpPr>
-            <a:spLocks xmlns:a="http://schemas.openxmlformats.org/drawingml/2006/main" noGrp="1"/>
-          </p:cNvSpPr>
-          <p:nvPr/>
-        </p:nvSpPr>
-        <p:spPr>
-          <a:xfrm xmlns:a="http://schemas.openxmlformats.org/drawingml/2006/main">
-            <a:off x="685800" y="885825"/>
-            <a:ext cx="10820400" cy="1066800"/>
-          </a:xfrm>
-          <a:prstGeom xmlns:a="http://schemas.openxmlformats.org/drawingml/2006/main" prst="rect">
-            <a:avLst/>
-          </a:prstGeom>
-          <a:noFill xmlns:a="http://schemas.openxmlformats.org/drawingml/2006/main"/>
-          <a:ln xmlns:a="http://schemas.openxmlformats.org/drawingml/2006/main" w="0">
-            <a:noFill/>
-          </a:ln>
-        </p:spPr>
-        <p:txBody>
-          <a:bodyPr xmlns:a="http://schemas.openxmlformats.org/drawingml/2006/main" anchor="t">
-            <a:normAutofit fontScale="100000"/>
-          </a:bodyPr>
-          <a:lstStyle xmlns:a="http://schemas.openxmlformats.org/drawingml/2006/main"/>
-          <a:p xmlns:a="http://schemas.openxmlformats.org/drawingml/2006/main">
-            <a:pPr>
-              <a:defRPr sz="3600" b="0">
-                <a:solidFill>
-                  <a:srgbClr val="FAFAFA"/>
-                </a:solidFill>
-                <a:latin typeface="Arial"/>
-                <a:ea typeface="Arial"/>
-                <a:cs typeface="Arial"/>
-              </a:defRPr>
-            </a:pPr>
-            <a:r>
-              <a:rPr sz="3600" b="0">
-                <a:solidFill>
-                  <a:srgbClr val="FAFAFA"/>
-                </a:solidFill>
-                <a:latin typeface="Arial"/>
-                <a:ea typeface="Arial"/>
-                <a:cs typeface="Arial"/>
-              </a:rPr>
-              <a:t>The stack keeps each call’s state</a:t>
-            </a:r>
-          </a:p>
-        </p:txBody>
-      </p:sp>
-      <p:sp>
-        <p:nvSpPr>
-          <p:cNvPr id="3" name="">
-            <a:extLst xmlns:a="http://schemas.openxmlformats.org/drawingml/2006/main">
-              <a:ext uri="{FF2B5EF4-FFF2-40B4-BE49-F238E27FC236}">
-                <a16:creationId xmlns:a16="http://schemas.microsoft.com/office/drawing/2014/main" id="{DBA8E267-AE1D-4447-A6DA-708A8A8CD3C0}"/>
-              </a:ext>
-            </a:extLst>
-          </p:cNvPr>
-          <p:cNvSpPr>
-            <a:spLocks xmlns:a="http://schemas.openxmlformats.org/drawingml/2006/main" noGrp="1"/>
-          </p:cNvSpPr>
-          <p:nvPr/>
-        </p:nvSpPr>
-        <p:spPr>
-          <a:xfrm xmlns:a="http://schemas.openxmlformats.org/drawingml/2006/main">
-            <a:off x="685800" y="2200275"/>
-            <a:ext cx="4857750" cy="3124200"/>
-          </a:xfrm>
-          <a:prstGeom xmlns:a="http://schemas.openxmlformats.org/drawingml/2006/main" prst="rect">
-            <a:avLst/>
-          </a:prstGeom>
-          <a:noFill xmlns:a="http://schemas.openxmlformats.org/drawingml/2006/main"/>
-          <a:ln xmlns:a="http://schemas.openxmlformats.org/drawingml/2006/main" w="0">
-            <a:noFill/>
-          </a:ln>
-        </p:spPr>
-        <p:txBody>
-          <a:bodyPr xmlns:a="http://schemas.openxmlformats.org/drawingml/2006/main" anchor="t">
-            <a:normAutofit fontScale="100000"/>
-          </a:bodyPr>
-          <a:lstStyle xmlns:a="http://schemas.openxmlformats.org/drawingml/2006/main"/>
-          <a:p xmlns:a="http://schemas.openxmlformats.org/drawingml/2006/main">
-            <a:pPr>
-              <a:defRPr sz="1950" b="0">
-                <a:solidFill>
-                  <a:srgbClr val="D4D4D8"/>
-                </a:solidFill>
-                <a:latin typeface="Arial"/>
-                <a:ea typeface="Arial"/>
-                <a:cs typeface="Arial"/>
-              </a:defRPr>
-            </a:pPr>
-            <a:r>
-              <a:rPr sz="1950" b="0">
-                <a:solidFill>
-                  <a:srgbClr val="D4D4D8"/>
-                </a:solidFill>
-                <a:latin typeface="Arial"/>
-                <a:ea typeface="Arial"/>
-                <a:cs typeface="Arial"/>
-              </a:rPr>
-              <a:t>The stack grows toward lower addresses. %rsp points at its current top.</a:t>
-            </a:r>
-          </a:p>
-          <a:p xmlns:a="http://schemas.openxmlformats.org/drawingml/2006/main">
-            <a:r>
-              <a:t/>
-            </a:r>
-          </a:p>
-          <a:p xmlns:a="http://schemas.openxmlformats.org/drawingml/2006/main">
-            <a:pPr>
-              <a:defRPr sz="1950" b="0">
-                <a:solidFill>
-                  <a:srgbClr val="D4D4D8"/>
-                </a:solidFill>
-                <a:latin typeface="Arial"/>
-                <a:ea typeface="Arial"/>
-                <a:cs typeface="Arial"/>
-              </a:defRPr>
-            </a:pPr>
-            <a:r>
-              <a:rPr sz="1950" b="0">
-                <a:solidFill>
-                  <a:srgbClr val="D4D4D8"/>
-                </a:solidFill>
-                <a:latin typeface="Arial"/>
-                <a:ea typeface="Arial"/>
-                <a:cs typeface="Arial"/>
-              </a:rPr>
-              <a:t>A function may save the old %rbp, set a new frame base, and subtract from %rsp to reserve space for local data.</a:t>
-            </a:r>
-          </a:p>
-        </p:txBody>
-      </p:sp>
-      <p:sp>
-        <p:nvSpPr>
-          <p:cNvPr id="4" name="">
-            <a:extLst xmlns:a="http://schemas.openxmlformats.org/drawingml/2006/main">
-              <a:ext uri="{FF2B5EF4-FFF2-40B4-BE49-F238E27FC236}">
-                <a16:creationId xmlns:a16="http://schemas.microsoft.com/office/drawing/2014/main" id="{7501CCA6-DF34-4AFB-90C1-2BDD4D11359E}"/>
-              </a:ext>
-            </a:extLst>
-          </p:cNvPr>
-          <p:cNvSpPr>
-            <a:spLocks xmlns:a="http://schemas.openxmlformats.org/drawingml/2006/main" noGrp="1"/>
-          </p:cNvSpPr>
-          <p:nvPr/>
-        </p:nvSpPr>
-        <p:spPr>
-          <a:xfrm xmlns:a="http://schemas.openxmlformats.org/drawingml/2006/main">
-            <a:off x="6181725" y="2200275"/>
-            <a:ext cx="5238750" cy="3286125"/>
-          </a:xfrm>
-          <a:prstGeom xmlns:a="http://schemas.openxmlformats.org/drawingml/2006/main" prst="rect">
-            <a:avLst/>
-          </a:prstGeom>
-          <a:noFill xmlns:a="http://schemas.openxmlformats.org/drawingml/2006/main"/>
-          <a:ln xmlns:a="http://schemas.openxmlformats.org/drawingml/2006/main" w="0">
-            <a:noFill/>
-          </a:ln>
-        </p:spPr>
-        <p:txBody>
-          <a:bodyPr xmlns:a="http://schemas.openxmlformats.org/drawingml/2006/main" anchor="t">
-            <a:normAutofit fontScale="100000"/>
-          </a:bodyPr>
-          <a:lstStyle xmlns:a="http://schemas.openxmlformats.org/drawingml/2006/main"/>
-          <a:p xmlns:a="http://schemas.openxmlformats.org/drawingml/2006/main">
-            <a:pPr>
-              <a:defRPr sz="1650" b="0">
-                <a:solidFill>
-                  <a:srgbClr val="A7F3D0"/>
-                </a:solidFill>
-                <a:latin typeface="Courier New"/>
-                <a:ea typeface="Courier New"/>
-                <a:cs typeface="Courier New"/>
-              </a:defRPr>
-            </a:pPr>
-            <a:r>
-              <a:rPr sz="1650" b="0">
-                <a:solidFill>
-                  <a:srgbClr val="A7F3D0"/>
-                </a:solidFill>
-                <a:latin typeface="Courier New"/>
-                <a:ea typeface="Courier New"/>
-                <a:cs typeface="Courier New"/>
-              </a:rPr>
-              <a:t>pushq %rbp        save old frame</a:t>
-            </a:r>
-          </a:p>
-          <a:p xmlns:a="http://schemas.openxmlformats.org/drawingml/2006/main">
-            <a:pPr>
-              <a:defRPr sz="1650" b="0">
-                <a:solidFill>
-                  <a:srgbClr val="A7F3D0"/>
-                </a:solidFill>
-                <a:latin typeface="Courier New"/>
-                <a:ea typeface="Courier New"/>
-                <a:cs typeface="Courier New"/>
-              </a:defRPr>
-            </a:pPr>
-            <a:r>
-              <a:rPr sz="1650" b="0">
-                <a:solidFill>
-                  <a:srgbClr val="A7F3D0"/>
-                </a:solidFill>
-                <a:latin typeface="Courier New"/>
-                <a:ea typeface="Courier New"/>
-                <a:cs typeface="Courier New"/>
-              </a:rPr>
-              <a:t>movq %rsp, %rbp   set frame base</a:t>
-            </a:r>
-          </a:p>
-          <a:p xmlns:a="http://schemas.openxmlformats.org/drawingml/2006/main">
-            <a:pPr>
-              <a:defRPr sz="1650" b="0">
-                <a:solidFill>
-                  <a:srgbClr val="A7F3D0"/>
-                </a:solidFill>
-                <a:latin typeface="Courier New"/>
-                <a:ea typeface="Courier New"/>
-                <a:cs typeface="Courier New"/>
-              </a:defRPr>
-            </a:pPr>
-            <a:r>
-              <a:rPr sz="1650" b="0">
-                <a:solidFill>
-                  <a:srgbClr val="A7F3D0"/>
-                </a:solidFill>
-                <a:latin typeface="Courier New"/>
-                <a:ea typeface="Courier New"/>
-                <a:cs typeface="Courier New"/>
-              </a:rPr>
-              <a:t>subq $16, %rsp   reserve 16 bytes</a:t>
-            </a:r>
-          </a:p>
-          <a:p xmlns:a="http://schemas.openxmlformats.org/drawingml/2006/main">
-            <a:pPr>
-              <a:defRPr sz="1650" b="0">
-                <a:solidFill>
-                  <a:srgbClr val="A7F3D0"/>
-                </a:solidFill>
-                <a:latin typeface="Courier New"/>
-                <a:ea typeface="Courier New"/>
-                <a:cs typeface="Courier New"/>
-              </a:defRPr>
-            </a:pPr>
-            <a:r>
-              <a:rPr sz="1650" b="0">
-                <a:solidFill>
-                  <a:srgbClr val="A7F3D0"/>
-                </a:solidFill>
-                <a:latin typeface="Courier New"/>
-                <a:ea typeface="Courier New"/>
-                <a:cs typeface="Courier New"/>
-              </a:rPr>
-              <a:t>...</a:t>
-            </a:r>
-          </a:p>
-          <a:p xmlns:a="http://schemas.openxmlformats.org/drawingml/2006/main">
-            <a:pPr>
-              <a:defRPr sz="1650" b="0">
-                <a:solidFill>
-                  <a:srgbClr val="A7F3D0"/>
-                </a:solidFill>
-                <a:latin typeface="Courier New"/>
-                <a:ea typeface="Courier New"/>
-                <a:cs typeface="Courier New"/>
-              </a:defRPr>
-            </a:pPr>
-            <a:r>
-              <a:rPr sz="1650" b="0">
-                <a:solidFill>
-                  <a:srgbClr val="A7F3D0"/>
-                </a:solidFill>
-                <a:latin typeface="Courier New"/>
-                <a:ea typeface="Courier New"/>
-                <a:cs typeface="Courier New"/>
-              </a:rPr>
-              <a:t>leave             restore old frame</a:t>
-            </a:r>
-          </a:p>
-          <a:p xmlns:a="http://schemas.openxmlformats.org/drawingml/2006/main">
-            <a:pPr>
-              <a:defRPr sz="1650" b="0">
-                <a:solidFill>
-                  <a:srgbClr val="A7F3D0"/>
-                </a:solidFill>
-                <a:latin typeface="Courier New"/>
-                <a:ea typeface="Courier New"/>
-                <a:cs typeface="Courier New"/>
-              </a:defRPr>
-            </a:pPr>
-            <a:r>
-              <a:rPr sz="1650" b="0">
-                <a:solidFill>
-                  <a:srgbClr val="A7F3D0"/>
-                </a:solidFill>
-                <a:latin typeface="Courier New"/>
-                <a:ea typeface="Courier New"/>
-                <a:cs typeface="Courier New"/>
-              </a:rPr>
-              <a:t>ret               return to caller</a:t>
-            </a:r>
-          </a:p>
-        </p:txBody>
-      </p:sp>
-      <p:sp>
-        <p:nvSpPr>
-          <p:cNvPr id="5" name="">
-            <a:extLst xmlns:a="http://schemas.openxmlformats.org/drawingml/2006/main">
-              <a:ext uri="{FF2B5EF4-FFF2-40B4-BE49-F238E27FC236}">
-                <a16:creationId xmlns:a16="http://schemas.microsoft.com/office/drawing/2014/main" id="{7D24F0F0-C481-47F0-AFF2-9B88B6E24745}"/>
-              </a:ext>
-            </a:extLst>
-          </p:cNvPr>
-          <p:cNvSpPr>
-            <a:spLocks xmlns:a="http://schemas.openxmlformats.org/drawingml/2006/main" noGrp="1"/>
-          </p:cNvSpPr>
-          <p:nvPr/>
-        </p:nvSpPr>
-        <p:spPr>
-          <a:xfrm xmlns:a="http://schemas.openxmlformats.org/drawingml/2006/main">
-            <a:off x="685800" y="5743575"/>
-            <a:ext cx="10191750" cy="428625"/>
-          </a:xfrm>
-          <a:prstGeom xmlns:a="http://schemas.openxmlformats.org/drawingml/2006/main" prst="rect">
-            <a:avLst/>
-          </a:prstGeom>
-          <a:noFill xmlns:a="http://schemas.openxmlformats.org/drawingml/2006/main"/>
-          <a:ln xmlns:a="http://schemas.openxmlformats.org/drawingml/2006/main" w="0">
-            <a:noFill/>
-          </a:ln>
-        </p:spPr>
-        <p:txBody>
-          <a:bodyPr xmlns:a="http://schemas.openxmlformats.org/drawingml/2006/main" anchor="t">
-            <a:normAutofit fontScale="100000"/>
-          </a:bodyPr>
-          <a:lstStyle xmlns:a="http://schemas.openxmlformats.org/drawingml/2006/main"/>
-          <a:p xmlns:a="http://schemas.openxmlformats.org/drawingml/2006/main">
-            <a:pPr>
-              <a:defRPr sz="1350" b="0">
-                <a:solidFill>
-                  <a:srgbClr val="A1A1AA"/>
-                </a:solidFill>
-                <a:latin typeface="Arial"/>
-                <a:ea typeface="Arial"/>
-                <a:cs typeface="Arial"/>
-              </a:defRPr>
-            </a:pPr>
-            <a:r>
-              <a:rPr sz="1350" b="0">
-                <a:solidFill>
-                  <a:srgbClr val="A1A1AA"/>
-                </a:solidFill>
-                <a:latin typeface="Arial"/>
-                <a:ea typeface="Arial"/>
-                <a:cs typeface="Arial"/>
-              </a:rPr>
-              <a:t>These are common unoptimized patterns, not instructions every function must contain.</a:t>
-            </a:r>
-          </a:p>
-        </p:txBody>
-      </p:sp>
-      <p:sp>
-        <p:nvSpPr>
-          <p:cNvPr id="6" name="">
-            <a:extLst xmlns:a="http://schemas.openxmlformats.org/drawingml/2006/main">
-              <a:ext uri="{FF2B5EF4-FFF2-40B4-BE49-F238E27FC236}">
-                <a16:creationId xmlns:a16="http://schemas.microsoft.com/office/drawing/2014/main" id="{68488E68-0622-4C3B-99D7-9AD1AF278A45}"/>
-              </a:ext>
-            </a:extLst>
-          </p:cNvPr>
-          <p:cNvSpPr>
-            <a:spLocks xmlns:a="http://schemas.openxmlformats.org/drawingml/2006/main" noGrp="1"/>
-          </p:cNvSpPr>
-          <p:nvPr/>
-        </p:nvSpPr>
-        <p:spPr>
-          <a:xfrm xmlns:a="http://schemas.openxmlformats.org/drawingml/2006/main">
-            <a:off x="10477500" y="6210300"/>
-            <a:ext cx="1000125" cy="219075"/>
-          </a:xfrm>
-          <a:prstGeom xmlns:a="http://schemas.openxmlformats.org/drawingml/2006/main" prst="rect">
-            <a:avLst/>
-          </a:prstGeom>
-          <a:noFill xmlns:a="http://schemas.openxmlformats.org/drawingml/2006/main"/>
-          <a:ln xmlns:a="http://schemas.openxmlformats.org/drawingml/2006/main" w="0">
-            <a:noFill/>
-          </a:ln>
-        </p:spPr>
-        <p:txBody>
-          <a:bodyPr xmlns:a="http://schemas.openxmlformats.org/drawingml/2006/main" anchor="t">
-            <a:normAutofit fontScale="79762"/>
-          </a:bodyPr>
-          <a:lstStyle xmlns:a="http://schemas.openxmlformats.org/drawingml/2006/main"/>
-          <a:p xmlns:a="http://schemas.openxmlformats.org/drawingml/2006/main">
-            <a:pPr>
-              <a:defRPr sz="1050" b="0">
-                <a:solidFill>
-                  <a:srgbClr val="71717A"/>
-                </a:solidFill>
-                <a:latin typeface="Courier New"/>
-                <a:ea typeface="Courier New"/>
-                <a:cs typeface="Courier New"/>
-              </a:defRPr>
-            </a:pPr>
-            <a:r>
-              <a:rPr sz="1050" b="0">
-                <a:solidFill>
-                  <a:srgbClr val="71717A"/>
-                </a:solidFill>
-                <a:latin typeface="Courier New"/>
-                <a:ea typeface="Courier New"/>
-                <a:cs typeface="Courier New"/>
-              </a:rPr>
-              <a:t>21 / 26</a:t>
-            </a:r>
-          </a:p>
-        </p:txBody>
-      </p:sp>
-    </p:spTree>
-    <p:extLst>
-      <p:ext uri="{BB962C8B-B14F-4D97-AF65-F5344CB8AC3E}">
-        <p14:creationId xmlns:p14="http://schemas.microsoft.com/office/powerpoint/2010/main" val="692106884"/>
-      </p:ext>
-    </p:extLst>
-  </p:cSld>
-</p:sld>
-</file>
-
-<file path=ppt/slides/slide22.xml><?xml version="1.0" encoding="utf-8"?>
-<p:sld xmlns:p="http://schemas.openxmlformats.org/presentationml/2006/main">
-  <p:cSld>
-    <p:bg>
-      <p:bgPr>
-        <a:solidFill xmlns:a="http://schemas.openxmlformats.org/drawingml/2006/main">
-          <a:srgbClr val="09090B"/>
-        </a:solidFill>
-      </p:bgPr>
-    </p:bg>
-    <p:spTree>
-      <p:nvGrpSpPr>
-        <p:cNvPr id="1" name=""/>
-        <p:cNvGrpSpPr/>
-        <p:nvPr/>
-      </p:nvGrpSpPr>
-      <p:grpSpPr>
-        <a:xfrm xmlns:a="http://schemas.openxmlformats.org/drawingml/2006/main"/>
-      </p:grpSpPr>
-      <p:sp>
-        <p:nvSpPr>
-          <p:cNvPr id="7" name="">
-            <a:extLst xmlns:a="http://schemas.openxmlformats.org/drawingml/2006/main">
-              <a:ext uri="{FF2B5EF4-FFF2-40B4-BE49-F238E27FC236}">
-                <a16:creationId xmlns:a16="http://schemas.microsoft.com/office/drawing/2014/main" id="{DF9ECE8B-B23C-4E20-88C8-3896A9C8C574}"/>
-              </a:ext>
-            </a:extLst>
-          </p:cNvPr>
-          <p:cNvSpPr>
-            <a:spLocks xmlns:a="http://schemas.openxmlformats.org/drawingml/2006/main" noGrp="1"/>
-          </p:cNvSpPr>
-          <p:nvPr/>
-        </p:nvSpPr>
-        <p:spPr>
-          <a:xfrm xmlns:a="http://schemas.openxmlformats.org/drawingml/2006/main">
-            <a:off x="685800" y="361950"/>
-            <a:ext cx="10477500" cy="285750"/>
-          </a:xfrm>
-          <a:prstGeom xmlns:a="http://schemas.openxmlformats.org/drawingml/2006/main" prst="rect">
-            <a:avLst/>
-          </a:prstGeom>
-          <a:noFill xmlns:a="http://schemas.openxmlformats.org/drawingml/2006/main"/>
-          <a:ln xmlns:a="http://schemas.openxmlformats.org/drawingml/2006/main" w="0">
-            <a:noFill/>
-          </a:ln>
-        </p:spPr>
-        <p:txBody>
-          <a:bodyPr xmlns:a="http://schemas.openxmlformats.org/drawingml/2006/main" anchor="t">
-            <a:normAutofit fontScale="100000"/>
-          </a:bodyPr>
-          <a:lstStyle xmlns:a="http://schemas.openxmlformats.org/drawingml/2006/main"/>
-          <a:p xmlns:a="http://schemas.openxmlformats.org/drawingml/2006/main">
-            <a:pPr>
-              <a:defRPr sz="1275" b="0">
-                <a:solidFill>
-                  <a:srgbClr val="6EE7B7"/>
-                </a:solidFill>
-                <a:latin typeface="Courier New"/>
-                <a:ea typeface="Courier New"/>
-                <a:cs typeface="Courier New"/>
-              </a:defRPr>
-            </a:pPr>
-            <a:r>
-              <a:rPr sz="1275" b="0">
-                <a:solidFill>
-                  <a:srgbClr val="6EE7B7"/>
-                </a:solidFill>
-                <a:latin typeface="Courier New"/>
-                <a:ea typeface="Courier New"/>
-                <a:cs typeface="Courier New"/>
-              </a:rPr>
-              <a:t>WORKED EXAMPLE</a:t>
-            </a:r>
-          </a:p>
-        </p:txBody>
-      </p:sp>
-      <p:sp>
-        <p:nvSpPr>
-          <p:cNvPr id="2" name="">
-            <a:extLst xmlns:a="http://schemas.openxmlformats.org/drawingml/2006/main">
-              <a:ext uri="{FF2B5EF4-FFF2-40B4-BE49-F238E27FC236}">
-                <a16:creationId xmlns:a16="http://schemas.microsoft.com/office/drawing/2014/main" id="{490ACD20-CB71-48D1-9C4F-1B4D40C0AF55}"/>
-              </a:ext>
-            </a:extLst>
-          </p:cNvPr>
-          <p:cNvSpPr>
-            <a:spLocks xmlns:a="http://schemas.openxmlformats.org/drawingml/2006/main" noGrp="1"/>
-          </p:cNvSpPr>
-          <p:nvPr/>
-        </p:nvSpPr>
-        <p:spPr>
-          <a:xfrm xmlns:a="http://schemas.openxmlformats.org/drawingml/2006/main">
-            <a:off x="685800" y="885825"/>
-            <a:ext cx="10820400" cy="1066800"/>
-          </a:xfrm>
-          <a:prstGeom xmlns:a="http://schemas.openxmlformats.org/drawingml/2006/main" prst="rect">
-            <a:avLst/>
-          </a:prstGeom>
-          <a:noFill xmlns:a="http://schemas.openxmlformats.org/drawingml/2006/main"/>
-          <a:ln xmlns:a="http://schemas.openxmlformats.org/drawingml/2006/main" w="0">
-            <a:noFill/>
-          </a:ln>
-        </p:spPr>
-        <p:txBody>
-          <a:bodyPr xmlns:a="http://schemas.openxmlformats.org/drawingml/2006/main" anchor="t">
-            <a:normAutofit fontScale="100000"/>
-          </a:bodyPr>
-          <a:lstStyle xmlns:a="http://schemas.openxmlformats.org/drawingml/2006/main"/>
-          <a:p xmlns:a="http://schemas.openxmlformats.org/drawingml/2006/main">
-            <a:pPr>
-              <a:defRPr sz="3600" b="0">
-                <a:solidFill>
-                  <a:srgbClr val="FAFAFA"/>
-                </a:solidFill>
-                <a:latin typeface="Arial"/>
-                <a:ea typeface="Arial"/>
-                <a:cs typeface="Arial"/>
-              </a:defRPr>
-            </a:pPr>
-            <a:r>
-              <a:rPr sz="3600" b="0">
-                <a:solidFill>
-                  <a:srgbClr val="FAFAFA"/>
-                </a:solidFill>
-                <a:latin typeface="Arial"/>
-                <a:ea typeface="Arial"/>
-                <a:cs typeface="Arial"/>
-              </a:rPr>
-              <a:t>A stack frame in addresses</a:t>
-            </a:r>
-          </a:p>
-        </p:txBody>
-      </p:sp>
-      <p:sp>
-        <p:nvSpPr>
-          <p:cNvPr id="3" name="">
-            <a:extLst xmlns:a="http://schemas.openxmlformats.org/drawingml/2006/main">
-              <a:ext uri="{FF2B5EF4-FFF2-40B4-BE49-F238E27FC236}">
-                <a16:creationId xmlns:a16="http://schemas.microsoft.com/office/drawing/2014/main" id="{42CAF0E4-B4BD-4908-A8DF-C8D90E30371D}"/>
-              </a:ext>
-            </a:extLst>
-          </p:cNvPr>
-          <p:cNvSpPr>
-            <a:spLocks xmlns:a="http://schemas.openxmlformats.org/drawingml/2006/main" noGrp="1"/>
-          </p:cNvSpPr>
-          <p:nvPr/>
-        </p:nvSpPr>
-        <p:spPr>
-          <a:xfrm xmlns:a="http://schemas.openxmlformats.org/drawingml/2006/main">
-            <a:off x="685800" y="2200275"/>
-            <a:ext cx="4857750" cy="3124200"/>
-          </a:xfrm>
-          <a:prstGeom xmlns:a="http://schemas.openxmlformats.org/drawingml/2006/main" prst="rect">
-            <a:avLst/>
-          </a:prstGeom>
-          <a:noFill xmlns:a="http://schemas.openxmlformats.org/drawingml/2006/main"/>
-          <a:ln xmlns:a="http://schemas.openxmlformats.org/drawingml/2006/main" w="0">
-            <a:noFill/>
-          </a:ln>
-        </p:spPr>
-        <p:txBody>
-          <a:bodyPr xmlns:a="http://schemas.openxmlformats.org/drawingml/2006/main" anchor="t">
-            <a:normAutofit fontScale="100000"/>
-          </a:bodyPr>
-          <a:lstStyle xmlns:a="http://schemas.openxmlformats.org/drawingml/2006/main"/>
-          <a:p xmlns:a="http://schemas.openxmlformats.org/drawingml/2006/main">
-            <a:pPr>
-              <a:defRPr sz="1950" b="0">
-                <a:solidFill>
-                  <a:srgbClr val="D4D4D8"/>
-                </a:solidFill>
-                <a:latin typeface="Arial"/>
-                <a:ea typeface="Arial"/>
-                <a:cs typeface="Arial"/>
-              </a:defRPr>
-            </a:pPr>
-            <a:r>
-              <a:rPr sz="1950" b="0">
-                <a:solidFill>
-                  <a:srgbClr val="D4D4D8"/>
-                </a:solidFill>
-                <a:latin typeface="Arial"/>
-                <a:ea typeface="Arial"/>
-                <a:cs typeface="Arial"/>
-              </a:rPr>
-              <a:t>Suppose %rsp is 0x1000 just after call has placed the return address on the stack.</a:t>
-            </a:r>
-          </a:p>
-          <a:p xmlns:a="http://schemas.openxmlformats.org/drawingml/2006/main">
-            <a:r>
-              <a:t/>
-            </a:r>
-          </a:p>
-          <a:p xmlns:a="http://schemas.openxmlformats.org/drawingml/2006/main">
-            <a:pPr>
-              <a:defRPr sz="1950" b="0">
-                <a:solidFill>
-                  <a:srgbClr val="D4D4D8"/>
-                </a:solidFill>
-                <a:latin typeface="Arial"/>
-                <a:ea typeface="Arial"/>
-                <a:cs typeface="Arial"/>
-              </a:defRPr>
-            </a:pPr>
-            <a:r>
-              <a:rPr sz="1950" b="0">
-                <a:solidFill>
-                  <a:srgbClr val="D4D4D8"/>
-                </a:solidFill>
-                <a:latin typeface="Arial"/>
-                <a:ea typeface="Arial"/>
-                <a:cs typeface="Arial"/>
-              </a:rPr>
-              <a:t>Follow the three setup instructions. Which address holds the saved %rbp? Where does the new frame begin?</a:t>
-            </a:r>
-          </a:p>
-        </p:txBody>
-      </p:sp>
-      <p:sp>
-        <p:nvSpPr>
-          <p:cNvPr id="4" name="">
-            <a:extLst xmlns:a="http://schemas.openxmlformats.org/drawingml/2006/main">
-              <a:ext uri="{FF2B5EF4-FFF2-40B4-BE49-F238E27FC236}">
-                <a16:creationId xmlns:a16="http://schemas.microsoft.com/office/drawing/2014/main" id="{076D16AC-6246-4BCF-AC54-52506BB24489}"/>
-              </a:ext>
-            </a:extLst>
-          </p:cNvPr>
-          <p:cNvSpPr>
-            <a:spLocks xmlns:a="http://schemas.openxmlformats.org/drawingml/2006/main" noGrp="1"/>
-          </p:cNvSpPr>
-          <p:nvPr/>
-        </p:nvSpPr>
-        <p:spPr>
-          <a:xfrm xmlns:a="http://schemas.openxmlformats.org/drawingml/2006/main">
-            <a:off x="6181725" y="2200275"/>
-            <a:ext cx="5238750" cy="3286125"/>
-          </a:xfrm>
-          <a:prstGeom xmlns:a="http://schemas.openxmlformats.org/drawingml/2006/main" prst="rect">
-            <a:avLst/>
-          </a:prstGeom>
-          <a:noFill xmlns:a="http://schemas.openxmlformats.org/drawingml/2006/main"/>
-          <a:ln xmlns:a="http://schemas.openxmlformats.org/drawingml/2006/main" w="0">
-            <a:noFill/>
-          </a:ln>
-        </p:spPr>
-        <p:txBody>
-          <a:bodyPr xmlns:a="http://schemas.openxmlformats.org/drawingml/2006/main" anchor="t">
-            <a:normAutofit fontScale="100000"/>
-          </a:bodyPr>
-          <a:lstStyle xmlns:a="http://schemas.openxmlformats.org/drawingml/2006/main"/>
-          <a:p xmlns:a="http://schemas.openxmlformats.org/drawingml/2006/main">
-            <a:pPr>
-              <a:defRPr sz="1650" b="0">
-                <a:solidFill>
-                  <a:srgbClr val="A7F3D0"/>
-                </a:solidFill>
-                <a:latin typeface="Courier New"/>
-                <a:ea typeface="Courier New"/>
-                <a:cs typeface="Courier New"/>
-              </a:defRPr>
-            </a:pPr>
-            <a:r>
-              <a:rPr sz="1650" b="0">
-                <a:solidFill>
-                  <a:srgbClr val="A7F3D0"/>
-                </a:solidFill>
-                <a:latin typeface="Courier New"/>
-                <a:ea typeface="Courier New"/>
-                <a:cs typeface="Courier New"/>
-              </a:rPr>
-              <a:t>Start             rsp = 0x1000</a:t>
-            </a:r>
-          </a:p>
-          <a:p xmlns:a="http://schemas.openxmlformats.org/drawingml/2006/main">
-            <a:pPr>
-              <a:defRPr sz="1650" b="0">
-                <a:solidFill>
-                  <a:srgbClr val="A7F3D0"/>
-                </a:solidFill>
-                <a:latin typeface="Courier New"/>
-                <a:ea typeface="Courier New"/>
-                <a:cs typeface="Courier New"/>
-              </a:defRPr>
-            </a:pPr>
-            <a:r>
-              <a:rPr sz="1650" b="0">
-                <a:solidFill>
-                  <a:srgbClr val="A7F3D0"/>
-                </a:solidFill>
-                <a:latin typeface="Courier New"/>
-                <a:ea typeface="Courier New"/>
-                <a:cs typeface="Courier New"/>
-              </a:rPr>
-              <a:t>pushq %rbp        rsp = 0x0ff8</a:t>
-            </a:r>
-          </a:p>
-          <a:p xmlns:a="http://schemas.openxmlformats.org/drawingml/2006/main">
-            <a:pPr>
-              <a:defRPr sz="1650" b="0">
-                <a:solidFill>
-                  <a:srgbClr val="A7F3D0"/>
-                </a:solidFill>
-                <a:latin typeface="Courier New"/>
-                <a:ea typeface="Courier New"/>
-                <a:cs typeface="Courier New"/>
-              </a:defRPr>
-            </a:pPr>
-            <a:r>
-              <a:rPr sz="1650" b="0">
-                <a:solidFill>
-                  <a:srgbClr val="A7F3D0"/>
-                </a:solidFill>
-                <a:latin typeface="Courier New"/>
-                <a:ea typeface="Courier New"/>
-                <a:cs typeface="Courier New"/>
-              </a:rPr>
-              <a:t>movq %rsp,%rbp    rbp = 0x0ff8</a:t>
-            </a:r>
-          </a:p>
-          <a:p xmlns:a="http://schemas.openxmlformats.org/drawingml/2006/main">
-            <a:pPr>
-              <a:defRPr sz="1650" b="0">
-                <a:solidFill>
-                  <a:srgbClr val="A7F3D0"/>
-                </a:solidFill>
-                <a:latin typeface="Courier New"/>
-                <a:ea typeface="Courier New"/>
-                <a:cs typeface="Courier New"/>
-              </a:defRPr>
-            </a:pPr>
-            <a:r>
-              <a:rPr sz="1650" b="0">
-                <a:solidFill>
-                  <a:srgbClr val="A7F3D0"/>
-                </a:solidFill>
-                <a:latin typeface="Courier New"/>
-                <a:ea typeface="Courier New"/>
-                <a:cs typeface="Courier New"/>
-              </a:rPr>
-              <a:t>subq $16,%rsp     rsp = 0x0fe8</a:t>
-            </a:r>
-          </a:p>
-          <a:p xmlns:a="http://schemas.openxmlformats.org/drawingml/2006/main">
-            <a:r>
-              <a:t/>
-            </a:r>
-          </a:p>
-          <a:p xmlns:a="http://schemas.openxmlformats.org/drawingml/2006/main">
-            <a:pPr>
-              <a:defRPr sz="1650" b="0">
-                <a:solidFill>
-                  <a:srgbClr val="A7F3D0"/>
-                </a:solidFill>
-                <a:latin typeface="Courier New"/>
-                <a:ea typeface="Courier New"/>
-                <a:cs typeface="Courier New"/>
-              </a:defRPr>
-            </a:pPr>
-            <a:r>
-              <a:rPr sz="1650" b="0">
-                <a:solidFill>
-                  <a:srgbClr val="A7F3D0"/>
-                </a:solidFill>
-                <a:latin typeface="Courier New"/>
-                <a:ea typeface="Courier New"/>
-                <a:cs typeface="Courier New"/>
-              </a:rPr>
-              <a:t>Saved rbp: [0x0ff8]</a:t>
-            </a:r>
-          </a:p>
-          <a:p xmlns:a="http://schemas.openxmlformats.org/drawingml/2006/main">
-            <a:pPr>
-              <a:defRPr sz="1650" b="0">
-                <a:solidFill>
-                  <a:srgbClr val="A7F3D0"/>
-                </a:solidFill>
-                <a:latin typeface="Courier New"/>
-                <a:ea typeface="Courier New"/>
-                <a:cs typeface="Courier New"/>
-              </a:defRPr>
-            </a:pPr>
-            <a:r>
-              <a:rPr sz="1650" b="0">
-                <a:solidFill>
-                  <a:srgbClr val="A7F3D0"/>
-                </a:solidFill>
-                <a:latin typeface="Courier New"/>
-                <a:ea typeface="Courier New"/>
-                <a:cs typeface="Courier New"/>
-              </a:rPr>
-              <a:t>Return address: [0x1000]</a:t>
-            </a:r>
-          </a:p>
-        </p:txBody>
-      </p:sp>
-      <p:sp>
-        <p:nvSpPr>
-          <p:cNvPr id="5" name="">
-            <a:extLst xmlns:a="http://schemas.openxmlformats.org/drawingml/2006/main">
-              <a:ext uri="{FF2B5EF4-FFF2-40B4-BE49-F238E27FC236}">
-                <a16:creationId xmlns:a16="http://schemas.microsoft.com/office/drawing/2014/main" id="{C76DE0B4-0C15-4123-8440-0FF11A619B0B}"/>
-              </a:ext>
-            </a:extLst>
-          </p:cNvPr>
-          <p:cNvSpPr>
-            <a:spLocks xmlns:a="http://schemas.openxmlformats.org/drawingml/2006/main" noGrp="1"/>
-          </p:cNvSpPr>
-          <p:nvPr/>
-        </p:nvSpPr>
-        <p:spPr>
-          <a:xfrm xmlns:a="http://schemas.openxmlformats.org/drawingml/2006/main">
-            <a:off x="685800" y="5743575"/>
-            <a:ext cx="10191750" cy="428625"/>
-          </a:xfrm>
-          <a:prstGeom xmlns:a="http://schemas.openxmlformats.org/drawingml/2006/main" prst="rect">
-            <a:avLst/>
-          </a:prstGeom>
-          <a:noFill xmlns:a="http://schemas.openxmlformats.org/drawingml/2006/main"/>
-          <a:ln xmlns:a="http://schemas.openxmlformats.org/drawingml/2006/main" w="0">
-            <a:noFill/>
-          </a:ln>
-        </p:spPr>
-        <p:txBody>
-          <a:bodyPr xmlns:a="http://schemas.openxmlformats.org/drawingml/2006/main" anchor="t">
-            <a:normAutofit fontScale="100000"/>
-          </a:bodyPr>
-          <a:lstStyle xmlns:a="http://schemas.openxmlformats.org/drawingml/2006/main"/>
-          <a:p xmlns:a="http://schemas.openxmlformats.org/drawingml/2006/main">
-            <a:pPr>
-              <a:defRPr sz="1350" b="0">
-                <a:solidFill>
-                  <a:srgbClr val="A1A1AA"/>
-                </a:solidFill>
-                <a:latin typeface="Arial"/>
-                <a:ea typeface="Arial"/>
-                <a:cs typeface="Arial"/>
-              </a:defRPr>
-            </a:pPr>
-            <a:r>
-              <a:rPr sz="1350" b="0">
-                <a:solidFill>
-                  <a:srgbClr val="A1A1AA"/>
-                </a:solidFill>
-                <a:latin typeface="Arial"/>
-                <a:ea typeface="Arial"/>
-                <a:cs typeface="Arial"/>
-              </a:rPr>
-              <a:t>Local stack space is at addresses below the new %rbp.</a:t>
-            </a:r>
-          </a:p>
-        </p:txBody>
-      </p:sp>
-      <p:sp>
-        <p:nvSpPr>
-          <p:cNvPr id="6" name="">
-            <a:extLst xmlns:a="http://schemas.openxmlformats.org/drawingml/2006/main">
-              <a:ext uri="{FF2B5EF4-FFF2-40B4-BE49-F238E27FC236}">
-                <a16:creationId xmlns:a16="http://schemas.microsoft.com/office/drawing/2014/main" id="{387BB551-D0A1-42CB-A4D8-FB6926F1B6D6}"/>
-              </a:ext>
-            </a:extLst>
-          </p:cNvPr>
-          <p:cNvSpPr>
-            <a:spLocks xmlns:a="http://schemas.openxmlformats.org/drawingml/2006/main" noGrp="1"/>
-          </p:cNvSpPr>
-          <p:nvPr/>
-        </p:nvSpPr>
-        <p:spPr>
-          <a:xfrm xmlns:a="http://schemas.openxmlformats.org/drawingml/2006/main">
-            <a:off x="10477500" y="6210300"/>
-            <a:ext cx="1000125" cy="219075"/>
-          </a:xfrm>
-          <a:prstGeom xmlns:a="http://schemas.openxmlformats.org/drawingml/2006/main" prst="rect">
-            <a:avLst/>
-          </a:prstGeom>
-          <a:noFill xmlns:a="http://schemas.openxmlformats.org/drawingml/2006/main"/>
-          <a:ln xmlns:a="http://schemas.openxmlformats.org/drawingml/2006/main" w="0">
-            <a:noFill/>
-          </a:ln>
-        </p:spPr>
-        <p:txBody>
-          <a:bodyPr xmlns:a="http://schemas.openxmlformats.org/drawingml/2006/main" anchor="t">
-            <a:normAutofit fontScale="79762"/>
-          </a:bodyPr>
-          <a:lstStyle xmlns:a="http://schemas.openxmlformats.org/drawingml/2006/main"/>
-          <a:p xmlns:a="http://schemas.openxmlformats.org/drawingml/2006/main">
-            <a:pPr>
-              <a:defRPr sz="1050" b="0">
-                <a:solidFill>
-                  <a:srgbClr val="71717A"/>
-                </a:solidFill>
-                <a:latin typeface="Courier New"/>
-                <a:ea typeface="Courier New"/>
-                <a:cs typeface="Courier New"/>
-              </a:defRPr>
-            </a:pPr>
-            <a:r>
-              <a:rPr sz="1050" b="0">
-                <a:solidFill>
-                  <a:srgbClr val="71717A"/>
-                </a:solidFill>
-                <a:latin typeface="Courier New"/>
-                <a:ea typeface="Courier New"/>
-                <a:cs typeface="Courier New"/>
-              </a:rPr>
-              <a:t>22 / 26</a:t>
-            </a:r>
-          </a:p>
-        </p:txBody>
-      </p:sp>
-    </p:spTree>
-    <p:extLst>
-      <p:ext uri="{BB962C8B-B14F-4D97-AF65-F5344CB8AC3E}">
-        <p14:creationId xmlns:p14="http://schemas.microsoft.com/office/powerpoint/2010/main" val="446938757"/>
-      </p:ext>
-    </p:extLst>
-  </p:cSld>
-</p:sld>
-</file>
-
-<file path=ppt/slides/slide23.xml><?xml version="1.0" encoding="utf-8"?>
-<p:sld xmlns:p="http://schemas.openxmlformats.org/presentationml/2006/main">
-  <p:cSld>
-    <p:bg>
-      <p:bgPr>
-        <a:solidFill xmlns:a="http://schemas.openxmlformats.org/drawingml/2006/main">
-          <a:srgbClr val="09090B"/>
-        </a:solidFill>
-      </p:bgPr>
-    </p:bg>
-    <p:spTree>
-      <p:nvGrpSpPr>
-        <p:cNvPr id="1" name=""/>
-        <p:cNvGrpSpPr/>
-        <p:nvPr/>
-      </p:nvGrpSpPr>
-      <p:grpSpPr>
-        <a:xfrm xmlns:a="http://schemas.openxmlformats.org/drawingml/2006/main"/>
-      </p:grpSpPr>
-      <p:sp>
-        <p:nvSpPr>
-          <p:cNvPr id="7" name="">
-            <a:extLst xmlns:a="http://schemas.openxmlformats.org/drawingml/2006/main">
-              <a:ext uri="{FF2B5EF4-FFF2-40B4-BE49-F238E27FC236}">
-                <a16:creationId xmlns:a16="http://schemas.microsoft.com/office/drawing/2014/main" id="{8590715E-5556-4506-99CB-3CFCFF466267}"/>
-              </a:ext>
-            </a:extLst>
-          </p:cNvPr>
-          <p:cNvSpPr>
-            <a:spLocks xmlns:a="http://schemas.openxmlformats.org/drawingml/2006/main" noGrp="1"/>
-          </p:cNvSpPr>
-          <p:nvPr/>
-        </p:nvSpPr>
-        <p:spPr>
-          <a:xfrm xmlns:a="http://schemas.openxmlformats.org/drawingml/2006/main">
-            <a:off x="685800" y="361950"/>
-            <a:ext cx="10477500" cy="285750"/>
-          </a:xfrm>
-          <a:prstGeom xmlns:a="http://schemas.openxmlformats.org/drawingml/2006/main" prst="rect">
-            <a:avLst/>
-          </a:prstGeom>
-          <a:noFill xmlns:a="http://schemas.openxmlformats.org/drawingml/2006/main"/>
-          <a:ln xmlns:a="http://schemas.openxmlformats.org/drawingml/2006/main" w="0">
-            <a:noFill/>
-          </a:ln>
-        </p:spPr>
-        <p:txBody>
-          <a:bodyPr xmlns:a="http://schemas.openxmlformats.org/drawingml/2006/main" anchor="t">
-            <a:normAutofit fontScale="100000"/>
-          </a:bodyPr>
-          <a:lstStyle xmlns:a="http://schemas.openxmlformats.org/drawingml/2006/main"/>
-          <a:p xmlns:a="http://schemas.openxmlformats.org/drawingml/2006/main">
-            <a:pPr>
-              <a:defRPr sz="1275" b="0">
-                <a:solidFill>
-                  <a:srgbClr val="6EE7B7"/>
-                </a:solidFill>
-                <a:latin typeface="Courier New"/>
-                <a:ea typeface="Courier New"/>
-                <a:cs typeface="Courier New"/>
-              </a:defRPr>
-            </a:pPr>
-            <a:r>
-              <a:rPr sz="1275" b="0">
-                <a:solidFill>
-                  <a:srgbClr val="6EE7B7"/>
-                </a:solidFill>
-                <a:latin typeface="Courier New"/>
-                <a:ea typeface="Courier New"/>
-                <a:cs typeface="Courier New"/>
-              </a:rPr>
-              <a:t>LECTURE 8 · C MEETS MEMORY</a:t>
-            </a:r>
-          </a:p>
-        </p:txBody>
-      </p:sp>
-      <p:sp>
-        <p:nvSpPr>
-          <p:cNvPr id="2" name="">
-            <a:extLst xmlns:a="http://schemas.openxmlformats.org/drawingml/2006/main">
-              <a:ext uri="{FF2B5EF4-FFF2-40B4-BE49-F238E27FC236}">
-                <a16:creationId xmlns:a16="http://schemas.microsoft.com/office/drawing/2014/main" id="{82D60D5C-5097-4AFC-A226-6F86C0B22CD8}"/>
-              </a:ext>
-            </a:extLst>
-          </p:cNvPr>
-          <p:cNvSpPr>
-            <a:spLocks xmlns:a="http://schemas.openxmlformats.org/drawingml/2006/main" noGrp="1"/>
-          </p:cNvSpPr>
-          <p:nvPr/>
-        </p:nvSpPr>
-        <p:spPr>
-          <a:xfrm xmlns:a="http://schemas.openxmlformats.org/drawingml/2006/main">
-            <a:off x="685800" y="885825"/>
-            <a:ext cx="10820400" cy="1066800"/>
-          </a:xfrm>
-          <a:prstGeom xmlns:a="http://schemas.openxmlformats.org/drawingml/2006/main" prst="rect">
-            <a:avLst/>
-          </a:prstGeom>
-          <a:noFill xmlns:a="http://schemas.openxmlformats.org/drawingml/2006/main"/>
-          <a:ln xmlns:a="http://schemas.openxmlformats.org/drawingml/2006/main" w="0">
-            <a:noFill/>
-          </a:ln>
-        </p:spPr>
-        <p:txBody>
-          <a:bodyPr xmlns:a="http://schemas.openxmlformats.org/drawingml/2006/main" anchor="t">
-            <a:normAutofit fontScale="100000"/>
-          </a:bodyPr>
-          <a:lstStyle xmlns:a="http://schemas.openxmlformats.org/drawingml/2006/main"/>
-          <a:p xmlns:a="http://schemas.openxmlformats.org/drawingml/2006/main">
-            <a:pPr>
-              <a:defRPr sz="3600" b="0">
-                <a:solidFill>
-                  <a:srgbClr val="FAFAFA"/>
-                </a:solidFill>
-                <a:latin typeface="Arial"/>
-                <a:ea typeface="Arial"/>
-                <a:cs typeface="Arial"/>
-              </a:defRPr>
-            </a:pPr>
-            <a:r>
-              <a:rPr sz="3600" b="0">
-                <a:solidFill>
-                  <a:srgbClr val="FAFAFA"/>
-                </a:solidFill>
-                <a:latin typeface="Arial"/>
-                <a:ea typeface="Arial"/>
-                <a:cs typeface="Arial"/>
-              </a:rPr>
-              <a:t>Arrays and sizeof</a:t>
-            </a:r>
-          </a:p>
-        </p:txBody>
-      </p:sp>
-      <p:sp>
-        <p:nvSpPr>
-          <p:cNvPr id="3" name="">
-            <a:extLst xmlns:a="http://schemas.openxmlformats.org/drawingml/2006/main">
-              <a:ext uri="{FF2B5EF4-FFF2-40B4-BE49-F238E27FC236}">
-                <a16:creationId xmlns:a16="http://schemas.microsoft.com/office/drawing/2014/main" id="{8824CBCE-7260-4C05-873A-8106C8431E65}"/>
-              </a:ext>
-            </a:extLst>
-          </p:cNvPr>
-          <p:cNvSpPr>
-            <a:spLocks xmlns:a="http://schemas.openxmlformats.org/drawingml/2006/main" noGrp="1"/>
-          </p:cNvSpPr>
-          <p:nvPr/>
-        </p:nvSpPr>
-        <p:spPr>
-          <a:xfrm xmlns:a="http://schemas.openxmlformats.org/drawingml/2006/main">
-            <a:off x="685800" y="2200275"/>
-            <a:ext cx="4857750" cy="3124200"/>
-          </a:xfrm>
-          <a:prstGeom xmlns:a="http://schemas.openxmlformats.org/drawingml/2006/main" prst="rect">
-            <a:avLst/>
-          </a:prstGeom>
-          <a:noFill xmlns:a="http://schemas.openxmlformats.org/drawingml/2006/main"/>
-          <a:ln xmlns:a="http://schemas.openxmlformats.org/drawingml/2006/main" w="0">
-            <a:noFill/>
-          </a:ln>
-        </p:spPr>
-        <p:txBody>
-          <a:bodyPr xmlns:a="http://schemas.openxmlformats.org/drawingml/2006/main" anchor="t">
-            <a:normAutofit fontScale="100000"/>
-          </a:bodyPr>
-          <a:lstStyle xmlns:a="http://schemas.openxmlformats.org/drawingml/2006/main"/>
-          <a:p xmlns:a="http://schemas.openxmlformats.org/drawingml/2006/main">
-            <a:pPr>
-              <a:defRPr sz="1950" b="0">
-                <a:solidFill>
-                  <a:srgbClr val="D4D4D8"/>
-                </a:solidFill>
-                <a:latin typeface="Arial"/>
-                <a:ea typeface="Arial"/>
-                <a:cs typeface="Arial"/>
-              </a:defRPr>
-            </a:pPr>
-            <a:r>
-              <a:rPr sz="1950" b="0">
-                <a:solidFill>
-                  <a:srgbClr val="D4D4D8"/>
-                </a:solidFill>
-                <a:latin typeface="Arial"/>
-                <a:ea typeface="Arial"/>
-                <a:cs typeface="Arial"/>
-              </a:rPr>
-              <a:t>An array stores elements in consecutive memory. In its own scope, sizeof array measures its total bytes.</a:t>
-            </a:r>
-          </a:p>
-          <a:p xmlns:a="http://schemas.openxmlformats.org/drawingml/2006/main">
-            <a:r>
-              <a:t/>
-            </a:r>
-          </a:p>
-          <a:p xmlns:a="http://schemas.openxmlformats.org/drawingml/2006/main">
-            <a:pPr>
-              <a:defRPr sz="1950" b="0">
-                <a:solidFill>
-                  <a:srgbClr val="D4D4D8"/>
-                </a:solidFill>
-                <a:latin typeface="Arial"/>
-                <a:ea typeface="Arial"/>
-                <a:cs typeface="Arial"/>
-              </a:defRPr>
-            </a:pPr>
-            <a:r>
-              <a:rPr sz="1950" b="0">
-                <a:solidFill>
-                  <a:srgbClr val="D4D4D8"/>
-                </a:solidFill>
-                <a:latin typeface="Arial"/>
-                <a:ea typeface="Arial"/>
-                <a:cs typeface="Arial"/>
-              </a:rPr>
-              <a:t>A function parameter written as int a[] is treated as a pointer, so sizeof a there measures the pointer.</a:t>
-            </a:r>
-          </a:p>
-        </p:txBody>
-      </p:sp>
-      <p:sp>
-        <p:nvSpPr>
-          <p:cNvPr id="4" name="">
-            <a:extLst xmlns:a="http://schemas.openxmlformats.org/drawingml/2006/main">
-              <a:ext uri="{FF2B5EF4-FFF2-40B4-BE49-F238E27FC236}">
-                <a16:creationId xmlns:a16="http://schemas.microsoft.com/office/drawing/2014/main" id="{53F3EF8A-5CA0-46A6-9CBD-8AE88915A418}"/>
-              </a:ext>
-            </a:extLst>
-          </p:cNvPr>
-          <p:cNvSpPr>
-            <a:spLocks xmlns:a="http://schemas.openxmlformats.org/drawingml/2006/main" noGrp="1"/>
-          </p:cNvSpPr>
-          <p:nvPr/>
-        </p:nvSpPr>
-        <p:spPr>
-          <a:xfrm xmlns:a="http://schemas.openxmlformats.org/drawingml/2006/main">
-            <a:off x="6181725" y="2200275"/>
-            <a:ext cx="5238750" cy="3286125"/>
-          </a:xfrm>
-          <a:prstGeom xmlns:a="http://schemas.openxmlformats.org/drawingml/2006/main" prst="rect">
-            <a:avLst/>
-          </a:prstGeom>
-          <a:noFill xmlns:a="http://schemas.openxmlformats.org/drawingml/2006/main"/>
-          <a:ln xmlns:a="http://schemas.openxmlformats.org/drawingml/2006/main" w="0">
-            <a:noFill/>
-          </a:ln>
-        </p:spPr>
-        <p:txBody>
-          <a:bodyPr xmlns:a="http://schemas.openxmlformats.org/drawingml/2006/main" anchor="t">
-            <a:normAutofit fontScale="100000"/>
-          </a:bodyPr>
-          <a:lstStyle xmlns:a="http://schemas.openxmlformats.org/drawingml/2006/main"/>
-          <a:p xmlns:a="http://schemas.openxmlformats.org/drawingml/2006/main">
-            <a:pPr>
-              <a:defRPr sz="1650" b="0">
-                <a:solidFill>
-                  <a:srgbClr val="A7F3D0"/>
-                </a:solidFill>
-                <a:latin typeface="Courier New"/>
-                <a:ea typeface="Courier New"/>
-                <a:cs typeface="Courier New"/>
-              </a:defRPr>
-            </a:pPr>
-            <a:r>
-              <a:rPr sz="1650" b="0">
-                <a:solidFill>
-                  <a:srgbClr val="A7F3D0"/>
-                </a:solidFill>
-                <a:latin typeface="Courier New"/>
-                <a:ea typeface="Courier New"/>
-                <a:cs typeface="Courier New"/>
-              </a:rPr>
-              <a:t>int a[5];</a:t>
-            </a:r>
-          </a:p>
-          <a:p xmlns:a="http://schemas.openxmlformats.org/drawingml/2006/main">
-            <a:pPr>
-              <a:defRPr sz="1650" b="0">
-                <a:solidFill>
-                  <a:srgbClr val="A7F3D0"/>
-                </a:solidFill>
-                <a:latin typeface="Courier New"/>
-                <a:ea typeface="Courier New"/>
-                <a:cs typeface="Courier New"/>
-              </a:defRPr>
-            </a:pPr>
-            <a:r>
-              <a:rPr sz="1650" b="0">
-                <a:solidFill>
-                  <a:srgbClr val="A7F3D0"/>
-                </a:solidFill>
-                <a:latin typeface="Courier New"/>
-                <a:ea typeface="Courier New"/>
-                <a:cs typeface="Courier New"/>
-              </a:rPr>
-              <a:t>sizeof a / sizeof a[0]  → 5</a:t>
-            </a:r>
-          </a:p>
-          <a:p xmlns:a="http://schemas.openxmlformats.org/drawingml/2006/main">
-            <a:r>
-              <a:t/>
-            </a:r>
-          </a:p>
-          <a:p xmlns:a="http://schemas.openxmlformats.org/drawingml/2006/main">
-            <a:pPr>
-              <a:defRPr sz="1650" b="0">
-                <a:solidFill>
-                  <a:srgbClr val="A7F3D0"/>
-                </a:solidFill>
-                <a:latin typeface="Courier New"/>
-                <a:ea typeface="Courier New"/>
-                <a:cs typeface="Courier New"/>
-              </a:defRPr>
-            </a:pPr>
-            <a:r>
-              <a:rPr sz="1650" b="0">
-                <a:solidFill>
-                  <a:srgbClr val="A7F3D0"/>
-                </a:solidFill>
-                <a:latin typeface="Courier New"/>
-                <a:ea typeface="Courier New"/>
-                <a:cs typeface="Courier New"/>
-              </a:rPr>
-              <a:t>void f(int a[], int length) {</a:t>
-            </a:r>
-          </a:p>
-          <a:p xmlns:a="http://schemas.openxmlformats.org/drawingml/2006/main">
-            <a:pPr>
-              <a:defRPr sz="1650" b="0">
-                <a:solidFill>
-                  <a:srgbClr val="A7F3D0"/>
-                </a:solidFill>
-                <a:latin typeface="Courier New"/>
-                <a:ea typeface="Courier New"/>
-                <a:cs typeface="Courier New"/>
-              </a:defRPr>
-            </a:pPr>
-            <a:r>
-              <a:rPr sz="1650" b="0">
-                <a:solidFill>
-                  <a:srgbClr val="A7F3D0"/>
-                </a:solidFill>
-                <a:latin typeface="Courier New"/>
-                <a:ea typeface="Courier New"/>
-                <a:cs typeface="Courier New"/>
-              </a:rPr>
-              <a:t>    // use length for bounds</a:t>
-            </a:r>
-          </a:p>
-          <a:p xmlns:a="http://schemas.openxmlformats.org/drawingml/2006/main">
-            <a:pPr>
-              <a:defRPr sz="1650" b="0">
-                <a:solidFill>
-                  <a:srgbClr val="A7F3D0"/>
-                </a:solidFill>
-                <a:latin typeface="Courier New"/>
-                <a:ea typeface="Courier New"/>
-                <a:cs typeface="Courier New"/>
-              </a:defRPr>
-            </a:pPr>
-            <a:r>
-              <a:rPr sz="1650" b="0">
-                <a:solidFill>
-                  <a:srgbClr val="A7F3D0"/>
-                </a:solidFill>
-                <a:latin typeface="Courier New"/>
-                <a:ea typeface="Courier New"/>
-                <a:cs typeface="Courier New"/>
-              </a:rPr>
-              <a:t>}</a:t>
-            </a:r>
-          </a:p>
-        </p:txBody>
-      </p:sp>
-      <p:sp>
-        <p:nvSpPr>
-          <p:cNvPr id="5" name="">
-            <a:extLst xmlns:a="http://schemas.openxmlformats.org/drawingml/2006/main">
-              <a:ext uri="{FF2B5EF4-FFF2-40B4-BE49-F238E27FC236}">
-                <a16:creationId xmlns:a16="http://schemas.microsoft.com/office/drawing/2014/main" id="{55CDC612-C221-42AB-9D87-FE77B53CF706}"/>
-              </a:ext>
-            </a:extLst>
-          </p:cNvPr>
-          <p:cNvSpPr>
-            <a:spLocks xmlns:a="http://schemas.openxmlformats.org/drawingml/2006/main" noGrp="1"/>
-          </p:cNvSpPr>
-          <p:nvPr/>
-        </p:nvSpPr>
-        <p:spPr>
-          <a:xfrm xmlns:a="http://schemas.openxmlformats.org/drawingml/2006/main">
-            <a:off x="685800" y="5743575"/>
-            <a:ext cx="10191750" cy="428625"/>
-          </a:xfrm>
-          <a:prstGeom xmlns:a="http://schemas.openxmlformats.org/drawingml/2006/main" prst="rect">
-            <a:avLst/>
-          </a:prstGeom>
-          <a:noFill xmlns:a="http://schemas.openxmlformats.org/drawingml/2006/main"/>
-          <a:ln xmlns:a="http://schemas.openxmlformats.org/drawingml/2006/main" w="0">
-            <a:noFill/>
-          </a:ln>
-        </p:spPr>
-        <p:txBody>
-          <a:bodyPr xmlns:a="http://schemas.openxmlformats.org/drawingml/2006/main" anchor="t">
-            <a:normAutofit fontScale="100000"/>
-          </a:bodyPr>
-          <a:lstStyle xmlns:a="http://schemas.openxmlformats.org/drawingml/2006/main"/>
-          <a:p xmlns:a="http://schemas.openxmlformats.org/drawingml/2006/main">
-            <a:pPr>
-              <a:defRPr sz="1350" b="0">
-                <a:solidFill>
-                  <a:srgbClr val="A1A1AA"/>
-                </a:solidFill>
-                <a:latin typeface="Arial"/>
-                <a:ea typeface="Arial"/>
-                <a:cs typeface="Arial"/>
-              </a:defRPr>
-            </a:pPr>
-            <a:r>
-              <a:rPr sz="1350" b="0">
-                <a:solidFill>
-                  <a:srgbClr val="A1A1AA"/>
-                </a:solidFill>
-                <a:latin typeface="Arial"/>
-                <a:ea typeface="Arial"/>
-                <a:cs typeface="Arial"/>
-              </a:rPr>
-              <a:t>For a VLA, sizeof can be evaluated at run time. In a parameter, it still describes a pointer.</a:t>
-            </a:r>
-          </a:p>
-        </p:txBody>
-      </p:sp>
-      <p:sp>
-        <p:nvSpPr>
-          <p:cNvPr id="6" name="">
-            <a:extLst xmlns:a="http://schemas.openxmlformats.org/drawingml/2006/main">
-              <a:ext uri="{FF2B5EF4-FFF2-40B4-BE49-F238E27FC236}">
-                <a16:creationId xmlns:a16="http://schemas.microsoft.com/office/drawing/2014/main" id="{ADD73477-4FA3-4C43-95EC-0D60D66F183D}"/>
-              </a:ext>
-            </a:extLst>
-          </p:cNvPr>
-          <p:cNvSpPr>
-            <a:spLocks xmlns:a="http://schemas.openxmlformats.org/drawingml/2006/main" noGrp="1"/>
-          </p:cNvSpPr>
-          <p:nvPr/>
-        </p:nvSpPr>
-        <p:spPr>
-          <a:xfrm xmlns:a="http://schemas.openxmlformats.org/drawingml/2006/main">
-            <a:off x="10477500" y="6210300"/>
-            <a:ext cx="1000125" cy="219075"/>
-          </a:xfrm>
-          <a:prstGeom xmlns:a="http://schemas.openxmlformats.org/drawingml/2006/main" prst="rect">
-            <a:avLst/>
-          </a:prstGeom>
-          <a:noFill xmlns:a="http://schemas.openxmlformats.org/drawingml/2006/main"/>
-          <a:ln xmlns:a="http://schemas.openxmlformats.org/drawingml/2006/main" w="0">
-            <a:noFill/>
-          </a:ln>
-        </p:spPr>
-        <p:txBody>
-          <a:bodyPr xmlns:a="http://schemas.openxmlformats.org/drawingml/2006/main" anchor="t">
-            <a:normAutofit fontScale="79762"/>
-          </a:bodyPr>
-          <a:lstStyle xmlns:a="http://schemas.openxmlformats.org/drawingml/2006/main"/>
-          <a:p xmlns:a="http://schemas.openxmlformats.org/drawingml/2006/main">
-            <a:pPr>
-              <a:defRPr sz="1050" b="0">
-                <a:solidFill>
-                  <a:srgbClr val="71717A"/>
-                </a:solidFill>
-                <a:latin typeface="Courier New"/>
-                <a:ea typeface="Courier New"/>
-                <a:cs typeface="Courier New"/>
-              </a:defRPr>
-            </a:pPr>
-            <a:r>
-              <a:rPr sz="1050" b="0">
-                <a:solidFill>
-                  <a:srgbClr val="71717A"/>
-                </a:solidFill>
-                <a:latin typeface="Courier New"/>
-                <a:ea typeface="Courier New"/>
-                <a:cs typeface="Courier New"/>
-              </a:rPr>
-              <a:t>23 / 26</a:t>
-            </a:r>
-          </a:p>
-        </p:txBody>
-      </p:sp>
-    </p:spTree>
-    <p:extLst>
-      <p:ext uri="{BB962C8B-B14F-4D97-AF65-F5344CB8AC3E}">
-        <p14:creationId xmlns:p14="http://schemas.microsoft.com/office/powerpoint/2010/main" val="131361384"/>
-      </p:ext>
-    </p:extLst>
-  </p:cSld>
-</p:sld>
-</file>
-
-<file path=ppt/slides/slide24.xml><?xml version="1.0" encoding="utf-8"?>
-<p:sld xmlns:p="http://schemas.openxmlformats.org/presentationml/2006/main">
-  <p:cSld>
-    <p:bg>
-      <p:bgPr>
-        <a:solidFill xmlns:a="http://schemas.openxmlformats.org/drawingml/2006/main">
-          <a:srgbClr val="09090B"/>
-        </a:solidFill>
-      </p:bgPr>
-    </p:bg>
-    <p:spTree>
-      <p:nvGrpSpPr>
-        <p:cNvPr id="1" name=""/>
-        <p:cNvGrpSpPr/>
-        <p:nvPr/>
-      </p:nvGrpSpPr>
-      <p:grpSpPr>
-        <a:xfrm xmlns:a="http://schemas.openxmlformats.org/drawingml/2006/main"/>
-      </p:grpSpPr>
-      <p:sp>
-        <p:nvSpPr>
-          <p:cNvPr id="7" name="">
-            <a:extLst xmlns:a="http://schemas.openxmlformats.org/drawingml/2006/main">
-              <a:ext uri="{FF2B5EF4-FFF2-40B4-BE49-F238E27FC236}">
-                <a16:creationId xmlns:a16="http://schemas.microsoft.com/office/drawing/2014/main" id="{1A4E527B-75C9-41BB-8BD2-46E59ACF945C}"/>
-              </a:ext>
-            </a:extLst>
-          </p:cNvPr>
-          <p:cNvSpPr>
-            <a:spLocks xmlns:a="http://schemas.openxmlformats.org/drawingml/2006/main" noGrp="1"/>
-          </p:cNvSpPr>
-          <p:nvPr/>
-        </p:nvSpPr>
-        <p:spPr>
-          <a:xfrm xmlns:a="http://schemas.openxmlformats.org/drawingml/2006/main">
-            <a:off x="685800" y="361950"/>
-            <a:ext cx="10477500" cy="285750"/>
-          </a:xfrm>
-          <a:prstGeom xmlns:a="http://schemas.openxmlformats.org/drawingml/2006/main" prst="rect">
-            <a:avLst/>
-          </a:prstGeom>
-          <a:noFill xmlns:a="http://schemas.openxmlformats.org/drawingml/2006/main"/>
-          <a:ln xmlns:a="http://schemas.openxmlformats.org/drawingml/2006/main" w="0">
-            <a:noFill/>
-          </a:ln>
-        </p:spPr>
-        <p:txBody>
-          <a:bodyPr xmlns:a="http://schemas.openxmlformats.org/drawingml/2006/main" anchor="t">
-            <a:normAutofit fontScale="100000"/>
-          </a:bodyPr>
-          <a:lstStyle xmlns:a="http://schemas.openxmlformats.org/drawingml/2006/main"/>
-          <a:p xmlns:a="http://schemas.openxmlformats.org/drawingml/2006/main">
-            <a:pPr>
-              <a:defRPr sz="1275" b="0">
-                <a:solidFill>
-                  <a:srgbClr val="6EE7B7"/>
-                </a:solidFill>
-                <a:latin typeface="Courier New"/>
-                <a:ea typeface="Courier New"/>
-                <a:cs typeface="Courier New"/>
-              </a:defRPr>
-            </a:pPr>
-            <a:r>
-              <a:rPr sz="1275" b="0">
-                <a:solidFill>
-                  <a:srgbClr val="6EE7B7"/>
-                </a:solidFill>
-                <a:latin typeface="Courier New"/>
-                <a:ea typeface="Courier New"/>
-                <a:cs typeface="Courier New"/>
-              </a:rPr>
-              <a:t>LECTURE 8 · MEMORY OWNERSHIP</a:t>
-            </a:r>
-          </a:p>
-        </p:txBody>
-      </p:sp>
-      <p:sp>
-        <p:nvSpPr>
-          <p:cNvPr id="2" name="">
-            <a:extLst xmlns:a="http://schemas.openxmlformats.org/drawingml/2006/main">
-              <a:ext uri="{FF2B5EF4-FFF2-40B4-BE49-F238E27FC236}">
-                <a16:creationId xmlns:a16="http://schemas.microsoft.com/office/drawing/2014/main" id="{88781F12-D1F6-4F0F-8C4F-6D14E0665F1D}"/>
-              </a:ext>
-            </a:extLst>
-          </p:cNvPr>
-          <p:cNvSpPr>
-            <a:spLocks xmlns:a="http://schemas.openxmlformats.org/drawingml/2006/main" noGrp="1"/>
-          </p:cNvSpPr>
-          <p:nvPr/>
-        </p:nvSpPr>
-        <p:spPr>
-          <a:xfrm xmlns:a="http://schemas.openxmlformats.org/drawingml/2006/main">
-            <a:off x="685800" y="885825"/>
-            <a:ext cx="10820400" cy="1066800"/>
-          </a:xfrm>
-          <a:prstGeom xmlns:a="http://schemas.openxmlformats.org/drawingml/2006/main" prst="rect">
-            <a:avLst/>
-          </a:prstGeom>
-          <a:noFill xmlns:a="http://schemas.openxmlformats.org/drawingml/2006/main"/>
-          <a:ln xmlns:a="http://schemas.openxmlformats.org/drawingml/2006/main" w="0">
-            <a:noFill/>
-          </a:ln>
-        </p:spPr>
-        <p:txBody>
-          <a:bodyPr xmlns:a="http://schemas.openxmlformats.org/drawingml/2006/main" anchor="t">
-            <a:normAutofit fontScale="100000"/>
-          </a:bodyPr>
-          <a:lstStyle xmlns:a="http://schemas.openxmlformats.org/drawingml/2006/main"/>
-          <a:p xmlns:a="http://schemas.openxmlformats.org/drawingml/2006/main">
-            <a:pPr>
-              <a:defRPr sz="3600" b="0">
-                <a:solidFill>
-                  <a:srgbClr val="FAFAFA"/>
-                </a:solidFill>
-                <a:latin typeface="Arial"/>
-                <a:ea typeface="Arial"/>
-                <a:cs typeface="Arial"/>
-              </a:defRPr>
-            </a:pPr>
-            <a:r>
-              <a:rPr sz="3600" b="0">
-                <a:solidFill>
-                  <a:srgbClr val="FAFAFA"/>
-                </a:solidFill>
-                <a:latin typeface="Arial"/>
-                <a:ea typeface="Arial"/>
-                <a:cs typeface="Arial"/>
-              </a:rPr>
-              <a:t>Variable length arrays and lifetime</a:t>
-            </a:r>
-          </a:p>
-        </p:txBody>
-      </p:sp>
-      <p:sp>
-        <p:nvSpPr>
-          <p:cNvPr id="3" name="">
-            <a:extLst xmlns:a="http://schemas.openxmlformats.org/drawingml/2006/main">
-              <a:ext uri="{FF2B5EF4-FFF2-40B4-BE49-F238E27FC236}">
-                <a16:creationId xmlns:a16="http://schemas.microsoft.com/office/drawing/2014/main" id="{1965108D-54FA-4EA6-B69B-816C27061671}"/>
-              </a:ext>
-            </a:extLst>
-          </p:cNvPr>
-          <p:cNvSpPr>
-            <a:spLocks xmlns:a="http://schemas.openxmlformats.org/drawingml/2006/main" noGrp="1"/>
-          </p:cNvSpPr>
-          <p:nvPr/>
-        </p:nvSpPr>
-        <p:spPr>
-          <a:xfrm xmlns:a="http://schemas.openxmlformats.org/drawingml/2006/main">
-            <a:off x="685800" y="2200275"/>
-            <a:ext cx="4857750" cy="3124200"/>
-          </a:xfrm>
-          <a:prstGeom xmlns:a="http://schemas.openxmlformats.org/drawingml/2006/main" prst="rect">
-            <a:avLst/>
-          </a:prstGeom>
-          <a:noFill xmlns:a="http://schemas.openxmlformats.org/drawingml/2006/main"/>
-          <a:ln xmlns:a="http://schemas.openxmlformats.org/drawingml/2006/main" w="0">
-            <a:noFill/>
-          </a:ln>
-        </p:spPr>
-        <p:txBody>
-          <a:bodyPr xmlns:a="http://schemas.openxmlformats.org/drawingml/2006/main" anchor="t">
-            <a:normAutofit fontScale="100000"/>
-          </a:bodyPr>
-          <a:lstStyle xmlns:a="http://schemas.openxmlformats.org/drawingml/2006/main"/>
-          <a:p xmlns:a="http://schemas.openxmlformats.org/drawingml/2006/main">
-            <a:pPr>
-              <a:defRPr sz="1950" b="0">
-                <a:solidFill>
-                  <a:srgbClr val="D4D4D8"/>
-                </a:solidFill>
-                <a:latin typeface="Arial"/>
-                <a:ea typeface="Arial"/>
-                <a:cs typeface="Arial"/>
-              </a:defRPr>
-            </a:pPr>
-            <a:r>
-              <a:rPr sz="1950" b="0">
-                <a:solidFill>
-                  <a:srgbClr val="D4D4D8"/>
-                </a:solidFill>
-                <a:latin typeface="Arial"/>
-                <a:ea typeface="Arial"/>
-                <a:cs typeface="Arial"/>
-              </a:rPr>
-              <a:t>A VLA gets its length at run time. Its elements need explicit initialization.</a:t>
-            </a:r>
-          </a:p>
-          <a:p xmlns:a="http://schemas.openxmlformats.org/drawingml/2006/main">
-            <a:r>
-              <a:t/>
-            </a:r>
-          </a:p>
-          <a:p xmlns:a="http://schemas.openxmlformats.org/drawingml/2006/main">
-            <a:pPr>
-              <a:defRPr sz="1950" b="0">
-                <a:solidFill>
-                  <a:srgbClr val="D4D4D8"/>
-                </a:solidFill>
-                <a:latin typeface="Arial"/>
-                <a:ea typeface="Arial"/>
-                <a:cs typeface="Arial"/>
-              </a:defRPr>
-            </a:pPr>
-            <a:r>
-              <a:rPr sz="1950" b="0">
-                <a:solidFill>
-                  <a:srgbClr val="D4D4D8"/>
-                </a:solidFill>
-                <a:latin typeface="Arial"/>
-                <a:ea typeface="Arial"/>
-                <a:cs typeface="Arial"/>
-              </a:rPr>
-              <a:t>Local array storage ends when its scope ends, so returning a pointer to that array leaves a dangling pointer.</a:t>
-            </a:r>
-          </a:p>
-        </p:txBody>
-      </p:sp>
-      <p:sp>
-        <p:nvSpPr>
-          <p:cNvPr id="4" name="">
-            <a:extLst xmlns:a="http://schemas.openxmlformats.org/drawingml/2006/main">
-              <a:ext uri="{FF2B5EF4-FFF2-40B4-BE49-F238E27FC236}">
-                <a16:creationId xmlns:a16="http://schemas.microsoft.com/office/drawing/2014/main" id="{469604DC-2292-4E13-ABDC-DCF5ADE833D3}"/>
-              </a:ext>
-            </a:extLst>
-          </p:cNvPr>
-          <p:cNvSpPr>
-            <a:spLocks xmlns:a="http://schemas.openxmlformats.org/drawingml/2006/main" noGrp="1"/>
-          </p:cNvSpPr>
-          <p:nvPr/>
-        </p:nvSpPr>
-        <p:spPr>
-          <a:xfrm xmlns:a="http://schemas.openxmlformats.org/drawingml/2006/main">
-            <a:off x="6181725" y="2200275"/>
-            <a:ext cx="5238750" cy="3286125"/>
-          </a:xfrm>
-          <a:prstGeom xmlns:a="http://schemas.openxmlformats.org/drawingml/2006/main" prst="rect">
-            <a:avLst/>
-          </a:prstGeom>
-          <a:noFill xmlns:a="http://schemas.openxmlformats.org/drawingml/2006/main"/>
-          <a:ln xmlns:a="http://schemas.openxmlformats.org/drawingml/2006/main" w="0">
-            <a:noFill/>
-          </a:ln>
-        </p:spPr>
-        <p:txBody>
-          <a:bodyPr xmlns:a="http://schemas.openxmlformats.org/drawingml/2006/main" anchor="t">
-            <a:normAutofit fontScale="100000"/>
-          </a:bodyPr>
-          <a:lstStyle xmlns:a="http://schemas.openxmlformats.org/drawingml/2006/main"/>
-          <a:p xmlns:a="http://schemas.openxmlformats.org/drawingml/2006/main">
-            <a:pPr>
-              <a:defRPr sz="1650" b="0">
-                <a:solidFill>
-                  <a:srgbClr val="A7F3D0"/>
-                </a:solidFill>
-                <a:latin typeface="Courier New"/>
-                <a:ea typeface="Courier New"/>
-                <a:cs typeface="Courier New"/>
-              </a:defRPr>
-            </a:pPr>
-            <a:r>
-              <a:rPr sz="1650" b="0">
-                <a:solidFill>
-                  <a:srgbClr val="A7F3D0"/>
-                </a:solidFill>
-                <a:latin typeface="Courier New"/>
-                <a:ea typeface="Courier New"/>
-                <a:cs typeface="Courier New"/>
-              </a:rPr>
-              <a:t>int n = get_count();</a:t>
-            </a:r>
-          </a:p>
-          <a:p xmlns:a="http://schemas.openxmlformats.org/drawingml/2006/main">
-            <a:pPr>
-              <a:defRPr sz="1650" b="0">
-                <a:solidFill>
-                  <a:srgbClr val="A7F3D0"/>
-                </a:solidFill>
-                <a:latin typeface="Courier New"/>
-                <a:ea typeface="Courier New"/>
-                <a:cs typeface="Courier New"/>
-              </a:defRPr>
-            </a:pPr>
-            <a:r>
-              <a:rPr sz="1650" b="0">
-                <a:solidFill>
-                  <a:srgbClr val="A7F3D0"/>
-                </a:solidFill>
-                <a:latin typeface="Courier New"/>
-                <a:ea typeface="Courier New"/>
-                <a:cs typeface="Courier New"/>
-              </a:rPr>
-              <a:t>if (n &lt;= 0) return;</a:t>
-            </a:r>
-          </a:p>
-          <a:p xmlns:a="http://schemas.openxmlformats.org/drawingml/2006/main">
-            <a:pPr>
-              <a:defRPr sz="1650" b="0">
-                <a:solidFill>
-                  <a:srgbClr val="A7F3D0"/>
-                </a:solidFill>
-                <a:latin typeface="Courier New"/>
-                <a:ea typeface="Courier New"/>
-                <a:cs typeface="Courier New"/>
-              </a:defRPr>
-            </a:pPr>
-            <a:r>
-              <a:rPr sz="1650" b="0">
-                <a:solidFill>
-                  <a:srgbClr val="A7F3D0"/>
-                </a:solidFill>
-                <a:latin typeface="Courier New"/>
-                <a:ea typeface="Courier New"/>
-                <a:cs typeface="Courier New"/>
-              </a:rPr>
-              <a:t>int a[n];</a:t>
-            </a:r>
-          </a:p>
-          <a:p xmlns:a="http://schemas.openxmlformats.org/drawingml/2006/main">
-            <a:pPr>
-              <a:defRPr sz="1650" b="0">
-                <a:solidFill>
-                  <a:srgbClr val="A7F3D0"/>
-                </a:solidFill>
-                <a:latin typeface="Courier New"/>
-                <a:ea typeface="Courier New"/>
-                <a:cs typeface="Courier New"/>
-              </a:defRPr>
-            </a:pPr>
-            <a:r>
-              <a:rPr sz="1650" b="0">
-                <a:solidFill>
-                  <a:srgbClr val="A7F3D0"/>
-                </a:solidFill>
-                <a:latin typeface="Courier New"/>
-                <a:ea typeface="Courier New"/>
-                <a:cs typeface="Courier New"/>
-              </a:rPr>
-              <a:t>for (int i = 0; i &lt; n; ++i) a[i] = 0;</a:t>
-            </a:r>
-          </a:p>
-          <a:p xmlns:a="http://schemas.openxmlformats.org/drawingml/2006/main">
-            <a:r>
-              <a:t/>
-            </a:r>
-          </a:p>
-          <a:p xmlns:a="http://schemas.openxmlformats.org/drawingml/2006/main">
-            <a:pPr>
-              <a:defRPr sz="1650" b="0">
-                <a:solidFill>
-                  <a:srgbClr val="A7F3D0"/>
-                </a:solidFill>
-                <a:latin typeface="Courier New"/>
-                <a:ea typeface="Courier New"/>
-                <a:cs typeface="Courier New"/>
-              </a:defRPr>
-            </a:pPr>
-            <a:r>
-              <a:rPr sz="1650" b="0">
-                <a:solidFill>
-                  <a:srgbClr val="A7F3D0"/>
-                </a:solidFill>
-                <a:latin typeface="Courier New"/>
-                <a:ea typeface="Courier New"/>
-                <a:cs typeface="Courier New"/>
-              </a:rPr>
-              <a:t>// a is valid only in this scope</a:t>
-            </a:r>
-          </a:p>
-        </p:txBody>
-      </p:sp>
-      <p:sp>
-        <p:nvSpPr>
-          <p:cNvPr id="5" name="">
-            <a:extLst xmlns:a="http://schemas.openxmlformats.org/drawingml/2006/main">
-              <a:ext uri="{FF2B5EF4-FFF2-40B4-BE49-F238E27FC236}">
-                <a16:creationId xmlns:a16="http://schemas.microsoft.com/office/drawing/2014/main" id="{7D3BF107-5180-4233-B694-C22D938AF442}"/>
-              </a:ext>
-            </a:extLst>
-          </p:cNvPr>
-          <p:cNvSpPr>
-            <a:spLocks xmlns:a="http://schemas.openxmlformats.org/drawingml/2006/main" noGrp="1"/>
-          </p:cNvSpPr>
-          <p:nvPr/>
-        </p:nvSpPr>
-        <p:spPr>
-          <a:xfrm xmlns:a="http://schemas.openxmlformats.org/drawingml/2006/main">
-            <a:off x="685800" y="5743575"/>
-            <a:ext cx="10191750" cy="428625"/>
-          </a:xfrm>
-          <a:prstGeom xmlns:a="http://schemas.openxmlformats.org/drawingml/2006/main" prst="rect">
-            <a:avLst/>
-          </a:prstGeom>
-          <a:noFill xmlns:a="http://schemas.openxmlformats.org/drawingml/2006/main"/>
-          <a:ln xmlns:a="http://schemas.openxmlformats.org/drawingml/2006/main" w="0">
-            <a:noFill/>
-          </a:ln>
-        </p:spPr>
-        <p:txBody>
-          <a:bodyPr xmlns:a="http://schemas.openxmlformats.org/drawingml/2006/main" anchor="t">
-            <a:normAutofit fontScale="100000"/>
-          </a:bodyPr>
-          <a:lstStyle xmlns:a="http://schemas.openxmlformats.org/drawingml/2006/main"/>
-          <a:p xmlns:a="http://schemas.openxmlformats.org/drawingml/2006/main">
-            <a:pPr>
-              <a:defRPr sz="1350" b="0">
-                <a:solidFill>
-                  <a:srgbClr val="A1A1AA"/>
-                </a:solidFill>
-                <a:latin typeface="Arial"/>
-                <a:ea typeface="Arial"/>
-                <a:cs typeface="Arial"/>
-              </a:defRPr>
-            </a:pPr>
-            <a:r>
-              <a:rPr sz="1350" b="0">
-                <a:solidFill>
-                  <a:srgbClr val="A1A1AA"/>
-                </a:solidFill>
-                <a:latin typeface="Arial"/>
-                <a:ea typeface="Arial"/>
-                <a:cs typeface="Arial"/>
-              </a:rPr>
-              <a:t>For data that must survive a function return, use an appropriate allocation and ownership plan.</a:t>
-            </a:r>
-          </a:p>
-        </p:txBody>
-      </p:sp>
-      <p:sp>
-        <p:nvSpPr>
-          <p:cNvPr id="6" name="">
-            <a:extLst xmlns:a="http://schemas.openxmlformats.org/drawingml/2006/main">
-              <a:ext uri="{FF2B5EF4-FFF2-40B4-BE49-F238E27FC236}">
-                <a16:creationId xmlns:a16="http://schemas.microsoft.com/office/drawing/2014/main" id="{F07F17B8-3DBB-4D10-AFE1-F119955BA144}"/>
-              </a:ext>
-            </a:extLst>
-          </p:cNvPr>
-          <p:cNvSpPr>
-            <a:spLocks xmlns:a="http://schemas.openxmlformats.org/drawingml/2006/main" noGrp="1"/>
-          </p:cNvSpPr>
-          <p:nvPr/>
-        </p:nvSpPr>
-        <p:spPr>
-          <a:xfrm xmlns:a="http://schemas.openxmlformats.org/drawingml/2006/main">
-            <a:off x="10477500" y="6210300"/>
-            <a:ext cx="1000125" cy="219075"/>
-          </a:xfrm>
-          <a:prstGeom xmlns:a="http://schemas.openxmlformats.org/drawingml/2006/main" prst="rect">
-            <a:avLst/>
-          </a:prstGeom>
-          <a:noFill xmlns:a="http://schemas.openxmlformats.org/drawingml/2006/main"/>
-          <a:ln xmlns:a="http://schemas.openxmlformats.org/drawingml/2006/main" w="0">
-            <a:noFill/>
-          </a:ln>
-        </p:spPr>
-        <p:txBody>
-          <a:bodyPr xmlns:a="http://schemas.openxmlformats.org/drawingml/2006/main" anchor="t">
-            <a:normAutofit fontScale="79762"/>
-          </a:bodyPr>
-          <a:lstStyle xmlns:a="http://schemas.openxmlformats.org/drawingml/2006/main"/>
-          <a:p xmlns:a="http://schemas.openxmlformats.org/drawingml/2006/main">
-            <a:pPr>
-              <a:defRPr sz="1050" b="0">
-                <a:solidFill>
-                  <a:srgbClr val="71717A"/>
-                </a:solidFill>
-                <a:latin typeface="Courier New"/>
-                <a:ea typeface="Courier New"/>
-                <a:cs typeface="Courier New"/>
-              </a:defRPr>
-            </a:pPr>
-            <a:r>
-              <a:rPr sz="1050" b="0">
-                <a:solidFill>
-                  <a:srgbClr val="71717A"/>
-                </a:solidFill>
-                <a:latin typeface="Courier New"/>
-                <a:ea typeface="Courier New"/>
-                <a:cs typeface="Courier New"/>
-              </a:rPr>
-              <a:t>24 / 26</a:t>
-            </a:r>
-          </a:p>
-        </p:txBody>
-      </p:sp>
-    </p:spTree>
-    <p:extLst>
-      <p:ext uri="{BB962C8B-B14F-4D97-AF65-F5344CB8AC3E}">
-        <p14:creationId xmlns:p14="http://schemas.microsoft.com/office/powerpoint/2010/main" val="298913049"/>
-      </p:ext>
-    </p:extLst>
-  </p:cSld>
-</p:sld>
-</file>
-
-<file path=ppt/slides/slide25.xml><?xml version="1.0" encoding="utf-8"?>
-<p:sld xmlns:p="http://schemas.openxmlformats.org/presentationml/2006/main">
-  <p:cSld>
-    <p:bg>
-      <p:bgPr>
-        <a:solidFill xmlns:a="http://schemas.openxmlformats.org/drawingml/2006/main">
-          <a:srgbClr val="09090B"/>
-        </a:solidFill>
-      </p:bgPr>
-    </p:bg>
-    <p:spTree>
-      <p:nvGrpSpPr>
-        <p:cNvPr id="1" name=""/>
-        <p:cNvGrpSpPr/>
-        <p:nvPr/>
-      </p:nvGrpSpPr>
-      <p:grpSpPr>
-        <a:xfrm xmlns:a="http://schemas.openxmlformats.org/drawingml/2006/main"/>
-      </p:grpSpPr>
-      <p:sp>
-        <p:nvSpPr>
-          <p:cNvPr id="7" name="">
-            <a:extLst xmlns:a="http://schemas.openxmlformats.org/drawingml/2006/main">
-              <a:ext uri="{FF2B5EF4-FFF2-40B4-BE49-F238E27FC236}">
-                <a16:creationId xmlns:a16="http://schemas.microsoft.com/office/drawing/2014/main" id="{C6A0EA87-3B46-415F-985F-EECA1D3A9081}"/>
-              </a:ext>
-            </a:extLst>
-          </p:cNvPr>
-          <p:cNvSpPr>
-            <a:spLocks xmlns:a="http://schemas.openxmlformats.org/drawingml/2006/main" noGrp="1"/>
-          </p:cNvSpPr>
-          <p:nvPr/>
-        </p:nvSpPr>
-        <p:spPr>
-          <a:xfrm xmlns:a="http://schemas.openxmlformats.org/drawingml/2006/main">
-            <a:off x="685800" y="361950"/>
-            <a:ext cx="10477500" cy="285750"/>
-          </a:xfrm>
-          <a:prstGeom xmlns:a="http://schemas.openxmlformats.org/drawingml/2006/main" prst="rect">
-            <a:avLst/>
-          </a:prstGeom>
-          <a:noFill xmlns:a="http://schemas.openxmlformats.org/drawingml/2006/main"/>
-          <a:ln xmlns:a="http://schemas.openxmlformats.org/drawingml/2006/main" w="0">
-            <a:noFill/>
-          </a:ln>
-        </p:spPr>
-        <p:txBody>
-          <a:bodyPr xmlns:a="http://schemas.openxmlformats.org/drawingml/2006/main" anchor="t">
-            <a:normAutofit fontScale="100000"/>
-          </a:bodyPr>
-          <a:lstStyle xmlns:a="http://schemas.openxmlformats.org/drawingml/2006/main"/>
-          <a:p xmlns:a="http://schemas.openxmlformats.org/drawingml/2006/main">
-            <a:pPr>
-              <a:defRPr sz="1275" b="0">
-                <a:solidFill>
-                  <a:srgbClr val="6EE7B7"/>
-                </a:solidFill>
-                <a:latin typeface="Courier New"/>
-                <a:ea typeface="Courier New"/>
-                <a:cs typeface="Courier New"/>
-              </a:defRPr>
-            </a:pPr>
-            <a:r>
-              <a:rPr sz="1275" b="0">
-                <a:solidFill>
-                  <a:srgbClr val="6EE7B7"/>
-                </a:solidFill>
-                <a:latin typeface="Courier New"/>
-                <a:ea typeface="Courier New"/>
-                <a:cs typeface="Courier New"/>
-              </a:rPr>
-              <a:t>BOARD PRACTICE · 3 MINUTES</a:t>
-            </a:r>
-          </a:p>
-        </p:txBody>
-      </p:sp>
-      <p:sp>
-        <p:nvSpPr>
-          <p:cNvPr id="2" name="">
-            <a:extLst xmlns:a="http://schemas.openxmlformats.org/drawingml/2006/main">
-              <a:ext uri="{FF2B5EF4-FFF2-40B4-BE49-F238E27FC236}">
-                <a16:creationId xmlns:a16="http://schemas.microsoft.com/office/drawing/2014/main" id="{E3AF9897-55A2-4D9A-A50A-671E7D8C1471}"/>
-              </a:ext>
-            </a:extLst>
-          </p:cNvPr>
-          <p:cNvSpPr>
-            <a:spLocks xmlns:a="http://schemas.openxmlformats.org/drawingml/2006/main" noGrp="1"/>
-          </p:cNvSpPr>
-          <p:nvPr/>
-        </p:nvSpPr>
-        <p:spPr>
-          <a:xfrm xmlns:a="http://schemas.openxmlformats.org/drawingml/2006/main">
-            <a:off x="685800" y="885825"/>
-            <a:ext cx="10820400" cy="1066800"/>
-          </a:xfrm>
-          <a:prstGeom xmlns:a="http://schemas.openxmlformats.org/drawingml/2006/main" prst="rect">
-            <a:avLst/>
-          </a:prstGeom>
-          <a:noFill xmlns:a="http://schemas.openxmlformats.org/drawingml/2006/main"/>
-          <a:ln xmlns:a="http://schemas.openxmlformats.org/drawingml/2006/main" w="0">
-            <a:noFill/>
-          </a:ln>
-        </p:spPr>
-        <p:txBody>
-          <a:bodyPr xmlns:a="http://schemas.openxmlformats.org/drawingml/2006/main" anchor="t">
-            <a:normAutofit fontScale="100000"/>
-          </a:bodyPr>
-          <a:lstStyle xmlns:a="http://schemas.openxmlformats.org/drawingml/2006/main"/>
-          <a:p xmlns:a="http://schemas.openxmlformats.org/drawingml/2006/main">
-            <a:pPr>
-              <a:defRPr sz="3600" b="0">
-                <a:solidFill>
-                  <a:srgbClr val="FAFAFA"/>
-                </a:solidFill>
-                <a:latin typeface="Arial"/>
-                <a:ea typeface="Arial"/>
-                <a:cs typeface="Arial"/>
-              </a:defRPr>
-            </a:pPr>
-            <a:r>
-              <a:rPr sz="3600" b="0">
-                <a:solidFill>
-                  <a:srgbClr val="FAFAFA"/>
-                </a:solidFill>
-                <a:latin typeface="Arial"/>
-                <a:ea typeface="Arial"/>
-                <a:cs typeface="Arial"/>
-              </a:rPr>
-              <a:t>One final trace</a:t>
-            </a:r>
-          </a:p>
-        </p:txBody>
-      </p:sp>
-      <p:sp>
-        <p:nvSpPr>
-          <p:cNvPr id="3" name="">
-            <a:extLst xmlns:a="http://schemas.openxmlformats.org/drawingml/2006/main">
-              <a:ext uri="{FF2B5EF4-FFF2-40B4-BE49-F238E27FC236}">
-                <a16:creationId xmlns:a16="http://schemas.microsoft.com/office/drawing/2014/main" id="{A76ADACC-4000-472D-9EA8-BCA87CECFC52}"/>
-              </a:ext>
-            </a:extLst>
-          </p:cNvPr>
-          <p:cNvSpPr>
-            <a:spLocks xmlns:a="http://schemas.openxmlformats.org/drawingml/2006/main" noGrp="1"/>
-          </p:cNvSpPr>
-          <p:nvPr/>
-        </p:nvSpPr>
-        <p:spPr>
-          <a:xfrm xmlns:a="http://schemas.openxmlformats.org/drawingml/2006/main">
-            <a:off x="685800" y="2200275"/>
-            <a:ext cx="4857750" cy="3124200"/>
-          </a:xfrm>
-          <a:prstGeom xmlns:a="http://schemas.openxmlformats.org/drawingml/2006/main" prst="rect">
-            <a:avLst/>
-          </a:prstGeom>
-          <a:noFill xmlns:a="http://schemas.openxmlformats.org/drawingml/2006/main"/>
-          <a:ln xmlns:a="http://schemas.openxmlformats.org/drawingml/2006/main" w="0">
-            <a:noFill/>
-          </a:ln>
-        </p:spPr>
-        <p:txBody>
-          <a:bodyPr xmlns:a="http://schemas.openxmlformats.org/drawingml/2006/main" anchor="t">
-            <a:normAutofit fontScale="100000"/>
-          </a:bodyPr>
-          <a:lstStyle xmlns:a="http://schemas.openxmlformats.org/drawingml/2006/main"/>
-          <a:p xmlns:a="http://schemas.openxmlformats.org/drawingml/2006/main">
-            <a:pPr>
-              <a:defRPr sz="1950" b="0">
-                <a:solidFill>
-                  <a:srgbClr val="D4D4D8"/>
-                </a:solidFill>
-                <a:latin typeface="Arial"/>
-                <a:ea typeface="Arial"/>
-                <a:cs typeface="Arial"/>
-              </a:defRPr>
-            </a:pPr>
-            <a:r>
-              <a:rPr sz="1950" b="0">
-                <a:solidFill>
-                  <a:srgbClr val="D4D4D8"/>
-                </a:solidFill>
-                <a:latin typeface="Arial"/>
-                <a:ea typeface="Arial"/>
-                <a:cs typeface="Arial"/>
-              </a:rPr>
-              <a:t>Assume int is 4 bytes, %rax holds &amp;a[0], and %rcx = 2.</a:t>
-            </a:r>
-          </a:p>
-          <a:p xmlns:a="http://schemas.openxmlformats.org/drawingml/2006/main">
-            <a:r>
-              <a:t/>
-            </a:r>
-          </a:p>
-          <a:p xmlns:a="http://schemas.openxmlformats.org/drawingml/2006/main">
-            <a:pPr>
-              <a:defRPr sz="1950" b="0">
-                <a:solidFill>
-                  <a:srgbClr val="D4D4D8"/>
-                </a:solidFill>
-                <a:latin typeface="Arial"/>
-                <a:ea typeface="Arial"/>
-                <a:cs typeface="Arial"/>
-              </a:defRPr>
-            </a:pPr>
-            <a:r>
-              <a:rPr sz="1950" b="0">
-                <a:solidFill>
-                  <a:srgbClr val="D4D4D8"/>
-                </a:solidFill>
-                <a:latin typeface="Arial"/>
-                <a:ea typeface="Arial"/>
-                <a:cs typeface="Arial"/>
-              </a:rPr>
-              <a:t>What address does leaq compute? What value does movl read?</a:t>
-            </a:r>
-          </a:p>
-        </p:txBody>
-      </p:sp>
-      <p:sp>
-        <p:nvSpPr>
-          <p:cNvPr id="4" name="">
-            <a:extLst xmlns:a="http://schemas.openxmlformats.org/drawingml/2006/main">
-              <a:ext uri="{FF2B5EF4-FFF2-40B4-BE49-F238E27FC236}">
-                <a16:creationId xmlns:a16="http://schemas.microsoft.com/office/drawing/2014/main" id="{D7B5CA29-8179-4E81-89A9-826193A48354}"/>
-              </a:ext>
-            </a:extLst>
-          </p:cNvPr>
-          <p:cNvSpPr>
-            <a:spLocks xmlns:a="http://schemas.openxmlformats.org/drawingml/2006/main" noGrp="1"/>
-          </p:cNvSpPr>
-          <p:nvPr/>
-        </p:nvSpPr>
-        <p:spPr>
-          <a:xfrm xmlns:a="http://schemas.openxmlformats.org/drawingml/2006/main">
-            <a:off x="6181725" y="2200275"/>
-            <a:ext cx="5238750" cy="3286125"/>
-          </a:xfrm>
-          <a:prstGeom xmlns:a="http://schemas.openxmlformats.org/drawingml/2006/main" prst="rect">
-            <a:avLst/>
-          </a:prstGeom>
-          <a:noFill xmlns:a="http://schemas.openxmlformats.org/drawingml/2006/main"/>
-          <a:ln xmlns:a="http://schemas.openxmlformats.org/drawingml/2006/main" w="0">
-            <a:noFill/>
-          </a:ln>
-        </p:spPr>
-        <p:txBody>
-          <a:bodyPr xmlns:a="http://schemas.openxmlformats.org/drawingml/2006/main" anchor="t">
-            <a:normAutofit fontScale="100000"/>
-          </a:bodyPr>
-          <a:lstStyle xmlns:a="http://schemas.openxmlformats.org/drawingml/2006/main"/>
-          <a:p xmlns:a="http://schemas.openxmlformats.org/drawingml/2006/main">
-            <a:pPr>
-              <a:defRPr sz="1650" b="0">
-                <a:solidFill>
-                  <a:srgbClr val="A7F3D0"/>
-                </a:solidFill>
-                <a:latin typeface="Courier New"/>
-                <a:ea typeface="Courier New"/>
-                <a:cs typeface="Courier New"/>
-              </a:defRPr>
-            </a:pPr>
-            <a:r>
-              <a:rPr sz="1650" b="0">
-                <a:solidFill>
-                  <a:srgbClr val="A7F3D0"/>
-                </a:solidFill>
-                <a:latin typeface="Courier New"/>
-                <a:ea typeface="Courier New"/>
-                <a:cs typeface="Courier New"/>
-              </a:rPr>
-              <a:t>a = {10, 20, 30, 40}</a:t>
-            </a:r>
-          </a:p>
-          <a:p xmlns:a="http://schemas.openxmlformats.org/drawingml/2006/main">
-            <a:pPr>
-              <a:defRPr sz="1650" b="0">
-                <a:solidFill>
-                  <a:srgbClr val="A7F3D0"/>
-                </a:solidFill>
-                <a:latin typeface="Courier New"/>
-                <a:ea typeface="Courier New"/>
-                <a:cs typeface="Courier New"/>
-              </a:defRPr>
-            </a:pPr>
-            <a:r>
-              <a:rPr sz="1650" b="0">
-                <a:solidFill>
-                  <a:srgbClr val="A7F3D0"/>
-                </a:solidFill>
-                <a:latin typeface="Courier New"/>
-                <a:ea typeface="Courier New"/>
-                <a:cs typeface="Courier New"/>
-              </a:rPr>
-              <a:t>%rax = 0x2000</a:t>
-            </a:r>
-          </a:p>
-          <a:p xmlns:a="http://schemas.openxmlformats.org/drawingml/2006/main">
-            <a:r>
-              <a:t/>
-            </a:r>
-          </a:p>
-          <a:p xmlns:a="http://schemas.openxmlformats.org/drawingml/2006/main">
-            <a:pPr>
-              <a:defRPr sz="1650" b="0">
-                <a:solidFill>
-                  <a:srgbClr val="A7F3D0"/>
-                </a:solidFill>
-                <a:latin typeface="Courier New"/>
-                <a:ea typeface="Courier New"/>
-                <a:cs typeface="Courier New"/>
-              </a:defRPr>
-            </a:pPr>
-            <a:r>
-              <a:rPr sz="1650" b="0">
-                <a:solidFill>
-                  <a:srgbClr val="A7F3D0"/>
-                </a:solidFill>
-                <a:latin typeface="Courier New"/>
-                <a:ea typeface="Courier New"/>
-                <a:cs typeface="Courier New"/>
-              </a:rPr>
-              <a:t>leaq (%rax,%rcx,4), %rdx</a:t>
-            </a:r>
-          </a:p>
-          <a:p xmlns:a="http://schemas.openxmlformats.org/drawingml/2006/main">
-            <a:pPr>
-              <a:defRPr sz="1650" b="0">
-                <a:solidFill>
-                  <a:srgbClr val="A7F3D0"/>
-                </a:solidFill>
-                <a:latin typeface="Courier New"/>
-                <a:ea typeface="Courier New"/>
-                <a:cs typeface="Courier New"/>
-              </a:defRPr>
-            </a:pPr>
-            <a:r>
-              <a:rPr sz="1650" b="0">
-                <a:solidFill>
-                  <a:srgbClr val="A7F3D0"/>
-                </a:solidFill>
-                <a:latin typeface="Courier New"/>
-                <a:ea typeface="Courier New"/>
-                <a:cs typeface="Courier New"/>
-              </a:rPr>
-              <a:t>movl (%rdx), %eax</a:t>
-            </a:r>
-          </a:p>
-          <a:p xmlns:a="http://schemas.openxmlformats.org/drawingml/2006/main">
-            <a:r>
-              <a:t/>
-            </a:r>
-          </a:p>
-          <a:p xmlns:a="http://schemas.openxmlformats.org/drawingml/2006/main">
-            <a:pPr>
-              <a:defRPr sz="1650" b="0">
-                <a:solidFill>
-                  <a:srgbClr val="A7F3D0"/>
-                </a:solidFill>
-                <a:latin typeface="Courier New"/>
-                <a:ea typeface="Courier New"/>
-                <a:cs typeface="Courier New"/>
-              </a:defRPr>
-            </a:pPr>
-            <a:r>
-              <a:rPr sz="1650" b="0">
-                <a:solidFill>
-                  <a:srgbClr val="A7F3D0"/>
-                </a:solidFill>
-                <a:latin typeface="Courier New"/>
-                <a:ea typeface="Courier New"/>
-                <a:cs typeface="Courier New"/>
-              </a:rPr>
-              <a:t>%rdx = ?</a:t>
-            </a:r>
-          </a:p>
-          <a:p xmlns:a="http://schemas.openxmlformats.org/drawingml/2006/main">
-            <a:pPr>
-              <a:defRPr sz="1650" b="0">
-                <a:solidFill>
-                  <a:srgbClr val="A7F3D0"/>
-                </a:solidFill>
-                <a:latin typeface="Courier New"/>
-                <a:ea typeface="Courier New"/>
-                <a:cs typeface="Courier New"/>
-              </a:defRPr>
-            </a:pPr>
-            <a:r>
-              <a:rPr sz="1650" b="0">
-                <a:solidFill>
-                  <a:srgbClr val="A7F3D0"/>
-                </a:solidFill>
-                <a:latin typeface="Courier New"/>
-                <a:ea typeface="Courier New"/>
-                <a:cs typeface="Courier New"/>
-              </a:rPr>
-              <a:t>%eax = ?</a:t>
-            </a:r>
-          </a:p>
-        </p:txBody>
-      </p:sp>
-      <p:sp>
-        <p:nvSpPr>
-          <p:cNvPr id="5" name="">
-            <a:extLst xmlns:a="http://schemas.openxmlformats.org/drawingml/2006/main">
-              <a:ext uri="{FF2B5EF4-FFF2-40B4-BE49-F238E27FC236}">
-                <a16:creationId xmlns:a16="http://schemas.microsoft.com/office/drawing/2014/main" id="{59CD6D66-0E53-4FBC-9A5B-B3B2042F199D}"/>
-              </a:ext>
-            </a:extLst>
-          </p:cNvPr>
-          <p:cNvSpPr>
-            <a:spLocks xmlns:a="http://schemas.openxmlformats.org/drawingml/2006/main" noGrp="1"/>
-          </p:cNvSpPr>
-          <p:nvPr/>
-        </p:nvSpPr>
-        <p:spPr>
-          <a:xfrm xmlns:a="http://schemas.openxmlformats.org/drawingml/2006/main">
-            <a:off x="685800" y="5743575"/>
-            <a:ext cx="10191750" cy="428625"/>
-          </a:xfrm>
-          <a:prstGeom xmlns:a="http://schemas.openxmlformats.org/drawingml/2006/main" prst="rect">
-            <a:avLst/>
-          </a:prstGeom>
-          <a:noFill xmlns:a="http://schemas.openxmlformats.org/drawingml/2006/main"/>
-          <a:ln xmlns:a="http://schemas.openxmlformats.org/drawingml/2006/main" w="0">
-            <a:noFill/>
-          </a:ln>
-        </p:spPr>
-        <p:txBody>
-          <a:bodyPr xmlns:a="http://schemas.openxmlformats.org/drawingml/2006/main" anchor="t">
-            <a:normAutofit fontScale="100000"/>
-          </a:bodyPr>
-          <a:lstStyle xmlns:a="http://schemas.openxmlformats.org/drawingml/2006/main"/>
-          <a:p xmlns:a="http://schemas.openxmlformats.org/drawingml/2006/main">
-            <a:pPr>
-              <a:defRPr sz="1350" b="0">
-                <a:solidFill>
-                  <a:srgbClr val="A1A1AA"/>
-                </a:solidFill>
-                <a:latin typeface="Arial"/>
-                <a:ea typeface="Arial"/>
-                <a:cs typeface="Arial"/>
-              </a:defRPr>
-            </a:pPr>
-            <a:r>
-              <a:rPr sz="1350" b="0">
-                <a:solidFill>
-                  <a:srgbClr val="A1A1AA"/>
-                </a:solidFill>
-                <a:latin typeface="Arial"/>
-                <a:ea typeface="Arial"/>
-                <a:cs typeface="Arial"/>
-              </a:rPr>
-              <a:t>Sketch four boxes, each four bytes wide, before calculating.</a:t>
-            </a:r>
-          </a:p>
-        </p:txBody>
-      </p:sp>
-      <p:sp>
-        <p:nvSpPr>
-          <p:cNvPr id="6" name="">
-            <a:extLst xmlns:a="http://schemas.openxmlformats.org/drawingml/2006/main">
-              <a:ext uri="{FF2B5EF4-FFF2-40B4-BE49-F238E27FC236}">
-                <a16:creationId xmlns:a16="http://schemas.microsoft.com/office/drawing/2014/main" id="{43485F3E-6B40-4752-9B33-026E6403DBE8}"/>
-              </a:ext>
-            </a:extLst>
-          </p:cNvPr>
-          <p:cNvSpPr>
-            <a:spLocks xmlns:a="http://schemas.openxmlformats.org/drawingml/2006/main" noGrp="1"/>
-          </p:cNvSpPr>
-          <p:nvPr/>
-        </p:nvSpPr>
-        <p:spPr>
-          <a:xfrm xmlns:a="http://schemas.openxmlformats.org/drawingml/2006/main">
-            <a:off x="10477500" y="6210300"/>
-            <a:ext cx="1000125" cy="219075"/>
-          </a:xfrm>
-          <a:prstGeom xmlns:a="http://schemas.openxmlformats.org/drawingml/2006/main" prst="rect">
-            <a:avLst/>
-          </a:prstGeom>
-          <a:noFill xmlns:a="http://schemas.openxmlformats.org/drawingml/2006/main"/>
-          <a:ln xmlns:a="http://schemas.openxmlformats.org/drawingml/2006/main" w="0">
-            <a:noFill/>
-          </a:ln>
-        </p:spPr>
-        <p:txBody>
-          <a:bodyPr xmlns:a="http://schemas.openxmlformats.org/drawingml/2006/main" anchor="t">
-            <a:normAutofit fontScale="79762"/>
-          </a:bodyPr>
-          <a:lstStyle xmlns:a="http://schemas.openxmlformats.org/drawingml/2006/main"/>
-          <a:p xmlns:a="http://schemas.openxmlformats.org/drawingml/2006/main">
-            <a:pPr>
-              <a:defRPr sz="1050" b="0">
-                <a:solidFill>
-                  <a:srgbClr val="71717A"/>
-                </a:solidFill>
-                <a:latin typeface="Courier New"/>
-                <a:ea typeface="Courier New"/>
-                <a:cs typeface="Courier New"/>
-              </a:defRPr>
-            </a:pPr>
-            <a:r>
-              <a:rPr sz="1050" b="0">
-                <a:solidFill>
-                  <a:srgbClr val="71717A"/>
-                </a:solidFill>
-                <a:latin typeface="Courier New"/>
-                <a:ea typeface="Courier New"/>
-                <a:cs typeface="Courier New"/>
-              </a:rPr>
-              <a:t>25 / 26</a:t>
-            </a:r>
-          </a:p>
-        </p:txBody>
-      </p:sp>
-    </p:spTree>
-    <p:extLst>
-      <p:ext uri="{BB962C8B-B14F-4D97-AF65-F5344CB8AC3E}">
-        <p14:creationId xmlns:p14="http://schemas.microsoft.com/office/powerpoint/2010/main" val="1744903419"/>
-      </p:ext>
-    </p:extLst>
-  </p:cSld>
-</p:sld>
-</file>
-
-<file path=ppt/slides/slide26.xml><?xml version="1.0" encoding="utf-8"?>
-<p:sld xmlns:p="http://schemas.openxmlformats.org/presentationml/2006/main">
-  <p:cSld>
-    <p:bg>
-      <p:bgPr>
-        <a:solidFill xmlns:a="http://schemas.openxmlformats.org/drawingml/2006/main">
-          <a:srgbClr val="09090B"/>
-        </a:solidFill>
-      </p:bgPr>
-    </p:bg>
-    <p:spTree>
-      <p:nvGrpSpPr>
-        <p:cNvPr id="1" name=""/>
-        <p:cNvGrpSpPr/>
-        <p:nvPr/>
-      </p:nvGrpSpPr>
-      <p:grpSpPr>
-        <a:xfrm xmlns:a="http://schemas.openxmlformats.org/drawingml/2006/main"/>
-      </p:grpSpPr>
-      <p:sp>
-        <p:nvSpPr>
-          <p:cNvPr id="7" name="">
-            <a:extLst xmlns:a="http://schemas.openxmlformats.org/drawingml/2006/main">
-              <a:ext uri="{FF2B5EF4-FFF2-40B4-BE49-F238E27FC236}">
-                <a16:creationId xmlns:a16="http://schemas.microsoft.com/office/drawing/2014/main" id="{25A1F966-C6D8-41EE-9831-A7547BBA9B5D}"/>
-              </a:ext>
-            </a:extLst>
-          </p:cNvPr>
-          <p:cNvSpPr>
-            <a:spLocks xmlns:a="http://schemas.openxmlformats.org/drawingml/2006/main" noGrp="1"/>
-          </p:cNvSpPr>
-          <p:nvPr/>
-        </p:nvSpPr>
-        <p:spPr>
-          <a:xfrm xmlns:a="http://schemas.openxmlformats.org/drawingml/2006/main">
-            <a:off x="685800" y="361950"/>
-            <a:ext cx="10477500" cy="285750"/>
-          </a:xfrm>
-          <a:prstGeom xmlns:a="http://schemas.openxmlformats.org/drawingml/2006/main" prst="rect">
-            <a:avLst/>
-          </a:prstGeom>
-          <a:noFill xmlns:a="http://schemas.openxmlformats.org/drawingml/2006/main"/>
-          <a:ln xmlns:a="http://schemas.openxmlformats.org/drawingml/2006/main" w="0">
-            <a:noFill/>
-          </a:ln>
-        </p:spPr>
-        <p:txBody>
-          <a:bodyPr xmlns:a="http://schemas.openxmlformats.org/drawingml/2006/main" anchor="t">
-            <a:normAutofit fontScale="100000"/>
-          </a:bodyPr>
-          <a:lstStyle xmlns:a="http://schemas.openxmlformats.org/drawingml/2006/main"/>
-          <a:p xmlns:a="http://schemas.openxmlformats.org/drawingml/2006/main">
-            <a:pPr>
-              <a:defRPr sz="1275" b="0">
-                <a:solidFill>
-                  <a:srgbClr val="6EE7B7"/>
-                </a:solidFill>
-                <a:latin typeface="Courier New"/>
-                <a:ea typeface="Courier New"/>
-                <a:cs typeface="Courier New"/>
-              </a:defRPr>
-            </a:pPr>
-            <a:r>
-              <a:rPr sz="1275" b="0">
-                <a:solidFill>
-                  <a:srgbClr val="6EE7B7"/>
-                </a:solidFill>
-                <a:latin typeface="Courier New"/>
-                <a:ea typeface="Courier New"/>
-                <a:cs typeface="Courier New"/>
-              </a:rPr>
-              <a:t>WRAP-UP</a:t>
-            </a:r>
-          </a:p>
-        </p:txBody>
-      </p:sp>
-      <p:sp>
-        <p:nvSpPr>
-          <p:cNvPr id="2" name="">
-            <a:extLst xmlns:a="http://schemas.openxmlformats.org/drawingml/2006/main">
-              <a:ext uri="{FF2B5EF4-FFF2-40B4-BE49-F238E27FC236}">
-                <a16:creationId xmlns:a16="http://schemas.microsoft.com/office/drawing/2014/main" id="{DFA97D09-7BEF-4822-B56A-3FC3068371B2}"/>
-              </a:ext>
-            </a:extLst>
-          </p:cNvPr>
-          <p:cNvSpPr>
-            <a:spLocks xmlns:a="http://schemas.openxmlformats.org/drawingml/2006/main" noGrp="1"/>
-          </p:cNvSpPr>
-          <p:nvPr/>
-        </p:nvSpPr>
-        <p:spPr>
-          <a:xfrm xmlns:a="http://schemas.openxmlformats.org/drawingml/2006/main">
-            <a:off x="685800" y="885825"/>
-            <a:ext cx="10820400" cy="1066800"/>
-          </a:xfrm>
-          <a:prstGeom xmlns:a="http://schemas.openxmlformats.org/drawingml/2006/main" prst="rect">
-            <a:avLst/>
-          </a:prstGeom>
-          <a:noFill xmlns:a="http://schemas.openxmlformats.org/drawingml/2006/main"/>
-          <a:ln xmlns:a="http://schemas.openxmlformats.org/drawingml/2006/main" w="0">
-            <a:noFill/>
-          </a:ln>
-        </p:spPr>
-        <p:txBody>
-          <a:bodyPr xmlns:a="http://schemas.openxmlformats.org/drawingml/2006/main" anchor="t">
-            <a:normAutofit fontScale="100000"/>
-          </a:bodyPr>
-          <a:lstStyle xmlns:a="http://schemas.openxmlformats.org/drawingml/2006/main"/>
-          <a:p xmlns:a="http://schemas.openxmlformats.org/drawingml/2006/main">
-            <a:pPr>
-              <a:defRPr sz="3600" b="0">
-                <a:solidFill>
-                  <a:srgbClr val="FAFAFA"/>
-                </a:solidFill>
-                <a:latin typeface="Arial"/>
-                <a:ea typeface="Arial"/>
-                <a:cs typeface="Arial"/>
-              </a:defRPr>
-            </a:pPr>
-            <a:r>
-              <a:rPr sz="3600" b="0">
-                <a:solidFill>
-                  <a:srgbClr val="FAFAFA"/>
-                </a:solidFill>
-                <a:latin typeface="Arial"/>
-                <a:ea typeface="Arial"/>
-                <a:cs typeface="Arial"/>
-              </a:rPr>
-              <a:t>Trace answer and checklist</a:t>
-            </a:r>
-          </a:p>
-        </p:txBody>
-      </p:sp>
-      <p:sp>
-        <p:nvSpPr>
-          <p:cNvPr id="3" name="">
-            <a:extLst xmlns:a="http://schemas.openxmlformats.org/drawingml/2006/main">
-              <a:ext uri="{FF2B5EF4-FFF2-40B4-BE49-F238E27FC236}">
-                <a16:creationId xmlns:a16="http://schemas.microsoft.com/office/drawing/2014/main" id="{12F6E8D5-3AF7-4BE3-AFBF-72535F3AFE93}"/>
-              </a:ext>
-            </a:extLst>
-          </p:cNvPr>
-          <p:cNvSpPr>
-            <a:spLocks xmlns:a="http://schemas.openxmlformats.org/drawingml/2006/main" noGrp="1"/>
-          </p:cNvSpPr>
-          <p:nvPr/>
-        </p:nvSpPr>
-        <p:spPr>
-          <a:xfrm xmlns:a="http://schemas.openxmlformats.org/drawingml/2006/main">
-            <a:off x="685800" y="2200275"/>
-            <a:ext cx="4857750" cy="3124200"/>
-          </a:xfrm>
-          <a:prstGeom xmlns:a="http://schemas.openxmlformats.org/drawingml/2006/main" prst="rect">
-            <a:avLst/>
-          </a:prstGeom>
-          <a:noFill xmlns:a="http://schemas.openxmlformats.org/drawingml/2006/main"/>
-          <a:ln xmlns:a="http://schemas.openxmlformats.org/drawingml/2006/main" w="0">
-            <a:noFill/>
-          </a:ln>
-        </p:spPr>
-        <p:txBody>
-          <a:bodyPr xmlns:a="http://schemas.openxmlformats.org/drawingml/2006/main" anchor="t">
-            <a:normAutofit fontScale="100000"/>
-          </a:bodyPr>
-          <a:lstStyle xmlns:a="http://schemas.openxmlformats.org/drawingml/2006/main"/>
-          <a:p xmlns:a="http://schemas.openxmlformats.org/drawingml/2006/main">
-            <a:pPr>
-              <a:defRPr sz="1950" b="0">
-                <a:solidFill>
-                  <a:srgbClr val="D4D4D8"/>
-                </a:solidFill>
-                <a:latin typeface="Arial"/>
-                <a:ea typeface="Arial"/>
-                <a:cs typeface="Arial"/>
-              </a:defRPr>
-            </a:pPr>
-            <a:r>
-              <a:rPr sz="1950" b="0">
-                <a:solidFill>
-                  <a:srgbClr val="D4D4D8"/>
-                </a:solidFill>
-                <a:latin typeface="Arial"/>
-                <a:ea typeface="Arial"/>
-                <a:cs typeface="Arial"/>
-              </a:rPr>
-              <a:t>leaq computes 0x2000 + 2×4 = 0x2008. movl reads the 4-byte int at that address: 30.</a:t>
-            </a:r>
-          </a:p>
-          <a:p xmlns:a="http://schemas.openxmlformats.org/drawingml/2006/main">
-            <a:r>
-              <a:t/>
-            </a:r>
-          </a:p>
-          <a:p xmlns:a="http://schemas.openxmlformats.org/drawingml/2006/main">
-            <a:pPr>
-              <a:defRPr sz="1950" b="0">
-                <a:solidFill>
-                  <a:srgbClr val="D4D4D8"/>
-                </a:solidFill>
-                <a:latin typeface="Arial"/>
-                <a:ea typeface="Arial"/>
-                <a:cs typeface="Arial"/>
-              </a:defRPr>
-            </a:pPr>
-            <a:r>
-              <a:rPr sz="1950" b="0">
-                <a:solidFill>
-                  <a:srgbClr val="D4D4D8"/>
-                </a:solidFill>
-                <a:latin typeface="Arial"/>
-                <a:ea typeface="Arial"/>
-                <a:cs typeface="Arial"/>
-              </a:rPr>
-              <a:t>When assembly feels dense, mark the operand type, track the changed register, then follow the next instruction.</a:t>
-            </a:r>
-          </a:p>
-        </p:txBody>
-      </p:sp>
-      <p:sp>
-        <p:nvSpPr>
-          <p:cNvPr id="4" name="">
-            <a:extLst xmlns:a="http://schemas.openxmlformats.org/drawingml/2006/main">
-              <a:ext uri="{FF2B5EF4-FFF2-40B4-BE49-F238E27FC236}">
-                <a16:creationId xmlns:a16="http://schemas.microsoft.com/office/drawing/2014/main" id="{4EF18EBB-7C7E-4A7B-84AC-5DE137C6CDD2}"/>
-              </a:ext>
-            </a:extLst>
-          </p:cNvPr>
-          <p:cNvSpPr>
-            <a:spLocks xmlns:a="http://schemas.openxmlformats.org/drawingml/2006/main" noGrp="1"/>
-          </p:cNvSpPr>
-          <p:nvPr/>
-        </p:nvSpPr>
-        <p:spPr>
-          <a:xfrm xmlns:a="http://schemas.openxmlformats.org/drawingml/2006/main">
-            <a:off x="6181725" y="2200275"/>
-            <a:ext cx="5238750" cy="3286125"/>
-          </a:xfrm>
-          <a:prstGeom xmlns:a="http://schemas.openxmlformats.org/drawingml/2006/main" prst="rect">
-            <a:avLst/>
-          </a:prstGeom>
-          <a:noFill xmlns:a="http://schemas.openxmlformats.org/drawingml/2006/main"/>
-          <a:ln xmlns:a="http://schemas.openxmlformats.org/drawingml/2006/main" w="0">
-            <a:noFill/>
-          </a:ln>
-        </p:spPr>
-        <p:txBody>
-          <a:bodyPr xmlns:a="http://schemas.openxmlformats.org/drawingml/2006/main" anchor="t">
-            <a:normAutofit fontScale="100000"/>
-          </a:bodyPr>
-          <a:lstStyle xmlns:a="http://schemas.openxmlformats.org/drawingml/2006/main"/>
-          <a:p xmlns:a="http://schemas.openxmlformats.org/drawingml/2006/main">
-            <a:pPr>
-              <a:defRPr sz="1650" b="0">
-                <a:solidFill>
-                  <a:srgbClr val="A7F3D0"/>
-                </a:solidFill>
-                <a:latin typeface="Courier New"/>
-                <a:ea typeface="Courier New"/>
-                <a:cs typeface="Courier New"/>
-              </a:defRPr>
-            </a:pPr>
-            <a:r>
-              <a:rPr sz="1650" b="0">
-                <a:solidFill>
-                  <a:srgbClr val="A7F3D0"/>
-                </a:solidFill>
-                <a:latin typeface="Courier New"/>
-                <a:ea typeface="Courier New"/>
-                <a:cs typeface="Courier New"/>
-              </a:rPr>
-              <a:t>%rdx = 0x2008   address of a[2]</a:t>
-            </a:r>
-          </a:p>
-          <a:p xmlns:a="http://schemas.openxmlformats.org/drawingml/2006/main">
-            <a:pPr>
-              <a:defRPr sz="1650" b="0">
-                <a:solidFill>
-                  <a:srgbClr val="A7F3D0"/>
-                </a:solidFill>
-                <a:latin typeface="Courier New"/>
-                <a:ea typeface="Courier New"/>
-                <a:cs typeface="Courier New"/>
-              </a:defRPr>
-            </a:pPr>
-            <a:r>
-              <a:rPr sz="1650" b="0">
-                <a:solidFill>
-                  <a:srgbClr val="A7F3D0"/>
-                </a:solidFill>
-                <a:latin typeface="Courier New"/>
-                <a:ea typeface="Courier New"/>
-                <a:cs typeface="Courier New"/>
-              </a:rPr>
-              <a:t>%eax = 30       value of a[2]</a:t>
-            </a:r>
-          </a:p>
-          <a:p xmlns:a="http://schemas.openxmlformats.org/drawingml/2006/main">
-            <a:r>
-              <a:t/>
-            </a:r>
-          </a:p>
-          <a:p xmlns:a="http://schemas.openxmlformats.org/drawingml/2006/main">
-            <a:pPr>
-              <a:defRPr sz="1650" b="0">
-                <a:solidFill>
-                  <a:srgbClr val="A7F3D0"/>
-                </a:solidFill>
-                <a:latin typeface="Courier New"/>
-                <a:ea typeface="Courier New"/>
-                <a:cs typeface="Courier New"/>
-              </a:defRPr>
-            </a:pPr>
-            <a:r>
-              <a:rPr sz="1650" b="0">
-                <a:solidFill>
-                  <a:srgbClr val="A7F3D0"/>
-                </a:solidFill>
-                <a:latin typeface="Courier New"/>
-                <a:ea typeface="Courier New"/>
-                <a:cs typeface="Courier New"/>
-              </a:rPr>
-              <a:t>$        literal</a:t>
-            </a:r>
-          </a:p>
-          <a:p xmlns:a="http://schemas.openxmlformats.org/drawingml/2006/main">
-            <a:pPr>
-              <a:defRPr sz="1650" b="0">
-                <a:solidFill>
-                  <a:srgbClr val="A7F3D0"/>
-                </a:solidFill>
-                <a:latin typeface="Courier New"/>
-                <a:ea typeface="Courier New"/>
-                <a:cs typeface="Courier New"/>
-              </a:defRPr>
-            </a:pPr>
-            <a:r>
-              <a:rPr sz="1650" b="0">
-                <a:solidFill>
-                  <a:srgbClr val="A7F3D0"/>
-                </a:solidFill>
-                <a:latin typeface="Courier New"/>
-                <a:ea typeface="Courier New"/>
-                <a:cs typeface="Courier New"/>
-              </a:rPr>
-              <a:t>%        register</a:t>
-            </a:r>
-          </a:p>
-          <a:p xmlns:a="http://schemas.openxmlformats.org/drawingml/2006/main">
-            <a:pPr>
-              <a:defRPr sz="1650" b="0">
-                <a:solidFill>
-                  <a:srgbClr val="A7F3D0"/>
-                </a:solidFill>
-                <a:latin typeface="Courier New"/>
-                <a:ea typeface="Courier New"/>
-                <a:cs typeface="Courier New"/>
-              </a:defRPr>
-            </a:pPr>
-            <a:r>
-              <a:rPr sz="1650" b="0">
-                <a:solidFill>
-                  <a:srgbClr val="A7F3D0"/>
-                </a:solidFill>
-                <a:latin typeface="Courier New"/>
-                <a:ea typeface="Courier New"/>
-                <a:cs typeface="Courier New"/>
-              </a:rPr>
-              <a:t>(...)    memory</a:t>
-            </a:r>
-          </a:p>
-          <a:p xmlns:a="http://schemas.openxmlformats.org/drawingml/2006/main">
-            <a:pPr>
-              <a:defRPr sz="1650" b="0">
-                <a:solidFill>
-                  <a:srgbClr val="A7F3D0"/>
-                </a:solidFill>
-                <a:latin typeface="Courier New"/>
-                <a:ea typeface="Courier New"/>
-                <a:cs typeface="Courier New"/>
-              </a:defRPr>
-            </a:pPr>
-            <a:r>
-              <a:rPr sz="1650" b="0">
-                <a:solidFill>
-                  <a:srgbClr val="A7F3D0"/>
-                </a:solidFill>
-                <a:latin typeface="Courier New"/>
-                <a:ea typeface="Courier New"/>
-                <a:cs typeface="Courier New"/>
-              </a:rPr>
-              <a:t>q/l      8/4 bytes</a:t>
-            </a:r>
-          </a:p>
-        </p:txBody>
-      </p:sp>
-      <p:sp>
-        <p:nvSpPr>
-          <p:cNvPr id="5" name="">
-            <a:extLst xmlns:a="http://schemas.openxmlformats.org/drawingml/2006/main">
-              <a:ext uri="{FF2B5EF4-FFF2-40B4-BE49-F238E27FC236}">
-                <a16:creationId xmlns:a16="http://schemas.microsoft.com/office/drawing/2014/main" id="{ECA36F9F-59E4-44F4-9FC8-C812B4C6F1CE}"/>
-              </a:ext>
-            </a:extLst>
-          </p:cNvPr>
-          <p:cNvSpPr>
-            <a:spLocks xmlns:a="http://schemas.openxmlformats.org/drawingml/2006/main" noGrp="1"/>
-          </p:cNvSpPr>
-          <p:nvPr/>
-        </p:nvSpPr>
-        <p:spPr>
-          <a:xfrm xmlns:a="http://schemas.openxmlformats.org/drawingml/2006/main">
-            <a:off x="685800" y="5743575"/>
-            <a:ext cx="10191750" cy="428625"/>
-          </a:xfrm>
-          <a:prstGeom xmlns:a="http://schemas.openxmlformats.org/drawingml/2006/main" prst="rect">
-            <a:avLst/>
-          </a:prstGeom>
-          <a:noFill xmlns:a="http://schemas.openxmlformats.org/drawingml/2006/main"/>
-          <a:ln xmlns:a="http://schemas.openxmlformats.org/drawingml/2006/main" w="0">
-            <a:noFill/>
-          </a:ln>
-        </p:spPr>
-        <p:txBody>
-          <a:bodyPr xmlns:a="http://schemas.openxmlformats.org/drawingml/2006/main" anchor="t">
-            <a:normAutofit fontScale="100000"/>
-          </a:bodyPr>
-          <a:lstStyle xmlns:a="http://schemas.openxmlformats.org/drawingml/2006/main"/>
-          <a:p xmlns:a="http://schemas.openxmlformats.org/drawingml/2006/main">
-            <a:pPr>
-              <a:defRPr sz="1350" b="0">
-                <a:solidFill>
-                  <a:srgbClr val="A1A1AA"/>
-                </a:solidFill>
-                <a:latin typeface="Arial"/>
-                <a:ea typeface="Arial"/>
-                <a:cs typeface="Arial"/>
-              </a:defRPr>
-            </a:pPr>
-            <a:r>
-              <a:rPr sz="1350" b="0">
-                <a:solidFill>
-                  <a:srgbClr val="A1A1AA"/>
-                </a:solidFill>
-                <a:latin typeface="Arial"/>
-                <a:ea typeface="Arial"/>
-                <a:cs typeface="Arial"/>
-              </a:rPr>
-              <a:t>Read the relevant C beside the assembly, then verify one step at a time.</a:t>
-            </a:r>
-          </a:p>
-        </p:txBody>
-      </p:sp>
-      <p:sp>
-        <p:nvSpPr>
-          <p:cNvPr id="6" name="">
-            <a:extLst xmlns:a="http://schemas.openxmlformats.org/drawingml/2006/main">
-              <a:ext uri="{FF2B5EF4-FFF2-40B4-BE49-F238E27FC236}">
-                <a16:creationId xmlns:a16="http://schemas.microsoft.com/office/drawing/2014/main" id="{2B8D8537-72A7-4B47-A806-12B2F54A7471}"/>
-              </a:ext>
-            </a:extLst>
-          </p:cNvPr>
-          <p:cNvSpPr>
-            <a:spLocks xmlns:a="http://schemas.openxmlformats.org/drawingml/2006/main" noGrp="1"/>
-          </p:cNvSpPr>
-          <p:nvPr/>
-        </p:nvSpPr>
-        <p:spPr>
-          <a:xfrm xmlns:a="http://schemas.openxmlformats.org/drawingml/2006/main">
-            <a:off x="10477500" y="6210300"/>
-            <a:ext cx="1000125" cy="219075"/>
-          </a:xfrm>
-          <a:prstGeom xmlns:a="http://schemas.openxmlformats.org/drawingml/2006/main" prst="rect">
-            <a:avLst/>
-          </a:prstGeom>
-          <a:noFill xmlns:a="http://schemas.openxmlformats.org/drawingml/2006/main"/>
-          <a:ln xmlns:a="http://schemas.openxmlformats.org/drawingml/2006/main" w="0">
-            <a:noFill/>
-          </a:ln>
-        </p:spPr>
-        <p:txBody>
-          <a:bodyPr xmlns:a="http://schemas.openxmlformats.org/drawingml/2006/main" anchor="t">
-            <a:normAutofit fontScale="79762"/>
-          </a:bodyPr>
-          <a:lstStyle xmlns:a="http://schemas.openxmlformats.org/drawingml/2006/main"/>
-          <a:p xmlns:a="http://schemas.openxmlformats.org/drawingml/2006/main">
-            <a:pPr>
-              <a:defRPr sz="1050" b="0">
-                <a:solidFill>
-                  <a:srgbClr val="71717A"/>
-                </a:solidFill>
-                <a:latin typeface="Courier New"/>
-                <a:ea typeface="Courier New"/>
-                <a:cs typeface="Courier New"/>
-              </a:defRPr>
-            </a:pPr>
-            <a:r>
-              <a:rPr sz="1050" b="0">
-                <a:solidFill>
-                  <a:srgbClr val="71717A"/>
-                </a:solidFill>
-                <a:latin typeface="Courier New"/>
-                <a:ea typeface="Courier New"/>
-                <a:cs typeface="Courier New"/>
-              </a:rPr>
-              <a:t>26 / 26</a:t>
-            </a:r>
-          </a:p>
-        </p:txBody>
-      </p:sp>
-    </p:spTree>
-    <p:extLst>
-      <p:ext uri="{BB962C8B-B14F-4D97-AF65-F5344CB8AC3E}">
-        <p14:creationId xmlns:p14="http://schemas.microsoft.com/office/powerpoint/2010/main" val="883911834"/>
+        <p14:creationId xmlns:p14="http://schemas.microsoft.com/office/powerpoint/2010/main" val="543148191"/>
       </p:ext>
     </p:extLst>
   </p:cSld>
@@ -12609,7 +7411,7 @@
           <p:cNvPr id="7" name="">
             <a:extLst xmlns:a="http://schemas.openxmlformats.org/drawingml/2006/main">
               <a:ext uri="{FF2B5EF4-FFF2-40B4-BE49-F238E27FC236}">
-                <a16:creationId xmlns:a16="http://schemas.microsoft.com/office/drawing/2014/main" id="{23217C83-2C97-4761-B068-713D269F9408}"/>
+                <a16:creationId xmlns:a16="http://schemas.microsoft.com/office/drawing/2014/main" id="{B5D392E2-ECE4-47EE-B3D0-9D82E9C110AB}"/>
               </a:ext>
             </a:extLst>
           </p:cNvPr>
@@ -12656,7 +7458,7 @@
                 <a:ea typeface="Courier New"/>
                 <a:cs typeface="Courier New"/>
               </a:rPr>
-              <a:t>FLOATING POINT · FIRST STEP</a:t>
+              <a:t>FLOATING POINT · PLACE VALUES</a:t>
             </a:r>
           </a:p>
         </p:txBody>
@@ -12666,7 +7468,7 @@
           <p:cNvPr id="2" name="">
             <a:extLst xmlns:a="http://schemas.openxmlformats.org/drawingml/2006/main">
               <a:ext uri="{FF2B5EF4-FFF2-40B4-BE49-F238E27FC236}">
-                <a16:creationId xmlns:a16="http://schemas.microsoft.com/office/drawing/2014/main" id="{F83129EE-90C7-453C-AC74-A49AEC155EE6}"/>
+                <a16:creationId xmlns:a16="http://schemas.microsoft.com/office/drawing/2014/main" id="{0FA87D23-1C78-4E8D-BE9A-8D7DD6EC2DE8}"/>
               </a:ext>
             </a:extLst>
           </p:cNvPr>
@@ -12713,7 +7515,7 @@
                 <a:ea typeface="Arial"/>
                 <a:cs typeface="Arial"/>
               </a:rPr>
-              <a:t>Write a ratio in binary</a:t>
+              <a:t>Binary fractions use halves</a:t>
             </a:r>
           </a:p>
         </p:txBody>
@@ -12723,7 +7525,7 @@
           <p:cNvPr id="3" name="">
             <a:extLst xmlns:a="http://schemas.openxmlformats.org/drawingml/2006/main">
               <a:ext uri="{FF2B5EF4-FFF2-40B4-BE49-F238E27FC236}">
-                <a16:creationId xmlns:a16="http://schemas.microsoft.com/office/drawing/2014/main" id="{B5D0BD62-5570-4BC1-B18E-4ADB5B78029D}"/>
+                <a16:creationId xmlns:a16="http://schemas.microsoft.com/office/drawing/2014/main" id="{33AD77F0-B9D5-4B25-9CB0-F3C4860335FB}"/>
               </a:ext>
             </a:extLst>
           </p:cNvPr>
@@ -12770,7 +7572,7 @@
                 <a:ea typeface="Arial"/>
                 <a:cs typeface="Arial"/>
               </a:rPr>
-              <a:t>Start with the value, before thinking about fields.</a:t>
+              <a:t>Digits after a binary point are worth 1/2, 1/4, 1/8, and so on. A zero means that place contributes nothing.</a:t>
             </a:r>
           </a:p>
           <a:p xmlns:a="http://schemas.openxmlformats.org/drawingml/2006/main">
@@ -12798,7 +7600,7 @@
                 <a:ea typeface="Arial"/>
                 <a:cs typeface="Arial"/>
               </a:rPr>
-              <a:t>5/4 is 1.25 in decimal. The quarter is 2⁻², so 5/4 is 1.01 in binary.</a:t>
+              <a:t>Add the places marked 1 to find the value.</a:t>
             </a:r>
           </a:p>
         </p:txBody>
@@ -12808,7 +7610,7 @@
           <p:cNvPr id="4" name="">
             <a:extLst xmlns:a="http://schemas.openxmlformats.org/drawingml/2006/main">
               <a:ext uri="{FF2B5EF4-FFF2-40B4-BE49-F238E27FC236}">
-                <a16:creationId xmlns:a16="http://schemas.microsoft.com/office/drawing/2014/main" id="{71514B00-5A2D-421F-ABE5-1E1175E765C4}"/>
+                <a16:creationId xmlns:a16="http://schemas.microsoft.com/office/drawing/2014/main" id="{9042D823-812C-45B1-B937-3F76BB8CC4E9}"/>
               </a:ext>
             </a:extLst>
           </p:cNvPr>
@@ -12855,7 +7657,12 @@
                 <a:ea typeface="Courier New"/>
                 <a:cs typeface="Courier New"/>
               </a:rPr>
-              <a:t>5/4 = 1 + 1/4</a:t>
+              <a:t>0.101₂</a:t>
+            </a:r>
+          </a:p>
+          <a:p xmlns:a="http://schemas.openxmlformats.org/drawingml/2006/main">
+            <a:r>
+              <a:t/>
             </a:r>
           </a:p>
           <a:p xmlns:a="http://schemas.openxmlformats.org/drawingml/2006/main">
@@ -12878,7 +7685,7 @@
                 <a:ea typeface="Courier New"/>
                 <a:cs typeface="Courier New"/>
               </a:rPr>
-              <a:t>    = 1 + 2⁻²</a:t>
+              <a:t>1 × 1/2 = 1/2</a:t>
             </a:r>
           </a:p>
           <a:p xmlns:a="http://schemas.openxmlformats.org/drawingml/2006/main">
@@ -12901,7 +7708,30 @@
                 <a:ea typeface="Courier New"/>
                 <a:cs typeface="Courier New"/>
               </a:rPr>
-              <a:t>    = 1.01₂</a:t>
+              <a:t>0 × 1/4 = 0</a:t>
+            </a:r>
+          </a:p>
+          <a:p xmlns:a="http://schemas.openxmlformats.org/drawingml/2006/main">
+            <a:pPr>
+              <a:defRPr sz="1650" b="0">
+                <a:solidFill>
+                  <a:srgbClr val="A7F3D0"/>
+                </a:solidFill>
+                <a:latin typeface="Courier New"/>
+                <a:ea typeface="Courier New"/>
+                <a:cs typeface="Courier New"/>
+              </a:defRPr>
+            </a:pPr>
+            <a:r>
+              <a:rPr sz="1650" b="0">
+                <a:solidFill>
+                  <a:srgbClr val="A7F3D0"/>
+                </a:solidFill>
+                <a:latin typeface="Courier New"/>
+                <a:ea typeface="Courier New"/>
+                <a:cs typeface="Courier New"/>
+              </a:rPr>
+              <a:t>1 × 1/8 = 1/8</a:t>
             </a:r>
           </a:p>
           <a:p xmlns:a="http://schemas.openxmlformats.org/drawingml/2006/main">
@@ -12929,7 +7759,7 @@
                 <a:ea typeface="Courier New"/>
                 <a:cs typeface="Courier New"/>
               </a:rPr>
-              <a:t>With 3 fraction bits: 1.010₂</a:t>
+              <a:t>Total = 5/8</a:t>
             </a:r>
           </a:p>
         </p:txBody>
@@ -12939,7 +7769,7 @@
           <p:cNvPr id="5" name="">
             <a:extLst xmlns:a="http://schemas.openxmlformats.org/drawingml/2006/main">
               <a:ext uri="{FF2B5EF4-FFF2-40B4-BE49-F238E27FC236}">
-                <a16:creationId xmlns:a16="http://schemas.microsoft.com/office/drawing/2014/main" id="{90951000-B20E-4C49-A64C-8A7F940E2D1B}"/>
+                <a16:creationId xmlns:a16="http://schemas.microsoft.com/office/drawing/2014/main" id="{F772C52A-EF74-4A1F-8EE9-C24F596DDA95}"/>
               </a:ext>
             </a:extLst>
           </p:cNvPr>
@@ -12986,7 +7816,7 @@
                 <a:ea typeface="Arial"/>
                 <a:cs typeface="Arial"/>
               </a:rPr>
-              <a:t>Binary places after the point are 1/2, 1/4, 1/8, and so on.</a:t>
+              <a:t>Ask students to read 0.011₂ aloud as 1/4 + 1/8 = 3/8.</a:t>
             </a:r>
           </a:p>
         </p:txBody>
@@ -12996,7 +7826,7 @@
           <p:cNvPr id="6" name="">
             <a:extLst xmlns:a="http://schemas.openxmlformats.org/drawingml/2006/main">
               <a:ext uri="{FF2B5EF4-FFF2-40B4-BE49-F238E27FC236}">
-                <a16:creationId xmlns:a16="http://schemas.microsoft.com/office/drawing/2014/main" id="{D8B60308-1A78-4D4A-A5E8-B77EA72C37A8}"/>
+                <a16:creationId xmlns:a16="http://schemas.microsoft.com/office/drawing/2014/main" id="{F1AFEE4C-B9E4-4741-91C8-4F97DD41E561}"/>
               </a:ext>
             </a:extLst>
           </p:cNvPr>
@@ -13043,7 +7873,7 @@
                 <a:ea typeface="Courier New"/>
                 <a:cs typeface="Courier New"/>
               </a:rPr>
-              <a:t>03 / 26</a:t>
+              <a:t>03 / 17</a:t>
             </a:r>
           </a:p>
         </p:txBody>
@@ -13051,7 +7881,7 @@
     </p:spTree>
     <p:extLst>
       <p:ext uri="{BB962C8B-B14F-4D97-AF65-F5344CB8AC3E}">
-        <p14:creationId xmlns:p14="http://schemas.microsoft.com/office/powerpoint/2010/main" val="1031819998"/>
+        <p14:creationId xmlns:p14="http://schemas.microsoft.com/office/powerpoint/2010/main" val="291771276"/>
       </p:ext>
     </p:extLst>
   </p:cSld>
@@ -13082,7 +7912,7 @@
           <p:cNvPr id="7" name="">
             <a:extLst xmlns:a="http://schemas.openxmlformats.org/drawingml/2006/main">
               <a:ext uri="{FF2B5EF4-FFF2-40B4-BE49-F238E27FC236}">
-                <a16:creationId xmlns:a16="http://schemas.microsoft.com/office/drawing/2014/main" id="{BCFBF6B7-AA73-4E6D-9493-BE91284C8170}"/>
+                <a16:creationId xmlns:a16="http://schemas.microsoft.com/office/drawing/2014/main" id="{6A2B8F6E-916B-4F1A-B1DE-7F8CF9815ED1}"/>
               </a:ext>
             </a:extLst>
           </p:cNvPr>
@@ -13129,7 +7959,7 @@
                 <a:ea typeface="Courier New"/>
                 <a:cs typeface="Courier New"/>
               </a:rPr>
-              <a:t>FLOATING POINT · NORMAL VALUES</a:t>
+              <a:t>FLOATING POINT · FIRST STEP</a:t>
             </a:r>
           </a:p>
         </p:txBody>
@@ -13139,7 +7969,7 @@
           <p:cNvPr id="2" name="">
             <a:extLst xmlns:a="http://schemas.openxmlformats.org/drawingml/2006/main">
               <a:ext uri="{FF2B5EF4-FFF2-40B4-BE49-F238E27FC236}">
-                <a16:creationId xmlns:a16="http://schemas.microsoft.com/office/drawing/2014/main" id="{ADEAA4E1-64CC-4F17-A696-AC75ACC0FD10}"/>
+                <a16:creationId xmlns:a16="http://schemas.microsoft.com/office/drawing/2014/main" id="{46C07235-B5C4-4979-B81B-2ED6B27EB17B}"/>
               </a:ext>
             </a:extLst>
           </p:cNvPr>
@@ -13186,7 +8016,7 @@
                 <a:ea typeface="Arial"/>
                 <a:cs typeface="Arial"/>
               </a:rPr>
-              <a:t>The exponent has a bias</a:t>
+              <a:t>Write a ratio in binary</a:t>
             </a:r>
           </a:p>
         </p:txBody>
@@ -13196,7 +8026,7 @@
           <p:cNvPr id="3" name="">
             <a:extLst xmlns:a="http://schemas.openxmlformats.org/drawingml/2006/main">
               <a:ext uri="{FF2B5EF4-FFF2-40B4-BE49-F238E27FC236}">
-                <a16:creationId xmlns:a16="http://schemas.microsoft.com/office/drawing/2014/main" id="{CDAD1316-1DD6-453D-AF4E-1FE12220AE09}"/>
+                <a16:creationId xmlns:a16="http://schemas.microsoft.com/office/drawing/2014/main" id="{A5C4A061-A866-4339-8D2C-DCC225B16872}"/>
               </a:ext>
             </a:extLst>
           </p:cNvPr>
@@ -13243,7 +8073,7 @@
                 <a:ea typeface="Arial"/>
                 <a:cs typeface="Arial"/>
               </a:rPr>
-              <a:t>A normal value is written as 1.fraction × 2ᵉ. The leading 1 is implied and is not stored.</a:t>
+              <a:t>Start with the value, before thinking about fields.</a:t>
             </a:r>
           </a:p>
           <a:p xmlns:a="http://schemas.openxmlformats.org/drawingml/2006/main">
@@ -13271,7 +8101,7 @@
                 <a:ea typeface="Arial"/>
                 <a:cs typeface="Arial"/>
               </a:rPr>
-              <a:t>The stored exponent E equals e + bias.</a:t>
+              <a:t>5/4 is 1.25 in decimal. The quarter is 2⁻², so 5/4 is 1.01 in binary.</a:t>
             </a:r>
           </a:p>
         </p:txBody>
@@ -13281,7 +8111,7 @@
           <p:cNvPr id="4" name="">
             <a:extLst xmlns:a="http://schemas.openxmlformats.org/drawingml/2006/main">
               <a:ext uri="{FF2B5EF4-FFF2-40B4-BE49-F238E27FC236}">
-                <a16:creationId xmlns:a16="http://schemas.microsoft.com/office/drawing/2014/main" id="{70C9427F-68F0-4671-8106-A7F32DC45507}"/>
+                <a16:creationId xmlns:a16="http://schemas.microsoft.com/office/drawing/2014/main" id="{7B4F2147-9B56-4059-8DF7-AE2DD714A12F}"/>
               </a:ext>
             </a:extLst>
           </p:cNvPr>
@@ -13328,7 +8158,53 @@
                 <a:ea typeface="Courier New"/>
                 <a:cs typeface="Courier New"/>
               </a:rPr>
-              <a:t>Practice bias = 3</a:t>
+              <a:t>5/4 = 1 + 1/4</a:t>
+            </a:r>
+          </a:p>
+          <a:p xmlns:a="http://schemas.openxmlformats.org/drawingml/2006/main">
+            <a:pPr>
+              <a:defRPr sz="1650" b="0">
+                <a:solidFill>
+                  <a:srgbClr val="A7F3D0"/>
+                </a:solidFill>
+                <a:latin typeface="Courier New"/>
+                <a:ea typeface="Courier New"/>
+                <a:cs typeface="Courier New"/>
+              </a:defRPr>
+            </a:pPr>
+            <a:r>
+              <a:rPr sz="1650" b="0">
+                <a:solidFill>
+                  <a:srgbClr val="A7F3D0"/>
+                </a:solidFill>
+                <a:latin typeface="Courier New"/>
+                <a:ea typeface="Courier New"/>
+                <a:cs typeface="Courier New"/>
+              </a:rPr>
+              <a:t>    = 1 + 2⁻²</a:t>
+            </a:r>
+          </a:p>
+          <a:p xmlns:a="http://schemas.openxmlformats.org/drawingml/2006/main">
+            <a:pPr>
+              <a:defRPr sz="1650" b="0">
+                <a:solidFill>
+                  <a:srgbClr val="A7F3D0"/>
+                </a:solidFill>
+                <a:latin typeface="Courier New"/>
+                <a:ea typeface="Courier New"/>
+                <a:cs typeface="Courier New"/>
+              </a:defRPr>
+            </a:pPr>
+            <a:r>
+              <a:rPr sz="1650" b="0">
+                <a:solidFill>
+                  <a:srgbClr val="A7F3D0"/>
+                </a:solidFill>
+                <a:latin typeface="Courier New"/>
+                <a:ea typeface="Courier New"/>
+                <a:cs typeface="Courier New"/>
+              </a:rPr>
+              <a:t>    = 1.01₂</a:t>
             </a:r>
           </a:p>
           <a:p xmlns:a="http://schemas.openxmlformats.org/drawingml/2006/main">
@@ -13356,53 +8232,7 @@
                 <a:ea typeface="Courier New"/>
                 <a:cs typeface="Courier New"/>
               </a:rPr>
-              <a:t>e = −2  →  E = 1  →  bits 001</a:t>
-            </a:r>
-          </a:p>
-          <a:p xmlns:a="http://schemas.openxmlformats.org/drawingml/2006/main">
-            <a:pPr>
-              <a:defRPr sz="1650" b="0">
-                <a:solidFill>
-                  <a:srgbClr val="A7F3D0"/>
-                </a:solidFill>
-                <a:latin typeface="Courier New"/>
-                <a:ea typeface="Courier New"/>
-                <a:cs typeface="Courier New"/>
-              </a:defRPr>
-            </a:pPr>
-            <a:r>
-              <a:rPr sz="1650" b="0">
-                <a:solidFill>
-                  <a:srgbClr val="A7F3D0"/>
-                </a:solidFill>
-                <a:latin typeface="Courier New"/>
-                <a:ea typeface="Courier New"/>
-                <a:cs typeface="Courier New"/>
-              </a:rPr>
-              <a:t>e =  0  →  E = 3  →  bits 011</a:t>
-            </a:r>
-          </a:p>
-          <a:p xmlns:a="http://schemas.openxmlformats.org/drawingml/2006/main">
-            <a:pPr>
-              <a:defRPr sz="1650" b="0">
-                <a:solidFill>
-                  <a:srgbClr val="A7F3D0"/>
-                </a:solidFill>
-                <a:latin typeface="Courier New"/>
-                <a:ea typeface="Courier New"/>
-                <a:cs typeface="Courier New"/>
-              </a:defRPr>
-            </a:pPr>
-            <a:r>
-              <a:rPr sz="1650" b="0">
-                <a:solidFill>
-                  <a:srgbClr val="A7F3D0"/>
-                </a:solidFill>
-                <a:latin typeface="Courier New"/>
-                <a:ea typeface="Courier New"/>
-                <a:cs typeface="Courier New"/>
-              </a:rPr>
-              <a:t>e =  2  →  E = 5  →  bits 101</a:t>
+              <a:t>With 3 fraction bits: 1.010₂</a:t>
             </a:r>
           </a:p>
         </p:txBody>
@@ -13412,7 +8242,7 @@
           <p:cNvPr id="5" name="">
             <a:extLst xmlns:a="http://schemas.openxmlformats.org/drawingml/2006/main">
               <a:ext uri="{FF2B5EF4-FFF2-40B4-BE49-F238E27FC236}">
-                <a16:creationId xmlns:a16="http://schemas.microsoft.com/office/drawing/2014/main" id="{22AB6784-0A31-4631-8E90-1916BFF61E77}"/>
+                <a16:creationId xmlns:a16="http://schemas.microsoft.com/office/drawing/2014/main" id="{A6E6F628-BA88-4D78-A4F2-3E09B0641802}"/>
               </a:ext>
             </a:extLst>
           </p:cNvPr>
@@ -13459,7 +8289,7 @@
                 <a:ea typeface="Arial"/>
                 <a:cs typeface="Arial"/>
               </a:rPr>
-              <a:t>In this 3-bit format, E = 0 is for zero or subnormals; E = 7 is reserved.</a:t>
+              <a:t>Binary places after the point are 1/2, 1/4, 1/8, and so on.</a:t>
             </a:r>
           </a:p>
         </p:txBody>
@@ -13469,7 +8299,7 @@
           <p:cNvPr id="6" name="">
             <a:extLst xmlns:a="http://schemas.openxmlformats.org/drawingml/2006/main">
               <a:ext uri="{FF2B5EF4-FFF2-40B4-BE49-F238E27FC236}">
-                <a16:creationId xmlns:a16="http://schemas.microsoft.com/office/drawing/2014/main" id="{2339BDBC-16B5-48E3-83D2-2EE8FDE771E9}"/>
+                <a16:creationId xmlns:a16="http://schemas.microsoft.com/office/drawing/2014/main" id="{9EA450FB-5658-4F21-83CF-52AD8EE310C6}"/>
               </a:ext>
             </a:extLst>
           </p:cNvPr>
@@ -13516,7 +8346,7 @@
                 <a:ea typeface="Courier New"/>
                 <a:cs typeface="Courier New"/>
               </a:rPr>
-              <a:t>04 / 26</a:t>
+              <a:t>04 / 17</a:t>
             </a:r>
           </a:p>
         </p:txBody>
@@ -13524,7 +8354,7 @@
     </p:spTree>
     <p:extLst>
       <p:ext uri="{BB962C8B-B14F-4D97-AF65-F5344CB8AC3E}">
-        <p14:creationId xmlns:p14="http://schemas.microsoft.com/office/powerpoint/2010/main" val="600653741"/>
+        <p14:creationId xmlns:p14="http://schemas.microsoft.com/office/powerpoint/2010/main" val="576821286"/>
       </p:ext>
     </p:extLst>
   </p:cSld>
@@ -13555,7 +8385,7 @@
           <p:cNvPr id="7" name="">
             <a:extLst xmlns:a="http://schemas.openxmlformats.org/drawingml/2006/main">
               <a:ext uri="{FF2B5EF4-FFF2-40B4-BE49-F238E27FC236}">
-                <a16:creationId xmlns:a16="http://schemas.microsoft.com/office/drawing/2014/main" id="{742D3E43-7C4C-4CAF-8365-70B7B211B76C}"/>
+                <a16:creationId xmlns:a16="http://schemas.microsoft.com/office/drawing/2014/main" id="{296701F5-44AC-470A-90E3-4B400A4368B1}"/>
               </a:ext>
             </a:extLst>
           </p:cNvPr>
@@ -13602,7 +8432,7 @@
                 <a:ea typeface="Courier New"/>
                 <a:cs typeface="Courier New"/>
               </a:rPr>
-              <a:t>FLOATING POINT · WORKED EXAMPLE</a:t>
+              <a:t>FLOATING POINT · NORMAL VALUES</a:t>
             </a:r>
           </a:p>
         </p:txBody>
@@ -13612,7 +8442,7 @@
           <p:cNvPr id="2" name="">
             <a:extLst xmlns:a="http://schemas.openxmlformats.org/drawingml/2006/main">
               <a:ext uri="{FF2B5EF4-FFF2-40B4-BE49-F238E27FC236}">
-                <a16:creationId xmlns:a16="http://schemas.microsoft.com/office/drawing/2014/main" id="{1BC47B7C-FBD1-45EA-BDB0-89D2E74D3A36}"/>
+                <a16:creationId xmlns:a16="http://schemas.microsoft.com/office/drawing/2014/main" id="{F1A41727-1C44-4AA9-BFCF-804B0B36CB62}"/>
               </a:ext>
             </a:extLst>
           </p:cNvPr>
@@ -13659,7 +8489,7 @@
                 <a:ea typeface="Arial"/>
                 <a:cs typeface="Arial"/>
               </a:rPr>
-              <a:t>Encode a normal value: 5/4</a:t>
+              <a:t>The exponent has a bias</a:t>
             </a:r>
           </a:p>
         </p:txBody>
@@ -13669,7 +8499,7 @@
           <p:cNvPr id="3" name="">
             <a:extLst xmlns:a="http://schemas.openxmlformats.org/drawingml/2006/main">
               <a:ext uri="{FF2B5EF4-FFF2-40B4-BE49-F238E27FC236}">
-                <a16:creationId xmlns:a16="http://schemas.microsoft.com/office/drawing/2014/main" id="{705A294B-32F3-4E6A-B582-DE7B0874C530}"/>
+                <a16:creationId xmlns:a16="http://schemas.microsoft.com/office/drawing/2014/main" id="{3AD1D40A-6476-4B46-98BE-F07AD1BAED8F}"/>
               </a:ext>
             </a:extLst>
           </p:cNvPr>
@@ -13716,7 +8546,7 @@
                 <a:ea typeface="Arial"/>
                 <a:cs typeface="Arial"/>
               </a:rPr>
-              <a:t>5/4 = 1.010₂ × 2⁰.</a:t>
+              <a:t>A normal value is written as 1.fraction × 2ᵉ. The leading 1 is implied and is not stored.</a:t>
             </a:r>
           </a:p>
           <a:p xmlns:a="http://schemas.openxmlformats.org/drawingml/2006/main">
@@ -13744,7 +8574,7 @@
                 <a:ea typeface="Arial"/>
                 <a:cs typeface="Arial"/>
               </a:rPr>
-              <a:t>The true exponent is e = 0, so stored E = 0 + 3 = 3. The fraction after the leading 1 is 010₂, or F = 2.</a:t>
+              <a:t>The stored exponent E equals e + bias.</a:t>
             </a:r>
           </a:p>
         </p:txBody>
@@ -13754,7 +8584,7 @@
           <p:cNvPr id="4" name="">
             <a:extLst xmlns:a="http://schemas.openxmlformats.org/drawingml/2006/main">
               <a:ext uri="{FF2B5EF4-FFF2-40B4-BE49-F238E27FC236}">
-                <a16:creationId xmlns:a16="http://schemas.microsoft.com/office/drawing/2014/main" id="{3674ED78-0E5F-47D4-8B31-627FCBD79096}"/>
+                <a16:creationId xmlns:a16="http://schemas.microsoft.com/office/drawing/2014/main" id="{90CDE952-D3BD-4AA4-9C56-58162D3711F0}"/>
               </a:ext>
             </a:extLst>
           </p:cNvPr>
@@ -13801,7 +8631,12 @@
                 <a:ea typeface="Courier New"/>
                 <a:cs typeface="Courier New"/>
               </a:rPr>
-              <a:t>S = 0</a:t>
+              <a:t>Practice bias = 3</a:t>
+            </a:r>
+          </a:p>
+          <a:p xmlns:a="http://schemas.openxmlformats.org/drawingml/2006/main">
+            <a:r>
+              <a:t/>
             </a:r>
           </a:p>
           <a:p xmlns:a="http://schemas.openxmlformats.org/drawingml/2006/main">
@@ -13824,7 +8659,7 @@
                 <a:ea typeface="Courier New"/>
                 <a:cs typeface="Courier New"/>
               </a:rPr>
-              <a:t>E = 3 = 011₂</a:t>
+              <a:t>e = −2  →  E = 1  →  bits 001</a:t>
             </a:r>
           </a:p>
           <a:p xmlns:a="http://schemas.openxmlformats.org/drawingml/2006/main">
@@ -13847,12 +8682,7 @@
                 <a:ea typeface="Courier New"/>
                 <a:cs typeface="Courier New"/>
               </a:rPr>
-              <a:t>F = 2 = 010₂</a:t>
-            </a:r>
-          </a:p>
-          <a:p xmlns:a="http://schemas.openxmlformats.org/drawingml/2006/main">
-            <a:r>
-              <a:t/>
+              <a:t>e =  0  →  E = 3  →  bits 011</a:t>
             </a:r>
           </a:p>
           <a:p xmlns:a="http://schemas.openxmlformats.org/drawingml/2006/main">
@@ -13875,35 +8705,7 @@
                 <a:ea typeface="Courier New"/>
                 <a:cs typeface="Courier New"/>
               </a:rPr>
-              <a:t>Fields: 0 | 011 | 010</a:t>
-            </a:r>
-          </a:p>
-          <a:p xmlns:a="http://schemas.openxmlformats.org/drawingml/2006/main">
-            <a:r>
-              <a:t/>
-            </a:r>
-          </a:p>
-          <a:p xmlns:a="http://schemas.openxmlformats.org/drawingml/2006/main">
-            <a:pPr>
-              <a:defRPr sz="1650" b="0">
-                <a:solidFill>
-                  <a:srgbClr val="A7F3D0"/>
-                </a:solidFill>
-                <a:latin typeface="Courier New"/>
-                <a:ea typeface="Courier New"/>
-                <a:cs typeface="Courier New"/>
-              </a:defRPr>
-            </a:pPr>
-            <a:r>
-              <a:rPr sz="1650" b="0">
-                <a:solidFill>
-                  <a:srgbClr val="A7F3D0"/>
-                </a:solidFill>
-                <a:latin typeface="Courier New"/>
-                <a:ea typeface="Courier New"/>
-                <a:cs typeface="Courier New"/>
-              </a:rPr>
-              <a:t>Check: (1 + 2/8) × 2⁰ = 5/4</a:t>
+              <a:t>e =  2  →  E = 5  →  bits 101</a:t>
             </a:r>
           </a:p>
         </p:txBody>
@@ -13913,7 +8715,7 @@
           <p:cNvPr id="5" name="">
             <a:extLst xmlns:a="http://schemas.openxmlformats.org/drawingml/2006/main">
               <a:ext uri="{FF2B5EF4-FFF2-40B4-BE49-F238E27FC236}">
-                <a16:creationId xmlns:a16="http://schemas.microsoft.com/office/drawing/2014/main" id="{87ECD816-C700-4272-BD81-C1A4CAD3494F}"/>
+                <a16:creationId xmlns:a16="http://schemas.microsoft.com/office/drawing/2014/main" id="{92DCB498-5F45-448E-BB8D-9308ECED6BB4}"/>
               </a:ext>
             </a:extLst>
           </p:cNvPr>
@@ -13960,7 +8762,7 @@
                 <a:ea typeface="Arial"/>
                 <a:cs typeface="Arial"/>
               </a:rPr>
-              <a:t>The stored fraction has three bits; the implied leading 1 is not one of them.</a:t>
+              <a:t>In this 3-bit format, E = 0 is for zero or subnormals; E = 7 is reserved.</a:t>
             </a:r>
           </a:p>
         </p:txBody>
@@ -13970,7 +8772,7 @@
           <p:cNvPr id="6" name="">
             <a:extLst xmlns:a="http://schemas.openxmlformats.org/drawingml/2006/main">
               <a:ext uri="{FF2B5EF4-FFF2-40B4-BE49-F238E27FC236}">
-                <a16:creationId xmlns:a16="http://schemas.microsoft.com/office/drawing/2014/main" id="{F3CD6794-AFE3-4574-AC1E-68A9423BC913}"/>
+                <a16:creationId xmlns:a16="http://schemas.microsoft.com/office/drawing/2014/main" id="{05A872D8-2421-41B5-BA58-B863431FFC9F}"/>
               </a:ext>
             </a:extLst>
           </p:cNvPr>
@@ -14017,7 +8819,7 @@
                 <a:ea typeface="Courier New"/>
                 <a:cs typeface="Courier New"/>
               </a:rPr>
-              <a:t>05 / 26</a:t>
+              <a:t>05 / 17</a:t>
             </a:r>
           </a:p>
         </p:txBody>
@@ -14025,7 +8827,7 @@
     </p:spTree>
     <p:extLst>
       <p:ext uri="{BB962C8B-B14F-4D97-AF65-F5344CB8AC3E}">
-        <p14:creationId xmlns:p14="http://schemas.microsoft.com/office/powerpoint/2010/main" val="926200402"/>
+        <p14:creationId xmlns:p14="http://schemas.microsoft.com/office/powerpoint/2010/main" val="35799394"/>
       </p:ext>
     </p:extLst>
   </p:cSld>
@@ -14056,7 +8858,7 @@
           <p:cNvPr id="7" name="">
             <a:extLst xmlns:a="http://schemas.openxmlformats.org/drawingml/2006/main">
               <a:ext uri="{FF2B5EF4-FFF2-40B4-BE49-F238E27FC236}">
-                <a16:creationId xmlns:a16="http://schemas.microsoft.com/office/drawing/2014/main" id="{DBD6A3ED-265C-4789-BF0A-6021958AF056}"/>
+                <a16:creationId xmlns:a16="http://schemas.microsoft.com/office/drawing/2014/main" id="{FB5EA43F-92DB-4BE5-9FFF-F3398FA0483D}"/>
               </a:ext>
             </a:extLst>
           </p:cNvPr>
@@ -14103,7 +8905,7 @@
                 <a:ea typeface="Courier New"/>
                 <a:cs typeface="Courier New"/>
               </a:rPr>
-              <a:t>FLOATING POINT · SUBNORMALS</a:t>
+              <a:t>FLOATING POINT · WORKED EXAMPLE</a:t>
             </a:r>
           </a:p>
         </p:txBody>
@@ -14113,7 +8915,7 @@
           <p:cNvPr id="2" name="">
             <a:extLst xmlns:a="http://schemas.openxmlformats.org/drawingml/2006/main">
               <a:ext uri="{FF2B5EF4-FFF2-40B4-BE49-F238E27FC236}">
-                <a16:creationId xmlns:a16="http://schemas.microsoft.com/office/drawing/2014/main" id="{7EE61E4C-7F57-406B-BD21-5422E88EBCDA}"/>
+                <a16:creationId xmlns:a16="http://schemas.microsoft.com/office/drawing/2014/main" id="{6A5A1436-63F1-4731-91E3-0B1734A4E376}"/>
               </a:ext>
             </a:extLst>
           </p:cNvPr>
@@ -14160,7 +8962,7 @@
                 <a:ea typeface="Arial"/>
                 <a:cs typeface="Arial"/>
               </a:rPr>
-              <a:t>What happens below the normal range?</a:t>
+              <a:t>Encode a normal value: 5/4</a:t>
             </a:r>
           </a:p>
         </p:txBody>
@@ -14170,7 +8972,7 @@
           <p:cNvPr id="3" name="">
             <a:extLst xmlns:a="http://schemas.openxmlformats.org/drawingml/2006/main">
               <a:ext uri="{FF2B5EF4-FFF2-40B4-BE49-F238E27FC236}">
-                <a16:creationId xmlns:a16="http://schemas.microsoft.com/office/drawing/2014/main" id="{318B8CFA-E6B6-4BAD-88B5-C9355CEAE07C}"/>
+                <a16:creationId xmlns:a16="http://schemas.microsoft.com/office/drawing/2014/main" id="{DA52FDEA-F645-47DC-919B-5685E856E204}"/>
               </a:ext>
             </a:extLst>
           </p:cNvPr>
@@ -14217,7 +9019,7 @@
                 <a:ea typeface="Arial"/>
                 <a:cs typeface="Arial"/>
               </a:rPr>
-              <a:t>The smallest positive normal value here is 1.000₂ × 2⁻² = 1/4.</a:t>
+              <a:t>5/4 = 1.010₂ × 2⁰.</a:t>
             </a:r>
           </a:p>
           <a:p xmlns:a="http://schemas.openxmlformats.org/drawingml/2006/main">
@@ -14245,7 +9047,7 @@
                 <a:ea typeface="Arial"/>
                 <a:cs typeface="Arial"/>
               </a:rPr>
-              <a:t>Smaller positive values use E = 0. They have no implied leading 1. Their exponent is fixed at 1 − bias.</a:t>
+              <a:t>The true exponent is e = 0, so stored E = 0 + 3 = 3. The fraction after the leading 1 is 010₂, or F = 2.</a:t>
             </a:r>
           </a:p>
         </p:txBody>
@@ -14255,7 +9057,7 @@
           <p:cNvPr id="4" name="">
             <a:extLst xmlns:a="http://schemas.openxmlformats.org/drawingml/2006/main">
               <a:ext uri="{FF2B5EF4-FFF2-40B4-BE49-F238E27FC236}">
-                <a16:creationId xmlns:a16="http://schemas.microsoft.com/office/drawing/2014/main" id="{109ABFFC-5872-4624-AE1D-84C39905D2F8}"/>
+                <a16:creationId xmlns:a16="http://schemas.microsoft.com/office/drawing/2014/main" id="{66956661-037E-4836-A00D-BBE7BEC67CE5}"/>
               </a:ext>
             </a:extLst>
           </p:cNvPr>
@@ -14302,7 +9104,7 @@
                 <a:ea typeface="Courier New"/>
                 <a:cs typeface="Courier New"/>
               </a:rPr>
-              <a:t>Normal:    (1 + F/8) × 2^(E−3)</a:t>
+              <a:t>S = 0</a:t>
             </a:r>
           </a:p>
           <a:p xmlns:a="http://schemas.openxmlformats.org/drawingml/2006/main">
@@ -14325,7 +9127,30 @@
                 <a:ea typeface="Courier New"/>
                 <a:cs typeface="Courier New"/>
               </a:rPr>
-              <a:t>Subnormal: (    F/8) × 2^(1−3)</a:t>
+              <a:t>E = 3 = 011₂</a:t>
+            </a:r>
+          </a:p>
+          <a:p xmlns:a="http://schemas.openxmlformats.org/drawingml/2006/main">
+            <a:pPr>
+              <a:defRPr sz="1650" b="0">
+                <a:solidFill>
+                  <a:srgbClr val="A7F3D0"/>
+                </a:solidFill>
+                <a:latin typeface="Courier New"/>
+                <a:ea typeface="Courier New"/>
+                <a:cs typeface="Courier New"/>
+              </a:defRPr>
+            </a:pPr>
+            <a:r>
+              <a:rPr sz="1650" b="0">
+                <a:solidFill>
+                  <a:srgbClr val="A7F3D0"/>
+                </a:solidFill>
+                <a:latin typeface="Courier New"/>
+                <a:ea typeface="Courier New"/>
+                <a:cs typeface="Courier New"/>
+              </a:rPr>
+              <a:t>F = 2 = 010₂</a:t>
             </a:r>
           </a:p>
           <a:p xmlns:a="http://schemas.openxmlformats.org/drawingml/2006/main">
@@ -14353,7 +9178,12 @@
                 <a:ea typeface="Courier New"/>
                 <a:cs typeface="Courier New"/>
               </a:rPr>
-              <a:t>With E = 0:</a:t>
+              <a:t>Fields: 0 | 011 | 010</a:t>
+            </a:r>
+          </a:p>
+          <a:p xmlns:a="http://schemas.openxmlformats.org/drawingml/2006/main">
+            <a:r>
+              <a:t/>
             </a:r>
           </a:p>
           <a:p xmlns:a="http://schemas.openxmlformats.org/drawingml/2006/main">
@@ -14376,7 +9206,7 @@
                 <a:ea typeface="Courier New"/>
                 <a:cs typeface="Courier New"/>
               </a:rPr>
-              <a:t>value = (F/8) × 1/4 = F/32</a:t>
+              <a:t>Check: (1 + 2/8) × 2⁰ = 5/4</a:t>
             </a:r>
           </a:p>
         </p:txBody>
@@ -14386,7 +9216,7 @@
           <p:cNvPr id="5" name="">
             <a:extLst xmlns:a="http://schemas.openxmlformats.org/drawingml/2006/main">
               <a:ext uri="{FF2B5EF4-FFF2-40B4-BE49-F238E27FC236}">
-                <a16:creationId xmlns:a16="http://schemas.microsoft.com/office/drawing/2014/main" id="{9F4CF9CF-84BA-4EC0-8FAB-A22D151C3C0A}"/>
+                <a16:creationId xmlns:a16="http://schemas.microsoft.com/office/drawing/2014/main" id="{ED77AF00-6FE1-4CFC-B54D-88BC56D34ECE}"/>
               </a:ext>
             </a:extLst>
           </p:cNvPr>
@@ -14433,7 +9263,7 @@
                 <a:ea typeface="Arial"/>
                 <a:cs typeface="Arial"/>
               </a:rPr>
-              <a:t>E = 0 changes the formula; it does not mean the true exponent is −3.</a:t>
+              <a:t>The stored fraction has three bits; the implied leading 1 is not one of them.</a:t>
             </a:r>
           </a:p>
         </p:txBody>
@@ -14443,7 +9273,7 @@
           <p:cNvPr id="6" name="">
             <a:extLst xmlns:a="http://schemas.openxmlformats.org/drawingml/2006/main">
               <a:ext uri="{FF2B5EF4-FFF2-40B4-BE49-F238E27FC236}">
-                <a16:creationId xmlns:a16="http://schemas.microsoft.com/office/drawing/2014/main" id="{8102533E-061C-486D-8935-0048992AA266}"/>
+                <a16:creationId xmlns:a16="http://schemas.microsoft.com/office/drawing/2014/main" id="{50A2E0CF-972D-435B-99E9-C4F31D4132B0}"/>
               </a:ext>
             </a:extLst>
           </p:cNvPr>
@@ -14490,7 +9320,7 @@
                 <a:ea typeface="Courier New"/>
                 <a:cs typeface="Courier New"/>
               </a:rPr>
-              <a:t>06 / 26</a:t>
+              <a:t>06 / 17</a:t>
             </a:r>
           </a:p>
         </p:txBody>
@@ -14498,7 +9328,7 @@
     </p:spTree>
     <p:extLst>
       <p:ext uri="{BB962C8B-B14F-4D97-AF65-F5344CB8AC3E}">
-        <p14:creationId xmlns:p14="http://schemas.microsoft.com/office/powerpoint/2010/main" val="2127417299"/>
+        <p14:creationId xmlns:p14="http://schemas.microsoft.com/office/powerpoint/2010/main" val="1095495873"/>
       </p:ext>
     </p:extLst>
   </p:cSld>
@@ -14529,7 +9359,7 @@
           <p:cNvPr id="7" name="">
             <a:extLst xmlns:a="http://schemas.openxmlformats.org/drawingml/2006/main">
               <a:ext uri="{FF2B5EF4-FFF2-40B4-BE49-F238E27FC236}">
-                <a16:creationId xmlns:a16="http://schemas.microsoft.com/office/drawing/2014/main" id="{CECA9B27-DB7A-4F32-815F-B74B7157F97F}"/>
+                <a16:creationId xmlns:a16="http://schemas.microsoft.com/office/drawing/2014/main" id="{514F9435-A104-4D30-A188-4EE2456CA2BB}"/>
               </a:ext>
             </a:extLst>
           </p:cNvPr>
@@ -14586,7 +9416,7 @@
           <p:cNvPr id="2" name="">
             <a:extLst xmlns:a="http://schemas.openxmlformats.org/drawingml/2006/main">
               <a:ext uri="{FF2B5EF4-FFF2-40B4-BE49-F238E27FC236}">
-                <a16:creationId xmlns:a16="http://schemas.microsoft.com/office/drawing/2014/main" id="{B2C12482-9A52-4181-8EA9-E8A66935C31D}"/>
+                <a16:creationId xmlns:a16="http://schemas.microsoft.com/office/drawing/2014/main" id="{E3CC3344-C3E4-4449-AF40-33DADFB16B1E}"/>
               </a:ext>
             </a:extLst>
           </p:cNvPr>
@@ -14633,7 +9463,7 @@
                 <a:ea typeface="Arial"/>
                 <a:cs typeface="Arial"/>
               </a:rPr>
-              <a:t>Encode a subnormal value: 1/8</a:t>
+              <a:t>Decode a normal bit pattern</a:t>
             </a:r>
           </a:p>
         </p:txBody>
@@ -14643,7 +9473,7 @@
           <p:cNvPr id="3" name="">
             <a:extLst xmlns:a="http://schemas.openxmlformats.org/drawingml/2006/main">
               <a:ext uri="{FF2B5EF4-FFF2-40B4-BE49-F238E27FC236}">
-                <a16:creationId xmlns:a16="http://schemas.microsoft.com/office/drawing/2014/main" id="{0E01CC07-B285-4F43-B3EB-D367BBB056A6}"/>
+                <a16:creationId xmlns:a16="http://schemas.microsoft.com/office/drawing/2014/main" id="{798D5084-9296-4E15-A9DC-A45F46A15641}"/>
               </a:ext>
             </a:extLst>
           </p:cNvPr>
@@ -14690,7 +9520,7 @@
                 <a:ea typeface="Arial"/>
                 <a:cs typeface="Arial"/>
               </a:rPr>
-              <a:t>1/8 is below the smallest normal value, 1/4. Set E = 0.</a:t>
+              <a:t>Read the exponent field as an unsigned integer, then subtract the bias. Read the fraction field as F/8.</a:t>
             </a:r>
           </a:p>
           <a:p xmlns:a="http://schemas.openxmlformats.org/drawingml/2006/main">
@@ -14718,7 +9548,7 @@
                 <a:ea typeface="Arial"/>
                 <a:cs typeface="Arial"/>
               </a:rPr>
-              <a:t>For this format, a subnormal has value F/32. Solve F/32 = 1/8, giving F = 4.</a:t>
+              <a:t>Because E is not zero, include the implied leading 1.</a:t>
             </a:r>
           </a:p>
         </p:txBody>
@@ -14728,7 +9558,7 @@
           <p:cNvPr id="4" name="">
             <a:extLst xmlns:a="http://schemas.openxmlformats.org/drawingml/2006/main">
               <a:ext uri="{FF2B5EF4-FFF2-40B4-BE49-F238E27FC236}">
-                <a16:creationId xmlns:a16="http://schemas.microsoft.com/office/drawing/2014/main" id="{99F60560-AF7C-4B8A-BBEF-A206FB04E784}"/>
+                <a16:creationId xmlns:a16="http://schemas.microsoft.com/office/drawing/2014/main" id="{FD548711-085C-45B3-A8BC-2D9BA414882B}"/>
               </a:ext>
             </a:extLst>
           </p:cNvPr>
@@ -14775,7 +9605,12 @@
                 <a:ea typeface="Courier New"/>
                 <a:cs typeface="Courier New"/>
               </a:rPr>
-              <a:t>S = 0</a:t>
+              <a:t>Bits: 0 | 010 | 101</a:t>
+            </a:r>
+          </a:p>
+          <a:p xmlns:a="http://schemas.openxmlformats.org/drawingml/2006/main">
+            <a:r>
+              <a:t/>
             </a:r>
           </a:p>
           <a:p xmlns:a="http://schemas.openxmlformats.org/drawingml/2006/main">
@@ -14798,7 +9633,7 @@
                 <a:ea typeface="Courier New"/>
                 <a:cs typeface="Courier New"/>
               </a:rPr>
-              <a:t>E = 0 = 000₂</a:t>
+              <a:t>E = 2, so e = 2 − 3 = −1</a:t>
             </a:r>
           </a:p>
           <a:p xmlns:a="http://schemas.openxmlformats.org/drawingml/2006/main">
@@ -14821,7 +9656,7 @@
                 <a:ea typeface="Courier New"/>
                 <a:cs typeface="Courier New"/>
               </a:rPr>
-              <a:t>F = 4 = 100₂</a:t>
+              <a:t>F = 5, so 1 + F/8 = 13/8</a:t>
             </a:r>
           </a:p>
           <a:p xmlns:a="http://schemas.openxmlformats.org/drawingml/2006/main">
@@ -14849,35 +9684,7 @@
                 <a:ea typeface="Courier New"/>
                 <a:cs typeface="Courier New"/>
               </a:rPr>
-              <a:t>Fields: 0 | 000 | 100</a:t>
-            </a:r>
-          </a:p>
-          <a:p xmlns:a="http://schemas.openxmlformats.org/drawingml/2006/main">
-            <a:r>
-              <a:t/>
-            </a:r>
-          </a:p>
-          <a:p xmlns:a="http://schemas.openxmlformats.org/drawingml/2006/main">
-            <a:pPr>
-              <a:defRPr sz="1650" b="0">
-                <a:solidFill>
-                  <a:srgbClr val="A7F3D0"/>
-                </a:solidFill>
-                <a:latin typeface="Courier New"/>
-                <a:ea typeface="Courier New"/>
-                <a:cs typeface="Courier New"/>
-              </a:defRPr>
-            </a:pPr>
-            <a:r>
-              <a:rPr sz="1650" b="0">
-                <a:solidFill>
-                  <a:srgbClr val="A7F3D0"/>
-                </a:solidFill>
-                <a:latin typeface="Courier New"/>
-                <a:ea typeface="Courier New"/>
-                <a:cs typeface="Courier New"/>
-              </a:rPr>
-              <a:t>Check: (4/8) × 2⁻² = 1/8</a:t>
+              <a:t>Value = (13/8) × 2⁻¹ = 13/16</a:t>
             </a:r>
           </a:p>
         </p:txBody>
@@ -14887,7 +9694,7 @@
           <p:cNvPr id="5" name="">
             <a:extLst xmlns:a="http://schemas.openxmlformats.org/drawingml/2006/main">
               <a:ext uri="{FF2B5EF4-FFF2-40B4-BE49-F238E27FC236}">
-                <a16:creationId xmlns:a16="http://schemas.microsoft.com/office/drawing/2014/main" id="{8DB80937-F574-4F1A-B149-19222B27F739}"/>
+                <a16:creationId xmlns:a16="http://schemas.microsoft.com/office/drawing/2014/main" id="{584E23CF-F2CD-46A9-9F4D-20949170792D}"/>
               </a:ext>
             </a:extLst>
           </p:cNvPr>
@@ -14934,7 +9741,7 @@
                 <a:ea typeface="Arial"/>
                 <a:cs typeface="Arial"/>
               </a:rPr>
-              <a:t>The stored fraction is 100₂. There is no leading 1 in the subnormal formula.</a:t>
+              <a:t>The bit pattern is a recipe for a value, not the digits of that value.</a:t>
             </a:r>
           </a:p>
         </p:txBody>
@@ -14944,7 +9751,7 @@
           <p:cNvPr id="6" name="">
             <a:extLst xmlns:a="http://schemas.openxmlformats.org/drawingml/2006/main">
               <a:ext uri="{FF2B5EF4-FFF2-40B4-BE49-F238E27FC236}">
-                <a16:creationId xmlns:a16="http://schemas.microsoft.com/office/drawing/2014/main" id="{E1E48C19-A67A-47A9-8DED-3CD488DF82E5}"/>
+                <a16:creationId xmlns:a16="http://schemas.microsoft.com/office/drawing/2014/main" id="{96E02F47-A9E9-43B2-AC22-5EF03769EDD4}"/>
               </a:ext>
             </a:extLst>
           </p:cNvPr>
@@ -14991,7 +9798,7 @@
                 <a:ea typeface="Courier New"/>
                 <a:cs typeface="Courier New"/>
               </a:rPr>
-              <a:t>07 / 26</a:t>
+              <a:t>07 / 17</a:t>
             </a:r>
           </a:p>
         </p:txBody>
@@ -14999,7 +9806,7 @@
     </p:spTree>
     <p:extLst>
       <p:ext uri="{BB962C8B-B14F-4D97-AF65-F5344CB8AC3E}">
-        <p14:creationId xmlns:p14="http://schemas.microsoft.com/office/powerpoint/2010/main" val="482910634"/>
+        <p14:creationId xmlns:p14="http://schemas.microsoft.com/office/powerpoint/2010/main" val="659736008"/>
       </p:ext>
     </p:extLst>
   </p:cSld>
@@ -15030,7 +9837,7 @@
           <p:cNvPr id="7" name="">
             <a:extLst xmlns:a="http://schemas.openxmlformats.org/drawingml/2006/main">
               <a:ext uri="{FF2B5EF4-FFF2-40B4-BE49-F238E27FC236}">
-                <a16:creationId xmlns:a16="http://schemas.microsoft.com/office/drawing/2014/main" id="{2F1D4FA8-7CA1-42C0-8651-205DAB456109}"/>
+                <a16:creationId xmlns:a16="http://schemas.microsoft.com/office/drawing/2014/main" id="{52BEAABF-BD4F-40AF-A282-4DA602FE61EE}"/>
               </a:ext>
             </a:extLst>
           </p:cNvPr>
@@ -15077,7 +9884,7 @@
                 <a:ea typeface="Courier New"/>
                 <a:cs typeface="Courier New"/>
               </a:rPr>
-              <a:t>FLOATING POINT · PRACTICE</a:t>
+              <a:t>FLOATING POINT · SUBNORMALS</a:t>
             </a:r>
           </a:p>
         </p:txBody>
@@ -15087,7 +9894,7 @@
           <p:cNvPr id="2" name="">
             <a:extLst xmlns:a="http://schemas.openxmlformats.org/drawingml/2006/main">
               <a:ext uri="{FF2B5EF4-FFF2-40B4-BE49-F238E27FC236}">
-                <a16:creationId xmlns:a16="http://schemas.microsoft.com/office/drawing/2014/main" id="{40F8098D-7D0F-42BB-811B-E0EB6101091B}"/>
+                <a16:creationId xmlns:a16="http://schemas.microsoft.com/office/drawing/2014/main" id="{55B309F2-033B-47F8-941D-460A77FAB0C8}"/>
               </a:ext>
             </a:extLst>
           </p:cNvPr>
@@ -15134,7 +9941,7 @@
                 <a:ea typeface="Arial"/>
                 <a:cs typeface="Arial"/>
               </a:rPr>
-              <a:t>Your turn: classify two ratios</a:t>
+              <a:t>What happens below the normal range?</a:t>
             </a:r>
           </a:p>
         </p:txBody>
@@ -15144,7 +9951,7 @@
           <p:cNvPr id="3" name="">
             <a:extLst xmlns:a="http://schemas.openxmlformats.org/drawingml/2006/main">
               <a:ext uri="{FF2B5EF4-FFF2-40B4-BE49-F238E27FC236}">
-                <a16:creationId xmlns:a16="http://schemas.microsoft.com/office/drawing/2014/main" id="{3D92BDD9-1EE8-40B7-8D10-7CD44AC2FF64}"/>
+                <a16:creationId xmlns:a16="http://schemas.microsoft.com/office/drawing/2014/main" id="{2413D46C-F548-4E0D-8AC8-B55CC5C096EA}"/>
               </a:ext>
             </a:extLst>
           </p:cNvPr>
@@ -15191,7 +9998,7 @@
                 <a:ea typeface="Arial"/>
                 <a:cs typeface="Arial"/>
               </a:rPr>
-              <a:t>Use the same practice format: 3 exponent bits, bias 3, and 3 fraction bits.</a:t>
+              <a:t>The smallest positive normal value here is 1.000₂ × 2⁻² = 1/4.</a:t>
             </a:r>
           </a:p>
           <a:p xmlns:a="http://schemas.openxmlformats.org/drawingml/2006/main">
@@ -15219,7 +10026,7 @@
                 <a:ea typeface="Arial"/>
                 <a:cs typeface="Arial"/>
               </a:rPr>
-              <a:t>For each ratio, decide normal or subnormal, then find E and F.</a:t>
+              <a:t>Smaller positive values use E = 0. They have no implied leading 1. Their exponent is fixed at 1 − bias.</a:t>
             </a:r>
           </a:p>
         </p:txBody>
@@ -15229,7 +10036,7 @@
           <p:cNvPr id="4" name="">
             <a:extLst xmlns:a="http://schemas.openxmlformats.org/drawingml/2006/main">
               <a:ext uri="{FF2B5EF4-FFF2-40B4-BE49-F238E27FC236}">
-                <a16:creationId xmlns:a16="http://schemas.microsoft.com/office/drawing/2014/main" id="{4C44C26C-EAB8-4C35-ADA6-099DD154A3DC}"/>
+                <a16:creationId xmlns:a16="http://schemas.microsoft.com/office/drawing/2014/main" id="{F4B5AD63-6E91-45DD-AE29-2F54895B988B}"/>
               </a:ext>
             </a:extLst>
           </p:cNvPr>
@@ -15276,7 +10083,7 @@
                 <a:ea typeface="Courier New"/>
                 <a:cs typeface="Courier New"/>
               </a:rPr>
-              <a:t>A. 3/2</a:t>
+              <a:t>Normal:    (1 + F/8) × 2^(E−3)</a:t>
             </a:r>
           </a:p>
           <a:p xmlns:a="http://schemas.openxmlformats.org/drawingml/2006/main">
@@ -15299,7 +10106,12 @@
                 <a:ea typeface="Courier New"/>
                 <a:cs typeface="Courier New"/>
               </a:rPr>
-              <a:t>   normal or subnormal?</a:t>
+              <a:t>Subnormal: (    F/8) × 2^(1−3)</a:t>
+            </a:r>
+          </a:p>
+          <a:p xmlns:a="http://schemas.openxmlformats.org/drawingml/2006/main">
+            <a:r>
+              <a:t/>
             </a:r>
           </a:p>
           <a:p xmlns:a="http://schemas.openxmlformats.org/drawingml/2006/main">
@@ -15322,12 +10134,7 @@
                 <a:ea typeface="Courier New"/>
                 <a:cs typeface="Courier New"/>
               </a:rPr>
-              <a:t>   E = ?   F = ?</a:t>
-            </a:r>
-          </a:p>
-          <a:p xmlns:a="http://schemas.openxmlformats.org/drawingml/2006/main">
-            <a:r>
-              <a:t/>
+              <a:t>With E = 0:</a:t>
             </a:r>
           </a:p>
           <a:p xmlns:a="http://schemas.openxmlformats.org/drawingml/2006/main">
@@ -15350,53 +10157,7 @@
                 <a:ea typeface="Courier New"/>
                 <a:cs typeface="Courier New"/>
               </a:rPr>
-              <a:t>B. 3/16</a:t>
-            </a:r>
-          </a:p>
-          <a:p xmlns:a="http://schemas.openxmlformats.org/drawingml/2006/main">
-            <a:pPr>
-              <a:defRPr sz="1650" b="0">
-                <a:solidFill>
-                  <a:srgbClr val="A7F3D0"/>
-                </a:solidFill>
-                <a:latin typeface="Courier New"/>
-                <a:ea typeface="Courier New"/>
-                <a:cs typeface="Courier New"/>
-              </a:defRPr>
-            </a:pPr>
-            <a:r>
-              <a:rPr sz="1650" b="0">
-                <a:solidFill>
-                  <a:srgbClr val="A7F3D0"/>
-                </a:solidFill>
-                <a:latin typeface="Courier New"/>
-                <a:ea typeface="Courier New"/>
-                <a:cs typeface="Courier New"/>
-              </a:rPr>
-              <a:t>   normal or subnormal?</a:t>
-            </a:r>
-          </a:p>
-          <a:p xmlns:a="http://schemas.openxmlformats.org/drawingml/2006/main">
-            <a:pPr>
-              <a:defRPr sz="1650" b="0">
-                <a:solidFill>
-                  <a:srgbClr val="A7F3D0"/>
-                </a:solidFill>
-                <a:latin typeface="Courier New"/>
-                <a:ea typeface="Courier New"/>
-                <a:cs typeface="Courier New"/>
-              </a:defRPr>
-            </a:pPr>
-            <a:r>
-              <a:rPr sz="1650" b="0">
-                <a:solidFill>
-                  <a:srgbClr val="A7F3D0"/>
-                </a:solidFill>
-                <a:latin typeface="Courier New"/>
-                <a:ea typeface="Courier New"/>
-                <a:cs typeface="Courier New"/>
-              </a:rPr>
-              <a:t>   E = ?   F = ?</a:t>
+              <a:t>value = (F/8) × 1/4 = F/32</a:t>
             </a:r>
           </a:p>
         </p:txBody>
@@ -15406,7 +10167,7 @@
           <p:cNvPr id="5" name="">
             <a:extLst xmlns:a="http://schemas.openxmlformats.org/drawingml/2006/main">
               <a:ext uri="{FF2B5EF4-FFF2-40B4-BE49-F238E27FC236}">
-                <a16:creationId xmlns:a16="http://schemas.microsoft.com/office/drawing/2014/main" id="{010BF70E-B1F3-4655-8D2A-9F8999B30F9F}"/>
+                <a16:creationId xmlns:a16="http://schemas.microsoft.com/office/drawing/2014/main" id="{10C83417-6965-41D8-8054-D122A500127B}"/>
               </a:ext>
             </a:extLst>
           </p:cNvPr>
@@ -15453,7 +10214,7 @@
                 <a:ea typeface="Arial"/>
                 <a:cs typeface="Arial"/>
               </a:rPr>
-              <a:t>Compare each value with the smallest normal, 1/4, before finding bits.</a:t>
+              <a:t>E = 0 changes the formula; it does not mean the true exponent is −3.</a:t>
             </a:r>
           </a:p>
         </p:txBody>
@@ -15463,7 +10224,7 @@
           <p:cNvPr id="6" name="">
             <a:extLst xmlns:a="http://schemas.openxmlformats.org/drawingml/2006/main">
               <a:ext uri="{FF2B5EF4-FFF2-40B4-BE49-F238E27FC236}">
-                <a16:creationId xmlns:a16="http://schemas.microsoft.com/office/drawing/2014/main" id="{C7BFB043-FF1A-4122-A4D8-61D62EBF9E95}"/>
+                <a16:creationId xmlns:a16="http://schemas.microsoft.com/office/drawing/2014/main" id="{8E1F2603-246C-497E-B2CC-C75AC3901746}"/>
               </a:ext>
             </a:extLst>
           </p:cNvPr>
@@ -15510,7 +10271,7 @@
                 <a:ea typeface="Courier New"/>
                 <a:cs typeface="Courier New"/>
               </a:rPr>
-              <a:t>08 / 26</a:t>
+              <a:t>08 / 17</a:t>
             </a:r>
           </a:p>
         </p:txBody>
@@ -15518,7 +10279,7 @@
     </p:spTree>
     <p:extLst>
       <p:ext uri="{BB962C8B-B14F-4D97-AF65-F5344CB8AC3E}">
-        <p14:creationId xmlns:p14="http://schemas.microsoft.com/office/powerpoint/2010/main" val="2091730236"/>
+        <p14:creationId xmlns:p14="http://schemas.microsoft.com/office/powerpoint/2010/main" val="1857122576"/>
       </p:ext>
     </p:extLst>
   </p:cSld>
@@ -15549,7 +10310,7 @@
           <p:cNvPr id="7" name="">
             <a:extLst xmlns:a="http://schemas.openxmlformats.org/drawingml/2006/main">
               <a:ext uri="{FF2B5EF4-FFF2-40B4-BE49-F238E27FC236}">
-                <a16:creationId xmlns:a16="http://schemas.microsoft.com/office/drawing/2014/main" id="{09288539-5276-4697-90F4-50641D976E34}"/>
+                <a16:creationId xmlns:a16="http://schemas.microsoft.com/office/drawing/2014/main" id="{0E1C1D56-F3B0-4FC7-8312-5DCE66DE8296}"/>
               </a:ext>
             </a:extLst>
           </p:cNvPr>
@@ -15596,7 +10357,7 @@
                 <a:ea typeface="Courier New"/>
                 <a:cs typeface="Courier New"/>
               </a:rPr>
-              <a:t>FLOATING POINT · CHECK</a:t>
+              <a:t>FLOATING POINT · WORKED EXAMPLE</a:t>
             </a:r>
           </a:p>
         </p:txBody>
@@ -15606,7 +10367,7 @@
           <p:cNvPr id="2" name="">
             <a:extLst xmlns:a="http://schemas.openxmlformats.org/drawingml/2006/main">
               <a:ext uri="{FF2B5EF4-FFF2-40B4-BE49-F238E27FC236}">
-                <a16:creationId xmlns:a16="http://schemas.microsoft.com/office/drawing/2014/main" id="{E565C4E1-2E6B-40DB-BB5D-138AB40CBC18}"/>
+                <a16:creationId xmlns:a16="http://schemas.microsoft.com/office/drawing/2014/main" id="{47EC4111-990D-4F27-A48D-9B66E8564E29}"/>
               </a:ext>
             </a:extLst>
           </p:cNvPr>
@@ -15653,7 +10414,7 @@
                 <a:ea typeface="Arial"/>
                 <a:cs typeface="Arial"/>
               </a:rPr>
-              <a:t>Practice answers</a:t>
+              <a:t>Encode a subnormal value: 1/8</a:t>
             </a:r>
           </a:p>
         </p:txBody>
@@ -15663,7 +10424,7 @@
           <p:cNvPr id="3" name="">
             <a:extLst xmlns:a="http://schemas.openxmlformats.org/drawingml/2006/main">
               <a:ext uri="{FF2B5EF4-FFF2-40B4-BE49-F238E27FC236}">
-                <a16:creationId xmlns:a16="http://schemas.microsoft.com/office/drawing/2014/main" id="{5C240C3A-57CA-42F3-B71A-D2332E5D333D}"/>
+                <a16:creationId xmlns:a16="http://schemas.microsoft.com/office/drawing/2014/main" id="{EA7FC2C0-68E4-440B-B218-A53A78DE1183}"/>
               </a:ext>
             </a:extLst>
           </p:cNvPr>
@@ -15710,7 +10471,7 @@
                 <a:ea typeface="Arial"/>
                 <a:cs typeface="Arial"/>
               </a:rPr>
-              <a:t>3/2 = 1.100₂ × 2⁰, so it is normal.</a:t>
+              <a:t>1/8 is below the smallest normal value, 1/4. Set E = 0.</a:t>
             </a:r>
           </a:p>
           <a:p xmlns:a="http://schemas.openxmlformats.org/drawingml/2006/main">
@@ -15738,7 +10499,7 @@
                 <a:ea typeface="Arial"/>
                 <a:cs typeface="Arial"/>
               </a:rPr>
-              <a:t>3/16 is below 1/4, so it is subnormal. Since value = F/32, F = 6.</a:t>
+              <a:t>For this format, a subnormal has value F/32. Solve F/32 = 1/8, giving F = 4.</a:t>
             </a:r>
           </a:p>
         </p:txBody>
@@ -15748,7 +10509,7 @@
           <p:cNvPr id="4" name="">
             <a:extLst xmlns:a="http://schemas.openxmlformats.org/drawingml/2006/main">
               <a:ext uri="{FF2B5EF4-FFF2-40B4-BE49-F238E27FC236}">
-                <a16:creationId xmlns:a16="http://schemas.microsoft.com/office/drawing/2014/main" id="{CF3E6C5D-FB1A-4074-BB14-6DA60B946AE0}"/>
+                <a16:creationId xmlns:a16="http://schemas.microsoft.com/office/drawing/2014/main" id="{C7B97746-2F05-4C79-997B-46EF673FF248}"/>
               </a:ext>
             </a:extLst>
           </p:cNvPr>
@@ -15795,7 +10556,7 @@
                 <a:ea typeface="Courier New"/>
                 <a:cs typeface="Courier New"/>
               </a:rPr>
-              <a:t>A. 3/2</a:t>
+              <a:t>S = 0</a:t>
             </a:r>
           </a:p>
           <a:p xmlns:a="http://schemas.openxmlformats.org/drawingml/2006/main">
@@ -15818,7 +10579,7 @@
                 <a:ea typeface="Courier New"/>
                 <a:cs typeface="Courier New"/>
               </a:rPr>
-              <a:t>   E = 3 = 011₂</a:t>
+              <a:t>E = 0 = 000₂</a:t>
             </a:r>
           </a:p>
           <a:p xmlns:a="http://schemas.openxmlformats.org/drawingml/2006/main">
@@ -15841,7 +10602,12 @@
                 <a:ea typeface="Courier New"/>
                 <a:cs typeface="Courier New"/>
               </a:rPr>
-              <a:t>   F = 4 = 100₂</a:t>
+              <a:t>F = 4 = 100₂</a:t>
+            </a:r>
+          </a:p>
+          <a:p xmlns:a="http://schemas.openxmlformats.org/drawingml/2006/main">
+            <a:r>
+              <a:t/>
             </a:r>
           </a:p>
           <a:p xmlns:a="http://schemas.openxmlformats.org/drawingml/2006/main">
@@ -15864,7 +10630,7 @@
                 <a:ea typeface="Courier New"/>
                 <a:cs typeface="Courier New"/>
               </a:rPr>
-              <a:t>   Check: (1 + 4/8) × 1 = 3/2</a:t>
+              <a:t>Fields: 0 | 000 | 100</a:t>
             </a:r>
           </a:p>
           <a:p xmlns:a="http://schemas.openxmlformats.org/drawingml/2006/main">
@@ -15892,76 +10658,7 @@
                 <a:ea typeface="Courier New"/>
                 <a:cs typeface="Courier New"/>
               </a:rPr>
-              <a:t>B. 3/16</a:t>
-            </a:r>
-          </a:p>
-          <a:p xmlns:a="http://schemas.openxmlformats.org/drawingml/2006/main">
-            <a:pPr>
-              <a:defRPr sz="1650" b="0">
-                <a:solidFill>
-                  <a:srgbClr val="A7F3D0"/>
-                </a:solidFill>
-                <a:latin typeface="Courier New"/>
-                <a:ea typeface="Courier New"/>
-                <a:cs typeface="Courier New"/>
-              </a:defRPr>
-            </a:pPr>
-            <a:r>
-              <a:rPr sz="1650" b="0">
-                <a:solidFill>
-                  <a:srgbClr val="A7F3D0"/>
-                </a:solidFill>
-                <a:latin typeface="Courier New"/>
-                <a:ea typeface="Courier New"/>
-                <a:cs typeface="Courier New"/>
-              </a:rPr>
-              <a:t>   E = 0 = 000₂</a:t>
-            </a:r>
-          </a:p>
-          <a:p xmlns:a="http://schemas.openxmlformats.org/drawingml/2006/main">
-            <a:pPr>
-              <a:defRPr sz="1650" b="0">
-                <a:solidFill>
-                  <a:srgbClr val="A7F3D0"/>
-                </a:solidFill>
-                <a:latin typeface="Courier New"/>
-                <a:ea typeface="Courier New"/>
-                <a:cs typeface="Courier New"/>
-              </a:defRPr>
-            </a:pPr>
-            <a:r>
-              <a:rPr sz="1650" b="0">
-                <a:solidFill>
-                  <a:srgbClr val="A7F3D0"/>
-                </a:solidFill>
-                <a:latin typeface="Courier New"/>
-                <a:ea typeface="Courier New"/>
-                <a:cs typeface="Courier New"/>
-              </a:rPr>
-              <a:t>   F = 6 = 110₂</a:t>
-            </a:r>
-          </a:p>
-          <a:p xmlns:a="http://schemas.openxmlformats.org/drawingml/2006/main">
-            <a:pPr>
-              <a:defRPr sz="1650" b="0">
-                <a:solidFill>
-                  <a:srgbClr val="A7F3D0"/>
-                </a:solidFill>
-                <a:latin typeface="Courier New"/>
-                <a:ea typeface="Courier New"/>
-                <a:cs typeface="Courier New"/>
-              </a:defRPr>
-            </a:pPr>
-            <a:r>
-              <a:rPr sz="1650" b="0">
-                <a:solidFill>
-                  <a:srgbClr val="A7F3D0"/>
-                </a:solidFill>
-                <a:latin typeface="Courier New"/>
-                <a:ea typeface="Courier New"/>
-                <a:cs typeface="Courier New"/>
-              </a:rPr>
-              <a:t>   Check: 6/32 = 3/16</a:t>
+              <a:t>Check: (4/8) × 2⁻² = 1/8</a:t>
             </a:r>
           </a:p>
         </p:txBody>
@@ -15971,7 +10668,7 @@
           <p:cNvPr id="5" name="">
             <a:extLst xmlns:a="http://schemas.openxmlformats.org/drawingml/2006/main">
               <a:ext uri="{FF2B5EF4-FFF2-40B4-BE49-F238E27FC236}">
-                <a16:creationId xmlns:a16="http://schemas.microsoft.com/office/drawing/2014/main" id="{7A691C48-55B9-462E-A2A2-10EE22CE8B3F}"/>
+                <a16:creationId xmlns:a16="http://schemas.microsoft.com/office/drawing/2014/main" id="{C953FAB2-7571-49A3-B6C8-87F90FA9D556}"/>
               </a:ext>
             </a:extLst>
           </p:cNvPr>
@@ -16018,7 +10715,7 @@
                 <a:ea typeface="Arial"/>
                 <a:cs typeface="Arial"/>
               </a:rPr>
-              <a:t>A fraction can be exactly representable in one format and not another.</a:t>
+              <a:t>The stored fraction is 100₂. There is no leading 1 in the subnormal formula.</a:t>
             </a:r>
           </a:p>
         </p:txBody>
@@ -16028,7 +10725,7 @@
           <p:cNvPr id="6" name="">
             <a:extLst xmlns:a="http://schemas.openxmlformats.org/drawingml/2006/main">
               <a:ext uri="{FF2B5EF4-FFF2-40B4-BE49-F238E27FC236}">
-                <a16:creationId xmlns:a16="http://schemas.microsoft.com/office/drawing/2014/main" id="{56A1B2B5-6F4D-4BDD-A953-77BA254CF43A}"/>
+                <a16:creationId xmlns:a16="http://schemas.microsoft.com/office/drawing/2014/main" id="{ECE7F5E9-2417-44C6-925E-4767F90FA696}"/>
               </a:ext>
             </a:extLst>
           </p:cNvPr>
@@ -16075,7 +10772,7 @@
                 <a:ea typeface="Courier New"/>
                 <a:cs typeface="Courier New"/>
               </a:rPr>
-              <a:t>09 / 26</a:t>
+              <a:t>09 / 17</a:t>
             </a:r>
           </a:p>
         </p:txBody>
@@ -16083,7 +10780,7 @@
     </p:spTree>
     <p:extLst>
       <p:ext uri="{BB962C8B-B14F-4D97-AF65-F5344CB8AC3E}">
-        <p14:creationId xmlns:p14="http://schemas.microsoft.com/office/powerpoint/2010/main" val="1946185767"/>
+        <p14:creationId xmlns:p14="http://schemas.microsoft.com/office/powerpoint/2010/main" val="1082036242"/>
       </p:ext>
     </p:extLst>
   </p:cSld>

--- a/public/presentations/CS211_Recitation_3.pptx
+++ b/public/presentations/CS211_Recitation_3.pptx
@@ -2,29 +2,32 @@
 <file path=ppt/presentation.xml><?xml version="1.0" encoding="utf-8"?>
 <p:presentation xmlns:p="http://schemas.openxmlformats.org/presentationml/2006/main">
   <p:sldMasterIdLst>
-    <p:sldMasterId xmlns:r="http://schemas.openxmlformats.org/officeDocument/2006/relationships" id="2147483648" r:id="R8ef0510d25a24440"/>
+    <p:sldMasterId xmlns:r="http://schemas.openxmlformats.org/officeDocument/2006/relationships" id="2147483648" r:id="Ra47e6fe55a134014"/>
   </p:sldMasterIdLst>
   <p:notesMasterIdLst>
-    <p:notesMasterId xmlns:r="http://schemas.openxmlformats.org/officeDocument/2006/relationships" r:id="R8aa4f0f4d1994147"/>
+    <p:notesMasterId xmlns:r="http://schemas.openxmlformats.org/officeDocument/2006/relationships" r:id="Rd3b23f1bb00e4b8d"/>
   </p:notesMasterIdLst>
   <p:sldIdLst>
-    <p:sldId xmlns:r="http://schemas.openxmlformats.org/officeDocument/2006/relationships" id="256" r:id="R2e5fd7b401034495"/>
-    <p:sldId xmlns:r="http://schemas.openxmlformats.org/officeDocument/2006/relationships" id="257" r:id="R1225c6ea891b4ed2"/>
-    <p:sldId xmlns:r="http://schemas.openxmlformats.org/officeDocument/2006/relationships" id="258" r:id="R461f0b8506044744"/>
-    <p:sldId xmlns:r="http://schemas.openxmlformats.org/officeDocument/2006/relationships" id="259" r:id="Rdb93ef0b09d84dfb"/>
-    <p:sldId xmlns:r="http://schemas.openxmlformats.org/officeDocument/2006/relationships" id="260" r:id="Rd313bce263f546a8"/>
-    <p:sldId xmlns:r="http://schemas.openxmlformats.org/officeDocument/2006/relationships" id="261" r:id="R358fc6bfdd2c40b7"/>
-    <p:sldId xmlns:r="http://schemas.openxmlformats.org/officeDocument/2006/relationships" id="262" r:id="R09bb18d6ecab4f9f"/>
-    <p:sldId xmlns:r="http://schemas.openxmlformats.org/officeDocument/2006/relationships" id="263" r:id="R1ab76bbb87ad4eeb"/>
-    <p:sldId xmlns:r="http://schemas.openxmlformats.org/officeDocument/2006/relationships" id="264" r:id="R20e0c0edd2f54e00"/>
-    <p:sldId xmlns:r="http://schemas.openxmlformats.org/officeDocument/2006/relationships" id="265" r:id="R453557a4695c48d0"/>
-    <p:sldId xmlns:r="http://schemas.openxmlformats.org/officeDocument/2006/relationships" id="266" r:id="R1f9e5f482c784e45"/>
-    <p:sldId xmlns:r="http://schemas.openxmlformats.org/officeDocument/2006/relationships" id="267" r:id="Re5ccc9e889de484c"/>
-    <p:sldId xmlns:r="http://schemas.openxmlformats.org/officeDocument/2006/relationships" id="268" r:id="Rb3843a33f808476c"/>
-    <p:sldId xmlns:r="http://schemas.openxmlformats.org/officeDocument/2006/relationships" id="269" r:id="R88c937303f4342cc"/>
-    <p:sldId xmlns:r="http://schemas.openxmlformats.org/officeDocument/2006/relationships" id="270" r:id="Re10018e583c2457c"/>
-    <p:sldId xmlns:r="http://schemas.openxmlformats.org/officeDocument/2006/relationships" id="271" r:id="R400764ad50c341f5"/>
-    <p:sldId xmlns:r="http://schemas.openxmlformats.org/officeDocument/2006/relationships" id="272" r:id="R267876eb78f74481"/>
+    <p:sldId xmlns:r="http://schemas.openxmlformats.org/officeDocument/2006/relationships" id="256" r:id="R4600a745c4114dc6"/>
+    <p:sldId xmlns:r="http://schemas.openxmlformats.org/officeDocument/2006/relationships" id="257" r:id="Rfbd2ab6f0c9b4982"/>
+    <p:sldId xmlns:r="http://schemas.openxmlformats.org/officeDocument/2006/relationships" id="258" r:id="R27b11eb247a749a8"/>
+    <p:sldId xmlns:r="http://schemas.openxmlformats.org/officeDocument/2006/relationships" id="259" r:id="Rf0d345b8f1a145d5"/>
+    <p:sldId xmlns:r="http://schemas.openxmlformats.org/officeDocument/2006/relationships" id="260" r:id="R8b0d79b20a25400a"/>
+    <p:sldId xmlns:r="http://schemas.openxmlformats.org/officeDocument/2006/relationships" id="261" r:id="R8e12034dd6864da2"/>
+    <p:sldId xmlns:r="http://schemas.openxmlformats.org/officeDocument/2006/relationships" id="262" r:id="R2dabec76ca8845d8"/>
+    <p:sldId xmlns:r="http://schemas.openxmlformats.org/officeDocument/2006/relationships" id="263" r:id="R1aaed51860dc4a9f"/>
+    <p:sldId xmlns:r="http://schemas.openxmlformats.org/officeDocument/2006/relationships" id="264" r:id="R6a5f4c0583294f71"/>
+    <p:sldId xmlns:r="http://schemas.openxmlformats.org/officeDocument/2006/relationships" id="265" r:id="Rc64204b446d54df8"/>
+    <p:sldId xmlns:r="http://schemas.openxmlformats.org/officeDocument/2006/relationships" id="266" r:id="R80e53087e4004862"/>
+    <p:sldId xmlns:r="http://schemas.openxmlformats.org/officeDocument/2006/relationships" id="267" r:id="R013ff6a4f2fe4cbe"/>
+    <p:sldId xmlns:r="http://schemas.openxmlformats.org/officeDocument/2006/relationships" id="268" r:id="R02cddb29a9df4149"/>
+    <p:sldId xmlns:r="http://schemas.openxmlformats.org/officeDocument/2006/relationships" id="269" r:id="R4b94b08c36fd40c3"/>
+    <p:sldId xmlns:r="http://schemas.openxmlformats.org/officeDocument/2006/relationships" id="270" r:id="Re6e10f2a9a304161"/>
+    <p:sldId xmlns:r="http://schemas.openxmlformats.org/officeDocument/2006/relationships" id="271" r:id="Rbde8424f5d854cb5"/>
+    <p:sldId xmlns:r="http://schemas.openxmlformats.org/officeDocument/2006/relationships" id="272" r:id="R43c57c166f024dbe"/>
+    <p:sldId xmlns:r="http://schemas.openxmlformats.org/officeDocument/2006/relationships" id="273" r:id="Ra6d0bdf5fc754bdc"/>
+    <p:sldId xmlns:r="http://schemas.openxmlformats.org/officeDocument/2006/relationships" id="274" r:id="Rd577631298fa4770"/>
+    <p:sldId xmlns:r="http://schemas.openxmlformats.org/officeDocument/2006/relationships" id="275" r:id="Ra16db4aea30a4f8b"/>
   </p:sldIdLst>
   <p:sldSz cx="12192000" cy="6858000"/>
   <p:notesSz cx="6858000" cy="9144000"/>
@@ -458,17 +461,7 @@
           <a:lstStyle xmlns:a="http://schemas.openxmlformats.org/drawingml/2006/main"/>
           <a:p xmlns:a="http://schemas.openxmlformats.org/drawingml/2006/main">
             <a:r>
-              <a:t>Suggested 50-minute pacing: binary place values and fields 8 min; normal values 12 min; subnormals and the boundary 12 min; decoding and encoding practice 12 min; rounding and recap 6 min. This teaches the concepts behind the professor’s planned assignment without displaying its unreleased prompt or solution. Source: lecture 6 and the professor’s description supplied by the TA.</a:t>
-            </a:r>
-          </a:p>
-          <a:p xmlns:a="http://schemas.openxmlformats.org/drawingml/2006/main">
-            <a:r>
-              <a:t/>
-            </a:r>
-          </a:p>
-          <a:p xmlns:a="http://schemas.openxmlformats.org/drawingml/2006/main">
-            <a:r>
-              <a:t>Source: https://firner.com/presentations/cs211/2026-Fall/cs211_06/#/</a:t>
+              <a:t>Suggested 50-minute pacing: binary place values and fields 7 min; normal values 10 min; subnormals and the boundary 10 min; decoding and encoding practice 10 min; rounding and spacing 5 min; HW3 preview and recap 8 min. The HW3 details are based on the professor’s description supplied by the TA; the assignment is not officially posted. Source: lecture 6.</a:t>
             </a:r>
           </a:p>
         </p:txBody>
@@ -541,16 +534,6 @@
               <a:t>Use the 3-exponent-bit, bias-3, 3-fraction-bit practice format. Largest subnormal is F=7, giving 7/32. Smallest normal is E=1,F=0, giving 2^(1−3)=1/4. This illustrates gradual underflow.</a:t>
             </a:r>
           </a:p>
-          <a:p xmlns:a="http://schemas.openxmlformats.org/drawingml/2006/main">
-            <a:r>
-              <a:t/>
-            </a:r>
-          </a:p>
-          <a:p xmlns:a="http://schemas.openxmlformats.org/drawingml/2006/main">
-            <a:r>
-              <a:t>Source: https://firner.com/presentations/cs211/2026-Fall/cs211_06/#/</a:t>
-            </a:r>
-          </a:p>
         </p:txBody>
       </p:sp>
       <p:sp>
@@ -621,16 +604,6 @@
               <a:t>Allow two to three minutes. A is normal: E=2,F=4, value (1+4/8)×2^-1=3/4. B is subnormal: E=0,F=3, value 3/32. Ask students to name the equation before calculating.</a:t>
             </a:r>
           </a:p>
-          <a:p xmlns:a="http://schemas.openxmlformats.org/drawingml/2006/main">
-            <a:r>
-              <a:t/>
-            </a:r>
-          </a:p>
-          <a:p xmlns:a="http://schemas.openxmlformats.org/drawingml/2006/main">
-            <a:r>
-              <a:t>Source: https://firner.com/presentations/cs211/2026-Fall/cs211_06/#/</a:t>
-            </a:r>
-          </a:p>
         </p:txBody>
       </p:sp>
       <p:sp>
@@ -701,16 +674,6 @@
               <a:t>Have students explain why B is not (1+3/8)×2^-3. The exponent for subnormals is fixed at 1−bias=-2, and the leading 1 is absent.</a:t>
             </a:r>
           </a:p>
-          <a:p xmlns:a="http://schemas.openxmlformats.org/drawingml/2006/main">
-            <a:r>
-              <a:t/>
-            </a:r>
-          </a:p>
-          <a:p xmlns:a="http://schemas.openxmlformats.org/drawingml/2006/main">
-            <a:r>
-              <a:t>Source: https://firner.com/presentations/cs211/2026-Fall/cs211_06/#/</a:t>
-            </a:r>
-          </a:p>
         </p:txBody>
       </p:sp>
       <p:sp>
@@ -781,16 +744,6 @@
               <a:t>Give two minutes. Both examples are exactly representable, so no rounding rule is needed. Ask students to check results by substituting E and F into the appropriate formula.</a:t>
             </a:r>
           </a:p>
-          <a:p xmlns:a="http://schemas.openxmlformats.org/drawingml/2006/main">
-            <a:r>
-              <a:t/>
-            </a:r>
-          </a:p>
-          <a:p xmlns:a="http://schemas.openxmlformats.org/drawingml/2006/main">
-            <a:r>
-              <a:t>Source: https://firner.com/presentations/cs211/2026-Fall/cs211_06/#/</a:t>
-            </a:r>
-          </a:p>
         </p:txBody>
       </p:sp>
       <p:sp>
@@ -861,16 +814,6 @@
               <a:t>Do not reveal until students have tried both. Emphasize that E=0 is a category marker here, not the unbiased exponent. E=3 represents true exponent zero because bias is three.</a:t>
             </a:r>
           </a:p>
-          <a:p xmlns:a="http://schemas.openxmlformats.org/drawingml/2006/main">
-            <a:r>
-              <a:t/>
-            </a:r>
-          </a:p>
-          <a:p xmlns:a="http://schemas.openxmlformats.org/drawingml/2006/main">
-            <a:r>
-              <a:t>Source: https://firner.com/presentations/cs211/2026-Fall/cs211_06/#/</a:t>
-            </a:r>
-          </a:p>
         </p:txBody>
       </p:sp>
       <p:sp>
@@ -941,16 +884,6 @@
               <a:t>The future homework description does not specify rounding, so do not teach truncation or nearest as a required rule. Here E=1 for both nearby normals. 5/16=0.3125, 11/32=0.34375, and 1/3≈0.3333. This replaces the earlier abstract associativity slide with a representation example directly tied to the professor's stated learning goal.</a:t>
             </a:r>
           </a:p>
-          <a:p xmlns:a="http://schemas.openxmlformats.org/drawingml/2006/main">
-            <a:r>
-              <a:t/>
-            </a:r>
-          </a:p>
-          <a:p xmlns:a="http://schemas.openxmlformats.org/drawingml/2006/main">
-            <a:r>
-              <a:t>Source: https://firner.com/presentations/cs211/2026-Fall/cs211_06/#/</a:t>
-            </a:r>
-          </a:p>
         </p:txBody>
       </p:sp>
       <p:sp>
@@ -1021,16 +954,6 @@
               <a:t>For normals with fixed E, incrementing F by one changes the value by 2^(E−bias)/8. Show how this connects to the rounding slide and lecture 6’s discussion of gaps between floats.</a:t>
             </a:r>
           </a:p>
-          <a:p xmlns:a="http://schemas.openxmlformats.org/drawingml/2006/main">
-            <a:r>
-              <a:t/>
-            </a:r>
-          </a:p>
-          <a:p xmlns:a="http://schemas.openxmlformats.org/drawingml/2006/main">
-            <a:r>
-              <a:t>Source: https://firner.com/presentations/cs211/2026-Fall/cs211_06/#/</a:t>
-            </a:r>
-          </a:p>
         </p:txBody>
       </p:sp>
       <p:sp>
@@ -1098,17 +1021,147 @@
           <a:lstStyle xmlns:a="http://schemas.openxmlformats.org/drawingml/2006/main"/>
           <a:p xmlns:a="http://schemas.openxmlformats.org/drawingml/2006/main">
             <a:r>
-              <a:t>Review the two mistakes most likely to occur: forgetting to add the bias for a normal exponent, and using the normal hidden 1 for a subnormal. Do not reveal the unreleased homework solution. Remind students to follow the eventual assignment’s rounding and valid-input rules.</a:t>
-            </a:r>
-          </a:p>
-          <a:p xmlns:a="http://schemas.openxmlformats.org/drawingml/2006/main">
-            <a:r>
-              <a:t/>
-            </a:r>
-          </a:p>
-          <a:p xmlns:a="http://schemas.openxmlformats.org/drawingml/2006/main">
-            <a:r>
-              <a:t>Source: https://firner.com/presentations/cs211/2026-Fall/cs211_06/#/</a:t>
+              <a:t>Based on the professor’s preview supplied by the TA. The intended command-line inputs are exponent bits, bias, significand bits, numerator, and denominator, in that order. The output contains the exponent and significand field values. Use 5/2 as a new teaching example. The final handout may add input and rounding details.</a:t>
+            </a:r>
+          </a:p>
+        </p:txBody>
+      </p:sp>
+      <p:sp>
+        <p:nvSpPr>
+          <p:cNvPr id="4" name="Slide Number Placeholder 3"/>
+          <p:cNvSpPr>
+            <a:spLocks xmlns:a="http://schemas.openxmlformats.org/drawingml/2006/main" noGrp="1"/>
+          </p:cNvSpPr>
+          <p:nvPr>
+            <p:ph type="sldNum" idx="5"/>
+          </p:nvPr>
+        </p:nvSpPr>
+        <p:spPr/>
+        <p:txBody>
+          <a:bodyPr xmlns:a="http://schemas.openxmlformats.org/drawingml/2006/main"/>
+          <a:lstStyle xmlns:a="http://schemas.openxmlformats.org/drawingml/2006/main"/>
+          <a:p xmlns:a="http://schemas.openxmlformats.org/drawingml/2006/main"/>
+        </p:txBody>
+      </p:sp>
+    </p:spTree>
+  </p:cSld>
+  <p:clrMapOvr>
+    <a:masterClrMapping xmlns:a="http://schemas.openxmlformats.org/drawingml/2006/main"/>
+  </p:clrMapOvr>
+</p:notes>
+</file>
+
+<file path=ppt/notesSlides/notesSlide18.xml><?xml version="1.0" encoding="utf-8"?>
+<p:notes xmlns:p="http://schemas.openxmlformats.org/presentationml/2006/main">
+  <p:cSld>
+    <p:spTree>
+      <p:nvGrpSpPr>
+        <p:cNvPr id="1" name=""/>
+        <p:cNvGrpSpPr/>
+        <p:nvPr/>
+      </p:nvGrpSpPr>
+      <p:grpSpPr>
+        <a:xfrm xmlns:a="http://schemas.openxmlformats.org/drawingml/2006/main"/>
+      </p:grpSpPr>
+      <p:sp>
+        <p:nvSpPr>
+          <p:cNvPr id="2" name="Slide Image Placeholder 1"/>
+          <p:cNvSpPr>
+            <a:spLocks xmlns:a="http://schemas.openxmlformats.org/drawingml/2006/main" noGrp="1"/>
+          </p:cNvSpPr>
+          <p:nvPr>
+            <p:ph type="sldImg" idx="0"/>
+          </p:nvPr>
+        </p:nvSpPr>
+        <p:spPr/>
+      </p:sp>
+      <p:sp>
+        <p:nvSpPr>
+          <p:cNvPr id="3" name="Notes Placeholder 2"/>
+          <p:cNvSpPr>
+            <a:spLocks xmlns:a="http://schemas.openxmlformats.org/drawingml/2006/main" noGrp="1"/>
+          </p:cNvSpPr>
+          <p:nvPr>
+            <p:ph type="body" idx="1"/>
+          </p:nvPr>
+        </p:nvSpPr>
+        <p:spPr/>
+        <p:txBody>
+          <a:bodyPr xmlns:a="http://schemas.openxmlformats.org/drawingml/2006/main"/>
+          <a:lstStyle xmlns:a="http://schemas.openxmlformats.org/drawingml/2006/main"/>
+          <a:p xmlns:a="http://schemas.openxmlformats.org/drawingml/2006/main">
+            <a:r>
+              <a:t>This example is mathematically exact and uses the planned input order. Important TA note: the supplied draft solution computes the normal significand as (numerator &lt;&lt; sig_bits)/denominator − 2^sig_bits without scaling by 2^power_of_two. For these inputs that draft gives F=12, outside the three-bit range, rather than F=2. Do not present that draft code as a correct answer key until the normal path is fixed. Source: professor’s preview and lecture 6 normal-value equation.</a:t>
+            </a:r>
+          </a:p>
+        </p:txBody>
+      </p:sp>
+      <p:sp>
+        <p:nvSpPr>
+          <p:cNvPr id="4" name="Slide Number Placeholder 3"/>
+          <p:cNvSpPr>
+            <a:spLocks xmlns:a="http://schemas.openxmlformats.org/drawingml/2006/main" noGrp="1"/>
+          </p:cNvSpPr>
+          <p:nvPr>
+            <p:ph type="sldNum" idx="5"/>
+          </p:nvPr>
+        </p:nvSpPr>
+        <p:spPr/>
+        <p:txBody>
+          <a:bodyPr xmlns:a="http://schemas.openxmlformats.org/drawingml/2006/main"/>
+          <a:lstStyle xmlns:a="http://schemas.openxmlformats.org/drawingml/2006/main"/>
+          <a:p xmlns:a="http://schemas.openxmlformats.org/drawingml/2006/main"/>
+        </p:txBody>
+      </p:sp>
+    </p:spTree>
+  </p:cSld>
+  <p:clrMapOvr>
+    <a:masterClrMapping xmlns:a="http://schemas.openxmlformats.org/drawingml/2006/main"/>
+  </p:clrMapOvr>
+</p:notes>
+</file>
+
+<file path=ppt/notesSlides/notesSlide19.xml><?xml version="1.0" encoding="utf-8"?>
+<p:notes xmlns:p="http://schemas.openxmlformats.org/presentationml/2006/main">
+  <p:cSld>
+    <p:spTree>
+      <p:nvGrpSpPr>
+        <p:cNvPr id="1" name=""/>
+        <p:cNvGrpSpPr/>
+        <p:nvPr/>
+      </p:nvGrpSpPr>
+      <p:grpSpPr>
+        <a:xfrm xmlns:a="http://schemas.openxmlformats.org/drawingml/2006/main"/>
+      </p:grpSpPr>
+      <p:sp>
+        <p:nvSpPr>
+          <p:cNvPr id="2" name="Slide Image Placeholder 1"/>
+          <p:cNvSpPr>
+            <a:spLocks xmlns:a="http://schemas.openxmlformats.org/drawingml/2006/main" noGrp="1"/>
+          </p:cNvSpPr>
+          <p:nvPr>
+            <p:ph type="sldImg" idx="0"/>
+          </p:nvPr>
+        </p:nvSpPr>
+        <p:spPr/>
+      </p:sp>
+      <p:sp>
+        <p:nvSpPr>
+          <p:cNvPr id="3" name="Notes Placeholder 2"/>
+          <p:cNvSpPr>
+            <a:spLocks xmlns:a="http://schemas.openxmlformats.org/drawingml/2006/main" noGrp="1"/>
+          </p:cNvSpPr>
+          <p:nvPr>
+            <p:ph type="body" idx="1"/>
+          </p:nvPr>
+        </p:nvSpPr>
+        <p:spPr/>
+        <p:txBody>
+          <a:bodyPr xmlns:a="http://schemas.openxmlformats.org/drawingml/2006/main"/>
+          <a:lstStyle xmlns:a="http://schemas.openxmlformats.org/drawingml/2006/main"/>
+          <a:p xmlns:a="http://schemas.openxmlformats.org/drawingml/2006/main">
+            <a:r>
+              <a:t>Here p is the number of significand bits. For exact examples, solve the equation algebraically. The eventual homework may specify how to round values that fall between encodings, so do not assume a rounding rule yet. This is a conceptual approach, not a copy of the unreleased source code. Source: professor’s preview and lecture 6 equations.</a:t>
             </a:r>
           </a:p>
         </p:txBody>
@@ -1181,14 +1234,74 @@
               <a:t>The planned assignment accepts exponent-bit count, bias, significand-bit count, numerator, and denominator. Do not present this as the released homework. Explain that these are stored fields, not decimal digits. Here F means the integer represented by the three fraction bits. Lecture 6 reviews normal and subnormal equations.</a:t>
             </a:r>
           </a:p>
-          <a:p xmlns:a="http://schemas.openxmlformats.org/drawingml/2006/main">
-            <a:r>
-              <a:t/>
-            </a:r>
-          </a:p>
-          <a:p xmlns:a="http://schemas.openxmlformats.org/drawingml/2006/main">
-            <a:r>
-              <a:t>Source: https://firner.com/presentations/cs211/2026-Fall/cs211_06/#/</a:t>
+        </p:txBody>
+      </p:sp>
+      <p:sp>
+        <p:nvSpPr>
+          <p:cNvPr id="4" name="Slide Number Placeholder 3"/>
+          <p:cNvSpPr>
+            <a:spLocks xmlns:a="http://schemas.openxmlformats.org/drawingml/2006/main" noGrp="1"/>
+          </p:cNvSpPr>
+          <p:nvPr>
+            <p:ph type="sldNum" idx="5"/>
+          </p:nvPr>
+        </p:nvSpPr>
+        <p:spPr/>
+        <p:txBody>
+          <a:bodyPr xmlns:a="http://schemas.openxmlformats.org/drawingml/2006/main"/>
+          <a:lstStyle xmlns:a="http://schemas.openxmlformats.org/drawingml/2006/main"/>
+          <a:p xmlns:a="http://schemas.openxmlformats.org/drawingml/2006/main"/>
+        </p:txBody>
+      </p:sp>
+    </p:spTree>
+  </p:cSld>
+  <p:clrMapOvr>
+    <a:masterClrMapping xmlns:a="http://schemas.openxmlformats.org/drawingml/2006/main"/>
+  </p:clrMapOvr>
+</p:notes>
+</file>
+
+<file path=ppt/notesSlides/notesSlide20.xml><?xml version="1.0" encoding="utf-8"?>
+<p:notes xmlns:p="http://schemas.openxmlformats.org/presentationml/2006/main">
+  <p:cSld>
+    <p:spTree>
+      <p:nvGrpSpPr>
+        <p:cNvPr id="1" name=""/>
+        <p:cNvGrpSpPr/>
+        <p:nvPr/>
+      </p:nvGrpSpPr>
+      <p:grpSpPr>
+        <a:xfrm xmlns:a="http://schemas.openxmlformats.org/drawingml/2006/main"/>
+      </p:grpSpPr>
+      <p:sp>
+        <p:nvSpPr>
+          <p:cNvPr id="2" name="Slide Image Placeholder 1"/>
+          <p:cNvSpPr>
+            <a:spLocks xmlns:a="http://schemas.openxmlformats.org/drawingml/2006/main" noGrp="1"/>
+          </p:cNvSpPr>
+          <p:nvPr>
+            <p:ph type="sldImg" idx="0"/>
+          </p:nvPr>
+        </p:nvSpPr>
+        <p:spPr/>
+      </p:sp>
+      <p:sp>
+        <p:nvSpPr>
+          <p:cNvPr id="3" name="Notes Placeholder 2"/>
+          <p:cNvSpPr>
+            <a:spLocks xmlns:a="http://schemas.openxmlformats.org/drawingml/2006/main" noGrp="1"/>
+          </p:cNvSpPr>
+          <p:nvPr>
+            <p:ph type="body" idx="1"/>
+          </p:nvPr>
+        </p:nvSpPr>
+        <p:spPr/>
+        <p:txBody>
+          <a:bodyPr xmlns:a="http://schemas.openxmlformats.org/drawingml/2006/main"/>
+          <a:lstStyle xmlns:a="http://schemas.openxmlformats.org/drawingml/2006/main"/>
+          <a:p xmlns:a="http://schemas.openxmlformats.org/drawingml/2006/main">
+            <a:r>
+              <a:t>Review the two mistakes most likely to occur: forgetting to add the bias for a normal exponent, and using the normal hidden 1 for a subnormal. Do not reveal the unreleased homework solution. Remind students to follow the eventual assignment’s rounding and valid-input rules.</a:t>
             </a:r>
           </a:p>
         </p:txBody>
@@ -1261,16 +1374,6 @@
               <a:t>Draw place-value columns before introducing exponent fields. This bridges base-2 arithmetic to the 5/4 and 3/16 examples. The 0.101₂ example equals 0.625.</a:t>
             </a:r>
           </a:p>
-          <a:p xmlns:a="http://schemas.openxmlformats.org/drawingml/2006/main">
-            <a:r>
-              <a:t/>
-            </a:r>
-          </a:p>
-          <a:p xmlns:a="http://schemas.openxmlformats.org/drawingml/2006/main">
-            <a:r>
-              <a:t>Source: https://firner.com/presentations/cs211/2026-Fall/cs211_06/#/</a:t>
-            </a:r>
-          </a:p>
         </p:txBody>
       </p:sp>
       <p:sp>
@@ -1341,16 +1444,6 @@
               <a:t>Draw place-value columns 1, 1/2, 1/4, 1/8. 1.010 binary is exactly 1.25. The trailing zero pads the practice format; it does not change the value. The examples are constructed for teaching, not copied from the unreleased solution.</a:t>
             </a:r>
           </a:p>
-          <a:p xmlns:a="http://schemas.openxmlformats.org/drawingml/2006/main">
-            <a:r>
-              <a:t/>
-            </a:r>
-          </a:p>
-          <a:p xmlns:a="http://schemas.openxmlformats.org/drawingml/2006/main">
-            <a:r>
-              <a:t>Source: https://firner.com/presentations/cs211/2026-Fall/cs211_06/#/</a:t>
-            </a:r>
-          </a:p>
         </p:txBody>
       </p:sp>
       <p:sp>
@@ -1421,16 +1514,6 @@
               <a:t>Normal fields have E from 1 through 6 in this toy format. The all-ones exponent is reserved for infinities/NaNs in IEEE-style formats. We are using the lecture's normal/subnormal equations and a toy format with bias 3. Avoid saying the bias always equals 2^(k−1)−1; the planned exercise supplies it explicitly.</a:t>
             </a:r>
           </a:p>
-          <a:p xmlns:a="http://schemas.openxmlformats.org/drawingml/2006/main">
-            <a:r>
-              <a:t/>
-            </a:r>
-          </a:p>
-          <a:p xmlns:a="http://schemas.openxmlformats.org/drawingml/2006/main">
-            <a:r>
-              <a:t>Source: https://firner.com/presentations/cs211/2026-Fall/cs211_06/#/</a:t>
-            </a:r>
-          </a:p>
         </p:txBody>
       </p:sp>
       <p:sp>
@@ -1501,16 +1584,6 @@
               <a:t>Work through this slowly on the board. Ask which part of 1.010 is stored: 010. The lecture equation is (−1)^S × 2^(E−bias) × (1+F/2^sig_bits). For E=3, bias=3, F=2, sig_bits=3 the result is exactly 1.25.</a:t>
             </a:r>
           </a:p>
-          <a:p xmlns:a="http://schemas.openxmlformats.org/drawingml/2006/main">
-            <a:r>
-              <a:t/>
-            </a:r>
-          </a:p>
-          <a:p xmlns:a="http://schemas.openxmlformats.org/drawingml/2006/main">
-            <a:r>
-              <a:t>Source: https://firner.com/presentations/cs211/2026-Fall/cs211_06/#/</a:t>
-            </a:r>
-          </a:p>
         </p:txBody>
       </p:sp>
       <p:sp>
@@ -1581,16 +1654,6 @@
               <a:t>Pause at each field and ask students what it means. The sign is zero. E=2 lies in the normal range, e=-1, and F=5. The value is 0.8125.</a:t>
             </a:r>
           </a:p>
-          <a:p xmlns:a="http://schemas.openxmlformats.org/drawingml/2006/main">
-            <a:r>
-              <a:t/>
-            </a:r>
-          </a:p>
-          <a:p xmlns:a="http://schemas.openxmlformats.org/drawingml/2006/main">
-            <a:r>
-              <a:t>Source: https://firner.com/presentations/cs211/2026-Fall/cs211_06/#/</a:t>
-            </a:r>
-          </a:p>
         </p:txBody>
       </p:sp>
       <p:sp>
@@ -1661,16 +1724,6 @@
               <a:t>This is the likely stumbling block: subnormals use exponent 1−bias, not 0−bias, and no hidden leading 1. For this format, F=0 gives zero, F=1 is 1/32, F=7 is 7/32, and the smallest normal is 1/4. Source: lecture 6 equations.</a:t>
             </a:r>
           </a:p>
-          <a:p xmlns:a="http://schemas.openxmlformats.org/drawingml/2006/main">
-            <a:r>
-              <a:t/>
-            </a:r>
-          </a:p>
-          <a:p xmlns:a="http://schemas.openxmlformats.org/drawingml/2006/main">
-            <a:r>
-              <a:t>Source: https://firner.com/presentations/cs211/2026-Fall/cs211_06/#/</a:t>
-            </a:r>
-          </a:p>
         </p:txBody>
       </p:sp>
       <p:sp>
@@ -1739,16 +1792,6 @@
           <a:p xmlns:a="http://schemas.openxmlformats.org/drawingml/2006/main">
             <a:r>
               <a:t>Contrast this with the normal 5/4 example. Students may try to store a negative exponent in E or include the hidden 1. Return to the formula to resolve both confusions.</a:t>
-            </a:r>
-          </a:p>
-          <a:p xmlns:a="http://schemas.openxmlformats.org/drawingml/2006/main">
-            <a:r>
-              <a:t/>
-            </a:r>
-          </a:p>
-          <a:p xmlns:a="http://schemas.openxmlformats.org/drawingml/2006/main">
-            <a:r>
-              <a:t>Source: https://firner.com/presentations/cs211/2026-Fall/cs211_06/#/</a:t>
             </a:r>
           </a:p>
         </p:txBody>
@@ -1816,7 +1859,7 @@
   </p:cSld>
   <p:clrMap bg1="lt1" tx1="dk1" bg2="lt2" tx2="dk2" accent1="accent1" accent2="accent2" accent3="accent3" accent4="accent4" accent5="accent5" accent6="accent6" hlink="hlink" folHlink="folHlink"/>
   <p:sldLayoutIdLst>
-    <p:sldLayoutId xmlns:r="http://schemas.openxmlformats.org/officeDocument/2006/relationships" id="2147483649" r:id="R1ec887bd53c348e7"/>
+    <p:sldLayoutId xmlns:r="http://schemas.openxmlformats.org/officeDocument/2006/relationships" id="2147483649" r:id="R9f6ca5ca0cc841de"/>
   </p:sldLayoutIdLst>
   <p:txStyles>
     <p:titleStyle>
@@ -2396,6 +2439,7 @@
           <a:lstStyle xmlns:a="http://schemas.openxmlformats.org/drawingml/2006/main"/>
           <a:p xmlns:a="http://schemas.openxmlformats.org/drawingml/2006/main">
             <a:pPr>
+              <a:buNone/>
               <a:defRPr sz="1275" b="0">
                 <a:solidFill>
                   <a:srgbClr val="6EE7B7"/>
@@ -2453,6 +2497,7 @@
           <a:lstStyle xmlns:a="http://schemas.openxmlformats.org/drawingml/2006/main"/>
           <a:p xmlns:a="http://schemas.openxmlformats.org/drawingml/2006/main">
             <a:pPr>
+              <a:buNone/>
               <a:defRPr sz="4500" b="0">
                 <a:solidFill>
                   <a:srgbClr val="FAFAFA"/>
@@ -2510,6 +2555,7 @@
           <a:lstStyle xmlns:a="http://schemas.openxmlformats.org/drawingml/2006/main"/>
           <a:p xmlns:a="http://schemas.openxmlformats.org/drawingml/2006/main">
             <a:pPr>
+              <a:buNone/>
               <a:defRPr sz="2100" b="0">
                 <a:solidFill>
                   <a:srgbClr val="D4D4D8"/>
@@ -2567,6 +2613,7 @@
           <a:lstStyle xmlns:a="http://schemas.openxmlformats.org/drawingml/2006/main"/>
           <a:p xmlns:a="http://schemas.openxmlformats.org/drawingml/2006/main">
             <a:pPr>
+              <a:buNone/>
               <a:defRPr sz="1650" b="0">
                 <a:solidFill>
                   <a:srgbClr val="A7F3D0"/>
@@ -2595,6 +2642,7 @@
           </a:p>
           <a:p xmlns:a="http://schemas.openxmlformats.org/drawingml/2006/main">
             <a:pPr>
+              <a:buNone/>
               <a:defRPr sz="1650" b="0">
                 <a:solidFill>
                   <a:srgbClr val="A7F3D0"/>
@@ -2618,6 +2666,7 @@
           </a:p>
           <a:p xmlns:a="http://schemas.openxmlformats.org/drawingml/2006/main">
             <a:pPr>
+              <a:buNone/>
               <a:defRPr sz="1650" b="0">
                 <a:solidFill>
                   <a:srgbClr val="A7F3D0"/>
@@ -2641,6 +2690,7 @@
           </a:p>
           <a:p xmlns:a="http://schemas.openxmlformats.org/drawingml/2006/main">
             <a:pPr>
+              <a:buNone/>
               <a:defRPr sz="1650" b="0">
                 <a:solidFill>
                   <a:srgbClr val="A7F3D0"/>
@@ -2664,6 +2714,7 @@
           </a:p>
           <a:p xmlns:a="http://schemas.openxmlformats.org/drawingml/2006/main">
             <a:pPr>
+              <a:buNone/>
               <a:defRPr sz="1650" b="0">
                 <a:solidFill>
                   <a:srgbClr val="A7F3D0"/>
@@ -2683,6 +2734,30 @@
                 <a:cs typeface="Courier New"/>
               </a:rPr>
               <a:t>Practice with ratios and bit patterns</a:t>
+            </a:r>
+          </a:p>
+          <a:p xmlns:a="http://schemas.openxmlformats.org/drawingml/2006/main">
+            <a:pPr>
+              <a:buNone/>
+              <a:defRPr sz="1650" b="0">
+                <a:solidFill>
+                  <a:srgbClr val="A7F3D0"/>
+                </a:solidFill>
+                <a:latin typeface="Courier New"/>
+                <a:ea typeface="Courier New"/>
+                <a:cs typeface="Courier New"/>
+              </a:defRPr>
+            </a:pPr>
+            <a:r>
+              <a:rPr sz="1650" b="0">
+                <a:solidFill>
+                  <a:srgbClr val="A7F3D0"/>
+                </a:solidFill>
+                <a:latin typeface="Courier New"/>
+                <a:ea typeface="Courier New"/>
+                <a:cs typeface="Courier New"/>
+              </a:rPr>
+              <a:t>HW3 preview</a:t>
             </a:r>
           </a:p>
         </p:txBody>
@@ -2721,6 +2796,7 @@
           <a:lstStyle xmlns:a="http://schemas.openxmlformats.org/drawingml/2006/main"/>
           <a:p xmlns:a="http://schemas.openxmlformats.org/drawingml/2006/main">
             <a:pPr>
+              <a:buNone/>
               <a:defRPr sz="1350" b="0">
                 <a:solidFill>
                   <a:srgbClr val="A1A1AA"/>
@@ -2778,6 +2854,7 @@
           <a:lstStyle xmlns:a="http://schemas.openxmlformats.org/drawingml/2006/main"/>
           <a:p xmlns:a="http://schemas.openxmlformats.org/drawingml/2006/main">
             <a:pPr>
+              <a:buNone/>
               <a:defRPr sz="1050" b="0">
                 <a:solidFill>
                   <a:srgbClr val="71717A"/>
@@ -2796,7 +2873,7 @@
                 <a:ea typeface="Courier New"/>
                 <a:cs typeface="Courier New"/>
               </a:rPr>
-              <a:t>01 / 17</a:t>
+              <a:t>01 / 20</a:t>
             </a:r>
           </a:p>
         </p:txBody>
@@ -2864,6 +2941,7 @@
           <a:lstStyle xmlns:a="http://schemas.openxmlformats.org/drawingml/2006/main"/>
           <a:p xmlns:a="http://schemas.openxmlformats.org/drawingml/2006/main">
             <a:pPr>
+              <a:buNone/>
               <a:defRPr sz="1275" b="0">
                 <a:solidFill>
                   <a:srgbClr val="6EE7B7"/>
@@ -2921,6 +2999,7 @@
           <a:lstStyle xmlns:a="http://schemas.openxmlformats.org/drawingml/2006/main"/>
           <a:p xmlns:a="http://schemas.openxmlformats.org/drawingml/2006/main">
             <a:pPr>
+              <a:buNone/>
               <a:defRPr sz="3600" b="0">
                 <a:solidFill>
                   <a:srgbClr val="FAFAFA"/>
@@ -2978,6 +3057,7 @@
           <a:lstStyle xmlns:a="http://schemas.openxmlformats.org/drawingml/2006/main"/>
           <a:p xmlns:a="http://schemas.openxmlformats.org/drawingml/2006/main">
             <a:pPr>
+              <a:buNone/>
               <a:defRPr sz="1950" b="0">
                 <a:solidFill>
                   <a:srgbClr val="D4D4D8"/>
@@ -3035,6 +3115,7 @@
           <a:lstStyle xmlns:a="http://schemas.openxmlformats.org/drawingml/2006/main"/>
           <a:p xmlns:a="http://schemas.openxmlformats.org/drawingml/2006/main">
             <a:pPr>
+              <a:buNone/>
               <a:defRPr sz="1650" b="0">
                 <a:solidFill>
                   <a:srgbClr val="A7F3D0"/>
@@ -3058,6 +3139,7 @@
           </a:p>
           <a:p xmlns:a="http://schemas.openxmlformats.org/drawingml/2006/main">
             <a:pPr>
+              <a:buNone/>
               <a:defRPr sz="1650" b="0">
                 <a:solidFill>
                   <a:srgbClr val="A7F3D0"/>
@@ -3086,6 +3168,7 @@
           </a:p>
           <a:p xmlns:a="http://schemas.openxmlformats.org/drawingml/2006/main">
             <a:pPr>
+              <a:buNone/>
               <a:defRPr sz="1650" b="0">
                 <a:solidFill>
                   <a:srgbClr val="A7F3D0"/>
@@ -3109,6 +3192,7 @@
           </a:p>
           <a:p xmlns:a="http://schemas.openxmlformats.org/drawingml/2006/main">
             <a:pPr>
+              <a:buNone/>
               <a:defRPr sz="1650" b="0">
                 <a:solidFill>
                   <a:srgbClr val="A7F3D0"/>
@@ -3137,6 +3221,7 @@
           </a:p>
           <a:p xmlns:a="http://schemas.openxmlformats.org/drawingml/2006/main">
             <a:pPr>
+              <a:buNone/>
               <a:defRPr sz="1650" b="0">
                 <a:solidFill>
                   <a:srgbClr val="A7F3D0"/>
@@ -3194,6 +3279,7 @@
           <a:lstStyle xmlns:a="http://schemas.openxmlformats.org/drawingml/2006/main"/>
           <a:p xmlns:a="http://schemas.openxmlformats.org/drawingml/2006/main">
             <a:pPr>
+              <a:buNone/>
               <a:defRPr sz="1350" b="0">
                 <a:solidFill>
                   <a:srgbClr val="A1A1AA"/>
@@ -3251,6 +3337,7 @@
           <a:lstStyle xmlns:a="http://schemas.openxmlformats.org/drawingml/2006/main"/>
           <a:p xmlns:a="http://schemas.openxmlformats.org/drawingml/2006/main">
             <a:pPr>
+              <a:buNone/>
               <a:defRPr sz="1050" b="0">
                 <a:solidFill>
                   <a:srgbClr val="71717A"/>
@@ -3269,7 +3356,7 @@
                 <a:ea typeface="Courier New"/>
                 <a:cs typeface="Courier New"/>
               </a:rPr>
-              <a:t>10 / 17</a:t>
+              <a:t>10 / 20</a:t>
             </a:r>
           </a:p>
         </p:txBody>
@@ -3337,6 +3424,7 @@
           <a:lstStyle xmlns:a="http://schemas.openxmlformats.org/drawingml/2006/main"/>
           <a:p xmlns:a="http://schemas.openxmlformats.org/drawingml/2006/main">
             <a:pPr>
+              <a:buNone/>
               <a:defRPr sz="1275" b="0">
                 <a:solidFill>
                   <a:srgbClr val="6EE7B7"/>
@@ -3394,6 +3482,7 @@
           <a:lstStyle xmlns:a="http://schemas.openxmlformats.org/drawingml/2006/main"/>
           <a:p xmlns:a="http://schemas.openxmlformats.org/drawingml/2006/main">
             <a:pPr>
+              <a:buNone/>
               <a:defRPr sz="3600" b="0">
                 <a:solidFill>
                   <a:srgbClr val="FAFAFA"/>
@@ -3451,6 +3540,7 @@
           <a:lstStyle xmlns:a="http://schemas.openxmlformats.org/drawingml/2006/main"/>
           <a:p xmlns:a="http://schemas.openxmlformats.org/drawingml/2006/main">
             <a:pPr>
+              <a:buNone/>
               <a:defRPr sz="1950" b="0">
                 <a:solidFill>
                   <a:srgbClr val="D4D4D8"/>
@@ -3479,6 +3569,7 @@
           </a:p>
           <a:p xmlns:a="http://schemas.openxmlformats.org/drawingml/2006/main">
             <a:pPr>
+              <a:buNone/>
               <a:defRPr sz="1950" b="0">
                 <a:solidFill>
                   <a:srgbClr val="D4D4D8"/>
@@ -3536,6 +3627,7 @@
           <a:lstStyle xmlns:a="http://schemas.openxmlformats.org/drawingml/2006/main"/>
           <a:p xmlns:a="http://schemas.openxmlformats.org/drawingml/2006/main">
             <a:pPr>
+              <a:buNone/>
               <a:defRPr sz="1650" b="0">
                 <a:solidFill>
                   <a:srgbClr val="A7F3D0"/>
@@ -3559,6 +3651,7 @@
           </a:p>
           <a:p xmlns:a="http://schemas.openxmlformats.org/drawingml/2006/main">
             <a:pPr>
+              <a:buNone/>
               <a:defRPr sz="1650" b="0">
                 <a:solidFill>
                   <a:srgbClr val="A7F3D0"/>
@@ -3582,6 +3675,7 @@
           </a:p>
           <a:p xmlns:a="http://schemas.openxmlformats.org/drawingml/2006/main">
             <a:pPr>
+              <a:buNone/>
               <a:defRPr sz="1650" b="0">
                 <a:solidFill>
                   <a:srgbClr val="A7F3D0"/>
@@ -3610,6 +3704,7 @@
           </a:p>
           <a:p xmlns:a="http://schemas.openxmlformats.org/drawingml/2006/main">
             <a:pPr>
+              <a:buNone/>
               <a:defRPr sz="1650" b="0">
                 <a:solidFill>
                   <a:srgbClr val="A7F3D0"/>
@@ -3633,6 +3728,7 @@
           </a:p>
           <a:p xmlns:a="http://schemas.openxmlformats.org/drawingml/2006/main">
             <a:pPr>
+              <a:buNone/>
               <a:defRPr sz="1650" b="0">
                 <a:solidFill>
                   <a:srgbClr val="A7F3D0"/>
@@ -3656,6 +3752,7 @@
           </a:p>
           <a:p xmlns:a="http://schemas.openxmlformats.org/drawingml/2006/main">
             <a:pPr>
+              <a:buNone/>
               <a:defRPr sz="1650" b="0">
                 <a:solidFill>
                   <a:srgbClr val="A7F3D0"/>
@@ -3713,6 +3810,7 @@
           <a:lstStyle xmlns:a="http://schemas.openxmlformats.org/drawingml/2006/main"/>
           <a:p xmlns:a="http://schemas.openxmlformats.org/drawingml/2006/main">
             <a:pPr>
+              <a:buNone/>
               <a:defRPr sz="1350" b="0">
                 <a:solidFill>
                   <a:srgbClr val="A1A1AA"/>
@@ -3770,6 +3868,7 @@
           <a:lstStyle xmlns:a="http://schemas.openxmlformats.org/drawingml/2006/main"/>
           <a:p xmlns:a="http://schemas.openxmlformats.org/drawingml/2006/main">
             <a:pPr>
+              <a:buNone/>
               <a:defRPr sz="1050" b="0">
                 <a:solidFill>
                   <a:srgbClr val="71717A"/>
@@ -3788,7 +3887,7 @@
                 <a:ea typeface="Courier New"/>
                 <a:cs typeface="Courier New"/>
               </a:rPr>
-              <a:t>11 / 17</a:t>
+              <a:t>11 / 20</a:t>
             </a:r>
           </a:p>
         </p:txBody>
@@ -3856,6 +3955,7 @@
           <a:lstStyle xmlns:a="http://schemas.openxmlformats.org/drawingml/2006/main"/>
           <a:p xmlns:a="http://schemas.openxmlformats.org/drawingml/2006/main">
             <a:pPr>
+              <a:buNone/>
               <a:defRPr sz="1275" b="0">
                 <a:solidFill>
                   <a:srgbClr val="6EE7B7"/>
@@ -3913,6 +4013,7 @@
           <a:lstStyle xmlns:a="http://schemas.openxmlformats.org/drawingml/2006/main"/>
           <a:p xmlns:a="http://schemas.openxmlformats.org/drawingml/2006/main">
             <a:pPr>
+              <a:buNone/>
               <a:defRPr sz="3600" b="0">
                 <a:solidFill>
                   <a:srgbClr val="FAFAFA"/>
@@ -3970,6 +4071,7 @@
           <a:lstStyle xmlns:a="http://schemas.openxmlformats.org/drawingml/2006/main"/>
           <a:p xmlns:a="http://schemas.openxmlformats.org/drawingml/2006/main">
             <a:pPr>
+              <a:buNone/>
               <a:defRPr sz="1950" b="0">
                 <a:solidFill>
                   <a:srgbClr val="D4D4D8"/>
@@ -3998,6 +4100,7 @@
           </a:p>
           <a:p xmlns:a="http://schemas.openxmlformats.org/drawingml/2006/main">
             <a:pPr>
+              <a:buNone/>
               <a:defRPr sz="1950" b="0">
                 <a:solidFill>
                   <a:srgbClr val="D4D4D8"/>
@@ -4055,6 +4158,7 @@
           <a:lstStyle xmlns:a="http://schemas.openxmlformats.org/drawingml/2006/main"/>
           <a:p xmlns:a="http://schemas.openxmlformats.org/drawingml/2006/main">
             <a:pPr>
+              <a:buNone/>
               <a:defRPr sz="1650" b="0">
                 <a:solidFill>
                   <a:srgbClr val="A7F3D0"/>
@@ -4078,6 +4182,7 @@
           </a:p>
           <a:p xmlns:a="http://schemas.openxmlformats.org/drawingml/2006/main">
             <a:pPr>
+              <a:buNone/>
               <a:defRPr sz="1650" b="0">
                 <a:solidFill>
                   <a:srgbClr val="A7F3D0"/>
@@ -4106,6 +4211,7 @@
           </a:p>
           <a:p xmlns:a="http://schemas.openxmlformats.org/drawingml/2006/main">
             <a:pPr>
+              <a:buNone/>
               <a:defRPr sz="1650" b="0">
                 <a:solidFill>
                   <a:srgbClr val="A7F3D0"/>
@@ -4129,6 +4235,7 @@
           </a:p>
           <a:p xmlns:a="http://schemas.openxmlformats.org/drawingml/2006/main">
             <a:pPr>
+              <a:buNone/>
               <a:defRPr sz="1650" b="0">
                 <a:solidFill>
                   <a:srgbClr val="A7F3D0"/>
@@ -4186,6 +4293,7 @@
           <a:lstStyle xmlns:a="http://schemas.openxmlformats.org/drawingml/2006/main"/>
           <a:p xmlns:a="http://schemas.openxmlformats.org/drawingml/2006/main">
             <a:pPr>
+              <a:buNone/>
               <a:defRPr sz="1350" b="0">
                 <a:solidFill>
                   <a:srgbClr val="A1A1AA"/>
@@ -4243,6 +4351,7 @@
           <a:lstStyle xmlns:a="http://schemas.openxmlformats.org/drawingml/2006/main"/>
           <a:p xmlns:a="http://schemas.openxmlformats.org/drawingml/2006/main">
             <a:pPr>
+              <a:buNone/>
               <a:defRPr sz="1050" b="0">
                 <a:solidFill>
                   <a:srgbClr val="71717A"/>
@@ -4261,7 +4370,7 @@
                 <a:ea typeface="Courier New"/>
                 <a:cs typeface="Courier New"/>
               </a:rPr>
-              <a:t>12 / 17</a:t>
+              <a:t>12 / 20</a:t>
             </a:r>
           </a:p>
         </p:txBody>
@@ -4329,6 +4438,7 @@
           <a:lstStyle xmlns:a="http://schemas.openxmlformats.org/drawingml/2006/main"/>
           <a:p xmlns:a="http://schemas.openxmlformats.org/drawingml/2006/main">
             <a:pPr>
+              <a:buNone/>
               <a:defRPr sz="1275" b="0">
                 <a:solidFill>
                   <a:srgbClr val="6EE7B7"/>
@@ -4386,6 +4496,7 @@
           <a:lstStyle xmlns:a="http://schemas.openxmlformats.org/drawingml/2006/main"/>
           <a:p xmlns:a="http://schemas.openxmlformats.org/drawingml/2006/main">
             <a:pPr>
+              <a:buNone/>
               <a:defRPr sz="3600" b="0">
                 <a:solidFill>
                   <a:srgbClr val="FAFAFA"/>
@@ -4443,6 +4554,7 @@
           <a:lstStyle xmlns:a="http://schemas.openxmlformats.org/drawingml/2006/main"/>
           <a:p xmlns:a="http://schemas.openxmlformats.org/drawingml/2006/main">
             <a:pPr>
+              <a:buNone/>
               <a:defRPr sz="1950" b="0">
                 <a:solidFill>
                   <a:srgbClr val="D4D4D8"/>
@@ -4471,6 +4583,7 @@
           </a:p>
           <a:p xmlns:a="http://schemas.openxmlformats.org/drawingml/2006/main">
             <a:pPr>
+              <a:buNone/>
               <a:defRPr sz="1950" b="0">
                 <a:solidFill>
                   <a:srgbClr val="D4D4D8"/>
@@ -4528,6 +4641,7 @@
           <a:lstStyle xmlns:a="http://schemas.openxmlformats.org/drawingml/2006/main"/>
           <a:p xmlns:a="http://schemas.openxmlformats.org/drawingml/2006/main">
             <a:pPr>
+              <a:buNone/>
               <a:defRPr sz="1650" b="0">
                 <a:solidFill>
                   <a:srgbClr val="A7F3D0"/>
@@ -4551,6 +4665,7 @@
           </a:p>
           <a:p xmlns:a="http://schemas.openxmlformats.org/drawingml/2006/main">
             <a:pPr>
+              <a:buNone/>
               <a:defRPr sz="1650" b="0">
                 <a:solidFill>
                   <a:srgbClr val="A7F3D0"/>
@@ -4574,6 +4689,7 @@
           </a:p>
           <a:p xmlns:a="http://schemas.openxmlformats.org/drawingml/2006/main">
             <a:pPr>
+              <a:buNone/>
               <a:defRPr sz="1650" b="0">
                 <a:solidFill>
                   <a:srgbClr val="A7F3D0"/>
@@ -4602,6 +4718,7 @@
           </a:p>
           <a:p xmlns:a="http://schemas.openxmlformats.org/drawingml/2006/main">
             <a:pPr>
+              <a:buNone/>
               <a:defRPr sz="1650" b="0">
                 <a:solidFill>
                   <a:srgbClr val="A7F3D0"/>
@@ -4625,6 +4742,7 @@
           </a:p>
           <a:p xmlns:a="http://schemas.openxmlformats.org/drawingml/2006/main">
             <a:pPr>
+              <a:buNone/>
               <a:defRPr sz="1650" b="0">
                 <a:solidFill>
                   <a:srgbClr val="A7F3D0"/>
@@ -4648,6 +4766,7 @@
           </a:p>
           <a:p xmlns:a="http://schemas.openxmlformats.org/drawingml/2006/main">
             <a:pPr>
+              <a:buNone/>
               <a:defRPr sz="1650" b="0">
                 <a:solidFill>
                   <a:srgbClr val="A7F3D0"/>
@@ -4705,6 +4824,7 @@
           <a:lstStyle xmlns:a="http://schemas.openxmlformats.org/drawingml/2006/main"/>
           <a:p xmlns:a="http://schemas.openxmlformats.org/drawingml/2006/main">
             <a:pPr>
+              <a:buNone/>
               <a:defRPr sz="1350" b="0">
                 <a:solidFill>
                   <a:srgbClr val="A1A1AA"/>
@@ -4762,6 +4882,7 @@
           <a:lstStyle xmlns:a="http://schemas.openxmlformats.org/drawingml/2006/main"/>
           <a:p xmlns:a="http://schemas.openxmlformats.org/drawingml/2006/main">
             <a:pPr>
+              <a:buNone/>
               <a:defRPr sz="1050" b="0">
                 <a:solidFill>
                   <a:srgbClr val="71717A"/>
@@ -4780,7 +4901,7 @@
                 <a:ea typeface="Courier New"/>
                 <a:cs typeface="Courier New"/>
               </a:rPr>
-              <a:t>13 / 17</a:t>
+              <a:t>13 / 20</a:t>
             </a:r>
           </a:p>
         </p:txBody>
@@ -4848,6 +4969,7 @@
           <a:lstStyle xmlns:a="http://schemas.openxmlformats.org/drawingml/2006/main"/>
           <a:p xmlns:a="http://schemas.openxmlformats.org/drawingml/2006/main">
             <a:pPr>
+              <a:buNone/>
               <a:defRPr sz="1275" b="0">
                 <a:solidFill>
                   <a:srgbClr val="6EE7B7"/>
@@ -4905,6 +5027,7 @@
           <a:lstStyle xmlns:a="http://schemas.openxmlformats.org/drawingml/2006/main"/>
           <a:p xmlns:a="http://schemas.openxmlformats.org/drawingml/2006/main">
             <a:pPr>
+              <a:buNone/>
               <a:defRPr sz="3600" b="0">
                 <a:solidFill>
                   <a:srgbClr val="FAFAFA"/>
@@ -4962,6 +5085,7 @@
           <a:lstStyle xmlns:a="http://schemas.openxmlformats.org/drawingml/2006/main"/>
           <a:p xmlns:a="http://schemas.openxmlformats.org/drawingml/2006/main">
             <a:pPr>
+              <a:buNone/>
               <a:defRPr sz="1950" b="0">
                 <a:solidFill>
                   <a:srgbClr val="D4D4D8"/>
@@ -4990,6 +5114,7 @@
           </a:p>
           <a:p xmlns:a="http://schemas.openxmlformats.org/drawingml/2006/main">
             <a:pPr>
+              <a:buNone/>
               <a:defRPr sz="1950" b="0">
                 <a:solidFill>
                   <a:srgbClr val="D4D4D8"/>
@@ -5047,6 +5172,7 @@
           <a:lstStyle xmlns:a="http://schemas.openxmlformats.org/drawingml/2006/main"/>
           <a:p xmlns:a="http://schemas.openxmlformats.org/drawingml/2006/main">
             <a:pPr>
+              <a:buNone/>
               <a:defRPr sz="1650" b="0">
                 <a:solidFill>
                   <a:srgbClr val="A7F3D0"/>
@@ -5070,6 +5196,7 @@
           </a:p>
           <a:p xmlns:a="http://schemas.openxmlformats.org/drawingml/2006/main">
             <a:pPr>
+              <a:buNone/>
               <a:defRPr sz="1650" b="0">
                 <a:solidFill>
                   <a:srgbClr val="A7F3D0"/>
@@ -5093,6 +5220,7 @@
           </a:p>
           <a:p xmlns:a="http://schemas.openxmlformats.org/drawingml/2006/main">
             <a:pPr>
+              <a:buNone/>
               <a:defRPr sz="1650" b="0">
                 <a:solidFill>
                   <a:srgbClr val="A7F3D0"/>
@@ -5116,6 +5244,7 @@
           </a:p>
           <a:p xmlns:a="http://schemas.openxmlformats.org/drawingml/2006/main">
             <a:pPr>
+              <a:buNone/>
               <a:defRPr sz="1650" b="0">
                 <a:solidFill>
                   <a:srgbClr val="A7F3D0"/>
@@ -5144,6 +5273,7 @@
           </a:p>
           <a:p xmlns:a="http://schemas.openxmlformats.org/drawingml/2006/main">
             <a:pPr>
+              <a:buNone/>
               <a:defRPr sz="1650" b="0">
                 <a:solidFill>
                   <a:srgbClr val="A7F3D0"/>
@@ -5167,6 +5297,7 @@
           </a:p>
           <a:p xmlns:a="http://schemas.openxmlformats.org/drawingml/2006/main">
             <a:pPr>
+              <a:buNone/>
               <a:defRPr sz="1650" b="0">
                 <a:solidFill>
                   <a:srgbClr val="A7F3D0"/>
@@ -5190,6 +5321,7 @@
           </a:p>
           <a:p xmlns:a="http://schemas.openxmlformats.org/drawingml/2006/main">
             <a:pPr>
+              <a:buNone/>
               <a:defRPr sz="1650" b="0">
                 <a:solidFill>
                   <a:srgbClr val="A7F3D0"/>
@@ -5213,6 +5345,7 @@
           </a:p>
           <a:p xmlns:a="http://schemas.openxmlformats.org/drawingml/2006/main">
             <a:pPr>
+              <a:buNone/>
               <a:defRPr sz="1650" b="0">
                 <a:solidFill>
                   <a:srgbClr val="A7F3D0"/>
@@ -5270,6 +5403,7 @@
           <a:lstStyle xmlns:a="http://schemas.openxmlformats.org/drawingml/2006/main"/>
           <a:p xmlns:a="http://schemas.openxmlformats.org/drawingml/2006/main">
             <a:pPr>
+              <a:buNone/>
               <a:defRPr sz="1350" b="0">
                 <a:solidFill>
                   <a:srgbClr val="A1A1AA"/>
@@ -5327,6 +5461,7 @@
           <a:lstStyle xmlns:a="http://schemas.openxmlformats.org/drawingml/2006/main"/>
           <a:p xmlns:a="http://schemas.openxmlformats.org/drawingml/2006/main">
             <a:pPr>
+              <a:buNone/>
               <a:defRPr sz="1050" b="0">
                 <a:solidFill>
                   <a:srgbClr val="71717A"/>
@@ -5345,7 +5480,7 @@
                 <a:ea typeface="Courier New"/>
                 <a:cs typeface="Courier New"/>
               </a:rPr>
-              <a:t>14 / 17</a:t>
+              <a:t>14 / 20</a:t>
             </a:r>
           </a:p>
         </p:txBody>
@@ -5413,6 +5548,7 @@
           <a:lstStyle xmlns:a="http://schemas.openxmlformats.org/drawingml/2006/main"/>
           <a:p xmlns:a="http://schemas.openxmlformats.org/drawingml/2006/main">
             <a:pPr>
+              <a:buNone/>
               <a:defRPr sz="1275" b="0">
                 <a:solidFill>
                   <a:srgbClr val="6EE7B7"/>
@@ -5470,6 +5606,7 @@
           <a:lstStyle xmlns:a="http://schemas.openxmlformats.org/drawingml/2006/main"/>
           <a:p xmlns:a="http://schemas.openxmlformats.org/drawingml/2006/main">
             <a:pPr>
+              <a:buNone/>
               <a:defRPr sz="3600" b="0">
                 <a:solidFill>
                   <a:srgbClr val="FAFAFA"/>
@@ -5527,6 +5664,7 @@
           <a:lstStyle xmlns:a="http://schemas.openxmlformats.org/drawingml/2006/main"/>
           <a:p xmlns:a="http://schemas.openxmlformats.org/drawingml/2006/main">
             <a:pPr>
+              <a:buNone/>
               <a:defRPr sz="1950" b="0">
                 <a:solidFill>
                   <a:srgbClr val="D4D4D8"/>
@@ -5555,6 +5693,7 @@
           </a:p>
           <a:p xmlns:a="http://schemas.openxmlformats.org/drawingml/2006/main">
             <a:pPr>
+              <a:buNone/>
               <a:defRPr sz="1950" b="0">
                 <a:solidFill>
                   <a:srgbClr val="D4D4D8"/>
@@ -5612,6 +5751,7 @@
           <a:lstStyle xmlns:a="http://schemas.openxmlformats.org/drawingml/2006/main"/>
           <a:p xmlns:a="http://schemas.openxmlformats.org/drawingml/2006/main">
             <a:pPr>
+              <a:buNone/>
               <a:defRPr sz="1650" b="0">
                 <a:solidFill>
                   <a:srgbClr val="A7F3D0"/>
@@ -5640,6 +5780,7 @@
           </a:p>
           <a:p xmlns:a="http://schemas.openxmlformats.org/drawingml/2006/main">
             <a:pPr>
+              <a:buNone/>
               <a:defRPr sz="1650" b="0">
                 <a:solidFill>
                   <a:srgbClr val="A7F3D0"/>
@@ -5663,6 +5804,7 @@
           </a:p>
           <a:p xmlns:a="http://schemas.openxmlformats.org/drawingml/2006/main">
             <a:pPr>
+              <a:buNone/>
               <a:defRPr sz="1650" b="0">
                 <a:solidFill>
                   <a:srgbClr val="A7F3D0"/>
@@ -5686,6 +5828,7 @@
           </a:p>
           <a:p xmlns:a="http://schemas.openxmlformats.org/drawingml/2006/main">
             <a:pPr>
+              <a:buNone/>
               <a:defRPr sz="1650" b="0">
                 <a:solidFill>
                   <a:srgbClr val="A7F3D0"/>
@@ -5714,6 +5857,7 @@
           </a:p>
           <a:p xmlns:a="http://schemas.openxmlformats.org/drawingml/2006/main">
             <a:pPr>
+              <a:buNone/>
               <a:defRPr sz="1650" b="0">
                 <a:solidFill>
                   <a:srgbClr val="A7F3D0"/>
@@ -5771,6 +5915,7 @@
           <a:lstStyle xmlns:a="http://schemas.openxmlformats.org/drawingml/2006/main"/>
           <a:p xmlns:a="http://schemas.openxmlformats.org/drawingml/2006/main">
             <a:pPr>
+              <a:buNone/>
               <a:defRPr sz="1350" b="0">
                 <a:solidFill>
                   <a:srgbClr val="A1A1AA"/>
@@ -5828,6 +5973,7 @@
           <a:lstStyle xmlns:a="http://schemas.openxmlformats.org/drawingml/2006/main"/>
           <a:p xmlns:a="http://schemas.openxmlformats.org/drawingml/2006/main">
             <a:pPr>
+              <a:buNone/>
               <a:defRPr sz="1050" b="0">
                 <a:solidFill>
                   <a:srgbClr val="71717A"/>
@@ -5846,7 +5992,7 @@
                 <a:ea typeface="Courier New"/>
                 <a:cs typeface="Courier New"/>
               </a:rPr>
-              <a:t>15 / 17</a:t>
+              <a:t>15 / 20</a:t>
             </a:r>
           </a:p>
         </p:txBody>
@@ -5914,6 +6060,7 @@
           <a:lstStyle xmlns:a="http://schemas.openxmlformats.org/drawingml/2006/main"/>
           <a:p xmlns:a="http://schemas.openxmlformats.org/drawingml/2006/main">
             <a:pPr>
+              <a:buNone/>
               <a:defRPr sz="1275" b="0">
                 <a:solidFill>
                   <a:srgbClr val="6EE7B7"/>
@@ -5971,6 +6118,7 @@
           <a:lstStyle xmlns:a="http://schemas.openxmlformats.org/drawingml/2006/main"/>
           <a:p xmlns:a="http://schemas.openxmlformats.org/drawingml/2006/main">
             <a:pPr>
+              <a:buNone/>
               <a:defRPr sz="3600" b="0">
                 <a:solidFill>
                   <a:srgbClr val="FAFAFA"/>
@@ -6028,6 +6176,7 @@
           <a:lstStyle xmlns:a="http://schemas.openxmlformats.org/drawingml/2006/main"/>
           <a:p xmlns:a="http://schemas.openxmlformats.org/drawingml/2006/main">
             <a:pPr>
+              <a:buNone/>
               <a:defRPr sz="1950" b="0">
                 <a:solidFill>
                   <a:srgbClr val="D4D4D8"/>
@@ -6056,6 +6205,7 @@
           </a:p>
           <a:p xmlns:a="http://schemas.openxmlformats.org/drawingml/2006/main">
             <a:pPr>
+              <a:buNone/>
               <a:defRPr sz="1950" b="0">
                 <a:solidFill>
                   <a:srgbClr val="D4D4D8"/>
@@ -6113,6 +6263,7 @@
           <a:lstStyle xmlns:a="http://schemas.openxmlformats.org/drawingml/2006/main"/>
           <a:p xmlns:a="http://schemas.openxmlformats.org/drawingml/2006/main">
             <a:pPr>
+              <a:buNone/>
               <a:defRPr sz="1650" b="0">
                 <a:solidFill>
                   <a:srgbClr val="A7F3D0"/>
@@ -6136,6 +6287,7 @@
           </a:p>
           <a:p xmlns:a="http://schemas.openxmlformats.org/drawingml/2006/main">
             <a:pPr>
+              <a:buNone/>
               <a:defRPr sz="1650" b="0">
                 <a:solidFill>
                   <a:srgbClr val="A7F3D0"/>
@@ -6159,6 +6311,7 @@
           </a:p>
           <a:p xmlns:a="http://schemas.openxmlformats.org/drawingml/2006/main">
             <a:pPr>
+              <a:buNone/>
               <a:defRPr sz="1650" b="0">
                 <a:solidFill>
                   <a:srgbClr val="A7F3D0"/>
@@ -6187,6 +6340,7 @@
           </a:p>
           <a:p xmlns:a="http://schemas.openxmlformats.org/drawingml/2006/main">
             <a:pPr>
+              <a:buNone/>
               <a:defRPr sz="1650" b="0">
                 <a:solidFill>
                   <a:srgbClr val="A7F3D0"/>
@@ -6210,6 +6364,7 @@
           </a:p>
           <a:p xmlns:a="http://schemas.openxmlformats.org/drawingml/2006/main">
             <a:pPr>
+              <a:buNone/>
               <a:defRPr sz="1650" b="0">
                 <a:solidFill>
                   <a:srgbClr val="A7F3D0"/>
@@ -6233,6 +6388,7 @@
           </a:p>
           <a:p xmlns:a="http://schemas.openxmlformats.org/drawingml/2006/main">
             <a:pPr>
+              <a:buNone/>
               <a:defRPr sz="1650" b="0">
                 <a:solidFill>
                   <a:srgbClr val="A7F3D0"/>
@@ -6290,6 +6446,7 @@
           <a:lstStyle xmlns:a="http://schemas.openxmlformats.org/drawingml/2006/main"/>
           <a:p xmlns:a="http://schemas.openxmlformats.org/drawingml/2006/main">
             <a:pPr>
+              <a:buNone/>
               <a:defRPr sz="1350" b="0">
                 <a:solidFill>
                   <a:srgbClr val="A1A1AA"/>
@@ -6347,6 +6504,7 @@
           <a:lstStyle xmlns:a="http://schemas.openxmlformats.org/drawingml/2006/main"/>
           <a:p xmlns:a="http://schemas.openxmlformats.org/drawingml/2006/main">
             <a:pPr>
+              <a:buNone/>
               <a:defRPr sz="1050" b="0">
                 <a:solidFill>
                   <a:srgbClr val="71717A"/>
@@ -6365,7 +6523,7 @@
                 <a:ea typeface="Courier New"/>
                 <a:cs typeface="Courier New"/>
               </a:rPr>
-              <a:t>16 / 17</a:t>
+              <a:t>16 / 20</a:t>
             </a:r>
           </a:p>
         </p:txBody>
@@ -6404,7 +6562,7 @@
           <p:cNvPr id="7" name="">
             <a:extLst xmlns:a="http://schemas.openxmlformats.org/drawingml/2006/main">
               <a:ext uri="{FF2B5EF4-FFF2-40B4-BE49-F238E27FC236}">
-                <a16:creationId xmlns:a16="http://schemas.microsoft.com/office/drawing/2014/main" id="{4989B079-C3E8-43BB-8638-96121018769A}"/>
+                <a16:creationId xmlns:a16="http://schemas.microsoft.com/office/drawing/2014/main" id="{0BCE7827-648B-4B62-AE80-F3CE9BFFD594}"/>
               </a:ext>
             </a:extLst>
           </p:cNvPr>
@@ -6433,6 +6591,7 @@
           <a:lstStyle xmlns:a="http://schemas.openxmlformats.org/drawingml/2006/main"/>
           <a:p xmlns:a="http://schemas.openxmlformats.org/drawingml/2006/main">
             <a:pPr>
+              <a:buNone/>
               <a:defRPr sz="1275" b="0">
                 <a:solidFill>
                   <a:srgbClr val="6EE7B7"/>
@@ -6451,7 +6610,7 @@
                 <a:ea typeface="Courier New"/>
                 <a:cs typeface="Courier New"/>
               </a:rPr>
-              <a:t>FLOATING POINT · RECAP</a:t>
+              <a:t>FLOATING POINT · ASSIGNMENT PREVIEW</a:t>
             </a:r>
           </a:p>
         </p:txBody>
@@ -6461,7 +6620,7 @@
           <p:cNvPr id="2" name="">
             <a:extLst xmlns:a="http://schemas.openxmlformats.org/drawingml/2006/main">
               <a:ext uri="{FF2B5EF4-FFF2-40B4-BE49-F238E27FC236}">
-                <a16:creationId xmlns:a16="http://schemas.microsoft.com/office/drawing/2014/main" id="{95D3113E-85F1-4E22-A62E-265E94FE3617}"/>
+                <a16:creationId xmlns:a16="http://schemas.microsoft.com/office/drawing/2014/main" id="{E6B69FE5-5D95-4306-AAF0-9A70AD531613}"/>
               </a:ext>
             </a:extLst>
           </p:cNvPr>
@@ -6490,6 +6649,7 @@
           <a:lstStyle xmlns:a="http://schemas.openxmlformats.org/drawingml/2006/main"/>
           <a:p xmlns:a="http://schemas.openxmlformats.org/drawingml/2006/main">
             <a:pPr>
+              <a:buNone/>
               <a:defRPr sz="3600" b="0">
                 <a:solidFill>
                   <a:srgbClr val="FAFAFA"/>
@@ -6508,7 +6668,7 @@
                 <a:ea typeface="Arial"/>
                 <a:cs typeface="Arial"/>
               </a:rPr>
-              <a:t>How to check an encoding</a:t>
+              <a:t>HW3 preview: five inputs</a:t>
             </a:r>
           </a:p>
         </p:txBody>
@@ -6518,7 +6678,7 @@
           <p:cNvPr id="3" name="">
             <a:extLst xmlns:a="http://schemas.openxmlformats.org/drawingml/2006/main">
               <a:ext uri="{FF2B5EF4-FFF2-40B4-BE49-F238E27FC236}">
-                <a16:creationId xmlns:a16="http://schemas.microsoft.com/office/drawing/2014/main" id="{8EC5E33C-BA7C-4ADE-9FC3-9ABD9F3C6FD4}"/>
+                <a16:creationId xmlns:a16="http://schemas.microsoft.com/office/drawing/2014/main" id="{887FE9A9-E5DE-4BC1-94AD-59371BF9B78C}"/>
               </a:ext>
             </a:extLst>
           </p:cNvPr>
@@ -6547,6 +6707,7 @@
           <a:lstStyle xmlns:a="http://schemas.openxmlformats.org/drawingml/2006/main"/>
           <a:p xmlns:a="http://schemas.openxmlformats.org/drawingml/2006/main">
             <a:pPr>
+              <a:buNone/>
               <a:defRPr sz="1950" b="0">
                 <a:solidFill>
                   <a:srgbClr val="D4D4D8"/>
@@ -6565,35 +6726,7 @@
                 <a:ea typeface="Arial"/>
                 <a:cs typeface="Arial"/>
               </a:rPr>
-              <a:t>Compare the value with the smallest normal. Choose the normal or subnormal equation, work out the fields, then decode them to check.</a:t>
-            </a:r>
-          </a:p>
-          <a:p xmlns:a="http://schemas.openxmlformats.org/drawingml/2006/main">
-            <a:r>
-              <a:t/>
-            </a:r>
-          </a:p>
-          <a:p xmlns:a="http://schemas.openxmlformats.org/drawingml/2006/main">
-            <a:pPr>
-              <a:defRPr sz="1950" b="0">
-                <a:solidFill>
-                  <a:srgbClr val="D4D4D8"/>
-                </a:solidFill>
-                <a:latin typeface="Arial"/>
-                <a:ea typeface="Arial"/>
-                <a:cs typeface="Arial"/>
-              </a:defRPr>
-            </a:pPr>
-            <a:r>
-              <a:rPr sz="1950" b="0">
-                <a:solidFill>
-                  <a:srgbClr val="D4D4D8"/>
-                </a:solidFill>
-                <a:latin typeface="Arial"/>
-                <a:ea typeface="Arial"/>
-                <a:cs typeface="Arial"/>
-              </a:rPr>
-              <a:t>If the value is not exact, use the rounding rule given with the problem.</a:t>
+              <a:t>The professor plans a program that reads a format and a nonnegative ratio. The assignment has not been posted, so treat these details as a preview.</a:t>
             </a:r>
           </a:p>
         </p:txBody>
@@ -6603,7 +6736,7 @@
           <p:cNvPr id="4" name="">
             <a:extLst xmlns:a="http://schemas.openxmlformats.org/drawingml/2006/main">
               <a:ext uri="{FF2B5EF4-FFF2-40B4-BE49-F238E27FC236}">
-                <a16:creationId xmlns:a16="http://schemas.microsoft.com/office/drawing/2014/main" id="{EA939046-DA6B-448C-A179-5B13743C72F3}"/>
+                <a16:creationId xmlns:a16="http://schemas.microsoft.com/office/drawing/2014/main" id="{CED75AEC-85E3-4520-B63E-09FCF9AACAE6}"/>
               </a:ext>
             </a:extLst>
           </p:cNvPr>
@@ -6632,6 +6765,7 @@
           <a:lstStyle xmlns:a="http://schemas.openxmlformats.org/drawingml/2006/main"/>
           <a:p xmlns:a="http://schemas.openxmlformats.org/drawingml/2006/main">
             <a:pPr>
+              <a:buNone/>
               <a:defRPr sz="1650" b="0">
                 <a:solidFill>
                   <a:srgbClr val="A7F3D0"/>
@@ -6650,7 +6784,55 @@
                 <a:ea typeface="Courier New"/>
                 <a:cs typeface="Courier New"/>
               </a:rPr>
-              <a:t>Our practice format</a:t>
+              <a:t>format:  exp_bits = 3</a:t>
+            </a:r>
+          </a:p>
+          <a:p xmlns:a="http://schemas.openxmlformats.org/drawingml/2006/main">
+            <a:pPr>
+              <a:buNone/>
+              <a:defRPr sz="1650" b="0">
+                <a:solidFill>
+                  <a:srgbClr val="A7F3D0"/>
+                </a:solidFill>
+                <a:latin typeface="Courier New"/>
+                <a:ea typeface="Courier New"/>
+                <a:cs typeface="Courier New"/>
+              </a:defRPr>
+            </a:pPr>
+            <a:r>
+              <a:rPr sz="1650" b="0">
+                <a:solidFill>
+                  <a:srgbClr val="A7F3D0"/>
+                </a:solidFill>
+                <a:latin typeface="Courier New"/>
+                <a:ea typeface="Courier New"/>
+                <a:cs typeface="Courier New"/>
+              </a:rPr>
+              <a:t>         bias = 3</a:t>
+            </a:r>
+          </a:p>
+          <a:p xmlns:a="http://schemas.openxmlformats.org/drawingml/2006/main">
+            <a:pPr>
+              <a:buNone/>
+              <a:defRPr sz="1650" b="0">
+                <a:solidFill>
+                  <a:srgbClr val="A7F3D0"/>
+                </a:solidFill>
+                <a:latin typeface="Courier New"/>
+                <a:ea typeface="Courier New"/>
+                <a:cs typeface="Courier New"/>
+              </a:defRPr>
+            </a:pPr>
+            <a:r>
+              <a:rPr sz="1650" b="0">
+                <a:solidFill>
+                  <a:srgbClr val="A7F3D0"/>
+                </a:solidFill>
+                <a:latin typeface="Courier New"/>
+                <a:ea typeface="Courier New"/>
+                <a:cs typeface="Courier New"/>
+              </a:rPr>
+              <a:t>         sig_bits = 3</a:t>
             </a:r>
           </a:p>
           <a:p xmlns:a="http://schemas.openxmlformats.org/drawingml/2006/main">
@@ -6660,6 +6842,7 @@
           </a:p>
           <a:p xmlns:a="http://schemas.openxmlformats.org/drawingml/2006/main">
             <a:pPr>
+              <a:buNone/>
               <a:defRPr sz="1650" b="0">
                 <a:solidFill>
                   <a:srgbClr val="A7F3D0"/>
@@ -6678,11 +6861,12 @@
                 <a:ea typeface="Courier New"/>
                 <a:cs typeface="Courier New"/>
               </a:rPr>
-              <a:t>Normal:    (1 + F/8) × 2^(E−3)</a:t>
-            </a:r>
-          </a:p>
-          <a:p xmlns:a="http://schemas.openxmlformats.org/drawingml/2006/main">
-            <a:pPr>
+              <a:t>value:   numerator = 5</a:t>
+            </a:r>
+          </a:p>
+          <a:p xmlns:a="http://schemas.openxmlformats.org/drawingml/2006/main">
+            <a:pPr>
+              <a:buNone/>
               <a:defRPr sz="1650" b="0">
                 <a:solidFill>
                   <a:srgbClr val="A7F3D0"/>
@@ -6701,16 +6885,36 @@
                 <a:ea typeface="Courier New"/>
                 <a:cs typeface="Courier New"/>
               </a:rPr>
-              <a:t>Subnormal: (    F/8) × 2⁻²</a:t>
-            </a:r>
-          </a:p>
-          <a:p xmlns:a="http://schemas.openxmlformats.org/drawingml/2006/main">
-            <a:r>
+              <a:t>         denominator = 2</a:t>
+            </a:r>
+          </a:p>
+          <a:p xmlns:a="http://schemas.openxmlformats.org/drawingml/2006/main">
+            <a:pPr>
+              <a:buNone/>
+              <a:defRPr sz="1650" b="0">
+                <a:solidFill>
+                  <a:srgbClr val="A7F3D0"/>
+                </a:solidFill>
+                <a:latin typeface="Courier New"/>
+                <a:ea typeface="Courier New"/>
+                <a:cs typeface="Courier New"/>
+              </a:defRPr>
+            </a:pPr>
+            <a:r>
+              <a:rPr sz="1650" b="0">
+                <a:solidFill>
+                  <a:srgbClr val="A7F3D0"/>
+                </a:solidFill>
+                <a:latin typeface="Courier New"/>
+                <a:ea typeface="Courier New"/>
+                <a:cs typeface="Courier New"/>
+              </a:rPr>
               <a:t/>
             </a:r>
           </a:p>
           <a:p xmlns:a="http://schemas.openxmlformats.org/drawingml/2006/main">
             <a:pPr>
+              <a:buNone/>
               <a:defRPr sz="1650" b="0">
                 <a:solidFill>
                   <a:srgbClr val="A7F3D0"/>
@@ -6729,35 +6933,7 @@
                 <a:ea typeface="Courier New"/>
                 <a:cs typeface="Courier New"/>
               </a:rPr>
-              <a:t>E = 0, F = 0  →  zero</a:t>
-            </a:r>
-          </a:p>
-          <a:p xmlns:a="http://schemas.openxmlformats.org/drawingml/2006/main">
-            <a:r>
-              <a:t/>
-            </a:r>
-          </a:p>
-          <a:p xmlns:a="http://schemas.openxmlformats.org/drawingml/2006/main">
-            <a:pPr>
-              <a:defRPr sz="1650" b="0">
-                <a:solidFill>
-                  <a:srgbClr val="A7F3D0"/>
-                </a:solidFill>
-                <a:latin typeface="Courier New"/>
-                <a:ea typeface="Courier New"/>
-                <a:cs typeface="Courier New"/>
-              </a:defRPr>
-            </a:pPr>
-            <a:r>
-              <a:rPr sz="1650" b="0">
-                <a:solidFill>
-                  <a:srgbClr val="A7F3D0"/>
-                </a:solidFill>
-                <a:latin typeface="Courier New"/>
-                <a:ea typeface="Courier New"/>
-                <a:cs typeface="Courier New"/>
-              </a:rPr>
-              <a:t>Decode your bits as a final check.</a:t>
+              <a:t>Find: E (exponent), F (fraction)</a:t>
             </a:r>
           </a:p>
         </p:txBody>
@@ -6767,7 +6943,7 @@
           <p:cNvPr id="5" name="">
             <a:extLst xmlns:a="http://schemas.openxmlformats.org/drawingml/2006/main">
               <a:ext uri="{FF2B5EF4-FFF2-40B4-BE49-F238E27FC236}">
-                <a16:creationId xmlns:a16="http://schemas.microsoft.com/office/drawing/2014/main" id="{585A0E73-828D-45A1-9AD7-8EED8C5E7EB1}"/>
+                <a16:creationId xmlns:a16="http://schemas.microsoft.com/office/drawing/2014/main" id="{7A18BC8F-2DC5-4B6B-A4F9-10CDE1183DE6}"/>
               </a:ext>
             </a:extLst>
           </p:cNvPr>
@@ -6796,6 +6972,7 @@
           <a:lstStyle xmlns:a="http://schemas.openxmlformats.org/drawingml/2006/main"/>
           <a:p xmlns:a="http://schemas.openxmlformats.org/drawingml/2006/main">
             <a:pPr>
+              <a:buNone/>
               <a:defRPr sz="1350" b="0">
                 <a:solidFill>
                   <a:srgbClr val="A1A1AA"/>
@@ -6814,7 +6991,7 @@
                 <a:ea typeface="Arial"/>
                 <a:cs typeface="Arial"/>
               </a:rPr>
-              <a:t>A correct encoding must reproduce the intended value or its required rounded value.</a:t>
+              <a:t>The first three inputs define the format; the last two define the value.</a:t>
             </a:r>
           </a:p>
         </p:txBody>
@@ -6824,7 +7001,7 @@
           <p:cNvPr id="6" name="">
             <a:extLst xmlns:a="http://schemas.openxmlformats.org/drawingml/2006/main">
               <a:ext uri="{FF2B5EF4-FFF2-40B4-BE49-F238E27FC236}">
-                <a16:creationId xmlns:a16="http://schemas.microsoft.com/office/drawing/2014/main" id="{E1FBC5BD-1F5D-42FA-AC83-E0BF862F4EDF}"/>
+                <a16:creationId xmlns:a16="http://schemas.microsoft.com/office/drawing/2014/main" id="{94269C50-3A0A-4FBB-A1D2-A33411F72ECA}"/>
               </a:ext>
             </a:extLst>
           </p:cNvPr>
@@ -6853,6 +7030,7 @@
           <a:lstStyle xmlns:a="http://schemas.openxmlformats.org/drawingml/2006/main"/>
           <a:p xmlns:a="http://schemas.openxmlformats.org/drawingml/2006/main">
             <a:pPr>
+              <a:buNone/>
               <a:defRPr sz="1050" b="0">
                 <a:solidFill>
                   <a:srgbClr val="71717A"/>
@@ -6871,7 +7049,7 @@
                 <a:ea typeface="Courier New"/>
                 <a:cs typeface="Courier New"/>
               </a:rPr>
-              <a:t>17 / 17</a:t>
+              <a:t>17 / 20</a:t>
             </a:r>
           </a:p>
         </p:txBody>
@@ -6879,7 +7057,1071 @@
     </p:spTree>
     <p:extLst>
       <p:ext uri="{BB962C8B-B14F-4D97-AF65-F5344CB8AC3E}">
-        <p14:creationId xmlns:p14="http://schemas.microsoft.com/office/powerpoint/2010/main" val="10196595"/>
+        <p14:creationId xmlns:p14="http://schemas.microsoft.com/office/powerpoint/2010/main" val="1018474765"/>
+      </p:ext>
+    </p:extLst>
+  </p:cSld>
+</p:sld>
+</file>
+
+<file path=ppt/slides/slide18.xml><?xml version="1.0" encoding="utf-8"?>
+<p:sld xmlns:p="http://schemas.openxmlformats.org/presentationml/2006/main">
+  <p:cSld>
+    <p:bg>
+      <p:bgPr>
+        <a:solidFill xmlns:a="http://schemas.openxmlformats.org/drawingml/2006/main">
+          <a:srgbClr val="09090B"/>
+        </a:solidFill>
+      </p:bgPr>
+    </p:bg>
+    <p:spTree>
+      <p:nvGrpSpPr>
+        <p:cNvPr id="1" name=""/>
+        <p:cNvGrpSpPr/>
+        <p:nvPr/>
+      </p:nvGrpSpPr>
+      <p:grpSpPr>
+        <a:xfrm xmlns:a="http://schemas.openxmlformats.org/drawingml/2006/main"/>
+      </p:grpSpPr>
+      <p:sp>
+        <p:nvSpPr>
+          <p:cNvPr id="7" name="">
+            <a:extLst xmlns:a="http://schemas.openxmlformats.org/drawingml/2006/main">
+              <a:ext uri="{FF2B5EF4-FFF2-40B4-BE49-F238E27FC236}">
+                <a16:creationId xmlns:a16="http://schemas.microsoft.com/office/drawing/2014/main" id="{0BCE7827-648B-4B62-AE80-F3CE9BFFD594}"/>
+              </a:ext>
+            </a:extLst>
+          </p:cNvPr>
+          <p:cNvSpPr>
+            <a:spLocks xmlns:a="http://schemas.openxmlformats.org/drawingml/2006/main" noGrp="1"/>
+          </p:cNvSpPr>
+          <p:nvPr/>
+        </p:nvSpPr>
+        <p:spPr>
+          <a:xfrm xmlns:a="http://schemas.openxmlformats.org/drawingml/2006/main">
+            <a:off x="685800" y="361950"/>
+            <a:ext cx="10477500" cy="285750"/>
+          </a:xfrm>
+          <a:prstGeom xmlns:a="http://schemas.openxmlformats.org/drawingml/2006/main" prst="rect">
+            <a:avLst/>
+          </a:prstGeom>
+          <a:noFill xmlns:a="http://schemas.openxmlformats.org/drawingml/2006/main"/>
+          <a:ln xmlns:a="http://schemas.openxmlformats.org/drawingml/2006/main" w="0">
+            <a:noFill/>
+          </a:ln>
+        </p:spPr>
+        <p:txBody>
+          <a:bodyPr xmlns:a="http://schemas.openxmlformats.org/drawingml/2006/main" anchor="t">
+            <a:normAutofit fontScale="100000"/>
+          </a:bodyPr>
+          <a:lstStyle xmlns:a="http://schemas.openxmlformats.org/drawingml/2006/main"/>
+          <a:p xmlns:a="http://schemas.openxmlformats.org/drawingml/2006/main">
+            <a:pPr>
+              <a:buNone/>
+              <a:defRPr sz="1275" b="0">
+                <a:solidFill>
+                  <a:srgbClr val="6EE7B7"/>
+                </a:solidFill>
+                <a:latin typeface="Courier New"/>
+                <a:ea typeface="Courier New"/>
+                <a:cs typeface="Courier New"/>
+              </a:defRPr>
+            </a:pPr>
+            <a:r>
+              <a:rPr sz="1275" b="0">
+                <a:solidFill>
+                  <a:srgbClr val="6EE7B7"/>
+                </a:solidFill>
+                <a:latin typeface="Courier New"/>
+                <a:ea typeface="Courier New"/>
+                <a:cs typeface="Courier New"/>
+              </a:rPr>
+              <a:t>FLOATING POINT · WORKED INPUT</a:t>
+            </a:r>
+          </a:p>
+        </p:txBody>
+      </p:sp>
+      <p:sp>
+        <p:nvSpPr>
+          <p:cNvPr id="2" name="">
+            <a:extLst xmlns:a="http://schemas.openxmlformats.org/drawingml/2006/main">
+              <a:ext uri="{FF2B5EF4-FFF2-40B4-BE49-F238E27FC236}">
+                <a16:creationId xmlns:a16="http://schemas.microsoft.com/office/drawing/2014/main" id="{E6B69FE5-5D95-4306-AAF0-9A70AD531613}"/>
+              </a:ext>
+            </a:extLst>
+          </p:cNvPr>
+          <p:cNvSpPr>
+            <a:spLocks xmlns:a="http://schemas.openxmlformats.org/drawingml/2006/main" noGrp="1"/>
+          </p:cNvSpPr>
+          <p:nvPr/>
+        </p:nvSpPr>
+        <p:spPr>
+          <a:xfrm xmlns:a="http://schemas.openxmlformats.org/drawingml/2006/main">
+            <a:off x="685800" y="885825"/>
+            <a:ext cx="10820400" cy="1066800"/>
+          </a:xfrm>
+          <a:prstGeom xmlns:a="http://schemas.openxmlformats.org/drawingml/2006/main" prst="rect">
+            <a:avLst/>
+          </a:prstGeom>
+          <a:noFill xmlns:a="http://schemas.openxmlformats.org/drawingml/2006/main"/>
+          <a:ln xmlns:a="http://schemas.openxmlformats.org/drawingml/2006/main" w="0">
+            <a:noFill/>
+          </a:ln>
+        </p:spPr>
+        <p:txBody>
+          <a:bodyPr xmlns:a="http://schemas.openxmlformats.org/drawingml/2006/main" anchor="t">
+            <a:normAutofit fontScale="100000"/>
+          </a:bodyPr>
+          <a:lstStyle xmlns:a="http://schemas.openxmlformats.org/drawingml/2006/main"/>
+          <a:p xmlns:a="http://schemas.openxmlformats.org/drawingml/2006/main">
+            <a:pPr>
+              <a:buNone/>
+              <a:defRPr sz="3600" b="0">
+                <a:solidFill>
+                  <a:srgbClr val="FAFAFA"/>
+                </a:solidFill>
+                <a:latin typeface="Arial"/>
+                <a:ea typeface="Arial"/>
+                <a:cs typeface="Arial"/>
+              </a:defRPr>
+            </a:pPr>
+            <a:r>
+              <a:rPr sz="3600" b="0">
+                <a:solidFill>
+                  <a:srgbClr val="FAFAFA"/>
+                </a:solidFill>
+                <a:latin typeface="Arial"/>
+                <a:ea typeface="Arial"/>
+                <a:cs typeface="Arial"/>
+              </a:rPr>
+              <a:t>HW3 preview: encode 5/2</a:t>
+            </a:r>
+          </a:p>
+        </p:txBody>
+      </p:sp>
+      <p:sp>
+        <p:nvSpPr>
+          <p:cNvPr id="3" name="">
+            <a:extLst xmlns:a="http://schemas.openxmlformats.org/drawingml/2006/main">
+              <a:ext uri="{FF2B5EF4-FFF2-40B4-BE49-F238E27FC236}">
+                <a16:creationId xmlns:a16="http://schemas.microsoft.com/office/drawing/2014/main" id="{887FE9A9-E5DE-4BC1-94AD-59371BF9B78C}"/>
+              </a:ext>
+            </a:extLst>
+          </p:cNvPr>
+          <p:cNvSpPr>
+            <a:spLocks xmlns:a="http://schemas.openxmlformats.org/drawingml/2006/main" noGrp="1"/>
+          </p:cNvSpPr>
+          <p:nvPr/>
+        </p:nvSpPr>
+        <p:spPr>
+          <a:xfrm xmlns:a="http://schemas.openxmlformats.org/drawingml/2006/main">
+            <a:off x="685800" y="2200275"/>
+            <a:ext cx="4857750" cy="3124200"/>
+          </a:xfrm>
+          <a:prstGeom xmlns:a="http://schemas.openxmlformats.org/drawingml/2006/main" prst="rect">
+            <a:avLst/>
+          </a:prstGeom>
+          <a:noFill xmlns:a="http://schemas.openxmlformats.org/drawingml/2006/main"/>
+          <a:ln xmlns:a="http://schemas.openxmlformats.org/drawingml/2006/main" w="0">
+            <a:noFill/>
+          </a:ln>
+        </p:spPr>
+        <p:txBody>
+          <a:bodyPr xmlns:a="http://schemas.openxmlformats.org/drawingml/2006/main" anchor="t">
+            <a:normAutofit fontScale="100000"/>
+          </a:bodyPr>
+          <a:lstStyle xmlns:a="http://schemas.openxmlformats.org/drawingml/2006/main"/>
+          <a:p xmlns:a="http://schemas.openxmlformats.org/drawingml/2006/main">
+            <a:pPr>
+              <a:buNone/>
+              <a:defRPr sz="1950" b="0">
+                <a:solidFill>
+                  <a:srgbClr val="D4D4D8"/>
+                </a:solidFill>
+                <a:latin typeface="Arial"/>
+                <a:ea typeface="Arial"/>
+                <a:cs typeface="Arial"/>
+              </a:defRPr>
+            </a:pPr>
+            <a:r>
+              <a:rPr sz="1950" b="0">
+                <a:solidFill>
+                  <a:srgbClr val="D4D4D8"/>
+                </a:solidFill>
+                <a:latin typeface="Arial"/>
+                <a:ea typeface="Arial"/>
+                <a:cs typeface="Arial"/>
+              </a:rPr>
+              <a:t>With 3 exponent bits, bias 3, and 3 fraction bits, write 5/2 as 1.010₂ × 2¹. The true exponent is 1, so E = 1 + 3 = 4. The stored fraction is 010₂, so F = 2.</a:t>
+            </a:r>
+          </a:p>
+        </p:txBody>
+      </p:sp>
+      <p:sp>
+        <p:nvSpPr>
+          <p:cNvPr id="4" name="">
+            <a:extLst xmlns:a="http://schemas.openxmlformats.org/drawingml/2006/main">
+              <a:ext uri="{FF2B5EF4-FFF2-40B4-BE49-F238E27FC236}">
+                <a16:creationId xmlns:a16="http://schemas.microsoft.com/office/drawing/2014/main" id="{CED75AEC-85E3-4520-B63E-09FCF9AACAE6}"/>
+              </a:ext>
+            </a:extLst>
+          </p:cNvPr>
+          <p:cNvSpPr>
+            <a:spLocks xmlns:a="http://schemas.openxmlformats.org/drawingml/2006/main" noGrp="1"/>
+          </p:cNvSpPr>
+          <p:nvPr/>
+        </p:nvSpPr>
+        <p:spPr>
+          <a:xfrm xmlns:a="http://schemas.openxmlformats.org/drawingml/2006/main">
+            <a:off x="6181725" y="2200275"/>
+            <a:ext cx="5238750" cy="3286125"/>
+          </a:xfrm>
+          <a:prstGeom xmlns:a="http://schemas.openxmlformats.org/drawingml/2006/main" prst="rect">
+            <a:avLst/>
+          </a:prstGeom>
+          <a:noFill xmlns:a="http://schemas.openxmlformats.org/drawingml/2006/main"/>
+          <a:ln xmlns:a="http://schemas.openxmlformats.org/drawingml/2006/main" w="0">
+            <a:noFill/>
+          </a:ln>
+        </p:spPr>
+        <p:txBody>
+          <a:bodyPr xmlns:a="http://schemas.openxmlformats.org/drawingml/2006/main" anchor="t">
+            <a:normAutofit fontScale="100000"/>
+          </a:bodyPr>
+          <a:lstStyle xmlns:a="http://schemas.openxmlformats.org/drawingml/2006/main"/>
+          <a:p xmlns:a="http://schemas.openxmlformats.org/drawingml/2006/main">
+            <a:pPr>
+              <a:buNone/>
+              <a:defRPr sz="1650" b="0">
+                <a:solidFill>
+                  <a:srgbClr val="A7F3D0"/>
+                </a:solidFill>
+                <a:latin typeface="Courier New"/>
+                <a:ea typeface="Courier New"/>
+                <a:cs typeface="Courier New"/>
+              </a:defRPr>
+            </a:pPr>
+            <a:r>
+              <a:rPr sz="1650" b="0">
+                <a:solidFill>
+                  <a:srgbClr val="A7F3D0"/>
+                </a:solidFill>
+                <a:latin typeface="Courier New"/>
+                <a:ea typeface="Courier New"/>
+                <a:cs typeface="Courier New"/>
+              </a:rPr>
+              <a:t>Inputs: 3 3 3 5 2</a:t>
+            </a:r>
+          </a:p>
+          <a:p xmlns:a="http://schemas.openxmlformats.org/drawingml/2006/main">
+            <a:pPr>
+              <a:buNone/>
+              <a:defRPr sz="1650" b="0">
+                <a:solidFill>
+                  <a:srgbClr val="A7F3D0"/>
+                </a:solidFill>
+                <a:latin typeface="Courier New"/>
+                <a:ea typeface="Courier New"/>
+                <a:cs typeface="Courier New"/>
+              </a:defRPr>
+            </a:pPr>
+            <a:r>
+              <a:rPr sz="1650" b="0">
+                <a:solidFill>
+                  <a:srgbClr val="A7F3D0"/>
+                </a:solidFill>
+                <a:latin typeface="Courier New"/>
+                <a:ea typeface="Courier New"/>
+                <a:cs typeface="Courier New"/>
+              </a:rPr>
+              <a:t/>
+            </a:r>
+          </a:p>
+          <a:p xmlns:a="http://schemas.openxmlformats.org/drawingml/2006/main">
+            <a:pPr>
+              <a:buNone/>
+              <a:defRPr sz="1650" b="0">
+                <a:solidFill>
+                  <a:srgbClr val="A7F3D0"/>
+                </a:solidFill>
+                <a:latin typeface="Courier New"/>
+                <a:ea typeface="Courier New"/>
+                <a:cs typeface="Courier New"/>
+              </a:defRPr>
+            </a:pPr>
+            <a:r>
+              <a:rPr sz="1650" b="0">
+                <a:solidFill>
+                  <a:srgbClr val="A7F3D0"/>
+                </a:solidFill>
+                <a:latin typeface="Courier New"/>
+                <a:ea typeface="Courier New"/>
+                <a:cs typeface="Courier New"/>
+              </a:rPr>
+              <a:t>E = 4 = 100₂</a:t>
+            </a:r>
+          </a:p>
+          <a:p xmlns:a="http://schemas.openxmlformats.org/drawingml/2006/main">
+            <a:pPr>
+              <a:defRPr sz="1650">
+                <a:solidFill>
+                  <a:srgbClr val="A7F3D0"/>
+                </a:solidFill>
+                <a:latin typeface="Courier New"/>
+                <a:ea typeface="Courier New"/>
+                <a:cs typeface="Courier New"/>
+              </a:defRPr>
+            </a:pPr>
+            <a:r>
+              <a:rPr sz="1650">
+                <a:solidFill>
+                  <a:srgbClr val="A7F3D0"/>
+                </a:solidFill>
+                <a:latin typeface="Courier New"/>
+                <a:ea typeface="Courier New"/>
+                <a:cs typeface="Courier New"/>
+              </a:rPr>
+              <a:t>F = 2 = 010₂</a:t>
+            </a:r>
+          </a:p>
+          <a:p xmlns:a="http://schemas.openxmlformats.org/drawingml/2006/main">
+            <a:pPr>
+              <a:buNone/>
+              <a:defRPr sz="1650" b="0">
+                <a:solidFill>
+                  <a:srgbClr val="A7F3D0"/>
+                </a:solidFill>
+                <a:latin typeface="Courier New"/>
+                <a:ea typeface="Courier New"/>
+                <a:cs typeface="Courier New"/>
+              </a:defRPr>
+            </a:pPr>
+            <a:r>
+              <a:rPr sz="1650" b="0">
+                <a:solidFill>
+                  <a:srgbClr val="A7F3D0"/>
+                </a:solidFill>
+                <a:latin typeface="Courier New"/>
+                <a:ea typeface="Courier New"/>
+                <a:cs typeface="Courier New"/>
+              </a:rPr>
+              <a:t/>
+            </a:r>
+          </a:p>
+          <a:p xmlns:a="http://schemas.openxmlformats.org/drawingml/2006/main">
+            <a:pPr>
+              <a:buNone/>
+              <a:defRPr sz="1650" b="0">
+                <a:solidFill>
+                  <a:srgbClr val="A7F3D0"/>
+                </a:solidFill>
+                <a:latin typeface="Courier New"/>
+                <a:ea typeface="Courier New"/>
+                <a:cs typeface="Courier New"/>
+              </a:defRPr>
+            </a:pPr>
+            <a:r>
+              <a:rPr sz="1650" b="0">
+                <a:solidFill>
+                  <a:srgbClr val="A7F3D0"/>
+                </a:solidFill>
+                <a:latin typeface="Courier New"/>
+                <a:ea typeface="Courier New"/>
+                <a:cs typeface="Courier New"/>
+              </a:rPr>
+              <a:t>Output: 4 2</a:t>
+            </a:r>
+          </a:p>
+          <a:p xmlns:a="http://schemas.openxmlformats.org/drawingml/2006/main">
+            <a:pPr>
+              <a:buNone/>
+              <a:defRPr sz="1650" b="0">
+                <a:solidFill>
+                  <a:srgbClr val="A7F3D0"/>
+                </a:solidFill>
+                <a:latin typeface="Courier New"/>
+                <a:ea typeface="Courier New"/>
+                <a:cs typeface="Courier New"/>
+              </a:defRPr>
+            </a:pPr>
+            <a:r>
+              <a:rPr sz="1650" b="0">
+                <a:solidFill>
+                  <a:srgbClr val="A7F3D0"/>
+                </a:solidFill>
+                <a:latin typeface="Courier New"/>
+                <a:ea typeface="Courier New"/>
+                <a:cs typeface="Courier New"/>
+              </a:rPr>
+              <a:t/>
+            </a:r>
+          </a:p>
+          <a:p xmlns:a="http://schemas.openxmlformats.org/drawingml/2006/main">
+            <a:pPr>
+              <a:buNone/>
+              <a:defRPr sz="1650" b="0">
+                <a:solidFill>
+                  <a:srgbClr val="A7F3D0"/>
+                </a:solidFill>
+                <a:latin typeface="Courier New"/>
+                <a:ea typeface="Courier New"/>
+                <a:cs typeface="Courier New"/>
+              </a:defRPr>
+            </a:pPr>
+            <a:r>
+              <a:rPr sz="1650" b="0">
+                <a:solidFill>
+                  <a:srgbClr val="A7F3D0"/>
+                </a:solidFill>
+                <a:latin typeface="Courier New"/>
+                <a:ea typeface="Courier New"/>
+                <a:cs typeface="Courier New"/>
+              </a:rPr>
+              <a:t>Check: (1 + 2/8) × 2¹ = 5/2</a:t>
+            </a:r>
+          </a:p>
+        </p:txBody>
+      </p:sp>
+      <p:sp>
+        <p:nvSpPr>
+          <p:cNvPr id="5" name="">
+            <a:extLst xmlns:a="http://schemas.openxmlformats.org/drawingml/2006/main">
+              <a:ext uri="{FF2B5EF4-FFF2-40B4-BE49-F238E27FC236}">
+                <a16:creationId xmlns:a16="http://schemas.microsoft.com/office/drawing/2014/main" id="{7A18BC8F-2DC5-4B6B-A4F9-10CDE1183DE6}"/>
+              </a:ext>
+            </a:extLst>
+          </p:cNvPr>
+          <p:cNvSpPr>
+            <a:spLocks xmlns:a="http://schemas.openxmlformats.org/drawingml/2006/main" noGrp="1"/>
+          </p:cNvSpPr>
+          <p:nvPr/>
+        </p:nvSpPr>
+        <p:spPr>
+          <a:xfrm xmlns:a="http://schemas.openxmlformats.org/drawingml/2006/main">
+            <a:off x="685800" y="5743575"/>
+            <a:ext cx="10191750" cy="428625"/>
+          </a:xfrm>
+          <a:prstGeom xmlns:a="http://schemas.openxmlformats.org/drawingml/2006/main" prst="rect">
+            <a:avLst/>
+          </a:prstGeom>
+          <a:noFill xmlns:a="http://schemas.openxmlformats.org/drawingml/2006/main"/>
+          <a:ln xmlns:a="http://schemas.openxmlformats.org/drawingml/2006/main" w="0">
+            <a:noFill/>
+          </a:ln>
+        </p:spPr>
+        <p:txBody>
+          <a:bodyPr xmlns:a="http://schemas.openxmlformats.org/drawingml/2006/main" anchor="t">
+            <a:normAutofit fontScale="100000"/>
+          </a:bodyPr>
+          <a:lstStyle xmlns:a="http://schemas.openxmlformats.org/drawingml/2006/main"/>
+          <a:p xmlns:a="http://schemas.openxmlformats.org/drawingml/2006/main">
+            <a:pPr>
+              <a:buNone/>
+              <a:defRPr sz="1350" b="0">
+                <a:solidFill>
+                  <a:srgbClr val="A1A1AA"/>
+                </a:solidFill>
+                <a:latin typeface="Arial"/>
+                <a:ea typeface="Arial"/>
+                <a:cs typeface="Arial"/>
+              </a:defRPr>
+            </a:pPr>
+            <a:r>
+              <a:rPr sz="1350" b="0">
+                <a:solidFill>
+                  <a:srgbClr val="A1A1AA"/>
+                </a:solidFill>
+                <a:latin typeface="Arial"/>
+                <a:ea typeface="Arial"/>
+                <a:cs typeface="Arial"/>
+              </a:rPr>
+              <a:t>Move the binary point before taking the stored fraction bits.</a:t>
+            </a:r>
+          </a:p>
+        </p:txBody>
+      </p:sp>
+      <p:sp>
+        <p:nvSpPr>
+          <p:cNvPr id="6" name="">
+            <a:extLst xmlns:a="http://schemas.openxmlformats.org/drawingml/2006/main">
+              <a:ext uri="{FF2B5EF4-FFF2-40B4-BE49-F238E27FC236}">
+                <a16:creationId xmlns:a16="http://schemas.microsoft.com/office/drawing/2014/main" id="{94269C50-3A0A-4FBB-A1D2-A33411F72ECA}"/>
+              </a:ext>
+            </a:extLst>
+          </p:cNvPr>
+          <p:cNvSpPr>
+            <a:spLocks xmlns:a="http://schemas.openxmlformats.org/drawingml/2006/main" noGrp="1"/>
+          </p:cNvSpPr>
+          <p:nvPr/>
+        </p:nvSpPr>
+        <p:spPr>
+          <a:xfrm xmlns:a="http://schemas.openxmlformats.org/drawingml/2006/main">
+            <a:off x="10477500" y="6210300"/>
+            <a:ext cx="1000125" cy="219075"/>
+          </a:xfrm>
+          <a:prstGeom xmlns:a="http://schemas.openxmlformats.org/drawingml/2006/main" prst="rect">
+            <a:avLst/>
+          </a:prstGeom>
+          <a:noFill xmlns:a="http://schemas.openxmlformats.org/drawingml/2006/main"/>
+          <a:ln xmlns:a="http://schemas.openxmlformats.org/drawingml/2006/main" w="0">
+            <a:noFill/>
+          </a:ln>
+        </p:spPr>
+        <p:txBody>
+          <a:bodyPr xmlns:a="http://schemas.openxmlformats.org/drawingml/2006/main" anchor="t">
+            <a:normAutofit fontScale="79762"/>
+          </a:bodyPr>
+          <a:lstStyle xmlns:a="http://schemas.openxmlformats.org/drawingml/2006/main"/>
+          <a:p xmlns:a="http://schemas.openxmlformats.org/drawingml/2006/main">
+            <a:pPr>
+              <a:buNone/>
+              <a:defRPr sz="1050" b="0">
+                <a:solidFill>
+                  <a:srgbClr val="71717A"/>
+                </a:solidFill>
+                <a:latin typeface="Courier New"/>
+                <a:ea typeface="Courier New"/>
+                <a:cs typeface="Courier New"/>
+              </a:defRPr>
+            </a:pPr>
+            <a:r>
+              <a:rPr sz="1050" b="0">
+                <a:solidFill>
+                  <a:srgbClr val="71717A"/>
+                </a:solidFill>
+                <a:latin typeface="Courier New"/>
+                <a:ea typeface="Courier New"/>
+                <a:cs typeface="Courier New"/>
+              </a:rPr>
+              <a:t>18 / 20</a:t>
+            </a:r>
+          </a:p>
+        </p:txBody>
+      </p:sp>
+    </p:spTree>
+    <p:extLst>
+      <p:ext uri="{BB962C8B-B14F-4D97-AF65-F5344CB8AC3E}">
+        <p14:creationId xmlns:p14="http://schemas.microsoft.com/office/powerpoint/2010/main" val="1018474765"/>
+      </p:ext>
+    </p:extLst>
+  </p:cSld>
+</p:sld>
+</file>
+
+<file path=ppt/slides/slide19.xml><?xml version="1.0" encoding="utf-8"?>
+<p:sld xmlns:p="http://schemas.openxmlformats.org/presentationml/2006/main">
+  <p:cSld>
+    <p:bg>
+      <p:bgPr>
+        <a:solidFill xmlns:a="http://schemas.openxmlformats.org/drawingml/2006/main">
+          <a:srgbClr val="09090B"/>
+        </a:solidFill>
+      </p:bgPr>
+    </p:bg>
+    <p:spTree>
+      <p:nvGrpSpPr>
+        <p:cNvPr id="1" name=""/>
+        <p:cNvGrpSpPr/>
+        <p:nvPr/>
+      </p:nvGrpSpPr>
+      <p:grpSpPr>
+        <a:xfrm xmlns:a="http://schemas.openxmlformats.org/drawingml/2006/main"/>
+      </p:grpSpPr>
+      <p:sp>
+        <p:nvSpPr>
+          <p:cNvPr id="7" name="">
+            <a:extLst xmlns:a="http://schemas.openxmlformats.org/drawingml/2006/main">
+              <a:ext uri="{FF2B5EF4-FFF2-40B4-BE49-F238E27FC236}">
+                <a16:creationId xmlns:a16="http://schemas.microsoft.com/office/drawing/2014/main" id="{0BCE7827-648B-4B62-AE80-F3CE9BFFD594}"/>
+              </a:ext>
+            </a:extLst>
+          </p:cNvPr>
+          <p:cNvSpPr>
+            <a:spLocks xmlns:a="http://schemas.openxmlformats.org/drawingml/2006/main" noGrp="1"/>
+          </p:cNvSpPr>
+          <p:nvPr/>
+        </p:nvSpPr>
+        <p:spPr>
+          <a:xfrm xmlns:a="http://schemas.openxmlformats.org/drawingml/2006/main">
+            <a:off x="685800" y="361950"/>
+            <a:ext cx="10477500" cy="285750"/>
+          </a:xfrm>
+          <a:prstGeom xmlns:a="http://schemas.openxmlformats.org/drawingml/2006/main" prst="rect">
+            <a:avLst/>
+          </a:prstGeom>
+          <a:noFill xmlns:a="http://schemas.openxmlformats.org/drawingml/2006/main"/>
+          <a:ln xmlns:a="http://schemas.openxmlformats.org/drawingml/2006/main" w="0">
+            <a:noFill/>
+          </a:ln>
+        </p:spPr>
+        <p:txBody>
+          <a:bodyPr xmlns:a="http://schemas.openxmlformats.org/drawingml/2006/main" anchor="t">
+            <a:normAutofit fontScale="100000"/>
+          </a:bodyPr>
+          <a:lstStyle xmlns:a="http://schemas.openxmlformats.org/drawingml/2006/main"/>
+          <a:p xmlns:a="http://schemas.openxmlformats.org/drawingml/2006/main">
+            <a:pPr>
+              <a:buNone/>
+              <a:defRPr sz="1275" b="0">
+                <a:solidFill>
+                  <a:srgbClr val="6EE7B7"/>
+                </a:solidFill>
+                <a:latin typeface="Courier New"/>
+                <a:ea typeface="Courier New"/>
+                <a:cs typeface="Courier New"/>
+              </a:defRPr>
+            </a:pPr>
+            <a:r>
+              <a:rPr sz="1275" b="0">
+                <a:solidFill>
+                  <a:srgbClr val="6EE7B7"/>
+                </a:solidFill>
+                <a:latin typeface="Courier New"/>
+                <a:ea typeface="Courier New"/>
+                <a:cs typeface="Courier New"/>
+              </a:rPr>
+              <a:t>FLOATING POINT · METHOD</a:t>
+            </a:r>
+          </a:p>
+        </p:txBody>
+      </p:sp>
+      <p:sp>
+        <p:nvSpPr>
+          <p:cNvPr id="2" name="">
+            <a:extLst xmlns:a="http://schemas.openxmlformats.org/drawingml/2006/main">
+              <a:ext uri="{FF2B5EF4-FFF2-40B4-BE49-F238E27FC236}">
+                <a16:creationId xmlns:a16="http://schemas.microsoft.com/office/drawing/2014/main" id="{E6B69FE5-5D95-4306-AAF0-9A70AD531613}"/>
+              </a:ext>
+            </a:extLst>
+          </p:cNvPr>
+          <p:cNvSpPr>
+            <a:spLocks xmlns:a="http://schemas.openxmlformats.org/drawingml/2006/main" noGrp="1"/>
+          </p:cNvSpPr>
+          <p:nvPr/>
+        </p:nvSpPr>
+        <p:spPr>
+          <a:xfrm xmlns:a="http://schemas.openxmlformats.org/drawingml/2006/main">
+            <a:off x="685800" y="885825"/>
+            <a:ext cx="10820400" cy="1066800"/>
+          </a:xfrm>
+          <a:prstGeom xmlns:a="http://schemas.openxmlformats.org/drawingml/2006/main" prst="rect">
+            <a:avLst/>
+          </a:prstGeom>
+          <a:noFill xmlns:a="http://schemas.openxmlformats.org/drawingml/2006/main"/>
+          <a:ln xmlns:a="http://schemas.openxmlformats.org/drawingml/2006/main" w="0">
+            <a:noFill/>
+          </a:ln>
+        </p:spPr>
+        <p:txBody>
+          <a:bodyPr xmlns:a="http://schemas.openxmlformats.org/drawingml/2006/main" anchor="t">
+            <a:normAutofit fontScale="100000"/>
+          </a:bodyPr>
+          <a:lstStyle xmlns:a="http://schemas.openxmlformats.org/drawingml/2006/main"/>
+          <a:p xmlns:a="http://schemas.openxmlformats.org/drawingml/2006/main">
+            <a:pPr>
+              <a:buNone/>
+              <a:defRPr sz="3600" b="0">
+                <a:solidFill>
+                  <a:srgbClr val="FAFAFA"/>
+                </a:solidFill>
+                <a:latin typeface="Arial"/>
+                <a:ea typeface="Arial"/>
+                <a:cs typeface="Arial"/>
+              </a:defRPr>
+            </a:pPr>
+            <a:r>
+              <a:rPr sz="3600" b="0">
+                <a:solidFill>
+                  <a:srgbClr val="FAFAFA"/>
+                </a:solidFill>
+                <a:latin typeface="Arial"/>
+                <a:ea typeface="Arial"/>
+                <a:cs typeface="Arial"/>
+              </a:rPr>
+              <a:t>HW3 preview: choose the equation</a:t>
+            </a:r>
+          </a:p>
+        </p:txBody>
+      </p:sp>
+      <p:sp>
+        <p:nvSpPr>
+          <p:cNvPr id="3" name="">
+            <a:extLst xmlns:a="http://schemas.openxmlformats.org/drawingml/2006/main">
+              <a:ext uri="{FF2B5EF4-FFF2-40B4-BE49-F238E27FC236}">
+                <a16:creationId xmlns:a16="http://schemas.microsoft.com/office/drawing/2014/main" id="{887FE9A9-E5DE-4BC1-94AD-59371BF9B78C}"/>
+              </a:ext>
+            </a:extLst>
+          </p:cNvPr>
+          <p:cNvSpPr>
+            <a:spLocks xmlns:a="http://schemas.openxmlformats.org/drawingml/2006/main" noGrp="1"/>
+          </p:cNvSpPr>
+          <p:nvPr/>
+        </p:nvSpPr>
+        <p:spPr>
+          <a:xfrm xmlns:a="http://schemas.openxmlformats.org/drawingml/2006/main">
+            <a:off x="685800" y="2200275"/>
+            <a:ext cx="4857750" cy="3124200"/>
+          </a:xfrm>
+          <a:prstGeom xmlns:a="http://schemas.openxmlformats.org/drawingml/2006/main" prst="rect">
+            <a:avLst/>
+          </a:prstGeom>
+          <a:noFill xmlns:a="http://schemas.openxmlformats.org/drawingml/2006/main"/>
+          <a:ln xmlns:a="http://schemas.openxmlformats.org/drawingml/2006/main" w="0">
+            <a:noFill/>
+          </a:ln>
+        </p:spPr>
+        <p:txBody>
+          <a:bodyPr xmlns:a="http://schemas.openxmlformats.org/drawingml/2006/main" anchor="t">
+            <a:normAutofit fontScale="100000"/>
+          </a:bodyPr>
+          <a:lstStyle xmlns:a="http://schemas.openxmlformats.org/drawingml/2006/main"/>
+          <a:p xmlns:a="http://schemas.openxmlformats.org/drawingml/2006/main">
+            <a:pPr>
+              <a:buNone/>
+              <a:defRPr sz="1950" b="0">
+                <a:solidFill>
+                  <a:srgbClr val="D4D4D8"/>
+                </a:solidFill>
+                <a:latin typeface="Arial"/>
+                <a:ea typeface="Arial"/>
+                <a:cs typeface="Arial"/>
+              </a:defRPr>
+            </a:pPr>
+            <a:r>
+              <a:rPr sz="1950" b="0">
+                <a:solidFill>
+                  <a:srgbClr val="D4D4D8"/>
+                </a:solidFill>
+                <a:latin typeface="Arial"/>
+                <a:ea typeface="Arial"/>
+                <a:cs typeface="Arial"/>
+              </a:rPr>
+              <a:t>For a nonzero ratio, compare its value with the smallest normal, 2^(1−bias). That tells you which equation to use. Solve for E and F, then decode them to check.</a:t>
+            </a:r>
+          </a:p>
+        </p:txBody>
+      </p:sp>
+      <p:sp>
+        <p:nvSpPr>
+          <p:cNvPr id="4" name="">
+            <a:extLst xmlns:a="http://schemas.openxmlformats.org/drawingml/2006/main">
+              <a:ext uri="{FF2B5EF4-FFF2-40B4-BE49-F238E27FC236}">
+                <a16:creationId xmlns:a16="http://schemas.microsoft.com/office/drawing/2014/main" id="{CED75AEC-85E3-4520-B63E-09FCF9AACAE6}"/>
+              </a:ext>
+            </a:extLst>
+          </p:cNvPr>
+          <p:cNvSpPr>
+            <a:spLocks xmlns:a="http://schemas.openxmlformats.org/drawingml/2006/main" noGrp="1"/>
+          </p:cNvSpPr>
+          <p:nvPr/>
+        </p:nvSpPr>
+        <p:spPr>
+          <a:xfrm xmlns:a="http://schemas.openxmlformats.org/drawingml/2006/main">
+            <a:off x="6181725" y="2200275"/>
+            <a:ext cx="5238750" cy="3286125"/>
+          </a:xfrm>
+          <a:prstGeom xmlns:a="http://schemas.openxmlformats.org/drawingml/2006/main" prst="rect">
+            <a:avLst/>
+          </a:prstGeom>
+          <a:noFill xmlns:a="http://schemas.openxmlformats.org/drawingml/2006/main"/>
+          <a:ln xmlns:a="http://schemas.openxmlformats.org/drawingml/2006/main" w="0">
+            <a:noFill/>
+          </a:ln>
+        </p:spPr>
+        <p:txBody>
+          <a:bodyPr xmlns:a="http://schemas.openxmlformats.org/drawingml/2006/main" anchor="t">
+            <a:normAutofit fontScale="100000"/>
+          </a:bodyPr>
+          <a:lstStyle xmlns:a="http://schemas.openxmlformats.org/drawingml/2006/main"/>
+          <a:p xmlns:a="http://schemas.openxmlformats.org/drawingml/2006/main">
+            <a:pPr>
+              <a:buNone/>
+              <a:defRPr sz="1650" b="0">
+                <a:solidFill>
+                  <a:srgbClr val="A7F3D0"/>
+                </a:solidFill>
+                <a:latin typeface="Courier New"/>
+                <a:ea typeface="Courier New"/>
+                <a:cs typeface="Courier New"/>
+              </a:defRPr>
+            </a:pPr>
+            <a:r>
+              <a:rPr sz="1650" b="0">
+                <a:solidFill>
+                  <a:srgbClr val="A7F3D0"/>
+                </a:solidFill>
+                <a:latin typeface="Courier New"/>
+                <a:ea typeface="Courier New"/>
+                <a:cs typeface="Courier New"/>
+              </a:rPr>
+              <a:t>Normal (E &gt; 0):</a:t>
+            </a:r>
+          </a:p>
+          <a:p xmlns:a="http://schemas.openxmlformats.org/drawingml/2006/main">
+            <a:pPr>
+              <a:buNone/>
+              <a:defRPr sz="1650" b="0">
+                <a:solidFill>
+                  <a:srgbClr val="A7F3D0"/>
+                </a:solidFill>
+                <a:latin typeface="Courier New"/>
+                <a:ea typeface="Courier New"/>
+                <a:cs typeface="Courier New"/>
+              </a:defRPr>
+            </a:pPr>
+            <a:r>
+              <a:rPr sz="1650" b="0">
+                <a:solidFill>
+                  <a:srgbClr val="A7F3D0"/>
+                </a:solidFill>
+                <a:latin typeface="Courier New"/>
+                <a:ea typeface="Courier New"/>
+                <a:cs typeface="Courier New"/>
+              </a:rPr>
+              <a:t>value = (1 + F/2^p) × 2^(E−bias)</a:t>
+            </a:r>
+          </a:p>
+          <a:p xmlns:a="http://schemas.openxmlformats.org/drawingml/2006/main">
+            <a:pPr>
+              <a:buNone/>
+              <a:defRPr sz="1650" b="0">
+                <a:solidFill>
+                  <a:srgbClr val="A7F3D0"/>
+                </a:solidFill>
+                <a:latin typeface="Courier New"/>
+                <a:ea typeface="Courier New"/>
+                <a:cs typeface="Courier New"/>
+              </a:defRPr>
+            </a:pPr>
+            <a:r>
+              <a:rPr sz="1650" b="0">
+                <a:solidFill>
+                  <a:srgbClr val="A7F3D0"/>
+                </a:solidFill>
+                <a:latin typeface="Courier New"/>
+                <a:ea typeface="Courier New"/>
+                <a:cs typeface="Courier New"/>
+              </a:rPr>
+              <a:t/>
+            </a:r>
+          </a:p>
+          <a:p xmlns:a="http://schemas.openxmlformats.org/drawingml/2006/main">
+            <a:pPr>
+              <a:defRPr sz="1650">
+                <a:solidFill>
+                  <a:srgbClr val="A7F3D0"/>
+                </a:solidFill>
+                <a:latin typeface="Courier New"/>
+                <a:ea typeface="Courier New"/>
+                <a:cs typeface="Courier New"/>
+              </a:defRPr>
+            </a:pPr>
+            <a:r>
+              <a:rPr sz="1650">
+                <a:solidFill>
+                  <a:srgbClr val="A7F3D0"/>
+                </a:solidFill>
+                <a:latin typeface="Courier New"/>
+                <a:ea typeface="Courier New"/>
+                <a:cs typeface="Courier New"/>
+              </a:rPr>
+              <a:t>Subnormal (E = 0):</a:t>
+            </a:r>
+          </a:p>
+          <a:p xmlns:a="http://schemas.openxmlformats.org/drawingml/2006/main">
+            <a:pPr>
+              <a:buNone/>
+              <a:defRPr sz="1650" b="0">
+                <a:solidFill>
+                  <a:srgbClr val="A7F3D0"/>
+                </a:solidFill>
+                <a:latin typeface="Courier New"/>
+                <a:ea typeface="Courier New"/>
+                <a:cs typeface="Courier New"/>
+              </a:defRPr>
+            </a:pPr>
+            <a:r>
+              <a:rPr sz="1650" b="0">
+                <a:solidFill>
+                  <a:srgbClr val="A7F3D0"/>
+                </a:solidFill>
+                <a:latin typeface="Courier New"/>
+                <a:ea typeface="Courier New"/>
+                <a:cs typeface="Courier New"/>
+              </a:rPr>
+              <a:t>value = (F/2^p) × 2^(1−bias)</a:t>
+            </a:r>
+          </a:p>
+          <a:p xmlns:a="http://schemas.openxmlformats.org/drawingml/2006/main">
+            <a:pPr>
+              <a:buNone/>
+              <a:defRPr sz="1650" b="0">
+                <a:solidFill>
+                  <a:srgbClr val="A7F3D0"/>
+                </a:solidFill>
+                <a:latin typeface="Courier New"/>
+                <a:ea typeface="Courier New"/>
+                <a:cs typeface="Courier New"/>
+              </a:defRPr>
+            </a:pPr>
+            <a:r>
+              <a:rPr sz="1650" b="0">
+                <a:solidFill>
+                  <a:srgbClr val="A7F3D0"/>
+                </a:solidFill>
+                <a:latin typeface="Courier New"/>
+                <a:ea typeface="Courier New"/>
+                <a:cs typeface="Courier New"/>
+              </a:rPr>
+              <a:t/>
+            </a:r>
+          </a:p>
+          <a:p xmlns:a="http://schemas.openxmlformats.org/drawingml/2006/main">
+            <a:pPr>
+              <a:buNone/>
+              <a:defRPr sz="1650" b="0">
+                <a:solidFill>
+                  <a:srgbClr val="A7F3D0"/>
+                </a:solidFill>
+                <a:latin typeface="Courier New"/>
+                <a:ea typeface="Courier New"/>
+                <a:cs typeface="Courier New"/>
+              </a:defRPr>
+            </a:pPr>
+            <a:r>
+              <a:rPr sz="1650" b="0">
+                <a:solidFill>
+                  <a:srgbClr val="A7F3D0"/>
+                </a:solidFill>
+                <a:latin typeface="Courier New"/>
+                <a:ea typeface="Courier New"/>
+                <a:cs typeface="Courier New"/>
+              </a:rPr>
+              <a:t>If numerator = 0: E = 0, F = 0</a:t>
+            </a:r>
+          </a:p>
+        </p:txBody>
+      </p:sp>
+      <p:sp>
+        <p:nvSpPr>
+          <p:cNvPr id="5" name="">
+            <a:extLst xmlns:a="http://schemas.openxmlformats.org/drawingml/2006/main">
+              <a:ext uri="{FF2B5EF4-FFF2-40B4-BE49-F238E27FC236}">
+                <a16:creationId xmlns:a16="http://schemas.microsoft.com/office/drawing/2014/main" id="{7A18BC8F-2DC5-4B6B-A4F9-10CDE1183DE6}"/>
+              </a:ext>
+            </a:extLst>
+          </p:cNvPr>
+          <p:cNvSpPr>
+            <a:spLocks xmlns:a="http://schemas.openxmlformats.org/drawingml/2006/main" noGrp="1"/>
+          </p:cNvSpPr>
+          <p:nvPr/>
+        </p:nvSpPr>
+        <p:spPr>
+          <a:xfrm xmlns:a="http://schemas.openxmlformats.org/drawingml/2006/main">
+            <a:off x="685800" y="5743575"/>
+            <a:ext cx="10191750" cy="428625"/>
+          </a:xfrm>
+          <a:prstGeom xmlns:a="http://schemas.openxmlformats.org/drawingml/2006/main" prst="rect">
+            <a:avLst/>
+          </a:prstGeom>
+          <a:noFill xmlns:a="http://schemas.openxmlformats.org/drawingml/2006/main"/>
+          <a:ln xmlns:a="http://schemas.openxmlformats.org/drawingml/2006/main" w="0">
+            <a:noFill/>
+          </a:ln>
+        </p:spPr>
+        <p:txBody>
+          <a:bodyPr xmlns:a="http://schemas.openxmlformats.org/drawingml/2006/main" anchor="t">
+            <a:normAutofit fontScale="100000"/>
+          </a:bodyPr>
+          <a:lstStyle xmlns:a="http://schemas.openxmlformats.org/drawingml/2006/main"/>
+          <a:p xmlns:a="http://schemas.openxmlformats.org/drawingml/2006/main">
+            <a:pPr>
+              <a:buNone/>
+              <a:defRPr sz="1350" b="0">
+                <a:solidFill>
+                  <a:srgbClr val="A1A1AA"/>
+                </a:solidFill>
+                <a:latin typeface="Arial"/>
+                <a:ea typeface="Arial"/>
+                <a:cs typeface="Arial"/>
+              </a:defRPr>
+            </a:pPr>
+            <a:r>
+              <a:rPr sz="1350" b="0">
+                <a:solidFill>
+                  <a:srgbClr val="A1A1AA"/>
+                </a:solidFill>
+                <a:latin typeface="Arial"/>
+                <a:ea typeface="Arial"/>
+                <a:cs typeface="Arial"/>
+              </a:rPr>
+              <a:t>Use the supplied p and bias, not the values from our practice format.</a:t>
+            </a:r>
+          </a:p>
+        </p:txBody>
+      </p:sp>
+      <p:sp>
+        <p:nvSpPr>
+          <p:cNvPr id="6" name="">
+            <a:extLst xmlns:a="http://schemas.openxmlformats.org/drawingml/2006/main">
+              <a:ext uri="{FF2B5EF4-FFF2-40B4-BE49-F238E27FC236}">
+                <a16:creationId xmlns:a16="http://schemas.microsoft.com/office/drawing/2014/main" id="{94269C50-3A0A-4FBB-A1D2-A33411F72ECA}"/>
+              </a:ext>
+            </a:extLst>
+          </p:cNvPr>
+          <p:cNvSpPr>
+            <a:spLocks xmlns:a="http://schemas.openxmlformats.org/drawingml/2006/main" noGrp="1"/>
+          </p:cNvSpPr>
+          <p:nvPr/>
+        </p:nvSpPr>
+        <p:spPr>
+          <a:xfrm xmlns:a="http://schemas.openxmlformats.org/drawingml/2006/main">
+            <a:off x="10477500" y="6210300"/>
+            <a:ext cx="1000125" cy="219075"/>
+          </a:xfrm>
+          <a:prstGeom xmlns:a="http://schemas.openxmlformats.org/drawingml/2006/main" prst="rect">
+            <a:avLst/>
+          </a:prstGeom>
+          <a:noFill xmlns:a="http://schemas.openxmlformats.org/drawingml/2006/main"/>
+          <a:ln xmlns:a="http://schemas.openxmlformats.org/drawingml/2006/main" w="0">
+            <a:noFill/>
+          </a:ln>
+        </p:spPr>
+        <p:txBody>
+          <a:bodyPr xmlns:a="http://schemas.openxmlformats.org/drawingml/2006/main" anchor="t">
+            <a:normAutofit fontScale="79762"/>
+          </a:bodyPr>
+          <a:lstStyle xmlns:a="http://schemas.openxmlformats.org/drawingml/2006/main"/>
+          <a:p xmlns:a="http://schemas.openxmlformats.org/drawingml/2006/main">
+            <a:pPr>
+              <a:buNone/>
+              <a:defRPr sz="1050" b="0">
+                <a:solidFill>
+                  <a:srgbClr val="71717A"/>
+                </a:solidFill>
+                <a:latin typeface="Courier New"/>
+                <a:ea typeface="Courier New"/>
+                <a:cs typeface="Courier New"/>
+              </a:defRPr>
+            </a:pPr>
+            <a:r>
+              <a:rPr sz="1050" b="0">
+                <a:solidFill>
+                  <a:srgbClr val="71717A"/>
+                </a:solidFill>
+                <a:latin typeface="Courier New"/>
+                <a:ea typeface="Courier New"/>
+                <a:cs typeface="Courier New"/>
+              </a:rPr>
+              <a:t>19 / 20</a:t>
+            </a:r>
+          </a:p>
+        </p:txBody>
+      </p:sp>
+    </p:spTree>
+    <p:extLst>
+      <p:ext uri="{BB962C8B-B14F-4D97-AF65-F5344CB8AC3E}">
+        <p14:creationId xmlns:p14="http://schemas.microsoft.com/office/powerpoint/2010/main" val="1018474765"/>
       </p:ext>
     </p:extLst>
   </p:cSld>
@@ -6939,6 +8181,7 @@
           <a:lstStyle xmlns:a="http://schemas.openxmlformats.org/drawingml/2006/main"/>
           <a:p xmlns:a="http://schemas.openxmlformats.org/drawingml/2006/main">
             <a:pPr>
+              <a:buNone/>
               <a:defRPr sz="1275" b="0">
                 <a:solidFill>
                   <a:srgbClr val="6EE7B7"/>
@@ -6996,6 +8239,7 @@
           <a:lstStyle xmlns:a="http://schemas.openxmlformats.org/drawingml/2006/main"/>
           <a:p xmlns:a="http://schemas.openxmlformats.org/drawingml/2006/main">
             <a:pPr>
+              <a:buNone/>
               <a:defRPr sz="3600" b="0">
                 <a:solidFill>
                   <a:srgbClr val="FAFAFA"/>
@@ -7053,6 +8297,7 @@
           <a:lstStyle xmlns:a="http://schemas.openxmlformats.org/drawingml/2006/main"/>
           <a:p xmlns:a="http://schemas.openxmlformats.org/drawingml/2006/main">
             <a:pPr>
+              <a:buNone/>
               <a:defRPr sz="1950" b="0">
                 <a:solidFill>
                   <a:srgbClr val="D4D4D8"/>
@@ -7081,6 +8326,7 @@
           </a:p>
           <a:p xmlns:a="http://schemas.openxmlformats.org/drawingml/2006/main">
             <a:pPr>
+              <a:buNone/>
               <a:defRPr sz="1950" b="0">
                 <a:solidFill>
                   <a:srgbClr val="D4D4D8"/>
@@ -7138,6 +8384,7 @@
           <a:lstStyle xmlns:a="http://schemas.openxmlformats.org/drawingml/2006/main"/>
           <a:p xmlns:a="http://schemas.openxmlformats.org/drawingml/2006/main">
             <a:pPr>
+              <a:buNone/>
               <a:defRPr sz="1650" b="0">
                 <a:solidFill>
                   <a:srgbClr val="A7F3D0"/>
@@ -7166,6 +8413,7 @@
           </a:p>
           <a:p xmlns:a="http://schemas.openxmlformats.org/drawingml/2006/main">
             <a:pPr>
+              <a:buNone/>
               <a:defRPr sz="1650" b="0">
                 <a:solidFill>
                   <a:srgbClr val="A7F3D0"/>
@@ -7189,6 +8437,7 @@
           </a:p>
           <a:p xmlns:a="http://schemas.openxmlformats.org/drawingml/2006/main">
             <a:pPr>
+              <a:buNone/>
               <a:defRPr sz="1650" b="0">
                 <a:solidFill>
                   <a:srgbClr val="A7F3D0"/>
@@ -7217,6 +8466,7 @@
           </a:p>
           <a:p xmlns:a="http://schemas.openxmlformats.org/drawingml/2006/main">
             <a:pPr>
+              <a:buNone/>
               <a:defRPr sz="1650" b="0">
                 <a:solidFill>
                   <a:srgbClr val="A7F3D0"/>
@@ -7240,6 +8490,7 @@
           </a:p>
           <a:p xmlns:a="http://schemas.openxmlformats.org/drawingml/2006/main">
             <a:pPr>
+              <a:buNone/>
               <a:defRPr sz="1650" b="0">
                 <a:solidFill>
                   <a:srgbClr val="A7F3D0"/>
@@ -7297,6 +8548,7 @@
           <a:lstStyle xmlns:a="http://schemas.openxmlformats.org/drawingml/2006/main"/>
           <a:p xmlns:a="http://schemas.openxmlformats.org/drawingml/2006/main">
             <a:pPr>
+              <a:buNone/>
               <a:defRPr sz="1350" b="0">
                 <a:solidFill>
                   <a:srgbClr val="A1A1AA"/>
@@ -7354,6 +8606,7 @@
           <a:lstStyle xmlns:a="http://schemas.openxmlformats.org/drawingml/2006/main"/>
           <a:p xmlns:a="http://schemas.openxmlformats.org/drawingml/2006/main">
             <a:pPr>
+              <a:buNone/>
               <a:defRPr sz="1050" b="0">
                 <a:solidFill>
                   <a:srgbClr val="71717A"/>
@@ -7372,7 +8625,7 @@
                 <a:ea typeface="Courier New"/>
                 <a:cs typeface="Courier New"/>
               </a:rPr>
-              <a:t>02 / 17</a:t>
+              <a:t>02 / 20</a:t>
             </a:r>
           </a:p>
         </p:txBody>
@@ -7381,6 +8634,523 @@
     <p:extLst>
       <p:ext uri="{BB962C8B-B14F-4D97-AF65-F5344CB8AC3E}">
         <p14:creationId xmlns:p14="http://schemas.microsoft.com/office/powerpoint/2010/main" val="543148191"/>
+      </p:ext>
+    </p:extLst>
+  </p:cSld>
+</p:sld>
+</file>
+
+<file path=ppt/slides/slide20.xml><?xml version="1.0" encoding="utf-8"?>
+<p:sld xmlns:p="http://schemas.openxmlformats.org/presentationml/2006/main">
+  <p:cSld>
+    <p:bg>
+      <p:bgPr>
+        <a:solidFill xmlns:a="http://schemas.openxmlformats.org/drawingml/2006/main">
+          <a:srgbClr val="09090B"/>
+        </a:solidFill>
+      </p:bgPr>
+    </p:bg>
+    <p:spTree>
+      <p:nvGrpSpPr>
+        <p:cNvPr id="1" name=""/>
+        <p:cNvGrpSpPr/>
+        <p:nvPr/>
+      </p:nvGrpSpPr>
+      <p:grpSpPr>
+        <a:xfrm xmlns:a="http://schemas.openxmlformats.org/drawingml/2006/main"/>
+      </p:grpSpPr>
+      <p:sp>
+        <p:nvSpPr>
+          <p:cNvPr id="7" name="">
+            <a:extLst xmlns:a="http://schemas.openxmlformats.org/drawingml/2006/main">
+              <a:ext uri="{FF2B5EF4-FFF2-40B4-BE49-F238E27FC236}">
+                <a16:creationId xmlns:a16="http://schemas.microsoft.com/office/drawing/2014/main" id="{4989B079-C3E8-43BB-8638-96121018769A}"/>
+              </a:ext>
+            </a:extLst>
+          </p:cNvPr>
+          <p:cNvSpPr>
+            <a:spLocks xmlns:a="http://schemas.openxmlformats.org/drawingml/2006/main" noGrp="1"/>
+          </p:cNvSpPr>
+          <p:nvPr/>
+        </p:nvSpPr>
+        <p:spPr>
+          <a:xfrm xmlns:a="http://schemas.openxmlformats.org/drawingml/2006/main">
+            <a:off x="685800" y="361950"/>
+            <a:ext cx="10477500" cy="285750"/>
+          </a:xfrm>
+          <a:prstGeom xmlns:a="http://schemas.openxmlformats.org/drawingml/2006/main" prst="rect">
+            <a:avLst/>
+          </a:prstGeom>
+          <a:noFill xmlns:a="http://schemas.openxmlformats.org/drawingml/2006/main"/>
+          <a:ln xmlns:a="http://schemas.openxmlformats.org/drawingml/2006/main" w="0">
+            <a:noFill/>
+          </a:ln>
+        </p:spPr>
+        <p:txBody>
+          <a:bodyPr xmlns:a="http://schemas.openxmlformats.org/drawingml/2006/main" anchor="t">
+            <a:normAutofit fontScale="100000"/>
+          </a:bodyPr>
+          <a:lstStyle xmlns:a="http://schemas.openxmlformats.org/drawingml/2006/main"/>
+          <a:p xmlns:a="http://schemas.openxmlformats.org/drawingml/2006/main">
+            <a:pPr>
+              <a:buNone/>
+              <a:defRPr sz="1275" b="0">
+                <a:solidFill>
+                  <a:srgbClr val="6EE7B7"/>
+                </a:solidFill>
+                <a:latin typeface="Courier New"/>
+                <a:ea typeface="Courier New"/>
+                <a:cs typeface="Courier New"/>
+              </a:defRPr>
+            </a:pPr>
+            <a:r>
+              <a:rPr sz="1275" b="0">
+                <a:solidFill>
+                  <a:srgbClr val="6EE7B7"/>
+                </a:solidFill>
+                <a:latin typeface="Courier New"/>
+                <a:ea typeface="Courier New"/>
+                <a:cs typeface="Courier New"/>
+              </a:rPr>
+              <a:t>FLOATING POINT · RECAP</a:t>
+            </a:r>
+          </a:p>
+        </p:txBody>
+      </p:sp>
+      <p:sp>
+        <p:nvSpPr>
+          <p:cNvPr id="2" name="">
+            <a:extLst xmlns:a="http://schemas.openxmlformats.org/drawingml/2006/main">
+              <a:ext uri="{FF2B5EF4-FFF2-40B4-BE49-F238E27FC236}">
+                <a16:creationId xmlns:a16="http://schemas.microsoft.com/office/drawing/2014/main" id="{95D3113E-85F1-4E22-A62E-265E94FE3617}"/>
+              </a:ext>
+            </a:extLst>
+          </p:cNvPr>
+          <p:cNvSpPr>
+            <a:spLocks xmlns:a="http://schemas.openxmlformats.org/drawingml/2006/main" noGrp="1"/>
+          </p:cNvSpPr>
+          <p:nvPr/>
+        </p:nvSpPr>
+        <p:spPr>
+          <a:xfrm xmlns:a="http://schemas.openxmlformats.org/drawingml/2006/main">
+            <a:off x="685800" y="885825"/>
+            <a:ext cx="10820400" cy="1066800"/>
+          </a:xfrm>
+          <a:prstGeom xmlns:a="http://schemas.openxmlformats.org/drawingml/2006/main" prst="rect">
+            <a:avLst/>
+          </a:prstGeom>
+          <a:noFill xmlns:a="http://schemas.openxmlformats.org/drawingml/2006/main"/>
+          <a:ln xmlns:a="http://schemas.openxmlformats.org/drawingml/2006/main" w="0">
+            <a:noFill/>
+          </a:ln>
+        </p:spPr>
+        <p:txBody>
+          <a:bodyPr xmlns:a="http://schemas.openxmlformats.org/drawingml/2006/main" anchor="t">
+            <a:normAutofit fontScale="100000"/>
+          </a:bodyPr>
+          <a:lstStyle xmlns:a="http://schemas.openxmlformats.org/drawingml/2006/main"/>
+          <a:p xmlns:a="http://schemas.openxmlformats.org/drawingml/2006/main">
+            <a:pPr>
+              <a:buNone/>
+              <a:defRPr sz="3600" b="0">
+                <a:solidFill>
+                  <a:srgbClr val="FAFAFA"/>
+                </a:solidFill>
+                <a:latin typeface="Arial"/>
+                <a:ea typeface="Arial"/>
+                <a:cs typeface="Arial"/>
+              </a:defRPr>
+            </a:pPr>
+            <a:r>
+              <a:rPr sz="3600" b="0">
+                <a:solidFill>
+                  <a:srgbClr val="FAFAFA"/>
+                </a:solidFill>
+                <a:latin typeface="Arial"/>
+                <a:ea typeface="Arial"/>
+                <a:cs typeface="Arial"/>
+              </a:rPr>
+              <a:t>How to check an encoding</a:t>
+            </a:r>
+          </a:p>
+        </p:txBody>
+      </p:sp>
+      <p:sp>
+        <p:nvSpPr>
+          <p:cNvPr id="3" name="">
+            <a:extLst xmlns:a="http://schemas.openxmlformats.org/drawingml/2006/main">
+              <a:ext uri="{FF2B5EF4-FFF2-40B4-BE49-F238E27FC236}">
+                <a16:creationId xmlns:a16="http://schemas.microsoft.com/office/drawing/2014/main" id="{8EC5E33C-BA7C-4ADE-9FC3-9ABD9F3C6FD4}"/>
+              </a:ext>
+            </a:extLst>
+          </p:cNvPr>
+          <p:cNvSpPr>
+            <a:spLocks xmlns:a="http://schemas.openxmlformats.org/drawingml/2006/main" noGrp="1"/>
+          </p:cNvSpPr>
+          <p:nvPr/>
+        </p:nvSpPr>
+        <p:spPr>
+          <a:xfrm xmlns:a="http://schemas.openxmlformats.org/drawingml/2006/main">
+            <a:off x="685800" y="2200275"/>
+            <a:ext cx="4857750" cy="3124200"/>
+          </a:xfrm>
+          <a:prstGeom xmlns:a="http://schemas.openxmlformats.org/drawingml/2006/main" prst="rect">
+            <a:avLst/>
+          </a:prstGeom>
+          <a:noFill xmlns:a="http://schemas.openxmlformats.org/drawingml/2006/main"/>
+          <a:ln xmlns:a="http://schemas.openxmlformats.org/drawingml/2006/main" w="0">
+            <a:noFill/>
+          </a:ln>
+        </p:spPr>
+        <p:txBody>
+          <a:bodyPr xmlns:a="http://schemas.openxmlformats.org/drawingml/2006/main" anchor="t">
+            <a:normAutofit fontScale="100000"/>
+          </a:bodyPr>
+          <a:lstStyle xmlns:a="http://schemas.openxmlformats.org/drawingml/2006/main"/>
+          <a:p xmlns:a="http://schemas.openxmlformats.org/drawingml/2006/main">
+            <a:pPr>
+              <a:buNone/>
+              <a:defRPr sz="1950" b="0">
+                <a:solidFill>
+                  <a:srgbClr val="D4D4D8"/>
+                </a:solidFill>
+                <a:latin typeface="Arial"/>
+                <a:ea typeface="Arial"/>
+                <a:cs typeface="Arial"/>
+              </a:defRPr>
+            </a:pPr>
+            <a:r>
+              <a:rPr sz="1950" b="0">
+                <a:solidFill>
+                  <a:srgbClr val="D4D4D8"/>
+                </a:solidFill>
+                <a:latin typeface="Arial"/>
+                <a:ea typeface="Arial"/>
+                <a:cs typeface="Arial"/>
+              </a:rPr>
+              <a:t>Compare the value with the smallest normal. Choose the normal or subnormal equation, work out the fields, then decode them to check.</a:t>
+            </a:r>
+          </a:p>
+          <a:p xmlns:a="http://schemas.openxmlformats.org/drawingml/2006/main">
+            <a:r>
+              <a:t/>
+            </a:r>
+          </a:p>
+          <a:p xmlns:a="http://schemas.openxmlformats.org/drawingml/2006/main">
+            <a:pPr>
+              <a:buNone/>
+              <a:defRPr sz="1950" b="0">
+                <a:solidFill>
+                  <a:srgbClr val="D4D4D8"/>
+                </a:solidFill>
+                <a:latin typeface="Arial"/>
+                <a:ea typeface="Arial"/>
+                <a:cs typeface="Arial"/>
+              </a:defRPr>
+            </a:pPr>
+            <a:r>
+              <a:rPr sz="1950" b="0">
+                <a:solidFill>
+                  <a:srgbClr val="D4D4D8"/>
+                </a:solidFill>
+                <a:latin typeface="Arial"/>
+                <a:ea typeface="Arial"/>
+                <a:cs typeface="Arial"/>
+              </a:rPr>
+              <a:t>If the value is not exact, use the rounding rule given with the problem.</a:t>
+            </a:r>
+          </a:p>
+        </p:txBody>
+      </p:sp>
+      <p:sp>
+        <p:nvSpPr>
+          <p:cNvPr id="4" name="">
+            <a:extLst xmlns:a="http://schemas.openxmlformats.org/drawingml/2006/main">
+              <a:ext uri="{FF2B5EF4-FFF2-40B4-BE49-F238E27FC236}">
+                <a16:creationId xmlns:a16="http://schemas.microsoft.com/office/drawing/2014/main" id="{EA939046-DA6B-448C-A179-5B13743C72F3}"/>
+              </a:ext>
+            </a:extLst>
+          </p:cNvPr>
+          <p:cNvSpPr>
+            <a:spLocks xmlns:a="http://schemas.openxmlformats.org/drawingml/2006/main" noGrp="1"/>
+          </p:cNvSpPr>
+          <p:nvPr/>
+        </p:nvSpPr>
+        <p:spPr>
+          <a:xfrm xmlns:a="http://schemas.openxmlformats.org/drawingml/2006/main">
+            <a:off x="6181725" y="2200275"/>
+            <a:ext cx="5238750" cy="3286125"/>
+          </a:xfrm>
+          <a:prstGeom xmlns:a="http://schemas.openxmlformats.org/drawingml/2006/main" prst="rect">
+            <a:avLst/>
+          </a:prstGeom>
+          <a:noFill xmlns:a="http://schemas.openxmlformats.org/drawingml/2006/main"/>
+          <a:ln xmlns:a="http://schemas.openxmlformats.org/drawingml/2006/main" w="0">
+            <a:noFill/>
+          </a:ln>
+        </p:spPr>
+        <p:txBody>
+          <a:bodyPr xmlns:a="http://schemas.openxmlformats.org/drawingml/2006/main" anchor="t">
+            <a:normAutofit fontScale="100000"/>
+          </a:bodyPr>
+          <a:lstStyle xmlns:a="http://schemas.openxmlformats.org/drawingml/2006/main"/>
+          <a:p xmlns:a="http://schemas.openxmlformats.org/drawingml/2006/main">
+            <a:pPr>
+              <a:buNone/>
+              <a:defRPr sz="1650" b="0">
+                <a:solidFill>
+                  <a:srgbClr val="A7F3D0"/>
+                </a:solidFill>
+                <a:latin typeface="Courier New"/>
+                <a:ea typeface="Courier New"/>
+                <a:cs typeface="Courier New"/>
+              </a:defRPr>
+            </a:pPr>
+            <a:r>
+              <a:rPr sz="1650" b="0">
+                <a:solidFill>
+                  <a:srgbClr val="A7F3D0"/>
+                </a:solidFill>
+                <a:latin typeface="Courier New"/>
+                <a:ea typeface="Courier New"/>
+                <a:cs typeface="Courier New"/>
+              </a:rPr>
+              <a:t>Our practice format</a:t>
+            </a:r>
+          </a:p>
+          <a:p xmlns:a="http://schemas.openxmlformats.org/drawingml/2006/main">
+            <a:r>
+              <a:t/>
+            </a:r>
+          </a:p>
+          <a:p xmlns:a="http://schemas.openxmlformats.org/drawingml/2006/main">
+            <a:pPr>
+              <a:buNone/>
+              <a:defRPr sz="1650" b="0">
+                <a:solidFill>
+                  <a:srgbClr val="A7F3D0"/>
+                </a:solidFill>
+                <a:latin typeface="Courier New"/>
+                <a:ea typeface="Courier New"/>
+                <a:cs typeface="Courier New"/>
+              </a:defRPr>
+            </a:pPr>
+            <a:r>
+              <a:rPr sz="1650" b="0">
+                <a:solidFill>
+                  <a:srgbClr val="A7F3D0"/>
+                </a:solidFill>
+                <a:latin typeface="Courier New"/>
+                <a:ea typeface="Courier New"/>
+                <a:cs typeface="Courier New"/>
+              </a:rPr>
+              <a:t>Normal:    (1 + F/8) × 2^(E−3)</a:t>
+            </a:r>
+          </a:p>
+          <a:p xmlns:a="http://schemas.openxmlformats.org/drawingml/2006/main">
+            <a:pPr>
+              <a:buNone/>
+              <a:defRPr sz="1650" b="0">
+                <a:solidFill>
+                  <a:srgbClr val="A7F3D0"/>
+                </a:solidFill>
+                <a:latin typeface="Courier New"/>
+                <a:ea typeface="Courier New"/>
+                <a:cs typeface="Courier New"/>
+              </a:defRPr>
+            </a:pPr>
+            <a:r>
+              <a:rPr sz="1650" b="0">
+                <a:solidFill>
+                  <a:srgbClr val="A7F3D0"/>
+                </a:solidFill>
+                <a:latin typeface="Courier New"/>
+                <a:ea typeface="Courier New"/>
+                <a:cs typeface="Courier New"/>
+              </a:rPr>
+              <a:t>Subnormal: (    F/8) × 2⁻²</a:t>
+            </a:r>
+          </a:p>
+          <a:p xmlns:a="http://schemas.openxmlformats.org/drawingml/2006/main">
+            <a:r>
+              <a:t/>
+            </a:r>
+          </a:p>
+          <a:p xmlns:a="http://schemas.openxmlformats.org/drawingml/2006/main">
+            <a:pPr>
+              <a:buNone/>
+              <a:defRPr sz="1650" b="0">
+                <a:solidFill>
+                  <a:srgbClr val="A7F3D0"/>
+                </a:solidFill>
+                <a:latin typeface="Courier New"/>
+                <a:ea typeface="Courier New"/>
+                <a:cs typeface="Courier New"/>
+              </a:defRPr>
+            </a:pPr>
+            <a:r>
+              <a:rPr sz="1650" b="0">
+                <a:solidFill>
+                  <a:srgbClr val="A7F3D0"/>
+                </a:solidFill>
+                <a:latin typeface="Courier New"/>
+                <a:ea typeface="Courier New"/>
+                <a:cs typeface="Courier New"/>
+              </a:rPr>
+              <a:t>E = 0, F = 0  →  zero</a:t>
+            </a:r>
+          </a:p>
+          <a:p xmlns:a="http://schemas.openxmlformats.org/drawingml/2006/main">
+            <a:r>
+              <a:t/>
+            </a:r>
+          </a:p>
+          <a:p xmlns:a="http://schemas.openxmlformats.org/drawingml/2006/main">
+            <a:pPr>
+              <a:buNone/>
+              <a:defRPr sz="1650" b="0">
+                <a:solidFill>
+                  <a:srgbClr val="A7F3D0"/>
+                </a:solidFill>
+                <a:latin typeface="Courier New"/>
+                <a:ea typeface="Courier New"/>
+                <a:cs typeface="Courier New"/>
+              </a:defRPr>
+            </a:pPr>
+            <a:r>
+              <a:rPr sz="1650" b="0">
+                <a:solidFill>
+                  <a:srgbClr val="A7F3D0"/>
+                </a:solidFill>
+                <a:latin typeface="Courier New"/>
+                <a:ea typeface="Courier New"/>
+                <a:cs typeface="Courier New"/>
+              </a:rPr>
+              <a:t>Decode your bits as a final check.</a:t>
+            </a:r>
+          </a:p>
+        </p:txBody>
+      </p:sp>
+      <p:sp>
+        <p:nvSpPr>
+          <p:cNvPr id="5" name="">
+            <a:extLst xmlns:a="http://schemas.openxmlformats.org/drawingml/2006/main">
+              <a:ext uri="{FF2B5EF4-FFF2-40B4-BE49-F238E27FC236}">
+                <a16:creationId xmlns:a16="http://schemas.microsoft.com/office/drawing/2014/main" id="{585A0E73-828D-45A1-9AD7-8EED8C5E7EB1}"/>
+              </a:ext>
+            </a:extLst>
+          </p:cNvPr>
+          <p:cNvSpPr>
+            <a:spLocks xmlns:a="http://schemas.openxmlformats.org/drawingml/2006/main" noGrp="1"/>
+          </p:cNvSpPr>
+          <p:nvPr/>
+        </p:nvSpPr>
+        <p:spPr>
+          <a:xfrm xmlns:a="http://schemas.openxmlformats.org/drawingml/2006/main">
+            <a:off x="685800" y="5743575"/>
+            <a:ext cx="10191750" cy="428625"/>
+          </a:xfrm>
+          <a:prstGeom xmlns:a="http://schemas.openxmlformats.org/drawingml/2006/main" prst="rect">
+            <a:avLst/>
+          </a:prstGeom>
+          <a:noFill xmlns:a="http://schemas.openxmlformats.org/drawingml/2006/main"/>
+          <a:ln xmlns:a="http://schemas.openxmlformats.org/drawingml/2006/main" w="0">
+            <a:noFill/>
+          </a:ln>
+        </p:spPr>
+        <p:txBody>
+          <a:bodyPr xmlns:a="http://schemas.openxmlformats.org/drawingml/2006/main" anchor="t">
+            <a:normAutofit fontScale="100000"/>
+          </a:bodyPr>
+          <a:lstStyle xmlns:a="http://schemas.openxmlformats.org/drawingml/2006/main"/>
+          <a:p xmlns:a="http://schemas.openxmlformats.org/drawingml/2006/main">
+            <a:pPr>
+              <a:buNone/>
+              <a:defRPr sz="1350" b="0">
+                <a:solidFill>
+                  <a:srgbClr val="A1A1AA"/>
+                </a:solidFill>
+                <a:latin typeface="Arial"/>
+                <a:ea typeface="Arial"/>
+                <a:cs typeface="Arial"/>
+              </a:defRPr>
+            </a:pPr>
+            <a:r>
+              <a:rPr sz="1350" b="0">
+                <a:solidFill>
+                  <a:srgbClr val="A1A1AA"/>
+                </a:solidFill>
+                <a:latin typeface="Arial"/>
+                <a:ea typeface="Arial"/>
+                <a:cs typeface="Arial"/>
+              </a:rPr>
+              <a:t>A correct encoding must reproduce the intended value or its required rounded value.</a:t>
+            </a:r>
+          </a:p>
+        </p:txBody>
+      </p:sp>
+      <p:sp>
+        <p:nvSpPr>
+          <p:cNvPr id="6" name="">
+            <a:extLst xmlns:a="http://schemas.openxmlformats.org/drawingml/2006/main">
+              <a:ext uri="{FF2B5EF4-FFF2-40B4-BE49-F238E27FC236}">
+                <a16:creationId xmlns:a16="http://schemas.microsoft.com/office/drawing/2014/main" id="{E1FBC5BD-1F5D-42FA-AC83-E0BF862F4EDF}"/>
+              </a:ext>
+            </a:extLst>
+          </p:cNvPr>
+          <p:cNvSpPr>
+            <a:spLocks xmlns:a="http://schemas.openxmlformats.org/drawingml/2006/main" noGrp="1"/>
+          </p:cNvSpPr>
+          <p:nvPr/>
+        </p:nvSpPr>
+        <p:spPr>
+          <a:xfrm xmlns:a="http://schemas.openxmlformats.org/drawingml/2006/main">
+            <a:off x="10477500" y="6210300"/>
+            <a:ext cx="1000125" cy="219075"/>
+          </a:xfrm>
+          <a:prstGeom xmlns:a="http://schemas.openxmlformats.org/drawingml/2006/main" prst="rect">
+            <a:avLst/>
+          </a:prstGeom>
+          <a:noFill xmlns:a="http://schemas.openxmlformats.org/drawingml/2006/main"/>
+          <a:ln xmlns:a="http://schemas.openxmlformats.org/drawingml/2006/main" w="0">
+            <a:noFill/>
+          </a:ln>
+        </p:spPr>
+        <p:txBody>
+          <a:bodyPr xmlns:a="http://schemas.openxmlformats.org/drawingml/2006/main" anchor="t">
+            <a:normAutofit fontScale="79762"/>
+          </a:bodyPr>
+          <a:lstStyle xmlns:a="http://schemas.openxmlformats.org/drawingml/2006/main"/>
+          <a:p xmlns:a="http://schemas.openxmlformats.org/drawingml/2006/main">
+            <a:pPr>
+              <a:buNone/>
+              <a:defRPr sz="1050" b="0">
+                <a:solidFill>
+                  <a:srgbClr val="71717A"/>
+                </a:solidFill>
+                <a:latin typeface="Courier New"/>
+                <a:ea typeface="Courier New"/>
+                <a:cs typeface="Courier New"/>
+              </a:defRPr>
+            </a:pPr>
+            <a:r>
+              <a:rPr sz="1050" b="0">
+                <a:solidFill>
+                  <a:srgbClr val="71717A"/>
+                </a:solidFill>
+                <a:latin typeface="Courier New"/>
+                <a:ea typeface="Courier New"/>
+                <a:cs typeface="Courier New"/>
+              </a:rPr>
+              <a:t>20 / 20</a:t>
+            </a:r>
+          </a:p>
+        </p:txBody>
+      </p:sp>
+    </p:spTree>
+    <p:extLst>
+      <p:ext uri="{BB962C8B-B14F-4D97-AF65-F5344CB8AC3E}">
+        <p14:creationId xmlns:p14="http://schemas.microsoft.com/office/powerpoint/2010/main" val="10196595"/>
       </p:ext>
     </p:extLst>
   </p:cSld>
@@ -7440,6 +9210,7 @@
           <a:lstStyle xmlns:a="http://schemas.openxmlformats.org/drawingml/2006/main"/>
           <a:p xmlns:a="http://schemas.openxmlformats.org/drawingml/2006/main">
             <a:pPr>
+              <a:buNone/>
               <a:defRPr sz="1275" b="0">
                 <a:solidFill>
                   <a:srgbClr val="6EE7B7"/>
@@ -7497,6 +9268,7 @@
           <a:lstStyle xmlns:a="http://schemas.openxmlformats.org/drawingml/2006/main"/>
           <a:p xmlns:a="http://schemas.openxmlformats.org/drawingml/2006/main">
             <a:pPr>
+              <a:buNone/>
               <a:defRPr sz="3600" b="0">
                 <a:solidFill>
                   <a:srgbClr val="FAFAFA"/>
@@ -7554,6 +9326,7 @@
           <a:lstStyle xmlns:a="http://schemas.openxmlformats.org/drawingml/2006/main"/>
           <a:p xmlns:a="http://schemas.openxmlformats.org/drawingml/2006/main">
             <a:pPr>
+              <a:buNone/>
               <a:defRPr sz="1950" b="0">
                 <a:solidFill>
                   <a:srgbClr val="D4D4D8"/>
@@ -7582,6 +9355,7 @@
           </a:p>
           <a:p xmlns:a="http://schemas.openxmlformats.org/drawingml/2006/main">
             <a:pPr>
+              <a:buNone/>
               <a:defRPr sz="1950" b="0">
                 <a:solidFill>
                   <a:srgbClr val="D4D4D8"/>
@@ -7639,6 +9413,7 @@
           <a:lstStyle xmlns:a="http://schemas.openxmlformats.org/drawingml/2006/main"/>
           <a:p xmlns:a="http://schemas.openxmlformats.org/drawingml/2006/main">
             <a:pPr>
+              <a:buNone/>
               <a:defRPr sz="1650" b="0">
                 <a:solidFill>
                   <a:srgbClr val="A7F3D0"/>
@@ -7667,6 +9442,7 @@
           </a:p>
           <a:p xmlns:a="http://schemas.openxmlformats.org/drawingml/2006/main">
             <a:pPr>
+              <a:buNone/>
               <a:defRPr sz="1650" b="0">
                 <a:solidFill>
                   <a:srgbClr val="A7F3D0"/>
@@ -7690,6 +9466,7 @@
           </a:p>
           <a:p xmlns:a="http://schemas.openxmlformats.org/drawingml/2006/main">
             <a:pPr>
+              <a:buNone/>
               <a:defRPr sz="1650" b="0">
                 <a:solidFill>
                   <a:srgbClr val="A7F3D0"/>
@@ -7713,6 +9490,7 @@
           </a:p>
           <a:p xmlns:a="http://schemas.openxmlformats.org/drawingml/2006/main">
             <a:pPr>
+              <a:buNone/>
               <a:defRPr sz="1650" b="0">
                 <a:solidFill>
                   <a:srgbClr val="A7F3D0"/>
@@ -7741,6 +9519,7 @@
           </a:p>
           <a:p xmlns:a="http://schemas.openxmlformats.org/drawingml/2006/main">
             <a:pPr>
+              <a:buNone/>
               <a:defRPr sz="1650" b="0">
                 <a:solidFill>
                   <a:srgbClr val="A7F3D0"/>
@@ -7798,6 +9577,7 @@
           <a:lstStyle xmlns:a="http://schemas.openxmlformats.org/drawingml/2006/main"/>
           <a:p xmlns:a="http://schemas.openxmlformats.org/drawingml/2006/main">
             <a:pPr>
+              <a:buNone/>
               <a:defRPr sz="1350" b="0">
                 <a:solidFill>
                   <a:srgbClr val="A1A1AA"/>
@@ -7855,6 +9635,7 @@
           <a:lstStyle xmlns:a="http://schemas.openxmlformats.org/drawingml/2006/main"/>
           <a:p xmlns:a="http://schemas.openxmlformats.org/drawingml/2006/main">
             <a:pPr>
+              <a:buNone/>
               <a:defRPr sz="1050" b="0">
                 <a:solidFill>
                   <a:srgbClr val="71717A"/>
@@ -7873,7 +9654,7 @@
                 <a:ea typeface="Courier New"/>
                 <a:cs typeface="Courier New"/>
               </a:rPr>
-              <a:t>03 / 17</a:t>
+              <a:t>03 / 20</a:t>
             </a:r>
           </a:p>
         </p:txBody>
@@ -7941,6 +9722,7 @@
           <a:lstStyle xmlns:a="http://schemas.openxmlformats.org/drawingml/2006/main"/>
           <a:p xmlns:a="http://schemas.openxmlformats.org/drawingml/2006/main">
             <a:pPr>
+              <a:buNone/>
               <a:defRPr sz="1275" b="0">
                 <a:solidFill>
                   <a:srgbClr val="6EE7B7"/>
@@ -7998,6 +9780,7 @@
           <a:lstStyle xmlns:a="http://schemas.openxmlformats.org/drawingml/2006/main"/>
           <a:p xmlns:a="http://schemas.openxmlformats.org/drawingml/2006/main">
             <a:pPr>
+              <a:buNone/>
               <a:defRPr sz="3600" b="0">
                 <a:solidFill>
                   <a:srgbClr val="FAFAFA"/>
@@ -8055,6 +9838,7 @@
           <a:lstStyle xmlns:a="http://schemas.openxmlformats.org/drawingml/2006/main"/>
           <a:p xmlns:a="http://schemas.openxmlformats.org/drawingml/2006/main">
             <a:pPr>
+              <a:buNone/>
               <a:defRPr sz="1950" b="0">
                 <a:solidFill>
                   <a:srgbClr val="D4D4D8"/>
@@ -8083,6 +9867,7 @@
           </a:p>
           <a:p xmlns:a="http://schemas.openxmlformats.org/drawingml/2006/main">
             <a:pPr>
+              <a:buNone/>
               <a:defRPr sz="1950" b="0">
                 <a:solidFill>
                   <a:srgbClr val="D4D4D8"/>
@@ -8140,6 +9925,7 @@
           <a:lstStyle xmlns:a="http://schemas.openxmlformats.org/drawingml/2006/main"/>
           <a:p xmlns:a="http://schemas.openxmlformats.org/drawingml/2006/main">
             <a:pPr>
+              <a:buNone/>
               <a:defRPr sz="1650" b="0">
                 <a:solidFill>
                   <a:srgbClr val="A7F3D0"/>
@@ -8163,6 +9949,7 @@
           </a:p>
           <a:p xmlns:a="http://schemas.openxmlformats.org/drawingml/2006/main">
             <a:pPr>
+              <a:buNone/>
               <a:defRPr sz="1650" b="0">
                 <a:solidFill>
                   <a:srgbClr val="A7F3D0"/>
@@ -8186,6 +9973,7 @@
           </a:p>
           <a:p xmlns:a="http://schemas.openxmlformats.org/drawingml/2006/main">
             <a:pPr>
+              <a:buNone/>
               <a:defRPr sz="1650" b="0">
                 <a:solidFill>
                   <a:srgbClr val="A7F3D0"/>
@@ -8214,6 +10002,7 @@
           </a:p>
           <a:p xmlns:a="http://schemas.openxmlformats.org/drawingml/2006/main">
             <a:pPr>
+              <a:buNone/>
               <a:defRPr sz="1650" b="0">
                 <a:solidFill>
                   <a:srgbClr val="A7F3D0"/>
@@ -8271,6 +10060,7 @@
           <a:lstStyle xmlns:a="http://schemas.openxmlformats.org/drawingml/2006/main"/>
           <a:p xmlns:a="http://schemas.openxmlformats.org/drawingml/2006/main">
             <a:pPr>
+              <a:buNone/>
               <a:defRPr sz="1350" b="0">
                 <a:solidFill>
                   <a:srgbClr val="A1A1AA"/>
@@ -8328,6 +10118,7 @@
           <a:lstStyle xmlns:a="http://schemas.openxmlformats.org/drawingml/2006/main"/>
           <a:p xmlns:a="http://schemas.openxmlformats.org/drawingml/2006/main">
             <a:pPr>
+              <a:buNone/>
               <a:defRPr sz="1050" b="0">
                 <a:solidFill>
                   <a:srgbClr val="71717A"/>
@@ -8346,7 +10137,7 @@
                 <a:ea typeface="Courier New"/>
                 <a:cs typeface="Courier New"/>
               </a:rPr>
-              <a:t>04 / 17</a:t>
+              <a:t>04 / 20</a:t>
             </a:r>
           </a:p>
         </p:txBody>
@@ -8414,6 +10205,7 @@
           <a:lstStyle xmlns:a="http://schemas.openxmlformats.org/drawingml/2006/main"/>
           <a:p xmlns:a="http://schemas.openxmlformats.org/drawingml/2006/main">
             <a:pPr>
+              <a:buNone/>
               <a:defRPr sz="1275" b="0">
                 <a:solidFill>
                   <a:srgbClr val="6EE7B7"/>
@@ -8471,6 +10263,7 @@
           <a:lstStyle xmlns:a="http://schemas.openxmlformats.org/drawingml/2006/main"/>
           <a:p xmlns:a="http://schemas.openxmlformats.org/drawingml/2006/main">
             <a:pPr>
+              <a:buNone/>
               <a:defRPr sz="3600" b="0">
                 <a:solidFill>
                   <a:srgbClr val="FAFAFA"/>
@@ -8528,6 +10321,7 @@
           <a:lstStyle xmlns:a="http://schemas.openxmlformats.org/drawingml/2006/main"/>
           <a:p xmlns:a="http://schemas.openxmlformats.org/drawingml/2006/main">
             <a:pPr>
+              <a:buNone/>
               <a:defRPr sz="1950" b="0">
                 <a:solidFill>
                   <a:srgbClr val="D4D4D8"/>
@@ -8556,6 +10350,7 @@
           </a:p>
           <a:p xmlns:a="http://schemas.openxmlformats.org/drawingml/2006/main">
             <a:pPr>
+              <a:buNone/>
               <a:defRPr sz="1950" b="0">
                 <a:solidFill>
                   <a:srgbClr val="D4D4D8"/>
@@ -8613,6 +10408,7 @@
           <a:lstStyle xmlns:a="http://schemas.openxmlformats.org/drawingml/2006/main"/>
           <a:p xmlns:a="http://schemas.openxmlformats.org/drawingml/2006/main">
             <a:pPr>
+              <a:buNone/>
               <a:defRPr sz="1650" b="0">
                 <a:solidFill>
                   <a:srgbClr val="A7F3D0"/>
@@ -8641,6 +10437,7 @@
           </a:p>
           <a:p xmlns:a="http://schemas.openxmlformats.org/drawingml/2006/main">
             <a:pPr>
+              <a:buNone/>
               <a:defRPr sz="1650" b="0">
                 <a:solidFill>
                   <a:srgbClr val="A7F3D0"/>
@@ -8664,6 +10461,7 @@
           </a:p>
           <a:p xmlns:a="http://schemas.openxmlformats.org/drawingml/2006/main">
             <a:pPr>
+              <a:buNone/>
               <a:defRPr sz="1650" b="0">
                 <a:solidFill>
                   <a:srgbClr val="A7F3D0"/>
@@ -8687,6 +10485,7 @@
           </a:p>
           <a:p xmlns:a="http://schemas.openxmlformats.org/drawingml/2006/main">
             <a:pPr>
+              <a:buNone/>
               <a:defRPr sz="1650" b="0">
                 <a:solidFill>
                   <a:srgbClr val="A7F3D0"/>
@@ -8744,6 +10543,7 @@
           <a:lstStyle xmlns:a="http://schemas.openxmlformats.org/drawingml/2006/main"/>
           <a:p xmlns:a="http://schemas.openxmlformats.org/drawingml/2006/main">
             <a:pPr>
+              <a:buNone/>
               <a:defRPr sz="1350" b="0">
                 <a:solidFill>
                   <a:srgbClr val="A1A1AA"/>
@@ -8801,6 +10601,7 @@
           <a:lstStyle xmlns:a="http://schemas.openxmlformats.org/drawingml/2006/main"/>
           <a:p xmlns:a="http://schemas.openxmlformats.org/drawingml/2006/main">
             <a:pPr>
+              <a:buNone/>
               <a:defRPr sz="1050" b="0">
                 <a:solidFill>
                   <a:srgbClr val="71717A"/>
@@ -8819,7 +10620,7 @@
                 <a:ea typeface="Courier New"/>
                 <a:cs typeface="Courier New"/>
               </a:rPr>
-              <a:t>05 / 17</a:t>
+              <a:t>05 / 20</a:t>
             </a:r>
           </a:p>
         </p:txBody>
@@ -8887,6 +10688,7 @@
           <a:lstStyle xmlns:a="http://schemas.openxmlformats.org/drawingml/2006/main"/>
           <a:p xmlns:a="http://schemas.openxmlformats.org/drawingml/2006/main">
             <a:pPr>
+              <a:buNone/>
               <a:defRPr sz="1275" b="0">
                 <a:solidFill>
                   <a:srgbClr val="6EE7B7"/>
@@ -8944,6 +10746,7 @@
           <a:lstStyle xmlns:a="http://schemas.openxmlformats.org/drawingml/2006/main"/>
           <a:p xmlns:a="http://schemas.openxmlformats.org/drawingml/2006/main">
             <a:pPr>
+              <a:buNone/>
               <a:defRPr sz="3600" b="0">
                 <a:solidFill>
                   <a:srgbClr val="FAFAFA"/>
@@ -9001,6 +10804,7 @@
           <a:lstStyle xmlns:a="http://schemas.openxmlformats.org/drawingml/2006/main"/>
           <a:p xmlns:a="http://schemas.openxmlformats.org/drawingml/2006/main">
             <a:pPr>
+              <a:buNone/>
               <a:defRPr sz="1950" b="0">
                 <a:solidFill>
                   <a:srgbClr val="D4D4D8"/>
@@ -9029,6 +10833,7 @@
           </a:p>
           <a:p xmlns:a="http://schemas.openxmlformats.org/drawingml/2006/main">
             <a:pPr>
+              <a:buNone/>
               <a:defRPr sz="1950" b="0">
                 <a:solidFill>
                   <a:srgbClr val="D4D4D8"/>
@@ -9086,6 +10891,7 @@
           <a:lstStyle xmlns:a="http://schemas.openxmlformats.org/drawingml/2006/main"/>
           <a:p xmlns:a="http://schemas.openxmlformats.org/drawingml/2006/main">
             <a:pPr>
+              <a:buNone/>
               <a:defRPr sz="1650" b="0">
                 <a:solidFill>
                   <a:srgbClr val="A7F3D0"/>
@@ -9109,6 +10915,7 @@
           </a:p>
           <a:p xmlns:a="http://schemas.openxmlformats.org/drawingml/2006/main">
             <a:pPr>
+              <a:buNone/>
               <a:defRPr sz="1650" b="0">
                 <a:solidFill>
                   <a:srgbClr val="A7F3D0"/>
@@ -9132,6 +10939,7 @@
           </a:p>
           <a:p xmlns:a="http://schemas.openxmlformats.org/drawingml/2006/main">
             <a:pPr>
+              <a:buNone/>
               <a:defRPr sz="1650" b="0">
                 <a:solidFill>
                   <a:srgbClr val="A7F3D0"/>
@@ -9160,6 +10968,7 @@
           </a:p>
           <a:p xmlns:a="http://schemas.openxmlformats.org/drawingml/2006/main">
             <a:pPr>
+              <a:buNone/>
               <a:defRPr sz="1650" b="0">
                 <a:solidFill>
                   <a:srgbClr val="A7F3D0"/>
@@ -9188,6 +10997,7 @@
           </a:p>
           <a:p xmlns:a="http://schemas.openxmlformats.org/drawingml/2006/main">
             <a:pPr>
+              <a:buNone/>
               <a:defRPr sz="1650" b="0">
                 <a:solidFill>
                   <a:srgbClr val="A7F3D0"/>
@@ -9245,6 +11055,7 @@
           <a:lstStyle xmlns:a="http://schemas.openxmlformats.org/drawingml/2006/main"/>
           <a:p xmlns:a="http://schemas.openxmlformats.org/drawingml/2006/main">
             <a:pPr>
+              <a:buNone/>
               <a:defRPr sz="1350" b="0">
                 <a:solidFill>
                   <a:srgbClr val="A1A1AA"/>
@@ -9302,6 +11113,7 @@
           <a:lstStyle xmlns:a="http://schemas.openxmlformats.org/drawingml/2006/main"/>
           <a:p xmlns:a="http://schemas.openxmlformats.org/drawingml/2006/main">
             <a:pPr>
+              <a:buNone/>
               <a:defRPr sz="1050" b="0">
                 <a:solidFill>
                   <a:srgbClr val="71717A"/>
@@ -9320,7 +11132,7 @@
                 <a:ea typeface="Courier New"/>
                 <a:cs typeface="Courier New"/>
               </a:rPr>
-              <a:t>06 / 17</a:t>
+              <a:t>06 / 20</a:t>
             </a:r>
           </a:p>
         </p:txBody>
@@ -9388,6 +11200,7 @@
           <a:lstStyle xmlns:a="http://schemas.openxmlformats.org/drawingml/2006/main"/>
           <a:p xmlns:a="http://schemas.openxmlformats.org/drawingml/2006/main">
             <a:pPr>
+              <a:buNone/>
               <a:defRPr sz="1275" b="0">
                 <a:solidFill>
                   <a:srgbClr val="6EE7B7"/>
@@ -9445,6 +11258,7 @@
           <a:lstStyle xmlns:a="http://schemas.openxmlformats.org/drawingml/2006/main"/>
           <a:p xmlns:a="http://schemas.openxmlformats.org/drawingml/2006/main">
             <a:pPr>
+              <a:buNone/>
               <a:defRPr sz="3600" b="0">
                 <a:solidFill>
                   <a:srgbClr val="FAFAFA"/>
@@ -9502,6 +11316,7 @@
           <a:lstStyle xmlns:a="http://schemas.openxmlformats.org/drawingml/2006/main"/>
           <a:p xmlns:a="http://schemas.openxmlformats.org/drawingml/2006/main">
             <a:pPr>
+              <a:buNone/>
               <a:defRPr sz="1950" b="0">
                 <a:solidFill>
                   <a:srgbClr val="D4D4D8"/>
@@ -9530,6 +11345,7 @@
           </a:p>
           <a:p xmlns:a="http://schemas.openxmlformats.org/drawingml/2006/main">
             <a:pPr>
+              <a:buNone/>
               <a:defRPr sz="1950" b="0">
                 <a:solidFill>
                   <a:srgbClr val="D4D4D8"/>
@@ -9587,6 +11403,7 @@
           <a:lstStyle xmlns:a="http://schemas.openxmlformats.org/drawingml/2006/main"/>
           <a:p xmlns:a="http://schemas.openxmlformats.org/drawingml/2006/main">
             <a:pPr>
+              <a:buNone/>
               <a:defRPr sz="1650" b="0">
                 <a:solidFill>
                   <a:srgbClr val="A7F3D0"/>
@@ -9615,6 +11432,7 @@
           </a:p>
           <a:p xmlns:a="http://schemas.openxmlformats.org/drawingml/2006/main">
             <a:pPr>
+              <a:buNone/>
               <a:defRPr sz="1650" b="0">
                 <a:solidFill>
                   <a:srgbClr val="A7F3D0"/>
@@ -9638,6 +11456,7 @@
           </a:p>
           <a:p xmlns:a="http://schemas.openxmlformats.org/drawingml/2006/main">
             <a:pPr>
+              <a:buNone/>
               <a:defRPr sz="1650" b="0">
                 <a:solidFill>
                   <a:srgbClr val="A7F3D0"/>
@@ -9666,6 +11485,7 @@
           </a:p>
           <a:p xmlns:a="http://schemas.openxmlformats.org/drawingml/2006/main">
             <a:pPr>
+              <a:buNone/>
               <a:defRPr sz="1650" b="0">
                 <a:solidFill>
                   <a:srgbClr val="A7F3D0"/>
@@ -9723,6 +11543,7 @@
           <a:lstStyle xmlns:a="http://schemas.openxmlformats.org/drawingml/2006/main"/>
           <a:p xmlns:a="http://schemas.openxmlformats.org/drawingml/2006/main">
             <a:pPr>
+              <a:buNone/>
               <a:defRPr sz="1350" b="0">
                 <a:solidFill>
                   <a:srgbClr val="A1A1AA"/>
@@ -9780,6 +11601,7 @@
           <a:lstStyle xmlns:a="http://schemas.openxmlformats.org/drawingml/2006/main"/>
           <a:p xmlns:a="http://schemas.openxmlformats.org/drawingml/2006/main">
             <a:pPr>
+              <a:buNone/>
               <a:defRPr sz="1050" b="0">
                 <a:solidFill>
                   <a:srgbClr val="71717A"/>
@@ -9798,7 +11620,7 @@
                 <a:ea typeface="Courier New"/>
                 <a:cs typeface="Courier New"/>
               </a:rPr>
-              <a:t>07 / 17</a:t>
+              <a:t>07 / 20</a:t>
             </a:r>
           </a:p>
         </p:txBody>
@@ -9866,6 +11688,7 @@
           <a:lstStyle xmlns:a="http://schemas.openxmlformats.org/drawingml/2006/main"/>
           <a:p xmlns:a="http://schemas.openxmlformats.org/drawingml/2006/main">
             <a:pPr>
+              <a:buNone/>
               <a:defRPr sz="1275" b="0">
                 <a:solidFill>
                   <a:srgbClr val="6EE7B7"/>
@@ -9923,6 +11746,7 @@
           <a:lstStyle xmlns:a="http://schemas.openxmlformats.org/drawingml/2006/main"/>
           <a:p xmlns:a="http://schemas.openxmlformats.org/drawingml/2006/main">
             <a:pPr>
+              <a:buNone/>
               <a:defRPr sz="3600" b="0">
                 <a:solidFill>
                   <a:srgbClr val="FAFAFA"/>
@@ -9980,6 +11804,7 @@
           <a:lstStyle xmlns:a="http://schemas.openxmlformats.org/drawingml/2006/main"/>
           <a:p xmlns:a="http://schemas.openxmlformats.org/drawingml/2006/main">
             <a:pPr>
+              <a:buNone/>
               <a:defRPr sz="1950" b="0">
                 <a:solidFill>
                   <a:srgbClr val="D4D4D8"/>
@@ -10008,6 +11833,7 @@
           </a:p>
           <a:p xmlns:a="http://schemas.openxmlformats.org/drawingml/2006/main">
             <a:pPr>
+              <a:buNone/>
               <a:defRPr sz="1950" b="0">
                 <a:solidFill>
                   <a:srgbClr val="D4D4D8"/>
@@ -10065,6 +11891,7 @@
           <a:lstStyle xmlns:a="http://schemas.openxmlformats.org/drawingml/2006/main"/>
           <a:p xmlns:a="http://schemas.openxmlformats.org/drawingml/2006/main">
             <a:pPr>
+              <a:buNone/>
               <a:defRPr sz="1650" b="0">
                 <a:solidFill>
                   <a:srgbClr val="A7F3D0"/>
@@ -10088,6 +11915,7 @@
           </a:p>
           <a:p xmlns:a="http://schemas.openxmlformats.org/drawingml/2006/main">
             <a:pPr>
+              <a:buNone/>
               <a:defRPr sz="1650" b="0">
                 <a:solidFill>
                   <a:srgbClr val="A7F3D0"/>
@@ -10116,6 +11944,7 @@
           </a:p>
           <a:p xmlns:a="http://schemas.openxmlformats.org/drawingml/2006/main">
             <a:pPr>
+              <a:buNone/>
               <a:defRPr sz="1650" b="0">
                 <a:solidFill>
                   <a:srgbClr val="A7F3D0"/>
@@ -10139,6 +11968,7 @@
           </a:p>
           <a:p xmlns:a="http://schemas.openxmlformats.org/drawingml/2006/main">
             <a:pPr>
+              <a:buNone/>
               <a:defRPr sz="1650" b="0">
                 <a:solidFill>
                   <a:srgbClr val="A7F3D0"/>
@@ -10196,6 +12026,7 @@
           <a:lstStyle xmlns:a="http://schemas.openxmlformats.org/drawingml/2006/main"/>
           <a:p xmlns:a="http://schemas.openxmlformats.org/drawingml/2006/main">
             <a:pPr>
+              <a:buNone/>
               <a:defRPr sz="1350" b="0">
                 <a:solidFill>
                   <a:srgbClr val="A1A1AA"/>
@@ -10253,6 +12084,7 @@
           <a:lstStyle xmlns:a="http://schemas.openxmlformats.org/drawingml/2006/main"/>
           <a:p xmlns:a="http://schemas.openxmlformats.org/drawingml/2006/main">
             <a:pPr>
+              <a:buNone/>
               <a:defRPr sz="1050" b="0">
                 <a:solidFill>
                   <a:srgbClr val="71717A"/>
@@ -10271,7 +12103,7 @@
                 <a:ea typeface="Courier New"/>
                 <a:cs typeface="Courier New"/>
               </a:rPr>
-              <a:t>08 / 17</a:t>
+              <a:t>08 / 20</a:t>
             </a:r>
           </a:p>
         </p:txBody>
@@ -10339,6 +12171,7 @@
           <a:lstStyle xmlns:a="http://schemas.openxmlformats.org/drawingml/2006/main"/>
           <a:p xmlns:a="http://schemas.openxmlformats.org/drawingml/2006/main">
             <a:pPr>
+              <a:buNone/>
               <a:defRPr sz="1275" b="0">
                 <a:solidFill>
                   <a:srgbClr val="6EE7B7"/>
@@ -10396,6 +12229,7 @@
           <a:lstStyle xmlns:a="http://schemas.openxmlformats.org/drawingml/2006/main"/>
           <a:p xmlns:a="http://schemas.openxmlformats.org/drawingml/2006/main">
             <a:pPr>
+              <a:buNone/>
               <a:defRPr sz="3600" b="0">
                 <a:solidFill>
                   <a:srgbClr val="FAFAFA"/>
@@ -10453,6 +12287,7 @@
           <a:lstStyle xmlns:a="http://schemas.openxmlformats.org/drawingml/2006/main"/>
           <a:p xmlns:a="http://schemas.openxmlformats.org/drawingml/2006/main">
             <a:pPr>
+              <a:buNone/>
               <a:defRPr sz="1950" b="0">
                 <a:solidFill>
                   <a:srgbClr val="D4D4D8"/>
@@ -10481,6 +12316,7 @@
           </a:p>
           <a:p xmlns:a="http://schemas.openxmlformats.org/drawingml/2006/main">
             <a:pPr>
+              <a:buNone/>
               <a:defRPr sz="1950" b="0">
                 <a:solidFill>
                   <a:srgbClr val="D4D4D8"/>
@@ -10538,6 +12374,7 @@
           <a:lstStyle xmlns:a="http://schemas.openxmlformats.org/drawingml/2006/main"/>
           <a:p xmlns:a="http://schemas.openxmlformats.org/drawingml/2006/main">
             <a:pPr>
+              <a:buNone/>
               <a:defRPr sz="1650" b="0">
                 <a:solidFill>
                   <a:srgbClr val="A7F3D0"/>
@@ -10561,6 +12398,7 @@
           </a:p>
           <a:p xmlns:a="http://schemas.openxmlformats.org/drawingml/2006/main">
             <a:pPr>
+              <a:buNone/>
               <a:defRPr sz="1650" b="0">
                 <a:solidFill>
                   <a:srgbClr val="A7F3D0"/>
@@ -10584,6 +12422,7 @@
           </a:p>
           <a:p xmlns:a="http://schemas.openxmlformats.org/drawingml/2006/main">
             <a:pPr>
+              <a:buNone/>
               <a:defRPr sz="1650" b="0">
                 <a:solidFill>
                   <a:srgbClr val="A7F3D0"/>
@@ -10612,6 +12451,7 @@
           </a:p>
           <a:p xmlns:a="http://schemas.openxmlformats.org/drawingml/2006/main">
             <a:pPr>
+              <a:buNone/>
               <a:defRPr sz="1650" b="0">
                 <a:solidFill>
                   <a:srgbClr val="A7F3D0"/>
@@ -10640,6 +12480,7 @@
           </a:p>
           <a:p xmlns:a="http://schemas.openxmlformats.org/drawingml/2006/main">
             <a:pPr>
+              <a:buNone/>
               <a:defRPr sz="1650" b="0">
                 <a:solidFill>
                   <a:srgbClr val="A7F3D0"/>
@@ -10697,6 +12538,7 @@
           <a:lstStyle xmlns:a="http://schemas.openxmlformats.org/drawingml/2006/main"/>
           <a:p xmlns:a="http://schemas.openxmlformats.org/drawingml/2006/main">
             <a:pPr>
+              <a:buNone/>
               <a:defRPr sz="1350" b="0">
                 <a:solidFill>
                   <a:srgbClr val="A1A1AA"/>
@@ -10754,6 +12596,7 @@
           <a:lstStyle xmlns:a="http://schemas.openxmlformats.org/drawingml/2006/main"/>
           <a:p xmlns:a="http://schemas.openxmlformats.org/drawingml/2006/main">
             <a:pPr>
+              <a:buNone/>
               <a:defRPr sz="1050" b="0">
                 <a:solidFill>
                   <a:srgbClr val="71717A"/>
@@ -10772,7 +12615,7 @@
                 <a:ea typeface="Courier New"/>
                 <a:cs typeface="Courier New"/>
               </a:rPr>
-              <a:t>09 / 17</a:t>
+              <a:t>09 / 20</a:t>
             </a:r>
           </a:p>
         </p:txBody>

--- a/public/presentations/CS211_Recitation_3.pptx
+++ b/public/presentations/CS211_Recitation_3.pptx
@@ -2,32 +2,34 @@
 <file path=ppt/presentation.xml><?xml version="1.0" encoding="utf-8"?>
 <p:presentation xmlns:p="http://schemas.openxmlformats.org/presentationml/2006/main">
   <p:sldMasterIdLst>
-    <p:sldMasterId xmlns:r="http://schemas.openxmlformats.org/officeDocument/2006/relationships" id="2147483648" r:id="Ra47e6fe55a134014"/>
+    <p:sldMasterId xmlns:r="http://schemas.openxmlformats.org/officeDocument/2006/relationships" id="2147483648" r:id="R8d68ad4fd84a47cc"/>
   </p:sldMasterIdLst>
   <p:notesMasterIdLst>
-    <p:notesMasterId xmlns:r="http://schemas.openxmlformats.org/officeDocument/2006/relationships" r:id="Rd3b23f1bb00e4b8d"/>
+    <p:notesMasterId xmlns:r="http://schemas.openxmlformats.org/officeDocument/2006/relationships" r:id="Rf14b7f2b99254511"/>
   </p:notesMasterIdLst>
   <p:sldIdLst>
-    <p:sldId xmlns:r="http://schemas.openxmlformats.org/officeDocument/2006/relationships" id="256" r:id="R4600a745c4114dc6"/>
-    <p:sldId xmlns:r="http://schemas.openxmlformats.org/officeDocument/2006/relationships" id="257" r:id="Rfbd2ab6f0c9b4982"/>
-    <p:sldId xmlns:r="http://schemas.openxmlformats.org/officeDocument/2006/relationships" id="258" r:id="R27b11eb247a749a8"/>
-    <p:sldId xmlns:r="http://schemas.openxmlformats.org/officeDocument/2006/relationships" id="259" r:id="Rf0d345b8f1a145d5"/>
-    <p:sldId xmlns:r="http://schemas.openxmlformats.org/officeDocument/2006/relationships" id="260" r:id="R8b0d79b20a25400a"/>
-    <p:sldId xmlns:r="http://schemas.openxmlformats.org/officeDocument/2006/relationships" id="261" r:id="R8e12034dd6864da2"/>
-    <p:sldId xmlns:r="http://schemas.openxmlformats.org/officeDocument/2006/relationships" id="262" r:id="R2dabec76ca8845d8"/>
-    <p:sldId xmlns:r="http://schemas.openxmlformats.org/officeDocument/2006/relationships" id="263" r:id="R1aaed51860dc4a9f"/>
-    <p:sldId xmlns:r="http://schemas.openxmlformats.org/officeDocument/2006/relationships" id="264" r:id="R6a5f4c0583294f71"/>
-    <p:sldId xmlns:r="http://schemas.openxmlformats.org/officeDocument/2006/relationships" id="265" r:id="Rc64204b446d54df8"/>
-    <p:sldId xmlns:r="http://schemas.openxmlformats.org/officeDocument/2006/relationships" id="266" r:id="R80e53087e4004862"/>
-    <p:sldId xmlns:r="http://schemas.openxmlformats.org/officeDocument/2006/relationships" id="267" r:id="R013ff6a4f2fe4cbe"/>
-    <p:sldId xmlns:r="http://schemas.openxmlformats.org/officeDocument/2006/relationships" id="268" r:id="R02cddb29a9df4149"/>
-    <p:sldId xmlns:r="http://schemas.openxmlformats.org/officeDocument/2006/relationships" id="269" r:id="R4b94b08c36fd40c3"/>
-    <p:sldId xmlns:r="http://schemas.openxmlformats.org/officeDocument/2006/relationships" id="270" r:id="Re6e10f2a9a304161"/>
-    <p:sldId xmlns:r="http://schemas.openxmlformats.org/officeDocument/2006/relationships" id="271" r:id="Rbde8424f5d854cb5"/>
-    <p:sldId xmlns:r="http://schemas.openxmlformats.org/officeDocument/2006/relationships" id="272" r:id="R43c57c166f024dbe"/>
-    <p:sldId xmlns:r="http://schemas.openxmlformats.org/officeDocument/2006/relationships" id="273" r:id="Ra6d0bdf5fc754bdc"/>
-    <p:sldId xmlns:r="http://schemas.openxmlformats.org/officeDocument/2006/relationships" id="274" r:id="Rd577631298fa4770"/>
-    <p:sldId xmlns:r="http://schemas.openxmlformats.org/officeDocument/2006/relationships" id="275" r:id="Ra16db4aea30a4f8b"/>
+    <p:sldId xmlns:r="http://schemas.openxmlformats.org/officeDocument/2006/relationships" id="256" r:id="R5267d73aa5874270"/>
+    <p:sldId xmlns:r="http://schemas.openxmlformats.org/officeDocument/2006/relationships" id="257" r:id="R4aae4a14d1454a16"/>
+    <p:sldId xmlns:r="http://schemas.openxmlformats.org/officeDocument/2006/relationships" id="258" r:id="Rc0f65d20b6634bdb"/>
+    <p:sldId xmlns:r="http://schemas.openxmlformats.org/officeDocument/2006/relationships" id="259" r:id="Rd38053d8d9e74084"/>
+    <p:sldId xmlns:r="http://schemas.openxmlformats.org/officeDocument/2006/relationships" id="260" r:id="R3b9dd25fa84345d1"/>
+    <p:sldId xmlns:r="http://schemas.openxmlformats.org/officeDocument/2006/relationships" id="261" r:id="R6b5d7bf35bdf495a"/>
+    <p:sldId xmlns:r="http://schemas.openxmlformats.org/officeDocument/2006/relationships" id="262" r:id="R2ec18e9e512745e0"/>
+    <p:sldId xmlns:r="http://schemas.openxmlformats.org/officeDocument/2006/relationships" id="263" r:id="R1f840f1fbef04f32"/>
+    <p:sldId xmlns:r="http://schemas.openxmlformats.org/officeDocument/2006/relationships" id="264" r:id="Rfecf66dcab394e97"/>
+    <p:sldId xmlns:r="http://schemas.openxmlformats.org/officeDocument/2006/relationships" id="265" r:id="R60723292eea841aa"/>
+    <p:sldId xmlns:r="http://schemas.openxmlformats.org/officeDocument/2006/relationships" id="266" r:id="Re1f14d0166f34c45"/>
+    <p:sldId xmlns:r="http://schemas.openxmlformats.org/officeDocument/2006/relationships" id="267" r:id="R7fb7ed0b61e149be"/>
+    <p:sldId xmlns:r="http://schemas.openxmlformats.org/officeDocument/2006/relationships" id="268" r:id="Rc9360792d54144b3"/>
+    <p:sldId xmlns:r="http://schemas.openxmlformats.org/officeDocument/2006/relationships" id="269" r:id="R194cd94b0dce415d"/>
+    <p:sldId xmlns:r="http://schemas.openxmlformats.org/officeDocument/2006/relationships" id="270" r:id="R27ffca7f438c4ed5"/>
+    <p:sldId xmlns:r="http://schemas.openxmlformats.org/officeDocument/2006/relationships" id="271" r:id="Rc8e7e17d97f643df"/>
+    <p:sldId xmlns:r="http://schemas.openxmlformats.org/officeDocument/2006/relationships" id="272" r:id="Rf2a99ac22aca4a16"/>
+    <p:sldId xmlns:r="http://schemas.openxmlformats.org/officeDocument/2006/relationships" id="273" r:id="Rd4ee585781d84149"/>
+    <p:sldId xmlns:r="http://schemas.openxmlformats.org/officeDocument/2006/relationships" id="274" r:id="Re9e87104bc05434b"/>
+    <p:sldId xmlns:r="http://schemas.openxmlformats.org/officeDocument/2006/relationships" id="275" r:id="Rb2e27981acfa43a2"/>
+    <p:sldId xmlns:r="http://schemas.openxmlformats.org/officeDocument/2006/relationships" id="276" r:id="R188c15c14f384b7c"/>
+    <p:sldId xmlns:r="http://schemas.openxmlformats.org/officeDocument/2006/relationships" id="277" r:id="Rf43030d33e9541e3"/>
   </p:sldIdLst>
   <p:sldSz cx="12192000" cy="6858000"/>
   <p:notesSz cx="6858000" cy="9144000"/>
@@ -461,7 +463,7 @@
           <a:lstStyle xmlns:a="http://schemas.openxmlformats.org/drawingml/2006/main"/>
           <a:p xmlns:a="http://schemas.openxmlformats.org/drawingml/2006/main">
             <a:r>
-              <a:t>Suggested 50-minute pacing: binary place values and fields 7 min; normal values 10 min; subnormals and the boundary 10 min; decoding and encoding practice 10 min; rounding and spacing 5 min; HW3 preview and recap 8 min. The HW3 details are based on the professor’s description supplied by the TA; the assignment is not officially posted. Source: lecture 6.</a:t>
+              <a:t>Suggested 50-minute pacing: binary place values and fields 7 min; normal values 10 min; subnormals and the boundary 14 min; decoding and encoding practice 8 min; rounding and spacing 4 min; HW3 preview and recap 7 min. Pause after the subnormal step table and ask students to name the next value after 7/32. The HW3 details are based on the professor’s description supplied by the TA; the assignment is not officially posted. Source: lecture 6.</a:t>
             </a:r>
           </a:p>
         </p:txBody>
@@ -531,7 +533,7 @@
           <a:lstStyle xmlns:a="http://schemas.openxmlformats.org/drawingml/2006/main"/>
           <a:p xmlns:a="http://schemas.openxmlformats.org/drawingml/2006/main">
             <a:r>
-              <a:t>Use the 3-exponent-bit, bias-3, 3-fraction-bit practice format. Largest subnormal is F=7, giving 7/32. Smallest normal is E=1,F=0, giving 2^(1−3)=1/4. This illustrates gradual underflow.</a:t>
+              <a:t>Derive the step: one fraction unit is 1/8; multiplying by 2^-2=1/4 gives 1/32. For this practice format, E=0,F=0 is zero and E=0,F=1..7 are positive subnormals. Let students answer 8/32=1/4 before the boundary slide. Source: lecture 6 subnormal equation.</a:t>
             </a:r>
           </a:p>
         </p:txBody>
@@ -601,7 +603,7 @@
           <a:lstStyle xmlns:a="http://schemas.openxmlformats.org/drawingml/2006/main"/>
           <a:p xmlns:a="http://schemas.openxmlformats.org/drawingml/2006/main">
             <a:r>
-              <a:t>Allow two to three minutes. A is normal: E=2,F=4, value (1+4/8)×2^-1=3/4. B is subnormal: E=0,F=3, value 3/32. Ask students to name the equation before calculating.</a:t>
+              <a:t>Keep the calculation concrete: 1/8=4/32, so F=4. Decode using 0.100 binary times 2^-2: 1/2 times 1/4 is 1/8. Ask why E is zero and why F is four. Source: lecture 6 subnormal equation.</a:t>
             </a:r>
           </a:p>
         </p:txBody>
@@ -671,7 +673,7 @@
           <a:lstStyle xmlns:a="http://schemas.openxmlformats.org/drawingml/2006/main"/>
           <a:p xmlns:a="http://schemas.openxmlformats.org/drawingml/2006/main">
             <a:r>
-              <a:t>Have students explain why B is not (1+3/8)×2^-3. The exponent for subnormals is fixed at 1−bias=-2, and the leading 1 is absent.</a:t>
+              <a:t>Link back to the question on the previous step table. The step from 7/32 to 8/32 is 1/32, matching the subnormal spacing. E=0 does not mean exponent −3; both values use 2^-2. Source: lecture 6 normal and subnormal equations.</a:t>
             </a:r>
           </a:p>
         </p:txBody>
@@ -741,7 +743,7 @@
           <a:lstStyle xmlns:a="http://schemas.openxmlformats.org/drawingml/2006/main"/>
           <a:p xmlns:a="http://schemas.openxmlformats.org/drawingml/2006/main">
             <a:r>
-              <a:t>Give two minutes. Both examples are exactly representable, so no rounding rule is needed. Ask students to check results by substituting E and F into the appropriate formula.</a:t>
+              <a:t>Allow two to three minutes. A is normal: E=2,F=4, value (1+4/8)×2^-1=3/4. B is subnormal: E=0,F=3, value 3/32. Ask students to name the equation before calculating.</a:t>
             </a:r>
           </a:p>
         </p:txBody>
@@ -811,7 +813,7 @@
           <a:lstStyle xmlns:a="http://schemas.openxmlformats.org/drawingml/2006/main"/>
           <a:p xmlns:a="http://schemas.openxmlformats.org/drawingml/2006/main">
             <a:r>
-              <a:t>Do not reveal until students have tried both. Emphasize that E=0 is a category marker here, not the unbiased exponent. E=3 represents true exponent zero because bias is three.</a:t>
+              <a:t>Have students explain why B is not (1+3/8)×2^-3. The exponent for subnormals is fixed at 1−bias=-2, and the leading 1 is absent.</a:t>
             </a:r>
           </a:p>
         </p:txBody>
@@ -881,7 +883,7 @@
           <a:lstStyle xmlns:a="http://schemas.openxmlformats.org/drawingml/2006/main"/>
           <a:p xmlns:a="http://schemas.openxmlformats.org/drawingml/2006/main">
             <a:r>
-              <a:t>The future homework description does not specify rounding, so do not teach truncation or nearest as a required rule. Here E=1 for both nearby normals. 5/16=0.3125, 11/32=0.34375, and 1/3≈0.3333. This replaces the earlier abstract associativity slide with a representation example directly tied to the professor's stated learning goal.</a:t>
+              <a:t>Give two minutes. Both examples are exactly representable, so no rounding rule is needed. Ask students to check results by substituting E and F into the appropriate formula.</a:t>
             </a:r>
           </a:p>
         </p:txBody>
@@ -951,7 +953,7 @@
           <a:lstStyle xmlns:a="http://schemas.openxmlformats.org/drawingml/2006/main"/>
           <a:p xmlns:a="http://schemas.openxmlformats.org/drawingml/2006/main">
             <a:r>
-              <a:t>For normals with fixed E, incrementing F by one changes the value by 2^(E−bias)/8. Show how this connects to the rounding slide and lecture 6’s discussion of gaps between floats.</a:t>
+              <a:t>Do not reveal until students have tried both. Emphasize that E=0 is a category marker here, not the unbiased exponent. E=3 represents true exponent zero because bias is three.</a:t>
             </a:r>
           </a:p>
         </p:txBody>
@@ -1021,7 +1023,7 @@
           <a:lstStyle xmlns:a="http://schemas.openxmlformats.org/drawingml/2006/main"/>
           <a:p xmlns:a="http://schemas.openxmlformats.org/drawingml/2006/main">
             <a:r>
-              <a:t>Based on the professor’s preview supplied by the TA. The intended command-line inputs are exponent bits, bias, significand bits, numerator, and denominator, in that order. The output contains the exponent and significand field values. Use 5/2 as a new teaching example. The final handout may add input and rounding details.</a:t>
+              <a:t>The future homework description does not specify rounding, so do not teach truncation or nearest as a required rule. Here E=1 for both nearby normals. 5/16=0.3125, 11/32=0.34375, and 1/3≈0.3333. This replaces the earlier abstract associativity slide with a representation example directly tied to the professor's stated learning goal.</a:t>
             </a:r>
           </a:p>
         </p:txBody>
@@ -1091,7 +1093,7 @@
           <a:lstStyle xmlns:a="http://schemas.openxmlformats.org/drawingml/2006/main"/>
           <a:p xmlns:a="http://schemas.openxmlformats.org/drawingml/2006/main">
             <a:r>
-              <a:t>This example is mathematically exact and uses the planned input order. Important TA note: the supplied draft solution computes the normal significand as (numerator &lt;&lt; sig_bits)/denominator − 2^sig_bits without scaling by 2^power_of_two. For these inputs that draft gives F=12, outside the three-bit range, rather than F=2. Do not present that draft code as a correct answer key until the normal path is fixed. Source: professor’s preview and lecture 6 normal-value equation.</a:t>
+              <a:t>For normals with fixed E, incrementing F by one changes the value by 2^(E−bias)/8. Show how this connects to the rounding slide and lecture 6’s discussion of gaps between floats.</a:t>
             </a:r>
           </a:p>
         </p:txBody>
@@ -1161,7 +1163,7 @@
           <a:lstStyle xmlns:a="http://schemas.openxmlformats.org/drawingml/2006/main"/>
           <a:p xmlns:a="http://schemas.openxmlformats.org/drawingml/2006/main">
             <a:r>
-              <a:t>Here p is the number of significand bits. For exact examples, solve the equation algebraically. The eventual homework may specify how to round values that fall between encodings, so do not assume a rounding rule yet. This is a conceptual approach, not a copy of the unreleased source code. Source: professor’s preview and lecture 6 equations.</a:t>
+              <a:t>Based on the professor’s preview supplied by the TA. The intended command-line inputs are exponent bits, bias, significand bits, numerator, and denominator, in that order. The output contains the exponent and significand field values. Use 5/2 as a new teaching example. The final handout may add input and rounding details.</a:t>
             </a:r>
           </a:p>
         </p:txBody>
@@ -1301,6 +1303,146 @@
           <a:lstStyle xmlns:a="http://schemas.openxmlformats.org/drawingml/2006/main"/>
           <a:p xmlns:a="http://schemas.openxmlformats.org/drawingml/2006/main">
             <a:r>
+              <a:t>This example is mathematically exact and uses the planned input order. Important TA note: the supplied draft solution computes the normal significand as (numerator &lt;&lt; sig_bits)/denominator − 2^sig_bits without scaling by 2^power_of_two. For these inputs that draft gives F=12, outside the three-bit range, rather than F=2. Do not present that draft code as a correct answer key until the normal path is fixed. Source: professor’s preview and lecture 6 normal-value equation.</a:t>
+            </a:r>
+          </a:p>
+        </p:txBody>
+      </p:sp>
+      <p:sp>
+        <p:nvSpPr>
+          <p:cNvPr id="4" name="Slide Number Placeholder 3"/>
+          <p:cNvSpPr>
+            <a:spLocks xmlns:a="http://schemas.openxmlformats.org/drawingml/2006/main" noGrp="1"/>
+          </p:cNvSpPr>
+          <p:nvPr>
+            <p:ph type="sldNum" idx="5"/>
+          </p:nvPr>
+        </p:nvSpPr>
+        <p:spPr/>
+        <p:txBody>
+          <a:bodyPr xmlns:a="http://schemas.openxmlformats.org/drawingml/2006/main"/>
+          <a:lstStyle xmlns:a="http://schemas.openxmlformats.org/drawingml/2006/main"/>
+          <a:p xmlns:a="http://schemas.openxmlformats.org/drawingml/2006/main"/>
+        </p:txBody>
+      </p:sp>
+    </p:spTree>
+  </p:cSld>
+  <p:clrMapOvr>
+    <a:masterClrMapping xmlns:a="http://schemas.openxmlformats.org/drawingml/2006/main"/>
+  </p:clrMapOvr>
+</p:notes>
+</file>
+
+<file path=ppt/notesSlides/notesSlide21.xml><?xml version="1.0" encoding="utf-8"?>
+<p:notes xmlns:p="http://schemas.openxmlformats.org/presentationml/2006/main">
+  <p:cSld>
+    <p:spTree>
+      <p:nvGrpSpPr>
+        <p:cNvPr id="1" name=""/>
+        <p:cNvGrpSpPr/>
+        <p:nvPr/>
+      </p:nvGrpSpPr>
+      <p:grpSpPr>
+        <a:xfrm xmlns:a="http://schemas.openxmlformats.org/drawingml/2006/main"/>
+      </p:grpSpPr>
+      <p:sp>
+        <p:nvSpPr>
+          <p:cNvPr id="2" name="Slide Image Placeholder 1"/>
+          <p:cNvSpPr>
+            <a:spLocks xmlns:a="http://schemas.openxmlformats.org/drawingml/2006/main" noGrp="1"/>
+          </p:cNvSpPr>
+          <p:nvPr>
+            <p:ph type="sldImg" idx="0"/>
+          </p:nvPr>
+        </p:nvSpPr>
+        <p:spPr/>
+      </p:sp>
+      <p:sp>
+        <p:nvSpPr>
+          <p:cNvPr id="3" name="Notes Placeholder 2"/>
+          <p:cNvSpPr>
+            <a:spLocks xmlns:a="http://schemas.openxmlformats.org/drawingml/2006/main" noGrp="1"/>
+          </p:cNvSpPr>
+          <p:nvPr>
+            <p:ph type="body" idx="1"/>
+          </p:nvPr>
+        </p:nvSpPr>
+        <p:spPr/>
+        <p:txBody>
+          <a:bodyPr xmlns:a="http://schemas.openxmlformats.org/drawingml/2006/main"/>
+          <a:lstStyle xmlns:a="http://schemas.openxmlformats.org/drawingml/2006/main"/>
+          <a:p xmlns:a="http://schemas.openxmlformats.org/drawingml/2006/main">
+            <a:r>
+              <a:t>Here p is the number of significand bits. For exact examples, solve the equation algebraically. The eventual homework may specify how to round values that fall between encodings, so do not assume a rounding rule yet. This is a conceptual approach, not a copy of the unreleased source code. Source: professor’s preview and lecture 6 equations.</a:t>
+            </a:r>
+          </a:p>
+        </p:txBody>
+      </p:sp>
+      <p:sp>
+        <p:nvSpPr>
+          <p:cNvPr id="4" name="Slide Number Placeholder 3"/>
+          <p:cNvSpPr>
+            <a:spLocks xmlns:a="http://schemas.openxmlformats.org/drawingml/2006/main" noGrp="1"/>
+          </p:cNvSpPr>
+          <p:nvPr>
+            <p:ph type="sldNum" idx="5"/>
+          </p:nvPr>
+        </p:nvSpPr>
+        <p:spPr/>
+        <p:txBody>
+          <a:bodyPr xmlns:a="http://schemas.openxmlformats.org/drawingml/2006/main"/>
+          <a:lstStyle xmlns:a="http://schemas.openxmlformats.org/drawingml/2006/main"/>
+          <a:p xmlns:a="http://schemas.openxmlformats.org/drawingml/2006/main"/>
+        </p:txBody>
+      </p:sp>
+    </p:spTree>
+  </p:cSld>
+  <p:clrMapOvr>
+    <a:masterClrMapping xmlns:a="http://schemas.openxmlformats.org/drawingml/2006/main"/>
+  </p:clrMapOvr>
+</p:notes>
+</file>
+
+<file path=ppt/notesSlides/notesSlide22.xml><?xml version="1.0" encoding="utf-8"?>
+<p:notes xmlns:p="http://schemas.openxmlformats.org/presentationml/2006/main">
+  <p:cSld>
+    <p:spTree>
+      <p:nvGrpSpPr>
+        <p:cNvPr id="1" name=""/>
+        <p:cNvGrpSpPr/>
+        <p:nvPr/>
+      </p:nvGrpSpPr>
+      <p:grpSpPr>
+        <a:xfrm xmlns:a="http://schemas.openxmlformats.org/drawingml/2006/main"/>
+      </p:grpSpPr>
+      <p:sp>
+        <p:nvSpPr>
+          <p:cNvPr id="2" name="Slide Image Placeholder 1"/>
+          <p:cNvSpPr>
+            <a:spLocks xmlns:a="http://schemas.openxmlformats.org/drawingml/2006/main" noGrp="1"/>
+          </p:cNvSpPr>
+          <p:nvPr>
+            <p:ph type="sldImg" idx="0"/>
+          </p:nvPr>
+        </p:nvSpPr>
+        <p:spPr/>
+      </p:sp>
+      <p:sp>
+        <p:nvSpPr>
+          <p:cNvPr id="3" name="Notes Placeholder 2"/>
+          <p:cNvSpPr>
+            <a:spLocks xmlns:a="http://schemas.openxmlformats.org/drawingml/2006/main" noGrp="1"/>
+          </p:cNvSpPr>
+          <p:nvPr>
+            <p:ph type="body" idx="1"/>
+          </p:nvPr>
+        </p:nvSpPr>
+        <p:spPr/>
+        <p:txBody>
+          <a:bodyPr xmlns:a="http://schemas.openxmlformats.org/drawingml/2006/main"/>
+          <a:lstStyle xmlns:a="http://schemas.openxmlformats.org/drawingml/2006/main"/>
+          <a:p xmlns:a="http://schemas.openxmlformats.org/drawingml/2006/main">
+            <a:r>
               <a:t>Review the two mistakes most likely to occur: forgetting to add the bias for a normal exponent, and using the normal hidden 1 for a subnormal. Do not reveal the unreleased homework solution. Remind students to follow the eventual assignment’s rounding and valid-input rules.</a:t>
             </a:r>
           </a:p>
@@ -1511,7 +1653,7 @@
           <a:lstStyle xmlns:a="http://schemas.openxmlformats.org/drawingml/2006/main"/>
           <a:p xmlns:a="http://schemas.openxmlformats.org/drawingml/2006/main">
             <a:r>
-              <a:t>Normal fields have E from 1 through 6 in this toy format. The all-ones exponent is reserved for infinities/NaNs in IEEE-style formats. We are using the lecture's normal/subnormal equations and a toy format with bias 3. Avoid saying the bias always equals 2^(k−1)−1; the planned exercise supplies it explicitly.</a:t>
+              <a:t>State the notation before either formula: this deck uses E for the stored unsigned field and e for the unbiased true exponent. Thus decode e=E−bias; encode E=e+bias. A student may have seen E=e−bias where their E means true exponent. Both describe the same operation with different names. Normal fields have stored E from 1 through 6 in this toy format. E=0 is for zero/subnormals and E=7 is reserved. The planned homework supplies the bias explicitly.</a:t>
             </a:r>
           </a:p>
         </p:txBody>
@@ -1721,7 +1863,7 @@
           <a:lstStyle xmlns:a="http://schemas.openxmlformats.org/drawingml/2006/main"/>
           <a:p xmlns:a="http://schemas.openxmlformats.org/drawingml/2006/main">
             <a:r>
-              <a:t>This is the likely stumbling block: subnormals use exponent 1−bias, not 0−bias, and no hidden leading 1. For this format, F=0 gives zero, F=1 is 1/32, F=7 is 7/32, and the smallest normal is 1/4. Source: lecture 6 equations.</a:t>
+              <a:t>Pause before giving the subnormal rule. Ask: if E=1 is the smallest normal field, where could 1/8 go? A normal encoding would need true exponent −3 and stored E=0, but zero is reserved for a different rule. The next slide explains that rule using binary digits rather than a formula first. Source: lecture 6 normal and subnormal equations.</a:t>
             </a:r>
           </a:p>
         </p:txBody>
@@ -1791,7 +1933,7 @@
           <a:lstStyle xmlns:a="http://schemas.openxmlformats.org/drawingml/2006/main"/>
           <a:p xmlns:a="http://schemas.openxmlformats.org/drawingml/2006/main">
             <a:r>
-              <a:t>Contrast this with the normal 5/4 example. Students may try to store a negative exponent in E or include the hidden 1. Return to the formula to resolve both confusions.</a:t>
+              <a:t>Use the same scale before and after the boundary: 2^(1−bias)=2^-2. This is the key change: replace the normal hidden 1 with 0. Do not compute 0−bias for E=0. Ask students why 0.100 binary is 1/2, then multiply by 1/4 to get 1/8. Source: lecture 6 subnormal equation.</a:t>
             </a:r>
           </a:p>
         </p:txBody>
@@ -1859,7 +2001,7 @@
   </p:cSld>
   <p:clrMap bg1="lt1" tx1="dk1" bg2="lt2" tx2="dk2" accent1="accent1" accent2="accent2" accent3="accent3" accent4="accent4" accent5="accent5" accent6="accent6" hlink="hlink" folHlink="folHlink"/>
   <p:sldLayoutIdLst>
-    <p:sldLayoutId xmlns:r="http://schemas.openxmlformats.org/officeDocument/2006/relationships" id="2147483649" r:id="R9f6ca5ca0cc841de"/>
+    <p:sldLayoutId xmlns:r="http://schemas.openxmlformats.org/officeDocument/2006/relationships" id="2147483649" r:id="R2eed2ef29c5a483c"/>
   </p:sldLayoutIdLst>
   <p:txStyles>
     <p:titleStyle>
@@ -2873,7 +3015,7 @@
                 <a:ea typeface="Courier New"/>
                 <a:cs typeface="Courier New"/>
               </a:rPr>
-              <a:t>01 / 20</a:t>
+              <a:t>01 / 22</a:t>
             </a:r>
           </a:p>
         </p:txBody>
@@ -2960,7 +3102,7 @@
                 <a:ea typeface="Courier New"/>
                 <a:cs typeface="Courier New"/>
               </a:rPr>
-              <a:t>FLOATING POINT · SMALLEST VALUES</a:t>
+              <a:t>FLOATING POINT · PLACE VALUES</a:t>
             </a:r>
           </a:p>
         </p:txBody>
@@ -3018,7 +3160,7 @@
                 <a:ea typeface="Arial"/>
                 <a:cs typeface="Arial"/>
               </a:rPr>
-              <a:t>The normal–subnormal boundary</a:t>
+              <a:t>Subnormals count in steps of 1/32</a:t>
             </a:r>
           </a:p>
         </p:txBody>
@@ -3076,7 +3218,7 @@
                 <a:ea typeface="Arial"/>
                 <a:cs typeface="Arial"/>
               </a:rPr>
-              <a:t>The largest subnormal sits directly below the smallest normal. The exponent stays at −2 across this boundary, but the implied leading 1 appears only for the normal value.</a:t>
+              <a:t>The three stored fraction bits make 0.FFF₂ increase by 1/8 each time. Multiplying by the fixed 2⁻² scale makes each step 1/32. So the field value F counts steps of 1/32.</a:t>
             </a:r>
           </a:p>
         </p:txBody>
@@ -3134,7 +3276,7 @@
                 <a:ea typeface="Courier New"/>
                 <a:cs typeface="Courier New"/>
               </a:rPr>
-              <a:t>Largest subnormal: E=0, F=7</a:t>
+              <a:t>F     bits     value</a:t>
             </a:r>
           </a:p>
           <a:p xmlns:a="http://schemas.openxmlformats.org/drawingml/2006/main">
@@ -3158,7 +3300,78 @@
                 <a:ea typeface="Courier New"/>
                 <a:cs typeface="Courier New"/>
               </a:rPr>
-              <a:t>value = 7/32</a:t>
+              <a:t>0     000      0/32</a:t>
+            </a:r>
+          </a:p>
+          <a:p xmlns:a="http://schemas.openxmlformats.org/drawingml/2006/main">
+            <a:pPr>
+              <a:defRPr sz="1650">
+                <a:solidFill>
+                  <a:srgbClr val="A7F3D0"/>
+                </a:solidFill>
+                <a:latin typeface="Courier New"/>
+                <a:ea typeface="Courier New"/>
+                <a:cs typeface="Courier New"/>
+              </a:defRPr>
+            </a:pPr>
+            <a:r>
+              <a:rPr sz="1650">
+                <a:solidFill>
+                  <a:srgbClr val="A7F3D0"/>
+                </a:solidFill>
+                <a:latin typeface="Courier New"/>
+                <a:ea typeface="Courier New"/>
+                <a:cs typeface="Courier New"/>
+              </a:rPr>
+              <a:t>1     001      1/32</a:t>
+            </a:r>
+          </a:p>
+          <a:p xmlns:a="http://schemas.openxmlformats.org/drawingml/2006/main">
+            <a:pPr>
+              <a:buNone/>
+              <a:defRPr sz="1650" b="0">
+                <a:solidFill>
+                  <a:srgbClr val="A7F3D0"/>
+                </a:solidFill>
+                <a:latin typeface="Courier New"/>
+                <a:ea typeface="Courier New"/>
+                <a:cs typeface="Courier New"/>
+              </a:defRPr>
+            </a:pPr>
+            <a:r>
+              <a:rPr sz="1650" b="0">
+                <a:solidFill>
+                  <a:srgbClr val="A7F3D0"/>
+                </a:solidFill>
+                <a:latin typeface="Courier New"/>
+                <a:ea typeface="Courier New"/>
+                <a:cs typeface="Courier New"/>
+              </a:rPr>
+              <a:t>4     100      4/32 = 1/8</a:t>
+            </a:r>
+          </a:p>
+          <a:p xmlns:a="http://schemas.openxmlformats.org/drawingml/2006/main">
+            <a:pPr>
+              <a:buNone/>
+              <a:defRPr sz="1650" b="0">
+                <a:solidFill>
+                  <a:srgbClr val="A7F3D0"/>
+                </a:solidFill>
+                <a:latin typeface="Courier New"/>
+                <a:ea typeface="Courier New"/>
+                <a:cs typeface="Courier New"/>
+              </a:defRPr>
+            </a:pPr>
+            <a:r>
+              <a:rPr sz="1650" b="0">
+                <a:solidFill>
+                  <a:srgbClr val="A7F3D0"/>
+                </a:solidFill>
+                <a:latin typeface="Courier New"/>
+                <a:ea typeface="Courier New"/>
+                <a:cs typeface="Courier New"/>
+              </a:rPr>
+              <a:t>7     111      7/32</a:t>
             </a:r>
           </a:p>
           <a:p xmlns:a="http://schemas.openxmlformats.org/drawingml/2006/main">
@@ -3187,60 +3400,7 @@
                 <a:ea typeface="Courier New"/>
                 <a:cs typeface="Courier New"/>
               </a:rPr>
-              <a:t>Smallest normal: E=1, F=0</a:t>
-            </a:r>
-          </a:p>
-          <a:p xmlns:a="http://schemas.openxmlformats.org/drawingml/2006/main">
-            <a:pPr>
-              <a:buNone/>
-              <a:defRPr sz="1650" b="0">
-                <a:solidFill>
-                  <a:srgbClr val="A7F3D0"/>
-                </a:solidFill>
-                <a:latin typeface="Courier New"/>
-                <a:ea typeface="Courier New"/>
-                <a:cs typeface="Courier New"/>
-              </a:defRPr>
-            </a:pPr>
-            <a:r>
-              <a:rPr sz="1650" b="0">
-                <a:solidFill>
-                  <a:srgbClr val="A7F3D0"/>
-                </a:solidFill>
-                <a:latin typeface="Courier New"/>
-                <a:ea typeface="Courier New"/>
-                <a:cs typeface="Courier New"/>
-              </a:rPr>
-              <a:t>value = 1/4 = 8/32</a:t>
-            </a:r>
-          </a:p>
-          <a:p xmlns:a="http://schemas.openxmlformats.org/drawingml/2006/main">
-            <a:r>
-              <a:t/>
-            </a:r>
-          </a:p>
-          <a:p xmlns:a="http://schemas.openxmlformats.org/drawingml/2006/main">
-            <a:pPr>
-              <a:buNone/>
-              <a:defRPr sz="1650" b="0">
-                <a:solidFill>
-                  <a:srgbClr val="A7F3D0"/>
-                </a:solidFill>
-                <a:latin typeface="Courier New"/>
-                <a:ea typeface="Courier New"/>
-                <a:cs typeface="Courier New"/>
-              </a:defRPr>
-            </a:pPr>
-            <a:r>
-              <a:rPr sz="1650" b="0">
-                <a:solidFill>
-                  <a:srgbClr val="A7F3D0"/>
-                </a:solidFill>
-                <a:latin typeface="Courier New"/>
-                <a:ea typeface="Courier New"/>
-                <a:cs typeface="Courier New"/>
-              </a:rPr>
-              <a:t>Gap = 1/32</a:t>
+              <a:t>Subnormal value = F/32</a:t>
             </a:r>
           </a:p>
         </p:txBody>
@@ -3298,7 +3458,7 @@
                 <a:ea typeface="Arial"/>
                 <a:cs typeface="Arial"/>
               </a:rPr>
-              <a:t>Subnormals fill the gap between zero and the smallest normal.</a:t>
+              <a:t>Ask: what is the next value after 7/32?</a:t>
             </a:r>
           </a:p>
         </p:txBody>
@@ -3356,7 +3516,7 @@
                 <a:ea typeface="Courier New"/>
                 <a:cs typeface="Courier New"/>
               </a:rPr>
-              <a:t>10 / 20</a:t>
+              <a:t>10 / 22</a:t>
             </a:r>
           </a:p>
         </p:txBody>
@@ -3395,7 +3555,7 @@
           <p:cNvPr id="7" name="">
             <a:extLst xmlns:a="http://schemas.openxmlformats.org/drawingml/2006/main">
               <a:ext uri="{FF2B5EF4-FFF2-40B4-BE49-F238E27FC236}">
-                <a16:creationId xmlns:a16="http://schemas.microsoft.com/office/drawing/2014/main" id="{ED6F0A3D-C361-4FA6-9CFE-2E669E0D919F}"/>
+                <a16:creationId xmlns:a16="http://schemas.microsoft.com/office/drawing/2014/main" id="{0E1C1D56-F3B0-4FC7-8312-5DCE66DE8296}"/>
               </a:ext>
             </a:extLst>
           </p:cNvPr>
@@ -3443,7 +3603,7 @@
                 <a:ea typeface="Courier New"/>
                 <a:cs typeface="Courier New"/>
               </a:rPr>
-              <a:t>FLOATING POINT · PRACTICE</a:t>
+              <a:t>FLOATING POINT · WORKED EXAMPLE</a:t>
             </a:r>
           </a:p>
         </p:txBody>
@@ -3453,7 +3613,7 @@
           <p:cNvPr id="2" name="">
             <a:extLst xmlns:a="http://schemas.openxmlformats.org/drawingml/2006/main">
               <a:ext uri="{FF2B5EF4-FFF2-40B4-BE49-F238E27FC236}">
-                <a16:creationId xmlns:a16="http://schemas.microsoft.com/office/drawing/2014/main" id="{8531682B-A598-4D48-84FE-CD10468FEB1D}"/>
+                <a16:creationId xmlns:a16="http://schemas.microsoft.com/office/drawing/2014/main" id="{47EC4111-990D-4F27-A48D-9B66E8564E29}"/>
               </a:ext>
             </a:extLst>
           </p:cNvPr>
@@ -3501,7 +3661,7 @@
                 <a:ea typeface="Arial"/>
                 <a:cs typeface="Arial"/>
               </a:rPr>
-              <a:t>Your turn: decode two patterns</a:t>
+              <a:t>Encode a subnormal: 1/8</a:t>
             </a:r>
           </a:p>
         </p:txBody>
@@ -3511,7 +3671,7 @@
           <p:cNvPr id="3" name="">
             <a:extLst xmlns:a="http://schemas.openxmlformats.org/drawingml/2006/main">
               <a:ext uri="{FF2B5EF4-FFF2-40B4-BE49-F238E27FC236}">
-                <a16:creationId xmlns:a16="http://schemas.microsoft.com/office/drawing/2014/main" id="{7C4976BE-C2D5-4F13-B1DA-E2F9D2612B6A}"/>
+                <a16:creationId xmlns:a16="http://schemas.microsoft.com/office/drawing/2014/main" id="{EA7FC2C0-68E4-440B-B218-A53A78DE1183}"/>
               </a:ext>
             </a:extLst>
           </p:cNvPr>
@@ -3559,36 +3719,7 @@
                 <a:ea typeface="Arial"/>
                 <a:cs typeface="Arial"/>
               </a:rPr>
-              <a:t>Use the same format: 3 exponent bits, bias 3, and 3 fraction bits.</a:t>
-            </a:r>
-          </a:p>
-          <a:p xmlns:a="http://schemas.openxmlformats.org/drawingml/2006/main">
-            <a:r>
-              <a:t/>
-            </a:r>
-          </a:p>
-          <a:p xmlns:a="http://schemas.openxmlformats.org/drawingml/2006/main">
-            <a:pPr>
-              <a:buNone/>
-              <a:defRPr sz="1950" b="0">
-                <a:solidFill>
-                  <a:srgbClr val="D4D4D8"/>
-                </a:solidFill>
-                <a:latin typeface="Arial"/>
-                <a:ea typeface="Arial"/>
-                <a:cs typeface="Arial"/>
-              </a:defRPr>
-            </a:pPr>
-            <a:r>
-              <a:rPr sz="1950" b="0">
-                <a:solidFill>
-                  <a:srgbClr val="D4D4D8"/>
-                </a:solidFill>
-                <a:latin typeface="Arial"/>
-                <a:ea typeface="Arial"/>
-                <a:cs typeface="Arial"/>
-              </a:rPr>
-              <a:t>For each pattern, classify it, find E and F, then calculate the value.</a:t>
+              <a:t>1/8 is below the smallest normal, 1/4, so E = 0. A subnormal here is worth F/32. Solve F/32 = 1/8: F = 4, which is 100₂ in three bits.</a:t>
             </a:r>
           </a:p>
         </p:txBody>
@@ -3598,7 +3729,7 @@
           <p:cNvPr id="4" name="">
             <a:extLst xmlns:a="http://schemas.openxmlformats.org/drawingml/2006/main">
               <a:ext uri="{FF2B5EF4-FFF2-40B4-BE49-F238E27FC236}">
-                <a16:creationId xmlns:a16="http://schemas.microsoft.com/office/drawing/2014/main" id="{97877AB9-DA81-4CB4-8D40-AAADEA86261B}"/>
+                <a16:creationId xmlns:a16="http://schemas.microsoft.com/office/drawing/2014/main" id="{C7B97746-2F05-4C79-997B-46EF673FF248}"/>
               </a:ext>
             </a:extLst>
           </p:cNvPr>
@@ -3646,7 +3777,7 @@
                 <a:ea typeface="Courier New"/>
                 <a:cs typeface="Courier New"/>
               </a:rPr>
-              <a:t>A. 0 | 010 | 100</a:t>
+              <a:t>S = 0</a:t>
             </a:r>
           </a:p>
           <a:p xmlns:a="http://schemas.openxmlformats.org/drawingml/2006/main">
@@ -3670,7 +3801,7 @@
                 <a:ea typeface="Courier New"/>
                 <a:cs typeface="Courier New"/>
               </a:rPr>
-              <a:t>   normal or subnormal?</a:t>
+              <a:t>E = 0 = 000₂</a:t>
             </a:r>
           </a:p>
           <a:p xmlns:a="http://schemas.openxmlformats.org/drawingml/2006/main">
@@ -3694,7 +3825,7 @@
                 <a:ea typeface="Courier New"/>
                 <a:cs typeface="Courier New"/>
               </a:rPr>
-              <a:t>   value = ?</a:t>
+              <a:t>F = 4 = 100₂</a:t>
             </a:r>
           </a:p>
           <a:p xmlns:a="http://schemas.openxmlformats.org/drawingml/2006/main">
@@ -3723,7 +3854,12 @@
                 <a:ea typeface="Courier New"/>
                 <a:cs typeface="Courier New"/>
               </a:rPr>
-              <a:t>B. 0 | 000 | 011</a:t>
+              <a:t>Fields: 0 | 000 | 100</a:t>
+            </a:r>
+          </a:p>
+          <a:p xmlns:a="http://schemas.openxmlformats.org/drawingml/2006/main">
+            <a:r>
+              <a:t/>
             </a:r>
           </a:p>
           <a:p xmlns:a="http://schemas.openxmlformats.org/drawingml/2006/main">
@@ -3747,31 +3883,7 @@
                 <a:ea typeface="Courier New"/>
                 <a:cs typeface="Courier New"/>
               </a:rPr>
-              <a:t>   normal or subnormal?</a:t>
-            </a:r>
-          </a:p>
-          <a:p xmlns:a="http://schemas.openxmlformats.org/drawingml/2006/main">
-            <a:pPr>
-              <a:buNone/>
-              <a:defRPr sz="1650" b="0">
-                <a:solidFill>
-                  <a:srgbClr val="A7F3D0"/>
-                </a:solidFill>
-                <a:latin typeface="Courier New"/>
-                <a:ea typeface="Courier New"/>
-                <a:cs typeface="Courier New"/>
-              </a:defRPr>
-            </a:pPr>
-            <a:r>
-              <a:rPr sz="1650" b="0">
-                <a:solidFill>
-                  <a:srgbClr val="A7F3D0"/>
-                </a:solidFill>
-                <a:latin typeface="Courier New"/>
-                <a:ea typeface="Courier New"/>
-                <a:cs typeface="Courier New"/>
-              </a:rPr>
-              <a:t>   value = ?</a:t>
+              <a:t>Check: 4/32 = 1/8</a:t>
             </a:r>
           </a:p>
         </p:txBody>
@@ -3781,7 +3893,7 @@
           <p:cNvPr id="5" name="">
             <a:extLst xmlns:a="http://schemas.openxmlformats.org/drawingml/2006/main">
               <a:ext uri="{FF2B5EF4-FFF2-40B4-BE49-F238E27FC236}">
-                <a16:creationId xmlns:a16="http://schemas.microsoft.com/office/drawing/2014/main" id="{0C768E93-B810-439B-9ECE-DACDD6255183}"/>
+                <a16:creationId xmlns:a16="http://schemas.microsoft.com/office/drawing/2014/main" id="{C953FAB2-7571-49A3-B6C8-87F90FA9D556}"/>
               </a:ext>
             </a:extLst>
           </p:cNvPr>
@@ -3829,7 +3941,7 @@
                 <a:ea typeface="Arial"/>
                 <a:cs typeface="Arial"/>
               </a:rPr>
-              <a:t>Check E first: it selects the equation.</a:t>
+              <a:t>No hidden 1: read the significand as 0.100₂.</a:t>
             </a:r>
           </a:p>
         </p:txBody>
@@ -3839,7 +3951,7 @@
           <p:cNvPr id="6" name="">
             <a:extLst xmlns:a="http://schemas.openxmlformats.org/drawingml/2006/main">
               <a:ext uri="{FF2B5EF4-FFF2-40B4-BE49-F238E27FC236}">
-                <a16:creationId xmlns:a16="http://schemas.microsoft.com/office/drawing/2014/main" id="{4E485357-E888-4A45-92E1-47CDEA8A71B2}"/>
+                <a16:creationId xmlns:a16="http://schemas.microsoft.com/office/drawing/2014/main" id="{ECE7F5E9-2417-44C6-925E-4767F90FA696}"/>
               </a:ext>
             </a:extLst>
           </p:cNvPr>
@@ -3887,7 +3999,7 @@
                 <a:ea typeface="Courier New"/>
                 <a:cs typeface="Courier New"/>
               </a:rPr>
-              <a:t>11 / 20</a:t>
+              <a:t>11 / 22</a:t>
             </a:r>
           </a:p>
         </p:txBody>
@@ -3895,7 +4007,7 @@
     </p:spTree>
     <p:extLst>
       <p:ext uri="{BB962C8B-B14F-4D97-AF65-F5344CB8AC3E}">
-        <p14:creationId xmlns:p14="http://schemas.microsoft.com/office/powerpoint/2010/main" val="1507595076"/>
+        <p14:creationId xmlns:p14="http://schemas.microsoft.com/office/powerpoint/2010/main" val="1082036242"/>
       </p:ext>
     </p:extLst>
   </p:cSld>
@@ -3926,7 +4038,7 @@
           <p:cNvPr id="7" name="">
             <a:extLst xmlns:a="http://schemas.openxmlformats.org/drawingml/2006/main">
               <a:ext uri="{FF2B5EF4-FFF2-40B4-BE49-F238E27FC236}">
-                <a16:creationId xmlns:a16="http://schemas.microsoft.com/office/drawing/2014/main" id="{7AC5D697-73A9-4130-AF88-3B9A153D538D}"/>
+                <a16:creationId xmlns:a16="http://schemas.microsoft.com/office/drawing/2014/main" id="{DF65E5C3-C59B-4F4C-8123-D26BB20B62FC}"/>
               </a:ext>
             </a:extLst>
           </p:cNvPr>
@@ -3974,7 +4086,7 @@
                 <a:ea typeface="Courier New"/>
                 <a:cs typeface="Courier New"/>
               </a:rPr>
-              <a:t>FLOATING POINT · CHECK</a:t>
+              <a:t>FLOATING POINT · BOUNDARY</a:t>
             </a:r>
           </a:p>
         </p:txBody>
@@ -3984,7 +4096,7 @@
           <p:cNvPr id="2" name="">
             <a:extLst xmlns:a="http://schemas.openxmlformats.org/drawingml/2006/main">
               <a:ext uri="{FF2B5EF4-FFF2-40B4-BE49-F238E27FC236}">
-                <a16:creationId xmlns:a16="http://schemas.microsoft.com/office/drawing/2014/main" id="{1059792B-54CD-4C1F-8A87-49C3F494D2AD}"/>
+                <a16:creationId xmlns:a16="http://schemas.microsoft.com/office/drawing/2014/main" id="{AAF148DA-667A-4F17-8947-3A10B5D66209}"/>
               </a:ext>
             </a:extLst>
           </p:cNvPr>
@@ -4032,7 +4144,7 @@
                 <a:ea typeface="Arial"/>
                 <a:cs typeface="Arial"/>
               </a:rPr>
-              <a:t>Decode answers</a:t>
+              <a:t>The next normal is one step away</a:t>
             </a:r>
           </a:p>
         </p:txBody>
@@ -4042,7 +4154,7 @@
           <p:cNvPr id="3" name="">
             <a:extLst xmlns:a="http://schemas.openxmlformats.org/drawingml/2006/main">
               <a:ext uri="{FF2B5EF4-FFF2-40B4-BE49-F238E27FC236}">
-                <a16:creationId xmlns:a16="http://schemas.microsoft.com/office/drawing/2014/main" id="{26F3E9C7-6AC5-4E40-B664-B323C1BA5CEA}"/>
+                <a16:creationId xmlns:a16="http://schemas.microsoft.com/office/drawing/2014/main" id="{9CBE9A2B-E617-4407-BF21-6D1C10DB5F7C}"/>
               </a:ext>
             </a:extLst>
           </p:cNvPr>
@@ -4090,36 +4202,7 @@
                 <a:ea typeface="Arial"/>
                 <a:cs typeface="Arial"/>
               </a:rPr>
-              <a:t>A uses the normal equation because E = 2.</a:t>
-            </a:r>
-          </a:p>
-          <a:p xmlns:a="http://schemas.openxmlformats.org/drawingml/2006/main">
-            <a:r>
-              <a:t/>
-            </a:r>
-          </a:p>
-          <a:p xmlns:a="http://schemas.openxmlformats.org/drawingml/2006/main">
-            <a:pPr>
-              <a:buNone/>
-              <a:defRPr sz="1950" b="0">
-                <a:solidFill>
-                  <a:srgbClr val="D4D4D8"/>
-                </a:solidFill>
-                <a:latin typeface="Arial"/>
-                <a:ea typeface="Arial"/>
-                <a:cs typeface="Arial"/>
-              </a:defRPr>
-            </a:pPr>
-            <a:r>
-              <a:rPr sz="1950" b="0">
-                <a:solidFill>
-                  <a:srgbClr val="D4D4D8"/>
-                </a:solidFill>
-                <a:latin typeface="Arial"/>
-                <a:ea typeface="Arial"/>
-                <a:cs typeface="Arial"/>
-              </a:rPr>
-              <a:t>B uses the subnormal equation because E = 0; there is no implied leading 1.</a:t>
+              <a:t>The largest subnormal is 7/32. The smallest normal is 8/32. Both use the 2⁻² scale; the implied leading digit changes from 0 to 1 when E changes from 0 to 1.</a:t>
             </a:r>
           </a:p>
         </p:txBody>
@@ -4129,7 +4212,7 @@
           <p:cNvPr id="4" name="">
             <a:extLst xmlns:a="http://schemas.openxmlformats.org/drawingml/2006/main">
               <a:ext uri="{FF2B5EF4-FFF2-40B4-BE49-F238E27FC236}">
-                <a16:creationId xmlns:a16="http://schemas.microsoft.com/office/drawing/2014/main" id="{737C1F1B-87F6-43C2-BCA8-B1C729031D72}"/>
+                <a16:creationId xmlns:a16="http://schemas.microsoft.com/office/drawing/2014/main" id="{F24EA955-1341-477F-B9E0-1F67FB906026}"/>
               </a:ext>
             </a:extLst>
           </p:cNvPr>
@@ -4177,7 +4260,7 @@
                 <a:ea typeface="Courier New"/>
                 <a:cs typeface="Courier New"/>
               </a:rPr>
-              <a:t>A. 0 | 010 | 100</a:t>
+              <a:t>E = 0, F = 111₂</a:t>
             </a:r>
           </a:p>
           <a:p xmlns:a="http://schemas.openxmlformats.org/drawingml/2006/main">
@@ -4201,7 +4284,7 @@
                 <a:ea typeface="Courier New"/>
                 <a:cs typeface="Courier New"/>
               </a:rPr>
-              <a:t>   (1 + 4/8) × 2⁻¹ = 3/4</a:t>
+              <a:t>0.111₂ × 2⁻² = 7/32</a:t>
             </a:r>
           </a:p>
           <a:p xmlns:a="http://schemas.openxmlformats.org/drawingml/2006/main">
@@ -4230,7 +4313,7 @@
                 <a:ea typeface="Courier New"/>
                 <a:cs typeface="Courier New"/>
               </a:rPr>
-              <a:t>B. 0 | 000 | 011</a:t>
+              <a:t>E = 1, F = 000₂</a:t>
             </a:r>
           </a:p>
           <a:p xmlns:a="http://schemas.openxmlformats.org/drawingml/2006/main">
@@ -4254,7 +4337,36 @@
                 <a:ea typeface="Courier New"/>
                 <a:cs typeface="Courier New"/>
               </a:rPr>
-              <a:t>   (3/8) × 2⁻² = 3/32</a:t>
+              <a:t>1.000₂ × 2⁻² = 8/32</a:t>
+            </a:r>
+          </a:p>
+          <a:p xmlns:a="http://schemas.openxmlformats.org/drawingml/2006/main">
+            <a:r>
+              <a:t/>
+            </a:r>
+          </a:p>
+          <a:p xmlns:a="http://schemas.openxmlformats.org/drawingml/2006/main">
+            <a:pPr>
+              <a:buNone/>
+              <a:defRPr sz="1650" b="0">
+                <a:solidFill>
+                  <a:srgbClr val="A7F3D0"/>
+                </a:solidFill>
+                <a:latin typeface="Courier New"/>
+                <a:ea typeface="Courier New"/>
+                <a:cs typeface="Courier New"/>
+              </a:defRPr>
+            </a:pPr>
+            <a:r>
+              <a:rPr sz="1650" b="0">
+                <a:solidFill>
+                  <a:srgbClr val="A7F3D0"/>
+                </a:solidFill>
+                <a:latin typeface="Courier New"/>
+                <a:ea typeface="Courier New"/>
+                <a:cs typeface="Courier New"/>
+              </a:rPr>
+              <a:t>Gap = 1/32</a:t>
             </a:r>
           </a:p>
         </p:txBody>
@@ -4264,7 +4376,7 @@
           <p:cNvPr id="5" name="">
             <a:extLst xmlns:a="http://schemas.openxmlformats.org/drawingml/2006/main">
               <a:ext uri="{FF2B5EF4-FFF2-40B4-BE49-F238E27FC236}">
-                <a16:creationId xmlns:a16="http://schemas.microsoft.com/office/drawing/2014/main" id="{9DAD2664-9B32-4402-A088-C1DEBD68E3CD}"/>
+                <a16:creationId xmlns:a16="http://schemas.microsoft.com/office/drawing/2014/main" id="{E8B59BBF-C1FE-4848-A1BE-0E49C6150211}"/>
               </a:ext>
             </a:extLst>
           </p:cNvPr>
@@ -4312,7 +4424,7 @@
                 <a:ea typeface="Arial"/>
                 <a:cs typeface="Arial"/>
               </a:rPr>
-              <a:t>If the answer seems surprising, decode the same fields back into the formula.</a:t>
+              <a:t>Subnormal values fill the space between zero and 1/4.</a:t>
             </a:r>
           </a:p>
         </p:txBody>
@@ -4322,7 +4434,7 @@
           <p:cNvPr id="6" name="">
             <a:extLst xmlns:a="http://schemas.openxmlformats.org/drawingml/2006/main">
               <a:ext uri="{FF2B5EF4-FFF2-40B4-BE49-F238E27FC236}">
-                <a16:creationId xmlns:a16="http://schemas.microsoft.com/office/drawing/2014/main" id="{DBE61FAB-FD81-4893-85F8-90700B31187C}"/>
+                <a16:creationId xmlns:a16="http://schemas.microsoft.com/office/drawing/2014/main" id="{C1D8CDEF-F520-47D3-A60F-E6AFCB834AE6}"/>
               </a:ext>
             </a:extLst>
           </p:cNvPr>
@@ -4370,7 +4482,7 @@
                 <a:ea typeface="Courier New"/>
                 <a:cs typeface="Courier New"/>
               </a:rPr>
-              <a:t>12 / 20</a:t>
+              <a:t>12 / 22</a:t>
             </a:r>
           </a:p>
         </p:txBody>
@@ -4378,7 +4490,7 @@
     </p:spTree>
     <p:extLst>
       <p:ext uri="{BB962C8B-B14F-4D97-AF65-F5344CB8AC3E}">
-        <p14:creationId xmlns:p14="http://schemas.microsoft.com/office/powerpoint/2010/main" val="1502731382"/>
+        <p14:creationId xmlns:p14="http://schemas.microsoft.com/office/powerpoint/2010/main" val="1006218793"/>
       </p:ext>
     </p:extLst>
   </p:cSld>
@@ -4409,7 +4521,7 @@
           <p:cNvPr id="7" name="">
             <a:extLst xmlns:a="http://schemas.openxmlformats.org/drawingml/2006/main">
               <a:ext uri="{FF2B5EF4-FFF2-40B4-BE49-F238E27FC236}">
-                <a16:creationId xmlns:a16="http://schemas.microsoft.com/office/drawing/2014/main" id="{35A724E8-02D1-4C78-A9D3-AE6AD6E2D594}"/>
+                <a16:creationId xmlns:a16="http://schemas.microsoft.com/office/drawing/2014/main" id="{ED6F0A3D-C361-4FA6-9CFE-2E669E0D919F}"/>
               </a:ext>
             </a:extLst>
           </p:cNvPr>
@@ -4467,7 +4579,7 @@
           <p:cNvPr id="2" name="">
             <a:extLst xmlns:a="http://schemas.openxmlformats.org/drawingml/2006/main">
               <a:ext uri="{FF2B5EF4-FFF2-40B4-BE49-F238E27FC236}">
-                <a16:creationId xmlns:a16="http://schemas.microsoft.com/office/drawing/2014/main" id="{D68140D5-AD40-4B2D-9276-45B94835A98B}"/>
+                <a16:creationId xmlns:a16="http://schemas.microsoft.com/office/drawing/2014/main" id="{8531682B-A598-4D48-84FE-CD10468FEB1D}"/>
               </a:ext>
             </a:extLst>
           </p:cNvPr>
@@ -4515,7 +4627,7 @@
                 <a:ea typeface="Arial"/>
                 <a:cs typeface="Arial"/>
               </a:rPr>
-              <a:t>Your turn: classify two ratios</a:t>
+              <a:t>Your turn: decode two patterns</a:t>
             </a:r>
           </a:p>
         </p:txBody>
@@ -4525,7 +4637,7 @@
           <p:cNvPr id="3" name="">
             <a:extLst xmlns:a="http://schemas.openxmlformats.org/drawingml/2006/main">
               <a:ext uri="{FF2B5EF4-FFF2-40B4-BE49-F238E27FC236}">
-                <a16:creationId xmlns:a16="http://schemas.microsoft.com/office/drawing/2014/main" id="{AA9609DC-0513-451F-B1A4-CD75618D8A9F}"/>
+                <a16:creationId xmlns:a16="http://schemas.microsoft.com/office/drawing/2014/main" id="{7C4976BE-C2D5-4F13-B1DA-E2F9D2612B6A}"/>
               </a:ext>
             </a:extLst>
           </p:cNvPr>
@@ -4573,7 +4685,7 @@
                 <a:ea typeface="Arial"/>
                 <a:cs typeface="Arial"/>
               </a:rPr>
-              <a:t>Use the same practice format: 3 exponent bits, bias 3, and 3 fraction bits.</a:t>
+              <a:t>Use the same format: 3 exponent bits, bias 3, and 3 fraction bits.</a:t>
             </a:r>
           </a:p>
           <a:p xmlns:a="http://schemas.openxmlformats.org/drawingml/2006/main">
@@ -4602,7 +4714,7 @@
                 <a:ea typeface="Arial"/>
                 <a:cs typeface="Arial"/>
               </a:rPr>
-              <a:t>For each ratio, decide normal or subnormal, then find E and F.</a:t>
+              <a:t>For each pattern, classify it, find E and F, then calculate the value.</a:t>
             </a:r>
           </a:p>
         </p:txBody>
@@ -4612,7 +4724,7 @@
           <p:cNvPr id="4" name="">
             <a:extLst xmlns:a="http://schemas.openxmlformats.org/drawingml/2006/main">
               <a:ext uri="{FF2B5EF4-FFF2-40B4-BE49-F238E27FC236}">
-                <a16:creationId xmlns:a16="http://schemas.microsoft.com/office/drawing/2014/main" id="{37A2E272-B675-4F8B-8D9A-1DD0C7D3E885}"/>
+                <a16:creationId xmlns:a16="http://schemas.microsoft.com/office/drawing/2014/main" id="{97877AB9-DA81-4CB4-8D40-AAADEA86261B}"/>
               </a:ext>
             </a:extLst>
           </p:cNvPr>
@@ -4660,7 +4772,7 @@
                 <a:ea typeface="Courier New"/>
                 <a:cs typeface="Courier New"/>
               </a:rPr>
-              <a:t>A. 3/2</a:t>
+              <a:t>A. 0 | 010 | 100</a:t>
             </a:r>
           </a:p>
           <a:p xmlns:a="http://schemas.openxmlformats.org/drawingml/2006/main">
@@ -4708,7 +4820,7 @@
                 <a:ea typeface="Courier New"/>
                 <a:cs typeface="Courier New"/>
               </a:rPr>
-              <a:t>   E = ?   F = ?</a:t>
+              <a:t>   value = ?</a:t>
             </a:r>
           </a:p>
           <a:p xmlns:a="http://schemas.openxmlformats.org/drawingml/2006/main">
@@ -4737,7 +4849,7 @@
                 <a:ea typeface="Courier New"/>
                 <a:cs typeface="Courier New"/>
               </a:rPr>
-              <a:t>B. 3/16</a:t>
+              <a:t>B. 0 | 000 | 011</a:t>
             </a:r>
           </a:p>
           <a:p xmlns:a="http://schemas.openxmlformats.org/drawingml/2006/main">
@@ -4785,7 +4897,7 @@
                 <a:ea typeface="Courier New"/>
                 <a:cs typeface="Courier New"/>
               </a:rPr>
-              <a:t>   E = ?   F = ?</a:t>
+              <a:t>   value = ?</a:t>
             </a:r>
           </a:p>
         </p:txBody>
@@ -4795,7 +4907,7 @@
           <p:cNvPr id="5" name="">
             <a:extLst xmlns:a="http://schemas.openxmlformats.org/drawingml/2006/main">
               <a:ext uri="{FF2B5EF4-FFF2-40B4-BE49-F238E27FC236}">
-                <a16:creationId xmlns:a16="http://schemas.microsoft.com/office/drawing/2014/main" id="{8F900304-F8E7-4C1C-B3A0-F1A0DD604211}"/>
+                <a16:creationId xmlns:a16="http://schemas.microsoft.com/office/drawing/2014/main" id="{0C768E93-B810-439B-9ECE-DACDD6255183}"/>
               </a:ext>
             </a:extLst>
           </p:cNvPr>
@@ -4843,7 +4955,7 @@
                 <a:ea typeface="Arial"/>
                 <a:cs typeface="Arial"/>
               </a:rPr>
-              <a:t>Compare each value with the smallest normal, 1/4, before finding bits.</a:t>
+              <a:t>If E = 0, count F steps of 1/32. Otherwise use the normal rule.</a:t>
             </a:r>
           </a:p>
         </p:txBody>
@@ -4853,7 +4965,7 @@
           <p:cNvPr id="6" name="">
             <a:extLst xmlns:a="http://schemas.openxmlformats.org/drawingml/2006/main">
               <a:ext uri="{FF2B5EF4-FFF2-40B4-BE49-F238E27FC236}">
-                <a16:creationId xmlns:a16="http://schemas.microsoft.com/office/drawing/2014/main" id="{16200DCD-0F16-4BE6-9538-9FDAF86C958E}"/>
+                <a16:creationId xmlns:a16="http://schemas.microsoft.com/office/drawing/2014/main" id="{4E485357-E888-4A45-92E1-47CDEA8A71B2}"/>
               </a:ext>
             </a:extLst>
           </p:cNvPr>
@@ -4901,7 +5013,7 @@
                 <a:ea typeface="Courier New"/>
                 <a:cs typeface="Courier New"/>
               </a:rPr>
-              <a:t>13 / 20</a:t>
+              <a:t>13 / 22</a:t>
             </a:r>
           </a:p>
         </p:txBody>
@@ -4909,7 +5021,7 @@
     </p:spTree>
     <p:extLst>
       <p:ext uri="{BB962C8B-B14F-4D97-AF65-F5344CB8AC3E}">
-        <p14:creationId xmlns:p14="http://schemas.microsoft.com/office/powerpoint/2010/main" val="2079659254"/>
+        <p14:creationId xmlns:p14="http://schemas.microsoft.com/office/powerpoint/2010/main" val="1507595076"/>
       </p:ext>
     </p:extLst>
   </p:cSld>
@@ -4940,7 +5052,7 @@
           <p:cNvPr id="7" name="">
             <a:extLst xmlns:a="http://schemas.openxmlformats.org/drawingml/2006/main">
               <a:ext uri="{FF2B5EF4-FFF2-40B4-BE49-F238E27FC236}">
-                <a16:creationId xmlns:a16="http://schemas.microsoft.com/office/drawing/2014/main" id="{D25A2A70-779E-4A39-9AD5-537DDE3C5B7A}"/>
+                <a16:creationId xmlns:a16="http://schemas.microsoft.com/office/drawing/2014/main" id="{7AC5D697-73A9-4130-AF88-3B9A153D538D}"/>
               </a:ext>
             </a:extLst>
           </p:cNvPr>
@@ -4998,7 +5110,7 @@
           <p:cNvPr id="2" name="">
             <a:extLst xmlns:a="http://schemas.openxmlformats.org/drawingml/2006/main">
               <a:ext uri="{FF2B5EF4-FFF2-40B4-BE49-F238E27FC236}">
-                <a16:creationId xmlns:a16="http://schemas.microsoft.com/office/drawing/2014/main" id="{2F2733A3-E106-4C90-B097-BE7CB4577892}"/>
+                <a16:creationId xmlns:a16="http://schemas.microsoft.com/office/drawing/2014/main" id="{1059792B-54CD-4C1F-8A87-49C3F494D2AD}"/>
               </a:ext>
             </a:extLst>
           </p:cNvPr>
@@ -5046,7 +5158,7 @@
                 <a:ea typeface="Arial"/>
                 <a:cs typeface="Arial"/>
               </a:rPr>
-              <a:t>Practice answers</a:t>
+              <a:t>Decode answers</a:t>
             </a:r>
           </a:p>
         </p:txBody>
@@ -5056,7 +5168,7 @@
           <p:cNvPr id="3" name="">
             <a:extLst xmlns:a="http://schemas.openxmlformats.org/drawingml/2006/main">
               <a:ext uri="{FF2B5EF4-FFF2-40B4-BE49-F238E27FC236}">
-                <a16:creationId xmlns:a16="http://schemas.microsoft.com/office/drawing/2014/main" id="{53BB6D32-B5C1-4BFB-8D41-7B7055B1A606}"/>
+                <a16:creationId xmlns:a16="http://schemas.microsoft.com/office/drawing/2014/main" id="{26F3E9C7-6AC5-4E40-B664-B323C1BA5CEA}"/>
               </a:ext>
             </a:extLst>
           </p:cNvPr>
@@ -5104,36 +5216,7 @@
                 <a:ea typeface="Arial"/>
                 <a:cs typeface="Arial"/>
               </a:rPr>
-              <a:t>3/2 = 1.100₂ × 2⁰, so it is normal.</a:t>
-            </a:r>
-          </a:p>
-          <a:p xmlns:a="http://schemas.openxmlformats.org/drawingml/2006/main">
-            <a:r>
-              <a:t/>
-            </a:r>
-          </a:p>
-          <a:p xmlns:a="http://schemas.openxmlformats.org/drawingml/2006/main">
-            <a:pPr>
-              <a:buNone/>
-              <a:defRPr sz="1950" b="0">
-                <a:solidFill>
-                  <a:srgbClr val="D4D4D8"/>
-                </a:solidFill>
-                <a:latin typeface="Arial"/>
-                <a:ea typeface="Arial"/>
-                <a:cs typeface="Arial"/>
-              </a:defRPr>
-            </a:pPr>
-            <a:r>
-              <a:rPr sz="1950" b="0">
-                <a:solidFill>
-                  <a:srgbClr val="D4D4D8"/>
-                </a:solidFill>
-                <a:latin typeface="Arial"/>
-                <a:ea typeface="Arial"/>
-                <a:cs typeface="Arial"/>
-              </a:rPr>
-              <a:t>3/16 is below 1/4, so it is subnormal. Since value = F/32, F = 6.</a:t>
+              <a:t>A has E = 2, so decode a normal value. B has E = 0, so its F = 3 means three steps of 1/32.</a:t>
             </a:r>
           </a:p>
         </p:txBody>
@@ -5143,7 +5226,7 @@
           <p:cNvPr id="4" name="">
             <a:extLst xmlns:a="http://schemas.openxmlformats.org/drawingml/2006/main">
               <a:ext uri="{FF2B5EF4-FFF2-40B4-BE49-F238E27FC236}">
-                <a16:creationId xmlns:a16="http://schemas.microsoft.com/office/drawing/2014/main" id="{CD85FA7D-EF72-4F2A-85B4-517634BC5BE7}"/>
+                <a16:creationId xmlns:a16="http://schemas.microsoft.com/office/drawing/2014/main" id="{737C1F1B-87F6-43C2-BCA8-B1C729031D72}"/>
               </a:ext>
             </a:extLst>
           </p:cNvPr>
@@ -5191,7 +5274,7 @@
                 <a:ea typeface="Courier New"/>
                 <a:cs typeface="Courier New"/>
               </a:rPr>
-              <a:t>A. 3/2</a:t>
+              <a:t>A. 0 | 010 | 100</a:t>
             </a:r>
           </a:p>
           <a:p xmlns:a="http://schemas.openxmlformats.org/drawingml/2006/main">
@@ -5215,7 +5298,12 @@
                 <a:ea typeface="Courier New"/>
                 <a:cs typeface="Courier New"/>
               </a:rPr>
-              <a:t>   E = 3 = 011₂</a:t>
+              <a:t>   (1 + 4/8) × 2⁻¹ = 3/4</a:t>
+            </a:r>
+          </a:p>
+          <a:p xmlns:a="http://schemas.openxmlformats.org/drawingml/2006/main">
+            <a:r>
+              <a:t/>
             </a:r>
           </a:p>
           <a:p xmlns:a="http://schemas.openxmlformats.org/drawingml/2006/main">
@@ -5239,7 +5327,7 @@
                 <a:ea typeface="Courier New"/>
                 <a:cs typeface="Courier New"/>
               </a:rPr>
-              <a:t>   F = 4 = 100₂</a:t>
+              <a:t>B. 0 | 000 | 011</a:t>
             </a:r>
           </a:p>
           <a:p xmlns:a="http://schemas.openxmlformats.org/drawingml/2006/main">
@@ -5263,108 +5351,7 @@
                 <a:ea typeface="Courier New"/>
                 <a:cs typeface="Courier New"/>
               </a:rPr>
-              <a:t>   Check: (1 + 4/8) × 1 = 3/2</a:t>
-            </a:r>
-          </a:p>
-          <a:p xmlns:a="http://schemas.openxmlformats.org/drawingml/2006/main">
-            <a:r>
-              <a:t/>
-            </a:r>
-          </a:p>
-          <a:p xmlns:a="http://schemas.openxmlformats.org/drawingml/2006/main">
-            <a:pPr>
-              <a:buNone/>
-              <a:defRPr sz="1650" b="0">
-                <a:solidFill>
-                  <a:srgbClr val="A7F3D0"/>
-                </a:solidFill>
-                <a:latin typeface="Courier New"/>
-                <a:ea typeface="Courier New"/>
-                <a:cs typeface="Courier New"/>
-              </a:defRPr>
-            </a:pPr>
-            <a:r>
-              <a:rPr sz="1650" b="0">
-                <a:solidFill>
-                  <a:srgbClr val="A7F3D0"/>
-                </a:solidFill>
-                <a:latin typeface="Courier New"/>
-                <a:ea typeface="Courier New"/>
-                <a:cs typeface="Courier New"/>
-              </a:rPr>
-              <a:t>B. 3/16</a:t>
-            </a:r>
-          </a:p>
-          <a:p xmlns:a="http://schemas.openxmlformats.org/drawingml/2006/main">
-            <a:pPr>
-              <a:buNone/>
-              <a:defRPr sz="1650" b="0">
-                <a:solidFill>
-                  <a:srgbClr val="A7F3D0"/>
-                </a:solidFill>
-                <a:latin typeface="Courier New"/>
-                <a:ea typeface="Courier New"/>
-                <a:cs typeface="Courier New"/>
-              </a:defRPr>
-            </a:pPr>
-            <a:r>
-              <a:rPr sz="1650" b="0">
-                <a:solidFill>
-                  <a:srgbClr val="A7F3D0"/>
-                </a:solidFill>
-                <a:latin typeface="Courier New"/>
-                <a:ea typeface="Courier New"/>
-                <a:cs typeface="Courier New"/>
-              </a:rPr>
-              <a:t>   E = 0 = 000₂</a:t>
-            </a:r>
-          </a:p>
-          <a:p xmlns:a="http://schemas.openxmlformats.org/drawingml/2006/main">
-            <a:pPr>
-              <a:buNone/>
-              <a:defRPr sz="1650" b="0">
-                <a:solidFill>
-                  <a:srgbClr val="A7F3D0"/>
-                </a:solidFill>
-                <a:latin typeface="Courier New"/>
-                <a:ea typeface="Courier New"/>
-                <a:cs typeface="Courier New"/>
-              </a:defRPr>
-            </a:pPr>
-            <a:r>
-              <a:rPr sz="1650" b="0">
-                <a:solidFill>
-                  <a:srgbClr val="A7F3D0"/>
-                </a:solidFill>
-                <a:latin typeface="Courier New"/>
-                <a:ea typeface="Courier New"/>
-                <a:cs typeface="Courier New"/>
-              </a:rPr>
-              <a:t>   F = 6 = 110₂</a:t>
-            </a:r>
-          </a:p>
-          <a:p xmlns:a="http://schemas.openxmlformats.org/drawingml/2006/main">
-            <a:pPr>
-              <a:buNone/>
-              <a:defRPr sz="1650" b="0">
-                <a:solidFill>
-                  <a:srgbClr val="A7F3D0"/>
-                </a:solidFill>
-                <a:latin typeface="Courier New"/>
-                <a:ea typeface="Courier New"/>
-                <a:cs typeface="Courier New"/>
-              </a:defRPr>
-            </a:pPr>
-            <a:r>
-              <a:rPr sz="1650" b="0">
-                <a:solidFill>
-                  <a:srgbClr val="A7F3D0"/>
-                </a:solidFill>
-                <a:latin typeface="Courier New"/>
-                <a:ea typeface="Courier New"/>
-                <a:cs typeface="Courier New"/>
-              </a:rPr>
-              <a:t>   Check: 6/32 = 3/16</a:t>
+              <a:t>   F = 3  →  3/32</a:t>
             </a:r>
           </a:p>
         </p:txBody>
@@ -5374,7 +5361,7 @@
           <p:cNvPr id="5" name="">
             <a:extLst xmlns:a="http://schemas.openxmlformats.org/drawingml/2006/main">
               <a:ext uri="{FF2B5EF4-FFF2-40B4-BE49-F238E27FC236}">
-                <a16:creationId xmlns:a16="http://schemas.microsoft.com/office/drawing/2014/main" id="{09DD94A5-8CF6-4CC6-9FAF-1AAE9F86C651}"/>
+                <a16:creationId xmlns:a16="http://schemas.microsoft.com/office/drawing/2014/main" id="{9DAD2664-9B32-4402-A088-C1DEBD68E3CD}"/>
               </a:ext>
             </a:extLst>
           </p:cNvPr>
@@ -5422,7 +5409,7 @@
                 <a:ea typeface="Arial"/>
                 <a:cs typeface="Arial"/>
               </a:rPr>
-              <a:t>A fraction can be exactly representable in one format and not another.</a:t>
+              <a:t>If the answer seems surprising, decode the same fields back into the formula.</a:t>
             </a:r>
           </a:p>
         </p:txBody>
@@ -5432,7 +5419,7 @@
           <p:cNvPr id="6" name="">
             <a:extLst xmlns:a="http://schemas.openxmlformats.org/drawingml/2006/main">
               <a:ext uri="{FF2B5EF4-FFF2-40B4-BE49-F238E27FC236}">
-                <a16:creationId xmlns:a16="http://schemas.microsoft.com/office/drawing/2014/main" id="{BEB8226B-AC16-4616-9E79-3B5C231B3962}"/>
+                <a16:creationId xmlns:a16="http://schemas.microsoft.com/office/drawing/2014/main" id="{DBE61FAB-FD81-4893-85F8-90700B31187C}"/>
               </a:ext>
             </a:extLst>
           </p:cNvPr>
@@ -5480,7 +5467,7 @@
                 <a:ea typeface="Courier New"/>
                 <a:cs typeface="Courier New"/>
               </a:rPr>
-              <a:t>14 / 20</a:t>
+              <a:t>14 / 22</a:t>
             </a:r>
           </a:p>
         </p:txBody>
@@ -5488,7 +5475,7 @@
     </p:spTree>
     <p:extLst>
       <p:ext uri="{BB962C8B-B14F-4D97-AF65-F5344CB8AC3E}">
-        <p14:creationId xmlns:p14="http://schemas.microsoft.com/office/powerpoint/2010/main" val="1590754296"/>
+        <p14:creationId xmlns:p14="http://schemas.microsoft.com/office/powerpoint/2010/main" val="1502731382"/>
       </p:ext>
     </p:extLst>
   </p:cSld>
@@ -5519,7 +5506,7 @@
           <p:cNvPr id="7" name="">
             <a:extLst xmlns:a="http://schemas.openxmlformats.org/drawingml/2006/main">
               <a:ext uri="{FF2B5EF4-FFF2-40B4-BE49-F238E27FC236}">
-                <a16:creationId xmlns:a16="http://schemas.microsoft.com/office/drawing/2014/main" id="{93E43C1D-677A-4484-B42E-435337BCED51}"/>
+                <a16:creationId xmlns:a16="http://schemas.microsoft.com/office/drawing/2014/main" id="{35A724E8-02D1-4C78-A9D3-AE6AD6E2D594}"/>
               </a:ext>
             </a:extLst>
           </p:cNvPr>
@@ -5567,7 +5554,7 @@
                 <a:ea typeface="Courier New"/>
                 <a:cs typeface="Courier New"/>
               </a:rPr>
-              <a:t>FLOATING POINT · PRECISION</a:t>
+              <a:t>FLOATING POINT · PRACTICE</a:t>
             </a:r>
           </a:p>
         </p:txBody>
@@ -5577,7 +5564,7 @@
           <p:cNvPr id="2" name="">
             <a:extLst xmlns:a="http://schemas.openxmlformats.org/drawingml/2006/main">
               <a:ext uri="{FF2B5EF4-FFF2-40B4-BE49-F238E27FC236}">
-                <a16:creationId xmlns:a16="http://schemas.microsoft.com/office/drawing/2014/main" id="{074B736B-6CBC-48AB-BB9C-B94B56E89F35}"/>
+                <a16:creationId xmlns:a16="http://schemas.microsoft.com/office/drawing/2014/main" id="{D68140D5-AD40-4B2D-9276-45B94835A98B}"/>
               </a:ext>
             </a:extLst>
           </p:cNvPr>
@@ -5625,7 +5612,7 @@
                 <a:ea typeface="Arial"/>
                 <a:cs typeface="Arial"/>
               </a:rPr>
-              <a:t>Some ratios need rounding</a:t>
+              <a:t>Your turn: classify two ratios</a:t>
             </a:r>
           </a:p>
         </p:txBody>
@@ -5635,7 +5622,7 @@
           <p:cNvPr id="3" name="">
             <a:extLst xmlns:a="http://schemas.openxmlformats.org/drawingml/2006/main">
               <a:ext uri="{FF2B5EF4-FFF2-40B4-BE49-F238E27FC236}">
-                <a16:creationId xmlns:a16="http://schemas.microsoft.com/office/drawing/2014/main" id="{31BF5015-85C0-4422-9A8D-3AB1598AB1B5}"/>
+                <a16:creationId xmlns:a16="http://schemas.microsoft.com/office/drawing/2014/main" id="{AA9609DC-0513-451F-B1A4-CD75618D8A9F}"/>
               </a:ext>
             </a:extLst>
           </p:cNvPr>
@@ -5683,7 +5670,7 @@
                 <a:ea typeface="Arial"/>
                 <a:cs typeface="Arial"/>
               </a:rPr>
-              <a:t>Only eight fraction patterns fit in three bits. A ratio such as 1/3 has a repeating binary expansion and cannot be stored exactly.</a:t>
+              <a:t>Use the same practice format: 3 exponent bits, bias 3, and 3 fraction bits.</a:t>
             </a:r>
           </a:p>
           <a:p xmlns:a="http://schemas.openxmlformats.org/drawingml/2006/main">
@@ -5712,7 +5699,7 @@
                 <a:ea typeface="Arial"/>
                 <a:cs typeface="Arial"/>
               </a:rPr>
-              <a:t>The required rounding rule decides which nearby value to store.</a:t>
+              <a:t>For each ratio, decide normal or subnormal, then find E and F.</a:t>
             </a:r>
           </a:p>
         </p:txBody>
@@ -5722,7 +5709,7 @@
           <p:cNvPr id="4" name="">
             <a:extLst xmlns:a="http://schemas.openxmlformats.org/drawingml/2006/main">
               <a:ext uri="{FF2B5EF4-FFF2-40B4-BE49-F238E27FC236}">
-                <a16:creationId xmlns:a16="http://schemas.microsoft.com/office/drawing/2014/main" id="{442E6650-2F07-46E8-968E-92CAC81BA173}"/>
+                <a16:creationId xmlns:a16="http://schemas.microsoft.com/office/drawing/2014/main" id="{37A2E272-B675-4F8B-8D9A-1DD0C7D3E885}"/>
               </a:ext>
             </a:extLst>
           </p:cNvPr>
@@ -5770,7 +5757,55 @@
                 <a:ea typeface="Courier New"/>
                 <a:cs typeface="Courier New"/>
               </a:rPr>
-              <a:t>1/3 = 1.010101…₂ × 2⁻²</a:t>
+              <a:t>A. 3/2</a:t>
+            </a:r>
+          </a:p>
+          <a:p xmlns:a="http://schemas.openxmlformats.org/drawingml/2006/main">
+            <a:pPr>
+              <a:buNone/>
+              <a:defRPr sz="1650" b="0">
+                <a:solidFill>
+                  <a:srgbClr val="A7F3D0"/>
+                </a:solidFill>
+                <a:latin typeface="Courier New"/>
+                <a:ea typeface="Courier New"/>
+                <a:cs typeface="Courier New"/>
+              </a:defRPr>
+            </a:pPr>
+            <a:r>
+              <a:rPr sz="1650" b="0">
+                <a:solidFill>
+                  <a:srgbClr val="A7F3D0"/>
+                </a:solidFill>
+                <a:latin typeface="Courier New"/>
+                <a:ea typeface="Courier New"/>
+                <a:cs typeface="Courier New"/>
+              </a:rPr>
+              <a:t>   normal or subnormal?</a:t>
+            </a:r>
+          </a:p>
+          <a:p xmlns:a="http://schemas.openxmlformats.org/drawingml/2006/main">
+            <a:pPr>
+              <a:buNone/>
+              <a:defRPr sz="1650" b="0">
+                <a:solidFill>
+                  <a:srgbClr val="A7F3D0"/>
+                </a:solidFill>
+                <a:latin typeface="Courier New"/>
+                <a:ea typeface="Courier New"/>
+                <a:cs typeface="Courier New"/>
+              </a:defRPr>
+            </a:pPr>
+            <a:r>
+              <a:rPr sz="1650" b="0">
+                <a:solidFill>
+                  <a:srgbClr val="A7F3D0"/>
+                </a:solidFill>
+                <a:latin typeface="Courier New"/>
+                <a:ea typeface="Courier New"/>
+                <a:cs typeface="Courier New"/>
+              </a:rPr>
+              <a:t>   E = ?   F = ?</a:t>
             </a:r>
           </a:p>
           <a:p xmlns:a="http://schemas.openxmlformats.org/drawingml/2006/main">
@@ -5799,7 +5834,7 @@
                 <a:ea typeface="Courier New"/>
                 <a:cs typeface="Courier New"/>
               </a:rPr>
-              <a:t>Nearby values in this format:</a:t>
+              <a:t>B. 3/16</a:t>
             </a:r>
           </a:p>
           <a:p xmlns:a="http://schemas.openxmlformats.org/drawingml/2006/main">
@@ -5823,7 +5858,7 @@
                 <a:ea typeface="Courier New"/>
                 <a:cs typeface="Courier New"/>
               </a:rPr>
-              <a:t>F = 010₂  →  5/16</a:t>
+              <a:t>   normal or subnormal?</a:t>
             </a:r>
           </a:p>
           <a:p xmlns:a="http://schemas.openxmlformats.org/drawingml/2006/main">
@@ -5847,36 +5882,7 @@
                 <a:ea typeface="Courier New"/>
                 <a:cs typeface="Courier New"/>
               </a:rPr>
-              <a:t>F = 011₂  →  11/32</a:t>
-            </a:r>
-          </a:p>
-          <a:p xmlns:a="http://schemas.openxmlformats.org/drawingml/2006/main">
-            <a:r>
-              <a:t/>
-            </a:r>
-          </a:p>
-          <a:p xmlns:a="http://schemas.openxmlformats.org/drawingml/2006/main">
-            <a:pPr>
-              <a:buNone/>
-              <a:defRPr sz="1650" b="0">
-                <a:solidFill>
-                  <a:srgbClr val="A7F3D0"/>
-                </a:solidFill>
-                <a:latin typeface="Courier New"/>
-                <a:ea typeface="Courier New"/>
-                <a:cs typeface="Courier New"/>
-              </a:defRPr>
-            </a:pPr>
-            <a:r>
-              <a:rPr sz="1650" b="0">
-                <a:solidFill>
-                  <a:srgbClr val="A7F3D0"/>
-                </a:solidFill>
-                <a:latin typeface="Courier New"/>
-                <a:ea typeface="Courier New"/>
-                <a:cs typeface="Courier New"/>
-              </a:rPr>
-              <a:t>Neither is exactly 1/3.</a:t>
+              <a:t>   E = ?   F = ?</a:t>
             </a:r>
           </a:p>
         </p:txBody>
@@ -5886,7 +5892,7 @@
           <p:cNvPr id="5" name="">
             <a:extLst xmlns:a="http://schemas.openxmlformats.org/drawingml/2006/main">
               <a:ext uri="{FF2B5EF4-FFF2-40B4-BE49-F238E27FC236}">
-                <a16:creationId xmlns:a16="http://schemas.microsoft.com/office/drawing/2014/main" id="{7550F9BB-98E4-470C-A339-F30A270C656C}"/>
+                <a16:creationId xmlns:a16="http://schemas.microsoft.com/office/drawing/2014/main" id="{8F900304-F8E7-4C1C-B3A0-F1A0DD604211}"/>
               </a:ext>
             </a:extLst>
           </p:cNvPr>
@@ -5934,7 +5940,7 @@
                 <a:ea typeface="Arial"/>
                 <a:cs typeface="Arial"/>
               </a:rPr>
-              <a:t>Wait for the assignment’s rounding instructions before choosing a stored result.</a:t>
+              <a:t>Compare each value with the smallest normal, 1/4, before finding bits.</a:t>
             </a:r>
           </a:p>
         </p:txBody>
@@ -5944,7 +5950,7 @@
           <p:cNvPr id="6" name="">
             <a:extLst xmlns:a="http://schemas.openxmlformats.org/drawingml/2006/main">
               <a:ext uri="{FF2B5EF4-FFF2-40B4-BE49-F238E27FC236}">
-                <a16:creationId xmlns:a16="http://schemas.microsoft.com/office/drawing/2014/main" id="{73B702C8-3DF9-406E-8087-CF675ECCC2D1}"/>
+                <a16:creationId xmlns:a16="http://schemas.microsoft.com/office/drawing/2014/main" id="{16200DCD-0F16-4BE6-9538-9FDAF86C958E}"/>
               </a:ext>
             </a:extLst>
           </p:cNvPr>
@@ -5992,7 +5998,7 @@
                 <a:ea typeface="Courier New"/>
                 <a:cs typeface="Courier New"/>
               </a:rPr>
-              <a:t>15 / 20</a:t>
+              <a:t>15 / 22</a:t>
             </a:r>
           </a:p>
         </p:txBody>
@@ -6000,7 +6006,7 @@
     </p:spTree>
     <p:extLst>
       <p:ext uri="{BB962C8B-B14F-4D97-AF65-F5344CB8AC3E}">
-        <p14:creationId xmlns:p14="http://schemas.microsoft.com/office/powerpoint/2010/main" val="1704851840"/>
+        <p14:creationId xmlns:p14="http://schemas.microsoft.com/office/powerpoint/2010/main" val="2079659254"/>
       </p:ext>
     </p:extLst>
   </p:cSld>
@@ -6031,7 +6037,7 @@
           <p:cNvPr id="7" name="">
             <a:extLst xmlns:a="http://schemas.openxmlformats.org/drawingml/2006/main">
               <a:ext uri="{FF2B5EF4-FFF2-40B4-BE49-F238E27FC236}">
-                <a16:creationId xmlns:a16="http://schemas.microsoft.com/office/drawing/2014/main" id="{0BCE7827-648B-4B62-AE80-F3CE9BFFD594}"/>
+                <a16:creationId xmlns:a16="http://schemas.microsoft.com/office/drawing/2014/main" id="{D25A2A70-779E-4A39-9AD5-537DDE3C5B7A}"/>
               </a:ext>
             </a:extLst>
           </p:cNvPr>
@@ -6079,7 +6085,7 @@
                 <a:ea typeface="Courier New"/>
                 <a:cs typeface="Courier New"/>
               </a:rPr>
-              <a:t>FLOATING POINT · SPACING</a:t>
+              <a:t>FLOATING POINT · CHECK</a:t>
             </a:r>
           </a:p>
         </p:txBody>
@@ -6089,7 +6095,7 @@
           <p:cNvPr id="2" name="">
             <a:extLst xmlns:a="http://schemas.openxmlformats.org/drawingml/2006/main">
               <a:ext uri="{FF2B5EF4-FFF2-40B4-BE49-F238E27FC236}">
-                <a16:creationId xmlns:a16="http://schemas.microsoft.com/office/drawing/2014/main" id="{E6B69FE5-5D95-4306-AAF0-9A70AD531613}"/>
+                <a16:creationId xmlns:a16="http://schemas.microsoft.com/office/drawing/2014/main" id="{2F2733A3-E106-4C90-B097-BE7CB4577892}"/>
               </a:ext>
             </a:extLst>
           </p:cNvPr>
@@ -6137,7 +6143,7 @@
                 <a:ea typeface="Arial"/>
                 <a:cs typeface="Arial"/>
               </a:rPr>
-              <a:t>Precision changes with scale</a:t>
+              <a:t>Practice answers</a:t>
             </a:r>
           </a:p>
         </p:txBody>
@@ -6147,7 +6153,7 @@
           <p:cNvPr id="3" name="">
             <a:extLst xmlns:a="http://schemas.openxmlformats.org/drawingml/2006/main">
               <a:ext uri="{FF2B5EF4-FFF2-40B4-BE49-F238E27FC236}">
-                <a16:creationId xmlns:a16="http://schemas.microsoft.com/office/drawing/2014/main" id="{887FE9A9-E5DE-4BC1-94AD-59371BF9B78C}"/>
+                <a16:creationId xmlns:a16="http://schemas.microsoft.com/office/drawing/2014/main" id="{53BB6D32-B5C1-4BFB-8D41-7B7055B1A606}"/>
               </a:ext>
             </a:extLst>
           </p:cNvPr>
@@ -6195,7 +6201,7 @@
                 <a:ea typeface="Arial"/>
                 <a:cs typeface="Arial"/>
               </a:rPr>
-              <a:t>The same three fraction bits give eight values within each normal exponent range.</a:t>
+              <a:t>3/2 = 1.100₂ × 2⁰, so it is normal.</a:t>
             </a:r>
           </a:p>
           <a:p xmlns:a="http://schemas.openxmlformats.org/drawingml/2006/main">
@@ -6224,7 +6230,7 @@
                 <a:ea typeface="Arial"/>
                 <a:cs typeface="Arial"/>
               </a:rPr>
-              <a:t>When the exponent increases by one, the distance between neighboring values doubles.</a:t>
+              <a:t>3/16 is below 1/4, so it is subnormal. Since value = F/32, F = 6.</a:t>
             </a:r>
           </a:p>
         </p:txBody>
@@ -6234,7 +6240,7 @@
           <p:cNvPr id="4" name="">
             <a:extLst xmlns:a="http://schemas.openxmlformats.org/drawingml/2006/main">
               <a:ext uri="{FF2B5EF4-FFF2-40B4-BE49-F238E27FC236}">
-                <a16:creationId xmlns:a16="http://schemas.microsoft.com/office/drawing/2014/main" id="{CED75AEC-85E3-4520-B63E-09FCF9AACAE6}"/>
+                <a16:creationId xmlns:a16="http://schemas.microsoft.com/office/drawing/2014/main" id="{CD85FA7D-EF72-4F2A-85B4-517634BC5BE7}"/>
               </a:ext>
             </a:extLst>
           </p:cNvPr>
@@ -6282,7 +6288,7 @@
                 <a:ea typeface="Courier New"/>
                 <a:cs typeface="Courier New"/>
               </a:rPr>
-              <a:t>E = 3 (e = 0)</a:t>
+              <a:t>A. 3/2</a:t>
             </a:r>
           </a:p>
           <a:p xmlns:a="http://schemas.openxmlformats.org/drawingml/2006/main">
@@ -6306,7 +6312,7 @@
                 <a:ea typeface="Courier New"/>
                 <a:cs typeface="Courier New"/>
               </a:rPr>
-              <a:t>F = 0 → 1       F = 1 → 9/8</a:t>
+              <a:t>   E = 3 = 011₂</a:t>
             </a:r>
           </a:p>
           <a:p xmlns:a="http://schemas.openxmlformats.org/drawingml/2006/main">
@@ -6330,7 +6336,31 @@
                 <a:ea typeface="Courier New"/>
                 <a:cs typeface="Courier New"/>
               </a:rPr>
-              <a:t>step = 1/8</a:t>
+              <a:t>   F = 4 = 100₂</a:t>
+            </a:r>
+          </a:p>
+          <a:p xmlns:a="http://schemas.openxmlformats.org/drawingml/2006/main">
+            <a:pPr>
+              <a:buNone/>
+              <a:defRPr sz="1650" b="0">
+                <a:solidFill>
+                  <a:srgbClr val="A7F3D0"/>
+                </a:solidFill>
+                <a:latin typeface="Courier New"/>
+                <a:ea typeface="Courier New"/>
+                <a:cs typeface="Courier New"/>
+              </a:defRPr>
+            </a:pPr>
+            <a:r>
+              <a:rPr sz="1650" b="0">
+                <a:solidFill>
+                  <a:srgbClr val="A7F3D0"/>
+                </a:solidFill>
+                <a:latin typeface="Courier New"/>
+                <a:ea typeface="Courier New"/>
+                <a:cs typeface="Courier New"/>
+              </a:rPr>
+              <a:t>   Check: (1 + 4/8) × 1 = 3/2</a:t>
             </a:r>
           </a:p>
           <a:p xmlns:a="http://schemas.openxmlformats.org/drawingml/2006/main">
@@ -6359,7 +6389,7 @@
                 <a:ea typeface="Courier New"/>
                 <a:cs typeface="Courier New"/>
               </a:rPr>
-              <a:t>E = 4 (e = 1)</a:t>
+              <a:t>B. 3/16</a:t>
             </a:r>
           </a:p>
           <a:p xmlns:a="http://schemas.openxmlformats.org/drawingml/2006/main">
@@ -6383,7 +6413,7 @@
                 <a:ea typeface="Courier New"/>
                 <a:cs typeface="Courier New"/>
               </a:rPr>
-              <a:t>F = 0 → 2       F = 1 → 9/4</a:t>
+              <a:t>   E = 0 = 000₂</a:t>
             </a:r>
           </a:p>
           <a:p xmlns:a="http://schemas.openxmlformats.org/drawingml/2006/main">
@@ -6407,7 +6437,31 @@
                 <a:ea typeface="Courier New"/>
                 <a:cs typeface="Courier New"/>
               </a:rPr>
-              <a:t>step = 1/4</a:t>
+              <a:t>   F = 6 = 110₂</a:t>
+            </a:r>
+          </a:p>
+          <a:p xmlns:a="http://schemas.openxmlformats.org/drawingml/2006/main">
+            <a:pPr>
+              <a:buNone/>
+              <a:defRPr sz="1650" b="0">
+                <a:solidFill>
+                  <a:srgbClr val="A7F3D0"/>
+                </a:solidFill>
+                <a:latin typeface="Courier New"/>
+                <a:ea typeface="Courier New"/>
+                <a:cs typeface="Courier New"/>
+              </a:defRPr>
+            </a:pPr>
+            <a:r>
+              <a:rPr sz="1650" b="0">
+                <a:solidFill>
+                  <a:srgbClr val="A7F3D0"/>
+                </a:solidFill>
+                <a:latin typeface="Courier New"/>
+                <a:ea typeface="Courier New"/>
+                <a:cs typeface="Courier New"/>
+              </a:rPr>
+              <a:t>   Check: 6/32 = 3/16</a:t>
             </a:r>
           </a:p>
         </p:txBody>
@@ -6417,7 +6471,7 @@
           <p:cNvPr id="5" name="">
             <a:extLst xmlns:a="http://schemas.openxmlformats.org/drawingml/2006/main">
               <a:ext uri="{FF2B5EF4-FFF2-40B4-BE49-F238E27FC236}">
-                <a16:creationId xmlns:a16="http://schemas.microsoft.com/office/drawing/2014/main" id="{7A18BC8F-2DC5-4B6B-A4F9-10CDE1183DE6}"/>
+                <a16:creationId xmlns:a16="http://schemas.microsoft.com/office/drawing/2014/main" id="{09DD94A5-8CF6-4CC6-9FAF-1AAE9F86C651}"/>
               </a:ext>
             </a:extLst>
           </p:cNvPr>
@@ -6465,7 +6519,7 @@
                 <a:ea typeface="Arial"/>
                 <a:cs typeface="Arial"/>
               </a:rPr>
-              <a:t>This is why large floating point values have larger gaps.</a:t>
+              <a:t>A fraction can be exactly representable in one format and not another.</a:t>
             </a:r>
           </a:p>
         </p:txBody>
@@ -6475,7 +6529,7 @@
           <p:cNvPr id="6" name="">
             <a:extLst xmlns:a="http://schemas.openxmlformats.org/drawingml/2006/main">
               <a:ext uri="{FF2B5EF4-FFF2-40B4-BE49-F238E27FC236}">
-                <a16:creationId xmlns:a16="http://schemas.microsoft.com/office/drawing/2014/main" id="{94269C50-3A0A-4FBB-A1D2-A33411F72ECA}"/>
+                <a16:creationId xmlns:a16="http://schemas.microsoft.com/office/drawing/2014/main" id="{BEB8226B-AC16-4616-9E79-3B5C231B3962}"/>
               </a:ext>
             </a:extLst>
           </p:cNvPr>
@@ -6523,7 +6577,7 @@
                 <a:ea typeface="Courier New"/>
                 <a:cs typeface="Courier New"/>
               </a:rPr>
-              <a:t>16 / 20</a:t>
+              <a:t>16 / 22</a:t>
             </a:r>
           </a:p>
         </p:txBody>
@@ -6531,7 +6585,7 @@
     </p:spTree>
     <p:extLst>
       <p:ext uri="{BB962C8B-B14F-4D97-AF65-F5344CB8AC3E}">
-        <p14:creationId xmlns:p14="http://schemas.microsoft.com/office/powerpoint/2010/main" val="1018474765"/>
+        <p14:creationId xmlns:p14="http://schemas.microsoft.com/office/powerpoint/2010/main" val="1590754296"/>
       </p:ext>
     </p:extLst>
   </p:cSld>
@@ -6562,7 +6616,7 @@
           <p:cNvPr id="7" name="">
             <a:extLst xmlns:a="http://schemas.openxmlformats.org/drawingml/2006/main">
               <a:ext uri="{FF2B5EF4-FFF2-40B4-BE49-F238E27FC236}">
-                <a16:creationId xmlns:a16="http://schemas.microsoft.com/office/drawing/2014/main" id="{0BCE7827-648B-4B62-AE80-F3CE9BFFD594}"/>
+                <a16:creationId xmlns:a16="http://schemas.microsoft.com/office/drawing/2014/main" id="{93E43C1D-677A-4484-B42E-435337BCED51}"/>
               </a:ext>
             </a:extLst>
           </p:cNvPr>
@@ -6610,7 +6664,7 @@
                 <a:ea typeface="Courier New"/>
                 <a:cs typeface="Courier New"/>
               </a:rPr>
-              <a:t>FLOATING POINT · ASSIGNMENT PREVIEW</a:t>
+              <a:t>FLOATING POINT · PRECISION</a:t>
             </a:r>
           </a:p>
         </p:txBody>
@@ -6620,7 +6674,7 @@
           <p:cNvPr id="2" name="">
             <a:extLst xmlns:a="http://schemas.openxmlformats.org/drawingml/2006/main">
               <a:ext uri="{FF2B5EF4-FFF2-40B4-BE49-F238E27FC236}">
-                <a16:creationId xmlns:a16="http://schemas.microsoft.com/office/drawing/2014/main" id="{E6B69FE5-5D95-4306-AAF0-9A70AD531613}"/>
+                <a16:creationId xmlns:a16="http://schemas.microsoft.com/office/drawing/2014/main" id="{074B736B-6CBC-48AB-BB9C-B94B56E89F35}"/>
               </a:ext>
             </a:extLst>
           </p:cNvPr>
@@ -6668,7 +6722,7 @@
                 <a:ea typeface="Arial"/>
                 <a:cs typeface="Arial"/>
               </a:rPr>
-              <a:t>HW3 preview: five inputs</a:t>
+              <a:t>Some ratios need rounding</a:t>
             </a:r>
           </a:p>
         </p:txBody>
@@ -6678,7 +6732,7 @@
           <p:cNvPr id="3" name="">
             <a:extLst xmlns:a="http://schemas.openxmlformats.org/drawingml/2006/main">
               <a:ext uri="{FF2B5EF4-FFF2-40B4-BE49-F238E27FC236}">
-                <a16:creationId xmlns:a16="http://schemas.microsoft.com/office/drawing/2014/main" id="{887FE9A9-E5DE-4BC1-94AD-59371BF9B78C}"/>
+                <a16:creationId xmlns:a16="http://schemas.microsoft.com/office/drawing/2014/main" id="{31BF5015-85C0-4422-9A8D-3AB1598AB1B5}"/>
               </a:ext>
             </a:extLst>
           </p:cNvPr>
@@ -6726,7 +6780,36 @@
                 <a:ea typeface="Arial"/>
                 <a:cs typeface="Arial"/>
               </a:rPr>
-              <a:t>The professor plans a program that reads a format and a nonnegative ratio. The assignment has not been posted, so treat these details as a preview.</a:t>
+              <a:t>Only eight fraction patterns fit in three bits. A ratio such as 1/3 has a repeating binary expansion and cannot be stored exactly.</a:t>
+            </a:r>
+          </a:p>
+          <a:p xmlns:a="http://schemas.openxmlformats.org/drawingml/2006/main">
+            <a:r>
+              <a:t/>
+            </a:r>
+          </a:p>
+          <a:p xmlns:a="http://schemas.openxmlformats.org/drawingml/2006/main">
+            <a:pPr>
+              <a:buNone/>
+              <a:defRPr sz="1950" b="0">
+                <a:solidFill>
+                  <a:srgbClr val="D4D4D8"/>
+                </a:solidFill>
+                <a:latin typeface="Arial"/>
+                <a:ea typeface="Arial"/>
+                <a:cs typeface="Arial"/>
+              </a:defRPr>
+            </a:pPr>
+            <a:r>
+              <a:rPr sz="1950" b="0">
+                <a:solidFill>
+                  <a:srgbClr val="D4D4D8"/>
+                </a:solidFill>
+                <a:latin typeface="Arial"/>
+                <a:ea typeface="Arial"/>
+                <a:cs typeface="Arial"/>
+              </a:rPr>
+              <a:t>The required rounding rule decides which nearby value to store.</a:t>
             </a:r>
           </a:p>
         </p:txBody>
@@ -6736,7 +6819,7 @@
           <p:cNvPr id="4" name="">
             <a:extLst xmlns:a="http://schemas.openxmlformats.org/drawingml/2006/main">
               <a:ext uri="{FF2B5EF4-FFF2-40B4-BE49-F238E27FC236}">
-                <a16:creationId xmlns:a16="http://schemas.microsoft.com/office/drawing/2014/main" id="{CED75AEC-85E3-4520-B63E-09FCF9AACAE6}"/>
+                <a16:creationId xmlns:a16="http://schemas.microsoft.com/office/drawing/2014/main" id="{442E6650-2F07-46E8-968E-92CAC81BA173}"/>
               </a:ext>
             </a:extLst>
           </p:cNvPr>
@@ -6784,7 +6867,12 @@
                 <a:ea typeface="Courier New"/>
                 <a:cs typeface="Courier New"/>
               </a:rPr>
-              <a:t>format:  exp_bits = 3</a:t>
+              <a:t>1/3 = 1.010101…₂ × 2⁻²</a:t>
+            </a:r>
+          </a:p>
+          <a:p xmlns:a="http://schemas.openxmlformats.org/drawingml/2006/main">
+            <a:r>
+              <a:t/>
             </a:r>
           </a:p>
           <a:p xmlns:a="http://schemas.openxmlformats.org/drawingml/2006/main">
@@ -6808,7 +6896,7 @@
                 <a:ea typeface="Courier New"/>
                 <a:cs typeface="Courier New"/>
               </a:rPr>
-              <a:t>         bias = 3</a:t>
+              <a:t>Nearby values in this format:</a:t>
             </a:r>
           </a:p>
           <a:p xmlns:a="http://schemas.openxmlformats.org/drawingml/2006/main">
@@ -6832,7 +6920,31 @@
                 <a:ea typeface="Courier New"/>
                 <a:cs typeface="Courier New"/>
               </a:rPr>
-              <a:t>         sig_bits = 3</a:t>
+              <a:t>F = 010₂  →  5/16</a:t>
+            </a:r>
+          </a:p>
+          <a:p xmlns:a="http://schemas.openxmlformats.org/drawingml/2006/main">
+            <a:pPr>
+              <a:buNone/>
+              <a:defRPr sz="1650" b="0">
+                <a:solidFill>
+                  <a:srgbClr val="A7F3D0"/>
+                </a:solidFill>
+                <a:latin typeface="Courier New"/>
+                <a:ea typeface="Courier New"/>
+                <a:cs typeface="Courier New"/>
+              </a:defRPr>
+            </a:pPr>
+            <a:r>
+              <a:rPr sz="1650" b="0">
+                <a:solidFill>
+                  <a:srgbClr val="A7F3D0"/>
+                </a:solidFill>
+                <a:latin typeface="Courier New"/>
+                <a:ea typeface="Courier New"/>
+                <a:cs typeface="Courier New"/>
+              </a:rPr>
+              <a:t>F = 011₂  →  11/32</a:t>
             </a:r>
           </a:p>
           <a:p xmlns:a="http://schemas.openxmlformats.org/drawingml/2006/main">
@@ -6861,79 +6973,7 @@
                 <a:ea typeface="Courier New"/>
                 <a:cs typeface="Courier New"/>
               </a:rPr>
-              <a:t>value:   numerator = 5</a:t>
-            </a:r>
-          </a:p>
-          <a:p xmlns:a="http://schemas.openxmlformats.org/drawingml/2006/main">
-            <a:pPr>
-              <a:buNone/>
-              <a:defRPr sz="1650" b="0">
-                <a:solidFill>
-                  <a:srgbClr val="A7F3D0"/>
-                </a:solidFill>
-                <a:latin typeface="Courier New"/>
-                <a:ea typeface="Courier New"/>
-                <a:cs typeface="Courier New"/>
-              </a:defRPr>
-            </a:pPr>
-            <a:r>
-              <a:rPr sz="1650" b="0">
-                <a:solidFill>
-                  <a:srgbClr val="A7F3D0"/>
-                </a:solidFill>
-                <a:latin typeface="Courier New"/>
-                <a:ea typeface="Courier New"/>
-                <a:cs typeface="Courier New"/>
-              </a:rPr>
-              <a:t>         denominator = 2</a:t>
-            </a:r>
-          </a:p>
-          <a:p xmlns:a="http://schemas.openxmlformats.org/drawingml/2006/main">
-            <a:pPr>
-              <a:buNone/>
-              <a:defRPr sz="1650" b="0">
-                <a:solidFill>
-                  <a:srgbClr val="A7F3D0"/>
-                </a:solidFill>
-                <a:latin typeface="Courier New"/>
-                <a:ea typeface="Courier New"/>
-                <a:cs typeface="Courier New"/>
-              </a:defRPr>
-            </a:pPr>
-            <a:r>
-              <a:rPr sz="1650" b="0">
-                <a:solidFill>
-                  <a:srgbClr val="A7F3D0"/>
-                </a:solidFill>
-                <a:latin typeface="Courier New"/>
-                <a:ea typeface="Courier New"/>
-                <a:cs typeface="Courier New"/>
-              </a:rPr>
-              <a:t/>
-            </a:r>
-          </a:p>
-          <a:p xmlns:a="http://schemas.openxmlformats.org/drawingml/2006/main">
-            <a:pPr>
-              <a:buNone/>
-              <a:defRPr sz="1650" b="0">
-                <a:solidFill>
-                  <a:srgbClr val="A7F3D0"/>
-                </a:solidFill>
-                <a:latin typeface="Courier New"/>
-                <a:ea typeface="Courier New"/>
-                <a:cs typeface="Courier New"/>
-              </a:defRPr>
-            </a:pPr>
-            <a:r>
-              <a:rPr sz="1650" b="0">
-                <a:solidFill>
-                  <a:srgbClr val="A7F3D0"/>
-                </a:solidFill>
-                <a:latin typeface="Courier New"/>
-                <a:ea typeface="Courier New"/>
-                <a:cs typeface="Courier New"/>
-              </a:rPr>
-              <a:t>Find: E (exponent), F (fraction)</a:t>
+              <a:t>Neither is exactly 1/3.</a:t>
             </a:r>
           </a:p>
         </p:txBody>
@@ -6943,7 +6983,7 @@
           <p:cNvPr id="5" name="">
             <a:extLst xmlns:a="http://schemas.openxmlformats.org/drawingml/2006/main">
               <a:ext uri="{FF2B5EF4-FFF2-40B4-BE49-F238E27FC236}">
-                <a16:creationId xmlns:a16="http://schemas.microsoft.com/office/drawing/2014/main" id="{7A18BC8F-2DC5-4B6B-A4F9-10CDE1183DE6}"/>
+                <a16:creationId xmlns:a16="http://schemas.microsoft.com/office/drawing/2014/main" id="{7550F9BB-98E4-470C-A339-F30A270C656C}"/>
               </a:ext>
             </a:extLst>
           </p:cNvPr>
@@ -6991,7 +7031,7 @@
                 <a:ea typeface="Arial"/>
                 <a:cs typeface="Arial"/>
               </a:rPr>
-              <a:t>The first three inputs define the format; the last two define the value.</a:t>
+              <a:t>Wait for the assignment’s rounding instructions before choosing a stored result.</a:t>
             </a:r>
           </a:p>
         </p:txBody>
@@ -7001,7 +7041,7 @@
           <p:cNvPr id="6" name="">
             <a:extLst xmlns:a="http://schemas.openxmlformats.org/drawingml/2006/main">
               <a:ext uri="{FF2B5EF4-FFF2-40B4-BE49-F238E27FC236}">
-                <a16:creationId xmlns:a16="http://schemas.microsoft.com/office/drawing/2014/main" id="{94269C50-3A0A-4FBB-A1D2-A33411F72ECA}"/>
+                <a16:creationId xmlns:a16="http://schemas.microsoft.com/office/drawing/2014/main" id="{73B702C8-3DF9-406E-8087-CF675ECCC2D1}"/>
               </a:ext>
             </a:extLst>
           </p:cNvPr>
@@ -7049,7 +7089,7 @@
                 <a:ea typeface="Courier New"/>
                 <a:cs typeface="Courier New"/>
               </a:rPr>
-              <a:t>17 / 20</a:t>
+              <a:t>17 / 22</a:t>
             </a:r>
           </a:p>
         </p:txBody>
@@ -7057,7 +7097,7 @@
     </p:spTree>
     <p:extLst>
       <p:ext uri="{BB962C8B-B14F-4D97-AF65-F5344CB8AC3E}">
-        <p14:creationId xmlns:p14="http://schemas.microsoft.com/office/powerpoint/2010/main" val="1018474765"/>
+        <p14:creationId xmlns:p14="http://schemas.microsoft.com/office/powerpoint/2010/main" val="1704851840"/>
       </p:ext>
     </p:extLst>
   </p:cSld>
@@ -7136,7 +7176,7 @@
                 <a:ea typeface="Courier New"/>
                 <a:cs typeface="Courier New"/>
               </a:rPr>
-              <a:t>FLOATING POINT · WORKED INPUT</a:t>
+              <a:t>FLOATING POINT · SPACING</a:t>
             </a:r>
           </a:p>
         </p:txBody>
@@ -7194,7 +7234,7 @@
                 <a:ea typeface="Arial"/>
                 <a:cs typeface="Arial"/>
               </a:rPr>
-              <a:t>HW3 preview: encode 5/2</a:t>
+              <a:t>Precision changes with scale</a:t>
             </a:r>
           </a:p>
         </p:txBody>
@@ -7252,7 +7292,36 @@
                 <a:ea typeface="Arial"/>
                 <a:cs typeface="Arial"/>
               </a:rPr>
-              <a:t>With 3 exponent bits, bias 3, and 3 fraction bits, write 5/2 as 1.010₂ × 2¹. The true exponent is 1, so E = 1 + 3 = 4. The stored fraction is 010₂, so F = 2.</a:t>
+              <a:t>The same three fraction bits give eight values within each normal exponent range.</a:t>
+            </a:r>
+          </a:p>
+          <a:p xmlns:a="http://schemas.openxmlformats.org/drawingml/2006/main">
+            <a:r>
+              <a:t/>
+            </a:r>
+          </a:p>
+          <a:p xmlns:a="http://schemas.openxmlformats.org/drawingml/2006/main">
+            <a:pPr>
+              <a:buNone/>
+              <a:defRPr sz="1950" b="0">
+                <a:solidFill>
+                  <a:srgbClr val="D4D4D8"/>
+                </a:solidFill>
+                <a:latin typeface="Arial"/>
+                <a:ea typeface="Arial"/>
+                <a:cs typeface="Arial"/>
+              </a:defRPr>
+            </a:pPr>
+            <a:r>
+              <a:rPr sz="1950" b="0">
+                <a:solidFill>
+                  <a:srgbClr val="D4D4D8"/>
+                </a:solidFill>
+                <a:latin typeface="Arial"/>
+                <a:ea typeface="Arial"/>
+                <a:cs typeface="Arial"/>
+              </a:rPr>
+              <a:t>When the exponent increases by one, the distance between neighboring values doubles.</a:t>
             </a:r>
           </a:p>
         </p:txBody>
@@ -7310,7 +7379,7 @@
                 <a:ea typeface="Courier New"/>
                 <a:cs typeface="Courier New"/>
               </a:rPr>
-              <a:t>Inputs: 3 3 3 5 2</a:t>
+              <a:t>E = 3 (e = 0)</a:t>
             </a:r>
           </a:p>
           <a:p xmlns:a="http://schemas.openxmlformats.org/drawingml/2006/main">
@@ -7334,6 +7403,35 @@
                 <a:ea typeface="Courier New"/>
                 <a:cs typeface="Courier New"/>
               </a:rPr>
+              <a:t>F = 0 → 1       F = 1 → 9/8</a:t>
+            </a:r>
+          </a:p>
+          <a:p xmlns:a="http://schemas.openxmlformats.org/drawingml/2006/main">
+            <a:pPr>
+              <a:buNone/>
+              <a:defRPr sz="1650" b="0">
+                <a:solidFill>
+                  <a:srgbClr val="A7F3D0"/>
+                </a:solidFill>
+                <a:latin typeface="Courier New"/>
+                <a:ea typeface="Courier New"/>
+                <a:cs typeface="Courier New"/>
+              </a:defRPr>
+            </a:pPr>
+            <a:r>
+              <a:rPr sz="1650" b="0">
+                <a:solidFill>
+                  <a:srgbClr val="A7F3D0"/>
+                </a:solidFill>
+                <a:latin typeface="Courier New"/>
+                <a:ea typeface="Courier New"/>
+                <a:cs typeface="Courier New"/>
+              </a:rPr>
+              <a:t>step = 1/8</a:t>
+            </a:r>
+          </a:p>
+          <a:p xmlns:a="http://schemas.openxmlformats.org/drawingml/2006/main">
+            <a:r>
               <a:t/>
             </a:r>
           </a:p>
@@ -7358,30 +7456,7 @@
                 <a:ea typeface="Courier New"/>
                 <a:cs typeface="Courier New"/>
               </a:rPr>
-              <a:t>E = 4 = 100₂</a:t>
-            </a:r>
-          </a:p>
-          <a:p xmlns:a="http://schemas.openxmlformats.org/drawingml/2006/main">
-            <a:pPr>
-              <a:defRPr sz="1650">
-                <a:solidFill>
-                  <a:srgbClr val="A7F3D0"/>
-                </a:solidFill>
-                <a:latin typeface="Courier New"/>
-                <a:ea typeface="Courier New"/>
-                <a:cs typeface="Courier New"/>
-              </a:defRPr>
-            </a:pPr>
-            <a:r>
-              <a:rPr sz="1650">
-                <a:solidFill>
-                  <a:srgbClr val="A7F3D0"/>
-                </a:solidFill>
-                <a:latin typeface="Courier New"/>
-                <a:ea typeface="Courier New"/>
-                <a:cs typeface="Courier New"/>
-              </a:rPr>
-              <a:t>F = 2 = 010₂</a:t>
+              <a:t>E = 4 (e = 1)</a:t>
             </a:r>
           </a:p>
           <a:p xmlns:a="http://schemas.openxmlformats.org/drawingml/2006/main">
@@ -7405,7 +7480,7 @@
                 <a:ea typeface="Courier New"/>
                 <a:cs typeface="Courier New"/>
               </a:rPr>
-              <a:t/>
+              <a:t>F = 0 → 2       F = 1 → 9/4</a:t>
             </a:r>
           </a:p>
           <a:p xmlns:a="http://schemas.openxmlformats.org/drawingml/2006/main">
@@ -7429,55 +7504,7 @@
                 <a:ea typeface="Courier New"/>
                 <a:cs typeface="Courier New"/>
               </a:rPr>
-              <a:t>Output: 4 2</a:t>
-            </a:r>
-          </a:p>
-          <a:p xmlns:a="http://schemas.openxmlformats.org/drawingml/2006/main">
-            <a:pPr>
-              <a:buNone/>
-              <a:defRPr sz="1650" b="0">
-                <a:solidFill>
-                  <a:srgbClr val="A7F3D0"/>
-                </a:solidFill>
-                <a:latin typeface="Courier New"/>
-                <a:ea typeface="Courier New"/>
-                <a:cs typeface="Courier New"/>
-              </a:defRPr>
-            </a:pPr>
-            <a:r>
-              <a:rPr sz="1650" b="0">
-                <a:solidFill>
-                  <a:srgbClr val="A7F3D0"/>
-                </a:solidFill>
-                <a:latin typeface="Courier New"/>
-                <a:ea typeface="Courier New"/>
-                <a:cs typeface="Courier New"/>
-              </a:rPr>
-              <a:t/>
-            </a:r>
-          </a:p>
-          <a:p xmlns:a="http://schemas.openxmlformats.org/drawingml/2006/main">
-            <a:pPr>
-              <a:buNone/>
-              <a:defRPr sz="1650" b="0">
-                <a:solidFill>
-                  <a:srgbClr val="A7F3D0"/>
-                </a:solidFill>
-                <a:latin typeface="Courier New"/>
-                <a:ea typeface="Courier New"/>
-                <a:cs typeface="Courier New"/>
-              </a:defRPr>
-            </a:pPr>
-            <a:r>
-              <a:rPr sz="1650" b="0">
-                <a:solidFill>
-                  <a:srgbClr val="A7F3D0"/>
-                </a:solidFill>
-                <a:latin typeface="Courier New"/>
-                <a:ea typeface="Courier New"/>
-                <a:cs typeface="Courier New"/>
-              </a:rPr>
-              <a:t>Check: (1 + 2/8) × 2¹ = 5/2</a:t>
+              <a:t>step = 1/4</a:t>
             </a:r>
           </a:p>
         </p:txBody>
@@ -7535,7 +7562,7 @@
                 <a:ea typeface="Arial"/>
                 <a:cs typeface="Arial"/>
               </a:rPr>
-              <a:t>Move the binary point before taking the stored fraction bits.</a:t>
+              <a:t>This is why large floating point values have larger gaps.</a:t>
             </a:r>
           </a:p>
         </p:txBody>
@@ -7593,7 +7620,7 @@
                 <a:ea typeface="Courier New"/>
                 <a:cs typeface="Courier New"/>
               </a:rPr>
-              <a:t>18 / 20</a:t>
+              <a:t>18 / 22</a:t>
             </a:r>
           </a:p>
         </p:txBody>
@@ -7680,7 +7707,7 @@
                 <a:ea typeface="Courier New"/>
                 <a:cs typeface="Courier New"/>
               </a:rPr>
-              <a:t>FLOATING POINT · METHOD</a:t>
+              <a:t>FLOATING POINT · ASSIGNMENT PREVIEW</a:t>
             </a:r>
           </a:p>
         </p:txBody>
@@ -7738,7 +7765,7 @@
                 <a:ea typeface="Arial"/>
                 <a:cs typeface="Arial"/>
               </a:rPr>
-              <a:t>HW3 preview: choose the equation</a:t>
+              <a:t>HW3 preview: five inputs</a:t>
             </a:r>
           </a:p>
         </p:txBody>
@@ -7796,7 +7823,7 @@
                 <a:ea typeface="Arial"/>
                 <a:cs typeface="Arial"/>
               </a:rPr>
-              <a:t>For a nonzero ratio, compare its value with the smallest normal, 2^(1−bias). That tells you which equation to use. Solve for E and F, then decode them to check.</a:t>
+              <a:t>The professor plans a program that reads a format and a nonnegative ratio. The assignment has not been posted, so treat these details as a preview.</a:t>
             </a:r>
           </a:p>
         </p:txBody>
@@ -7854,7 +7881,7 @@
                 <a:ea typeface="Courier New"/>
                 <a:cs typeface="Courier New"/>
               </a:rPr>
-              <a:t>Normal (E &gt; 0):</a:t>
+              <a:t>format:  exp_bits = 3</a:t>
             </a:r>
           </a:p>
           <a:p xmlns:a="http://schemas.openxmlformats.org/drawingml/2006/main">
@@ -7878,7 +7905,7 @@
                 <a:ea typeface="Courier New"/>
                 <a:cs typeface="Courier New"/>
               </a:rPr>
-              <a:t>value = (1 + F/2^p) × 2^(E−bias)</a:t>
+              <a:t>         bias = 3</a:t>
             </a:r>
           </a:p>
           <a:p xmlns:a="http://schemas.openxmlformats.org/drawingml/2006/main">
@@ -7902,34 +7929,16 @@
                 <a:ea typeface="Courier New"/>
                 <a:cs typeface="Courier New"/>
               </a:rPr>
+              <a:t>         sig_bits = 3</a:t>
+            </a:r>
+          </a:p>
+          <a:p xmlns:a="http://schemas.openxmlformats.org/drawingml/2006/main">
+            <a:r>
               <a:t/>
             </a:r>
           </a:p>
           <a:p xmlns:a="http://schemas.openxmlformats.org/drawingml/2006/main">
             <a:pPr>
-              <a:defRPr sz="1650">
-                <a:solidFill>
-                  <a:srgbClr val="A7F3D0"/>
-                </a:solidFill>
-                <a:latin typeface="Courier New"/>
-                <a:ea typeface="Courier New"/>
-                <a:cs typeface="Courier New"/>
-              </a:defRPr>
-            </a:pPr>
-            <a:r>
-              <a:rPr sz="1650">
-                <a:solidFill>
-                  <a:srgbClr val="A7F3D0"/>
-                </a:solidFill>
-                <a:latin typeface="Courier New"/>
-                <a:ea typeface="Courier New"/>
-                <a:cs typeface="Courier New"/>
-              </a:rPr>
-              <a:t>Subnormal (E = 0):</a:t>
-            </a:r>
-          </a:p>
-          <a:p xmlns:a="http://schemas.openxmlformats.org/drawingml/2006/main">
-            <a:pPr>
               <a:buNone/>
               <a:defRPr sz="1650" b="0">
                 <a:solidFill>
@@ -7949,7 +7958,7 @@
                 <a:ea typeface="Courier New"/>
                 <a:cs typeface="Courier New"/>
               </a:rPr>
-              <a:t>value = (F/2^p) × 2^(1−bias)</a:t>
+              <a:t>value:   numerator = 5</a:t>
             </a:r>
           </a:p>
           <a:p xmlns:a="http://schemas.openxmlformats.org/drawingml/2006/main">
@@ -7973,6 +7982,30 @@
                 <a:ea typeface="Courier New"/>
                 <a:cs typeface="Courier New"/>
               </a:rPr>
+              <a:t>         denominator = 2</a:t>
+            </a:r>
+          </a:p>
+          <a:p xmlns:a="http://schemas.openxmlformats.org/drawingml/2006/main">
+            <a:pPr>
+              <a:buNone/>
+              <a:defRPr sz="1650" b="0">
+                <a:solidFill>
+                  <a:srgbClr val="A7F3D0"/>
+                </a:solidFill>
+                <a:latin typeface="Courier New"/>
+                <a:ea typeface="Courier New"/>
+                <a:cs typeface="Courier New"/>
+              </a:defRPr>
+            </a:pPr>
+            <a:r>
+              <a:rPr sz="1650" b="0">
+                <a:solidFill>
+                  <a:srgbClr val="A7F3D0"/>
+                </a:solidFill>
+                <a:latin typeface="Courier New"/>
+                <a:ea typeface="Courier New"/>
+                <a:cs typeface="Courier New"/>
+              </a:rPr>
               <a:t/>
             </a:r>
           </a:p>
@@ -7997,7 +8030,7 @@
                 <a:ea typeface="Courier New"/>
                 <a:cs typeface="Courier New"/>
               </a:rPr>
-              <a:t>If numerator = 0: E = 0, F = 0</a:t>
+              <a:t>Find: E (exponent), F (fraction)</a:t>
             </a:r>
           </a:p>
         </p:txBody>
@@ -8055,7 +8088,7 @@
                 <a:ea typeface="Arial"/>
                 <a:cs typeface="Arial"/>
               </a:rPr>
-              <a:t>Use the supplied p and bias, not the values from our practice format.</a:t>
+              <a:t>The first three inputs define the format; the last two define the value.</a:t>
             </a:r>
           </a:p>
         </p:txBody>
@@ -8113,7 +8146,7 @@
                 <a:ea typeface="Courier New"/>
                 <a:cs typeface="Courier New"/>
               </a:rPr>
-              <a:t>19 / 20</a:t>
+              <a:t>19 / 22</a:t>
             </a:r>
           </a:p>
         </p:txBody>
@@ -8509,7 +8542,7 @@
                 <a:ea typeface="Courier New"/>
                 <a:cs typeface="Courier New"/>
               </a:rPr>
-              <a:t>3 stored fraction bits</a:t>
+              <a:t>3 stored significand (fraction) bits</a:t>
             </a:r>
           </a:p>
         </p:txBody>
@@ -8625,7 +8658,7 @@
                 <a:ea typeface="Courier New"/>
                 <a:cs typeface="Courier New"/>
               </a:rPr>
-              <a:t>02 / 20</a:t>
+              <a:t>02 / 22</a:t>
             </a:r>
           </a:p>
         </p:txBody>
@@ -8664,7 +8697,7 @@
           <p:cNvPr id="7" name="">
             <a:extLst xmlns:a="http://schemas.openxmlformats.org/drawingml/2006/main">
               <a:ext uri="{FF2B5EF4-FFF2-40B4-BE49-F238E27FC236}">
-                <a16:creationId xmlns:a16="http://schemas.microsoft.com/office/drawing/2014/main" id="{4989B079-C3E8-43BB-8638-96121018769A}"/>
+                <a16:creationId xmlns:a16="http://schemas.microsoft.com/office/drawing/2014/main" id="{0BCE7827-648B-4B62-AE80-F3CE9BFFD594}"/>
               </a:ext>
             </a:extLst>
           </p:cNvPr>
@@ -8712,7 +8745,7 @@
                 <a:ea typeface="Courier New"/>
                 <a:cs typeface="Courier New"/>
               </a:rPr>
-              <a:t>FLOATING POINT · RECAP</a:t>
+              <a:t>FLOATING POINT · WORKED INPUT</a:t>
             </a:r>
           </a:p>
         </p:txBody>
@@ -8722,7 +8755,7 @@
           <p:cNvPr id="2" name="">
             <a:extLst xmlns:a="http://schemas.openxmlformats.org/drawingml/2006/main">
               <a:ext uri="{FF2B5EF4-FFF2-40B4-BE49-F238E27FC236}">
-                <a16:creationId xmlns:a16="http://schemas.microsoft.com/office/drawing/2014/main" id="{95D3113E-85F1-4E22-A62E-265E94FE3617}"/>
+                <a16:creationId xmlns:a16="http://schemas.microsoft.com/office/drawing/2014/main" id="{E6B69FE5-5D95-4306-AAF0-9A70AD531613}"/>
               </a:ext>
             </a:extLst>
           </p:cNvPr>
@@ -8770,7 +8803,7 @@
                 <a:ea typeface="Arial"/>
                 <a:cs typeface="Arial"/>
               </a:rPr>
-              <a:t>How to check an encoding</a:t>
+              <a:t>HW3 preview: encode 5/2</a:t>
             </a:r>
           </a:p>
         </p:txBody>
@@ -8780,7 +8813,7 @@
           <p:cNvPr id="3" name="">
             <a:extLst xmlns:a="http://schemas.openxmlformats.org/drawingml/2006/main">
               <a:ext uri="{FF2B5EF4-FFF2-40B4-BE49-F238E27FC236}">
-                <a16:creationId xmlns:a16="http://schemas.microsoft.com/office/drawing/2014/main" id="{8EC5E33C-BA7C-4ADE-9FC3-9ABD9F3C6FD4}"/>
+                <a16:creationId xmlns:a16="http://schemas.microsoft.com/office/drawing/2014/main" id="{887FE9A9-E5DE-4BC1-94AD-59371BF9B78C}"/>
               </a:ext>
             </a:extLst>
           </p:cNvPr>
@@ -8828,36 +8861,7 @@
                 <a:ea typeface="Arial"/>
                 <a:cs typeface="Arial"/>
               </a:rPr>
-              <a:t>Compare the value with the smallest normal. Choose the normal or subnormal equation, work out the fields, then decode them to check.</a:t>
-            </a:r>
-          </a:p>
-          <a:p xmlns:a="http://schemas.openxmlformats.org/drawingml/2006/main">
-            <a:r>
-              <a:t/>
-            </a:r>
-          </a:p>
-          <a:p xmlns:a="http://schemas.openxmlformats.org/drawingml/2006/main">
-            <a:pPr>
-              <a:buNone/>
-              <a:defRPr sz="1950" b="0">
-                <a:solidFill>
-                  <a:srgbClr val="D4D4D8"/>
-                </a:solidFill>
-                <a:latin typeface="Arial"/>
-                <a:ea typeface="Arial"/>
-                <a:cs typeface="Arial"/>
-              </a:defRPr>
-            </a:pPr>
-            <a:r>
-              <a:rPr sz="1950" b="0">
-                <a:solidFill>
-                  <a:srgbClr val="D4D4D8"/>
-                </a:solidFill>
-                <a:latin typeface="Arial"/>
-                <a:ea typeface="Arial"/>
-                <a:cs typeface="Arial"/>
-              </a:rPr>
-              <a:t>If the value is not exact, use the rounding rule given with the problem.</a:t>
+              <a:t>With 3 exponent bits, bias 3, and 3 fraction bits, write 5/2 as 1.010₂ × 2¹. The true exponent is 1, so E = 1 + 3 = 4. The stored fraction is 010₂, so F = 2.</a:t>
             </a:r>
           </a:p>
         </p:txBody>
@@ -8867,7 +8871,7 @@
           <p:cNvPr id="4" name="">
             <a:extLst xmlns:a="http://schemas.openxmlformats.org/drawingml/2006/main">
               <a:ext uri="{FF2B5EF4-FFF2-40B4-BE49-F238E27FC236}">
-                <a16:creationId xmlns:a16="http://schemas.microsoft.com/office/drawing/2014/main" id="{EA939046-DA6B-448C-A179-5B13743C72F3}"/>
+                <a16:creationId xmlns:a16="http://schemas.microsoft.com/office/drawing/2014/main" id="{CED75AEC-85E3-4520-B63E-09FCF9AACAE6}"/>
               </a:ext>
             </a:extLst>
           </p:cNvPr>
@@ -8915,11 +8919,30 @@
                 <a:ea typeface="Courier New"/>
                 <a:cs typeface="Courier New"/>
               </a:rPr>
-              <a:t>Our practice format</a:t>
-            </a:r>
-          </a:p>
-          <a:p xmlns:a="http://schemas.openxmlformats.org/drawingml/2006/main">
-            <a:r>
+              <a:t>Inputs: 3 3 3 5 2</a:t>
+            </a:r>
+          </a:p>
+          <a:p xmlns:a="http://schemas.openxmlformats.org/drawingml/2006/main">
+            <a:pPr>
+              <a:buNone/>
+              <a:defRPr sz="1650" b="0">
+                <a:solidFill>
+                  <a:srgbClr val="A7F3D0"/>
+                </a:solidFill>
+                <a:latin typeface="Courier New"/>
+                <a:ea typeface="Courier New"/>
+                <a:cs typeface="Courier New"/>
+              </a:defRPr>
+            </a:pPr>
+            <a:r>
+              <a:rPr sz="1650" b="0">
+                <a:solidFill>
+                  <a:srgbClr val="A7F3D0"/>
+                </a:solidFill>
+                <a:latin typeface="Courier New"/>
+                <a:ea typeface="Courier New"/>
+                <a:cs typeface="Courier New"/>
+              </a:rPr>
               <a:t/>
             </a:r>
           </a:p>
@@ -8944,7 +8967,31 @@
                 <a:ea typeface="Courier New"/>
                 <a:cs typeface="Courier New"/>
               </a:rPr>
-              <a:t>Normal:    (1 + F/8) × 2^(E−3)</a:t>
+              <a:t>E = 4 = 100₂</a:t>
+            </a:r>
+          </a:p>
+          <a:p xmlns:a="http://schemas.openxmlformats.org/drawingml/2006/main">
+            <a:pPr>
+              <a:buNone/>
+              <a:defRPr sz="1650">
+                <a:solidFill>
+                  <a:srgbClr val="A7F3D0"/>
+                </a:solidFill>
+                <a:latin typeface="Courier New"/>
+                <a:ea typeface="Courier New"/>
+                <a:cs typeface="Courier New"/>
+              </a:defRPr>
+            </a:pPr>
+            <a:r>
+              <a:rPr sz="1650">
+                <a:solidFill>
+                  <a:srgbClr val="A7F3D0"/>
+                </a:solidFill>
+                <a:latin typeface="Courier New"/>
+                <a:ea typeface="Courier New"/>
+                <a:cs typeface="Courier New"/>
+              </a:rPr>
+              <a:t>F = 2 = 010₂</a:t>
             </a:r>
           </a:p>
           <a:p xmlns:a="http://schemas.openxmlformats.org/drawingml/2006/main">
@@ -8968,11 +9015,6 @@
                 <a:ea typeface="Courier New"/>
                 <a:cs typeface="Courier New"/>
               </a:rPr>
-              <a:t>Subnormal: (    F/8) × 2⁻²</a:t>
-            </a:r>
-          </a:p>
-          <a:p xmlns:a="http://schemas.openxmlformats.org/drawingml/2006/main">
-            <a:r>
               <a:t/>
             </a:r>
           </a:p>
@@ -8997,11 +9039,30 @@
                 <a:ea typeface="Courier New"/>
                 <a:cs typeface="Courier New"/>
               </a:rPr>
-              <a:t>E = 0, F = 0  →  zero</a:t>
-            </a:r>
-          </a:p>
-          <a:p xmlns:a="http://schemas.openxmlformats.org/drawingml/2006/main">
-            <a:r>
+              <a:t>Output: 4 2</a:t>
+            </a:r>
+          </a:p>
+          <a:p xmlns:a="http://schemas.openxmlformats.org/drawingml/2006/main">
+            <a:pPr>
+              <a:buNone/>
+              <a:defRPr sz="1650" b="0">
+                <a:solidFill>
+                  <a:srgbClr val="A7F3D0"/>
+                </a:solidFill>
+                <a:latin typeface="Courier New"/>
+                <a:ea typeface="Courier New"/>
+                <a:cs typeface="Courier New"/>
+              </a:defRPr>
+            </a:pPr>
+            <a:r>
+              <a:rPr sz="1650" b="0">
+                <a:solidFill>
+                  <a:srgbClr val="A7F3D0"/>
+                </a:solidFill>
+                <a:latin typeface="Courier New"/>
+                <a:ea typeface="Courier New"/>
+                <a:cs typeface="Courier New"/>
+              </a:rPr>
               <a:t/>
             </a:r>
           </a:p>
@@ -9026,7 +9087,7 @@
                 <a:ea typeface="Courier New"/>
                 <a:cs typeface="Courier New"/>
               </a:rPr>
-              <a:t>Decode your bits as a final check.</a:t>
+              <a:t>Check: (1 + 2/8) × 2¹ = 5/2</a:t>
             </a:r>
           </a:p>
         </p:txBody>
@@ -9036,7 +9097,7 @@
           <p:cNvPr id="5" name="">
             <a:extLst xmlns:a="http://schemas.openxmlformats.org/drawingml/2006/main">
               <a:ext uri="{FF2B5EF4-FFF2-40B4-BE49-F238E27FC236}">
-                <a16:creationId xmlns:a16="http://schemas.microsoft.com/office/drawing/2014/main" id="{585A0E73-828D-45A1-9AD7-8EED8C5E7EB1}"/>
+                <a16:creationId xmlns:a16="http://schemas.microsoft.com/office/drawing/2014/main" id="{7A18BC8F-2DC5-4B6B-A4F9-10CDE1183DE6}"/>
               </a:ext>
             </a:extLst>
           </p:cNvPr>
@@ -9084,7 +9145,7 @@
                 <a:ea typeface="Arial"/>
                 <a:cs typeface="Arial"/>
               </a:rPr>
-              <a:t>A correct encoding must reproduce the intended value or its required rounded value.</a:t>
+              <a:t>Move the binary point before taking the stored fraction bits.</a:t>
             </a:r>
           </a:p>
         </p:txBody>
@@ -9094,7 +9155,7 @@
           <p:cNvPr id="6" name="">
             <a:extLst xmlns:a="http://schemas.openxmlformats.org/drawingml/2006/main">
               <a:ext uri="{FF2B5EF4-FFF2-40B4-BE49-F238E27FC236}">
-                <a16:creationId xmlns:a16="http://schemas.microsoft.com/office/drawing/2014/main" id="{E1FBC5BD-1F5D-42FA-AC83-E0BF862F4EDF}"/>
+                <a16:creationId xmlns:a16="http://schemas.microsoft.com/office/drawing/2014/main" id="{94269C50-3A0A-4FBB-A1D2-A33411F72ECA}"/>
               </a:ext>
             </a:extLst>
           </p:cNvPr>
@@ -9142,7 +9203,1093 @@
                 <a:ea typeface="Courier New"/>
                 <a:cs typeface="Courier New"/>
               </a:rPr>
-              <a:t>20 / 20</a:t>
+              <a:t>20 / 22</a:t>
+            </a:r>
+          </a:p>
+        </p:txBody>
+      </p:sp>
+    </p:spTree>
+    <p:extLst>
+      <p:ext uri="{BB962C8B-B14F-4D97-AF65-F5344CB8AC3E}">
+        <p14:creationId xmlns:p14="http://schemas.microsoft.com/office/powerpoint/2010/main" val="1018474765"/>
+      </p:ext>
+    </p:extLst>
+  </p:cSld>
+</p:sld>
+</file>
+
+<file path=ppt/slides/slide21.xml><?xml version="1.0" encoding="utf-8"?>
+<p:sld xmlns:p="http://schemas.openxmlformats.org/presentationml/2006/main">
+  <p:cSld>
+    <p:bg>
+      <p:bgPr>
+        <a:solidFill xmlns:a="http://schemas.openxmlformats.org/drawingml/2006/main">
+          <a:srgbClr val="09090B"/>
+        </a:solidFill>
+      </p:bgPr>
+    </p:bg>
+    <p:spTree>
+      <p:nvGrpSpPr>
+        <p:cNvPr id="1" name=""/>
+        <p:cNvGrpSpPr/>
+        <p:nvPr/>
+      </p:nvGrpSpPr>
+      <p:grpSpPr>
+        <a:xfrm xmlns:a="http://schemas.openxmlformats.org/drawingml/2006/main"/>
+      </p:grpSpPr>
+      <p:sp>
+        <p:nvSpPr>
+          <p:cNvPr id="7" name="">
+            <a:extLst xmlns:a="http://schemas.openxmlformats.org/drawingml/2006/main">
+              <a:ext uri="{FF2B5EF4-FFF2-40B4-BE49-F238E27FC236}">
+                <a16:creationId xmlns:a16="http://schemas.microsoft.com/office/drawing/2014/main" id="{0BCE7827-648B-4B62-AE80-F3CE9BFFD594}"/>
+              </a:ext>
+            </a:extLst>
+          </p:cNvPr>
+          <p:cNvSpPr>
+            <a:spLocks xmlns:a="http://schemas.openxmlformats.org/drawingml/2006/main" noGrp="1"/>
+          </p:cNvSpPr>
+          <p:nvPr/>
+        </p:nvSpPr>
+        <p:spPr>
+          <a:xfrm xmlns:a="http://schemas.openxmlformats.org/drawingml/2006/main">
+            <a:off x="685800" y="361950"/>
+            <a:ext cx="10477500" cy="285750"/>
+          </a:xfrm>
+          <a:prstGeom xmlns:a="http://schemas.openxmlformats.org/drawingml/2006/main" prst="rect">
+            <a:avLst/>
+          </a:prstGeom>
+          <a:noFill xmlns:a="http://schemas.openxmlformats.org/drawingml/2006/main"/>
+          <a:ln xmlns:a="http://schemas.openxmlformats.org/drawingml/2006/main" w="0">
+            <a:noFill/>
+          </a:ln>
+        </p:spPr>
+        <p:txBody>
+          <a:bodyPr xmlns:a="http://schemas.openxmlformats.org/drawingml/2006/main" anchor="t">
+            <a:normAutofit fontScale="100000"/>
+          </a:bodyPr>
+          <a:lstStyle xmlns:a="http://schemas.openxmlformats.org/drawingml/2006/main"/>
+          <a:p xmlns:a="http://schemas.openxmlformats.org/drawingml/2006/main">
+            <a:pPr>
+              <a:buNone/>
+              <a:defRPr sz="1275" b="0">
+                <a:solidFill>
+                  <a:srgbClr val="6EE7B7"/>
+                </a:solidFill>
+                <a:latin typeface="Courier New"/>
+                <a:ea typeface="Courier New"/>
+                <a:cs typeface="Courier New"/>
+              </a:defRPr>
+            </a:pPr>
+            <a:r>
+              <a:rPr sz="1275" b="0">
+                <a:solidFill>
+                  <a:srgbClr val="6EE7B7"/>
+                </a:solidFill>
+                <a:latin typeface="Courier New"/>
+                <a:ea typeface="Courier New"/>
+                <a:cs typeface="Courier New"/>
+              </a:rPr>
+              <a:t>FLOATING POINT · METHOD</a:t>
+            </a:r>
+          </a:p>
+        </p:txBody>
+      </p:sp>
+      <p:sp>
+        <p:nvSpPr>
+          <p:cNvPr id="2" name="">
+            <a:extLst xmlns:a="http://schemas.openxmlformats.org/drawingml/2006/main">
+              <a:ext uri="{FF2B5EF4-FFF2-40B4-BE49-F238E27FC236}">
+                <a16:creationId xmlns:a16="http://schemas.microsoft.com/office/drawing/2014/main" id="{E6B69FE5-5D95-4306-AAF0-9A70AD531613}"/>
+              </a:ext>
+            </a:extLst>
+          </p:cNvPr>
+          <p:cNvSpPr>
+            <a:spLocks xmlns:a="http://schemas.openxmlformats.org/drawingml/2006/main" noGrp="1"/>
+          </p:cNvSpPr>
+          <p:nvPr/>
+        </p:nvSpPr>
+        <p:spPr>
+          <a:xfrm xmlns:a="http://schemas.openxmlformats.org/drawingml/2006/main">
+            <a:off x="685800" y="885825"/>
+            <a:ext cx="10820400" cy="1066800"/>
+          </a:xfrm>
+          <a:prstGeom xmlns:a="http://schemas.openxmlformats.org/drawingml/2006/main" prst="rect">
+            <a:avLst/>
+          </a:prstGeom>
+          <a:noFill xmlns:a="http://schemas.openxmlformats.org/drawingml/2006/main"/>
+          <a:ln xmlns:a="http://schemas.openxmlformats.org/drawingml/2006/main" w="0">
+            <a:noFill/>
+          </a:ln>
+        </p:spPr>
+        <p:txBody>
+          <a:bodyPr xmlns:a="http://schemas.openxmlformats.org/drawingml/2006/main" anchor="t">
+            <a:normAutofit fontScale="100000"/>
+          </a:bodyPr>
+          <a:lstStyle xmlns:a="http://schemas.openxmlformats.org/drawingml/2006/main"/>
+          <a:p xmlns:a="http://schemas.openxmlformats.org/drawingml/2006/main">
+            <a:pPr>
+              <a:buNone/>
+              <a:defRPr sz="3600" b="0">
+                <a:solidFill>
+                  <a:srgbClr val="FAFAFA"/>
+                </a:solidFill>
+                <a:latin typeface="Arial"/>
+                <a:ea typeface="Arial"/>
+                <a:cs typeface="Arial"/>
+              </a:defRPr>
+            </a:pPr>
+            <a:r>
+              <a:rPr sz="3600" b="0">
+                <a:solidFill>
+                  <a:srgbClr val="FAFAFA"/>
+                </a:solidFill>
+                <a:latin typeface="Arial"/>
+                <a:ea typeface="Arial"/>
+                <a:cs typeface="Arial"/>
+              </a:rPr>
+              <a:t>HW3 preview: choose the equation</a:t>
+            </a:r>
+          </a:p>
+        </p:txBody>
+      </p:sp>
+      <p:sp>
+        <p:nvSpPr>
+          <p:cNvPr id="3" name="">
+            <a:extLst xmlns:a="http://schemas.openxmlformats.org/drawingml/2006/main">
+              <a:ext uri="{FF2B5EF4-FFF2-40B4-BE49-F238E27FC236}">
+                <a16:creationId xmlns:a16="http://schemas.microsoft.com/office/drawing/2014/main" id="{887FE9A9-E5DE-4BC1-94AD-59371BF9B78C}"/>
+              </a:ext>
+            </a:extLst>
+          </p:cNvPr>
+          <p:cNvSpPr>
+            <a:spLocks xmlns:a="http://schemas.openxmlformats.org/drawingml/2006/main" noGrp="1"/>
+          </p:cNvSpPr>
+          <p:nvPr/>
+        </p:nvSpPr>
+        <p:spPr>
+          <a:xfrm xmlns:a="http://schemas.openxmlformats.org/drawingml/2006/main">
+            <a:off x="685800" y="2200275"/>
+            <a:ext cx="4857750" cy="3124200"/>
+          </a:xfrm>
+          <a:prstGeom xmlns:a="http://schemas.openxmlformats.org/drawingml/2006/main" prst="rect">
+            <a:avLst/>
+          </a:prstGeom>
+          <a:noFill xmlns:a="http://schemas.openxmlformats.org/drawingml/2006/main"/>
+          <a:ln xmlns:a="http://schemas.openxmlformats.org/drawingml/2006/main" w="0">
+            <a:noFill/>
+          </a:ln>
+        </p:spPr>
+        <p:txBody>
+          <a:bodyPr xmlns:a="http://schemas.openxmlformats.org/drawingml/2006/main" anchor="t">
+            <a:normAutofit fontScale="100000"/>
+          </a:bodyPr>
+          <a:lstStyle xmlns:a="http://schemas.openxmlformats.org/drawingml/2006/main"/>
+          <a:p xmlns:a="http://schemas.openxmlformats.org/drawingml/2006/main">
+            <a:pPr>
+              <a:buNone/>
+              <a:defRPr sz="1950" b="0">
+                <a:solidFill>
+                  <a:srgbClr val="D4D4D8"/>
+                </a:solidFill>
+                <a:latin typeface="Arial"/>
+                <a:ea typeface="Arial"/>
+                <a:cs typeface="Arial"/>
+              </a:defRPr>
+            </a:pPr>
+            <a:r>
+              <a:rPr sz="1950" b="0">
+                <a:solidFill>
+                  <a:srgbClr val="D4D4D8"/>
+                </a:solidFill>
+                <a:latin typeface="Arial"/>
+                <a:ea typeface="Arial"/>
+                <a:cs typeface="Arial"/>
+              </a:rPr>
+              <a:t>Compare a nonzero ratio with the smallest normal, 2^(1−bias). Below that threshold, set E = 0 and use no hidden 1.</a:t>
+            </a:r>
+          </a:p>
+          <a:p xmlns:a="http://schemas.openxmlformats.org/drawingml/2006/main">
+            <a:pPr>
+              <a:buNone/>
+              <a:defRPr sz="1950" b="0">
+                <a:solidFill>
+                  <a:srgbClr val="D4D4D8"/>
+                </a:solidFill>
+                <a:latin typeface="Arial"/>
+                <a:ea typeface="Arial"/>
+                <a:cs typeface="Arial"/>
+              </a:defRPr>
+            </a:pPr>
+            <a:r>
+              <a:rPr sz="1950" b="0">
+                <a:solidFill>
+                  <a:srgbClr val="D4D4D8"/>
+                </a:solidFill>
+                <a:latin typeface="Arial"/>
+                <a:ea typeface="Arial"/>
+                <a:cs typeface="Arial"/>
+              </a:rPr>
+              <a:t/>
+            </a:r>
+          </a:p>
+          <a:p xmlns:a="http://schemas.openxmlformats.org/drawingml/2006/main">
+            <a:pPr>
+              <a:buNone/>
+              <a:defRPr sz="1950" b="0">
+                <a:solidFill>
+                  <a:srgbClr val="D4D4D8"/>
+                </a:solidFill>
+                <a:latin typeface="Arial"/>
+                <a:ea typeface="Arial"/>
+                <a:cs typeface="Arial"/>
+              </a:defRPr>
+            </a:pPr>
+            <a:r>
+              <a:rPr sz="1950" b="0">
+                <a:solidFill>
+                  <a:srgbClr val="D4D4D8"/>
+                </a:solidFill>
+                <a:latin typeface="Arial"/>
+                <a:ea typeface="Arial"/>
+                <a:cs typeface="Arial"/>
+              </a:rPr>
+              <a:t>Otherwise find the true exponent e and store E = e + bias. Solve for F, then decode to check.</a:t>
+            </a:r>
+          </a:p>
+        </p:txBody>
+      </p:sp>
+      <p:sp>
+        <p:nvSpPr>
+          <p:cNvPr id="4" name="">
+            <a:extLst xmlns:a="http://schemas.openxmlformats.org/drawingml/2006/main">
+              <a:ext uri="{FF2B5EF4-FFF2-40B4-BE49-F238E27FC236}">
+                <a16:creationId xmlns:a16="http://schemas.microsoft.com/office/drawing/2014/main" id="{CED75AEC-85E3-4520-B63E-09FCF9AACAE6}"/>
+              </a:ext>
+            </a:extLst>
+          </p:cNvPr>
+          <p:cNvSpPr>
+            <a:spLocks xmlns:a="http://schemas.openxmlformats.org/drawingml/2006/main" noGrp="1"/>
+          </p:cNvSpPr>
+          <p:nvPr/>
+        </p:nvSpPr>
+        <p:spPr>
+          <a:xfrm xmlns:a="http://schemas.openxmlformats.org/drawingml/2006/main">
+            <a:off x="6181725" y="2200275"/>
+            <a:ext cx="5238750" cy="3286125"/>
+          </a:xfrm>
+          <a:prstGeom xmlns:a="http://schemas.openxmlformats.org/drawingml/2006/main" prst="rect">
+            <a:avLst/>
+          </a:prstGeom>
+          <a:noFill xmlns:a="http://schemas.openxmlformats.org/drawingml/2006/main"/>
+          <a:ln xmlns:a="http://schemas.openxmlformats.org/drawingml/2006/main" w="0">
+            <a:noFill/>
+          </a:ln>
+        </p:spPr>
+        <p:txBody>
+          <a:bodyPr xmlns:a="http://schemas.openxmlformats.org/drawingml/2006/main" anchor="t">
+            <a:normAutofit fontScale="100000"/>
+          </a:bodyPr>
+          <a:lstStyle xmlns:a="http://schemas.openxmlformats.org/drawingml/2006/main"/>
+          <a:p xmlns:a="http://schemas.openxmlformats.org/drawingml/2006/main">
+            <a:pPr>
+              <a:buNone/>
+              <a:defRPr sz="1650" b="0">
+                <a:solidFill>
+                  <a:srgbClr val="A7F3D0"/>
+                </a:solidFill>
+                <a:latin typeface="Courier New"/>
+                <a:ea typeface="Courier New"/>
+                <a:cs typeface="Courier New"/>
+              </a:defRPr>
+            </a:pPr>
+            <a:r>
+              <a:rPr sz="1650" b="0">
+                <a:solidFill>
+                  <a:srgbClr val="A7F3D0"/>
+                </a:solidFill>
+                <a:latin typeface="Courier New"/>
+                <a:ea typeface="Courier New"/>
+                <a:cs typeface="Courier New"/>
+              </a:rPr>
+              <a:t>Normal (E &gt; 0):</a:t>
+            </a:r>
+          </a:p>
+          <a:p xmlns:a="http://schemas.openxmlformats.org/drawingml/2006/main">
+            <a:pPr>
+              <a:buNone/>
+              <a:defRPr sz="1650" b="0">
+                <a:solidFill>
+                  <a:srgbClr val="A7F3D0"/>
+                </a:solidFill>
+                <a:latin typeface="Courier New"/>
+                <a:ea typeface="Courier New"/>
+                <a:cs typeface="Courier New"/>
+              </a:defRPr>
+            </a:pPr>
+            <a:r>
+              <a:rPr sz="1650" b="0">
+                <a:solidFill>
+                  <a:srgbClr val="A7F3D0"/>
+                </a:solidFill>
+                <a:latin typeface="Courier New"/>
+                <a:ea typeface="Courier New"/>
+                <a:cs typeface="Courier New"/>
+              </a:rPr>
+              <a:t>value = (1 + F/2^p) × 2^(E−bias)</a:t>
+            </a:r>
+          </a:p>
+          <a:p xmlns:a="http://schemas.openxmlformats.org/drawingml/2006/main">
+            <a:pPr>
+              <a:buNone/>
+              <a:defRPr sz="1650" b="0">
+                <a:solidFill>
+                  <a:srgbClr val="A7F3D0"/>
+                </a:solidFill>
+                <a:latin typeface="Courier New"/>
+                <a:ea typeface="Courier New"/>
+                <a:cs typeface="Courier New"/>
+              </a:defRPr>
+            </a:pPr>
+            <a:r>
+              <a:rPr sz="1650" b="0">
+                <a:solidFill>
+                  <a:srgbClr val="A7F3D0"/>
+                </a:solidFill>
+                <a:latin typeface="Courier New"/>
+                <a:ea typeface="Courier New"/>
+                <a:cs typeface="Courier New"/>
+              </a:rPr>
+              <a:t/>
+            </a:r>
+          </a:p>
+          <a:p xmlns:a="http://schemas.openxmlformats.org/drawingml/2006/main">
+            <a:pPr>
+              <a:buNone/>
+              <a:defRPr sz="1650">
+                <a:solidFill>
+                  <a:srgbClr val="A7F3D0"/>
+                </a:solidFill>
+                <a:latin typeface="Courier New"/>
+                <a:ea typeface="Courier New"/>
+                <a:cs typeface="Courier New"/>
+              </a:defRPr>
+            </a:pPr>
+            <a:r>
+              <a:rPr sz="1650">
+                <a:solidFill>
+                  <a:srgbClr val="A7F3D0"/>
+                </a:solidFill>
+                <a:latin typeface="Courier New"/>
+                <a:ea typeface="Courier New"/>
+                <a:cs typeface="Courier New"/>
+              </a:rPr>
+              <a:t>Subnormal (E = 0):</a:t>
+            </a:r>
+          </a:p>
+          <a:p xmlns:a="http://schemas.openxmlformats.org/drawingml/2006/main">
+            <a:pPr>
+              <a:buNone/>
+              <a:defRPr sz="1650" b="0">
+                <a:solidFill>
+                  <a:srgbClr val="A7F3D0"/>
+                </a:solidFill>
+                <a:latin typeface="Courier New"/>
+                <a:ea typeface="Courier New"/>
+                <a:cs typeface="Courier New"/>
+              </a:defRPr>
+            </a:pPr>
+            <a:r>
+              <a:rPr sz="1650" b="0">
+                <a:solidFill>
+                  <a:srgbClr val="A7F3D0"/>
+                </a:solidFill>
+                <a:latin typeface="Courier New"/>
+                <a:ea typeface="Courier New"/>
+                <a:cs typeface="Courier New"/>
+              </a:rPr>
+              <a:t>value = (F/2^p) × 2^(1−bias)</a:t>
+            </a:r>
+          </a:p>
+          <a:p xmlns:a="http://schemas.openxmlformats.org/drawingml/2006/main">
+            <a:pPr>
+              <a:buNone/>
+              <a:defRPr sz="1650" b="0">
+                <a:solidFill>
+                  <a:srgbClr val="A7F3D0"/>
+                </a:solidFill>
+                <a:latin typeface="Courier New"/>
+                <a:ea typeface="Courier New"/>
+                <a:cs typeface="Courier New"/>
+              </a:defRPr>
+            </a:pPr>
+            <a:r>
+              <a:rPr sz="1650" b="0">
+                <a:solidFill>
+                  <a:srgbClr val="A7F3D0"/>
+                </a:solidFill>
+                <a:latin typeface="Courier New"/>
+                <a:ea typeface="Courier New"/>
+                <a:cs typeface="Courier New"/>
+              </a:rPr>
+              <a:t/>
+            </a:r>
+          </a:p>
+          <a:p xmlns:a="http://schemas.openxmlformats.org/drawingml/2006/main">
+            <a:pPr>
+              <a:buNone/>
+              <a:defRPr sz="1650" b="0">
+                <a:solidFill>
+                  <a:srgbClr val="A7F3D0"/>
+                </a:solidFill>
+                <a:latin typeface="Courier New"/>
+                <a:ea typeface="Courier New"/>
+                <a:cs typeface="Courier New"/>
+              </a:defRPr>
+            </a:pPr>
+            <a:r>
+              <a:rPr sz="1650" b="0">
+                <a:solidFill>
+                  <a:srgbClr val="A7F3D0"/>
+                </a:solidFill>
+                <a:latin typeface="Courier New"/>
+                <a:ea typeface="Courier New"/>
+                <a:cs typeface="Courier New"/>
+              </a:rPr>
+              <a:t>If numerator = 0: E = 0, F = 0</a:t>
+            </a:r>
+          </a:p>
+        </p:txBody>
+      </p:sp>
+      <p:sp>
+        <p:nvSpPr>
+          <p:cNvPr id="5" name="">
+            <a:extLst xmlns:a="http://schemas.openxmlformats.org/drawingml/2006/main">
+              <a:ext uri="{FF2B5EF4-FFF2-40B4-BE49-F238E27FC236}">
+                <a16:creationId xmlns:a16="http://schemas.microsoft.com/office/drawing/2014/main" id="{7A18BC8F-2DC5-4B6B-A4F9-10CDE1183DE6}"/>
+              </a:ext>
+            </a:extLst>
+          </p:cNvPr>
+          <p:cNvSpPr>
+            <a:spLocks xmlns:a="http://schemas.openxmlformats.org/drawingml/2006/main" noGrp="1"/>
+          </p:cNvSpPr>
+          <p:nvPr/>
+        </p:nvSpPr>
+        <p:spPr>
+          <a:xfrm xmlns:a="http://schemas.openxmlformats.org/drawingml/2006/main">
+            <a:off x="685800" y="5743575"/>
+            <a:ext cx="10191750" cy="428625"/>
+          </a:xfrm>
+          <a:prstGeom xmlns:a="http://schemas.openxmlformats.org/drawingml/2006/main" prst="rect">
+            <a:avLst/>
+          </a:prstGeom>
+          <a:noFill xmlns:a="http://schemas.openxmlformats.org/drawingml/2006/main"/>
+          <a:ln xmlns:a="http://schemas.openxmlformats.org/drawingml/2006/main" w="0">
+            <a:noFill/>
+          </a:ln>
+        </p:spPr>
+        <p:txBody>
+          <a:bodyPr xmlns:a="http://schemas.openxmlformats.org/drawingml/2006/main" anchor="t">
+            <a:normAutofit fontScale="100000"/>
+          </a:bodyPr>
+          <a:lstStyle xmlns:a="http://schemas.openxmlformats.org/drawingml/2006/main"/>
+          <a:p xmlns:a="http://schemas.openxmlformats.org/drawingml/2006/main">
+            <a:pPr>
+              <a:buNone/>
+              <a:defRPr sz="1350" b="0">
+                <a:solidFill>
+                  <a:srgbClr val="A1A1AA"/>
+                </a:solidFill>
+                <a:latin typeface="Arial"/>
+                <a:ea typeface="Arial"/>
+                <a:cs typeface="Arial"/>
+              </a:defRPr>
+            </a:pPr>
+            <a:r>
+              <a:rPr sz="1350" b="0">
+                <a:solidFill>
+                  <a:srgbClr val="A1A1AA"/>
+                </a:solidFill>
+                <a:latin typeface="Arial"/>
+                <a:ea typeface="Arial"/>
+                <a:cs typeface="Arial"/>
+              </a:rPr>
+              <a:t>Use the supplied p and bias, not the values from our practice format.</a:t>
+            </a:r>
+          </a:p>
+        </p:txBody>
+      </p:sp>
+      <p:sp>
+        <p:nvSpPr>
+          <p:cNvPr id="6" name="">
+            <a:extLst xmlns:a="http://schemas.openxmlformats.org/drawingml/2006/main">
+              <a:ext uri="{FF2B5EF4-FFF2-40B4-BE49-F238E27FC236}">
+                <a16:creationId xmlns:a16="http://schemas.microsoft.com/office/drawing/2014/main" id="{94269C50-3A0A-4FBB-A1D2-A33411F72ECA}"/>
+              </a:ext>
+            </a:extLst>
+          </p:cNvPr>
+          <p:cNvSpPr>
+            <a:spLocks xmlns:a="http://schemas.openxmlformats.org/drawingml/2006/main" noGrp="1"/>
+          </p:cNvSpPr>
+          <p:nvPr/>
+        </p:nvSpPr>
+        <p:spPr>
+          <a:xfrm xmlns:a="http://schemas.openxmlformats.org/drawingml/2006/main">
+            <a:off x="10477500" y="6210300"/>
+            <a:ext cx="1000125" cy="219075"/>
+          </a:xfrm>
+          <a:prstGeom xmlns:a="http://schemas.openxmlformats.org/drawingml/2006/main" prst="rect">
+            <a:avLst/>
+          </a:prstGeom>
+          <a:noFill xmlns:a="http://schemas.openxmlformats.org/drawingml/2006/main"/>
+          <a:ln xmlns:a="http://schemas.openxmlformats.org/drawingml/2006/main" w="0">
+            <a:noFill/>
+          </a:ln>
+        </p:spPr>
+        <p:txBody>
+          <a:bodyPr xmlns:a="http://schemas.openxmlformats.org/drawingml/2006/main" anchor="t">
+            <a:normAutofit fontScale="79762"/>
+          </a:bodyPr>
+          <a:lstStyle xmlns:a="http://schemas.openxmlformats.org/drawingml/2006/main"/>
+          <a:p xmlns:a="http://schemas.openxmlformats.org/drawingml/2006/main">
+            <a:pPr>
+              <a:buNone/>
+              <a:defRPr sz="1050" b="0">
+                <a:solidFill>
+                  <a:srgbClr val="71717A"/>
+                </a:solidFill>
+                <a:latin typeface="Courier New"/>
+                <a:ea typeface="Courier New"/>
+                <a:cs typeface="Courier New"/>
+              </a:defRPr>
+            </a:pPr>
+            <a:r>
+              <a:rPr sz="1050" b="0">
+                <a:solidFill>
+                  <a:srgbClr val="71717A"/>
+                </a:solidFill>
+                <a:latin typeface="Courier New"/>
+                <a:ea typeface="Courier New"/>
+                <a:cs typeface="Courier New"/>
+              </a:rPr>
+              <a:t>21 / 22</a:t>
+            </a:r>
+          </a:p>
+        </p:txBody>
+      </p:sp>
+    </p:spTree>
+    <p:extLst>
+      <p:ext uri="{BB962C8B-B14F-4D97-AF65-F5344CB8AC3E}">
+        <p14:creationId xmlns:p14="http://schemas.microsoft.com/office/powerpoint/2010/main" val="1018474765"/>
+      </p:ext>
+    </p:extLst>
+  </p:cSld>
+</p:sld>
+</file>
+
+<file path=ppt/slides/slide22.xml><?xml version="1.0" encoding="utf-8"?>
+<p:sld xmlns:p="http://schemas.openxmlformats.org/presentationml/2006/main">
+  <p:cSld>
+    <p:bg>
+      <p:bgPr>
+        <a:solidFill xmlns:a="http://schemas.openxmlformats.org/drawingml/2006/main">
+          <a:srgbClr val="09090B"/>
+        </a:solidFill>
+      </p:bgPr>
+    </p:bg>
+    <p:spTree>
+      <p:nvGrpSpPr>
+        <p:cNvPr id="1" name=""/>
+        <p:cNvGrpSpPr/>
+        <p:nvPr/>
+      </p:nvGrpSpPr>
+      <p:grpSpPr>
+        <a:xfrm xmlns:a="http://schemas.openxmlformats.org/drawingml/2006/main"/>
+      </p:grpSpPr>
+      <p:sp>
+        <p:nvSpPr>
+          <p:cNvPr id="7" name="">
+            <a:extLst xmlns:a="http://schemas.openxmlformats.org/drawingml/2006/main">
+              <a:ext uri="{FF2B5EF4-FFF2-40B4-BE49-F238E27FC236}">
+                <a16:creationId xmlns:a16="http://schemas.microsoft.com/office/drawing/2014/main" id="{4989B079-C3E8-43BB-8638-96121018769A}"/>
+              </a:ext>
+            </a:extLst>
+          </p:cNvPr>
+          <p:cNvSpPr>
+            <a:spLocks xmlns:a="http://schemas.openxmlformats.org/drawingml/2006/main" noGrp="1"/>
+          </p:cNvSpPr>
+          <p:nvPr/>
+        </p:nvSpPr>
+        <p:spPr>
+          <a:xfrm xmlns:a="http://schemas.openxmlformats.org/drawingml/2006/main">
+            <a:off x="685800" y="361950"/>
+            <a:ext cx="10477500" cy="285750"/>
+          </a:xfrm>
+          <a:prstGeom xmlns:a="http://schemas.openxmlformats.org/drawingml/2006/main" prst="rect">
+            <a:avLst/>
+          </a:prstGeom>
+          <a:noFill xmlns:a="http://schemas.openxmlformats.org/drawingml/2006/main"/>
+          <a:ln xmlns:a="http://schemas.openxmlformats.org/drawingml/2006/main" w="0">
+            <a:noFill/>
+          </a:ln>
+        </p:spPr>
+        <p:txBody>
+          <a:bodyPr xmlns:a="http://schemas.openxmlformats.org/drawingml/2006/main" anchor="t">
+            <a:normAutofit fontScale="100000"/>
+          </a:bodyPr>
+          <a:lstStyle xmlns:a="http://schemas.openxmlformats.org/drawingml/2006/main"/>
+          <a:p xmlns:a="http://schemas.openxmlformats.org/drawingml/2006/main">
+            <a:pPr>
+              <a:buNone/>
+              <a:defRPr sz="1275" b="0">
+                <a:solidFill>
+                  <a:srgbClr val="6EE7B7"/>
+                </a:solidFill>
+                <a:latin typeface="Courier New"/>
+                <a:ea typeface="Courier New"/>
+                <a:cs typeface="Courier New"/>
+              </a:defRPr>
+            </a:pPr>
+            <a:r>
+              <a:rPr sz="1275" b="0">
+                <a:solidFill>
+                  <a:srgbClr val="6EE7B7"/>
+                </a:solidFill>
+                <a:latin typeface="Courier New"/>
+                <a:ea typeface="Courier New"/>
+                <a:cs typeface="Courier New"/>
+              </a:rPr>
+              <a:t>FLOATING POINT · RECAP</a:t>
+            </a:r>
+          </a:p>
+        </p:txBody>
+      </p:sp>
+      <p:sp>
+        <p:nvSpPr>
+          <p:cNvPr id="2" name="">
+            <a:extLst xmlns:a="http://schemas.openxmlformats.org/drawingml/2006/main">
+              <a:ext uri="{FF2B5EF4-FFF2-40B4-BE49-F238E27FC236}">
+                <a16:creationId xmlns:a16="http://schemas.microsoft.com/office/drawing/2014/main" id="{95D3113E-85F1-4E22-A62E-265E94FE3617}"/>
+              </a:ext>
+            </a:extLst>
+          </p:cNvPr>
+          <p:cNvSpPr>
+            <a:spLocks xmlns:a="http://schemas.openxmlformats.org/drawingml/2006/main" noGrp="1"/>
+          </p:cNvSpPr>
+          <p:nvPr/>
+        </p:nvSpPr>
+        <p:spPr>
+          <a:xfrm xmlns:a="http://schemas.openxmlformats.org/drawingml/2006/main">
+            <a:off x="685800" y="885825"/>
+            <a:ext cx="10820400" cy="1066800"/>
+          </a:xfrm>
+          <a:prstGeom xmlns:a="http://schemas.openxmlformats.org/drawingml/2006/main" prst="rect">
+            <a:avLst/>
+          </a:prstGeom>
+          <a:noFill xmlns:a="http://schemas.openxmlformats.org/drawingml/2006/main"/>
+          <a:ln xmlns:a="http://schemas.openxmlformats.org/drawingml/2006/main" w="0">
+            <a:noFill/>
+          </a:ln>
+        </p:spPr>
+        <p:txBody>
+          <a:bodyPr xmlns:a="http://schemas.openxmlformats.org/drawingml/2006/main" anchor="t">
+            <a:normAutofit fontScale="100000"/>
+          </a:bodyPr>
+          <a:lstStyle xmlns:a="http://schemas.openxmlformats.org/drawingml/2006/main"/>
+          <a:p xmlns:a="http://schemas.openxmlformats.org/drawingml/2006/main">
+            <a:pPr>
+              <a:buNone/>
+              <a:defRPr sz="3600" b="0">
+                <a:solidFill>
+                  <a:srgbClr val="FAFAFA"/>
+                </a:solidFill>
+                <a:latin typeface="Arial"/>
+                <a:ea typeface="Arial"/>
+                <a:cs typeface="Arial"/>
+              </a:defRPr>
+            </a:pPr>
+            <a:r>
+              <a:rPr sz="3600" b="0">
+                <a:solidFill>
+                  <a:srgbClr val="FAFAFA"/>
+                </a:solidFill>
+                <a:latin typeface="Arial"/>
+                <a:ea typeface="Arial"/>
+                <a:cs typeface="Arial"/>
+              </a:rPr>
+              <a:t>How to check an encoding</a:t>
+            </a:r>
+          </a:p>
+        </p:txBody>
+      </p:sp>
+      <p:sp>
+        <p:nvSpPr>
+          <p:cNvPr id="3" name="">
+            <a:extLst xmlns:a="http://schemas.openxmlformats.org/drawingml/2006/main">
+              <a:ext uri="{FF2B5EF4-FFF2-40B4-BE49-F238E27FC236}">
+                <a16:creationId xmlns:a16="http://schemas.microsoft.com/office/drawing/2014/main" id="{8EC5E33C-BA7C-4ADE-9FC3-9ABD9F3C6FD4}"/>
+              </a:ext>
+            </a:extLst>
+          </p:cNvPr>
+          <p:cNvSpPr>
+            <a:spLocks xmlns:a="http://schemas.openxmlformats.org/drawingml/2006/main" noGrp="1"/>
+          </p:cNvSpPr>
+          <p:nvPr/>
+        </p:nvSpPr>
+        <p:spPr>
+          <a:xfrm xmlns:a="http://schemas.openxmlformats.org/drawingml/2006/main">
+            <a:off x="685800" y="2200275"/>
+            <a:ext cx="4857750" cy="3124200"/>
+          </a:xfrm>
+          <a:prstGeom xmlns:a="http://schemas.openxmlformats.org/drawingml/2006/main" prst="rect">
+            <a:avLst/>
+          </a:prstGeom>
+          <a:noFill xmlns:a="http://schemas.openxmlformats.org/drawingml/2006/main"/>
+          <a:ln xmlns:a="http://schemas.openxmlformats.org/drawingml/2006/main" w="0">
+            <a:noFill/>
+          </a:ln>
+        </p:spPr>
+        <p:txBody>
+          <a:bodyPr xmlns:a="http://schemas.openxmlformats.org/drawingml/2006/main" anchor="t">
+            <a:normAutofit fontScale="100000"/>
+          </a:bodyPr>
+          <a:lstStyle xmlns:a="http://schemas.openxmlformats.org/drawingml/2006/main"/>
+          <a:p xmlns:a="http://schemas.openxmlformats.org/drawingml/2006/main">
+            <a:pPr>
+              <a:buNone/>
+              <a:defRPr sz="1950" b="0">
+                <a:solidFill>
+                  <a:srgbClr val="D4D4D8"/>
+                </a:solidFill>
+                <a:latin typeface="Arial"/>
+                <a:ea typeface="Arial"/>
+                <a:cs typeface="Arial"/>
+              </a:defRPr>
+            </a:pPr>
+            <a:r>
+              <a:rPr sz="1950" b="0">
+                <a:solidFill>
+                  <a:srgbClr val="D4D4D8"/>
+                </a:solidFill>
+                <a:latin typeface="Arial"/>
+                <a:ea typeface="Arial"/>
+                <a:cs typeface="Arial"/>
+              </a:rPr>
+              <a:t>In our practice format, E = 0 means count F steps of 1/32. Otherwise decode e = E − 3 and use the implied leading 1.</a:t>
+            </a:r>
+          </a:p>
+          <a:p xmlns:a="http://schemas.openxmlformats.org/drawingml/2006/main">
+            <a:r>
+              <a:t/>
+            </a:r>
+          </a:p>
+          <a:p xmlns:a="http://schemas.openxmlformats.org/drawingml/2006/main">
+            <a:pPr>
+              <a:buNone/>
+              <a:defRPr sz="1950" b="0">
+                <a:solidFill>
+                  <a:srgbClr val="D4D4D8"/>
+                </a:solidFill>
+                <a:latin typeface="Arial"/>
+                <a:ea typeface="Arial"/>
+                <a:cs typeface="Arial"/>
+              </a:defRPr>
+            </a:pPr>
+            <a:r>
+              <a:rPr sz="1950" b="0">
+                <a:solidFill>
+                  <a:srgbClr val="D4D4D8"/>
+                </a:solidFill>
+                <a:latin typeface="Arial"/>
+                <a:ea typeface="Arial"/>
+                <a:cs typeface="Arial"/>
+              </a:rPr>
+              <a:t>For an inexact value, follow the problem’s rounding rule.</a:t>
+            </a:r>
+          </a:p>
+        </p:txBody>
+      </p:sp>
+      <p:sp>
+        <p:nvSpPr>
+          <p:cNvPr id="4" name="">
+            <a:extLst xmlns:a="http://schemas.openxmlformats.org/drawingml/2006/main">
+              <a:ext uri="{FF2B5EF4-FFF2-40B4-BE49-F238E27FC236}">
+                <a16:creationId xmlns:a16="http://schemas.microsoft.com/office/drawing/2014/main" id="{EA939046-DA6B-448C-A179-5B13743C72F3}"/>
+              </a:ext>
+            </a:extLst>
+          </p:cNvPr>
+          <p:cNvSpPr>
+            <a:spLocks xmlns:a="http://schemas.openxmlformats.org/drawingml/2006/main" noGrp="1"/>
+          </p:cNvSpPr>
+          <p:nvPr/>
+        </p:nvSpPr>
+        <p:spPr>
+          <a:xfrm xmlns:a="http://schemas.openxmlformats.org/drawingml/2006/main">
+            <a:off x="6181725" y="2200275"/>
+            <a:ext cx="5238750" cy="3286125"/>
+          </a:xfrm>
+          <a:prstGeom xmlns:a="http://schemas.openxmlformats.org/drawingml/2006/main" prst="rect">
+            <a:avLst/>
+          </a:prstGeom>
+          <a:noFill xmlns:a="http://schemas.openxmlformats.org/drawingml/2006/main"/>
+          <a:ln xmlns:a="http://schemas.openxmlformats.org/drawingml/2006/main" w="0">
+            <a:noFill/>
+          </a:ln>
+        </p:spPr>
+        <p:txBody>
+          <a:bodyPr xmlns:a="http://schemas.openxmlformats.org/drawingml/2006/main" anchor="t">
+            <a:normAutofit fontScale="100000"/>
+          </a:bodyPr>
+          <a:lstStyle xmlns:a="http://schemas.openxmlformats.org/drawingml/2006/main"/>
+          <a:p xmlns:a="http://schemas.openxmlformats.org/drawingml/2006/main">
+            <a:pPr>
+              <a:buNone/>
+              <a:defRPr sz="1650" b="0">
+                <a:solidFill>
+                  <a:srgbClr val="A7F3D0"/>
+                </a:solidFill>
+                <a:latin typeface="Courier New"/>
+                <a:ea typeface="Courier New"/>
+                <a:cs typeface="Courier New"/>
+              </a:defRPr>
+            </a:pPr>
+            <a:r>
+              <a:rPr sz="1650" b="0">
+                <a:solidFill>
+                  <a:srgbClr val="A7F3D0"/>
+                </a:solidFill>
+                <a:latin typeface="Courier New"/>
+                <a:ea typeface="Courier New"/>
+                <a:cs typeface="Courier New"/>
+              </a:rPr>
+              <a:t>Our practice format</a:t>
+            </a:r>
+          </a:p>
+          <a:p xmlns:a="http://schemas.openxmlformats.org/drawingml/2006/main">
+            <a:r>
+              <a:t/>
+            </a:r>
+          </a:p>
+          <a:p xmlns:a="http://schemas.openxmlformats.org/drawingml/2006/main">
+            <a:pPr>
+              <a:buNone/>
+              <a:defRPr sz="1650" b="0">
+                <a:solidFill>
+                  <a:srgbClr val="A7F3D0"/>
+                </a:solidFill>
+                <a:latin typeface="Courier New"/>
+                <a:ea typeface="Courier New"/>
+                <a:cs typeface="Courier New"/>
+              </a:defRPr>
+            </a:pPr>
+            <a:r>
+              <a:rPr sz="1650" b="0">
+                <a:solidFill>
+                  <a:srgbClr val="A7F3D0"/>
+                </a:solidFill>
+                <a:latin typeface="Courier New"/>
+                <a:ea typeface="Courier New"/>
+                <a:cs typeface="Courier New"/>
+              </a:rPr>
+              <a:t>Normal:    (1 + F/8) × 2^(E−3)</a:t>
+            </a:r>
+          </a:p>
+          <a:p xmlns:a="http://schemas.openxmlformats.org/drawingml/2006/main">
+            <a:pPr>
+              <a:buNone/>
+              <a:defRPr sz="1650" b="0">
+                <a:solidFill>
+                  <a:srgbClr val="A7F3D0"/>
+                </a:solidFill>
+                <a:latin typeface="Courier New"/>
+                <a:ea typeface="Courier New"/>
+                <a:cs typeface="Courier New"/>
+              </a:defRPr>
+            </a:pPr>
+            <a:r>
+              <a:rPr sz="1650" b="0">
+                <a:solidFill>
+                  <a:srgbClr val="A7F3D0"/>
+                </a:solidFill>
+                <a:latin typeface="Courier New"/>
+                <a:ea typeface="Courier New"/>
+                <a:cs typeface="Courier New"/>
+              </a:rPr>
+              <a:t>Subnormal: F/32  (E = 0)</a:t>
+            </a:r>
+          </a:p>
+          <a:p xmlns:a="http://schemas.openxmlformats.org/drawingml/2006/main">
+            <a:r>
+              <a:t/>
+            </a:r>
+          </a:p>
+          <a:p xmlns:a="http://schemas.openxmlformats.org/drawingml/2006/main">
+            <a:pPr>
+              <a:buNone/>
+              <a:defRPr sz="1650" b="0">
+                <a:solidFill>
+                  <a:srgbClr val="A7F3D0"/>
+                </a:solidFill>
+                <a:latin typeface="Courier New"/>
+                <a:ea typeface="Courier New"/>
+                <a:cs typeface="Courier New"/>
+              </a:defRPr>
+            </a:pPr>
+            <a:r>
+              <a:rPr sz="1650" b="0">
+                <a:solidFill>
+                  <a:srgbClr val="A7F3D0"/>
+                </a:solidFill>
+                <a:latin typeface="Courier New"/>
+                <a:ea typeface="Courier New"/>
+                <a:cs typeface="Courier New"/>
+              </a:rPr>
+              <a:t>E = 0, F = 0  →  zero</a:t>
+            </a:r>
+          </a:p>
+          <a:p xmlns:a="http://schemas.openxmlformats.org/drawingml/2006/main">
+            <a:r>
+              <a:t/>
+            </a:r>
+          </a:p>
+          <a:p xmlns:a="http://schemas.openxmlformats.org/drawingml/2006/main">
+            <a:pPr>
+              <a:buNone/>
+              <a:defRPr sz="1650" b="0">
+                <a:solidFill>
+                  <a:srgbClr val="A7F3D0"/>
+                </a:solidFill>
+                <a:latin typeface="Courier New"/>
+                <a:ea typeface="Courier New"/>
+                <a:cs typeface="Courier New"/>
+              </a:defRPr>
+            </a:pPr>
+            <a:r>
+              <a:rPr sz="1650" b="0">
+                <a:solidFill>
+                  <a:srgbClr val="A7F3D0"/>
+                </a:solidFill>
+                <a:latin typeface="Courier New"/>
+                <a:ea typeface="Courier New"/>
+                <a:cs typeface="Courier New"/>
+              </a:rPr>
+              <a:t>Decode your bits as a final check.</a:t>
+            </a:r>
+          </a:p>
+        </p:txBody>
+      </p:sp>
+      <p:sp>
+        <p:nvSpPr>
+          <p:cNvPr id="5" name="">
+            <a:extLst xmlns:a="http://schemas.openxmlformats.org/drawingml/2006/main">
+              <a:ext uri="{FF2B5EF4-FFF2-40B4-BE49-F238E27FC236}">
+                <a16:creationId xmlns:a16="http://schemas.microsoft.com/office/drawing/2014/main" id="{585A0E73-828D-45A1-9AD7-8EED8C5E7EB1}"/>
+              </a:ext>
+            </a:extLst>
+          </p:cNvPr>
+          <p:cNvSpPr>
+            <a:spLocks xmlns:a="http://schemas.openxmlformats.org/drawingml/2006/main" noGrp="1"/>
+          </p:cNvSpPr>
+          <p:nvPr/>
+        </p:nvSpPr>
+        <p:spPr>
+          <a:xfrm xmlns:a="http://schemas.openxmlformats.org/drawingml/2006/main">
+            <a:off x="685800" y="5743575"/>
+            <a:ext cx="10191750" cy="428625"/>
+          </a:xfrm>
+          <a:prstGeom xmlns:a="http://schemas.openxmlformats.org/drawingml/2006/main" prst="rect">
+            <a:avLst/>
+          </a:prstGeom>
+          <a:noFill xmlns:a="http://schemas.openxmlformats.org/drawingml/2006/main"/>
+          <a:ln xmlns:a="http://schemas.openxmlformats.org/drawingml/2006/main" w="0">
+            <a:noFill/>
+          </a:ln>
+        </p:spPr>
+        <p:txBody>
+          <a:bodyPr xmlns:a="http://schemas.openxmlformats.org/drawingml/2006/main" anchor="t">
+            <a:normAutofit fontScale="100000"/>
+          </a:bodyPr>
+          <a:lstStyle xmlns:a="http://schemas.openxmlformats.org/drawingml/2006/main"/>
+          <a:p xmlns:a="http://schemas.openxmlformats.org/drawingml/2006/main">
+            <a:pPr>
+              <a:buNone/>
+              <a:defRPr sz="1350" b="0">
+                <a:solidFill>
+                  <a:srgbClr val="A1A1AA"/>
+                </a:solidFill>
+                <a:latin typeface="Arial"/>
+                <a:ea typeface="Arial"/>
+                <a:cs typeface="Arial"/>
+              </a:defRPr>
+            </a:pPr>
+            <a:r>
+              <a:rPr sz="1350" b="0">
+                <a:solidFill>
+                  <a:srgbClr val="A1A1AA"/>
+                </a:solidFill>
+                <a:latin typeface="Arial"/>
+                <a:ea typeface="Arial"/>
+                <a:cs typeface="Arial"/>
+              </a:rPr>
+              <a:t>A correct encoding must reproduce the intended value or its required rounded value.</a:t>
+            </a:r>
+          </a:p>
+        </p:txBody>
+      </p:sp>
+      <p:sp>
+        <p:nvSpPr>
+          <p:cNvPr id="6" name="">
+            <a:extLst xmlns:a="http://schemas.openxmlformats.org/drawingml/2006/main">
+              <a:ext uri="{FF2B5EF4-FFF2-40B4-BE49-F238E27FC236}">
+                <a16:creationId xmlns:a16="http://schemas.microsoft.com/office/drawing/2014/main" id="{E1FBC5BD-1F5D-42FA-AC83-E0BF862F4EDF}"/>
+              </a:ext>
+            </a:extLst>
+          </p:cNvPr>
+          <p:cNvSpPr>
+            <a:spLocks xmlns:a="http://schemas.openxmlformats.org/drawingml/2006/main" noGrp="1"/>
+          </p:cNvSpPr>
+          <p:nvPr/>
+        </p:nvSpPr>
+        <p:spPr>
+          <a:xfrm xmlns:a="http://schemas.openxmlformats.org/drawingml/2006/main">
+            <a:off x="10477500" y="6210300"/>
+            <a:ext cx="1000125" cy="219075"/>
+          </a:xfrm>
+          <a:prstGeom xmlns:a="http://schemas.openxmlformats.org/drawingml/2006/main" prst="rect">
+            <a:avLst/>
+          </a:prstGeom>
+          <a:noFill xmlns:a="http://schemas.openxmlformats.org/drawingml/2006/main"/>
+          <a:ln xmlns:a="http://schemas.openxmlformats.org/drawingml/2006/main" w="0">
+            <a:noFill/>
+          </a:ln>
+        </p:spPr>
+        <p:txBody>
+          <a:bodyPr xmlns:a="http://schemas.openxmlformats.org/drawingml/2006/main" anchor="t">
+            <a:normAutofit fontScale="79762"/>
+          </a:bodyPr>
+          <a:lstStyle xmlns:a="http://schemas.openxmlformats.org/drawingml/2006/main"/>
+          <a:p xmlns:a="http://schemas.openxmlformats.org/drawingml/2006/main">
+            <a:pPr>
+              <a:buNone/>
+              <a:defRPr sz="1050" b="0">
+                <a:solidFill>
+                  <a:srgbClr val="71717A"/>
+                </a:solidFill>
+                <a:latin typeface="Courier New"/>
+                <a:ea typeface="Courier New"/>
+                <a:cs typeface="Courier New"/>
+              </a:defRPr>
+            </a:pPr>
+            <a:r>
+              <a:rPr sz="1050" b="0">
+                <a:solidFill>
+                  <a:srgbClr val="71717A"/>
+                </a:solidFill>
+                <a:latin typeface="Courier New"/>
+                <a:ea typeface="Courier New"/>
+                <a:cs typeface="Courier New"/>
+              </a:rPr>
+              <a:t>22 / 22</a:t>
             </a:r>
           </a:p>
         </p:txBody>
@@ -9654,7 +10801,7 @@
                 <a:ea typeface="Courier New"/>
                 <a:cs typeface="Courier New"/>
               </a:rPr>
-              <a:t>03 / 20</a:t>
+              <a:t>03 / 22</a:t>
             </a:r>
           </a:p>
         </p:txBody>
@@ -10137,7 +11284,7 @@
                 <a:ea typeface="Courier New"/>
                 <a:cs typeface="Courier New"/>
               </a:rPr>
-              <a:t>04 / 20</a:t>
+              <a:t>04 / 22</a:t>
             </a:r>
           </a:p>
         </p:txBody>
@@ -10282,7 +11429,7 @@
                 <a:ea typeface="Arial"/>
                 <a:cs typeface="Arial"/>
               </a:rPr>
-              <a:t>The exponent has a bias</a:t>
+              <a:t>Stored and true exponents</a:t>
             </a:r>
           </a:p>
         </p:txBody>
@@ -10340,36 +11487,7 @@
                 <a:ea typeface="Arial"/>
                 <a:cs typeface="Arial"/>
               </a:rPr>
-              <a:t>A normal value is written as 1.fraction × 2ᵉ. The leading 1 is implied and is not stored.</a:t>
-            </a:r>
-          </a:p>
-          <a:p xmlns:a="http://schemas.openxmlformats.org/drawingml/2006/main">
-            <a:r>
-              <a:t/>
-            </a:r>
-          </a:p>
-          <a:p xmlns:a="http://schemas.openxmlformats.org/drawingml/2006/main">
-            <a:pPr>
-              <a:buNone/>
-              <a:defRPr sz="1950" b="0">
-                <a:solidFill>
-                  <a:srgbClr val="D4D4D8"/>
-                </a:solidFill>
-                <a:latin typeface="Arial"/>
-                <a:ea typeface="Arial"/>
-                <a:cs typeface="Arial"/>
-              </a:defRPr>
-            </a:pPr>
-            <a:r>
-              <a:rPr sz="1950" b="0">
-                <a:solidFill>
-                  <a:srgbClr val="D4D4D8"/>
-                </a:solidFill>
-                <a:latin typeface="Arial"/>
-                <a:ea typeface="Arial"/>
-                <a:cs typeface="Arial"/>
-              </a:rPr>
-              <a:t>The stored exponent E equals e + bias.</a:t>
+              <a:t>Here E is the unsigned number stored in the exponent bits. Lowercase e is the true exponent in 2ᵉ. For normal values, subtract the bias when decoding and add it when encoding.</a:t>
             </a:r>
           </a:p>
         </p:txBody>
@@ -10456,7 +11574,7 @@
                 <a:ea typeface="Courier New"/>
                 <a:cs typeface="Courier New"/>
               </a:rPr>
-              <a:t>e = −2  →  E = 1  →  bits 001</a:t>
+              <a:t>Decode bits 001₂:</a:t>
             </a:r>
           </a:p>
           <a:p xmlns:a="http://schemas.openxmlformats.org/drawingml/2006/main">
@@ -10480,7 +11598,7 @@
                 <a:ea typeface="Courier New"/>
                 <a:cs typeface="Courier New"/>
               </a:rPr>
-              <a:t>e =  0  →  E = 3  →  bits 011</a:t>
+              <a:t>E = 1  →  e = 1 − 3 = −2</a:t>
             </a:r>
           </a:p>
           <a:p xmlns:a="http://schemas.openxmlformats.org/drawingml/2006/main">
@@ -10504,7 +11622,55 @@
                 <a:ea typeface="Courier New"/>
                 <a:cs typeface="Courier New"/>
               </a:rPr>
-              <a:t>e =  2  →  E = 5  →  bits 101</a:t>
+              <a:t/>
+            </a:r>
+          </a:p>
+          <a:p xmlns:a="http://schemas.openxmlformats.org/drawingml/2006/main">
+            <a:pPr>
+              <a:buNone/>
+              <a:defRPr sz="1650" b="0">
+                <a:solidFill>
+                  <a:srgbClr val="A7F3D0"/>
+                </a:solidFill>
+                <a:latin typeface="Courier New"/>
+                <a:ea typeface="Courier New"/>
+                <a:cs typeface="Courier New"/>
+              </a:defRPr>
+            </a:pPr>
+            <a:r>
+              <a:rPr sz="1650" b="0">
+                <a:solidFill>
+                  <a:srgbClr val="A7F3D0"/>
+                </a:solidFill>
+                <a:latin typeface="Courier New"/>
+                <a:ea typeface="Courier New"/>
+                <a:cs typeface="Courier New"/>
+              </a:rPr>
+              <a:t>Encode true exponent e = −2:</a:t>
+            </a:r>
+          </a:p>
+          <a:p xmlns:a="http://schemas.openxmlformats.org/drawingml/2006/main">
+            <a:pPr>
+              <a:buNone/>
+              <a:defRPr sz="1650" b="0">
+                <a:solidFill>
+                  <a:srgbClr val="A7F3D0"/>
+                </a:solidFill>
+                <a:latin typeface="Courier New"/>
+                <a:ea typeface="Courier New"/>
+                <a:cs typeface="Courier New"/>
+              </a:defRPr>
+            </a:pPr>
+            <a:r>
+              <a:rPr sz="1650" b="0">
+                <a:solidFill>
+                  <a:srgbClr val="A7F3D0"/>
+                </a:solidFill>
+                <a:latin typeface="Courier New"/>
+                <a:ea typeface="Courier New"/>
+                <a:cs typeface="Courier New"/>
+              </a:rPr>
+              <a:t>E = −2 + 3 = 1  →  bits 001</a:t>
             </a:r>
           </a:p>
         </p:txBody>
@@ -10562,7 +11728,7 @@
                 <a:ea typeface="Arial"/>
                 <a:cs typeface="Arial"/>
               </a:rPr>
-              <a:t>In this 3-bit format, E = 0 is for zero or subnormals; E = 7 is reserved.</a:t>
+              <a:t>Symbols vary by source: first decide which exponent is stored.</a:t>
             </a:r>
           </a:p>
         </p:txBody>
@@ -10620,7 +11786,7 @@
                 <a:ea typeface="Courier New"/>
                 <a:cs typeface="Courier New"/>
               </a:rPr>
-              <a:t>05 / 20</a:t>
+              <a:t>05 / 22</a:t>
             </a:r>
           </a:p>
         </p:txBody>
@@ -11132,7 +12298,7 @@
                 <a:ea typeface="Courier New"/>
                 <a:cs typeface="Courier New"/>
               </a:rPr>
-              <a:t>06 / 20</a:t>
+              <a:t>06 / 22</a:t>
             </a:r>
           </a:p>
         </p:txBody>
@@ -11620,7 +12786,7 @@
                 <a:ea typeface="Courier New"/>
                 <a:cs typeface="Courier New"/>
               </a:rPr>
-              <a:t>07 / 20</a:t>
+              <a:t>07 / 22</a:t>
             </a:r>
           </a:p>
         </p:txBody>
@@ -11707,7 +12873,7 @@
                 <a:ea typeface="Courier New"/>
                 <a:cs typeface="Courier New"/>
               </a:rPr>
-              <a:t>FLOATING POINT · SUBNORMALS</a:t>
+              <a:t>FLOATING POINT · WHY SUBNORMALS</a:t>
             </a:r>
           </a:p>
         </p:txBody>
@@ -11765,7 +12931,7 @@
                 <a:ea typeface="Arial"/>
                 <a:cs typeface="Arial"/>
               </a:rPr>
-              <a:t>What happens below the normal range?</a:t>
+              <a:t>The smallest normal is 1/4</a:t>
             </a:r>
           </a:p>
         </p:txBody>
@@ -11823,36 +12989,7 @@
                 <a:ea typeface="Arial"/>
                 <a:cs typeface="Arial"/>
               </a:rPr>
-              <a:t>The smallest positive normal value here is 1.000₂ × 2⁻² = 1/4.</a:t>
-            </a:r>
-          </a:p>
-          <a:p xmlns:a="http://schemas.openxmlformats.org/drawingml/2006/main">
-            <a:r>
-              <a:t/>
-            </a:r>
-          </a:p>
-          <a:p xmlns:a="http://schemas.openxmlformats.org/drawingml/2006/main">
-            <a:pPr>
-              <a:buNone/>
-              <a:defRPr sz="1950" b="0">
-                <a:solidFill>
-                  <a:srgbClr val="D4D4D8"/>
-                </a:solidFill>
-                <a:latin typeface="Arial"/>
-                <a:ea typeface="Arial"/>
-                <a:cs typeface="Arial"/>
-              </a:defRPr>
-            </a:pPr>
-            <a:r>
-              <a:rPr sz="1950" b="0">
-                <a:solidFill>
-                  <a:srgbClr val="D4D4D8"/>
-                </a:solidFill>
-                <a:latin typeface="Arial"/>
-                <a:ea typeface="Arial"/>
-                <a:cs typeface="Arial"/>
-              </a:rPr>
-              <a:t>Smaller positive values use E = 0. They have no implied leading 1. Their exponent is fixed at 1 − bias.</a:t>
+              <a:t>The smallest normal exponent field is E = 1. With bias 3, that means e = −2. If the stored fraction is 000, the value is 1/4. We need another way to represent smaller positive values such as 1/8.</a:t>
             </a:r>
           </a:p>
         </p:txBody>
@@ -11910,7 +13047,7 @@
                 <a:ea typeface="Courier New"/>
                 <a:cs typeface="Courier New"/>
               </a:rPr>
-              <a:t>Normal:    (1 + F/8) × 2^(E−3)</a:t>
+              <a:t>Smallest normal</a:t>
             </a:r>
           </a:p>
           <a:p xmlns:a="http://schemas.openxmlformats.org/drawingml/2006/main">
@@ -11934,16 +13071,34 @@
                 <a:ea typeface="Courier New"/>
                 <a:cs typeface="Courier New"/>
               </a:rPr>
-              <a:t>Subnormal: (    F/8) × 2^(1−3)</a:t>
-            </a:r>
-          </a:p>
-          <a:p xmlns:a="http://schemas.openxmlformats.org/drawingml/2006/main">
-            <a:r>
               <a:t/>
             </a:r>
           </a:p>
           <a:p xmlns:a="http://schemas.openxmlformats.org/drawingml/2006/main">
             <a:pPr>
+              <a:defRPr sz="1650">
+                <a:solidFill>
+                  <a:srgbClr val="A7F3D0"/>
+                </a:solidFill>
+                <a:latin typeface="Courier New"/>
+                <a:ea typeface="Courier New"/>
+                <a:cs typeface="Courier New"/>
+              </a:defRPr>
+            </a:pPr>
+            <a:r>
+              <a:rPr sz="1650">
+                <a:solidFill>
+                  <a:srgbClr val="A7F3D0"/>
+                </a:solidFill>
+                <a:latin typeface="Courier New"/>
+                <a:ea typeface="Courier New"/>
+                <a:cs typeface="Courier New"/>
+              </a:rPr>
+              <a:t>E = 001₂  →  e = 1 − 3 = −2</a:t>
+            </a:r>
+          </a:p>
+          <a:p xmlns:a="http://schemas.openxmlformats.org/drawingml/2006/main">
+            <a:pPr>
               <a:buNone/>
               <a:defRPr sz="1650" b="0">
                 <a:solidFill>
@@ -11963,7 +13118,7 @@
                 <a:ea typeface="Courier New"/>
                 <a:cs typeface="Courier New"/>
               </a:rPr>
-              <a:t>With E = 0:</a:t>
+              <a:t>F = 000₂  →  significand 1.000₂</a:t>
             </a:r>
           </a:p>
           <a:p xmlns:a="http://schemas.openxmlformats.org/drawingml/2006/main">
@@ -11987,7 +13142,79 @@
                 <a:ea typeface="Courier New"/>
                 <a:cs typeface="Courier New"/>
               </a:rPr>
-              <a:t>value = (F/8) × 1/4 = F/32</a:t>
+              <a:t/>
+            </a:r>
+          </a:p>
+          <a:p xmlns:a="http://schemas.openxmlformats.org/drawingml/2006/main">
+            <a:pPr>
+              <a:buNone/>
+              <a:defRPr sz="1650" b="0">
+                <a:solidFill>
+                  <a:srgbClr val="A7F3D0"/>
+                </a:solidFill>
+                <a:latin typeface="Courier New"/>
+                <a:ea typeface="Courier New"/>
+                <a:cs typeface="Courier New"/>
+              </a:defRPr>
+            </a:pPr>
+            <a:r>
+              <a:rPr sz="1650" b="0">
+                <a:solidFill>
+                  <a:srgbClr val="A7F3D0"/>
+                </a:solidFill>
+                <a:latin typeface="Courier New"/>
+                <a:ea typeface="Courier New"/>
+                <a:cs typeface="Courier New"/>
+              </a:rPr>
+              <a:t>value = 1.000₂ × 2⁻² = 1/4</a:t>
+            </a:r>
+          </a:p>
+          <a:p xmlns:a="http://schemas.openxmlformats.org/drawingml/2006/main">
+            <a:pPr>
+              <a:buNone/>
+              <a:defRPr sz="1650" b="0">
+                <a:solidFill>
+                  <a:srgbClr val="A7F3D0"/>
+                </a:solidFill>
+                <a:latin typeface="Courier New"/>
+                <a:ea typeface="Courier New"/>
+                <a:cs typeface="Courier New"/>
+              </a:defRPr>
+            </a:pPr>
+            <a:r>
+              <a:rPr sz="1650" b="0">
+                <a:solidFill>
+                  <a:srgbClr val="A7F3D0"/>
+                </a:solidFill>
+                <a:latin typeface="Courier New"/>
+                <a:ea typeface="Courier New"/>
+                <a:cs typeface="Courier New"/>
+              </a:rPr>
+              <a:t/>
+            </a:r>
+          </a:p>
+          <a:p xmlns:a="http://schemas.openxmlformats.org/drawingml/2006/main">
+            <a:pPr>
+              <a:buNone/>
+              <a:defRPr sz="1650" b="0">
+                <a:solidFill>
+                  <a:srgbClr val="A7F3D0"/>
+                </a:solidFill>
+                <a:latin typeface="Courier New"/>
+                <a:ea typeface="Courier New"/>
+                <a:cs typeface="Courier New"/>
+              </a:defRPr>
+            </a:pPr>
+            <a:r>
+              <a:rPr sz="1650" b="0">
+                <a:solidFill>
+                  <a:srgbClr val="A7F3D0"/>
+                </a:solidFill>
+                <a:latin typeface="Courier New"/>
+                <a:ea typeface="Courier New"/>
+                <a:cs typeface="Courier New"/>
+              </a:rPr>
+              <a:t>1/8 is smaller. E = 0 marks a new case.</a:t>
             </a:r>
           </a:p>
         </p:txBody>
@@ -12045,7 +13272,7 @@
                 <a:ea typeface="Arial"/>
                 <a:cs typeface="Arial"/>
               </a:rPr>
-              <a:t>E = 0 changes the formula; it does not mean the true exponent is −3.</a:t>
+              <a:t>For E = 0, use the subnormal rule instead of subtracting the bias.</a:t>
             </a:r>
           </a:p>
         </p:txBody>
@@ -12103,7 +13330,7 @@
                 <a:ea typeface="Courier New"/>
                 <a:cs typeface="Courier New"/>
               </a:rPr>
-              <a:t>08 / 20</a:t>
+              <a:t>08 / 22</a:t>
             </a:r>
           </a:p>
         </p:txBody>
@@ -12190,7 +13417,7 @@
                 <a:ea typeface="Courier New"/>
                 <a:cs typeface="Courier New"/>
               </a:rPr>
-              <a:t>FLOATING POINT · WORKED EXAMPLE</a:t>
+              <a:t>FLOATING POINT · SUBNORMAL RULE</a:t>
             </a:r>
           </a:p>
         </p:txBody>
@@ -12248,7 +13475,7 @@
                 <a:ea typeface="Arial"/>
                 <a:cs typeface="Arial"/>
               </a:rPr>
-              <a:t>Encode a subnormal value: 1/8</a:t>
+              <a:t>E = 0 drops the hidden 1</a:t>
             </a:r>
           </a:p>
         </p:txBody>
@@ -12306,36 +13533,7 @@
                 <a:ea typeface="Arial"/>
                 <a:cs typeface="Arial"/>
               </a:rPr>
-              <a:t>1/8 is below the smallest normal value, 1/4. Set E = 0.</a:t>
-            </a:r>
-          </a:p>
-          <a:p xmlns:a="http://schemas.openxmlformats.org/drawingml/2006/main">
-            <a:r>
-              <a:t/>
-            </a:r>
-          </a:p>
-          <a:p xmlns:a="http://schemas.openxmlformats.org/drawingml/2006/main">
-            <a:pPr>
-              <a:buNone/>
-              <a:defRPr sz="1950" b="0">
-                <a:solidFill>
-                  <a:srgbClr val="D4D4D8"/>
-                </a:solidFill>
-                <a:latin typeface="Arial"/>
-                <a:ea typeface="Arial"/>
-                <a:cs typeface="Arial"/>
-              </a:defRPr>
-            </a:pPr>
-            <a:r>
-              <a:rPr sz="1950" b="0">
-                <a:solidFill>
-                  <a:srgbClr val="D4D4D8"/>
-                </a:solidFill>
-                <a:latin typeface="Arial"/>
-                <a:ea typeface="Arial"/>
-                <a:cs typeface="Arial"/>
-              </a:rPr>
-              <a:t>For this format, a subnormal has value F/32. Solve F/32 = 1/8, giving F = 4.</a:t>
+              <a:t>Normal values start with an implied 1 before the fraction bits. When E = 0, use an implied 0 instead. Keep the same 2⁻² scale as the smallest normal so the values grow smoothly from zero.</a:t>
             </a:r>
           </a:p>
         </p:txBody>
@@ -12393,7 +13591,7 @@
                 <a:ea typeface="Courier New"/>
                 <a:cs typeface="Courier New"/>
               </a:rPr>
-              <a:t>S = 0</a:t>
+              <a:t>Fixed e = 1 − bias = −2</a:t>
             </a:r>
           </a:p>
           <a:p xmlns:a="http://schemas.openxmlformats.org/drawingml/2006/main">
@@ -12417,7 +13615,7 @@
                 <a:ea typeface="Courier New"/>
                 <a:cs typeface="Courier New"/>
               </a:rPr>
-              <a:t>E = 0 = 000₂</a:t>
+              <a:t/>
             </a:r>
           </a:p>
           <a:p xmlns:a="http://schemas.openxmlformats.org/drawingml/2006/main">
@@ -12441,16 +13639,81 @@
                 <a:ea typeface="Courier New"/>
                 <a:cs typeface="Courier New"/>
               </a:rPr>
-              <a:t>F = 4 = 100₂</a:t>
-            </a:r>
-          </a:p>
-          <a:p xmlns:a="http://schemas.openxmlformats.org/drawingml/2006/main">
-            <a:r>
+              <a:t>Normal, E = 1:</a:t>
+            </a:r>
+          </a:p>
+          <a:p xmlns:a="http://schemas.openxmlformats.org/drawingml/2006/main">
+            <a:pPr>
+              <a:defRPr sz="1650">
+                <a:solidFill>
+                  <a:srgbClr val="A7F3D0"/>
+                </a:solidFill>
+                <a:latin typeface="Courier New"/>
+                <a:ea typeface="Courier New"/>
+                <a:cs typeface="Courier New"/>
+              </a:defRPr>
+            </a:pPr>
+            <a:r>
+              <a:rPr sz="1650">
+                <a:solidFill>
+                  <a:srgbClr val="A7F3D0"/>
+                </a:solidFill>
+                <a:latin typeface="Courier New"/>
+                <a:ea typeface="Courier New"/>
+                <a:cs typeface="Courier New"/>
+              </a:rPr>
+              <a:t>1.FFF₂ × 2⁻²</a:t>
+            </a:r>
+          </a:p>
+          <a:p xmlns:a="http://schemas.openxmlformats.org/drawingml/2006/main">
+            <a:pPr>
+              <a:buNone/>
+              <a:defRPr sz="1650" b="0">
+                <a:solidFill>
+                  <a:srgbClr val="A7F3D0"/>
+                </a:solidFill>
+                <a:latin typeface="Courier New"/>
+                <a:ea typeface="Courier New"/>
+                <a:cs typeface="Courier New"/>
+              </a:defRPr>
+            </a:pPr>
+            <a:r>
+              <a:rPr sz="1650" b="0">
+                <a:solidFill>
+                  <a:srgbClr val="A7F3D0"/>
+                </a:solidFill>
+                <a:latin typeface="Courier New"/>
+                <a:ea typeface="Courier New"/>
+                <a:cs typeface="Courier New"/>
+              </a:rPr>
               <a:t/>
             </a:r>
           </a:p>
           <a:p xmlns:a="http://schemas.openxmlformats.org/drawingml/2006/main">
             <a:pPr>
+              <a:defRPr sz="1650">
+                <a:solidFill>
+                  <a:srgbClr val="A7F3D0"/>
+                </a:solidFill>
+                <a:latin typeface="Courier New"/>
+                <a:ea typeface="Courier New"/>
+                <a:cs typeface="Courier New"/>
+              </a:defRPr>
+            </a:pPr>
+            <a:r>
+              <a:rPr sz="1650">
+                <a:solidFill>
+                  <a:srgbClr val="A7F3D0"/>
+                </a:solidFill>
+                <a:latin typeface="Courier New"/>
+                <a:ea typeface="Courier New"/>
+                <a:cs typeface="Courier New"/>
+              </a:rPr>
+              <a:t>Subnormal, E = 0:</a:t>
+            </a:r>
+          </a:p>
+          <a:p xmlns:a="http://schemas.openxmlformats.org/drawingml/2006/main">
+            <a:pPr>
               <a:buNone/>
               <a:defRPr sz="1650" b="0">
                 <a:solidFill>
@@ -12470,11 +13733,30 @@
                 <a:ea typeface="Courier New"/>
                 <a:cs typeface="Courier New"/>
               </a:rPr>
-              <a:t>Fields: 0 | 000 | 100</a:t>
-            </a:r>
-          </a:p>
-          <a:p xmlns:a="http://schemas.openxmlformats.org/drawingml/2006/main">
-            <a:r>
+              <a:t>0.FFF₂ × 2⁻²</a:t>
+            </a:r>
+          </a:p>
+          <a:p xmlns:a="http://schemas.openxmlformats.org/drawingml/2006/main">
+            <a:pPr>
+              <a:buNone/>
+              <a:defRPr sz="1650" b="0">
+                <a:solidFill>
+                  <a:srgbClr val="A7F3D0"/>
+                </a:solidFill>
+                <a:latin typeface="Courier New"/>
+                <a:ea typeface="Courier New"/>
+                <a:cs typeface="Courier New"/>
+              </a:defRPr>
+            </a:pPr>
+            <a:r>
+              <a:rPr sz="1650" b="0">
+                <a:solidFill>
+                  <a:srgbClr val="A7F3D0"/>
+                </a:solidFill>
+                <a:latin typeface="Courier New"/>
+                <a:ea typeface="Courier New"/>
+                <a:cs typeface="Courier New"/>
+              </a:rPr>
               <a:t/>
             </a:r>
           </a:p>
@@ -12499,7 +13781,31 @@
                 <a:ea typeface="Courier New"/>
                 <a:cs typeface="Courier New"/>
               </a:rPr>
-              <a:t>Check: (4/8) × 2⁻² = 1/8</a:t>
+              <a:t>F = 000  →  0.000₂ × 2⁻² = 0</a:t>
+            </a:r>
+          </a:p>
+          <a:p xmlns:a="http://schemas.openxmlformats.org/drawingml/2006/main">
+            <a:pPr>
+              <a:buNone/>
+              <a:defRPr sz="1650" b="0">
+                <a:solidFill>
+                  <a:srgbClr val="A7F3D0"/>
+                </a:solidFill>
+                <a:latin typeface="Courier New"/>
+                <a:ea typeface="Courier New"/>
+                <a:cs typeface="Courier New"/>
+              </a:defRPr>
+            </a:pPr>
+            <a:r>
+              <a:rPr sz="1650" b="0">
+                <a:solidFill>
+                  <a:srgbClr val="A7F3D0"/>
+                </a:solidFill>
+                <a:latin typeface="Courier New"/>
+                <a:ea typeface="Courier New"/>
+                <a:cs typeface="Courier New"/>
+              </a:rPr>
+              <a:t>F = 100  →  0.100₂ × 2⁻² = 1/8</a:t>
             </a:r>
           </a:p>
         </p:txBody>
@@ -12557,7 +13863,7 @@
                 <a:ea typeface="Arial"/>
                 <a:cs typeface="Arial"/>
               </a:rPr>
-              <a:t>The stored fraction is 100₂. There is no leading 1 in the subnormal formula.</a:t>
+              <a:t>The leading 0 or 1 is implied; only FFF is stored.</a:t>
             </a:r>
           </a:p>
         </p:txBody>
@@ -12615,7 +13921,7 @@
                 <a:ea typeface="Courier New"/>
                 <a:cs typeface="Courier New"/>
               </a:rPr>
-              <a:t>09 / 20</a:t>
+              <a:t>09 / 22</a:t>
             </a:r>
           </a:p>
         </p:txBody>

--- a/public/presentations/CS211_Recitation_3.pptx
+++ b/public/presentations/CS211_Recitation_3.pptx
@@ -2,34 +2,36 @@
 <file path=ppt/presentation.xml><?xml version="1.0" encoding="utf-8"?>
 <p:presentation xmlns:p="http://schemas.openxmlformats.org/presentationml/2006/main">
   <p:sldMasterIdLst>
-    <p:sldMasterId xmlns:r="http://schemas.openxmlformats.org/officeDocument/2006/relationships" id="2147483648" r:id="R8d68ad4fd84a47cc"/>
+    <p:sldMasterId xmlns:r="http://schemas.openxmlformats.org/officeDocument/2006/relationships" id="2147483648" r:id="Ra581eb1e70f04890"/>
   </p:sldMasterIdLst>
   <p:notesMasterIdLst>
-    <p:notesMasterId xmlns:r="http://schemas.openxmlformats.org/officeDocument/2006/relationships" r:id="Rf14b7f2b99254511"/>
+    <p:notesMasterId xmlns:r="http://schemas.openxmlformats.org/officeDocument/2006/relationships" r:id="Rbb865c280d434164"/>
   </p:notesMasterIdLst>
   <p:sldIdLst>
-    <p:sldId xmlns:r="http://schemas.openxmlformats.org/officeDocument/2006/relationships" id="256" r:id="R5267d73aa5874270"/>
-    <p:sldId xmlns:r="http://schemas.openxmlformats.org/officeDocument/2006/relationships" id="257" r:id="R4aae4a14d1454a16"/>
-    <p:sldId xmlns:r="http://schemas.openxmlformats.org/officeDocument/2006/relationships" id="258" r:id="Rc0f65d20b6634bdb"/>
-    <p:sldId xmlns:r="http://schemas.openxmlformats.org/officeDocument/2006/relationships" id="259" r:id="Rd38053d8d9e74084"/>
-    <p:sldId xmlns:r="http://schemas.openxmlformats.org/officeDocument/2006/relationships" id="260" r:id="R3b9dd25fa84345d1"/>
-    <p:sldId xmlns:r="http://schemas.openxmlformats.org/officeDocument/2006/relationships" id="261" r:id="R6b5d7bf35bdf495a"/>
-    <p:sldId xmlns:r="http://schemas.openxmlformats.org/officeDocument/2006/relationships" id="262" r:id="R2ec18e9e512745e0"/>
-    <p:sldId xmlns:r="http://schemas.openxmlformats.org/officeDocument/2006/relationships" id="263" r:id="R1f840f1fbef04f32"/>
-    <p:sldId xmlns:r="http://schemas.openxmlformats.org/officeDocument/2006/relationships" id="264" r:id="Rfecf66dcab394e97"/>
-    <p:sldId xmlns:r="http://schemas.openxmlformats.org/officeDocument/2006/relationships" id="265" r:id="R60723292eea841aa"/>
-    <p:sldId xmlns:r="http://schemas.openxmlformats.org/officeDocument/2006/relationships" id="266" r:id="Re1f14d0166f34c45"/>
-    <p:sldId xmlns:r="http://schemas.openxmlformats.org/officeDocument/2006/relationships" id="267" r:id="R7fb7ed0b61e149be"/>
-    <p:sldId xmlns:r="http://schemas.openxmlformats.org/officeDocument/2006/relationships" id="268" r:id="Rc9360792d54144b3"/>
-    <p:sldId xmlns:r="http://schemas.openxmlformats.org/officeDocument/2006/relationships" id="269" r:id="R194cd94b0dce415d"/>
-    <p:sldId xmlns:r="http://schemas.openxmlformats.org/officeDocument/2006/relationships" id="270" r:id="R27ffca7f438c4ed5"/>
-    <p:sldId xmlns:r="http://schemas.openxmlformats.org/officeDocument/2006/relationships" id="271" r:id="Rc8e7e17d97f643df"/>
-    <p:sldId xmlns:r="http://schemas.openxmlformats.org/officeDocument/2006/relationships" id="272" r:id="Rf2a99ac22aca4a16"/>
-    <p:sldId xmlns:r="http://schemas.openxmlformats.org/officeDocument/2006/relationships" id="273" r:id="Rd4ee585781d84149"/>
-    <p:sldId xmlns:r="http://schemas.openxmlformats.org/officeDocument/2006/relationships" id="274" r:id="Re9e87104bc05434b"/>
-    <p:sldId xmlns:r="http://schemas.openxmlformats.org/officeDocument/2006/relationships" id="275" r:id="Rb2e27981acfa43a2"/>
-    <p:sldId xmlns:r="http://schemas.openxmlformats.org/officeDocument/2006/relationships" id="276" r:id="R188c15c14f384b7c"/>
-    <p:sldId xmlns:r="http://schemas.openxmlformats.org/officeDocument/2006/relationships" id="277" r:id="Rf43030d33e9541e3"/>
+    <p:sldId xmlns:r="http://schemas.openxmlformats.org/officeDocument/2006/relationships" id="256" r:id="R3b3728e610b24b82"/>
+    <p:sldId xmlns:r="http://schemas.openxmlformats.org/officeDocument/2006/relationships" id="257" r:id="Rdf587f2ca1514ed5"/>
+    <p:sldId xmlns:r="http://schemas.openxmlformats.org/officeDocument/2006/relationships" id="258" r:id="R788d641bee0e46f7"/>
+    <p:sldId xmlns:r="http://schemas.openxmlformats.org/officeDocument/2006/relationships" id="259" r:id="R30cfa2125db74ca6"/>
+    <p:sldId xmlns:r="http://schemas.openxmlformats.org/officeDocument/2006/relationships" id="260" r:id="R7d53adca072f4738"/>
+    <p:sldId xmlns:r="http://schemas.openxmlformats.org/officeDocument/2006/relationships" id="261" r:id="R6c66a994006c45e0"/>
+    <p:sldId xmlns:r="http://schemas.openxmlformats.org/officeDocument/2006/relationships" id="262" r:id="R6f1480aea06143a6"/>
+    <p:sldId xmlns:r="http://schemas.openxmlformats.org/officeDocument/2006/relationships" id="263" r:id="R9f5c3e9ab19c4953"/>
+    <p:sldId xmlns:r="http://schemas.openxmlformats.org/officeDocument/2006/relationships" id="264" r:id="R163ed676201b4ca9"/>
+    <p:sldId xmlns:r="http://schemas.openxmlformats.org/officeDocument/2006/relationships" id="265" r:id="R6fb00f9d361c4b4b"/>
+    <p:sldId xmlns:r="http://schemas.openxmlformats.org/officeDocument/2006/relationships" id="266" r:id="Rd5a016d5364547db"/>
+    <p:sldId xmlns:r="http://schemas.openxmlformats.org/officeDocument/2006/relationships" id="267" r:id="R5b09294dfc4c4a08"/>
+    <p:sldId xmlns:r="http://schemas.openxmlformats.org/officeDocument/2006/relationships" id="268" r:id="Rcab8b974bc2a495c"/>
+    <p:sldId xmlns:r="http://schemas.openxmlformats.org/officeDocument/2006/relationships" id="269" r:id="R4db0ca0f0c1a4f87"/>
+    <p:sldId xmlns:r="http://schemas.openxmlformats.org/officeDocument/2006/relationships" id="270" r:id="R805499bc847d4ef1"/>
+    <p:sldId xmlns:r="http://schemas.openxmlformats.org/officeDocument/2006/relationships" id="271" r:id="Raec2f52b08104e65"/>
+    <p:sldId xmlns:r="http://schemas.openxmlformats.org/officeDocument/2006/relationships" id="272" r:id="R26a40352e6c84eb9"/>
+    <p:sldId xmlns:r="http://schemas.openxmlformats.org/officeDocument/2006/relationships" id="273" r:id="Rae14098eac234600"/>
+    <p:sldId xmlns:r="http://schemas.openxmlformats.org/officeDocument/2006/relationships" id="274" r:id="Rd20e5cfba2c24adb"/>
+    <p:sldId xmlns:r="http://schemas.openxmlformats.org/officeDocument/2006/relationships" id="275" r:id="R0540b3cf26454380"/>
+    <p:sldId xmlns:r="http://schemas.openxmlformats.org/officeDocument/2006/relationships" id="276" r:id="R03d16bfa308b42ed"/>
+    <p:sldId xmlns:r="http://schemas.openxmlformats.org/officeDocument/2006/relationships" id="277" r:id="R14fcb46eb35546e3"/>
+    <p:sldId xmlns:r="http://schemas.openxmlformats.org/officeDocument/2006/relationships" id="278" r:id="R86a7c2badc484d81"/>
+    <p:sldId xmlns:r="http://schemas.openxmlformats.org/officeDocument/2006/relationships" id="279" r:id="Rac8466e2a79d4548"/>
   </p:sldIdLst>
   <p:sldSz cx="12192000" cy="6858000"/>
   <p:notesSz cx="6858000" cy="9144000"/>
@@ -463,7 +465,7 @@
           <a:lstStyle xmlns:a="http://schemas.openxmlformats.org/drawingml/2006/main"/>
           <a:p xmlns:a="http://schemas.openxmlformats.org/drawingml/2006/main">
             <a:r>
-              <a:t>Suggested 50-minute pacing: binary place values and fields 7 min; normal values 10 min; subnormals and the boundary 14 min; decoding and encoding practice 8 min; rounding and spacing 4 min; HW3 preview and recap 7 min. Pause after the subnormal step table and ask students to name the next value after 7/32. The HW3 details are based on the professor’s description supplied by the TA; the assignment is not officially posted. Source: lecture 6.</a:t>
+              <a:t>Suggested 50-minute pacing: binary place values and fields 7 min; normal values 10 min; quiz review 4 min; subnormals and the boundary 12 min; decoding and encoding practice 7 min; rounding and spacing 3 min; HW3 preview and recap 7 min. Pause after the quiz question before revealing the answer. The HW3 details are based on the professor’s description supplied by the TA; the assignment is not officially posted. Source: lecture 6 and the quiz screenshot supplied by the TA.</a:t>
             </a:r>
           </a:p>
         </p:txBody>
@@ -533,7 +535,7 @@
           <a:lstStyle xmlns:a="http://schemas.openxmlformats.org/drawingml/2006/main"/>
           <a:p xmlns:a="http://schemas.openxmlformats.org/drawingml/2006/main">
             <a:r>
-              <a:t>Derive the step: one fraction unit is 1/8; multiplying by 2^-2=1/4 gives 1/32. For this practice format, E=0,F=0 is zero and E=0,F=1..7 are positive subnormals. Let students answer 8/32=1/4 before the boundary slide. Source: lecture 6 subnormal equation.</a:t>
+              <a:t>Pause before giving the subnormal rule. Ask: if E=1 is the smallest normal field, where could 1/8 go? A normal encoding would need true exponent −3 and stored E=0, but zero is reserved for a different rule. The next slide explains that rule using binary digits rather than a formula first. Source: lecture 6 normal and subnormal equations.</a:t>
             </a:r>
           </a:p>
         </p:txBody>
@@ -603,7 +605,7 @@
           <a:lstStyle xmlns:a="http://schemas.openxmlformats.org/drawingml/2006/main"/>
           <a:p xmlns:a="http://schemas.openxmlformats.org/drawingml/2006/main">
             <a:r>
-              <a:t>Keep the calculation concrete: 1/8=4/32, so F=4. Decode using 0.100 binary times 2^-2: 1/2 times 1/4 is 1/8. Ask why E is zero and why F is four. Source: lecture 6 subnormal equation.</a:t>
+              <a:t>Use the same scale before and after the boundary: 2^(1−bias)=2^-2. This is the key change: replace the normal hidden 1 with 0. Do not compute 0−bias for E=0. Ask students why 0.100 binary is 1/2, then multiply by 1/4 to get 1/8. Source: lecture 6 subnormal equation.</a:t>
             </a:r>
           </a:p>
         </p:txBody>
@@ -673,7 +675,7 @@
           <a:lstStyle xmlns:a="http://schemas.openxmlformats.org/drawingml/2006/main"/>
           <a:p xmlns:a="http://schemas.openxmlformats.org/drawingml/2006/main">
             <a:r>
-              <a:t>Link back to the question on the previous step table. The step from 7/32 to 8/32 is 1/32, matching the subnormal spacing. E=0 does not mean exponent −3; both values use 2^-2. Source: lecture 6 normal and subnormal equations.</a:t>
+              <a:t>Derive the step: one fraction unit is 1/8; multiplying by 2^-2=1/4 gives 1/32. For this practice format, E=0,F=0 is zero and E=0,F=1..7 are positive subnormals. Let students answer 8/32=1/4 before the boundary slide. Source: lecture 6 subnormal equation.</a:t>
             </a:r>
           </a:p>
         </p:txBody>
@@ -743,7 +745,7 @@
           <a:lstStyle xmlns:a="http://schemas.openxmlformats.org/drawingml/2006/main"/>
           <a:p xmlns:a="http://schemas.openxmlformats.org/drawingml/2006/main">
             <a:r>
-              <a:t>Allow two to three minutes. A is normal: E=2,F=4, value (1+4/8)×2^-1=3/4. B is subnormal: E=0,F=3, value 3/32. Ask students to name the equation before calculating.</a:t>
+              <a:t>Keep the calculation concrete: 1/8=4/32, so F=4. Decode using 0.100 binary times 2^-2: 1/2 times 1/4 is 1/8. Ask why E is zero and why F is four. Source: lecture 6 subnormal equation.</a:t>
             </a:r>
           </a:p>
         </p:txBody>
@@ -813,7 +815,7 @@
           <a:lstStyle xmlns:a="http://schemas.openxmlformats.org/drawingml/2006/main"/>
           <a:p xmlns:a="http://schemas.openxmlformats.org/drawingml/2006/main">
             <a:r>
-              <a:t>Have students explain why B is not (1+3/8)×2^-3. The exponent for subnormals is fixed at 1−bias=-2, and the leading 1 is absent.</a:t>
+              <a:t>Link back to the question on the previous step table. The step from 7/32 to 8/32 is 1/32, matching the subnormal spacing. E=0 does not mean exponent −3; both values use 2^-2. Source: lecture 6 normal and subnormal equations.</a:t>
             </a:r>
           </a:p>
         </p:txBody>
@@ -883,7 +885,7 @@
           <a:lstStyle xmlns:a="http://schemas.openxmlformats.org/drawingml/2006/main"/>
           <a:p xmlns:a="http://schemas.openxmlformats.org/drawingml/2006/main">
             <a:r>
-              <a:t>Give two minutes. Both examples are exactly representable, so no rounding rule is needed. Ask students to check results by substituting E and F into the appropriate formula.</a:t>
+              <a:t>Allow two to three minutes. A is normal: E=2,F=4, value (1+4/8)×2^-1=3/4. B is subnormal: E=0,F=3, value 3/32. Ask students to name the equation before calculating.</a:t>
             </a:r>
           </a:p>
         </p:txBody>
@@ -953,7 +955,7 @@
           <a:lstStyle xmlns:a="http://schemas.openxmlformats.org/drawingml/2006/main"/>
           <a:p xmlns:a="http://schemas.openxmlformats.org/drawingml/2006/main">
             <a:r>
-              <a:t>Do not reveal until students have tried both. Emphasize that E=0 is a category marker here, not the unbiased exponent. E=3 represents true exponent zero because bias is three.</a:t>
+              <a:t>Have students explain why B is not (1+3/8)×2^-3. The exponent for subnormals is fixed at 1−bias=-2, and the leading 1 is absent.</a:t>
             </a:r>
           </a:p>
         </p:txBody>
@@ -1023,7 +1025,7 @@
           <a:lstStyle xmlns:a="http://schemas.openxmlformats.org/drawingml/2006/main"/>
           <a:p xmlns:a="http://schemas.openxmlformats.org/drawingml/2006/main">
             <a:r>
-              <a:t>The future homework description does not specify rounding, so do not teach truncation or nearest as a required rule. Here E=1 for both nearby normals. 5/16=0.3125, 11/32=0.34375, and 1/3≈0.3333. This replaces the earlier abstract associativity slide with a representation example directly tied to the professor's stated learning goal.</a:t>
+              <a:t>Give two minutes. Both examples are exactly representable, so no rounding rule is needed. Ask students to check results by substituting E and F into the appropriate formula.</a:t>
             </a:r>
           </a:p>
         </p:txBody>
@@ -1093,7 +1095,7 @@
           <a:lstStyle xmlns:a="http://schemas.openxmlformats.org/drawingml/2006/main"/>
           <a:p xmlns:a="http://schemas.openxmlformats.org/drawingml/2006/main">
             <a:r>
-              <a:t>For normals with fixed E, incrementing F by one changes the value by 2^(E−bias)/8. Show how this connects to the rounding slide and lecture 6’s discussion of gaps between floats.</a:t>
+              <a:t>Do not reveal until students have tried both. Emphasize that E=0 is a category marker here, not the unbiased exponent. E=3 represents true exponent zero because bias is three.</a:t>
             </a:r>
           </a:p>
         </p:txBody>
@@ -1163,7 +1165,7 @@
           <a:lstStyle xmlns:a="http://schemas.openxmlformats.org/drawingml/2006/main"/>
           <a:p xmlns:a="http://schemas.openxmlformats.org/drawingml/2006/main">
             <a:r>
-              <a:t>Based on the professor’s preview supplied by the TA. The intended command-line inputs are exponent bits, bias, significand bits, numerator, and denominator, in that order. The output contains the exponent and significand field values. Use 5/2 as a new teaching example. The final handout may add input and rounding details.</a:t>
+              <a:t>The future homework description does not specify rounding, so do not teach truncation or nearest as a required rule. Here E=1 for both nearby normals. 5/16=0.3125, 11/32=0.34375, and 1/3≈0.3333. This replaces the earlier abstract associativity slide with a representation example directly tied to the professor's stated learning goal.</a:t>
             </a:r>
           </a:p>
         </p:txBody>
@@ -1303,7 +1305,7 @@
           <a:lstStyle xmlns:a="http://schemas.openxmlformats.org/drawingml/2006/main"/>
           <a:p xmlns:a="http://schemas.openxmlformats.org/drawingml/2006/main">
             <a:r>
-              <a:t>This example is mathematically exact and uses the planned input order. Important TA note: the supplied draft solution computes the normal significand as (numerator &lt;&lt; sig_bits)/denominator − 2^sig_bits without scaling by 2^power_of_two. For these inputs that draft gives F=12, outside the three-bit range, rather than F=2. Do not present that draft code as a correct answer key until the normal path is fixed. Source: professor’s preview and lecture 6 normal-value equation.</a:t>
+              <a:t>For normals with fixed E, incrementing F by one changes the value by 2^(E−bias)/8. Show how this connects to the rounding slide and lecture 6’s discussion of gaps between floats.</a:t>
             </a:r>
           </a:p>
         </p:txBody>
@@ -1373,7 +1375,7 @@
           <a:lstStyle xmlns:a="http://schemas.openxmlformats.org/drawingml/2006/main"/>
           <a:p xmlns:a="http://schemas.openxmlformats.org/drawingml/2006/main">
             <a:r>
-              <a:t>Here p is the number of significand bits. For exact examples, solve the equation algebraically. The eventual homework may specify how to round values that fall between encodings, so do not assume a rounding rule yet. This is a conceptual approach, not a copy of the unreleased source code. Source: professor’s preview and lecture 6 equations.</a:t>
+              <a:t>Based on the professor’s preview supplied by the TA. The intended command-line inputs are exponent bits, bias, significand bits, numerator, and denominator, in that order. The output contains the exponent and significand field values. Use 5/2 as a new teaching example. The final handout may add input and rounding details.</a:t>
             </a:r>
           </a:p>
         </p:txBody>
@@ -1443,6 +1445,146 @@
           <a:lstStyle xmlns:a="http://schemas.openxmlformats.org/drawingml/2006/main"/>
           <a:p xmlns:a="http://schemas.openxmlformats.org/drawingml/2006/main">
             <a:r>
+              <a:t>This example is mathematically exact and uses the planned input order. Important TA note: the supplied draft solution computes the normal significand as (numerator &lt;&lt; sig_bits)/denominator − 2^sig_bits without scaling by 2^power_of_two. For these inputs that draft gives F=12, outside the three-bit range, rather than F=2. Do not present that draft code as a correct answer key until the normal path is fixed. Source: professor’s preview and lecture 6 normal-value equation.</a:t>
+            </a:r>
+          </a:p>
+        </p:txBody>
+      </p:sp>
+      <p:sp>
+        <p:nvSpPr>
+          <p:cNvPr id="4" name="Slide Number Placeholder 3"/>
+          <p:cNvSpPr>
+            <a:spLocks xmlns:a="http://schemas.openxmlformats.org/drawingml/2006/main" noGrp="1"/>
+          </p:cNvSpPr>
+          <p:nvPr>
+            <p:ph type="sldNum" idx="5"/>
+          </p:nvPr>
+        </p:nvSpPr>
+        <p:spPr/>
+        <p:txBody>
+          <a:bodyPr xmlns:a="http://schemas.openxmlformats.org/drawingml/2006/main"/>
+          <a:lstStyle xmlns:a="http://schemas.openxmlformats.org/drawingml/2006/main"/>
+          <a:p xmlns:a="http://schemas.openxmlformats.org/drawingml/2006/main"/>
+        </p:txBody>
+      </p:sp>
+    </p:spTree>
+  </p:cSld>
+  <p:clrMapOvr>
+    <a:masterClrMapping xmlns:a="http://schemas.openxmlformats.org/drawingml/2006/main"/>
+  </p:clrMapOvr>
+</p:notes>
+</file>
+
+<file path=ppt/notesSlides/notesSlide23.xml><?xml version="1.0" encoding="utf-8"?>
+<p:notes xmlns:p="http://schemas.openxmlformats.org/presentationml/2006/main">
+  <p:cSld>
+    <p:spTree>
+      <p:nvGrpSpPr>
+        <p:cNvPr id="1" name=""/>
+        <p:cNvGrpSpPr/>
+        <p:nvPr/>
+      </p:nvGrpSpPr>
+      <p:grpSpPr>
+        <a:xfrm xmlns:a="http://schemas.openxmlformats.org/drawingml/2006/main"/>
+      </p:grpSpPr>
+      <p:sp>
+        <p:nvSpPr>
+          <p:cNvPr id="2" name="Slide Image Placeholder 1"/>
+          <p:cNvSpPr>
+            <a:spLocks xmlns:a="http://schemas.openxmlformats.org/drawingml/2006/main" noGrp="1"/>
+          </p:cNvSpPr>
+          <p:nvPr>
+            <p:ph type="sldImg" idx="0"/>
+          </p:nvPr>
+        </p:nvSpPr>
+        <p:spPr/>
+      </p:sp>
+      <p:sp>
+        <p:nvSpPr>
+          <p:cNvPr id="3" name="Notes Placeholder 2"/>
+          <p:cNvSpPr>
+            <a:spLocks xmlns:a="http://schemas.openxmlformats.org/drawingml/2006/main" noGrp="1"/>
+          </p:cNvSpPr>
+          <p:nvPr>
+            <p:ph type="body" idx="1"/>
+          </p:nvPr>
+        </p:nvSpPr>
+        <p:spPr/>
+        <p:txBody>
+          <a:bodyPr xmlns:a="http://schemas.openxmlformats.org/drawingml/2006/main"/>
+          <a:lstStyle xmlns:a="http://schemas.openxmlformats.org/drawingml/2006/main"/>
+          <a:p xmlns:a="http://schemas.openxmlformats.org/drawingml/2006/main">
+            <a:r>
+              <a:t>Here p is the number of significand bits. For exact examples, solve the equation algebraically. The eventual homework may specify how to round values that fall between encodings, so do not assume a rounding rule yet. This is a conceptual approach, not a copy of the unreleased source code. Source: professor’s preview and lecture 6 equations.</a:t>
+            </a:r>
+          </a:p>
+        </p:txBody>
+      </p:sp>
+      <p:sp>
+        <p:nvSpPr>
+          <p:cNvPr id="4" name="Slide Number Placeholder 3"/>
+          <p:cNvSpPr>
+            <a:spLocks xmlns:a="http://schemas.openxmlformats.org/drawingml/2006/main" noGrp="1"/>
+          </p:cNvSpPr>
+          <p:nvPr>
+            <p:ph type="sldNum" idx="5"/>
+          </p:nvPr>
+        </p:nvSpPr>
+        <p:spPr/>
+        <p:txBody>
+          <a:bodyPr xmlns:a="http://schemas.openxmlformats.org/drawingml/2006/main"/>
+          <a:lstStyle xmlns:a="http://schemas.openxmlformats.org/drawingml/2006/main"/>
+          <a:p xmlns:a="http://schemas.openxmlformats.org/drawingml/2006/main"/>
+        </p:txBody>
+      </p:sp>
+    </p:spTree>
+  </p:cSld>
+  <p:clrMapOvr>
+    <a:masterClrMapping xmlns:a="http://schemas.openxmlformats.org/drawingml/2006/main"/>
+  </p:clrMapOvr>
+</p:notes>
+</file>
+
+<file path=ppt/notesSlides/notesSlide24.xml><?xml version="1.0" encoding="utf-8"?>
+<p:notes xmlns:p="http://schemas.openxmlformats.org/presentationml/2006/main">
+  <p:cSld>
+    <p:spTree>
+      <p:nvGrpSpPr>
+        <p:cNvPr id="1" name=""/>
+        <p:cNvGrpSpPr/>
+        <p:nvPr/>
+      </p:nvGrpSpPr>
+      <p:grpSpPr>
+        <a:xfrm xmlns:a="http://schemas.openxmlformats.org/drawingml/2006/main"/>
+      </p:grpSpPr>
+      <p:sp>
+        <p:nvSpPr>
+          <p:cNvPr id="2" name="Slide Image Placeholder 1"/>
+          <p:cNvSpPr>
+            <a:spLocks xmlns:a="http://schemas.openxmlformats.org/drawingml/2006/main" noGrp="1"/>
+          </p:cNvSpPr>
+          <p:nvPr>
+            <p:ph type="sldImg" idx="0"/>
+          </p:nvPr>
+        </p:nvSpPr>
+        <p:spPr/>
+      </p:sp>
+      <p:sp>
+        <p:nvSpPr>
+          <p:cNvPr id="3" name="Notes Placeholder 2"/>
+          <p:cNvSpPr>
+            <a:spLocks xmlns:a="http://schemas.openxmlformats.org/drawingml/2006/main" noGrp="1"/>
+          </p:cNvSpPr>
+          <p:nvPr>
+            <p:ph type="body" idx="1"/>
+          </p:nvPr>
+        </p:nvSpPr>
+        <p:spPr/>
+        <p:txBody>
+          <a:bodyPr xmlns:a="http://schemas.openxmlformats.org/drawingml/2006/main"/>
+          <a:lstStyle xmlns:a="http://schemas.openxmlformats.org/drawingml/2006/main"/>
+          <a:p xmlns:a="http://schemas.openxmlformats.org/drawingml/2006/main">
+            <a:r>
               <a:t>Review the two mistakes most likely to occur: forgetting to add the bias for a normal exponent, and using the normal hidden 1 for a subnormal. Do not reveal the unreleased homework solution. Remind students to follow the eventual assignment’s rounding and valid-input rules.</a:t>
             </a:r>
           </a:p>
@@ -1863,7 +2005,7 @@
           <a:lstStyle xmlns:a="http://schemas.openxmlformats.org/drawingml/2006/main"/>
           <a:p xmlns:a="http://schemas.openxmlformats.org/drawingml/2006/main">
             <a:r>
-              <a:t>Pause before giving the subnormal rule. Ask: if E=1 is the smallest normal field, where could 1/8 go? A normal encoding would need true exponent −3 and stored E=0, but zero is reserved for a different rule. The next slide explains that rule using binary digits rather than a formula first. Source: lecture 6 normal and subnormal equations.</a:t>
+              <a:t>This is adapted from the quiz screenshot supplied by the TA. Give students one or two minutes. The question asks for the closest representable value and the decimal values of the sign, exponent, and significand fields. It is an exact case, so no rounding is needed. Keep the answer hidden until the next slide. The quiz calls the two stored fraction bits significand bits.</a:t>
             </a:r>
           </a:p>
         </p:txBody>
@@ -1933,7 +2075,7 @@
           <a:lstStyle xmlns:a="http://schemas.openxmlformats.org/drawingml/2006/main"/>
           <a:p xmlns:a="http://schemas.openxmlformats.org/drawingml/2006/main">
             <a:r>
-              <a:t>Use the same scale before and after the boundary: 2^(1−bias)=2^-2. This is the key change: replace the normal hidden 1 with 0. Do not compute 0−bias for E=0. Ask students why 0.100 binary is 1/2, then multiply by 1/4 to get 1/8. Source: lecture 6 subnormal equation.</a:t>
+              <a:t>Quiz screenshot supplied by the TA. Decode the fields aloud: sign bit 1 makes the value negative; 01111₂ is 15, so true exponent 15−15=0; 00₂ is stored significand field 0, with implied leading 1 for a normal value. Thus (−1)^1 × (1+0/4) × 2^0=−1.0. The reserved all-ones exponent is 11111₂=31, not 01111₂=15. Explicitly tell students that an exact target is its own closest representable value.</a:t>
             </a:r>
           </a:p>
         </p:txBody>
@@ -2001,7 +2143,7 @@
   </p:cSld>
   <p:clrMap bg1="lt1" tx1="dk1" bg2="lt2" tx2="dk2" accent1="accent1" accent2="accent2" accent3="accent3" accent4="accent4" accent5="accent5" accent6="accent6" hlink="hlink" folHlink="folHlink"/>
   <p:sldLayoutIdLst>
-    <p:sldLayoutId xmlns:r="http://schemas.openxmlformats.org/officeDocument/2006/relationships" id="2147483649" r:id="R2eed2ef29c5a483c"/>
+    <p:sldLayoutId xmlns:r="http://schemas.openxmlformats.org/officeDocument/2006/relationships" id="2147483649" r:id="R37788616201544a6"/>
   </p:sldLayoutIdLst>
   <p:txStyles>
     <p:titleStyle>
@@ -2851,6 +2993,30 @@
                 <a:ea typeface="Courier New"/>
                 <a:cs typeface="Courier New"/>
               </a:rPr>
+              <a:t>Quiz review: −1.0</a:t>
+            </a:r>
+          </a:p>
+          <a:p xmlns:a="http://schemas.openxmlformats.org/drawingml/2006/main">
+            <a:pPr>
+              <a:buNone/>
+              <a:defRPr sz="1650" b="0">
+                <a:solidFill>
+                  <a:srgbClr val="A7F3D0"/>
+                </a:solidFill>
+                <a:latin typeface="Courier New"/>
+                <a:ea typeface="Courier New"/>
+                <a:cs typeface="Courier New"/>
+              </a:defRPr>
+            </a:pPr>
+            <a:r>
+              <a:rPr sz="1650" b="0">
+                <a:solidFill>
+                  <a:srgbClr val="A7F3D0"/>
+                </a:solidFill>
+                <a:latin typeface="Courier New"/>
+                <a:ea typeface="Courier New"/>
+                <a:cs typeface="Courier New"/>
+              </a:rPr>
               <a:t>Normal and subnormal values</a:t>
             </a:r>
           </a:p>
@@ -3015,7 +3181,7 @@
                 <a:ea typeface="Courier New"/>
                 <a:cs typeface="Courier New"/>
               </a:rPr>
-              <a:t>01 / 22</a:t>
+              <a:t>01 / 24</a:t>
             </a:r>
           </a:p>
         </p:txBody>
@@ -3054,7 +3220,7 @@
           <p:cNvPr id="7" name="">
             <a:extLst xmlns:a="http://schemas.openxmlformats.org/drawingml/2006/main">
               <a:ext uri="{FF2B5EF4-FFF2-40B4-BE49-F238E27FC236}">
-                <a16:creationId xmlns:a16="http://schemas.microsoft.com/office/drawing/2014/main" id="{DF65E5C3-C59B-4F4C-8123-D26BB20B62FC}"/>
+                <a16:creationId xmlns:a16="http://schemas.microsoft.com/office/drawing/2014/main" id="{52BEAABF-BD4F-40AF-A282-4DA602FE61EE}"/>
               </a:ext>
             </a:extLst>
           </p:cNvPr>
@@ -3102,7 +3268,7 @@
                 <a:ea typeface="Courier New"/>
                 <a:cs typeface="Courier New"/>
               </a:rPr>
-              <a:t>FLOATING POINT · PLACE VALUES</a:t>
+              <a:t>FLOATING POINT · WHY SUBNORMALS</a:t>
             </a:r>
           </a:p>
         </p:txBody>
@@ -3112,7 +3278,7 @@
           <p:cNvPr id="2" name="">
             <a:extLst xmlns:a="http://schemas.openxmlformats.org/drawingml/2006/main">
               <a:ext uri="{FF2B5EF4-FFF2-40B4-BE49-F238E27FC236}">
-                <a16:creationId xmlns:a16="http://schemas.microsoft.com/office/drawing/2014/main" id="{AAF148DA-667A-4F17-8947-3A10B5D66209}"/>
+                <a16:creationId xmlns:a16="http://schemas.microsoft.com/office/drawing/2014/main" id="{55B309F2-033B-47F8-941D-460A77FAB0C8}"/>
               </a:ext>
             </a:extLst>
           </p:cNvPr>
@@ -3160,7 +3326,7 @@
                 <a:ea typeface="Arial"/>
                 <a:cs typeface="Arial"/>
               </a:rPr>
-              <a:t>Subnormals count in steps of 1/32</a:t>
+              <a:t>The smallest normal is 1/4</a:t>
             </a:r>
           </a:p>
         </p:txBody>
@@ -3170,7 +3336,7 @@
           <p:cNvPr id="3" name="">
             <a:extLst xmlns:a="http://schemas.openxmlformats.org/drawingml/2006/main">
               <a:ext uri="{FF2B5EF4-FFF2-40B4-BE49-F238E27FC236}">
-                <a16:creationId xmlns:a16="http://schemas.microsoft.com/office/drawing/2014/main" id="{9CBE9A2B-E617-4407-BF21-6D1C10DB5F7C}"/>
+                <a16:creationId xmlns:a16="http://schemas.microsoft.com/office/drawing/2014/main" id="{2413D46C-F548-4E0D-8AC8-B55CC5C096EA}"/>
               </a:ext>
             </a:extLst>
           </p:cNvPr>
@@ -3218,7 +3384,7 @@
                 <a:ea typeface="Arial"/>
                 <a:cs typeface="Arial"/>
               </a:rPr>
-              <a:t>The three stored fraction bits make 0.FFF₂ increase by 1/8 each time. Multiplying by the fixed 2⁻² scale makes each step 1/32. So the field value F counts steps of 1/32.</a:t>
+              <a:t>The smallest normal exponent field is E = 1. With bias 3, that means e = −2. If the stored fraction is 000, the value is 1/4. We need another way to represent smaller positive values such as 1/8.</a:t>
             </a:r>
           </a:p>
         </p:txBody>
@@ -3228,7 +3394,7 @@
           <p:cNvPr id="4" name="">
             <a:extLst xmlns:a="http://schemas.openxmlformats.org/drawingml/2006/main">
               <a:ext uri="{FF2B5EF4-FFF2-40B4-BE49-F238E27FC236}">
-                <a16:creationId xmlns:a16="http://schemas.microsoft.com/office/drawing/2014/main" id="{F24EA955-1341-477F-B9E0-1F67FB906026}"/>
+                <a16:creationId xmlns:a16="http://schemas.microsoft.com/office/drawing/2014/main" id="{F4B5AD63-6E91-45DD-AE29-2F54895B988B}"/>
               </a:ext>
             </a:extLst>
           </p:cNvPr>
@@ -3276,7 +3442,7 @@
                 <a:ea typeface="Courier New"/>
                 <a:cs typeface="Courier New"/>
               </a:rPr>
-              <a:t>F     bits     value</a:t>
+              <a:t>Smallest normal</a:t>
             </a:r>
           </a:p>
           <a:p xmlns:a="http://schemas.openxmlformats.org/drawingml/2006/main">
@@ -3300,11 +3466,12 @@
                 <a:ea typeface="Courier New"/>
                 <a:cs typeface="Courier New"/>
               </a:rPr>
-              <a:t>0     000      0/32</a:t>
-            </a:r>
-          </a:p>
-          <a:p xmlns:a="http://schemas.openxmlformats.org/drawingml/2006/main">
-            <a:pPr>
+              <a:t/>
+            </a:r>
+          </a:p>
+          <a:p xmlns:a="http://schemas.openxmlformats.org/drawingml/2006/main">
+            <a:pPr>
+              <a:buNone/>
               <a:defRPr sz="1650">
                 <a:solidFill>
                   <a:srgbClr val="A7F3D0"/>
@@ -3323,7 +3490,7 @@
                 <a:ea typeface="Courier New"/>
                 <a:cs typeface="Courier New"/>
               </a:rPr>
-              <a:t>1     001      1/32</a:t>
+              <a:t>E = 001₂  →  e = 1 − 3 = −2</a:t>
             </a:r>
           </a:p>
           <a:p xmlns:a="http://schemas.openxmlformats.org/drawingml/2006/main">
@@ -3347,7 +3514,7 @@
                 <a:ea typeface="Courier New"/>
                 <a:cs typeface="Courier New"/>
               </a:rPr>
-              <a:t>4     100      4/32 = 1/8</a:t>
+              <a:t>F = 000₂  →  significand 1.000₂</a:t>
             </a:r>
           </a:p>
           <a:p xmlns:a="http://schemas.openxmlformats.org/drawingml/2006/main">
@@ -3371,11 +3538,6 @@
                 <a:ea typeface="Courier New"/>
                 <a:cs typeface="Courier New"/>
               </a:rPr>
-              <a:t>7     111      7/32</a:t>
-            </a:r>
-          </a:p>
-          <a:p xmlns:a="http://schemas.openxmlformats.org/drawingml/2006/main">
-            <a:r>
               <a:t/>
             </a:r>
           </a:p>
@@ -3400,7 +3562,55 @@
                 <a:ea typeface="Courier New"/>
                 <a:cs typeface="Courier New"/>
               </a:rPr>
-              <a:t>Subnormal value = F/32</a:t>
+              <a:t>value = 1.000₂ × 2⁻² = 1/4</a:t>
+            </a:r>
+          </a:p>
+          <a:p xmlns:a="http://schemas.openxmlformats.org/drawingml/2006/main">
+            <a:pPr>
+              <a:buNone/>
+              <a:defRPr sz="1650" b="0">
+                <a:solidFill>
+                  <a:srgbClr val="A7F3D0"/>
+                </a:solidFill>
+                <a:latin typeface="Courier New"/>
+                <a:ea typeface="Courier New"/>
+                <a:cs typeface="Courier New"/>
+              </a:defRPr>
+            </a:pPr>
+            <a:r>
+              <a:rPr sz="1650" b="0">
+                <a:solidFill>
+                  <a:srgbClr val="A7F3D0"/>
+                </a:solidFill>
+                <a:latin typeface="Courier New"/>
+                <a:ea typeface="Courier New"/>
+                <a:cs typeface="Courier New"/>
+              </a:rPr>
+              <a:t/>
+            </a:r>
+          </a:p>
+          <a:p xmlns:a="http://schemas.openxmlformats.org/drawingml/2006/main">
+            <a:pPr>
+              <a:buNone/>
+              <a:defRPr sz="1650" b="0">
+                <a:solidFill>
+                  <a:srgbClr val="A7F3D0"/>
+                </a:solidFill>
+                <a:latin typeface="Courier New"/>
+                <a:ea typeface="Courier New"/>
+                <a:cs typeface="Courier New"/>
+              </a:defRPr>
+            </a:pPr>
+            <a:r>
+              <a:rPr sz="1650" b="0">
+                <a:solidFill>
+                  <a:srgbClr val="A7F3D0"/>
+                </a:solidFill>
+                <a:latin typeface="Courier New"/>
+                <a:ea typeface="Courier New"/>
+                <a:cs typeface="Courier New"/>
+              </a:rPr>
+              <a:t>1/8 is smaller. E = 0 marks a new case.</a:t>
             </a:r>
           </a:p>
         </p:txBody>
@@ -3410,7 +3620,7 @@
           <p:cNvPr id="5" name="">
             <a:extLst xmlns:a="http://schemas.openxmlformats.org/drawingml/2006/main">
               <a:ext uri="{FF2B5EF4-FFF2-40B4-BE49-F238E27FC236}">
-                <a16:creationId xmlns:a16="http://schemas.microsoft.com/office/drawing/2014/main" id="{E8B59BBF-C1FE-4848-A1BE-0E49C6150211}"/>
+                <a16:creationId xmlns:a16="http://schemas.microsoft.com/office/drawing/2014/main" id="{10C83417-6965-41D8-8054-D122A500127B}"/>
               </a:ext>
             </a:extLst>
           </p:cNvPr>
@@ -3458,7 +3668,7 @@
                 <a:ea typeface="Arial"/>
                 <a:cs typeface="Arial"/>
               </a:rPr>
-              <a:t>Ask: what is the next value after 7/32?</a:t>
+              <a:t>For E = 0, use the subnormal rule instead of subtracting the bias.</a:t>
             </a:r>
           </a:p>
         </p:txBody>
@@ -3468,7 +3678,7 @@
           <p:cNvPr id="6" name="">
             <a:extLst xmlns:a="http://schemas.openxmlformats.org/drawingml/2006/main">
               <a:ext uri="{FF2B5EF4-FFF2-40B4-BE49-F238E27FC236}">
-                <a16:creationId xmlns:a16="http://schemas.microsoft.com/office/drawing/2014/main" id="{C1D8CDEF-F520-47D3-A60F-E6AFCB834AE6}"/>
+                <a16:creationId xmlns:a16="http://schemas.microsoft.com/office/drawing/2014/main" id="{8E1F2603-246C-497E-B2CC-C75AC3901746}"/>
               </a:ext>
             </a:extLst>
           </p:cNvPr>
@@ -3516,7 +3726,7 @@
                 <a:ea typeface="Courier New"/>
                 <a:cs typeface="Courier New"/>
               </a:rPr>
-              <a:t>10 / 22</a:t>
+              <a:t>10 / 24</a:t>
             </a:r>
           </a:p>
         </p:txBody>
@@ -3524,7 +3734,7 @@
     </p:spTree>
     <p:extLst>
       <p:ext uri="{BB962C8B-B14F-4D97-AF65-F5344CB8AC3E}">
-        <p14:creationId xmlns:p14="http://schemas.microsoft.com/office/powerpoint/2010/main" val="1006218793"/>
+        <p14:creationId xmlns:p14="http://schemas.microsoft.com/office/powerpoint/2010/main" val="1857122576"/>
       </p:ext>
     </p:extLst>
   </p:cSld>
@@ -3603,7 +3813,7 @@
                 <a:ea typeface="Courier New"/>
                 <a:cs typeface="Courier New"/>
               </a:rPr>
-              <a:t>FLOATING POINT · WORKED EXAMPLE</a:t>
+              <a:t>FLOATING POINT · SUBNORMAL RULE</a:t>
             </a:r>
           </a:p>
         </p:txBody>
@@ -3661,7 +3871,7 @@
                 <a:ea typeface="Arial"/>
                 <a:cs typeface="Arial"/>
               </a:rPr>
-              <a:t>Encode a subnormal: 1/8</a:t>
+              <a:t>E = 0 drops the hidden 1</a:t>
             </a:r>
           </a:p>
         </p:txBody>
@@ -3719,7 +3929,7 @@
                 <a:ea typeface="Arial"/>
                 <a:cs typeface="Arial"/>
               </a:rPr>
-              <a:t>1/8 is below the smallest normal, 1/4, so E = 0. A subnormal here is worth F/32. Solve F/32 = 1/8: F = 4, which is 100₂ in three bits.</a:t>
+              <a:t>Normal values start with an implied 1 before the fraction bits. When E = 0, use an implied 0 instead. Keep the same 2⁻² scale as the smallest normal so the values grow smoothly from zero.</a:t>
             </a:r>
           </a:p>
         </p:txBody>
@@ -3777,7 +3987,7 @@
                 <a:ea typeface="Courier New"/>
                 <a:cs typeface="Courier New"/>
               </a:rPr>
-              <a:t>S = 0</a:t>
+              <a:t>Fixed e = 1 − bias = −2</a:t>
             </a:r>
           </a:p>
           <a:p xmlns:a="http://schemas.openxmlformats.org/drawingml/2006/main">
@@ -3801,7 +4011,7 @@
                 <a:ea typeface="Courier New"/>
                 <a:cs typeface="Courier New"/>
               </a:rPr>
-              <a:t>E = 0 = 000₂</a:t>
+              <a:t/>
             </a:r>
           </a:p>
           <a:p xmlns:a="http://schemas.openxmlformats.org/drawingml/2006/main">
@@ -3825,17 +4035,84 @@
                 <a:ea typeface="Courier New"/>
                 <a:cs typeface="Courier New"/>
               </a:rPr>
-              <a:t>F = 4 = 100₂</a:t>
-            </a:r>
-          </a:p>
-          <a:p xmlns:a="http://schemas.openxmlformats.org/drawingml/2006/main">
-            <a:r>
+              <a:t>Normal, E = 1:</a:t>
+            </a:r>
+          </a:p>
+          <a:p xmlns:a="http://schemas.openxmlformats.org/drawingml/2006/main">
+            <a:pPr>
+              <a:buNone/>
+              <a:defRPr sz="1650">
+                <a:solidFill>
+                  <a:srgbClr val="A7F3D0"/>
+                </a:solidFill>
+                <a:latin typeface="Courier New"/>
+                <a:ea typeface="Courier New"/>
+                <a:cs typeface="Courier New"/>
+              </a:defRPr>
+            </a:pPr>
+            <a:r>
+              <a:rPr sz="1650">
+                <a:solidFill>
+                  <a:srgbClr val="A7F3D0"/>
+                </a:solidFill>
+                <a:latin typeface="Courier New"/>
+                <a:ea typeface="Courier New"/>
+                <a:cs typeface="Courier New"/>
+              </a:rPr>
+              <a:t>1.FFF₂ × 2⁻²</a:t>
+            </a:r>
+          </a:p>
+          <a:p xmlns:a="http://schemas.openxmlformats.org/drawingml/2006/main">
+            <a:pPr>
+              <a:buNone/>
+              <a:defRPr sz="1650" b="0">
+                <a:solidFill>
+                  <a:srgbClr val="A7F3D0"/>
+                </a:solidFill>
+                <a:latin typeface="Courier New"/>
+                <a:ea typeface="Courier New"/>
+                <a:cs typeface="Courier New"/>
+              </a:defRPr>
+            </a:pPr>
+            <a:r>
+              <a:rPr sz="1650" b="0">
+                <a:solidFill>
+                  <a:srgbClr val="A7F3D0"/>
+                </a:solidFill>
+                <a:latin typeface="Courier New"/>
+                <a:ea typeface="Courier New"/>
+                <a:cs typeface="Courier New"/>
+              </a:rPr>
               <a:t/>
             </a:r>
           </a:p>
           <a:p xmlns:a="http://schemas.openxmlformats.org/drawingml/2006/main">
             <a:pPr>
               <a:buNone/>
+              <a:defRPr sz="1650">
+                <a:solidFill>
+                  <a:srgbClr val="A7F3D0"/>
+                </a:solidFill>
+                <a:latin typeface="Courier New"/>
+                <a:ea typeface="Courier New"/>
+                <a:cs typeface="Courier New"/>
+              </a:defRPr>
+            </a:pPr>
+            <a:r>
+              <a:rPr sz="1650">
+                <a:solidFill>
+                  <a:srgbClr val="A7F3D0"/>
+                </a:solidFill>
+                <a:latin typeface="Courier New"/>
+                <a:ea typeface="Courier New"/>
+                <a:cs typeface="Courier New"/>
+              </a:rPr>
+              <a:t>Subnormal, E = 0:</a:t>
+            </a:r>
+          </a:p>
+          <a:p xmlns:a="http://schemas.openxmlformats.org/drawingml/2006/main">
+            <a:pPr>
+              <a:buNone/>
               <a:defRPr sz="1650" b="0">
                 <a:solidFill>
                   <a:srgbClr val="A7F3D0"/>
@@ -3854,11 +4131,30 @@
                 <a:ea typeface="Courier New"/>
                 <a:cs typeface="Courier New"/>
               </a:rPr>
-              <a:t>Fields: 0 | 000 | 100</a:t>
-            </a:r>
-          </a:p>
-          <a:p xmlns:a="http://schemas.openxmlformats.org/drawingml/2006/main">
-            <a:r>
+              <a:t>0.FFF₂ × 2⁻²</a:t>
+            </a:r>
+          </a:p>
+          <a:p xmlns:a="http://schemas.openxmlformats.org/drawingml/2006/main">
+            <a:pPr>
+              <a:buNone/>
+              <a:defRPr sz="1650" b="0">
+                <a:solidFill>
+                  <a:srgbClr val="A7F3D0"/>
+                </a:solidFill>
+                <a:latin typeface="Courier New"/>
+                <a:ea typeface="Courier New"/>
+                <a:cs typeface="Courier New"/>
+              </a:defRPr>
+            </a:pPr>
+            <a:r>
+              <a:rPr sz="1650" b="0">
+                <a:solidFill>
+                  <a:srgbClr val="A7F3D0"/>
+                </a:solidFill>
+                <a:latin typeface="Courier New"/>
+                <a:ea typeface="Courier New"/>
+                <a:cs typeface="Courier New"/>
+              </a:rPr>
               <a:t/>
             </a:r>
           </a:p>
@@ -3883,7 +4179,31 @@
                 <a:ea typeface="Courier New"/>
                 <a:cs typeface="Courier New"/>
               </a:rPr>
-              <a:t>Check: 4/32 = 1/8</a:t>
+              <a:t>F = 000  →  0.000₂ × 2⁻² = 0</a:t>
+            </a:r>
+          </a:p>
+          <a:p xmlns:a="http://schemas.openxmlformats.org/drawingml/2006/main">
+            <a:pPr>
+              <a:buNone/>
+              <a:defRPr sz="1650" b="0">
+                <a:solidFill>
+                  <a:srgbClr val="A7F3D0"/>
+                </a:solidFill>
+                <a:latin typeface="Courier New"/>
+                <a:ea typeface="Courier New"/>
+                <a:cs typeface="Courier New"/>
+              </a:defRPr>
+            </a:pPr>
+            <a:r>
+              <a:rPr sz="1650" b="0">
+                <a:solidFill>
+                  <a:srgbClr val="A7F3D0"/>
+                </a:solidFill>
+                <a:latin typeface="Courier New"/>
+                <a:ea typeface="Courier New"/>
+                <a:cs typeface="Courier New"/>
+              </a:rPr>
+              <a:t>F = 100  →  0.100₂ × 2⁻² = 1/8</a:t>
             </a:r>
           </a:p>
         </p:txBody>
@@ -3941,7 +4261,7 @@
                 <a:ea typeface="Arial"/>
                 <a:cs typeface="Arial"/>
               </a:rPr>
-              <a:t>No hidden 1: read the significand as 0.100₂.</a:t>
+              <a:t>The leading 0 or 1 is implied; only FFF is stored.</a:t>
             </a:r>
           </a:p>
         </p:txBody>
@@ -3999,7 +4319,7 @@
                 <a:ea typeface="Courier New"/>
                 <a:cs typeface="Courier New"/>
               </a:rPr>
-              <a:t>11 / 22</a:t>
+              <a:t>11 / 24</a:t>
             </a:r>
           </a:p>
         </p:txBody>
@@ -4086,7 +4406,7 @@
                 <a:ea typeface="Courier New"/>
                 <a:cs typeface="Courier New"/>
               </a:rPr>
-              <a:t>FLOATING POINT · BOUNDARY</a:t>
+              <a:t>FLOATING POINT · PLACE VALUES</a:t>
             </a:r>
           </a:p>
         </p:txBody>
@@ -4144,7 +4464,7 @@
                 <a:ea typeface="Arial"/>
                 <a:cs typeface="Arial"/>
               </a:rPr>
-              <a:t>The next normal is one step away</a:t>
+              <a:t>Subnormals count in steps of 1/32</a:t>
             </a:r>
           </a:p>
         </p:txBody>
@@ -4202,7 +4522,7 @@
                 <a:ea typeface="Arial"/>
                 <a:cs typeface="Arial"/>
               </a:rPr>
-              <a:t>The largest subnormal is 7/32. The smallest normal is 8/32. Both use the 2⁻² scale; the implied leading digit changes from 0 to 1 when E changes from 0 to 1.</a:t>
+              <a:t>The three stored fraction bits make 0.FFF₂ increase by 1/8 each time. Multiplying by the fixed 2⁻² scale makes each step 1/32. So the field value F counts steps of 1/32.</a:t>
             </a:r>
           </a:p>
         </p:txBody>
@@ -4260,7 +4580,7 @@
                 <a:ea typeface="Courier New"/>
                 <a:cs typeface="Courier New"/>
               </a:rPr>
-              <a:t>E = 0, F = 111₂</a:t>
+              <a:t>F     bits     value</a:t>
             </a:r>
           </a:p>
           <a:p xmlns:a="http://schemas.openxmlformats.org/drawingml/2006/main">
@@ -4284,7 +4604,79 @@
                 <a:ea typeface="Courier New"/>
                 <a:cs typeface="Courier New"/>
               </a:rPr>
-              <a:t>0.111₂ × 2⁻² = 7/32</a:t>
+              <a:t>0     000      0/32</a:t>
+            </a:r>
+          </a:p>
+          <a:p xmlns:a="http://schemas.openxmlformats.org/drawingml/2006/main">
+            <a:pPr>
+              <a:buNone/>
+              <a:defRPr sz="1650">
+                <a:solidFill>
+                  <a:srgbClr val="A7F3D0"/>
+                </a:solidFill>
+                <a:latin typeface="Courier New"/>
+                <a:ea typeface="Courier New"/>
+                <a:cs typeface="Courier New"/>
+              </a:defRPr>
+            </a:pPr>
+            <a:r>
+              <a:rPr sz="1650">
+                <a:solidFill>
+                  <a:srgbClr val="A7F3D0"/>
+                </a:solidFill>
+                <a:latin typeface="Courier New"/>
+                <a:ea typeface="Courier New"/>
+                <a:cs typeface="Courier New"/>
+              </a:rPr>
+              <a:t>1     001      1/32</a:t>
+            </a:r>
+          </a:p>
+          <a:p xmlns:a="http://schemas.openxmlformats.org/drawingml/2006/main">
+            <a:pPr>
+              <a:buNone/>
+              <a:defRPr sz="1650" b="0">
+                <a:solidFill>
+                  <a:srgbClr val="A7F3D0"/>
+                </a:solidFill>
+                <a:latin typeface="Courier New"/>
+                <a:ea typeface="Courier New"/>
+                <a:cs typeface="Courier New"/>
+              </a:defRPr>
+            </a:pPr>
+            <a:r>
+              <a:rPr sz="1650" b="0">
+                <a:solidFill>
+                  <a:srgbClr val="A7F3D0"/>
+                </a:solidFill>
+                <a:latin typeface="Courier New"/>
+                <a:ea typeface="Courier New"/>
+                <a:cs typeface="Courier New"/>
+              </a:rPr>
+              <a:t>4     100      4/32 = 1/8</a:t>
+            </a:r>
+          </a:p>
+          <a:p xmlns:a="http://schemas.openxmlformats.org/drawingml/2006/main">
+            <a:pPr>
+              <a:buNone/>
+              <a:defRPr sz="1650" b="0">
+                <a:solidFill>
+                  <a:srgbClr val="A7F3D0"/>
+                </a:solidFill>
+                <a:latin typeface="Courier New"/>
+                <a:ea typeface="Courier New"/>
+                <a:cs typeface="Courier New"/>
+              </a:defRPr>
+            </a:pPr>
+            <a:r>
+              <a:rPr sz="1650" b="0">
+                <a:solidFill>
+                  <a:srgbClr val="A7F3D0"/>
+                </a:solidFill>
+                <a:latin typeface="Courier New"/>
+                <a:ea typeface="Courier New"/>
+                <a:cs typeface="Courier New"/>
+              </a:rPr>
+              <a:t>7     111      7/32</a:t>
             </a:r>
           </a:p>
           <a:p xmlns:a="http://schemas.openxmlformats.org/drawingml/2006/main">
@@ -4313,60 +4705,7 @@
                 <a:ea typeface="Courier New"/>
                 <a:cs typeface="Courier New"/>
               </a:rPr>
-              <a:t>E = 1, F = 000₂</a:t>
-            </a:r>
-          </a:p>
-          <a:p xmlns:a="http://schemas.openxmlformats.org/drawingml/2006/main">
-            <a:pPr>
-              <a:buNone/>
-              <a:defRPr sz="1650" b="0">
-                <a:solidFill>
-                  <a:srgbClr val="A7F3D0"/>
-                </a:solidFill>
-                <a:latin typeface="Courier New"/>
-                <a:ea typeface="Courier New"/>
-                <a:cs typeface="Courier New"/>
-              </a:defRPr>
-            </a:pPr>
-            <a:r>
-              <a:rPr sz="1650" b="0">
-                <a:solidFill>
-                  <a:srgbClr val="A7F3D0"/>
-                </a:solidFill>
-                <a:latin typeface="Courier New"/>
-                <a:ea typeface="Courier New"/>
-                <a:cs typeface="Courier New"/>
-              </a:rPr>
-              <a:t>1.000₂ × 2⁻² = 8/32</a:t>
-            </a:r>
-          </a:p>
-          <a:p xmlns:a="http://schemas.openxmlformats.org/drawingml/2006/main">
-            <a:r>
-              <a:t/>
-            </a:r>
-          </a:p>
-          <a:p xmlns:a="http://schemas.openxmlformats.org/drawingml/2006/main">
-            <a:pPr>
-              <a:buNone/>
-              <a:defRPr sz="1650" b="0">
-                <a:solidFill>
-                  <a:srgbClr val="A7F3D0"/>
-                </a:solidFill>
-                <a:latin typeface="Courier New"/>
-                <a:ea typeface="Courier New"/>
-                <a:cs typeface="Courier New"/>
-              </a:defRPr>
-            </a:pPr>
-            <a:r>
-              <a:rPr sz="1650" b="0">
-                <a:solidFill>
-                  <a:srgbClr val="A7F3D0"/>
-                </a:solidFill>
-                <a:latin typeface="Courier New"/>
-                <a:ea typeface="Courier New"/>
-                <a:cs typeface="Courier New"/>
-              </a:rPr>
-              <a:t>Gap = 1/32</a:t>
+              <a:t>Subnormal value = F/32</a:t>
             </a:r>
           </a:p>
         </p:txBody>
@@ -4424,7 +4763,7 @@
                 <a:ea typeface="Arial"/>
                 <a:cs typeface="Arial"/>
               </a:rPr>
-              <a:t>Subnormal values fill the space between zero and 1/4.</a:t>
+              <a:t>Ask: what is the next value after 7/32?</a:t>
             </a:r>
           </a:p>
         </p:txBody>
@@ -4482,7 +4821,7 @@
                 <a:ea typeface="Courier New"/>
                 <a:cs typeface="Courier New"/>
               </a:rPr>
-              <a:t>12 / 22</a:t>
+              <a:t>12 / 24</a:t>
             </a:r>
           </a:p>
         </p:txBody>
@@ -4521,7 +4860,7 @@
           <p:cNvPr id="7" name="">
             <a:extLst xmlns:a="http://schemas.openxmlformats.org/drawingml/2006/main">
               <a:ext uri="{FF2B5EF4-FFF2-40B4-BE49-F238E27FC236}">
-                <a16:creationId xmlns:a16="http://schemas.microsoft.com/office/drawing/2014/main" id="{ED6F0A3D-C361-4FA6-9CFE-2E669E0D919F}"/>
+                <a16:creationId xmlns:a16="http://schemas.microsoft.com/office/drawing/2014/main" id="{0E1C1D56-F3B0-4FC7-8312-5DCE66DE8296}"/>
               </a:ext>
             </a:extLst>
           </p:cNvPr>
@@ -4569,7 +4908,7 @@
                 <a:ea typeface="Courier New"/>
                 <a:cs typeface="Courier New"/>
               </a:rPr>
-              <a:t>FLOATING POINT · PRACTICE</a:t>
+              <a:t>FLOATING POINT · WORKED EXAMPLE</a:t>
             </a:r>
           </a:p>
         </p:txBody>
@@ -4579,7 +4918,7 @@
           <p:cNvPr id="2" name="">
             <a:extLst xmlns:a="http://schemas.openxmlformats.org/drawingml/2006/main">
               <a:ext uri="{FF2B5EF4-FFF2-40B4-BE49-F238E27FC236}">
-                <a16:creationId xmlns:a16="http://schemas.microsoft.com/office/drawing/2014/main" id="{8531682B-A598-4D48-84FE-CD10468FEB1D}"/>
+                <a16:creationId xmlns:a16="http://schemas.microsoft.com/office/drawing/2014/main" id="{47EC4111-990D-4F27-A48D-9B66E8564E29}"/>
               </a:ext>
             </a:extLst>
           </p:cNvPr>
@@ -4627,7 +4966,7 @@
                 <a:ea typeface="Arial"/>
                 <a:cs typeface="Arial"/>
               </a:rPr>
-              <a:t>Your turn: decode two patterns</a:t>
+              <a:t>Encode a subnormal: 1/8</a:t>
             </a:r>
           </a:p>
         </p:txBody>
@@ -4637,7 +4976,7 @@
           <p:cNvPr id="3" name="">
             <a:extLst xmlns:a="http://schemas.openxmlformats.org/drawingml/2006/main">
               <a:ext uri="{FF2B5EF4-FFF2-40B4-BE49-F238E27FC236}">
-                <a16:creationId xmlns:a16="http://schemas.microsoft.com/office/drawing/2014/main" id="{7C4976BE-C2D5-4F13-B1DA-E2F9D2612B6A}"/>
+                <a16:creationId xmlns:a16="http://schemas.microsoft.com/office/drawing/2014/main" id="{EA7FC2C0-68E4-440B-B218-A53A78DE1183}"/>
               </a:ext>
             </a:extLst>
           </p:cNvPr>
@@ -4685,36 +5024,7 @@
                 <a:ea typeface="Arial"/>
                 <a:cs typeface="Arial"/>
               </a:rPr>
-              <a:t>Use the same format: 3 exponent bits, bias 3, and 3 fraction bits.</a:t>
-            </a:r>
-          </a:p>
-          <a:p xmlns:a="http://schemas.openxmlformats.org/drawingml/2006/main">
-            <a:r>
-              <a:t/>
-            </a:r>
-          </a:p>
-          <a:p xmlns:a="http://schemas.openxmlformats.org/drawingml/2006/main">
-            <a:pPr>
-              <a:buNone/>
-              <a:defRPr sz="1950" b="0">
-                <a:solidFill>
-                  <a:srgbClr val="D4D4D8"/>
-                </a:solidFill>
-                <a:latin typeface="Arial"/>
-                <a:ea typeface="Arial"/>
-                <a:cs typeface="Arial"/>
-              </a:defRPr>
-            </a:pPr>
-            <a:r>
-              <a:rPr sz="1950" b="0">
-                <a:solidFill>
-                  <a:srgbClr val="D4D4D8"/>
-                </a:solidFill>
-                <a:latin typeface="Arial"/>
-                <a:ea typeface="Arial"/>
-                <a:cs typeface="Arial"/>
-              </a:rPr>
-              <a:t>For each pattern, classify it, find E and F, then calculate the value.</a:t>
+              <a:t>1/8 is below the smallest normal, 1/4, so E = 0. A subnormal here is worth F/32. Solve F/32 = 1/8: F = 4, which is 100₂ in three bits.</a:t>
             </a:r>
           </a:p>
         </p:txBody>
@@ -4724,7 +5034,7 @@
           <p:cNvPr id="4" name="">
             <a:extLst xmlns:a="http://schemas.openxmlformats.org/drawingml/2006/main">
               <a:ext uri="{FF2B5EF4-FFF2-40B4-BE49-F238E27FC236}">
-                <a16:creationId xmlns:a16="http://schemas.microsoft.com/office/drawing/2014/main" id="{97877AB9-DA81-4CB4-8D40-AAADEA86261B}"/>
+                <a16:creationId xmlns:a16="http://schemas.microsoft.com/office/drawing/2014/main" id="{C7B97746-2F05-4C79-997B-46EF673FF248}"/>
               </a:ext>
             </a:extLst>
           </p:cNvPr>
@@ -4772,7 +5082,7 @@
                 <a:ea typeface="Courier New"/>
                 <a:cs typeface="Courier New"/>
               </a:rPr>
-              <a:t>A. 0 | 010 | 100</a:t>
+              <a:t>S = 0</a:t>
             </a:r>
           </a:p>
           <a:p xmlns:a="http://schemas.openxmlformats.org/drawingml/2006/main">
@@ -4796,7 +5106,7 @@
                 <a:ea typeface="Courier New"/>
                 <a:cs typeface="Courier New"/>
               </a:rPr>
-              <a:t>   normal or subnormal?</a:t>
+              <a:t>E = 0 = 000₂</a:t>
             </a:r>
           </a:p>
           <a:p xmlns:a="http://schemas.openxmlformats.org/drawingml/2006/main">
@@ -4820,7 +5130,7 @@
                 <a:ea typeface="Courier New"/>
                 <a:cs typeface="Courier New"/>
               </a:rPr>
-              <a:t>   value = ?</a:t>
+              <a:t>F = 4 = 100₂</a:t>
             </a:r>
           </a:p>
           <a:p xmlns:a="http://schemas.openxmlformats.org/drawingml/2006/main">
@@ -4849,7 +5159,12 @@
                 <a:ea typeface="Courier New"/>
                 <a:cs typeface="Courier New"/>
               </a:rPr>
-              <a:t>B. 0 | 000 | 011</a:t>
+              <a:t>Fields: 0 | 000 | 100</a:t>
+            </a:r>
+          </a:p>
+          <a:p xmlns:a="http://schemas.openxmlformats.org/drawingml/2006/main">
+            <a:r>
+              <a:t/>
             </a:r>
           </a:p>
           <a:p xmlns:a="http://schemas.openxmlformats.org/drawingml/2006/main">
@@ -4873,31 +5188,7 @@
                 <a:ea typeface="Courier New"/>
                 <a:cs typeface="Courier New"/>
               </a:rPr>
-              <a:t>   normal or subnormal?</a:t>
-            </a:r>
-          </a:p>
-          <a:p xmlns:a="http://schemas.openxmlformats.org/drawingml/2006/main">
-            <a:pPr>
-              <a:buNone/>
-              <a:defRPr sz="1650" b="0">
-                <a:solidFill>
-                  <a:srgbClr val="A7F3D0"/>
-                </a:solidFill>
-                <a:latin typeface="Courier New"/>
-                <a:ea typeface="Courier New"/>
-                <a:cs typeface="Courier New"/>
-              </a:defRPr>
-            </a:pPr>
-            <a:r>
-              <a:rPr sz="1650" b="0">
-                <a:solidFill>
-                  <a:srgbClr val="A7F3D0"/>
-                </a:solidFill>
-                <a:latin typeface="Courier New"/>
-                <a:ea typeface="Courier New"/>
-                <a:cs typeface="Courier New"/>
-              </a:rPr>
-              <a:t>   value = ?</a:t>
+              <a:t>Check: 4/32 = 1/8</a:t>
             </a:r>
           </a:p>
         </p:txBody>
@@ -4907,7 +5198,7 @@
           <p:cNvPr id="5" name="">
             <a:extLst xmlns:a="http://schemas.openxmlformats.org/drawingml/2006/main">
               <a:ext uri="{FF2B5EF4-FFF2-40B4-BE49-F238E27FC236}">
-                <a16:creationId xmlns:a16="http://schemas.microsoft.com/office/drawing/2014/main" id="{0C768E93-B810-439B-9ECE-DACDD6255183}"/>
+                <a16:creationId xmlns:a16="http://schemas.microsoft.com/office/drawing/2014/main" id="{C953FAB2-7571-49A3-B6C8-87F90FA9D556}"/>
               </a:ext>
             </a:extLst>
           </p:cNvPr>
@@ -4955,7 +5246,7 @@
                 <a:ea typeface="Arial"/>
                 <a:cs typeface="Arial"/>
               </a:rPr>
-              <a:t>If E = 0, count F steps of 1/32. Otherwise use the normal rule.</a:t>
+              <a:t>No hidden 1: read the significand as 0.100₂.</a:t>
             </a:r>
           </a:p>
         </p:txBody>
@@ -4965,7 +5256,7 @@
           <p:cNvPr id="6" name="">
             <a:extLst xmlns:a="http://schemas.openxmlformats.org/drawingml/2006/main">
               <a:ext uri="{FF2B5EF4-FFF2-40B4-BE49-F238E27FC236}">
-                <a16:creationId xmlns:a16="http://schemas.microsoft.com/office/drawing/2014/main" id="{4E485357-E888-4A45-92E1-47CDEA8A71B2}"/>
+                <a16:creationId xmlns:a16="http://schemas.microsoft.com/office/drawing/2014/main" id="{ECE7F5E9-2417-44C6-925E-4767F90FA696}"/>
               </a:ext>
             </a:extLst>
           </p:cNvPr>
@@ -5013,7 +5304,7 @@
                 <a:ea typeface="Courier New"/>
                 <a:cs typeface="Courier New"/>
               </a:rPr>
-              <a:t>13 / 22</a:t>
+              <a:t>13 / 24</a:t>
             </a:r>
           </a:p>
         </p:txBody>
@@ -5021,7 +5312,7 @@
     </p:spTree>
     <p:extLst>
       <p:ext uri="{BB962C8B-B14F-4D97-AF65-F5344CB8AC3E}">
-        <p14:creationId xmlns:p14="http://schemas.microsoft.com/office/powerpoint/2010/main" val="1507595076"/>
+        <p14:creationId xmlns:p14="http://schemas.microsoft.com/office/powerpoint/2010/main" val="1082036242"/>
       </p:ext>
     </p:extLst>
   </p:cSld>
@@ -5052,7 +5343,7 @@
           <p:cNvPr id="7" name="">
             <a:extLst xmlns:a="http://schemas.openxmlformats.org/drawingml/2006/main">
               <a:ext uri="{FF2B5EF4-FFF2-40B4-BE49-F238E27FC236}">
-                <a16:creationId xmlns:a16="http://schemas.microsoft.com/office/drawing/2014/main" id="{7AC5D697-73A9-4130-AF88-3B9A153D538D}"/>
+                <a16:creationId xmlns:a16="http://schemas.microsoft.com/office/drawing/2014/main" id="{DF65E5C3-C59B-4F4C-8123-D26BB20B62FC}"/>
               </a:ext>
             </a:extLst>
           </p:cNvPr>
@@ -5100,7 +5391,7 @@
                 <a:ea typeface="Courier New"/>
                 <a:cs typeface="Courier New"/>
               </a:rPr>
-              <a:t>FLOATING POINT · CHECK</a:t>
+              <a:t>FLOATING POINT · BOUNDARY</a:t>
             </a:r>
           </a:p>
         </p:txBody>
@@ -5110,7 +5401,7 @@
           <p:cNvPr id="2" name="">
             <a:extLst xmlns:a="http://schemas.openxmlformats.org/drawingml/2006/main">
               <a:ext uri="{FF2B5EF4-FFF2-40B4-BE49-F238E27FC236}">
-                <a16:creationId xmlns:a16="http://schemas.microsoft.com/office/drawing/2014/main" id="{1059792B-54CD-4C1F-8A87-49C3F494D2AD}"/>
+                <a16:creationId xmlns:a16="http://schemas.microsoft.com/office/drawing/2014/main" id="{AAF148DA-667A-4F17-8947-3A10B5D66209}"/>
               </a:ext>
             </a:extLst>
           </p:cNvPr>
@@ -5158,7 +5449,7 @@
                 <a:ea typeface="Arial"/>
                 <a:cs typeface="Arial"/>
               </a:rPr>
-              <a:t>Decode answers</a:t>
+              <a:t>The next normal is one step away</a:t>
             </a:r>
           </a:p>
         </p:txBody>
@@ -5168,7 +5459,7 @@
           <p:cNvPr id="3" name="">
             <a:extLst xmlns:a="http://schemas.openxmlformats.org/drawingml/2006/main">
               <a:ext uri="{FF2B5EF4-FFF2-40B4-BE49-F238E27FC236}">
-                <a16:creationId xmlns:a16="http://schemas.microsoft.com/office/drawing/2014/main" id="{26F3E9C7-6AC5-4E40-B664-B323C1BA5CEA}"/>
+                <a16:creationId xmlns:a16="http://schemas.microsoft.com/office/drawing/2014/main" id="{9CBE9A2B-E617-4407-BF21-6D1C10DB5F7C}"/>
               </a:ext>
             </a:extLst>
           </p:cNvPr>
@@ -5216,7 +5507,7 @@
                 <a:ea typeface="Arial"/>
                 <a:cs typeface="Arial"/>
               </a:rPr>
-              <a:t>A has E = 2, so decode a normal value. B has E = 0, so its F = 3 means three steps of 1/32.</a:t>
+              <a:t>The largest subnormal is 7/32. The smallest normal is 8/32. Both use the 2⁻² scale; the implied leading digit changes from 0 to 1 when E changes from 0 to 1.</a:t>
             </a:r>
           </a:p>
         </p:txBody>
@@ -5226,7 +5517,7 @@
           <p:cNvPr id="4" name="">
             <a:extLst xmlns:a="http://schemas.openxmlformats.org/drawingml/2006/main">
               <a:ext uri="{FF2B5EF4-FFF2-40B4-BE49-F238E27FC236}">
-                <a16:creationId xmlns:a16="http://schemas.microsoft.com/office/drawing/2014/main" id="{737C1F1B-87F6-43C2-BCA8-B1C729031D72}"/>
+                <a16:creationId xmlns:a16="http://schemas.microsoft.com/office/drawing/2014/main" id="{F24EA955-1341-477F-B9E0-1F67FB906026}"/>
               </a:ext>
             </a:extLst>
           </p:cNvPr>
@@ -5274,7 +5565,7 @@
                 <a:ea typeface="Courier New"/>
                 <a:cs typeface="Courier New"/>
               </a:rPr>
-              <a:t>A. 0 | 010 | 100</a:t>
+              <a:t>E = 0, F = 111₂</a:t>
             </a:r>
           </a:p>
           <a:p xmlns:a="http://schemas.openxmlformats.org/drawingml/2006/main">
@@ -5298,7 +5589,7 @@
                 <a:ea typeface="Courier New"/>
                 <a:cs typeface="Courier New"/>
               </a:rPr>
-              <a:t>   (1 + 4/8) × 2⁻¹ = 3/4</a:t>
+              <a:t>0.111₂ × 2⁻² = 7/32</a:t>
             </a:r>
           </a:p>
           <a:p xmlns:a="http://schemas.openxmlformats.org/drawingml/2006/main">
@@ -5327,7 +5618,7 @@
                 <a:ea typeface="Courier New"/>
                 <a:cs typeface="Courier New"/>
               </a:rPr>
-              <a:t>B. 0 | 000 | 011</a:t>
+              <a:t>E = 1, F = 000₂</a:t>
             </a:r>
           </a:p>
           <a:p xmlns:a="http://schemas.openxmlformats.org/drawingml/2006/main">
@@ -5351,7 +5642,36 @@
                 <a:ea typeface="Courier New"/>
                 <a:cs typeface="Courier New"/>
               </a:rPr>
-              <a:t>   F = 3  →  3/32</a:t>
+              <a:t>1.000₂ × 2⁻² = 8/32</a:t>
+            </a:r>
+          </a:p>
+          <a:p xmlns:a="http://schemas.openxmlformats.org/drawingml/2006/main">
+            <a:r>
+              <a:t/>
+            </a:r>
+          </a:p>
+          <a:p xmlns:a="http://schemas.openxmlformats.org/drawingml/2006/main">
+            <a:pPr>
+              <a:buNone/>
+              <a:defRPr sz="1650" b="0">
+                <a:solidFill>
+                  <a:srgbClr val="A7F3D0"/>
+                </a:solidFill>
+                <a:latin typeface="Courier New"/>
+                <a:ea typeface="Courier New"/>
+                <a:cs typeface="Courier New"/>
+              </a:defRPr>
+            </a:pPr>
+            <a:r>
+              <a:rPr sz="1650" b="0">
+                <a:solidFill>
+                  <a:srgbClr val="A7F3D0"/>
+                </a:solidFill>
+                <a:latin typeface="Courier New"/>
+                <a:ea typeface="Courier New"/>
+                <a:cs typeface="Courier New"/>
+              </a:rPr>
+              <a:t>Gap = 1/32</a:t>
             </a:r>
           </a:p>
         </p:txBody>
@@ -5361,7 +5681,7 @@
           <p:cNvPr id="5" name="">
             <a:extLst xmlns:a="http://schemas.openxmlformats.org/drawingml/2006/main">
               <a:ext uri="{FF2B5EF4-FFF2-40B4-BE49-F238E27FC236}">
-                <a16:creationId xmlns:a16="http://schemas.microsoft.com/office/drawing/2014/main" id="{9DAD2664-9B32-4402-A088-C1DEBD68E3CD}"/>
+                <a16:creationId xmlns:a16="http://schemas.microsoft.com/office/drawing/2014/main" id="{E8B59BBF-C1FE-4848-A1BE-0E49C6150211}"/>
               </a:ext>
             </a:extLst>
           </p:cNvPr>
@@ -5409,7 +5729,7 @@
                 <a:ea typeface="Arial"/>
                 <a:cs typeface="Arial"/>
               </a:rPr>
-              <a:t>If the answer seems surprising, decode the same fields back into the formula.</a:t>
+              <a:t>Subnormal values fill the space between zero and 1/4.</a:t>
             </a:r>
           </a:p>
         </p:txBody>
@@ -5419,7 +5739,7 @@
           <p:cNvPr id="6" name="">
             <a:extLst xmlns:a="http://schemas.openxmlformats.org/drawingml/2006/main">
               <a:ext uri="{FF2B5EF4-FFF2-40B4-BE49-F238E27FC236}">
-                <a16:creationId xmlns:a16="http://schemas.microsoft.com/office/drawing/2014/main" id="{DBE61FAB-FD81-4893-85F8-90700B31187C}"/>
+                <a16:creationId xmlns:a16="http://schemas.microsoft.com/office/drawing/2014/main" id="{C1D8CDEF-F520-47D3-A60F-E6AFCB834AE6}"/>
               </a:ext>
             </a:extLst>
           </p:cNvPr>
@@ -5467,7 +5787,7 @@
                 <a:ea typeface="Courier New"/>
                 <a:cs typeface="Courier New"/>
               </a:rPr>
-              <a:t>14 / 22</a:t>
+              <a:t>14 / 24</a:t>
             </a:r>
           </a:p>
         </p:txBody>
@@ -5475,7 +5795,7 @@
     </p:spTree>
     <p:extLst>
       <p:ext uri="{BB962C8B-B14F-4D97-AF65-F5344CB8AC3E}">
-        <p14:creationId xmlns:p14="http://schemas.microsoft.com/office/powerpoint/2010/main" val="1502731382"/>
+        <p14:creationId xmlns:p14="http://schemas.microsoft.com/office/powerpoint/2010/main" val="1006218793"/>
       </p:ext>
     </p:extLst>
   </p:cSld>
@@ -5506,7 +5826,7 @@
           <p:cNvPr id="7" name="">
             <a:extLst xmlns:a="http://schemas.openxmlformats.org/drawingml/2006/main">
               <a:ext uri="{FF2B5EF4-FFF2-40B4-BE49-F238E27FC236}">
-                <a16:creationId xmlns:a16="http://schemas.microsoft.com/office/drawing/2014/main" id="{35A724E8-02D1-4C78-A9D3-AE6AD6E2D594}"/>
+                <a16:creationId xmlns:a16="http://schemas.microsoft.com/office/drawing/2014/main" id="{ED6F0A3D-C361-4FA6-9CFE-2E669E0D919F}"/>
               </a:ext>
             </a:extLst>
           </p:cNvPr>
@@ -5564,7 +5884,7 @@
           <p:cNvPr id="2" name="">
             <a:extLst xmlns:a="http://schemas.openxmlformats.org/drawingml/2006/main">
               <a:ext uri="{FF2B5EF4-FFF2-40B4-BE49-F238E27FC236}">
-                <a16:creationId xmlns:a16="http://schemas.microsoft.com/office/drawing/2014/main" id="{D68140D5-AD40-4B2D-9276-45B94835A98B}"/>
+                <a16:creationId xmlns:a16="http://schemas.microsoft.com/office/drawing/2014/main" id="{8531682B-A598-4D48-84FE-CD10468FEB1D}"/>
               </a:ext>
             </a:extLst>
           </p:cNvPr>
@@ -5612,7 +5932,7 @@
                 <a:ea typeface="Arial"/>
                 <a:cs typeface="Arial"/>
               </a:rPr>
-              <a:t>Your turn: classify two ratios</a:t>
+              <a:t>Your turn: decode two patterns</a:t>
             </a:r>
           </a:p>
         </p:txBody>
@@ -5622,7 +5942,7 @@
           <p:cNvPr id="3" name="">
             <a:extLst xmlns:a="http://schemas.openxmlformats.org/drawingml/2006/main">
               <a:ext uri="{FF2B5EF4-FFF2-40B4-BE49-F238E27FC236}">
-                <a16:creationId xmlns:a16="http://schemas.microsoft.com/office/drawing/2014/main" id="{AA9609DC-0513-451F-B1A4-CD75618D8A9F}"/>
+                <a16:creationId xmlns:a16="http://schemas.microsoft.com/office/drawing/2014/main" id="{7C4976BE-C2D5-4F13-B1DA-E2F9D2612B6A}"/>
               </a:ext>
             </a:extLst>
           </p:cNvPr>
@@ -5670,7 +5990,7 @@
                 <a:ea typeface="Arial"/>
                 <a:cs typeface="Arial"/>
               </a:rPr>
-              <a:t>Use the same practice format: 3 exponent bits, bias 3, and 3 fraction bits.</a:t>
+              <a:t>Use the same format: 3 exponent bits, bias 3, and 3 fraction bits.</a:t>
             </a:r>
           </a:p>
           <a:p xmlns:a="http://schemas.openxmlformats.org/drawingml/2006/main">
@@ -5699,7 +6019,7 @@
                 <a:ea typeface="Arial"/>
                 <a:cs typeface="Arial"/>
               </a:rPr>
-              <a:t>For each ratio, decide normal or subnormal, then find E and F.</a:t>
+              <a:t>For each pattern, classify it, find E and F, then calculate the value.</a:t>
             </a:r>
           </a:p>
         </p:txBody>
@@ -5709,7 +6029,7 @@
           <p:cNvPr id="4" name="">
             <a:extLst xmlns:a="http://schemas.openxmlformats.org/drawingml/2006/main">
               <a:ext uri="{FF2B5EF4-FFF2-40B4-BE49-F238E27FC236}">
-                <a16:creationId xmlns:a16="http://schemas.microsoft.com/office/drawing/2014/main" id="{37A2E272-B675-4F8B-8D9A-1DD0C7D3E885}"/>
+                <a16:creationId xmlns:a16="http://schemas.microsoft.com/office/drawing/2014/main" id="{97877AB9-DA81-4CB4-8D40-AAADEA86261B}"/>
               </a:ext>
             </a:extLst>
           </p:cNvPr>
@@ -5757,7 +6077,7 @@
                 <a:ea typeface="Courier New"/>
                 <a:cs typeface="Courier New"/>
               </a:rPr>
-              <a:t>A. 3/2</a:t>
+              <a:t>A. 0 | 010 | 100</a:t>
             </a:r>
           </a:p>
           <a:p xmlns:a="http://schemas.openxmlformats.org/drawingml/2006/main">
@@ -5805,7 +6125,7 @@
                 <a:ea typeface="Courier New"/>
                 <a:cs typeface="Courier New"/>
               </a:rPr>
-              <a:t>   E = ?   F = ?</a:t>
+              <a:t>   value = ?</a:t>
             </a:r>
           </a:p>
           <a:p xmlns:a="http://schemas.openxmlformats.org/drawingml/2006/main">
@@ -5834,7 +6154,7 @@
                 <a:ea typeface="Courier New"/>
                 <a:cs typeface="Courier New"/>
               </a:rPr>
-              <a:t>B. 3/16</a:t>
+              <a:t>B. 0 | 000 | 011</a:t>
             </a:r>
           </a:p>
           <a:p xmlns:a="http://schemas.openxmlformats.org/drawingml/2006/main">
@@ -5882,7 +6202,7 @@
                 <a:ea typeface="Courier New"/>
                 <a:cs typeface="Courier New"/>
               </a:rPr>
-              <a:t>   E = ?   F = ?</a:t>
+              <a:t>   value = ?</a:t>
             </a:r>
           </a:p>
         </p:txBody>
@@ -5892,7 +6212,7 @@
           <p:cNvPr id="5" name="">
             <a:extLst xmlns:a="http://schemas.openxmlformats.org/drawingml/2006/main">
               <a:ext uri="{FF2B5EF4-FFF2-40B4-BE49-F238E27FC236}">
-                <a16:creationId xmlns:a16="http://schemas.microsoft.com/office/drawing/2014/main" id="{8F900304-F8E7-4C1C-B3A0-F1A0DD604211}"/>
+                <a16:creationId xmlns:a16="http://schemas.microsoft.com/office/drawing/2014/main" id="{0C768E93-B810-439B-9ECE-DACDD6255183}"/>
               </a:ext>
             </a:extLst>
           </p:cNvPr>
@@ -5940,7 +6260,7 @@
                 <a:ea typeface="Arial"/>
                 <a:cs typeface="Arial"/>
               </a:rPr>
-              <a:t>Compare each value with the smallest normal, 1/4, before finding bits.</a:t>
+              <a:t>If E = 0, count F steps of 1/32. Otherwise use the normal rule.</a:t>
             </a:r>
           </a:p>
         </p:txBody>
@@ -5950,7 +6270,7 @@
           <p:cNvPr id="6" name="">
             <a:extLst xmlns:a="http://schemas.openxmlformats.org/drawingml/2006/main">
               <a:ext uri="{FF2B5EF4-FFF2-40B4-BE49-F238E27FC236}">
-                <a16:creationId xmlns:a16="http://schemas.microsoft.com/office/drawing/2014/main" id="{16200DCD-0F16-4BE6-9538-9FDAF86C958E}"/>
+                <a16:creationId xmlns:a16="http://schemas.microsoft.com/office/drawing/2014/main" id="{4E485357-E888-4A45-92E1-47CDEA8A71B2}"/>
               </a:ext>
             </a:extLst>
           </p:cNvPr>
@@ -5998,7 +6318,7 @@
                 <a:ea typeface="Courier New"/>
                 <a:cs typeface="Courier New"/>
               </a:rPr>
-              <a:t>15 / 22</a:t>
+              <a:t>15 / 24</a:t>
             </a:r>
           </a:p>
         </p:txBody>
@@ -6006,7 +6326,7 @@
     </p:spTree>
     <p:extLst>
       <p:ext uri="{BB962C8B-B14F-4D97-AF65-F5344CB8AC3E}">
-        <p14:creationId xmlns:p14="http://schemas.microsoft.com/office/powerpoint/2010/main" val="2079659254"/>
+        <p14:creationId xmlns:p14="http://schemas.microsoft.com/office/powerpoint/2010/main" val="1507595076"/>
       </p:ext>
     </p:extLst>
   </p:cSld>
@@ -6037,7 +6357,7 @@
           <p:cNvPr id="7" name="">
             <a:extLst xmlns:a="http://schemas.openxmlformats.org/drawingml/2006/main">
               <a:ext uri="{FF2B5EF4-FFF2-40B4-BE49-F238E27FC236}">
-                <a16:creationId xmlns:a16="http://schemas.microsoft.com/office/drawing/2014/main" id="{D25A2A70-779E-4A39-9AD5-537DDE3C5B7A}"/>
+                <a16:creationId xmlns:a16="http://schemas.microsoft.com/office/drawing/2014/main" id="{7AC5D697-73A9-4130-AF88-3B9A153D538D}"/>
               </a:ext>
             </a:extLst>
           </p:cNvPr>
@@ -6095,7 +6415,7 @@
           <p:cNvPr id="2" name="">
             <a:extLst xmlns:a="http://schemas.openxmlformats.org/drawingml/2006/main">
               <a:ext uri="{FF2B5EF4-FFF2-40B4-BE49-F238E27FC236}">
-                <a16:creationId xmlns:a16="http://schemas.microsoft.com/office/drawing/2014/main" id="{2F2733A3-E106-4C90-B097-BE7CB4577892}"/>
+                <a16:creationId xmlns:a16="http://schemas.microsoft.com/office/drawing/2014/main" id="{1059792B-54CD-4C1F-8A87-49C3F494D2AD}"/>
               </a:ext>
             </a:extLst>
           </p:cNvPr>
@@ -6143,7 +6463,7 @@
                 <a:ea typeface="Arial"/>
                 <a:cs typeface="Arial"/>
               </a:rPr>
-              <a:t>Practice answers</a:t>
+              <a:t>Decode answers</a:t>
             </a:r>
           </a:p>
         </p:txBody>
@@ -6153,7 +6473,7 @@
           <p:cNvPr id="3" name="">
             <a:extLst xmlns:a="http://schemas.openxmlformats.org/drawingml/2006/main">
               <a:ext uri="{FF2B5EF4-FFF2-40B4-BE49-F238E27FC236}">
-                <a16:creationId xmlns:a16="http://schemas.microsoft.com/office/drawing/2014/main" id="{53BB6D32-B5C1-4BFB-8D41-7B7055B1A606}"/>
+                <a16:creationId xmlns:a16="http://schemas.microsoft.com/office/drawing/2014/main" id="{26F3E9C7-6AC5-4E40-B664-B323C1BA5CEA}"/>
               </a:ext>
             </a:extLst>
           </p:cNvPr>
@@ -6201,36 +6521,7 @@
                 <a:ea typeface="Arial"/>
                 <a:cs typeface="Arial"/>
               </a:rPr>
-              <a:t>3/2 = 1.100₂ × 2⁰, so it is normal.</a:t>
-            </a:r>
-          </a:p>
-          <a:p xmlns:a="http://schemas.openxmlformats.org/drawingml/2006/main">
-            <a:r>
-              <a:t/>
-            </a:r>
-          </a:p>
-          <a:p xmlns:a="http://schemas.openxmlformats.org/drawingml/2006/main">
-            <a:pPr>
-              <a:buNone/>
-              <a:defRPr sz="1950" b="0">
-                <a:solidFill>
-                  <a:srgbClr val="D4D4D8"/>
-                </a:solidFill>
-                <a:latin typeface="Arial"/>
-                <a:ea typeface="Arial"/>
-                <a:cs typeface="Arial"/>
-              </a:defRPr>
-            </a:pPr>
-            <a:r>
-              <a:rPr sz="1950" b="0">
-                <a:solidFill>
-                  <a:srgbClr val="D4D4D8"/>
-                </a:solidFill>
-                <a:latin typeface="Arial"/>
-                <a:ea typeface="Arial"/>
-                <a:cs typeface="Arial"/>
-              </a:rPr>
-              <a:t>3/16 is below 1/4, so it is subnormal. Since value = F/32, F = 6.</a:t>
+              <a:t>A has E = 2, so decode a normal value. B has E = 0, so its F = 3 means three steps of 1/32.</a:t>
             </a:r>
           </a:p>
         </p:txBody>
@@ -6240,7 +6531,7 @@
           <p:cNvPr id="4" name="">
             <a:extLst xmlns:a="http://schemas.openxmlformats.org/drawingml/2006/main">
               <a:ext uri="{FF2B5EF4-FFF2-40B4-BE49-F238E27FC236}">
-                <a16:creationId xmlns:a16="http://schemas.microsoft.com/office/drawing/2014/main" id="{CD85FA7D-EF72-4F2A-85B4-517634BC5BE7}"/>
+                <a16:creationId xmlns:a16="http://schemas.microsoft.com/office/drawing/2014/main" id="{737C1F1B-87F6-43C2-BCA8-B1C729031D72}"/>
               </a:ext>
             </a:extLst>
           </p:cNvPr>
@@ -6288,7 +6579,7 @@
                 <a:ea typeface="Courier New"/>
                 <a:cs typeface="Courier New"/>
               </a:rPr>
-              <a:t>A. 3/2</a:t>
+              <a:t>A. 0 | 010 | 100</a:t>
             </a:r>
           </a:p>
           <a:p xmlns:a="http://schemas.openxmlformats.org/drawingml/2006/main">
@@ -6312,7 +6603,12 @@
                 <a:ea typeface="Courier New"/>
                 <a:cs typeface="Courier New"/>
               </a:rPr>
-              <a:t>   E = 3 = 011₂</a:t>
+              <a:t>   (1 + 4/8) × 2⁻¹ = 3/4</a:t>
+            </a:r>
+          </a:p>
+          <a:p xmlns:a="http://schemas.openxmlformats.org/drawingml/2006/main">
+            <a:r>
+              <a:t/>
             </a:r>
           </a:p>
           <a:p xmlns:a="http://schemas.openxmlformats.org/drawingml/2006/main">
@@ -6336,7 +6632,7 @@
                 <a:ea typeface="Courier New"/>
                 <a:cs typeface="Courier New"/>
               </a:rPr>
-              <a:t>   F = 4 = 100₂</a:t>
+              <a:t>B. 0 | 000 | 011</a:t>
             </a:r>
           </a:p>
           <a:p xmlns:a="http://schemas.openxmlformats.org/drawingml/2006/main">
@@ -6360,108 +6656,7 @@
                 <a:ea typeface="Courier New"/>
                 <a:cs typeface="Courier New"/>
               </a:rPr>
-              <a:t>   Check: (1 + 4/8) × 1 = 3/2</a:t>
-            </a:r>
-          </a:p>
-          <a:p xmlns:a="http://schemas.openxmlformats.org/drawingml/2006/main">
-            <a:r>
-              <a:t/>
-            </a:r>
-          </a:p>
-          <a:p xmlns:a="http://schemas.openxmlformats.org/drawingml/2006/main">
-            <a:pPr>
-              <a:buNone/>
-              <a:defRPr sz="1650" b="0">
-                <a:solidFill>
-                  <a:srgbClr val="A7F3D0"/>
-                </a:solidFill>
-                <a:latin typeface="Courier New"/>
-                <a:ea typeface="Courier New"/>
-                <a:cs typeface="Courier New"/>
-              </a:defRPr>
-            </a:pPr>
-            <a:r>
-              <a:rPr sz="1650" b="0">
-                <a:solidFill>
-                  <a:srgbClr val="A7F3D0"/>
-                </a:solidFill>
-                <a:latin typeface="Courier New"/>
-                <a:ea typeface="Courier New"/>
-                <a:cs typeface="Courier New"/>
-              </a:rPr>
-              <a:t>B. 3/16</a:t>
-            </a:r>
-          </a:p>
-          <a:p xmlns:a="http://schemas.openxmlformats.org/drawingml/2006/main">
-            <a:pPr>
-              <a:buNone/>
-              <a:defRPr sz="1650" b="0">
-                <a:solidFill>
-                  <a:srgbClr val="A7F3D0"/>
-                </a:solidFill>
-                <a:latin typeface="Courier New"/>
-                <a:ea typeface="Courier New"/>
-                <a:cs typeface="Courier New"/>
-              </a:defRPr>
-            </a:pPr>
-            <a:r>
-              <a:rPr sz="1650" b="0">
-                <a:solidFill>
-                  <a:srgbClr val="A7F3D0"/>
-                </a:solidFill>
-                <a:latin typeface="Courier New"/>
-                <a:ea typeface="Courier New"/>
-                <a:cs typeface="Courier New"/>
-              </a:rPr>
-              <a:t>   E = 0 = 000₂</a:t>
-            </a:r>
-          </a:p>
-          <a:p xmlns:a="http://schemas.openxmlformats.org/drawingml/2006/main">
-            <a:pPr>
-              <a:buNone/>
-              <a:defRPr sz="1650" b="0">
-                <a:solidFill>
-                  <a:srgbClr val="A7F3D0"/>
-                </a:solidFill>
-                <a:latin typeface="Courier New"/>
-                <a:ea typeface="Courier New"/>
-                <a:cs typeface="Courier New"/>
-              </a:defRPr>
-            </a:pPr>
-            <a:r>
-              <a:rPr sz="1650" b="0">
-                <a:solidFill>
-                  <a:srgbClr val="A7F3D0"/>
-                </a:solidFill>
-                <a:latin typeface="Courier New"/>
-                <a:ea typeface="Courier New"/>
-                <a:cs typeface="Courier New"/>
-              </a:rPr>
-              <a:t>   F = 6 = 110₂</a:t>
-            </a:r>
-          </a:p>
-          <a:p xmlns:a="http://schemas.openxmlformats.org/drawingml/2006/main">
-            <a:pPr>
-              <a:buNone/>
-              <a:defRPr sz="1650" b="0">
-                <a:solidFill>
-                  <a:srgbClr val="A7F3D0"/>
-                </a:solidFill>
-                <a:latin typeface="Courier New"/>
-                <a:ea typeface="Courier New"/>
-                <a:cs typeface="Courier New"/>
-              </a:defRPr>
-            </a:pPr>
-            <a:r>
-              <a:rPr sz="1650" b="0">
-                <a:solidFill>
-                  <a:srgbClr val="A7F3D0"/>
-                </a:solidFill>
-                <a:latin typeface="Courier New"/>
-                <a:ea typeface="Courier New"/>
-                <a:cs typeface="Courier New"/>
-              </a:rPr>
-              <a:t>   Check: 6/32 = 3/16</a:t>
+              <a:t>   F = 3  →  3/32</a:t>
             </a:r>
           </a:p>
         </p:txBody>
@@ -6471,7 +6666,7 @@
           <p:cNvPr id="5" name="">
             <a:extLst xmlns:a="http://schemas.openxmlformats.org/drawingml/2006/main">
               <a:ext uri="{FF2B5EF4-FFF2-40B4-BE49-F238E27FC236}">
-                <a16:creationId xmlns:a16="http://schemas.microsoft.com/office/drawing/2014/main" id="{09DD94A5-8CF6-4CC6-9FAF-1AAE9F86C651}"/>
+                <a16:creationId xmlns:a16="http://schemas.microsoft.com/office/drawing/2014/main" id="{9DAD2664-9B32-4402-A088-C1DEBD68E3CD}"/>
               </a:ext>
             </a:extLst>
           </p:cNvPr>
@@ -6519,7 +6714,7 @@
                 <a:ea typeface="Arial"/>
                 <a:cs typeface="Arial"/>
               </a:rPr>
-              <a:t>A fraction can be exactly representable in one format and not another.</a:t>
+              <a:t>If the answer seems surprising, decode the same fields back into the formula.</a:t>
             </a:r>
           </a:p>
         </p:txBody>
@@ -6529,7 +6724,7 @@
           <p:cNvPr id="6" name="">
             <a:extLst xmlns:a="http://schemas.openxmlformats.org/drawingml/2006/main">
               <a:ext uri="{FF2B5EF4-FFF2-40B4-BE49-F238E27FC236}">
-                <a16:creationId xmlns:a16="http://schemas.microsoft.com/office/drawing/2014/main" id="{BEB8226B-AC16-4616-9E79-3B5C231B3962}"/>
+                <a16:creationId xmlns:a16="http://schemas.microsoft.com/office/drawing/2014/main" id="{DBE61FAB-FD81-4893-85F8-90700B31187C}"/>
               </a:ext>
             </a:extLst>
           </p:cNvPr>
@@ -6577,7 +6772,7 @@
                 <a:ea typeface="Courier New"/>
                 <a:cs typeface="Courier New"/>
               </a:rPr>
-              <a:t>16 / 22</a:t>
+              <a:t>16 / 24</a:t>
             </a:r>
           </a:p>
         </p:txBody>
@@ -6585,7 +6780,7 @@
     </p:spTree>
     <p:extLst>
       <p:ext uri="{BB962C8B-B14F-4D97-AF65-F5344CB8AC3E}">
-        <p14:creationId xmlns:p14="http://schemas.microsoft.com/office/powerpoint/2010/main" val="1590754296"/>
+        <p14:creationId xmlns:p14="http://schemas.microsoft.com/office/powerpoint/2010/main" val="1502731382"/>
       </p:ext>
     </p:extLst>
   </p:cSld>
@@ -6616,7 +6811,7 @@
           <p:cNvPr id="7" name="">
             <a:extLst xmlns:a="http://schemas.openxmlformats.org/drawingml/2006/main">
               <a:ext uri="{FF2B5EF4-FFF2-40B4-BE49-F238E27FC236}">
-                <a16:creationId xmlns:a16="http://schemas.microsoft.com/office/drawing/2014/main" id="{93E43C1D-677A-4484-B42E-435337BCED51}"/>
+                <a16:creationId xmlns:a16="http://schemas.microsoft.com/office/drawing/2014/main" id="{35A724E8-02D1-4C78-A9D3-AE6AD6E2D594}"/>
               </a:ext>
             </a:extLst>
           </p:cNvPr>
@@ -6664,7 +6859,7 @@
                 <a:ea typeface="Courier New"/>
                 <a:cs typeface="Courier New"/>
               </a:rPr>
-              <a:t>FLOATING POINT · PRECISION</a:t>
+              <a:t>FLOATING POINT · PRACTICE</a:t>
             </a:r>
           </a:p>
         </p:txBody>
@@ -6674,7 +6869,7 @@
           <p:cNvPr id="2" name="">
             <a:extLst xmlns:a="http://schemas.openxmlformats.org/drawingml/2006/main">
               <a:ext uri="{FF2B5EF4-FFF2-40B4-BE49-F238E27FC236}">
-                <a16:creationId xmlns:a16="http://schemas.microsoft.com/office/drawing/2014/main" id="{074B736B-6CBC-48AB-BB9C-B94B56E89F35}"/>
+                <a16:creationId xmlns:a16="http://schemas.microsoft.com/office/drawing/2014/main" id="{D68140D5-AD40-4B2D-9276-45B94835A98B}"/>
               </a:ext>
             </a:extLst>
           </p:cNvPr>
@@ -6722,7 +6917,7 @@
                 <a:ea typeface="Arial"/>
                 <a:cs typeface="Arial"/>
               </a:rPr>
-              <a:t>Some ratios need rounding</a:t>
+              <a:t>Your turn: classify two ratios</a:t>
             </a:r>
           </a:p>
         </p:txBody>
@@ -6732,7 +6927,7 @@
           <p:cNvPr id="3" name="">
             <a:extLst xmlns:a="http://schemas.openxmlformats.org/drawingml/2006/main">
               <a:ext uri="{FF2B5EF4-FFF2-40B4-BE49-F238E27FC236}">
-                <a16:creationId xmlns:a16="http://schemas.microsoft.com/office/drawing/2014/main" id="{31BF5015-85C0-4422-9A8D-3AB1598AB1B5}"/>
+                <a16:creationId xmlns:a16="http://schemas.microsoft.com/office/drawing/2014/main" id="{AA9609DC-0513-451F-B1A4-CD75618D8A9F}"/>
               </a:ext>
             </a:extLst>
           </p:cNvPr>
@@ -6780,7 +6975,7 @@
                 <a:ea typeface="Arial"/>
                 <a:cs typeface="Arial"/>
               </a:rPr>
-              <a:t>Only eight fraction patterns fit in three bits. A ratio such as 1/3 has a repeating binary expansion and cannot be stored exactly.</a:t>
+              <a:t>Use the same practice format: 3 exponent bits, bias 3, and 3 fraction bits.</a:t>
             </a:r>
           </a:p>
           <a:p xmlns:a="http://schemas.openxmlformats.org/drawingml/2006/main">
@@ -6809,7 +7004,7 @@
                 <a:ea typeface="Arial"/>
                 <a:cs typeface="Arial"/>
               </a:rPr>
-              <a:t>The required rounding rule decides which nearby value to store.</a:t>
+              <a:t>For each ratio, decide normal or subnormal, then find E and F.</a:t>
             </a:r>
           </a:p>
         </p:txBody>
@@ -6819,7 +7014,7 @@
           <p:cNvPr id="4" name="">
             <a:extLst xmlns:a="http://schemas.openxmlformats.org/drawingml/2006/main">
               <a:ext uri="{FF2B5EF4-FFF2-40B4-BE49-F238E27FC236}">
-                <a16:creationId xmlns:a16="http://schemas.microsoft.com/office/drawing/2014/main" id="{442E6650-2F07-46E8-968E-92CAC81BA173}"/>
+                <a16:creationId xmlns:a16="http://schemas.microsoft.com/office/drawing/2014/main" id="{37A2E272-B675-4F8B-8D9A-1DD0C7D3E885}"/>
               </a:ext>
             </a:extLst>
           </p:cNvPr>
@@ -6867,7 +7062,55 @@
                 <a:ea typeface="Courier New"/>
                 <a:cs typeface="Courier New"/>
               </a:rPr>
-              <a:t>1/3 = 1.010101…₂ × 2⁻²</a:t>
+              <a:t>A. 3/2</a:t>
+            </a:r>
+          </a:p>
+          <a:p xmlns:a="http://schemas.openxmlformats.org/drawingml/2006/main">
+            <a:pPr>
+              <a:buNone/>
+              <a:defRPr sz="1650" b="0">
+                <a:solidFill>
+                  <a:srgbClr val="A7F3D0"/>
+                </a:solidFill>
+                <a:latin typeface="Courier New"/>
+                <a:ea typeface="Courier New"/>
+                <a:cs typeface="Courier New"/>
+              </a:defRPr>
+            </a:pPr>
+            <a:r>
+              <a:rPr sz="1650" b="0">
+                <a:solidFill>
+                  <a:srgbClr val="A7F3D0"/>
+                </a:solidFill>
+                <a:latin typeface="Courier New"/>
+                <a:ea typeface="Courier New"/>
+                <a:cs typeface="Courier New"/>
+              </a:rPr>
+              <a:t>   normal or subnormal?</a:t>
+            </a:r>
+          </a:p>
+          <a:p xmlns:a="http://schemas.openxmlformats.org/drawingml/2006/main">
+            <a:pPr>
+              <a:buNone/>
+              <a:defRPr sz="1650" b="0">
+                <a:solidFill>
+                  <a:srgbClr val="A7F3D0"/>
+                </a:solidFill>
+                <a:latin typeface="Courier New"/>
+                <a:ea typeface="Courier New"/>
+                <a:cs typeface="Courier New"/>
+              </a:defRPr>
+            </a:pPr>
+            <a:r>
+              <a:rPr sz="1650" b="0">
+                <a:solidFill>
+                  <a:srgbClr val="A7F3D0"/>
+                </a:solidFill>
+                <a:latin typeface="Courier New"/>
+                <a:ea typeface="Courier New"/>
+                <a:cs typeface="Courier New"/>
+              </a:rPr>
+              <a:t>   E = ?   F = ?</a:t>
             </a:r>
           </a:p>
           <a:p xmlns:a="http://schemas.openxmlformats.org/drawingml/2006/main">
@@ -6896,7 +7139,7 @@
                 <a:ea typeface="Courier New"/>
                 <a:cs typeface="Courier New"/>
               </a:rPr>
-              <a:t>Nearby values in this format:</a:t>
+              <a:t>B. 3/16</a:t>
             </a:r>
           </a:p>
           <a:p xmlns:a="http://schemas.openxmlformats.org/drawingml/2006/main">
@@ -6920,7 +7163,7 @@
                 <a:ea typeface="Courier New"/>
                 <a:cs typeface="Courier New"/>
               </a:rPr>
-              <a:t>F = 010₂  →  5/16</a:t>
+              <a:t>   normal or subnormal?</a:t>
             </a:r>
           </a:p>
           <a:p xmlns:a="http://schemas.openxmlformats.org/drawingml/2006/main">
@@ -6944,36 +7187,7 @@
                 <a:ea typeface="Courier New"/>
                 <a:cs typeface="Courier New"/>
               </a:rPr>
-              <a:t>F = 011₂  →  11/32</a:t>
-            </a:r>
-          </a:p>
-          <a:p xmlns:a="http://schemas.openxmlformats.org/drawingml/2006/main">
-            <a:r>
-              <a:t/>
-            </a:r>
-          </a:p>
-          <a:p xmlns:a="http://schemas.openxmlformats.org/drawingml/2006/main">
-            <a:pPr>
-              <a:buNone/>
-              <a:defRPr sz="1650" b="0">
-                <a:solidFill>
-                  <a:srgbClr val="A7F3D0"/>
-                </a:solidFill>
-                <a:latin typeface="Courier New"/>
-                <a:ea typeface="Courier New"/>
-                <a:cs typeface="Courier New"/>
-              </a:defRPr>
-            </a:pPr>
-            <a:r>
-              <a:rPr sz="1650" b="0">
-                <a:solidFill>
-                  <a:srgbClr val="A7F3D0"/>
-                </a:solidFill>
-                <a:latin typeface="Courier New"/>
-                <a:ea typeface="Courier New"/>
-                <a:cs typeface="Courier New"/>
-              </a:rPr>
-              <a:t>Neither is exactly 1/3.</a:t>
+              <a:t>   E = ?   F = ?</a:t>
             </a:r>
           </a:p>
         </p:txBody>
@@ -6983,7 +7197,7 @@
           <p:cNvPr id="5" name="">
             <a:extLst xmlns:a="http://schemas.openxmlformats.org/drawingml/2006/main">
               <a:ext uri="{FF2B5EF4-FFF2-40B4-BE49-F238E27FC236}">
-                <a16:creationId xmlns:a16="http://schemas.microsoft.com/office/drawing/2014/main" id="{7550F9BB-98E4-470C-A339-F30A270C656C}"/>
+                <a16:creationId xmlns:a16="http://schemas.microsoft.com/office/drawing/2014/main" id="{8F900304-F8E7-4C1C-B3A0-F1A0DD604211}"/>
               </a:ext>
             </a:extLst>
           </p:cNvPr>
@@ -7031,7 +7245,7 @@
                 <a:ea typeface="Arial"/>
                 <a:cs typeface="Arial"/>
               </a:rPr>
-              <a:t>Wait for the assignment’s rounding instructions before choosing a stored result.</a:t>
+              <a:t>Compare each value with the smallest normal, 1/4, before finding bits.</a:t>
             </a:r>
           </a:p>
         </p:txBody>
@@ -7041,7 +7255,7 @@
           <p:cNvPr id="6" name="">
             <a:extLst xmlns:a="http://schemas.openxmlformats.org/drawingml/2006/main">
               <a:ext uri="{FF2B5EF4-FFF2-40B4-BE49-F238E27FC236}">
-                <a16:creationId xmlns:a16="http://schemas.microsoft.com/office/drawing/2014/main" id="{73B702C8-3DF9-406E-8087-CF675ECCC2D1}"/>
+                <a16:creationId xmlns:a16="http://schemas.microsoft.com/office/drawing/2014/main" id="{16200DCD-0F16-4BE6-9538-9FDAF86C958E}"/>
               </a:ext>
             </a:extLst>
           </p:cNvPr>
@@ -7089,7 +7303,7 @@
                 <a:ea typeface="Courier New"/>
                 <a:cs typeface="Courier New"/>
               </a:rPr>
-              <a:t>17 / 22</a:t>
+              <a:t>17 / 24</a:t>
             </a:r>
           </a:p>
         </p:txBody>
@@ -7097,7 +7311,7 @@
     </p:spTree>
     <p:extLst>
       <p:ext uri="{BB962C8B-B14F-4D97-AF65-F5344CB8AC3E}">
-        <p14:creationId xmlns:p14="http://schemas.microsoft.com/office/powerpoint/2010/main" val="1704851840"/>
+        <p14:creationId xmlns:p14="http://schemas.microsoft.com/office/powerpoint/2010/main" val="2079659254"/>
       </p:ext>
     </p:extLst>
   </p:cSld>
@@ -7128,7 +7342,7 @@
           <p:cNvPr id="7" name="">
             <a:extLst xmlns:a="http://schemas.openxmlformats.org/drawingml/2006/main">
               <a:ext uri="{FF2B5EF4-FFF2-40B4-BE49-F238E27FC236}">
-                <a16:creationId xmlns:a16="http://schemas.microsoft.com/office/drawing/2014/main" id="{0BCE7827-648B-4B62-AE80-F3CE9BFFD594}"/>
+                <a16:creationId xmlns:a16="http://schemas.microsoft.com/office/drawing/2014/main" id="{D25A2A70-779E-4A39-9AD5-537DDE3C5B7A}"/>
               </a:ext>
             </a:extLst>
           </p:cNvPr>
@@ -7176,7 +7390,7 @@
                 <a:ea typeface="Courier New"/>
                 <a:cs typeface="Courier New"/>
               </a:rPr>
-              <a:t>FLOATING POINT · SPACING</a:t>
+              <a:t>FLOATING POINT · CHECK</a:t>
             </a:r>
           </a:p>
         </p:txBody>
@@ -7186,7 +7400,7 @@
           <p:cNvPr id="2" name="">
             <a:extLst xmlns:a="http://schemas.openxmlformats.org/drawingml/2006/main">
               <a:ext uri="{FF2B5EF4-FFF2-40B4-BE49-F238E27FC236}">
-                <a16:creationId xmlns:a16="http://schemas.microsoft.com/office/drawing/2014/main" id="{E6B69FE5-5D95-4306-AAF0-9A70AD531613}"/>
+                <a16:creationId xmlns:a16="http://schemas.microsoft.com/office/drawing/2014/main" id="{2F2733A3-E106-4C90-B097-BE7CB4577892}"/>
               </a:ext>
             </a:extLst>
           </p:cNvPr>
@@ -7234,7 +7448,7 @@
                 <a:ea typeface="Arial"/>
                 <a:cs typeface="Arial"/>
               </a:rPr>
-              <a:t>Precision changes with scale</a:t>
+              <a:t>Practice answers</a:t>
             </a:r>
           </a:p>
         </p:txBody>
@@ -7244,7 +7458,7 @@
           <p:cNvPr id="3" name="">
             <a:extLst xmlns:a="http://schemas.openxmlformats.org/drawingml/2006/main">
               <a:ext uri="{FF2B5EF4-FFF2-40B4-BE49-F238E27FC236}">
-                <a16:creationId xmlns:a16="http://schemas.microsoft.com/office/drawing/2014/main" id="{887FE9A9-E5DE-4BC1-94AD-59371BF9B78C}"/>
+                <a16:creationId xmlns:a16="http://schemas.microsoft.com/office/drawing/2014/main" id="{53BB6D32-B5C1-4BFB-8D41-7B7055B1A606}"/>
               </a:ext>
             </a:extLst>
           </p:cNvPr>
@@ -7292,7 +7506,7 @@
                 <a:ea typeface="Arial"/>
                 <a:cs typeface="Arial"/>
               </a:rPr>
-              <a:t>The same three fraction bits give eight values within each normal exponent range.</a:t>
+              <a:t>3/2 = 1.100₂ × 2⁰, so it is normal.</a:t>
             </a:r>
           </a:p>
           <a:p xmlns:a="http://schemas.openxmlformats.org/drawingml/2006/main">
@@ -7321,7 +7535,7 @@
                 <a:ea typeface="Arial"/>
                 <a:cs typeface="Arial"/>
               </a:rPr>
-              <a:t>When the exponent increases by one, the distance between neighboring values doubles.</a:t>
+              <a:t>3/16 is below 1/4, so it is subnormal. Since value = F/32, F = 6.</a:t>
             </a:r>
           </a:p>
         </p:txBody>
@@ -7331,7 +7545,7 @@
           <p:cNvPr id="4" name="">
             <a:extLst xmlns:a="http://schemas.openxmlformats.org/drawingml/2006/main">
               <a:ext uri="{FF2B5EF4-FFF2-40B4-BE49-F238E27FC236}">
-                <a16:creationId xmlns:a16="http://schemas.microsoft.com/office/drawing/2014/main" id="{CED75AEC-85E3-4520-B63E-09FCF9AACAE6}"/>
+                <a16:creationId xmlns:a16="http://schemas.microsoft.com/office/drawing/2014/main" id="{CD85FA7D-EF72-4F2A-85B4-517634BC5BE7}"/>
               </a:ext>
             </a:extLst>
           </p:cNvPr>
@@ -7379,7 +7593,7 @@
                 <a:ea typeface="Courier New"/>
                 <a:cs typeface="Courier New"/>
               </a:rPr>
-              <a:t>E = 3 (e = 0)</a:t>
+              <a:t>A. 3/2</a:t>
             </a:r>
           </a:p>
           <a:p xmlns:a="http://schemas.openxmlformats.org/drawingml/2006/main">
@@ -7403,7 +7617,7 @@
                 <a:ea typeface="Courier New"/>
                 <a:cs typeface="Courier New"/>
               </a:rPr>
-              <a:t>F = 0 → 1       F = 1 → 9/8</a:t>
+              <a:t>   E = 3 = 011₂</a:t>
             </a:r>
           </a:p>
           <a:p xmlns:a="http://schemas.openxmlformats.org/drawingml/2006/main">
@@ -7427,7 +7641,31 @@
                 <a:ea typeface="Courier New"/>
                 <a:cs typeface="Courier New"/>
               </a:rPr>
-              <a:t>step = 1/8</a:t>
+              <a:t>   F = 4 = 100₂</a:t>
+            </a:r>
+          </a:p>
+          <a:p xmlns:a="http://schemas.openxmlformats.org/drawingml/2006/main">
+            <a:pPr>
+              <a:buNone/>
+              <a:defRPr sz="1650" b="0">
+                <a:solidFill>
+                  <a:srgbClr val="A7F3D0"/>
+                </a:solidFill>
+                <a:latin typeface="Courier New"/>
+                <a:ea typeface="Courier New"/>
+                <a:cs typeface="Courier New"/>
+              </a:defRPr>
+            </a:pPr>
+            <a:r>
+              <a:rPr sz="1650" b="0">
+                <a:solidFill>
+                  <a:srgbClr val="A7F3D0"/>
+                </a:solidFill>
+                <a:latin typeface="Courier New"/>
+                <a:ea typeface="Courier New"/>
+                <a:cs typeface="Courier New"/>
+              </a:rPr>
+              <a:t>   Check: (1 + 4/8) × 1 = 3/2</a:t>
             </a:r>
           </a:p>
           <a:p xmlns:a="http://schemas.openxmlformats.org/drawingml/2006/main">
@@ -7456,7 +7694,7 @@
                 <a:ea typeface="Courier New"/>
                 <a:cs typeface="Courier New"/>
               </a:rPr>
-              <a:t>E = 4 (e = 1)</a:t>
+              <a:t>B. 3/16</a:t>
             </a:r>
           </a:p>
           <a:p xmlns:a="http://schemas.openxmlformats.org/drawingml/2006/main">
@@ -7480,7 +7718,7 @@
                 <a:ea typeface="Courier New"/>
                 <a:cs typeface="Courier New"/>
               </a:rPr>
-              <a:t>F = 0 → 2       F = 1 → 9/4</a:t>
+              <a:t>   E = 0 = 000₂</a:t>
             </a:r>
           </a:p>
           <a:p xmlns:a="http://schemas.openxmlformats.org/drawingml/2006/main">
@@ -7504,7 +7742,31 @@
                 <a:ea typeface="Courier New"/>
                 <a:cs typeface="Courier New"/>
               </a:rPr>
-              <a:t>step = 1/4</a:t>
+              <a:t>   F = 6 = 110₂</a:t>
+            </a:r>
+          </a:p>
+          <a:p xmlns:a="http://schemas.openxmlformats.org/drawingml/2006/main">
+            <a:pPr>
+              <a:buNone/>
+              <a:defRPr sz="1650" b="0">
+                <a:solidFill>
+                  <a:srgbClr val="A7F3D0"/>
+                </a:solidFill>
+                <a:latin typeface="Courier New"/>
+                <a:ea typeface="Courier New"/>
+                <a:cs typeface="Courier New"/>
+              </a:defRPr>
+            </a:pPr>
+            <a:r>
+              <a:rPr sz="1650" b="0">
+                <a:solidFill>
+                  <a:srgbClr val="A7F3D0"/>
+                </a:solidFill>
+                <a:latin typeface="Courier New"/>
+                <a:ea typeface="Courier New"/>
+                <a:cs typeface="Courier New"/>
+              </a:rPr>
+              <a:t>   Check: 6/32 = 3/16</a:t>
             </a:r>
           </a:p>
         </p:txBody>
@@ -7514,7 +7776,7 @@
           <p:cNvPr id="5" name="">
             <a:extLst xmlns:a="http://schemas.openxmlformats.org/drawingml/2006/main">
               <a:ext uri="{FF2B5EF4-FFF2-40B4-BE49-F238E27FC236}">
-                <a16:creationId xmlns:a16="http://schemas.microsoft.com/office/drawing/2014/main" id="{7A18BC8F-2DC5-4B6B-A4F9-10CDE1183DE6}"/>
+                <a16:creationId xmlns:a16="http://schemas.microsoft.com/office/drawing/2014/main" id="{09DD94A5-8CF6-4CC6-9FAF-1AAE9F86C651}"/>
               </a:ext>
             </a:extLst>
           </p:cNvPr>
@@ -7562,7 +7824,7 @@
                 <a:ea typeface="Arial"/>
                 <a:cs typeface="Arial"/>
               </a:rPr>
-              <a:t>This is why large floating point values have larger gaps.</a:t>
+              <a:t>A fraction can be exactly representable in one format and not another.</a:t>
             </a:r>
           </a:p>
         </p:txBody>
@@ -7572,7 +7834,7 @@
           <p:cNvPr id="6" name="">
             <a:extLst xmlns:a="http://schemas.openxmlformats.org/drawingml/2006/main">
               <a:ext uri="{FF2B5EF4-FFF2-40B4-BE49-F238E27FC236}">
-                <a16:creationId xmlns:a16="http://schemas.microsoft.com/office/drawing/2014/main" id="{94269C50-3A0A-4FBB-A1D2-A33411F72ECA}"/>
+                <a16:creationId xmlns:a16="http://schemas.microsoft.com/office/drawing/2014/main" id="{BEB8226B-AC16-4616-9E79-3B5C231B3962}"/>
               </a:ext>
             </a:extLst>
           </p:cNvPr>
@@ -7620,7 +7882,7 @@
                 <a:ea typeface="Courier New"/>
                 <a:cs typeface="Courier New"/>
               </a:rPr>
-              <a:t>18 / 22</a:t>
+              <a:t>18 / 24</a:t>
             </a:r>
           </a:p>
         </p:txBody>
@@ -7628,7 +7890,7 @@
     </p:spTree>
     <p:extLst>
       <p:ext uri="{BB962C8B-B14F-4D97-AF65-F5344CB8AC3E}">
-        <p14:creationId xmlns:p14="http://schemas.microsoft.com/office/powerpoint/2010/main" val="1018474765"/>
+        <p14:creationId xmlns:p14="http://schemas.microsoft.com/office/powerpoint/2010/main" val="1590754296"/>
       </p:ext>
     </p:extLst>
   </p:cSld>
@@ -7659,7 +7921,7 @@
           <p:cNvPr id="7" name="">
             <a:extLst xmlns:a="http://schemas.openxmlformats.org/drawingml/2006/main">
               <a:ext uri="{FF2B5EF4-FFF2-40B4-BE49-F238E27FC236}">
-                <a16:creationId xmlns:a16="http://schemas.microsoft.com/office/drawing/2014/main" id="{0BCE7827-648B-4B62-AE80-F3CE9BFFD594}"/>
+                <a16:creationId xmlns:a16="http://schemas.microsoft.com/office/drawing/2014/main" id="{93E43C1D-677A-4484-B42E-435337BCED51}"/>
               </a:ext>
             </a:extLst>
           </p:cNvPr>
@@ -7707,7 +7969,7 @@
                 <a:ea typeface="Courier New"/>
                 <a:cs typeface="Courier New"/>
               </a:rPr>
-              <a:t>FLOATING POINT · ASSIGNMENT PREVIEW</a:t>
+              <a:t>FLOATING POINT · PRECISION</a:t>
             </a:r>
           </a:p>
         </p:txBody>
@@ -7717,7 +7979,7 @@
           <p:cNvPr id="2" name="">
             <a:extLst xmlns:a="http://schemas.openxmlformats.org/drawingml/2006/main">
               <a:ext uri="{FF2B5EF4-FFF2-40B4-BE49-F238E27FC236}">
-                <a16:creationId xmlns:a16="http://schemas.microsoft.com/office/drawing/2014/main" id="{E6B69FE5-5D95-4306-AAF0-9A70AD531613}"/>
+                <a16:creationId xmlns:a16="http://schemas.microsoft.com/office/drawing/2014/main" id="{074B736B-6CBC-48AB-BB9C-B94B56E89F35}"/>
               </a:ext>
             </a:extLst>
           </p:cNvPr>
@@ -7765,7 +8027,7 @@
                 <a:ea typeface="Arial"/>
                 <a:cs typeface="Arial"/>
               </a:rPr>
-              <a:t>HW3 preview: five inputs</a:t>
+              <a:t>Some ratios need rounding</a:t>
             </a:r>
           </a:p>
         </p:txBody>
@@ -7775,7 +8037,7 @@
           <p:cNvPr id="3" name="">
             <a:extLst xmlns:a="http://schemas.openxmlformats.org/drawingml/2006/main">
               <a:ext uri="{FF2B5EF4-FFF2-40B4-BE49-F238E27FC236}">
-                <a16:creationId xmlns:a16="http://schemas.microsoft.com/office/drawing/2014/main" id="{887FE9A9-E5DE-4BC1-94AD-59371BF9B78C}"/>
+                <a16:creationId xmlns:a16="http://schemas.microsoft.com/office/drawing/2014/main" id="{31BF5015-85C0-4422-9A8D-3AB1598AB1B5}"/>
               </a:ext>
             </a:extLst>
           </p:cNvPr>
@@ -7823,7 +8085,36 @@
                 <a:ea typeface="Arial"/>
                 <a:cs typeface="Arial"/>
               </a:rPr>
-              <a:t>The professor plans a program that reads a format and a nonnegative ratio. The assignment has not been posted, so treat these details as a preview.</a:t>
+              <a:t>Only eight fraction patterns fit in three bits. A ratio such as 1/3 has a repeating binary expansion and cannot be stored exactly.</a:t>
+            </a:r>
+          </a:p>
+          <a:p xmlns:a="http://schemas.openxmlformats.org/drawingml/2006/main">
+            <a:r>
+              <a:t/>
+            </a:r>
+          </a:p>
+          <a:p xmlns:a="http://schemas.openxmlformats.org/drawingml/2006/main">
+            <a:pPr>
+              <a:buNone/>
+              <a:defRPr sz="1950" b="0">
+                <a:solidFill>
+                  <a:srgbClr val="D4D4D8"/>
+                </a:solidFill>
+                <a:latin typeface="Arial"/>
+                <a:ea typeface="Arial"/>
+                <a:cs typeface="Arial"/>
+              </a:defRPr>
+            </a:pPr>
+            <a:r>
+              <a:rPr sz="1950" b="0">
+                <a:solidFill>
+                  <a:srgbClr val="D4D4D8"/>
+                </a:solidFill>
+                <a:latin typeface="Arial"/>
+                <a:ea typeface="Arial"/>
+                <a:cs typeface="Arial"/>
+              </a:rPr>
+              <a:t>The required rounding rule decides which nearby value to store.</a:t>
             </a:r>
           </a:p>
         </p:txBody>
@@ -7833,7 +8124,7 @@
           <p:cNvPr id="4" name="">
             <a:extLst xmlns:a="http://schemas.openxmlformats.org/drawingml/2006/main">
               <a:ext uri="{FF2B5EF4-FFF2-40B4-BE49-F238E27FC236}">
-                <a16:creationId xmlns:a16="http://schemas.microsoft.com/office/drawing/2014/main" id="{CED75AEC-85E3-4520-B63E-09FCF9AACAE6}"/>
+                <a16:creationId xmlns:a16="http://schemas.microsoft.com/office/drawing/2014/main" id="{442E6650-2F07-46E8-968E-92CAC81BA173}"/>
               </a:ext>
             </a:extLst>
           </p:cNvPr>
@@ -7881,7 +8172,12 @@
                 <a:ea typeface="Courier New"/>
                 <a:cs typeface="Courier New"/>
               </a:rPr>
-              <a:t>format:  exp_bits = 3</a:t>
+              <a:t>1/3 = 1.010101…₂ × 2⁻²</a:t>
+            </a:r>
+          </a:p>
+          <a:p xmlns:a="http://schemas.openxmlformats.org/drawingml/2006/main">
+            <a:r>
+              <a:t/>
             </a:r>
           </a:p>
           <a:p xmlns:a="http://schemas.openxmlformats.org/drawingml/2006/main">
@@ -7905,7 +8201,7 @@
                 <a:ea typeface="Courier New"/>
                 <a:cs typeface="Courier New"/>
               </a:rPr>
-              <a:t>         bias = 3</a:t>
+              <a:t>Nearby values in this format:</a:t>
             </a:r>
           </a:p>
           <a:p xmlns:a="http://schemas.openxmlformats.org/drawingml/2006/main">
@@ -7929,7 +8225,31 @@
                 <a:ea typeface="Courier New"/>
                 <a:cs typeface="Courier New"/>
               </a:rPr>
-              <a:t>         sig_bits = 3</a:t>
+              <a:t>F = 010₂  →  5/16</a:t>
+            </a:r>
+          </a:p>
+          <a:p xmlns:a="http://schemas.openxmlformats.org/drawingml/2006/main">
+            <a:pPr>
+              <a:buNone/>
+              <a:defRPr sz="1650" b="0">
+                <a:solidFill>
+                  <a:srgbClr val="A7F3D0"/>
+                </a:solidFill>
+                <a:latin typeface="Courier New"/>
+                <a:ea typeface="Courier New"/>
+                <a:cs typeface="Courier New"/>
+              </a:defRPr>
+            </a:pPr>
+            <a:r>
+              <a:rPr sz="1650" b="0">
+                <a:solidFill>
+                  <a:srgbClr val="A7F3D0"/>
+                </a:solidFill>
+                <a:latin typeface="Courier New"/>
+                <a:ea typeface="Courier New"/>
+                <a:cs typeface="Courier New"/>
+              </a:rPr>
+              <a:t>F = 011₂  →  11/32</a:t>
             </a:r>
           </a:p>
           <a:p xmlns:a="http://schemas.openxmlformats.org/drawingml/2006/main">
@@ -7958,79 +8278,7 @@
                 <a:ea typeface="Courier New"/>
                 <a:cs typeface="Courier New"/>
               </a:rPr>
-              <a:t>value:   numerator = 5</a:t>
-            </a:r>
-          </a:p>
-          <a:p xmlns:a="http://schemas.openxmlformats.org/drawingml/2006/main">
-            <a:pPr>
-              <a:buNone/>
-              <a:defRPr sz="1650" b="0">
-                <a:solidFill>
-                  <a:srgbClr val="A7F3D0"/>
-                </a:solidFill>
-                <a:latin typeface="Courier New"/>
-                <a:ea typeface="Courier New"/>
-                <a:cs typeface="Courier New"/>
-              </a:defRPr>
-            </a:pPr>
-            <a:r>
-              <a:rPr sz="1650" b="0">
-                <a:solidFill>
-                  <a:srgbClr val="A7F3D0"/>
-                </a:solidFill>
-                <a:latin typeface="Courier New"/>
-                <a:ea typeface="Courier New"/>
-                <a:cs typeface="Courier New"/>
-              </a:rPr>
-              <a:t>         denominator = 2</a:t>
-            </a:r>
-          </a:p>
-          <a:p xmlns:a="http://schemas.openxmlformats.org/drawingml/2006/main">
-            <a:pPr>
-              <a:buNone/>
-              <a:defRPr sz="1650" b="0">
-                <a:solidFill>
-                  <a:srgbClr val="A7F3D0"/>
-                </a:solidFill>
-                <a:latin typeface="Courier New"/>
-                <a:ea typeface="Courier New"/>
-                <a:cs typeface="Courier New"/>
-              </a:defRPr>
-            </a:pPr>
-            <a:r>
-              <a:rPr sz="1650" b="0">
-                <a:solidFill>
-                  <a:srgbClr val="A7F3D0"/>
-                </a:solidFill>
-                <a:latin typeface="Courier New"/>
-                <a:ea typeface="Courier New"/>
-                <a:cs typeface="Courier New"/>
-              </a:rPr>
-              <a:t/>
-            </a:r>
-          </a:p>
-          <a:p xmlns:a="http://schemas.openxmlformats.org/drawingml/2006/main">
-            <a:pPr>
-              <a:buNone/>
-              <a:defRPr sz="1650" b="0">
-                <a:solidFill>
-                  <a:srgbClr val="A7F3D0"/>
-                </a:solidFill>
-                <a:latin typeface="Courier New"/>
-                <a:ea typeface="Courier New"/>
-                <a:cs typeface="Courier New"/>
-              </a:defRPr>
-            </a:pPr>
-            <a:r>
-              <a:rPr sz="1650" b="0">
-                <a:solidFill>
-                  <a:srgbClr val="A7F3D0"/>
-                </a:solidFill>
-                <a:latin typeface="Courier New"/>
-                <a:ea typeface="Courier New"/>
-                <a:cs typeface="Courier New"/>
-              </a:rPr>
-              <a:t>Find: E (exponent), F (fraction)</a:t>
+              <a:t>Neither is exactly 1/3.</a:t>
             </a:r>
           </a:p>
         </p:txBody>
@@ -8040,7 +8288,7 @@
           <p:cNvPr id="5" name="">
             <a:extLst xmlns:a="http://schemas.openxmlformats.org/drawingml/2006/main">
               <a:ext uri="{FF2B5EF4-FFF2-40B4-BE49-F238E27FC236}">
-                <a16:creationId xmlns:a16="http://schemas.microsoft.com/office/drawing/2014/main" id="{7A18BC8F-2DC5-4B6B-A4F9-10CDE1183DE6}"/>
+                <a16:creationId xmlns:a16="http://schemas.microsoft.com/office/drawing/2014/main" id="{7550F9BB-98E4-470C-A339-F30A270C656C}"/>
               </a:ext>
             </a:extLst>
           </p:cNvPr>
@@ -8088,7 +8336,7 @@
                 <a:ea typeface="Arial"/>
                 <a:cs typeface="Arial"/>
               </a:rPr>
-              <a:t>The first three inputs define the format; the last two define the value.</a:t>
+              <a:t>Wait for the assignment’s rounding instructions before choosing a stored result.</a:t>
             </a:r>
           </a:p>
         </p:txBody>
@@ -8098,7 +8346,7 @@
           <p:cNvPr id="6" name="">
             <a:extLst xmlns:a="http://schemas.openxmlformats.org/drawingml/2006/main">
               <a:ext uri="{FF2B5EF4-FFF2-40B4-BE49-F238E27FC236}">
-                <a16:creationId xmlns:a16="http://schemas.microsoft.com/office/drawing/2014/main" id="{94269C50-3A0A-4FBB-A1D2-A33411F72ECA}"/>
+                <a16:creationId xmlns:a16="http://schemas.microsoft.com/office/drawing/2014/main" id="{73B702C8-3DF9-406E-8087-CF675ECCC2D1}"/>
               </a:ext>
             </a:extLst>
           </p:cNvPr>
@@ -8146,7 +8394,7 @@
                 <a:ea typeface="Courier New"/>
                 <a:cs typeface="Courier New"/>
               </a:rPr>
-              <a:t>19 / 22</a:t>
+              <a:t>19 / 24</a:t>
             </a:r>
           </a:p>
         </p:txBody>
@@ -8154,7 +8402,7 @@
     </p:spTree>
     <p:extLst>
       <p:ext uri="{BB962C8B-B14F-4D97-AF65-F5344CB8AC3E}">
-        <p14:creationId xmlns:p14="http://schemas.microsoft.com/office/powerpoint/2010/main" val="1018474765"/>
+        <p14:creationId xmlns:p14="http://schemas.microsoft.com/office/powerpoint/2010/main" val="1704851840"/>
       </p:ext>
     </p:extLst>
   </p:cSld>
@@ -8658,7 +8906,7 @@
                 <a:ea typeface="Courier New"/>
                 <a:cs typeface="Courier New"/>
               </a:rPr>
-              <a:t>02 / 22</a:t>
+              <a:t>02 / 24</a:t>
             </a:r>
           </a:p>
         </p:txBody>
@@ -8745,7 +8993,7 @@
                 <a:ea typeface="Courier New"/>
                 <a:cs typeface="Courier New"/>
               </a:rPr>
-              <a:t>FLOATING POINT · WORKED INPUT</a:t>
+              <a:t>FLOATING POINT · SPACING</a:t>
             </a:r>
           </a:p>
         </p:txBody>
@@ -8803,7 +9051,7 @@
                 <a:ea typeface="Arial"/>
                 <a:cs typeface="Arial"/>
               </a:rPr>
-              <a:t>HW3 preview: encode 5/2</a:t>
+              <a:t>Precision changes with scale</a:t>
             </a:r>
           </a:p>
         </p:txBody>
@@ -8861,7 +9109,36 @@
                 <a:ea typeface="Arial"/>
                 <a:cs typeface="Arial"/>
               </a:rPr>
-              <a:t>With 3 exponent bits, bias 3, and 3 fraction bits, write 5/2 as 1.010₂ × 2¹. The true exponent is 1, so E = 1 + 3 = 4. The stored fraction is 010₂, so F = 2.</a:t>
+              <a:t>The same three fraction bits give eight values within each normal exponent range.</a:t>
+            </a:r>
+          </a:p>
+          <a:p xmlns:a="http://schemas.openxmlformats.org/drawingml/2006/main">
+            <a:r>
+              <a:t/>
+            </a:r>
+          </a:p>
+          <a:p xmlns:a="http://schemas.openxmlformats.org/drawingml/2006/main">
+            <a:pPr>
+              <a:buNone/>
+              <a:defRPr sz="1950" b="0">
+                <a:solidFill>
+                  <a:srgbClr val="D4D4D8"/>
+                </a:solidFill>
+                <a:latin typeface="Arial"/>
+                <a:ea typeface="Arial"/>
+                <a:cs typeface="Arial"/>
+              </a:defRPr>
+            </a:pPr>
+            <a:r>
+              <a:rPr sz="1950" b="0">
+                <a:solidFill>
+                  <a:srgbClr val="D4D4D8"/>
+                </a:solidFill>
+                <a:latin typeface="Arial"/>
+                <a:ea typeface="Arial"/>
+                <a:cs typeface="Arial"/>
+              </a:rPr>
+              <a:t>When the exponent increases by one, the distance between neighboring values doubles.</a:t>
             </a:r>
           </a:p>
         </p:txBody>
@@ -8919,7 +9196,7 @@
                 <a:ea typeface="Courier New"/>
                 <a:cs typeface="Courier New"/>
               </a:rPr>
-              <a:t>Inputs: 3 3 3 5 2</a:t>
+              <a:t>E = 3 (e = 0)</a:t>
             </a:r>
           </a:p>
           <a:p xmlns:a="http://schemas.openxmlformats.org/drawingml/2006/main">
@@ -8943,6 +9220,35 @@
                 <a:ea typeface="Courier New"/>
                 <a:cs typeface="Courier New"/>
               </a:rPr>
+              <a:t>F = 0 → 1       F = 1 → 9/8</a:t>
+            </a:r>
+          </a:p>
+          <a:p xmlns:a="http://schemas.openxmlformats.org/drawingml/2006/main">
+            <a:pPr>
+              <a:buNone/>
+              <a:defRPr sz="1650" b="0">
+                <a:solidFill>
+                  <a:srgbClr val="A7F3D0"/>
+                </a:solidFill>
+                <a:latin typeface="Courier New"/>
+                <a:ea typeface="Courier New"/>
+                <a:cs typeface="Courier New"/>
+              </a:defRPr>
+            </a:pPr>
+            <a:r>
+              <a:rPr sz="1650" b="0">
+                <a:solidFill>
+                  <a:srgbClr val="A7F3D0"/>
+                </a:solidFill>
+                <a:latin typeface="Courier New"/>
+                <a:ea typeface="Courier New"/>
+                <a:cs typeface="Courier New"/>
+              </a:rPr>
+              <a:t>step = 1/8</a:t>
+            </a:r>
+          </a:p>
+          <a:p xmlns:a="http://schemas.openxmlformats.org/drawingml/2006/main">
+            <a:r>
               <a:t/>
             </a:r>
           </a:p>
@@ -8967,31 +9273,7 @@
                 <a:ea typeface="Courier New"/>
                 <a:cs typeface="Courier New"/>
               </a:rPr>
-              <a:t>E = 4 = 100₂</a:t>
-            </a:r>
-          </a:p>
-          <a:p xmlns:a="http://schemas.openxmlformats.org/drawingml/2006/main">
-            <a:pPr>
-              <a:buNone/>
-              <a:defRPr sz="1650">
-                <a:solidFill>
-                  <a:srgbClr val="A7F3D0"/>
-                </a:solidFill>
-                <a:latin typeface="Courier New"/>
-                <a:ea typeface="Courier New"/>
-                <a:cs typeface="Courier New"/>
-              </a:defRPr>
-            </a:pPr>
-            <a:r>
-              <a:rPr sz="1650">
-                <a:solidFill>
-                  <a:srgbClr val="A7F3D0"/>
-                </a:solidFill>
-                <a:latin typeface="Courier New"/>
-                <a:ea typeface="Courier New"/>
-                <a:cs typeface="Courier New"/>
-              </a:rPr>
-              <a:t>F = 2 = 010₂</a:t>
+              <a:t>E = 4 (e = 1)</a:t>
             </a:r>
           </a:p>
           <a:p xmlns:a="http://schemas.openxmlformats.org/drawingml/2006/main">
@@ -9015,7 +9297,7 @@
                 <a:ea typeface="Courier New"/>
                 <a:cs typeface="Courier New"/>
               </a:rPr>
-              <a:t/>
+              <a:t>F = 0 → 2       F = 1 → 9/4</a:t>
             </a:r>
           </a:p>
           <a:p xmlns:a="http://schemas.openxmlformats.org/drawingml/2006/main">
@@ -9039,55 +9321,7 @@
                 <a:ea typeface="Courier New"/>
                 <a:cs typeface="Courier New"/>
               </a:rPr>
-              <a:t>Output: 4 2</a:t>
-            </a:r>
-          </a:p>
-          <a:p xmlns:a="http://schemas.openxmlformats.org/drawingml/2006/main">
-            <a:pPr>
-              <a:buNone/>
-              <a:defRPr sz="1650" b="0">
-                <a:solidFill>
-                  <a:srgbClr val="A7F3D0"/>
-                </a:solidFill>
-                <a:latin typeface="Courier New"/>
-                <a:ea typeface="Courier New"/>
-                <a:cs typeface="Courier New"/>
-              </a:defRPr>
-            </a:pPr>
-            <a:r>
-              <a:rPr sz="1650" b="0">
-                <a:solidFill>
-                  <a:srgbClr val="A7F3D0"/>
-                </a:solidFill>
-                <a:latin typeface="Courier New"/>
-                <a:ea typeface="Courier New"/>
-                <a:cs typeface="Courier New"/>
-              </a:rPr>
-              <a:t/>
-            </a:r>
-          </a:p>
-          <a:p xmlns:a="http://schemas.openxmlformats.org/drawingml/2006/main">
-            <a:pPr>
-              <a:buNone/>
-              <a:defRPr sz="1650" b="0">
-                <a:solidFill>
-                  <a:srgbClr val="A7F3D0"/>
-                </a:solidFill>
-                <a:latin typeface="Courier New"/>
-                <a:ea typeface="Courier New"/>
-                <a:cs typeface="Courier New"/>
-              </a:defRPr>
-            </a:pPr>
-            <a:r>
-              <a:rPr sz="1650" b="0">
-                <a:solidFill>
-                  <a:srgbClr val="A7F3D0"/>
-                </a:solidFill>
-                <a:latin typeface="Courier New"/>
-                <a:ea typeface="Courier New"/>
-                <a:cs typeface="Courier New"/>
-              </a:rPr>
-              <a:t>Check: (1 + 2/8) × 2¹ = 5/2</a:t>
+              <a:t>step = 1/4</a:t>
             </a:r>
           </a:p>
         </p:txBody>
@@ -9145,7 +9379,7 @@
                 <a:ea typeface="Arial"/>
                 <a:cs typeface="Arial"/>
               </a:rPr>
-              <a:t>Move the binary point before taking the stored fraction bits.</a:t>
+              <a:t>This is why large floating point values have larger gaps.</a:t>
             </a:r>
           </a:p>
         </p:txBody>
@@ -9203,7 +9437,7 @@
                 <a:ea typeface="Courier New"/>
                 <a:cs typeface="Courier New"/>
               </a:rPr>
-              <a:t>20 / 22</a:t>
+              <a:t>20 / 24</a:t>
             </a:r>
           </a:p>
         </p:txBody>
@@ -9290,7 +9524,7 @@
                 <a:ea typeface="Courier New"/>
                 <a:cs typeface="Courier New"/>
               </a:rPr>
-              <a:t>FLOATING POINT · METHOD</a:t>
+              <a:t>FLOATING POINT · ASSIGNMENT PREVIEW</a:t>
             </a:r>
           </a:p>
         </p:txBody>
@@ -9348,7 +9582,7 @@
                 <a:ea typeface="Arial"/>
                 <a:cs typeface="Arial"/>
               </a:rPr>
-              <a:t>HW3 preview: choose the equation</a:t>
+              <a:t>HW3 preview: five inputs</a:t>
             </a:r>
           </a:p>
         </p:txBody>
@@ -9406,55 +9640,7 @@
                 <a:ea typeface="Arial"/>
                 <a:cs typeface="Arial"/>
               </a:rPr>
-              <a:t>Compare a nonzero ratio with the smallest normal, 2^(1−bias). Below that threshold, set E = 0 and use no hidden 1.</a:t>
-            </a:r>
-          </a:p>
-          <a:p xmlns:a="http://schemas.openxmlformats.org/drawingml/2006/main">
-            <a:pPr>
-              <a:buNone/>
-              <a:defRPr sz="1950" b="0">
-                <a:solidFill>
-                  <a:srgbClr val="D4D4D8"/>
-                </a:solidFill>
-                <a:latin typeface="Arial"/>
-                <a:ea typeface="Arial"/>
-                <a:cs typeface="Arial"/>
-              </a:defRPr>
-            </a:pPr>
-            <a:r>
-              <a:rPr sz="1950" b="0">
-                <a:solidFill>
-                  <a:srgbClr val="D4D4D8"/>
-                </a:solidFill>
-                <a:latin typeface="Arial"/>
-                <a:ea typeface="Arial"/>
-                <a:cs typeface="Arial"/>
-              </a:rPr>
-              <a:t/>
-            </a:r>
-          </a:p>
-          <a:p xmlns:a="http://schemas.openxmlformats.org/drawingml/2006/main">
-            <a:pPr>
-              <a:buNone/>
-              <a:defRPr sz="1950" b="0">
-                <a:solidFill>
-                  <a:srgbClr val="D4D4D8"/>
-                </a:solidFill>
-                <a:latin typeface="Arial"/>
-                <a:ea typeface="Arial"/>
-                <a:cs typeface="Arial"/>
-              </a:defRPr>
-            </a:pPr>
-            <a:r>
-              <a:rPr sz="1950" b="0">
-                <a:solidFill>
-                  <a:srgbClr val="D4D4D8"/>
-                </a:solidFill>
-                <a:latin typeface="Arial"/>
-                <a:ea typeface="Arial"/>
-                <a:cs typeface="Arial"/>
-              </a:rPr>
-              <a:t>Otherwise find the true exponent e and store E = e + bias. Solve for F, then decode to check.</a:t>
+              <a:t>The professor plans a program that reads a format and a nonnegative ratio. The assignment has not been posted, so treat these details as a preview.</a:t>
             </a:r>
           </a:p>
         </p:txBody>
@@ -9512,7 +9698,7 @@
                 <a:ea typeface="Courier New"/>
                 <a:cs typeface="Courier New"/>
               </a:rPr>
-              <a:t>Normal (E &gt; 0):</a:t>
+              <a:t>format:  exp_bits = 3</a:t>
             </a:r>
           </a:p>
           <a:p xmlns:a="http://schemas.openxmlformats.org/drawingml/2006/main">
@@ -9536,7 +9722,7 @@
                 <a:ea typeface="Courier New"/>
                 <a:cs typeface="Courier New"/>
               </a:rPr>
-              <a:t>value = (1 + F/2^p) × 2^(E−bias)</a:t>
+              <a:t>         bias = 3</a:t>
             </a:r>
           </a:p>
           <a:p xmlns:a="http://schemas.openxmlformats.org/drawingml/2006/main">
@@ -9560,36 +9746,17 @@
                 <a:ea typeface="Courier New"/>
                 <a:cs typeface="Courier New"/>
               </a:rPr>
+              <a:t>         sig_bits = 3</a:t>
+            </a:r>
+          </a:p>
+          <a:p xmlns:a="http://schemas.openxmlformats.org/drawingml/2006/main">
+            <a:r>
               <a:t/>
             </a:r>
           </a:p>
           <a:p xmlns:a="http://schemas.openxmlformats.org/drawingml/2006/main">
             <a:pPr>
               <a:buNone/>
-              <a:defRPr sz="1650">
-                <a:solidFill>
-                  <a:srgbClr val="A7F3D0"/>
-                </a:solidFill>
-                <a:latin typeface="Courier New"/>
-                <a:ea typeface="Courier New"/>
-                <a:cs typeface="Courier New"/>
-              </a:defRPr>
-            </a:pPr>
-            <a:r>
-              <a:rPr sz="1650">
-                <a:solidFill>
-                  <a:srgbClr val="A7F3D0"/>
-                </a:solidFill>
-                <a:latin typeface="Courier New"/>
-                <a:ea typeface="Courier New"/>
-                <a:cs typeface="Courier New"/>
-              </a:rPr>
-              <a:t>Subnormal (E = 0):</a:t>
-            </a:r>
-          </a:p>
-          <a:p xmlns:a="http://schemas.openxmlformats.org/drawingml/2006/main">
-            <a:pPr>
-              <a:buNone/>
               <a:defRPr sz="1650" b="0">
                 <a:solidFill>
                   <a:srgbClr val="A7F3D0"/>
@@ -9608,7 +9775,7 @@
                 <a:ea typeface="Courier New"/>
                 <a:cs typeface="Courier New"/>
               </a:rPr>
-              <a:t>value = (F/2^p) × 2^(1−bias)</a:t>
+              <a:t>value:   numerator = 5</a:t>
             </a:r>
           </a:p>
           <a:p xmlns:a="http://schemas.openxmlformats.org/drawingml/2006/main">
@@ -9632,6 +9799,30 @@
                 <a:ea typeface="Courier New"/>
                 <a:cs typeface="Courier New"/>
               </a:rPr>
+              <a:t>         denominator = 2</a:t>
+            </a:r>
+          </a:p>
+          <a:p xmlns:a="http://schemas.openxmlformats.org/drawingml/2006/main">
+            <a:pPr>
+              <a:buNone/>
+              <a:defRPr sz="1650" b="0">
+                <a:solidFill>
+                  <a:srgbClr val="A7F3D0"/>
+                </a:solidFill>
+                <a:latin typeface="Courier New"/>
+                <a:ea typeface="Courier New"/>
+                <a:cs typeface="Courier New"/>
+              </a:defRPr>
+            </a:pPr>
+            <a:r>
+              <a:rPr sz="1650" b="0">
+                <a:solidFill>
+                  <a:srgbClr val="A7F3D0"/>
+                </a:solidFill>
+                <a:latin typeface="Courier New"/>
+                <a:ea typeface="Courier New"/>
+                <a:cs typeface="Courier New"/>
+              </a:rPr>
               <a:t/>
             </a:r>
           </a:p>
@@ -9656,7 +9847,7 @@
                 <a:ea typeface="Courier New"/>
                 <a:cs typeface="Courier New"/>
               </a:rPr>
-              <a:t>If numerator = 0: E = 0, F = 0</a:t>
+              <a:t>Find: E (exponent), F (fraction)</a:t>
             </a:r>
           </a:p>
         </p:txBody>
@@ -9714,7 +9905,7 @@
                 <a:ea typeface="Arial"/>
                 <a:cs typeface="Arial"/>
               </a:rPr>
-              <a:t>Use the supplied p and bias, not the values from our practice format.</a:t>
+              <a:t>The first three inputs define the format; the last two define the value.</a:t>
             </a:r>
           </a:p>
         </p:txBody>
@@ -9772,7 +9963,7 @@
                 <a:ea typeface="Courier New"/>
                 <a:cs typeface="Courier New"/>
               </a:rPr>
-              <a:t>21 / 22</a:t>
+              <a:t>21 / 24</a:t>
             </a:r>
           </a:p>
         </p:txBody>
@@ -9811,7 +10002,7 @@
           <p:cNvPr id="7" name="">
             <a:extLst xmlns:a="http://schemas.openxmlformats.org/drawingml/2006/main">
               <a:ext uri="{FF2B5EF4-FFF2-40B4-BE49-F238E27FC236}">
-                <a16:creationId xmlns:a16="http://schemas.microsoft.com/office/drawing/2014/main" id="{4989B079-C3E8-43BB-8638-96121018769A}"/>
+                <a16:creationId xmlns:a16="http://schemas.microsoft.com/office/drawing/2014/main" id="{0BCE7827-648B-4B62-AE80-F3CE9BFFD594}"/>
               </a:ext>
             </a:extLst>
           </p:cNvPr>
@@ -9859,7 +10050,7 @@
                 <a:ea typeface="Courier New"/>
                 <a:cs typeface="Courier New"/>
               </a:rPr>
-              <a:t>FLOATING POINT · RECAP</a:t>
+              <a:t>FLOATING POINT · WORKED INPUT</a:t>
             </a:r>
           </a:p>
         </p:txBody>
@@ -9869,7 +10060,7 @@
           <p:cNvPr id="2" name="">
             <a:extLst xmlns:a="http://schemas.openxmlformats.org/drawingml/2006/main">
               <a:ext uri="{FF2B5EF4-FFF2-40B4-BE49-F238E27FC236}">
-                <a16:creationId xmlns:a16="http://schemas.microsoft.com/office/drawing/2014/main" id="{95D3113E-85F1-4E22-A62E-265E94FE3617}"/>
+                <a16:creationId xmlns:a16="http://schemas.microsoft.com/office/drawing/2014/main" id="{E6B69FE5-5D95-4306-AAF0-9A70AD531613}"/>
               </a:ext>
             </a:extLst>
           </p:cNvPr>
@@ -9917,7 +10108,7 @@
                 <a:ea typeface="Arial"/>
                 <a:cs typeface="Arial"/>
               </a:rPr>
-              <a:t>How to check an encoding</a:t>
+              <a:t>HW3 preview: encode 5/2</a:t>
             </a:r>
           </a:p>
         </p:txBody>
@@ -9927,7 +10118,7 @@
           <p:cNvPr id="3" name="">
             <a:extLst xmlns:a="http://schemas.openxmlformats.org/drawingml/2006/main">
               <a:ext uri="{FF2B5EF4-FFF2-40B4-BE49-F238E27FC236}">
-                <a16:creationId xmlns:a16="http://schemas.microsoft.com/office/drawing/2014/main" id="{8EC5E33C-BA7C-4ADE-9FC3-9ABD9F3C6FD4}"/>
+                <a16:creationId xmlns:a16="http://schemas.microsoft.com/office/drawing/2014/main" id="{887FE9A9-E5DE-4BC1-94AD-59371BF9B78C}"/>
               </a:ext>
             </a:extLst>
           </p:cNvPr>
@@ -9975,36 +10166,7 @@
                 <a:ea typeface="Arial"/>
                 <a:cs typeface="Arial"/>
               </a:rPr>
-              <a:t>In our practice format, E = 0 means count F steps of 1/32. Otherwise decode e = E − 3 and use the implied leading 1.</a:t>
-            </a:r>
-          </a:p>
-          <a:p xmlns:a="http://schemas.openxmlformats.org/drawingml/2006/main">
-            <a:r>
-              <a:t/>
-            </a:r>
-          </a:p>
-          <a:p xmlns:a="http://schemas.openxmlformats.org/drawingml/2006/main">
-            <a:pPr>
-              <a:buNone/>
-              <a:defRPr sz="1950" b="0">
-                <a:solidFill>
-                  <a:srgbClr val="D4D4D8"/>
-                </a:solidFill>
-                <a:latin typeface="Arial"/>
-                <a:ea typeface="Arial"/>
-                <a:cs typeface="Arial"/>
-              </a:defRPr>
-            </a:pPr>
-            <a:r>
-              <a:rPr sz="1950" b="0">
-                <a:solidFill>
-                  <a:srgbClr val="D4D4D8"/>
-                </a:solidFill>
-                <a:latin typeface="Arial"/>
-                <a:ea typeface="Arial"/>
-                <a:cs typeface="Arial"/>
-              </a:rPr>
-              <a:t>For an inexact value, follow the problem’s rounding rule.</a:t>
+              <a:t>With 3 exponent bits, bias 3, and 3 fraction bits, write 5/2 as 1.010₂ × 2¹. The true exponent is 1, so E = 1 + 3 = 4. The stored fraction is 010₂, so F = 2.</a:t>
             </a:r>
           </a:p>
         </p:txBody>
@@ -10014,7 +10176,7 @@
           <p:cNvPr id="4" name="">
             <a:extLst xmlns:a="http://schemas.openxmlformats.org/drawingml/2006/main">
               <a:ext uri="{FF2B5EF4-FFF2-40B4-BE49-F238E27FC236}">
-                <a16:creationId xmlns:a16="http://schemas.microsoft.com/office/drawing/2014/main" id="{EA939046-DA6B-448C-A179-5B13743C72F3}"/>
+                <a16:creationId xmlns:a16="http://schemas.microsoft.com/office/drawing/2014/main" id="{CED75AEC-85E3-4520-B63E-09FCF9AACAE6}"/>
               </a:ext>
             </a:extLst>
           </p:cNvPr>
@@ -10062,11 +10224,30 @@
                 <a:ea typeface="Courier New"/>
                 <a:cs typeface="Courier New"/>
               </a:rPr>
-              <a:t>Our practice format</a:t>
-            </a:r>
-          </a:p>
-          <a:p xmlns:a="http://schemas.openxmlformats.org/drawingml/2006/main">
-            <a:r>
+              <a:t>Inputs: 3 3 3 5 2</a:t>
+            </a:r>
+          </a:p>
+          <a:p xmlns:a="http://schemas.openxmlformats.org/drawingml/2006/main">
+            <a:pPr>
+              <a:buNone/>
+              <a:defRPr sz="1650" b="0">
+                <a:solidFill>
+                  <a:srgbClr val="A7F3D0"/>
+                </a:solidFill>
+                <a:latin typeface="Courier New"/>
+                <a:ea typeface="Courier New"/>
+                <a:cs typeface="Courier New"/>
+              </a:defRPr>
+            </a:pPr>
+            <a:r>
+              <a:rPr sz="1650" b="0">
+                <a:solidFill>
+                  <a:srgbClr val="A7F3D0"/>
+                </a:solidFill>
+                <a:latin typeface="Courier New"/>
+                <a:ea typeface="Courier New"/>
+                <a:cs typeface="Courier New"/>
+              </a:rPr>
               <a:t/>
             </a:r>
           </a:p>
@@ -10091,7 +10272,31 @@
                 <a:ea typeface="Courier New"/>
                 <a:cs typeface="Courier New"/>
               </a:rPr>
-              <a:t>Normal:    (1 + F/8) × 2^(E−3)</a:t>
+              <a:t>E = 4 = 100₂</a:t>
+            </a:r>
+          </a:p>
+          <a:p xmlns:a="http://schemas.openxmlformats.org/drawingml/2006/main">
+            <a:pPr>
+              <a:buNone/>
+              <a:defRPr sz="1650">
+                <a:solidFill>
+                  <a:srgbClr val="A7F3D0"/>
+                </a:solidFill>
+                <a:latin typeface="Courier New"/>
+                <a:ea typeface="Courier New"/>
+                <a:cs typeface="Courier New"/>
+              </a:defRPr>
+            </a:pPr>
+            <a:r>
+              <a:rPr sz="1650">
+                <a:solidFill>
+                  <a:srgbClr val="A7F3D0"/>
+                </a:solidFill>
+                <a:latin typeface="Courier New"/>
+                <a:ea typeface="Courier New"/>
+                <a:cs typeface="Courier New"/>
+              </a:rPr>
+              <a:t>F = 2 = 010₂</a:t>
             </a:r>
           </a:p>
           <a:p xmlns:a="http://schemas.openxmlformats.org/drawingml/2006/main">
@@ -10115,11 +10320,6 @@
                 <a:ea typeface="Courier New"/>
                 <a:cs typeface="Courier New"/>
               </a:rPr>
-              <a:t>Subnormal: F/32  (E = 0)</a:t>
-            </a:r>
-          </a:p>
-          <a:p xmlns:a="http://schemas.openxmlformats.org/drawingml/2006/main">
-            <a:r>
               <a:t/>
             </a:r>
           </a:p>
@@ -10144,11 +10344,30 @@
                 <a:ea typeface="Courier New"/>
                 <a:cs typeface="Courier New"/>
               </a:rPr>
-              <a:t>E = 0, F = 0  →  zero</a:t>
-            </a:r>
-          </a:p>
-          <a:p xmlns:a="http://schemas.openxmlformats.org/drawingml/2006/main">
-            <a:r>
+              <a:t>Output: 4 2</a:t>
+            </a:r>
+          </a:p>
+          <a:p xmlns:a="http://schemas.openxmlformats.org/drawingml/2006/main">
+            <a:pPr>
+              <a:buNone/>
+              <a:defRPr sz="1650" b="0">
+                <a:solidFill>
+                  <a:srgbClr val="A7F3D0"/>
+                </a:solidFill>
+                <a:latin typeface="Courier New"/>
+                <a:ea typeface="Courier New"/>
+                <a:cs typeface="Courier New"/>
+              </a:defRPr>
+            </a:pPr>
+            <a:r>
+              <a:rPr sz="1650" b="0">
+                <a:solidFill>
+                  <a:srgbClr val="A7F3D0"/>
+                </a:solidFill>
+                <a:latin typeface="Courier New"/>
+                <a:ea typeface="Courier New"/>
+                <a:cs typeface="Courier New"/>
+              </a:rPr>
               <a:t/>
             </a:r>
           </a:p>
@@ -10173,7 +10392,7 @@
                 <a:ea typeface="Courier New"/>
                 <a:cs typeface="Courier New"/>
               </a:rPr>
-              <a:t>Decode your bits as a final check.</a:t>
+              <a:t>Check: (1 + 2/8) × 2¹ = 5/2</a:t>
             </a:r>
           </a:p>
         </p:txBody>
@@ -10183,7 +10402,7 @@
           <p:cNvPr id="5" name="">
             <a:extLst xmlns:a="http://schemas.openxmlformats.org/drawingml/2006/main">
               <a:ext uri="{FF2B5EF4-FFF2-40B4-BE49-F238E27FC236}">
-                <a16:creationId xmlns:a16="http://schemas.microsoft.com/office/drawing/2014/main" id="{585A0E73-828D-45A1-9AD7-8EED8C5E7EB1}"/>
+                <a16:creationId xmlns:a16="http://schemas.microsoft.com/office/drawing/2014/main" id="{7A18BC8F-2DC5-4B6B-A4F9-10CDE1183DE6}"/>
               </a:ext>
             </a:extLst>
           </p:cNvPr>
@@ -10231,7 +10450,7 @@
                 <a:ea typeface="Arial"/>
                 <a:cs typeface="Arial"/>
               </a:rPr>
-              <a:t>A correct encoding must reproduce the intended value or its required rounded value.</a:t>
+              <a:t>Move the binary point before taking the stored fraction bits.</a:t>
             </a:r>
           </a:p>
         </p:txBody>
@@ -10241,7 +10460,7 @@
           <p:cNvPr id="6" name="">
             <a:extLst xmlns:a="http://schemas.openxmlformats.org/drawingml/2006/main">
               <a:ext uri="{FF2B5EF4-FFF2-40B4-BE49-F238E27FC236}">
-                <a16:creationId xmlns:a16="http://schemas.microsoft.com/office/drawing/2014/main" id="{E1FBC5BD-1F5D-42FA-AC83-E0BF862F4EDF}"/>
+                <a16:creationId xmlns:a16="http://schemas.microsoft.com/office/drawing/2014/main" id="{94269C50-3A0A-4FBB-A1D2-A33411F72ECA}"/>
               </a:ext>
             </a:extLst>
           </p:cNvPr>
@@ -10289,7 +10508,1093 @@
                 <a:ea typeface="Courier New"/>
                 <a:cs typeface="Courier New"/>
               </a:rPr>
-              <a:t>22 / 22</a:t>
+              <a:t>22 / 24</a:t>
+            </a:r>
+          </a:p>
+        </p:txBody>
+      </p:sp>
+    </p:spTree>
+    <p:extLst>
+      <p:ext uri="{BB962C8B-B14F-4D97-AF65-F5344CB8AC3E}">
+        <p14:creationId xmlns:p14="http://schemas.microsoft.com/office/powerpoint/2010/main" val="1018474765"/>
+      </p:ext>
+    </p:extLst>
+  </p:cSld>
+</p:sld>
+</file>
+
+<file path=ppt/slides/slide23.xml><?xml version="1.0" encoding="utf-8"?>
+<p:sld xmlns:p="http://schemas.openxmlformats.org/presentationml/2006/main">
+  <p:cSld>
+    <p:bg>
+      <p:bgPr>
+        <a:solidFill xmlns:a="http://schemas.openxmlformats.org/drawingml/2006/main">
+          <a:srgbClr val="09090B"/>
+        </a:solidFill>
+      </p:bgPr>
+    </p:bg>
+    <p:spTree>
+      <p:nvGrpSpPr>
+        <p:cNvPr id="1" name=""/>
+        <p:cNvGrpSpPr/>
+        <p:nvPr/>
+      </p:nvGrpSpPr>
+      <p:grpSpPr>
+        <a:xfrm xmlns:a="http://schemas.openxmlformats.org/drawingml/2006/main"/>
+      </p:grpSpPr>
+      <p:sp>
+        <p:nvSpPr>
+          <p:cNvPr id="7" name="">
+            <a:extLst xmlns:a="http://schemas.openxmlformats.org/drawingml/2006/main">
+              <a:ext uri="{FF2B5EF4-FFF2-40B4-BE49-F238E27FC236}">
+                <a16:creationId xmlns:a16="http://schemas.microsoft.com/office/drawing/2014/main" id="{0BCE7827-648B-4B62-AE80-F3CE9BFFD594}"/>
+              </a:ext>
+            </a:extLst>
+          </p:cNvPr>
+          <p:cNvSpPr>
+            <a:spLocks xmlns:a="http://schemas.openxmlformats.org/drawingml/2006/main" noGrp="1"/>
+          </p:cNvSpPr>
+          <p:nvPr/>
+        </p:nvSpPr>
+        <p:spPr>
+          <a:xfrm xmlns:a="http://schemas.openxmlformats.org/drawingml/2006/main">
+            <a:off x="685800" y="361950"/>
+            <a:ext cx="10477500" cy="285750"/>
+          </a:xfrm>
+          <a:prstGeom xmlns:a="http://schemas.openxmlformats.org/drawingml/2006/main" prst="rect">
+            <a:avLst/>
+          </a:prstGeom>
+          <a:noFill xmlns:a="http://schemas.openxmlformats.org/drawingml/2006/main"/>
+          <a:ln xmlns:a="http://schemas.openxmlformats.org/drawingml/2006/main" w="0">
+            <a:noFill/>
+          </a:ln>
+        </p:spPr>
+        <p:txBody>
+          <a:bodyPr xmlns:a="http://schemas.openxmlformats.org/drawingml/2006/main" anchor="t">
+            <a:normAutofit fontScale="100000"/>
+          </a:bodyPr>
+          <a:lstStyle xmlns:a="http://schemas.openxmlformats.org/drawingml/2006/main"/>
+          <a:p xmlns:a="http://schemas.openxmlformats.org/drawingml/2006/main">
+            <a:pPr>
+              <a:buNone/>
+              <a:defRPr sz="1275" b="0">
+                <a:solidFill>
+                  <a:srgbClr val="6EE7B7"/>
+                </a:solidFill>
+                <a:latin typeface="Courier New"/>
+                <a:ea typeface="Courier New"/>
+                <a:cs typeface="Courier New"/>
+              </a:defRPr>
+            </a:pPr>
+            <a:r>
+              <a:rPr sz="1275" b="0">
+                <a:solidFill>
+                  <a:srgbClr val="6EE7B7"/>
+                </a:solidFill>
+                <a:latin typeface="Courier New"/>
+                <a:ea typeface="Courier New"/>
+                <a:cs typeface="Courier New"/>
+              </a:rPr>
+              <a:t>FLOATING POINT · METHOD</a:t>
+            </a:r>
+          </a:p>
+        </p:txBody>
+      </p:sp>
+      <p:sp>
+        <p:nvSpPr>
+          <p:cNvPr id="2" name="">
+            <a:extLst xmlns:a="http://schemas.openxmlformats.org/drawingml/2006/main">
+              <a:ext uri="{FF2B5EF4-FFF2-40B4-BE49-F238E27FC236}">
+                <a16:creationId xmlns:a16="http://schemas.microsoft.com/office/drawing/2014/main" id="{E6B69FE5-5D95-4306-AAF0-9A70AD531613}"/>
+              </a:ext>
+            </a:extLst>
+          </p:cNvPr>
+          <p:cNvSpPr>
+            <a:spLocks xmlns:a="http://schemas.openxmlformats.org/drawingml/2006/main" noGrp="1"/>
+          </p:cNvSpPr>
+          <p:nvPr/>
+        </p:nvSpPr>
+        <p:spPr>
+          <a:xfrm xmlns:a="http://schemas.openxmlformats.org/drawingml/2006/main">
+            <a:off x="685800" y="885825"/>
+            <a:ext cx="10820400" cy="1066800"/>
+          </a:xfrm>
+          <a:prstGeom xmlns:a="http://schemas.openxmlformats.org/drawingml/2006/main" prst="rect">
+            <a:avLst/>
+          </a:prstGeom>
+          <a:noFill xmlns:a="http://schemas.openxmlformats.org/drawingml/2006/main"/>
+          <a:ln xmlns:a="http://schemas.openxmlformats.org/drawingml/2006/main" w="0">
+            <a:noFill/>
+          </a:ln>
+        </p:spPr>
+        <p:txBody>
+          <a:bodyPr xmlns:a="http://schemas.openxmlformats.org/drawingml/2006/main" anchor="t">
+            <a:normAutofit fontScale="100000"/>
+          </a:bodyPr>
+          <a:lstStyle xmlns:a="http://schemas.openxmlformats.org/drawingml/2006/main"/>
+          <a:p xmlns:a="http://schemas.openxmlformats.org/drawingml/2006/main">
+            <a:pPr>
+              <a:buNone/>
+              <a:defRPr sz="3600" b="0">
+                <a:solidFill>
+                  <a:srgbClr val="FAFAFA"/>
+                </a:solidFill>
+                <a:latin typeface="Arial"/>
+                <a:ea typeface="Arial"/>
+                <a:cs typeface="Arial"/>
+              </a:defRPr>
+            </a:pPr>
+            <a:r>
+              <a:rPr sz="3600" b="0">
+                <a:solidFill>
+                  <a:srgbClr val="FAFAFA"/>
+                </a:solidFill>
+                <a:latin typeface="Arial"/>
+                <a:ea typeface="Arial"/>
+                <a:cs typeface="Arial"/>
+              </a:rPr>
+              <a:t>HW3 preview: choose the equation</a:t>
+            </a:r>
+          </a:p>
+        </p:txBody>
+      </p:sp>
+      <p:sp>
+        <p:nvSpPr>
+          <p:cNvPr id="3" name="">
+            <a:extLst xmlns:a="http://schemas.openxmlformats.org/drawingml/2006/main">
+              <a:ext uri="{FF2B5EF4-FFF2-40B4-BE49-F238E27FC236}">
+                <a16:creationId xmlns:a16="http://schemas.microsoft.com/office/drawing/2014/main" id="{887FE9A9-E5DE-4BC1-94AD-59371BF9B78C}"/>
+              </a:ext>
+            </a:extLst>
+          </p:cNvPr>
+          <p:cNvSpPr>
+            <a:spLocks xmlns:a="http://schemas.openxmlformats.org/drawingml/2006/main" noGrp="1"/>
+          </p:cNvSpPr>
+          <p:nvPr/>
+        </p:nvSpPr>
+        <p:spPr>
+          <a:xfrm xmlns:a="http://schemas.openxmlformats.org/drawingml/2006/main">
+            <a:off x="685800" y="2200275"/>
+            <a:ext cx="4857750" cy="3124200"/>
+          </a:xfrm>
+          <a:prstGeom xmlns:a="http://schemas.openxmlformats.org/drawingml/2006/main" prst="rect">
+            <a:avLst/>
+          </a:prstGeom>
+          <a:noFill xmlns:a="http://schemas.openxmlformats.org/drawingml/2006/main"/>
+          <a:ln xmlns:a="http://schemas.openxmlformats.org/drawingml/2006/main" w="0">
+            <a:noFill/>
+          </a:ln>
+        </p:spPr>
+        <p:txBody>
+          <a:bodyPr xmlns:a="http://schemas.openxmlformats.org/drawingml/2006/main" anchor="t">
+            <a:normAutofit fontScale="100000"/>
+          </a:bodyPr>
+          <a:lstStyle xmlns:a="http://schemas.openxmlformats.org/drawingml/2006/main"/>
+          <a:p xmlns:a="http://schemas.openxmlformats.org/drawingml/2006/main">
+            <a:pPr>
+              <a:buNone/>
+              <a:defRPr sz="1950" b="0">
+                <a:solidFill>
+                  <a:srgbClr val="D4D4D8"/>
+                </a:solidFill>
+                <a:latin typeface="Arial"/>
+                <a:ea typeface="Arial"/>
+                <a:cs typeface="Arial"/>
+              </a:defRPr>
+            </a:pPr>
+            <a:r>
+              <a:rPr sz="1950" b="0">
+                <a:solidFill>
+                  <a:srgbClr val="D4D4D8"/>
+                </a:solidFill>
+                <a:latin typeface="Arial"/>
+                <a:ea typeface="Arial"/>
+                <a:cs typeface="Arial"/>
+              </a:rPr>
+              <a:t>Compare a nonzero ratio with the smallest normal, 2^(1−bias). Below that threshold, set E = 0 and use no hidden 1.</a:t>
+            </a:r>
+          </a:p>
+          <a:p xmlns:a="http://schemas.openxmlformats.org/drawingml/2006/main">
+            <a:pPr>
+              <a:buNone/>
+              <a:defRPr sz="1950" b="0">
+                <a:solidFill>
+                  <a:srgbClr val="D4D4D8"/>
+                </a:solidFill>
+                <a:latin typeface="Arial"/>
+                <a:ea typeface="Arial"/>
+                <a:cs typeface="Arial"/>
+              </a:defRPr>
+            </a:pPr>
+            <a:r>
+              <a:rPr sz="1950" b="0">
+                <a:solidFill>
+                  <a:srgbClr val="D4D4D8"/>
+                </a:solidFill>
+                <a:latin typeface="Arial"/>
+                <a:ea typeface="Arial"/>
+                <a:cs typeface="Arial"/>
+              </a:rPr>
+              <a:t/>
+            </a:r>
+          </a:p>
+          <a:p xmlns:a="http://schemas.openxmlformats.org/drawingml/2006/main">
+            <a:pPr>
+              <a:buNone/>
+              <a:defRPr sz="1950" b="0">
+                <a:solidFill>
+                  <a:srgbClr val="D4D4D8"/>
+                </a:solidFill>
+                <a:latin typeface="Arial"/>
+                <a:ea typeface="Arial"/>
+                <a:cs typeface="Arial"/>
+              </a:defRPr>
+            </a:pPr>
+            <a:r>
+              <a:rPr sz="1950" b="0">
+                <a:solidFill>
+                  <a:srgbClr val="D4D4D8"/>
+                </a:solidFill>
+                <a:latin typeface="Arial"/>
+                <a:ea typeface="Arial"/>
+                <a:cs typeface="Arial"/>
+              </a:rPr>
+              <a:t>Otherwise find the true exponent e and store E = e + bias. Solve for F, then decode to check.</a:t>
+            </a:r>
+          </a:p>
+        </p:txBody>
+      </p:sp>
+      <p:sp>
+        <p:nvSpPr>
+          <p:cNvPr id="4" name="">
+            <a:extLst xmlns:a="http://schemas.openxmlformats.org/drawingml/2006/main">
+              <a:ext uri="{FF2B5EF4-FFF2-40B4-BE49-F238E27FC236}">
+                <a16:creationId xmlns:a16="http://schemas.microsoft.com/office/drawing/2014/main" id="{CED75AEC-85E3-4520-B63E-09FCF9AACAE6}"/>
+              </a:ext>
+            </a:extLst>
+          </p:cNvPr>
+          <p:cNvSpPr>
+            <a:spLocks xmlns:a="http://schemas.openxmlformats.org/drawingml/2006/main" noGrp="1"/>
+          </p:cNvSpPr>
+          <p:nvPr/>
+        </p:nvSpPr>
+        <p:spPr>
+          <a:xfrm xmlns:a="http://schemas.openxmlformats.org/drawingml/2006/main">
+            <a:off x="6181725" y="2200275"/>
+            <a:ext cx="5238750" cy="3286125"/>
+          </a:xfrm>
+          <a:prstGeom xmlns:a="http://schemas.openxmlformats.org/drawingml/2006/main" prst="rect">
+            <a:avLst/>
+          </a:prstGeom>
+          <a:noFill xmlns:a="http://schemas.openxmlformats.org/drawingml/2006/main"/>
+          <a:ln xmlns:a="http://schemas.openxmlformats.org/drawingml/2006/main" w="0">
+            <a:noFill/>
+          </a:ln>
+        </p:spPr>
+        <p:txBody>
+          <a:bodyPr xmlns:a="http://schemas.openxmlformats.org/drawingml/2006/main" anchor="t">
+            <a:normAutofit fontScale="100000"/>
+          </a:bodyPr>
+          <a:lstStyle xmlns:a="http://schemas.openxmlformats.org/drawingml/2006/main"/>
+          <a:p xmlns:a="http://schemas.openxmlformats.org/drawingml/2006/main">
+            <a:pPr>
+              <a:buNone/>
+              <a:defRPr sz="1650" b="0">
+                <a:solidFill>
+                  <a:srgbClr val="A7F3D0"/>
+                </a:solidFill>
+                <a:latin typeface="Courier New"/>
+                <a:ea typeface="Courier New"/>
+                <a:cs typeface="Courier New"/>
+              </a:defRPr>
+            </a:pPr>
+            <a:r>
+              <a:rPr sz="1650" b="0">
+                <a:solidFill>
+                  <a:srgbClr val="A7F3D0"/>
+                </a:solidFill>
+                <a:latin typeface="Courier New"/>
+                <a:ea typeface="Courier New"/>
+                <a:cs typeface="Courier New"/>
+              </a:rPr>
+              <a:t>Normal (E &gt; 0):</a:t>
+            </a:r>
+          </a:p>
+          <a:p xmlns:a="http://schemas.openxmlformats.org/drawingml/2006/main">
+            <a:pPr>
+              <a:buNone/>
+              <a:defRPr sz="1650" b="0">
+                <a:solidFill>
+                  <a:srgbClr val="A7F3D0"/>
+                </a:solidFill>
+                <a:latin typeface="Courier New"/>
+                <a:ea typeface="Courier New"/>
+                <a:cs typeface="Courier New"/>
+              </a:defRPr>
+            </a:pPr>
+            <a:r>
+              <a:rPr sz="1650" b="0">
+                <a:solidFill>
+                  <a:srgbClr val="A7F3D0"/>
+                </a:solidFill>
+                <a:latin typeface="Courier New"/>
+                <a:ea typeface="Courier New"/>
+                <a:cs typeface="Courier New"/>
+              </a:rPr>
+              <a:t>value = (1 + F/2^p) × 2^(E−bias)</a:t>
+            </a:r>
+          </a:p>
+          <a:p xmlns:a="http://schemas.openxmlformats.org/drawingml/2006/main">
+            <a:pPr>
+              <a:buNone/>
+              <a:defRPr sz="1650" b="0">
+                <a:solidFill>
+                  <a:srgbClr val="A7F3D0"/>
+                </a:solidFill>
+                <a:latin typeface="Courier New"/>
+                <a:ea typeface="Courier New"/>
+                <a:cs typeface="Courier New"/>
+              </a:defRPr>
+            </a:pPr>
+            <a:r>
+              <a:rPr sz="1650" b="0">
+                <a:solidFill>
+                  <a:srgbClr val="A7F3D0"/>
+                </a:solidFill>
+                <a:latin typeface="Courier New"/>
+                <a:ea typeface="Courier New"/>
+                <a:cs typeface="Courier New"/>
+              </a:rPr>
+              <a:t/>
+            </a:r>
+          </a:p>
+          <a:p xmlns:a="http://schemas.openxmlformats.org/drawingml/2006/main">
+            <a:pPr>
+              <a:buNone/>
+              <a:defRPr sz="1650">
+                <a:solidFill>
+                  <a:srgbClr val="A7F3D0"/>
+                </a:solidFill>
+                <a:latin typeface="Courier New"/>
+                <a:ea typeface="Courier New"/>
+                <a:cs typeface="Courier New"/>
+              </a:defRPr>
+            </a:pPr>
+            <a:r>
+              <a:rPr sz="1650">
+                <a:solidFill>
+                  <a:srgbClr val="A7F3D0"/>
+                </a:solidFill>
+                <a:latin typeface="Courier New"/>
+                <a:ea typeface="Courier New"/>
+                <a:cs typeface="Courier New"/>
+              </a:rPr>
+              <a:t>Subnormal (E = 0):</a:t>
+            </a:r>
+          </a:p>
+          <a:p xmlns:a="http://schemas.openxmlformats.org/drawingml/2006/main">
+            <a:pPr>
+              <a:buNone/>
+              <a:defRPr sz="1650" b="0">
+                <a:solidFill>
+                  <a:srgbClr val="A7F3D0"/>
+                </a:solidFill>
+                <a:latin typeface="Courier New"/>
+                <a:ea typeface="Courier New"/>
+                <a:cs typeface="Courier New"/>
+              </a:defRPr>
+            </a:pPr>
+            <a:r>
+              <a:rPr sz="1650" b="0">
+                <a:solidFill>
+                  <a:srgbClr val="A7F3D0"/>
+                </a:solidFill>
+                <a:latin typeface="Courier New"/>
+                <a:ea typeface="Courier New"/>
+                <a:cs typeface="Courier New"/>
+              </a:rPr>
+              <a:t>value = (F/2^p) × 2^(1−bias)</a:t>
+            </a:r>
+          </a:p>
+          <a:p xmlns:a="http://schemas.openxmlformats.org/drawingml/2006/main">
+            <a:pPr>
+              <a:buNone/>
+              <a:defRPr sz="1650" b="0">
+                <a:solidFill>
+                  <a:srgbClr val="A7F3D0"/>
+                </a:solidFill>
+                <a:latin typeface="Courier New"/>
+                <a:ea typeface="Courier New"/>
+                <a:cs typeface="Courier New"/>
+              </a:defRPr>
+            </a:pPr>
+            <a:r>
+              <a:rPr sz="1650" b="0">
+                <a:solidFill>
+                  <a:srgbClr val="A7F3D0"/>
+                </a:solidFill>
+                <a:latin typeface="Courier New"/>
+                <a:ea typeface="Courier New"/>
+                <a:cs typeface="Courier New"/>
+              </a:rPr>
+              <a:t/>
+            </a:r>
+          </a:p>
+          <a:p xmlns:a="http://schemas.openxmlformats.org/drawingml/2006/main">
+            <a:pPr>
+              <a:buNone/>
+              <a:defRPr sz="1650" b="0">
+                <a:solidFill>
+                  <a:srgbClr val="A7F3D0"/>
+                </a:solidFill>
+                <a:latin typeface="Courier New"/>
+                <a:ea typeface="Courier New"/>
+                <a:cs typeface="Courier New"/>
+              </a:defRPr>
+            </a:pPr>
+            <a:r>
+              <a:rPr sz="1650" b="0">
+                <a:solidFill>
+                  <a:srgbClr val="A7F3D0"/>
+                </a:solidFill>
+                <a:latin typeface="Courier New"/>
+                <a:ea typeface="Courier New"/>
+                <a:cs typeface="Courier New"/>
+              </a:rPr>
+              <a:t>If numerator = 0: E = 0, F = 0</a:t>
+            </a:r>
+          </a:p>
+        </p:txBody>
+      </p:sp>
+      <p:sp>
+        <p:nvSpPr>
+          <p:cNvPr id="5" name="">
+            <a:extLst xmlns:a="http://schemas.openxmlformats.org/drawingml/2006/main">
+              <a:ext uri="{FF2B5EF4-FFF2-40B4-BE49-F238E27FC236}">
+                <a16:creationId xmlns:a16="http://schemas.microsoft.com/office/drawing/2014/main" id="{7A18BC8F-2DC5-4B6B-A4F9-10CDE1183DE6}"/>
+              </a:ext>
+            </a:extLst>
+          </p:cNvPr>
+          <p:cNvSpPr>
+            <a:spLocks xmlns:a="http://schemas.openxmlformats.org/drawingml/2006/main" noGrp="1"/>
+          </p:cNvSpPr>
+          <p:nvPr/>
+        </p:nvSpPr>
+        <p:spPr>
+          <a:xfrm xmlns:a="http://schemas.openxmlformats.org/drawingml/2006/main">
+            <a:off x="685800" y="5743575"/>
+            <a:ext cx="10191750" cy="428625"/>
+          </a:xfrm>
+          <a:prstGeom xmlns:a="http://schemas.openxmlformats.org/drawingml/2006/main" prst="rect">
+            <a:avLst/>
+          </a:prstGeom>
+          <a:noFill xmlns:a="http://schemas.openxmlformats.org/drawingml/2006/main"/>
+          <a:ln xmlns:a="http://schemas.openxmlformats.org/drawingml/2006/main" w="0">
+            <a:noFill/>
+          </a:ln>
+        </p:spPr>
+        <p:txBody>
+          <a:bodyPr xmlns:a="http://schemas.openxmlformats.org/drawingml/2006/main" anchor="t">
+            <a:normAutofit fontScale="100000"/>
+          </a:bodyPr>
+          <a:lstStyle xmlns:a="http://schemas.openxmlformats.org/drawingml/2006/main"/>
+          <a:p xmlns:a="http://schemas.openxmlformats.org/drawingml/2006/main">
+            <a:pPr>
+              <a:buNone/>
+              <a:defRPr sz="1350" b="0">
+                <a:solidFill>
+                  <a:srgbClr val="A1A1AA"/>
+                </a:solidFill>
+                <a:latin typeface="Arial"/>
+                <a:ea typeface="Arial"/>
+                <a:cs typeface="Arial"/>
+              </a:defRPr>
+            </a:pPr>
+            <a:r>
+              <a:rPr sz="1350" b="0">
+                <a:solidFill>
+                  <a:srgbClr val="A1A1AA"/>
+                </a:solidFill>
+                <a:latin typeface="Arial"/>
+                <a:ea typeface="Arial"/>
+                <a:cs typeface="Arial"/>
+              </a:rPr>
+              <a:t>Use the supplied p and bias, not the values from our practice format.</a:t>
+            </a:r>
+          </a:p>
+        </p:txBody>
+      </p:sp>
+      <p:sp>
+        <p:nvSpPr>
+          <p:cNvPr id="6" name="">
+            <a:extLst xmlns:a="http://schemas.openxmlformats.org/drawingml/2006/main">
+              <a:ext uri="{FF2B5EF4-FFF2-40B4-BE49-F238E27FC236}">
+                <a16:creationId xmlns:a16="http://schemas.microsoft.com/office/drawing/2014/main" id="{94269C50-3A0A-4FBB-A1D2-A33411F72ECA}"/>
+              </a:ext>
+            </a:extLst>
+          </p:cNvPr>
+          <p:cNvSpPr>
+            <a:spLocks xmlns:a="http://schemas.openxmlformats.org/drawingml/2006/main" noGrp="1"/>
+          </p:cNvSpPr>
+          <p:nvPr/>
+        </p:nvSpPr>
+        <p:spPr>
+          <a:xfrm xmlns:a="http://schemas.openxmlformats.org/drawingml/2006/main">
+            <a:off x="10477500" y="6210300"/>
+            <a:ext cx="1000125" cy="219075"/>
+          </a:xfrm>
+          <a:prstGeom xmlns:a="http://schemas.openxmlformats.org/drawingml/2006/main" prst="rect">
+            <a:avLst/>
+          </a:prstGeom>
+          <a:noFill xmlns:a="http://schemas.openxmlformats.org/drawingml/2006/main"/>
+          <a:ln xmlns:a="http://schemas.openxmlformats.org/drawingml/2006/main" w="0">
+            <a:noFill/>
+          </a:ln>
+        </p:spPr>
+        <p:txBody>
+          <a:bodyPr xmlns:a="http://schemas.openxmlformats.org/drawingml/2006/main" anchor="t">
+            <a:normAutofit fontScale="79762"/>
+          </a:bodyPr>
+          <a:lstStyle xmlns:a="http://schemas.openxmlformats.org/drawingml/2006/main"/>
+          <a:p xmlns:a="http://schemas.openxmlformats.org/drawingml/2006/main">
+            <a:pPr>
+              <a:buNone/>
+              <a:defRPr sz="1050" b="0">
+                <a:solidFill>
+                  <a:srgbClr val="71717A"/>
+                </a:solidFill>
+                <a:latin typeface="Courier New"/>
+                <a:ea typeface="Courier New"/>
+                <a:cs typeface="Courier New"/>
+              </a:defRPr>
+            </a:pPr>
+            <a:r>
+              <a:rPr sz="1050" b="0">
+                <a:solidFill>
+                  <a:srgbClr val="71717A"/>
+                </a:solidFill>
+                <a:latin typeface="Courier New"/>
+                <a:ea typeface="Courier New"/>
+                <a:cs typeface="Courier New"/>
+              </a:rPr>
+              <a:t>23 / 24</a:t>
+            </a:r>
+          </a:p>
+        </p:txBody>
+      </p:sp>
+    </p:spTree>
+    <p:extLst>
+      <p:ext uri="{BB962C8B-B14F-4D97-AF65-F5344CB8AC3E}">
+        <p14:creationId xmlns:p14="http://schemas.microsoft.com/office/powerpoint/2010/main" val="1018474765"/>
+      </p:ext>
+    </p:extLst>
+  </p:cSld>
+</p:sld>
+</file>
+
+<file path=ppt/slides/slide24.xml><?xml version="1.0" encoding="utf-8"?>
+<p:sld xmlns:p="http://schemas.openxmlformats.org/presentationml/2006/main">
+  <p:cSld>
+    <p:bg>
+      <p:bgPr>
+        <a:solidFill xmlns:a="http://schemas.openxmlformats.org/drawingml/2006/main">
+          <a:srgbClr val="09090B"/>
+        </a:solidFill>
+      </p:bgPr>
+    </p:bg>
+    <p:spTree>
+      <p:nvGrpSpPr>
+        <p:cNvPr id="1" name=""/>
+        <p:cNvGrpSpPr/>
+        <p:nvPr/>
+      </p:nvGrpSpPr>
+      <p:grpSpPr>
+        <a:xfrm xmlns:a="http://schemas.openxmlformats.org/drawingml/2006/main"/>
+      </p:grpSpPr>
+      <p:sp>
+        <p:nvSpPr>
+          <p:cNvPr id="7" name="">
+            <a:extLst xmlns:a="http://schemas.openxmlformats.org/drawingml/2006/main">
+              <a:ext uri="{FF2B5EF4-FFF2-40B4-BE49-F238E27FC236}">
+                <a16:creationId xmlns:a16="http://schemas.microsoft.com/office/drawing/2014/main" id="{4989B079-C3E8-43BB-8638-96121018769A}"/>
+              </a:ext>
+            </a:extLst>
+          </p:cNvPr>
+          <p:cNvSpPr>
+            <a:spLocks xmlns:a="http://schemas.openxmlformats.org/drawingml/2006/main" noGrp="1"/>
+          </p:cNvSpPr>
+          <p:nvPr/>
+        </p:nvSpPr>
+        <p:spPr>
+          <a:xfrm xmlns:a="http://schemas.openxmlformats.org/drawingml/2006/main">
+            <a:off x="685800" y="361950"/>
+            <a:ext cx="10477500" cy="285750"/>
+          </a:xfrm>
+          <a:prstGeom xmlns:a="http://schemas.openxmlformats.org/drawingml/2006/main" prst="rect">
+            <a:avLst/>
+          </a:prstGeom>
+          <a:noFill xmlns:a="http://schemas.openxmlformats.org/drawingml/2006/main"/>
+          <a:ln xmlns:a="http://schemas.openxmlformats.org/drawingml/2006/main" w="0">
+            <a:noFill/>
+          </a:ln>
+        </p:spPr>
+        <p:txBody>
+          <a:bodyPr xmlns:a="http://schemas.openxmlformats.org/drawingml/2006/main" anchor="t">
+            <a:normAutofit fontScale="100000"/>
+          </a:bodyPr>
+          <a:lstStyle xmlns:a="http://schemas.openxmlformats.org/drawingml/2006/main"/>
+          <a:p xmlns:a="http://schemas.openxmlformats.org/drawingml/2006/main">
+            <a:pPr>
+              <a:buNone/>
+              <a:defRPr sz="1275" b="0">
+                <a:solidFill>
+                  <a:srgbClr val="6EE7B7"/>
+                </a:solidFill>
+                <a:latin typeface="Courier New"/>
+                <a:ea typeface="Courier New"/>
+                <a:cs typeface="Courier New"/>
+              </a:defRPr>
+            </a:pPr>
+            <a:r>
+              <a:rPr sz="1275" b="0">
+                <a:solidFill>
+                  <a:srgbClr val="6EE7B7"/>
+                </a:solidFill>
+                <a:latin typeface="Courier New"/>
+                <a:ea typeface="Courier New"/>
+                <a:cs typeface="Courier New"/>
+              </a:rPr>
+              <a:t>FLOATING POINT · RECAP</a:t>
+            </a:r>
+          </a:p>
+        </p:txBody>
+      </p:sp>
+      <p:sp>
+        <p:nvSpPr>
+          <p:cNvPr id="2" name="">
+            <a:extLst xmlns:a="http://schemas.openxmlformats.org/drawingml/2006/main">
+              <a:ext uri="{FF2B5EF4-FFF2-40B4-BE49-F238E27FC236}">
+                <a16:creationId xmlns:a16="http://schemas.microsoft.com/office/drawing/2014/main" id="{95D3113E-85F1-4E22-A62E-265E94FE3617}"/>
+              </a:ext>
+            </a:extLst>
+          </p:cNvPr>
+          <p:cNvSpPr>
+            <a:spLocks xmlns:a="http://schemas.openxmlformats.org/drawingml/2006/main" noGrp="1"/>
+          </p:cNvSpPr>
+          <p:nvPr/>
+        </p:nvSpPr>
+        <p:spPr>
+          <a:xfrm xmlns:a="http://schemas.openxmlformats.org/drawingml/2006/main">
+            <a:off x="685800" y="885825"/>
+            <a:ext cx="10820400" cy="1066800"/>
+          </a:xfrm>
+          <a:prstGeom xmlns:a="http://schemas.openxmlformats.org/drawingml/2006/main" prst="rect">
+            <a:avLst/>
+          </a:prstGeom>
+          <a:noFill xmlns:a="http://schemas.openxmlformats.org/drawingml/2006/main"/>
+          <a:ln xmlns:a="http://schemas.openxmlformats.org/drawingml/2006/main" w="0">
+            <a:noFill/>
+          </a:ln>
+        </p:spPr>
+        <p:txBody>
+          <a:bodyPr xmlns:a="http://schemas.openxmlformats.org/drawingml/2006/main" anchor="t">
+            <a:normAutofit fontScale="100000"/>
+          </a:bodyPr>
+          <a:lstStyle xmlns:a="http://schemas.openxmlformats.org/drawingml/2006/main"/>
+          <a:p xmlns:a="http://schemas.openxmlformats.org/drawingml/2006/main">
+            <a:pPr>
+              <a:buNone/>
+              <a:defRPr sz="3600" b="0">
+                <a:solidFill>
+                  <a:srgbClr val="FAFAFA"/>
+                </a:solidFill>
+                <a:latin typeface="Arial"/>
+                <a:ea typeface="Arial"/>
+                <a:cs typeface="Arial"/>
+              </a:defRPr>
+            </a:pPr>
+            <a:r>
+              <a:rPr sz="3600" b="0">
+                <a:solidFill>
+                  <a:srgbClr val="FAFAFA"/>
+                </a:solidFill>
+                <a:latin typeface="Arial"/>
+                <a:ea typeface="Arial"/>
+                <a:cs typeface="Arial"/>
+              </a:rPr>
+              <a:t>How to check an encoding</a:t>
+            </a:r>
+          </a:p>
+        </p:txBody>
+      </p:sp>
+      <p:sp>
+        <p:nvSpPr>
+          <p:cNvPr id="3" name="">
+            <a:extLst xmlns:a="http://schemas.openxmlformats.org/drawingml/2006/main">
+              <a:ext uri="{FF2B5EF4-FFF2-40B4-BE49-F238E27FC236}">
+                <a16:creationId xmlns:a16="http://schemas.microsoft.com/office/drawing/2014/main" id="{8EC5E33C-BA7C-4ADE-9FC3-9ABD9F3C6FD4}"/>
+              </a:ext>
+            </a:extLst>
+          </p:cNvPr>
+          <p:cNvSpPr>
+            <a:spLocks xmlns:a="http://schemas.openxmlformats.org/drawingml/2006/main" noGrp="1"/>
+          </p:cNvSpPr>
+          <p:nvPr/>
+        </p:nvSpPr>
+        <p:spPr>
+          <a:xfrm xmlns:a="http://schemas.openxmlformats.org/drawingml/2006/main">
+            <a:off x="685800" y="2200275"/>
+            <a:ext cx="4857750" cy="3124200"/>
+          </a:xfrm>
+          <a:prstGeom xmlns:a="http://schemas.openxmlformats.org/drawingml/2006/main" prst="rect">
+            <a:avLst/>
+          </a:prstGeom>
+          <a:noFill xmlns:a="http://schemas.openxmlformats.org/drawingml/2006/main"/>
+          <a:ln xmlns:a="http://schemas.openxmlformats.org/drawingml/2006/main" w="0">
+            <a:noFill/>
+          </a:ln>
+        </p:spPr>
+        <p:txBody>
+          <a:bodyPr xmlns:a="http://schemas.openxmlformats.org/drawingml/2006/main" anchor="t">
+            <a:normAutofit fontScale="100000"/>
+          </a:bodyPr>
+          <a:lstStyle xmlns:a="http://schemas.openxmlformats.org/drawingml/2006/main"/>
+          <a:p xmlns:a="http://schemas.openxmlformats.org/drawingml/2006/main">
+            <a:pPr>
+              <a:buNone/>
+              <a:defRPr sz="1950" b="0">
+                <a:solidFill>
+                  <a:srgbClr val="D4D4D8"/>
+                </a:solidFill>
+                <a:latin typeface="Arial"/>
+                <a:ea typeface="Arial"/>
+                <a:cs typeface="Arial"/>
+              </a:defRPr>
+            </a:pPr>
+            <a:r>
+              <a:rPr sz="1950" b="0">
+                <a:solidFill>
+                  <a:srgbClr val="D4D4D8"/>
+                </a:solidFill>
+                <a:latin typeface="Arial"/>
+                <a:ea typeface="Arial"/>
+                <a:cs typeface="Arial"/>
+              </a:rPr>
+              <a:t>In our practice format, E = 0 means count F steps of 1/32. Otherwise decode e = E − 3 and use the implied leading 1.</a:t>
+            </a:r>
+          </a:p>
+          <a:p xmlns:a="http://schemas.openxmlformats.org/drawingml/2006/main">
+            <a:r>
+              <a:t/>
+            </a:r>
+          </a:p>
+          <a:p xmlns:a="http://schemas.openxmlformats.org/drawingml/2006/main">
+            <a:pPr>
+              <a:buNone/>
+              <a:defRPr sz="1950" b="0">
+                <a:solidFill>
+                  <a:srgbClr val="D4D4D8"/>
+                </a:solidFill>
+                <a:latin typeface="Arial"/>
+                <a:ea typeface="Arial"/>
+                <a:cs typeface="Arial"/>
+              </a:defRPr>
+            </a:pPr>
+            <a:r>
+              <a:rPr sz="1950" b="0">
+                <a:solidFill>
+                  <a:srgbClr val="D4D4D8"/>
+                </a:solidFill>
+                <a:latin typeface="Arial"/>
+                <a:ea typeface="Arial"/>
+                <a:cs typeface="Arial"/>
+              </a:rPr>
+              <a:t>For an inexact value, follow the problem’s rounding rule.</a:t>
+            </a:r>
+          </a:p>
+        </p:txBody>
+      </p:sp>
+      <p:sp>
+        <p:nvSpPr>
+          <p:cNvPr id="4" name="">
+            <a:extLst xmlns:a="http://schemas.openxmlformats.org/drawingml/2006/main">
+              <a:ext uri="{FF2B5EF4-FFF2-40B4-BE49-F238E27FC236}">
+                <a16:creationId xmlns:a16="http://schemas.microsoft.com/office/drawing/2014/main" id="{EA939046-DA6B-448C-A179-5B13743C72F3}"/>
+              </a:ext>
+            </a:extLst>
+          </p:cNvPr>
+          <p:cNvSpPr>
+            <a:spLocks xmlns:a="http://schemas.openxmlformats.org/drawingml/2006/main" noGrp="1"/>
+          </p:cNvSpPr>
+          <p:nvPr/>
+        </p:nvSpPr>
+        <p:spPr>
+          <a:xfrm xmlns:a="http://schemas.openxmlformats.org/drawingml/2006/main">
+            <a:off x="6181725" y="2200275"/>
+            <a:ext cx="5238750" cy="3286125"/>
+          </a:xfrm>
+          <a:prstGeom xmlns:a="http://schemas.openxmlformats.org/drawingml/2006/main" prst="rect">
+            <a:avLst/>
+          </a:prstGeom>
+          <a:noFill xmlns:a="http://schemas.openxmlformats.org/drawingml/2006/main"/>
+          <a:ln xmlns:a="http://schemas.openxmlformats.org/drawingml/2006/main" w="0">
+            <a:noFill/>
+          </a:ln>
+        </p:spPr>
+        <p:txBody>
+          <a:bodyPr xmlns:a="http://schemas.openxmlformats.org/drawingml/2006/main" anchor="t">
+            <a:normAutofit fontScale="100000"/>
+          </a:bodyPr>
+          <a:lstStyle xmlns:a="http://schemas.openxmlformats.org/drawingml/2006/main"/>
+          <a:p xmlns:a="http://schemas.openxmlformats.org/drawingml/2006/main">
+            <a:pPr>
+              <a:buNone/>
+              <a:defRPr sz="1650" b="0">
+                <a:solidFill>
+                  <a:srgbClr val="A7F3D0"/>
+                </a:solidFill>
+                <a:latin typeface="Courier New"/>
+                <a:ea typeface="Courier New"/>
+                <a:cs typeface="Courier New"/>
+              </a:defRPr>
+            </a:pPr>
+            <a:r>
+              <a:rPr sz="1650" b="0">
+                <a:solidFill>
+                  <a:srgbClr val="A7F3D0"/>
+                </a:solidFill>
+                <a:latin typeface="Courier New"/>
+                <a:ea typeface="Courier New"/>
+                <a:cs typeface="Courier New"/>
+              </a:rPr>
+              <a:t>Our practice format</a:t>
+            </a:r>
+          </a:p>
+          <a:p xmlns:a="http://schemas.openxmlformats.org/drawingml/2006/main">
+            <a:r>
+              <a:t/>
+            </a:r>
+          </a:p>
+          <a:p xmlns:a="http://schemas.openxmlformats.org/drawingml/2006/main">
+            <a:pPr>
+              <a:buNone/>
+              <a:defRPr sz="1650" b="0">
+                <a:solidFill>
+                  <a:srgbClr val="A7F3D0"/>
+                </a:solidFill>
+                <a:latin typeface="Courier New"/>
+                <a:ea typeface="Courier New"/>
+                <a:cs typeface="Courier New"/>
+              </a:defRPr>
+            </a:pPr>
+            <a:r>
+              <a:rPr sz="1650" b="0">
+                <a:solidFill>
+                  <a:srgbClr val="A7F3D0"/>
+                </a:solidFill>
+                <a:latin typeface="Courier New"/>
+                <a:ea typeface="Courier New"/>
+                <a:cs typeface="Courier New"/>
+              </a:rPr>
+              <a:t>Normal:    (1 + F/8) × 2^(E−3)</a:t>
+            </a:r>
+          </a:p>
+          <a:p xmlns:a="http://schemas.openxmlformats.org/drawingml/2006/main">
+            <a:pPr>
+              <a:buNone/>
+              <a:defRPr sz="1650" b="0">
+                <a:solidFill>
+                  <a:srgbClr val="A7F3D0"/>
+                </a:solidFill>
+                <a:latin typeface="Courier New"/>
+                <a:ea typeface="Courier New"/>
+                <a:cs typeface="Courier New"/>
+              </a:defRPr>
+            </a:pPr>
+            <a:r>
+              <a:rPr sz="1650" b="0">
+                <a:solidFill>
+                  <a:srgbClr val="A7F3D0"/>
+                </a:solidFill>
+                <a:latin typeface="Courier New"/>
+                <a:ea typeface="Courier New"/>
+                <a:cs typeface="Courier New"/>
+              </a:rPr>
+              <a:t>Subnormal: F/32  (E = 0)</a:t>
+            </a:r>
+          </a:p>
+          <a:p xmlns:a="http://schemas.openxmlformats.org/drawingml/2006/main">
+            <a:r>
+              <a:t/>
+            </a:r>
+          </a:p>
+          <a:p xmlns:a="http://schemas.openxmlformats.org/drawingml/2006/main">
+            <a:pPr>
+              <a:buNone/>
+              <a:defRPr sz="1650" b="0">
+                <a:solidFill>
+                  <a:srgbClr val="A7F3D0"/>
+                </a:solidFill>
+                <a:latin typeface="Courier New"/>
+                <a:ea typeface="Courier New"/>
+                <a:cs typeface="Courier New"/>
+              </a:defRPr>
+            </a:pPr>
+            <a:r>
+              <a:rPr sz="1650" b="0">
+                <a:solidFill>
+                  <a:srgbClr val="A7F3D0"/>
+                </a:solidFill>
+                <a:latin typeface="Courier New"/>
+                <a:ea typeface="Courier New"/>
+                <a:cs typeface="Courier New"/>
+              </a:rPr>
+              <a:t>E = 0, F = 0  →  zero</a:t>
+            </a:r>
+          </a:p>
+          <a:p xmlns:a="http://schemas.openxmlformats.org/drawingml/2006/main">
+            <a:r>
+              <a:t/>
+            </a:r>
+          </a:p>
+          <a:p xmlns:a="http://schemas.openxmlformats.org/drawingml/2006/main">
+            <a:pPr>
+              <a:buNone/>
+              <a:defRPr sz="1650" b="0">
+                <a:solidFill>
+                  <a:srgbClr val="A7F3D0"/>
+                </a:solidFill>
+                <a:latin typeface="Courier New"/>
+                <a:ea typeface="Courier New"/>
+                <a:cs typeface="Courier New"/>
+              </a:defRPr>
+            </a:pPr>
+            <a:r>
+              <a:rPr sz="1650" b="0">
+                <a:solidFill>
+                  <a:srgbClr val="A7F3D0"/>
+                </a:solidFill>
+                <a:latin typeface="Courier New"/>
+                <a:ea typeface="Courier New"/>
+                <a:cs typeface="Courier New"/>
+              </a:rPr>
+              <a:t>Decode your bits as a final check.</a:t>
+            </a:r>
+          </a:p>
+        </p:txBody>
+      </p:sp>
+      <p:sp>
+        <p:nvSpPr>
+          <p:cNvPr id="5" name="">
+            <a:extLst xmlns:a="http://schemas.openxmlformats.org/drawingml/2006/main">
+              <a:ext uri="{FF2B5EF4-FFF2-40B4-BE49-F238E27FC236}">
+                <a16:creationId xmlns:a16="http://schemas.microsoft.com/office/drawing/2014/main" id="{585A0E73-828D-45A1-9AD7-8EED8C5E7EB1}"/>
+              </a:ext>
+            </a:extLst>
+          </p:cNvPr>
+          <p:cNvSpPr>
+            <a:spLocks xmlns:a="http://schemas.openxmlformats.org/drawingml/2006/main" noGrp="1"/>
+          </p:cNvSpPr>
+          <p:nvPr/>
+        </p:nvSpPr>
+        <p:spPr>
+          <a:xfrm xmlns:a="http://schemas.openxmlformats.org/drawingml/2006/main">
+            <a:off x="685800" y="5743575"/>
+            <a:ext cx="10191750" cy="428625"/>
+          </a:xfrm>
+          <a:prstGeom xmlns:a="http://schemas.openxmlformats.org/drawingml/2006/main" prst="rect">
+            <a:avLst/>
+          </a:prstGeom>
+          <a:noFill xmlns:a="http://schemas.openxmlformats.org/drawingml/2006/main"/>
+          <a:ln xmlns:a="http://schemas.openxmlformats.org/drawingml/2006/main" w="0">
+            <a:noFill/>
+          </a:ln>
+        </p:spPr>
+        <p:txBody>
+          <a:bodyPr xmlns:a="http://schemas.openxmlformats.org/drawingml/2006/main" anchor="t">
+            <a:normAutofit fontScale="100000"/>
+          </a:bodyPr>
+          <a:lstStyle xmlns:a="http://schemas.openxmlformats.org/drawingml/2006/main"/>
+          <a:p xmlns:a="http://schemas.openxmlformats.org/drawingml/2006/main">
+            <a:pPr>
+              <a:buNone/>
+              <a:defRPr sz="1350" b="0">
+                <a:solidFill>
+                  <a:srgbClr val="A1A1AA"/>
+                </a:solidFill>
+                <a:latin typeface="Arial"/>
+                <a:ea typeface="Arial"/>
+                <a:cs typeface="Arial"/>
+              </a:defRPr>
+            </a:pPr>
+            <a:r>
+              <a:rPr sz="1350" b="0">
+                <a:solidFill>
+                  <a:srgbClr val="A1A1AA"/>
+                </a:solidFill>
+                <a:latin typeface="Arial"/>
+                <a:ea typeface="Arial"/>
+                <a:cs typeface="Arial"/>
+              </a:rPr>
+              <a:t>A correct encoding must reproduce the intended value or its required rounded value.</a:t>
+            </a:r>
+          </a:p>
+        </p:txBody>
+      </p:sp>
+      <p:sp>
+        <p:nvSpPr>
+          <p:cNvPr id="6" name="">
+            <a:extLst xmlns:a="http://schemas.openxmlformats.org/drawingml/2006/main">
+              <a:ext uri="{FF2B5EF4-FFF2-40B4-BE49-F238E27FC236}">
+                <a16:creationId xmlns:a16="http://schemas.microsoft.com/office/drawing/2014/main" id="{E1FBC5BD-1F5D-42FA-AC83-E0BF862F4EDF}"/>
+              </a:ext>
+            </a:extLst>
+          </p:cNvPr>
+          <p:cNvSpPr>
+            <a:spLocks xmlns:a="http://schemas.openxmlformats.org/drawingml/2006/main" noGrp="1"/>
+          </p:cNvSpPr>
+          <p:nvPr/>
+        </p:nvSpPr>
+        <p:spPr>
+          <a:xfrm xmlns:a="http://schemas.openxmlformats.org/drawingml/2006/main">
+            <a:off x="10477500" y="6210300"/>
+            <a:ext cx="1000125" cy="219075"/>
+          </a:xfrm>
+          <a:prstGeom xmlns:a="http://schemas.openxmlformats.org/drawingml/2006/main" prst="rect">
+            <a:avLst/>
+          </a:prstGeom>
+          <a:noFill xmlns:a="http://schemas.openxmlformats.org/drawingml/2006/main"/>
+          <a:ln xmlns:a="http://schemas.openxmlformats.org/drawingml/2006/main" w="0">
+            <a:noFill/>
+          </a:ln>
+        </p:spPr>
+        <p:txBody>
+          <a:bodyPr xmlns:a="http://schemas.openxmlformats.org/drawingml/2006/main" anchor="t">
+            <a:normAutofit fontScale="79762"/>
+          </a:bodyPr>
+          <a:lstStyle xmlns:a="http://schemas.openxmlformats.org/drawingml/2006/main"/>
+          <a:p xmlns:a="http://schemas.openxmlformats.org/drawingml/2006/main">
+            <a:pPr>
+              <a:buNone/>
+              <a:defRPr sz="1050" b="0">
+                <a:solidFill>
+                  <a:srgbClr val="71717A"/>
+                </a:solidFill>
+                <a:latin typeface="Courier New"/>
+                <a:ea typeface="Courier New"/>
+                <a:cs typeface="Courier New"/>
+              </a:defRPr>
+            </a:pPr>
+            <a:r>
+              <a:rPr sz="1050" b="0">
+                <a:solidFill>
+                  <a:srgbClr val="71717A"/>
+                </a:solidFill>
+                <a:latin typeface="Courier New"/>
+                <a:ea typeface="Courier New"/>
+                <a:cs typeface="Courier New"/>
+              </a:rPr>
+              <a:t>24 / 24</a:t>
             </a:r>
           </a:p>
         </p:txBody>
@@ -10801,7 +12106,7 @@
                 <a:ea typeface="Courier New"/>
                 <a:cs typeface="Courier New"/>
               </a:rPr>
-              <a:t>03 / 22</a:t>
+              <a:t>03 / 24</a:t>
             </a:r>
           </a:p>
         </p:txBody>
@@ -11284,7 +12589,7 @@
                 <a:ea typeface="Courier New"/>
                 <a:cs typeface="Courier New"/>
               </a:rPr>
-              <a:t>04 / 22</a:t>
+              <a:t>04 / 24</a:t>
             </a:r>
           </a:p>
         </p:txBody>
@@ -11786,7 +13091,7 @@
                 <a:ea typeface="Courier New"/>
                 <a:cs typeface="Courier New"/>
               </a:rPr>
-              <a:t>05 / 22</a:t>
+              <a:t>05 / 24</a:t>
             </a:r>
           </a:p>
         </p:txBody>
@@ -12298,7 +13603,7 @@
                 <a:ea typeface="Courier New"/>
                 <a:cs typeface="Courier New"/>
               </a:rPr>
-              <a:t>06 / 22</a:t>
+              <a:t>06 / 24</a:t>
             </a:r>
           </a:p>
         </p:txBody>
@@ -12786,7 +14091,7 @@
                 <a:ea typeface="Courier New"/>
                 <a:cs typeface="Courier New"/>
               </a:rPr>
-              <a:t>07 / 22</a:t>
+              <a:t>07 / 24</a:t>
             </a:r>
           </a:p>
         </p:txBody>
@@ -12825,7 +14130,7 @@
           <p:cNvPr id="7" name="">
             <a:extLst xmlns:a="http://schemas.openxmlformats.org/drawingml/2006/main">
               <a:ext uri="{FF2B5EF4-FFF2-40B4-BE49-F238E27FC236}">
-                <a16:creationId xmlns:a16="http://schemas.microsoft.com/office/drawing/2014/main" id="{52BEAABF-BD4F-40AF-A282-4DA602FE61EE}"/>
+                <a16:creationId xmlns:a16="http://schemas.microsoft.com/office/drawing/2014/main" id="{514F9435-A104-4D30-A188-4EE2456CA2BB}"/>
               </a:ext>
             </a:extLst>
           </p:cNvPr>
@@ -12873,7 +14178,7 @@
                 <a:ea typeface="Courier New"/>
                 <a:cs typeface="Courier New"/>
               </a:rPr>
-              <a:t>FLOATING POINT · WHY SUBNORMALS</a:t>
+              <a:t>FLOATING POINT · QUIZ REVIEW</a:t>
             </a:r>
           </a:p>
         </p:txBody>
@@ -12883,7 +14188,7 @@
           <p:cNvPr id="2" name="">
             <a:extLst xmlns:a="http://schemas.openxmlformats.org/drawingml/2006/main">
               <a:ext uri="{FF2B5EF4-FFF2-40B4-BE49-F238E27FC236}">
-                <a16:creationId xmlns:a16="http://schemas.microsoft.com/office/drawing/2014/main" id="{55B309F2-033B-47F8-941D-460A77FAB0C8}"/>
+                <a16:creationId xmlns:a16="http://schemas.microsoft.com/office/drawing/2014/main" id="{E3CC3344-C3E4-4449-AF40-33DADFB16B1E}"/>
               </a:ext>
             </a:extLst>
           </p:cNvPr>
@@ -12931,7 +14236,7 @@
                 <a:ea typeface="Arial"/>
                 <a:cs typeface="Arial"/>
               </a:rPr>
-              <a:t>The smallest normal is 1/4</a:t>
+              <a:t>Quiz review: −1.0 in 8 bits</a:t>
             </a:r>
           </a:p>
         </p:txBody>
@@ -12941,7 +14246,7 @@
           <p:cNvPr id="3" name="">
             <a:extLst xmlns:a="http://schemas.openxmlformats.org/drawingml/2006/main">
               <a:ext uri="{FF2B5EF4-FFF2-40B4-BE49-F238E27FC236}">
-                <a16:creationId xmlns:a16="http://schemas.microsoft.com/office/drawing/2014/main" id="{2413D46C-F548-4E0D-8AC8-B55CC5C096EA}"/>
+                <a16:creationId xmlns:a16="http://schemas.microsoft.com/office/drawing/2014/main" id="{798D5084-9296-4E15-A9DC-A45F46A15641}"/>
               </a:ext>
             </a:extLst>
           </p:cNvPr>
@@ -12989,7 +14294,7 @@
                 <a:ea typeface="Arial"/>
                 <a:cs typeface="Arial"/>
               </a:rPr>
-              <a:t>The smallest normal exponent field is E = 1. With bias 3, that means e = −2. If the stored fraction is 000, the value is 1/4. We need another way to represent smaller positive values such as 1/8.</a:t>
+              <a:t>An 8-bit format has 1 sign bit, 5 exponent bits, 2 stored significand bits, and bias 15. An exponent field of 11111₂ is reserved for infinity and NaN. What representable value is closest to −1.0?</a:t>
             </a:r>
           </a:p>
         </p:txBody>
@@ -12999,7 +14304,7 @@
           <p:cNvPr id="4" name="">
             <a:extLst xmlns:a="http://schemas.openxmlformats.org/drawingml/2006/main">
               <a:ext uri="{FF2B5EF4-FFF2-40B4-BE49-F238E27FC236}">
-                <a16:creationId xmlns:a16="http://schemas.microsoft.com/office/drawing/2014/main" id="{F4B5AD63-6E91-45DD-AE29-2F54895B988B}"/>
+                <a16:creationId xmlns:a16="http://schemas.microsoft.com/office/drawing/2014/main" id="{FD548711-085C-45B3-A8BC-2D9BA414882B}"/>
               </a:ext>
             </a:extLst>
           </p:cNvPr>
@@ -13047,7 +14352,12 @@
                 <a:ea typeface="Courier New"/>
                 <a:cs typeface="Courier New"/>
               </a:rPr>
-              <a:t>Smallest normal</a:t>
+              <a:t>Write each answer in decimal:</a:t>
+            </a:r>
+          </a:p>
+          <a:p xmlns:a="http://schemas.openxmlformats.org/drawingml/2006/main">
+            <a:r>
+              <a:t/>
             </a:r>
           </a:p>
           <a:p xmlns:a="http://schemas.openxmlformats.org/drawingml/2006/main">
@@ -13071,7 +14381,31 @@
                 <a:ea typeface="Courier New"/>
                 <a:cs typeface="Courier New"/>
               </a:rPr>
-              <a:t/>
+              <a:t>value = ?</a:t>
+            </a:r>
+          </a:p>
+          <a:p xmlns:a="http://schemas.openxmlformats.org/drawingml/2006/main">
+            <a:pPr>
+              <a:buNone/>
+              <a:defRPr sz="1650" b="0">
+                <a:solidFill>
+                  <a:srgbClr val="A7F3D0"/>
+                </a:solidFill>
+                <a:latin typeface="Courier New"/>
+                <a:ea typeface="Courier New"/>
+                <a:cs typeface="Courier New"/>
+              </a:defRPr>
+            </a:pPr>
+            <a:r>
+              <a:rPr sz="1650" b="0">
+                <a:solidFill>
+                  <a:srgbClr val="A7F3D0"/>
+                </a:solidFill>
+                <a:latin typeface="Courier New"/>
+                <a:ea typeface="Courier New"/>
+                <a:cs typeface="Courier New"/>
+              </a:rPr>
+              <a:t>sign = ?</a:t>
             </a:r>
           </a:p>
           <a:p xmlns:a="http://schemas.openxmlformats.org/drawingml/2006/main">
@@ -13094,7 +14428,7 @@
                 <a:ea typeface="Courier New"/>
                 <a:cs typeface="Courier New"/>
               </a:rPr>
-              <a:t>E = 001₂  →  e = 1 − 3 = −2</a:t>
+              <a:t>exponent = ?</a:t>
             </a:r>
           </a:p>
           <a:p xmlns:a="http://schemas.openxmlformats.org/drawingml/2006/main">
@@ -13118,103 +14452,7 @@
                 <a:ea typeface="Courier New"/>
                 <a:cs typeface="Courier New"/>
               </a:rPr>
-              <a:t>F = 000₂  →  significand 1.000₂</a:t>
-            </a:r>
-          </a:p>
-          <a:p xmlns:a="http://schemas.openxmlformats.org/drawingml/2006/main">
-            <a:pPr>
-              <a:buNone/>
-              <a:defRPr sz="1650" b="0">
-                <a:solidFill>
-                  <a:srgbClr val="A7F3D0"/>
-                </a:solidFill>
-                <a:latin typeface="Courier New"/>
-                <a:ea typeface="Courier New"/>
-                <a:cs typeface="Courier New"/>
-              </a:defRPr>
-            </a:pPr>
-            <a:r>
-              <a:rPr sz="1650" b="0">
-                <a:solidFill>
-                  <a:srgbClr val="A7F3D0"/>
-                </a:solidFill>
-                <a:latin typeface="Courier New"/>
-                <a:ea typeface="Courier New"/>
-                <a:cs typeface="Courier New"/>
-              </a:rPr>
-              <a:t/>
-            </a:r>
-          </a:p>
-          <a:p xmlns:a="http://schemas.openxmlformats.org/drawingml/2006/main">
-            <a:pPr>
-              <a:buNone/>
-              <a:defRPr sz="1650" b="0">
-                <a:solidFill>
-                  <a:srgbClr val="A7F3D0"/>
-                </a:solidFill>
-                <a:latin typeface="Courier New"/>
-                <a:ea typeface="Courier New"/>
-                <a:cs typeface="Courier New"/>
-              </a:defRPr>
-            </a:pPr>
-            <a:r>
-              <a:rPr sz="1650" b="0">
-                <a:solidFill>
-                  <a:srgbClr val="A7F3D0"/>
-                </a:solidFill>
-                <a:latin typeface="Courier New"/>
-                <a:ea typeface="Courier New"/>
-                <a:cs typeface="Courier New"/>
-              </a:rPr>
-              <a:t>value = 1.000₂ × 2⁻² = 1/4</a:t>
-            </a:r>
-          </a:p>
-          <a:p xmlns:a="http://schemas.openxmlformats.org/drawingml/2006/main">
-            <a:pPr>
-              <a:buNone/>
-              <a:defRPr sz="1650" b="0">
-                <a:solidFill>
-                  <a:srgbClr val="A7F3D0"/>
-                </a:solidFill>
-                <a:latin typeface="Courier New"/>
-                <a:ea typeface="Courier New"/>
-                <a:cs typeface="Courier New"/>
-              </a:defRPr>
-            </a:pPr>
-            <a:r>
-              <a:rPr sz="1650" b="0">
-                <a:solidFill>
-                  <a:srgbClr val="A7F3D0"/>
-                </a:solidFill>
-                <a:latin typeface="Courier New"/>
-                <a:ea typeface="Courier New"/>
-                <a:cs typeface="Courier New"/>
-              </a:rPr>
-              <a:t/>
-            </a:r>
-          </a:p>
-          <a:p xmlns:a="http://schemas.openxmlformats.org/drawingml/2006/main">
-            <a:pPr>
-              <a:buNone/>
-              <a:defRPr sz="1650" b="0">
-                <a:solidFill>
-                  <a:srgbClr val="A7F3D0"/>
-                </a:solidFill>
-                <a:latin typeface="Courier New"/>
-                <a:ea typeface="Courier New"/>
-                <a:cs typeface="Courier New"/>
-              </a:defRPr>
-            </a:pPr>
-            <a:r>
-              <a:rPr sz="1650" b="0">
-                <a:solidFill>
-                  <a:srgbClr val="A7F3D0"/>
-                </a:solidFill>
-                <a:latin typeface="Courier New"/>
-                <a:ea typeface="Courier New"/>
-                <a:cs typeface="Courier New"/>
-              </a:rPr>
-              <a:t>1/8 is smaller. E = 0 marks a new case.</a:t>
+              <a:t>significand = ?</a:t>
             </a:r>
           </a:p>
         </p:txBody>
@@ -13224,7 +14462,7 @@
           <p:cNvPr id="5" name="">
             <a:extLst xmlns:a="http://schemas.openxmlformats.org/drawingml/2006/main">
               <a:ext uri="{FF2B5EF4-FFF2-40B4-BE49-F238E27FC236}">
-                <a16:creationId xmlns:a16="http://schemas.microsoft.com/office/drawing/2014/main" id="{10C83417-6965-41D8-8054-D122A500127B}"/>
+                <a16:creationId xmlns:a16="http://schemas.microsoft.com/office/drawing/2014/main" id="{584E23CF-F2CD-46A9-9F4D-20949170792D}"/>
               </a:ext>
             </a:extLst>
           </p:cNvPr>
@@ -13272,7 +14510,7 @@
                 <a:ea typeface="Arial"/>
                 <a:cs typeface="Arial"/>
               </a:rPr>
-              <a:t>For E = 0, use the subnormal rule instead of subtracting the bias.</a:t>
+              <a:t>Work out the fields before revealing the answer.</a:t>
             </a:r>
           </a:p>
         </p:txBody>
@@ -13282,7 +14520,7 @@
           <p:cNvPr id="6" name="">
             <a:extLst xmlns:a="http://schemas.openxmlformats.org/drawingml/2006/main">
               <a:ext uri="{FF2B5EF4-FFF2-40B4-BE49-F238E27FC236}">
-                <a16:creationId xmlns:a16="http://schemas.microsoft.com/office/drawing/2014/main" id="{8E1F2603-246C-497E-B2CC-C75AC3901746}"/>
+                <a16:creationId xmlns:a16="http://schemas.microsoft.com/office/drawing/2014/main" id="{96E02F47-A9E9-43B2-AC22-5EF03769EDD4}"/>
               </a:ext>
             </a:extLst>
           </p:cNvPr>
@@ -13330,7 +14568,7 @@
                 <a:ea typeface="Courier New"/>
                 <a:cs typeface="Courier New"/>
               </a:rPr>
-              <a:t>08 / 22</a:t>
+              <a:t>08 / 24</a:t>
             </a:r>
           </a:p>
         </p:txBody>
@@ -13338,7 +14576,7 @@
     </p:spTree>
     <p:extLst>
       <p:ext uri="{BB962C8B-B14F-4D97-AF65-F5344CB8AC3E}">
-        <p14:creationId xmlns:p14="http://schemas.microsoft.com/office/powerpoint/2010/main" val="1857122576"/>
+        <p14:creationId xmlns:p14="http://schemas.microsoft.com/office/powerpoint/2010/main" val="659736008"/>
       </p:ext>
     </p:extLst>
   </p:cSld>
@@ -13369,7 +14607,7 @@
           <p:cNvPr id="7" name="">
             <a:extLst xmlns:a="http://schemas.openxmlformats.org/drawingml/2006/main">
               <a:ext uri="{FF2B5EF4-FFF2-40B4-BE49-F238E27FC236}">
-                <a16:creationId xmlns:a16="http://schemas.microsoft.com/office/drawing/2014/main" id="{0E1C1D56-F3B0-4FC7-8312-5DCE66DE8296}"/>
+                <a16:creationId xmlns:a16="http://schemas.microsoft.com/office/drawing/2014/main" id="{514F9435-A104-4D30-A188-4EE2456CA2BB}"/>
               </a:ext>
             </a:extLst>
           </p:cNvPr>
@@ -13417,7 +14655,7 @@
                 <a:ea typeface="Courier New"/>
                 <a:cs typeface="Courier New"/>
               </a:rPr>
-              <a:t>FLOATING POINT · SUBNORMAL RULE</a:t>
+              <a:t>FLOATING POINT · WORKED ANSWER</a:t>
             </a:r>
           </a:p>
         </p:txBody>
@@ -13427,7 +14665,7 @@
           <p:cNvPr id="2" name="">
             <a:extLst xmlns:a="http://schemas.openxmlformats.org/drawingml/2006/main">
               <a:ext uri="{FF2B5EF4-FFF2-40B4-BE49-F238E27FC236}">
-                <a16:creationId xmlns:a16="http://schemas.microsoft.com/office/drawing/2014/main" id="{47EC4111-990D-4F27-A48D-9B66E8564E29}"/>
+                <a16:creationId xmlns:a16="http://schemas.microsoft.com/office/drawing/2014/main" id="{E3CC3344-C3E4-4449-AF40-33DADFB16B1E}"/>
               </a:ext>
             </a:extLst>
           </p:cNvPr>
@@ -13475,7 +14713,7 @@
                 <a:ea typeface="Arial"/>
                 <a:cs typeface="Arial"/>
               </a:rPr>
-              <a:t>E = 0 drops the hidden 1</a:t>
+              <a:t>Quiz answer: −1.0 is exact</a:t>
             </a:r>
           </a:p>
         </p:txBody>
@@ -13485,7 +14723,7 @@
           <p:cNvPr id="3" name="">
             <a:extLst xmlns:a="http://schemas.openxmlformats.org/drawingml/2006/main">
               <a:ext uri="{FF2B5EF4-FFF2-40B4-BE49-F238E27FC236}">
-                <a16:creationId xmlns:a16="http://schemas.microsoft.com/office/drawing/2014/main" id="{EA7FC2C0-68E4-440B-B218-A53A78DE1183}"/>
+                <a16:creationId xmlns:a16="http://schemas.microsoft.com/office/drawing/2014/main" id="{798D5084-9296-4E15-A9DC-A45F46A15641}"/>
               </a:ext>
             </a:extLst>
           </p:cNvPr>
@@ -13533,7 +14771,7 @@
                 <a:ea typeface="Arial"/>
                 <a:cs typeface="Arial"/>
               </a:rPr>
-              <a:t>Normal values start with an implied 1 before the fraction bits. When E = 0, use an implied 0 instead. Keep the same 2⁻² scale as the smallest normal so the values grow smoothly from zero.</a:t>
+              <a:t>−1.0 is representable exactly. Its magnitude is 1.00₂ × 2⁰, so the sign is 1, the true exponent is 0, and the stored fraction is 00₂. Add bias 15 to encode the exponent field.</a:t>
             </a:r>
           </a:p>
         </p:txBody>
@@ -13543,7 +14781,7 @@
           <p:cNvPr id="4" name="">
             <a:extLst xmlns:a="http://schemas.openxmlformats.org/drawingml/2006/main">
               <a:ext uri="{FF2B5EF4-FFF2-40B4-BE49-F238E27FC236}">
-                <a16:creationId xmlns:a16="http://schemas.microsoft.com/office/drawing/2014/main" id="{C7B97746-2F05-4C79-997B-46EF673FF248}"/>
+                <a16:creationId xmlns:a16="http://schemas.microsoft.com/office/drawing/2014/main" id="{FD548711-085C-45B3-A8BC-2D9BA414882B}"/>
               </a:ext>
             </a:extLst>
           </p:cNvPr>
@@ -13591,7 +14829,30 @@
                 <a:ea typeface="Courier New"/>
                 <a:cs typeface="Courier New"/>
               </a:rPr>
-              <a:t>Fixed e = 1 − bias = −2</a:t>
+              <a:t>value = −1.0</a:t>
+            </a:r>
+          </a:p>
+          <a:p xmlns:a="http://schemas.openxmlformats.org/drawingml/2006/main">
+            <a:pPr>
+              <a:defRPr sz="1650">
+                <a:solidFill>
+                  <a:srgbClr val="A7F3D0"/>
+                </a:solidFill>
+                <a:latin typeface="Courier New"/>
+                <a:ea typeface="Courier New"/>
+                <a:cs typeface="Courier New"/>
+              </a:defRPr>
+            </a:pPr>
+            <a:r>
+              <a:rPr sz="1650">
+                <a:solidFill>
+                  <a:srgbClr val="A7F3D0"/>
+                </a:solidFill>
+                <a:latin typeface="Courier New"/>
+                <a:ea typeface="Courier New"/>
+                <a:cs typeface="Courier New"/>
+              </a:rPr>
+              <a:t>sign = 1</a:t>
             </a:r>
           </a:p>
           <a:p xmlns:a="http://schemas.openxmlformats.org/drawingml/2006/main">
@@ -13615,6 +14876,35 @@
                 <a:ea typeface="Courier New"/>
                 <a:cs typeface="Courier New"/>
               </a:rPr>
+              <a:t>exponent = 15</a:t>
+            </a:r>
+          </a:p>
+          <a:p xmlns:a="http://schemas.openxmlformats.org/drawingml/2006/main">
+            <a:pPr>
+              <a:buNone/>
+              <a:defRPr sz="1650" b="0">
+                <a:solidFill>
+                  <a:srgbClr val="A7F3D0"/>
+                </a:solidFill>
+                <a:latin typeface="Courier New"/>
+                <a:ea typeface="Courier New"/>
+                <a:cs typeface="Courier New"/>
+              </a:defRPr>
+            </a:pPr>
+            <a:r>
+              <a:rPr sz="1650" b="0">
+                <a:solidFill>
+                  <a:srgbClr val="A7F3D0"/>
+                </a:solidFill>
+                <a:latin typeface="Courier New"/>
+                <a:ea typeface="Courier New"/>
+                <a:cs typeface="Courier New"/>
+              </a:rPr>
+              <a:t>significand = 0</a:t>
+            </a:r>
+          </a:p>
+          <a:p xmlns:a="http://schemas.openxmlformats.org/drawingml/2006/main">
+            <a:r>
               <a:t/>
             </a:r>
           </a:p>
@@ -13639,30 +14929,7 @@
                 <a:ea typeface="Courier New"/>
                 <a:cs typeface="Courier New"/>
               </a:rPr>
-              <a:t>Normal, E = 1:</a:t>
-            </a:r>
-          </a:p>
-          <a:p xmlns:a="http://schemas.openxmlformats.org/drawingml/2006/main">
-            <a:pPr>
-              <a:defRPr sz="1650">
-                <a:solidFill>
-                  <a:srgbClr val="A7F3D0"/>
-                </a:solidFill>
-                <a:latin typeface="Courier New"/>
-                <a:ea typeface="Courier New"/>
-                <a:cs typeface="Courier New"/>
-              </a:defRPr>
-            </a:pPr>
-            <a:r>
-              <a:rPr sz="1650">
-                <a:solidFill>
-                  <a:srgbClr val="A7F3D0"/>
-                </a:solidFill>
-                <a:latin typeface="Courier New"/>
-                <a:ea typeface="Courier New"/>
-                <a:cs typeface="Courier New"/>
-              </a:rPr>
-              <a:t>1.FFF₂ × 2⁻²</a:t>
+              <a:t>Bits: 1 | 01111 | 00</a:t>
             </a:r>
           </a:p>
           <a:p xmlns:a="http://schemas.openxmlformats.org/drawingml/2006/main">
@@ -13691,29 +14958,6 @@
           </a:p>
           <a:p xmlns:a="http://schemas.openxmlformats.org/drawingml/2006/main">
             <a:pPr>
-              <a:defRPr sz="1650">
-                <a:solidFill>
-                  <a:srgbClr val="A7F3D0"/>
-                </a:solidFill>
-                <a:latin typeface="Courier New"/>
-                <a:ea typeface="Courier New"/>
-                <a:cs typeface="Courier New"/>
-              </a:defRPr>
-            </a:pPr>
-            <a:r>
-              <a:rPr sz="1650">
-                <a:solidFill>
-                  <a:srgbClr val="A7F3D0"/>
-                </a:solidFill>
-                <a:latin typeface="Courier New"/>
-                <a:ea typeface="Courier New"/>
-                <a:cs typeface="Courier New"/>
-              </a:rPr>
-              <a:t>Subnormal, E = 0:</a:t>
-            </a:r>
-          </a:p>
-          <a:p xmlns:a="http://schemas.openxmlformats.org/drawingml/2006/main">
-            <a:pPr>
               <a:buNone/>
               <a:defRPr sz="1650" b="0">
                 <a:solidFill>
@@ -13733,79 +14977,7 @@
                 <a:ea typeface="Courier New"/>
                 <a:cs typeface="Courier New"/>
               </a:rPr>
-              <a:t>0.FFF₂ × 2⁻²</a:t>
-            </a:r>
-          </a:p>
-          <a:p xmlns:a="http://schemas.openxmlformats.org/drawingml/2006/main">
-            <a:pPr>
-              <a:buNone/>
-              <a:defRPr sz="1650" b="0">
-                <a:solidFill>
-                  <a:srgbClr val="A7F3D0"/>
-                </a:solidFill>
-                <a:latin typeface="Courier New"/>
-                <a:ea typeface="Courier New"/>
-                <a:cs typeface="Courier New"/>
-              </a:defRPr>
-            </a:pPr>
-            <a:r>
-              <a:rPr sz="1650" b="0">
-                <a:solidFill>
-                  <a:srgbClr val="A7F3D0"/>
-                </a:solidFill>
-                <a:latin typeface="Courier New"/>
-                <a:ea typeface="Courier New"/>
-                <a:cs typeface="Courier New"/>
-              </a:rPr>
-              <a:t/>
-            </a:r>
-          </a:p>
-          <a:p xmlns:a="http://schemas.openxmlformats.org/drawingml/2006/main">
-            <a:pPr>
-              <a:buNone/>
-              <a:defRPr sz="1650" b="0">
-                <a:solidFill>
-                  <a:srgbClr val="A7F3D0"/>
-                </a:solidFill>
-                <a:latin typeface="Courier New"/>
-                <a:ea typeface="Courier New"/>
-                <a:cs typeface="Courier New"/>
-              </a:defRPr>
-            </a:pPr>
-            <a:r>
-              <a:rPr sz="1650" b="0">
-                <a:solidFill>
-                  <a:srgbClr val="A7F3D0"/>
-                </a:solidFill>
-                <a:latin typeface="Courier New"/>
-                <a:ea typeface="Courier New"/>
-                <a:cs typeface="Courier New"/>
-              </a:rPr>
-              <a:t>F = 000  →  0.000₂ × 2⁻² = 0</a:t>
-            </a:r>
-          </a:p>
-          <a:p xmlns:a="http://schemas.openxmlformats.org/drawingml/2006/main">
-            <a:pPr>
-              <a:buNone/>
-              <a:defRPr sz="1650" b="0">
-                <a:solidFill>
-                  <a:srgbClr val="A7F3D0"/>
-                </a:solidFill>
-                <a:latin typeface="Courier New"/>
-                <a:ea typeface="Courier New"/>
-                <a:cs typeface="Courier New"/>
-              </a:defRPr>
-            </a:pPr>
-            <a:r>
-              <a:rPr sz="1650" b="0">
-                <a:solidFill>
-                  <a:srgbClr val="A7F3D0"/>
-                </a:solidFill>
-                <a:latin typeface="Courier New"/>
-                <a:ea typeface="Courier New"/>
-                <a:cs typeface="Courier New"/>
-              </a:rPr>
-              <a:t>F = 100  →  0.100₂ × 2⁻² = 1/8</a:t>
+              <a:t>Check: −(1 + 0/4) × 2^(15−15) = −1</a:t>
             </a:r>
           </a:p>
         </p:txBody>
@@ -13815,7 +14987,7 @@
           <p:cNvPr id="5" name="">
             <a:extLst xmlns:a="http://schemas.openxmlformats.org/drawingml/2006/main">
               <a:ext uri="{FF2B5EF4-FFF2-40B4-BE49-F238E27FC236}">
-                <a16:creationId xmlns:a16="http://schemas.microsoft.com/office/drawing/2014/main" id="{C953FAB2-7571-49A3-B6C8-87F90FA9D556}"/>
+                <a16:creationId xmlns:a16="http://schemas.microsoft.com/office/drawing/2014/main" id="{584E23CF-F2CD-46A9-9F4D-20949170792D}"/>
               </a:ext>
             </a:extLst>
           </p:cNvPr>
@@ -13863,7 +15035,7 @@
                 <a:ea typeface="Arial"/>
                 <a:cs typeface="Arial"/>
               </a:rPr>
-              <a:t>The leading 0 or 1 is implied; only FFF is stored.</a:t>
+              <a:t>E = 15 is valid; all five exponent bits set would be E = 31.</a:t>
             </a:r>
           </a:p>
         </p:txBody>
@@ -13873,7 +15045,7 @@
           <p:cNvPr id="6" name="">
             <a:extLst xmlns:a="http://schemas.openxmlformats.org/drawingml/2006/main">
               <a:ext uri="{FF2B5EF4-FFF2-40B4-BE49-F238E27FC236}">
-                <a16:creationId xmlns:a16="http://schemas.microsoft.com/office/drawing/2014/main" id="{ECE7F5E9-2417-44C6-925E-4767F90FA696}"/>
+                <a16:creationId xmlns:a16="http://schemas.microsoft.com/office/drawing/2014/main" id="{96E02F47-A9E9-43B2-AC22-5EF03769EDD4}"/>
               </a:ext>
             </a:extLst>
           </p:cNvPr>
@@ -13921,7 +15093,7 @@
                 <a:ea typeface="Courier New"/>
                 <a:cs typeface="Courier New"/>
               </a:rPr>
-              <a:t>09 / 22</a:t>
+              <a:t>09 / 24</a:t>
             </a:r>
           </a:p>
         </p:txBody>
@@ -13929,7 +15101,7 @@
     </p:spTree>
     <p:extLst>
       <p:ext uri="{BB962C8B-B14F-4D97-AF65-F5344CB8AC3E}">
-        <p14:creationId xmlns:p14="http://schemas.microsoft.com/office/powerpoint/2010/main" val="1082036242"/>
+        <p14:creationId xmlns:p14="http://schemas.microsoft.com/office/powerpoint/2010/main" val="659736008"/>
       </p:ext>
     </p:extLst>
   </p:cSld>

--- a/public/presentations/CS211_Recitation_3.pptx
+++ b/public/presentations/CS211_Recitation_3.pptx
@@ -2,36 +2,36 @@
 <file path=ppt/presentation.xml><?xml version="1.0" encoding="utf-8"?>
 <p:presentation xmlns:p="http://schemas.openxmlformats.org/presentationml/2006/main">
   <p:sldMasterIdLst>
-    <p:sldMasterId xmlns:r="http://schemas.openxmlformats.org/officeDocument/2006/relationships" id="2147483648" r:id="Ra581eb1e70f04890"/>
+    <p:sldMasterId xmlns:r="http://schemas.openxmlformats.org/officeDocument/2006/relationships" id="2147483648" r:id="R1019ac9d30db4862"/>
   </p:sldMasterIdLst>
   <p:notesMasterIdLst>
-    <p:notesMasterId xmlns:r="http://schemas.openxmlformats.org/officeDocument/2006/relationships" r:id="Rbb865c280d434164"/>
+    <p:notesMasterId xmlns:r="http://schemas.openxmlformats.org/officeDocument/2006/relationships" r:id="Rdb8619b902f649c6"/>
   </p:notesMasterIdLst>
   <p:sldIdLst>
-    <p:sldId xmlns:r="http://schemas.openxmlformats.org/officeDocument/2006/relationships" id="256" r:id="R3b3728e610b24b82"/>
-    <p:sldId xmlns:r="http://schemas.openxmlformats.org/officeDocument/2006/relationships" id="257" r:id="Rdf587f2ca1514ed5"/>
-    <p:sldId xmlns:r="http://schemas.openxmlformats.org/officeDocument/2006/relationships" id="258" r:id="R788d641bee0e46f7"/>
-    <p:sldId xmlns:r="http://schemas.openxmlformats.org/officeDocument/2006/relationships" id="259" r:id="R30cfa2125db74ca6"/>
-    <p:sldId xmlns:r="http://schemas.openxmlformats.org/officeDocument/2006/relationships" id="260" r:id="R7d53adca072f4738"/>
-    <p:sldId xmlns:r="http://schemas.openxmlformats.org/officeDocument/2006/relationships" id="261" r:id="R6c66a994006c45e0"/>
-    <p:sldId xmlns:r="http://schemas.openxmlformats.org/officeDocument/2006/relationships" id="262" r:id="R6f1480aea06143a6"/>
-    <p:sldId xmlns:r="http://schemas.openxmlformats.org/officeDocument/2006/relationships" id="263" r:id="R9f5c3e9ab19c4953"/>
-    <p:sldId xmlns:r="http://schemas.openxmlformats.org/officeDocument/2006/relationships" id="264" r:id="R163ed676201b4ca9"/>
-    <p:sldId xmlns:r="http://schemas.openxmlformats.org/officeDocument/2006/relationships" id="265" r:id="R6fb00f9d361c4b4b"/>
-    <p:sldId xmlns:r="http://schemas.openxmlformats.org/officeDocument/2006/relationships" id="266" r:id="Rd5a016d5364547db"/>
-    <p:sldId xmlns:r="http://schemas.openxmlformats.org/officeDocument/2006/relationships" id="267" r:id="R5b09294dfc4c4a08"/>
-    <p:sldId xmlns:r="http://schemas.openxmlformats.org/officeDocument/2006/relationships" id="268" r:id="Rcab8b974bc2a495c"/>
-    <p:sldId xmlns:r="http://schemas.openxmlformats.org/officeDocument/2006/relationships" id="269" r:id="R4db0ca0f0c1a4f87"/>
-    <p:sldId xmlns:r="http://schemas.openxmlformats.org/officeDocument/2006/relationships" id="270" r:id="R805499bc847d4ef1"/>
-    <p:sldId xmlns:r="http://schemas.openxmlformats.org/officeDocument/2006/relationships" id="271" r:id="Raec2f52b08104e65"/>
-    <p:sldId xmlns:r="http://schemas.openxmlformats.org/officeDocument/2006/relationships" id="272" r:id="R26a40352e6c84eb9"/>
-    <p:sldId xmlns:r="http://schemas.openxmlformats.org/officeDocument/2006/relationships" id="273" r:id="Rae14098eac234600"/>
-    <p:sldId xmlns:r="http://schemas.openxmlformats.org/officeDocument/2006/relationships" id="274" r:id="Rd20e5cfba2c24adb"/>
-    <p:sldId xmlns:r="http://schemas.openxmlformats.org/officeDocument/2006/relationships" id="275" r:id="R0540b3cf26454380"/>
-    <p:sldId xmlns:r="http://schemas.openxmlformats.org/officeDocument/2006/relationships" id="276" r:id="R03d16bfa308b42ed"/>
-    <p:sldId xmlns:r="http://schemas.openxmlformats.org/officeDocument/2006/relationships" id="277" r:id="R14fcb46eb35546e3"/>
-    <p:sldId xmlns:r="http://schemas.openxmlformats.org/officeDocument/2006/relationships" id="278" r:id="R86a7c2badc484d81"/>
-    <p:sldId xmlns:r="http://schemas.openxmlformats.org/officeDocument/2006/relationships" id="279" r:id="Rac8466e2a79d4548"/>
+    <p:sldId xmlns:r="http://schemas.openxmlformats.org/officeDocument/2006/relationships" id="256" r:id="R6ba236134733443e"/>
+    <p:sldId xmlns:r="http://schemas.openxmlformats.org/officeDocument/2006/relationships" id="257" r:id="R34f5fff1d2fb477a"/>
+    <p:sldId xmlns:r="http://schemas.openxmlformats.org/officeDocument/2006/relationships" id="258" r:id="R001cb5dba51c4517"/>
+    <p:sldId xmlns:r="http://schemas.openxmlformats.org/officeDocument/2006/relationships" id="259" r:id="R55a78fa90afc4869"/>
+    <p:sldId xmlns:r="http://schemas.openxmlformats.org/officeDocument/2006/relationships" id="260" r:id="Rca8e234d66784667"/>
+    <p:sldId xmlns:r="http://schemas.openxmlformats.org/officeDocument/2006/relationships" id="261" r:id="R55e01ce370084027"/>
+    <p:sldId xmlns:r="http://schemas.openxmlformats.org/officeDocument/2006/relationships" id="262" r:id="R822bdbcdd4ad4cb0"/>
+    <p:sldId xmlns:r="http://schemas.openxmlformats.org/officeDocument/2006/relationships" id="263" r:id="R18832adb7e704e98"/>
+    <p:sldId xmlns:r="http://schemas.openxmlformats.org/officeDocument/2006/relationships" id="264" r:id="R2c17979014aa4707"/>
+    <p:sldId xmlns:r="http://schemas.openxmlformats.org/officeDocument/2006/relationships" id="265" r:id="Rf7fea7c6a65547cf"/>
+    <p:sldId xmlns:r="http://schemas.openxmlformats.org/officeDocument/2006/relationships" id="266" r:id="R2e9b4ec5e6994b56"/>
+    <p:sldId xmlns:r="http://schemas.openxmlformats.org/officeDocument/2006/relationships" id="267" r:id="R55a3e558356a487e"/>
+    <p:sldId xmlns:r="http://schemas.openxmlformats.org/officeDocument/2006/relationships" id="268" r:id="R4fd32bb66f1d4348"/>
+    <p:sldId xmlns:r="http://schemas.openxmlformats.org/officeDocument/2006/relationships" id="269" r:id="R4394d82d39944aac"/>
+    <p:sldId xmlns:r="http://schemas.openxmlformats.org/officeDocument/2006/relationships" id="270" r:id="Re6c518dcb49d40ba"/>
+    <p:sldId xmlns:r="http://schemas.openxmlformats.org/officeDocument/2006/relationships" id="271" r:id="Rf8062d929f1a4ab8"/>
+    <p:sldId xmlns:r="http://schemas.openxmlformats.org/officeDocument/2006/relationships" id="272" r:id="R1535b5ecf1d940c6"/>
+    <p:sldId xmlns:r="http://schemas.openxmlformats.org/officeDocument/2006/relationships" id="273" r:id="R2e7736863938452e"/>
+    <p:sldId xmlns:r="http://schemas.openxmlformats.org/officeDocument/2006/relationships" id="274" r:id="R5e304eec38da40db"/>
+    <p:sldId xmlns:r="http://schemas.openxmlformats.org/officeDocument/2006/relationships" id="275" r:id="R6465cdf01deb4580"/>
+    <p:sldId xmlns:r="http://schemas.openxmlformats.org/officeDocument/2006/relationships" id="276" r:id="R4b9184e4013d4cc9"/>
+    <p:sldId xmlns:r="http://schemas.openxmlformats.org/officeDocument/2006/relationships" id="277" r:id="Recb98edfc6ef43ad"/>
+    <p:sldId xmlns:r="http://schemas.openxmlformats.org/officeDocument/2006/relationships" id="278" r:id="Ra0f0dd9475bb4b57"/>
+    <p:sldId xmlns:r="http://schemas.openxmlformats.org/officeDocument/2006/relationships" id="279" r:id="Rc359c217dc1642e0"/>
   </p:sldIdLst>
   <p:sldSz cx="12192000" cy="6858000"/>
   <p:notesSz cx="6858000" cy="9144000"/>
@@ -1655,7 +1655,7 @@
           <a:lstStyle xmlns:a="http://schemas.openxmlformats.org/drawingml/2006/main"/>
           <a:p xmlns:a="http://schemas.openxmlformats.org/drawingml/2006/main">
             <a:r>
-              <a:t>Draw place-value columns before introducing exponent fields. This bridges base-2 arithmetic to the 5/4 and 3/16 examples. The 0.101₂ example equals 0.625.</a:t>
+              <a:t>Draw place-value columns before introducing exponent fields. This bridges base-2 arithmetic to the 5/4 and 3/16 examples. The worked 0.101₂ example equals 5/8. Pause for students to solve 0.011₂; the answer is 1/4 + 1/8 = 3/8.</a:t>
             </a:r>
           </a:p>
         </p:txBody>
@@ -2143,7 +2143,7 @@
   </p:cSld>
   <p:clrMap bg1="lt1" tx1="dk1" bg2="lt2" tx2="dk2" accent1="accent1" accent2="accent2" accent3="accent3" accent4="accent4" accent5="accent5" accent6="accent6" hlink="hlink" folHlink="folHlink"/>
   <p:sldLayoutIdLst>
-    <p:sldLayoutId xmlns:r="http://schemas.openxmlformats.org/officeDocument/2006/relationships" id="2147483649" r:id="R37788616201544a6"/>
+    <p:sldLayoutId xmlns:r="http://schemas.openxmlformats.org/officeDocument/2006/relationships" id="2147483649" r:id="R5842b14d28c342ce"/>
   </p:sldLayoutIdLst>
   <p:txStyles>
     <p:titleStyle>
@@ -12048,7 +12048,7 @@
                 <a:ea typeface="Arial"/>
                 <a:cs typeface="Arial"/>
               </a:rPr>
-              <a:t>Ask students to read 0.011₂ aloud as 1/4 + 1/8 = 3/8.</a:t>
+              <a:t>Your turn: What fraction is 0.011₂? Show the place values you used.</a:t>
             </a:r>
           </a:p>
         </p:txBody>
@@ -14410,6 +14410,7 @@
           </a:p>
           <a:p xmlns:a="http://schemas.openxmlformats.org/drawingml/2006/main">
             <a:pPr>
+              <a:buNone/>
               <a:defRPr sz="1650">
                 <a:solidFill>
                   <a:srgbClr val="A7F3D0"/>
@@ -14834,6 +14835,7 @@
           </a:p>
           <a:p xmlns:a="http://schemas.openxmlformats.org/drawingml/2006/main">
             <a:pPr>
+              <a:buNone/>
               <a:defRPr sz="1650">
                 <a:solidFill>
                   <a:srgbClr val="A7F3D0"/>

--- a/public/presentations/CS211_Recitation_3.pptx
+++ b/public/presentations/CS211_Recitation_3.pptx
@@ -2,36 +2,38 @@
 <file path=ppt/presentation.xml><?xml version="1.0" encoding="utf-8"?>
 <p:presentation xmlns:p="http://schemas.openxmlformats.org/presentationml/2006/main">
   <p:sldMasterIdLst>
-    <p:sldMasterId xmlns:r="http://schemas.openxmlformats.org/officeDocument/2006/relationships" id="2147483648" r:id="R1019ac9d30db4862"/>
+    <p:sldMasterId xmlns:r="http://schemas.openxmlformats.org/officeDocument/2006/relationships" id="2147483648" r:id="R37680de94059499a"/>
   </p:sldMasterIdLst>
   <p:notesMasterIdLst>
-    <p:notesMasterId xmlns:r="http://schemas.openxmlformats.org/officeDocument/2006/relationships" r:id="Rdb8619b902f649c6"/>
+    <p:notesMasterId xmlns:r="http://schemas.openxmlformats.org/officeDocument/2006/relationships" r:id="Rbc8e1e2c45334134"/>
   </p:notesMasterIdLst>
   <p:sldIdLst>
-    <p:sldId xmlns:r="http://schemas.openxmlformats.org/officeDocument/2006/relationships" id="256" r:id="R6ba236134733443e"/>
-    <p:sldId xmlns:r="http://schemas.openxmlformats.org/officeDocument/2006/relationships" id="257" r:id="R34f5fff1d2fb477a"/>
-    <p:sldId xmlns:r="http://schemas.openxmlformats.org/officeDocument/2006/relationships" id="258" r:id="R001cb5dba51c4517"/>
-    <p:sldId xmlns:r="http://schemas.openxmlformats.org/officeDocument/2006/relationships" id="259" r:id="R55a78fa90afc4869"/>
-    <p:sldId xmlns:r="http://schemas.openxmlformats.org/officeDocument/2006/relationships" id="260" r:id="Rca8e234d66784667"/>
-    <p:sldId xmlns:r="http://schemas.openxmlformats.org/officeDocument/2006/relationships" id="261" r:id="R55e01ce370084027"/>
-    <p:sldId xmlns:r="http://schemas.openxmlformats.org/officeDocument/2006/relationships" id="262" r:id="R822bdbcdd4ad4cb0"/>
-    <p:sldId xmlns:r="http://schemas.openxmlformats.org/officeDocument/2006/relationships" id="263" r:id="R18832adb7e704e98"/>
-    <p:sldId xmlns:r="http://schemas.openxmlformats.org/officeDocument/2006/relationships" id="264" r:id="R2c17979014aa4707"/>
-    <p:sldId xmlns:r="http://schemas.openxmlformats.org/officeDocument/2006/relationships" id="265" r:id="Rf7fea7c6a65547cf"/>
-    <p:sldId xmlns:r="http://schemas.openxmlformats.org/officeDocument/2006/relationships" id="266" r:id="R2e9b4ec5e6994b56"/>
-    <p:sldId xmlns:r="http://schemas.openxmlformats.org/officeDocument/2006/relationships" id="267" r:id="R55a3e558356a487e"/>
-    <p:sldId xmlns:r="http://schemas.openxmlformats.org/officeDocument/2006/relationships" id="268" r:id="R4fd32bb66f1d4348"/>
-    <p:sldId xmlns:r="http://schemas.openxmlformats.org/officeDocument/2006/relationships" id="269" r:id="R4394d82d39944aac"/>
-    <p:sldId xmlns:r="http://schemas.openxmlformats.org/officeDocument/2006/relationships" id="270" r:id="Re6c518dcb49d40ba"/>
-    <p:sldId xmlns:r="http://schemas.openxmlformats.org/officeDocument/2006/relationships" id="271" r:id="Rf8062d929f1a4ab8"/>
-    <p:sldId xmlns:r="http://schemas.openxmlformats.org/officeDocument/2006/relationships" id="272" r:id="R1535b5ecf1d940c6"/>
-    <p:sldId xmlns:r="http://schemas.openxmlformats.org/officeDocument/2006/relationships" id="273" r:id="R2e7736863938452e"/>
-    <p:sldId xmlns:r="http://schemas.openxmlformats.org/officeDocument/2006/relationships" id="274" r:id="R5e304eec38da40db"/>
-    <p:sldId xmlns:r="http://schemas.openxmlformats.org/officeDocument/2006/relationships" id="275" r:id="R6465cdf01deb4580"/>
-    <p:sldId xmlns:r="http://schemas.openxmlformats.org/officeDocument/2006/relationships" id="276" r:id="R4b9184e4013d4cc9"/>
-    <p:sldId xmlns:r="http://schemas.openxmlformats.org/officeDocument/2006/relationships" id="277" r:id="Recb98edfc6ef43ad"/>
-    <p:sldId xmlns:r="http://schemas.openxmlformats.org/officeDocument/2006/relationships" id="278" r:id="Ra0f0dd9475bb4b57"/>
-    <p:sldId xmlns:r="http://schemas.openxmlformats.org/officeDocument/2006/relationships" id="279" r:id="Rc359c217dc1642e0"/>
+    <p:sldId xmlns:r="http://schemas.openxmlformats.org/officeDocument/2006/relationships" id="256" r:id="R940dc9cb7acc45cb"/>
+    <p:sldId xmlns:r="http://schemas.openxmlformats.org/officeDocument/2006/relationships" id="257" r:id="R7b841f58357e4433"/>
+    <p:sldId xmlns:r="http://schemas.openxmlformats.org/officeDocument/2006/relationships" id="258" r:id="R2868d2b31b6b4e92"/>
+    <p:sldId xmlns:r="http://schemas.openxmlformats.org/officeDocument/2006/relationships" id="259" r:id="R45b077fff45f4382"/>
+    <p:sldId xmlns:r="http://schemas.openxmlformats.org/officeDocument/2006/relationships" id="260" r:id="Rbc52cf803f544a74"/>
+    <p:sldId xmlns:r="http://schemas.openxmlformats.org/officeDocument/2006/relationships" id="261" r:id="Raec4052dc8224440"/>
+    <p:sldId xmlns:r="http://schemas.openxmlformats.org/officeDocument/2006/relationships" id="262" r:id="R2d140b9904d94459"/>
+    <p:sldId xmlns:r="http://schemas.openxmlformats.org/officeDocument/2006/relationships" id="263" r:id="Ra99ff6ad601c4478"/>
+    <p:sldId xmlns:r="http://schemas.openxmlformats.org/officeDocument/2006/relationships" id="264" r:id="Rd85da423900746da"/>
+    <p:sldId xmlns:r="http://schemas.openxmlformats.org/officeDocument/2006/relationships" id="265" r:id="R7a3e18f265944b3d"/>
+    <p:sldId xmlns:r="http://schemas.openxmlformats.org/officeDocument/2006/relationships" id="266" r:id="R760a6842863e42cf"/>
+    <p:sldId xmlns:r="http://schemas.openxmlformats.org/officeDocument/2006/relationships" id="267" r:id="Rdc9ee0c25e094a13"/>
+    <p:sldId xmlns:r="http://schemas.openxmlformats.org/officeDocument/2006/relationships" id="268" r:id="R65169ae9db9d4b33"/>
+    <p:sldId xmlns:r="http://schemas.openxmlformats.org/officeDocument/2006/relationships" id="269" r:id="Rfe6235fada264ae0"/>
+    <p:sldId xmlns:r="http://schemas.openxmlformats.org/officeDocument/2006/relationships" id="270" r:id="Rdcc9b7f9a87f43e1"/>
+    <p:sldId xmlns:r="http://schemas.openxmlformats.org/officeDocument/2006/relationships" id="271" r:id="Rfcac26cf11d34c77"/>
+    <p:sldId xmlns:r="http://schemas.openxmlformats.org/officeDocument/2006/relationships" id="272" r:id="R6868f5890e2a4b98"/>
+    <p:sldId xmlns:r="http://schemas.openxmlformats.org/officeDocument/2006/relationships" id="273" r:id="R6faddac8d57f45cd"/>
+    <p:sldId xmlns:r="http://schemas.openxmlformats.org/officeDocument/2006/relationships" id="274" r:id="R75d1b85af1df4135"/>
+    <p:sldId xmlns:r="http://schemas.openxmlformats.org/officeDocument/2006/relationships" id="275" r:id="R7cc0bf07befc460c"/>
+    <p:sldId xmlns:r="http://schemas.openxmlformats.org/officeDocument/2006/relationships" id="276" r:id="Ra93cd562dc944029"/>
+    <p:sldId xmlns:r="http://schemas.openxmlformats.org/officeDocument/2006/relationships" id="277" r:id="R6d09ffd060664596"/>
+    <p:sldId xmlns:r="http://schemas.openxmlformats.org/officeDocument/2006/relationships" id="278" r:id="R412a0c63c0db427e"/>
+    <p:sldId xmlns:r="http://schemas.openxmlformats.org/officeDocument/2006/relationships" id="279" r:id="R8af56e70733c4c3b"/>
+    <p:sldId xmlns:r="http://schemas.openxmlformats.org/officeDocument/2006/relationships" id="280" r:id="R4298338e0f9a43eb"/>
+    <p:sldId xmlns:r="http://schemas.openxmlformats.org/officeDocument/2006/relationships" id="281" r:id="R3a6e000efa074efd"/>
   </p:sldIdLst>
   <p:sldSz cx="12192000" cy="6858000"/>
   <p:notesSz cx="6858000" cy="9144000"/>
@@ -465,7 +467,7 @@
           <a:lstStyle xmlns:a="http://schemas.openxmlformats.org/drawingml/2006/main"/>
           <a:p xmlns:a="http://schemas.openxmlformats.org/drawingml/2006/main">
             <a:r>
-              <a:t>Suggested 50-minute pacing: binary place values and fields 7 min; normal values 10 min; quiz review 4 min; subnormals and the boundary 12 min; decoding and encoding practice 7 min; rounding and spacing 3 min; HW3 preview and recap 7 min. Pause after the quiz question before revealing the answer. The HW3 details are based on the professor’s description supplied by the TA; the assignment is not officially posted. Source: lecture 6 and the quiz screenshot supplied by the TA.</a:t>
+              <a:t>Suggested 50-minute pacing: binary place values and fields 6 min; Firner equations and normal values 9 min; quiz review 4 min; general threshold and subnormal examples 14 min; decoding and encoding practice 6 min; rounding and spacing 3 min; HW3 preview and recap 8 min. Pause after the quiz question before revealing the answer. The HW3 details are based on the professor’s description supplied by the TA; the assignment is not officially posted. Sources: lecture 6 equation slide and the quiz screenshot supplied by the TA.</a:t>
             </a:r>
           </a:p>
         </p:txBody>
@@ -535,7 +537,7 @@
           <a:lstStyle xmlns:a="http://schemas.openxmlformats.org/drawingml/2006/main"/>
           <a:p xmlns:a="http://schemas.openxmlformats.org/drawingml/2006/main">
             <a:r>
-              <a:t>Pause before giving the subnormal rule. Ask: if E=1 is the smallest normal field, where could 1/8 go? A normal encoding would need true exponent −3 and stored E=0, but zero is reserved for a different rule. The next slide explains that rule using binary digits rather than a formula first. Source: lecture 6 normal and subnormal equations.</a:t>
+              <a:t>Quiz screenshot supplied by the TA. Decode the fields aloud: sign bit 1 makes the value negative; 01111₂ is 15, so true exponent 15−15=0; 00₂ is stored significand field 0, with implied leading 1 for a normal value. Thus (−1)^1 × (1+0/4) × 2^0=−1.0. The reserved all-ones exponent is 11111₂=31, not 01111₂=15. Explicitly tell students that an exact target is its own closest representable value.</a:t>
             </a:r>
           </a:p>
         </p:txBody>
@@ -605,7 +607,7 @@
           <a:lstStyle xmlns:a="http://schemas.openxmlformats.org/drawingml/2006/main"/>
           <a:p xmlns:a="http://schemas.openxmlformats.org/drawingml/2006/main">
             <a:r>
-              <a:t>Use the same scale before and after the boundary: 2^(1−bias)=2^-2. This is the key change: replace the normal hidden 1 with 0. Do not compute 0−bias for E=0. Ask students why 0.100 binary is 1/2, then multiply by 1/4 to get 1/8. Source: lecture 6 subnormal equation.</a:t>
+              <a:t>Derive the threshold directly from Firner’s normal equation on Lecture 6, slide 2. The number of exponent bits alone does not determine the threshold because the planned homework supplies bias separately. For an exactly representable nonzero finite value, magnitude below 2^(1−bias) implies a subnormal encoding. An arbitrary inexact input below the threshold might round to zero or the smallest normal, depending on the assignment’s rule; do not claim the threshold alone decides a rounded result. Source: Lecture 6 equations.</a:t>
             </a:r>
           </a:p>
         </p:txBody>
@@ -675,7 +677,7 @@
           <a:lstStyle xmlns:a="http://schemas.openxmlformats.org/drawingml/2006/main"/>
           <a:p xmlns:a="http://schemas.openxmlformats.org/drawingml/2006/main">
             <a:r>
-              <a:t>Derive the step: one fraction unit is 1/8; multiplying by 2^-2=1/4 gives 1/32. For this practice format, E=0,F=0 is zero and E=0,F=1..7 are positive subnormals. Let students answer 8/32=1/4 before the boundary slide. Source: lecture 6 subnormal equation.</a:t>
+              <a:t>This is the bias-3 substitution into the general rule on the previous slide. Pause before giving the subnormal rule. Ask: if E=1 is the smallest normal field, where could 1/8 go? A normal encoding would need true exponent −3 and stored E=0, but zero uses the subnormal equation. The next slide explains its significand without a hidden 1. Source: Lecture 6 equations.</a:t>
             </a:r>
           </a:p>
         </p:txBody>
@@ -745,7 +747,7 @@
           <a:lstStyle xmlns:a="http://schemas.openxmlformats.org/drawingml/2006/main"/>
           <a:p xmlns:a="http://schemas.openxmlformats.org/drawingml/2006/main">
             <a:r>
-              <a:t>Keep the calculation concrete: 1/8=4/32, so F=4. Decode using 0.100 binary times 2^-2: 1/2 times 1/4 is 1/8. Ask why E is zero and why F is four. Source: lecture 6 subnormal equation.</a:t>
+              <a:t>Use the same scale before and after the boundary: 2^(1−bias)=2^-2. This is the key change: replace the normal hidden 1 with 0. Do not compute 0−bias for E=0. Ask students why 0.100 binary is 1/2, then multiply by 1/4 to get 1/8. Source: lecture 6 subnormal equation.</a:t>
             </a:r>
           </a:p>
         </p:txBody>
@@ -815,7 +817,7 @@
           <a:lstStyle xmlns:a="http://schemas.openxmlformats.org/drawingml/2006/main"/>
           <a:p xmlns:a="http://schemas.openxmlformats.org/drawingml/2006/main">
             <a:r>
-              <a:t>Link back to the question on the previous step table. The step from 7/32 to 8/32 is 1/32, matching the subnormal spacing. E=0 does not mean exponent −3; both values use 2^-2. Source: lecture 6 normal and subnormal equations.</a:t>
+              <a:t>Derive the step: one fraction unit is 1/8; multiplying by 2^-2=1/4 gives 1/32. For this practice format, E=0,F=0 is zero and E=0,F=1..7 are positive subnormals. Let students answer 8/32=1/4 before the boundary slide. Source: lecture 6 subnormal equation.</a:t>
             </a:r>
           </a:p>
         </p:txBody>
@@ -885,7 +887,7 @@
           <a:lstStyle xmlns:a="http://schemas.openxmlformats.org/drawingml/2006/main"/>
           <a:p xmlns:a="http://schemas.openxmlformats.org/drawingml/2006/main">
             <a:r>
-              <a:t>Allow two to three minutes. A is normal: E=2,F=4, value (1+4/8)×2^-1=3/4. B is subnormal: E=0,F=3, value 3/32. Ask students to name the equation before calculating.</a:t>
+              <a:t>Keep the calculation concrete: 1/8=4/32, so F=4. Decode using 0.100 binary times 2^-2: 1/2 times 1/4 is 1/8. Ask why E is zero and why F is four. Source: lecture 6 subnormal equation.</a:t>
             </a:r>
           </a:p>
         </p:txBody>
@@ -955,7 +957,7 @@
           <a:lstStyle xmlns:a="http://schemas.openxmlformats.org/drawingml/2006/main"/>
           <a:p xmlns:a="http://schemas.openxmlformats.org/drawingml/2006/main">
             <a:r>
-              <a:t>Have students explain why B is not (1+3/8)×2^-3. The exponent for subnormals is fixed at 1−bias=-2, and the leading 1 is absent.</a:t>
+              <a:t>Link back to the question on the previous step table. The step from 7/32 to 8/32 is 1/32, matching the subnormal spacing. E=0 does not mean exponent −3; both values use 2^-2. Source: lecture 6 normal and subnormal equations.</a:t>
             </a:r>
           </a:p>
         </p:txBody>
@@ -1025,7 +1027,7 @@
           <a:lstStyle xmlns:a="http://schemas.openxmlformats.org/drawingml/2006/main"/>
           <a:p xmlns:a="http://schemas.openxmlformats.org/drawingml/2006/main">
             <a:r>
-              <a:t>Give two minutes. Both examples are exactly representable, so no rounding rule is needed. Ask students to check results by substituting E and F into the appropriate formula.</a:t>
+              <a:t>Allow two to three minutes. A is normal: E=2,F=4, value (1+4/8)×2^-1=3/4. B is subnormal: E=0,F=3, value 3/32. Ask students to name the equation before calculating.</a:t>
             </a:r>
           </a:p>
         </p:txBody>
@@ -1095,7 +1097,7 @@
           <a:lstStyle xmlns:a="http://schemas.openxmlformats.org/drawingml/2006/main"/>
           <a:p xmlns:a="http://schemas.openxmlformats.org/drawingml/2006/main">
             <a:r>
-              <a:t>Do not reveal until students have tried both. Emphasize that E=0 is a category marker here, not the unbiased exponent. E=3 represents true exponent zero because bias is three.</a:t>
+              <a:t>Have students explain why B is not (1+3/8)×2^-3. The exponent for subnormals is fixed at 1−bias=-2, and the leading 1 is absent.</a:t>
             </a:r>
           </a:p>
         </p:txBody>
@@ -1165,7 +1167,7 @@
           <a:lstStyle xmlns:a="http://schemas.openxmlformats.org/drawingml/2006/main"/>
           <a:p xmlns:a="http://schemas.openxmlformats.org/drawingml/2006/main">
             <a:r>
-              <a:t>The future homework description does not specify rounding, so do not teach truncation or nearest as a required rule. Here E=1 for both nearby normals. 5/16=0.3125, 11/32=0.34375, and 1/3≈0.3333. This replaces the earlier abstract associativity slide with a representation example directly tied to the professor's stated learning goal.</a:t>
+              <a:t>Give two minutes. Both examples are exactly representable, so no rounding rule is needed. Ask students to check results by substituting E and F into the appropriate formula.</a:t>
             </a:r>
           </a:p>
         </p:txBody>
@@ -1305,7 +1307,7 @@
           <a:lstStyle xmlns:a="http://schemas.openxmlformats.org/drawingml/2006/main"/>
           <a:p xmlns:a="http://schemas.openxmlformats.org/drawingml/2006/main">
             <a:r>
-              <a:t>For normals with fixed E, incrementing F by one changes the value by 2^(E−bias)/8. Show how this connects to the rounding slide and lecture 6’s discussion of gaps between floats.</a:t>
+              <a:t>Do not reveal until students have tried both. Emphasize that E=0 is a category marker here, not the unbiased exponent. E=3 represents true exponent zero because bias is three.</a:t>
             </a:r>
           </a:p>
         </p:txBody>
@@ -1375,7 +1377,7 @@
           <a:lstStyle xmlns:a="http://schemas.openxmlformats.org/drawingml/2006/main"/>
           <a:p xmlns:a="http://schemas.openxmlformats.org/drawingml/2006/main">
             <a:r>
-              <a:t>Based on the professor’s preview supplied by the TA. The intended command-line inputs are exponent bits, bias, significand bits, numerator, and denominator, in that order. The output contains the exponent and significand field values. Use 5/2 as a new teaching example. The final handout may add input and rounding details.</a:t>
+              <a:t>The future homework description does not specify rounding, so do not teach truncation or nearest as a required rule. Here E=1 for both nearby normals. 5/16=0.3125, 11/32=0.34375, and 1/3≈0.3333. This replaces the earlier abstract associativity slide with a representation example directly tied to the professor's stated learning goal.</a:t>
             </a:r>
           </a:p>
         </p:txBody>
@@ -1445,7 +1447,7 @@
           <a:lstStyle xmlns:a="http://schemas.openxmlformats.org/drawingml/2006/main"/>
           <a:p xmlns:a="http://schemas.openxmlformats.org/drawingml/2006/main">
             <a:r>
-              <a:t>This example is mathematically exact and uses the planned input order. Important TA note: the supplied draft solution computes the normal significand as (numerator &lt;&lt; sig_bits)/denominator − 2^sig_bits without scaling by 2^power_of_two. For these inputs that draft gives F=12, outside the three-bit range, rather than F=2. Do not present that draft code as a correct answer key until the normal path is fixed. Source: professor’s preview and lecture 6 normal-value equation.</a:t>
+              <a:t>For normals with fixed E, incrementing F by one changes the value by 2^(E−bias)/8. Show how this connects to the rounding slide and lecture 6’s discussion of gaps between floats.</a:t>
             </a:r>
           </a:p>
         </p:txBody>
@@ -1515,7 +1517,7 @@
           <a:lstStyle xmlns:a="http://schemas.openxmlformats.org/drawingml/2006/main"/>
           <a:p xmlns:a="http://schemas.openxmlformats.org/drawingml/2006/main">
             <a:r>
-              <a:t>Here p is the number of significand bits. For exact examples, solve the equation algebraically. The eventual homework may specify how to round values that fall between encodings, so do not assume a rounding rule yet. This is a conceptual approach, not a copy of the unreleased source code. Source: professor’s preview and lecture 6 equations.</a:t>
+              <a:t>Based on the professor’s preview supplied by the TA. The intended command-line inputs are exponent bits, bias, significand bits, numerator, and denominator, in that order. The output contains the exponent and significand field values. Use 5/2 as a new teaching example. The final handout may add input and rounding details.</a:t>
             </a:r>
           </a:p>
         </p:txBody>
@@ -1585,6 +1587,146 @@
           <a:lstStyle xmlns:a="http://schemas.openxmlformats.org/drawingml/2006/main"/>
           <a:p xmlns:a="http://schemas.openxmlformats.org/drawingml/2006/main">
             <a:r>
+              <a:t>This example is mathematically exact and uses the planned input order. Important TA note: the supplied draft solution computes the normal significand as (numerator &lt;&lt; sig_bits)/denominator − 2^sig_bits without scaling by 2^power_of_two. For these inputs that draft gives F=12, outside the three-bit range, rather than F=2. Do not present that draft code as a correct answer key until the normal path is fixed. Source: professor’s preview and lecture 6 normal-value equation.</a:t>
+            </a:r>
+          </a:p>
+        </p:txBody>
+      </p:sp>
+      <p:sp>
+        <p:nvSpPr>
+          <p:cNvPr id="4" name="Slide Number Placeholder 3"/>
+          <p:cNvSpPr>
+            <a:spLocks xmlns:a="http://schemas.openxmlformats.org/drawingml/2006/main" noGrp="1"/>
+          </p:cNvSpPr>
+          <p:nvPr>
+            <p:ph type="sldNum" idx="5"/>
+          </p:nvPr>
+        </p:nvSpPr>
+        <p:spPr/>
+        <p:txBody>
+          <a:bodyPr xmlns:a="http://schemas.openxmlformats.org/drawingml/2006/main"/>
+          <a:lstStyle xmlns:a="http://schemas.openxmlformats.org/drawingml/2006/main"/>
+          <a:p xmlns:a="http://schemas.openxmlformats.org/drawingml/2006/main"/>
+        </p:txBody>
+      </p:sp>
+    </p:spTree>
+  </p:cSld>
+  <p:clrMapOvr>
+    <a:masterClrMapping xmlns:a="http://schemas.openxmlformats.org/drawingml/2006/main"/>
+  </p:clrMapOvr>
+</p:notes>
+</file>
+
+<file path=ppt/notesSlides/notesSlide25.xml><?xml version="1.0" encoding="utf-8"?>
+<p:notes xmlns:p="http://schemas.openxmlformats.org/presentationml/2006/main">
+  <p:cSld>
+    <p:spTree>
+      <p:nvGrpSpPr>
+        <p:cNvPr id="1" name=""/>
+        <p:cNvGrpSpPr/>
+        <p:nvPr/>
+      </p:nvGrpSpPr>
+      <p:grpSpPr>
+        <a:xfrm xmlns:a="http://schemas.openxmlformats.org/drawingml/2006/main"/>
+      </p:grpSpPr>
+      <p:sp>
+        <p:nvSpPr>
+          <p:cNvPr id="2" name="Slide Image Placeholder 1"/>
+          <p:cNvSpPr>
+            <a:spLocks xmlns:a="http://schemas.openxmlformats.org/drawingml/2006/main" noGrp="1"/>
+          </p:cNvSpPr>
+          <p:nvPr>
+            <p:ph type="sldImg" idx="0"/>
+          </p:nvPr>
+        </p:nvSpPr>
+        <p:spPr/>
+      </p:sp>
+      <p:sp>
+        <p:nvSpPr>
+          <p:cNvPr id="3" name="Notes Placeholder 2"/>
+          <p:cNvSpPr>
+            <a:spLocks xmlns:a="http://schemas.openxmlformats.org/drawingml/2006/main" noGrp="1"/>
+          </p:cNvSpPr>
+          <p:nvPr>
+            <p:ph type="body" idx="1"/>
+          </p:nvPr>
+        </p:nvSpPr>
+        <p:spPr/>
+        <p:txBody>
+          <a:bodyPr xmlns:a="http://schemas.openxmlformats.org/drawingml/2006/main"/>
+          <a:lstStyle xmlns:a="http://schemas.openxmlformats.org/drawingml/2006/main"/>
+          <a:p xmlns:a="http://schemas.openxmlformats.org/drawingml/2006/main">
+            <a:r>
+              <a:t>These are Firner’s Lecture 6 equations using his field names. The planned homework supplies Sig Bits, bias, numerator, and denominator; for nonnegative inputs sign is zero. If numerator is zero, exponent and Significand fields are both zero. For exact examples, solve the appropriate equation algebraically. The eventual homework may specify how to round values between encodings, so do not assume a rounding rule yet. This is a conceptual approach, not a copy of the unreleased source code.</a:t>
+            </a:r>
+          </a:p>
+        </p:txBody>
+      </p:sp>
+      <p:sp>
+        <p:nvSpPr>
+          <p:cNvPr id="4" name="Slide Number Placeholder 3"/>
+          <p:cNvSpPr>
+            <a:spLocks xmlns:a="http://schemas.openxmlformats.org/drawingml/2006/main" noGrp="1"/>
+          </p:cNvSpPr>
+          <p:nvPr>
+            <p:ph type="sldNum" idx="5"/>
+          </p:nvPr>
+        </p:nvSpPr>
+        <p:spPr/>
+        <p:txBody>
+          <a:bodyPr xmlns:a="http://schemas.openxmlformats.org/drawingml/2006/main"/>
+          <a:lstStyle xmlns:a="http://schemas.openxmlformats.org/drawingml/2006/main"/>
+          <a:p xmlns:a="http://schemas.openxmlformats.org/drawingml/2006/main"/>
+        </p:txBody>
+      </p:sp>
+    </p:spTree>
+  </p:cSld>
+  <p:clrMapOvr>
+    <a:masterClrMapping xmlns:a="http://schemas.openxmlformats.org/drawingml/2006/main"/>
+  </p:clrMapOvr>
+</p:notes>
+</file>
+
+<file path=ppt/notesSlides/notesSlide26.xml><?xml version="1.0" encoding="utf-8"?>
+<p:notes xmlns:p="http://schemas.openxmlformats.org/presentationml/2006/main">
+  <p:cSld>
+    <p:spTree>
+      <p:nvGrpSpPr>
+        <p:cNvPr id="1" name=""/>
+        <p:cNvGrpSpPr/>
+        <p:nvPr/>
+      </p:nvGrpSpPr>
+      <p:grpSpPr>
+        <a:xfrm xmlns:a="http://schemas.openxmlformats.org/drawingml/2006/main"/>
+      </p:grpSpPr>
+      <p:sp>
+        <p:nvSpPr>
+          <p:cNvPr id="2" name="Slide Image Placeholder 1"/>
+          <p:cNvSpPr>
+            <a:spLocks xmlns:a="http://schemas.openxmlformats.org/drawingml/2006/main" noGrp="1"/>
+          </p:cNvSpPr>
+          <p:nvPr>
+            <p:ph type="sldImg" idx="0"/>
+          </p:nvPr>
+        </p:nvSpPr>
+        <p:spPr/>
+      </p:sp>
+      <p:sp>
+        <p:nvSpPr>
+          <p:cNvPr id="3" name="Notes Placeholder 2"/>
+          <p:cNvSpPr>
+            <a:spLocks xmlns:a="http://schemas.openxmlformats.org/drawingml/2006/main" noGrp="1"/>
+          </p:cNvSpPr>
+          <p:nvPr>
+            <p:ph type="body" idx="1"/>
+          </p:nvPr>
+        </p:nvSpPr>
+        <p:spPr/>
+        <p:txBody>
+          <a:bodyPr xmlns:a="http://schemas.openxmlformats.org/drawingml/2006/main"/>
+          <a:lstStyle xmlns:a="http://schemas.openxmlformats.org/drawingml/2006/main"/>
+          <a:p xmlns:a="http://schemas.openxmlformats.org/drawingml/2006/main">
+            <a:r>
               <a:t>Review the two mistakes most likely to occur: forgetting to add the bias for a normal exponent, and using the normal hidden 1 for a subnormal. Do not reveal the unreleased homework solution. Remind students to follow the eventual assignment’s rounding and valid-input rules.</a:t>
             </a:r>
           </a:p>
@@ -1865,7 +2007,7 @@
           <a:lstStyle xmlns:a="http://schemas.openxmlformats.org/drawingml/2006/main"/>
           <a:p xmlns:a="http://schemas.openxmlformats.org/drawingml/2006/main">
             <a:r>
-              <a:t>Work through this slowly on the board. Ask which part of 1.010 is stored: 010. The lecture equation is (−1)^S × 2^(E−bias) × (1+F/2^sig_bits). For E=3, bias=3, F=2, sig_bits=3 the result is exactly 1.25.</a:t>
+              <a:t>Transcribed from Firner’s Lecture 6, slide 2 (Equations): subnormals with zero exponent bits have value (−1)^sign × 2^(1−bias) × (Significand / 2^Sig Bits); normals have value (−1)^sign × 2^(exponent−bias) × (1 + Significand / 2^Sig Bits). The all-ones exponent field is reserved for infinity/NaN in the formats discussed. In this deck E=exponent, F=Significand, and p=Sig Bits. Emphasize that Significand means the integer stored in the field, not 0.FFF or 1.FFF as a decimal number.</a:t>
             </a:r>
           </a:p>
         </p:txBody>
@@ -1935,7 +2077,7 @@
           <a:lstStyle xmlns:a="http://schemas.openxmlformats.org/drawingml/2006/main"/>
           <a:p xmlns:a="http://schemas.openxmlformats.org/drawingml/2006/main">
             <a:r>
-              <a:t>Pause at each field and ask students what it means. The sign is zero. E=2 lies in the normal range, e=-1, and F=5. The value is 0.8125.</a:t>
+              <a:t>Work through this slowly on the board. Ask which part of 1.010 is stored: 010. The lecture equation is (−1)^S × 2^(E−bias) × (1+F/2^sig_bits). For E=3, bias=3, F=2, sig_bits=3 the result is exactly 1.25.</a:t>
             </a:r>
           </a:p>
         </p:txBody>
@@ -2005,7 +2147,7 @@
           <a:lstStyle xmlns:a="http://schemas.openxmlformats.org/drawingml/2006/main"/>
           <a:p xmlns:a="http://schemas.openxmlformats.org/drawingml/2006/main">
             <a:r>
-              <a:t>This is adapted from the quiz screenshot supplied by the TA. Give students one or two minutes. The question asks for the closest representable value and the decimal values of the sign, exponent, and significand fields. It is an exact case, so no rounding is needed. Keep the answer hidden until the next slide. The quiz calls the two stored fraction bits significand bits.</a:t>
+              <a:t>Pause at each field and ask students what it means. The sign is zero. E=2 lies in the normal range, e=-1, and F=5. The value is 0.8125.</a:t>
             </a:r>
           </a:p>
         </p:txBody>
@@ -2075,7 +2217,7 @@
           <a:lstStyle xmlns:a="http://schemas.openxmlformats.org/drawingml/2006/main"/>
           <a:p xmlns:a="http://schemas.openxmlformats.org/drawingml/2006/main">
             <a:r>
-              <a:t>Quiz screenshot supplied by the TA. Decode the fields aloud: sign bit 1 makes the value negative; 01111₂ is 15, so true exponent 15−15=0; 00₂ is stored significand field 0, with implied leading 1 for a normal value. Thus (−1)^1 × (1+0/4) × 2^0=−1.0. The reserved all-ones exponent is 11111₂=31, not 01111₂=15. Explicitly tell students that an exact target is its own closest representable value.</a:t>
+              <a:t>This is adapted from the quiz screenshot supplied by the TA. Give students one or two minutes. The question asks for the closest representable value and the decimal values of the sign, exponent, and significand fields. It is an exact case, so no rounding is needed. Keep the answer hidden until the next slide. The quiz calls the two stored fraction bits significand bits.</a:t>
             </a:r>
           </a:p>
         </p:txBody>
@@ -2143,7 +2285,7 @@
   </p:cSld>
   <p:clrMap bg1="lt1" tx1="dk1" bg2="lt2" tx2="dk2" accent1="accent1" accent2="accent2" accent3="accent3" accent4="accent4" accent5="accent5" accent6="accent6" hlink="hlink" folHlink="folHlink"/>
   <p:sldLayoutIdLst>
-    <p:sldLayoutId xmlns:r="http://schemas.openxmlformats.org/officeDocument/2006/relationships" id="2147483649" r:id="R5842b14d28c342ce"/>
+    <p:sldLayoutId xmlns:r="http://schemas.openxmlformats.org/officeDocument/2006/relationships" id="2147483649" r:id="R33028cef623841ad"/>
   </p:sldLayoutIdLst>
   <p:txStyles>
     <p:titleStyle>
@@ -2969,7 +3111,7 @@
                 <a:ea typeface="Courier New"/>
                 <a:cs typeface="Courier New"/>
               </a:rPr>
-              <a:t>Exponent and significand fields</a:t>
+              <a:t>Firner’s value equations</a:t>
             </a:r>
           </a:p>
           <a:p xmlns:a="http://schemas.openxmlformats.org/drawingml/2006/main">
@@ -2993,7 +3135,7 @@
                 <a:ea typeface="Courier New"/>
                 <a:cs typeface="Courier New"/>
               </a:rPr>
-              <a:t>Quiz review: −1.0</a:t>
+              <a:t>Normal values and quiz review</a:t>
             </a:r>
           </a:p>
           <a:p xmlns:a="http://schemas.openxmlformats.org/drawingml/2006/main">
@@ -3017,7 +3159,7 @@
                 <a:ea typeface="Courier New"/>
                 <a:cs typeface="Courier New"/>
               </a:rPr>
-              <a:t>Normal and subnormal values</a:t>
+              <a:t>General subnormal threshold</a:t>
             </a:r>
           </a:p>
           <a:p xmlns:a="http://schemas.openxmlformats.org/drawingml/2006/main">
@@ -3041,31 +3183,7 @@
                 <a:ea typeface="Courier New"/>
                 <a:cs typeface="Courier New"/>
               </a:rPr>
-              <a:t>Practice with ratios and bit patterns</a:t>
-            </a:r>
-          </a:p>
-          <a:p xmlns:a="http://schemas.openxmlformats.org/drawingml/2006/main">
-            <a:pPr>
-              <a:buNone/>
-              <a:defRPr sz="1650" b="0">
-                <a:solidFill>
-                  <a:srgbClr val="A7F3D0"/>
-                </a:solidFill>
-                <a:latin typeface="Courier New"/>
-                <a:ea typeface="Courier New"/>
-                <a:cs typeface="Courier New"/>
-              </a:defRPr>
-            </a:pPr>
-            <a:r>
-              <a:rPr sz="1650" b="0">
-                <a:solidFill>
-                  <a:srgbClr val="A7F3D0"/>
-                </a:solidFill>
-                <a:latin typeface="Courier New"/>
-                <a:ea typeface="Courier New"/>
-                <a:cs typeface="Courier New"/>
-              </a:rPr>
-              <a:t>HW3 preview</a:t>
+              <a:t>Practice and HW3 preview</a:t>
             </a:r>
           </a:p>
         </p:txBody>
@@ -3181,7 +3299,7 @@
                 <a:ea typeface="Courier New"/>
                 <a:cs typeface="Courier New"/>
               </a:rPr>
-              <a:t>01 / 24</a:t>
+              <a:t>01 / 26</a:t>
             </a:r>
           </a:p>
         </p:txBody>
@@ -3220,7 +3338,7 @@
           <p:cNvPr id="7" name="">
             <a:extLst xmlns:a="http://schemas.openxmlformats.org/drawingml/2006/main">
               <a:ext uri="{FF2B5EF4-FFF2-40B4-BE49-F238E27FC236}">
-                <a16:creationId xmlns:a16="http://schemas.microsoft.com/office/drawing/2014/main" id="{52BEAABF-BD4F-40AF-A282-4DA602FE61EE}"/>
+                <a16:creationId xmlns:a16="http://schemas.microsoft.com/office/drawing/2014/main" id="{514F9435-A104-4D30-A188-4EE2456CA2BB}"/>
               </a:ext>
             </a:extLst>
           </p:cNvPr>
@@ -3268,7 +3386,7 @@
                 <a:ea typeface="Courier New"/>
                 <a:cs typeface="Courier New"/>
               </a:rPr>
-              <a:t>FLOATING POINT · WHY SUBNORMALS</a:t>
+              <a:t>FLOATING POINT · WORKED ANSWER</a:t>
             </a:r>
           </a:p>
         </p:txBody>
@@ -3278,7 +3396,7 @@
           <p:cNvPr id="2" name="">
             <a:extLst xmlns:a="http://schemas.openxmlformats.org/drawingml/2006/main">
               <a:ext uri="{FF2B5EF4-FFF2-40B4-BE49-F238E27FC236}">
-                <a16:creationId xmlns:a16="http://schemas.microsoft.com/office/drawing/2014/main" id="{55B309F2-033B-47F8-941D-460A77FAB0C8}"/>
+                <a16:creationId xmlns:a16="http://schemas.microsoft.com/office/drawing/2014/main" id="{E3CC3344-C3E4-4449-AF40-33DADFB16B1E}"/>
               </a:ext>
             </a:extLst>
           </p:cNvPr>
@@ -3326,7 +3444,7 @@
                 <a:ea typeface="Arial"/>
                 <a:cs typeface="Arial"/>
               </a:rPr>
-              <a:t>The smallest normal is 1/4</a:t>
+              <a:t>Quiz answer: −1.0 is exact</a:t>
             </a:r>
           </a:p>
         </p:txBody>
@@ -3336,7 +3454,7 @@
           <p:cNvPr id="3" name="">
             <a:extLst xmlns:a="http://schemas.openxmlformats.org/drawingml/2006/main">
               <a:ext uri="{FF2B5EF4-FFF2-40B4-BE49-F238E27FC236}">
-                <a16:creationId xmlns:a16="http://schemas.microsoft.com/office/drawing/2014/main" id="{2413D46C-F548-4E0D-8AC8-B55CC5C096EA}"/>
+                <a16:creationId xmlns:a16="http://schemas.microsoft.com/office/drawing/2014/main" id="{798D5084-9296-4E15-A9DC-A45F46A15641}"/>
               </a:ext>
             </a:extLst>
           </p:cNvPr>
@@ -3384,7 +3502,7 @@
                 <a:ea typeface="Arial"/>
                 <a:cs typeface="Arial"/>
               </a:rPr>
-              <a:t>The smallest normal exponent field is E = 1. With bias 3, that means e = −2. If the stored fraction is 000, the value is 1/4. We need another way to represent smaller positive values such as 1/8.</a:t>
+              <a:t>−1.0 is representable exactly. Its magnitude is 1.00₂ × 2⁰, so the sign is 1, the true exponent is 0, and the stored fraction is 00₂. Add bias 15 to encode the exponent field.</a:t>
             </a:r>
           </a:p>
         </p:txBody>
@@ -3394,7 +3512,7 @@
           <p:cNvPr id="4" name="">
             <a:extLst xmlns:a="http://schemas.openxmlformats.org/drawingml/2006/main">
               <a:ext uri="{FF2B5EF4-FFF2-40B4-BE49-F238E27FC236}">
-                <a16:creationId xmlns:a16="http://schemas.microsoft.com/office/drawing/2014/main" id="{F4B5AD63-6E91-45DD-AE29-2F54895B988B}"/>
+                <a16:creationId xmlns:a16="http://schemas.microsoft.com/office/drawing/2014/main" id="{FD548711-085C-45B3-A8BC-2D9BA414882B}"/>
               </a:ext>
             </a:extLst>
           </p:cNvPr>
@@ -3442,7 +3560,31 @@
                 <a:ea typeface="Courier New"/>
                 <a:cs typeface="Courier New"/>
               </a:rPr>
-              <a:t>Smallest normal</a:t>
+              <a:t>value = −1.0</a:t>
+            </a:r>
+          </a:p>
+          <a:p xmlns:a="http://schemas.openxmlformats.org/drawingml/2006/main">
+            <a:pPr>
+              <a:buNone/>
+              <a:defRPr sz="1650">
+                <a:solidFill>
+                  <a:srgbClr val="A7F3D0"/>
+                </a:solidFill>
+                <a:latin typeface="Courier New"/>
+                <a:ea typeface="Courier New"/>
+                <a:cs typeface="Courier New"/>
+              </a:defRPr>
+            </a:pPr>
+            <a:r>
+              <a:rPr sz="1650">
+                <a:solidFill>
+                  <a:srgbClr val="A7F3D0"/>
+                </a:solidFill>
+                <a:latin typeface="Courier New"/>
+                <a:ea typeface="Courier New"/>
+                <a:cs typeface="Courier New"/>
+              </a:rPr>
+              <a:t>sign = 1</a:t>
             </a:r>
           </a:p>
           <a:p xmlns:a="http://schemas.openxmlformats.org/drawingml/2006/main">
@@ -3466,36 +3608,41 @@
                 <a:ea typeface="Courier New"/>
                 <a:cs typeface="Courier New"/>
               </a:rPr>
+              <a:t>exponent = 15</a:t>
+            </a:r>
+          </a:p>
+          <a:p xmlns:a="http://schemas.openxmlformats.org/drawingml/2006/main">
+            <a:pPr>
+              <a:buNone/>
+              <a:defRPr sz="1650" b="0">
+                <a:solidFill>
+                  <a:srgbClr val="A7F3D0"/>
+                </a:solidFill>
+                <a:latin typeface="Courier New"/>
+                <a:ea typeface="Courier New"/>
+                <a:cs typeface="Courier New"/>
+              </a:defRPr>
+            </a:pPr>
+            <a:r>
+              <a:rPr sz="1650" b="0">
+                <a:solidFill>
+                  <a:srgbClr val="A7F3D0"/>
+                </a:solidFill>
+                <a:latin typeface="Courier New"/>
+                <a:ea typeface="Courier New"/>
+                <a:cs typeface="Courier New"/>
+              </a:rPr>
+              <a:t>significand = 0</a:t>
+            </a:r>
+          </a:p>
+          <a:p xmlns:a="http://schemas.openxmlformats.org/drawingml/2006/main">
+            <a:r>
               <a:t/>
             </a:r>
           </a:p>
           <a:p xmlns:a="http://schemas.openxmlformats.org/drawingml/2006/main">
             <a:pPr>
               <a:buNone/>
-              <a:defRPr sz="1650">
-                <a:solidFill>
-                  <a:srgbClr val="A7F3D0"/>
-                </a:solidFill>
-                <a:latin typeface="Courier New"/>
-                <a:ea typeface="Courier New"/>
-                <a:cs typeface="Courier New"/>
-              </a:defRPr>
-            </a:pPr>
-            <a:r>
-              <a:rPr sz="1650">
-                <a:solidFill>
-                  <a:srgbClr val="A7F3D0"/>
-                </a:solidFill>
-                <a:latin typeface="Courier New"/>
-                <a:ea typeface="Courier New"/>
-                <a:cs typeface="Courier New"/>
-              </a:rPr>
-              <a:t>E = 001₂  →  e = 1 − 3 = −2</a:t>
-            </a:r>
-          </a:p>
-          <a:p xmlns:a="http://schemas.openxmlformats.org/drawingml/2006/main">
-            <a:pPr>
-              <a:buNone/>
               <a:defRPr sz="1650" b="0">
                 <a:solidFill>
                   <a:srgbClr val="A7F3D0"/>
@@ -3514,7 +3661,7 @@
                 <a:ea typeface="Courier New"/>
                 <a:cs typeface="Courier New"/>
               </a:rPr>
-              <a:t>F = 000₂  →  significand 1.000₂</a:t>
+              <a:t>Bits: 1 | 01111 | 00</a:t>
             </a:r>
           </a:p>
           <a:p xmlns:a="http://schemas.openxmlformats.org/drawingml/2006/main">
@@ -3562,7 +3709,7 @@
                 <a:ea typeface="Courier New"/>
                 <a:cs typeface="Courier New"/>
               </a:rPr>
-              <a:t>value = 1.000₂ × 2⁻² = 1/4</a:t>
+              <a:t>Check: (-1)^1 × 2^(15−15)</a:t>
             </a:r>
           </a:p>
           <a:p xmlns:a="http://schemas.openxmlformats.org/drawingml/2006/main">
@@ -3586,31 +3733,7 @@
                 <a:ea typeface="Courier New"/>
                 <a:cs typeface="Courier New"/>
               </a:rPr>
-              <a:t/>
-            </a:r>
-          </a:p>
-          <a:p xmlns:a="http://schemas.openxmlformats.org/drawingml/2006/main">
-            <a:pPr>
-              <a:buNone/>
-              <a:defRPr sz="1650" b="0">
-                <a:solidFill>
-                  <a:srgbClr val="A7F3D0"/>
-                </a:solidFill>
-                <a:latin typeface="Courier New"/>
-                <a:ea typeface="Courier New"/>
-                <a:cs typeface="Courier New"/>
-              </a:defRPr>
-            </a:pPr>
-            <a:r>
-              <a:rPr sz="1650" b="0">
-                <a:solidFill>
-                  <a:srgbClr val="A7F3D0"/>
-                </a:solidFill>
-                <a:latin typeface="Courier New"/>
-                <a:ea typeface="Courier New"/>
-                <a:cs typeface="Courier New"/>
-              </a:rPr>
-              <a:t>1/8 is smaller. E = 0 marks a new case.</a:t>
+              <a:t>       × (1 + 0/2^2) = −1</a:t>
             </a:r>
           </a:p>
         </p:txBody>
@@ -3620,7 +3743,7 @@
           <p:cNvPr id="5" name="">
             <a:extLst xmlns:a="http://schemas.openxmlformats.org/drawingml/2006/main">
               <a:ext uri="{FF2B5EF4-FFF2-40B4-BE49-F238E27FC236}">
-                <a16:creationId xmlns:a16="http://schemas.microsoft.com/office/drawing/2014/main" id="{10C83417-6965-41D8-8054-D122A500127B}"/>
+                <a16:creationId xmlns:a16="http://schemas.microsoft.com/office/drawing/2014/main" id="{584E23CF-F2CD-46A9-9F4D-20949170792D}"/>
               </a:ext>
             </a:extLst>
           </p:cNvPr>
@@ -3668,7 +3791,7 @@
                 <a:ea typeface="Arial"/>
                 <a:cs typeface="Arial"/>
               </a:rPr>
-              <a:t>For E = 0, use the subnormal rule instead of subtracting the bias.</a:t>
+              <a:t>E = 15 is valid; all five exponent bits set would be E = 31.</a:t>
             </a:r>
           </a:p>
         </p:txBody>
@@ -3678,7 +3801,7 @@
           <p:cNvPr id="6" name="">
             <a:extLst xmlns:a="http://schemas.openxmlformats.org/drawingml/2006/main">
               <a:ext uri="{FF2B5EF4-FFF2-40B4-BE49-F238E27FC236}">
-                <a16:creationId xmlns:a16="http://schemas.microsoft.com/office/drawing/2014/main" id="{8E1F2603-246C-497E-B2CC-C75AC3901746}"/>
+                <a16:creationId xmlns:a16="http://schemas.microsoft.com/office/drawing/2014/main" id="{96E02F47-A9E9-43B2-AC22-5EF03769EDD4}"/>
               </a:ext>
             </a:extLst>
           </p:cNvPr>
@@ -3726,7 +3849,7 @@
                 <a:ea typeface="Courier New"/>
                 <a:cs typeface="Courier New"/>
               </a:rPr>
-              <a:t>10 / 24</a:t>
+              <a:t>10 / 26</a:t>
             </a:r>
           </a:p>
         </p:txBody>
@@ -3734,7 +3857,7 @@
     </p:spTree>
     <p:extLst>
       <p:ext uri="{BB962C8B-B14F-4D97-AF65-F5344CB8AC3E}">
-        <p14:creationId xmlns:p14="http://schemas.microsoft.com/office/powerpoint/2010/main" val="1857122576"/>
+        <p14:creationId xmlns:p14="http://schemas.microsoft.com/office/powerpoint/2010/main" val="659736008"/>
       </p:ext>
     </p:extLst>
   </p:cSld>
@@ -3765,7 +3888,7 @@
           <p:cNvPr id="7" name="">
             <a:extLst xmlns:a="http://schemas.openxmlformats.org/drawingml/2006/main">
               <a:ext uri="{FF2B5EF4-FFF2-40B4-BE49-F238E27FC236}">
-                <a16:creationId xmlns:a16="http://schemas.microsoft.com/office/drawing/2014/main" id="{0E1C1D56-F3B0-4FC7-8312-5DCE66DE8296}"/>
+                <a16:creationId xmlns:a16="http://schemas.microsoft.com/office/drawing/2014/main" id="{52BEAABF-BD4F-40AF-A282-4DA602FE61EE}"/>
               </a:ext>
             </a:extLst>
           </p:cNvPr>
@@ -3813,7 +3936,7 @@
                 <a:ea typeface="Courier New"/>
                 <a:cs typeface="Courier New"/>
               </a:rPr>
-              <a:t>FLOATING POINT · SUBNORMAL RULE</a:t>
+              <a:t>FLOATING POINT · GENERAL THRESHOLD</a:t>
             </a:r>
           </a:p>
         </p:txBody>
@@ -3823,7 +3946,7 @@
           <p:cNvPr id="2" name="">
             <a:extLst xmlns:a="http://schemas.openxmlformats.org/drawingml/2006/main">
               <a:ext uri="{FF2B5EF4-FFF2-40B4-BE49-F238E27FC236}">
-                <a16:creationId xmlns:a16="http://schemas.microsoft.com/office/drawing/2014/main" id="{47EC4111-990D-4F27-A48D-9B66E8564E29}"/>
+                <a16:creationId xmlns:a16="http://schemas.microsoft.com/office/drawing/2014/main" id="{55B309F2-033B-47F8-941D-460A77FAB0C8}"/>
               </a:ext>
             </a:extLst>
           </p:cNvPr>
@@ -3871,7 +3994,7 @@
                 <a:ea typeface="Arial"/>
                 <a:cs typeface="Arial"/>
               </a:rPr>
-              <a:t>E = 0 drops the hidden 1</a:t>
+              <a:t>When is a value subnormal?</a:t>
             </a:r>
           </a:p>
         </p:txBody>
@@ -3881,7 +4004,7 @@
           <p:cNvPr id="3" name="">
             <a:extLst xmlns:a="http://schemas.openxmlformats.org/drawingml/2006/main">
               <a:ext uri="{FF2B5EF4-FFF2-40B4-BE49-F238E27FC236}">
-                <a16:creationId xmlns:a16="http://schemas.microsoft.com/office/drawing/2014/main" id="{EA7FC2C0-68E4-440B-B218-A53A78DE1183}"/>
+                <a16:creationId xmlns:a16="http://schemas.microsoft.com/office/drawing/2014/main" id="{2413D46C-F548-4E0D-8AC8-B55CC5C096EA}"/>
               </a:ext>
             </a:extLst>
           </p:cNvPr>
@@ -3929,7 +4052,7 @@
                 <a:ea typeface="Arial"/>
                 <a:cs typeface="Arial"/>
               </a:rPr>
-              <a:t>Normal values start with an implied 1 before the fraction bits. When E = 0, use an implied 0 instead. Keep the same 2⁻² scale as the smallest normal so the values grow smoothly from zero.</a:t>
+              <a:t>The smallest positive normal uses sign 0, stored exponent 1, and Significand 0. Firner’s normal equation makes its value 2^(1−bias). An exactly representable nonzero value with smaller magnitude is subnormal.</a:t>
             </a:r>
           </a:p>
         </p:txBody>
@@ -3939,7 +4062,7 @@
           <p:cNvPr id="4" name="">
             <a:extLst xmlns:a="http://schemas.openxmlformats.org/drawingml/2006/main">
               <a:ext uri="{FF2B5EF4-FFF2-40B4-BE49-F238E27FC236}">
-                <a16:creationId xmlns:a16="http://schemas.microsoft.com/office/drawing/2014/main" id="{C7B97746-2F05-4C79-997B-46EF673FF248}"/>
+                <a16:creationId xmlns:a16="http://schemas.microsoft.com/office/drawing/2014/main" id="{F4B5AD63-6E91-45DD-AE29-2F54895B988B}"/>
               </a:ext>
             </a:extLst>
           </p:cNvPr>
@@ -3987,7 +4110,7 @@
                 <a:ea typeface="Courier New"/>
                 <a:cs typeface="Courier New"/>
               </a:rPr>
-              <a:t>Fixed e = 1 − bias = −2</a:t>
+              <a:t>Smallest positive normal:</a:t>
             </a:r>
           </a:p>
           <a:p xmlns:a="http://schemas.openxmlformats.org/drawingml/2006/main">
@@ -4011,6 +4134,78 @@
                 <a:ea typeface="Courier New"/>
                 <a:cs typeface="Courier New"/>
               </a:rPr>
+              <a:t>(-1)^0 × 2^(1−bias)</a:t>
+            </a:r>
+          </a:p>
+          <a:p xmlns:a="http://schemas.openxmlformats.org/drawingml/2006/main">
+            <a:pPr>
+              <a:buNone/>
+              <a:defRPr sz="1650">
+                <a:solidFill>
+                  <a:srgbClr val="A7F3D0"/>
+                </a:solidFill>
+                <a:latin typeface="Courier New"/>
+                <a:ea typeface="Courier New"/>
+                <a:cs typeface="Courier New"/>
+              </a:defRPr>
+            </a:pPr>
+            <a:r>
+              <a:rPr sz="1650">
+                <a:solidFill>
+                  <a:srgbClr val="A7F3D0"/>
+                </a:solidFill>
+                <a:latin typeface="Courier New"/>
+                <a:ea typeface="Courier New"/>
+                <a:cs typeface="Courier New"/>
+              </a:rPr>
+              <a:t>       × (1 + 0/2^(Sig Bits))</a:t>
+            </a:r>
+          </a:p>
+          <a:p xmlns:a="http://schemas.openxmlformats.org/drawingml/2006/main">
+            <a:pPr>
+              <a:buNone/>
+              <a:defRPr sz="1650" b="0">
+                <a:solidFill>
+                  <a:srgbClr val="A7F3D0"/>
+                </a:solidFill>
+                <a:latin typeface="Courier New"/>
+                <a:ea typeface="Courier New"/>
+                <a:cs typeface="Courier New"/>
+              </a:defRPr>
+            </a:pPr>
+            <a:r>
+              <a:rPr sz="1650" b="0">
+                <a:solidFill>
+                  <a:srgbClr val="A7F3D0"/>
+                </a:solidFill>
+                <a:latin typeface="Courier New"/>
+                <a:ea typeface="Courier New"/>
+                <a:cs typeface="Courier New"/>
+              </a:rPr>
+              <a:t>= 2^(1−bias)</a:t>
+            </a:r>
+          </a:p>
+          <a:p xmlns:a="http://schemas.openxmlformats.org/drawingml/2006/main">
+            <a:pPr>
+              <a:buNone/>
+              <a:defRPr sz="1650" b="0">
+                <a:solidFill>
+                  <a:srgbClr val="A7F3D0"/>
+                </a:solidFill>
+                <a:latin typeface="Courier New"/>
+                <a:ea typeface="Courier New"/>
+                <a:cs typeface="Courier New"/>
+              </a:defRPr>
+            </a:pPr>
+            <a:r>
+              <a:rPr sz="1650" b="0">
+                <a:solidFill>
+                  <a:srgbClr val="A7F3D0"/>
+                </a:solidFill>
+                <a:latin typeface="Courier New"/>
+                <a:ea typeface="Courier New"/>
+                <a:cs typeface="Courier New"/>
+              </a:rPr>
               <a:t/>
             </a:r>
           </a:p>
@@ -4035,31 +4230,7 @@
                 <a:ea typeface="Courier New"/>
                 <a:cs typeface="Courier New"/>
               </a:rPr>
-              <a:t>Normal, E = 1:</a:t>
-            </a:r>
-          </a:p>
-          <a:p xmlns:a="http://schemas.openxmlformats.org/drawingml/2006/main">
-            <a:pPr>
-              <a:buNone/>
-              <a:defRPr sz="1650">
-                <a:solidFill>
-                  <a:srgbClr val="A7F3D0"/>
-                </a:solidFill>
-                <a:latin typeface="Courier New"/>
-                <a:ea typeface="Courier New"/>
-                <a:cs typeface="Courier New"/>
-              </a:defRPr>
-            </a:pPr>
-            <a:r>
-              <a:rPr sz="1650">
-                <a:solidFill>
-                  <a:srgbClr val="A7F3D0"/>
-                </a:solidFill>
-                <a:latin typeface="Courier New"/>
-                <a:ea typeface="Courier New"/>
-                <a:cs typeface="Courier New"/>
-              </a:rPr>
-              <a:t>1.FFF₂ × 2⁻²</a:t>
+              <a:t>0 &lt; |value| &lt; 2^(1−bias)</a:t>
             </a:r>
           </a:p>
           <a:p xmlns:a="http://schemas.openxmlformats.org/drawingml/2006/main">
@@ -4083,36 +4254,36 @@
                 <a:ea typeface="Courier New"/>
                 <a:cs typeface="Courier New"/>
               </a:rPr>
+              <a:t>→ subnormal: E = 0, F &gt; 0</a:t>
+            </a:r>
+          </a:p>
+          <a:p xmlns:a="http://schemas.openxmlformats.org/drawingml/2006/main">
+            <a:pPr>
+              <a:buNone/>
+              <a:defRPr sz="1650" b="0">
+                <a:solidFill>
+                  <a:srgbClr val="A7F3D0"/>
+                </a:solidFill>
+                <a:latin typeface="Courier New"/>
+                <a:ea typeface="Courier New"/>
+                <a:cs typeface="Courier New"/>
+              </a:defRPr>
+            </a:pPr>
+            <a:r>
+              <a:rPr sz="1650" b="0">
+                <a:solidFill>
+                  <a:srgbClr val="A7F3D0"/>
+                </a:solidFill>
+                <a:latin typeface="Courier New"/>
+                <a:ea typeface="Courier New"/>
+                <a:cs typeface="Courier New"/>
+              </a:rPr>
               <a:t/>
             </a:r>
           </a:p>
           <a:p xmlns:a="http://schemas.openxmlformats.org/drawingml/2006/main">
             <a:pPr>
               <a:buNone/>
-              <a:defRPr sz="1650">
-                <a:solidFill>
-                  <a:srgbClr val="A7F3D0"/>
-                </a:solidFill>
-                <a:latin typeface="Courier New"/>
-                <a:ea typeface="Courier New"/>
-                <a:cs typeface="Courier New"/>
-              </a:defRPr>
-            </a:pPr>
-            <a:r>
-              <a:rPr sz="1650">
-                <a:solidFill>
-                  <a:srgbClr val="A7F3D0"/>
-                </a:solidFill>
-                <a:latin typeface="Courier New"/>
-                <a:ea typeface="Courier New"/>
-                <a:cs typeface="Courier New"/>
-              </a:rPr>
-              <a:t>Subnormal, E = 0:</a:t>
-            </a:r>
-          </a:p>
-          <a:p xmlns:a="http://schemas.openxmlformats.org/drawingml/2006/main">
-            <a:pPr>
-              <a:buNone/>
               <a:defRPr sz="1650" b="0">
                 <a:solidFill>
                   <a:srgbClr val="A7F3D0"/>
@@ -4131,79 +4302,7 @@
                 <a:ea typeface="Courier New"/>
                 <a:cs typeface="Courier New"/>
               </a:rPr>
-              <a:t>0.FFF₂ × 2⁻²</a:t>
-            </a:r>
-          </a:p>
-          <a:p xmlns:a="http://schemas.openxmlformats.org/drawingml/2006/main">
-            <a:pPr>
-              <a:buNone/>
-              <a:defRPr sz="1650" b="0">
-                <a:solidFill>
-                  <a:srgbClr val="A7F3D0"/>
-                </a:solidFill>
-                <a:latin typeface="Courier New"/>
-                <a:ea typeface="Courier New"/>
-                <a:cs typeface="Courier New"/>
-              </a:defRPr>
-            </a:pPr>
-            <a:r>
-              <a:rPr sz="1650" b="0">
-                <a:solidFill>
-                  <a:srgbClr val="A7F3D0"/>
-                </a:solidFill>
-                <a:latin typeface="Courier New"/>
-                <a:ea typeface="Courier New"/>
-                <a:cs typeface="Courier New"/>
-              </a:rPr>
-              <a:t/>
-            </a:r>
-          </a:p>
-          <a:p xmlns:a="http://schemas.openxmlformats.org/drawingml/2006/main">
-            <a:pPr>
-              <a:buNone/>
-              <a:defRPr sz="1650" b="0">
-                <a:solidFill>
-                  <a:srgbClr val="A7F3D0"/>
-                </a:solidFill>
-                <a:latin typeface="Courier New"/>
-                <a:ea typeface="Courier New"/>
-                <a:cs typeface="Courier New"/>
-              </a:defRPr>
-            </a:pPr>
-            <a:r>
-              <a:rPr sz="1650" b="0">
-                <a:solidFill>
-                  <a:srgbClr val="A7F3D0"/>
-                </a:solidFill>
-                <a:latin typeface="Courier New"/>
-                <a:ea typeface="Courier New"/>
-                <a:cs typeface="Courier New"/>
-              </a:rPr>
-              <a:t>F = 000  →  0.000₂ × 2⁻² = 0</a:t>
-            </a:r>
-          </a:p>
-          <a:p xmlns:a="http://schemas.openxmlformats.org/drawingml/2006/main">
-            <a:pPr>
-              <a:buNone/>
-              <a:defRPr sz="1650" b="0">
-                <a:solidFill>
-                  <a:srgbClr val="A7F3D0"/>
-                </a:solidFill>
-                <a:latin typeface="Courier New"/>
-                <a:ea typeface="Courier New"/>
-                <a:cs typeface="Courier New"/>
-              </a:defRPr>
-            </a:pPr>
-            <a:r>
-              <a:rPr sz="1650" b="0">
-                <a:solidFill>
-                  <a:srgbClr val="A7F3D0"/>
-                </a:solidFill>
-                <a:latin typeface="Courier New"/>
-                <a:ea typeface="Courier New"/>
-                <a:cs typeface="Courier New"/>
-              </a:rPr>
-              <a:t>F = 100  →  0.100₂ × 2⁻² = 1/8</a:t>
+              <a:t>bias = 3 → threshold = 1/4</a:t>
             </a:r>
           </a:p>
         </p:txBody>
@@ -4213,7 +4312,7 @@
           <p:cNvPr id="5" name="">
             <a:extLst xmlns:a="http://schemas.openxmlformats.org/drawingml/2006/main">
               <a:ext uri="{FF2B5EF4-FFF2-40B4-BE49-F238E27FC236}">
-                <a16:creationId xmlns:a16="http://schemas.microsoft.com/office/drawing/2014/main" id="{C953FAB2-7571-49A3-B6C8-87F90FA9D556}"/>
+                <a16:creationId xmlns:a16="http://schemas.microsoft.com/office/drawing/2014/main" id="{10C83417-6965-41D8-8054-D122A500127B}"/>
               </a:ext>
             </a:extLst>
           </p:cNvPr>
@@ -4261,7 +4360,7 @@
                 <a:ea typeface="Arial"/>
                 <a:cs typeface="Arial"/>
               </a:rPr>
-              <a:t>The leading 0 or 1 is implied; only FFF is stored.</a:t>
+              <a:t>The supplied bias sets this threshold; exponent-bit count sets field width.</a:t>
             </a:r>
           </a:p>
         </p:txBody>
@@ -4271,7 +4370,7 @@
           <p:cNvPr id="6" name="">
             <a:extLst xmlns:a="http://schemas.openxmlformats.org/drawingml/2006/main">
               <a:ext uri="{FF2B5EF4-FFF2-40B4-BE49-F238E27FC236}">
-                <a16:creationId xmlns:a16="http://schemas.microsoft.com/office/drawing/2014/main" id="{ECE7F5E9-2417-44C6-925E-4767F90FA696}"/>
+                <a16:creationId xmlns:a16="http://schemas.microsoft.com/office/drawing/2014/main" id="{8E1F2603-246C-497E-B2CC-C75AC3901746}"/>
               </a:ext>
             </a:extLst>
           </p:cNvPr>
@@ -4319,7 +4418,7 @@
                 <a:ea typeface="Courier New"/>
                 <a:cs typeface="Courier New"/>
               </a:rPr>
-              <a:t>11 / 24</a:t>
+              <a:t>11 / 26</a:t>
             </a:r>
           </a:p>
         </p:txBody>
@@ -4327,7 +4426,7 @@
     </p:spTree>
     <p:extLst>
       <p:ext uri="{BB962C8B-B14F-4D97-AF65-F5344CB8AC3E}">
-        <p14:creationId xmlns:p14="http://schemas.microsoft.com/office/powerpoint/2010/main" val="1082036242"/>
+        <p14:creationId xmlns:p14="http://schemas.microsoft.com/office/powerpoint/2010/main" val="1857122576"/>
       </p:ext>
     </p:extLst>
   </p:cSld>
@@ -4358,7 +4457,7 @@
           <p:cNvPr id="7" name="">
             <a:extLst xmlns:a="http://schemas.openxmlformats.org/drawingml/2006/main">
               <a:ext uri="{FF2B5EF4-FFF2-40B4-BE49-F238E27FC236}">
-                <a16:creationId xmlns:a16="http://schemas.microsoft.com/office/drawing/2014/main" id="{DF65E5C3-C59B-4F4C-8123-D26BB20B62FC}"/>
+                <a16:creationId xmlns:a16="http://schemas.microsoft.com/office/drawing/2014/main" id="{52BEAABF-BD4F-40AF-A282-4DA602FE61EE}"/>
               </a:ext>
             </a:extLst>
           </p:cNvPr>
@@ -4406,7 +4505,7 @@
                 <a:ea typeface="Courier New"/>
                 <a:cs typeface="Courier New"/>
               </a:rPr>
-              <a:t>FLOATING POINT · PLACE VALUES</a:t>
+              <a:t>FLOATING POINT · WHY SUBNORMALS</a:t>
             </a:r>
           </a:p>
         </p:txBody>
@@ -4416,7 +4515,7 @@
           <p:cNvPr id="2" name="">
             <a:extLst xmlns:a="http://schemas.openxmlformats.org/drawingml/2006/main">
               <a:ext uri="{FF2B5EF4-FFF2-40B4-BE49-F238E27FC236}">
-                <a16:creationId xmlns:a16="http://schemas.microsoft.com/office/drawing/2014/main" id="{AAF148DA-667A-4F17-8947-3A10B5D66209}"/>
+                <a16:creationId xmlns:a16="http://schemas.microsoft.com/office/drawing/2014/main" id="{55B309F2-033B-47F8-941D-460A77FAB0C8}"/>
               </a:ext>
             </a:extLst>
           </p:cNvPr>
@@ -4464,7 +4563,7 @@
                 <a:ea typeface="Arial"/>
                 <a:cs typeface="Arial"/>
               </a:rPr>
-              <a:t>Subnormals count in steps of 1/32</a:t>
+              <a:t>With bias 3, smallest normal is 1/4</a:t>
             </a:r>
           </a:p>
         </p:txBody>
@@ -4474,7 +4573,7 @@
           <p:cNvPr id="3" name="">
             <a:extLst xmlns:a="http://schemas.openxmlformats.org/drawingml/2006/main">
               <a:ext uri="{FF2B5EF4-FFF2-40B4-BE49-F238E27FC236}">
-                <a16:creationId xmlns:a16="http://schemas.microsoft.com/office/drawing/2014/main" id="{9CBE9A2B-E617-4407-BF21-6D1C10DB5F7C}"/>
+                <a16:creationId xmlns:a16="http://schemas.microsoft.com/office/drawing/2014/main" id="{2413D46C-F548-4E0D-8AC8-B55CC5C096EA}"/>
               </a:ext>
             </a:extLst>
           </p:cNvPr>
@@ -4522,7 +4621,7 @@
                 <a:ea typeface="Arial"/>
                 <a:cs typeface="Arial"/>
               </a:rPr>
-              <a:t>The three stored fraction bits make 0.FFF₂ increase by 1/8 each time. Multiplying by the fixed 2⁻² scale makes each step 1/32. So the field value F counts steps of 1/32.</a:t>
+              <a:t>In our practice format, bias is 3. Use exponent field E = 1 and stored Significand F = 0 in Firner’s normal equation. The threshold is 2^(1−3) = 1/4. A smaller positive value such as 1/8 uses E = 0.</a:t>
             </a:r>
           </a:p>
         </p:txBody>
@@ -4532,7 +4631,7 @@
           <p:cNvPr id="4" name="">
             <a:extLst xmlns:a="http://schemas.openxmlformats.org/drawingml/2006/main">
               <a:ext uri="{FF2B5EF4-FFF2-40B4-BE49-F238E27FC236}">
-                <a16:creationId xmlns:a16="http://schemas.microsoft.com/office/drawing/2014/main" id="{F24EA955-1341-477F-B9E0-1F67FB906026}"/>
+                <a16:creationId xmlns:a16="http://schemas.microsoft.com/office/drawing/2014/main" id="{F4B5AD63-6E91-45DD-AE29-2F54895B988B}"/>
               </a:ext>
             </a:extLst>
           </p:cNvPr>
@@ -4580,7 +4679,7 @@
                 <a:ea typeface="Courier New"/>
                 <a:cs typeface="Courier New"/>
               </a:rPr>
-              <a:t>F     bits     value</a:t>
+              <a:t>Our format: bias = 3, Sig Bits = 3</a:t>
             </a:r>
           </a:p>
           <a:p xmlns:a="http://schemas.openxmlformats.org/drawingml/2006/main">
@@ -4604,7 +4703,7 @@
                 <a:ea typeface="Courier New"/>
                 <a:cs typeface="Courier New"/>
               </a:rPr>
-              <a:t>0     000      0/32</a:t>
+              <a:t/>
             </a:r>
           </a:p>
           <a:p xmlns:a="http://schemas.openxmlformats.org/drawingml/2006/main">
@@ -4628,7 +4727,7 @@
                 <a:ea typeface="Courier New"/>
                 <a:cs typeface="Courier New"/>
               </a:rPr>
-              <a:t>1     001      1/32</a:t>
+              <a:t>S = 0, E = 1, F = 0</a:t>
             </a:r>
           </a:p>
           <a:p xmlns:a="http://schemas.openxmlformats.org/drawingml/2006/main">
@@ -4652,7 +4751,7 @@
                 <a:ea typeface="Courier New"/>
                 <a:cs typeface="Courier New"/>
               </a:rPr>
-              <a:t>4     100      4/32 = 1/8</a:t>
+              <a:t/>
             </a:r>
           </a:p>
           <a:p xmlns:a="http://schemas.openxmlformats.org/drawingml/2006/main">
@@ -4676,11 +4775,78 @@
                 <a:ea typeface="Courier New"/>
                 <a:cs typeface="Courier New"/>
               </a:rPr>
-              <a:t>7     111      7/32</a:t>
-            </a:r>
-          </a:p>
-          <a:p xmlns:a="http://schemas.openxmlformats.org/drawingml/2006/main">
-            <a:r>
+              <a:t>value = (-1)^0 × 2^(1−3)</a:t>
+            </a:r>
+          </a:p>
+          <a:p xmlns:a="http://schemas.openxmlformats.org/drawingml/2006/main">
+            <a:pPr>
+              <a:buNone/>
+              <a:defRPr sz="1650" b="0">
+                <a:solidFill>
+                  <a:srgbClr val="A7F3D0"/>
+                </a:solidFill>
+                <a:latin typeface="Courier New"/>
+                <a:ea typeface="Courier New"/>
+                <a:cs typeface="Courier New"/>
+              </a:defRPr>
+            </a:pPr>
+            <a:r>
+              <a:rPr sz="1650" b="0">
+                <a:solidFill>
+                  <a:srgbClr val="A7F3D0"/>
+                </a:solidFill>
+                <a:latin typeface="Courier New"/>
+                <a:ea typeface="Courier New"/>
+                <a:cs typeface="Courier New"/>
+              </a:rPr>
+              <a:t>        × (1 + 0/2^3)</a:t>
+            </a:r>
+          </a:p>
+          <a:p xmlns:a="http://schemas.openxmlformats.org/drawingml/2006/main">
+            <a:pPr>
+              <a:buNone/>
+              <a:defRPr sz="1650" b="0">
+                <a:solidFill>
+                  <a:srgbClr val="A7F3D0"/>
+                </a:solidFill>
+                <a:latin typeface="Courier New"/>
+                <a:ea typeface="Courier New"/>
+                <a:cs typeface="Courier New"/>
+              </a:defRPr>
+            </a:pPr>
+            <a:r>
+              <a:rPr sz="1650" b="0">
+                <a:solidFill>
+                  <a:srgbClr val="A7F3D0"/>
+                </a:solidFill>
+                <a:latin typeface="Courier New"/>
+                <a:ea typeface="Courier New"/>
+                <a:cs typeface="Courier New"/>
+              </a:rPr>
+              <a:t>      = 1/4</a:t>
+            </a:r>
+          </a:p>
+          <a:p xmlns:a="http://schemas.openxmlformats.org/drawingml/2006/main">
+            <a:pPr>
+              <a:buNone/>
+              <a:defRPr sz="1650" b="0">
+                <a:solidFill>
+                  <a:srgbClr val="A7F3D0"/>
+                </a:solidFill>
+                <a:latin typeface="Courier New"/>
+                <a:ea typeface="Courier New"/>
+                <a:cs typeface="Courier New"/>
+              </a:defRPr>
+            </a:pPr>
+            <a:r>
+              <a:rPr sz="1650" b="0">
+                <a:solidFill>
+                  <a:srgbClr val="A7F3D0"/>
+                </a:solidFill>
+                <a:latin typeface="Courier New"/>
+                <a:ea typeface="Courier New"/>
+                <a:cs typeface="Courier New"/>
+              </a:rPr>
               <a:t/>
             </a:r>
           </a:p>
@@ -4705,7 +4871,7 @@
                 <a:ea typeface="Courier New"/>
                 <a:cs typeface="Courier New"/>
               </a:rPr>
-              <a:t>Subnormal value = F/32</a:t>
+              <a:t>1/8 is smaller → subnormal</a:t>
             </a:r>
           </a:p>
         </p:txBody>
@@ -4715,7 +4881,7 @@
           <p:cNvPr id="5" name="">
             <a:extLst xmlns:a="http://schemas.openxmlformats.org/drawingml/2006/main">
               <a:ext uri="{FF2B5EF4-FFF2-40B4-BE49-F238E27FC236}">
-                <a16:creationId xmlns:a16="http://schemas.microsoft.com/office/drawing/2014/main" id="{E8B59BBF-C1FE-4848-A1BE-0E49C6150211}"/>
+                <a16:creationId xmlns:a16="http://schemas.microsoft.com/office/drawing/2014/main" id="{10C83417-6965-41D8-8054-D122A500127B}"/>
               </a:ext>
             </a:extLst>
           </p:cNvPr>
@@ -4763,7 +4929,7 @@
                 <a:ea typeface="Arial"/>
                 <a:cs typeface="Arial"/>
               </a:rPr>
-              <a:t>Ask: what is the next value after 7/32?</a:t>
+              <a:t>For E = 0, use the subnormal rule instead of subtracting the bias.</a:t>
             </a:r>
           </a:p>
         </p:txBody>
@@ -4773,7 +4939,7 @@
           <p:cNvPr id="6" name="">
             <a:extLst xmlns:a="http://schemas.openxmlformats.org/drawingml/2006/main">
               <a:ext uri="{FF2B5EF4-FFF2-40B4-BE49-F238E27FC236}">
-                <a16:creationId xmlns:a16="http://schemas.microsoft.com/office/drawing/2014/main" id="{C1D8CDEF-F520-47D3-A60F-E6AFCB834AE6}"/>
+                <a16:creationId xmlns:a16="http://schemas.microsoft.com/office/drawing/2014/main" id="{8E1F2603-246C-497E-B2CC-C75AC3901746}"/>
               </a:ext>
             </a:extLst>
           </p:cNvPr>
@@ -4821,7 +4987,7 @@
                 <a:ea typeface="Courier New"/>
                 <a:cs typeface="Courier New"/>
               </a:rPr>
-              <a:t>12 / 24</a:t>
+              <a:t>12 / 26</a:t>
             </a:r>
           </a:p>
         </p:txBody>
@@ -4829,7 +4995,7 @@
     </p:spTree>
     <p:extLst>
       <p:ext uri="{BB962C8B-B14F-4D97-AF65-F5344CB8AC3E}">
-        <p14:creationId xmlns:p14="http://schemas.microsoft.com/office/powerpoint/2010/main" val="1006218793"/>
+        <p14:creationId xmlns:p14="http://schemas.microsoft.com/office/powerpoint/2010/main" val="1857122576"/>
       </p:ext>
     </p:extLst>
   </p:cSld>
@@ -4908,7 +5074,7 @@
                 <a:ea typeface="Courier New"/>
                 <a:cs typeface="Courier New"/>
               </a:rPr>
-              <a:t>FLOATING POINT · WORKED EXAMPLE</a:t>
+              <a:t>FLOATING POINT · SUBNORMAL RULE</a:t>
             </a:r>
           </a:p>
         </p:txBody>
@@ -4966,7 +5132,7 @@
                 <a:ea typeface="Arial"/>
                 <a:cs typeface="Arial"/>
               </a:rPr>
-              <a:t>Encode a subnormal: 1/8</a:t>
+              <a:t>E = 0 drops the hidden 1</a:t>
             </a:r>
           </a:p>
         </p:txBody>
@@ -5024,7 +5190,7 @@
                 <a:ea typeface="Arial"/>
                 <a:cs typeface="Arial"/>
               </a:rPr>
-              <a:t>1/8 is below the smallest normal, 1/4, so E = 0. A subnormal here is worth F/32. Solve F/32 = 1/8: F = 4, which is 100₂ in three bits.</a:t>
+              <a:t>Normal values start with an implied 1 before the fraction bits. When E = 0, use an implied 0 instead. Keep the same 2⁻² scale as the smallest normal so the values grow smoothly from zero.</a:t>
             </a:r>
           </a:p>
         </p:txBody>
@@ -5082,7 +5248,7 @@
                 <a:ea typeface="Courier New"/>
                 <a:cs typeface="Courier New"/>
               </a:rPr>
-              <a:t>S = 0</a:t>
+              <a:t>Fixed scale = 2^(1−bias) = 2⁻²</a:t>
             </a:r>
           </a:p>
           <a:p xmlns:a="http://schemas.openxmlformats.org/drawingml/2006/main">
@@ -5106,7 +5272,7 @@
                 <a:ea typeface="Courier New"/>
                 <a:cs typeface="Courier New"/>
               </a:rPr>
-              <a:t>E = 0 = 000₂</a:t>
+              <a:t/>
             </a:r>
           </a:p>
           <a:p xmlns:a="http://schemas.openxmlformats.org/drawingml/2006/main">
@@ -5130,17 +5296,84 @@
                 <a:ea typeface="Courier New"/>
                 <a:cs typeface="Courier New"/>
               </a:rPr>
-              <a:t>F = 4 = 100₂</a:t>
-            </a:r>
-          </a:p>
-          <a:p xmlns:a="http://schemas.openxmlformats.org/drawingml/2006/main">
-            <a:r>
+              <a:t>Normal, E = 1:</a:t>
+            </a:r>
+          </a:p>
+          <a:p xmlns:a="http://schemas.openxmlformats.org/drawingml/2006/main">
+            <a:pPr>
+              <a:buNone/>
+              <a:defRPr sz="1650">
+                <a:solidFill>
+                  <a:srgbClr val="A7F3D0"/>
+                </a:solidFill>
+                <a:latin typeface="Courier New"/>
+                <a:ea typeface="Courier New"/>
+                <a:cs typeface="Courier New"/>
+              </a:defRPr>
+            </a:pPr>
+            <a:r>
+              <a:rPr sz="1650">
+                <a:solidFill>
+                  <a:srgbClr val="A7F3D0"/>
+                </a:solidFill>
+                <a:latin typeface="Courier New"/>
+                <a:ea typeface="Courier New"/>
+                <a:cs typeface="Courier New"/>
+              </a:rPr>
+              <a:t>1.FFF₂ × 2⁻²</a:t>
+            </a:r>
+          </a:p>
+          <a:p xmlns:a="http://schemas.openxmlformats.org/drawingml/2006/main">
+            <a:pPr>
+              <a:buNone/>
+              <a:defRPr sz="1650" b="0">
+                <a:solidFill>
+                  <a:srgbClr val="A7F3D0"/>
+                </a:solidFill>
+                <a:latin typeface="Courier New"/>
+                <a:ea typeface="Courier New"/>
+                <a:cs typeface="Courier New"/>
+              </a:defRPr>
+            </a:pPr>
+            <a:r>
+              <a:rPr sz="1650" b="0">
+                <a:solidFill>
+                  <a:srgbClr val="A7F3D0"/>
+                </a:solidFill>
+                <a:latin typeface="Courier New"/>
+                <a:ea typeface="Courier New"/>
+                <a:cs typeface="Courier New"/>
+              </a:rPr>
               <a:t/>
             </a:r>
           </a:p>
           <a:p xmlns:a="http://schemas.openxmlformats.org/drawingml/2006/main">
             <a:pPr>
               <a:buNone/>
+              <a:defRPr sz="1650">
+                <a:solidFill>
+                  <a:srgbClr val="A7F3D0"/>
+                </a:solidFill>
+                <a:latin typeface="Courier New"/>
+                <a:ea typeface="Courier New"/>
+                <a:cs typeface="Courier New"/>
+              </a:defRPr>
+            </a:pPr>
+            <a:r>
+              <a:rPr sz="1650">
+                <a:solidFill>
+                  <a:srgbClr val="A7F3D0"/>
+                </a:solidFill>
+                <a:latin typeface="Courier New"/>
+                <a:ea typeface="Courier New"/>
+                <a:cs typeface="Courier New"/>
+              </a:rPr>
+              <a:t>Subnormal, E = 0:</a:t>
+            </a:r>
+          </a:p>
+          <a:p xmlns:a="http://schemas.openxmlformats.org/drawingml/2006/main">
+            <a:pPr>
+              <a:buNone/>
               <a:defRPr sz="1650" b="0">
                 <a:solidFill>
                   <a:srgbClr val="A7F3D0"/>
@@ -5159,11 +5392,30 @@
                 <a:ea typeface="Courier New"/>
                 <a:cs typeface="Courier New"/>
               </a:rPr>
-              <a:t>Fields: 0 | 000 | 100</a:t>
-            </a:r>
-          </a:p>
-          <a:p xmlns:a="http://schemas.openxmlformats.org/drawingml/2006/main">
-            <a:r>
+              <a:t>0.FFF₂ × 2⁻²</a:t>
+            </a:r>
+          </a:p>
+          <a:p xmlns:a="http://schemas.openxmlformats.org/drawingml/2006/main">
+            <a:pPr>
+              <a:buNone/>
+              <a:defRPr sz="1650" b="0">
+                <a:solidFill>
+                  <a:srgbClr val="A7F3D0"/>
+                </a:solidFill>
+                <a:latin typeface="Courier New"/>
+                <a:ea typeface="Courier New"/>
+                <a:cs typeface="Courier New"/>
+              </a:defRPr>
+            </a:pPr>
+            <a:r>
+              <a:rPr sz="1650" b="0">
+                <a:solidFill>
+                  <a:srgbClr val="A7F3D0"/>
+                </a:solidFill>
+                <a:latin typeface="Courier New"/>
+                <a:ea typeface="Courier New"/>
+                <a:cs typeface="Courier New"/>
+              </a:rPr>
               <a:t/>
             </a:r>
           </a:p>
@@ -5188,7 +5440,31 @@
                 <a:ea typeface="Courier New"/>
                 <a:cs typeface="Courier New"/>
               </a:rPr>
-              <a:t>Check: 4/32 = 1/8</a:t>
+              <a:t>F = 000  →  0.000₂ × 2⁻² = 0</a:t>
+            </a:r>
+          </a:p>
+          <a:p xmlns:a="http://schemas.openxmlformats.org/drawingml/2006/main">
+            <a:pPr>
+              <a:buNone/>
+              <a:defRPr sz="1650" b="0">
+                <a:solidFill>
+                  <a:srgbClr val="A7F3D0"/>
+                </a:solidFill>
+                <a:latin typeface="Courier New"/>
+                <a:ea typeface="Courier New"/>
+                <a:cs typeface="Courier New"/>
+              </a:defRPr>
+            </a:pPr>
+            <a:r>
+              <a:rPr sz="1650" b="0">
+                <a:solidFill>
+                  <a:srgbClr val="A7F3D0"/>
+                </a:solidFill>
+                <a:latin typeface="Courier New"/>
+                <a:ea typeface="Courier New"/>
+                <a:cs typeface="Courier New"/>
+              </a:rPr>
+              <a:t>F = 100  →  0.100₂ × 2⁻² = 1/8</a:t>
             </a:r>
           </a:p>
         </p:txBody>
@@ -5246,7 +5522,7 @@
                 <a:ea typeface="Arial"/>
                 <a:cs typeface="Arial"/>
               </a:rPr>
-              <a:t>No hidden 1: read the significand as 0.100₂.</a:t>
+              <a:t>The leading 0 or 1 is implied; only FFF is stored.</a:t>
             </a:r>
           </a:p>
         </p:txBody>
@@ -5304,7 +5580,7 @@
                 <a:ea typeface="Courier New"/>
                 <a:cs typeface="Courier New"/>
               </a:rPr>
-              <a:t>13 / 24</a:t>
+              <a:t>13 / 26</a:t>
             </a:r>
           </a:p>
         </p:txBody>
@@ -5391,7 +5667,7 @@
                 <a:ea typeface="Courier New"/>
                 <a:cs typeface="Courier New"/>
               </a:rPr>
-              <a:t>FLOATING POINT · BOUNDARY</a:t>
+              <a:t>FLOATING POINT · PLACE VALUES</a:t>
             </a:r>
           </a:p>
         </p:txBody>
@@ -5449,7 +5725,7 @@
                 <a:ea typeface="Arial"/>
                 <a:cs typeface="Arial"/>
               </a:rPr>
-              <a:t>The next normal is one step away</a:t>
+              <a:t>Subnormals count in steps of 1/32</a:t>
             </a:r>
           </a:p>
         </p:txBody>
@@ -5507,7 +5783,7 @@
                 <a:ea typeface="Arial"/>
                 <a:cs typeface="Arial"/>
               </a:rPr>
-              <a:t>The largest subnormal is 7/32. The smallest normal is 8/32. Both use the 2⁻² scale; the implied leading digit changes from 0 to 1 when E changes from 0 to 1.</a:t>
+              <a:t>For sign 0, bias 3, and Sig Bits 3, Firner’s subnormal equation becomes 2^(1−3) × (F/2^3) = F/32. So the stored Significand field F counts steps of 1/32.</a:t>
             </a:r>
           </a:p>
         </p:txBody>
@@ -5565,7 +5841,7 @@
                 <a:ea typeface="Courier New"/>
                 <a:cs typeface="Courier New"/>
               </a:rPr>
-              <a:t>E = 0, F = 111₂</a:t>
+              <a:t>F     bits     value</a:t>
             </a:r>
           </a:p>
           <a:p xmlns:a="http://schemas.openxmlformats.org/drawingml/2006/main">
@@ -5589,7 +5865,79 @@
                 <a:ea typeface="Courier New"/>
                 <a:cs typeface="Courier New"/>
               </a:rPr>
-              <a:t>0.111₂ × 2⁻² = 7/32</a:t>
+              <a:t>0     000      0/32</a:t>
+            </a:r>
+          </a:p>
+          <a:p xmlns:a="http://schemas.openxmlformats.org/drawingml/2006/main">
+            <a:pPr>
+              <a:buNone/>
+              <a:defRPr sz="1650">
+                <a:solidFill>
+                  <a:srgbClr val="A7F3D0"/>
+                </a:solidFill>
+                <a:latin typeface="Courier New"/>
+                <a:ea typeface="Courier New"/>
+                <a:cs typeface="Courier New"/>
+              </a:defRPr>
+            </a:pPr>
+            <a:r>
+              <a:rPr sz="1650">
+                <a:solidFill>
+                  <a:srgbClr val="A7F3D0"/>
+                </a:solidFill>
+                <a:latin typeface="Courier New"/>
+                <a:ea typeface="Courier New"/>
+                <a:cs typeface="Courier New"/>
+              </a:rPr>
+              <a:t>1     001      1/32</a:t>
+            </a:r>
+          </a:p>
+          <a:p xmlns:a="http://schemas.openxmlformats.org/drawingml/2006/main">
+            <a:pPr>
+              <a:buNone/>
+              <a:defRPr sz="1650" b="0">
+                <a:solidFill>
+                  <a:srgbClr val="A7F3D0"/>
+                </a:solidFill>
+                <a:latin typeface="Courier New"/>
+                <a:ea typeface="Courier New"/>
+                <a:cs typeface="Courier New"/>
+              </a:defRPr>
+            </a:pPr>
+            <a:r>
+              <a:rPr sz="1650" b="0">
+                <a:solidFill>
+                  <a:srgbClr val="A7F3D0"/>
+                </a:solidFill>
+                <a:latin typeface="Courier New"/>
+                <a:ea typeface="Courier New"/>
+                <a:cs typeface="Courier New"/>
+              </a:rPr>
+              <a:t>4     100      4/32 = 1/8</a:t>
+            </a:r>
+          </a:p>
+          <a:p xmlns:a="http://schemas.openxmlformats.org/drawingml/2006/main">
+            <a:pPr>
+              <a:buNone/>
+              <a:defRPr sz="1650" b="0">
+                <a:solidFill>
+                  <a:srgbClr val="A7F3D0"/>
+                </a:solidFill>
+                <a:latin typeface="Courier New"/>
+                <a:ea typeface="Courier New"/>
+                <a:cs typeface="Courier New"/>
+              </a:defRPr>
+            </a:pPr>
+            <a:r>
+              <a:rPr sz="1650" b="0">
+                <a:solidFill>
+                  <a:srgbClr val="A7F3D0"/>
+                </a:solidFill>
+                <a:latin typeface="Courier New"/>
+                <a:ea typeface="Courier New"/>
+                <a:cs typeface="Courier New"/>
+              </a:rPr>
+              <a:t>7     111      7/32</a:t>
             </a:r>
           </a:p>
           <a:p xmlns:a="http://schemas.openxmlformats.org/drawingml/2006/main">
@@ -5618,60 +5966,7 @@
                 <a:ea typeface="Courier New"/>
                 <a:cs typeface="Courier New"/>
               </a:rPr>
-              <a:t>E = 1, F = 000₂</a:t>
-            </a:r>
-          </a:p>
-          <a:p xmlns:a="http://schemas.openxmlformats.org/drawingml/2006/main">
-            <a:pPr>
-              <a:buNone/>
-              <a:defRPr sz="1650" b="0">
-                <a:solidFill>
-                  <a:srgbClr val="A7F3D0"/>
-                </a:solidFill>
-                <a:latin typeface="Courier New"/>
-                <a:ea typeface="Courier New"/>
-                <a:cs typeface="Courier New"/>
-              </a:defRPr>
-            </a:pPr>
-            <a:r>
-              <a:rPr sz="1650" b="0">
-                <a:solidFill>
-                  <a:srgbClr val="A7F3D0"/>
-                </a:solidFill>
-                <a:latin typeface="Courier New"/>
-                <a:ea typeface="Courier New"/>
-                <a:cs typeface="Courier New"/>
-              </a:rPr>
-              <a:t>1.000₂ × 2⁻² = 8/32</a:t>
-            </a:r>
-          </a:p>
-          <a:p xmlns:a="http://schemas.openxmlformats.org/drawingml/2006/main">
-            <a:r>
-              <a:t/>
-            </a:r>
-          </a:p>
-          <a:p xmlns:a="http://schemas.openxmlformats.org/drawingml/2006/main">
-            <a:pPr>
-              <a:buNone/>
-              <a:defRPr sz="1650" b="0">
-                <a:solidFill>
-                  <a:srgbClr val="A7F3D0"/>
-                </a:solidFill>
-                <a:latin typeface="Courier New"/>
-                <a:ea typeface="Courier New"/>
-                <a:cs typeface="Courier New"/>
-              </a:defRPr>
-            </a:pPr>
-            <a:r>
-              <a:rPr sz="1650" b="0">
-                <a:solidFill>
-                  <a:srgbClr val="A7F3D0"/>
-                </a:solidFill>
-                <a:latin typeface="Courier New"/>
-                <a:ea typeface="Courier New"/>
-                <a:cs typeface="Courier New"/>
-              </a:rPr>
-              <a:t>Gap = 1/32</a:t>
+              <a:t>Subnormal value = F/32</a:t>
             </a:r>
           </a:p>
         </p:txBody>
@@ -5729,7 +6024,7 @@
                 <a:ea typeface="Arial"/>
                 <a:cs typeface="Arial"/>
               </a:rPr>
-              <a:t>Subnormal values fill the space between zero and 1/4.</a:t>
+              <a:t>Ask: what is the next value after 7/32?</a:t>
             </a:r>
           </a:p>
         </p:txBody>
@@ -5787,7 +6082,7 @@
                 <a:ea typeface="Courier New"/>
                 <a:cs typeface="Courier New"/>
               </a:rPr>
-              <a:t>14 / 24</a:t>
+              <a:t>14 / 26</a:t>
             </a:r>
           </a:p>
         </p:txBody>
@@ -5826,7 +6121,7 @@
           <p:cNvPr id="7" name="">
             <a:extLst xmlns:a="http://schemas.openxmlformats.org/drawingml/2006/main">
               <a:ext uri="{FF2B5EF4-FFF2-40B4-BE49-F238E27FC236}">
-                <a16:creationId xmlns:a16="http://schemas.microsoft.com/office/drawing/2014/main" id="{ED6F0A3D-C361-4FA6-9CFE-2E669E0D919F}"/>
+                <a16:creationId xmlns:a16="http://schemas.microsoft.com/office/drawing/2014/main" id="{0E1C1D56-F3B0-4FC7-8312-5DCE66DE8296}"/>
               </a:ext>
             </a:extLst>
           </p:cNvPr>
@@ -5874,7 +6169,7 @@
                 <a:ea typeface="Courier New"/>
                 <a:cs typeface="Courier New"/>
               </a:rPr>
-              <a:t>FLOATING POINT · PRACTICE</a:t>
+              <a:t>FLOATING POINT · WORKED EXAMPLE</a:t>
             </a:r>
           </a:p>
         </p:txBody>
@@ -5884,7 +6179,7 @@
           <p:cNvPr id="2" name="">
             <a:extLst xmlns:a="http://schemas.openxmlformats.org/drawingml/2006/main">
               <a:ext uri="{FF2B5EF4-FFF2-40B4-BE49-F238E27FC236}">
-                <a16:creationId xmlns:a16="http://schemas.microsoft.com/office/drawing/2014/main" id="{8531682B-A598-4D48-84FE-CD10468FEB1D}"/>
+                <a16:creationId xmlns:a16="http://schemas.microsoft.com/office/drawing/2014/main" id="{47EC4111-990D-4F27-A48D-9B66E8564E29}"/>
               </a:ext>
             </a:extLst>
           </p:cNvPr>
@@ -5932,7 +6227,7 @@
                 <a:ea typeface="Arial"/>
                 <a:cs typeface="Arial"/>
               </a:rPr>
-              <a:t>Your turn: decode two patterns</a:t>
+              <a:t>Encode a subnormal: 1/8</a:t>
             </a:r>
           </a:p>
         </p:txBody>
@@ -5942,7 +6237,7 @@
           <p:cNvPr id="3" name="">
             <a:extLst xmlns:a="http://schemas.openxmlformats.org/drawingml/2006/main">
               <a:ext uri="{FF2B5EF4-FFF2-40B4-BE49-F238E27FC236}">
-                <a16:creationId xmlns:a16="http://schemas.microsoft.com/office/drawing/2014/main" id="{7C4976BE-C2D5-4F13-B1DA-E2F9D2612B6A}"/>
+                <a16:creationId xmlns:a16="http://schemas.microsoft.com/office/drawing/2014/main" id="{EA7FC2C0-68E4-440B-B218-A53A78DE1183}"/>
               </a:ext>
             </a:extLst>
           </p:cNvPr>
@@ -5990,36 +6285,7 @@
                 <a:ea typeface="Arial"/>
                 <a:cs typeface="Arial"/>
               </a:rPr>
-              <a:t>Use the same format: 3 exponent bits, bias 3, and 3 fraction bits.</a:t>
-            </a:r>
-          </a:p>
-          <a:p xmlns:a="http://schemas.openxmlformats.org/drawingml/2006/main">
-            <a:r>
-              <a:t/>
-            </a:r>
-          </a:p>
-          <a:p xmlns:a="http://schemas.openxmlformats.org/drawingml/2006/main">
-            <a:pPr>
-              <a:buNone/>
-              <a:defRPr sz="1950" b="0">
-                <a:solidFill>
-                  <a:srgbClr val="D4D4D8"/>
-                </a:solidFill>
-                <a:latin typeface="Arial"/>
-                <a:ea typeface="Arial"/>
-                <a:cs typeface="Arial"/>
-              </a:defRPr>
-            </a:pPr>
-            <a:r>
-              <a:rPr sz="1950" b="0">
-                <a:solidFill>
-                  <a:srgbClr val="D4D4D8"/>
-                </a:solidFill>
-                <a:latin typeface="Arial"/>
-                <a:ea typeface="Arial"/>
-                <a:cs typeface="Arial"/>
-              </a:rPr>
-              <a:t>For each pattern, classify it, find E and F, then calculate the value.</a:t>
+              <a:t>1/8 is below the smallest normal, 1/4, so E = 0. A subnormal here is worth F/32. Solve F/32 = 1/8: F = 4, which is 100₂ in three bits.</a:t>
             </a:r>
           </a:p>
         </p:txBody>
@@ -6029,7 +6295,7 @@
           <p:cNvPr id="4" name="">
             <a:extLst xmlns:a="http://schemas.openxmlformats.org/drawingml/2006/main">
               <a:ext uri="{FF2B5EF4-FFF2-40B4-BE49-F238E27FC236}">
-                <a16:creationId xmlns:a16="http://schemas.microsoft.com/office/drawing/2014/main" id="{97877AB9-DA81-4CB4-8D40-AAADEA86261B}"/>
+                <a16:creationId xmlns:a16="http://schemas.microsoft.com/office/drawing/2014/main" id="{C7B97746-2F05-4C79-997B-46EF673FF248}"/>
               </a:ext>
             </a:extLst>
           </p:cNvPr>
@@ -6077,7 +6343,7 @@
                 <a:ea typeface="Courier New"/>
                 <a:cs typeface="Courier New"/>
               </a:rPr>
-              <a:t>A. 0 | 010 | 100</a:t>
+              <a:t>S = 0</a:t>
             </a:r>
           </a:p>
           <a:p xmlns:a="http://schemas.openxmlformats.org/drawingml/2006/main">
@@ -6101,7 +6367,7 @@
                 <a:ea typeface="Courier New"/>
                 <a:cs typeface="Courier New"/>
               </a:rPr>
-              <a:t>   normal or subnormal?</a:t>
+              <a:t>E = 0 = 000₂</a:t>
             </a:r>
           </a:p>
           <a:p xmlns:a="http://schemas.openxmlformats.org/drawingml/2006/main">
@@ -6125,7 +6391,7 @@
                 <a:ea typeface="Courier New"/>
                 <a:cs typeface="Courier New"/>
               </a:rPr>
-              <a:t>   value = ?</a:t>
+              <a:t>F = 4 = 100₂</a:t>
             </a:r>
           </a:p>
           <a:p xmlns:a="http://schemas.openxmlformats.org/drawingml/2006/main">
@@ -6154,7 +6420,12 @@
                 <a:ea typeface="Courier New"/>
                 <a:cs typeface="Courier New"/>
               </a:rPr>
-              <a:t>B. 0 | 000 | 011</a:t>
+              <a:t>Fields: 0 | 000 | 100</a:t>
+            </a:r>
+          </a:p>
+          <a:p xmlns:a="http://schemas.openxmlformats.org/drawingml/2006/main">
+            <a:r>
+              <a:t/>
             </a:r>
           </a:p>
           <a:p xmlns:a="http://schemas.openxmlformats.org/drawingml/2006/main">
@@ -6178,7 +6449,7 @@
                 <a:ea typeface="Courier New"/>
                 <a:cs typeface="Courier New"/>
               </a:rPr>
-              <a:t>   normal or subnormal?</a:t>
+              <a:t>Check: (-1)^0 × 2^(1−3)</a:t>
             </a:r>
           </a:p>
           <a:p xmlns:a="http://schemas.openxmlformats.org/drawingml/2006/main">
@@ -6202,7 +6473,7 @@
                 <a:ea typeface="Courier New"/>
                 <a:cs typeface="Courier New"/>
               </a:rPr>
-              <a:t>   value = ?</a:t>
+              <a:t>       × (4/2^3) = 1/8</a:t>
             </a:r>
           </a:p>
         </p:txBody>
@@ -6212,7 +6483,7 @@
           <p:cNvPr id="5" name="">
             <a:extLst xmlns:a="http://schemas.openxmlformats.org/drawingml/2006/main">
               <a:ext uri="{FF2B5EF4-FFF2-40B4-BE49-F238E27FC236}">
-                <a16:creationId xmlns:a16="http://schemas.microsoft.com/office/drawing/2014/main" id="{0C768E93-B810-439B-9ECE-DACDD6255183}"/>
+                <a16:creationId xmlns:a16="http://schemas.microsoft.com/office/drawing/2014/main" id="{C953FAB2-7571-49A3-B6C8-87F90FA9D556}"/>
               </a:ext>
             </a:extLst>
           </p:cNvPr>
@@ -6260,7 +6531,7 @@
                 <a:ea typeface="Arial"/>
                 <a:cs typeface="Arial"/>
               </a:rPr>
-              <a:t>If E = 0, count F steps of 1/32. Otherwise use the normal rule.</a:t>
+              <a:t>No hidden 1: read the significand as 0.100₂.</a:t>
             </a:r>
           </a:p>
         </p:txBody>
@@ -6270,7 +6541,7 @@
           <p:cNvPr id="6" name="">
             <a:extLst xmlns:a="http://schemas.openxmlformats.org/drawingml/2006/main">
               <a:ext uri="{FF2B5EF4-FFF2-40B4-BE49-F238E27FC236}">
-                <a16:creationId xmlns:a16="http://schemas.microsoft.com/office/drawing/2014/main" id="{4E485357-E888-4A45-92E1-47CDEA8A71B2}"/>
+                <a16:creationId xmlns:a16="http://schemas.microsoft.com/office/drawing/2014/main" id="{ECE7F5E9-2417-44C6-925E-4767F90FA696}"/>
               </a:ext>
             </a:extLst>
           </p:cNvPr>
@@ -6318,7 +6589,7 @@
                 <a:ea typeface="Courier New"/>
                 <a:cs typeface="Courier New"/>
               </a:rPr>
-              <a:t>15 / 24</a:t>
+              <a:t>15 / 26</a:t>
             </a:r>
           </a:p>
         </p:txBody>
@@ -6326,7 +6597,7 @@
     </p:spTree>
     <p:extLst>
       <p:ext uri="{BB962C8B-B14F-4D97-AF65-F5344CB8AC3E}">
-        <p14:creationId xmlns:p14="http://schemas.microsoft.com/office/powerpoint/2010/main" val="1507595076"/>
+        <p14:creationId xmlns:p14="http://schemas.microsoft.com/office/powerpoint/2010/main" val="1082036242"/>
       </p:ext>
     </p:extLst>
   </p:cSld>
@@ -6357,7 +6628,7 @@
           <p:cNvPr id="7" name="">
             <a:extLst xmlns:a="http://schemas.openxmlformats.org/drawingml/2006/main">
               <a:ext uri="{FF2B5EF4-FFF2-40B4-BE49-F238E27FC236}">
-                <a16:creationId xmlns:a16="http://schemas.microsoft.com/office/drawing/2014/main" id="{7AC5D697-73A9-4130-AF88-3B9A153D538D}"/>
+                <a16:creationId xmlns:a16="http://schemas.microsoft.com/office/drawing/2014/main" id="{DF65E5C3-C59B-4F4C-8123-D26BB20B62FC}"/>
               </a:ext>
             </a:extLst>
           </p:cNvPr>
@@ -6405,7 +6676,7 @@
                 <a:ea typeface="Courier New"/>
                 <a:cs typeface="Courier New"/>
               </a:rPr>
-              <a:t>FLOATING POINT · CHECK</a:t>
+              <a:t>FLOATING POINT · BOUNDARY</a:t>
             </a:r>
           </a:p>
         </p:txBody>
@@ -6415,7 +6686,7 @@
           <p:cNvPr id="2" name="">
             <a:extLst xmlns:a="http://schemas.openxmlformats.org/drawingml/2006/main">
               <a:ext uri="{FF2B5EF4-FFF2-40B4-BE49-F238E27FC236}">
-                <a16:creationId xmlns:a16="http://schemas.microsoft.com/office/drawing/2014/main" id="{1059792B-54CD-4C1F-8A87-49C3F494D2AD}"/>
+                <a16:creationId xmlns:a16="http://schemas.microsoft.com/office/drawing/2014/main" id="{AAF148DA-667A-4F17-8947-3A10B5D66209}"/>
               </a:ext>
             </a:extLst>
           </p:cNvPr>
@@ -6463,7 +6734,7 @@
                 <a:ea typeface="Arial"/>
                 <a:cs typeface="Arial"/>
               </a:rPr>
-              <a:t>Decode answers</a:t>
+              <a:t>The next normal is one step away</a:t>
             </a:r>
           </a:p>
         </p:txBody>
@@ -6473,7 +6744,7 @@
           <p:cNvPr id="3" name="">
             <a:extLst xmlns:a="http://schemas.openxmlformats.org/drawingml/2006/main">
               <a:ext uri="{FF2B5EF4-FFF2-40B4-BE49-F238E27FC236}">
-                <a16:creationId xmlns:a16="http://schemas.microsoft.com/office/drawing/2014/main" id="{26F3E9C7-6AC5-4E40-B664-B323C1BA5CEA}"/>
+                <a16:creationId xmlns:a16="http://schemas.microsoft.com/office/drawing/2014/main" id="{9CBE9A2B-E617-4407-BF21-6D1C10DB5F7C}"/>
               </a:ext>
             </a:extLst>
           </p:cNvPr>
@@ -6521,7 +6792,7 @@
                 <a:ea typeface="Arial"/>
                 <a:cs typeface="Arial"/>
               </a:rPr>
-              <a:t>A has E = 2, so decode a normal value. B has E = 0, so its F = 3 means three steps of 1/32.</a:t>
+              <a:t>The largest subnormal is 7/32. The smallest normal is 8/32. Both use the 2⁻² scale; the implied leading digit changes from 0 to 1 when E changes from 0 to 1.</a:t>
             </a:r>
           </a:p>
         </p:txBody>
@@ -6531,7 +6802,7 @@
           <p:cNvPr id="4" name="">
             <a:extLst xmlns:a="http://schemas.openxmlformats.org/drawingml/2006/main">
               <a:ext uri="{FF2B5EF4-FFF2-40B4-BE49-F238E27FC236}">
-                <a16:creationId xmlns:a16="http://schemas.microsoft.com/office/drawing/2014/main" id="{737C1F1B-87F6-43C2-BCA8-B1C729031D72}"/>
+                <a16:creationId xmlns:a16="http://schemas.microsoft.com/office/drawing/2014/main" id="{F24EA955-1341-477F-B9E0-1F67FB906026}"/>
               </a:ext>
             </a:extLst>
           </p:cNvPr>
@@ -6579,7 +6850,7 @@
                 <a:ea typeface="Courier New"/>
                 <a:cs typeface="Courier New"/>
               </a:rPr>
-              <a:t>A. 0 | 010 | 100</a:t>
+              <a:t>E = 0, F = 111₂</a:t>
             </a:r>
           </a:p>
           <a:p xmlns:a="http://schemas.openxmlformats.org/drawingml/2006/main">
@@ -6603,7 +6874,7 @@
                 <a:ea typeface="Courier New"/>
                 <a:cs typeface="Courier New"/>
               </a:rPr>
-              <a:t>   (1 + 4/8) × 2⁻¹ = 3/4</a:t>
+              <a:t>0.111₂ × 2⁻² = 7/32</a:t>
             </a:r>
           </a:p>
           <a:p xmlns:a="http://schemas.openxmlformats.org/drawingml/2006/main">
@@ -6632,7 +6903,7 @@
                 <a:ea typeface="Courier New"/>
                 <a:cs typeface="Courier New"/>
               </a:rPr>
-              <a:t>B. 0 | 000 | 011</a:t>
+              <a:t>E = 1, F = 000₂</a:t>
             </a:r>
           </a:p>
           <a:p xmlns:a="http://schemas.openxmlformats.org/drawingml/2006/main">
@@ -6656,7 +6927,36 @@
                 <a:ea typeface="Courier New"/>
                 <a:cs typeface="Courier New"/>
               </a:rPr>
-              <a:t>   F = 3  →  3/32</a:t>
+              <a:t>1.000₂ × 2⁻² = 8/32</a:t>
+            </a:r>
+          </a:p>
+          <a:p xmlns:a="http://schemas.openxmlformats.org/drawingml/2006/main">
+            <a:r>
+              <a:t/>
+            </a:r>
+          </a:p>
+          <a:p xmlns:a="http://schemas.openxmlformats.org/drawingml/2006/main">
+            <a:pPr>
+              <a:buNone/>
+              <a:defRPr sz="1650" b="0">
+                <a:solidFill>
+                  <a:srgbClr val="A7F3D0"/>
+                </a:solidFill>
+                <a:latin typeface="Courier New"/>
+                <a:ea typeface="Courier New"/>
+                <a:cs typeface="Courier New"/>
+              </a:defRPr>
+            </a:pPr>
+            <a:r>
+              <a:rPr sz="1650" b="0">
+                <a:solidFill>
+                  <a:srgbClr val="A7F3D0"/>
+                </a:solidFill>
+                <a:latin typeface="Courier New"/>
+                <a:ea typeface="Courier New"/>
+                <a:cs typeface="Courier New"/>
+              </a:rPr>
+              <a:t>Gap = 1/32</a:t>
             </a:r>
           </a:p>
         </p:txBody>
@@ -6666,7 +6966,7 @@
           <p:cNvPr id="5" name="">
             <a:extLst xmlns:a="http://schemas.openxmlformats.org/drawingml/2006/main">
               <a:ext uri="{FF2B5EF4-FFF2-40B4-BE49-F238E27FC236}">
-                <a16:creationId xmlns:a16="http://schemas.microsoft.com/office/drawing/2014/main" id="{9DAD2664-9B32-4402-A088-C1DEBD68E3CD}"/>
+                <a16:creationId xmlns:a16="http://schemas.microsoft.com/office/drawing/2014/main" id="{E8B59BBF-C1FE-4848-A1BE-0E49C6150211}"/>
               </a:ext>
             </a:extLst>
           </p:cNvPr>
@@ -6714,7 +7014,7 @@
                 <a:ea typeface="Arial"/>
                 <a:cs typeface="Arial"/>
               </a:rPr>
-              <a:t>If the answer seems surprising, decode the same fields back into the formula.</a:t>
+              <a:t>Subnormal values fill the space between zero and 1/4.</a:t>
             </a:r>
           </a:p>
         </p:txBody>
@@ -6724,7 +7024,7 @@
           <p:cNvPr id="6" name="">
             <a:extLst xmlns:a="http://schemas.openxmlformats.org/drawingml/2006/main">
               <a:ext uri="{FF2B5EF4-FFF2-40B4-BE49-F238E27FC236}">
-                <a16:creationId xmlns:a16="http://schemas.microsoft.com/office/drawing/2014/main" id="{DBE61FAB-FD81-4893-85F8-90700B31187C}"/>
+                <a16:creationId xmlns:a16="http://schemas.microsoft.com/office/drawing/2014/main" id="{C1D8CDEF-F520-47D3-A60F-E6AFCB834AE6}"/>
               </a:ext>
             </a:extLst>
           </p:cNvPr>
@@ -6772,7 +7072,7 @@
                 <a:ea typeface="Courier New"/>
                 <a:cs typeface="Courier New"/>
               </a:rPr>
-              <a:t>16 / 24</a:t>
+              <a:t>16 / 26</a:t>
             </a:r>
           </a:p>
         </p:txBody>
@@ -6780,7 +7080,7 @@
     </p:spTree>
     <p:extLst>
       <p:ext uri="{BB962C8B-B14F-4D97-AF65-F5344CB8AC3E}">
-        <p14:creationId xmlns:p14="http://schemas.microsoft.com/office/powerpoint/2010/main" val="1502731382"/>
+        <p14:creationId xmlns:p14="http://schemas.microsoft.com/office/powerpoint/2010/main" val="1006218793"/>
       </p:ext>
     </p:extLst>
   </p:cSld>
@@ -6811,7 +7111,7 @@
           <p:cNvPr id="7" name="">
             <a:extLst xmlns:a="http://schemas.openxmlformats.org/drawingml/2006/main">
               <a:ext uri="{FF2B5EF4-FFF2-40B4-BE49-F238E27FC236}">
-                <a16:creationId xmlns:a16="http://schemas.microsoft.com/office/drawing/2014/main" id="{35A724E8-02D1-4C78-A9D3-AE6AD6E2D594}"/>
+                <a16:creationId xmlns:a16="http://schemas.microsoft.com/office/drawing/2014/main" id="{ED6F0A3D-C361-4FA6-9CFE-2E669E0D919F}"/>
               </a:ext>
             </a:extLst>
           </p:cNvPr>
@@ -6869,7 +7169,7 @@
           <p:cNvPr id="2" name="">
             <a:extLst xmlns:a="http://schemas.openxmlformats.org/drawingml/2006/main">
               <a:ext uri="{FF2B5EF4-FFF2-40B4-BE49-F238E27FC236}">
-                <a16:creationId xmlns:a16="http://schemas.microsoft.com/office/drawing/2014/main" id="{D68140D5-AD40-4B2D-9276-45B94835A98B}"/>
+                <a16:creationId xmlns:a16="http://schemas.microsoft.com/office/drawing/2014/main" id="{8531682B-A598-4D48-84FE-CD10468FEB1D}"/>
               </a:ext>
             </a:extLst>
           </p:cNvPr>
@@ -6917,7 +7217,7 @@
                 <a:ea typeface="Arial"/>
                 <a:cs typeface="Arial"/>
               </a:rPr>
-              <a:t>Your turn: classify two ratios</a:t>
+              <a:t>Your turn: decode two patterns</a:t>
             </a:r>
           </a:p>
         </p:txBody>
@@ -6927,7 +7227,7 @@
           <p:cNvPr id="3" name="">
             <a:extLst xmlns:a="http://schemas.openxmlformats.org/drawingml/2006/main">
               <a:ext uri="{FF2B5EF4-FFF2-40B4-BE49-F238E27FC236}">
-                <a16:creationId xmlns:a16="http://schemas.microsoft.com/office/drawing/2014/main" id="{AA9609DC-0513-451F-B1A4-CD75618D8A9F}"/>
+                <a16:creationId xmlns:a16="http://schemas.microsoft.com/office/drawing/2014/main" id="{7C4976BE-C2D5-4F13-B1DA-E2F9D2612B6A}"/>
               </a:ext>
             </a:extLst>
           </p:cNvPr>
@@ -6975,7 +7275,7 @@
                 <a:ea typeface="Arial"/>
                 <a:cs typeface="Arial"/>
               </a:rPr>
-              <a:t>Use the same practice format: 3 exponent bits, bias 3, and 3 fraction bits.</a:t>
+              <a:t>Use the same format: 3 exponent bits, bias 3, and 3 fraction bits.</a:t>
             </a:r>
           </a:p>
           <a:p xmlns:a="http://schemas.openxmlformats.org/drawingml/2006/main">
@@ -7004,7 +7304,7 @@
                 <a:ea typeface="Arial"/>
                 <a:cs typeface="Arial"/>
               </a:rPr>
-              <a:t>For each ratio, decide normal or subnormal, then find E and F.</a:t>
+              <a:t>For each pattern, classify it, find E and F, then calculate the value.</a:t>
             </a:r>
           </a:p>
         </p:txBody>
@@ -7014,7 +7314,7 @@
           <p:cNvPr id="4" name="">
             <a:extLst xmlns:a="http://schemas.openxmlformats.org/drawingml/2006/main">
               <a:ext uri="{FF2B5EF4-FFF2-40B4-BE49-F238E27FC236}">
-                <a16:creationId xmlns:a16="http://schemas.microsoft.com/office/drawing/2014/main" id="{37A2E272-B675-4F8B-8D9A-1DD0C7D3E885}"/>
+                <a16:creationId xmlns:a16="http://schemas.microsoft.com/office/drawing/2014/main" id="{97877AB9-DA81-4CB4-8D40-AAADEA86261B}"/>
               </a:ext>
             </a:extLst>
           </p:cNvPr>
@@ -7062,7 +7362,7 @@
                 <a:ea typeface="Courier New"/>
                 <a:cs typeface="Courier New"/>
               </a:rPr>
-              <a:t>A. 3/2</a:t>
+              <a:t>A. 0 | 010 | 100</a:t>
             </a:r>
           </a:p>
           <a:p xmlns:a="http://schemas.openxmlformats.org/drawingml/2006/main">
@@ -7110,7 +7410,7 @@
                 <a:ea typeface="Courier New"/>
                 <a:cs typeface="Courier New"/>
               </a:rPr>
-              <a:t>   E = ?   F = ?</a:t>
+              <a:t>   value = ?</a:t>
             </a:r>
           </a:p>
           <a:p xmlns:a="http://schemas.openxmlformats.org/drawingml/2006/main">
@@ -7139,7 +7439,7 @@
                 <a:ea typeface="Courier New"/>
                 <a:cs typeface="Courier New"/>
               </a:rPr>
-              <a:t>B. 3/16</a:t>
+              <a:t>B. 0 | 000 | 011</a:t>
             </a:r>
           </a:p>
           <a:p xmlns:a="http://schemas.openxmlformats.org/drawingml/2006/main">
@@ -7187,7 +7487,7 @@
                 <a:ea typeface="Courier New"/>
                 <a:cs typeface="Courier New"/>
               </a:rPr>
-              <a:t>   E = ?   F = ?</a:t>
+              <a:t>   value = ?</a:t>
             </a:r>
           </a:p>
         </p:txBody>
@@ -7197,7 +7497,7 @@
           <p:cNvPr id="5" name="">
             <a:extLst xmlns:a="http://schemas.openxmlformats.org/drawingml/2006/main">
               <a:ext uri="{FF2B5EF4-FFF2-40B4-BE49-F238E27FC236}">
-                <a16:creationId xmlns:a16="http://schemas.microsoft.com/office/drawing/2014/main" id="{8F900304-F8E7-4C1C-B3A0-F1A0DD604211}"/>
+                <a16:creationId xmlns:a16="http://schemas.microsoft.com/office/drawing/2014/main" id="{0C768E93-B810-439B-9ECE-DACDD6255183}"/>
               </a:ext>
             </a:extLst>
           </p:cNvPr>
@@ -7245,7 +7545,7 @@
                 <a:ea typeface="Arial"/>
                 <a:cs typeface="Arial"/>
               </a:rPr>
-              <a:t>Compare each value with the smallest normal, 1/4, before finding bits.</a:t>
+              <a:t>If E = 0, count F steps of 1/32. Otherwise use the normal rule.</a:t>
             </a:r>
           </a:p>
         </p:txBody>
@@ -7255,7 +7555,7 @@
           <p:cNvPr id="6" name="">
             <a:extLst xmlns:a="http://schemas.openxmlformats.org/drawingml/2006/main">
               <a:ext uri="{FF2B5EF4-FFF2-40B4-BE49-F238E27FC236}">
-                <a16:creationId xmlns:a16="http://schemas.microsoft.com/office/drawing/2014/main" id="{16200DCD-0F16-4BE6-9538-9FDAF86C958E}"/>
+                <a16:creationId xmlns:a16="http://schemas.microsoft.com/office/drawing/2014/main" id="{4E485357-E888-4A45-92E1-47CDEA8A71B2}"/>
               </a:ext>
             </a:extLst>
           </p:cNvPr>
@@ -7303,7 +7603,7 @@
                 <a:ea typeface="Courier New"/>
                 <a:cs typeface="Courier New"/>
               </a:rPr>
-              <a:t>17 / 24</a:t>
+              <a:t>17 / 26</a:t>
             </a:r>
           </a:p>
         </p:txBody>
@@ -7311,7 +7611,7 @@
     </p:spTree>
     <p:extLst>
       <p:ext uri="{BB962C8B-B14F-4D97-AF65-F5344CB8AC3E}">
-        <p14:creationId xmlns:p14="http://schemas.microsoft.com/office/powerpoint/2010/main" val="2079659254"/>
+        <p14:creationId xmlns:p14="http://schemas.microsoft.com/office/powerpoint/2010/main" val="1507595076"/>
       </p:ext>
     </p:extLst>
   </p:cSld>
@@ -7342,7 +7642,7 @@
           <p:cNvPr id="7" name="">
             <a:extLst xmlns:a="http://schemas.openxmlformats.org/drawingml/2006/main">
               <a:ext uri="{FF2B5EF4-FFF2-40B4-BE49-F238E27FC236}">
-                <a16:creationId xmlns:a16="http://schemas.microsoft.com/office/drawing/2014/main" id="{D25A2A70-779E-4A39-9AD5-537DDE3C5B7A}"/>
+                <a16:creationId xmlns:a16="http://schemas.microsoft.com/office/drawing/2014/main" id="{7AC5D697-73A9-4130-AF88-3B9A153D538D}"/>
               </a:ext>
             </a:extLst>
           </p:cNvPr>
@@ -7400,7 +7700,7 @@
           <p:cNvPr id="2" name="">
             <a:extLst xmlns:a="http://schemas.openxmlformats.org/drawingml/2006/main">
               <a:ext uri="{FF2B5EF4-FFF2-40B4-BE49-F238E27FC236}">
-                <a16:creationId xmlns:a16="http://schemas.microsoft.com/office/drawing/2014/main" id="{2F2733A3-E106-4C90-B097-BE7CB4577892}"/>
+                <a16:creationId xmlns:a16="http://schemas.microsoft.com/office/drawing/2014/main" id="{1059792B-54CD-4C1F-8A87-49C3F494D2AD}"/>
               </a:ext>
             </a:extLst>
           </p:cNvPr>
@@ -7448,7 +7748,7 @@
                 <a:ea typeface="Arial"/>
                 <a:cs typeface="Arial"/>
               </a:rPr>
-              <a:t>Practice answers</a:t>
+              <a:t>Decode answers</a:t>
             </a:r>
           </a:p>
         </p:txBody>
@@ -7458,7 +7758,7 @@
           <p:cNvPr id="3" name="">
             <a:extLst xmlns:a="http://schemas.openxmlformats.org/drawingml/2006/main">
               <a:ext uri="{FF2B5EF4-FFF2-40B4-BE49-F238E27FC236}">
-                <a16:creationId xmlns:a16="http://schemas.microsoft.com/office/drawing/2014/main" id="{53BB6D32-B5C1-4BFB-8D41-7B7055B1A606}"/>
+                <a16:creationId xmlns:a16="http://schemas.microsoft.com/office/drawing/2014/main" id="{26F3E9C7-6AC5-4E40-B664-B323C1BA5CEA}"/>
               </a:ext>
             </a:extLst>
           </p:cNvPr>
@@ -7506,36 +7806,7 @@
                 <a:ea typeface="Arial"/>
                 <a:cs typeface="Arial"/>
               </a:rPr>
-              <a:t>3/2 = 1.100₂ × 2⁰, so it is normal.</a:t>
-            </a:r>
-          </a:p>
-          <a:p xmlns:a="http://schemas.openxmlformats.org/drawingml/2006/main">
-            <a:r>
-              <a:t/>
-            </a:r>
-          </a:p>
-          <a:p xmlns:a="http://schemas.openxmlformats.org/drawingml/2006/main">
-            <a:pPr>
-              <a:buNone/>
-              <a:defRPr sz="1950" b="0">
-                <a:solidFill>
-                  <a:srgbClr val="D4D4D8"/>
-                </a:solidFill>
-                <a:latin typeface="Arial"/>
-                <a:ea typeface="Arial"/>
-                <a:cs typeface="Arial"/>
-              </a:defRPr>
-            </a:pPr>
-            <a:r>
-              <a:rPr sz="1950" b="0">
-                <a:solidFill>
-                  <a:srgbClr val="D4D4D8"/>
-                </a:solidFill>
-                <a:latin typeface="Arial"/>
-                <a:ea typeface="Arial"/>
-                <a:cs typeface="Arial"/>
-              </a:rPr>
-              <a:t>3/16 is below 1/4, so it is subnormal. Since value = F/32, F = 6.</a:t>
+              <a:t>A has E = 2, so decode a normal value. B has E = 0, so its F = 3 means three steps of 1/32.</a:t>
             </a:r>
           </a:p>
         </p:txBody>
@@ -7545,7 +7816,7 @@
           <p:cNvPr id="4" name="">
             <a:extLst xmlns:a="http://schemas.openxmlformats.org/drawingml/2006/main">
               <a:ext uri="{FF2B5EF4-FFF2-40B4-BE49-F238E27FC236}">
-                <a16:creationId xmlns:a16="http://schemas.microsoft.com/office/drawing/2014/main" id="{CD85FA7D-EF72-4F2A-85B4-517634BC5BE7}"/>
+                <a16:creationId xmlns:a16="http://schemas.microsoft.com/office/drawing/2014/main" id="{737C1F1B-87F6-43C2-BCA8-B1C729031D72}"/>
               </a:ext>
             </a:extLst>
           </p:cNvPr>
@@ -7593,7 +7864,7 @@
                 <a:ea typeface="Courier New"/>
                 <a:cs typeface="Courier New"/>
               </a:rPr>
-              <a:t>A. 3/2</a:t>
+              <a:t>A. 0 | 010 | 100</a:t>
             </a:r>
           </a:p>
           <a:p xmlns:a="http://schemas.openxmlformats.org/drawingml/2006/main">
@@ -7617,7 +7888,12 @@
                 <a:ea typeface="Courier New"/>
                 <a:cs typeface="Courier New"/>
               </a:rPr>
-              <a:t>   E = 3 = 011₂</a:t>
+              <a:t>   2^(2−3) × (1 + 4/2^3) = 3/4</a:t>
+            </a:r>
+          </a:p>
+          <a:p xmlns:a="http://schemas.openxmlformats.org/drawingml/2006/main">
+            <a:r>
+              <a:t/>
             </a:r>
           </a:p>
           <a:p xmlns:a="http://schemas.openxmlformats.org/drawingml/2006/main">
@@ -7641,7 +7917,7 @@
                 <a:ea typeface="Courier New"/>
                 <a:cs typeface="Courier New"/>
               </a:rPr>
-              <a:t>   F = 4 = 100₂</a:t>
+              <a:t>B. 0 | 000 | 011</a:t>
             </a:r>
           </a:p>
           <a:p xmlns:a="http://schemas.openxmlformats.org/drawingml/2006/main">
@@ -7665,108 +7941,7 @@
                 <a:ea typeface="Courier New"/>
                 <a:cs typeface="Courier New"/>
               </a:rPr>
-              <a:t>   Check: (1 + 4/8) × 1 = 3/2</a:t>
-            </a:r>
-          </a:p>
-          <a:p xmlns:a="http://schemas.openxmlformats.org/drawingml/2006/main">
-            <a:r>
-              <a:t/>
-            </a:r>
-          </a:p>
-          <a:p xmlns:a="http://schemas.openxmlformats.org/drawingml/2006/main">
-            <a:pPr>
-              <a:buNone/>
-              <a:defRPr sz="1650" b="0">
-                <a:solidFill>
-                  <a:srgbClr val="A7F3D0"/>
-                </a:solidFill>
-                <a:latin typeface="Courier New"/>
-                <a:ea typeface="Courier New"/>
-                <a:cs typeface="Courier New"/>
-              </a:defRPr>
-            </a:pPr>
-            <a:r>
-              <a:rPr sz="1650" b="0">
-                <a:solidFill>
-                  <a:srgbClr val="A7F3D0"/>
-                </a:solidFill>
-                <a:latin typeface="Courier New"/>
-                <a:ea typeface="Courier New"/>
-                <a:cs typeface="Courier New"/>
-              </a:rPr>
-              <a:t>B. 3/16</a:t>
-            </a:r>
-          </a:p>
-          <a:p xmlns:a="http://schemas.openxmlformats.org/drawingml/2006/main">
-            <a:pPr>
-              <a:buNone/>
-              <a:defRPr sz="1650" b="0">
-                <a:solidFill>
-                  <a:srgbClr val="A7F3D0"/>
-                </a:solidFill>
-                <a:latin typeface="Courier New"/>
-                <a:ea typeface="Courier New"/>
-                <a:cs typeface="Courier New"/>
-              </a:defRPr>
-            </a:pPr>
-            <a:r>
-              <a:rPr sz="1650" b="0">
-                <a:solidFill>
-                  <a:srgbClr val="A7F3D0"/>
-                </a:solidFill>
-                <a:latin typeface="Courier New"/>
-                <a:ea typeface="Courier New"/>
-                <a:cs typeface="Courier New"/>
-              </a:rPr>
-              <a:t>   E = 0 = 000₂</a:t>
-            </a:r>
-          </a:p>
-          <a:p xmlns:a="http://schemas.openxmlformats.org/drawingml/2006/main">
-            <a:pPr>
-              <a:buNone/>
-              <a:defRPr sz="1650" b="0">
-                <a:solidFill>
-                  <a:srgbClr val="A7F3D0"/>
-                </a:solidFill>
-                <a:latin typeface="Courier New"/>
-                <a:ea typeface="Courier New"/>
-                <a:cs typeface="Courier New"/>
-              </a:defRPr>
-            </a:pPr>
-            <a:r>
-              <a:rPr sz="1650" b="0">
-                <a:solidFill>
-                  <a:srgbClr val="A7F3D0"/>
-                </a:solidFill>
-                <a:latin typeface="Courier New"/>
-                <a:ea typeface="Courier New"/>
-                <a:cs typeface="Courier New"/>
-              </a:rPr>
-              <a:t>   F = 6 = 110₂</a:t>
-            </a:r>
-          </a:p>
-          <a:p xmlns:a="http://schemas.openxmlformats.org/drawingml/2006/main">
-            <a:pPr>
-              <a:buNone/>
-              <a:defRPr sz="1650" b="0">
-                <a:solidFill>
-                  <a:srgbClr val="A7F3D0"/>
-                </a:solidFill>
-                <a:latin typeface="Courier New"/>
-                <a:ea typeface="Courier New"/>
-                <a:cs typeface="Courier New"/>
-              </a:defRPr>
-            </a:pPr>
-            <a:r>
-              <a:rPr sz="1650" b="0">
-                <a:solidFill>
-                  <a:srgbClr val="A7F3D0"/>
-                </a:solidFill>
-                <a:latin typeface="Courier New"/>
-                <a:ea typeface="Courier New"/>
-                <a:cs typeface="Courier New"/>
-              </a:rPr>
-              <a:t>   Check: 6/32 = 3/16</a:t>
+              <a:t>   2^(1−3) × (3/2^3) = 3/32</a:t>
             </a:r>
           </a:p>
         </p:txBody>
@@ -7776,7 +7951,7 @@
           <p:cNvPr id="5" name="">
             <a:extLst xmlns:a="http://schemas.openxmlformats.org/drawingml/2006/main">
               <a:ext uri="{FF2B5EF4-FFF2-40B4-BE49-F238E27FC236}">
-                <a16:creationId xmlns:a16="http://schemas.microsoft.com/office/drawing/2014/main" id="{09DD94A5-8CF6-4CC6-9FAF-1AAE9F86C651}"/>
+                <a16:creationId xmlns:a16="http://schemas.microsoft.com/office/drawing/2014/main" id="{9DAD2664-9B32-4402-A088-C1DEBD68E3CD}"/>
               </a:ext>
             </a:extLst>
           </p:cNvPr>
@@ -7824,7 +7999,7 @@
                 <a:ea typeface="Arial"/>
                 <a:cs typeface="Arial"/>
               </a:rPr>
-              <a:t>A fraction can be exactly representable in one format and not another.</a:t>
+              <a:t>If the answer seems surprising, decode the same fields back into the formula.</a:t>
             </a:r>
           </a:p>
         </p:txBody>
@@ -7834,7 +8009,7 @@
           <p:cNvPr id="6" name="">
             <a:extLst xmlns:a="http://schemas.openxmlformats.org/drawingml/2006/main">
               <a:ext uri="{FF2B5EF4-FFF2-40B4-BE49-F238E27FC236}">
-                <a16:creationId xmlns:a16="http://schemas.microsoft.com/office/drawing/2014/main" id="{BEB8226B-AC16-4616-9E79-3B5C231B3962}"/>
+                <a16:creationId xmlns:a16="http://schemas.microsoft.com/office/drawing/2014/main" id="{DBE61FAB-FD81-4893-85F8-90700B31187C}"/>
               </a:ext>
             </a:extLst>
           </p:cNvPr>
@@ -7882,7 +8057,7 @@
                 <a:ea typeface="Courier New"/>
                 <a:cs typeface="Courier New"/>
               </a:rPr>
-              <a:t>18 / 24</a:t>
+              <a:t>18 / 26</a:t>
             </a:r>
           </a:p>
         </p:txBody>
@@ -7890,7 +8065,7 @@
     </p:spTree>
     <p:extLst>
       <p:ext uri="{BB962C8B-B14F-4D97-AF65-F5344CB8AC3E}">
-        <p14:creationId xmlns:p14="http://schemas.microsoft.com/office/powerpoint/2010/main" val="1590754296"/>
+        <p14:creationId xmlns:p14="http://schemas.microsoft.com/office/powerpoint/2010/main" val="1502731382"/>
       </p:ext>
     </p:extLst>
   </p:cSld>
@@ -7921,7 +8096,7 @@
           <p:cNvPr id="7" name="">
             <a:extLst xmlns:a="http://schemas.openxmlformats.org/drawingml/2006/main">
               <a:ext uri="{FF2B5EF4-FFF2-40B4-BE49-F238E27FC236}">
-                <a16:creationId xmlns:a16="http://schemas.microsoft.com/office/drawing/2014/main" id="{93E43C1D-677A-4484-B42E-435337BCED51}"/>
+                <a16:creationId xmlns:a16="http://schemas.microsoft.com/office/drawing/2014/main" id="{35A724E8-02D1-4C78-A9D3-AE6AD6E2D594}"/>
               </a:ext>
             </a:extLst>
           </p:cNvPr>
@@ -7969,7 +8144,7 @@
                 <a:ea typeface="Courier New"/>
                 <a:cs typeface="Courier New"/>
               </a:rPr>
-              <a:t>FLOATING POINT · PRECISION</a:t>
+              <a:t>FLOATING POINT · PRACTICE</a:t>
             </a:r>
           </a:p>
         </p:txBody>
@@ -7979,7 +8154,7 @@
           <p:cNvPr id="2" name="">
             <a:extLst xmlns:a="http://schemas.openxmlformats.org/drawingml/2006/main">
               <a:ext uri="{FF2B5EF4-FFF2-40B4-BE49-F238E27FC236}">
-                <a16:creationId xmlns:a16="http://schemas.microsoft.com/office/drawing/2014/main" id="{074B736B-6CBC-48AB-BB9C-B94B56E89F35}"/>
+                <a16:creationId xmlns:a16="http://schemas.microsoft.com/office/drawing/2014/main" id="{D68140D5-AD40-4B2D-9276-45B94835A98B}"/>
               </a:ext>
             </a:extLst>
           </p:cNvPr>
@@ -8027,7 +8202,7 @@
                 <a:ea typeface="Arial"/>
                 <a:cs typeface="Arial"/>
               </a:rPr>
-              <a:t>Some ratios need rounding</a:t>
+              <a:t>Your turn: classify two ratios</a:t>
             </a:r>
           </a:p>
         </p:txBody>
@@ -8037,7 +8212,7 @@
           <p:cNvPr id="3" name="">
             <a:extLst xmlns:a="http://schemas.openxmlformats.org/drawingml/2006/main">
               <a:ext uri="{FF2B5EF4-FFF2-40B4-BE49-F238E27FC236}">
-                <a16:creationId xmlns:a16="http://schemas.microsoft.com/office/drawing/2014/main" id="{31BF5015-85C0-4422-9A8D-3AB1598AB1B5}"/>
+                <a16:creationId xmlns:a16="http://schemas.microsoft.com/office/drawing/2014/main" id="{AA9609DC-0513-451F-B1A4-CD75618D8A9F}"/>
               </a:ext>
             </a:extLst>
           </p:cNvPr>
@@ -8085,7 +8260,7 @@
                 <a:ea typeface="Arial"/>
                 <a:cs typeface="Arial"/>
               </a:rPr>
-              <a:t>Only eight fraction patterns fit in three bits. A ratio such as 1/3 has a repeating binary expansion and cannot be stored exactly.</a:t>
+              <a:t>Use the same practice format: 3 exponent bits, bias 3, and 3 fraction bits.</a:t>
             </a:r>
           </a:p>
           <a:p xmlns:a="http://schemas.openxmlformats.org/drawingml/2006/main">
@@ -8114,7 +8289,7 @@
                 <a:ea typeface="Arial"/>
                 <a:cs typeface="Arial"/>
               </a:rPr>
-              <a:t>The required rounding rule decides which nearby value to store.</a:t>
+              <a:t>For each ratio, decide normal or subnormal, then find E and F.</a:t>
             </a:r>
           </a:p>
         </p:txBody>
@@ -8124,7 +8299,7 @@
           <p:cNvPr id="4" name="">
             <a:extLst xmlns:a="http://schemas.openxmlformats.org/drawingml/2006/main">
               <a:ext uri="{FF2B5EF4-FFF2-40B4-BE49-F238E27FC236}">
-                <a16:creationId xmlns:a16="http://schemas.microsoft.com/office/drawing/2014/main" id="{442E6650-2F07-46E8-968E-92CAC81BA173}"/>
+                <a16:creationId xmlns:a16="http://schemas.microsoft.com/office/drawing/2014/main" id="{37A2E272-B675-4F8B-8D9A-1DD0C7D3E885}"/>
               </a:ext>
             </a:extLst>
           </p:cNvPr>
@@ -8172,7 +8347,55 @@
                 <a:ea typeface="Courier New"/>
                 <a:cs typeface="Courier New"/>
               </a:rPr>
-              <a:t>1/3 = 1.010101…₂ × 2⁻²</a:t>
+              <a:t>A. 3/2</a:t>
+            </a:r>
+          </a:p>
+          <a:p xmlns:a="http://schemas.openxmlformats.org/drawingml/2006/main">
+            <a:pPr>
+              <a:buNone/>
+              <a:defRPr sz="1650" b="0">
+                <a:solidFill>
+                  <a:srgbClr val="A7F3D0"/>
+                </a:solidFill>
+                <a:latin typeface="Courier New"/>
+                <a:ea typeface="Courier New"/>
+                <a:cs typeface="Courier New"/>
+              </a:defRPr>
+            </a:pPr>
+            <a:r>
+              <a:rPr sz="1650" b="0">
+                <a:solidFill>
+                  <a:srgbClr val="A7F3D0"/>
+                </a:solidFill>
+                <a:latin typeface="Courier New"/>
+                <a:ea typeface="Courier New"/>
+                <a:cs typeface="Courier New"/>
+              </a:rPr>
+              <a:t>   normal or subnormal?</a:t>
+            </a:r>
+          </a:p>
+          <a:p xmlns:a="http://schemas.openxmlformats.org/drawingml/2006/main">
+            <a:pPr>
+              <a:buNone/>
+              <a:defRPr sz="1650" b="0">
+                <a:solidFill>
+                  <a:srgbClr val="A7F3D0"/>
+                </a:solidFill>
+                <a:latin typeface="Courier New"/>
+                <a:ea typeface="Courier New"/>
+                <a:cs typeface="Courier New"/>
+              </a:defRPr>
+            </a:pPr>
+            <a:r>
+              <a:rPr sz="1650" b="0">
+                <a:solidFill>
+                  <a:srgbClr val="A7F3D0"/>
+                </a:solidFill>
+                <a:latin typeface="Courier New"/>
+                <a:ea typeface="Courier New"/>
+                <a:cs typeface="Courier New"/>
+              </a:rPr>
+              <a:t>   E = ?   F = ?</a:t>
             </a:r>
           </a:p>
           <a:p xmlns:a="http://schemas.openxmlformats.org/drawingml/2006/main">
@@ -8201,7 +8424,7 @@
                 <a:ea typeface="Courier New"/>
                 <a:cs typeface="Courier New"/>
               </a:rPr>
-              <a:t>Nearby values in this format:</a:t>
+              <a:t>B. 3/16</a:t>
             </a:r>
           </a:p>
           <a:p xmlns:a="http://schemas.openxmlformats.org/drawingml/2006/main">
@@ -8225,7 +8448,7 @@
                 <a:ea typeface="Courier New"/>
                 <a:cs typeface="Courier New"/>
               </a:rPr>
-              <a:t>F = 010₂  →  5/16</a:t>
+              <a:t>   normal or subnormal?</a:t>
             </a:r>
           </a:p>
           <a:p xmlns:a="http://schemas.openxmlformats.org/drawingml/2006/main">
@@ -8249,36 +8472,7 @@
                 <a:ea typeface="Courier New"/>
                 <a:cs typeface="Courier New"/>
               </a:rPr>
-              <a:t>F = 011₂  →  11/32</a:t>
-            </a:r>
-          </a:p>
-          <a:p xmlns:a="http://schemas.openxmlformats.org/drawingml/2006/main">
-            <a:r>
-              <a:t/>
-            </a:r>
-          </a:p>
-          <a:p xmlns:a="http://schemas.openxmlformats.org/drawingml/2006/main">
-            <a:pPr>
-              <a:buNone/>
-              <a:defRPr sz="1650" b="0">
-                <a:solidFill>
-                  <a:srgbClr val="A7F3D0"/>
-                </a:solidFill>
-                <a:latin typeface="Courier New"/>
-                <a:ea typeface="Courier New"/>
-                <a:cs typeface="Courier New"/>
-              </a:defRPr>
-            </a:pPr>
-            <a:r>
-              <a:rPr sz="1650" b="0">
-                <a:solidFill>
-                  <a:srgbClr val="A7F3D0"/>
-                </a:solidFill>
-                <a:latin typeface="Courier New"/>
-                <a:ea typeface="Courier New"/>
-                <a:cs typeface="Courier New"/>
-              </a:rPr>
-              <a:t>Neither is exactly 1/3.</a:t>
+              <a:t>   E = ?   F = ?</a:t>
             </a:r>
           </a:p>
         </p:txBody>
@@ -8288,7 +8482,7 @@
           <p:cNvPr id="5" name="">
             <a:extLst xmlns:a="http://schemas.openxmlformats.org/drawingml/2006/main">
               <a:ext uri="{FF2B5EF4-FFF2-40B4-BE49-F238E27FC236}">
-                <a16:creationId xmlns:a16="http://schemas.microsoft.com/office/drawing/2014/main" id="{7550F9BB-98E4-470C-A339-F30A270C656C}"/>
+                <a16:creationId xmlns:a16="http://schemas.microsoft.com/office/drawing/2014/main" id="{8F900304-F8E7-4C1C-B3A0-F1A0DD604211}"/>
               </a:ext>
             </a:extLst>
           </p:cNvPr>
@@ -8336,7 +8530,7 @@
                 <a:ea typeface="Arial"/>
                 <a:cs typeface="Arial"/>
               </a:rPr>
-              <a:t>Wait for the assignment’s rounding instructions before choosing a stored result.</a:t>
+              <a:t>Compare each value with the smallest normal, 1/4, before finding bits.</a:t>
             </a:r>
           </a:p>
         </p:txBody>
@@ -8346,7 +8540,7 @@
           <p:cNvPr id="6" name="">
             <a:extLst xmlns:a="http://schemas.openxmlformats.org/drawingml/2006/main">
               <a:ext uri="{FF2B5EF4-FFF2-40B4-BE49-F238E27FC236}">
-                <a16:creationId xmlns:a16="http://schemas.microsoft.com/office/drawing/2014/main" id="{73B702C8-3DF9-406E-8087-CF675ECCC2D1}"/>
+                <a16:creationId xmlns:a16="http://schemas.microsoft.com/office/drawing/2014/main" id="{16200DCD-0F16-4BE6-9538-9FDAF86C958E}"/>
               </a:ext>
             </a:extLst>
           </p:cNvPr>
@@ -8394,7 +8588,7 @@
                 <a:ea typeface="Courier New"/>
                 <a:cs typeface="Courier New"/>
               </a:rPr>
-              <a:t>19 / 24</a:t>
+              <a:t>19 / 26</a:t>
             </a:r>
           </a:p>
         </p:txBody>
@@ -8402,7 +8596,7 @@
     </p:spTree>
     <p:extLst>
       <p:ext uri="{BB962C8B-B14F-4D97-AF65-F5344CB8AC3E}">
-        <p14:creationId xmlns:p14="http://schemas.microsoft.com/office/powerpoint/2010/main" val="1704851840"/>
+        <p14:creationId xmlns:p14="http://schemas.microsoft.com/office/powerpoint/2010/main" val="2079659254"/>
       </p:ext>
     </p:extLst>
   </p:cSld>
@@ -8906,7 +9100,7 @@
                 <a:ea typeface="Courier New"/>
                 <a:cs typeface="Courier New"/>
               </a:rPr>
-              <a:t>02 / 24</a:t>
+              <a:t>02 / 26</a:t>
             </a:r>
           </a:p>
         </p:txBody>
@@ -8945,7 +9139,7 @@
           <p:cNvPr id="7" name="">
             <a:extLst xmlns:a="http://schemas.openxmlformats.org/drawingml/2006/main">
               <a:ext uri="{FF2B5EF4-FFF2-40B4-BE49-F238E27FC236}">
-                <a16:creationId xmlns:a16="http://schemas.microsoft.com/office/drawing/2014/main" id="{0BCE7827-648B-4B62-AE80-F3CE9BFFD594}"/>
+                <a16:creationId xmlns:a16="http://schemas.microsoft.com/office/drawing/2014/main" id="{D25A2A70-779E-4A39-9AD5-537DDE3C5B7A}"/>
               </a:ext>
             </a:extLst>
           </p:cNvPr>
@@ -8993,7 +9187,7 @@
                 <a:ea typeface="Courier New"/>
                 <a:cs typeface="Courier New"/>
               </a:rPr>
-              <a:t>FLOATING POINT · SPACING</a:t>
+              <a:t>FLOATING POINT · CHECK</a:t>
             </a:r>
           </a:p>
         </p:txBody>
@@ -9003,7 +9197,7 @@
           <p:cNvPr id="2" name="">
             <a:extLst xmlns:a="http://schemas.openxmlformats.org/drawingml/2006/main">
               <a:ext uri="{FF2B5EF4-FFF2-40B4-BE49-F238E27FC236}">
-                <a16:creationId xmlns:a16="http://schemas.microsoft.com/office/drawing/2014/main" id="{E6B69FE5-5D95-4306-AAF0-9A70AD531613}"/>
+                <a16:creationId xmlns:a16="http://schemas.microsoft.com/office/drawing/2014/main" id="{2F2733A3-E106-4C90-B097-BE7CB4577892}"/>
               </a:ext>
             </a:extLst>
           </p:cNvPr>
@@ -9051,7 +9245,7 @@
                 <a:ea typeface="Arial"/>
                 <a:cs typeface="Arial"/>
               </a:rPr>
-              <a:t>Precision changes with scale</a:t>
+              <a:t>Practice answers</a:t>
             </a:r>
           </a:p>
         </p:txBody>
@@ -9061,7 +9255,7 @@
           <p:cNvPr id="3" name="">
             <a:extLst xmlns:a="http://schemas.openxmlformats.org/drawingml/2006/main">
               <a:ext uri="{FF2B5EF4-FFF2-40B4-BE49-F238E27FC236}">
-                <a16:creationId xmlns:a16="http://schemas.microsoft.com/office/drawing/2014/main" id="{887FE9A9-E5DE-4BC1-94AD-59371BF9B78C}"/>
+                <a16:creationId xmlns:a16="http://schemas.microsoft.com/office/drawing/2014/main" id="{53BB6D32-B5C1-4BFB-8D41-7B7055B1A606}"/>
               </a:ext>
             </a:extLst>
           </p:cNvPr>
@@ -9109,7 +9303,7 @@
                 <a:ea typeface="Arial"/>
                 <a:cs typeface="Arial"/>
               </a:rPr>
-              <a:t>The same three fraction bits give eight values within each normal exponent range.</a:t>
+              <a:t>3/2 = 1.100₂ × 2⁰, so it is normal.</a:t>
             </a:r>
           </a:p>
           <a:p xmlns:a="http://schemas.openxmlformats.org/drawingml/2006/main">
@@ -9138,7 +9332,7 @@
                 <a:ea typeface="Arial"/>
                 <a:cs typeface="Arial"/>
               </a:rPr>
-              <a:t>When the exponent increases by one, the distance between neighboring values doubles.</a:t>
+              <a:t>3/16 is below 1/4, so it is subnormal. Since value = F/32, F = 6.</a:t>
             </a:r>
           </a:p>
         </p:txBody>
@@ -9148,7 +9342,7 @@
           <p:cNvPr id="4" name="">
             <a:extLst xmlns:a="http://schemas.openxmlformats.org/drawingml/2006/main">
               <a:ext uri="{FF2B5EF4-FFF2-40B4-BE49-F238E27FC236}">
-                <a16:creationId xmlns:a16="http://schemas.microsoft.com/office/drawing/2014/main" id="{CED75AEC-85E3-4520-B63E-09FCF9AACAE6}"/>
+                <a16:creationId xmlns:a16="http://schemas.microsoft.com/office/drawing/2014/main" id="{CD85FA7D-EF72-4F2A-85B4-517634BC5BE7}"/>
               </a:ext>
             </a:extLst>
           </p:cNvPr>
@@ -9196,7 +9390,7 @@
                 <a:ea typeface="Courier New"/>
                 <a:cs typeface="Courier New"/>
               </a:rPr>
-              <a:t>E = 3 (e = 0)</a:t>
+              <a:t>A. 3/2</a:t>
             </a:r>
           </a:p>
           <a:p xmlns:a="http://schemas.openxmlformats.org/drawingml/2006/main">
@@ -9220,7 +9414,7 @@
                 <a:ea typeface="Courier New"/>
                 <a:cs typeface="Courier New"/>
               </a:rPr>
-              <a:t>F = 0 → 1       F = 1 → 9/8</a:t>
+              <a:t>   E = 3 = 011₂</a:t>
             </a:r>
           </a:p>
           <a:p xmlns:a="http://schemas.openxmlformats.org/drawingml/2006/main">
@@ -9244,7 +9438,31 @@
                 <a:ea typeface="Courier New"/>
                 <a:cs typeface="Courier New"/>
               </a:rPr>
-              <a:t>step = 1/8</a:t>
+              <a:t>   F = 4 = 100₂</a:t>
+            </a:r>
+          </a:p>
+          <a:p xmlns:a="http://schemas.openxmlformats.org/drawingml/2006/main">
+            <a:pPr>
+              <a:buNone/>
+              <a:defRPr sz="1650" b="0">
+                <a:solidFill>
+                  <a:srgbClr val="A7F3D0"/>
+                </a:solidFill>
+                <a:latin typeface="Courier New"/>
+                <a:ea typeface="Courier New"/>
+                <a:cs typeface="Courier New"/>
+              </a:defRPr>
+            </a:pPr>
+            <a:r>
+              <a:rPr sz="1650" b="0">
+                <a:solidFill>
+                  <a:srgbClr val="A7F3D0"/>
+                </a:solidFill>
+                <a:latin typeface="Courier New"/>
+                <a:ea typeface="Courier New"/>
+                <a:cs typeface="Courier New"/>
+              </a:rPr>
+              <a:t>   Check: 2^(3−3) × (1 + 4/2^3) = 3/2</a:t>
             </a:r>
           </a:p>
           <a:p xmlns:a="http://schemas.openxmlformats.org/drawingml/2006/main">
@@ -9273,7 +9491,7 @@
                 <a:ea typeface="Courier New"/>
                 <a:cs typeface="Courier New"/>
               </a:rPr>
-              <a:t>E = 4 (e = 1)</a:t>
+              <a:t>B. 3/16</a:t>
             </a:r>
           </a:p>
           <a:p xmlns:a="http://schemas.openxmlformats.org/drawingml/2006/main">
@@ -9297,7 +9515,7 @@
                 <a:ea typeface="Courier New"/>
                 <a:cs typeface="Courier New"/>
               </a:rPr>
-              <a:t>F = 0 → 2       F = 1 → 9/4</a:t>
+              <a:t>   E = 0 = 000₂</a:t>
             </a:r>
           </a:p>
           <a:p xmlns:a="http://schemas.openxmlformats.org/drawingml/2006/main">
@@ -9321,7 +9539,31 @@
                 <a:ea typeface="Courier New"/>
                 <a:cs typeface="Courier New"/>
               </a:rPr>
-              <a:t>step = 1/4</a:t>
+              <a:t>   F = 6 = 110₂</a:t>
+            </a:r>
+          </a:p>
+          <a:p xmlns:a="http://schemas.openxmlformats.org/drawingml/2006/main">
+            <a:pPr>
+              <a:buNone/>
+              <a:defRPr sz="1650" b="0">
+                <a:solidFill>
+                  <a:srgbClr val="A7F3D0"/>
+                </a:solidFill>
+                <a:latin typeface="Courier New"/>
+                <a:ea typeface="Courier New"/>
+                <a:cs typeface="Courier New"/>
+              </a:defRPr>
+            </a:pPr>
+            <a:r>
+              <a:rPr sz="1650" b="0">
+                <a:solidFill>
+                  <a:srgbClr val="A7F3D0"/>
+                </a:solidFill>
+                <a:latin typeface="Courier New"/>
+                <a:ea typeface="Courier New"/>
+                <a:cs typeface="Courier New"/>
+              </a:rPr>
+              <a:t>   Check: 2^(1−3) × (6/2^3) = 3/16</a:t>
             </a:r>
           </a:p>
         </p:txBody>
@@ -9331,7 +9573,7 @@
           <p:cNvPr id="5" name="">
             <a:extLst xmlns:a="http://schemas.openxmlformats.org/drawingml/2006/main">
               <a:ext uri="{FF2B5EF4-FFF2-40B4-BE49-F238E27FC236}">
-                <a16:creationId xmlns:a16="http://schemas.microsoft.com/office/drawing/2014/main" id="{7A18BC8F-2DC5-4B6B-A4F9-10CDE1183DE6}"/>
+                <a16:creationId xmlns:a16="http://schemas.microsoft.com/office/drawing/2014/main" id="{09DD94A5-8CF6-4CC6-9FAF-1AAE9F86C651}"/>
               </a:ext>
             </a:extLst>
           </p:cNvPr>
@@ -9379,7 +9621,7 @@
                 <a:ea typeface="Arial"/>
                 <a:cs typeface="Arial"/>
               </a:rPr>
-              <a:t>This is why large floating point values have larger gaps.</a:t>
+              <a:t>A fraction can be exactly representable in one format and not another.</a:t>
             </a:r>
           </a:p>
         </p:txBody>
@@ -9389,7 +9631,7 @@
           <p:cNvPr id="6" name="">
             <a:extLst xmlns:a="http://schemas.openxmlformats.org/drawingml/2006/main">
               <a:ext uri="{FF2B5EF4-FFF2-40B4-BE49-F238E27FC236}">
-                <a16:creationId xmlns:a16="http://schemas.microsoft.com/office/drawing/2014/main" id="{94269C50-3A0A-4FBB-A1D2-A33411F72ECA}"/>
+                <a16:creationId xmlns:a16="http://schemas.microsoft.com/office/drawing/2014/main" id="{BEB8226B-AC16-4616-9E79-3B5C231B3962}"/>
               </a:ext>
             </a:extLst>
           </p:cNvPr>
@@ -9437,7 +9679,7 @@
                 <a:ea typeface="Courier New"/>
                 <a:cs typeface="Courier New"/>
               </a:rPr>
-              <a:t>20 / 24</a:t>
+              <a:t>20 / 26</a:t>
             </a:r>
           </a:p>
         </p:txBody>
@@ -9445,7 +9687,7 @@
     </p:spTree>
     <p:extLst>
       <p:ext uri="{BB962C8B-B14F-4D97-AF65-F5344CB8AC3E}">
-        <p14:creationId xmlns:p14="http://schemas.microsoft.com/office/powerpoint/2010/main" val="1018474765"/>
+        <p14:creationId xmlns:p14="http://schemas.microsoft.com/office/powerpoint/2010/main" val="1590754296"/>
       </p:ext>
     </p:extLst>
   </p:cSld>
@@ -9476,7 +9718,7 @@
           <p:cNvPr id="7" name="">
             <a:extLst xmlns:a="http://schemas.openxmlformats.org/drawingml/2006/main">
               <a:ext uri="{FF2B5EF4-FFF2-40B4-BE49-F238E27FC236}">
-                <a16:creationId xmlns:a16="http://schemas.microsoft.com/office/drawing/2014/main" id="{0BCE7827-648B-4B62-AE80-F3CE9BFFD594}"/>
+                <a16:creationId xmlns:a16="http://schemas.microsoft.com/office/drawing/2014/main" id="{93E43C1D-677A-4484-B42E-435337BCED51}"/>
               </a:ext>
             </a:extLst>
           </p:cNvPr>
@@ -9524,7 +9766,7 @@
                 <a:ea typeface="Courier New"/>
                 <a:cs typeface="Courier New"/>
               </a:rPr>
-              <a:t>FLOATING POINT · ASSIGNMENT PREVIEW</a:t>
+              <a:t>FLOATING POINT · PRECISION</a:t>
             </a:r>
           </a:p>
         </p:txBody>
@@ -9534,7 +9776,7 @@
           <p:cNvPr id="2" name="">
             <a:extLst xmlns:a="http://schemas.openxmlformats.org/drawingml/2006/main">
               <a:ext uri="{FF2B5EF4-FFF2-40B4-BE49-F238E27FC236}">
-                <a16:creationId xmlns:a16="http://schemas.microsoft.com/office/drawing/2014/main" id="{E6B69FE5-5D95-4306-AAF0-9A70AD531613}"/>
+                <a16:creationId xmlns:a16="http://schemas.microsoft.com/office/drawing/2014/main" id="{074B736B-6CBC-48AB-BB9C-B94B56E89F35}"/>
               </a:ext>
             </a:extLst>
           </p:cNvPr>
@@ -9582,7 +9824,7 @@
                 <a:ea typeface="Arial"/>
                 <a:cs typeface="Arial"/>
               </a:rPr>
-              <a:t>HW3 preview: five inputs</a:t>
+              <a:t>Some ratios need rounding</a:t>
             </a:r>
           </a:p>
         </p:txBody>
@@ -9592,7 +9834,7 @@
           <p:cNvPr id="3" name="">
             <a:extLst xmlns:a="http://schemas.openxmlformats.org/drawingml/2006/main">
               <a:ext uri="{FF2B5EF4-FFF2-40B4-BE49-F238E27FC236}">
-                <a16:creationId xmlns:a16="http://schemas.microsoft.com/office/drawing/2014/main" id="{887FE9A9-E5DE-4BC1-94AD-59371BF9B78C}"/>
+                <a16:creationId xmlns:a16="http://schemas.microsoft.com/office/drawing/2014/main" id="{31BF5015-85C0-4422-9A8D-3AB1598AB1B5}"/>
               </a:ext>
             </a:extLst>
           </p:cNvPr>
@@ -9640,7 +9882,36 @@
                 <a:ea typeface="Arial"/>
                 <a:cs typeface="Arial"/>
               </a:rPr>
-              <a:t>The professor plans a program that reads a format and a nonnegative ratio. The assignment has not been posted, so treat these details as a preview.</a:t>
+              <a:t>Only eight fraction patterns fit in three bits. A ratio such as 1/3 has a repeating binary expansion and cannot be stored exactly.</a:t>
+            </a:r>
+          </a:p>
+          <a:p xmlns:a="http://schemas.openxmlformats.org/drawingml/2006/main">
+            <a:r>
+              <a:t/>
+            </a:r>
+          </a:p>
+          <a:p xmlns:a="http://schemas.openxmlformats.org/drawingml/2006/main">
+            <a:pPr>
+              <a:buNone/>
+              <a:defRPr sz="1950" b="0">
+                <a:solidFill>
+                  <a:srgbClr val="D4D4D8"/>
+                </a:solidFill>
+                <a:latin typeface="Arial"/>
+                <a:ea typeface="Arial"/>
+                <a:cs typeface="Arial"/>
+              </a:defRPr>
+            </a:pPr>
+            <a:r>
+              <a:rPr sz="1950" b="0">
+                <a:solidFill>
+                  <a:srgbClr val="D4D4D8"/>
+                </a:solidFill>
+                <a:latin typeface="Arial"/>
+                <a:ea typeface="Arial"/>
+                <a:cs typeface="Arial"/>
+              </a:rPr>
+              <a:t>The required rounding rule decides which nearby value to store.</a:t>
             </a:r>
           </a:p>
         </p:txBody>
@@ -9650,7 +9921,7 @@
           <p:cNvPr id="4" name="">
             <a:extLst xmlns:a="http://schemas.openxmlformats.org/drawingml/2006/main">
               <a:ext uri="{FF2B5EF4-FFF2-40B4-BE49-F238E27FC236}">
-                <a16:creationId xmlns:a16="http://schemas.microsoft.com/office/drawing/2014/main" id="{CED75AEC-85E3-4520-B63E-09FCF9AACAE6}"/>
+                <a16:creationId xmlns:a16="http://schemas.microsoft.com/office/drawing/2014/main" id="{442E6650-2F07-46E8-968E-92CAC81BA173}"/>
               </a:ext>
             </a:extLst>
           </p:cNvPr>
@@ -9698,7 +9969,12 @@
                 <a:ea typeface="Courier New"/>
                 <a:cs typeface="Courier New"/>
               </a:rPr>
-              <a:t>format:  exp_bits = 3</a:t>
+              <a:t>1/3 = 1.010101…₂ × 2⁻²</a:t>
+            </a:r>
+          </a:p>
+          <a:p xmlns:a="http://schemas.openxmlformats.org/drawingml/2006/main">
+            <a:r>
+              <a:t/>
             </a:r>
           </a:p>
           <a:p xmlns:a="http://schemas.openxmlformats.org/drawingml/2006/main">
@@ -9722,7 +9998,7 @@
                 <a:ea typeface="Courier New"/>
                 <a:cs typeface="Courier New"/>
               </a:rPr>
-              <a:t>         bias = 3</a:t>
+              <a:t>Nearby values in this format:</a:t>
             </a:r>
           </a:p>
           <a:p xmlns:a="http://schemas.openxmlformats.org/drawingml/2006/main">
@@ -9746,7 +10022,31 @@
                 <a:ea typeface="Courier New"/>
                 <a:cs typeface="Courier New"/>
               </a:rPr>
-              <a:t>         sig_bits = 3</a:t>
+              <a:t>F = 010₂  →  5/16</a:t>
+            </a:r>
+          </a:p>
+          <a:p xmlns:a="http://schemas.openxmlformats.org/drawingml/2006/main">
+            <a:pPr>
+              <a:buNone/>
+              <a:defRPr sz="1650" b="0">
+                <a:solidFill>
+                  <a:srgbClr val="A7F3D0"/>
+                </a:solidFill>
+                <a:latin typeface="Courier New"/>
+                <a:ea typeface="Courier New"/>
+                <a:cs typeface="Courier New"/>
+              </a:defRPr>
+            </a:pPr>
+            <a:r>
+              <a:rPr sz="1650" b="0">
+                <a:solidFill>
+                  <a:srgbClr val="A7F3D0"/>
+                </a:solidFill>
+                <a:latin typeface="Courier New"/>
+                <a:ea typeface="Courier New"/>
+                <a:cs typeface="Courier New"/>
+              </a:rPr>
+              <a:t>F = 011₂  →  11/32</a:t>
             </a:r>
           </a:p>
           <a:p xmlns:a="http://schemas.openxmlformats.org/drawingml/2006/main">
@@ -9775,79 +10075,7 @@
                 <a:ea typeface="Courier New"/>
                 <a:cs typeface="Courier New"/>
               </a:rPr>
-              <a:t>value:   numerator = 5</a:t>
-            </a:r>
-          </a:p>
-          <a:p xmlns:a="http://schemas.openxmlformats.org/drawingml/2006/main">
-            <a:pPr>
-              <a:buNone/>
-              <a:defRPr sz="1650" b="0">
-                <a:solidFill>
-                  <a:srgbClr val="A7F3D0"/>
-                </a:solidFill>
-                <a:latin typeface="Courier New"/>
-                <a:ea typeface="Courier New"/>
-                <a:cs typeface="Courier New"/>
-              </a:defRPr>
-            </a:pPr>
-            <a:r>
-              <a:rPr sz="1650" b="0">
-                <a:solidFill>
-                  <a:srgbClr val="A7F3D0"/>
-                </a:solidFill>
-                <a:latin typeface="Courier New"/>
-                <a:ea typeface="Courier New"/>
-                <a:cs typeface="Courier New"/>
-              </a:rPr>
-              <a:t>         denominator = 2</a:t>
-            </a:r>
-          </a:p>
-          <a:p xmlns:a="http://schemas.openxmlformats.org/drawingml/2006/main">
-            <a:pPr>
-              <a:buNone/>
-              <a:defRPr sz="1650" b="0">
-                <a:solidFill>
-                  <a:srgbClr val="A7F3D0"/>
-                </a:solidFill>
-                <a:latin typeface="Courier New"/>
-                <a:ea typeface="Courier New"/>
-                <a:cs typeface="Courier New"/>
-              </a:defRPr>
-            </a:pPr>
-            <a:r>
-              <a:rPr sz="1650" b="0">
-                <a:solidFill>
-                  <a:srgbClr val="A7F3D0"/>
-                </a:solidFill>
-                <a:latin typeface="Courier New"/>
-                <a:ea typeface="Courier New"/>
-                <a:cs typeface="Courier New"/>
-              </a:rPr>
-              <a:t/>
-            </a:r>
-          </a:p>
-          <a:p xmlns:a="http://schemas.openxmlformats.org/drawingml/2006/main">
-            <a:pPr>
-              <a:buNone/>
-              <a:defRPr sz="1650" b="0">
-                <a:solidFill>
-                  <a:srgbClr val="A7F3D0"/>
-                </a:solidFill>
-                <a:latin typeface="Courier New"/>
-                <a:ea typeface="Courier New"/>
-                <a:cs typeface="Courier New"/>
-              </a:defRPr>
-            </a:pPr>
-            <a:r>
-              <a:rPr sz="1650" b="0">
-                <a:solidFill>
-                  <a:srgbClr val="A7F3D0"/>
-                </a:solidFill>
-                <a:latin typeface="Courier New"/>
-                <a:ea typeface="Courier New"/>
-                <a:cs typeface="Courier New"/>
-              </a:rPr>
-              <a:t>Find: E (exponent), F (fraction)</a:t>
+              <a:t>Neither is exactly 1/3.</a:t>
             </a:r>
           </a:p>
         </p:txBody>
@@ -9857,7 +10085,7 @@
           <p:cNvPr id="5" name="">
             <a:extLst xmlns:a="http://schemas.openxmlformats.org/drawingml/2006/main">
               <a:ext uri="{FF2B5EF4-FFF2-40B4-BE49-F238E27FC236}">
-                <a16:creationId xmlns:a16="http://schemas.microsoft.com/office/drawing/2014/main" id="{7A18BC8F-2DC5-4B6B-A4F9-10CDE1183DE6}"/>
+                <a16:creationId xmlns:a16="http://schemas.microsoft.com/office/drawing/2014/main" id="{7550F9BB-98E4-470C-A339-F30A270C656C}"/>
               </a:ext>
             </a:extLst>
           </p:cNvPr>
@@ -9905,7 +10133,7 @@
                 <a:ea typeface="Arial"/>
                 <a:cs typeface="Arial"/>
               </a:rPr>
-              <a:t>The first three inputs define the format; the last two define the value.</a:t>
+              <a:t>Wait for the assignment’s rounding instructions before choosing a stored result.</a:t>
             </a:r>
           </a:p>
         </p:txBody>
@@ -9915,7 +10143,7 @@
           <p:cNvPr id="6" name="">
             <a:extLst xmlns:a="http://schemas.openxmlformats.org/drawingml/2006/main">
               <a:ext uri="{FF2B5EF4-FFF2-40B4-BE49-F238E27FC236}">
-                <a16:creationId xmlns:a16="http://schemas.microsoft.com/office/drawing/2014/main" id="{94269C50-3A0A-4FBB-A1D2-A33411F72ECA}"/>
+                <a16:creationId xmlns:a16="http://schemas.microsoft.com/office/drawing/2014/main" id="{73B702C8-3DF9-406E-8087-CF675ECCC2D1}"/>
               </a:ext>
             </a:extLst>
           </p:cNvPr>
@@ -9963,7 +10191,7 @@
                 <a:ea typeface="Courier New"/>
                 <a:cs typeface="Courier New"/>
               </a:rPr>
-              <a:t>21 / 24</a:t>
+              <a:t>21 / 26</a:t>
             </a:r>
           </a:p>
         </p:txBody>
@@ -9971,7 +10199,7 @@
     </p:spTree>
     <p:extLst>
       <p:ext uri="{BB962C8B-B14F-4D97-AF65-F5344CB8AC3E}">
-        <p14:creationId xmlns:p14="http://schemas.microsoft.com/office/powerpoint/2010/main" val="1018474765"/>
+        <p14:creationId xmlns:p14="http://schemas.microsoft.com/office/powerpoint/2010/main" val="1704851840"/>
       </p:ext>
     </p:extLst>
   </p:cSld>
@@ -10050,7 +10278,7 @@
                 <a:ea typeface="Courier New"/>
                 <a:cs typeface="Courier New"/>
               </a:rPr>
-              <a:t>FLOATING POINT · WORKED INPUT</a:t>
+              <a:t>FLOATING POINT · SPACING</a:t>
             </a:r>
           </a:p>
         </p:txBody>
@@ -10108,7 +10336,7 @@
                 <a:ea typeface="Arial"/>
                 <a:cs typeface="Arial"/>
               </a:rPr>
-              <a:t>HW3 preview: encode 5/2</a:t>
+              <a:t>Precision changes with scale</a:t>
             </a:r>
           </a:p>
         </p:txBody>
@@ -10166,7 +10394,36 @@
                 <a:ea typeface="Arial"/>
                 <a:cs typeface="Arial"/>
               </a:rPr>
-              <a:t>With 3 exponent bits, bias 3, and 3 fraction bits, write 5/2 as 1.010₂ × 2¹. The true exponent is 1, so E = 1 + 3 = 4. The stored fraction is 010₂, so F = 2.</a:t>
+              <a:t>The same three fraction bits give eight values within each normal exponent range.</a:t>
+            </a:r>
+          </a:p>
+          <a:p xmlns:a="http://schemas.openxmlformats.org/drawingml/2006/main">
+            <a:r>
+              <a:t/>
+            </a:r>
+          </a:p>
+          <a:p xmlns:a="http://schemas.openxmlformats.org/drawingml/2006/main">
+            <a:pPr>
+              <a:buNone/>
+              <a:defRPr sz="1950" b="0">
+                <a:solidFill>
+                  <a:srgbClr val="D4D4D8"/>
+                </a:solidFill>
+                <a:latin typeface="Arial"/>
+                <a:ea typeface="Arial"/>
+                <a:cs typeface="Arial"/>
+              </a:defRPr>
+            </a:pPr>
+            <a:r>
+              <a:rPr sz="1950" b="0">
+                <a:solidFill>
+                  <a:srgbClr val="D4D4D8"/>
+                </a:solidFill>
+                <a:latin typeface="Arial"/>
+                <a:ea typeface="Arial"/>
+                <a:cs typeface="Arial"/>
+              </a:rPr>
+              <a:t>When the exponent increases by one, the distance between neighboring values doubles.</a:t>
             </a:r>
           </a:p>
         </p:txBody>
@@ -10224,7 +10481,7 @@
                 <a:ea typeface="Courier New"/>
                 <a:cs typeface="Courier New"/>
               </a:rPr>
-              <a:t>Inputs: 3 3 3 5 2</a:t>
+              <a:t>E = 3 (e = 0)</a:t>
             </a:r>
           </a:p>
           <a:p xmlns:a="http://schemas.openxmlformats.org/drawingml/2006/main">
@@ -10248,6 +10505,35 @@
                 <a:ea typeface="Courier New"/>
                 <a:cs typeface="Courier New"/>
               </a:rPr>
+              <a:t>F = 0 → 1       F = 1 → 9/8</a:t>
+            </a:r>
+          </a:p>
+          <a:p xmlns:a="http://schemas.openxmlformats.org/drawingml/2006/main">
+            <a:pPr>
+              <a:buNone/>
+              <a:defRPr sz="1650" b="0">
+                <a:solidFill>
+                  <a:srgbClr val="A7F3D0"/>
+                </a:solidFill>
+                <a:latin typeface="Courier New"/>
+                <a:ea typeface="Courier New"/>
+                <a:cs typeface="Courier New"/>
+              </a:defRPr>
+            </a:pPr>
+            <a:r>
+              <a:rPr sz="1650" b="0">
+                <a:solidFill>
+                  <a:srgbClr val="A7F3D0"/>
+                </a:solidFill>
+                <a:latin typeface="Courier New"/>
+                <a:ea typeface="Courier New"/>
+                <a:cs typeface="Courier New"/>
+              </a:rPr>
+              <a:t>step = 1/8</a:t>
+            </a:r>
+          </a:p>
+          <a:p xmlns:a="http://schemas.openxmlformats.org/drawingml/2006/main">
+            <a:r>
               <a:t/>
             </a:r>
           </a:p>
@@ -10272,31 +10558,7 @@
                 <a:ea typeface="Courier New"/>
                 <a:cs typeface="Courier New"/>
               </a:rPr>
-              <a:t>E = 4 = 100₂</a:t>
-            </a:r>
-          </a:p>
-          <a:p xmlns:a="http://schemas.openxmlformats.org/drawingml/2006/main">
-            <a:pPr>
-              <a:buNone/>
-              <a:defRPr sz="1650">
-                <a:solidFill>
-                  <a:srgbClr val="A7F3D0"/>
-                </a:solidFill>
-                <a:latin typeface="Courier New"/>
-                <a:ea typeface="Courier New"/>
-                <a:cs typeface="Courier New"/>
-              </a:defRPr>
-            </a:pPr>
-            <a:r>
-              <a:rPr sz="1650">
-                <a:solidFill>
-                  <a:srgbClr val="A7F3D0"/>
-                </a:solidFill>
-                <a:latin typeface="Courier New"/>
-                <a:ea typeface="Courier New"/>
-                <a:cs typeface="Courier New"/>
-              </a:rPr>
-              <a:t>F = 2 = 010₂</a:t>
+              <a:t>E = 4 (e = 1)</a:t>
             </a:r>
           </a:p>
           <a:p xmlns:a="http://schemas.openxmlformats.org/drawingml/2006/main">
@@ -10320,7 +10582,7 @@
                 <a:ea typeface="Courier New"/>
                 <a:cs typeface="Courier New"/>
               </a:rPr>
-              <a:t/>
+              <a:t>F = 0 → 2       F = 1 → 9/4</a:t>
             </a:r>
           </a:p>
           <a:p xmlns:a="http://schemas.openxmlformats.org/drawingml/2006/main">
@@ -10344,55 +10606,7 @@
                 <a:ea typeface="Courier New"/>
                 <a:cs typeface="Courier New"/>
               </a:rPr>
-              <a:t>Output: 4 2</a:t>
-            </a:r>
-          </a:p>
-          <a:p xmlns:a="http://schemas.openxmlformats.org/drawingml/2006/main">
-            <a:pPr>
-              <a:buNone/>
-              <a:defRPr sz="1650" b="0">
-                <a:solidFill>
-                  <a:srgbClr val="A7F3D0"/>
-                </a:solidFill>
-                <a:latin typeface="Courier New"/>
-                <a:ea typeface="Courier New"/>
-                <a:cs typeface="Courier New"/>
-              </a:defRPr>
-            </a:pPr>
-            <a:r>
-              <a:rPr sz="1650" b="0">
-                <a:solidFill>
-                  <a:srgbClr val="A7F3D0"/>
-                </a:solidFill>
-                <a:latin typeface="Courier New"/>
-                <a:ea typeface="Courier New"/>
-                <a:cs typeface="Courier New"/>
-              </a:rPr>
-              <a:t/>
-            </a:r>
-          </a:p>
-          <a:p xmlns:a="http://schemas.openxmlformats.org/drawingml/2006/main">
-            <a:pPr>
-              <a:buNone/>
-              <a:defRPr sz="1650" b="0">
-                <a:solidFill>
-                  <a:srgbClr val="A7F3D0"/>
-                </a:solidFill>
-                <a:latin typeface="Courier New"/>
-                <a:ea typeface="Courier New"/>
-                <a:cs typeface="Courier New"/>
-              </a:defRPr>
-            </a:pPr>
-            <a:r>
-              <a:rPr sz="1650" b="0">
-                <a:solidFill>
-                  <a:srgbClr val="A7F3D0"/>
-                </a:solidFill>
-                <a:latin typeface="Courier New"/>
-                <a:ea typeface="Courier New"/>
-                <a:cs typeface="Courier New"/>
-              </a:rPr>
-              <a:t>Check: (1 + 2/8) × 2¹ = 5/2</a:t>
+              <a:t>step = 1/4</a:t>
             </a:r>
           </a:p>
         </p:txBody>
@@ -10450,7 +10664,7 @@
                 <a:ea typeface="Arial"/>
                 <a:cs typeface="Arial"/>
               </a:rPr>
-              <a:t>Move the binary point before taking the stored fraction bits.</a:t>
+              <a:t>This is why large floating point values have larger gaps.</a:t>
             </a:r>
           </a:p>
         </p:txBody>
@@ -10508,7 +10722,7 @@
                 <a:ea typeface="Courier New"/>
                 <a:cs typeface="Courier New"/>
               </a:rPr>
-              <a:t>22 / 24</a:t>
+              <a:t>22 / 26</a:t>
             </a:r>
           </a:p>
         </p:txBody>
@@ -10595,7 +10809,7 @@
                 <a:ea typeface="Courier New"/>
                 <a:cs typeface="Courier New"/>
               </a:rPr>
-              <a:t>FLOATING POINT · METHOD</a:t>
+              <a:t>FLOATING POINT · ASSIGNMENT PREVIEW</a:t>
             </a:r>
           </a:p>
         </p:txBody>
@@ -10653,7 +10867,7 @@
                 <a:ea typeface="Arial"/>
                 <a:cs typeface="Arial"/>
               </a:rPr>
-              <a:t>HW3 preview: choose the equation</a:t>
+              <a:t>HW3 preview: five inputs</a:t>
             </a:r>
           </a:p>
         </p:txBody>
@@ -10711,55 +10925,7 @@
                 <a:ea typeface="Arial"/>
                 <a:cs typeface="Arial"/>
               </a:rPr>
-              <a:t>Compare a nonzero ratio with the smallest normal, 2^(1−bias). Below that threshold, set E = 0 and use no hidden 1.</a:t>
-            </a:r>
-          </a:p>
-          <a:p xmlns:a="http://schemas.openxmlformats.org/drawingml/2006/main">
-            <a:pPr>
-              <a:buNone/>
-              <a:defRPr sz="1950" b="0">
-                <a:solidFill>
-                  <a:srgbClr val="D4D4D8"/>
-                </a:solidFill>
-                <a:latin typeface="Arial"/>
-                <a:ea typeface="Arial"/>
-                <a:cs typeface="Arial"/>
-              </a:defRPr>
-            </a:pPr>
-            <a:r>
-              <a:rPr sz="1950" b="0">
-                <a:solidFill>
-                  <a:srgbClr val="D4D4D8"/>
-                </a:solidFill>
-                <a:latin typeface="Arial"/>
-                <a:ea typeface="Arial"/>
-                <a:cs typeface="Arial"/>
-              </a:rPr>
-              <a:t/>
-            </a:r>
-          </a:p>
-          <a:p xmlns:a="http://schemas.openxmlformats.org/drawingml/2006/main">
-            <a:pPr>
-              <a:buNone/>
-              <a:defRPr sz="1950" b="0">
-                <a:solidFill>
-                  <a:srgbClr val="D4D4D8"/>
-                </a:solidFill>
-                <a:latin typeface="Arial"/>
-                <a:ea typeface="Arial"/>
-                <a:cs typeface="Arial"/>
-              </a:defRPr>
-            </a:pPr>
-            <a:r>
-              <a:rPr sz="1950" b="0">
-                <a:solidFill>
-                  <a:srgbClr val="D4D4D8"/>
-                </a:solidFill>
-                <a:latin typeface="Arial"/>
-                <a:ea typeface="Arial"/>
-                <a:cs typeface="Arial"/>
-              </a:rPr>
-              <a:t>Otherwise find the true exponent e and store E = e + bias. Solve for F, then decode to check.</a:t>
+              <a:t>The professor plans a program that reads a format and a nonnegative ratio. The assignment has not been posted, so treat these details as a preview.</a:t>
             </a:r>
           </a:p>
         </p:txBody>
@@ -10817,7 +10983,7 @@
                 <a:ea typeface="Courier New"/>
                 <a:cs typeface="Courier New"/>
               </a:rPr>
-              <a:t>Normal (E &gt; 0):</a:t>
+              <a:t>format:  exp_bits = 3</a:t>
             </a:r>
           </a:p>
           <a:p xmlns:a="http://schemas.openxmlformats.org/drawingml/2006/main">
@@ -10841,7 +11007,7 @@
                 <a:ea typeface="Courier New"/>
                 <a:cs typeface="Courier New"/>
               </a:rPr>
-              <a:t>value = (1 + F/2^p) × 2^(E−bias)</a:t>
+              <a:t>         bias = 3</a:t>
             </a:r>
           </a:p>
           <a:p xmlns:a="http://schemas.openxmlformats.org/drawingml/2006/main">
@@ -10865,36 +11031,17 @@
                 <a:ea typeface="Courier New"/>
                 <a:cs typeface="Courier New"/>
               </a:rPr>
+              <a:t>         sig_bits = 3</a:t>
+            </a:r>
+          </a:p>
+          <a:p xmlns:a="http://schemas.openxmlformats.org/drawingml/2006/main">
+            <a:r>
               <a:t/>
             </a:r>
           </a:p>
           <a:p xmlns:a="http://schemas.openxmlformats.org/drawingml/2006/main">
             <a:pPr>
               <a:buNone/>
-              <a:defRPr sz="1650">
-                <a:solidFill>
-                  <a:srgbClr val="A7F3D0"/>
-                </a:solidFill>
-                <a:latin typeface="Courier New"/>
-                <a:ea typeface="Courier New"/>
-                <a:cs typeface="Courier New"/>
-              </a:defRPr>
-            </a:pPr>
-            <a:r>
-              <a:rPr sz="1650">
-                <a:solidFill>
-                  <a:srgbClr val="A7F3D0"/>
-                </a:solidFill>
-                <a:latin typeface="Courier New"/>
-                <a:ea typeface="Courier New"/>
-                <a:cs typeface="Courier New"/>
-              </a:rPr>
-              <a:t>Subnormal (E = 0):</a:t>
-            </a:r>
-          </a:p>
-          <a:p xmlns:a="http://schemas.openxmlformats.org/drawingml/2006/main">
-            <a:pPr>
-              <a:buNone/>
               <a:defRPr sz="1650" b="0">
                 <a:solidFill>
                   <a:srgbClr val="A7F3D0"/>
@@ -10913,7 +11060,7 @@
                 <a:ea typeface="Courier New"/>
                 <a:cs typeface="Courier New"/>
               </a:rPr>
-              <a:t>value = (F/2^p) × 2^(1−bias)</a:t>
+              <a:t>value:   numerator = 5</a:t>
             </a:r>
           </a:p>
           <a:p xmlns:a="http://schemas.openxmlformats.org/drawingml/2006/main">
@@ -10937,6 +11084,30 @@
                 <a:ea typeface="Courier New"/>
                 <a:cs typeface="Courier New"/>
               </a:rPr>
+              <a:t>         denominator = 2</a:t>
+            </a:r>
+          </a:p>
+          <a:p xmlns:a="http://schemas.openxmlformats.org/drawingml/2006/main">
+            <a:pPr>
+              <a:buNone/>
+              <a:defRPr sz="1650" b="0">
+                <a:solidFill>
+                  <a:srgbClr val="A7F3D0"/>
+                </a:solidFill>
+                <a:latin typeface="Courier New"/>
+                <a:ea typeface="Courier New"/>
+                <a:cs typeface="Courier New"/>
+              </a:defRPr>
+            </a:pPr>
+            <a:r>
+              <a:rPr sz="1650" b="0">
+                <a:solidFill>
+                  <a:srgbClr val="A7F3D0"/>
+                </a:solidFill>
+                <a:latin typeface="Courier New"/>
+                <a:ea typeface="Courier New"/>
+                <a:cs typeface="Courier New"/>
+              </a:rPr>
               <a:t/>
             </a:r>
           </a:p>
@@ -10961,7 +11132,7 @@
                 <a:ea typeface="Courier New"/>
                 <a:cs typeface="Courier New"/>
               </a:rPr>
-              <a:t>If numerator = 0: E = 0, F = 0</a:t>
+              <a:t>Find: E (exponent), F (fraction)</a:t>
             </a:r>
           </a:p>
         </p:txBody>
@@ -11019,7 +11190,7 @@
                 <a:ea typeface="Arial"/>
                 <a:cs typeface="Arial"/>
               </a:rPr>
-              <a:t>Use the supplied p and bias, not the values from our practice format.</a:t>
+              <a:t>The first three inputs define the format; the last two define the value.</a:t>
             </a:r>
           </a:p>
         </p:txBody>
@@ -11077,7 +11248,7 @@
                 <a:ea typeface="Courier New"/>
                 <a:cs typeface="Courier New"/>
               </a:rPr>
-              <a:t>23 / 24</a:t>
+              <a:t>23 / 26</a:t>
             </a:r>
           </a:p>
         </p:txBody>
@@ -11116,7 +11287,7 @@
           <p:cNvPr id="7" name="">
             <a:extLst xmlns:a="http://schemas.openxmlformats.org/drawingml/2006/main">
               <a:ext uri="{FF2B5EF4-FFF2-40B4-BE49-F238E27FC236}">
-                <a16:creationId xmlns:a16="http://schemas.microsoft.com/office/drawing/2014/main" id="{4989B079-C3E8-43BB-8638-96121018769A}"/>
+                <a16:creationId xmlns:a16="http://schemas.microsoft.com/office/drawing/2014/main" id="{0BCE7827-648B-4B62-AE80-F3CE9BFFD594}"/>
               </a:ext>
             </a:extLst>
           </p:cNvPr>
@@ -11164,7 +11335,7 @@
                 <a:ea typeface="Courier New"/>
                 <a:cs typeface="Courier New"/>
               </a:rPr>
-              <a:t>FLOATING POINT · RECAP</a:t>
+              <a:t>FLOATING POINT · WORKED INPUT</a:t>
             </a:r>
           </a:p>
         </p:txBody>
@@ -11174,7 +11345,7 @@
           <p:cNvPr id="2" name="">
             <a:extLst xmlns:a="http://schemas.openxmlformats.org/drawingml/2006/main">
               <a:ext uri="{FF2B5EF4-FFF2-40B4-BE49-F238E27FC236}">
-                <a16:creationId xmlns:a16="http://schemas.microsoft.com/office/drawing/2014/main" id="{95D3113E-85F1-4E22-A62E-265E94FE3617}"/>
+                <a16:creationId xmlns:a16="http://schemas.microsoft.com/office/drawing/2014/main" id="{E6B69FE5-5D95-4306-AAF0-9A70AD531613}"/>
               </a:ext>
             </a:extLst>
           </p:cNvPr>
@@ -11222,7 +11393,7 @@
                 <a:ea typeface="Arial"/>
                 <a:cs typeface="Arial"/>
               </a:rPr>
-              <a:t>How to check an encoding</a:t>
+              <a:t>HW3 preview: encode 5/2</a:t>
             </a:r>
           </a:p>
         </p:txBody>
@@ -11232,7 +11403,7 @@
           <p:cNvPr id="3" name="">
             <a:extLst xmlns:a="http://schemas.openxmlformats.org/drawingml/2006/main">
               <a:ext uri="{FF2B5EF4-FFF2-40B4-BE49-F238E27FC236}">
-                <a16:creationId xmlns:a16="http://schemas.microsoft.com/office/drawing/2014/main" id="{8EC5E33C-BA7C-4ADE-9FC3-9ABD9F3C6FD4}"/>
+                <a16:creationId xmlns:a16="http://schemas.microsoft.com/office/drawing/2014/main" id="{887FE9A9-E5DE-4BC1-94AD-59371BF9B78C}"/>
               </a:ext>
             </a:extLst>
           </p:cNvPr>
@@ -11280,36 +11451,7 @@
                 <a:ea typeface="Arial"/>
                 <a:cs typeface="Arial"/>
               </a:rPr>
-              <a:t>In our practice format, E = 0 means count F steps of 1/32. Otherwise decode e = E − 3 and use the implied leading 1.</a:t>
-            </a:r>
-          </a:p>
-          <a:p xmlns:a="http://schemas.openxmlformats.org/drawingml/2006/main">
-            <a:r>
-              <a:t/>
-            </a:r>
-          </a:p>
-          <a:p xmlns:a="http://schemas.openxmlformats.org/drawingml/2006/main">
-            <a:pPr>
-              <a:buNone/>
-              <a:defRPr sz="1950" b="0">
-                <a:solidFill>
-                  <a:srgbClr val="D4D4D8"/>
-                </a:solidFill>
-                <a:latin typeface="Arial"/>
-                <a:ea typeface="Arial"/>
-                <a:cs typeface="Arial"/>
-              </a:defRPr>
-            </a:pPr>
-            <a:r>
-              <a:rPr sz="1950" b="0">
-                <a:solidFill>
-                  <a:srgbClr val="D4D4D8"/>
-                </a:solidFill>
-                <a:latin typeface="Arial"/>
-                <a:ea typeface="Arial"/>
-                <a:cs typeface="Arial"/>
-              </a:rPr>
-              <a:t>For an inexact value, follow the problem’s rounding rule.</a:t>
+              <a:t>With 3 exponent bits, bias 3, and 3 fraction bits, write 5/2 as 1.010₂ × 2¹. The true exponent is 1, so E = 1 + 3 = 4. The stored fraction is 010₂, so F = 2.</a:t>
             </a:r>
           </a:p>
         </p:txBody>
@@ -11319,7 +11461,7 @@
           <p:cNvPr id="4" name="">
             <a:extLst xmlns:a="http://schemas.openxmlformats.org/drawingml/2006/main">
               <a:ext uri="{FF2B5EF4-FFF2-40B4-BE49-F238E27FC236}">
-                <a16:creationId xmlns:a16="http://schemas.microsoft.com/office/drawing/2014/main" id="{EA939046-DA6B-448C-A179-5B13743C72F3}"/>
+                <a16:creationId xmlns:a16="http://schemas.microsoft.com/office/drawing/2014/main" id="{CED75AEC-85E3-4520-B63E-09FCF9AACAE6}"/>
               </a:ext>
             </a:extLst>
           </p:cNvPr>
@@ -11367,11 +11509,30 @@
                 <a:ea typeface="Courier New"/>
                 <a:cs typeface="Courier New"/>
               </a:rPr>
-              <a:t>Our practice format</a:t>
-            </a:r>
-          </a:p>
-          <a:p xmlns:a="http://schemas.openxmlformats.org/drawingml/2006/main">
-            <a:r>
+              <a:t>Inputs: 3 3 3 5 2</a:t>
+            </a:r>
+          </a:p>
+          <a:p xmlns:a="http://schemas.openxmlformats.org/drawingml/2006/main">
+            <a:pPr>
+              <a:buNone/>
+              <a:defRPr sz="1650" b="0">
+                <a:solidFill>
+                  <a:srgbClr val="A7F3D0"/>
+                </a:solidFill>
+                <a:latin typeface="Courier New"/>
+                <a:ea typeface="Courier New"/>
+                <a:cs typeface="Courier New"/>
+              </a:defRPr>
+            </a:pPr>
+            <a:r>
+              <a:rPr sz="1650" b="0">
+                <a:solidFill>
+                  <a:srgbClr val="A7F3D0"/>
+                </a:solidFill>
+                <a:latin typeface="Courier New"/>
+                <a:ea typeface="Courier New"/>
+                <a:cs typeface="Courier New"/>
+              </a:rPr>
               <a:t/>
             </a:r>
           </a:p>
@@ -11396,7 +11557,31 @@
                 <a:ea typeface="Courier New"/>
                 <a:cs typeface="Courier New"/>
               </a:rPr>
-              <a:t>Normal:    (1 + F/8) × 2^(E−3)</a:t>
+              <a:t>E = 4 = 100₂</a:t>
+            </a:r>
+          </a:p>
+          <a:p xmlns:a="http://schemas.openxmlformats.org/drawingml/2006/main">
+            <a:pPr>
+              <a:buNone/>
+              <a:defRPr sz="1650">
+                <a:solidFill>
+                  <a:srgbClr val="A7F3D0"/>
+                </a:solidFill>
+                <a:latin typeface="Courier New"/>
+                <a:ea typeface="Courier New"/>
+                <a:cs typeface="Courier New"/>
+              </a:defRPr>
+            </a:pPr>
+            <a:r>
+              <a:rPr sz="1650">
+                <a:solidFill>
+                  <a:srgbClr val="A7F3D0"/>
+                </a:solidFill>
+                <a:latin typeface="Courier New"/>
+                <a:ea typeface="Courier New"/>
+                <a:cs typeface="Courier New"/>
+              </a:rPr>
+              <a:t>F = 2 = 010₂</a:t>
             </a:r>
           </a:p>
           <a:p xmlns:a="http://schemas.openxmlformats.org/drawingml/2006/main">
@@ -11420,11 +11605,6 @@
                 <a:ea typeface="Courier New"/>
                 <a:cs typeface="Courier New"/>
               </a:rPr>
-              <a:t>Subnormal: F/32  (E = 0)</a:t>
-            </a:r>
-          </a:p>
-          <a:p xmlns:a="http://schemas.openxmlformats.org/drawingml/2006/main">
-            <a:r>
               <a:t/>
             </a:r>
           </a:p>
@@ -11449,11 +11629,30 @@
                 <a:ea typeface="Courier New"/>
                 <a:cs typeface="Courier New"/>
               </a:rPr>
-              <a:t>E = 0, F = 0  →  zero</a:t>
-            </a:r>
-          </a:p>
-          <a:p xmlns:a="http://schemas.openxmlformats.org/drawingml/2006/main">
-            <a:r>
+              <a:t>Output: 4 2</a:t>
+            </a:r>
+          </a:p>
+          <a:p xmlns:a="http://schemas.openxmlformats.org/drawingml/2006/main">
+            <a:pPr>
+              <a:buNone/>
+              <a:defRPr sz="1650" b="0">
+                <a:solidFill>
+                  <a:srgbClr val="A7F3D0"/>
+                </a:solidFill>
+                <a:latin typeface="Courier New"/>
+                <a:ea typeface="Courier New"/>
+                <a:cs typeface="Courier New"/>
+              </a:defRPr>
+            </a:pPr>
+            <a:r>
+              <a:rPr sz="1650" b="0">
+                <a:solidFill>
+                  <a:srgbClr val="A7F3D0"/>
+                </a:solidFill>
+                <a:latin typeface="Courier New"/>
+                <a:ea typeface="Courier New"/>
+                <a:cs typeface="Courier New"/>
+              </a:rPr>
               <a:t/>
             </a:r>
           </a:p>
@@ -11478,7 +11677,7 @@
                 <a:ea typeface="Courier New"/>
                 <a:cs typeface="Courier New"/>
               </a:rPr>
-              <a:t>Decode your bits as a final check.</a:t>
+              <a:t>Check: 2^(4−3) × (1 + 2/2^3) = 5/2</a:t>
             </a:r>
           </a:p>
         </p:txBody>
@@ -11488,7 +11687,7 @@
           <p:cNvPr id="5" name="">
             <a:extLst xmlns:a="http://schemas.openxmlformats.org/drawingml/2006/main">
               <a:ext uri="{FF2B5EF4-FFF2-40B4-BE49-F238E27FC236}">
-                <a16:creationId xmlns:a16="http://schemas.microsoft.com/office/drawing/2014/main" id="{585A0E73-828D-45A1-9AD7-8EED8C5E7EB1}"/>
+                <a16:creationId xmlns:a16="http://schemas.microsoft.com/office/drawing/2014/main" id="{7A18BC8F-2DC5-4B6B-A4F9-10CDE1183DE6}"/>
               </a:ext>
             </a:extLst>
           </p:cNvPr>
@@ -11536,7 +11735,7 @@
                 <a:ea typeface="Arial"/>
                 <a:cs typeface="Arial"/>
               </a:rPr>
-              <a:t>A correct encoding must reproduce the intended value or its required rounded value.</a:t>
+              <a:t>Move the binary point before taking the stored fraction bits.</a:t>
             </a:r>
           </a:p>
         </p:txBody>
@@ -11546,7 +11745,7 @@
           <p:cNvPr id="6" name="">
             <a:extLst xmlns:a="http://schemas.openxmlformats.org/drawingml/2006/main">
               <a:ext uri="{FF2B5EF4-FFF2-40B4-BE49-F238E27FC236}">
-                <a16:creationId xmlns:a16="http://schemas.microsoft.com/office/drawing/2014/main" id="{E1FBC5BD-1F5D-42FA-AC83-E0BF862F4EDF}"/>
+                <a16:creationId xmlns:a16="http://schemas.microsoft.com/office/drawing/2014/main" id="{94269C50-3A0A-4FBB-A1D2-A33411F72ECA}"/>
               </a:ext>
             </a:extLst>
           </p:cNvPr>
@@ -11594,7 +11793,1093 @@
                 <a:ea typeface="Courier New"/>
                 <a:cs typeface="Courier New"/>
               </a:rPr>
-              <a:t>24 / 24</a:t>
+              <a:t>24 / 26</a:t>
+            </a:r>
+          </a:p>
+        </p:txBody>
+      </p:sp>
+    </p:spTree>
+    <p:extLst>
+      <p:ext uri="{BB962C8B-B14F-4D97-AF65-F5344CB8AC3E}">
+        <p14:creationId xmlns:p14="http://schemas.microsoft.com/office/powerpoint/2010/main" val="1018474765"/>
+      </p:ext>
+    </p:extLst>
+  </p:cSld>
+</p:sld>
+</file>
+
+<file path=ppt/slides/slide25.xml><?xml version="1.0" encoding="utf-8"?>
+<p:sld xmlns:p="http://schemas.openxmlformats.org/presentationml/2006/main">
+  <p:cSld>
+    <p:bg>
+      <p:bgPr>
+        <a:solidFill xmlns:a="http://schemas.openxmlformats.org/drawingml/2006/main">
+          <a:srgbClr val="09090B"/>
+        </a:solidFill>
+      </p:bgPr>
+    </p:bg>
+    <p:spTree>
+      <p:nvGrpSpPr>
+        <p:cNvPr id="1" name=""/>
+        <p:cNvGrpSpPr/>
+        <p:nvPr/>
+      </p:nvGrpSpPr>
+      <p:grpSpPr>
+        <a:xfrm xmlns:a="http://schemas.openxmlformats.org/drawingml/2006/main"/>
+      </p:grpSpPr>
+      <p:sp>
+        <p:nvSpPr>
+          <p:cNvPr id="7" name="">
+            <a:extLst xmlns:a="http://schemas.openxmlformats.org/drawingml/2006/main">
+              <a:ext uri="{FF2B5EF4-FFF2-40B4-BE49-F238E27FC236}">
+                <a16:creationId xmlns:a16="http://schemas.microsoft.com/office/drawing/2014/main" id="{0BCE7827-648B-4B62-AE80-F3CE9BFFD594}"/>
+              </a:ext>
+            </a:extLst>
+          </p:cNvPr>
+          <p:cNvSpPr>
+            <a:spLocks xmlns:a="http://schemas.openxmlformats.org/drawingml/2006/main" noGrp="1"/>
+          </p:cNvSpPr>
+          <p:nvPr/>
+        </p:nvSpPr>
+        <p:spPr>
+          <a:xfrm xmlns:a="http://schemas.openxmlformats.org/drawingml/2006/main">
+            <a:off x="685800" y="361950"/>
+            <a:ext cx="10477500" cy="285750"/>
+          </a:xfrm>
+          <a:prstGeom xmlns:a="http://schemas.openxmlformats.org/drawingml/2006/main" prst="rect">
+            <a:avLst/>
+          </a:prstGeom>
+          <a:noFill xmlns:a="http://schemas.openxmlformats.org/drawingml/2006/main"/>
+          <a:ln xmlns:a="http://schemas.openxmlformats.org/drawingml/2006/main" w="0">
+            <a:noFill/>
+          </a:ln>
+        </p:spPr>
+        <p:txBody>
+          <a:bodyPr xmlns:a="http://schemas.openxmlformats.org/drawingml/2006/main" anchor="t">
+            <a:normAutofit fontScale="100000"/>
+          </a:bodyPr>
+          <a:lstStyle xmlns:a="http://schemas.openxmlformats.org/drawingml/2006/main"/>
+          <a:p xmlns:a="http://schemas.openxmlformats.org/drawingml/2006/main">
+            <a:pPr>
+              <a:buNone/>
+              <a:defRPr sz="1275" b="0">
+                <a:solidFill>
+                  <a:srgbClr val="6EE7B7"/>
+                </a:solidFill>
+                <a:latin typeface="Courier New"/>
+                <a:ea typeface="Courier New"/>
+                <a:cs typeface="Courier New"/>
+              </a:defRPr>
+            </a:pPr>
+            <a:r>
+              <a:rPr sz="1275" b="0">
+                <a:solidFill>
+                  <a:srgbClr val="6EE7B7"/>
+                </a:solidFill>
+                <a:latin typeface="Courier New"/>
+                <a:ea typeface="Courier New"/>
+                <a:cs typeface="Courier New"/>
+              </a:rPr>
+              <a:t>FLOATING POINT · METHOD</a:t>
+            </a:r>
+          </a:p>
+        </p:txBody>
+      </p:sp>
+      <p:sp>
+        <p:nvSpPr>
+          <p:cNvPr id="2" name="">
+            <a:extLst xmlns:a="http://schemas.openxmlformats.org/drawingml/2006/main">
+              <a:ext uri="{FF2B5EF4-FFF2-40B4-BE49-F238E27FC236}">
+                <a16:creationId xmlns:a16="http://schemas.microsoft.com/office/drawing/2014/main" id="{E6B69FE5-5D95-4306-AAF0-9A70AD531613}"/>
+              </a:ext>
+            </a:extLst>
+          </p:cNvPr>
+          <p:cNvSpPr>
+            <a:spLocks xmlns:a="http://schemas.openxmlformats.org/drawingml/2006/main" noGrp="1"/>
+          </p:cNvSpPr>
+          <p:nvPr/>
+        </p:nvSpPr>
+        <p:spPr>
+          <a:xfrm xmlns:a="http://schemas.openxmlformats.org/drawingml/2006/main">
+            <a:off x="685800" y="885825"/>
+            <a:ext cx="10820400" cy="1066800"/>
+          </a:xfrm>
+          <a:prstGeom xmlns:a="http://schemas.openxmlformats.org/drawingml/2006/main" prst="rect">
+            <a:avLst/>
+          </a:prstGeom>
+          <a:noFill xmlns:a="http://schemas.openxmlformats.org/drawingml/2006/main"/>
+          <a:ln xmlns:a="http://schemas.openxmlformats.org/drawingml/2006/main" w="0">
+            <a:noFill/>
+          </a:ln>
+        </p:spPr>
+        <p:txBody>
+          <a:bodyPr xmlns:a="http://schemas.openxmlformats.org/drawingml/2006/main" anchor="t">
+            <a:normAutofit fontScale="100000"/>
+          </a:bodyPr>
+          <a:lstStyle xmlns:a="http://schemas.openxmlformats.org/drawingml/2006/main"/>
+          <a:p xmlns:a="http://schemas.openxmlformats.org/drawingml/2006/main">
+            <a:pPr>
+              <a:buNone/>
+              <a:defRPr sz="3600" b="0">
+                <a:solidFill>
+                  <a:srgbClr val="FAFAFA"/>
+                </a:solidFill>
+                <a:latin typeface="Arial"/>
+                <a:ea typeface="Arial"/>
+                <a:cs typeface="Arial"/>
+              </a:defRPr>
+            </a:pPr>
+            <a:r>
+              <a:rPr sz="3600" b="0">
+                <a:solidFill>
+                  <a:srgbClr val="FAFAFA"/>
+                </a:solidFill>
+                <a:latin typeface="Arial"/>
+                <a:ea typeface="Arial"/>
+                <a:cs typeface="Arial"/>
+              </a:rPr>
+              <a:t>HW3 preview: choose the equation</a:t>
+            </a:r>
+          </a:p>
+        </p:txBody>
+      </p:sp>
+      <p:sp>
+        <p:nvSpPr>
+          <p:cNvPr id="3" name="">
+            <a:extLst xmlns:a="http://schemas.openxmlformats.org/drawingml/2006/main">
+              <a:ext uri="{FF2B5EF4-FFF2-40B4-BE49-F238E27FC236}">
+                <a16:creationId xmlns:a16="http://schemas.microsoft.com/office/drawing/2014/main" id="{887FE9A9-E5DE-4BC1-94AD-59371BF9B78C}"/>
+              </a:ext>
+            </a:extLst>
+          </p:cNvPr>
+          <p:cNvSpPr>
+            <a:spLocks xmlns:a="http://schemas.openxmlformats.org/drawingml/2006/main" noGrp="1"/>
+          </p:cNvSpPr>
+          <p:nvPr/>
+        </p:nvSpPr>
+        <p:spPr>
+          <a:xfrm xmlns:a="http://schemas.openxmlformats.org/drawingml/2006/main">
+            <a:off x="685800" y="2200275"/>
+            <a:ext cx="4857750" cy="3124200"/>
+          </a:xfrm>
+          <a:prstGeom xmlns:a="http://schemas.openxmlformats.org/drawingml/2006/main" prst="rect">
+            <a:avLst/>
+          </a:prstGeom>
+          <a:noFill xmlns:a="http://schemas.openxmlformats.org/drawingml/2006/main"/>
+          <a:ln xmlns:a="http://schemas.openxmlformats.org/drawingml/2006/main" w="0">
+            <a:noFill/>
+          </a:ln>
+        </p:spPr>
+        <p:txBody>
+          <a:bodyPr xmlns:a="http://schemas.openxmlformats.org/drawingml/2006/main" anchor="t">
+            <a:normAutofit fontScale="100000"/>
+          </a:bodyPr>
+          <a:lstStyle xmlns:a="http://schemas.openxmlformats.org/drawingml/2006/main"/>
+          <a:p xmlns:a="http://schemas.openxmlformats.org/drawingml/2006/main">
+            <a:pPr>
+              <a:buNone/>
+              <a:defRPr sz="1950" b="0">
+                <a:solidFill>
+                  <a:srgbClr val="D4D4D8"/>
+                </a:solidFill>
+                <a:latin typeface="Arial"/>
+                <a:ea typeface="Arial"/>
+                <a:cs typeface="Arial"/>
+              </a:defRPr>
+            </a:pPr>
+            <a:r>
+              <a:rPr sz="1950" b="0">
+                <a:solidFill>
+                  <a:srgbClr val="D4D4D8"/>
+                </a:solidFill>
+                <a:latin typeface="Arial"/>
+                <a:ea typeface="Arial"/>
+                <a:cs typeface="Arial"/>
+              </a:rPr>
+              <a:t>Compare a nonzero ratio with the smallest normal, 2^(1−bias). Below that threshold, set E = 0 and use no hidden 1.</a:t>
+            </a:r>
+          </a:p>
+          <a:p xmlns:a="http://schemas.openxmlformats.org/drawingml/2006/main">
+            <a:pPr>
+              <a:buNone/>
+              <a:defRPr sz="1950" b="0">
+                <a:solidFill>
+                  <a:srgbClr val="D4D4D8"/>
+                </a:solidFill>
+                <a:latin typeface="Arial"/>
+                <a:ea typeface="Arial"/>
+                <a:cs typeface="Arial"/>
+              </a:defRPr>
+            </a:pPr>
+            <a:r>
+              <a:rPr sz="1950" b="0">
+                <a:solidFill>
+                  <a:srgbClr val="D4D4D8"/>
+                </a:solidFill>
+                <a:latin typeface="Arial"/>
+                <a:ea typeface="Arial"/>
+                <a:cs typeface="Arial"/>
+              </a:rPr>
+              <a:t/>
+            </a:r>
+          </a:p>
+          <a:p xmlns:a="http://schemas.openxmlformats.org/drawingml/2006/main">
+            <a:pPr>
+              <a:buNone/>
+              <a:defRPr sz="1950" b="0">
+                <a:solidFill>
+                  <a:srgbClr val="D4D4D8"/>
+                </a:solidFill>
+                <a:latin typeface="Arial"/>
+                <a:ea typeface="Arial"/>
+                <a:cs typeface="Arial"/>
+              </a:defRPr>
+            </a:pPr>
+            <a:r>
+              <a:rPr sz="1950" b="0">
+                <a:solidFill>
+                  <a:srgbClr val="D4D4D8"/>
+                </a:solidFill>
+                <a:latin typeface="Arial"/>
+                <a:ea typeface="Arial"/>
+                <a:cs typeface="Arial"/>
+              </a:rPr>
+              <a:t>Otherwise find the true exponent e and store E = e + bias. Solve for F, then decode to check.</a:t>
+            </a:r>
+          </a:p>
+        </p:txBody>
+      </p:sp>
+      <p:sp>
+        <p:nvSpPr>
+          <p:cNvPr id="4" name="">
+            <a:extLst xmlns:a="http://schemas.openxmlformats.org/drawingml/2006/main">
+              <a:ext uri="{FF2B5EF4-FFF2-40B4-BE49-F238E27FC236}">
+                <a16:creationId xmlns:a16="http://schemas.microsoft.com/office/drawing/2014/main" id="{CED75AEC-85E3-4520-B63E-09FCF9AACAE6}"/>
+              </a:ext>
+            </a:extLst>
+          </p:cNvPr>
+          <p:cNvSpPr>
+            <a:spLocks xmlns:a="http://schemas.openxmlformats.org/drawingml/2006/main" noGrp="1"/>
+          </p:cNvSpPr>
+          <p:nvPr/>
+        </p:nvSpPr>
+        <p:spPr>
+          <a:xfrm xmlns:a="http://schemas.openxmlformats.org/drawingml/2006/main">
+            <a:off x="6181725" y="2200275"/>
+            <a:ext cx="5238750" cy="3286125"/>
+          </a:xfrm>
+          <a:prstGeom xmlns:a="http://schemas.openxmlformats.org/drawingml/2006/main" prst="rect">
+            <a:avLst/>
+          </a:prstGeom>
+          <a:noFill xmlns:a="http://schemas.openxmlformats.org/drawingml/2006/main"/>
+          <a:ln xmlns:a="http://schemas.openxmlformats.org/drawingml/2006/main" w="0">
+            <a:noFill/>
+          </a:ln>
+        </p:spPr>
+        <p:txBody>
+          <a:bodyPr xmlns:a="http://schemas.openxmlformats.org/drawingml/2006/main" anchor="t">
+            <a:normAutofit fontScale="100000"/>
+          </a:bodyPr>
+          <a:lstStyle xmlns:a="http://schemas.openxmlformats.org/drawingml/2006/main"/>
+          <a:p xmlns:a="http://schemas.openxmlformats.org/drawingml/2006/main">
+            <a:pPr>
+              <a:buNone/>
+              <a:defRPr sz="1650" b="0">
+                <a:solidFill>
+                  <a:srgbClr val="A7F3D0"/>
+                </a:solidFill>
+                <a:latin typeface="Courier New"/>
+                <a:ea typeface="Courier New"/>
+                <a:cs typeface="Courier New"/>
+              </a:defRPr>
+            </a:pPr>
+            <a:r>
+              <a:rPr sz="1650" b="0">
+                <a:solidFill>
+                  <a:srgbClr val="A7F3D0"/>
+                </a:solidFill>
+                <a:latin typeface="Courier New"/>
+                <a:ea typeface="Courier New"/>
+                <a:cs typeface="Courier New"/>
+              </a:rPr>
+              <a:t>Normal (nonzero, not all-ones exponent):</a:t>
+            </a:r>
+          </a:p>
+          <a:p xmlns:a="http://schemas.openxmlformats.org/drawingml/2006/main">
+            <a:pPr>
+              <a:buNone/>
+              <a:defRPr sz="1650" b="0">
+                <a:solidFill>
+                  <a:srgbClr val="A7F3D0"/>
+                </a:solidFill>
+                <a:latin typeface="Courier New"/>
+                <a:ea typeface="Courier New"/>
+                <a:cs typeface="Courier New"/>
+              </a:defRPr>
+            </a:pPr>
+            <a:r>
+              <a:rPr sz="1650" b="0">
+                <a:solidFill>
+                  <a:srgbClr val="A7F3D0"/>
+                </a:solidFill>
+                <a:latin typeface="Courier New"/>
+                <a:ea typeface="Courier New"/>
+                <a:cs typeface="Courier New"/>
+              </a:rPr>
+              <a:t>(-1)^sign × 2^(exponent−bias)</a:t>
+            </a:r>
+          </a:p>
+          <a:p xmlns:a="http://schemas.openxmlformats.org/drawingml/2006/main">
+            <a:pPr>
+              <a:buNone/>
+              <a:defRPr sz="1650" b="0">
+                <a:solidFill>
+                  <a:srgbClr val="A7F3D0"/>
+                </a:solidFill>
+                <a:latin typeface="Courier New"/>
+                <a:ea typeface="Courier New"/>
+                <a:cs typeface="Courier New"/>
+              </a:defRPr>
+            </a:pPr>
+            <a:r>
+              <a:rPr sz="1650" b="0">
+                <a:solidFill>
+                  <a:srgbClr val="A7F3D0"/>
+                </a:solidFill>
+                <a:latin typeface="Courier New"/>
+                <a:ea typeface="Courier New"/>
+                <a:cs typeface="Courier New"/>
+              </a:rPr>
+              <a:t>× (1 + Significand/2^(Sig Bits))</a:t>
+            </a:r>
+          </a:p>
+          <a:p xmlns:a="http://schemas.openxmlformats.org/drawingml/2006/main">
+            <a:pPr>
+              <a:buNone/>
+              <a:defRPr sz="1650">
+                <a:solidFill>
+                  <a:srgbClr val="A7F3D0"/>
+                </a:solidFill>
+                <a:latin typeface="Courier New"/>
+                <a:ea typeface="Courier New"/>
+                <a:cs typeface="Courier New"/>
+              </a:defRPr>
+            </a:pPr>
+            <a:r>
+              <a:rPr sz="1650">
+                <a:solidFill>
+                  <a:srgbClr val="A7F3D0"/>
+                </a:solidFill>
+                <a:latin typeface="Courier New"/>
+                <a:ea typeface="Courier New"/>
+                <a:cs typeface="Courier New"/>
+              </a:rPr>
+              <a:t/>
+            </a:r>
+          </a:p>
+          <a:p xmlns:a="http://schemas.openxmlformats.org/drawingml/2006/main">
+            <a:pPr>
+              <a:buNone/>
+              <a:defRPr sz="1650" b="0">
+                <a:solidFill>
+                  <a:srgbClr val="A7F3D0"/>
+                </a:solidFill>
+                <a:latin typeface="Courier New"/>
+                <a:ea typeface="Courier New"/>
+                <a:cs typeface="Courier New"/>
+              </a:defRPr>
+            </a:pPr>
+            <a:r>
+              <a:rPr sz="1650" b="0">
+                <a:solidFill>
+                  <a:srgbClr val="A7F3D0"/>
+                </a:solidFill>
+                <a:latin typeface="Courier New"/>
+                <a:ea typeface="Courier New"/>
+                <a:cs typeface="Courier New"/>
+              </a:rPr>
+              <a:t>Subnormal (exponent = 0):</a:t>
+            </a:r>
+          </a:p>
+          <a:p xmlns:a="http://schemas.openxmlformats.org/drawingml/2006/main">
+            <a:pPr>
+              <a:buNone/>
+              <a:defRPr sz="1650" b="0">
+                <a:solidFill>
+                  <a:srgbClr val="A7F3D0"/>
+                </a:solidFill>
+                <a:latin typeface="Courier New"/>
+                <a:ea typeface="Courier New"/>
+                <a:cs typeface="Courier New"/>
+              </a:defRPr>
+            </a:pPr>
+            <a:r>
+              <a:rPr sz="1650" b="0">
+                <a:solidFill>
+                  <a:srgbClr val="A7F3D0"/>
+                </a:solidFill>
+                <a:latin typeface="Courier New"/>
+                <a:ea typeface="Courier New"/>
+                <a:cs typeface="Courier New"/>
+              </a:rPr>
+              <a:t>(-1)^sign × 2^(1−bias)</a:t>
+            </a:r>
+          </a:p>
+          <a:p xmlns:a="http://schemas.openxmlformats.org/drawingml/2006/main">
+            <a:pPr>
+              <a:buNone/>
+              <a:defRPr sz="1650" b="0">
+                <a:solidFill>
+                  <a:srgbClr val="A7F3D0"/>
+                </a:solidFill>
+                <a:latin typeface="Courier New"/>
+                <a:ea typeface="Courier New"/>
+                <a:cs typeface="Courier New"/>
+              </a:defRPr>
+            </a:pPr>
+            <a:r>
+              <a:rPr sz="1650" b="0">
+                <a:solidFill>
+                  <a:srgbClr val="A7F3D0"/>
+                </a:solidFill>
+                <a:latin typeface="Courier New"/>
+                <a:ea typeface="Courier New"/>
+                <a:cs typeface="Courier New"/>
+              </a:rPr>
+              <a:t>× (Significand/2^(Sig Bits))</a:t>
+            </a:r>
+          </a:p>
+        </p:txBody>
+      </p:sp>
+      <p:sp>
+        <p:nvSpPr>
+          <p:cNvPr id="5" name="">
+            <a:extLst xmlns:a="http://schemas.openxmlformats.org/drawingml/2006/main">
+              <a:ext uri="{FF2B5EF4-FFF2-40B4-BE49-F238E27FC236}">
+                <a16:creationId xmlns:a16="http://schemas.microsoft.com/office/drawing/2014/main" id="{7A18BC8F-2DC5-4B6B-A4F9-10CDE1183DE6}"/>
+              </a:ext>
+            </a:extLst>
+          </p:cNvPr>
+          <p:cNvSpPr>
+            <a:spLocks xmlns:a="http://schemas.openxmlformats.org/drawingml/2006/main" noGrp="1"/>
+          </p:cNvSpPr>
+          <p:nvPr/>
+        </p:nvSpPr>
+        <p:spPr>
+          <a:xfrm xmlns:a="http://schemas.openxmlformats.org/drawingml/2006/main">
+            <a:off x="685800" y="5743575"/>
+            <a:ext cx="10191750" cy="428625"/>
+          </a:xfrm>
+          <a:prstGeom xmlns:a="http://schemas.openxmlformats.org/drawingml/2006/main" prst="rect">
+            <a:avLst/>
+          </a:prstGeom>
+          <a:noFill xmlns:a="http://schemas.openxmlformats.org/drawingml/2006/main"/>
+          <a:ln xmlns:a="http://schemas.openxmlformats.org/drawingml/2006/main" w="0">
+            <a:noFill/>
+          </a:ln>
+        </p:spPr>
+        <p:txBody>
+          <a:bodyPr xmlns:a="http://schemas.openxmlformats.org/drawingml/2006/main" anchor="t">
+            <a:normAutofit fontScale="100000"/>
+          </a:bodyPr>
+          <a:lstStyle xmlns:a="http://schemas.openxmlformats.org/drawingml/2006/main"/>
+          <a:p xmlns:a="http://schemas.openxmlformats.org/drawingml/2006/main">
+            <a:pPr>
+              <a:buNone/>
+              <a:defRPr sz="1350" b="0">
+                <a:solidFill>
+                  <a:srgbClr val="A1A1AA"/>
+                </a:solidFill>
+                <a:latin typeface="Arial"/>
+                <a:ea typeface="Arial"/>
+                <a:cs typeface="Arial"/>
+              </a:defRPr>
+            </a:pPr>
+            <a:r>
+              <a:rPr sz="1350" b="0">
+                <a:solidFill>
+                  <a:srgbClr val="A1A1AA"/>
+                </a:solidFill>
+                <a:latin typeface="Arial"/>
+                <a:ea typeface="Arial"/>
+                <a:cs typeface="Arial"/>
+              </a:rPr>
+              <a:t>Use the supplied Sig Bits and bias, not the values from our practice format.</a:t>
+            </a:r>
+          </a:p>
+        </p:txBody>
+      </p:sp>
+      <p:sp>
+        <p:nvSpPr>
+          <p:cNvPr id="6" name="">
+            <a:extLst xmlns:a="http://schemas.openxmlformats.org/drawingml/2006/main">
+              <a:ext uri="{FF2B5EF4-FFF2-40B4-BE49-F238E27FC236}">
+                <a16:creationId xmlns:a16="http://schemas.microsoft.com/office/drawing/2014/main" id="{94269C50-3A0A-4FBB-A1D2-A33411F72ECA}"/>
+              </a:ext>
+            </a:extLst>
+          </p:cNvPr>
+          <p:cNvSpPr>
+            <a:spLocks xmlns:a="http://schemas.openxmlformats.org/drawingml/2006/main" noGrp="1"/>
+          </p:cNvSpPr>
+          <p:nvPr/>
+        </p:nvSpPr>
+        <p:spPr>
+          <a:xfrm xmlns:a="http://schemas.openxmlformats.org/drawingml/2006/main">
+            <a:off x="10477500" y="6210300"/>
+            <a:ext cx="1000125" cy="219075"/>
+          </a:xfrm>
+          <a:prstGeom xmlns:a="http://schemas.openxmlformats.org/drawingml/2006/main" prst="rect">
+            <a:avLst/>
+          </a:prstGeom>
+          <a:noFill xmlns:a="http://schemas.openxmlformats.org/drawingml/2006/main"/>
+          <a:ln xmlns:a="http://schemas.openxmlformats.org/drawingml/2006/main" w="0">
+            <a:noFill/>
+          </a:ln>
+        </p:spPr>
+        <p:txBody>
+          <a:bodyPr xmlns:a="http://schemas.openxmlformats.org/drawingml/2006/main" anchor="t">
+            <a:normAutofit fontScale="79762"/>
+          </a:bodyPr>
+          <a:lstStyle xmlns:a="http://schemas.openxmlformats.org/drawingml/2006/main"/>
+          <a:p xmlns:a="http://schemas.openxmlformats.org/drawingml/2006/main">
+            <a:pPr>
+              <a:buNone/>
+              <a:defRPr sz="1050" b="0">
+                <a:solidFill>
+                  <a:srgbClr val="71717A"/>
+                </a:solidFill>
+                <a:latin typeface="Courier New"/>
+                <a:ea typeface="Courier New"/>
+                <a:cs typeface="Courier New"/>
+              </a:defRPr>
+            </a:pPr>
+            <a:r>
+              <a:rPr sz="1050" b="0">
+                <a:solidFill>
+                  <a:srgbClr val="71717A"/>
+                </a:solidFill>
+                <a:latin typeface="Courier New"/>
+                <a:ea typeface="Courier New"/>
+                <a:cs typeface="Courier New"/>
+              </a:rPr>
+              <a:t>25 / 26</a:t>
+            </a:r>
+          </a:p>
+        </p:txBody>
+      </p:sp>
+    </p:spTree>
+    <p:extLst>
+      <p:ext uri="{BB962C8B-B14F-4D97-AF65-F5344CB8AC3E}">
+        <p14:creationId xmlns:p14="http://schemas.microsoft.com/office/powerpoint/2010/main" val="1018474765"/>
+      </p:ext>
+    </p:extLst>
+  </p:cSld>
+</p:sld>
+</file>
+
+<file path=ppt/slides/slide26.xml><?xml version="1.0" encoding="utf-8"?>
+<p:sld xmlns:p="http://schemas.openxmlformats.org/presentationml/2006/main">
+  <p:cSld>
+    <p:bg>
+      <p:bgPr>
+        <a:solidFill xmlns:a="http://schemas.openxmlformats.org/drawingml/2006/main">
+          <a:srgbClr val="09090B"/>
+        </a:solidFill>
+      </p:bgPr>
+    </p:bg>
+    <p:spTree>
+      <p:nvGrpSpPr>
+        <p:cNvPr id="1" name=""/>
+        <p:cNvGrpSpPr/>
+        <p:nvPr/>
+      </p:nvGrpSpPr>
+      <p:grpSpPr>
+        <a:xfrm xmlns:a="http://schemas.openxmlformats.org/drawingml/2006/main"/>
+      </p:grpSpPr>
+      <p:sp>
+        <p:nvSpPr>
+          <p:cNvPr id="7" name="">
+            <a:extLst xmlns:a="http://schemas.openxmlformats.org/drawingml/2006/main">
+              <a:ext uri="{FF2B5EF4-FFF2-40B4-BE49-F238E27FC236}">
+                <a16:creationId xmlns:a16="http://schemas.microsoft.com/office/drawing/2014/main" id="{4989B079-C3E8-43BB-8638-96121018769A}"/>
+              </a:ext>
+            </a:extLst>
+          </p:cNvPr>
+          <p:cNvSpPr>
+            <a:spLocks xmlns:a="http://schemas.openxmlformats.org/drawingml/2006/main" noGrp="1"/>
+          </p:cNvSpPr>
+          <p:nvPr/>
+        </p:nvSpPr>
+        <p:spPr>
+          <a:xfrm xmlns:a="http://schemas.openxmlformats.org/drawingml/2006/main">
+            <a:off x="685800" y="361950"/>
+            <a:ext cx="10477500" cy="285750"/>
+          </a:xfrm>
+          <a:prstGeom xmlns:a="http://schemas.openxmlformats.org/drawingml/2006/main" prst="rect">
+            <a:avLst/>
+          </a:prstGeom>
+          <a:noFill xmlns:a="http://schemas.openxmlformats.org/drawingml/2006/main"/>
+          <a:ln xmlns:a="http://schemas.openxmlformats.org/drawingml/2006/main" w="0">
+            <a:noFill/>
+          </a:ln>
+        </p:spPr>
+        <p:txBody>
+          <a:bodyPr xmlns:a="http://schemas.openxmlformats.org/drawingml/2006/main" anchor="t">
+            <a:normAutofit fontScale="100000"/>
+          </a:bodyPr>
+          <a:lstStyle xmlns:a="http://schemas.openxmlformats.org/drawingml/2006/main"/>
+          <a:p xmlns:a="http://schemas.openxmlformats.org/drawingml/2006/main">
+            <a:pPr>
+              <a:buNone/>
+              <a:defRPr sz="1275" b="0">
+                <a:solidFill>
+                  <a:srgbClr val="6EE7B7"/>
+                </a:solidFill>
+                <a:latin typeface="Courier New"/>
+                <a:ea typeface="Courier New"/>
+                <a:cs typeface="Courier New"/>
+              </a:defRPr>
+            </a:pPr>
+            <a:r>
+              <a:rPr sz="1275" b="0">
+                <a:solidFill>
+                  <a:srgbClr val="6EE7B7"/>
+                </a:solidFill>
+                <a:latin typeface="Courier New"/>
+                <a:ea typeface="Courier New"/>
+                <a:cs typeface="Courier New"/>
+              </a:rPr>
+              <a:t>FLOATING POINT · RECAP</a:t>
+            </a:r>
+          </a:p>
+        </p:txBody>
+      </p:sp>
+      <p:sp>
+        <p:nvSpPr>
+          <p:cNvPr id="2" name="">
+            <a:extLst xmlns:a="http://schemas.openxmlformats.org/drawingml/2006/main">
+              <a:ext uri="{FF2B5EF4-FFF2-40B4-BE49-F238E27FC236}">
+                <a16:creationId xmlns:a16="http://schemas.microsoft.com/office/drawing/2014/main" id="{95D3113E-85F1-4E22-A62E-265E94FE3617}"/>
+              </a:ext>
+            </a:extLst>
+          </p:cNvPr>
+          <p:cNvSpPr>
+            <a:spLocks xmlns:a="http://schemas.openxmlformats.org/drawingml/2006/main" noGrp="1"/>
+          </p:cNvSpPr>
+          <p:nvPr/>
+        </p:nvSpPr>
+        <p:spPr>
+          <a:xfrm xmlns:a="http://schemas.openxmlformats.org/drawingml/2006/main">
+            <a:off x="685800" y="885825"/>
+            <a:ext cx="10820400" cy="1066800"/>
+          </a:xfrm>
+          <a:prstGeom xmlns:a="http://schemas.openxmlformats.org/drawingml/2006/main" prst="rect">
+            <a:avLst/>
+          </a:prstGeom>
+          <a:noFill xmlns:a="http://schemas.openxmlformats.org/drawingml/2006/main"/>
+          <a:ln xmlns:a="http://schemas.openxmlformats.org/drawingml/2006/main" w="0">
+            <a:noFill/>
+          </a:ln>
+        </p:spPr>
+        <p:txBody>
+          <a:bodyPr xmlns:a="http://schemas.openxmlformats.org/drawingml/2006/main" anchor="t">
+            <a:normAutofit fontScale="100000"/>
+          </a:bodyPr>
+          <a:lstStyle xmlns:a="http://schemas.openxmlformats.org/drawingml/2006/main"/>
+          <a:p xmlns:a="http://schemas.openxmlformats.org/drawingml/2006/main">
+            <a:pPr>
+              <a:buNone/>
+              <a:defRPr sz="3600" b="0">
+                <a:solidFill>
+                  <a:srgbClr val="FAFAFA"/>
+                </a:solidFill>
+                <a:latin typeface="Arial"/>
+                <a:ea typeface="Arial"/>
+                <a:cs typeface="Arial"/>
+              </a:defRPr>
+            </a:pPr>
+            <a:r>
+              <a:rPr sz="3600" b="0">
+                <a:solidFill>
+                  <a:srgbClr val="FAFAFA"/>
+                </a:solidFill>
+                <a:latin typeface="Arial"/>
+                <a:ea typeface="Arial"/>
+                <a:cs typeface="Arial"/>
+              </a:rPr>
+              <a:t>How to check an encoding</a:t>
+            </a:r>
+          </a:p>
+        </p:txBody>
+      </p:sp>
+      <p:sp>
+        <p:nvSpPr>
+          <p:cNvPr id="3" name="">
+            <a:extLst xmlns:a="http://schemas.openxmlformats.org/drawingml/2006/main">
+              <a:ext uri="{FF2B5EF4-FFF2-40B4-BE49-F238E27FC236}">
+                <a16:creationId xmlns:a16="http://schemas.microsoft.com/office/drawing/2014/main" id="{8EC5E33C-BA7C-4ADE-9FC3-9ABD9F3C6FD4}"/>
+              </a:ext>
+            </a:extLst>
+          </p:cNvPr>
+          <p:cNvSpPr>
+            <a:spLocks xmlns:a="http://schemas.openxmlformats.org/drawingml/2006/main" noGrp="1"/>
+          </p:cNvSpPr>
+          <p:nvPr/>
+        </p:nvSpPr>
+        <p:spPr>
+          <a:xfrm xmlns:a="http://schemas.openxmlformats.org/drawingml/2006/main">
+            <a:off x="685800" y="2200275"/>
+            <a:ext cx="4857750" cy="3124200"/>
+          </a:xfrm>
+          <a:prstGeom xmlns:a="http://schemas.openxmlformats.org/drawingml/2006/main" prst="rect">
+            <a:avLst/>
+          </a:prstGeom>
+          <a:noFill xmlns:a="http://schemas.openxmlformats.org/drawingml/2006/main"/>
+          <a:ln xmlns:a="http://schemas.openxmlformats.org/drawingml/2006/main" w="0">
+            <a:noFill/>
+          </a:ln>
+        </p:spPr>
+        <p:txBody>
+          <a:bodyPr xmlns:a="http://schemas.openxmlformats.org/drawingml/2006/main" anchor="t">
+            <a:normAutofit fontScale="100000"/>
+          </a:bodyPr>
+          <a:lstStyle xmlns:a="http://schemas.openxmlformats.org/drawingml/2006/main"/>
+          <a:p xmlns:a="http://schemas.openxmlformats.org/drawingml/2006/main">
+            <a:pPr>
+              <a:buNone/>
+              <a:defRPr sz="1950" b="0">
+                <a:solidFill>
+                  <a:srgbClr val="D4D4D8"/>
+                </a:solidFill>
+                <a:latin typeface="Arial"/>
+                <a:ea typeface="Arial"/>
+                <a:cs typeface="Arial"/>
+              </a:defRPr>
+            </a:pPr>
+            <a:r>
+              <a:rPr sz="1950" b="0">
+                <a:solidFill>
+                  <a:srgbClr val="D4D4D8"/>
+                </a:solidFill>
+                <a:latin typeface="Arial"/>
+                <a:ea typeface="Arial"/>
+                <a:cs typeface="Arial"/>
+              </a:rPr>
+              <a:t>In our practice format, substitute sign 0, bias 3, and Sig Bits 3 into Firner’s equations. E = 0 selects the subnormal equation; other finite exponent fields use the normal equation.</a:t>
+            </a:r>
+          </a:p>
+          <a:p xmlns:a="http://schemas.openxmlformats.org/drawingml/2006/main">
+            <a:r>
+              <a:t/>
+            </a:r>
+          </a:p>
+          <a:p xmlns:a="http://schemas.openxmlformats.org/drawingml/2006/main">
+            <a:pPr>
+              <a:buNone/>
+              <a:defRPr sz="1950" b="0">
+                <a:solidFill>
+                  <a:srgbClr val="D4D4D8"/>
+                </a:solidFill>
+                <a:latin typeface="Arial"/>
+                <a:ea typeface="Arial"/>
+                <a:cs typeface="Arial"/>
+              </a:defRPr>
+            </a:pPr>
+            <a:r>
+              <a:rPr sz="1950" b="0">
+                <a:solidFill>
+                  <a:srgbClr val="D4D4D8"/>
+                </a:solidFill>
+                <a:latin typeface="Arial"/>
+                <a:ea typeface="Arial"/>
+                <a:cs typeface="Arial"/>
+              </a:rPr>
+              <a:t>For an inexact value, follow the problem’s rounding rule.</a:t>
+            </a:r>
+          </a:p>
+        </p:txBody>
+      </p:sp>
+      <p:sp>
+        <p:nvSpPr>
+          <p:cNvPr id="4" name="">
+            <a:extLst xmlns:a="http://schemas.openxmlformats.org/drawingml/2006/main">
+              <a:ext uri="{FF2B5EF4-FFF2-40B4-BE49-F238E27FC236}">
+                <a16:creationId xmlns:a16="http://schemas.microsoft.com/office/drawing/2014/main" id="{EA939046-DA6B-448C-A179-5B13743C72F3}"/>
+              </a:ext>
+            </a:extLst>
+          </p:cNvPr>
+          <p:cNvSpPr>
+            <a:spLocks xmlns:a="http://schemas.openxmlformats.org/drawingml/2006/main" noGrp="1"/>
+          </p:cNvSpPr>
+          <p:nvPr/>
+        </p:nvSpPr>
+        <p:spPr>
+          <a:xfrm xmlns:a="http://schemas.openxmlformats.org/drawingml/2006/main">
+            <a:off x="6181725" y="2200275"/>
+            <a:ext cx="5238750" cy="3286125"/>
+          </a:xfrm>
+          <a:prstGeom xmlns:a="http://schemas.openxmlformats.org/drawingml/2006/main" prst="rect">
+            <a:avLst/>
+          </a:prstGeom>
+          <a:noFill xmlns:a="http://schemas.openxmlformats.org/drawingml/2006/main"/>
+          <a:ln xmlns:a="http://schemas.openxmlformats.org/drawingml/2006/main" w="0">
+            <a:noFill/>
+          </a:ln>
+        </p:spPr>
+        <p:txBody>
+          <a:bodyPr xmlns:a="http://schemas.openxmlformats.org/drawingml/2006/main" anchor="t">
+            <a:normAutofit fontScale="100000"/>
+          </a:bodyPr>
+          <a:lstStyle xmlns:a="http://schemas.openxmlformats.org/drawingml/2006/main"/>
+          <a:p xmlns:a="http://schemas.openxmlformats.org/drawingml/2006/main">
+            <a:pPr>
+              <a:buNone/>
+              <a:defRPr sz="1650" b="0">
+                <a:solidFill>
+                  <a:srgbClr val="A7F3D0"/>
+                </a:solidFill>
+                <a:latin typeface="Courier New"/>
+                <a:ea typeface="Courier New"/>
+                <a:cs typeface="Courier New"/>
+              </a:defRPr>
+            </a:pPr>
+            <a:r>
+              <a:rPr sz="1650" b="0">
+                <a:solidFill>
+                  <a:srgbClr val="A7F3D0"/>
+                </a:solidFill>
+                <a:latin typeface="Courier New"/>
+                <a:ea typeface="Courier New"/>
+                <a:cs typeface="Courier New"/>
+              </a:rPr>
+              <a:t>Our format: S = 0, bias = 3, p = 3</a:t>
+            </a:r>
+          </a:p>
+          <a:p xmlns:a="http://schemas.openxmlformats.org/drawingml/2006/main">
+            <a:r>
+              <a:t/>
+            </a:r>
+          </a:p>
+          <a:p xmlns:a="http://schemas.openxmlformats.org/drawingml/2006/main">
+            <a:pPr>
+              <a:buNone/>
+              <a:defRPr sz="1650" b="0">
+                <a:solidFill>
+                  <a:srgbClr val="A7F3D0"/>
+                </a:solidFill>
+                <a:latin typeface="Courier New"/>
+                <a:ea typeface="Courier New"/>
+                <a:cs typeface="Courier New"/>
+              </a:defRPr>
+            </a:pPr>
+            <a:r>
+              <a:rPr sz="1650" b="0">
+                <a:solidFill>
+                  <a:srgbClr val="A7F3D0"/>
+                </a:solidFill>
+                <a:latin typeface="Courier New"/>
+                <a:ea typeface="Courier New"/>
+                <a:cs typeface="Courier New"/>
+              </a:rPr>
+              <a:t>Normal: 2^(E−3) × (1 + F/2^3)</a:t>
+            </a:r>
+          </a:p>
+          <a:p xmlns:a="http://schemas.openxmlformats.org/drawingml/2006/main">
+            <a:pPr>
+              <a:buNone/>
+              <a:defRPr sz="1650" b="0">
+                <a:solidFill>
+                  <a:srgbClr val="A7F3D0"/>
+                </a:solidFill>
+                <a:latin typeface="Courier New"/>
+                <a:ea typeface="Courier New"/>
+                <a:cs typeface="Courier New"/>
+              </a:defRPr>
+            </a:pPr>
+            <a:r>
+              <a:rPr sz="1650" b="0">
+                <a:solidFill>
+                  <a:srgbClr val="A7F3D0"/>
+                </a:solidFill>
+                <a:latin typeface="Courier New"/>
+                <a:ea typeface="Courier New"/>
+                <a:cs typeface="Courier New"/>
+              </a:rPr>
+              <a:t>Subnormal: 2^(1−3) × (F/2^3)</a:t>
+            </a:r>
+          </a:p>
+          <a:p xmlns:a="http://schemas.openxmlformats.org/drawingml/2006/main">
+            <a:r>
+              <a:t/>
+            </a:r>
+          </a:p>
+          <a:p xmlns:a="http://schemas.openxmlformats.org/drawingml/2006/main">
+            <a:pPr>
+              <a:buNone/>
+              <a:defRPr sz="1650" b="0">
+                <a:solidFill>
+                  <a:srgbClr val="A7F3D0"/>
+                </a:solidFill>
+                <a:latin typeface="Courier New"/>
+                <a:ea typeface="Courier New"/>
+                <a:cs typeface="Courier New"/>
+              </a:defRPr>
+            </a:pPr>
+            <a:r>
+              <a:rPr sz="1650" b="0">
+                <a:solidFill>
+                  <a:srgbClr val="A7F3D0"/>
+                </a:solidFill>
+                <a:latin typeface="Courier New"/>
+                <a:ea typeface="Courier New"/>
+                <a:cs typeface="Courier New"/>
+              </a:rPr>
+              <a:t>E = 0, F = 0  →  zero</a:t>
+            </a:r>
+          </a:p>
+          <a:p xmlns:a="http://schemas.openxmlformats.org/drawingml/2006/main">
+            <a:r>
+              <a:t/>
+            </a:r>
+          </a:p>
+          <a:p xmlns:a="http://schemas.openxmlformats.org/drawingml/2006/main">
+            <a:pPr>
+              <a:buNone/>
+              <a:defRPr sz="1650" b="0">
+                <a:solidFill>
+                  <a:srgbClr val="A7F3D0"/>
+                </a:solidFill>
+                <a:latin typeface="Courier New"/>
+                <a:ea typeface="Courier New"/>
+                <a:cs typeface="Courier New"/>
+              </a:defRPr>
+            </a:pPr>
+            <a:r>
+              <a:rPr sz="1650" b="0">
+                <a:solidFill>
+                  <a:srgbClr val="A7F3D0"/>
+                </a:solidFill>
+                <a:latin typeface="Courier New"/>
+                <a:ea typeface="Courier New"/>
+                <a:cs typeface="Courier New"/>
+              </a:rPr>
+              <a:t>Decode your bits as a final check.</a:t>
+            </a:r>
+          </a:p>
+        </p:txBody>
+      </p:sp>
+      <p:sp>
+        <p:nvSpPr>
+          <p:cNvPr id="5" name="">
+            <a:extLst xmlns:a="http://schemas.openxmlformats.org/drawingml/2006/main">
+              <a:ext uri="{FF2B5EF4-FFF2-40B4-BE49-F238E27FC236}">
+                <a16:creationId xmlns:a16="http://schemas.microsoft.com/office/drawing/2014/main" id="{585A0E73-828D-45A1-9AD7-8EED8C5E7EB1}"/>
+              </a:ext>
+            </a:extLst>
+          </p:cNvPr>
+          <p:cNvSpPr>
+            <a:spLocks xmlns:a="http://schemas.openxmlformats.org/drawingml/2006/main" noGrp="1"/>
+          </p:cNvSpPr>
+          <p:nvPr/>
+        </p:nvSpPr>
+        <p:spPr>
+          <a:xfrm xmlns:a="http://schemas.openxmlformats.org/drawingml/2006/main">
+            <a:off x="685800" y="5743575"/>
+            <a:ext cx="10191750" cy="428625"/>
+          </a:xfrm>
+          <a:prstGeom xmlns:a="http://schemas.openxmlformats.org/drawingml/2006/main" prst="rect">
+            <a:avLst/>
+          </a:prstGeom>
+          <a:noFill xmlns:a="http://schemas.openxmlformats.org/drawingml/2006/main"/>
+          <a:ln xmlns:a="http://schemas.openxmlformats.org/drawingml/2006/main" w="0">
+            <a:noFill/>
+          </a:ln>
+        </p:spPr>
+        <p:txBody>
+          <a:bodyPr xmlns:a="http://schemas.openxmlformats.org/drawingml/2006/main" anchor="t">
+            <a:normAutofit fontScale="100000"/>
+          </a:bodyPr>
+          <a:lstStyle xmlns:a="http://schemas.openxmlformats.org/drawingml/2006/main"/>
+          <a:p xmlns:a="http://schemas.openxmlformats.org/drawingml/2006/main">
+            <a:pPr>
+              <a:buNone/>
+              <a:defRPr sz="1350" b="0">
+                <a:solidFill>
+                  <a:srgbClr val="A1A1AA"/>
+                </a:solidFill>
+                <a:latin typeface="Arial"/>
+                <a:ea typeface="Arial"/>
+                <a:cs typeface="Arial"/>
+              </a:defRPr>
+            </a:pPr>
+            <a:r>
+              <a:rPr sz="1350" b="0">
+                <a:solidFill>
+                  <a:srgbClr val="A1A1AA"/>
+                </a:solidFill>
+                <a:latin typeface="Arial"/>
+                <a:ea typeface="Arial"/>
+                <a:cs typeface="Arial"/>
+              </a:rPr>
+              <a:t>A correct encoding must reproduce the intended value or its required rounded value.</a:t>
+            </a:r>
+          </a:p>
+        </p:txBody>
+      </p:sp>
+      <p:sp>
+        <p:nvSpPr>
+          <p:cNvPr id="6" name="">
+            <a:extLst xmlns:a="http://schemas.openxmlformats.org/drawingml/2006/main">
+              <a:ext uri="{FF2B5EF4-FFF2-40B4-BE49-F238E27FC236}">
+                <a16:creationId xmlns:a16="http://schemas.microsoft.com/office/drawing/2014/main" id="{E1FBC5BD-1F5D-42FA-AC83-E0BF862F4EDF}"/>
+              </a:ext>
+            </a:extLst>
+          </p:cNvPr>
+          <p:cNvSpPr>
+            <a:spLocks xmlns:a="http://schemas.openxmlformats.org/drawingml/2006/main" noGrp="1"/>
+          </p:cNvSpPr>
+          <p:nvPr/>
+        </p:nvSpPr>
+        <p:spPr>
+          <a:xfrm xmlns:a="http://schemas.openxmlformats.org/drawingml/2006/main">
+            <a:off x="10477500" y="6210300"/>
+            <a:ext cx="1000125" cy="219075"/>
+          </a:xfrm>
+          <a:prstGeom xmlns:a="http://schemas.openxmlformats.org/drawingml/2006/main" prst="rect">
+            <a:avLst/>
+          </a:prstGeom>
+          <a:noFill xmlns:a="http://schemas.openxmlformats.org/drawingml/2006/main"/>
+          <a:ln xmlns:a="http://schemas.openxmlformats.org/drawingml/2006/main" w="0">
+            <a:noFill/>
+          </a:ln>
+        </p:spPr>
+        <p:txBody>
+          <a:bodyPr xmlns:a="http://schemas.openxmlformats.org/drawingml/2006/main" anchor="t">
+            <a:normAutofit fontScale="79762"/>
+          </a:bodyPr>
+          <a:lstStyle xmlns:a="http://schemas.openxmlformats.org/drawingml/2006/main"/>
+          <a:p xmlns:a="http://schemas.openxmlformats.org/drawingml/2006/main">
+            <a:pPr>
+              <a:buNone/>
+              <a:defRPr sz="1050" b="0">
+                <a:solidFill>
+                  <a:srgbClr val="71717A"/>
+                </a:solidFill>
+                <a:latin typeface="Courier New"/>
+                <a:ea typeface="Courier New"/>
+                <a:cs typeface="Courier New"/>
+              </a:defRPr>
+            </a:pPr>
+            <a:r>
+              <a:rPr sz="1050" b="0">
+                <a:solidFill>
+                  <a:srgbClr val="71717A"/>
+                </a:solidFill>
+                <a:latin typeface="Courier New"/>
+                <a:ea typeface="Courier New"/>
+                <a:cs typeface="Courier New"/>
+              </a:rPr>
+              <a:t>26 / 26</a:t>
             </a:r>
           </a:p>
         </p:txBody>
@@ -12106,7 +13391,7 @@
                 <a:ea typeface="Courier New"/>
                 <a:cs typeface="Courier New"/>
               </a:rPr>
-              <a:t>03 / 24</a:t>
+              <a:t>03 / 26</a:t>
             </a:r>
           </a:p>
         </p:txBody>
@@ -12589,7 +13874,7 @@
                 <a:ea typeface="Courier New"/>
                 <a:cs typeface="Courier New"/>
               </a:rPr>
-              <a:t>04 / 24</a:t>
+              <a:t>04 / 26</a:t>
             </a:r>
           </a:p>
         </p:txBody>
@@ -13091,7 +14376,7 @@
                 <a:ea typeface="Courier New"/>
                 <a:cs typeface="Courier New"/>
               </a:rPr>
-              <a:t>05 / 24</a:t>
+              <a:t>05 / 26</a:t>
             </a:r>
           </a:p>
         </p:txBody>
@@ -13130,7 +14415,7 @@
           <p:cNvPr id="7" name="">
             <a:extLst xmlns:a="http://schemas.openxmlformats.org/drawingml/2006/main">
               <a:ext uri="{FF2B5EF4-FFF2-40B4-BE49-F238E27FC236}">
-                <a16:creationId xmlns:a16="http://schemas.microsoft.com/office/drawing/2014/main" id="{FB5EA43F-92DB-4BE5-9FFF-F3398FA0483D}"/>
+                <a16:creationId xmlns:a16="http://schemas.microsoft.com/office/drawing/2014/main" id="{296701F5-44AC-470A-90E3-4B400A4368B1}"/>
               </a:ext>
             </a:extLst>
           </p:cNvPr>
@@ -13178,7 +14463,7 @@
                 <a:ea typeface="Courier New"/>
                 <a:cs typeface="Courier New"/>
               </a:rPr>
-              <a:t>FLOATING POINT · WORKED EXAMPLE</a:t>
+              <a:t>FLOATING POINT · LECTURE FORMULAS</a:t>
             </a:r>
           </a:p>
         </p:txBody>
@@ -13188,7 +14473,7 @@
           <p:cNvPr id="2" name="">
             <a:extLst xmlns:a="http://schemas.openxmlformats.org/drawingml/2006/main">
               <a:ext uri="{FF2B5EF4-FFF2-40B4-BE49-F238E27FC236}">
-                <a16:creationId xmlns:a16="http://schemas.microsoft.com/office/drawing/2014/main" id="{6A5A1436-63F1-4731-91E3-0B1734A4E376}"/>
+                <a16:creationId xmlns:a16="http://schemas.microsoft.com/office/drawing/2014/main" id="{F1A41727-1C44-4AA9-BFCF-804B0B36CB62}"/>
               </a:ext>
             </a:extLst>
           </p:cNvPr>
@@ -13236,7 +14521,7 @@
                 <a:ea typeface="Arial"/>
                 <a:cs typeface="Arial"/>
               </a:rPr>
-              <a:t>Encode a normal value: 5/4</a:t>
+              <a:t>Firner’s floating point equations</a:t>
             </a:r>
           </a:p>
         </p:txBody>
@@ -13246,7 +14531,7 @@
           <p:cNvPr id="3" name="">
             <a:extLst xmlns:a="http://schemas.openxmlformats.org/drawingml/2006/main">
               <a:ext uri="{FF2B5EF4-FFF2-40B4-BE49-F238E27FC236}">
-                <a16:creationId xmlns:a16="http://schemas.microsoft.com/office/drawing/2014/main" id="{DA52FDEA-F645-47DC-919B-5685E856E204}"/>
+                <a16:creationId xmlns:a16="http://schemas.microsoft.com/office/drawing/2014/main" id="{3AD1D40A-6476-4B46-98BE-F07AD1BAED8F}"/>
               </a:ext>
             </a:extLst>
           </p:cNvPr>
@@ -13294,36 +14579,7 @@
                 <a:ea typeface="Arial"/>
                 <a:cs typeface="Arial"/>
               </a:rPr>
-              <a:t>5/4 = 1.010₂ × 2⁰.</a:t>
-            </a:r>
-          </a:p>
-          <a:p xmlns:a="http://schemas.openxmlformats.org/drawingml/2006/main">
-            <a:r>
-              <a:t/>
-            </a:r>
-          </a:p>
-          <a:p xmlns:a="http://schemas.openxmlformats.org/drawingml/2006/main">
-            <a:pPr>
-              <a:buNone/>
-              <a:defRPr sz="1950" b="0">
-                <a:solidFill>
-                  <a:srgbClr val="D4D4D8"/>
-                </a:solidFill>
-                <a:latin typeface="Arial"/>
-                <a:ea typeface="Arial"/>
-                <a:cs typeface="Arial"/>
-              </a:defRPr>
-            </a:pPr>
-            <a:r>
-              <a:rPr sz="1950" b="0">
-                <a:solidFill>
-                  <a:srgbClr val="D4D4D8"/>
-                </a:solidFill>
-                <a:latin typeface="Arial"/>
-                <a:ea typeface="Arial"/>
-                <a:cs typeface="Arial"/>
-              </a:rPr>
-              <a:t>The true exponent is e = 0, so stored E = 0 + 3 = 3. The fraction after the leading 1 is 010₂, or F = 2.</a:t>
+              <a:t>Firner uses the stored fields: sign (our S), exponent (E), and Significand (F). Sig Bits (p) is the number of stored fraction bits. E and F are read as unsigned integers.</a:t>
             </a:r>
           </a:p>
         </p:txBody>
@@ -13333,7 +14589,7 @@
           <p:cNvPr id="4" name="">
             <a:extLst xmlns:a="http://schemas.openxmlformats.org/drawingml/2006/main">
               <a:ext uri="{FF2B5EF4-FFF2-40B4-BE49-F238E27FC236}">
-                <a16:creationId xmlns:a16="http://schemas.microsoft.com/office/drawing/2014/main" id="{66956661-037E-4836-A00D-BBE7BEC67CE5}"/>
+                <a16:creationId xmlns:a16="http://schemas.microsoft.com/office/drawing/2014/main" id="{90CDE952-D3BD-4AA4-9C56-58162D3711F0}"/>
               </a:ext>
             </a:extLst>
           </p:cNvPr>
@@ -13381,7 +14637,31 @@
                 <a:ea typeface="Courier New"/>
                 <a:cs typeface="Courier New"/>
               </a:rPr>
-              <a:t>S = 0</a:t>
+              <a:t>Normal (exponent not 0 or all 1s):</a:t>
+            </a:r>
+          </a:p>
+          <a:p xmlns:a="http://schemas.openxmlformats.org/drawingml/2006/main">
+            <a:pPr>
+              <a:buNone/>
+              <a:defRPr sz="1650">
+                <a:solidFill>
+                  <a:srgbClr val="A7F3D0"/>
+                </a:solidFill>
+                <a:latin typeface="Courier New"/>
+                <a:ea typeface="Courier New"/>
+                <a:cs typeface="Courier New"/>
+              </a:defRPr>
+            </a:pPr>
+            <a:r>
+              <a:rPr sz="1650">
+                <a:solidFill>
+                  <a:srgbClr val="A7F3D0"/>
+                </a:solidFill>
+                <a:latin typeface="Courier New"/>
+                <a:ea typeface="Courier New"/>
+                <a:cs typeface="Courier New"/>
+              </a:rPr>
+              <a:t>value = (-1)^sign × 2^(exponent−bias)</a:t>
             </a:r>
           </a:p>
           <a:p xmlns:a="http://schemas.openxmlformats.org/drawingml/2006/main">
@@ -13405,7 +14685,7 @@
                 <a:ea typeface="Courier New"/>
                 <a:cs typeface="Courier New"/>
               </a:rPr>
-              <a:t>E = 3 = 011₂</a:t>
+              <a:t>        × (1 + Significand/2^(Sig Bits))</a:t>
             </a:r>
           </a:p>
           <a:p xmlns:a="http://schemas.openxmlformats.org/drawingml/2006/main">
@@ -13429,11 +14709,6 @@
                 <a:ea typeface="Courier New"/>
                 <a:cs typeface="Courier New"/>
               </a:rPr>
-              <a:t>F = 2 = 010₂</a:t>
-            </a:r>
-          </a:p>
-          <a:p xmlns:a="http://schemas.openxmlformats.org/drawingml/2006/main">
-            <a:r>
               <a:t/>
             </a:r>
           </a:p>
@@ -13458,12 +14733,7 @@
                 <a:ea typeface="Courier New"/>
                 <a:cs typeface="Courier New"/>
               </a:rPr>
-              <a:t>Fields: 0 | 011 | 010</a:t>
-            </a:r>
-          </a:p>
-          <a:p xmlns:a="http://schemas.openxmlformats.org/drawingml/2006/main">
-            <a:r>
-              <a:t/>
+              <a:t>Subnormal (exponent = 0):</a:t>
             </a:r>
           </a:p>
           <a:p xmlns:a="http://schemas.openxmlformats.org/drawingml/2006/main">
@@ -13487,7 +14757,31 @@
                 <a:ea typeface="Courier New"/>
                 <a:cs typeface="Courier New"/>
               </a:rPr>
-              <a:t>Check: (1 + 2/8) × 2⁰ = 5/4</a:t>
+              <a:t>value = (-1)^sign × 2^(1−bias)</a:t>
+            </a:r>
+          </a:p>
+          <a:p xmlns:a="http://schemas.openxmlformats.org/drawingml/2006/main">
+            <a:pPr>
+              <a:buNone/>
+              <a:defRPr sz="1650" b="0">
+                <a:solidFill>
+                  <a:srgbClr val="A7F3D0"/>
+                </a:solidFill>
+                <a:latin typeface="Courier New"/>
+                <a:ea typeface="Courier New"/>
+                <a:cs typeface="Courier New"/>
+              </a:defRPr>
+            </a:pPr>
+            <a:r>
+              <a:rPr sz="1650" b="0">
+                <a:solidFill>
+                  <a:srgbClr val="A7F3D0"/>
+                </a:solidFill>
+                <a:latin typeface="Courier New"/>
+                <a:ea typeface="Courier New"/>
+                <a:cs typeface="Courier New"/>
+              </a:rPr>
+              <a:t>        × (Significand/2^(Sig Bits))</a:t>
             </a:r>
           </a:p>
         </p:txBody>
@@ -13497,7 +14791,7 @@
           <p:cNvPr id="5" name="">
             <a:extLst xmlns:a="http://schemas.openxmlformats.org/drawingml/2006/main">
               <a:ext uri="{FF2B5EF4-FFF2-40B4-BE49-F238E27FC236}">
-                <a16:creationId xmlns:a16="http://schemas.microsoft.com/office/drawing/2014/main" id="{ED77AF00-6FE1-4CFC-B54D-88BC56D34ECE}"/>
+                <a16:creationId xmlns:a16="http://schemas.microsoft.com/office/drawing/2014/main" id="{92DCB498-5F45-448E-BB8D-9308ECED6BB4}"/>
               </a:ext>
             </a:extLst>
           </p:cNvPr>
@@ -13545,7 +14839,7 @@
                 <a:ea typeface="Arial"/>
                 <a:cs typeface="Arial"/>
               </a:rPr>
-              <a:t>The stored fraction has three bits; the implied leading 1 is not one of them.</a:t>
+              <a:t>Subnormals use 1 − bias and have no added 1 in the significand.</a:t>
             </a:r>
           </a:p>
         </p:txBody>
@@ -13555,7 +14849,7 @@
           <p:cNvPr id="6" name="">
             <a:extLst xmlns:a="http://schemas.openxmlformats.org/drawingml/2006/main">
               <a:ext uri="{FF2B5EF4-FFF2-40B4-BE49-F238E27FC236}">
-                <a16:creationId xmlns:a16="http://schemas.microsoft.com/office/drawing/2014/main" id="{50A2E0CF-972D-435B-99E9-C4F31D4132B0}"/>
+                <a16:creationId xmlns:a16="http://schemas.microsoft.com/office/drawing/2014/main" id="{05A872D8-2421-41B5-BA58-B863431FFC9F}"/>
               </a:ext>
             </a:extLst>
           </p:cNvPr>
@@ -13603,7 +14897,7 @@
                 <a:ea typeface="Courier New"/>
                 <a:cs typeface="Courier New"/>
               </a:rPr>
-              <a:t>06 / 24</a:t>
+              <a:t>06 / 26</a:t>
             </a:r>
           </a:p>
         </p:txBody>
@@ -13611,7 +14905,7 @@
     </p:spTree>
     <p:extLst>
       <p:ext uri="{BB962C8B-B14F-4D97-AF65-F5344CB8AC3E}">
-        <p14:creationId xmlns:p14="http://schemas.microsoft.com/office/powerpoint/2010/main" val="1095495873"/>
+        <p14:creationId xmlns:p14="http://schemas.microsoft.com/office/powerpoint/2010/main" val="35799394"/>
       </p:ext>
     </p:extLst>
   </p:cSld>
@@ -13642,7 +14936,7 @@
           <p:cNvPr id="7" name="">
             <a:extLst xmlns:a="http://schemas.openxmlformats.org/drawingml/2006/main">
               <a:ext uri="{FF2B5EF4-FFF2-40B4-BE49-F238E27FC236}">
-                <a16:creationId xmlns:a16="http://schemas.microsoft.com/office/drawing/2014/main" id="{514F9435-A104-4D30-A188-4EE2456CA2BB}"/>
+                <a16:creationId xmlns:a16="http://schemas.microsoft.com/office/drawing/2014/main" id="{FB5EA43F-92DB-4BE5-9FFF-F3398FA0483D}"/>
               </a:ext>
             </a:extLst>
           </p:cNvPr>
@@ -13700,7 +14994,7 @@
           <p:cNvPr id="2" name="">
             <a:extLst xmlns:a="http://schemas.openxmlformats.org/drawingml/2006/main">
               <a:ext uri="{FF2B5EF4-FFF2-40B4-BE49-F238E27FC236}">
-                <a16:creationId xmlns:a16="http://schemas.microsoft.com/office/drawing/2014/main" id="{E3CC3344-C3E4-4449-AF40-33DADFB16B1E}"/>
+                <a16:creationId xmlns:a16="http://schemas.microsoft.com/office/drawing/2014/main" id="{6A5A1436-63F1-4731-91E3-0B1734A4E376}"/>
               </a:ext>
             </a:extLst>
           </p:cNvPr>
@@ -13748,7 +15042,7 @@
                 <a:ea typeface="Arial"/>
                 <a:cs typeface="Arial"/>
               </a:rPr>
-              <a:t>Decode a normal bit pattern</a:t>
+              <a:t>Encode a normal value: 5/4</a:t>
             </a:r>
           </a:p>
         </p:txBody>
@@ -13758,7 +15052,7 @@
           <p:cNvPr id="3" name="">
             <a:extLst xmlns:a="http://schemas.openxmlformats.org/drawingml/2006/main">
               <a:ext uri="{FF2B5EF4-FFF2-40B4-BE49-F238E27FC236}">
-                <a16:creationId xmlns:a16="http://schemas.microsoft.com/office/drawing/2014/main" id="{798D5084-9296-4E15-A9DC-A45F46A15641}"/>
+                <a16:creationId xmlns:a16="http://schemas.microsoft.com/office/drawing/2014/main" id="{DA52FDEA-F645-47DC-919B-5685E856E204}"/>
               </a:ext>
             </a:extLst>
           </p:cNvPr>
@@ -13806,7 +15100,7 @@
                 <a:ea typeface="Arial"/>
                 <a:cs typeface="Arial"/>
               </a:rPr>
-              <a:t>Read the exponent field as an unsigned integer, then subtract the bias. Read the fraction field as F/8.</a:t>
+              <a:t>5/4 = 1.010₂ × 2⁰.</a:t>
             </a:r>
           </a:p>
           <a:p xmlns:a="http://schemas.openxmlformats.org/drawingml/2006/main">
@@ -13835,7 +15129,7 @@
                 <a:ea typeface="Arial"/>
                 <a:cs typeface="Arial"/>
               </a:rPr>
-              <a:t>Because E is not zero, include the implied leading 1.</a:t>
+              <a:t>The true exponent is e = 0, so stored E = 0 + 3 = 3. The fraction after the leading 1 is 010₂, or F = 2.</a:t>
             </a:r>
           </a:p>
         </p:txBody>
@@ -13845,7 +15139,7 @@
           <p:cNvPr id="4" name="">
             <a:extLst xmlns:a="http://schemas.openxmlformats.org/drawingml/2006/main">
               <a:ext uri="{FF2B5EF4-FFF2-40B4-BE49-F238E27FC236}">
-                <a16:creationId xmlns:a16="http://schemas.microsoft.com/office/drawing/2014/main" id="{FD548711-085C-45B3-A8BC-2D9BA414882B}"/>
+                <a16:creationId xmlns:a16="http://schemas.microsoft.com/office/drawing/2014/main" id="{66956661-037E-4836-A00D-BBE7BEC67CE5}"/>
               </a:ext>
             </a:extLst>
           </p:cNvPr>
@@ -13893,7 +15187,55 @@
                 <a:ea typeface="Courier New"/>
                 <a:cs typeface="Courier New"/>
               </a:rPr>
-              <a:t>Bits: 0 | 010 | 101</a:t>
+              <a:t>S = 0</a:t>
+            </a:r>
+          </a:p>
+          <a:p xmlns:a="http://schemas.openxmlformats.org/drawingml/2006/main">
+            <a:pPr>
+              <a:buNone/>
+              <a:defRPr sz="1650" b="0">
+                <a:solidFill>
+                  <a:srgbClr val="A7F3D0"/>
+                </a:solidFill>
+                <a:latin typeface="Courier New"/>
+                <a:ea typeface="Courier New"/>
+                <a:cs typeface="Courier New"/>
+              </a:defRPr>
+            </a:pPr>
+            <a:r>
+              <a:rPr sz="1650" b="0">
+                <a:solidFill>
+                  <a:srgbClr val="A7F3D0"/>
+                </a:solidFill>
+                <a:latin typeface="Courier New"/>
+                <a:ea typeface="Courier New"/>
+                <a:cs typeface="Courier New"/>
+              </a:rPr>
+              <a:t>E = 3 = 011₂</a:t>
+            </a:r>
+          </a:p>
+          <a:p xmlns:a="http://schemas.openxmlformats.org/drawingml/2006/main">
+            <a:pPr>
+              <a:buNone/>
+              <a:defRPr sz="1650" b="0">
+                <a:solidFill>
+                  <a:srgbClr val="A7F3D0"/>
+                </a:solidFill>
+                <a:latin typeface="Courier New"/>
+                <a:ea typeface="Courier New"/>
+                <a:cs typeface="Courier New"/>
+              </a:defRPr>
+            </a:pPr>
+            <a:r>
+              <a:rPr sz="1650" b="0">
+                <a:solidFill>
+                  <a:srgbClr val="A7F3D0"/>
+                </a:solidFill>
+                <a:latin typeface="Courier New"/>
+                <a:ea typeface="Courier New"/>
+                <a:cs typeface="Courier New"/>
+              </a:rPr>
+              <a:t>F = 2 = 010₂</a:t>
             </a:r>
           </a:p>
           <a:p xmlns:a="http://schemas.openxmlformats.org/drawingml/2006/main">
@@ -13922,7 +15264,12 @@
                 <a:ea typeface="Courier New"/>
                 <a:cs typeface="Courier New"/>
               </a:rPr>
-              <a:t>E = 2, so e = 2 − 3 = −1</a:t>
+              <a:t>Fields: 0 | 011 | 010</a:t>
+            </a:r>
+          </a:p>
+          <a:p xmlns:a="http://schemas.openxmlformats.org/drawingml/2006/main">
+            <a:r>
+              <a:t/>
             </a:r>
           </a:p>
           <a:p xmlns:a="http://schemas.openxmlformats.org/drawingml/2006/main">
@@ -13946,12 +15293,7 @@
                 <a:ea typeface="Courier New"/>
                 <a:cs typeface="Courier New"/>
               </a:rPr>
-              <a:t>F = 5, so 1 + F/8 = 13/8</a:t>
-            </a:r>
-          </a:p>
-          <a:p xmlns:a="http://schemas.openxmlformats.org/drawingml/2006/main">
-            <a:r>
-              <a:t/>
+              <a:t>Check: (-1)^0 × 2^(3−3)</a:t>
             </a:r>
           </a:p>
           <a:p xmlns:a="http://schemas.openxmlformats.org/drawingml/2006/main">
@@ -13975,7 +15317,7 @@
                 <a:ea typeface="Courier New"/>
                 <a:cs typeface="Courier New"/>
               </a:rPr>
-              <a:t>Value = (13/8) × 2⁻¹ = 13/16</a:t>
+              <a:t>       × (1 + 2/2^3) = 5/4</a:t>
             </a:r>
           </a:p>
         </p:txBody>
@@ -13985,7 +15327,7 @@
           <p:cNvPr id="5" name="">
             <a:extLst xmlns:a="http://schemas.openxmlformats.org/drawingml/2006/main">
               <a:ext uri="{FF2B5EF4-FFF2-40B4-BE49-F238E27FC236}">
-                <a16:creationId xmlns:a16="http://schemas.microsoft.com/office/drawing/2014/main" id="{584E23CF-F2CD-46A9-9F4D-20949170792D}"/>
+                <a16:creationId xmlns:a16="http://schemas.microsoft.com/office/drawing/2014/main" id="{ED77AF00-6FE1-4CFC-B54D-88BC56D34ECE}"/>
               </a:ext>
             </a:extLst>
           </p:cNvPr>
@@ -14033,7 +15375,7 @@
                 <a:ea typeface="Arial"/>
                 <a:cs typeface="Arial"/>
               </a:rPr>
-              <a:t>The bit pattern is a recipe for a value, not the digits of that value.</a:t>
+              <a:t>The stored fraction has three bits; the implied leading 1 is not one of them.</a:t>
             </a:r>
           </a:p>
         </p:txBody>
@@ -14043,7 +15385,7 @@
           <p:cNvPr id="6" name="">
             <a:extLst xmlns:a="http://schemas.openxmlformats.org/drawingml/2006/main">
               <a:ext uri="{FF2B5EF4-FFF2-40B4-BE49-F238E27FC236}">
-                <a16:creationId xmlns:a16="http://schemas.microsoft.com/office/drawing/2014/main" id="{96E02F47-A9E9-43B2-AC22-5EF03769EDD4}"/>
+                <a16:creationId xmlns:a16="http://schemas.microsoft.com/office/drawing/2014/main" id="{50A2E0CF-972D-435B-99E9-C4F31D4132B0}"/>
               </a:ext>
             </a:extLst>
           </p:cNvPr>
@@ -14091,7 +15433,7 @@
                 <a:ea typeface="Courier New"/>
                 <a:cs typeface="Courier New"/>
               </a:rPr>
-              <a:t>07 / 24</a:t>
+              <a:t>07 / 26</a:t>
             </a:r>
           </a:p>
         </p:txBody>
@@ -14099,7 +15441,7 @@
     </p:spTree>
     <p:extLst>
       <p:ext uri="{BB962C8B-B14F-4D97-AF65-F5344CB8AC3E}">
-        <p14:creationId xmlns:p14="http://schemas.microsoft.com/office/powerpoint/2010/main" val="659736008"/>
+        <p14:creationId xmlns:p14="http://schemas.microsoft.com/office/powerpoint/2010/main" val="1095495873"/>
       </p:ext>
     </p:extLst>
   </p:cSld>
@@ -14178,7 +15520,7 @@
                 <a:ea typeface="Courier New"/>
                 <a:cs typeface="Courier New"/>
               </a:rPr>
-              <a:t>FLOATING POINT · QUIZ REVIEW</a:t>
+              <a:t>FLOATING POINT · WORKED EXAMPLE</a:t>
             </a:r>
           </a:p>
         </p:txBody>
@@ -14236,7 +15578,7 @@
                 <a:ea typeface="Arial"/>
                 <a:cs typeface="Arial"/>
               </a:rPr>
-              <a:t>Quiz review: −1.0 in 8 bits</a:t>
+              <a:t>Decode a normal bit pattern</a:t>
             </a:r>
           </a:p>
         </p:txBody>
@@ -14294,7 +15636,36 @@
                 <a:ea typeface="Arial"/>
                 <a:cs typeface="Arial"/>
               </a:rPr>
-              <a:t>An 8-bit format has 1 sign bit, 5 exponent bits, 2 stored significand bits, and bias 15. An exponent field of 11111₂ is reserved for infinity and NaN. What representable value is closest to −1.0?</a:t>
+              <a:t>Read the exponent field as an unsigned integer, then subtract the bias. Read the fraction field as F/8.</a:t>
+            </a:r>
+          </a:p>
+          <a:p xmlns:a="http://schemas.openxmlformats.org/drawingml/2006/main">
+            <a:r>
+              <a:t/>
+            </a:r>
+          </a:p>
+          <a:p xmlns:a="http://schemas.openxmlformats.org/drawingml/2006/main">
+            <a:pPr>
+              <a:buNone/>
+              <a:defRPr sz="1950" b="0">
+                <a:solidFill>
+                  <a:srgbClr val="D4D4D8"/>
+                </a:solidFill>
+                <a:latin typeface="Arial"/>
+                <a:ea typeface="Arial"/>
+                <a:cs typeface="Arial"/>
+              </a:defRPr>
+            </a:pPr>
+            <a:r>
+              <a:rPr sz="1950" b="0">
+                <a:solidFill>
+                  <a:srgbClr val="D4D4D8"/>
+                </a:solidFill>
+                <a:latin typeface="Arial"/>
+                <a:ea typeface="Arial"/>
+                <a:cs typeface="Arial"/>
+              </a:rPr>
+              <a:t>Because E is not zero, include the implied leading 1.</a:t>
             </a:r>
           </a:p>
         </p:txBody>
@@ -14352,7 +15723,7 @@
                 <a:ea typeface="Courier New"/>
                 <a:cs typeface="Courier New"/>
               </a:rPr>
-              <a:t>Write each answer in decimal:</a:t>
+              <a:t>Bits: 0 | 010 | 101</a:t>
             </a:r>
           </a:p>
           <a:p xmlns:a="http://schemas.openxmlformats.org/drawingml/2006/main">
@@ -14381,7 +15752,7 @@
                 <a:ea typeface="Courier New"/>
                 <a:cs typeface="Courier New"/>
               </a:rPr>
-              <a:t>value = ?</a:t>
+              <a:t>E = 2, so e = 2 − 3 = −1</a:t>
             </a:r>
           </a:p>
           <a:p xmlns:a="http://schemas.openxmlformats.org/drawingml/2006/main">
@@ -14405,31 +15776,12 @@
                 <a:ea typeface="Courier New"/>
                 <a:cs typeface="Courier New"/>
               </a:rPr>
-              <a:t>sign = ?</a:t>
-            </a:r>
-          </a:p>
-          <a:p xmlns:a="http://schemas.openxmlformats.org/drawingml/2006/main">
-            <a:pPr>
-              <a:buNone/>
-              <a:defRPr sz="1650">
-                <a:solidFill>
-                  <a:srgbClr val="A7F3D0"/>
-                </a:solidFill>
-                <a:latin typeface="Courier New"/>
-                <a:ea typeface="Courier New"/>
-                <a:cs typeface="Courier New"/>
-              </a:defRPr>
-            </a:pPr>
-            <a:r>
-              <a:rPr sz="1650">
-                <a:solidFill>
-                  <a:srgbClr val="A7F3D0"/>
-                </a:solidFill>
-                <a:latin typeface="Courier New"/>
-                <a:ea typeface="Courier New"/>
-                <a:cs typeface="Courier New"/>
-              </a:rPr>
-              <a:t>exponent = ?</a:t>
+              <a:t>F = 5</a:t>
+            </a:r>
+          </a:p>
+          <a:p xmlns:a="http://schemas.openxmlformats.org/drawingml/2006/main">
+            <a:r>
+              <a:t/>
             </a:r>
           </a:p>
           <a:p xmlns:a="http://schemas.openxmlformats.org/drawingml/2006/main">
@@ -14453,7 +15805,31 @@
                 <a:ea typeface="Courier New"/>
                 <a:cs typeface="Courier New"/>
               </a:rPr>
-              <a:t>significand = ?</a:t>
+              <a:t>Value = (-1)^0 × 2^(2−3)</a:t>
+            </a:r>
+          </a:p>
+          <a:p xmlns:a="http://schemas.openxmlformats.org/drawingml/2006/main">
+            <a:pPr>
+              <a:buNone/>
+              <a:defRPr sz="1650" b="0">
+                <a:solidFill>
+                  <a:srgbClr val="A7F3D0"/>
+                </a:solidFill>
+                <a:latin typeface="Courier New"/>
+                <a:ea typeface="Courier New"/>
+                <a:cs typeface="Courier New"/>
+              </a:defRPr>
+            </a:pPr>
+            <a:r>
+              <a:rPr sz="1650" b="0">
+                <a:solidFill>
+                  <a:srgbClr val="A7F3D0"/>
+                </a:solidFill>
+                <a:latin typeface="Courier New"/>
+                <a:ea typeface="Courier New"/>
+                <a:cs typeface="Courier New"/>
+              </a:rPr>
+              <a:t>        × (1 + 5/2^3) = 13/16</a:t>
             </a:r>
           </a:p>
         </p:txBody>
@@ -14511,7 +15887,7 @@
                 <a:ea typeface="Arial"/>
                 <a:cs typeface="Arial"/>
               </a:rPr>
-              <a:t>Work out the fields before revealing the answer.</a:t>
+              <a:t>The bit pattern is a recipe for a value, not the digits of that value.</a:t>
             </a:r>
           </a:p>
         </p:txBody>
@@ -14569,7 +15945,7 @@
                 <a:ea typeface="Courier New"/>
                 <a:cs typeface="Courier New"/>
               </a:rPr>
-              <a:t>08 / 24</a:t>
+              <a:t>08 / 26</a:t>
             </a:r>
           </a:p>
         </p:txBody>
@@ -14656,7 +16032,7 @@
                 <a:ea typeface="Courier New"/>
                 <a:cs typeface="Courier New"/>
               </a:rPr>
-              <a:t>FLOATING POINT · WORKED ANSWER</a:t>
+              <a:t>FLOATING POINT · QUIZ REVIEW</a:t>
             </a:r>
           </a:p>
         </p:txBody>
@@ -14714,7 +16090,7 @@
                 <a:ea typeface="Arial"/>
                 <a:cs typeface="Arial"/>
               </a:rPr>
-              <a:t>Quiz answer: −1.0 is exact</a:t>
+              <a:t>Quiz review: −1.0 in 8 bits</a:t>
             </a:r>
           </a:p>
         </p:txBody>
@@ -14772,7 +16148,7 @@
                 <a:ea typeface="Arial"/>
                 <a:cs typeface="Arial"/>
               </a:rPr>
-              <a:t>−1.0 is representable exactly. Its magnitude is 1.00₂ × 2⁰, so the sign is 1, the true exponent is 0, and the stored fraction is 00₂. Add bias 15 to encode the exponent field.</a:t>
+              <a:t>An 8-bit format has 1 sign bit, 5 exponent bits, 2 stored significand bits, and bias 15. An exponent field of 11111₂ is reserved for infinity and NaN. What representable value is closest to −1.0?</a:t>
             </a:r>
           </a:p>
         </p:txBody>
@@ -14830,7 +16206,60 @@
                 <a:ea typeface="Courier New"/>
                 <a:cs typeface="Courier New"/>
               </a:rPr>
-              <a:t>value = −1.0</a:t>
+              <a:t>Write each answer in decimal:</a:t>
+            </a:r>
+          </a:p>
+          <a:p xmlns:a="http://schemas.openxmlformats.org/drawingml/2006/main">
+            <a:r>
+              <a:t/>
+            </a:r>
+          </a:p>
+          <a:p xmlns:a="http://schemas.openxmlformats.org/drawingml/2006/main">
+            <a:pPr>
+              <a:buNone/>
+              <a:defRPr sz="1650" b="0">
+                <a:solidFill>
+                  <a:srgbClr val="A7F3D0"/>
+                </a:solidFill>
+                <a:latin typeface="Courier New"/>
+                <a:ea typeface="Courier New"/>
+                <a:cs typeface="Courier New"/>
+              </a:defRPr>
+            </a:pPr>
+            <a:r>
+              <a:rPr sz="1650" b="0">
+                <a:solidFill>
+                  <a:srgbClr val="A7F3D0"/>
+                </a:solidFill>
+                <a:latin typeface="Courier New"/>
+                <a:ea typeface="Courier New"/>
+                <a:cs typeface="Courier New"/>
+              </a:rPr>
+              <a:t>value = ?</a:t>
+            </a:r>
+          </a:p>
+          <a:p xmlns:a="http://schemas.openxmlformats.org/drawingml/2006/main">
+            <a:pPr>
+              <a:buNone/>
+              <a:defRPr sz="1650" b="0">
+                <a:solidFill>
+                  <a:srgbClr val="A7F3D0"/>
+                </a:solidFill>
+                <a:latin typeface="Courier New"/>
+                <a:ea typeface="Courier New"/>
+                <a:cs typeface="Courier New"/>
+              </a:defRPr>
+            </a:pPr>
+            <a:r>
+              <a:rPr sz="1650" b="0">
+                <a:solidFill>
+                  <a:srgbClr val="A7F3D0"/>
+                </a:solidFill>
+                <a:latin typeface="Courier New"/>
+                <a:ea typeface="Courier New"/>
+                <a:cs typeface="Courier New"/>
+              </a:rPr>
+              <a:t>sign = ?</a:t>
             </a:r>
           </a:p>
           <a:p xmlns:a="http://schemas.openxmlformats.org/drawingml/2006/main">
@@ -14854,7 +16283,7 @@
                 <a:ea typeface="Courier New"/>
                 <a:cs typeface="Courier New"/>
               </a:rPr>
-              <a:t>sign = 1</a:t>
+              <a:t>exponent = ?</a:t>
             </a:r>
           </a:p>
           <a:p xmlns:a="http://schemas.openxmlformats.org/drawingml/2006/main">
@@ -14878,108 +16307,7 @@
                 <a:ea typeface="Courier New"/>
                 <a:cs typeface="Courier New"/>
               </a:rPr>
-              <a:t>exponent = 15</a:t>
-            </a:r>
-          </a:p>
-          <a:p xmlns:a="http://schemas.openxmlformats.org/drawingml/2006/main">
-            <a:pPr>
-              <a:buNone/>
-              <a:defRPr sz="1650" b="0">
-                <a:solidFill>
-                  <a:srgbClr val="A7F3D0"/>
-                </a:solidFill>
-                <a:latin typeface="Courier New"/>
-                <a:ea typeface="Courier New"/>
-                <a:cs typeface="Courier New"/>
-              </a:defRPr>
-            </a:pPr>
-            <a:r>
-              <a:rPr sz="1650" b="0">
-                <a:solidFill>
-                  <a:srgbClr val="A7F3D0"/>
-                </a:solidFill>
-                <a:latin typeface="Courier New"/>
-                <a:ea typeface="Courier New"/>
-                <a:cs typeface="Courier New"/>
-              </a:rPr>
-              <a:t>significand = 0</a:t>
-            </a:r>
-          </a:p>
-          <a:p xmlns:a="http://schemas.openxmlformats.org/drawingml/2006/main">
-            <a:r>
-              <a:t/>
-            </a:r>
-          </a:p>
-          <a:p xmlns:a="http://schemas.openxmlformats.org/drawingml/2006/main">
-            <a:pPr>
-              <a:buNone/>
-              <a:defRPr sz="1650" b="0">
-                <a:solidFill>
-                  <a:srgbClr val="A7F3D0"/>
-                </a:solidFill>
-                <a:latin typeface="Courier New"/>
-                <a:ea typeface="Courier New"/>
-                <a:cs typeface="Courier New"/>
-              </a:defRPr>
-            </a:pPr>
-            <a:r>
-              <a:rPr sz="1650" b="0">
-                <a:solidFill>
-                  <a:srgbClr val="A7F3D0"/>
-                </a:solidFill>
-                <a:latin typeface="Courier New"/>
-                <a:ea typeface="Courier New"/>
-                <a:cs typeface="Courier New"/>
-              </a:rPr>
-              <a:t>Bits: 1 | 01111 | 00</a:t>
-            </a:r>
-          </a:p>
-          <a:p xmlns:a="http://schemas.openxmlformats.org/drawingml/2006/main">
-            <a:pPr>
-              <a:buNone/>
-              <a:defRPr sz="1650" b="0">
-                <a:solidFill>
-                  <a:srgbClr val="A7F3D0"/>
-                </a:solidFill>
-                <a:latin typeface="Courier New"/>
-                <a:ea typeface="Courier New"/>
-                <a:cs typeface="Courier New"/>
-              </a:defRPr>
-            </a:pPr>
-            <a:r>
-              <a:rPr sz="1650" b="0">
-                <a:solidFill>
-                  <a:srgbClr val="A7F3D0"/>
-                </a:solidFill>
-                <a:latin typeface="Courier New"/>
-                <a:ea typeface="Courier New"/>
-                <a:cs typeface="Courier New"/>
-              </a:rPr>
-              <a:t/>
-            </a:r>
-          </a:p>
-          <a:p xmlns:a="http://schemas.openxmlformats.org/drawingml/2006/main">
-            <a:pPr>
-              <a:buNone/>
-              <a:defRPr sz="1650" b="0">
-                <a:solidFill>
-                  <a:srgbClr val="A7F3D0"/>
-                </a:solidFill>
-                <a:latin typeface="Courier New"/>
-                <a:ea typeface="Courier New"/>
-                <a:cs typeface="Courier New"/>
-              </a:defRPr>
-            </a:pPr>
-            <a:r>
-              <a:rPr sz="1650" b="0">
-                <a:solidFill>
-                  <a:srgbClr val="A7F3D0"/>
-                </a:solidFill>
-                <a:latin typeface="Courier New"/>
-                <a:ea typeface="Courier New"/>
-                <a:cs typeface="Courier New"/>
-              </a:rPr>
-              <a:t>Check: −(1 + 0/4) × 2^(15−15) = −1</a:t>
+              <a:t>significand = ?</a:t>
             </a:r>
           </a:p>
         </p:txBody>
@@ -15037,7 +16365,7 @@
                 <a:ea typeface="Arial"/>
                 <a:cs typeface="Arial"/>
               </a:rPr>
-              <a:t>E = 15 is valid; all five exponent bits set would be E = 31.</a:t>
+              <a:t>Work out the fields before revealing the answer.</a:t>
             </a:r>
           </a:p>
         </p:txBody>
@@ -15095,7 +16423,7 @@
                 <a:ea typeface="Courier New"/>
                 <a:cs typeface="Courier New"/>
               </a:rPr>
-              <a:t>09 / 24</a:t>
+              <a:t>09 / 26</a:t>
             </a:r>
           </a:p>
         </p:txBody>

--- a/public/presentations/CS211_Recitation_3.pptx
+++ b/public/presentations/CS211_Recitation_3.pptx
@@ -2,38 +2,38 @@
 <file path=ppt/presentation.xml><?xml version="1.0" encoding="utf-8"?>
 <p:presentation xmlns:p="http://schemas.openxmlformats.org/presentationml/2006/main">
   <p:sldMasterIdLst>
-    <p:sldMasterId xmlns:r="http://schemas.openxmlformats.org/officeDocument/2006/relationships" id="2147483648" r:id="R37680de94059499a"/>
+    <p:sldMasterId xmlns:r="http://schemas.openxmlformats.org/officeDocument/2006/relationships" id="2147483648" r:id="R82fcb09f96334701"/>
   </p:sldMasterIdLst>
   <p:notesMasterIdLst>
-    <p:notesMasterId xmlns:r="http://schemas.openxmlformats.org/officeDocument/2006/relationships" r:id="Rbc8e1e2c45334134"/>
+    <p:notesMasterId xmlns:r="http://schemas.openxmlformats.org/officeDocument/2006/relationships" r:id="R474a467d0120440c"/>
   </p:notesMasterIdLst>
   <p:sldIdLst>
-    <p:sldId xmlns:r="http://schemas.openxmlformats.org/officeDocument/2006/relationships" id="256" r:id="R940dc9cb7acc45cb"/>
-    <p:sldId xmlns:r="http://schemas.openxmlformats.org/officeDocument/2006/relationships" id="257" r:id="R7b841f58357e4433"/>
-    <p:sldId xmlns:r="http://schemas.openxmlformats.org/officeDocument/2006/relationships" id="258" r:id="R2868d2b31b6b4e92"/>
-    <p:sldId xmlns:r="http://schemas.openxmlformats.org/officeDocument/2006/relationships" id="259" r:id="R45b077fff45f4382"/>
-    <p:sldId xmlns:r="http://schemas.openxmlformats.org/officeDocument/2006/relationships" id="260" r:id="Rbc52cf803f544a74"/>
-    <p:sldId xmlns:r="http://schemas.openxmlformats.org/officeDocument/2006/relationships" id="261" r:id="Raec4052dc8224440"/>
-    <p:sldId xmlns:r="http://schemas.openxmlformats.org/officeDocument/2006/relationships" id="262" r:id="R2d140b9904d94459"/>
-    <p:sldId xmlns:r="http://schemas.openxmlformats.org/officeDocument/2006/relationships" id="263" r:id="Ra99ff6ad601c4478"/>
-    <p:sldId xmlns:r="http://schemas.openxmlformats.org/officeDocument/2006/relationships" id="264" r:id="Rd85da423900746da"/>
-    <p:sldId xmlns:r="http://schemas.openxmlformats.org/officeDocument/2006/relationships" id="265" r:id="R7a3e18f265944b3d"/>
-    <p:sldId xmlns:r="http://schemas.openxmlformats.org/officeDocument/2006/relationships" id="266" r:id="R760a6842863e42cf"/>
-    <p:sldId xmlns:r="http://schemas.openxmlformats.org/officeDocument/2006/relationships" id="267" r:id="Rdc9ee0c25e094a13"/>
-    <p:sldId xmlns:r="http://schemas.openxmlformats.org/officeDocument/2006/relationships" id="268" r:id="R65169ae9db9d4b33"/>
-    <p:sldId xmlns:r="http://schemas.openxmlformats.org/officeDocument/2006/relationships" id="269" r:id="Rfe6235fada264ae0"/>
-    <p:sldId xmlns:r="http://schemas.openxmlformats.org/officeDocument/2006/relationships" id="270" r:id="Rdcc9b7f9a87f43e1"/>
-    <p:sldId xmlns:r="http://schemas.openxmlformats.org/officeDocument/2006/relationships" id="271" r:id="Rfcac26cf11d34c77"/>
-    <p:sldId xmlns:r="http://schemas.openxmlformats.org/officeDocument/2006/relationships" id="272" r:id="R6868f5890e2a4b98"/>
-    <p:sldId xmlns:r="http://schemas.openxmlformats.org/officeDocument/2006/relationships" id="273" r:id="R6faddac8d57f45cd"/>
-    <p:sldId xmlns:r="http://schemas.openxmlformats.org/officeDocument/2006/relationships" id="274" r:id="R75d1b85af1df4135"/>
-    <p:sldId xmlns:r="http://schemas.openxmlformats.org/officeDocument/2006/relationships" id="275" r:id="R7cc0bf07befc460c"/>
-    <p:sldId xmlns:r="http://schemas.openxmlformats.org/officeDocument/2006/relationships" id="276" r:id="Ra93cd562dc944029"/>
-    <p:sldId xmlns:r="http://schemas.openxmlformats.org/officeDocument/2006/relationships" id="277" r:id="R6d09ffd060664596"/>
-    <p:sldId xmlns:r="http://schemas.openxmlformats.org/officeDocument/2006/relationships" id="278" r:id="R412a0c63c0db427e"/>
-    <p:sldId xmlns:r="http://schemas.openxmlformats.org/officeDocument/2006/relationships" id="279" r:id="R8af56e70733c4c3b"/>
-    <p:sldId xmlns:r="http://schemas.openxmlformats.org/officeDocument/2006/relationships" id="280" r:id="R4298338e0f9a43eb"/>
-    <p:sldId xmlns:r="http://schemas.openxmlformats.org/officeDocument/2006/relationships" id="281" r:id="R3a6e000efa074efd"/>
+    <p:sldId xmlns:r="http://schemas.openxmlformats.org/officeDocument/2006/relationships" id="256" r:id="Ra3d37a84d0a64374"/>
+    <p:sldId xmlns:r="http://schemas.openxmlformats.org/officeDocument/2006/relationships" id="257" r:id="R378aa6ce9e1644f6"/>
+    <p:sldId xmlns:r="http://schemas.openxmlformats.org/officeDocument/2006/relationships" id="258" r:id="R18c0225dd3024101"/>
+    <p:sldId xmlns:r="http://schemas.openxmlformats.org/officeDocument/2006/relationships" id="259" r:id="Rb66dca7862594817"/>
+    <p:sldId xmlns:r="http://schemas.openxmlformats.org/officeDocument/2006/relationships" id="260" r:id="R87e7b0b109244a3b"/>
+    <p:sldId xmlns:r="http://schemas.openxmlformats.org/officeDocument/2006/relationships" id="261" r:id="R0e9950f9f8e14af8"/>
+    <p:sldId xmlns:r="http://schemas.openxmlformats.org/officeDocument/2006/relationships" id="262" r:id="R08bf74868a8f481f"/>
+    <p:sldId xmlns:r="http://schemas.openxmlformats.org/officeDocument/2006/relationships" id="263" r:id="Rf297d606c7824529"/>
+    <p:sldId xmlns:r="http://schemas.openxmlformats.org/officeDocument/2006/relationships" id="264" r:id="Rfdf45718ac5b496a"/>
+    <p:sldId xmlns:r="http://schemas.openxmlformats.org/officeDocument/2006/relationships" id="265" r:id="R9898d2d361a44491"/>
+    <p:sldId xmlns:r="http://schemas.openxmlformats.org/officeDocument/2006/relationships" id="266" r:id="Re33468a2cb834722"/>
+    <p:sldId xmlns:r="http://schemas.openxmlformats.org/officeDocument/2006/relationships" id="267" r:id="R00519ed4bae841fc"/>
+    <p:sldId xmlns:r="http://schemas.openxmlformats.org/officeDocument/2006/relationships" id="268" r:id="Rdff174f64df84585"/>
+    <p:sldId xmlns:r="http://schemas.openxmlformats.org/officeDocument/2006/relationships" id="269" r:id="R7f4319538780495c"/>
+    <p:sldId xmlns:r="http://schemas.openxmlformats.org/officeDocument/2006/relationships" id="270" r:id="R549de014dc6a446c"/>
+    <p:sldId xmlns:r="http://schemas.openxmlformats.org/officeDocument/2006/relationships" id="271" r:id="R823a94f0d9b0413b"/>
+    <p:sldId xmlns:r="http://schemas.openxmlformats.org/officeDocument/2006/relationships" id="272" r:id="Rd52abeb6e1864609"/>
+    <p:sldId xmlns:r="http://schemas.openxmlformats.org/officeDocument/2006/relationships" id="273" r:id="Rbe73d3ff010445df"/>
+    <p:sldId xmlns:r="http://schemas.openxmlformats.org/officeDocument/2006/relationships" id="274" r:id="R36c3521d99074887"/>
+    <p:sldId xmlns:r="http://schemas.openxmlformats.org/officeDocument/2006/relationships" id="275" r:id="Rd711777c67754a83"/>
+    <p:sldId xmlns:r="http://schemas.openxmlformats.org/officeDocument/2006/relationships" id="276" r:id="Rcb6ad129dcd642da"/>
+    <p:sldId xmlns:r="http://schemas.openxmlformats.org/officeDocument/2006/relationships" id="277" r:id="R88d3fa45748c415b"/>
+    <p:sldId xmlns:r="http://schemas.openxmlformats.org/officeDocument/2006/relationships" id="278" r:id="R25e575ce39144c85"/>
+    <p:sldId xmlns:r="http://schemas.openxmlformats.org/officeDocument/2006/relationships" id="279" r:id="Rf364721da4444bec"/>
+    <p:sldId xmlns:r="http://schemas.openxmlformats.org/officeDocument/2006/relationships" id="280" r:id="R28565863f92c4eee"/>
+    <p:sldId xmlns:r="http://schemas.openxmlformats.org/officeDocument/2006/relationships" id="281" r:id="R6035c293abeb4503"/>
   </p:sldIdLst>
   <p:sldSz cx="12192000" cy="6858000"/>
   <p:notesSz cx="6858000" cy="9144000"/>
@@ -2285,7 +2285,7 @@
   </p:cSld>
   <p:clrMap bg1="lt1" tx1="dk1" bg2="lt2" tx2="dk2" accent1="accent1" accent2="accent2" accent3="accent3" accent4="accent4" accent5="accent5" accent6="accent6" hlink="hlink" folHlink="folHlink"/>
   <p:sldLayoutIdLst>
-    <p:sldLayoutId xmlns:r="http://schemas.openxmlformats.org/officeDocument/2006/relationships" id="2147483649" r:id="R33028cef623841ad"/>
+    <p:sldLayoutId xmlns:r="http://schemas.openxmlformats.org/officeDocument/2006/relationships" id="2147483649" r:id="Rfeba335572f146e8"/>
   </p:sldLayoutIdLst>
   <p:txStyles>
     <p:titleStyle>
@@ -3111,30 +3111,6 @@
                 <a:ea typeface="Courier New"/>
                 <a:cs typeface="Courier New"/>
               </a:rPr>
-              <a:t>Firner’s value equations</a:t>
-            </a:r>
-          </a:p>
-          <a:p xmlns:a="http://schemas.openxmlformats.org/drawingml/2006/main">
-            <a:pPr>
-              <a:buNone/>
-              <a:defRPr sz="1650" b="0">
-                <a:solidFill>
-                  <a:srgbClr val="A7F3D0"/>
-                </a:solidFill>
-                <a:latin typeface="Courier New"/>
-                <a:ea typeface="Courier New"/>
-                <a:cs typeface="Courier New"/>
-              </a:defRPr>
-            </a:pPr>
-            <a:r>
-              <a:rPr sz="1650" b="0">
-                <a:solidFill>
-                  <a:srgbClr val="A7F3D0"/>
-                </a:solidFill>
-                <a:latin typeface="Courier New"/>
-                <a:ea typeface="Courier New"/>
-                <a:cs typeface="Courier New"/>
-              </a:rPr>
               <a:t>Normal values and quiz review</a:t>
             </a:r>
           </a:p>
